--- a/第五週(10-08)/第五週_第1節_簡報.pptx
+++ b/第五週(10-08)/第五週_第1節_簡報.pptx
@@ -2520,7 +2520,7 @@
                 <a:ea typeface="Arial Unicode MS"/>
                 <a:cs typeface="Arial Unicode MS"/>
               </a:rPr>
-              <a:t>四題分別是：垂直視野、對百分之十反射率的測距、解析度那一行寫什麼、更新率。
+              <a:t>四題分別問垂直視野、對百分之十反射率的測距、解析度那一行寫什麼，還有更新率。
 </a:t>
             </a:r>
           </a:p>
@@ -3972,7 +3972,7 @@
                 <a:ea typeface="Arial Unicode MS"/>
                 <a:cs typeface="Arial Unicode MS"/>
               </a:rPr>
-              <a:t>線束數：128。
+              <a:t>線束數是 128。
 </a:t>
             </a:r>
           </a:p>
@@ -3994,7 +3994,7 @@
                 <a:ea typeface="Arial Unicode MS"/>
                 <a:cs typeface="Arial Unicode MS"/>
               </a:rPr>
-              <a:t>視野：水平 120 度、垂直 25.4 度。它不轉，所以只看得到前面那一塊。
+              <a:t>視野是水平 120 度、垂直 25.4 度。它不轉，所以只看得到前面那一塊。
 </a:t>
             </a:r>
           </a:p>
@@ -4401,7 +4401,7 @@
                 <a:ea typeface="Arial Unicode MS"/>
                 <a:cs typeface="Arial Unicode MS"/>
               </a:rPr>
-              <a:t>水平視野：360 度對 120 度。上下的線束數是 64 對 128，剛剛兩頁都看過了。
+              <a:t>先看水平視野，360 度對 120 度。上下的線束數是 64 對 128，剛剛兩頁都看過了。
 </a:t>
             </a:r>
           </a:p>
@@ -4423,7 +4423,7 @@
                 <a:ea typeface="Arial Unicode MS"/>
                 <a:cs typeface="Arial Unicode MS"/>
               </a:rPr>
-              <a:t>水平角解析度：這裡要算一下。OS1 的規格表沒有直接寫角度，它寫的是每一圈有 1024 個點。所以三百六十度除以一千零二十四，等於</a:t>
+              <a:t>再來是水平角解析度，這裡要算一下。OS1 的規格表沒有直接寫角度，它寫的是每一圈有 1024 個點。所以三百六十度除以一千零二十四，等於</a:t>
             </a:r>
             <a:r>
               <a:rPr sz="1150" b="1" lang="zh-TW" dirty="0">
@@ -4467,7 +4467,7 @@
                 <a:ea typeface="Arial Unicode MS"/>
                 <a:cs typeface="Arial Unicode MS"/>
               </a:rPr>
-              <a:t>測距：90 公尺對 210 公尺。
+              <a:t>測距是 90 公尺對 210 公尺。
 </a:t>
             </a:r>
           </a:p>
@@ -5369,7 +5369,7 @@
                 <a:ea typeface="Arial Unicode MS"/>
                 <a:cs typeface="Arial Unicode MS"/>
               </a:rPr>
-              <a:t>像素：2048 乘 1280</a:t>
+              <a:t>它有 2048 乘 1280 個像素</a:t>
             </a:r>
             <a:r>
               <a:rPr sz="1000" lang="zh-TW" dirty="0">
@@ -5435,7 +5435,7 @@
                 <a:ea typeface="Arial Unicode MS"/>
                 <a:cs typeface="Arial Unicode MS"/>
               </a:rPr>
-              <a:t>更新率：1080p 每秒 60 張。</a:t>
+              <a:t>更新率是 1080p 每秒 60 張。</a:t>
             </a:r>
             <a:r>
               <a:rPr sz="1000" lang="zh-TW" dirty="0">

--- a/第五週(10-08)/第五週_第1節_簡報.pptx
+++ b/第五週(10-08)/第五週_第1節_簡報.pptx
@@ -6082,8 +6082,8 @@
         </p:nvSpPr>
         <p:spPr>
           <a:xfrm>
-            <a:off x="6766560" y="-1371600"/>
-            <a:ext cx="4206240" cy="4206240"/>
+            <a:off x="6130753" y="-947729"/>
+            <a:ext cx="2987610" cy="2987610"/>
           </a:xfrm>
           <a:prstGeom prst="ellipse">
             <a:avLst/>
@@ -6107,8 +6107,8 @@
         </p:nvSpPr>
         <p:spPr>
           <a:xfrm>
-            <a:off x="7863840" y="3108960"/>
-            <a:ext cx="2560320" cy="2560320"/>
+            <a:off x="7104973" y="1520297"/>
+            <a:ext cx="1688649" cy="1688649"/>
           </a:xfrm>
           <a:prstGeom prst="ellipse">
             <a:avLst/>
@@ -6129,8 +6129,8 @@
         </p:nvSpPr>
         <p:spPr>
           <a:xfrm>
-            <a:off x="502920" y="1207008"/>
-            <a:ext cx="6949440" cy="274320"/>
+            <a:off x="1681812" y="883806"/>
+            <a:ext cx="4936051" cy="194844"/>
           </a:xfrm>
           <a:prstGeom prst="rect">
             <a:avLst/>
@@ -6146,7 +6146,7 @@
               <a:buNone/>
             </a:pPr>
             <a:r>
-              <a:rPr lang="en-US" sz="1250" b="1" dirty="0">
+              <a:rPr lang="en-US" sz="890" b="1" dirty="0">
                 <a:solidFill>
                   <a:srgbClr val="00A896"/>
                 </a:solidFill>
@@ -6156,7 +6156,7 @@
               </a:rPr>
               <a:t>MITUST · Nguyên lý xe tự lái · Tuần 5</a:t>
             </a:r>
-            <a:endParaRPr lang="en-US" sz="1250" dirty="0"/>
+            <a:endParaRPr lang="en-US" sz="890" dirty="0"/>
           </a:p>
         </p:txBody>
       </p:sp>
@@ -6168,8 +6168,8 @@
         </p:nvSpPr>
         <p:spPr>
           <a:xfrm>
-            <a:off x="502920" y="1572768"/>
-            <a:ext cx="7498080" cy="885499"/>
+            <a:off x="1681812" y="1143598"/>
+            <a:ext cx="5325739" cy="628953"/>
           </a:xfrm>
           <a:prstGeom prst="rect">
             <a:avLst/>
@@ -6188,7 +6188,7 @@
               <a:buNone/>
             </a:pPr>
             <a:r>
-              <a:rPr lang="en-US" sz="3400" b="1" dirty="0">
+              <a:rPr lang="en-US" sz="2410" b="1" dirty="0">
                 <a:solidFill>
                   <a:srgbClr val="FFFFFF"/>
                 </a:solidFill>
@@ -6198,7 +6198,7 @@
               </a:rPr>
               <a:t>Hôm nay đọc bảng thông số thật</a:t>
             </a:r>
-            <a:endParaRPr lang="en-US" sz="3400" dirty="0"/>
+            <a:endParaRPr lang="en-US" sz="2410" dirty="0"/>
           </a:p>
           <a:p>
             <a:pPr indent="0" marL="0">
@@ -6208,7 +6208,7 @@
               <a:buNone/>
             </a:pPr>
             <a:r>
-              <a:rPr lang="en-US" sz="1900" dirty="0">
+              <a:rPr lang="en-US" sz="1350" dirty="0">
                 <a:solidFill>
                   <a:srgbClr val="C8D6E2"/>
                 </a:solidFill>
@@ -6218,7 +6218,7 @@
               </a:rPr>
               <a:t>今天來讀真正的規格表</a:t>
             </a:r>
-            <a:endParaRPr lang="en-US" sz="3400" dirty="0"/>
+            <a:endParaRPr lang="en-US" sz="2410" dirty="0"/>
           </a:p>
         </p:txBody>
       </p:sp>
@@ -6230,8 +6230,8 @@
         </p:nvSpPr>
         <p:spPr>
           <a:xfrm>
-            <a:off x="502920" y="3008479"/>
-            <a:ext cx="1371600" cy="41148"/>
+            <a:off x="1681812" y="2163355"/>
+            <a:ext cx="974221" cy="29227"/>
           </a:xfrm>
           <a:prstGeom prst="rect">
             <a:avLst/>
@@ -6250,8 +6250,8 @@
         </p:nvSpPr>
         <p:spPr>
           <a:xfrm>
-            <a:off x="502920" y="3209647"/>
-            <a:ext cx="7132320" cy="612545"/>
+            <a:off x="1681812" y="2306241"/>
+            <a:ext cx="5065947" cy="435079"/>
           </a:xfrm>
           <a:prstGeom prst="rect">
             <a:avLst/>
@@ -6270,7 +6270,7 @@
               <a:buNone/>
             </a:pPr>
             <a:r>
-              <a:rPr lang="en-US" sz="1450" dirty="0">
+              <a:rPr lang="en-US" sz="1030" dirty="0">
                 <a:solidFill>
                   <a:srgbClr val="C8D6E2"/>
                 </a:solidFill>
@@ -6280,7 +6280,7 @@
               </a:rPr>
               <a:t>Ba thanh trượt hai tuần vừa rồi — hôm nay tìm chúng trên datasheet của hãng</a:t>
             </a:r>
-            <a:endParaRPr lang="en-US" sz="1450" dirty="0"/>
+            <a:endParaRPr lang="en-US" sz="1030" dirty="0"/>
           </a:p>
           <a:p>
             <a:pPr indent="0" marL="0">
@@ -6290,7 +6290,7 @@
               <a:buNone/>
             </a:pPr>
             <a:r>
-              <a:rPr lang="en-US" sz="1250" dirty="0">
+              <a:rPr lang="en-US" sz="890" dirty="0">
                 <a:solidFill>
                   <a:srgbClr val="8AA0B4"/>
                 </a:solidFill>
@@ -6300,7 +6300,7 @@
               </a:rPr>
               <a:t>前兩週拉的那三個滑桿，今天在廠商的規格表上把它們找出來</a:t>
             </a:r>
-            <a:endParaRPr lang="en-US" sz="1450" dirty="0"/>
+            <a:endParaRPr lang="en-US" sz="1030" dirty="0"/>
           </a:p>
         </p:txBody>
       </p:sp>
@@ -6312,8 +6312,8 @@
         </p:nvSpPr>
         <p:spPr>
           <a:xfrm>
-            <a:off x="502920" y="3895344"/>
-            <a:ext cx="5943600" cy="384048"/>
+            <a:off x="1681812" y="2793278"/>
+            <a:ext cx="4221622" cy="272782"/>
           </a:xfrm>
           <a:prstGeom prst="roundRect">
             <a:avLst>
@@ -6334,8 +6334,8 @@
         </p:nvSpPr>
         <p:spPr>
           <a:xfrm>
-            <a:off x="630936" y="3941064"/>
-            <a:ext cx="5687568" cy="292608"/>
+            <a:off x="1772740" y="2825752"/>
+            <a:ext cx="4039768" cy="207834"/>
           </a:xfrm>
           <a:prstGeom prst="rect">
             <a:avLst/>
@@ -6351,7 +6351,7 @@
               <a:buNone/>
             </a:pPr>
             <a:r>
-              <a:rPr lang="en-US" sz="1050" b="1" dirty="0">
+              <a:rPr lang="en-US" sz="750" b="1" dirty="0">
                 <a:solidFill>
                   <a:srgbClr val="9FD6CE"/>
                 </a:solidFill>
@@ -6361,7 +6361,7 @@
               </a:rPr>
               <a:t>工具｜Công cụ： ch-neural.github.io/MITUST-Principles-of-Self-Driving-Cars/week5/spec/</a:t>
             </a:r>
-            <a:endParaRPr lang="en-US" sz="1050" dirty="0"/>
+            <a:endParaRPr lang="en-US" sz="750" dirty="0"/>
           </a:p>
         </p:txBody>
       </p:sp>
@@ -6373,8 +6373,8 @@
         </p:nvSpPr>
         <p:spPr>
           <a:xfrm>
-            <a:off x="502920" y="4370832"/>
-            <a:ext cx="6949440" cy="274320"/>
+            <a:off x="1681812" y="3131008"/>
+            <a:ext cx="4936051" cy="194844"/>
           </a:xfrm>
           <a:prstGeom prst="rect">
             <a:avLst/>
@@ -6390,7 +6390,7 @@
               <a:buNone/>
             </a:pPr>
             <a:r>
-              <a:rPr lang="en-US" sz="1150" dirty="0">
+              <a:rPr lang="en-US" sz="820" dirty="0">
                 <a:solidFill>
                   <a:srgbClr val="8AA0B4"/>
                 </a:solidFill>
@@ -6400,7 +6400,7 @@
               </a:rPr>
               <a:t>第五週 第 1 節　2026/10/08（四）09:10–10:00　CH Tseng</a:t>
             </a:r>
-            <a:endParaRPr lang="en-US" sz="1150" dirty="0"/>
+            <a:endParaRPr lang="en-US" sz="820" dirty="0"/>
           </a:p>
         </p:txBody>
       </p:sp>
@@ -6412,8 +6412,8 @@
         </p:nvSpPr>
         <p:spPr>
           <a:xfrm>
-            <a:off x="356616" y="310896"/>
-            <a:ext cx="2212848" cy="749808"/>
+            <a:off x="1577895" y="247315"/>
+            <a:ext cx="1571743" cy="532574"/>
           </a:xfrm>
           <a:prstGeom prst="roundRect">
             <a:avLst>
@@ -6442,8 +6442,8 @@
         </p:blipFill>
         <p:spPr>
           <a:xfrm>
-            <a:off x="502920" y="475488"/>
-            <a:ext cx="1920240" cy="424269"/>
+            <a:off x="1681812" y="364222"/>
+            <a:ext cx="1363909" cy="301350"/>
           </a:xfrm>
           <a:prstGeom prst="rect">
             <a:avLst/>
@@ -6483,8 +6483,8 @@
         </p:nvSpPr>
         <p:spPr>
           <a:xfrm>
-            <a:off x="502920" y="420624"/>
-            <a:ext cx="8138160" cy="274320"/>
+            <a:off x="1681812" y="325253"/>
+            <a:ext cx="5780375" cy="194844"/>
           </a:xfrm>
           <a:prstGeom prst="rect">
             <a:avLst/>
@@ -6500,7 +6500,7 @@
               <a:buNone/>
             </a:pPr>
             <a:r>
-              <a:rPr lang="en-US" sz="1250" b="1" dirty="0">
+              <a:rPr lang="en-US" sz="890" b="1" dirty="0">
                 <a:solidFill>
                   <a:srgbClr val="007F72"/>
                 </a:solidFill>
@@ -6510,7 +6510,7 @@
               </a:rPr>
               <a:t>Câu trả lời · 答案</a:t>
             </a:r>
-            <a:endParaRPr lang="en-US" sz="1250" dirty="0"/>
+            <a:endParaRPr lang="en-US" sz="890" dirty="0"/>
           </a:p>
         </p:txBody>
       </p:sp>
@@ -6522,8 +6522,8 @@
         </p:nvSpPr>
         <p:spPr>
           <a:xfrm>
-            <a:off x="502920" y="1101852"/>
-            <a:ext cx="2468880" cy="2514600"/>
+            <a:off x="1681812" y="809116"/>
+            <a:ext cx="1753597" cy="1786071"/>
           </a:xfrm>
           <a:prstGeom prst="roundRect">
             <a:avLst>
@@ -6549,8 +6549,8 @@
         </p:nvSpPr>
         <p:spPr>
           <a:xfrm flipH="1" flipV="1">
-            <a:off x="1314902" y="1288435"/>
-            <a:ext cx="422458" cy="626319"/>
+            <a:off x="2258548" y="941642"/>
+            <a:ext cx="300063" cy="444862"/>
           </a:xfrm>
           <a:prstGeom prst="line">
             <a:avLst/>
@@ -6572,8 +6572,8 @@
         </p:nvSpPr>
         <p:spPr>
           <a:xfrm flipH="1" flipV="1">
-            <a:off x="1516480" y="1192287"/>
-            <a:ext cx="220880" cy="722467"/>
+            <a:off x="2401724" y="873350"/>
+            <a:ext cx="156887" cy="513154"/>
           </a:xfrm>
           <a:prstGeom prst="line">
             <a:avLst/>
@@ -6595,8 +6595,8 @@
         </p:nvSpPr>
         <p:spPr>
           <a:xfrm flipV="1">
-            <a:off x="1737360" y="1159276"/>
-            <a:ext cx="0" cy="755477"/>
+            <a:off x="2558611" y="849903"/>
+            <a:ext cx="0" cy="536601"/>
           </a:xfrm>
           <a:prstGeom prst="line">
             <a:avLst/>
@@ -6618,8 +6618,8 @@
         </p:nvSpPr>
         <p:spPr>
           <a:xfrm flipV="1">
-            <a:off x="1737360" y="1192287"/>
-            <a:ext cx="220880" cy="722467"/>
+            <a:off x="2558611" y="873350"/>
+            <a:ext cx="156887" cy="513154"/>
           </a:xfrm>
           <a:prstGeom prst="line">
             <a:avLst/>
@@ -6641,8 +6641,8 @@
         </p:nvSpPr>
         <p:spPr>
           <a:xfrm flipV="1">
-            <a:off x="1737360" y="1288435"/>
-            <a:ext cx="422458" cy="626319"/>
+            <a:off x="2558611" y="941642"/>
+            <a:ext cx="300063" cy="444862"/>
           </a:xfrm>
           <a:prstGeom prst="line">
             <a:avLst/>
@@ -6664,8 +6664,8 @@
         </p:nvSpPr>
         <p:spPr>
           <a:xfrm>
-            <a:off x="1675400" y="1852794"/>
-            <a:ext cx="123919" cy="123919"/>
+            <a:off x="2514602" y="1342495"/>
+            <a:ext cx="88018" cy="88018"/>
           </a:xfrm>
           <a:prstGeom prst="ellipse">
             <a:avLst/>
@@ -6684,8 +6684,8 @@
         </p:nvSpPr>
         <p:spPr>
           <a:xfrm flipH="1" flipV="1">
-            <a:off x="998392" y="2824237"/>
-            <a:ext cx="738968" cy="157073"/>
+            <a:off x="2033736" y="2032492"/>
+            <a:ext cx="524875" cy="111566"/>
           </a:xfrm>
           <a:prstGeom prst="line">
             <a:avLst/>
@@ -6707,8 +6707,8 @@
         </p:nvSpPr>
         <p:spPr>
           <a:xfrm flipH="1" flipV="1">
-            <a:off x="1261923" y="2394194"/>
-            <a:ext cx="475437" cy="587116"/>
+            <a:off x="2220917" y="1727041"/>
+            <a:ext cx="337694" cy="417017"/>
           </a:xfrm>
           <a:prstGeom prst="line">
             <a:avLst/>
@@ -6730,8 +6730,8 @@
         </p:nvSpPr>
         <p:spPr>
           <a:xfrm flipV="1">
-            <a:off x="1737360" y="2225832"/>
-            <a:ext cx="0" cy="755477"/>
+            <a:off x="2558611" y="1607457"/>
+            <a:ext cx="0" cy="536601"/>
           </a:xfrm>
           <a:prstGeom prst="line">
             <a:avLst/>
@@ -6753,8 +6753,8 @@
         </p:nvSpPr>
         <p:spPr>
           <a:xfrm flipV="1">
-            <a:off x="1737360" y="2394194"/>
-            <a:ext cx="475437" cy="587116"/>
+            <a:off x="2558611" y="1727041"/>
+            <a:ext cx="337694" cy="417017"/>
           </a:xfrm>
           <a:prstGeom prst="line">
             <a:avLst/>
@@ -6776,8 +6776,8 @@
         </p:nvSpPr>
         <p:spPr>
           <a:xfrm flipV="1">
-            <a:off x="1737360" y="2824237"/>
-            <a:ext cx="738968" cy="157073"/>
+            <a:off x="2558611" y="2032492"/>
+            <a:ext cx="524875" cy="111566"/>
           </a:xfrm>
           <a:prstGeom prst="line">
             <a:avLst/>
@@ -6799,8 +6799,8 @@
         </p:nvSpPr>
         <p:spPr>
           <a:xfrm>
-            <a:off x="1675400" y="2919350"/>
-            <a:ext cx="123919" cy="123919"/>
+            <a:off x="2514602" y="2100049"/>
+            <a:ext cx="88018" cy="88018"/>
           </a:xfrm>
           <a:prstGeom prst="ellipse">
             <a:avLst/>
@@ -6819,8 +6819,8 @@
         </p:nvSpPr>
         <p:spPr>
           <a:xfrm>
-            <a:off x="3429000" y="1319005"/>
-            <a:ext cx="5212080" cy="1005611"/>
+            <a:off x="3760150" y="963355"/>
+            <a:ext cx="3702038" cy="714266"/>
           </a:xfrm>
           <a:prstGeom prst="rect">
             <a:avLst/>
@@ -6839,7 +6839,7 @@
               <a:buNone/>
             </a:pPr>
             <a:r>
-              <a:rPr lang="en-US" sz="2300" b="1" dirty="0">
+              <a:rPr lang="en-US" sz="1630" b="1" dirty="0">
                 <a:solidFill>
                   <a:srgbClr val="0B1F3A"/>
                 </a:solidFill>
@@ -6849,7 +6849,7 @@
               </a:rPr>
               <a:t>Góc nhìn không nằm ở cảm biến — nó nằm ở ống kính</a:t>
             </a:r>
-            <a:endParaRPr lang="en-US" sz="2300" dirty="0"/>
+            <a:endParaRPr lang="en-US" sz="1630" dirty="0"/>
           </a:p>
           <a:p>
             <a:pPr indent="0" marL="0">
@@ -6859,7 +6859,7 @@
               <a:buNone/>
             </a:pPr>
             <a:r>
-              <a:rPr lang="en-US" sz="1400" dirty="0">
+              <a:rPr lang="en-US" sz="990" dirty="0">
                 <a:solidFill>
                   <a:srgbClr val="007F72"/>
                 </a:solidFill>
@@ -6869,7 +6869,7 @@
               </a:rPr>
               <a:t>視野不在感測器身上——它在鏡頭身上</a:t>
             </a:r>
-            <a:endParaRPr lang="en-US" sz="2300" dirty="0"/>
+            <a:endParaRPr lang="en-US" sz="1630" dirty="0"/>
           </a:p>
         </p:txBody>
       </p:sp>
@@ -6881,8 +6881,8 @@
         </p:nvSpPr>
         <p:spPr>
           <a:xfrm>
-            <a:off x="3429000" y="2416057"/>
-            <a:ext cx="5212080" cy="1074682"/>
+            <a:off x="3760150" y="1742570"/>
+            <a:ext cx="3702038" cy="763326"/>
           </a:xfrm>
           <a:prstGeom prst="rect">
             <a:avLst/>
@@ -6901,7 +6901,7 @@
               <a:buNone/>
             </a:pPr>
             <a:r>
-              <a:rPr lang="en-US" sz="1250" dirty="0">
+              <a:rPr lang="en-US" sz="890" dirty="0">
                 <a:solidFill>
                   <a:srgbClr val="5F7183"/>
                 </a:solidFill>
@@ -6911,7 +6911,7 @@
               </a:rPr>
               <a:t>Cùng một con chip, lắp ống kính 8 mm thì nhìn được 42°, lắp ống kính 3.6 mm thì nhìn được 81°. Hãng bán chip không biết bạn sẽ lắp ống kính nào, nên họ không thể viết.</a:t>
             </a:r>
-            <a:endParaRPr lang="en-US" sz="1250" dirty="0"/>
+            <a:endParaRPr lang="en-US" sz="890" dirty="0"/>
           </a:p>
           <a:p>
             <a:pPr indent="0" marL="0">
@@ -6921,7 +6921,7 @@
               <a:buNone/>
             </a:pPr>
             <a:r>
-              <a:rPr lang="en-US" sz="1150" dirty="0">
+              <a:rPr lang="en-US" sz="820" dirty="0">
                 <a:solidFill>
                   <a:srgbClr val="5F7183"/>
                 </a:solidFill>
@@ -6931,7 +6931,7 @@
               </a:rPr>
               <a:t>同一塊晶片，配 8 mm 的鏡頭看得到 42 度，配 3.6 mm 的鏡頭看得到 81 度。賣晶片的廠商不知道你要配什麼鏡頭，所以寫不出來。</a:t>
             </a:r>
-            <a:endParaRPr lang="en-US" sz="1250" dirty="0"/>
+            <a:endParaRPr lang="en-US" sz="890" dirty="0"/>
           </a:p>
         </p:txBody>
       </p:sp>
@@ -6943,8 +6943,8 @@
         </p:nvSpPr>
         <p:spPr>
           <a:xfrm>
-            <a:off x="502920" y="3913632"/>
-            <a:ext cx="8138160" cy="621792"/>
+            <a:off x="1681812" y="2806268"/>
+            <a:ext cx="5780375" cy="441647"/>
           </a:xfrm>
           <a:prstGeom prst="roundRect">
             <a:avLst>
@@ -6970,8 +6970,8 @@
         </p:nvSpPr>
         <p:spPr>
           <a:xfrm>
-            <a:off x="685800" y="3986784"/>
-            <a:ext cx="7772400" cy="493776"/>
+            <a:off x="1811708" y="2858226"/>
+            <a:ext cx="5520583" cy="350719"/>
           </a:xfrm>
           <a:prstGeom prst="rect">
             <a:avLst/>
@@ -6990,7 +6990,7 @@
               <a:buNone/>
             </a:pPr>
             <a:r>
-              <a:rPr lang="en-US" sz="1250" b="1" dirty="0">
+              <a:rPr lang="en-US" sz="890" b="1" dirty="0">
                 <a:solidFill>
                   <a:srgbClr val="7A4E00"/>
                 </a:solidFill>
@@ -7000,7 +7000,7 @@
               </a:rPr>
               <a:t>Còn tầm đo: camera không hề đo khoảng cách — nó tính ra, như tuần 3 đã làm.</a:t>
             </a:r>
-            <a:endParaRPr lang="en-US" sz="1250" dirty="0"/>
+            <a:endParaRPr lang="en-US" sz="890" dirty="0"/>
           </a:p>
           <a:p>
             <a:pPr indent="0" marL="0">
@@ -7010,7 +7010,7 @@
               <a:buNone/>
             </a:pPr>
             <a:r>
-              <a:rPr lang="en-US" sz="1150" dirty="0">
+              <a:rPr lang="en-US" sz="820" dirty="0">
                 <a:solidFill>
                   <a:srgbClr val="7A4E00"/>
                 </a:solidFill>
@@ -7020,7 +7020,7 @@
               </a:rPr>
               <a:t>至於測距：相機根本不量距離，它是算出來的，第三週算過那條式子。</a:t>
             </a:r>
-            <a:endParaRPr lang="en-US" sz="1250" dirty="0"/>
+            <a:endParaRPr lang="en-US" sz="890" dirty="0"/>
           </a:p>
         </p:txBody>
       </p:sp>
@@ -7040,8 +7040,8 @@
         </p:blipFill>
         <p:spPr>
           <a:xfrm>
-            <a:off x="7516368" y="4718304"/>
-            <a:ext cx="1097280" cy="242439"/>
+            <a:off x="6663327" y="3338842"/>
+            <a:ext cx="779376" cy="172200"/>
           </a:xfrm>
           <a:prstGeom prst="rect">
             <a:avLst/>
@@ -7056,8 +7056,8 @@
         </p:nvSpPr>
         <p:spPr>
           <a:xfrm>
-            <a:off x="109728" y="4791456"/>
-            <a:ext cx="822960" cy="256032"/>
+            <a:off x="1402536" y="3390800"/>
+            <a:ext cx="584532" cy="181855"/>
           </a:xfrm>
           <a:prstGeom prst="rect">
             <a:avLst/>
@@ -7073,7 +7073,7 @@
               <a:buNone/>
             </a:pPr>
             <a:r>
-              <a:rPr lang="en-US" sz="900" dirty="0">
+              <a:rPr lang="en-US" sz="640" dirty="0">
                 <a:solidFill>
                   <a:srgbClr val="5F7183"/>
                 </a:solidFill>
@@ -7083,7 +7083,7 @@
               </a:rPr>
               <a:t>10 / 14</a:t>
             </a:r>
-            <a:endParaRPr lang="en-US" sz="900" dirty="0"/>
+            <a:endParaRPr lang="en-US" sz="640" dirty="0"/>
           </a:p>
         </p:txBody>
       </p:sp>
@@ -7095,8 +7095,8 @@
         </p:nvSpPr>
         <p:spPr>
           <a:xfrm>
-            <a:off x="960120" y="4791456"/>
-            <a:ext cx="2011680" cy="256032"/>
+            <a:off x="2006553" y="3390800"/>
+            <a:ext cx="1428857" cy="181855"/>
           </a:xfrm>
           <a:prstGeom prst="rect">
             <a:avLst/>
@@ -7112,7 +7112,7 @@
               <a:buNone/>
             </a:pPr>
             <a:r>
-              <a:rPr lang="en-US" sz="900" dirty="0">
+              <a:rPr lang="en-US" sz="640" dirty="0">
                 <a:solidFill>
                   <a:srgbClr val="5F7183"/>
                 </a:solidFill>
@@ -7122,7 +7122,7 @@
               </a:rPr>
               <a:t>Tiết 1 · 第 1 節</a:t>
             </a:r>
-            <a:endParaRPr lang="en-US" sz="900" dirty="0"/>
+            <a:endParaRPr lang="en-US" sz="640" dirty="0"/>
           </a:p>
         </p:txBody>
       </p:sp>
@@ -7159,8 +7159,8 @@
         </p:nvSpPr>
         <p:spPr>
           <a:xfrm>
-            <a:off x="502920" y="420624"/>
-            <a:ext cx="8138160" cy="274320"/>
+            <a:off x="1681812" y="325253"/>
+            <a:ext cx="5780375" cy="194844"/>
           </a:xfrm>
           <a:prstGeom prst="rect">
             <a:avLst/>
@@ -7176,7 +7176,7 @@
               <a:buNone/>
             </a:pPr>
             <a:r>
-              <a:rPr lang="en-US" sz="1250" b="1" dirty="0">
+              <a:rPr lang="en-US" sz="890" b="1" dirty="0">
                 <a:solidFill>
                   <a:srgbClr val="007F72"/>
                 </a:solidFill>
@@ -7186,7 +7186,7 @@
               </a:rPr>
               <a:t>Đọc kỹ · 一行容易讀錯的字</a:t>
             </a:r>
-            <a:endParaRPr lang="en-US" sz="1250" dirty="0"/>
+            <a:endParaRPr lang="en-US" sz="890" dirty="0"/>
           </a:p>
         </p:txBody>
       </p:sp>
@@ -7198,8 +7198,8 @@
         </p:nvSpPr>
         <p:spPr>
           <a:xfrm>
-            <a:off x="502920" y="1101852"/>
-            <a:ext cx="2468880" cy="2514600"/>
+            <a:off x="1681812" y="809116"/>
+            <a:ext cx="1753597" cy="1786071"/>
           </a:xfrm>
           <a:prstGeom prst="roundRect">
             <a:avLst>
@@ -7225,8 +7225,8 @@
         </p:nvSpPr>
         <p:spPr>
           <a:xfrm>
-            <a:off x="940735" y="1821430"/>
-            <a:ext cx="1593251" cy="97768"/>
+            <a:off x="1992784" y="1320218"/>
+            <a:ext cx="1131655" cy="69442"/>
           </a:xfrm>
           <a:prstGeom prst="roundRect">
             <a:avLst>
@@ -7247,8 +7247,8 @@
         </p:nvSpPr>
         <p:spPr>
           <a:xfrm>
-            <a:off x="1192725" y="1803654"/>
-            <a:ext cx="133320" cy="133320"/>
+            <a:off x="2171767" y="1307592"/>
+            <a:ext cx="94694" cy="94694"/>
           </a:xfrm>
           <a:prstGeom prst="ellipse">
             <a:avLst/>
@@ -7267,8 +7267,8 @@
         </p:nvSpPr>
         <p:spPr>
           <a:xfrm>
-            <a:off x="1447645" y="1803654"/>
-            <a:ext cx="133320" cy="133320"/>
+            <a:off x="2352832" y="1307592"/>
+            <a:ext cx="94694" cy="94694"/>
           </a:xfrm>
           <a:prstGeom prst="ellipse">
             <a:avLst/>
@@ -7287,8 +7287,8 @@
         </p:nvSpPr>
         <p:spPr>
           <a:xfrm>
-            <a:off x="1702565" y="1803654"/>
-            <a:ext cx="133320" cy="133320"/>
+            <a:off x="2533897" y="1307592"/>
+            <a:ext cx="94694" cy="94694"/>
           </a:xfrm>
           <a:prstGeom prst="ellipse">
             <a:avLst/>
@@ -7307,8 +7307,8 @@
         </p:nvSpPr>
         <p:spPr>
           <a:xfrm>
-            <a:off x="1957485" y="1803654"/>
-            <a:ext cx="133320" cy="133320"/>
+            <a:off x="2714962" y="1307592"/>
+            <a:ext cx="94694" cy="94694"/>
           </a:xfrm>
           <a:prstGeom prst="ellipse">
             <a:avLst/>
@@ -7327,8 +7327,8 @@
         </p:nvSpPr>
         <p:spPr>
           <a:xfrm>
-            <a:off x="940735" y="2310268"/>
-            <a:ext cx="1593251" cy="97768"/>
+            <a:off x="1992784" y="1667430"/>
+            <a:ext cx="1131655" cy="69442"/>
           </a:xfrm>
           <a:prstGeom prst="roundRect">
             <a:avLst>
@@ -7349,8 +7349,8 @@
         </p:nvSpPr>
         <p:spPr>
           <a:xfrm>
-            <a:off x="1192725" y="2292492"/>
-            <a:ext cx="133320" cy="133320"/>
+            <a:off x="2171767" y="1654804"/>
+            <a:ext cx="94694" cy="94694"/>
           </a:xfrm>
           <a:prstGeom prst="ellipse">
             <a:avLst/>
@@ -7369,8 +7369,8 @@
         </p:nvSpPr>
         <p:spPr>
           <a:xfrm>
-            <a:off x="1447645" y="2292492"/>
-            <a:ext cx="133320" cy="133320"/>
+            <a:off x="2352832" y="1654804"/>
+            <a:ext cx="94694" cy="94694"/>
           </a:xfrm>
           <a:prstGeom prst="ellipse">
             <a:avLst/>
@@ -7389,8 +7389,8 @@
         </p:nvSpPr>
         <p:spPr>
           <a:xfrm>
-            <a:off x="1702565" y="2292492"/>
-            <a:ext cx="133320" cy="133320"/>
+            <a:off x="2533897" y="1654804"/>
+            <a:ext cx="94694" cy="94694"/>
           </a:xfrm>
           <a:prstGeom prst="ellipse">
             <a:avLst/>
@@ -7409,8 +7409,8 @@
         </p:nvSpPr>
         <p:spPr>
           <a:xfrm>
-            <a:off x="1957485" y="2292492"/>
-            <a:ext cx="133320" cy="133320"/>
+            <a:off x="2714962" y="1654804"/>
+            <a:ext cx="94694" cy="94694"/>
           </a:xfrm>
           <a:prstGeom prst="ellipse">
             <a:avLst/>
@@ -7429,8 +7429,8 @@
         </p:nvSpPr>
         <p:spPr>
           <a:xfrm>
-            <a:off x="2119740" y="2359152"/>
-            <a:ext cx="286785" cy="0"/>
+            <a:off x="2830208" y="1702151"/>
+            <a:ext cx="203698" cy="0"/>
           </a:xfrm>
           <a:prstGeom prst="line">
             <a:avLst/>
@@ -7453,8 +7453,8 @@
         </p:nvSpPr>
         <p:spPr>
           <a:xfrm>
-            <a:off x="940735" y="2799106"/>
-            <a:ext cx="1593251" cy="97768"/>
+            <a:off x="1992784" y="2014642"/>
+            <a:ext cx="1131655" cy="69442"/>
           </a:xfrm>
           <a:prstGeom prst="roundRect">
             <a:avLst>
@@ -7475,8 +7475,8 @@
         </p:nvSpPr>
         <p:spPr>
           <a:xfrm>
-            <a:off x="1192725" y="2781330"/>
-            <a:ext cx="133320" cy="133320"/>
+            <a:off x="2171767" y="2002016"/>
+            <a:ext cx="94694" cy="94694"/>
           </a:xfrm>
           <a:prstGeom prst="ellipse">
             <a:avLst/>
@@ -7495,8 +7495,8 @@
         </p:nvSpPr>
         <p:spPr>
           <a:xfrm>
-            <a:off x="1447645" y="2781330"/>
-            <a:ext cx="133320" cy="133320"/>
+            <a:off x="2352832" y="2002016"/>
+            <a:ext cx="94694" cy="94694"/>
           </a:xfrm>
           <a:prstGeom prst="ellipse">
             <a:avLst/>
@@ -7515,8 +7515,8 @@
         </p:nvSpPr>
         <p:spPr>
           <a:xfrm>
-            <a:off x="1702565" y="2781330"/>
-            <a:ext cx="133320" cy="133320"/>
+            <a:off x="2533897" y="2002016"/>
+            <a:ext cx="94694" cy="94694"/>
           </a:xfrm>
           <a:prstGeom prst="ellipse">
             <a:avLst/>
@@ -7535,8 +7535,8 @@
         </p:nvSpPr>
         <p:spPr>
           <a:xfrm>
-            <a:off x="1957485" y="2781330"/>
-            <a:ext cx="133320" cy="133320"/>
+            <a:off x="2714962" y="2002016"/>
+            <a:ext cx="94694" cy="94694"/>
           </a:xfrm>
           <a:prstGeom prst="ellipse">
             <a:avLst/>
@@ -7555,8 +7555,8 @@
         </p:nvSpPr>
         <p:spPr>
           <a:xfrm>
-            <a:off x="3429000" y="1319005"/>
-            <a:ext cx="5212080" cy="1005611"/>
+            <a:off x="3760150" y="963355"/>
+            <a:ext cx="3702038" cy="714266"/>
           </a:xfrm>
           <a:prstGeom prst="rect">
             <a:avLst/>
@@ -7575,7 +7575,7 @@
               <a:buNone/>
             </a:pPr>
             <a:r>
-              <a:rPr lang="en-US" sz="2300" b="1" dirty="0">
+              <a:rPr lang="en-US" sz="1630" b="1" dirty="0">
                 <a:solidFill>
                   <a:srgbClr val="0B1F3A"/>
                 </a:solidFill>
@@ -7585,7 +7585,7 @@
               </a:rPr>
               <a:t>Có dòng ghi «configurable»: đó là chế độ, không phải con số cố định</a:t>
             </a:r>
-            <a:endParaRPr lang="en-US" sz="2300" dirty="0"/>
+            <a:endParaRPr lang="en-US" sz="1630" dirty="0"/>
           </a:p>
           <a:p>
             <a:pPr indent="0" marL="0">
@@ -7595,7 +7595,7 @@
               <a:buNone/>
             </a:pPr>
             <a:r>
-              <a:rPr lang="en-US" sz="1400" dirty="0">
+              <a:rPr lang="en-US" sz="990" dirty="0">
                 <a:solidFill>
                   <a:srgbClr val="007F72"/>
                 </a:solidFill>
@@ -7605,7 +7605,7 @@
               </a:rPr>
               <a:t>有些行寫著「可設定」：那是模式，不是固定的數字</a:t>
             </a:r>
-            <a:endParaRPr lang="en-US" sz="2300" dirty="0"/>
+            <a:endParaRPr lang="en-US" sz="1630" dirty="0"/>
           </a:p>
         </p:txBody>
       </p:sp>
@@ -7617,8 +7617,8 @@
         </p:nvSpPr>
         <p:spPr>
           <a:xfrm>
-            <a:off x="3429000" y="2416057"/>
-            <a:ext cx="5212080" cy="1074682"/>
+            <a:off x="3760150" y="1742570"/>
+            <a:ext cx="3702038" cy="763326"/>
           </a:xfrm>
           <a:prstGeom prst="rect">
             <a:avLst/>
@@ -7637,7 +7637,7 @@
               <a:buNone/>
             </a:pPr>
             <a:r>
-              <a:rPr lang="en-US" sz="1250" dirty="0">
+              <a:rPr lang="en-US" sz="890" dirty="0">
                 <a:solidFill>
                   <a:srgbClr val="5F7183"/>
                 </a:solidFill>
@@ -7647,7 +7647,7 @@
               </a:rPr>
               <a:t>OS1: mỗi vòng 512 / 1024 / 2048 điểm, quay 10 hoặc 20 Hz. Cùng một con lidar, chọn chế độ khác thì số điểm trên người ở 40 m đổi hẳn.</a:t>
             </a:r>
-            <a:endParaRPr lang="en-US" sz="1250" dirty="0"/>
+            <a:endParaRPr lang="en-US" sz="890" dirty="0"/>
           </a:p>
           <a:p>
             <a:pPr indent="0" marL="0">
@@ -7657,7 +7657,7 @@
               <a:buNone/>
             </a:pPr>
             <a:r>
-              <a:rPr lang="en-US" sz="1150" dirty="0">
+              <a:rPr lang="en-US" sz="820" dirty="0">
                 <a:solidFill>
                   <a:srgbClr val="5F7183"/>
                 </a:solidFill>
@@ -7667,7 +7667,7 @@
               </a:rPr>
               <a:t>OS1 的每圈點數可以選 512 / 1024 / 2048，轉速可以選 10 或 20 Hz。同一顆光達，換一個模式，四十公尺行人身上的點數就整個不一樣。</a:t>
             </a:r>
-            <a:endParaRPr lang="en-US" sz="1250" dirty="0"/>
+            <a:endParaRPr lang="en-US" sz="890" dirty="0"/>
           </a:p>
         </p:txBody>
       </p:sp>
@@ -7679,8 +7679,8 @@
         </p:nvSpPr>
         <p:spPr>
           <a:xfrm>
-            <a:off x="502920" y="3913632"/>
-            <a:ext cx="8138160" cy="621792"/>
+            <a:off x="1681812" y="2806268"/>
+            <a:ext cx="5780375" cy="441647"/>
           </a:xfrm>
           <a:prstGeom prst="roundRect">
             <a:avLst>
@@ -7706,8 +7706,8 @@
         </p:nvSpPr>
         <p:spPr>
           <a:xfrm>
-            <a:off x="685800" y="3986784"/>
-            <a:ext cx="7772400" cy="493776"/>
+            <a:off x="1811708" y="2858226"/>
+            <a:ext cx="5520583" cy="350719"/>
           </a:xfrm>
           <a:prstGeom prst="rect">
             <a:avLst/>
@@ -7726,7 +7726,7 @@
               <a:buNone/>
             </a:pPr>
             <a:r>
-              <a:rPr lang="en-US" sz="1250" b="1" dirty="0">
+              <a:rPr lang="en-US" sz="890" b="1" dirty="0">
                 <a:solidFill>
                   <a:srgbClr val="7A4E00"/>
                 </a:solidFill>
@@ -7736,7 +7736,7 @@
               </a:rPr>
               <a:t>Tiết 3 các bạn sẽ tự đổi: 9 điểm thành 18 điểm, kết luận lật ngược.</a:t>
             </a:r>
-            <a:endParaRPr lang="en-US" sz="1250" dirty="0"/>
+            <a:endParaRPr lang="en-US" sz="890" dirty="0"/>
           </a:p>
           <a:p>
             <a:pPr indent="0" marL="0">
@@ -7746,7 +7746,7 @@
               <a:buNone/>
             </a:pPr>
             <a:r>
-              <a:rPr lang="en-US" sz="1150" dirty="0">
+              <a:rPr lang="en-US" sz="820" dirty="0">
                 <a:solidFill>
                   <a:srgbClr val="7A4E00"/>
                 </a:solidFill>
@@ -7756,7 +7756,7 @@
               </a:rPr>
               <a:t>第三節各位會自己切：9 個點變成 18 個點，結論整個翻過來。</a:t>
             </a:r>
-            <a:endParaRPr lang="en-US" sz="1250" dirty="0"/>
+            <a:endParaRPr lang="en-US" sz="890" dirty="0"/>
           </a:p>
         </p:txBody>
       </p:sp>
@@ -7776,8 +7776,8 @@
         </p:blipFill>
         <p:spPr>
           <a:xfrm>
-            <a:off x="7516368" y="4718304"/>
-            <a:ext cx="1097280" cy="242439"/>
+            <a:off x="6663327" y="3338842"/>
+            <a:ext cx="779376" cy="172200"/>
           </a:xfrm>
           <a:prstGeom prst="rect">
             <a:avLst/>
@@ -7792,8 +7792,8 @@
         </p:nvSpPr>
         <p:spPr>
           <a:xfrm>
-            <a:off x="109728" y="4791456"/>
-            <a:ext cx="822960" cy="256032"/>
+            <a:off x="1402536" y="3390800"/>
+            <a:ext cx="584532" cy="181855"/>
           </a:xfrm>
           <a:prstGeom prst="rect">
             <a:avLst/>
@@ -7809,7 +7809,7 @@
               <a:buNone/>
             </a:pPr>
             <a:r>
-              <a:rPr lang="en-US" sz="900" dirty="0">
+              <a:rPr lang="en-US" sz="640" dirty="0">
                 <a:solidFill>
                   <a:srgbClr val="5F7183"/>
                 </a:solidFill>
@@ -7819,7 +7819,7 @@
               </a:rPr>
               <a:t>11 / 14</a:t>
             </a:r>
-            <a:endParaRPr lang="en-US" sz="900" dirty="0"/>
+            <a:endParaRPr lang="en-US" sz="640" dirty="0"/>
           </a:p>
         </p:txBody>
       </p:sp>
@@ -7831,8 +7831,8 @@
         </p:nvSpPr>
         <p:spPr>
           <a:xfrm>
-            <a:off x="960120" y="4791456"/>
-            <a:ext cx="2011680" cy="256032"/>
+            <a:off x="2006553" y="3390800"/>
+            <a:ext cx="1428857" cy="181855"/>
           </a:xfrm>
           <a:prstGeom prst="rect">
             <a:avLst/>
@@ -7848,7 +7848,7 @@
               <a:buNone/>
             </a:pPr>
             <a:r>
-              <a:rPr lang="en-US" sz="900" dirty="0">
+              <a:rPr lang="en-US" sz="640" dirty="0">
                 <a:solidFill>
                   <a:srgbClr val="5F7183"/>
                 </a:solidFill>
@@ -7858,7 +7858,7 @@
               </a:rPr>
               <a:t>Tiết 1 · 第 1 節</a:t>
             </a:r>
-            <a:endParaRPr lang="en-US" sz="900" dirty="0"/>
+            <a:endParaRPr lang="en-US" sz="640" dirty="0"/>
           </a:p>
         </p:txBody>
       </p:sp>
@@ -7895,8 +7895,8 @@
         </p:nvSpPr>
         <p:spPr>
           <a:xfrm>
-            <a:off x="502920" y="292608"/>
-            <a:ext cx="8138160" cy="841248"/>
+            <a:off x="1681812" y="234326"/>
+            <a:ext cx="5780375" cy="597522"/>
           </a:xfrm>
           <a:prstGeom prst="rect">
             <a:avLst/>
@@ -7915,7 +7915,7 @@
               <a:buNone/>
             </a:pPr>
             <a:r>
-              <a:rPr lang="en-US" sz="2200" b="1" dirty="0">
+              <a:rPr lang="en-US" sz="1560" b="1" dirty="0">
                 <a:solidFill>
                   <a:srgbClr val="0B1F3A"/>
                 </a:solidFill>
@@ -7925,7 +7925,7 @@
               </a:rPr>
               <a:t>«90 m» hay «170 m»: cùng một con lidar, hai con số</a:t>
             </a:r>
-            <a:endParaRPr lang="en-US" sz="2200" dirty="0"/>
+            <a:endParaRPr lang="en-US" sz="1560" dirty="0"/>
           </a:p>
           <a:p>
             <a:pPr indent="0" marL="0">
@@ -7935,7 +7935,7 @@
               <a:buNone/>
             </a:pPr>
             <a:r>
-              <a:rPr lang="en-US" sz="1350" dirty="0">
+              <a:rPr lang="en-US" sz="960" dirty="0">
                 <a:solidFill>
                   <a:srgbClr val="5F7183"/>
                 </a:solidFill>
@@ -7945,7 +7945,7 @@
               </a:rPr>
               <a:t>「90 公尺」還是「170 公尺」：同一顆光達，兩個數字</a:t>
             </a:r>
-            <a:endParaRPr lang="en-US" sz="2200" dirty="0"/>
+            <a:endParaRPr lang="en-US" sz="1560" dirty="0"/>
           </a:p>
         </p:txBody>
       </p:sp>
@@ -7957,8 +7957,8 @@
         </p:nvSpPr>
         <p:spPr>
           <a:xfrm>
-            <a:off x="502920" y="1133856"/>
-            <a:ext cx="8138160" cy="713232"/>
+            <a:off x="1681812" y="831848"/>
+            <a:ext cx="5780375" cy="506595"/>
           </a:xfrm>
           <a:prstGeom prst="roundRect">
             <a:avLst>
@@ -7979,8 +7979,8 @@
         </p:nvSpPr>
         <p:spPr>
           <a:xfrm>
-            <a:off x="649224" y="1207008"/>
-            <a:ext cx="7845552" cy="566928"/>
+            <a:off x="1785729" y="883806"/>
+            <a:ext cx="5572542" cy="402678"/>
           </a:xfrm>
           <a:prstGeom prst="rect">
             <a:avLst/>
@@ -7999,7 +7999,7 @@
               <a:buNone/>
             </a:pPr>
             <a:r>
-              <a:rPr lang="en-US" sz="1150" b="1" dirty="0">
+              <a:rPr lang="en-US" sz="820" b="1" dirty="0">
                 <a:solidFill>
                   <a:srgbClr val="007F72"/>
                 </a:solidFill>
@@ -8009,7 +8009,7 @@
               </a:rPr>
               <a:t>Chép nguyên văn từ datasheet OS1. Chú ý phần chữ nhỏ phía sau.</a:t>
             </a:r>
-            <a:endParaRPr lang="en-US" sz="1150" dirty="0"/>
+            <a:endParaRPr lang="en-US" sz="820" dirty="0"/>
           </a:p>
           <a:p>
             <a:pPr indent="0" marL="0">
@@ -8019,7 +8019,7 @@
               <a:buNone/>
             </a:pPr>
             <a:r>
-              <a:rPr lang="en-US" sz="1000" dirty="0">
+              <a:rPr lang="en-US" sz="710" dirty="0">
                 <a:solidFill>
                   <a:srgbClr val="007F72"/>
                 </a:solidFill>
@@ -8029,7 +8029,7 @@
               </a:rPr>
               <a:t>照抄 OS1 規格表上的兩行。請注意後面那一串小字。</a:t>
             </a:r>
-            <a:endParaRPr lang="en-US" sz="1150" dirty="0"/>
+            <a:endParaRPr lang="en-US" sz="820" dirty="0"/>
           </a:p>
         </p:txBody>
       </p:sp>
@@ -8048,18 +8048,18 @@
           </p:nvPr>
         </p:nvGraphicFramePr>
         <p:xfrm>
-          <a:off x="502920" y="1956816"/>
-          <a:ext cx="8138160" cy="914400"/>
+          <a:off x="1681812" y="1416380"/>
+          <a:ext cx="5780375" cy="914400"/>
         </p:xfrm>
         <a:graphic>
           <a:graphicData uri="http://schemas.openxmlformats.org/drawingml/2006/table">
             <a:tbl>
               <a:tblPr/>
               <a:tblGrid>
-                <a:gridCol w="2034540"/>
-                <a:gridCol w="2034540"/>
-                <a:gridCol w="2034540"/>
-                <a:gridCol w="2034540"/>
+                <a:gridCol w="1445094"/>
+                <a:gridCol w="1445094"/>
+                <a:gridCol w="1445094"/>
+                <a:gridCol w="1445094"/>
               </a:tblGrid>
               <a:tr h="384048">
                 <a:tc>
@@ -8993,8 +8993,8 @@
         </p:nvSpPr>
         <p:spPr>
           <a:xfrm>
-            <a:off x="502920" y="3243985"/>
-            <a:ext cx="8138160" cy="457200"/>
+            <a:off x="1681812" y="2330631"/>
+            <a:ext cx="5780375" cy="324740"/>
           </a:xfrm>
           <a:prstGeom prst="rect">
             <a:avLst/>
@@ -9013,7 +9013,7 @@
               <a:buNone/>
             </a:pPr>
             <a:r>
-              <a:rPr lang="en-US" sz="1200" b="1" dirty="0">
+              <a:rPr lang="en-US" sz="850" b="1" dirty="0">
                 <a:solidFill>
                   <a:srgbClr val="007F72"/>
                 </a:solidFill>
@@ -9023,7 +9023,7 @@
               </a:rPr>
               <a:t>Quảng cáo hay ghi 170 m. Con số phải dùng để thiết kế là 90 m.</a:t>
             </a:r>
-            <a:endParaRPr lang="en-US" sz="1200" dirty="0"/>
+            <a:endParaRPr lang="en-US" sz="850" dirty="0"/>
           </a:p>
           <a:p>
             <a:pPr indent="0" marL="0">
@@ -9033,7 +9033,7 @@
               <a:buNone/>
             </a:pPr>
             <a:r>
-              <a:rPr lang="en-US" sz="1100" dirty="0">
+              <a:rPr lang="en-US" sz="780" dirty="0">
                 <a:solidFill>
                   <a:srgbClr val="007F72"/>
                 </a:solidFill>
@@ -9043,7 +9043,7 @@
               </a:rPr>
               <a:t>廣告上會寫 170 公尺。真正設計的時候要用的是 90 公尺。</a:t>
             </a:r>
-            <a:endParaRPr lang="en-US" sz="1200" dirty="0"/>
+            <a:endParaRPr lang="en-US" sz="850" dirty="0"/>
           </a:p>
         </p:txBody>
       </p:sp>
@@ -9063,8 +9063,8 @@
         </p:blipFill>
         <p:spPr>
           <a:xfrm>
-            <a:off x="7516368" y="4718304"/>
-            <a:ext cx="1097280" cy="242439"/>
+            <a:off x="6663327" y="3338842"/>
+            <a:ext cx="779376" cy="172200"/>
           </a:xfrm>
           <a:prstGeom prst="rect">
             <a:avLst/>
@@ -9079,8 +9079,8 @@
         </p:nvSpPr>
         <p:spPr>
           <a:xfrm>
-            <a:off x="109728" y="4791456"/>
-            <a:ext cx="822960" cy="256032"/>
+            <a:off x="1402536" y="3390800"/>
+            <a:ext cx="584532" cy="181855"/>
           </a:xfrm>
           <a:prstGeom prst="rect">
             <a:avLst/>
@@ -9096,7 +9096,7 @@
               <a:buNone/>
             </a:pPr>
             <a:r>
-              <a:rPr lang="en-US" sz="900" dirty="0">
+              <a:rPr lang="en-US" sz="640" dirty="0">
                 <a:solidFill>
                   <a:srgbClr val="5F7183"/>
                 </a:solidFill>
@@ -9106,7 +9106,7 @@
               </a:rPr>
               <a:t>12 / 14</a:t>
             </a:r>
-            <a:endParaRPr lang="en-US" sz="900" dirty="0"/>
+            <a:endParaRPr lang="en-US" sz="640" dirty="0"/>
           </a:p>
         </p:txBody>
       </p:sp>
@@ -9118,8 +9118,8 @@
         </p:nvSpPr>
         <p:spPr>
           <a:xfrm>
-            <a:off x="960120" y="4791456"/>
-            <a:ext cx="2011680" cy="256032"/>
+            <a:off x="2006553" y="3390800"/>
+            <a:ext cx="1428857" cy="181855"/>
           </a:xfrm>
           <a:prstGeom prst="rect">
             <a:avLst/>
@@ -9135,7 +9135,7 @@
               <a:buNone/>
             </a:pPr>
             <a:r>
-              <a:rPr lang="en-US" sz="900" dirty="0">
+              <a:rPr lang="en-US" sz="640" dirty="0">
                 <a:solidFill>
                   <a:srgbClr val="5F7183"/>
                 </a:solidFill>
@@ -9145,7 +9145,7 @@
               </a:rPr>
               <a:t>Tiết 1 · 第 1 節</a:t>
             </a:r>
-            <a:endParaRPr lang="en-US" sz="900" dirty="0"/>
+            <a:endParaRPr lang="en-US" sz="640" dirty="0"/>
           </a:p>
         </p:txBody>
       </p:sp>
@@ -9189,8 +9189,8 @@
         </p:nvSpPr>
         <p:spPr>
           <a:xfrm>
-            <a:off x="6766560" y="-1371600"/>
-            <a:ext cx="4206240" cy="4206240"/>
+            <a:off x="6130753" y="-947729"/>
+            <a:ext cx="2987610" cy="2987610"/>
           </a:xfrm>
           <a:prstGeom prst="ellipse">
             <a:avLst/>
@@ -9214,8 +9214,8 @@
         </p:nvSpPr>
         <p:spPr>
           <a:xfrm>
-            <a:off x="7863840" y="3108960"/>
-            <a:ext cx="2560320" cy="2560320"/>
+            <a:off x="7104973" y="1520297"/>
+            <a:ext cx="1688649" cy="1688649"/>
           </a:xfrm>
           <a:prstGeom prst="ellipse">
             <a:avLst/>
@@ -9236,8 +9236,8 @@
         </p:nvSpPr>
         <p:spPr>
           <a:xfrm>
-            <a:off x="502920" y="475488"/>
-            <a:ext cx="6766560" cy="274320"/>
+            <a:off x="1681812" y="364222"/>
+            <a:ext cx="4806155" cy="194844"/>
           </a:xfrm>
           <a:prstGeom prst="rect">
             <a:avLst/>
@@ -9253,7 +9253,7 @@
               <a:buNone/>
             </a:pPr>
             <a:r>
-              <a:rPr lang="en-US" sz="1250" b="1" dirty="0">
+              <a:rPr lang="en-US" sz="890" b="1" dirty="0">
                 <a:solidFill>
                   <a:srgbClr val="FFB020"/>
                 </a:solidFill>
@@ -9263,7 +9263,7 @@
               </a:rPr>
               <a:t>Lên máy · 上機（第一輪）</a:t>
             </a:r>
-            <a:endParaRPr lang="en-US" sz="1250" dirty="0"/>
+            <a:endParaRPr lang="en-US" sz="890" dirty="0"/>
           </a:p>
         </p:txBody>
       </p:sp>
@@ -9275,8 +9275,8 @@
         </p:nvSpPr>
         <p:spPr>
           <a:xfrm>
-            <a:off x="502920" y="786384"/>
-            <a:ext cx="8046720" cy="1225296"/>
+            <a:off x="1681812" y="585045"/>
+            <a:ext cx="5715427" cy="870304"/>
           </a:xfrm>
           <a:prstGeom prst="rect">
             <a:avLst/>
@@ -9295,7 +9295,7 @@
               <a:buNone/>
             </a:pPr>
             <a:r>
-              <a:rPr lang="en-US" sz="2300" b="1" dirty="0">
+              <a:rPr lang="en-US" sz="1630" b="1" dirty="0">
                 <a:solidFill>
                   <a:srgbClr val="FFFFFF"/>
                 </a:solidFill>
@@ -9305,7 +9305,7 @@
               </a:rPr>
               <a:t>Mỗi người tự làm: chọn OS1, tìm bốn con số, bấm kiểm tra.</a:t>
             </a:r>
-            <a:endParaRPr lang="en-US" sz="2300" dirty="0"/>
+            <a:endParaRPr lang="en-US" sz="1630" dirty="0"/>
           </a:p>
           <a:p>
             <a:pPr indent="0" marL="0">
@@ -9315,7 +9315,7 @@
               <a:buNone/>
             </a:pPr>
             <a:r>
-              <a:rPr lang="en-US" sz="1500" dirty="0">
+              <a:rPr lang="en-US" sz="1070" dirty="0">
                 <a:solidFill>
                   <a:srgbClr val="AFC3D4"/>
                 </a:solidFill>
@@ -9325,7 +9325,7 @@
               </a:rPr>
               <a:t>每個人自己做：選 OS1，把四個數字找出來，按檢查。</a:t>
             </a:r>
-            <a:endParaRPr lang="en-US" sz="2300" dirty="0"/>
+            <a:endParaRPr lang="en-US" sz="1630" dirty="0"/>
           </a:p>
         </p:txBody>
       </p:sp>
@@ -9337,8 +9337,8 @@
         </p:nvSpPr>
         <p:spPr>
           <a:xfrm>
-            <a:off x="502920" y="1880384"/>
-            <a:ext cx="8138160" cy="621792"/>
+            <a:off x="1681812" y="1362092"/>
+            <a:ext cx="5780375" cy="441647"/>
           </a:xfrm>
           <a:prstGeom prst="roundRect">
             <a:avLst>
@@ -9359,8 +9359,8 @@
         </p:nvSpPr>
         <p:spPr>
           <a:xfrm>
-            <a:off x="667512" y="2026688"/>
-            <a:ext cx="329184" cy="329184"/>
+            <a:off x="1798719" y="1466008"/>
+            <a:ext cx="233813" cy="233813"/>
           </a:xfrm>
           <a:prstGeom prst="ellipse">
             <a:avLst/>
@@ -9379,8 +9379,8 @@
         </p:nvSpPr>
         <p:spPr>
           <a:xfrm>
-            <a:off x="667512" y="2054120"/>
-            <a:ext cx="329184" cy="274320"/>
+            <a:off x="1798719" y="1485493"/>
+            <a:ext cx="233813" cy="194844"/>
           </a:xfrm>
           <a:prstGeom prst="rect">
             <a:avLst/>
@@ -9396,7 +9396,7 @@
               <a:buNone/>
             </a:pPr>
             <a:r>
-              <a:rPr lang="en-US" sz="1200" b="1" dirty="0">
+              <a:rPr lang="en-US" sz="850" b="1" dirty="0">
                 <a:solidFill>
                   <a:srgbClr val="FFFFFF"/>
                 </a:solidFill>
@@ -9406,7 +9406,7 @@
               </a:rPr>
               <a:t>1</a:t>
             </a:r>
-            <a:endParaRPr lang="en-US" sz="1200" dirty="0"/>
+            <a:endParaRPr lang="en-US" sz="850" dirty="0"/>
           </a:p>
         </p:txBody>
       </p:sp>
@@ -9418,8 +9418,8 @@
         </p:nvSpPr>
         <p:spPr>
           <a:xfrm>
-            <a:off x="1161288" y="1926104"/>
-            <a:ext cx="7296912" cy="548640"/>
+            <a:off x="2149438" y="1394566"/>
+            <a:ext cx="5182853" cy="389688"/>
           </a:xfrm>
           <a:prstGeom prst="rect">
             <a:avLst/>
@@ -9438,7 +9438,7 @@
               <a:buNone/>
             </a:pPr>
             <a:r>
-              <a:rPr lang="en-US" sz="1250" b="1" dirty="0">
+              <a:rPr lang="en-US" sz="890" b="1" dirty="0">
                 <a:solidFill>
                   <a:srgbClr val="FFFFFF"/>
                 </a:solidFill>
@@ -9448,7 +9448,7 @@
               </a:rPr>
               <a:t>Bốn câu: góc nhìn dọc · tầm đo với vật 10% · phân giải · tốc độ cập nhật</a:t>
             </a:r>
-            <a:endParaRPr lang="en-US" sz="1250" dirty="0"/>
+            <a:endParaRPr lang="en-US" sz="890" dirty="0"/>
           </a:p>
           <a:p>
             <a:pPr indent="0" marL="0">
@@ -9458,7 +9458,7 @@
               <a:buNone/>
             </a:pPr>
             <a:r>
-              <a:rPr lang="en-US" sz="1150" dirty="0">
+              <a:rPr lang="en-US" sz="820" dirty="0">
                 <a:solidFill>
                   <a:srgbClr val="AFC3D4"/>
                 </a:solidFill>
@@ -9468,7 +9468,7 @@
               </a:rPr>
               <a:t>四題：垂直視野・對 10% 反射率的測距・解析度・更新率</a:t>
             </a:r>
-            <a:endParaRPr lang="en-US" sz="1250" dirty="0"/>
+            <a:endParaRPr lang="en-US" sz="890" dirty="0"/>
           </a:p>
         </p:txBody>
       </p:sp>
@@ -9480,8 +9480,8 @@
         </p:nvSpPr>
         <p:spPr>
           <a:xfrm>
-            <a:off x="502920" y="2593616"/>
-            <a:ext cx="8138160" cy="621792"/>
+            <a:off x="1681812" y="1868686"/>
+            <a:ext cx="5780375" cy="441647"/>
           </a:xfrm>
           <a:prstGeom prst="roundRect">
             <a:avLst>
@@ -9502,8 +9502,8 @@
         </p:nvSpPr>
         <p:spPr>
           <a:xfrm>
-            <a:off x="667512" y="2739920"/>
-            <a:ext cx="329184" cy="329184"/>
+            <a:off x="1798719" y="1972603"/>
+            <a:ext cx="233813" cy="233813"/>
           </a:xfrm>
           <a:prstGeom prst="ellipse">
             <a:avLst/>
@@ -9522,8 +9522,8 @@
         </p:nvSpPr>
         <p:spPr>
           <a:xfrm>
-            <a:off x="667512" y="2767352"/>
-            <a:ext cx="329184" cy="274320"/>
+            <a:off x="1798719" y="1992087"/>
+            <a:ext cx="233813" cy="194844"/>
           </a:xfrm>
           <a:prstGeom prst="rect">
             <a:avLst/>
@@ -9539,7 +9539,7 @@
               <a:buNone/>
             </a:pPr>
             <a:r>
-              <a:rPr lang="en-US" sz="1200" b="1" dirty="0">
+              <a:rPr lang="en-US" sz="850" b="1" dirty="0">
                 <a:solidFill>
                   <a:srgbClr val="FFFFFF"/>
                 </a:solidFill>
@@ -9549,7 +9549,7 @@
               </a:rPr>
               <a:t>2</a:t>
             </a:r>
-            <a:endParaRPr lang="en-US" sz="1200" dirty="0"/>
+            <a:endParaRPr lang="en-US" sz="850" dirty="0"/>
           </a:p>
         </p:txBody>
       </p:sp>
@@ -9561,8 +9561,8 @@
         </p:nvSpPr>
         <p:spPr>
           <a:xfrm>
-            <a:off x="1161288" y="2639336"/>
-            <a:ext cx="7296912" cy="548640"/>
+            <a:off x="2149438" y="1901160"/>
+            <a:ext cx="5182853" cy="389688"/>
           </a:xfrm>
           <a:prstGeom prst="rect">
             <a:avLst/>
@@ -9581,7 +9581,7 @@
               <a:buNone/>
             </a:pPr>
             <a:r>
-              <a:rPr lang="en-US" sz="1250" b="1" dirty="0">
+              <a:rPr lang="en-US" sz="890" b="1" dirty="0">
                 <a:solidFill>
                   <a:srgbClr val="FFFFFF"/>
                 </a:solidFill>
@@ -9591,7 +9591,7 @@
               </a:rPr>
               <a:t>Sai thì công cụ nói sai ở đâu — đọc xong sửa lại, đừng đoán bừa</a:t>
             </a:r>
-            <a:endParaRPr lang="en-US" sz="1250" dirty="0"/>
+            <a:endParaRPr lang="en-US" sz="890" dirty="0"/>
           </a:p>
           <a:p>
             <a:pPr indent="0" marL="0">
@@ -9601,7 +9601,7 @@
               <a:buNone/>
             </a:pPr>
             <a:r>
-              <a:rPr lang="en-US" sz="1150" dirty="0">
+              <a:rPr lang="en-US" sz="820" dirty="0">
                 <a:solidFill>
                   <a:srgbClr val="AFC3D4"/>
                 </a:solidFill>
@@ -9611,7 +9611,7 @@
               </a:rPr>
               <a:t>選錯的話工具會告訴你錯在哪——看完再改，不要亂猜</a:t>
             </a:r>
-            <a:endParaRPr lang="en-US" sz="1250" dirty="0"/>
+            <a:endParaRPr lang="en-US" sz="890" dirty="0"/>
           </a:p>
         </p:txBody>
       </p:sp>
@@ -9623,8 +9623,8 @@
         </p:nvSpPr>
         <p:spPr>
           <a:xfrm>
-            <a:off x="502920" y="3306848"/>
-            <a:ext cx="8138160" cy="621792"/>
+            <a:off x="1681812" y="2375281"/>
+            <a:ext cx="5780375" cy="441647"/>
           </a:xfrm>
           <a:prstGeom prst="roundRect">
             <a:avLst>
@@ -9645,8 +9645,8 @@
         </p:nvSpPr>
         <p:spPr>
           <a:xfrm>
-            <a:off x="667512" y="3453152"/>
-            <a:ext cx="329184" cy="329184"/>
+            <a:off x="1798719" y="2479198"/>
+            <a:ext cx="233813" cy="233813"/>
           </a:xfrm>
           <a:prstGeom prst="ellipse">
             <a:avLst/>
@@ -9665,8 +9665,8 @@
         </p:nvSpPr>
         <p:spPr>
           <a:xfrm>
-            <a:off x="667512" y="3480584"/>
-            <a:ext cx="329184" cy="274320"/>
+            <a:off x="1798719" y="2498682"/>
+            <a:ext cx="233813" cy="194844"/>
           </a:xfrm>
           <a:prstGeom prst="rect">
             <a:avLst/>
@@ -9682,7 +9682,7 @@
               <a:buNone/>
             </a:pPr>
             <a:r>
-              <a:rPr lang="en-US" sz="1200" b="1" dirty="0">
+              <a:rPr lang="en-US" sz="850" b="1" dirty="0">
                 <a:solidFill>
                   <a:srgbClr val="FFFFFF"/>
                 </a:solidFill>
@@ -9692,7 +9692,7 @@
               </a:rPr>
               <a:t>3</a:t>
             </a:r>
-            <a:endParaRPr lang="en-US" sz="1200" dirty="0"/>
+            <a:endParaRPr lang="en-US" sz="850" dirty="0"/>
           </a:p>
         </p:txBody>
       </p:sp>
@@ -9704,8 +9704,8 @@
         </p:nvSpPr>
         <p:spPr>
           <a:xfrm>
-            <a:off x="1161288" y="3352568"/>
-            <a:ext cx="7296912" cy="548640"/>
+            <a:off x="2149438" y="2407755"/>
+            <a:ext cx="5182853" cy="389688"/>
           </a:xfrm>
           <a:prstGeom prst="rect">
             <a:avLst/>
@@ -9724,7 +9724,7 @@
               <a:buNone/>
             </a:pPr>
             <a:r>
-              <a:rPr lang="en-US" sz="1250" b="1" dirty="0">
+              <a:rPr lang="en-US" sz="890" b="1" dirty="0">
                 <a:solidFill>
                   <a:srgbClr val="FFFFFF"/>
                 </a:solidFill>
@@ -9734,7 +9734,7 @@
               </a:rPr>
               <a:t>Làm xong OS1 thì đổi sang AT128 làm lại một lượt</a:t>
             </a:r>
-            <a:endParaRPr lang="en-US" sz="1250" dirty="0"/>
+            <a:endParaRPr lang="en-US" sz="890" dirty="0"/>
           </a:p>
           <a:p>
             <a:pPr indent="0" marL="0">
@@ -9744,7 +9744,7 @@
               <a:buNone/>
             </a:pPr>
             <a:r>
-              <a:rPr lang="en-US" sz="1150" dirty="0">
+              <a:rPr lang="en-US" sz="820" dirty="0">
                 <a:solidFill>
                   <a:srgbClr val="AFC3D4"/>
                 </a:solidFill>
@@ -9754,7 +9754,7 @@
               </a:rPr>
               <a:t>OS1 做完，換 AT128 再做一次</a:t>
             </a:r>
-            <a:endParaRPr lang="en-US" sz="1250" dirty="0"/>
+            <a:endParaRPr lang="en-US" sz="890" dirty="0"/>
           </a:p>
         </p:txBody>
       </p:sp>
@@ -9766,8 +9766,8 @@
         </p:nvSpPr>
         <p:spPr>
           <a:xfrm>
-            <a:off x="502920" y="4056656"/>
-            <a:ext cx="8046720" cy="457200"/>
+            <a:off x="1681812" y="2907855"/>
+            <a:ext cx="5715427" cy="324740"/>
           </a:xfrm>
           <a:prstGeom prst="rect">
             <a:avLst/>
@@ -9786,7 +9786,7 @@
               <a:buNone/>
             </a:pPr>
             <a:r>
-              <a:rPr lang="en-US" sz="1250" b="1" dirty="0">
+              <a:rPr lang="en-US" sz="890" b="1" dirty="0">
                 <a:solidFill>
                   <a:srgbClr val="FFB020"/>
                 </a:solidFill>
@@ -9796,7 +9796,7 @@
               </a:rPr>
               <a:t>Hai câu của camera sẽ khiến nhiều người bực mình. Đó là chủ ý.</a:t>
             </a:r>
-            <a:endParaRPr lang="en-US" sz="1250" dirty="0"/>
+            <a:endParaRPr lang="en-US" sz="890" dirty="0"/>
           </a:p>
           <a:p>
             <a:pPr indent="0" marL="0">
@@ -9806,7 +9806,7 @@
               <a:buNone/>
             </a:pPr>
             <a:r>
-              <a:rPr lang="en-US" sz="1150" dirty="0">
+              <a:rPr lang="en-US" sz="820" dirty="0">
                 <a:solidFill>
                   <a:srgbClr val="FFB020"/>
                 </a:solidFill>
@@ -9816,7 +9816,7 @@
               </a:rPr>
               <a:t>相機那兩題會讓很多人火大。那是故意的。</a:t>
             </a:r>
-            <a:endParaRPr lang="en-US" sz="1250" dirty="0"/>
+            <a:endParaRPr lang="en-US" sz="890" dirty="0"/>
           </a:p>
         </p:txBody>
       </p:sp>
@@ -9828,8 +9828,8 @@
         </p:nvSpPr>
         <p:spPr>
           <a:xfrm>
-            <a:off x="109728" y="4791456"/>
-            <a:ext cx="822960" cy="256032"/>
+            <a:off x="1402536" y="3390800"/>
+            <a:ext cx="584532" cy="181855"/>
           </a:xfrm>
           <a:prstGeom prst="rect">
             <a:avLst/>
@@ -9845,7 +9845,7 @@
               <a:buNone/>
             </a:pPr>
             <a:r>
-              <a:rPr lang="en-US" sz="900" dirty="0">
+              <a:rPr lang="en-US" sz="640" dirty="0">
                 <a:solidFill>
                   <a:srgbClr val="9FB3C8"/>
                 </a:solidFill>
@@ -9855,7 +9855,7 @@
               </a:rPr>
               <a:t>13 / 14</a:t>
             </a:r>
-            <a:endParaRPr lang="en-US" sz="900" dirty="0"/>
+            <a:endParaRPr lang="en-US" sz="640" dirty="0"/>
           </a:p>
         </p:txBody>
       </p:sp>
@@ -9867,8 +9867,8 @@
         </p:nvSpPr>
         <p:spPr>
           <a:xfrm>
-            <a:off x="960120" y="4791456"/>
-            <a:ext cx="2011680" cy="256032"/>
+            <a:off x="2006553" y="3390800"/>
+            <a:ext cx="1428857" cy="181855"/>
           </a:xfrm>
           <a:prstGeom prst="rect">
             <a:avLst/>
@@ -9884,7 +9884,7 @@
               <a:buNone/>
             </a:pPr>
             <a:r>
-              <a:rPr lang="en-US" sz="900" dirty="0">
+              <a:rPr lang="en-US" sz="640" dirty="0">
                 <a:solidFill>
                   <a:srgbClr val="9FB3C8"/>
                 </a:solidFill>
@@ -9894,7 +9894,7 @@
               </a:rPr>
               <a:t>Tiết 1 · 第 1 節</a:t>
             </a:r>
-            <a:endParaRPr lang="en-US" sz="900" dirty="0"/>
+            <a:endParaRPr lang="en-US" sz="640" dirty="0"/>
           </a:p>
         </p:txBody>
       </p:sp>
@@ -9938,8 +9938,8 @@
         </p:nvSpPr>
         <p:spPr>
           <a:xfrm>
-            <a:off x="6766560" y="-1371600"/>
-            <a:ext cx="4206240" cy="4206240"/>
+            <a:off x="6130753" y="-947729"/>
+            <a:ext cx="2987610" cy="2987610"/>
           </a:xfrm>
           <a:prstGeom prst="ellipse">
             <a:avLst/>
@@ -9963,8 +9963,8 @@
         </p:nvSpPr>
         <p:spPr>
           <a:xfrm>
-            <a:off x="7863840" y="3108960"/>
-            <a:ext cx="2560320" cy="2560320"/>
+            <a:off x="7104973" y="1520297"/>
+            <a:ext cx="1688649" cy="1688649"/>
           </a:xfrm>
           <a:prstGeom prst="ellipse">
             <a:avLst/>
@@ -9985,8 +9985,8 @@
         </p:nvSpPr>
         <p:spPr>
           <a:xfrm>
-            <a:off x="502920" y="475488"/>
-            <a:ext cx="6766560" cy="274320"/>
+            <a:off x="1681812" y="364222"/>
+            <a:ext cx="4806155" cy="194844"/>
           </a:xfrm>
           <a:prstGeom prst="rect">
             <a:avLst/>
@@ -10002,7 +10002,7 @@
               <a:buNone/>
             </a:pPr>
             <a:r>
-              <a:rPr lang="en-US" sz="1250" b="1" dirty="0">
+              <a:rPr lang="en-US" sz="890" b="1" dirty="0">
                 <a:solidFill>
                   <a:srgbClr val="FFB020"/>
                 </a:solidFill>
@@ -10012,7 +10012,7 @@
               </a:rPr>
               <a:t>Tiết 1 · 第一節小結</a:t>
             </a:r>
-            <a:endParaRPr lang="en-US" sz="1250" dirty="0"/>
+            <a:endParaRPr lang="en-US" sz="890" dirty="0"/>
           </a:p>
         </p:txBody>
       </p:sp>
@@ -10024,8 +10024,8 @@
         </p:nvSpPr>
         <p:spPr>
           <a:xfrm>
-            <a:off x="502920" y="822960"/>
-            <a:ext cx="8046720" cy="1060704"/>
+            <a:off x="1681812" y="611024"/>
+            <a:ext cx="5715427" cy="753397"/>
           </a:xfrm>
           <a:prstGeom prst="rect">
             <a:avLst/>
@@ -10044,7 +10044,7 @@
               <a:buNone/>
             </a:pPr>
             <a:r>
-              <a:rPr lang="en-US" sz="2500" b="1" dirty="0">
+              <a:rPr lang="en-US" sz="1780" b="1" dirty="0">
                 <a:solidFill>
                   <a:srgbClr val="FFFFFF"/>
                 </a:solidFill>
@@ -10054,7 +10054,7 @@
               </a:rPr>
               <a:t>Mang ba câu này sang tiết 2</a:t>
             </a:r>
-            <a:endParaRPr lang="en-US" sz="2500" dirty="0"/>
+            <a:endParaRPr lang="en-US" sz="1780" dirty="0"/>
           </a:p>
           <a:p>
             <a:pPr indent="0" marL="0">
@@ -10064,7 +10064,7 @@
               <a:buNone/>
             </a:pPr>
             <a:r>
-              <a:rPr lang="en-US" sz="1500" dirty="0">
+              <a:rPr lang="en-US" sz="1070" dirty="0">
                 <a:solidFill>
                   <a:srgbClr val="AFC3D4"/>
                 </a:solidFill>
@@ -10074,7 +10074,7 @@
               </a:rPr>
               <a:t>帶三句話進第二節</a:t>
             </a:r>
-            <a:endParaRPr lang="en-US" sz="2500" dirty="0"/>
+            <a:endParaRPr lang="en-US" sz="1780" dirty="0"/>
           </a:p>
         </p:txBody>
       </p:sp>
@@ -10086,8 +10086,8 @@
         </p:nvSpPr>
         <p:spPr>
           <a:xfrm>
-            <a:off x="502920" y="1773936"/>
-            <a:ext cx="45720" cy="672713"/>
+            <a:off x="1681812" y="1286484"/>
+            <a:ext cx="32474" cy="477815"/>
           </a:xfrm>
           <a:prstGeom prst="rect">
             <a:avLst/>
@@ -10106,8 +10106,8 @@
         </p:nvSpPr>
         <p:spPr>
           <a:xfrm>
-            <a:off x="722376" y="1737360"/>
-            <a:ext cx="7863840" cy="782441"/>
+            <a:off x="1837688" y="1260505"/>
+            <a:ext cx="5585531" cy="555752"/>
           </a:xfrm>
           <a:prstGeom prst="rect">
             <a:avLst/>
@@ -10126,7 +10126,7 @@
               <a:buNone/>
             </a:pPr>
             <a:r>
-              <a:rPr lang="en-US" sz="1350" b="1" dirty="0">
+              <a:rPr lang="en-US" sz="960" b="1" dirty="0">
                 <a:solidFill>
                   <a:srgbClr val="FFFFFF"/>
                 </a:solidFill>
@@ -10136,7 +10136,7 @@
               </a:rPr>
               <a:t>Ba thanh trượt tuần trước = ba dòng trên datasheet: số kênh, góc nhìn, tầm đo. Cộng thêm dòng thứ tư: tốc độ cập nhật.</a:t>
             </a:r>
-            <a:endParaRPr lang="en-US" sz="1350" dirty="0"/>
+            <a:endParaRPr lang="en-US" sz="960" dirty="0"/>
           </a:p>
           <a:p>
             <a:pPr indent="0" marL="0">
@@ -10146,7 +10146,7 @@
               <a:buNone/>
             </a:pPr>
             <a:r>
-              <a:rPr lang="en-US" sz="1200" dirty="0">
+              <a:rPr lang="en-US" sz="850" dirty="0">
                 <a:solidFill>
                   <a:srgbClr val="AFC3D4"/>
                 </a:solidFill>
@@ -10156,7 +10156,7 @@
               </a:rPr>
               <a:t>上週三個滑桿就是規格表上三行：線束數、視野、測距。再加第四行：更新率。</a:t>
             </a:r>
-            <a:endParaRPr lang="en-US" sz="1350" dirty="0"/>
+            <a:endParaRPr lang="en-US" sz="960" dirty="0"/>
           </a:p>
         </p:txBody>
       </p:sp>
@@ -10168,8 +10168,8 @@
         </p:nvSpPr>
         <p:spPr>
           <a:xfrm>
-            <a:off x="502920" y="2647817"/>
-            <a:ext cx="45720" cy="672713"/>
+            <a:off x="1681812" y="1907184"/>
+            <a:ext cx="32474" cy="477815"/>
           </a:xfrm>
           <a:prstGeom prst="rect">
             <a:avLst/>
@@ -10188,8 +10188,8 @@
         </p:nvSpPr>
         <p:spPr>
           <a:xfrm>
-            <a:off x="722376" y="2611241"/>
-            <a:ext cx="7863840" cy="782441"/>
+            <a:off x="1837688" y="1881205"/>
+            <a:ext cx="5585531" cy="555752"/>
           </a:xfrm>
           <a:prstGeom prst="rect">
             <a:avLst/>
@@ -10208,7 +10208,7 @@
               <a:buNone/>
             </a:pPr>
             <a:r>
-              <a:rPr lang="en-US" sz="1350" b="1" dirty="0">
+              <a:rPr lang="en-US" sz="960" b="1" dirty="0">
                 <a:solidFill>
                   <a:srgbClr val="FFFFFF"/>
                 </a:solidFill>
@@ -10218,7 +10218,7 @@
               </a:rPr>
               <a:t>Datasheet cảm biến ảnh không có góc nhìn và tầm đo — góc nhìn do ống kính, khoảng cách là tính ra.</a:t>
             </a:r>
-            <a:endParaRPr lang="en-US" sz="1350" dirty="0"/>
+            <a:endParaRPr lang="en-US" sz="960" dirty="0"/>
           </a:p>
           <a:p>
             <a:pPr indent="0" marL="0">
@@ -10228,7 +10228,7 @@
               <a:buNone/>
             </a:pPr>
             <a:r>
-              <a:rPr lang="en-US" sz="1200" dirty="0">
+              <a:rPr lang="en-US" sz="850" dirty="0">
                 <a:solidFill>
                   <a:srgbClr val="AFC3D4"/>
                 </a:solidFill>
@@ -10238,7 +10238,7 @@
               </a:rPr>
               <a:t>影像感測器的規格表沒有視野和測距——視野看鏡頭，距離是算出來的。</a:t>
             </a:r>
-            <a:endParaRPr lang="en-US" sz="1350" dirty="0"/>
+            <a:endParaRPr lang="en-US" sz="960" dirty="0"/>
           </a:p>
         </p:txBody>
       </p:sp>
@@ -10250,8 +10250,8 @@
         </p:nvSpPr>
         <p:spPr>
           <a:xfrm>
-            <a:off x="502920" y="3521698"/>
-            <a:ext cx="45720" cy="672713"/>
+            <a:off x="1681812" y="2527885"/>
+            <a:ext cx="32474" cy="477815"/>
           </a:xfrm>
           <a:prstGeom prst="rect">
             <a:avLst/>
@@ -10270,8 +10270,8 @@
         </p:nvSpPr>
         <p:spPr>
           <a:xfrm>
-            <a:off x="722376" y="3485122"/>
-            <a:ext cx="7863840" cy="782441"/>
+            <a:off x="1837688" y="2501905"/>
+            <a:ext cx="5585531" cy="555752"/>
           </a:xfrm>
           <a:prstGeom prst="rect">
             <a:avLst/>
@@ -10290,7 +10290,7 @@
               <a:buNone/>
             </a:pPr>
             <a:r>
-              <a:rPr lang="en-US" sz="1350" b="1" dirty="0">
+              <a:rPr lang="en-US" sz="960" b="1" dirty="0">
                 <a:solidFill>
                   <a:srgbClr val="FFFFFF"/>
                 </a:solidFill>
@@ -10300,7 +10300,7 @@
               </a:rPr>
               <a:t>Tầm đo luôn phải hỏi: đo với vật phản xạ bao nhiêu phần trăm. 170 m hay 90 m là hai thế giới khác nhau.</a:t>
             </a:r>
-            <a:endParaRPr lang="en-US" sz="1350" dirty="0"/>
+            <a:endParaRPr lang="en-US" sz="960" dirty="0"/>
           </a:p>
           <a:p>
             <a:pPr indent="0" marL="0">
@@ -10310,7 +10310,7 @@
               <a:buNone/>
             </a:pPr>
             <a:r>
-              <a:rPr lang="en-US" sz="1200" dirty="0">
+              <a:rPr lang="en-US" sz="850" dirty="0">
                 <a:solidFill>
                   <a:srgbClr val="AFC3D4"/>
                 </a:solidFill>
@@ -10320,7 +10320,7 @@
               </a:rPr>
               <a:t>看到測距一定要追問：對百分之幾反射率量的。170 公尺和 90 公尺是兩個世界。</a:t>
             </a:r>
-            <a:endParaRPr lang="en-US" sz="1350" dirty="0"/>
+            <a:endParaRPr lang="en-US" sz="960" dirty="0"/>
           </a:p>
         </p:txBody>
       </p:sp>
@@ -10332,8 +10332,8 @@
         </p:nvSpPr>
         <p:spPr>
           <a:xfrm>
-            <a:off x="109728" y="4791456"/>
-            <a:ext cx="822960" cy="256032"/>
+            <a:off x="1402536" y="3390800"/>
+            <a:ext cx="584532" cy="181855"/>
           </a:xfrm>
           <a:prstGeom prst="rect">
             <a:avLst/>
@@ -10349,7 +10349,7 @@
               <a:buNone/>
             </a:pPr>
             <a:r>
-              <a:rPr lang="en-US" sz="900" dirty="0">
+              <a:rPr lang="en-US" sz="640" dirty="0">
                 <a:solidFill>
                   <a:srgbClr val="9FB3C8"/>
                 </a:solidFill>
@@ -10359,7 +10359,7 @@
               </a:rPr>
               <a:t>14 / 14</a:t>
             </a:r>
-            <a:endParaRPr lang="en-US" sz="900" dirty="0"/>
+            <a:endParaRPr lang="en-US" sz="640" dirty="0"/>
           </a:p>
         </p:txBody>
       </p:sp>
@@ -10371,8 +10371,8 @@
         </p:nvSpPr>
         <p:spPr>
           <a:xfrm>
-            <a:off x="960120" y="4791456"/>
-            <a:ext cx="2011680" cy="256032"/>
+            <a:off x="2006553" y="3390800"/>
+            <a:ext cx="1428857" cy="181855"/>
           </a:xfrm>
           <a:prstGeom prst="rect">
             <a:avLst/>
@@ -10388,7 +10388,7 @@
               <a:buNone/>
             </a:pPr>
             <a:r>
-              <a:rPr lang="en-US" sz="900" dirty="0">
+              <a:rPr lang="en-US" sz="640" dirty="0">
                 <a:solidFill>
                   <a:srgbClr val="9FB3C8"/>
                 </a:solidFill>
@@ -10398,7 +10398,7 @@
               </a:rPr>
               <a:t>Tiết 1 · 第 1 節</a:t>
             </a:r>
-            <a:endParaRPr lang="en-US" sz="900" dirty="0"/>
+            <a:endParaRPr lang="en-US" sz="640" dirty="0"/>
           </a:p>
         </p:txBody>
       </p:sp>
@@ -10435,8 +10435,8 @@
         </p:nvSpPr>
         <p:spPr>
           <a:xfrm>
-            <a:off x="502920" y="292608"/>
-            <a:ext cx="8138160" cy="841248"/>
+            <a:off x="1681812" y="234326"/>
+            <a:ext cx="5780375" cy="597522"/>
           </a:xfrm>
           <a:prstGeom prst="rect">
             <a:avLst/>
@@ -10455,7 +10455,7 @@
               <a:buNone/>
             </a:pPr>
             <a:r>
-              <a:rPr lang="en-US" sz="2200" b="1" dirty="0">
+              <a:rPr lang="en-US" sz="1560" b="1" dirty="0">
                 <a:solidFill>
                   <a:srgbClr val="0B1F3A"/>
                 </a:solidFill>
@@ -10465,7 +10465,7 @@
               </a:rPr>
               <a:t>Mở bàn đọc thông số</a:t>
             </a:r>
-            <a:endParaRPr lang="en-US" sz="2200" dirty="0"/>
+            <a:endParaRPr lang="en-US" sz="1560" dirty="0"/>
           </a:p>
           <a:p>
             <a:pPr indent="0" marL="0">
@@ -10475,7 +10475,7 @@
               <a:buNone/>
             </a:pPr>
             <a:r>
-              <a:rPr lang="en-US" sz="1350" dirty="0">
+              <a:rPr lang="en-US" sz="960" dirty="0">
                 <a:solidFill>
                   <a:srgbClr val="5F7183"/>
                 </a:solidFill>
@@ -10485,7 +10485,7 @@
               </a:rPr>
               <a:t>打開規格判讀台</a:t>
             </a:r>
-            <a:endParaRPr lang="en-US" sz="2200" dirty="0"/>
+            <a:endParaRPr lang="en-US" sz="1560" dirty="0"/>
           </a:p>
         </p:txBody>
       </p:sp>
@@ -10497,8 +10497,8 @@
         </p:nvSpPr>
         <p:spPr>
           <a:xfrm>
-            <a:off x="6364224" y="1133856"/>
-            <a:ext cx="2404872" cy="2624328"/>
+            <a:off x="5844982" y="831848"/>
+            <a:ext cx="1708133" cy="1864009"/>
           </a:xfrm>
           <a:prstGeom prst="roundRect">
             <a:avLst>
@@ -10532,8 +10532,8 @@
         </p:blipFill>
         <p:spPr>
           <a:xfrm>
-            <a:off x="6492240" y="1243584"/>
-            <a:ext cx="2148840" cy="2148840"/>
+            <a:off x="5935909" y="909785"/>
+            <a:ext cx="1526279" cy="1526279"/>
           </a:xfrm>
           <a:prstGeom prst="rect">
             <a:avLst/>
@@ -10548,8 +10548,8 @@
         </p:nvSpPr>
         <p:spPr>
           <a:xfrm>
-            <a:off x="6400800" y="3429000"/>
-            <a:ext cx="2331720" cy="310896"/>
+            <a:off x="5870961" y="2462043"/>
+            <a:ext cx="1656175" cy="220823"/>
           </a:xfrm>
           <a:prstGeom prst="rect">
             <a:avLst/>
@@ -10568,7 +10568,7 @@
               <a:buNone/>
             </a:pPr>
             <a:r>
-              <a:rPr lang="en-US" sz="1050" b="1" dirty="0">
+              <a:rPr lang="en-US" sz="750" b="1" dirty="0">
                 <a:solidFill>
                   <a:srgbClr val="5F7183"/>
                 </a:solidFill>
@@ -10578,7 +10578,7 @@
               </a:rPr>
               <a:t>Quét mã QR bằng camera điện thoại</a:t>
             </a:r>
-            <a:endParaRPr lang="en-US" sz="1050" dirty="0"/>
+            <a:endParaRPr lang="en-US" sz="750" dirty="0"/>
           </a:p>
           <a:p>
             <a:pPr algn="ctr" indent="0" marL="0">
@@ -10588,7 +10588,7 @@
               <a:buNone/>
             </a:pPr>
             <a:r>
-              <a:rPr lang="en-US" sz="950" dirty="0">
+              <a:rPr lang="en-US" sz="670" dirty="0">
                 <a:solidFill>
                   <a:srgbClr val="5F7183"/>
                 </a:solidFill>
@@ -10598,7 +10598,7 @@
               </a:rPr>
               <a:t>用手機相機掃這個 QR</a:t>
             </a:r>
-            <a:endParaRPr lang="en-US" sz="1050" dirty="0"/>
+            <a:endParaRPr lang="en-US" sz="750" dirty="0"/>
           </a:p>
         </p:txBody>
       </p:sp>
@@ -10610,8 +10610,8 @@
         </p:nvSpPr>
         <p:spPr>
           <a:xfrm>
-            <a:off x="502920" y="1133856"/>
-            <a:ext cx="5678424" cy="841248"/>
+            <a:off x="1681812" y="831848"/>
+            <a:ext cx="4033273" cy="597522"/>
           </a:xfrm>
           <a:prstGeom prst="roundRect">
             <a:avLst>
@@ -10632,8 +10632,8 @@
         </p:nvSpPr>
         <p:spPr>
           <a:xfrm>
-            <a:off x="649224" y="1225296"/>
-            <a:ext cx="5385816" cy="658368"/>
+            <a:off x="1785729" y="896796"/>
+            <a:ext cx="3825439" cy="467626"/>
           </a:xfrm>
           <a:prstGeom prst="rect">
             <a:avLst/>
@@ -10649,7 +10649,7 @@
               <a:buNone/>
             </a:pPr>
             <a:r>
-              <a:rPr lang="en-US" sz="1250" b="1" dirty="0">
+              <a:rPr lang="en-US" sz="890" b="1" dirty="0">
                 <a:solidFill>
                   <a:srgbClr val="FFFFFF"/>
                 </a:solidFill>
@@ -10659,14 +10659,14 @@
               </a:rPr>
               <a:t>https://ch-neural.github.io/</a:t>
             </a:r>
-            <a:endParaRPr lang="en-US" sz="1250" dirty="0"/>
+            <a:endParaRPr lang="en-US" sz="890" dirty="0"/>
           </a:p>
           <a:p>
             <a:pPr algn="ctr" indent="0" marL="0">
               <a:buNone/>
             </a:pPr>
             <a:r>
-              <a:rPr lang="en-US" sz="1250" b="1" dirty="0">
+              <a:rPr lang="en-US" sz="890" b="1" dirty="0">
                 <a:solidFill>
                   <a:srgbClr val="FFFFFF"/>
                 </a:solidFill>
@@ -10676,7 +10676,7 @@
               </a:rPr>
               <a:t>MITUST-Principles-of-Self-Driving-Cars/week5/spec/</a:t>
             </a:r>
-            <a:endParaRPr lang="en-US" sz="1250" dirty="0"/>
+            <a:endParaRPr lang="en-US" sz="890" dirty="0"/>
           </a:p>
         </p:txBody>
       </p:sp>
@@ -10688,8 +10688,8 @@
         </p:nvSpPr>
         <p:spPr>
           <a:xfrm>
-            <a:off x="539496" y="2157984"/>
-            <a:ext cx="292608" cy="292608"/>
+            <a:off x="1707792" y="1559266"/>
+            <a:ext cx="207834" cy="207834"/>
           </a:xfrm>
           <a:prstGeom prst="ellipse">
             <a:avLst/>
@@ -10708,8 +10708,8 @@
         </p:nvSpPr>
         <p:spPr>
           <a:xfrm>
-            <a:off x="539496" y="2167128"/>
-            <a:ext cx="292608" cy="274320"/>
+            <a:off x="1707792" y="1565760"/>
+            <a:ext cx="207834" cy="194844"/>
           </a:xfrm>
           <a:prstGeom prst="rect">
             <a:avLst/>
@@ -10725,7 +10725,7 @@
               <a:buNone/>
             </a:pPr>
             <a:r>
-              <a:rPr lang="en-US" sz="1100" b="1" dirty="0">
+              <a:rPr lang="en-US" sz="780" b="1" dirty="0">
                 <a:solidFill>
                   <a:srgbClr val="FFFFFF"/>
                 </a:solidFill>
@@ -10735,7 +10735,7 @@
               </a:rPr>
               <a:t>1</a:t>
             </a:r>
-            <a:endParaRPr lang="en-US" sz="1100" dirty="0"/>
+            <a:endParaRPr lang="en-US" sz="780" dirty="0"/>
           </a:p>
         </p:txBody>
       </p:sp>
@@ -10747,8 +10747,8 @@
         </p:nvSpPr>
         <p:spPr>
           <a:xfrm>
-            <a:off x="941832" y="2121408"/>
-            <a:ext cx="5166360" cy="457200"/>
+            <a:off x="1993563" y="1533286"/>
+            <a:ext cx="3669564" cy="324740"/>
           </a:xfrm>
           <a:prstGeom prst="rect">
             <a:avLst/>
@@ -10767,7 +10767,7 @@
               <a:buNone/>
             </a:pPr>
             <a:r>
-              <a:rPr lang="en-US" sz="1150" b="1" dirty="0">
+              <a:rPr lang="en-US" sz="820" b="1" dirty="0">
                 <a:solidFill>
                   <a:srgbClr val="1A2733"/>
                 </a:solidFill>
@@ -10777,7 +10777,7 @@
               </a:rPr>
               <a:t>Bốn model: ba cái là hàng thật, một cái là model ảo để so sánh giá rẻ</a:t>
             </a:r>
-            <a:endParaRPr lang="en-US" sz="1150" dirty="0"/>
+            <a:endParaRPr lang="en-US" sz="820" dirty="0"/>
           </a:p>
           <a:p>
             <a:pPr indent="0" marL="0">
@@ -10787,7 +10787,7 @@
               <a:buNone/>
             </a:pPr>
             <a:r>
-              <a:rPr lang="en-US" sz="1050" dirty="0">
+              <a:rPr lang="en-US" sz="750" dirty="0">
                 <a:solidFill>
                   <a:srgbClr val="5F7183"/>
                 </a:solidFill>
@@ -10797,7 +10797,7 @@
               </a:rPr>
               <a:t>四個型號：三個是真的產品，一個是便宜的教學用型號，拿來比較</a:t>
             </a:r>
-            <a:endParaRPr lang="en-US" sz="1150" dirty="0"/>
+            <a:endParaRPr lang="en-US" sz="820" dirty="0"/>
           </a:p>
         </p:txBody>
       </p:sp>
@@ -10809,8 +10809,8 @@
         </p:nvSpPr>
         <p:spPr>
           <a:xfrm>
-            <a:off x="539496" y="2651760"/>
-            <a:ext cx="292608" cy="292608"/>
+            <a:off x="1707792" y="1909985"/>
+            <a:ext cx="207834" cy="207834"/>
           </a:xfrm>
           <a:prstGeom prst="ellipse">
             <a:avLst/>
@@ -10829,8 +10829,8 @@
         </p:nvSpPr>
         <p:spPr>
           <a:xfrm>
-            <a:off x="539496" y="2660904"/>
-            <a:ext cx="292608" cy="274320"/>
+            <a:off x="1707792" y="1916480"/>
+            <a:ext cx="207834" cy="194844"/>
           </a:xfrm>
           <a:prstGeom prst="rect">
             <a:avLst/>
@@ -10846,7 +10846,7 @@
               <a:buNone/>
             </a:pPr>
             <a:r>
-              <a:rPr lang="en-US" sz="1100" b="1" dirty="0">
+              <a:rPr lang="en-US" sz="780" b="1" dirty="0">
                 <a:solidFill>
                   <a:srgbClr val="FFFFFF"/>
                 </a:solidFill>
@@ -10856,7 +10856,7 @@
               </a:rPr>
               <a:t>2</a:t>
             </a:r>
-            <a:endParaRPr lang="en-US" sz="1100" dirty="0"/>
+            <a:endParaRPr lang="en-US" sz="780" dirty="0"/>
           </a:p>
         </p:txBody>
       </p:sp>
@@ -10868,8 +10868,8 @@
         </p:nvSpPr>
         <p:spPr>
           <a:xfrm>
-            <a:off x="941832" y="2615184"/>
-            <a:ext cx="5166360" cy="457200"/>
+            <a:off x="1993563" y="1884006"/>
+            <a:ext cx="3669564" cy="324740"/>
           </a:xfrm>
           <a:prstGeom prst="rect">
             <a:avLst/>
@@ -10888,7 +10888,7 @@
               <a:buNone/>
             </a:pPr>
             <a:r>
-              <a:rPr lang="en-US" sz="1150" b="1" dirty="0">
+              <a:rPr lang="en-US" sz="820" b="1" dirty="0">
                 <a:solidFill>
                   <a:srgbClr val="1A2733"/>
                 </a:solidFill>
@@ -10898,7 +10898,7 @@
               </a:rPr>
               <a:t>Có nút «chỉ tiếng Anh»: bảng thông số thật thì không có bản dịch</a:t>
             </a:r>
-            <a:endParaRPr lang="en-US" sz="1150" dirty="0"/>
+            <a:endParaRPr lang="en-US" sz="820" dirty="0"/>
           </a:p>
           <a:p>
             <a:pPr indent="0" marL="0">
@@ -10908,7 +10908,7 @@
               <a:buNone/>
             </a:pPr>
             <a:r>
-              <a:rPr lang="en-US" sz="1050" dirty="0">
+              <a:rPr lang="en-US" sz="750" dirty="0">
                 <a:solidFill>
                   <a:srgbClr val="5F7183"/>
                 </a:solidFill>
@@ -10918,7 +10918,7 @@
               </a:rPr>
               <a:t>有一個「只看英文原文」的按鈕：真的規格表上是不會有翻譯的</a:t>
             </a:r>
-            <a:endParaRPr lang="en-US" sz="1150" dirty="0"/>
+            <a:endParaRPr lang="en-US" sz="820" dirty="0"/>
           </a:p>
         </p:txBody>
       </p:sp>
@@ -10930,8 +10930,8 @@
         </p:nvSpPr>
         <p:spPr>
           <a:xfrm>
-            <a:off x="539496" y="3145536"/>
-            <a:ext cx="292608" cy="292608"/>
+            <a:off x="1707792" y="2260704"/>
+            <a:ext cx="207834" cy="207834"/>
           </a:xfrm>
           <a:prstGeom prst="ellipse">
             <a:avLst/>
@@ -10950,8 +10950,8 @@
         </p:nvSpPr>
         <p:spPr>
           <a:xfrm>
-            <a:off x="539496" y="3154680"/>
-            <a:ext cx="292608" cy="274320"/>
+            <a:off x="1707792" y="2267199"/>
+            <a:ext cx="207834" cy="194844"/>
           </a:xfrm>
           <a:prstGeom prst="rect">
             <a:avLst/>
@@ -10967,7 +10967,7 @@
               <a:buNone/>
             </a:pPr>
             <a:r>
-              <a:rPr lang="en-US" sz="1100" b="1" dirty="0">
+              <a:rPr lang="en-US" sz="780" b="1" dirty="0">
                 <a:solidFill>
                   <a:srgbClr val="FFFFFF"/>
                 </a:solidFill>
@@ -10977,7 +10977,7 @@
               </a:rPr>
               <a:t>3</a:t>
             </a:r>
-            <a:endParaRPr lang="en-US" sz="1100" dirty="0"/>
+            <a:endParaRPr lang="en-US" sz="780" dirty="0"/>
           </a:p>
         </p:txBody>
       </p:sp>
@@ -10989,8 +10989,8 @@
         </p:nvSpPr>
         <p:spPr>
           <a:xfrm>
-            <a:off x="941832" y="3108960"/>
-            <a:ext cx="5166360" cy="457200"/>
+            <a:off x="1993563" y="2234725"/>
+            <a:ext cx="3669564" cy="324740"/>
           </a:xfrm>
           <a:prstGeom prst="rect">
             <a:avLst/>
@@ -11009,7 +11009,7 @@
               <a:buNone/>
             </a:pPr>
             <a:r>
-              <a:rPr lang="en-US" sz="1150" b="1" dirty="0">
+              <a:rPr lang="en-US" sz="820" b="1" dirty="0">
                 <a:solidFill>
                   <a:srgbClr val="1A2733"/>
                 </a:solidFill>
@@ -11019,7 +11019,7 @@
               </a:rPr>
               <a:t>Tiết 3 sẽ dùng suốt 50 phút, mỗi người tự làm và nộp</a:t>
             </a:r>
-            <a:endParaRPr lang="en-US" sz="1150" dirty="0"/>
+            <a:endParaRPr lang="en-US" sz="820" dirty="0"/>
           </a:p>
           <a:p>
             <a:pPr indent="0" marL="0">
@@ -11029,7 +11029,7 @@
               <a:buNone/>
             </a:pPr>
             <a:r>
-              <a:rPr lang="en-US" sz="1050" dirty="0">
+              <a:rPr lang="en-US" sz="750" dirty="0">
                 <a:solidFill>
                   <a:srgbClr val="5F7183"/>
                 </a:solidFill>
@@ -11039,7 +11039,7 @@
               </a:rPr>
               <a:t>第三節整節都會用它，而且是每個人自己做、自己交</a:t>
             </a:r>
-            <a:endParaRPr lang="en-US" sz="1150" dirty="0"/>
+            <a:endParaRPr lang="en-US" sz="820" dirty="0"/>
           </a:p>
         </p:txBody>
       </p:sp>
@@ -11051,8 +11051,8 @@
         </p:nvSpPr>
         <p:spPr>
           <a:xfrm>
-            <a:off x="502920" y="3913632"/>
-            <a:ext cx="8138160" cy="603504"/>
+            <a:off x="1681812" y="2806268"/>
+            <a:ext cx="5780375" cy="428657"/>
           </a:xfrm>
           <a:prstGeom prst="roundRect">
             <a:avLst>
@@ -11078,8 +11078,8 @@
         </p:nvSpPr>
         <p:spPr>
           <a:xfrm>
-            <a:off x="685800" y="3977640"/>
-            <a:ext cx="7772400" cy="493776"/>
+            <a:off x="1811708" y="2851732"/>
+            <a:ext cx="5520583" cy="350719"/>
           </a:xfrm>
           <a:prstGeom prst="rect">
             <a:avLst/>
@@ -11098,7 +11098,7 @@
               <a:buNone/>
             </a:pPr>
             <a:r>
-              <a:rPr lang="en-US" sz="1200" b="1" dirty="0">
+              <a:rPr lang="en-US" sz="850" b="1" dirty="0">
                 <a:solidFill>
                   <a:srgbClr val="7A4E00"/>
                 </a:solidFill>
@@ -11108,7 +11108,7 @@
               </a:rPr>
               <a:t>Mở xong bấm thử từng model một lượt cho quen.</a:t>
             </a:r>
-            <a:endParaRPr lang="en-US" sz="1200" dirty="0"/>
+            <a:endParaRPr lang="en-US" sz="850" dirty="0"/>
           </a:p>
           <a:p>
             <a:pPr indent="0" marL="0">
@@ -11118,7 +11118,7 @@
               <a:buNone/>
             </a:pPr>
             <a:r>
-              <a:rPr lang="en-US" sz="1100" dirty="0">
+              <a:rPr lang="en-US" sz="780" dirty="0">
                 <a:solidFill>
                   <a:srgbClr val="7A4E00"/>
                 </a:solidFill>
@@ -11128,7 +11128,7 @@
               </a:rPr>
               <a:t>打開之後先把四個型號各按一次，熟悉一下畫面。</a:t>
             </a:r>
-            <a:endParaRPr lang="en-US" sz="1200" dirty="0"/>
+            <a:endParaRPr lang="en-US" sz="850" dirty="0"/>
           </a:p>
         </p:txBody>
       </p:sp>
@@ -11148,8 +11148,8 @@
         </p:blipFill>
         <p:spPr>
           <a:xfrm>
-            <a:off x="7516368" y="4718304"/>
-            <a:ext cx="1097280" cy="242439"/>
+            <a:off x="6663327" y="3338842"/>
+            <a:ext cx="779376" cy="172200"/>
           </a:xfrm>
           <a:prstGeom prst="rect">
             <a:avLst/>
@@ -11164,8 +11164,8 @@
         </p:nvSpPr>
         <p:spPr>
           <a:xfrm>
-            <a:off x="109728" y="4791456"/>
-            <a:ext cx="822960" cy="256032"/>
+            <a:off x="1402536" y="3390800"/>
+            <a:ext cx="584532" cy="181855"/>
           </a:xfrm>
           <a:prstGeom prst="rect">
             <a:avLst/>
@@ -11181,7 +11181,7 @@
               <a:buNone/>
             </a:pPr>
             <a:r>
-              <a:rPr lang="en-US" sz="900" dirty="0">
+              <a:rPr lang="en-US" sz="640" dirty="0">
                 <a:solidFill>
                   <a:srgbClr val="5F7183"/>
                 </a:solidFill>
@@ -11191,7 +11191,7 @@
               </a:rPr>
               <a:t>2 / 14</a:t>
             </a:r>
-            <a:endParaRPr lang="en-US" sz="900" dirty="0"/>
+            <a:endParaRPr lang="en-US" sz="640" dirty="0"/>
           </a:p>
         </p:txBody>
       </p:sp>
@@ -11203,8 +11203,8 @@
         </p:nvSpPr>
         <p:spPr>
           <a:xfrm>
-            <a:off x="960120" y="4791456"/>
-            <a:ext cx="2011680" cy="256032"/>
+            <a:off x="2006553" y="3390800"/>
+            <a:ext cx="1428857" cy="181855"/>
           </a:xfrm>
           <a:prstGeom prst="rect">
             <a:avLst/>
@@ -11220,7 +11220,7 @@
               <a:buNone/>
             </a:pPr>
             <a:r>
-              <a:rPr lang="en-US" sz="900" dirty="0">
+              <a:rPr lang="en-US" sz="640" dirty="0">
                 <a:solidFill>
                   <a:srgbClr val="5F7183"/>
                 </a:solidFill>
@@ -11230,7 +11230,7 @@
               </a:rPr>
               <a:t>Tiết 1 · 第 1 節</a:t>
             </a:r>
-            <a:endParaRPr lang="en-US" sz="900" dirty="0"/>
+            <a:endParaRPr lang="en-US" sz="640" dirty="0"/>
           </a:p>
         </p:txBody>
       </p:sp>
@@ -11274,8 +11274,8 @@
         </p:nvSpPr>
         <p:spPr>
           <a:xfrm>
-            <a:off x="6766560" y="-1371600"/>
-            <a:ext cx="4206240" cy="4206240"/>
+            <a:off x="6130753" y="-947729"/>
+            <a:ext cx="2987610" cy="2987610"/>
           </a:xfrm>
           <a:prstGeom prst="ellipse">
             <a:avLst/>
@@ -11299,8 +11299,8 @@
         </p:nvSpPr>
         <p:spPr>
           <a:xfrm>
-            <a:off x="7863840" y="3108960"/>
-            <a:ext cx="2560320" cy="2560320"/>
+            <a:off x="7104973" y="1520297"/>
+            <a:ext cx="1688649" cy="1688649"/>
           </a:xfrm>
           <a:prstGeom prst="ellipse">
             <a:avLst/>
@@ -11321,8 +11321,8 @@
         </p:nvSpPr>
         <p:spPr>
           <a:xfrm>
-            <a:off x="502920" y="1691640"/>
-            <a:ext cx="4572000" cy="310896"/>
+            <a:off x="1681812" y="1228031"/>
+            <a:ext cx="3247402" cy="220823"/>
           </a:xfrm>
           <a:prstGeom prst="rect">
             <a:avLst/>
@@ -11338,7 +11338,7 @@
               <a:buNone/>
             </a:pPr>
             <a:r>
-              <a:rPr lang="en-US" sz="1350" b="1" dirty="0">
+              <a:rPr lang="en-US" sz="960" b="1" dirty="0">
                 <a:solidFill>
                   <a:srgbClr val="FFB020"/>
                 </a:solidFill>
@@ -11348,7 +11348,7 @@
               </a:rPr>
               <a:t>Phần 1 / 3</a:t>
             </a:r>
-            <a:endParaRPr lang="en-US" sz="1350" dirty="0"/>
+            <a:endParaRPr lang="en-US" sz="960" dirty="0"/>
           </a:p>
         </p:txBody>
       </p:sp>
@@ -11360,8 +11360,8 @@
         </p:nvSpPr>
         <p:spPr>
           <a:xfrm>
-            <a:off x="502920" y="2048256"/>
-            <a:ext cx="7315200" cy="1188720"/>
+            <a:off x="1681812" y="1481328"/>
+            <a:ext cx="5195843" cy="844324"/>
           </a:xfrm>
           <a:prstGeom prst="rect">
             <a:avLst/>
@@ -11380,7 +11380,7 @@
               <a:buNone/>
             </a:pPr>
             <a:r>
-              <a:rPr lang="en-US" sz="2900" b="1" dirty="0">
+              <a:rPr lang="en-US" sz="2060" b="1" dirty="0">
                 <a:solidFill>
                   <a:srgbClr val="FFFFFF"/>
                 </a:solidFill>
@@ -11390,7 +11390,7 @@
               </a:rPr>
               <a:t>Ba thanh trượt của tuần trước, nằm ở đâu trên datasheet</a:t>
             </a:r>
-            <a:endParaRPr lang="en-US" sz="2900" dirty="0"/>
+            <a:endParaRPr lang="en-US" sz="2060" dirty="0"/>
           </a:p>
           <a:p>
             <a:pPr indent="0" marL="0">
@@ -11400,7 +11400,7 @@
               <a:buNone/>
             </a:pPr>
             <a:r>
-              <a:rPr lang="en-US" sz="1700" dirty="0">
+              <a:rPr lang="en-US" sz="1210" dirty="0">
                 <a:solidFill>
                   <a:srgbClr val="AFC3D4"/>
                 </a:solidFill>
@@ -11410,7 +11410,7 @@
               </a:rPr>
               <a:t>上週那三個滑桿，在規格表的哪一行</a:t>
             </a:r>
-            <a:endParaRPr lang="en-US" sz="2900" dirty="0"/>
+            <a:endParaRPr lang="en-US" sz="2060" dirty="0"/>
           </a:p>
         </p:txBody>
       </p:sp>
@@ -11422,8 +11422,8 @@
         </p:nvSpPr>
         <p:spPr>
           <a:xfrm>
-            <a:off x="502920" y="3346704"/>
-            <a:ext cx="7315200" cy="640080"/>
+            <a:off x="1681812" y="2403590"/>
+            <a:ext cx="5195843" cy="454636"/>
           </a:xfrm>
           <a:prstGeom prst="rect">
             <a:avLst/>
@@ -11442,7 +11442,7 @@
               <a:buNone/>
             </a:pPr>
             <a:r>
-              <a:rPr lang="en-US" sz="1350" dirty="0">
+              <a:rPr lang="en-US" sz="960" dirty="0">
                 <a:solidFill>
                   <a:srgbClr val="AFC3D4"/>
                 </a:solidFill>
@@ -11452,7 +11452,7 @@
               </a:rPr>
               <a:t>Số tia · chiều dài tia · góc quét</a:t>
             </a:r>
-            <a:endParaRPr lang="en-US" sz="1350" dirty="0"/>
+            <a:endParaRPr lang="en-US" sz="960" dirty="0"/>
           </a:p>
           <a:p>
             <a:pPr indent="0" marL="0">
@@ -11462,7 +11462,7 @@
               <a:buNone/>
             </a:pPr>
             <a:r>
-              <a:rPr lang="en-US" sz="1200" dirty="0">
+              <a:rPr lang="en-US" sz="850" dirty="0">
                 <a:solidFill>
                   <a:srgbClr val="8AA0B4"/>
                 </a:solidFill>
@@ -11472,7 +11472,7 @@
               </a:rPr>
               <a:t>射線數・射線長度・張角</a:t>
             </a:r>
-            <a:endParaRPr lang="en-US" sz="1350" dirty="0"/>
+            <a:endParaRPr lang="en-US" sz="960" dirty="0"/>
           </a:p>
         </p:txBody>
       </p:sp>
@@ -11484,8 +11484,8 @@
         </p:nvSpPr>
         <p:spPr>
           <a:xfrm>
-            <a:off x="109728" y="4791456"/>
-            <a:ext cx="822960" cy="256032"/>
+            <a:off x="1402536" y="3390800"/>
+            <a:ext cx="584532" cy="181855"/>
           </a:xfrm>
           <a:prstGeom prst="rect">
             <a:avLst/>
@@ -11501,7 +11501,7 @@
               <a:buNone/>
             </a:pPr>
             <a:r>
-              <a:rPr lang="en-US" sz="900" dirty="0">
+              <a:rPr lang="en-US" sz="640" dirty="0">
                 <a:solidFill>
                   <a:srgbClr val="9FB3C8"/>
                 </a:solidFill>
@@ -11511,7 +11511,7 @@
               </a:rPr>
               <a:t>3 / 14</a:t>
             </a:r>
-            <a:endParaRPr lang="en-US" sz="900" dirty="0"/>
+            <a:endParaRPr lang="en-US" sz="640" dirty="0"/>
           </a:p>
         </p:txBody>
       </p:sp>
@@ -11523,8 +11523,8 @@
         </p:nvSpPr>
         <p:spPr>
           <a:xfrm>
-            <a:off x="960120" y="4791456"/>
-            <a:ext cx="2011680" cy="256032"/>
+            <a:off x="2006553" y="3390800"/>
+            <a:ext cx="1428857" cy="181855"/>
           </a:xfrm>
           <a:prstGeom prst="rect">
             <a:avLst/>
@@ -11540,7 +11540,7 @@
               <a:buNone/>
             </a:pPr>
             <a:r>
-              <a:rPr lang="en-US" sz="900" dirty="0">
+              <a:rPr lang="en-US" sz="640" dirty="0">
                 <a:solidFill>
                   <a:srgbClr val="9FB3C8"/>
                 </a:solidFill>
@@ -11550,7 +11550,7 @@
               </a:rPr>
               <a:t>Tiết 1 · 第 1 節</a:t>
             </a:r>
-            <a:endParaRPr lang="en-US" sz="900" dirty="0"/>
+            <a:endParaRPr lang="en-US" sz="640" dirty="0"/>
           </a:p>
         </p:txBody>
       </p:sp>
@@ -11587,8 +11587,8 @@
         </p:nvSpPr>
         <p:spPr>
           <a:xfrm>
-            <a:off x="502920" y="365760"/>
-            <a:ext cx="8138160" cy="274320"/>
+            <a:off x="1681812" y="286284"/>
+            <a:ext cx="5780375" cy="194844"/>
           </a:xfrm>
           <a:prstGeom prst="rect">
             <a:avLst/>
@@ -11604,7 +11604,7 @@
               <a:buNone/>
             </a:pPr>
             <a:r>
-              <a:rPr lang="en-US" sz="1300" b="1" dirty="0">
+              <a:rPr lang="en-US" sz="920" b="1" dirty="0">
                 <a:solidFill>
                   <a:srgbClr val="007F72"/>
                 </a:solidFill>
@@ -11614,7 +11614,7 @@
               </a:rPr>
               <a:t>1 / 2　Ouster OS1-64</a:t>
             </a:r>
-            <a:endParaRPr lang="en-US" sz="1300" dirty="0"/>
+            <a:endParaRPr lang="en-US" sz="920" dirty="0"/>
           </a:p>
         </p:txBody>
       </p:sp>
@@ -11626,8 +11626,8 @@
         </p:nvSpPr>
         <p:spPr>
           <a:xfrm>
-            <a:off x="502920" y="877824"/>
-            <a:ext cx="1481328" cy="1920240"/>
+            <a:off x="1681812" y="649993"/>
+            <a:ext cx="1052158" cy="1363909"/>
           </a:xfrm>
           <a:prstGeom prst="roundRect">
             <a:avLst>
@@ -11653,8 +11653,8 @@
         </p:nvSpPr>
         <p:spPr>
           <a:xfrm flipH="1" flipV="1">
-            <a:off x="610141" y="1806781"/>
-            <a:ext cx="269877" cy="155814"/>
+            <a:off x="1757969" y="1309813"/>
+            <a:ext cx="191689" cy="110671"/>
           </a:xfrm>
           <a:prstGeom prst="line">
             <a:avLst/>
@@ -11676,8 +11676,8 @@
         </p:nvSpPr>
         <p:spPr>
           <a:xfrm flipH="1" flipV="1">
-            <a:off x="679708" y="1723874"/>
-            <a:ext cx="200310" cy="238721"/>
+            <a:off x="1807382" y="1250926"/>
+            <a:ext cx="142276" cy="169559"/>
           </a:xfrm>
           <a:prstGeom prst="line">
             <a:avLst/>
@@ -11699,8 +11699,8 @@
         </p:nvSpPr>
         <p:spPr>
           <a:xfrm flipH="1" flipV="1">
-            <a:off x="773436" y="1669761"/>
-            <a:ext cx="106583" cy="292834"/>
+            <a:off x="1873954" y="1212490"/>
+            <a:ext cx="75704" cy="207994"/>
           </a:xfrm>
           <a:prstGeom prst="line">
             <a:avLst/>
@@ -11722,8 +11722,8 @@
         </p:nvSpPr>
         <p:spPr>
           <a:xfrm flipV="1">
-            <a:off x="880019" y="1650967"/>
-            <a:ext cx="0" cy="311628"/>
+            <a:off x="1949658" y="1199142"/>
+            <a:ext cx="0" cy="221343"/>
           </a:xfrm>
           <a:prstGeom prst="line">
             <a:avLst/>
@@ -11745,8 +11745,8 @@
         </p:nvSpPr>
         <p:spPr>
           <a:xfrm flipV="1">
-            <a:off x="880019" y="1669761"/>
-            <a:ext cx="106583" cy="292834"/>
+            <a:off x="1949658" y="1212490"/>
+            <a:ext cx="75704" cy="207994"/>
           </a:xfrm>
           <a:prstGeom prst="line">
             <a:avLst/>
@@ -11768,8 +11768,8 @@
         </p:nvSpPr>
         <p:spPr>
           <a:xfrm flipV="1">
-            <a:off x="880019" y="1723874"/>
-            <a:ext cx="200310" cy="238721"/>
+            <a:off x="1949658" y="1250926"/>
+            <a:ext cx="142276" cy="169559"/>
           </a:xfrm>
           <a:prstGeom prst="line">
             <a:avLst/>
@@ -11791,8 +11791,8 @@
         </p:nvSpPr>
         <p:spPr>
           <a:xfrm flipV="1">
-            <a:off x="880019" y="1806781"/>
-            <a:ext cx="269877" cy="155814"/>
+            <a:off x="1949658" y="1309813"/>
+            <a:ext cx="191689" cy="110671"/>
           </a:xfrm>
           <a:prstGeom prst="line">
             <a:avLst/>
@@ -11814,8 +11814,8 @@
         </p:nvSpPr>
         <p:spPr>
           <a:xfrm>
-            <a:off x="851453" y="1934029"/>
-            <a:ext cx="57132" cy="57132"/>
+            <a:off x="1929368" y="1400195"/>
+            <a:ext cx="40580" cy="40580"/>
           </a:xfrm>
           <a:prstGeom prst="ellipse">
             <a:avLst/>
@@ -11834,8 +11834,8 @@
         </p:nvSpPr>
         <p:spPr>
           <a:xfrm>
-            <a:off x="1399398" y="1630192"/>
-            <a:ext cx="415503" cy="415503"/>
+            <a:off x="2318563" y="1184386"/>
+            <a:ext cx="295124" cy="295124"/>
           </a:xfrm>
           <a:prstGeom prst="donut">
             <a:avLst/>
@@ -11856,8 +11856,8 @@
         </p:nvSpPr>
         <p:spPr>
           <a:xfrm>
-            <a:off x="1814901" y="1837944"/>
-            <a:ext cx="103876" cy="0"/>
+            <a:off x="2613687" y="1331948"/>
+            <a:ext cx="73781" cy="0"/>
           </a:xfrm>
           <a:prstGeom prst="line">
             <a:avLst/>
@@ -11879,8 +11879,8 @@
         </p:nvSpPr>
         <p:spPr>
           <a:xfrm>
-            <a:off x="1787068" y="1941820"/>
-            <a:ext cx="89959" cy="51938"/>
+            <a:off x="2593917" y="1405728"/>
+            <a:ext cx="63896" cy="36890"/>
           </a:xfrm>
           <a:prstGeom prst="line">
             <a:avLst/>
@@ -11902,8 +11902,8 @@
         </p:nvSpPr>
         <p:spPr>
           <a:xfrm>
-            <a:off x="1711025" y="2017862"/>
-            <a:ext cx="51938" cy="89959"/>
+            <a:off x="2539906" y="1459740"/>
+            <a:ext cx="36890" cy="63896"/>
           </a:xfrm>
           <a:prstGeom prst="line">
             <a:avLst/>
@@ -11925,8 +11925,8 @@
         </p:nvSpPr>
         <p:spPr>
           <a:xfrm>
-            <a:off x="1607149" y="2045696"/>
-            <a:ext cx="0" cy="103876"/>
+            <a:off x="2466125" y="1479509"/>
+            <a:ext cx="0" cy="73781"/>
           </a:xfrm>
           <a:prstGeom prst="line">
             <a:avLst/>
@@ -11948,8 +11948,8 @@
         </p:nvSpPr>
         <p:spPr>
           <a:xfrm flipH="1">
-            <a:off x="1451336" y="2017862"/>
-            <a:ext cx="51938" cy="89959"/>
+            <a:off x="2355453" y="1459740"/>
+            <a:ext cx="36890" cy="63896"/>
           </a:xfrm>
           <a:prstGeom prst="line">
             <a:avLst/>
@@ -11971,8 +11971,8 @@
         </p:nvSpPr>
         <p:spPr>
           <a:xfrm flipH="1">
-            <a:off x="1337272" y="1941820"/>
-            <a:ext cx="89959" cy="51938"/>
+            <a:off x="2274436" y="1405728"/>
+            <a:ext cx="63896" cy="36890"/>
           </a:xfrm>
           <a:prstGeom prst="line">
             <a:avLst/>
@@ -11994,8 +11994,8 @@
         </p:nvSpPr>
         <p:spPr>
           <a:xfrm flipH="1">
-            <a:off x="1295522" y="1837944"/>
-            <a:ext cx="103876" cy="0"/>
+            <a:off x="2244782" y="1331948"/>
+            <a:ext cx="73781" cy="0"/>
           </a:xfrm>
           <a:prstGeom prst="line">
             <a:avLst/>
@@ -12017,8 +12017,8 @@
         </p:nvSpPr>
         <p:spPr>
           <a:xfrm flipH="1" flipV="1">
-            <a:off x="1337272" y="1682130"/>
-            <a:ext cx="89959" cy="51938"/>
+            <a:off x="2274436" y="1221276"/>
+            <a:ext cx="63896" cy="36890"/>
           </a:xfrm>
           <a:prstGeom prst="line">
             <a:avLst/>
@@ -12040,8 +12040,8 @@
         </p:nvSpPr>
         <p:spPr>
           <a:xfrm flipH="1" flipV="1">
-            <a:off x="1451336" y="1568067"/>
-            <a:ext cx="51938" cy="89959"/>
+            <a:off x="2355453" y="1140259"/>
+            <a:ext cx="36890" cy="63896"/>
           </a:xfrm>
           <a:prstGeom prst="line">
             <a:avLst/>
@@ -12063,8 +12063,8 @@
         </p:nvSpPr>
         <p:spPr>
           <a:xfrm flipH="1" flipV="1">
-            <a:off x="1607149" y="1526316"/>
-            <a:ext cx="0" cy="103876"/>
+            <a:off x="2466125" y="1110605"/>
+            <a:ext cx="0" cy="73781"/>
           </a:xfrm>
           <a:prstGeom prst="line">
             <a:avLst/>
@@ -12086,8 +12086,8 @@
         </p:nvSpPr>
         <p:spPr>
           <a:xfrm flipV="1">
-            <a:off x="1711025" y="1568067"/>
-            <a:ext cx="51938" cy="89959"/>
+            <a:off x="2539906" y="1140259"/>
+            <a:ext cx="36890" cy="63896"/>
           </a:xfrm>
           <a:prstGeom prst="line">
             <a:avLst/>
@@ -12109,8 +12109,8 @@
         </p:nvSpPr>
         <p:spPr>
           <a:xfrm flipV="1">
-            <a:off x="1787068" y="1682130"/>
-            <a:ext cx="89959" cy="51938"/>
+            <a:off x="2593917" y="1221276"/>
+            <a:ext cx="63896" cy="36890"/>
           </a:xfrm>
           <a:prstGeom prst="line">
             <a:avLst/>
@@ -12132,8 +12132,8 @@
         </p:nvSpPr>
         <p:spPr>
           <a:xfrm>
-            <a:off x="1578584" y="1809378"/>
-            <a:ext cx="57132" cy="57132"/>
+            <a:off x="2445835" y="1311658"/>
+            <a:ext cx="40580" cy="40580"/>
           </a:xfrm>
           <a:prstGeom prst="ellipse">
             <a:avLst/>
@@ -12152,8 +12152,8 @@
         </p:nvSpPr>
         <p:spPr>
           <a:xfrm>
-            <a:off x="1191646" y="1786920"/>
-            <a:ext cx="103876" cy="102047"/>
+            <a:off x="2171001" y="1295707"/>
+            <a:ext cx="73781" cy="72482"/>
           </a:xfrm>
           <a:prstGeom prst="rightArrow">
             <a:avLst/>
@@ -12172,8 +12172,8 @@
         </p:nvSpPr>
         <p:spPr>
           <a:xfrm>
-            <a:off x="2295144" y="786384"/>
-            <a:ext cx="6345936" cy="522366"/>
+            <a:off x="2954794" y="585045"/>
+            <a:ext cx="4507394" cy="371026"/>
           </a:xfrm>
           <a:prstGeom prst="rect">
             <a:avLst/>
@@ -12192,7 +12192,7 @@
               <a:buNone/>
             </a:pPr>
             <a:r>
-              <a:rPr lang="en-US" sz="1800" b="1" dirty="0">
+              <a:rPr lang="en-US" sz="1280" b="1" dirty="0">
                 <a:solidFill>
                   <a:srgbClr val="0B1F3A"/>
                 </a:solidFill>
@@ -12202,7 +12202,7 @@
               </a:rPr>
               <a:t>Lidar quay 360°: rải điểm đều quanh xe</a:t>
             </a:r>
-            <a:endParaRPr lang="en-US" sz="1800" dirty="0"/>
+            <a:endParaRPr lang="en-US" sz="1280" dirty="0"/>
           </a:p>
           <a:p>
             <a:pPr indent="0" marL="0">
@@ -12212,7 +12212,7 @@
               <a:buNone/>
             </a:pPr>
             <a:r>
-              <a:rPr lang="en-US" sz="1250" dirty="0">
+              <a:rPr lang="en-US" sz="890" dirty="0">
                 <a:solidFill>
                   <a:srgbClr val="007F72"/>
                 </a:solidFill>
@@ -12222,7 +12222,7 @@
               </a:rPr>
               <a:t>旋轉式光達：點平均灑在車子周圍一整圈</a:t>
             </a:r>
-            <a:endParaRPr lang="en-US" sz="1800" dirty="0"/>
+            <a:endParaRPr lang="en-US" sz="1280" dirty="0"/>
           </a:p>
         </p:txBody>
       </p:sp>
@@ -12234,8 +12234,8 @@
         </p:nvSpPr>
         <p:spPr>
           <a:xfrm>
-            <a:off x="2295144" y="1400190"/>
-            <a:ext cx="1060704" cy="400118"/>
+            <a:off x="2954794" y="1021019"/>
+            <a:ext cx="753397" cy="284196"/>
           </a:xfrm>
           <a:prstGeom prst="roundRect">
             <a:avLst>
@@ -12256,8 +12256,8 @@
         </p:nvSpPr>
         <p:spPr>
           <a:xfrm>
-            <a:off x="2350008" y="1436766"/>
-            <a:ext cx="950976" cy="345254"/>
+            <a:off x="2993763" y="1046998"/>
+            <a:ext cx="675460" cy="245227"/>
           </a:xfrm>
           <a:prstGeom prst="rect">
             <a:avLst/>
@@ -12276,7 +12276,7 @@
               <a:buNone/>
             </a:pPr>
             <a:r>
-              <a:rPr lang="en-US" sz="900" b="1" dirty="0">
+              <a:rPr lang="en-US" sz="640" b="1" dirty="0">
                 <a:solidFill>
                   <a:srgbClr val="FFFFFF"/>
                 </a:solidFill>
@@ -12286,7 +12286,7 @@
               </a:rPr>
               <a:t>Số kênh</a:t>
             </a:r>
-            <a:endParaRPr lang="en-US" sz="900" dirty="0"/>
+            <a:endParaRPr lang="en-US" sz="640" dirty="0"/>
           </a:p>
           <a:p>
             <a:pPr algn="ctr" indent="0" marL="0">
@@ -12296,7 +12296,7 @@
               <a:buNone/>
             </a:pPr>
             <a:r>
-              <a:rPr lang="en-US" sz="850" dirty="0">
+              <a:rPr lang="en-US" sz="600" dirty="0">
                 <a:solidFill>
                   <a:srgbClr val="FFFFFF"/>
                 </a:solidFill>
@@ -12306,7 +12306,7 @@
               </a:rPr>
               <a:t>線束數</a:t>
             </a:r>
-            <a:endParaRPr lang="en-US" sz="900" dirty="0"/>
+            <a:endParaRPr lang="en-US" sz="640" dirty="0"/>
           </a:p>
         </p:txBody>
       </p:sp>
@@ -12318,8 +12318,8 @@
         </p:nvSpPr>
         <p:spPr>
           <a:xfrm>
-            <a:off x="3502152" y="1400190"/>
-            <a:ext cx="5138928" cy="454982"/>
+            <a:off x="3812108" y="1021019"/>
+            <a:ext cx="3650080" cy="323165"/>
           </a:xfrm>
           <a:prstGeom prst="rect">
             <a:avLst/>
@@ -12338,7 +12338,7 @@
               <a:buNone/>
             </a:pPr>
             <a:r>
-              <a:rPr lang="en-US" sz="1100" dirty="0">
+              <a:rPr lang="en-US" sz="780" dirty="0">
                 <a:solidFill>
                   <a:srgbClr val="1A2733"/>
                 </a:solidFill>
@@ -12348,7 +12348,7 @@
               </a:rPr>
               <a:t>32 / 64 / 128 channels — đây chính là thanh «số tia» của tuần trước</a:t>
             </a:r>
-            <a:endParaRPr lang="en-US" sz="1100" dirty="0"/>
+            <a:endParaRPr lang="en-US" sz="780" dirty="0"/>
           </a:p>
           <a:p>
             <a:pPr indent="0" marL="0">
@@ -12358,7 +12358,7 @@
               <a:buNone/>
             </a:pPr>
             <a:r>
-              <a:rPr lang="en-US" sz="1000" dirty="0">
+              <a:rPr lang="en-US" sz="710" dirty="0">
                 <a:solidFill>
                   <a:srgbClr val="5F7183"/>
                 </a:solidFill>
@@ -12368,7 +12368,7 @@
               </a:rPr>
               <a:t>32 / 64 / 128 channels——這就是上週那條「射線數」滑桿</a:t>
             </a:r>
-            <a:endParaRPr lang="en-US" sz="1100" dirty="0"/>
+            <a:endParaRPr lang="en-US" sz="780" dirty="0"/>
           </a:p>
         </p:txBody>
       </p:sp>
@@ -12380,8 +12380,8 @@
         </p:nvSpPr>
         <p:spPr>
           <a:xfrm>
-            <a:off x="2295144" y="1919180"/>
-            <a:ext cx="1060704" cy="400118"/>
+            <a:off x="2954794" y="1389648"/>
+            <a:ext cx="753397" cy="284196"/>
           </a:xfrm>
           <a:prstGeom prst="roundRect">
             <a:avLst>
@@ -12402,8 +12402,8 @@
         </p:nvSpPr>
         <p:spPr>
           <a:xfrm>
-            <a:off x="2350008" y="1955756"/>
-            <a:ext cx="950976" cy="345254"/>
+            <a:off x="2993763" y="1415627"/>
+            <a:ext cx="675460" cy="245227"/>
           </a:xfrm>
           <a:prstGeom prst="rect">
             <a:avLst/>
@@ -12422,7 +12422,7 @@
               <a:buNone/>
             </a:pPr>
             <a:r>
-              <a:rPr lang="en-US" sz="900" b="1" dirty="0">
+              <a:rPr lang="en-US" sz="640" b="1" dirty="0">
                 <a:solidFill>
                   <a:srgbClr val="FFFFFF"/>
                 </a:solidFill>
@@ -12432,7 +12432,7 @@
               </a:rPr>
               <a:t>Góc nhìn</a:t>
             </a:r>
-            <a:endParaRPr lang="en-US" sz="900" dirty="0"/>
+            <a:endParaRPr lang="en-US" sz="640" dirty="0"/>
           </a:p>
           <a:p>
             <a:pPr algn="ctr" indent="0" marL="0">
@@ -12442,7 +12442,7 @@
               <a:buNone/>
             </a:pPr>
             <a:r>
-              <a:rPr lang="en-US" sz="850" dirty="0">
+              <a:rPr lang="en-US" sz="600" dirty="0">
                 <a:solidFill>
                   <a:srgbClr val="FFFFFF"/>
                 </a:solidFill>
@@ -12452,7 +12452,7 @@
               </a:rPr>
               <a:t>視野</a:t>
             </a:r>
-            <a:endParaRPr lang="en-US" sz="900" dirty="0"/>
+            <a:endParaRPr lang="en-US" sz="640" dirty="0"/>
           </a:p>
         </p:txBody>
       </p:sp>
@@ -12464,8 +12464,8 @@
         </p:nvSpPr>
         <p:spPr>
           <a:xfrm>
-            <a:off x="3502152" y="1919180"/>
-            <a:ext cx="5138928" cy="635187"/>
+            <a:off x="3812108" y="1389648"/>
+            <a:ext cx="3650080" cy="451161"/>
           </a:xfrm>
           <a:prstGeom prst="rect">
             <a:avLst/>
@@ -12484,7 +12484,7 @@
               <a:buNone/>
             </a:pPr>
             <a:r>
-              <a:rPr lang="en-US" sz="1100" dirty="0">
+              <a:rPr lang="en-US" sz="780" dirty="0">
                 <a:solidFill>
                   <a:srgbClr val="1A2733"/>
                 </a:solidFill>
@@ -12494,7 +12494,7 @@
               </a:rPr>
               <a:t>Vertical 42.4°, Horizontal 360° — thanh «góc quét», nhưng nó quay cả vòng</a:t>
             </a:r>
-            <a:endParaRPr lang="en-US" sz="1100" dirty="0"/>
+            <a:endParaRPr lang="en-US" sz="780" dirty="0"/>
           </a:p>
           <a:p>
             <a:pPr indent="0" marL="0">
@@ -12504,7 +12504,7 @@
               <a:buNone/>
             </a:pPr>
             <a:r>
-              <a:rPr lang="en-US" sz="1000" dirty="0">
+              <a:rPr lang="en-US" sz="710" dirty="0">
                 <a:solidFill>
                   <a:srgbClr val="5F7183"/>
                 </a:solidFill>
@@ -12514,7 +12514,7 @@
               </a:rPr>
               <a:t>垂直 42.4°、水平 360°——就是「張角」，只是它轉一整圈</a:t>
             </a:r>
-            <a:endParaRPr lang="en-US" sz="1100" dirty="0"/>
+            <a:endParaRPr lang="en-US" sz="780" dirty="0"/>
           </a:p>
         </p:txBody>
       </p:sp>
@@ -12526,8 +12526,8 @@
         </p:nvSpPr>
         <p:spPr>
           <a:xfrm>
-            <a:off x="2295144" y="2618375"/>
-            <a:ext cx="1060704" cy="400118"/>
+            <a:off x="2954794" y="1886272"/>
+            <a:ext cx="753397" cy="284196"/>
           </a:xfrm>
           <a:prstGeom prst="roundRect">
             <a:avLst>
@@ -12548,8 +12548,8 @@
         </p:nvSpPr>
         <p:spPr>
           <a:xfrm>
-            <a:off x="2350008" y="2654951"/>
-            <a:ext cx="950976" cy="345254"/>
+            <a:off x="2993763" y="1912251"/>
+            <a:ext cx="675460" cy="245227"/>
           </a:xfrm>
           <a:prstGeom prst="rect">
             <a:avLst/>
@@ -12568,7 +12568,7 @@
               <a:buNone/>
             </a:pPr>
             <a:r>
-              <a:rPr lang="en-US" sz="900" b="1" dirty="0">
+              <a:rPr lang="en-US" sz="640" b="1" dirty="0">
                 <a:solidFill>
                   <a:srgbClr val="3A2A00"/>
                 </a:solidFill>
@@ -12578,7 +12578,7 @@
               </a:rPr>
               <a:t>Tầm đo</a:t>
             </a:r>
-            <a:endParaRPr lang="en-US" sz="900" dirty="0"/>
+            <a:endParaRPr lang="en-US" sz="640" dirty="0"/>
           </a:p>
           <a:p>
             <a:pPr algn="ctr" indent="0" marL="0">
@@ -12588,7 +12588,7 @@
               <a:buNone/>
             </a:pPr>
             <a:r>
-              <a:rPr lang="en-US" sz="850" dirty="0">
+              <a:rPr lang="en-US" sz="600" dirty="0">
                 <a:solidFill>
                   <a:srgbClr val="3A2A00"/>
                 </a:solidFill>
@@ -12598,7 +12598,7 @@
               </a:rPr>
               <a:t>測距</a:t>
             </a:r>
-            <a:endParaRPr lang="en-US" sz="900" dirty="0"/>
+            <a:endParaRPr lang="en-US" sz="640" dirty="0"/>
           </a:p>
         </p:txBody>
       </p:sp>
@@ -12610,8 +12610,8 @@
         </p:nvSpPr>
         <p:spPr>
           <a:xfrm>
-            <a:off x="3502152" y="2618375"/>
-            <a:ext cx="5138928" cy="454982"/>
+            <a:off x="3812108" y="1886272"/>
+            <a:ext cx="3650080" cy="323165"/>
           </a:xfrm>
           <a:prstGeom prst="rect">
             <a:avLst/>
@@ -12630,7 +12630,7 @@
               <a:buNone/>
             </a:pPr>
             <a:r>
-              <a:rPr lang="en-US" sz="1100" dirty="0">
+              <a:rPr lang="en-US" sz="780" dirty="0">
                 <a:solidFill>
                   <a:srgbClr val="1A2733"/>
                 </a:solidFill>
@@ -12640,7 +12640,7 @@
               </a:rPr>
               <a:t>90 m với vật phản xạ 10% — thanh «chiều dài tia»</a:t>
             </a:r>
-            <a:endParaRPr lang="en-US" sz="1100" dirty="0"/>
+            <a:endParaRPr lang="en-US" sz="780" dirty="0"/>
           </a:p>
           <a:p>
             <a:pPr indent="0" marL="0">
@@ -12650,7 +12650,7 @@
               <a:buNone/>
             </a:pPr>
             <a:r>
-              <a:rPr lang="en-US" sz="1000" dirty="0">
+              <a:rPr lang="en-US" sz="710" dirty="0">
                 <a:solidFill>
                   <a:srgbClr val="5F7183"/>
                 </a:solidFill>
@@ -12660,7 +12660,7 @@
               </a:rPr>
               <a:t>對 10% 反射率的目標 90 公尺——就是「射線長度」</a:t>
             </a:r>
-            <a:endParaRPr lang="en-US" sz="1100" dirty="0"/>
+            <a:endParaRPr lang="en-US" sz="780" dirty="0"/>
           </a:p>
         </p:txBody>
       </p:sp>
@@ -12672,8 +12672,8 @@
         </p:nvSpPr>
         <p:spPr>
           <a:xfrm>
-            <a:off x="502920" y="3931920"/>
-            <a:ext cx="8138160" cy="566928"/>
+            <a:off x="1681812" y="2819258"/>
+            <a:ext cx="5780375" cy="402678"/>
           </a:xfrm>
           <a:prstGeom prst="roundRect">
             <a:avLst>
@@ -12699,8 +12699,8 @@
         </p:nvSpPr>
         <p:spPr>
           <a:xfrm>
-            <a:off x="685800" y="3995928"/>
-            <a:ext cx="7772400" cy="457200"/>
+            <a:off x="1811708" y="2864721"/>
+            <a:ext cx="5520583" cy="324740"/>
           </a:xfrm>
           <a:prstGeom prst="rect">
             <a:avLst/>
@@ -12719,7 +12719,7 @@
               <a:buNone/>
             </a:pPr>
             <a:r>
-              <a:rPr lang="en-US" sz="1200" b="1" dirty="0">
+              <a:rPr lang="en-US" sz="850" b="1" dirty="0">
                 <a:solidFill>
                   <a:srgbClr val="7A4E00"/>
                 </a:solidFill>
@@ -12729,7 +12729,7 @@
               </a:rPr>
               <a:t>Ba dòng này chính là ba thanh trượt. Chỉ khác là hãng viết bằng tiếng Anh.</a:t>
             </a:r>
-            <a:endParaRPr lang="en-US" sz="1200" dirty="0"/>
+            <a:endParaRPr lang="en-US" sz="850" dirty="0"/>
           </a:p>
           <a:p>
             <a:pPr indent="0" marL="0">
@@ -12739,7 +12739,7 @@
               <a:buNone/>
             </a:pPr>
             <a:r>
-              <a:rPr lang="en-US" sz="1100" dirty="0">
+              <a:rPr lang="en-US" sz="780" dirty="0">
                 <a:solidFill>
                   <a:srgbClr val="7A4E00"/>
                 </a:solidFill>
@@ -12749,7 +12749,7 @@
               </a:rPr>
               <a:t>這三行就是那三個滑桿，只是廠商用英文寫。</a:t>
             </a:r>
-            <a:endParaRPr lang="en-US" sz="1200" dirty="0"/>
+            <a:endParaRPr lang="en-US" sz="850" dirty="0"/>
           </a:p>
         </p:txBody>
       </p:sp>
@@ -12769,8 +12769,8 @@
         </p:blipFill>
         <p:spPr>
           <a:xfrm>
-            <a:off x="7516368" y="4718304"/>
-            <a:ext cx="1097280" cy="242439"/>
+            <a:off x="6663327" y="3338842"/>
+            <a:ext cx="779376" cy="172200"/>
           </a:xfrm>
           <a:prstGeom prst="rect">
             <a:avLst/>
@@ -12785,8 +12785,8 @@
         </p:nvSpPr>
         <p:spPr>
           <a:xfrm>
-            <a:off x="109728" y="4791456"/>
-            <a:ext cx="822960" cy="256032"/>
+            <a:off x="1402536" y="3390800"/>
+            <a:ext cx="584532" cy="181855"/>
           </a:xfrm>
           <a:prstGeom prst="rect">
             <a:avLst/>
@@ -12802,7 +12802,7 @@
               <a:buNone/>
             </a:pPr>
             <a:r>
-              <a:rPr lang="en-US" sz="900" dirty="0">
+              <a:rPr lang="en-US" sz="640" dirty="0">
                 <a:solidFill>
                   <a:srgbClr val="5F7183"/>
                 </a:solidFill>
@@ -12812,7 +12812,7 @@
               </a:rPr>
               <a:t>4 / 14</a:t>
             </a:r>
-            <a:endParaRPr lang="en-US" sz="900" dirty="0"/>
+            <a:endParaRPr lang="en-US" sz="640" dirty="0"/>
           </a:p>
         </p:txBody>
       </p:sp>
@@ -12824,8 +12824,8 @@
         </p:nvSpPr>
         <p:spPr>
           <a:xfrm>
-            <a:off x="960120" y="4791456"/>
-            <a:ext cx="2011680" cy="256032"/>
+            <a:off x="2006553" y="3390800"/>
+            <a:ext cx="1428857" cy="181855"/>
           </a:xfrm>
           <a:prstGeom prst="rect">
             <a:avLst/>
@@ -12841,7 +12841,7 @@
               <a:buNone/>
             </a:pPr>
             <a:r>
-              <a:rPr lang="en-US" sz="900" dirty="0">
+              <a:rPr lang="en-US" sz="640" dirty="0">
                 <a:solidFill>
                   <a:srgbClr val="5F7183"/>
                 </a:solidFill>
@@ -12851,7 +12851,7 @@
               </a:rPr>
               <a:t>Tiết 1 · 第 1 節</a:t>
             </a:r>
-            <a:endParaRPr lang="en-US" sz="900" dirty="0"/>
+            <a:endParaRPr lang="en-US" sz="640" dirty="0"/>
           </a:p>
         </p:txBody>
       </p:sp>
@@ -12888,8 +12888,8 @@
         </p:nvSpPr>
         <p:spPr>
           <a:xfrm>
-            <a:off x="502920" y="365760"/>
-            <a:ext cx="8138160" cy="274320"/>
+            <a:off x="1681812" y="286284"/>
+            <a:ext cx="5780375" cy="194844"/>
           </a:xfrm>
           <a:prstGeom prst="rect">
             <a:avLst/>
@@ -12905,7 +12905,7 @@
               <a:buNone/>
             </a:pPr>
             <a:r>
-              <a:rPr lang="en-US" sz="1300" b="1" dirty="0">
+              <a:rPr lang="en-US" sz="920" b="1" dirty="0">
                 <a:solidFill>
                   <a:srgbClr val="007F72"/>
                 </a:solidFill>
@@ -12915,7 +12915,7 @@
               </a:rPr>
               <a:t>2 / 2　Hesai AT128</a:t>
             </a:r>
-            <a:endParaRPr lang="en-US" sz="1300" dirty="0"/>
+            <a:endParaRPr lang="en-US" sz="920" dirty="0"/>
           </a:p>
         </p:txBody>
       </p:sp>
@@ -12927,8 +12927,8 @@
         </p:nvSpPr>
         <p:spPr>
           <a:xfrm>
-            <a:off x="502920" y="877824"/>
-            <a:ext cx="1481328" cy="1920240"/>
+            <a:off x="1681812" y="649993"/>
+            <a:ext cx="1052158" cy="1363909"/>
           </a:xfrm>
           <a:prstGeom prst="roundRect">
             <a:avLst>
@@ -12954,8 +12954,8 @@
         </p:nvSpPr>
         <p:spPr>
           <a:xfrm flipH="1" flipV="1">
-            <a:off x="920221" y="1018382"/>
-            <a:ext cx="323363" cy="479405"/>
+            <a:off x="1978213" y="749829"/>
+            <a:ext cx="229678" cy="340512"/>
           </a:xfrm>
           <a:prstGeom prst="line">
             <a:avLst/>
@@ -12977,8 +12977,8 @@
         </p:nvSpPr>
         <p:spPr>
           <a:xfrm flipH="1" flipV="1">
-            <a:off x="1074515" y="944788"/>
-            <a:ext cx="169069" cy="552999"/>
+            <a:off x="2087805" y="697556"/>
+            <a:ext cx="120086" cy="392784"/>
           </a:xfrm>
           <a:prstGeom prst="line">
             <a:avLst/>
@@ -13000,8 +13000,8 @@
         </p:nvSpPr>
         <p:spPr>
           <a:xfrm flipV="1">
-            <a:off x="1243584" y="919521"/>
-            <a:ext cx="0" cy="578267"/>
+            <a:off x="2207891" y="679609"/>
+            <a:ext cx="0" cy="410731"/>
           </a:xfrm>
           <a:prstGeom prst="line">
             <a:avLst/>
@@ -13023,8 +13023,8 @@
         </p:nvSpPr>
         <p:spPr>
           <a:xfrm flipV="1">
-            <a:off x="1243584" y="944788"/>
-            <a:ext cx="169069" cy="552999"/>
+            <a:off x="2207891" y="697556"/>
+            <a:ext cx="120086" cy="392784"/>
           </a:xfrm>
           <a:prstGeom prst="line">
             <a:avLst/>
@@ -13046,8 +13046,8 @@
         </p:nvSpPr>
         <p:spPr>
           <a:xfrm flipV="1">
-            <a:off x="1243584" y="1018382"/>
-            <a:ext cx="323363" cy="479405"/>
+            <a:off x="2207891" y="749829"/>
+            <a:ext cx="229678" cy="340512"/>
           </a:xfrm>
           <a:prstGeom prst="line">
             <a:avLst/>
@@ -13069,8 +13069,8 @@
         </p:nvSpPr>
         <p:spPr>
           <a:xfrm>
-            <a:off x="1207227" y="1461431"/>
-            <a:ext cx="72713" cy="72713"/>
+            <a:off x="2182068" y="1064517"/>
+            <a:ext cx="51647" cy="51647"/>
           </a:xfrm>
           <a:prstGeom prst="ellipse">
             <a:avLst/>
@@ -13089,8 +13089,8 @@
         </p:nvSpPr>
         <p:spPr>
           <a:xfrm flipH="1" flipV="1">
-            <a:off x="677954" y="2193935"/>
-            <a:ext cx="565630" cy="120228"/>
+            <a:off x="1806136" y="1584801"/>
+            <a:ext cx="401756" cy="85396"/>
           </a:xfrm>
           <a:prstGeom prst="line">
             <a:avLst/>
@@ -13112,8 +13112,8 @@
         </p:nvSpPr>
         <p:spPr>
           <a:xfrm flipH="1" flipV="1">
-            <a:off x="879669" y="1864766"/>
-            <a:ext cx="363915" cy="449398"/>
+            <a:off x="1949410" y="1350999"/>
+            <a:ext cx="258482" cy="319198"/>
           </a:xfrm>
           <a:prstGeom prst="line">
             <a:avLst/>
@@ -13135,8 +13135,8 @@
         </p:nvSpPr>
         <p:spPr>
           <a:xfrm flipV="1">
-            <a:off x="1243584" y="1735897"/>
-            <a:ext cx="0" cy="578267"/>
+            <a:off x="2207891" y="1259466"/>
+            <a:ext cx="0" cy="410731"/>
           </a:xfrm>
           <a:prstGeom prst="line">
             <a:avLst/>
@@ -13158,8 +13158,8 @@
         </p:nvSpPr>
         <p:spPr>
           <a:xfrm flipV="1">
-            <a:off x="1243584" y="1864766"/>
-            <a:ext cx="363915" cy="449398"/>
+            <a:off x="2207891" y="1350999"/>
+            <a:ext cx="258482" cy="319198"/>
           </a:xfrm>
           <a:prstGeom prst="line">
             <a:avLst/>
@@ -13181,8 +13181,8 @@
         </p:nvSpPr>
         <p:spPr>
           <a:xfrm flipV="1">
-            <a:off x="1243584" y="2193935"/>
-            <a:ext cx="565630" cy="120228"/>
+            <a:off x="2207891" y="1584801"/>
+            <a:ext cx="401756" cy="85396"/>
           </a:xfrm>
           <a:prstGeom prst="line">
             <a:avLst/>
@@ -13204,8 +13204,8 @@
         </p:nvSpPr>
         <p:spPr>
           <a:xfrm>
-            <a:off x="1207227" y="2277807"/>
-            <a:ext cx="72713" cy="72713"/>
+            <a:off x="2182068" y="1644374"/>
+            <a:ext cx="51647" cy="51647"/>
           </a:xfrm>
           <a:prstGeom prst="ellipse">
             <a:avLst/>
@@ -13224,8 +13224,8 @@
         </p:nvSpPr>
         <p:spPr>
           <a:xfrm>
-            <a:off x="2295144" y="786384"/>
-            <a:ext cx="6345936" cy="787475"/>
+            <a:off x="2954794" y="585045"/>
+            <a:ext cx="4507394" cy="559328"/>
           </a:xfrm>
           <a:prstGeom prst="rect">
             <a:avLst/>
@@ -13244,7 +13244,7 @@
               <a:buNone/>
             </a:pPr>
             <a:r>
-              <a:rPr lang="en-US" sz="1800" b="1" dirty="0">
+              <a:rPr lang="en-US" sz="1280" b="1" dirty="0">
                 <a:solidFill>
                   <a:srgbClr val="0B1F3A"/>
                 </a:solidFill>
@@ -13254,7 +13254,7 @@
               </a:rPr>
               <a:t>Lidar cố định hướng trước: dồn điểm vào 120° phía trước</a:t>
             </a:r>
-            <a:endParaRPr lang="en-US" sz="1800" dirty="0"/>
+            <a:endParaRPr lang="en-US" sz="1280" dirty="0"/>
           </a:p>
           <a:p>
             <a:pPr indent="0" marL="0">
@@ -13264,7 +13264,7 @@
               <a:buNone/>
             </a:pPr>
             <a:r>
-              <a:rPr lang="en-US" sz="1250" dirty="0">
+              <a:rPr lang="en-US" sz="890" dirty="0">
                 <a:solidFill>
                   <a:srgbClr val="007F72"/>
                 </a:solidFill>
@@ -13274,7 +13274,7 @@
               </a:rPr>
               <a:t>固定式前向光達：把點集中在前方 120 度</a:t>
             </a:r>
-            <a:endParaRPr lang="en-US" sz="1800" dirty="0"/>
+            <a:endParaRPr lang="en-US" sz="1280" dirty="0"/>
           </a:p>
         </p:txBody>
       </p:sp>
@@ -13286,8 +13286,8 @@
         </p:nvSpPr>
         <p:spPr>
           <a:xfrm>
-            <a:off x="2295144" y="1665299"/>
-            <a:ext cx="1060704" cy="400118"/>
+            <a:off x="2954794" y="1209321"/>
+            <a:ext cx="753397" cy="284196"/>
           </a:xfrm>
           <a:prstGeom prst="roundRect">
             <a:avLst>
@@ -13308,8 +13308,8 @@
         </p:nvSpPr>
         <p:spPr>
           <a:xfrm>
-            <a:off x="2350008" y="1701875"/>
-            <a:ext cx="950976" cy="345254"/>
+            <a:off x="2993763" y="1235301"/>
+            <a:ext cx="675460" cy="245227"/>
           </a:xfrm>
           <a:prstGeom prst="rect">
             <a:avLst/>
@@ -13328,7 +13328,7 @@
               <a:buNone/>
             </a:pPr>
             <a:r>
-              <a:rPr lang="en-US" sz="900" b="1" dirty="0">
+              <a:rPr lang="en-US" sz="640" b="1" dirty="0">
                 <a:solidFill>
                   <a:srgbClr val="FFFFFF"/>
                 </a:solidFill>
@@ -13338,7 +13338,7 @@
               </a:rPr>
               <a:t>Số kênh</a:t>
             </a:r>
-            <a:endParaRPr lang="en-US" sz="900" dirty="0"/>
+            <a:endParaRPr lang="en-US" sz="640" dirty="0"/>
           </a:p>
           <a:p>
             <a:pPr algn="ctr" indent="0" marL="0">
@@ -13348,7 +13348,7 @@
               <a:buNone/>
             </a:pPr>
             <a:r>
-              <a:rPr lang="en-US" sz="850" dirty="0">
+              <a:rPr lang="en-US" sz="600" dirty="0">
                 <a:solidFill>
                   <a:srgbClr val="FFFFFF"/>
                 </a:solidFill>
@@ -13358,7 +13358,7 @@
               </a:rPr>
               <a:t>線束數</a:t>
             </a:r>
-            <a:endParaRPr lang="en-US" sz="900" dirty="0"/>
+            <a:endParaRPr lang="en-US" sz="640" dirty="0"/>
           </a:p>
         </p:txBody>
       </p:sp>
@@ -13370,8 +13370,8 @@
         </p:nvSpPr>
         <p:spPr>
           <a:xfrm>
-            <a:off x="3502152" y="1665299"/>
-            <a:ext cx="5138928" cy="454982"/>
+            <a:off x="3812108" y="1209321"/>
+            <a:ext cx="3650080" cy="323165"/>
           </a:xfrm>
           <a:prstGeom prst="rect">
             <a:avLst/>
@@ -13390,7 +13390,7 @@
               <a:buNone/>
             </a:pPr>
             <a:r>
-              <a:rPr lang="en-US" sz="1100" dirty="0">
+              <a:rPr lang="en-US" sz="780" dirty="0">
                 <a:solidFill>
                   <a:srgbClr val="1A2733"/>
                 </a:solidFill>
@@ -13400,7 +13400,7 @@
               </a:rPr>
               <a:t>128 channels</a:t>
             </a:r>
-            <a:endParaRPr lang="en-US" sz="1100" dirty="0"/>
+            <a:endParaRPr lang="en-US" sz="780" dirty="0"/>
           </a:p>
           <a:p>
             <a:pPr indent="0" marL="0">
@@ -13410,7 +13410,7 @@
               <a:buNone/>
             </a:pPr>
             <a:r>
-              <a:rPr lang="en-US" sz="1000" dirty="0">
+              <a:rPr lang="en-US" sz="710" dirty="0">
                 <a:solidFill>
                   <a:srgbClr val="5F7183"/>
                 </a:solidFill>
@@ -13420,7 +13420,7 @@
               </a:rPr>
               <a:t>128 channels</a:t>
             </a:r>
-            <a:endParaRPr lang="en-US" sz="1100" dirty="0"/>
+            <a:endParaRPr lang="en-US" sz="780" dirty="0"/>
           </a:p>
         </p:txBody>
       </p:sp>
@@ -13432,8 +13432,8 @@
         </p:nvSpPr>
         <p:spPr>
           <a:xfrm>
-            <a:off x="2295144" y="2184289"/>
-            <a:ext cx="1060704" cy="400118"/>
+            <a:off x="2954794" y="1577950"/>
+            <a:ext cx="753397" cy="284196"/>
           </a:xfrm>
           <a:prstGeom prst="roundRect">
             <a:avLst>
@@ -13454,8 +13454,8 @@
         </p:nvSpPr>
         <p:spPr>
           <a:xfrm>
-            <a:off x="2350008" y="2220865"/>
-            <a:ext cx="950976" cy="345254"/>
+            <a:off x="2993763" y="1603929"/>
+            <a:ext cx="675460" cy="245227"/>
           </a:xfrm>
           <a:prstGeom prst="rect">
             <a:avLst/>
@@ -13474,7 +13474,7 @@
               <a:buNone/>
             </a:pPr>
             <a:r>
-              <a:rPr lang="en-US" sz="900" b="1" dirty="0">
+              <a:rPr lang="en-US" sz="640" b="1" dirty="0">
                 <a:solidFill>
                   <a:srgbClr val="FFFFFF"/>
                 </a:solidFill>
@@ -13484,7 +13484,7 @@
               </a:rPr>
               <a:t>Góc nhìn</a:t>
             </a:r>
-            <a:endParaRPr lang="en-US" sz="900" dirty="0"/>
+            <a:endParaRPr lang="en-US" sz="640" dirty="0"/>
           </a:p>
           <a:p>
             <a:pPr algn="ctr" indent="0" marL="0">
@@ -13494,7 +13494,7 @@
               <a:buNone/>
             </a:pPr>
             <a:r>
-              <a:rPr lang="en-US" sz="850" dirty="0">
+              <a:rPr lang="en-US" sz="600" dirty="0">
                 <a:solidFill>
                   <a:srgbClr val="FFFFFF"/>
                 </a:solidFill>
@@ -13504,7 +13504,7 @@
               </a:rPr>
               <a:t>視野</a:t>
             </a:r>
-            <a:endParaRPr lang="en-US" sz="900" dirty="0"/>
+            <a:endParaRPr lang="en-US" sz="640" dirty="0"/>
           </a:p>
         </p:txBody>
       </p:sp>
@@ -13516,8 +13516,8 @@
         </p:nvSpPr>
         <p:spPr>
           <a:xfrm>
-            <a:off x="3502152" y="2184289"/>
-            <a:ext cx="5138928" cy="454982"/>
+            <a:off x="3812108" y="1577950"/>
+            <a:ext cx="3650080" cy="323165"/>
           </a:xfrm>
           <a:prstGeom prst="rect">
             <a:avLst/>
@@ -13536,7 +13536,7 @@
               <a:buNone/>
             </a:pPr>
             <a:r>
-              <a:rPr lang="en-US" sz="1100" dirty="0">
+              <a:rPr lang="en-US" sz="780" dirty="0">
                 <a:solidFill>
                   <a:srgbClr val="1A2733"/>
                 </a:solidFill>
@@ -13546,7 +13546,7 @@
               </a:rPr>
               <a:t>120° ngang × 25.4° dọc — không quay, chỉ nhìn phía trước</a:t>
             </a:r>
-            <a:endParaRPr lang="en-US" sz="1100" dirty="0"/>
+            <a:endParaRPr lang="en-US" sz="780" dirty="0"/>
           </a:p>
           <a:p>
             <a:pPr indent="0" marL="0">
@@ -13556,7 +13556,7 @@
               <a:buNone/>
             </a:pPr>
             <a:r>
-              <a:rPr lang="en-US" sz="1000" dirty="0">
+              <a:rPr lang="en-US" sz="710" dirty="0">
                 <a:solidFill>
                   <a:srgbClr val="5F7183"/>
                 </a:solidFill>
@@ -13566,7 +13566,7 @@
               </a:rPr>
               <a:t>水平 120°、垂直 25.4°——它不轉，只看前面</a:t>
             </a:r>
-            <a:endParaRPr lang="en-US" sz="1100" dirty="0"/>
+            <a:endParaRPr lang="en-US" sz="780" dirty="0"/>
           </a:p>
         </p:txBody>
       </p:sp>
@@ -13578,8 +13578,8 @@
         </p:nvSpPr>
         <p:spPr>
           <a:xfrm>
-            <a:off x="2295144" y="2703280"/>
-            <a:ext cx="1060704" cy="400118"/>
+            <a:off x="2954794" y="1946578"/>
+            <a:ext cx="753397" cy="284196"/>
           </a:xfrm>
           <a:prstGeom prst="roundRect">
             <a:avLst>
@@ -13600,8 +13600,8 @@
         </p:nvSpPr>
         <p:spPr>
           <a:xfrm>
-            <a:off x="2350008" y="2739856"/>
-            <a:ext cx="950976" cy="345254"/>
+            <a:off x="2993763" y="1972558"/>
+            <a:ext cx="675460" cy="245227"/>
           </a:xfrm>
           <a:prstGeom prst="rect">
             <a:avLst/>
@@ -13620,7 +13620,7 @@
               <a:buNone/>
             </a:pPr>
             <a:r>
-              <a:rPr lang="en-US" sz="900" b="1" dirty="0">
+              <a:rPr lang="en-US" sz="640" b="1" dirty="0">
                 <a:solidFill>
                   <a:srgbClr val="3A2A00"/>
                 </a:solidFill>
@@ -13630,7 +13630,7 @@
               </a:rPr>
               <a:t>Phân giải góc</a:t>
             </a:r>
-            <a:endParaRPr lang="en-US" sz="900" dirty="0"/>
+            <a:endParaRPr lang="en-US" sz="640" dirty="0"/>
           </a:p>
           <a:p>
             <a:pPr algn="ctr" indent="0" marL="0">
@@ -13640,7 +13640,7 @@
               <a:buNone/>
             </a:pPr>
             <a:r>
-              <a:rPr lang="en-US" sz="850" dirty="0">
+              <a:rPr lang="en-US" sz="600" dirty="0">
                 <a:solidFill>
                   <a:srgbClr val="3A2A00"/>
                 </a:solidFill>
@@ -13650,7 +13650,7 @@
               </a:rPr>
               <a:t>角解析度</a:t>
             </a:r>
-            <a:endParaRPr lang="en-US" sz="900" dirty="0"/>
+            <a:endParaRPr lang="en-US" sz="640" dirty="0"/>
           </a:p>
         </p:txBody>
       </p:sp>
@@ -13662,8 +13662,8 @@
         </p:nvSpPr>
         <p:spPr>
           <a:xfrm>
-            <a:off x="3502152" y="2703280"/>
-            <a:ext cx="5138928" cy="454982"/>
+            <a:off x="3812108" y="1946578"/>
+            <a:ext cx="3650080" cy="323165"/>
           </a:xfrm>
           <a:prstGeom prst="rect">
             <a:avLst/>
@@ -13682,7 +13682,7 @@
               <a:buNone/>
             </a:pPr>
             <a:r>
-              <a:rPr lang="en-US" sz="1100" dirty="0">
+              <a:rPr lang="en-US" sz="780" dirty="0">
                 <a:solidFill>
                   <a:srgbClr val="1A2733"/>
                 </a:solidFill>
@@ -13692,7 +13692,7 @@
               </a:rPr>
               <a:t>0.1° ngang × 0.2° dọc — hãng viết thẳng ra góc, không phải chia ngược</a:t>
             </a:r>
-            <a:endParaRPr lang="en-US" sz="1100" dirty="0"/>
+            <a:endParaRPr lang="en-US" sz="780" dirty="0"/>
           </a:p>
           <a:p>
             <a:pPr indent="0" marL="0">
@@ -13702,7 +13702,7 @@
               <a:buNone/>
             </a:pPr>
             <a:r>
-              <a:rPr lang="en-US" sz="1000" dirty="0">
+              <a:rPr lang="en-US" sz="710" dirty="0">
                 <a:solidFill>
                   <a:srgbClr val="5F7183"/>
                 </a:solidFill>
@@ -13712,7 +13712,7 @@
               </a:rPr>
               <a:t>左右 0.1°、上下 0.2°——這一顆直接把角度寫出來，不用自己除</a:t>
             </a:r>
-            <a:endParaRPr lang="en-US" sz="1100" dirty="0"/>
+            <a:endParaRPr lang="en-US" sz="780" dirty="0"/>
           </a:p>
         </p:txBody>
       </p:sp>
@@ -13724,8 +13724,8 @@
         </p:nvSpPr>
         <p:spPr>
           <a:xfrm>
-            <a:off x="502920" y="3931920"/>
-            <a:ext cx="8138160" cy="566928"/>
+            <a:off x="1681812" y="2819258"/>
+            <a:ext cx="5780375" cy="402678"/>
           </a:xfrm>
           <a:prstGeom prst="roundRect">
             <a:avLst>
@@ -13751,8 +13751,8 @@
         </p:nvSpPr>
         <p:spPr>
           <a:xfrm>
-            <a:off x="685800" y="3995928"/>
-            <a:ext cx="7772400" cy="457200"/>
+            <a:off x="1811708" y="2864721"/>
+            <a:ext cx="5520583" cy="324740"/>
           </a:xfrm>
           <a:prstGeom prst="rect">
             <a:avLst/>
@@ -13771,7 +13771,7 @@
               <a:buNone/>
             </a:pPr>
             <a:r>
-              <a:rPr lang="en-US" sz="1200" b="1" dirty="0">
+              <a:rPr lang="en-US" sz="850" b="1" dirty="0">
                 <a:solidFill>
                   <a:srgbClr val="7A4E00"/>
                 </a:solidFill>
@@ -13781,7 +13781,7 @@
               </a:rPr>
               <a:t>Cùng là lidar, một cái rải quanh 360°, một cái dồn vào 120°.</a:t>
             </a:r>
-            <a:endParaRPr lang="en-US" sz="1200" dirty="0"/>
+            <a:endParaRPr lang="en-US" sz="850" dirty="0"/>
           </a:p>
           <a:p>
             <a:pPr indent="0" marL="0">
@@ -13791,7 +13791,7 @@
               <a:buNone/>
             </a:pPr>
             <a:r>
-              <a:rPr lang="en-US" sz="1100" dirty="0">
+              <a:rPr lang="en-US" sz="780" dirty="0">
                 <a:solidFill>
                   <a:srgbClr val="7A4E00"/>
                 </a:solidFill>
@@ -13801,7 +13801,7 @@
               </a:rPr>
               <a:t>同樣是光達，一個灑滿 360 度，一個集中在 120 度。</a:t>
             </a:r>
-            <a:endParaRPr lang="en-US" sz="1200" dirty="0"/>
+            <a:endParaRPr lang="en-US" sz="850" dirty="0"/>
           </a:p>
         </p:txBody>
       </p:sp>
@@ -13821,8 +13821,8 @@
         </p:blipFill>
         <p:spPr>
           <a:xfrm>
-            <a:off x="7516368" y="4718304"/>
-            <a:ext cx="1097280" cy="242439"/>
+            <a:off x="6663327" y="3338842"/>
+            <a:ext cx="779376" cy="172200"/>
           </a:xfrm>
           <a:prstGeom prst="rect">
             <a:avLst/>
@@ -13837,8 +13837,8 @@
         </p:nvSpPr>
         <p:spPr>
           <a:xfrm>
-            <a:off x="109728" y="4791456"/>
-            <a:ext cx="822960" cy="256032"/>
+            <a:off x="1402536" y="3390800"/>
+            <a:ext cx="584532" cy="181855"/>
           </a:xfrm>
           <a:prstGeom prst="rect">
             <a:avLst/>
@@ -13854,7 +13854,7 @@
               <a:buNone/>
             </a:pPr>
             <a:r>
-              <a:rPr lang="en-US" sz="900" dirty="0">
+              <a:rPr lang="en-US" sz="640" dirty="0">
                 <a:solidFill>
                   <a:srgbClr val="5F7183"/>
                 </a:solidFill>
@@ -13864,7 +13864,7 @@
               </a:rPr>
               <a:t>5 / 14</a:t>
             </a:r>
-            <a:endParaRPr lang="en-US" sz="900" dirty="0"/>
+            <a:endParaRPr lang="en-US" sz="640" dirty="0"/>
           </a:p>
         </p:txBody>
       </p:sp>
@@ -13876,8 +13876,8 @@
         </p:nvSpPr>
         <p:spPr>
           <a:xfrm>
-            <a:off x="960120" y="4791456"/>
-            <a:ext cx="2011680" cy="256032"/>
+            <a:off x="2006553" y="3390800"/>
+            <a:ext cx="1428857" cy="181855"/>
           </a:xfrm>
           <a:prstGeom prst="rect">
             <a:avLst/>
@@ -13893,7 +13893,7 @@
               <a:buNone/>
             </a:pPr>
             <a:r>
-              <a:rPr lang="en-US" sz="900" dirty="0">
+              <a:rPr lang="en-US" sz="640" dirty="0">
                 <a:solidFill>
                   <a:srgbClr val="5F7183"/>
                 </a:solidFill>
@@ -13903,7 +13903,7 @@
               </a:rPr>
               <a:t>Tiết 1 · 第 1 節</a:t>
             </a:r>
-            <a:endParaRPr lang="en-US" sz="900" dirty="0"/>
+            <a:endParaRPr lang="en-US" sz="640" dirty="0"/>
           </a:p>
         </p:txBody>
       </p:sp>
@@ -13940,8 +13940,8 @@
         </p:nvSpPr>
         <p:spPr>
           <a:xfrm>
-            <a:off x="502920" y="292608"/>
-            <a:ext cx="8138160" cy="841248"/>
+            <a:off x="1681812" y="234326"/>
+            <a:ext cx="5780375" cy="597522"/>
           </a:xfrm>
           <a:prstGeom prst="rect">
             <a:avLst/>
@@ -13960,7 +13960,7 @@
               <a:buNone/>
             </a:pPr>
             <a:r>
-              <a:rPr lang="en-US" sz="2200" b="1" dirty="0">
+              <a:rPr lang="en-US" sz="1560" b="1" dirty="0">
                 <a:solidFill>
                   <a:srgbClr val="0B1F3A"/>
                 </a:solidFill>
@@ -13970,7 +13970,7 @@
               </a:rPr>
               <a:t>Cùng là lidar, hai cách tiêu tiền khác nhau</a:t>
             </a:r>
-            <a:endParaRPr lang="en-US" sz="2200" dirty="0"/>
+            <a:endParaRPr lang="en-US" sz="1560" dirty="0"/>
           </a:p>
           <a:p>
             <a:pPr indent="0" marL="0">
@@ -13980,7 +13980,7 @@
               <a:buNone/>
             </a:pPr>
             <a:r>
-              <a:rPr lang="en-US" sz="1350" dirty="0">
+              <a:rPr lang="en-US" sz="960" dirty="0">
                 <a:solidFill>
                   <a:srgbClr val="5F7183"/>
                 </a:solidFill>
@@ -13990,7 +13990,7 @@
               </a:rPr>
               <a:t>同樣是光達，兩種花錢的方式</a:t>
             </a:r>
-            <a:endParaRPr lang="en-US" sz="2200" dirty="0"/>
+            <a:endParaRPr lang="en-US" sz="1560" dirty="0"/>
           </a:p>
         </p:txBody>
       </p:sp>
@@ -14009,18 +14009,18 @@
           </p:nvPr>
         </p:nvGraphicFramePr>
         <p:xfrm>
-          <a:off x="502920" y="1133856"/>
-          <a:ext cx="8138160" cy="914400"/>
+          <a:off x="1681812" y="831848"/>
+          <a:ext cx="5780375" cy="914400"/>
         </p:xfrm>
         <a:graphic>
           <a:graphicData uri="http://schemas.openxmlformats.org/drawingml/2006/table">
             <a:tbl>
               <a:tblPr/>
               <a:tblGrid>
-                <a:gridCol w="2034540"/>
-                <a:gridCol w="2034540"/>
-                <a:gridCol w="2034540"/>
-                <a:gridCol w="2034540"/>
+                <a:gridCol w="1445094"/>
+                <a:gridCol w="1445094"/>
+                <a:gridCol w="1445094"/>
+                <a:gridCol w="1445094"/>
               </a:tblGrid>
               <a:tr h="384048">
                 <a:tc>
@@ -15480,8 +15480,8 @@
         </p:nvSpPr>
         <p:spPr>
           <a:xfrm>
-            <a:off x="502920" y="3712591"/>
-            <a:ext cx="8138160" cy="457200"/>
+            <a:off x="1681812" y="2663473"/>
+            <a:ext cx="5780375" cy="324740"/>
           </a:xfrm>
           <a:prstGeom prst="rect">
             <a:avLst/>
@@ -15500,7 +15500,7 @@
               <a:buNone/>
             </a:pPr>
             <a:r>
-              <a:rPr lang="en-US" sz="1200" b="1" dirty="0">
+              <a:rPr lang="en-US" sz="850" b="1" dirty="0">
                 <a:solidFill>
                   <a:srgbClr val="007F72"/>
                 </a:solidFill>
@@ -15510,7 +15510,7 @@
               </a:rPr>
               <a:t>Hàng cuối không nằm trên datasheet — nó là do ta tự tính từ ba dòng trên.</a:t>
             </a:r>
-            <a:endParaRPr lang="en-US" sz="1200" dirty="0"/>
+            <a:endParaRPr lang="en-US" sz="850" dirty="0"/>
           </a:p>
           <a:p>
             <a:pPr indent="0" marL="0">
@@ -15520,7 +15520,7 @@
               <a:buNone/>
             </a:pPr>
             <a:r>
-              <a:rPr lang="en-US" sz="1100" dirty="0">
+              <a:rPr lang="en-US" sz="780" dirty="0">
                 <a:solidFill>
                   <a:srgbClr val="007F72"/>
                 </a:solidFill>
@@ -15530,7 +15530,7 @@
               </a:rPr>
               <a:t>最後一行規格表上沒有，是我們自己用上面三行算出來的。</a:t>
             </a:r>
-            <a:endParaRPr lang="en-US" sz="1200" dirty="0"/>
+            <a:endParaRPr lang="en-US" sz="850" dirty="0"/>
           </a:p>
         </p:txBody>
       </p:sp>
@@ -15550,8 +15550,8 @@
         </p:blipFill>
         <p:spPr>
           <a:xfrm>
-            <a:off x="7516368" y="4718304"/>
-            <a:ext cx="1097280" cy="242439"/>
+            <a:off x="6663327" y="3338842"/>
+            <a:ext cx="779376" cy="172200"/>
           </a:xfrm>
           <a:prstGeom prst="rect">
             <a:avLst/>
@@ -15566,8 +15566,8 @@
         </p:nvSpPr>
         <p:spPr>
           <a:xfrm>
-            <a:off x="109728" y="4791456"/>
-            <a:ext cx="822960" cy="256032"/>
+            <a:off x="1402536" y="3390800"/>
+            <a:ext cx="584532" cy="181855"/>
           </a:xfrm>
           <a:prstGeom prst="rect">
             <a:avLst/>
@@ -15583,7 +15583,7 @@
               <a:buNone/>
             </a:pPr>
             <a:r>
-              <a:rPr lang="en-US" sz="900" dirty="0">
+              <a:rPr lang="en-US" sz="640" dirty="0">
                 <a:solidFill>
                   <a:srgbClr val="5F7183"/>
                 </a:solidFill>
@@ -15593,7 +15593,7 @@
               </a:rPr>
               <a:t>6 / 14</a:t>
             </a:r>
-            <a:endParaRPr lang="en-US" sz="900" dirty="0"/>
+            <a:endParaRPr lang="en-US" sz="640" dirty="0"/>
           </a:p>
         </p:txBody>
       </p:sp>
@@ -15605,8 +15605,8 @@
         </p:nvSpPr>
         <p:spPr>
           <a:xfrm>
-            <a:off x="960120" y="4791456"/>
-            <a:ext cx="2011680" cy="256032"/>
+            <a:off x="2006553" y="3390800"/>
+            <a:ext cx="1428857" cy="181855"/>
           </a:xfrm>
           <a:prstGeom prst="rect">
             <a:avLst/>
@@ -15622,7 +15622,7 @@
               <a:buNone/>
             </a:pPr>
             <a:r>
-              <a:rPr lang="en-US" sz="900" dirty="0">
+              <a:rPr lang="en-US" sz="640" dirty="0">
                 <a:solidFill>
                   <a:srgbClr val="5F7183"/>
                 </a:solidFill>
@@ -15632,7 +15632,7 @@
               </a:rPr>
               <a:t>Tiết 1 · 第 1 節</a:t>
             </a:r>
-            <a:endParaRPr lang="en-US" sz="900" dirty="0"/>
+            <a:endParaRPr lang="en-US" sz="640" dirty="0"/>
           </a:p>
         </p:txBody>
       </p:sp>
@@ -15669,8 +15669,8 @@
         </p:nvSpPr>
         <p:spPr>
           <a:xfrm>
-            <a:off x="502920" y="420624"/>
-            <a:ext cx="8138160" cy="274320"/>
+            <a:off x="1681812" y="325253"/>
+            <a:ext cx="5780375" cy="194844"/>
           </a:xfrm>
           <a:prstGeom prst="rect">
             <a:avLst/>
@@ -15686,7 +15686,7 @@
               <a:buNone/>
             </a:pPr>
             <a:r>
-              <a:rPr lang="en-US" sz="1250" b="1" dirty="0">
+              <a:rPr lang="en-US" sz="890" b="1" dirty="0">
                 <a:solidFill>
                   <a:srgbClr val="007F72"/>
                 </a:solidFill>
@@ -15696,7 +15696,7 @@
               </a:rPr>
               <a:t>Thông số thứ tư · 第四個規格</a:t>
             </a:r>
-            <a:endParaRPr lang="en-US" sz="1250" dirty="0"/>
+            <a:endParaRPr lang="en-US" sz="890" dirty="0"/>
           </a:p>
         </p:txBody>
       </p:sp>
@@ -15708,8 +15708,8 @@
         </p:nvSpPr>
         <p:spPr>
           <a:xfrm>
-            <a:off x="502920" y="1101852"/>
-            <a:ext cx="2468880" cy="2514600"/>
+            <a:off x="1681812" y="809116"/>
+            <a:ext cx="1753597" cy="1786071"/>
           </a:xfrm>
           <a:prstGeom prst="roundRect">
             <a:avLst>
@@ -15735,8 +15735,8 @@
         </p:nvSpPr>
         <p:spPr>
           <a:xfrm>
-            <a:off x="1493947" y="2203613"/>
-            <a:ext cx="929396" cy="755477"/>
+            <a:off x="2385719" y="1591675"/>
+            <a:ext cx="660132" cy="536601"/>
           </a:xfrm>
           <a:prstGeom prst="roundRect">
             <a:avLst>
@@ -15762,8 +15762,8 @@
         </p:nvSpPr>
         <p:spPr>
           <a:xfrm>
-            <a:off x="1339047" y="2048073"/>
-            <a:ext cx="929396" cy="755477"/>
+            <a:off x="2275697" y="1481198"/>
+            <a:ext cx="660132" cy="536601"/>
           </a:xfrm>
           <a:prstGeom prst="roundRect">
             <a:avLst>
@@ -15789,8 +15789,8 @@
         </p:nvSpPr>
         <p:spPr>
           <a:xfrm>
-            <a:off x="1184148" y="1892534"/>
-            <a:ext cx="929396" cy="755477"/>
+            <a:off x="2165675" y="1370721"/>
+            <a:ext cx="660132" cy="536601"/>
           </a:xfrm>
           <a:prstGeom prst="roundRect">
             <a:avLst>
@@ -15816,8 +15816,8 @@
         </p:nvSpPr>
         <p:spPr>
           <a:xfrm>
-            <a:off x="1029249" y="1736994"/>
-            <a:ext cx="929396" cy="755477"/>
+            <a:off x="2055653" y="1260245"/>
+            <a:ext cx="660132" cy="536601"/>
           </a:xfrm>
           <a:prstGeom prst="roundRect">
             <a:avLst>
@@ -15843,8 +15843,8 @@
         </p:nvSpPr>
         <p:spPr>
           <a:xfrm>
-            <a:off x="630936" y="2892430"/>
-            <a:ext cx="2212848" cy="399959"/>
+            <a:off x="1772740" y="2080928"/>
+            <a:ext cx="1571743" cy="284083"/>
           </a:xfrm>
           <a:prstGeom prst="rect">
             <a:avLst/>
@@ -15860,7 +15860,7 @@
               <a:buNone/>
             </a:pPr>
             <a:r>
-              <a:rPr lang="en-US" sz="1100" b="1" dirty="0">
+              <a:rPr lang="en-US" sz="780" b="1" dirty="0">
                 <a:solidFill>
                   <a:srgbClr val="8A5A00"/>
                 </a:solidFill>
@@ -15870,7 +15870,7 @@
               </a:rPr>
               <a:t>× 10 000</a:t>
             </a:r>
-            <a:endParaRPr lang="en-US" sz="1100" dirty="0"/>
+            <a:endParaRPr lang="en-US" sz="780" dirty="0"/>
           </a:p>
         </p:txBody>
       </p:sp>
@@ -15882,8 +15882,8 @@
         </p:nvSpPr>
         <p:spPr>
           <a:xfrm>
-            <a:off x="3429000" y="1420580"/>
-            <a:ext cx="5212080" cy="1005611"/>
+            <a:off x="3760150" y="1035502"/>
+            <a:ext cx="3702038" cy="714266"/>
           </a:xfrm>
           <a:prstGeom prst="rect">
             <a:avLst/>
@@ -15902,7 +15902,7 @@
               <a:buNone/>
             </a:pPr>
             <a:r>
-              <a:rPr lang="en-US" sz="2300" b="1" dirty="0">
+              <a:rPr lang="en-US" sz="1630" b="1" dirty="0">
                 <a:solidFill>
                   <a:srgbClr val="0B1F3A"/>
                 </a:solidFill>
@@ -15912,7 +15912,7 @@
               </a:rPr>
               <a:t>Tốc độ cập nhật: một giây nó nhìn mấy lần</a:t>
             </a:r>
-            <a:endParaRPr lang="en-US" sz="2300" dirty="0"/>
+            <a:endParaRPr lang="en-US" sz="1630" dirty="0"/>
           </a:p>
           <a:p>
             <a:pPr indent="0" marL="0">
@@ -15922,7 +15922,7 @@
               <a:buNone/>
             </a:pPr>
             <a:r>
-              <a:rPr lang="en-US" sz="1400" dirty="0">
+              <a:rPr lang="en-US" sz="990" dirty="0">
                 <a:solidFill>
                   <a:srgbClr val="007F72"/>
                 </a:solidFill>
@@ -15932,7 +15932,7 @@
               </a:rPr>
               <a:t>更新率：它一秒鐘看幾次</a:t>
             </a:r>
-            <a:endParaRPr lang="en-US" sz="2300" dirty="0"/>
+            <a:endParaRPr lang="en-US" sz="1630" dirty="0"/>
           </a:p>
         </p:txBody>
       </p:sp>
@@ -15944,8 +15944,8 @@
         </p:nvSpPr>
         <p:spPr>
           <a:xfrm>
-            <a:off x="3429000" y="2517631"/>
-            <a:ext cx="5212080" cy="871533"/>
+            <a:off x="3760150" y="1814716"/>
+            <a:ext cx="3702038" cy="619033"/>
           </a:xfrm>
           <a:prstGeom prst="rect">
             <a:avLst/>
@@ -15964,7 +15964,7 @@
               <a:buNone/>
             </a:pPr>
             <a:r>
-              <a:rPr lang="en-US" sz="1250" dirty="0">
+              <a:rPr lang="en-US" sz="890" dirty="0">
                 <a:solidFill>
                   <a:srgbClr val="5F7183"/>
                 </a:solidFill>
@@ -15974,7 +15974,7 @@
               </a:rPr>
               <a:t>OS1 quay 10 hoặc 20 vòng mỗi giây. Ở 10 Hz, mỗi khung cách nhau 100 ms — chạy 40 km/h thì trong khoảng đó xe đã đi 1,1 m.</a:t>
             </a:r>
-            <a:endParaRPr lang="en-US" sz="1250" dirty="0"/>
+            <a:endParaRPr lang="en-US" sz="890" dirty="0"/>
           </a:p>
           <a:p>
             <a:pPr indent="0" marL="0">
@@ -15984,7 +15984,7 @@
               <a:buNone/>
             </a:pPr>
             <a:r>
-              <a:rPr lang="en-US" sz="1150" dirty="0">
+              <a:rPr lang="en-US" sz="820" dirty="0">
                 <a:solidFill>
                   <a:srgbClr val="5F7183"/>
                 </a:solidFill>
@@ -15994,7 +15994,7 @@
               </a:rPr>
               <a:t>OS1 每秒轉 10 圈或 20 圈。10 Hz 的話，每一張畫面隔 100 毫秒——時速 40 的時候，這段時間車子已經走了 1.1 公尺。</a:t>
             </a:r>
-            <a:endParaRPr lang="en-US" sz="1250" dirty="0"/>
+            <a:endParaRPr lang="en-US" sz="890" dirty="0"/>
           </a:p>
         </p:txBody>
       </p:sp>
@@ -16006,8 +16006,8 @@
         </p:nvSpPr>
         <p:spPr>
           <a:xfrm>
-            <a:off x="502920" y="3913632"/>
-            <a:ext cx="8138160" cy="621792"/>
+            <a:off x="1681812" y="2806268"/>
+            <a:ext cx="5780375" cy="441647"/>
           </a:xfrm>
           <a:prstGeom prst="roundRect">
             <a:avLst>
@@ -16033,8 +16033,8 @@
         </p:nvSpPr>
         <p:spPr>
           <a:xfrm>
-            <a:off x="685800" y="3986784"/>
-            <a:ext cx="7772400" cy="493776"/>
+            <a:off x="1811708" y="2858226"/>
+            <a:ext cx="5520583" cy="350719"/>
           </a:xfrm>
           <a:prstGeom prst="rect">
             <a:avLst/>
@@ -16053,7 +16053,7 @@
               <a:buNone/>
             </a:pPr>
             <a:r>
-              <a:rPr lang="en-US" sz="1250" b="1" dirty="0">
+              <a:rPr lang="en-US" sz="890" b="1" dirty="0">
                 <a:solidFill>
                   <a:srgbClr val="7A4E00"/>
                 </a:solidFill>
@@ -16063,7 +16063,7 @@
               </a:rPr>
               <a:t>Tuần 3 và 4 chưa từng nhắc tới thông số này, nhưng nó quyết định «xe thấy muộn bao nhiêu».</a:t>
             </a:r>
-            <a:endParaRPr lang="en-US" sz="1250" dirty="0"/>
+            <a:endParaRPr lang="en-US" sz="890" dirty="0"/>
           </a:p>
           <a:p>
             <a:pPr indent="0" marL="0">
@@ -16073,7 +16073,7 @@
               <a:buNone/>
             </a:pPr>
             <a:r>
-              <a:rPr lang="en-US" sz="1150" dirty="0">
+              <a:rPr lang="en-US" sz="820" dirty="0">
                 <a:solidFill>
                   <a:srgbClr val="7A4E00"/>
                 </a:solidFill>
@@ -16083,7 +16083,7 @@
               </a:rPr>
               <a:t>第三、四週從來沒提過這個規格，但它決定了「車子晚多久才知道」。</a:t>
             </a:r>
-            <a:endParaRPr lang="en-US" sz="1250" dirty="0"/>
+            <a:endParaRPr lang="en-US" sz="890" dirty="0"/>
           </a:p>
         </p:txBody>
       </p:sp>
@@ -16103,8 +16103,8 @@
         </p:blipFill>
         <p:spPr>
           <a:xfrm>
-            <a:off x="7516368" y="4718304"/>
-            <a:ext cx="1097280" cy="242439"/>
+            <a:off x="6663327" y="3338842"/>
+            <a:ext cx="779376" cy="172200"/>
           </a:xfrm>
           <a:prstGeom prst="rect">
             <a:avLst/>
@@ -16119,8 +16119,8 @@
         </p:nvSpPr>
         <p:spPr>
           <a:xfrm>
-            <a:off x="109728" y="4791456"/>
-            <a:ext cx="822960" cy="256032"/>
+            <a:off x="1402536" y="3390800"/>
+            <a:ext cx="584532" cy="181855"/>
           </a:xfrm>
           <a:prstGeom prst="rect">
             <a:avLst/>
@@ -16136,7 +16136,7 @@
               <a:buNone/>
             </a:pPr>
             <a:r>
-              <a:rPr lang="en-US" sz="900" dirty="0">
+              <a:rPr lang="en-US" sz="640" dirty="0">
                 <a:solidFill>
                   <a:srgbClr val="5F7183"/>
                 </a:solidFill>
@@ -16146,7 +16146,7 @@
               </a:rPr>
               <a:t>7 / 14</a:t>
             </a:r>
-            <a:endParaRPr lang="en-US" sz="900" dirty="0"/>
+            <a:endParaRPr lang="en-US" sz="640" dirty="0"/>
           </a:p>
         </p:txBody>
       </p:sp>
@@ -16158,8 +16158,8 @@
         </p:nvSpPr>
         <p:spPr>
           <a:xfrm>
-            <a:off x="960120" y="4791456"/>
-            <a:ext cx="2011680" cy="256032"/>
+            <a:off x="2006553" y="3390800"/>
+            <a:ext cx="1428857" cy="181855"/>
           </a:xfrm>
           <a:prstGeom prst="rect">
             <a:avLst/>
@@ -16175,7 +16175,7 @@
               <a:buNone/>
             </a:pPr>
             <a:r>
-              <a:rPr lang="en-US" sz="900" dirty="0">
+              <a:rPr lang="en-US" sz="640" dirty="0">
                 <a:solidFill>
                   <a:srgbClr val="5F7183"/>
                 </a:solidFill>
@@ -16185,7 +16185,7 @@
               </a:rPr>
               <a:t>Tiết 1 · 第 1 節</a:t>
             </a:r>
-            <a:endParaRPr lang="en-US" sz="900" dirty="0"/>
+            <a:endParaRPr lang="en-US" sz="640" dirty="0"/>
           </a:p>
         </p:txBody>
       </p:sp>
@@ -16229,8 +16229,8 @@
         </p:nvSpPr>
         <p:spPr>
           <a:xfrm>
-            <a:off x="6766560" y="-1371600"/>
-            <a:ext cx="4206240" cy="4206240"/>
+            <a:off x="6130753" y="-947729"/>
+            <a:ext cx="2987610" cy="2987610"/>
           </a:xfrm>
           <a:prstGeom prst="ellipse">
             <a:avLst/>
@@ -16254,8 +16254,8 @@
         </p:nvSpPr>
         <p:spPr>
           <a:xfrm>
-            <a:off x="7863840" y="3108960"/>
-            <a:ext cx="2560320" cy="2560320"/>
+            <a:off x="7104973" y="1520297"/>
+            <a:ext cx="1688649" cy="1688649"/>
           </a:xfrm>
           <a:prstGeom prst="ellipse">
             <a:avLst/>
@@ -16276,8 +16276,8 @@
         </p:nvSpPr>
         <p:spPr>
           <a:xfrm>
-            <a:off x="502920" y="1691640"/>
-            <a:ext cx="4572000" cy="310896"/>
+            <a:off x="1681812" y="1228031"/>
+            <a:ext cx="3247402" cy="220823"/>
           </a:xfrm>
           <a:prstGeom prst="rect">
             <a:avLst/>
@@ -16293,7 +16293,7 @@
               <a:buNone/>
             </a:pPr>
             <a:r>
-              <a:rPr lang="en-US" sz="1350" b="1" dirty="0">
+              <a:rPr lang="en-US" sz="960" b="1" dirty="0">
                 <a:solidFill>
                   <a:srgbClr val="FFB020"/>
                 </a:solidFill>
@@ -16303,7 +16303,7 @@
               </a:rPr>
               <a:t>Phần 2 / 3</a:t>
             </a:r>
-            <a:endParaRPr lang="en-US" sz="1350" dirty="0"/>
+            <a:endParaRPr lang="en-US" sz="960" dirty="0"/>
           </a:p>
         </p:txBody>
       </p:sp>
@@ -16315,8 +16315,8 @@
         </p:nvSpPr>
         <p:spPr>
           <a:xfrm>
-            <a:off x="502920" y="2048256"/>
-            <a:ext cx="7315200" cy="1188720"/>
+            <a:off x="1681812" y="1481328"/>
+            <a:ext cx="5195843" cy="844324"/>
           </a:xfrm>
           <a:prstGeom prst="rect">
             <a:avLst/>
@@ -16335,7 +16335,7 @@
               <a:buNone/>
             </a:pPr>
             <a:r>
-              <a:rPr lang="en-US" sz="2900" b="1" dirty="0">
+              <a:rPr lang="en-US" sz="2060" b="1" dirty="0">
                 <a:solidFill>
                   <a:srgbClr val="FFFFFF"/>
                 </a:solidFill>
@@ -16345,7 +16345,7 @@
               </a:rPr>
               <a:t>Tại sao datasheet của camera không có góc nhìn</a:t>
             </a:r>
-            <a:endParaRPr lang="en-US" sz="2900" dirty="0"/>
+            <a:endParaRPr lang="en-US" sz="2060" dirty="0"/>
           </a:p>
           <a:p>
             <a:pPr indent="0" marL="0">
@@ -16355,7 +16355,7 @@
               <a:buNone/>
             </a:pPr>
             <a:r>
-              <a:rPr lang="en-US" sz="1700" dirty="0">
+              <a:rPr lang="en-US" sz="1210" dirty="0">
                 <a:solidFill>
                   <a:srgbClr val="AFC3D4"/>
                 </a:solidFill>
@@ -16365,7 +16365,7 @@
               </a:rPr>
               <a:t>為什麼相機的規格表上沒有視野</a:t>
             </a:r>
-            <a:endParaRPr lang="en-US" sz="2900" dirty="0"/>
+            <a:endParaRPr lang="en-US" sz="2060" dirty="0"/>
           </a:p>
         </p:txBody>
       </p:sp>
@@ -16377,8 +16377,8 @@
         </p:nvSpPr>
         <p:spPr>
           <a:xfrm>
-            <a:off x="502920" y="3346704"/>
-            <a:ext cx="7315200" cy="640080"/>
+            <a:off x="1681812" y="2403590"/>
+            <a:ext cx="5195843" cy="454636"/>
           </a:xfrm>
           <a:prstGeom prst="rect">
             <a:avLst/>
@@ -16397,7 +16397,7 @@
               <a:buNone/>
             </a:pPr>
             <a:r>
-              <a:rPr lang="en-US" sz="1350" dirty="0">
+              <a:rPr lang="en-US" sz="960" dirty="0">
                 <a:solidFill>
                   <a:srgbClr val="AFC3D4"/>
                 </a:solidFill>
@@ -16407,7 +16407,7 @@
               </a:rPr>
               <a:t>Hai dòng quan trọng nhất lại không nằm trên đó</a:t>
             </a:r>
-            <a:endParaRPr lang="en-US" sz="1350" dirty="0"/>
+            <a:endParaRPr lang="en-US" sz="960" dirty="0"/>
           </a:p>
           <a:p>
             <a:pPr indent="0" marL="0">
@@ -16417,7 +16417,7 @@
               <a:buNone/>
             </a:pPr>
             <a:r>
-              <a:rPr lang="en-US" sz="1200" dirty="0">
+              <a:rPr lang="en-US" sz="850" dirty="0">
                 <a:solidFill>
                   <a:srgbClr val="8AA0B4"/>
                 </a:solidFill>
@@ -16427,7 +16427,7 @@
               </a:rPr>
               <a:t>最重要的兩行，偏偏不在上面</a:t>
             </a:r>
-            <a:endParaRPr lang="en-US" sz="1350" dirty="0"/>
+            <a:endParaRPr lang="en-US" sz="960" dirty="0"/>
           </a:p>
         </p:txBody>
       </p:sp>
@@ -16439,8 +16439,8 @@
         </p:nvSpPr>
         <p:spPr>
           <a:xfrm>
-            <a:off x="109728" y="4791456"/>
-            <a:ext cx="822960" cy="256032"/>
+            <a:off x="1402536" y="3390800"/>
+            <a:ext cx="584532" cy="181855"/>
           </a:xfrm>
           <a:prstGeom prst="rect">
             <a:avLst/>
@@ -16456,7 +16456,7 @@
               <a:buNone/>
             </a:pPr>
             <a:r>
-              <a:rPr lang="en-US" sz="900" dirty="0">
+              <a:rPr lang="en-US" sz="640" dirty="0">
                 <a:solidFill>
                   <a:srgbClr val="9FB3C8"/>
                 </a:solidFill>
@@ -16466,7 +16466,7 @@
               </a:rPr>
               <a:t>8 / 14</a:t>
             </a:r>
-            <a:endParaRPr lang="en-US" sz="900" dirty="0"/>
+            <a:endParaRPr lang="en-US" sz="640" dirty="0"/>
           </a:p>
         </p:txBody>
       </p:sp>
@@ -16478,8 +16478,8 @@
         </p:nvSpPr>
         <p:spPr>
           <a:xfrm>
-            <a:off x="960120" y="4791456"/>
-            <a:ext cx="2011680" cy="256032"/>
+            <a:off x="2006553" y="3390800"/>
+            <a:ext cx="1428857" cy="181855"/>
           </a:xfrm>
           <a:prstGeom prst="rect">
             <a:avLst/>
@@ -16495,7 +16495,7 @@
               <a:buNone/>
             </a:pPr>
             <a:r>
-              <a:rPr lang="en-US" sz="900" dirty="0">
+              <a:rPr lang="en-US" sz="640" dirty="0">
                 <a:solidFill>
                   <a:srgbClr val="9FB3C8"/>
                 </a:solidFill>
@@ -16505,7 +16505,7 @@
               </a:rPr>
               <a:t>Tiết 1 · 第 1 節</a:t>
             </a:r>
-            <a:endParaRPr lang="en-US" sz="900" dirty="0"/>
+            <a:endParaRPr lang="en-US" sz="640" dirty="0"/>
           </a:p>
         </p:txBody>
       </p:sp>
@@ -16542,8 +16542,8 @@
         </p:nvSpPr>
         <p:spPr>
           <a:xfrm>
-            <a:off x="502920" y="365760"/>
-            <a:ext cx="8138160" cy="274320"/>
+            <a:off x="1681812" y="286284"/>
+            <a:ext cx="5780375" cy="194844"/>
           </a:xfrm>
           <a:prstGeom prst="rect">
             <a:avLst/>
@@ -16559,7 +16559,7 @@
               <a:buNone/>
             </a:pPr>
             <a:r>
-              <a:rPr lang="en-US" sz="1300" b="1" dirty="0">
+              <a:rPr lang="en-US" sz="920" b="1" dirty="0">
                 <a:solidFill>
                   <a:srgbClr val="007F72"/>
                 </a:solidFill>
@@ -16569,7 +16569,7 @@
               </a:rPr>
               <a:t>Camera · onsemi AR0233AT</a:t>
             </a:r>
-            <a:endParaRPr lang="en-US" sz="1300" dirty="0"/>
+            <a:endParaRPr lang="en-US" sz="920" dirty="0"/>
           </a:p>
         </p:txBody>
       </p:sp>
@@ -16581,8 +16581,8 @@
         </p:nvSpPr>
         <p:spPr>
           <a:xfrm>
-            <a:off x="502920" y="877824"/>
-            <a:ext cx="1481328" cy="1920240"/>
+            <a:off x="1681812" y="649993"/>
+            <a:ext cx="1052158" cy="1363909"/>
           </a:xfrm>
           <a:prstGeom prst="roundRect">
             <a:avLst>
@@ -16608,8 +16608,8 @@
         </p:nvSpPr>
         <p:spPr>
           <a:xfrm>
-            <a:off x="659282" y="1868317"/>
-            <a:ext cx="311628" cy="143349"/>
+            <a:off x="1792873" y="1353521"/>
+            <a:ext cx="221343" cy="101818"/>
           </a:xfrm>
           <a:prstGeom prst="roundRect">
             <a:avLst>
@@ -16630,8 +16630,8 @@
         </p:nvSpPr>
         <p:spPr>
           <a:xfrm>
-            <a:off x="777701" y="1896986"/>
-            <a:ext cx="105953" cy="86009"/>
+            <a:off x="1876984" y="1373884"/>
+            <a:ext cx="75257" cy="61091"/>
           </a:xfrm>
           <a:prstGeom prst="roundRect">
             <a:avLst>
@@ -16652,8 +16652,8 @@
         </p:nvSpPr>
         <p:spPr>
           <a:xfrm>
-            <a:off x="1009863" y="1939991"/>
-            <a:ext cx="649224" cy="0"/>
+            <a:off x="2041884" y="1404430"/>
+            <a:ext cx="461131" cy="0"/>
           </a:xfrm>
           <a:prstGeom prst="line">
             <a:avLst/>
@@ -16676,8 +16676,8 @@
         </p:nvSpPr>
         <p:spPr>
           <a:xfrm>
-            <a:off x="1172169" y="1854952"/>
-            <a:ext cx="0" cy="170078"/>
+            <a:off x="2157167" y="1344028"/>
+            <a:ext cx="0" cy="120803"/>
           </a:xfrm>
           <a:prstGeom prst="line">
             <a:avLst/>
@@ -16699,8 +16699,8 @@
         </p:nvSpPr>
         <p:spPr>
           <a:xfrm>
-            <a:off x="1334475" y="1854952"/>
-            <a:ext cx="0" cy="170078"/>
+            <a:off x="2272450" y="1344028"/>
+            <a:ext cx="0" cy="120803"/>
           </a:xfrm>
           <a:prstGeom prst="line">
             <a:avLst/>
@@ -16722,8 +16722,8 @@
         </p:nvSpPr>
         <p:spPr>
           <a:xfrm>
-            <a:off x="1496781" y="1854952"/>
-            <a:ext cx="0" cy="170078"/>
+            <a:off x="2387733" y="1344028"/>
+            <a:ext cx="0" cy="120803"/>
           </a:xfrm>
           <a:prstGeom prst="line">
             <a:avLst/>
@@ -16745,8 +16745,8 @@
         </p:nvSpPr>
         <p:spPr>
           <a:xfrm>
-            <a:off x="1646103" y="1752905"/>
-            <a:ext cx="90891" cy="374172"/>
+            <a:off x="2493793" y="1271546"/>
+            <a:ext cx="64558" cy="265767"/>
           </a:xfrm>
           <a:prstGeom prst="roundRect">
             <a:avLst>
@@ -16767,8 +16767,8 @@
         </p:nvSpPr>
         <p:spPr>
           <a:xfrm>
-            <a:off x="2295144" y="786384"/>
-            <a:ext cx="6345936" cy="522366"/>
+            <a:off x="2954794" y="585045"/>
+            <a:ext cx="4507394" cy="371026"/>
           </a:xfrm>
           <a:prstGeom prst="rect">
             <a:avLst/>
@@ -16787,7 +16787,7 @@
               <a:buNone/>
             </a:pPr>
             <a:r>
-              <a:rPr lang="en-US" sz="1800" b="1" dirty="0">
+              <a:rPr lang="en-US" sz="1280" b="1" dirty="0">
                 <a:solidFill>
                   <a:srgbClr val="0B1F3A"/>
                 </a:solidFill>
@@ -16797,7 +16797,7 @@
               </a:rPr>
               <a:t>Datasheet cảm biến ảnh: tìm mãi không thấy góc nhìn</a:t>
             </a:r>
-            <a:endParaRPr lang="en-US" sz="1800" dirty="0"/>
+            <a:endParaRPr lang="en-US" sz="1280" dirty="0"/>
           </a:p>
           <a:p>
             <a:pPr indent="0" marL="0">
@@ -16807,7 +16807,7 @@
               <a:buNone/>
             </a:pPr>
             <a:r>
-              <a:rPr lang="en-US" sz="1250" dirty="0">
+              <a:rPr lang="en-US" sz="890" dirty="0">
                 <a:solidFill>
                   <a:srgbClr val="007F72"/>
                 </a:solidFill>
@@ -16817,7 +16817,7 @@
               </a:rPr>
               <a:t>影像感測器的規格表：怎麼找都找不到視野</a:t>
             </a:r>
-            <a:endParaRPr lang="en-US" sz="1800" dirty="0"/>
+            <a:endParaRPr lang="en-US" sz="1280" dirty="0"/>
           </a:p>
         </p:txBody>
       </p:sp>
@@ -16829,8 +16829,8 @@
         </p:nvSpPr>
         <p:spPr>
           <a:xfrm>
-            <a:off x="2295144" y="1400190"/>
-            <a:ext cx="1060704" cy="400118"/>
+            <a:off x="2954794" y="1021019"/>
+            <a:ext cx="753397" cy="284196"/>
           </a:xfrm>
           <a:prstGeom prst="roundRect">
             <a:avLst>
@@ -16851,8 +16851,8 @@
         </p:nvSpPr>
         <p:spPr>
           <a:xfrm>
-            <a:off x="2350008" y="1436766"/>
-            <a:ext cx="950976" cy="345254"/>
+            <a:off x="2993763" y="1046998"/>
+            <a:ext cx="675460" cy="245227"/>
           </a:xfrm>
           <a:prstGeom prst="rect">
             <a:avLst/>
@@ -16871,7 +16871,7 @@
               <a:buNone/>
             </a:pPr>
             <a:r>
-              <a:rPr lang="en-US" sz="900" b="1" dirty="0">
+              <a:rPr lang="en-US" sz="640" b="1" dirty="0">
                 <a:solidFill>
                   <a:srgbClr val="FFFFFF"/>
                 </a:solidFill>
@@ -16881,7 +16881,7 @@
               </a:rPr>
               <a:t>Điểm ảnh</a:t>
             </a:r>
-            <a:endParaRPr lang="en-US" sz="900" dirty="0"/>
+            <a:endParaRPr lang="en-US" sz="640" dirty="0"/>
           </a:p>
           <a:p>
             <a:pPr algn="ctr" indent="0" marL="0">
@@ -16891,7 +16891,7 @@
               <a:buNone/>
             </a:pPr>
             <a:r>
-              <a:rPr lang="en-US" sz="850" dirty="0">
+              <a:rPr lang="en-US" sz="600" dirty="0">
                 <a:solidFill>
                   <a:srgbClr val="FFFFFF"/>
                 </a:solidFill>
@@ -16901,7 +16901,7 @@
               </a:rPr>
               <a:t>像素</a:t>
             </a:r>
-            <a:endParaRPr lang="en-US" sz="900" dirty="0"/>
+            <a:endParaRPr lang="en-US" sz="640" dirty="0"/>
           </a:p>
         </p:txBody>
       </p:sp>
@@ -16913,8 +16913,8 @@
         </p:nvSpPr>
         <p:spPr>
           <a:xfrm>
-            <a:off x="3502152" y="1400190"/>
-            <a:ext cx="5138928" cy="454982"/>
+            <a:off x="3812108" y="1021019"/>
+            <a:ext cx="3650080" cy="323165"/>
           </a:xfrm>
           <a:prstGeom prst="rect">
             <a:avLst/>
@@ -16933,7 +16933,7 @@
               <a:buNone/>
             </a:pPr>
             <a:r>
-              <a:rPr lang="en-US" sz="1100" dirty="0">
+              <a:rPr lang="en-US" sz="780" dirty="0">
                 <a:solidFill>
                   <a:srgbClr val="1A2733"/>
                 </a:solidFill>
@@ -16943,7 +16943,7 @@
               </a:rPr>
               <a:t>2048 × 1280 (2.6 MP), mỗi điểm ảnh 3.0 µm vuông</a:t>
             </a:r>
-            <a:endParaRPr lang="en-US" sz="1100" dirty="0"/>
+            <a:endParaRPr lang="en-US" sz="780" dirty="0"/>
           </a:p>
           <a:p>
             <a:pPr indent="0" marL="0">
@@ -16953,7 +16953,7 @@
               <a:buNone/>
             </a:pPr>
             <a:r>
-              <a:rPr lang="en-US" sz="1000" dirty="0">
+              <a:rPr lang="en-US" sz="710" dirty="0">
                 <a:solidFill>
                   <a:srgbClr val="5F7183"/>
                 </a:solidFill>
@@ -16963,7 +16963,7 @@
               </a:rPr>
               <a:t>2048 × 1280（2.6 MP），一個像素 3 微米見方</a:t>
             </a:r>
-            <a:endParaRPr lang="en-US" sz="1100" dirty="0"/>
+            <a:endParaRPr lang="en-US" sz="780" dirty="0"/>
           </a:p>
         </p:txBody>
       </p:sp>
@@ -16975,8 +16975,8 @@
         </p:nvSpPr>
         <p:spPr>
           <a:xfrm>
-            <a:off x="2295144" y="1919180"/>
-            <a:ext cx="1060704" cy="400118"/>
+            <a:off x="2954794" y="1389648"/>
+            <a:ext cx="753397" cy="284196"/>
           </a:xfrm>
           <a:prstGeom prst="roundRect">
             <a:avLst>
@@ -16997,8 +16997,8 @@
         </p:nvSpPr>
         <p:spPr>
           <a:xfrm>
-            <a:off x="2350008" y="1955756"/>
-            <a:ext cx="950976" cy="345254"/>
+            <a:off x="2993763" y="1415627"/>
+            <a:ext cx="675460" cy="245227"/>
           </a:xfrm>
           <a:prstGeom prst="rect">
             <a:avLst/>
@@ -17017,7 +17017,7 @@
               <a:buNone/>
             </a:pPr>
             <a:r>
-              <a:rPr lang="en-US" sz="900" b="1" dirty="0">
+              <a:rPr lang="en-US" sz="640" b="1" dirty="0">
                 <a:solidFill>
                   <a:srgbClr val="FFFFFF"/>
                 </a:solidFill>
@@ -17027,7 +17027,7 @@
               </a:rPr>
               <a:t>Tốc độ</a:t>
             </a:r>
-            <a:endParaRPr lang="en-US" sz="900" dirty="0"/>
+            <a:endParaRPr lang="en-US" sz="640" dirty="0"/>
           </a:p>
           <a:p>
             <a:pPr algn="ctr" indent="0" marL="0">
@@ -17037,7 +17037,7 @@
               <a:buNone/>
             </a:pPr>
             <a:r>
-              <a:rPr lang="en-US" sz="850" dirty="0">
+              <a:rPr lang="en-US" sz="600" dirty="0">
                 <a:solidFill>
                   <a:srgbClr val="FFFFFF"/>
                 </a:solidFill>
@@ -17047,7 +17047,7 @@
               </a:rPr>
               <a:t>更新率</a:t>
             </a:r>
-            <a:endParaRPr lang="en-US" sz="900" dirty="0"/>
+            <a:endParaRPr lang="en-US" sz="640" dirty="0"/>
           </a:p>
         </p:txBody>
       </p:sp>
@@ -17059,8 +17059,8 @@
         </p:nvSpPr>
         <p:spPr>
           <a:xfrm>
-            <a:off x="3502152" y="1919180"/>
-            <a:ext cx="5138928" cy="454982"/>
+            <a:off x="3812108" y="1389648"/>
+            <a:ext cx="3650080" cy="323165"/>
           </a:xfrm>
           <a:prstGeom prst="rect">
             <a:avLst/>
@@ -17079,7 +17079,7 @@
               <a:buNone/>
             </a:pPr>
             <a:r>
-              <a:rPr lang="en-US" sz="1100" dirty="0">
+              <a:rPr lang="en-US" sz="780" dirty="0">
                 <a:solidFill>
                   <a:srgbClr val="1A2733"/>
                 </a:solidFill>
@@ -17089,7 +17089,7 @@
               </a:rPr>
               <a:t>60 fps ở 1080p — nhanh hơn lidar sáu lần</a:t>
             </a:r>
-            <a:endParaRPr lang="en-US" sz="1100" dirty="0"/>
+            <a:endParaRPr lang="en-US" sz="780" dirty="0"/>
           </a:p>
           <a:p>
             <a:pPr indent="0" marL="0">
@@ -17099,7 +17099,7 @@
               <a:buNone/>
             </a:pPr>
             <a:r>
-              <a:rPr lang="en-US" sz="1000" dirty="0">
+              <a:rPr lang="en-US" sz="710" dirty="0">
                 <a:solidFill>
                   <a:srgbClr val="5F7183"/>
                 </a:solidFill>
@@ -17109,7 +17109,7 @@
               </a:rPr>
               <a:t>1080p 每秒 60 張——比光達快六倍</a:t>
             </a:r>
-            <a:endParaRPr lang="en-US" sz="1100" dirty="0"/>
+            <a:endParaRPr lang="en-US" sz="780" dirty="0"/>
           </a:p>
         </p:txBody>
       </p:sp>
@@ -17121,8 +17121,8 @@
         </p:nvSpPr>
         <p:spPr>
           <a:xfrm>
-            <a:off x="2295144" y="2438170"/>
-            <a:ext cx="1060704" cy="400118"/>
+            <a:off x="2954794" y="1758276"/>
+            <a:ext cx="753397" cy="284196"/>
           </a:xfrm>
           <a:prstGeom prst="roundRect">
             <a:avLst>
@@ -17143,8 +17143,8 @@
         </p:nvSpPr>
         <p:spPr>
           <a:xfrm>
-            <a:off x="2350008" y="2474746"/>
-            <a:ext cx="950976" cy="345254"/>
+            <a:off x="2993763" y="1784255"/>
+            <a:ext cx="675460" cy="245227"/>
           </a:xfrm>
           <a:prstGeom prst="rect">
             <a:avLst/>
@@ -17163,7 +17163,7 @@
               <a:buNone/>
             </a:pPr>
             <a:r>
-              <a:rPr lang="en-US" sz="900" b="1" dirty="0">
+              <a:rPr lang="en-US" sz="640" b="1" dirty="0">
                 <a:solidFill>
                   <a:srgbClr val="3A2A00"/>
                 </a:solidFill>
@@ -17173,7 +17173,7 @@
               </a:rPr>
               <a:t>Không có</a:t>
             </a:r>
-            <a:endParaRPr lang="en-US" sz="900" dirty="0"/>
+            <a:endParaRPr lang="en-US" sz="640" dirty="0"/>
           </a:p>
           <a:p>
             <a:pPr algn="ctr" indent="0" marL="0">
@@ -17183,7 +17183,7 @@
               <a:buNone/>
             </a:pPr>
             <a:r>
-              <a:rPr lang="en-US" sz="850" dirty="0">
+              <a:rPr lang="en-US" sz="600" dirty="0">
                 <a:solidFill>
                   <a:srgbClr val="3A2A00"/>
                 </a:solidFill>
@@ -17193,7 +17193,7 @@
               </a:rPr>
               <a:t>沒有的</a:t>
             </a:r>
-            <a:endParaRPr lang="en-US" sz="900" dirty="0"/>
+            <a:endParaRPr lang="en-US" sz="640" dirty="0"/>
           </a:p>
         </p:txBody>
       </p:sp>
@@ -17205,8 +17205,8 @@
         </p:nvSpPr>
         <p:spPr>
           <a:xfrm>
-            <a:off x="3502152" y="2438170"/>
-            <a:ext cx="5138928" cy="454982"/>
+            <a:off x="3812108" y="1758276"/>
+            <a:ext cx="3650080" cy="323165"/>
           </a:xfrm>
           <a:prstGeom prst="rect">
             <a:avLst/>
@@ -17225,7 +17225,7 @@
               <a:buNone/>
             </a:pPr>
             <a:r>
-              <a:rPr lang="en-US" sz="1100" dirty="0">
+              <a:rPr lang="en-US" sz="780" dirty="0">
                 <a:solidFill>
                   <a:srgbClr val="1A2733"/>
                 </a:solidFill>
@@ -17235,7 +17235,7 @@
               </a:rPr>
               <a:t>Không có dòng góc nhìn, cũng không có dòng tầm đo</a:t>
             </a:r>
-            <a:endParaRPr lang="en-US" sz="1100" dirty="0"/>
+            <a:endParaRPr lang="en-US" sz="780" dirty="0"/>
           </a:p>
           <a:p>
             <a:pPr indent="0" marL="0">
@@ -17245,7 +17245,7 @@
               <a:buNone/>
             </a:pPr>
             <a:r>
-              <a:rPr lang="en-US" sz="1000" dirty="0">
+              <a:rPr lang="en-US" sz="710" dirty="0">
                 <a:solidFill>
                   <a:srgbClr val="5F7183"/>
                 </a:solidFill>
@@ -17255,7 +17255,7 @@
               </a:rPr>
               <a:t>沒有視野那一行，也沒有測距那一行</a:t>
             </a:r>
-            <a:endParaRPr lang="en-US" sz="1100" dirty="0"/>
+            <a:endParaRPr lang="en-US" sz="780" dirty="0"/>
           </a:p>
         </p:txBody>
       </p:sp>
@@ -17267,8 +17267,8 @@
         </p:nvSpPr>
         <p:spPr>
           <a:xfrm>
-            <a:off x="502920" y="3931920"/>
-            <a:ext cx="8138160" cy="566928"/>
+            <a:off x="1681812" y="2819258"/>
+            <a:ext cx="5780375" cy="402678"/>
           </a:xfrm>
           <a:prstGeom prst="roundRect">
             <a:avLst>
@@ -17294,8 +17294,8 @@
         </p:nvSpPr>
         <p:spPr>
           <a:xfrm>
-            <a:off x="685800" y="3995928"/>
-            <a:ext cx="7772400" cy="457200"/>
+            <a:off x="1811708" y="2864721"/>
+            <a:ext cx="5520583" cy="324740"/>
           </a:xfrm>
           <a:prstGeom prst="rect">
             <a:avLst/>
@@ -17314,7 +17314,7 @@
               <a:buNone/>
             </a:pPr>
             <a:r>
-              <a:rPr lang="en-US" sz="1200" b="1" dirty="0">
+              <a:rPr lang="en-US" sz="850" b="1" dirty="0">
                 <a:solidFill>
                   <a:srgbClr val="7A4E00"/>
                 </a:solidFill>
@@ -17324,7 +17324,7 @@
               </a:rPr>
               <a:t>Hai thứ ta cần nhất thì bảng này không hề có. Vì sao?</a:t>
             </a:r>
-            <a:endParaRPr lang="en-US" sz="1200" dirty="0"/>
+            <a:endParaRPr lang="en-US" sz="850" dirty="0"/>
           </a:p>
           <a:p>
             <a:pPr indent="0" marL="0">
@@ -17334,7 +17334,7 @@
               <a:buNone/>
             </a:pPr>
             <a:r>
-              <a:rPr lang="en-US" sz="1100" dirty="0">
+              <a:rPr lang="en-US" sz="780" dirty="0">
                 <a:solidFill>
                   <a:srgbClr val="7A4E00"/>
                 </a:solidFill>
@@ -17344,7 +17344,7 @@
               </a:rPr>
               <a:t>我們最需要的兩個東西，這張表上偏偏都沒有。為什麼？</a:t>
             </a:r>
-            <a:endParaRPr lang="en-US" sz="1200" dirty="0"/>
+            <a:endParaRPr lang="en-US" sz="850" dirty="0"/>
           </a:p>
         </p:txBody>
       </p:sp>
@@ -17364,8 +17364,8 @@
         </p:blipFill>
         <p:spPr>
           <a:xfrm>
-            <a:off x="7516368" y="4718304"/>
-            <a:ext cx="1097280" cy="242439"/>
+            <a:off x="6663327" y="3338842"/>
+            <a:ext cx="779376" cy="172200"/>
           </a:xfrm>
           <a:prstGeom prst="rect">
             <a:avLst/>
@@ -17380,8 +17380,8 @@
         </p:nvSpPr>
         <p:spPr>
           <a:xfrm>
-            <a:off x="109728" y="4791456"/>
-            <a:ext cx="822960" cy="256032"/>
+            <a:off x="1402536" y="3390800"/>
+            <a:ext cx="584532" cy="181855"/>
           </a:xfrm>
           <a:prstGeom prst="rect">
             <a:avLst/>
@@ -17397,7 +17397,7 @@
               <a:buNone/>
             </a:pPr>
             <a:r>
-              <a:rPr lang="en-US" sz="900" dirty="0">
+              <a:rPr lang="en-US" sz="640" dirty="0">
                 <a:solidFill>
                   <a:srgbClr val="5F7183"/>
                 </a:solidFill>
@@ -17407,7 +17407,7 @@
               </a:rPr>
               <a:t>9 / 14</a:t>
             </a:r>
-            <a:endParaRPr lang="en-US" sz="900" dirty="0"/>
+            <a:endParaRPr lang="en-US" sz="640" dirty="0"/>
           </a:p>
         </p:txBody>
       </p:sp>
@@ -17419,8 +17419,8 @@
         </p:nvSpPr>
         <p:spPr>
           <a:xfrm>
-            <a:off x="960120" y="4791456"/>
-            <a:ext cx="2011680" cy="256032"/>
+            <a:off x="2006553" y="3390800"/>
+            <a:ext cx="1428857" cy="181855"/>
           </a:xfrm>
           <a:prstGeom prst="rect">
             <a:avLst/>
@@ -17436,7 +17436,7 @@
               <a:buNone/>
             </a:pPr>
             <a:r>
-              <a:rPr lang="en-US" sz="900" dirty="0">
+              <a:rPr lang="en-US" sz="640" dirty="0">
                 <a:solidFill>
                   <a:srgbClr val="5F7183"/>
                 </a:solidFill>
@@ -17446,7 +17446,7 @@
               </a:rPr>
               <a:t>Tiết 1 · 第 1 節</a:t>
             </a:r>
-            <a:endParaRPr lang="en-US" sz="900" dirty="0"/>
+            <a:endParaRPr lang="en-US" sz="640" dirty="0"/>
           </a:p>
         </p:txBody>
       </p:sp>

--- a/第五週(10-08)/第五週_第1節_簡報.pptx
+++ b/第五週(10-08)/第五週_第1節_簡報.pptx
@@ -6068,8 +6068,8 @@
       </p:nvGrpSpPr>
       <p:grpSpPr>
         <a:xfrm>
-          <a:off x="0" y="0"/>
-          <a:ext cx="0" cy="0"/>
+          <a:off x="1028250" y="0"/>
+          <a:ext cx="1" cy="1"/>
           <a:chOff x="0" y="0"/>
           <a:chExt cx="0" cy="0"/>
         </a:xfrm>
@@ -6082,8 +6082,8 @@
         </p:nvSpPr>
         <p:spPr>
           <a:xfrm>
-            <a:off x="6130753" y="-947729"/>
-            <a:ext cx="2987610" cy="2987610"/>
+            <a:off x="6273000" y="-1063125"/>
+            <a:ext cx="3260250" cy="3260250"/>
           </a:xfrm>
           <a:prstGeom prst="ellipse">
             <a:avLst/>
@@ -6107,8 +6107,8 @@
         </p:nvSpPr>
         <p:spPr>
           <a:xfrm>
-            <a:off x="7104973" y="1520297"/>
-            <a:ext cx="1688649" cy="1688649"/>
+            <a:off x="7336125" y="1630125"/>
+            <a:ext cx="1842750" cy="1842750"/>
           </a:xfrm>
           <a:prstGeom prst="ellipse">
             <a:avLst/>
@@ -6129,8 +6129,8 @@
         </p:nvSpPr>
         <p:spPr>
           <a:xfrm>
-            <a:off x="1681812" y="883806"/>
-            <a:ext cx="4936051" cy="194844"/>
+            <a:off x="1418063" y="935550"/>
+            <a:ext cx="5386500" cy="212625"/>
           </a:xfrm>
           <a:prstGeom prst="rect">
             <a:avLst/>
@@ -6146,7 +6146,7 @@
               <a:buNone/>
             </a:pPr>
             <a:r>
-              <a:rPr lang="en-US" sz="890" b="1" dirty="0">
+              <a:rPr lang="en-US" sz="970" b="1" dirty="0">
                 <a:solidFill>
                   <a:srgbClr val="00A896"/>
                 </a:solidFill>
@@ -6156,7 +6156,7 @@
               </a:rPr>
               <a:t>MITUST · Nguyên lý xe tự lái · Tuần 5</a:t>
             </a:r>
-            <a:endParaRPr lang="en-US" sz="890" dirty="0"/>
+            <a:endParaRPr lang="en-US" sz="970" dirty="0"/>
           </a:p>
         </p:txBody>
       </p:sp>
@@ -6168,8 +6168,8 @@
         </p:nvSpPr>
         <p:spPr>
           <a:xfrm>
-            <a:off x="1681812" y="1143598"/>
-            <a:ext cx="5325739" cy="628953"/>
+            <a:off x="1418063" y="1219050"/>
+            <a:ext cx="5811750" cy="686349"/>
           </a:xfrm>
           <a:prstGeom prst="rect">
             <a:avLst/>
@@ -6188,7 +6188,7 @@
               <a:buNone/>
             </a:pPr>
             <a:r>
-              <a:rPr lang="en-US" sz="2410" b="1" dirty="0">
+              <a:rPr lang="en-US" sz="2640" b="1" dirty="0">
                 <a:solidFill>
                   <a:srgbClr val="FFFFFF"/>
                 </a:solidFill>
@@ -6198,7 +6198,7 @@
               </a:rPr>
               <a:t>Hôm nay đọc bảng thông số thật</a:t>
             </a:r>
-            <a:endParaRPr lang="en-US" sz="2410" dirty="0"/>
+            <a:endParaRPr lang="en-US" sz="2640" dirty="0"/>
           </a:p>
           <a:p>
             <a:pPr indent="0" marL="0">
@@ -6208,7 +6208,7 @@
               <a:buNone/>
             </a:pPr>
             <a:r>
-              <a:rPr lang="en-US" sz="1350" dirty="0">
+              <a:rPr lang="en-US" sz="1470" dirty="0">
                 <a:solidFill>
                   <a:srgbClr val="C8D6E2"/>
                 </a:solidFill>
@@ -6218,7 +6218,7 @@
               </a:rPr>
               <a:t>今天來讀真正的規格表</a:t>
             </a:r>
-            <a:endParaRPr lang="en-US" sz="2410" dirty="0"/>
+            <a:endParaRPr lang="en-US" sz="2640" dirty="0"/>
           </a:p>
         </p:txBody>
       </p:sp>
@@ -6230,8 +6230,8 @@
         </p:nvSpPr>
         <p:spPr>
           <a:xfrm>
-            <a:off x="1681812" y="2163355"/>
-            <a:ext cx="974221" cy="29227"/>
+            <a:off x="1418063" y="2331867"/>
+            <a:ext cx="1063125" cy="31894"/>
           </a:xfrm>
           <a:prstGeom prst="rect">
             <a:avLst/>
@@ -6250,8 +6250,8 @@
         </p:nvSpPr>
         <p:spPr>
           <a:xfrm>
-            <a:off x="1681812" y="2306241"/>
-            <a:ext cx="5065947" cy="435079"/>
+            <a:off x="1418063" y="2487792"/>
+            <a:ext cx="5528250" cy="474783"/>
           </a:xfrm>
           <a:prstGeom prst="rect">
             <a:avLst/>
@@ -6270,7 +6270,7 @@
               <a:buNone/>
             </a:pPr>
             <a:r>
-              <a:rPr lang="en-US" sz="1030" dirty="0">
+              <a:rPr lang="en-US" sz="1120" dirty="0">
                 <a:solidFill>
                   <a:srgbClr val="C8D6E2"/>
                 </a:solidFill>
@@ -6280,7 +6280,7 @@
               </a:rPr>
               <a:t>Ba thanh trượt hai tuần vừa rồi — hôm nay tìm chúng trên datasheet của hãng</a:t>
             </a:r>
-            <a:endParaRPr lang="en-US" sz="1030" dirty="0"/>
+            <a:endParaRPr lang="en-US" sz="1120" dirty="0"/>
           </a:p>
           <a:p>
             <a:pPr indent="0" marL="0">
@@ -6290,7 +6290,7 @@
               <a:buNone/>
             </a:pPr>
             <a:r>
-              <a:rPr lang="en-US" sz="890" dirty="0">
+              <a:rPr lang="en-US" sz="970" dirty="0">
                 <a:solidFill>
                   <a:srgbClr val="8AA0B4"/>
                 </a:solidFill>
@@ -6300,7 +6300,7 @@
               </a:rPr>
               <a:t>前兩週拉的那三個滑桿，今天在廠商的規格表上把它們找出來</a:t>
             </a:r>
-            <a:endParaRPr lang="en-US" sz="1030" dirty="0"/>
+            <a:endParaRPr lang="en-US" sz="1120" dirty="0"/>
           </a:p>
         </p:txBody>
       </p:sp>
@@ -6312,8 +6312,8 @@
         </p:nvSpPr>
         <p:spPr>
           <a:xfrm>
-            <a:off x="1681812" y="2793278"/>
-            <a:ext cx="4221622" cy="272782"/>
+            <a:off x="1418063" y="3019275"/>
+            <a:ext cx="4606875" cy="297675"/>
           </a:xfrm>
           <a:prstGeom prst="roundRect">
             <a:avLst>
@@ -6334,8 +6334,8 @@
         </p:nvSpPr>
         <p:spPr>
           <a:xfrm>
-            <a:off x="1772740" y="2825752"/>
-            <a:ext cx="4039768" cy="207834"/>
+            <a:off x="1517288" y="3054713"/>
+            <a:ext cx="4408425" cy="226800"/>
           </a:xfrm>
           <a:prstGeom prst="rect">
             <a:avLst/>
@@ -6351,7 +6351,7 @@
               <a:buNone/>
             </a:pPr>
             <a:r>
-              <a:rPr lang="en-US" sz="750" b="1" dirty="0">
+              <a:rPr lang="en-US" sz="810" b="1" dirty="0">
                 <a:solidFill>
                   <a:srgbClr val="9FD6CE"/>
                 </a:solidFill>
@@ -6361,7 +6361,7 @@
               </a:rPr>
               <a:t>工具｜Công cụ： ch-neural.github.io/MITUST-Principles-of-Self-Driving-Cars/week5/spec/</a:t>
             </a:r>
-            <a:endParaRPr lang="en-US" sz="750" dirty="0"/>
+            <a:endParaRPr lang="en-US" sz="810" dirty="0"/>
           </a:p>
         </p:txBody>
       </p:sp>
@@ -6373,8 +6373,8 @@
         </p:nvSpPr>
         <p:spPr>
           <a:xfrm>
-            <a:off x="1681812" y="3131008"/>
-            <a:ext cx="4936051" cy="194844"/>
+            <a:off x="1418063" y="3387825"/>
+            <a:ext cx="5386500" cy="212625"/>
           </a:xfrm>
           <a:prstGeom prst="rect">
             <a:avLst/>
@@ -6390,7 +6390,7 @@
               <a:buNone/>
             </a:pPr>
             <a:r>
-              <a:rPr lang="en-US" sz="820" dirty="0">
+              <a:rPr lang="en-US" sz="890" dirty="0">
                 <a:solidFill>
                   <a:srgbClr val="8AA0B4"/>
                 </a:solidFill>
@@ -6400,7 +6400,7 @@
               </a:rPr>
               <a:t>第五週 第 1 節　2026/10/08（四）09:10–10:00　CH Tseng</a:t>
             </a:r>
-            <a:endParaRPr lang="en-US" sz="820" dirty="0"/>
+            <a:endParaRPr lang="en-US" sz="890" dirty="0"/>
           </a:p>
         </p:txBody>
       </p:sp>
@@ -6412,8 +6412,8 @@
         </p:nvSpPr>
         <p:spPr>
           <a:xfrm>
-            <a:off x="1577895" y="247315"/>
-            <a:ext cx="1571743" cy="532574"/>
+            <a:off x="1304663" y="240975"/>
+            <a:ext cx="1715175" cy="581175"/>
           </a:xfrm>
           <a:prstGeom prst="roundRect">
             <a:avLst>
@@ -6442,8 +6442,8 @@
         </p:blipFill>
         <p:spPr>
           <a:xfrm>
-            <a:off x="1681812" y="364222"/>
-            <a:ext cx="1363909" cy="301350"/>
+            <a:off x="502920" y="475488"/>
+            <a:ext cx="1920240" cy="424269"/>
           </a:xfrm>
           <a:prstGeom prst="rect">
             <a:avLst/>
@@ -6469,8 +6469,8 @@
       </p:nvGrpSpPr>
       <p:grpSpPr>
         <a:xfrm>
-          <a:off x="0" y="0"/>
-          <a:ext cx="0" cy="0"/>
+          <a:off x="942514" y="0"/>
+          <a:ext cx="1" cy="1"/>
           <a:chOff x="0" y="0"/>
           <a:chExt cx="0" cy="0"/>
         </a:xfrm>
@@ -6483,8 +6483,8 @@
         </p:nvSpPr>
         <p:spPr>
           <a:xfrm>
-            <a:off x="1681812" y="325253"/>
-            <a:ext cx="5780375" cy="194844"/>
+            <a:off x="1341758" y="333913"/>
+            <a:ext cx="6460485" cy="217769"/>
           </a:xfrm>
           <a:prstGeom prst="rect">
             <a:avLst/>
@@ -6500,7 +6500,7 @@
               <a:buNone/>
             </a:pPr>
             <a:r>
-              <a:rPr lang="en-US" sz="890" b="1" dirty="0">
+              <a:rPr lang="en-US" sz="990" b="1" dirty="0">
                 <a:solidFill>
                   <a:srgbClr val="007F72"/>
                 </a:solidFill>
@@ -6510,7 +6510,7 @@
               </a:rPr>
               <a:t>Câu trả lời · 答案</a:t>
             </a:r>
-            <a:endParaRPr lang="en-US" sz="890" dirty="0"/>
+            <a:endParaRPr lang="en-US" sz="990" dirty="0"/>
           </a:p>
         </p:txBody>
       </p:sp>
@@ -6522,8 +6522,8 @@
         </p:nvSpPr>
         <p:spPr>
           <a:xfrm>
-            <a:off x="1681812" y="809116"/>
-            <a:ext cx="1753597" cy="1786071"/>
+            <a:off x="1341758" y="874706"/>
+            <a:ext cx="1959922" cy="1996217"/>
           </a:xfrm>
           <a:prstGeom prst="roundRect">
             <a:avLst>
@@ -6549,8 +6549,8 @@
         </p:nvSpPr>
         <p:spPr>
           <a:xfrm flipH="1" flipV="1">
-            <a:off x="2258548" y="941642"/>
-            <a:ext cx="300063" cy="444862"/>
+            <a:off x="1986350" y="1022825"/>
+            <a:ext cx="335369" cy="497204"/>
           </a:xfrm>
           <a:prstGeom prst="line">
             <a:avLst/>
@@ -6572,8 +6572,8 @@
         </p:nvSpPr>
         <p:spPr>
           <a:xfrm flipH="1" flipV="1">
-            <a:off x="2401724" y="873350"/>
-            <a:ext cx="156887" cy="513154"/>
+            <a:off x="2146373" y="946498"/>
+            <a:ext cx="175346" cy="573531"/>
           </a:xfrm>
           <a:prstGeom prst="line">
             <a:avLst/>
@@ -6595,8 +6595,8 @@
         </p:nvSpPr>
         <p:spPr>
           <a:xfrm flipV="1">
-            <a:off x="2558611" y="849903"/>
-            <a:ext cx="0" cy="536601"/>
+            <a:off x="2321719" y="920292"/>
+            <a:ext cx="1" cy="599736"/>
           </a:xfrm>
           <a:prstGeom prst="line">
             <a:avLst/>
@@ -6618,8 +6618,8 @@
         </p:nvSpPr>
         <p:spPr>
           <a:xfrm flipV="1">
-            <a:off x="2558611" y="873350"/>
-            <a:ext cx="156887" cy="513154"/>
+            <a:off x="2321719" y="946498"/>
+            <a:ext cx="175346" cy="573531"/>
           </a:xfrm>
           <a:prstGeom prst="line">
             <a:avLst/>
@@ -6641,8 +6641,8 @@
         </p:nvSpPr>
         <p:spPr>
           <a:xfrm flipV="1">
-            <a:off x="2558611" y="941642"/>
-            <a:ext cx="300063" cy="444862"/>
+            <a:off x="2321719" y="1022825"/>
+            <a:ext cx="335369" cy="497204"/>
           </a:xfrm>
           <a:prstGeom prst="line">
             <a:avLst/>
@@ -6664,8 +6664,8 @@
         </p:nvSpPr>
         <p:spPr>
           <a:xfrm>
-            <a:off x="2514602" y="1342495"/>
-            <a:ext cx="88018" cy="88018"/>
+            <a:off x="2272532" y="1470842"/>
+            <a:ext cx="98373" cy="98373"/>
           </a:xfrm>
           <a:prstGeom prst="ellipse">
             <a:avLst/>
@@ -6684,8 +6684,8 @@
         </p:nvSpPr>
         <p:spPr>
           <a:xfrm flipH="1" flipV="1">
-            <a:off x="2033736" y="2032492"/>
-            <a:ext cx="524875" cy="111566"/>
+            <a:off x="1735088" y="2242023"/>
+            <a:ext cx="586630" cy="124693"/>
           </a:xfrm>
           <a:prstGeom prst="line">
             <a:avLst/>
@@ -6707,8 +6707,8 @@
         </p:nvSpPr>
         <p:spPr>
           <a:xfrm flipH="1" flipV="1">
-            <a:off x="2220917" y="1727041"/>
-            <a:ext cx="337694" cy="417017"/>
+            <a:off x="1944293" y="1900633"/>
+            <a:ext cx="377426" cy="466083"/>
           </a:xfrm>
           <a:prstGeom prst="line">
             <a:avLst/>
@@ -6730,8 +6730,8 @@
         </p:nvSpPr>
         <p:spPr>
           <a:xfrm flipV="1">
-            <a:off x="2558611" y="1607457"/>
-            <a:ext cx="0" cy="536601"/>
+            <a:off x="2321719" y="1766979"/>
+            <a:ext cx="1" cy="599736"/>
           </a:xfrm>
           <a:prstGeom prst="line">
             <a:avLst/>
@@ -6753,8 +6753,8 @@
         </p:nvSpPr>
         <p:spPr>
           <a:xfrm flipV="1">
-            <a:off x="2558611" y="1727041"/>
-            <a:ext cx="337694" cy="417017"/>
+            <a:off x="2321719" y="1900633"/>
+            <a:ext cx="377426" cy="466083"/>
           </a:xfrm>
           <a:prstGeom prst="line">
             <a:avLst/>
@@ -6776,8 +6776,8 @@
         </p:nvSpPr>
         <p:spPr>
           <a:xfrm flipV="1">
-            <a:off x="2558611" y="2032492"/>
-            <a:ext cx="524875" cy="111566"/>
+            <a:off x="2321719" y="2242023"/>
+            <a:ext cx="586630" cy="124693"/>
           </a:xfrm>
           <a:prstGeom prst="line">
             <a:avLst/>
@@ -6799,8 +6799,8 @@
         </p:nvSpPr>
         <p:spPr>
           <a:xfrm>
-            <a:off x="2514602" y="2100049"/>
-            <a:ext cx="88018" cy="88018"/>
+            <a:off x="2272532" y="2317528"/>
+            <a:ext cx="98373" cy="98373"/>
           </a:xfrm>
           <a:prstGeom prst="ellipse">
             <a:avLst/>
@@ -6819,8 +6819,8 @@
         </p:nvSpPr>
         <p:spPr>
           <a:xfrm>
-            <a:off x="3760150" y="963355"/>
-            <a:ext cx="3702038" cy="714266"/>
+            <a:off x="3664629" y="1047093"/>
+            <a:ext cx="4137614" cy="798305"/>
           </a:xfrm>
           <a:prstGeom prst="rect">
             <a:avLst/>
@@ -6839,7 +6839,7 @@
               <a:buNone/>
             </a:pPr>
             <a:r>
-              <a:rPr lang="en-US" sz="1630" b="1" dirty="0">
+              <a:rPr lang="en-US" sz="1830" b="1" dirty="0">
                 <a:solidFill>
                   <a:srgbClr val="0B1F3A"/>
                 </a:solidFill>
@@ -6849,7 +6849,7 @@
               </a:rPr>
               <a:t>Góc nhìn không nằm ở cảm biến — nó nằm ở ống kính</a:t>
             </a:r>
-            <a:endParaRPr lang="en-US" sz="1630" dirty="0"/>
+            <a:endParaRPr lang="en-US" sz="1830" dirty="0"/>
           </a:p>
           <a:p>
             <a:pPr indent="0" marL="0">
@@ -6859,7 +6859,7 @@
               <a:buNone/>
             </a:pPr>
             <a:r>
-              <a:rPr lang="en-US" sz="990" dirty="0">
+              <a:rPr lang="en-US" sz="1110" dirty="0">
                 <a:solidFill>
                   <a:srgbClr val="007F72"/>
                 </a:solidFill>
@@ -6869,7 +6869,7 @@
               </a:rPr>
               <a:t>視野不在感測器身上——它在鏡頭身上</a:t>
             </a:r>
-            <a:endParaRPr lang="en-US" sz="1630" dirty="0"/>
+            <a:endParaRPr lang="en-US" sz="1830" dirty="0"/>
           </a:p>
         </p:txBody>
       </p:sp>
@@ -6881,8 +6881,8 @@
         </p:nvSpPr>
         <p:spPr>
           <a:xfrm>
-            <a:off x="3760150" y="1742570"/>
-            <a:ext cx="3702038" cy="763326"/>
+            <a:off x="3664629" y="1917989"/>
+            <a:ext cx="4137614" cy="853137"/>
           </a:xfrm>
           <a:prstGeom prst="rect">
             <a:avLst/>
@@ -6901,7 +6901,7 @@
               <a:buNone/>
             </a:pPr>
             <a:r>
-              <a:rPr lang="en-US" sz="890" dirty="0">
+              <a:rPr lang="en-US" sz="990" dirty="0">
                 <a:solidFill>
                   <a:srgbClr val="5F7183"/>
                 </a:solidFill>
@@ -6911,7 +6911,7 @@
               </a:rPr>
               <a:t>Cùng một con chip, lắp ống kính 8 mm thì nhìn được 42°, lắp ống kính 3.6 mm thì nhìn được 81°. Hãng bán chip không biết bạn sẽ lắp ống kính nào, nên họ không thể viết.</a:t>
             </a:r>
-            <a:endParaRPr lang="en-US" sz="890" dirty="0"/>
+            <a:endParaRPr lang="en-US" sz="990" dirty="0"/>
           </a:p>
           <a:p>
             <a:pPr indent="0" marL="0">
@@ -6921,7 +6921,7 @@
               <a:buNone/>
             </a:pPr>
             <a:r>
-              <a:rPr lang="en-US" sz="820" dirty="0">
+              <a:rPr lang="en-US" sz="910" dirty="0">
                 <a:solidFill>
                   <a:srgbClr val="5F7183"/>
                 </a:solidFill>
@@ -6931,7 +6931,7 @@
               </a:rPr>
               <a:t>同一塊晶片，配 8 mm 的鏡頭看得到 42 度，配 3.6 mm 的鏡頭看得到 81 度。賣晶片的廠商不知道你要配什麼鏡頭，所以寫不出來。</a:t>
             </a:r>
-            <a:endParaRPr lang="en-US" sz="890" dirty="0"/>
+            <a:endParaRPr lang="en-US" sz="990" dirty="0"/>
           </a:p>
         </p:txBody>
       </p:sp>
@@ -6943,8 +6943,8 @@
         </p:nvSpPr>
         <p:spPr>
           <a:xfrm>
-            <a:off x="1681812" y="2806268"/>
-            <a:ext cx="5780375" cy="441647"/>
+            <a:off x="1341758" y="3106840"/>
+            <a:ext cx="6460485" cy="493610"/>
           </a:xfrm>
           <a:prstGeom prst="roundRect">
             <a:avLst>
@@ -6970,8 +6970,8 @@
         </p:nvSpPr>
         <p:spPr>
           <a:xfrm>
-            <a:off x="1811708" y="2858226"/>
-            <a:ext cx="5520583" cy="350719"/>
+            <a:off x="1486937" y="3164912"/>
+            <a:ext cx="6170126" cy="391984"/>
           </a:xfrm>
           <a:prstGeom prst="rect">
             <a:avLst/>
@@ -6990,7 +6990,7 @@
               <a:buNone/>
             </a:pPr>
             <a:r>
-              <a:rPr lang="en-US" sz="890" b="1" dirty="0">
+              <a:rPr lang="en-US" sz="990" b="1" dirty="0">
                 <a:solidFill>
                   <a:srgbClr val="7A4E00"/>
                 </a:solidFill>
@@ -7000,7 +7000,7 @@
               </a:rPr>
               <a:t>Còn tầm đo: camera không hề đo khoảng cách — nó tính ra, như tuần 3 đã làm.</a:t>
             </a:r>
-            <a:endParaRPr lang="en-US" sz="890" dirty="0"/>
+            <a:endParaRPr lang="en-US" sz="990" dirty="0"/>
           </a:p>
           <a:p>
             <a:pPr indent="0" marL="0">
@@ -7010,7 +7010,7 @@
               <a:buNone/>
             </a:pPr>
             <a:r>
-              <a:rPr lang="en-US" sz="820" dirty="0">
+              <a:rPr lang="en-US" sz="910" dirty="0">
                 <a:solidFill>
                   <a:srgbClr val="7A4E00"/>
                 </a:solidFill>
@@ -7020,7 +7020,7 @@
               </a:rPr>
               <a:t>至於測距：相機根本不量距離，它是算出來的，第三週算過那條式子。</a:t>
             </a:r>
-            <a:endParaRPr lang="en-US" sz="890" dirty="0"/>
+            <a:endParaRPr lang="en-US" sz="990" dirty="0"/>
           </a:p>
         </p:txBody>
       </p:sp>
@@ -7040,8 +7040,8 @@
         </p:blipFill>
         <p:spPr>
           <a:xfrm>
-            <a:off x="6663327" y="3338842"/>
-            <a:ext cx="779376" cy="172200"/>
+            <a:off x="7882128" y="109728"/>
+            <a:ext cx="1097280" cy="242439"/>
           </a:xfrm>
           <a:prstGeom prst="rect">
             <a:avLst/>
@@ -7056,8 +7056,8 @@
         </p:nvSpPr>
         <p:spPr>
           <a:xfrm>
-            <a:off x="1402536" y="3390800"/>
-            <a:ext cx="584532" cy="181855"/>
+            <a:off x="1029622" y="101626"/>
+            <a:ext cx="653307" cy="203251"/>
           </a:xfrm>
           <a:prstGeom prst="rect">
             <a:avLst/>
@@ -7073,7 +7073,7 @@
               <a:buNone/>
             </a:pPr>
             <a:r>
-              <a:rPr lang="en-US" sz="640" dirty="0">
+              <a:rPr lang="en-US" sz="710" dirty="0">
                 <a:solidFill>
                   <a:srgbClr val="5F7183"/>
                 </a:solidFill>
@@ -7083,7 +7083,7 @@
               </a:rPr>
               <a:t>10 / 14</a:t>
             </a:r>
-            <a:endParaRPr lang="en-US" sz="640" dirty="0"/>
+            <a:endParaRPr lang="en-US" sz="710" dirty="0"/>
           </a:p>
         </p:txBody>
       </p:sp>
@@ -7095,8 +7095,8 @@
         </p:nvSpPr>
         <p:spPr>
           <a:xfrm>
-            <a:off x="2006553" y="3390800"/>
-            <a:ext cx="1428857" cy="181855"/>
+            <a:off x="1704706" y="101626"/>
+            <a:ext cx="1596974" cy="203251"/>
           </a:xfrm>
           <a:prstGeom prst="rect">
             <a:avLst/>
@@ -7112,7 +7112,7 @@
               <a:buNone/>
             </a:pPr>
             <a:r>
-              <a:rPr lang="en-US" sz="640" dirty="0">
+              <a:rPr lang="en-US" sz="710" dirty="0">
                 <a:solidFill>
                   <a:srgbClr val="5F7183"/>
                 </a:solidFill>
@@ -7122,7 +7122,7 @@
               </a:rPr>
               <a:t>Tiết 1 · 第 1 節</a:t>
             </a:r>
-            <a:endParaRPr lang="en-US" sz="640" dirty="0"/>
+            <a:endParaRPr lang="en-US" sz="710" dirty="0"/>
           </a:p>
         </p:txBody>
       </p:sp>
@@ -7145,8 +7145,8 @@
       </p:nvGrpSpPr>
       <p:grpSpPr>
         <a:xfrm>
-          <a:off x="0" y="0"/>
-          <a:ext cx="0" cy="0"/>
+          <a:off x="942514" y="0"/>
+          <a:ext cx="1" cy="1"/>
           <a:chOff x="0" y="0"/>
           <a:chExt cx="0" cy="0"/>
         </a:xfrm>
@@ -7159,8 +7159,8 @@
         </p:nvSpPr>
         <p:spPr>
           <a:xfrm>
-            <a:off x="1681812" y="325253"/>
-            <a:ext cx="5780375" cy="194844"/>
+            <a:off x="1341758" y="333913"/>
+            <a:ext cx="6460485" cy="217769"/>
           </a:xfrm>
           <a:prstGeom prst="rect">
             <a:avLst/>
@@ -7176,7 +7176,7 @@
               <a:buNone/>
             </a:pPr>
             <a:r>
-              <a:rPr lang="en-US" sz="890" b="1" dirty="0">
+              <a:rPr lang="en-US" sz="990" b="1" dirty="0">
                 <a:solidFill>
                   <a:srgbClr val="007F72"/>
                 </a:solidFill>
@@ -7186,7 +7186,7 @@
               </a:rPr>
               <a:t>Đọc kỹ · 一行容易讀錯的字</a:t>
             </a:r>
-            <a:endParaRPr lang="en-US" sz="890" dirty="0"/>
+            <a:endParaRPr lang="en-US" sz="990" dirty="0"/>
           </a:p>
         </p:txBody>
       </p:sp>
@@ -7198,8 +7198,8 @@
         </p:nvSpPr>
         <p:spPr>
           <a:xfrm>
-            <a:off x="1681812" y="809116"/>
-            <a:ext cx="1753597" cy="1786071"/>
+            <a:off x="1341758" y="874706"/>
+            <a:ext cx="1959922" cy="1996217"/>
           </a:xfrm>
           <a:prstGeom prst="roundRect">
             <a:avLst>
@@ -7225,8 +7225,8 @@
         </p:nvSpPr>
         <p:spPr>
           <a:xfrm>
-            <a:off x="1992784" y="1320218"/>
-            <a:ext cx="1131655" cy="69442"/>
+            <a:off x="1689317" y="1445944"/>
+            <a:ext cx="1264804" cy="77613"/>
           </a:xfrm>
           <a:prstGeom prst="roundRect">
             <a:avLst>
@@ -7247,8 +7247,8 @@
         </p:nvSpPr>
         <p:spPr>
           <a:xfrm>
-            <a:off x="2171767" y="1307592"/>
-            <a:ext cx="94694" cy="94694"/>
+            <a:off x="1889360" y="1431832"/>
+            <a:ext cx="105836" cy="105836"/>
           </a:xfrm>
           <a:prstGeom prst="ellipse">
             <a:avLst/>
@@ -7267,8 +7267,8 @@
         </p:nvSpPr>
         <p:spPr>
           <a:xfrm>
-            <a:off x="2352832" y="1307592"/>
-            <a:ext cx="94694" cy="94694"/>
+            <a:off x="2091728" y="1431832"/>
+            <a:ext cx="105836" cy="105836"/>
           </a:xfrm>
           <a:prstGeom prst="ellipse">
             <a:avLst/>
@@ -7287,8 +7287,8 @@
         </p:nvSpPr>
         <p:spPr>
           <a:xfrm>
-            <a:off x="2533897" y="1307592"/>
-            <a:ext cx="94694" cy="94694"/>
+            <a:off x="2294097" y="1431832"/>
+            <a:ext cx="105836" cy="105836"/>
           </a:xfrm>
           <a:prstGeom prst="ellipse">
             <a:avLst/>
@@ -7307,8 +7307,8 @@
         </p:nvSpPr>
         <p:spPr>
           <a:xfrm>
-            <a:off x="2714962" y="1307592"/>
-            <a:ext cx="94694" cy="94694"/>
+            <a:off x="2496465" y="1431832"/>
+            <a:ext cx="105836" cy="105836"/>
           </a:xfrm>
           <a:prstGeom prst="ellipse">
             <a:avLst/>
@@ -7327,8 +7327,8 @@
         </p:nvSpPr>
         <p:spPr>
           <a:xfrm>
-            <a:off x="1992784" y="1667430"/>
-            <a:ext cx="1131655" cy="69442"/>
+            <a:off x="1689317" y="1834008"/>
+            <a:ext cx="1264804" cy="77613"/>
           </a:xfrm>
           <a:prstGeom prst="roundRect">
             <a:avLst>
@@ -7349,8 +7349,8 @@
         </p:nvSpPr>
         <p:spPr>
           <a:xfrm>
-            <a:off x="2171767" y="1654804"/>
-            <a:ext cx="94694" cy="94694"/>
+            <a:off x="1889360" y="1819897"/>
+            <a:ext cx="105836" cy="105836"/>
           </a:xfrm>
           <a:prstGeom prst="ellipse">
             <a:avLst/>
@@ -7369,8 +7369,8 @@
         </p:nvSpPr>
         <p:spPr>
           <a:xfrm>
-            <a:off x="2352832" y="1654804"/>
-            <a:ext cx="94694" cy="94694"/>
+            <a:off x="2091728" y="1819897"/>
+            <a:ext cx="105836" cy="105836"/>
           </a:xfrm>
           <a:prstGeom prst="ellipse">
             <a:avLst/>
@@ -7389,8 +7389,8 @@
         </p:nvSpPr>
         <p:spPr>
           <a:xfrm>
-            <a:off x="2533897" y="1654804"/>
-            <a:ext cx="94694" cy="94694"/>
+            <a:off x="2294097" y="1819897"/>
+            <a:ext cx="105836" cy="105836"/>
           </a:xfrm>
           <a:prstGeom prst="ellipse">
             <a:avLst/>
@@ -7409,8 +7409,8 @@
         </p:nvSpPr>
         <p:spPr>
           <a:xfrm>
-            <a:off x="2714962" y="1654804"/>
-            <a:ext cx="94694" cy="94694"/>
+            <a:off x="2496465" y="1819897"/>
+            <a:ext cx="105836" cy="105836"/>
           </a:xfrm>
           <a:prstGeom prst="ellipse">
             <a:avLst/>
@@ -7429,8 +7429,8 @@
         </p:nvSpPr>
         <p:spPr>
           <a:xfrm>
-            <a:off x="2830208" y="1702151"/>
-            <a:ext cx="203698" cy="0"/>
+            <a:off x="2625271" y="1872815"/>
+            <a:ext cx="227665" cy="1"/>
           </a:xfrm>
           <a:prstGeom prst="line">
             <a:avLst/>
@@ -7453,8 +7453,8 @@
         </p:nvSpPr>
         <p:spPr>
           <a:xfrm>
-            <a:off x="1992784" y="2014642"/>
-            <a:ext cx="1131655" cy="69442"/>
+            <a:off x="1689317" y="2222073"/>
+            <a:ext cx="1264804" cy="77613"/>
           </a:xfrm>
           <a:prstGeom prst="roundRect">
             <a:avLst>
@@ -7475,8 +7475,8 @@
         </p:nvSpPr>
         <p:spPr>
           <a:xfrm>
-            <a:off x="2171767" y="2002016"/>
-            <a:ext cx="94694" cy="94694"/>
+            <a:off x="1889360" y="2207961"/>
+            <a:ext cx="105836" cy="105836"/>
           </a:xfrm>
           <a:prstGeom prst="ellipse">
             <a:avLst/>
@@ -7495,8 +7495,8 @@
         </p:nvSpPr>
         <p:spPr>
           <a:xfrm>
-            <a:off x="2352832" y="2002016"/>
-            <a:ext cx="94694" cy="94694"/>
+            <a:off x="2091728" y="2207961"/>
+            <a:ext cx="105836" cy="105836"/>
           </a:xfrm>
           <a:prstGeom prst="ellipse">
             <a:avLst/>
@@ -7515,8 +7515,8 @@
         </p:nvSpPr>
         <p:spPr>
           <a:xfrm>
-            <a:off x="2533897" y="2002016"/>
-            <a:ext cx="94694" cy="94694"/>
+            <a:off x="2294097" y="2207961"/>
+            <a:ext cx="105836" cy="105836"/>
           </a:xfrm>
           <a:prstGeom prst="ellipse">
             <a:avLst/>
@@ -7535,8 +7535,8 @@
         </p:nvSpPr>
         <p:spPr>
           <a:xfrm>
-            <a:off x="2714962" y="2002016"/>
-            <a:ext cx="94694" cy="94694"/>
+            <a:off x="2496465" y="2207961"/>
+            <a:ext cx="105836" cy="105836"/>
           </a:xfrm>
           <a:prstGeom prst="ellipse">
             <a:avLst/>
@@ -7555,8 +7555,8 @@
         </p:nvSpPr>
         <p:spPr>
           <a:xfrm>
-            <a:off x="3760150" y="963355"/>
-            <a:ext cx="3702038" cy="714266"/>
+            <a:off x="3664629" y="1047093"/>
+            <a:ext cx="4137614" cy="798305"/>
           </a:xfrm>
           <a:prstGeom prst="rect">
             <a:avLst/>
@@ -7575,7 +7575,7 @@
               <a:buNone/>
             </a:pPr>
             <a:r>
-              <a:rPr lang="en-US" sz="1630" b="1" dirty="0">
+              <a:rPr lang="en-US" sz="1830" b="1" dirty="0">
                 <a:solidFill>
                   <a:srgbClr val="0B1F3A"/>
                 </a:solidFill>
@@ -7585,7 +7585,7 @@
               </a:rPr>
               <a:t>Có dòng ghi «configurable»: đó là chế độ, không phải con số cố định</a:t>
             </a:r>
-            <a:endParaRPr lang="en-US" sz="1630" dirty="0"/>
+            <a:endParaRPr lang="en-US" sz="1830" dirty="0"/>
           </a:p>
           <a:p>
             <a:pPr indent="0" marL="0">
@@ -7595,7 +7595,7 @@
               <a:buNone/>
             </a:pPr>
             <a:r>
-              <a:rPr lang="en-US" sz="990" dirty="0">
+              <a:rPr lang="en-US" sz="1110" dirty="0">
                 <a:solidFill>
                   <a:srgbClr val="007F72"/>
                 </a:solidFill>
@@ -7605,7 +7605,7 @@
               </a:rPr>
               <a:t>有些行寫著「可設定」：那是模式，不是固定的數字</a:t>
             </a:r>
-            <a:endParaRPr lang="en-US" sz="1630" dirty="0"/>
+            <a:endParaRPr lang="en-US" sz="1830" dirty="0"/>
           </a:p>
         </p:txBody>
       </p:sp>
@@ -7617,8 +7617,8 @@
         </p:nvSpPr>
         <p:spPr>
           <a:xfrm>
-            <a:off x="3760150" y="1742570"/>
-            <a:ext cx="3702038" cy="763326"/>
+            <a:off x="3664629" y="1917989"/>
+            <a:ext cx="4137614" cy="853137"/>
           </a:xfrm>
           <a:prstGeom prst="rect">
             <a:avLst/>
@@ -7637,7 +7637,7 @@
               <a:buNone/>
             </a:pPr>
             <a:r>
-              <a:rPr lang="en-US" sz="890" dirty="0">
+              <a:rPr lang="en-US" sz="990" dirty="0">
                 <a:solidFill>
                   <a:srgbClr val="5F7183"/>
                 </a:solidFill>
@@ -7647,7 +7647,7 @@
               </a:rPr>
               <a:t>OS1: mỗi vòng 512 / 1024 / 2048 điểm, quay 10 hoặc 20 Hz. Cùng một con lidar, chọn chế độ khác thì số điểm trên người ở 40 m đổi hẳn.</a:t>
             </a:r>
-            <a:endParaRPr lang="en-US" sz="890" dirty="0"/>
+            <a:endParaRPr lang="en-US" sz="990" dirty="0"/>
           </a:p>
           <a:p>
             <a:pPr indent="0" marL="0">
@@ -7657,7 +7657,7 @@
               <a:buNone/>
             </a:pPr>
             <a:r>
-              <a:rPr lang="en-US" sz="820" dirty="0">
+              <a:rPr lang="en-US" sz="910" dirty="0">
                 <a:solidFill>
                   <a:srgbClr val="5F7183"/>
                 </a:solidFill>
@@ -7667,7 +7667,7 @@
               </a:rPr>
               <a:t>OS1 的每圈點數可以選 512 / 1024 / 2048，轉速可以選 10 或 20 Hz。同一顆光達，換一個模式，四十公尺行人身上的點數就整個不一樣。</a:t>
             </a:r>
-            <a:endParaRPr lang="en-US" sz="890" dirty="0"/>
+            <a:endParaRPr lang="en-US" sz="990" dirty="0"/>
           </a:p>
         </p:txBody>
       </p:sp>
@@ -7679,8 +7679,8 @@
         </p:nvSpPr>
         <p:spPr>
           <a:xfrm>
-            <a:off x="1681812" y="2806268"/>
-            <a:ext cx="5780375" cy="441647"/>
+            <a:off x="1341758" y="3106840"/>
+            <a:ext cx="6460485" cy="493610"/>
           </a:xfrm>
           <a:prstGeom prst="roundRect">
             <a:avLst>
@@ -7706,8 +7706,8 @@
         </p:nvSpPr>
         <p:spPr>
           <a:xfrm>
-            <a:off x="1811708" y="2858226"/>
-            <a:ext cx="5520583" cy="350719"/>
+            <a:off x="1486937" y="3164912"/>
+            <a:ext cx="6170126" cy="391984"/>
           </a:xfrm>
           <a:prstGeom prst="rect">
             <a:avLst/>
@@ -7726,7 +7726,7 @@
               <a:buNone/>
             </a:pPr>
             <a:r>
-              <a:rPr lang="en-US" sz="890" b="1" dirty="0">
+              <a:rPr lang="en-US" sz="990" b="1" dirty="0">
                 <a:solidFill>
                   <a:srgbClr val="7A4E00"/>
                 </a:solidFill>
@@ -7736,7 +7736,7 @@
               </a:rPr>
               <a:t>Tiết 3 các bạn sẽ tự đổi: 9 điểm thành 18 điểm, kết luận lật ngược.</a:t>
             </a:r>
-            <a:endParaRPr lang="en-US" sz="890" dirty="0"/>
+            <a:endParaRPr lang="en-US" sz="990" dirty="0"/>
           </a:p>
           <a:p>
             <a:pPr indent="0" marL="0">
@@ -7746,7 +7746,7 @@
               <a:buNone/>
             </a:pPr>
             <a:r>
-              <a:rPr lang="en-US" sz="820" dirty="0">
+              <a:rPr lang="en-US" sz="910" dirty="0">
                 <a:solidFill>
                   <a:srgbClr val="7A4E00"/>
                 </a:solidFill>
@@ -7756,7 +7756,7 @@
               </a:rPr>
               <a:t>第三節各位會自己切：9 個點變成 18 個點，結論整個翻過來。</a:t>
             </a:r>
-            <a:endParaRPr lang="en-US" sz="890" dirty="0"/>
+            <a:endParaRPr lang="en-US" sz="990" dirty="0"/>
           </a:p>
         </p:txBody>
       </p:sp>
@@ -7776,8 +7776,8 @@
         </p:blipFill>
         <p:spPr>
           <a:xfrm>
-            <a:off x="6663327" y="3338842"/>
-            <a:ext cx="779376" cy="172200"/>
+            <a:off x="7882128" y="109728"/>
+            <a:ext cx="1097280" cy="242439"/>
           </a:xfrm>
           <a:prstGeom prst="rect">
             <a:avLst/>
@@ -7792,8 +7792,8 @@
         </p:nvSpPr>
         <p:spPr>
           <a:xfrm>
-            <a:off x="1402536" y="3390800"/>
-            <a:ext cx="584532" cy="181855"/>
+            <a:off x="1029622" y="101626"/>
+            <a:ext cx="653307" cy="203251"/>
           </a:xfrm>
           <a:prstGeom prst="rect">
             <a:avLst/>
@@ -7809,7 +7809,7 @@
               <a:buNone/>
             </a:pPr>
             <a:r>
-              <a:rPr lang="en-US" sz="640" dirty="0">
+              <a:rPr lang="en-US" sz="710" dirty="0">
                 <a:solidFill>
                   <a:srgbClr val="5F7183"/>
                 </a:solidFill>
@@ -7819,7 +7819,7 @@
               </a:rPr>
               <a:t>11 / 14</a:t>
             </a:r>
-            <a:endParaRPr lang="en-US" sz="640" dirty="0"/>
+            <a:endParaRPr lang="en-US" sz="710" dirty="0"/>
           </a:p>
         </p:txBody>
       </p:sp>
@@ -7831,8 +7831,8 @@
         </p:nvSpPr>
         <p:spPr>
           <a:xfrm>
-            <a:off x="2006553" y="3390800"/>
-            <a:ext cx="1428857" cy="181855"/>
+            <a:off x="1704706" y="101626"/>
+            <a:ext cx="1596974" cy="203251"/>
           </a:xfrm>
           <a:prstGeom prst="rect">
             <a:avLst/>
@@ -7848,7 +7848,7 @@
               <a:buNone/>
             </a:pPr>
             <a:r>
-              <a:rPr lang="en-US" sz="640" dirty="0">
+              <a:rPr lang="en-US" sz="710" dirty="0">
                 <a:solidFill>
                   <a:srgbClr val="5F7183"/>
                 </a:solidFill>
@@ -7858,7 +7858,7 @@
               </a:rPr>
               <a:t>Tiết 1 · 第 1 節</a:t>
             </a:r>
-            <a:endParaRPr lang="en-US" sz="640" dirty="0"/>
+            <a:endParaRPr lang="en-US" sz="710" dirty="0"/>
           </a:p>
         </p:txBody>
       </p:sp>
@@ -7881,8 +7881,8 @@
       </p:nvGrpSpPr>
       <p:grpSpPr>
         <a:xfrm>
-          <a:off x="0" y="0"/>
-          <a:ext cx="0" cy="0"/>
+          <a:off x="124436" y="0"/>
+          <a:ext cx="1" cy="1"/>
           <a:chOff x="0" y="0"/>
           <a:chExt cx="0" cy="0"/>
         </a:xfrm>
@@ -7895,8 +7895,8 @@
         </p:nvSpPr>
         <p:spPr>
           <a:xfrm>
-            <a:off x="1681812" y="234326"/>
-            <a:ext cx="5780375" cy="597522"/>
+            <a:off x="613668" y="284644"/>
+            <a:ext cx="7916664" cy="818352"/>
           </a:xfrm>
           <a:prstGeom prst="rect">
             <a:avLst/>
@@ -7915,7 +7915,7 @@
               <a:buNone/>
             </a:pPr>
             <a:r>
-              <a:rPr lang="en-US" sz="1560" b="1" dirty="0">
+              <a:rPr lang="en-US" sz="2140" b="1" dirty="0">
                 <a:solidFill>
                   <a:srgbClr val="0B1F3A"/>
                 </a:solidFill>
@@ -7925,7 +7925,7 @@
               </a:rPr>
               <a:t>«90 m» hay «170 m»: cùng một con lidar, hai con số</a:t>
             </a:r>
-            <a:endParaRPr lang="en-US" sz="1560" dirty="0"/>
+            <a:endParaRPr lang="en-US" sz="2140" dirty="0"/>
           </a:p>
           <a:p>
             <a:pPr indent="0" marL="0">
@@ -7935,7 +7935,7 @@
               <a:buNone/>
             </a:pPr>
             <a:r>
-              <a:rPr lang="en-US" sz="960" dirty="0">
+              <a:rPr lang="en-US" sz="1310" dirty="0">
                 <a:solidFill>
                   <a:srgbClr val="5F7183"/>
                 </a:solidFill>
@@ -7945,7 +7945,7 @@
               </a:rPr>
               <a:t>「90 公尺」還是「170 公尺」：同一顆光達，兩個數字</a:t>
             </a:r>
-            <a:endParaRPr lang="en-US" sz="1560" dirty="0"/>
+            <a:endParaRPr lang="en-US" sz="2140" dirty="0"/>
           </a:p>
         </p:txBody>
       </p:sp>
@@ -7957,8 +7957,8 @@
         </p:nvSpPr>
         <p:spPr>
           <a:xfrm>
-            <a:off x="1681812" y="831848"/>
-            <a:ext cx="5780375" cy="506595"/>
+            <a:off x="613668" y="1102996"/>
+            <a:ext cx="7916664" cy="693820"/>
           </a:xfrm>
           <a:prstGeom prst="roundRect">
             <a:avLst>
@@ -7979,8 +7979,8 @@
         </p:nvSpPr>
         <p:spPr>
           <a:xfrm>
-            <a:off x="1785729" y="883806"/>
-            <a:ext cx="5572542" cy="402678"/>
+            <a:off x="755990" y="1174157"/>
+            <a:ext cx="7632020" cy="551498"/>
           </a:xfrm>
           <a:prstGeom prst="rect">
             <a:avLst/>
@@ -7999,7 +7999,7 @@
               <a:buNone/>
             </a:pPr>
             <a:r>
-              <a:rPr lang="en-US" sz="820" b="1" dirty="0">
+              <a:rPr lang="en-US" sz="1120" b="1" dirty="0">
                 <a:solidFill>
                   <a:srgbClr val="007F72"/>
                 </a:solidFill>
@@ -8009,7 +8009,7 @@
               </a:rPr>
               <a:t>Chép nguyên văn từ datasheet OS1. Chú ý phần chữ nhỏ phía sau.</a:t>
             </a:r>
-            <a:endParaRPr lang="en-US" sz="820" dirty="0"/>
+            <a:endParaRPr lang="en-US" sz="1120" dirty="0"/>
           </a:p>
           <a:p>
             <a:pPr indent="0" marL="0">
@@ -8019,7 +8019,7 @@
               <a:buNone/>
             </a:pPr>
             <a:r>
-              <a:rPr lang="en-US" sz="710" dirty="0">
+              <a:rPr lang="en-US" sz="970" dirty="0">
                 <a:solidFill>
                   <a:srgbClr val="007F72"/>
                 </a:solidFill>
@@ -8029,7 +8029,7 @@
               </a:rPr>
               <a:t>照抄 OS1 規格表上的兩行。請注意後面那一串小字。</a:t>
             </a:r>
-            <a:endParaRPr lang="en-US" sz="820" dirty="0"/>
+            <a:endParaRPr lang="en-US" sz="1120" dirty="0"/>
           </a:p>
         </p:txBody>
       </p:sp>
@@ -8048,18 +8048,18 @@
           </p:nvPr>
         </p:nvGraphicFramePr>
         <p:xfrm>
-          <a:off x="1681812" y="1416380"/>
-          <a:ext cx="5780375" cy="914400"/>
+          <a:off x="613668" y="1903557"/>
+          <a:ext cx="7916664" cy="889513"/>
         </p:xfrm>
         <a:graphic>
           <a:graphicData uri="http://schemas.openxmlformats.org/drawingml/2006/table">
             <a:tbl>
               <a:tblPr/>
               <a:tblGrid>
-                <a:gridCol w="1445094"/>
-                <a:gridCol w="1445094"/>
-                <a:gridCol w="1445094"/>
-                <a:gridCol w="1445094"/>
+                <a:gridCol w="2034540"/>
+                <a:gridCol w="2034540"/>
+                <a:gridCol w="2034540"/>
+                <a:gridCol w="2034540"/>
               </a:tblGrid>
               <a:tr h="384048">
                 <a:tc>
@@ -8071,7 +8071,7 @@
                         <a:buNone/>
                       </a:pPr>
                       <a:r>
-                        <a:rPr lang="en-US" sz="1100" b="1" dirty="0">
+                        <a:rPr lang="en-US" sz="1070" b="1" dirty="0">
                           <a:solidFill>
                             <a:srgbClr val="FFFFFF"/>
                           </a:solidFill>
@@ -8081,14 +8081,14 @@
                         </a:rPr>
                         <a:t>Dòng trên datasheet</a:t>
                       </a:r>
-                      <a:endParaRPr lang="en-US" sz="1200" dirty="0"/>
+                      <a:endParaRPr lang="en-US" sz="1170" dirty="0"/>
                     </a:p>
                     <a:p>
                       <a:pPr algn="l" indent="0" marL="0">
                         <a:buNone/>
                       </a:pPr>
                       <a:r>
-                        <a:rPr lang="en-US" sz="950" dirty="0">
+                        <a:rPr lang="en-US" sz="920" dirty="0">
                           <a:solidFill>
                             <a:srgbClr val="CFE0EC"/>
                           </a:solidFill>
@@ -8098,7 +8098,7 @@
                         </a:rPr>
                         <a:t>規格表上那一行</a:t>
                       </a:r>
-                      <a:endParaRPr lang="en-US" sz="1200" dirty="0"/>
+                      <a:endParaRPr lang="en-US" sz="1170" dirty="0"/>
                     </a:p>
                   </a:txBody>
                   <a:tcPr marL="63500" marR="63500" marT="38100" marB="38100" anchor="ctr">
@@ -8152,7 +8152,7 @@
                         <a:buNone/>
                       </a:pPr>
                       <a:r>
-                        <a:rPr lang="en-US" sz="1100" b="1" dirty="0">
+                        <a:rPr lang="en-US" sz="1070" b="1" dirty="0">
                           <a:solidFill>
                             <a:srgbClr val="FFFFFF"/>
                           </a:solidFill>
@@ -8162,14 +8162,14 @@
                         </a:rPr>
                         <a:t>Con số</a:t>
                       </a:r>
-                      <a:endParaRPr lang="en-US" sz="1200" dirty="0"/>
+                      <a:endParaRPr lang="en-US" sz="1170" dirty="0"/>
                     </a:p>
                     <a:p>
                       <a:pPr algn="l" indent="0" marL="0">
                         <a:buNone/>
                       </a:pPr>
                       <a:r>
-                        <a:rPr lang="en-US" sz="950" dirty="0">
+                        <a:rPr lang="en-US" sz="920" dirty="0">
                           <a:solidFill>
                             <a:srgbClr val="CFE0EC"/>
                           </a:solidFill>
@@ -8179,7 +8179,7 @@
                         </a:rPr>
                         <a:t>數字</a:t>
                       </a:r>
-                      <a:endParaRPr lang="en-US" sz="1200" dirty="0"/>
+                      <a:endParaRPr lang="en-US" sz="1170" dirty="0"/>
                     </a:p>
                   </a:txBody>
                   <a:tcPr marL="63500" marR="63500" marT="38100" marB="38100" anchor="ctr">
@@ -8233,7 +8233,7 @@
                         <a:buNone/>
                       </a:pPr>
                       <a:r>
-                        <a:rPr lang="en-US" sz="1100" b="1" dirty="0">
+                        <a:rPr lang="en-US" sz="1070" b="1" dirty="0">
                           <a:solidFill>
                             <a:srgbClr val="FFFFFF"/>
                           </a:solidFill>
@@ -8243,14 +8243,14 @@
                         </a:rPr>
                         <a:t>Vật gì</a:t>
                       </a:r>
-                      <a:endParaRPr lang="en-US" sz="1200" dirty="0"/>
+                      <a:endParaRPr lang="en-US" sz="1170" dirty="0"/>
                     </a:p>
                     <a:p>
                       <a:pPr algn="l" indent="0" marL="0">
                         <a:buNone/>
                       </a:pPr>
                       <a:r>
-                        <a:rPr lang="en-US" sz="950" dirty="0">
+                        <a:rPr lang="en-US" sz="920" dirty="0">
                           <a:solidFill>
                             <a:srgbClr val="CFE0EC"/>
                           </a:solidFill>
@@ -8260,7 +8260,7 @@
                         </a:rPr>
                         <a:t>量的是什麼東西</a:t>
                       </a:r>
-                      <a:endParaRPr lang="en-US" sz="1200" dirty="0"/>
+                      <a:endParaRPr lang="en-US" sz="1170" dirty="0"/>
                     </a:p>
                   </a:txBody>
                   <a:tcPr marL="63500" marR="63500" marT="38100" marB="38100" anchor="ctr">
@@ -8314,7 +8314,7 @@
                         <a:buNone/>
                       </a:pPr>
                       <a:r>
-                        <a:rPr lang="en-US" sz="1100" b="1" dirty="0">
+                        <a:rPr lang="en-US" sz="1070" b="1" dirty="0">
                           <a:solidFill>
                             <a:srgbClr val="FFFFFF"/>
                           </a:solidFill>
@@ -8324,14 +8324,14 @@
                         </a:rPr>
                         <a:t>Ngoài đường là ai</a:t>
                       </a:r>
-                      <a:endParaRPr lang="en-US" sz="1200" dirty="0"/>
+                      <a:endParaRPr lang="en-US" sz="1170" dirty="0"/>
                     </a:p>
                     <a:p>
                       <a:pPr algn="l" indent="0" marL="0">
                         <a:buNone/>
                       </a:pPr>
                       <a:r>
-                        <a:rPr lang="en-US" sz="950" dirty="0">
+                        <a:rPr lang="en-US" sz="920" dirty="0">
                           <a:solidFill>
                             <a:srgbClr val="CFE0EC"/>
                           </a:solidFill>
@@ -8341,7 +8341,7 @@
                         </a:rPr>
                         <a:t>路上是誰</a:t>
                       </a:r>
-                      <a:endParaRPr lang="en-US" sz="1200" dirty="0"/>
+                      <a:endParaRPr lang="en-US" sz="1170" dirty="0"/>
                     </a:p>
                   </a:txBody>
                   <a:tcPr marL="63500" marR="63500" marT="38100" marB="38100" anchor="ctr">
@@ -8397,7 +8397,7 @@
                         <a:buNone/>
                       </a:pPr>
                       <a:r>
-                        <a:rPr lang="en-US" sz="1100" b="1" dirty="0">
+                        <a:rPr lang="en-US" sz="1070" b="1" dirty="0">
                           <a:solidFill>
                             <a:srgbClr val="0B1F3A"/>
                           </a:solidFill>
@@ -8407,14 +8407,14 @@
                         </a:rPr>
                         <a:t>Range (80% reflectivity)</a:t>
                       </a:r>
-                      <a:endParaRPr lang="en-US" sz="1200" dirty="0"/>
+                      <a:endParaRPr lang="en-US" sz="1170" dirty="0"/>
                     </a:p>
                     <a:p>
                       <a:pPr algn="l" indent="0" marL="0">
                         <a:buNone/>
                       </a:pPr>
                       <a:r>
-                        <a:rPr lang="en-US" sz="950" dirty="0">
+                        <a:rPr lang="en-US" sz="920" dirty="0">
                           <a:solidFill>
                             <a:srgbClr val="5F7183"/>
                           </a:solidFill>
@@ -8424,7 +8424,7 @@
                         </a:rPr>
                         <a:t>Range（80% 反射率）</a:t>
                       </a:r>
-                      <a:endParaRPr lang="en-US" sz="1200" dirty="0"/>
+                      <a:endParaRPr lang="en-US" sz="1170" dirty="0"/>
                     </a:p>
                   </a:txBody>
                   <a:tcPr marL="63500" marR="63500" marT="38100" marB="38100" anchor="ctr">
@@ -8475,7 +8475,7 @@
                         <a:buNone/>
                       </a:pPr>
                       <a:r>
-                        <a:rPr lang="en-US" sz="1100" dirty="0">
+                        <a:rPr lang="en-US" sz="1070" dirty="0">
                           <a:solidFill>
                             <a:srgbClr val="1A2733"/>
                           </a:solidFill>
@@ -8485,7 +8485,7 @@
                         </a:rPr>
                         <a:t>170 m</a:t>
                       </a:r>
-                      <a:endParaRPr lang="en-US" sz="1200" dirty="0"/>
+                      <a:endParaRPr lang="en-US" sz="1170" dirty="0"/>
                     </a:p>
                   </a:txBody>
                   <a:tcPr marL="63500" marR="63500" marT="38100" marB="38100" anchor="ctr">
@@ -8536,7 +8536,7 @@
                         <a:buNone/>
                       </a:pPr>
                       <a:r>
-                        <a:rPr lang="en-US" sz="1100" dirty="0">
+                        <a:rPr lang="en-US" sz="1070" dirty="0">
                           <a:solidFill>
                             <a:srgbClr val="1A2733"/>
                           </a:solidFill>
@@ -8546,14 +8546,14 @@
                         </a:rPr>
                         <a:t>Vật sáng, phản xạ mạnh</a:t>
                       </a:r>
-                      <a:endParaRPr lang="en-US" sz="1200" dirty="0"/>
+                      <a:endParaRPr lang="en-US" sz="1170" dirty="0"/>
                     </a:p>
                     <a:p>
                       <a:pPr algn="l" indent="0" marL="0">
                         <a:buNone/>
                       </a:pPr>
                       <a:r>
-                        <a:rPr lang="en-US" sz="950" dirty="0">
+                        <a:rPr lang="en-US" sz="920" dirty="0">
                           <a:solidFill>
                             <a:srgbClr val="5F7183"/>
                           </a:solidFill>
@@ -8563,7 +8563,7 @@
                         </a:rPr>
                         <a:t>亮色、反射強的東西</a:t>
                       </a:r>
-                      <a:endParaRPr lang="en-US" sz="1200" dirty="0"/>
+                      <a:endParaRPr lang="en-US" sz="1170" dirty="0"/>
                     </a:p>
                   </a:txBody>
                   <a:tcPr marL="63500" marR="63500" marT="38100" marB="38100" anchor="ctr">
@@ -8614,7 +8614,7 @@
                         <a:buNone/>
                       </a:pPr>
                       <a:r>
-                        <a:rPr lang="en-US" sz="1100" dirty="0">
+                        <a:rPr lang="en-US" sz="1070" dirty="0">
                           <a:solidFill>
                             <a:srgbClr val="1A2733"/>
                           </a:solidFill>
@@ -8624,14 +8624,14 @@
                         </a:rPr>
                         <a:t>Xe trắng, áo phản quang</a:t>
                       </a:r>
-                      <a:endParaRPr lang="en-US" sz="1200" dirty="0"/>
+                      <a:endParaRPr lang="en-US" sz="1170" dirty="0"/>
                     </a:p>
                     <a:p>
                       <a:pPr algn="l" indent="0" marL="0">
                         <a:buNone/>
                       </a:pPr>
                       <a:r>
-                        <a:rPr lang="en-US" sz="950" dirty="0">
+                        <a:rPr lang="en-US" sz="920" dirty="0">
                           <a:solidFill>
                             <a:srgbClr val="5F7183"/>
                           </a:solidFill>
@@ -8641,7 +8641,7 @@
                         </a:rPr>
                         <a:t>白色的車、反光背心</a:t>
                       </a:r>
-                      <a:endParaRPr lang="en-US" sz="1200" dirty="0"/>
+                      <a:endParaRPr lang="en-US" sz="1170" dirty="0"/>
                     </a:p>
                   </a:txBody>
                   <a:tcPr marL="63500" marR="63500" marT="38100" marB="38100" anchor="ctr">
@@ -8694,7 +8694,7 @@
                         <a:buNone/>
                       </a:pPr>
                       <a:r>
-                        <a:rPr lang="en-US" sz="1100" b="1" dirty="0">
+                        <a:rPr lang="en-US" sz="1070" b="1" dirty="0">
                           <a:solidFill>
                             <a:srgbClr val="0B1F3A"/>
                           </a:solidFill>
@@ -8704,14 +8704,14 @@
                         </a:rPr>
                         <a:t>Range (10% reflectivity)</a:t>
                       </a:r>
-                      <a:endParaRPr lang="en-US" sz="1200" dirty="0"/>
+                      <a:endParaRPr lang="en-US" sz="1170" dirty="0"/>
                     </a:p>
                     <a:p>
                       <a:pPr algn="l" indent="0" marL="0">
                         <a:buNone/>
                       </a:pPr>
                       <a:r>
-                        <a:rPr lang="en-US" sz="950" dirty="0">
+                        <a:rPr lang="en-US" sz="920" dirty="0">
                           <a:solidFill>
                             <a:srgbClr val="5F7183"/>
                           </a:solidFill>
@@ -8721,7 +8721,7 @@
                         </a:rPr>
                         <a:t>Range（10% 反射率）</a:t>
                       </a:r>
-                      <a:endParaRPr lang="en-US" sz="1200" dirty="0"/>
+                      <a:endParaRPr lang="en-US" sz="1170" dirty="0"/>
                     </a:p>
                   </a:txBody>
                   <a:tcPr marL="63500" marR="63500" marT="38100" marB="38100" anchor="ctr">
@@ -8772,7 +8772,7 @@
                         <a:buNone/>
                       </a:pPr>
                       <a:r>
-                        <a:rPr lang="en-US" sz="1100" dirty="0">
+                        <a:rPr lang="en-US" sz="1070" dirty="0">
                           <a:solidFill>
                             <a:srgbClr val="1A2733"/>
                           </a:solidFill>
@@ -8782,7 +8782,7 @@
                         </a:rPr>
                         <a:t>90 m</a:t>
                       </a:r>
-                      <a:endParaRPr lang="en-US" sz="1200" dirty="0"/>
+                      <a:endParaRPr lang="en-US" sz="1170" dirty="0"/>
                     </a:p>
                   </a:txBody>
                   <a:tcPr marL="63500" marR="63500" marT="38100" marB="38100" anchor="ctr">
@@ -8833,7 +8833,7 @@
                         <a:buNone/>
                       </a:pPr>
                       <a:r>
-                        <a:rPr lang="en-US" sz="1100" dirty="0">
+                        <a:rPr lang="en-US" sz="1070" dirty="0">
                           <a:solidFill>
                             <a:srgbClr val="1A2733"/>
                           </a:solidFill>
@@ -8843,14 +8843,14 @@
                         </a:rPr>
                         <a:t>Vật tối, phản xạ yếu</a:t>
                       </a:r>
-                      <a:endParaRPr lang="en-US" sz="1200" dirty="0"/>
+                      <a:endParaRPr lang="en-US" sz="1170" dirty="0"/>
                     </a:p>
                     <a:p>
                       <a:pPr algn="l" indent="0" marL="0">
                         <a:buNone/>
                       </a:pPr>
                       <a:r>
-                        <a:rPr lang="en-US" sz="950" dirty="0">
+                        <a:rPr lang="en-US" sz="920" dirty="0">
                           <a:solidFill>
                             <a:srgbClr val="5F7183"/>
                           </a:solidFill>
@@ -8860,7 +8860,7 @@
                         </a:rPr>
                         <a:t>深色、反射弱的東西</a:t>
                       </a:r>
-                      <a:endParaRPr lang="en-US" sz="1200" dirty="0"/>
+                      <a:endParaRPr lang="en-US" sz="1170" dirty="0"/>
                     </a:p>
                   </a:txBody>
                   <a:tcPr marL="63500" marR="63500" marT="38100" marB="38100" anchor="ctr">
@@ -8911,7 +8911,7 @@
                         <a:buNone/>
                       </a:pPr>
                       <a:r>
-                        <a:rPr lang="en-US" sz="1100" dirty="0">
+                        <a:rPr lang="en-US" sz="1070" dirty="0">
                           <a:solidFill>
                             <a:srgbClr val="1A2733"/>
                           </a:solidFill>
@@ -8921,14 +8921,14 @@
                         </a:rPr>
                         <a:t>Xe đen, áo mưa sẫm màu</a:t>
                       </a:r>
-                      <a:endParaRPr lang="en-US" sz="1200" dirty="0"/>
+                      <a:endParaRPr lang="en-US" sz="1170" dirty="0"/>
                     </a:p>
                     <a:p>
                       <a:pPr algn="l" indent="0" marL="0">
                         <a:buNone/>
                       </a:pPr>
                       <a:r>
-                        <a:rPr lang="en-US" sz="950" dirty="0">
+                        <a:rPr lang="en-US" sz="920" dirty="0">
                           <a:solidFill>
                             <a:srgbClr val="5F7183"/>
                           </a:solidFill>
@@ -8938,7 +8938,7 @@
                         </a:rPr>
                         <a:t>黑色的車、深色雨衣</a:t>
                       </a:r>
-                      <a:endParaRPr lang="en-US" sz="1200" dirty="0"/>
+                      <a:endParaRPr lang="en-US" sz="1170" dirty="0"/>
                     </a:p>
                   </a:txBody>
                   <a:tcPr marL="63500" marR="63500" marT="38100" marB="38100" anchor="ctr">
@@ -8993,8 +8993,8 @@
         </p:nvSpPr>
         <p:spPr>
           <a:xfrm>
-            <a:off x="1681812" y="2330631"/>
-            <a:ext cx="5780375" cy="324740"/>
+            <a:off x="613668" y="3155694"/>
+            <a:ext cx="7916664" cy="444756"/>
           </a:xfrm>
           <a:prstGeom prst="rect">
             <a:avLst/>
@@ -9013,7 +9013,7 @@
               <a:buNone/>
             </a:pPr>
             <a:r>
-              <a:rPr lang="en-US" sz="850" b="1" dirty="0">
+              <a:rPr lang="en-US" sz="1170" b="1" dirty="0">
                 <a:solidFill>
                   <a:srgbClr val="007F72"/>
                 </a:solidFill>
@@ -9023,7 +9023,7 @@
               </a:rPr>
               <a:t>Quảng cáo hay ghi 170 m. Con số phải dùng để thiết kế là 90 m.</a:t>
             </a:r>
-            <a:endParaRPr lang="en-US" sz="850" dirty="0"/>
+            <a:endParaRPr lang="en-US" sz="1170" dirty="0"/>
           </a:p>
           <a:p>
             <a:pPr indent="0" marL="0">
@@ -9033,7 +9033,7 @@
               <a:buNone/>
             </a:pPr>
             <a:r>
-              <a:rPr lang="en-US" sz="780" dirty="0">
+              <a:rPr lang="en-US" sz="1070" dirty="0">
                 <a:solidFill>
                   <a:srgbClr val="007F72"/>
                 </a:solidFill>
@@ -9043,7 +9043,7 @@
               </a:rPr>
               <a:t>廣告上會寫 170 公尺。真正設計的時候要用的是 90 公尺。</a:t>
             </a:r>
-            <a:endParaRPr lang="en-US" sz="850" dirty="0"/>
+            <a:endParaRPr lang="en-US" sz="1170" dirty="0"/>
           </a:p>
         </p:txBody>
       </p:sp>
@@ -9063,8 +9063,8 @@
         </p:blipFill>
         <p:spPr>
           <a:xfrm>
-            <a:off x="6663327" y="3338842"/>
-            <a:ext cx="779376" cy="172200"/>
+            <a:off x="7882128" y="109728"/>
+            <a:ext cx="1097280" cy="242439"/>
           </a:xfrm>
           <a:prstGeom prst="rect">
             <a:avLst/>
@@ -9079,8 +9079,8 @@
         </p:nvSpPr>
         <p:spPr>
           <a:xfrm>
-            <a:off x="1402536" y="3390800"/>
-            <a:ext cx="584532" cy="181855"/>
+            <a:off x="231177" y="124532"/>
+            <a:ext cx="800562" cy="249064"/>
           </a:xfrm>
           <a:prstGeom prst="rect">
             <a:avLst/>
@@ -9096,7 +9096,7 @@
               <a:buNone/>
             </a:pPr>
             <a:r>
-              <a:rPr lang="en-US" sz="640" dirty="0">
+              <a:rPr lang="en-US" sz="880" dirty="0">
                 <a:solidFill>
                   <a:srgbClr val="5F7183"/>
                 </a:solidFill>
@@ -9106,7 +9106,7 @@
               </a:rPr>
               <a:t>12 / 14</a:t>
             </a:r>
-            <a:endParaRPr lang="en-US" sz="640" dirty="0"/>
+            <a:endParaRPr lang="en-US" sz="880" dirty="0"/>
           </a:p>
         </p:txBody>
       </p:sp>
@@ -9118,8 +9118,8 @@
         </p:nvSpPr>
         <p:spPr>
           <a:xfrm>
-            <a:off x="2006553" y="3390800"/>
-            <a:ext cx="1428857" cy="181855"/>
+            <a:off x="1058424" y="124532"/>
+            <a:ext cx="1956928" cy="249064"/>
           </a:xfrm>
           <a:prstGeom prst="rect">
             <a:avLst/>
@@ -9135,7 +9135,7 @@
               <a:buNone/>
             </a:pPr>
             <a:r>
-              <a:rPr lang="en-US" sz="640" dirty="0">
+              <a:rPr lang="en-US" sz="880" dirty="0">
                 <a:solidFill>
                   <a:srgbClr val="5F7183"/>
                 </a:solidFill>
@@ -9145,7 +9145,7 @@
               </a:rPr>
               <a:t>Tiết 1 · 第 1 節</a:t>
             </a:r>
-            <a:endParaRPr lang="en-US" sz="640" dirty="0"/>
+            <a:endParaRPr lang="en-US" sz="880" dirty="0"/>
           </a:p>
         </p:txBody>
       </p:sp>
@@ -9175,8 +9175,8 @@
       </p:nvGrpSpPr>
       <p:grpSpPr>
         <a:xfrm>
-          <a:off x="0" y="0"/>
-          <a:ext cx="0" cy="0"/>
+          <a:off x="925172" y="0"/>
+          <a:ext cx="1" cy="1"/>
           <a:chOff x="0" y="0"/>
           <a:chExt cx="0" cy="0"/>
         </a:xfrm>
@@ -9189,8 +9189,8 @@
         </p:nvSpPr>
         <p:spPr>
           <a:xfrm>
-            <a:off x="6130753" y="-947729"/>
-            <a:ext cx="2987610" cy="2987610"/>
+            <a:off x="6322478" y="-1094048"/>
+            <a:ext cx="3355082" cy="3355082"/>
           </a:xfrm>
           <a:prstGeom prst="ellipse">
             <a:avLst/>
@@ -9214,8 +9214,8 @@
         </p:nvSpPr>
         <p:spPr>
           <a:xfrm>
-            <a:off x="7104973" y="1520297"/>
-            <a:ext cx="1688649" cy="1688649"/>
+            <a:off x="7416526" y="1677541"/>
+            <a:ext cx="1896351" cy="1896351"/>
           </a:xfrm>
           <a:prstGeom prst="ellipse">
             <a:avLst/>
@@ -9236,8 +9236,8 @@
         </p:nvSpPr>
         <p:spPr>
           <a:xfrm>
-            <a:off x="1681812" y="364222"/>
-            <a:ext cx="4806155" cy="194844"/>
+            <a:off x="1326323" y="379270"/>
+            <a:ext cx="5397306" cy="218810"/>
           </a:xfrm>
           <a:prstGeom prst="rect">
             <a:avLst/>
@@ -9253,7 +9253,7 @@
               <a:buNone/>
             </a:pPr>
             <a:r>
-              <a:rPr lang="en-US" sz="890" b="1" dirty="0">
+              <a:rPr lang="en-US" sz="1000" b="1" dirty="0">
                 <a:solidFill>
                   <a:srgbClr val="FFB020"/>
                 </a:solidFill>
@@ -9263,7 +9263,7 @@
               </a:rPr>
               <a:t>Lên máy · 上機（第一輪）</a:t>
             </a:r>
-            <a:endParaRPr lang="en-US" sz="890" dirty="0"/>
+            <a:endParaRPr lang="en-US" sz="1000" dirty="0"/>
           </a:p>
         </p:txBody>
       </p:sp>
@@ -9275,8 +9275,8 @@
         </p:nvSpPr>
         <p:spPr>
           <a:xfrm>
-            <a:off x="1681812" y="585045"/>
-            <a:ext cx="5715427" cy="870304"/>
+            <a:off x="1326323" y="627254"/>
+            <a:ext cx="6418418" cy="977350"/>
           </a:xfrm>
           <a:prstGeom prst="rect">
             <a:avLst/>
@@ -9295,7 +9295,7 @@
               <a:buNone/>
             </a:pPr>
             <a:r>
-              <a:rPr lang="en-US" sz="1630" b="1" dirty="0">
+              <a:rPr lang="en-US" sz="1830" b="1" dirty="0">
                 <a:solidFill>
                   <a:srgbClr val="FFFFFF"/>
                 </a:solidFill>
@@ -9305,7 +9305,7 @@
               </a:rPr>
               <a:t>Mỗi người tự làm: chọn OS1, tìm bốn con số, bấm kiểm tra.</a:t>
             </a:r>
-            <a:endParaRPr lang="en-US" sz="1630" dirty="0"/>
+            <a:endParaRPr lang="en-US" sz="1830" dirty="0"/>
           </a:p>
           <a:p>
             <a:pPr indent="0" marL="0">
@@ -9315,7 +9315,7 @@
               <a:buNone/>
             </a:pPr>
             <a:r>
-              <a:rPr lang="en-US" sz="1070" dirty="0">
+              <a:rPr lang="en-US" sz="1200" dirty="0">
                 <a:solidFill>
                   <a:srgbClr val="AFC3D4"/>
                 </a:solidFill>
@@ -9325,7 +9325,7 @@
               </a:rPr>
               <a:t>每個人自己做：選 OS1，把四個數字找出來，按檢查。</a:t>
             </a:r>
-            <a:endParaRPr lang="en-US" sz="1630" dirty="0"/>
+            <a:endParaRPr lang="en-US" sz="1830" dirty="0"/>
           </a:p>
         </p:txBody>
       </p:sp>
@@ -9337,8 +9337,8 @@
         </p:nvSpPr>
         <p:spPr>
           <a:xfrm>
-            <a:off x="1681812" y="1362092"/>
-            <a:ext cx="5780375" cy="441647"/>
+            <a:off x="1326323" y="1499877"/>
+            <a:ext cx="6491354" cy="495969"/>
           </a:xfrm>
           <a:prstGeom prst="roundRect">
             <a:avLst>
@@ -9359,8 +9359,8 @@
         </p:nvSpPr>
         <p:spPr>
           <a:xfrm>
-            <a:off x="1798719" y="1466008"/>
-            <a:ext cx="233813" cy="233813"/>
+            <a:off x="1457609" y="1616575"/>
+            <a:ext cx="262572" cy="262572"/>
           </a:xfrm>
           <a:prstGeom prst="ellipse">
             <a:avLst/>
@@ -9379,8 +9379,8 @@
         </p:nvSpPr>
         <p:spPr>
           <a:xfrm>
-            <a:off x="1798719" y="1485493"/>
-            <a:ext cx="233813" cy="194844"/>
+            <a:off x="1457609" y="1638456"/>
+            <a:ext cx="262572" cy="218810"/>
           </a:xfrm>
           <a:prstGeom prst="rect">
             <a:avLst/>
@@ -9396,7 +9396,7 @@
               <a:buNone/>
             </a:pPr>
             <a:r>
-              <a:rPr lang="en-US" sz="850" b="1" dirty="0">
+              <a:rPr lang="en-US" sz="960" b="1" dirty="0">
                 <a:solidFill>
                   <a:srgbClr val="FFFFFF"/>
                 </a:solidFill>
@@ -9406,7 +9406,7 @@
               </a:rPr>
               <a:t>1</a:t>
             </a:r>
-            <a:endParaRPr lang="en-US" sz="850" dirty="0"/>
+            <a:endParaRPr lang="en-US" sz="960" dirty="0"/>
           </a:p>
         </p:txBody>
       </p:sp>
@@ -9418,8 +9418,8 @@
         </p:nvSpPr>
         <p:spPr>
           <a:xfrm>
-            <a:off x="2149438" y="1394566"/>
-            <a:ext cx="5182853" cy="389688"/>
+            <a:off x="1851466" y="1536345"/>
+            <a:ext cx="5820338" cy="437619"/>
           </a:xfrm>
           <a:prstGeom prst="rect">
             <a:avLst/>
@@ -9438,7 +9438,7 @@
               <a:buNone/>
             </a:pPr>
             <a:r>
-              <a:rPr lang="en-US" sz="890" b="1" dirty="0">
+              <a:rPr lang="en-US" sz="1000" b="1" dirty="0">
                 <a:solidFill>
                   <a:srgbClr val="FFFFFF"/>
                 </a:solidFill>
@@ -9448,7 +9448,7 @@
               </a:rPr>
               <a:t>Bốn câu: góc nhìn dọc · tầm đo với vật 10% · phân giải · tốc độ cập nhật</a:t>
             </a:r>
-            <a:endParaRPr lang="en-US" sz="890" dirty="0"/>
+            <a:endParaRPr lang="en-US" sz="1000" dirty="0"/>
           </a:p>
           <a:p>
             <a:pPr indent="0" marL="0">
@@ -9458,7 +9458,7 @@
               <a:buNone/>
             </a:pPr>
             <a:r>
-              <a:rPr lang="en-US" sz="820" dirty="0">
+              <a:rPr lang="en-US" sz="920" dirty="0">
                 <a:solidFill>
                   <a:srgbClr val="AFC3D4"/>
                 </a:solidFill>
@@ -9468,7 +9468,7 @@
               </a:rPr>
               <a:t>四題：垂直視野・對 10% 反射率的測距・解析度・更新率</a:t>
             </a:r>
-            <a:endParaRPr lang="en-US" sz="890" dirty="0"/>
+            <a:endParaRPr lang="en-US" sz="1000" dirty="0"/>
           </a:p>
         </p:txBody>
       </p:sp>
@@ -9480,8 +9480,8 @@
         </p:nvSpPr>
         <p:spPr>
           <a:xfrm>
-            <a:off x="1681812" y="1868686"/>
-            <a:ext cx="5780375" cy="441647"/>
+            <a:off x="1326323" y="2068782"/>
+            <a:ext cx="6491354" cy="495969"/>
           </a:xfrm>
           <a:prstGeom prst="roundRect">
             <a:avLst>
@@ -9502,8 +9502,8 @@
         </p:nvSpPr>
         <p:spPr>
           <a:xfrm>
-            <a:off x="1798719" y="1972603"/>
-            <a:ext cx="233813" cy="233813"/>
+            <a:off x="1457609" y="2185481"/>
+            <a:ext cx="262572" cy="262572"/>
           </a:xfrm>
           <a:prstGeom prst="ellipse">
             <a:avLst/>
@@ -9522,8 +9522,8 @@
         </p:nvSpPr>
         <p:spPr>
           <a:xfrm>
-            <a:off x="1798719" y="1992087"/>
-            <a:ext cx="233813" cy="194844"/>
+            <a:off x="1457609" y="2207362"/>
+            <a:ext cx="262572" cy="218810"/>
           </a:xfrm>
           <a:prstGeom prst="rect">
             <a:avLst/>
@@ -9539,7 +9539,7 @@
               <a:buNone/>
             </a:pPr>
             <a:r>
-              <a:rPr lang="en-US" sz="850" b="1" dirty="0">
+              <a:rPr lang="en-US" sz="960" b="1" dirty="0">
                 <a:solidFill>
                   <a:srgbClr val="FFFFFF"/>
                 </a:solidFill>
@@ -9549,7 +9549,7 @@
               </a:rPr>
               <a:t>2</a:t>
             </a:r>
-            <a:endParaRPr lang="en-US" sz="850" dirty="0"/>
+            <a:endParaRPr lang="en-US" sz="960" dirty="0"/>
           </a:p>
         </p:txBody>
       </p:sp>
@@ -9561,8 +9561,8 @@
         </p:nvSpPr>
         <p:spPr>
           <a:xfrm>
-            <a:off x="2149438" y="1901160"/>
-            <a:ext cx="5182853" cy="389688"/>
+            <a:off x="1851466" y="2105250"/>
+            <a:ext cx="5820338" cy="437619"/>
           </a:xfrm>
           <a:prstGeom prst="rect">
             <a:avLst/>
@@ -9581,7 +9581,7 @@
               <a:buNone/>
             </a:pPr>
             <a:r>
-              <a:rPr lang="en-US" sz="890" b="1" dirty="0">
+              <a:rPr lang="en-US" sz="1000" b="1" dirty="0">
                 <a:solidFill>
                   <a:srgbClr val="FFFFFF"/>
                 </a:solidFill>
@@ -9591,7 +9591,7 @@
               </a:rPr>
               <a:t>Sai thì công cụ nói sai ở đâu — đọc xong sửa lại, đừng đoán bừa</a:t>
             </a:r>
-            <a:endParaRPr lang="en-US" sz="890" dirty="0"/>
+            <a:endParaRPr lang="en-US" sz="1000" dirty="0"/>
           </a:p>
           <a:p>
             <a:pPr indent="0" marL="0">
@@ -9601,7 +9601,7 @@
               <a:buNone/>
             </a:pPr>
             <a:r>
-              <a:rPr lang="en-US" sz="820" dirty="0">
+              <a:rPr lang="en-US" sz="920" dirty="0">
                 <a:solidFill>
                   <a:srgbClr val="AFC3D4"/>
                 </a:solidFill>
@@ -9611,7 +9611,7 @@
               </a:rPr>
               <a:t>選錯的話工具會告訴你錯在哪——看完再改，不要亂猜</a:t>
             </a:r>
-            <a:endParaRPr lang="en-US" sz="890" dirty="0"/>
+            <a:endParaRPr lang="en-US" sz="1000" dirty="0"/>
           </a:p>
         </p:txBody>
       </p:sp>
@@ -9623,8 +9623,8 @@
         </p:nvSpPr>
         <p:spPr>
           <a:xfrm>
-            <a:off x="1681812" y="2375281"/>
-            <a:ext cx="5780375" cy="441647"/>
+            <a:off x="1326323" y="2637687"/>
+            <a:ext cx="6491354" cy="495969"/>
           </a:xfrm>
           <a:prstGeom prst="roundRect">
             <a:avLst>
@@ -9645,8 +9645,8 @@
         </p:nvSpPr>
         <p:spPr>
           <a:xfrm>
-            <a:off x="1798719" y="2479198"/>
-            <a:ext cx="233813" cy="233813"/>
+            <a:off x="1457609" y="2754386"/>
+            <a:ext cx="262572" cy="262572"/>
           </a:xfrm>
           <a:prstGeom prst="ellipse">
             <a:avLst/>
@@ -9665,8 +9665,8 @@
         </p:nvSpPr>
         <p:spPr>
           <a:xfrm>
-            <a:off x="1798719" y="2498682"/>
-            <a:ext cx="233813" cy="194844"/>
+            <a:off x="1457609" y="2776267"/>
+            <a:ext cx="262572" cy="218810"/>
           </a:xfrm>
           <a:prstGeom prst="rect">
             <a:avLst/>
@@ -9682,7 +9682,7 @@
               <a:buNone/>
             </a:pPr>
             <a:r>
-              <a:rPr lang="en-US" sz="850" b="1" dirty="0">
+              <a:rPr lang="en-US" sz="960" b="1" dirty="0">
                 <a:solidFill>
                   <a:srgbClr val="FFFFFF"/>
                 </a:solidFill>
@@ -9692,7 +9692,7 @@
               </a:rPr>
               <a:t>3</a:t>
             </a:r>
-            <a:endParaRPr lang="en-US" sz="850" dirty="0"/>
+            <a:endParaRPr lang="en-US" sz="960" dirty="0"/>
           </a:p>
         </p:txBody>
       </p:sp>
@@ -9704,8 +9704,8 @@
         </p:nvSpPr>
         <p:spPr>
           <a:xfrm>
-            <a:off x="2149438" y="2407755"/>
-            <a:ext cx="5182853" cy="389688"/>
+            <a:off x="1851466" y="2674156"/>
+            <a:ext cx="5820338" cy="437619"/>
           </a:xfrm>
           <a:prstGeom prst="rect">
             <a:avLst/>
@@ -9724,7 +9724,7 @@
               <a:buNone/>
             </a:pPr>
             <a:r>
-              <a:rPr lang="en-US" sz="890" b="1" dirty="0">
+              <a:rPr lang="en-US" sz="1000" b="1" dirty="0">
                 <a:solidFill>
                   <a:srgbClr val="FFFFFF"/>
                 </a:solidFill>
@@ -9734,7 +9734,7 @@
               </a:rPr>
               <a:t>Làm xong OS1 thì đổi sang AT128 làm lại một lượt</a:t>
             </a:r>
-            <a:endParaRPr lang="en-US" sz="890" dirty="0"/>
+            <a:endParaRPr lang="en-US" sz="1000" dirty="0"/>
           </a:p>
           <a:p>
             <a:pPr indent="0" marL="0">
@@ -9744,7 +9744,7 @@
               <a:buNone/>
             </a:pPr>
             <a:r>
-              <a:rPr lang="en-US" sz="820" dirty="0">
+              <a:rPr lang="en-US" sz="920" dirty="0">
                 <a:solidFill>
                   <a:srgbClr val="AFC3D4"/>
                 </a:solidFill>
@@ -9754,7 +9754,7 @@
               </a:rPr>
               <a:t>OS1 做完，換 AT128 再做一次</a:t>
             </a:r>
-            <a:endParaRPr lang="en-US" sz="890" dirty="0"/>
+            <a:endParaRPr lang="en-US" sz="1000" dirty="0"/>
           </a:p>
         </p:txBody>
       </p:sp>
@@ -9766,8 +9766,8 @@
         </p:nvSpPr>
         <p:spPr>
           <a:xfrm>
-            <a:off x="1681812" y="2907855"/>
-            <a:ext cx="5715427" cy="324740"/>
+            <a:off x="1326323" y="3235767"/>
+            <a:ext cx="6418418" cy="364683"/>
           </a:xfrm>
           <a:prstGeom prst="rect">
             <a:avLst/>
@@ -9786,7 +9786,7 @@
               <a:buNone/>
             </a:pPr>
             <a:r>
-              <a:rPr lang="en-US" sz="890" b="1" dirty="0">
+              <a:rPr lang="en-US" sz="1000" b="1" dirty="0">
                 <a:solidFill>
                   <a:srgbClr val="FFB020"/>
                 </a:solidFill>
@@ -9796,7 +9796,7 @@
               </a:rPr>
               <a:t>Hai câu của camera sẽ khiến nhiều người bực mình. Đó là chủ ý.</a:t>
             </a:r>
-            <a:endParaRPr lang="en-US" sz="890" dirty="0"/>
+            <a:endParaRPr lang="en-US" sz="1000" dirty="0"/>
           </a:p>
           <a:p>
             <a:pPr indent="0" marL="0">
@@ -9806,7 +9806,7 @@
               <a:buNone/>
             </a:pPr>
             <a:r>
-              <a:rPr lang="en-US" sz="820" dirty="0">
+              <a:rPr lang="en-US" sz="920" dirty="0">
                 <a:solidFill>
                   <a:srgbClr val="FFB020"/>
                 </a:solidFill>
@@ -9816,7 +9816,7 @@
               </a:rPr>
               <a:t>相機那兩題會讓很多人火大。那是故意的。</a:t>
             </a:r>
-            <a:endParaRPr lang="en-US" sz="890" dirty="0"/>
+            <a:endParaRPr lang="en-US" sz="1000" dirty="0"/>
           </a:p>
         </p:txBody>
       </p:sp>
@@ -9828,8 +9828,8 @@
         </p:nvSpPr>
         <p:spPr>
           <a:xfrm>
-            <a:off x="1402536" y="3390800"/>
-            <a:ext cx="584532" cy="181855"/>
+            <a:off x="1012696" y="102111"/>
+            <a:ext cx="656429" cy="204222"/>
           </a:xfrm>
           <a:prstGeom prst="rect">
             <a:avLst/>
@@ -9845,7 +9845,7 @@
               <a:buNone/>
             </a:pPr>
             <a:r>
-              <a:rPr lang="en-US" sz="640" dirty="0">
+              <a:rPr lang="en-US" sz="720" dirty="0">
                 <a:solidFill>
                   <a:srgbClr val="9FB3C8"/>
                 </a:solidFill>
@@ -9855,7 +9855,7 @@
               </a:rPr>
               <a:t>13 / 14</a:t>
             </a:r>
-            <a:endParaRPr lang="en-US" sz="640" dirty="0"/>
+            <a:endParaRPr lang="en-US" sz="720" dirty="0"/>
           </a:p>
         </p:txBody>
       </p:sp>
@@ -9867,8 +9867,8 @@
         </p:nvSpPr>
         <p:spPr>
           <a:xfrm>
-            <a:off x="2006553" y="3390800"/>
-            <a:ext cx="1428857" cy="181855"/>
+            <a:off x="1691006" y="102111"/>
+            <a:ext cx="1604604" cy="204222"/>
           </a:xfrm>
           <a:prstGeom prst="rect">
             <a:avLst/>
@@ -9884,7 +9884,7 @@
               <a:buNone/>
             </a:pPr>
             <a:r>
-              <a:rPr lang="en-US" sz="640" dirty="0">
+              <a:rPr lang="en-US" sz="720" dirty="0">
                 <a:solidFill>
                   <a:srgbClr val="9FB3C8"/>
                 </a:solidFill>
@@ -9894,7 +9894,7 @@
               </a:rPr>
               <a:t>Tiết 1 · 第 1 節</a:t>
             </a:r>
-            <a:endParaRPr lang="en-US" sz="640" dirty="0"/>
+            <a:endParaRPr lang="en-US" sz="720" dirty="0"/>
           </a:p>
         </p:txBody>
       </p:sp>
@@ -9924,8 +9924,8 @@
       </p:nvGrpSpPr>
       <p:grpSpPr>
         <a:xfrm>
-          <a:off x="0" y="0"/>
-          <a:ext cx="0" cy="0"/>
+          <a:off x="898071" y="0"/>
+          <a:ext cx="1" cy="1"/>
           <a:chOff x="0" y="0"/>
           <a:chExt cx="0" cy="0"/>
         </a:xfrm>
@@ -9938,8 +9938,8 @@
         </p:nvSpPr>
         <p:spPr>
           <a:xfrm>
-            <a:off x="6130753" y="-947729"/>
-            <a:ext cx="2987610" cy="2987610"/>
+            <a:off x="6335486" y="-1102179"/>
+            <a:ext cx="3380014" cy="3380014"/>
           </a:xfrm>
           <a:prstGeom prst="ellipse">
             <a:avLst/>
@@ -9963,8 +9963,8 @@
         </p:nvSpPr>
         <p:spPr>
           <a:xfrm>
-            <a:off x="7104973" y="1520297"/>
-            <a:ext cx="1688649" cy="1688649"/>
+            <a:off x="7437664" y="1690007"/>
+            <a:ext cx="1910443" cy="1910443"/>
           </a:xfrm>
           <a:prstGeom prst="ellipse">
             <a:avLst/>
@@ -9985,8 +9985,8 @@
         </p:nvSpPr>
         <p:spPr>
           <a:xfrm>
-            <a:off x="1681812" y="364222"/>
-            <a:ext cx="4806155" cy="194844"/>
+            <a:off x="1302204" y="382089"/>
+            <a:ext cx="5437414" cy="220436"/>
           </a:xfrm>
           <a:prstGeom prst="rect">
             <a:avLst/>
@@ -10002,7 +10002,7 @@
               <a:buNone/>
             </a:pPr>
             <a:r>
-              <a:rPr lang="en-US" sz="890" b="1" dirty="0">
+              <a:rPr lang="en-US" sz="1000" b="1" dirty="0">
                 <a:solidFill>
                   <a:srgbClr val="FFB020"/>
                 </a:solidFill>
@@ -10012,7 +10012,7 @@
               </a:rPr>
               <a:t>Tiết 1 · 第一節小結</a:t>
             </a:r>
-            <a:endParaRPr lang="en-US" sz="890" dirty="0"/>
+            <a:endParaRPr lang="en-US" sz="1000" dirty="0"/>
           </a:p>
         </p:txBody>
       </p:sp>
@@ -10024,8 +10024,8 @@
         </p:nvSpPr>
         <p:spPr>
           <a:xfrm>
-            <a:off x="1681812" y="611024"/>
-            <a:ext cx="5715427" cy="753397"/>
+            <a:off x="1302204" y="661307"/>
+            <a:ext cx="6466114" cy="852351"/>
           </a:xfrm>
           <a:prstGeom prst="rect">
             <a:avLst/>
@@ -10044,7 +10044,7 @@
               <a:buNone/>
             </a:pPr>
             <a:r>
-              <a:rPr lang="en-US" sz="1780" b="1" dirty="0">
+              <a:rPr lang="en-US" sz="2010" b="1" dirty="0">
                 <a:solidFill>
                   <a:srgbClr val="FFFFFF"/>
                 </a:solidFill>
@@ -10054,7 +10054,7 @@
               </a:rPr>
               <a:t>Mang ba câu này sang tiết 2</a:t>
             </a:r>
-            <a:endParaRPr lang="en-US" sz="1780" dirty="0"/>
+            <a:endParaRPr lang="en-US" sz="2010" dirty="0"/>
           </a:p>
           <a:p>
             <a:pPr indent="0" marL="0">
@@ -10064,7 +10064,7 @@
               <a:buNone/>
             </a:pPr>
             <a:r>
-              <a:rPr lang="en-US" sz="1070" dirty="0">
+              <a:rPr lang="en-US" sz="1210" dirty="0">
                 <a:solidFill>
                   <a:srgbClr val="AFC3D4"/>
                 </a:solidFill>
@@ -10074,7 +10074,7 @@
               </a:rPr>
               <a:t>帶三句話進第二節</a:t>
             </a:r>
-            <a:endParaRPr lang="en-US" sz="1780" dirty="0"/>
+            <a:endParaRPr lang="en-US" sz="2010" dirty="0"/>
           </a:p>
         </p:txBody>
       </p:sp>
@@ -10086,8 +10086,8 @@
         </p:nvSpPr>
         <p:spPr>
           <a:xfrm>
-            <a:off x="1681812" y="1286484"/>
-            <a:ext cx="32474" cy="477815"/>
+            <a:off x="1302204" y="1425484"/>
+            <a:ext cx="36739" cy="540573"/>
           </a:xfrm>
           <a:prstGeom prst="rect">
             <a:avLst/>
@@ -10106,8 +10106,8 @@
         </p:nvSpPr>
         <p:spPr>
           <a:xfrm>
-            <a:off x="1837688" y="1260505"/>
-            <a:ext cx="5585531" cy="555752"/>
+            <a:off x="1478552" y="1396093"/>
+            <a:ext cx="6319157" cy="628747"/>
           </a:xfrm>
           <a:prstGeom prst="rect">
             <a:avLst/>
@@ -10126,7 +10126,7 @@
               <a:buNone/>
             </a:pPr>
             <a:r>
-              <a:rPr lang="en-US" sz="960" b="1" dirty="0">
+              <a:rPr lang="en-US" sz="1080" b="1" dirty="0">
                 <a:solidFill>
                   <a:srgbClr val="FFFFFF"/>
                 </a:solidFill>
@@ -10136,7 +10136,7 @@
               </a:rPr>
               <a:t>Ba thanh trượt tuần trước = ba dòng trên datasheet: số kênh, góc nhìn, tầm đo. Cộng thêm dòng thứ tư: tốc độ cập nhật.</a:t>
             </a:r>
-            <a:endParaRPr lang="en-US" sz="960" dirty="0"/>
+            <a:endParaRPr lang="en-US" sz="1080" dirty="0"/>
           </a:p>
           <a:p>
             <a:pPr indent="0" marL="0">
@@ -10146,7 +10146,7 @@
               <a:buNone/>
             </a:pPr>
             <a:r>
-              <a:rPr lang="en-US" sz="850" dirty="0">
+              <a:rPr lang="en-US" sz="960" dirty="0">
                 <a:solidFill>
                   <a:srgbClr val="AFC3D4"/>
                 </a:solidFill>
@@ -10156,7 +10156,7 @@
               </a:rPr>
               <a:t>上週三個滑桿就是規格表上三行：線束數、視野、測距。再加第四行：更新率。</a:t>
             </a:r>
-            <a:endParaRPr lang="en-US" sz="960" dirty="0"/>
+            <a:endParaRPr lang="en-US" sz="1080" dirty="0"/>
           </a:p>
         </p:txBody>
       </p:sp>
@@ -10168,8 +10168,8 @@
         </p:nvSpPr>
         <p:spPr>
           <a:xfrm>
-            <a:off x="1681812" y="1907184"/>
-            <a:ext cx="32474" cy="477815"/>
+            <a:off x="1302204" y="2127710"/>
+            <a:ext cx="36739" cy="540573"/>
           </a:xfrm>
           <a:prstGeom prst="rect">
             <a:avLst/>
@@ -10188,8 +10188,8 @@
         </p:nvSpPr>
         <p:spPr>
           <a:xfrm>
-            <a:off x="1837688" y="1881205"/>
-            <a:ext cx="5585531" cy="555752"/>
+            <a:off x="1478552" y="2098319"/>
+            <a:ext cx="6319157" cy="628747"/>
           </a:xfrm>
           <a:prstGeom prst="rect">
             <a:avLst/>
@@ -10208,7 +10208,7 @@
               <a:buNone/>
             </a:pPr>
             <a:r>
-              <a:rPr lang="en-US" sz="960" b="1" dirty="0">
+              <a:rPr lang="en-US" sz="1080" b="1" dirty="0">
                 <a:solidFill>
                   <a:srgbClr val="FFFFFF"/>
                 </a:solidFill>
@@ -10218,7 +10218,7 @@
               </a:rPr>
               <a:t>Datasheet cảm biến ảnh không có góc nhìn và tầm đo — góc nhìn do ống kính, khoảng cách là tính ra.</a:t>
             </a:r>
-            <a:endParaRPr lang="en-US" sz="960" dirty="0"/>
+            <a:endParaRPr lang="en-US" sz="1080" dirty="0"/>
           </a:p>
           <a:p>
             <a:pPr indent="0" marL="0">
@@ -10228,7 +10228,7 @@
               <a:buNone/>
             </a:pPr>
             <a:r>
-              <a:rPr lang="en-US" sz="850" dirty="0">
+              <a:rPr lang="en-US" sz="960" dirty="0">
                 <a:solidFill>
                   <a:srgbClr val="AFC3D4"/>
                 </a:solidFill>
@@ -10238,7 +10238,7 @@
               </a:rPr>
               <a:t>影像感測器的規格表沒有視野和測距——視野看鏡頭，距離是算出來的。</a:t>
             </a:r>
-            <a:endParaRPr lang="en-US" sz="960" dirty="0"/>
+            <a:endParaRPr lang="en-US" sz="1080" dirty="0"/>
           </a:p>
         </p:txBody>
       </p:sp>
@@ -10250,8 +10250,8 @@
         </p:nvSpPr>
         <p:spPr>
           <a:xfrm>
-            <a:off x="1681812" y="2527885"/>
-            <a:ext cx="32474" cy="477815"/>
+            <a:off x="1302204" y="2829936"/>
+            <a:ext cx="36739" cy="540573"/>
           </a:xfrm>
           <a:prstGeom prst="rect">
             <a:avLst/>
@@ -10270,8 +10270,8 @@
         </p:nvSpPr>
         <p:spPr>
           <a:xfrm>
-            <a:off x="1837688" y="2501905"/>
-            <a:ext cx="5585531" cy="555752"/>
+            <a:off x="1478552" y="2800544"/>
+            <a:ext cx="6319157" cy="628747"/>
           </a:xfrm>
           <a:prstGeom prst="rect">
             <a:avLst/>
@@ -10290,7 +10290,7 @@
               <a:buNone/>
             </a:pPr>
             <a:r>
-              <a:rPr lang="en-US" sz="960" b="1" dirty="0">
+              <a:rPr lang="en-US" sz="1080" b="1" dirty="0">
                 <a:solidFill>
                   <a:srgbClr val="FFFFFF"/>
                 </a:solidFill>
@@ -10300,7 +10300,7 @@
               </a:rPr>
               <a:t>Tầm đo luôn phải hỏi: đo với vật phản xạ bao nhiêu phần trăm. 170 m hay 90 m là hai thế giới khác nhau.</a:t>
             </a:r>
-            <a:endParaRPr lang="en-US" sz="960" dirty="0"/>
+            <a:endParaRPr lang="en-US" sz="1080" dirty="0"/>
           </a:p>
           <a:p>
             <a:pPr indent="0" marL="0">
@@ -10310,7 +10310,7 @@
               <a:buNone/>
             </a:pPr>
             <a:r>
-              <a:rPr lang="en-US" sz="850" dirty="0">
+              <a:rPr lang="en-US" sz="960" dirty="0">
                 <a:solidFill>
                   <a:srgbClr val="AFC3D4"/>
                 </a:solidFill>
@@ -10320,7 +10320,7 @@
               </a:rPr>
               <a:t>看到測距一定要追問：對百分之幾反射率量的。170 公尺和 90 公尺是兩個世界。</a:t>
             </a:r>
-            <a:endParaRPr lang="en-US" sz="960" dirty="0"/>
+            <a:endParaRPr lang="en-US" sz="1080" dirty="0"/>
           </a:p>
         </p:txBody>
       </p:sp>
@@ -10332,8 +10332,8 @@
         </p:nvSpPr>
         <p:spPr>
           <a:xfrm>
-            <a:off x="1402536" y="3390800"/>
-            <a:ext cx="584532" cy="181855"/>
+            <a:off x="986246" y="102870"/>
+            <a:ext cx="661307" cy="205740"/>
           </a:xfrm>
           <a:prstGeom prst="rect">
             <a:avLst/>
@@ -10349,7 +10349,7 @@
               <a:buNone/>
             </a:pPr>
             <a:r>
-              <a:rPr lang="en-US" sz="640" dirty="0">
+              <a:rPr lang="en-US" sz="720" dirty="0">
                 <a:solidFill>
                   <a:srgbClr val="9FB3C8"/>
                 </a:solidFill>
@@ -10359,7 +10359,7 @@
               </a:rPr>
               <a:t>14 / 14</a:t>
             </a:r>
-            <a:endParaRPr lang="en-US" sz="640" dirty="0"/>
+            <a:endParaRPr lang="en-US" sz="720" dirty="0"/>
           </a:p>
         </p:txBody>
       </p:sp>
@@ -10371,8 +10371,8 @@
         </p:nvSpPr>
         <p:spPr>
           <a:xfrm>
-            <a:off x="2006553" y="3390800"/>
-            <a:ext cx="1428857" cy="181855"/>
+            <a:off x="1669596" y="102870"/>
+            <a:ext cx="1616529" cy="205740"/>
           </a:xfrm>
           <a:prstGeom prst="rect">
             <a:avLst/>
@@ -10388,7 +10388,7 @@
               <a:buNone/>
             </a:pPr>
             <a:r>
-              <a:rPr lang="en-US" sz="640" dirty="0">
+              <a:rPr lang="en-US" sz="720" dirty="0">
                 <a:solidFill>
                   <a:srgbClr val="9FB3C8"/>
                 </a:solidFill>
@@ -10398,7 +10398,7 @@
               </a:rPr>
               <a:t>Tiết 1 · 第 1 節</a:t>
             </a:r>
-            <a:endParaRPr lang="en-US" sz="640" dirty="0"/>
+            <a:endParaRPr lang="en-US" sz="720" dirty="0"/>
           </a:p>
         </p:txBody>
       </p:sp>
@@ -10421,8 +10421,8 @@
       </p:nvGrpSpPr>
       <p:grpSpPr>
         <a:xfrm>
-          <a:off x="0" y="0"/>
-          <a:ext cx="0" cy="0"/>
+          <a:off x="927820" y="0"/>
+          <a:ext cx="1" cy="1"/>
           <a:chOff x="0" y="0"/>
           <a:chExt cx="0" cy="0"/>
         </a:xfrm>
@@ -10435,8 +10435,8 @@
         </p:nvSpPr>
         <p:spPr>
           <a:xfrm>
-            <a:off x="1681812" y="234326"/>
-            <a:ext cx="5780375" cy="597522"/>
+            <a:off x="1328680" y="233228"/>
+            <a:ext cx="6486641" cy="670529"/>
           </a:xfrm>
           <a:prstGeom prst="rect">
             <a:avLst/>
@@ -10455,7 +10455,7 @@
               <a:buNone/>
             </a:pPr>
             <a:r>
-              <a:rPr lang="en-US" sz="1560" b="1" dirty="0">
+              <a:rPr lang="en-US" sz="1750" b="1" dirty="0">
                 <a:solidFill>
                   <a:srgbClr val="0B1F3A"/>
                 </a:solidFill>
@@ -10465,7 +10465,7 @@
               </a:rPr>
               <a:t>Mở bàn đọc thông số</a:t>
             </a:r>
-            <a:endParaRPr lang="en-US" sz="1560" dirty="0"/>
+            <a:endParaRPr lang="en-US" sz="1750" dirty="0"/>
           </a:p>
           <a:p>
             <a:pPr indent="0" marL="0">
@@ -10475,7 +10475,7 @@
               <a:buNone/>
             </a:pPr>
             <a:r>
-              <a:rPr lang="en-US" sz="960" dirty="0">
+              <a:rPr lang="en-US" sz="1080" dirty="0">
                 <a:solidFill>
                   <a:srgbClr val="5F7183"/>
                 </a:solidFill>
@@ -10485,7 +10485,7 @@
               </a:rPr>
               <a:t>打開規格判讀台</a:t>
             </a:r>
-            <a:endParaRPr lang="en-US" sz="1560" dirty="0"/>
+            <a:endParaRPr lang="en-US" sz="1750" dirty="0"/>
           </a:p>
         </p:txBody>
       </p:sp>
@@ -10497,8 +10497,8 @@
         </p:nvSpPr>
         <p:spPr>
           <a:xfrm>
-            <a:off x="5844982" y="831848"/>
-            <a:ext cx="1708133" cy="1864009"/>
+            <a:off x="6000519" y="903757"/>
+            <a:ext cx="1916839" cy="2091759"/>
           </a:xfrm>
           <a:prstGeom prst="roundRect">
             <a:avLst>
@@ -10532,8 +10532,8 @@
         </p:blipFill>
         <p:spPr>
           <a:xfrm>
-            <a:off x="5935909" y="909785"/>
-            <a:ext cx="1526279" cy="1526279"/>
+            <a:off x="6492240" y="1243584"/>
+            <a:ext cx="2148840" cy="2148840"/>
           </a:xfrm>
           <a:prstGeom prst="rect">
             <a:avLst/>
@@ -10548,8 +10548,8 @@
         </p:nvSpPr>
         <p:spPr>
           <a:xfrm>
-            <a:off x="5870961" y="2462043"/>
-            <a:ext cx="1656175" cy="220823"/>
+            <a:off x="6029672" y="2733135"/>
+            <a:ext cx="1858532" cy="247804"/>
           </a:xfrm>
           <a:prstGeom prst="rect">
             <a:avLst/>
@@ -10568,7 +10568,7 @@
               <a:buNone/>
             </a:pPr>
             <a:r>
-              <a:rPr lang="en-US" sz="750" b="1" dirty="0">
+              <a:rPr lang="en-US" sz="840" b="1" dirty="0">
                 <a:solidFill>
                   <a:srgbClr val="5F7183"/>
                 </a:solidFill>
@@ -10578,7 +10578,7 @@
               </a:rPr>
               <a:t>Quét mã QR bằng camera điện thoại</a:t>
             </a:r>
-            <a:endParaRPr lang="en-US" sz="750" dirty="0"/>
+            <a:endParaRPr lang="en-US" sz="840" dirty="0"/>
           </a:p>
           <a:p>
             <a:pPr algn="ctr" indent="0" marL="0">
@@ -10588,7 +10588,7 @@
               <a:buNone/>
             </a:pPr>
             <a:r>
-              <a:rPr lang="en-US" sz="670" dirty="0">
+              <a:rPr lang="en-US" sz="760" dirty="0">
                 <a:solidFill>
                   <a:srgbClr val="5F7183"/>
                 </a:solidFill>
@@ -10598,7 +10598,7 @@
               </a:rPr>
               <a:t>用手機相機掃這個 QR</a:t>
             </a:r>
-            <a:endParaRPr lang="en-US" sz="750" dirty="0"/>
+            <a:endParaRPr lang="en-US" sz="840" dirty="0"/>
           </a:p>
         </p:txBody>
       </p:sp>
@@ -10610,8 +10610,8 @@
         </p:nvSpPr>
         <p:spPr>
           <a:xfrm>
-            <a:off x="1681812" y="831848"/>
-            <a:ext cx="4033273" cy="597522"/>
+            <a:off x="1328680" y="903757"/>
+            <a:ext cx="4526072" cy="670529"/>
           </a:xfrm>
           <a:prstGeom prst="roundRect">
             <a:avLst>
@@ -10632,8 +10632,8 @@
         </p:nvSpPr>
         <p:spPr>
           <a:xfrm>
-            <a:off x="1785729" y="896796"/>
-            <a:ext cx="3825439" cy="467626"/>
+            <a:off x="1445293" y="976640"/>
+            <a:ext cx="4292844" cy="524762"/>
           </a:xfrm>
           <a:prstGeom prst="rect">
             <a:avLst/>
@@ -10649,7 +10649,7 @@
               <a:buNone/>
             </a:pPr>
             <a:r>
-              <a:rPr lang="en-US" sz="890" b="1" dirty="0">
+              <a:rPr lang="en-US" sz="1000" b="1" dirty="0">
                 <a:solidFill>
                   <a:srgbClr val="FFFFFF"/>
                 </a:solidFill>
@@ -10659,14 +10659,14 @@
               </a:rPr>
               <a:t>https://ch-neural.github.io/</a:t>
             </a:r>
-            <a:endParaRPr lang="en-US" sz="890" dirty="0"/>
+            <a:endParaRPr lang="en-US" sz="1000" dirty="0"/>
           </a:p>
           <a:p>
             <a:pPr algn="ctr" indent="0" marL="0">
               <a:buNone/>
             </a:pPr>
             <a:r>
-              <a:rPr lang="en-US" sz="890" b="1" dirty="0">
+              <a:rPr lang="en-US" sz="1000" b="1" dirty="0">
                 <a:solidFill>
                   <a:srgbClr val="FFFFFF"/>
                 </a:solidFill>
@@ -10676,7 +10676,7 @@
               </a:rPr>
               <a:t>MITUST-Principles-of-Self-Driving-Cars/week5/spec/</a:t>
             </a:r>
-            <a:endParaRPr lang="en-US" sz="890" dirty="0"/>
+            <a:endParaRPr lang="en-US" sz="1000" dirty="0"/>
           </a:p>
         </p:txBody>
       </p:sp>
@@ -10688,8 +10688,8 @@
         </p:nvSpPr>
         <p:spPr>
           <a:xfrm>
-            <a:off x="1707792" y="1559266"/>
-            <a:ext cx="207834" cy="207834"/>
+            <a:off x="1357833" y="1720053"/>
+            <a:ext cx="233228" cy="233228"/>
           </a:xfrm>
           <a:prstGeom prst="ellipse">
             <a:avLst/>
@@ -10708,8 +10708,8 @@
         </p:nvSpPr>
         <p:spPr>
           <a:xfrm>
-            <a:off x="1707792" y="1565760"/>
-            <a:ext cx="207834" cy="194844"/>
+            <a:off x="1357833" y="1727341"/>
+            <a:ext cx="233228" cy="218651"/>
           </a:xfrm>
           <a:prstGeom prst="rect">
             <a:avLst/>
@@ -10725,7 +10725,7 @@
               <a:buNone/>
             </a:pPr>
             <a:r>
-              <a:rPr lang="en-US" sz="780" b="1" dirty="0">
+              <a:rPr lang="en-US" sz="880" b="1" dirty="0">
                 <a:solidFill>
                   <a:srgbClr val="FFFFFF"/>
                 </a:solidFill>
@@ -10735,7 +10735,7 @@
               </a:rPr>
               <a:t>1</a:t>
             </a:r>
-            <a:endParaRPr lang="en-US" sz="780" dirty="0"/>
+            <a:endParaRPr lang="en-US" sz="880" dirty="0"/>
           </a:p>
         </p:txBody>
       </p:sp>
@@ -10747,8 +10747,8 @@
         </p:nvSpPr>
         <p:spPr>
           <a:xfrm>
-            <a:off x="1993563" y="1533286"/>
-            <a:ext cx="3669564" cy="324740"/>
+            <a:off x="1678521" y="1690900"/>
+            <a:ext cx="4117924" cy="364418"/>
           </a:xfrm>
           <a:prstGeom prst="rect">
             <a:avLst/>
@@ -10767,7 +10767,7 @@
               <a:buNone/>
             </a:pPr>
             <a:r>
-              <a:rPr lang="en-US" sz="820" b="1" dirty="0">
+              <a:rPr lang="en-US" sz="920" b="1" dirty="0">
                 <a:solidFill>
                   <a:srgbClr val="1A2733"/>
                 </a:solidFill>
@@ -10777,7 +10777,7 @@
               </a:rPr>
               <a:t>Bốn model: ba cái là hàng thật, một cái là model ảo để so sánh giá rẻ</a:t>
             </a:r>
-            <a:endParaRPr lang="en-US" sz="820" dirty="0"/>
+            <a:endParaRPr lang="en-US" sz="920" dirty="0"/>
           </a:p>
           <a:p>
             <a:pPr indent="0" marL="0">
@@ -10787,7 +10787,7 @@
               <a:buNone/>
             </a:pPr>
             <a:r>
-              <a:rPr lang="en-US" sz="750" dirty="0">
+              <a:rPr lang="en-US" sz="840" dirty="0">
                 <a:solidFill>
                   <a:srgbClr val="5F7183"/>
                 </a:solidFill>
@@ -10797,7 +10797,7 @@
               </a:rPr>
               <a:t>四個型號：三個是真的產品，一個是便宜的教學用型號，拿來比較</a:t>
             </a:r>
-            <a:endParaRPr lang="en-US" sz="820" dirty="0"/>
+            <a:endParaRPr lang="en-US" sz="920" dirty="0"/>
           </a:p>
         </p:txBody>
       </p:sp>
@@ -10809,8 +10809,8 @@
         </p:nvSpPr>
         <p:spPr>
           <a:xfrm>
-            <a:off x="1707792" y="1909985"/>
-            <a:ext cx="207834" cy="207834"/>
+            <a:off x="1357833" y="2113624"/>
+            <a:ext cx="233228" cy="233228"/>
           </a:xfrm>
           <a:prstGeom prst="ellipse">
             <a:avLst/>
@@ -10829,8 +10829,8 @@
         </p:nvSpPr>
         <p:spPr>
           <a:xfrm>
-            <a:off x="1707792" y="1916480"/>
-            <a:ext cx="207834" cy="194844"/>
+            <a:off x="1357833" y="2120913"/>
+            <a:ext cx="233228" cy="218651"/>
           </a:xfrm>
           <a:prstGeom prst="rect">
             <a:avLst/>
@@ -10846,7 +10846,7 @@
               <a:buNone/>
             </a:pPr>
             <a:r>
-              <a:rPr lang="en-US" sz="780" b="1" dirty="0">
+              <a:rPr lang="en-US" sz="880" b="1" dirty="0">
                 <a:solidFill>
                   <a:srgbClr val="FFFFFF"/>
                 </a:solidFill>
@@ -10856,7 +10856,7 @@
               </a:rPr>
               <a:t>2</a:t>
             </a:r>
-            <a:endParaRPr lang="en-US" sz="780" dirty="0"/>
+            <a:endParaRPr lang="en-US" sz="880" dirty="0"/>
           </a:p>
         </p:txBody>
       </p:sp>
@@ -10868,8 +10868,8 @@
         </p:nvSpPr>
         <p:spPr>
           <a:xfrm>
-            <a:off x="1993563" y="1884006"/>
-            <a:ext cx="3669564" cy="324740"/>
+            <a:off x="1678521" y="2084471"/>
+            <a:ext cx="4117924" cy="364418"/>
           </a:xfrm>
           <a:prstGeom prst="rect">
             <a:avLst/>
@@ -10888,7 +10888,7 @@
               <a:buNone/>
             </a:pPr>
             <a:r>
-              <a:rPr lang="en-US" sz="820" b="1" dirty="0">
+              <a:rPr lang="en-US" sz="920" b="1" dirty="0">
                 <a:solidFill>
                   <a:srgbClr val="1A2733"/>
                 </a:solidFill>
@@ -10898,7 +10898,7 @@
               </a:rPr>
               <a:t>Có nút «chỉ tiếng Anh»: bảng thông số thật thì không có bản dịch</a:t>
             </a:r>
-            <a:endParaRPr lang="en-US" sz="820" dirty="0"/>
+            <a:endParaRPr lang="en-US" sz="920" dirty="0"/>
           </a:p>
           <a:p>
             <a:pPr indent="0" marL="0">
@@ -10908,7 +10908,7 @@
               <a:buNone/>
             </a:pPr>
             <a:r>
-              <a:rPr lang="en-US" sz="750" dirty="0">
+              <a:rPr lang="en-US" sz="840" dirty="0">
                 <a:solidFill>
                   <a:srgbClr val="5F7183"/>
                 </a:solidFill>
@@ -10918,7 +10918,7 @@
               </a:rPr>
               <a:t>有一個「只看英文原文」的按鈕：真的規格表上是不會有翻譯的</a:t>
             </a:r>
-            <a:endParaRPr lang="en-US" sz="820" dirty="0"/>
+            <a:endParaRPr lang="en-US" sz="920" dirty="0"/>
           </a:p>
         </p:txBody>
       </p:sp>
@@ -10930,8 +10930,8 @@
         </p:nvSpPr>
         <p:spPr>
           <a:xfrm>
-            <a:off x="1707792" y="2260704"/>
-            <a:ext cx="207834" cy="207834"/>
+            <a:off x="1357833" y="2507196"/>
+            <a:ext cx="233228" cy="233228"/>
           </a:xfrm>
           <a:prstGeom prst="ellipse">
             <a:avLst/>
@@ -10950,8 +10950,8 @@
         </p:nvSpPr>
         <p:spPr>
           <a:xfrm>
-            <a:off x="1707792" y="2267199"/>
-            <a:ext cx="207834" cy="194844"/>
+            <a:off x="1357833" y="2514484"/>
+            <a:ext cx="233228" cy="218651"/>
           </a:xfrm>
           <a:prstGeom prst="rect">
             <a:avLst/>
@@ -10967,7 +10967,7 @@
               <a:buNone/>
             </a:pPr>
             <a:r>
-              <a:rPr lang="en-US" sz="780" b="1" dirty="0">
+              <a:rPr lang="en-US" sz="880" b="1" dirty="0">
                 <a:solidFill>
                   <a:srgbClr val="FFFFFF"/>
                 </a:solidFill>
@@ -10977,7 +10977,7 @@
               </a:rPr>
               <a:t>3</a:t>
             </a:r>
-            <a:endParaRPr lang="en-US" sz="780" dirty="0"/>
+            <a:endParaRPr lang="en-US" sz="880" dirty="0"/>
           </a:p>
         </p:txBody>
       </p:sp>
@@ -10989,8 +10989,8 @@
         </p:nvSpPr>
         <p:spPr>
           <a:xfrm>
-            <a:off x="1993563" y="2234725"/>
-            <a:ext cx="3669564" cy="324740"/>
+            <a:off x="1678521" y="2478043"/>
+            <a:ext cx="4117924" cy="364418"/>
           </a:xfrm>
           <a:prstGeom prst="rect">
             <a:avLst/>
@@ -11009,7 +11009,7 @@
               <a:buNone/>
             </a:pPr>
             <a:r>
-              <a:rPr lang="en-US" sz="820" b="1" dirty="0">
+              <a:rPr lang="en-US" sz="920" b="1" dirty="0">
                 <a:solidFill>
                   <a:srgbClr val="1A2733"/>
                 </a:solidFill>
@@ -11019,7 +11019,7 @@
               </a:rPr>
               <a:t>Tiết 3 sẽ dùng suốt 50 phút, mỗi người tự làm và nộp</a:t>
             </a:r>
-            <a:endParaRPr lang="en-US" sz="820" dirty="0"/>
+            <a:endParaRPr lang="en-US" sz="920" dirty="0"/>
           </a:p>
           <a:p>
             <a:pPr indent="0" marL="0">
@@ -11029,7 +11029,7 @@
               <a:buNone/>
             </a:pPr>
             <a:r>
-              <a:rPr lang="en-US" sz="750" dirty="0">
+              <a:rPr lang="en-US" sz="840" dirty="0">
                 <a:solidFill>
                   <a:srgbClr val="5F7183"/>
                 </a:solidFill>
@@ -11039,7 +11039,7 @@
               </a:rPr>
               <a:t>第三節整節都會用它，而且是每個人自己做、自己交</a:t>
             </a:r>
-            <a:endParaRPr lang="en-US" sz="820" dirty="0"/>
+            <a:endParaRPr lang="en-US" sz="920" dirty="0"/>
           </a:p>
         </p:txBody>
       </p:sp>
@@ -11051,8 +11051,8 @@
         </p:nvSpPr>
         <p:spPr>
           <a:xfrm>
-            <a:off x="1681812" y="2806268"/>
-            <a:ext cx="5780375" cy="428657"/>
+            <a:off x="1328680" y="3119418"/>
+            <a:ext cx="6486641" cy="481032"/>
           </a:xfrm>
           <a:prstGeom prst="roundRect">
             <a:avLst>
@@ -11078,8 +11078,8 @@
         </p:nvSpPr>
         <p:spPr>
           <a:xfrm>
-            <a:off x="1811708" y="2851732"/>
-            <a:ext cx="5520583" cy="350719"/>
+            <a:off x="1474447" y="3170437"/>
+            <a:ext cx="6195106" cy="393571"/>
           </a:xfrm>
           <a:prstGeom prst="rect">
             <a:avLst/>
@@ -11098,7 +11098,7 @@
               <a:buNone/>
             </a:pPr>
             <a:r>
-              <a:rPr lang="en-US" sz="850" b="1" dirty="0">
+              <a:rPr lang="en-US" sz="960" b="1" dirty="0">
                 <a:solidFill>
                   <a:srgbClr val="7A4E00"/>
                 </a:solidFill>
@@ -11108,7 +11108,7 @@
               </a:rPr>
               <a:t>Mở xong bấm thử từng model một lượt cho quen.</a:t>
             </a:r>
-            <a:endParaRPr lang="en-US" sz="850" dirty="0"/>
+            <a:endParaRPr lang="en-US" sz="960" dirty="0"/>
           </a:p>
           <a:p>
             <a:pPr indent="0" marL="0">
@@ -11118,7 +11118,7 @@
               <a:buNone/>
             </a:pPr>
             <a:r>
-              <a:rPr lang="en-US" sz="780" dirty="0">
+              <a:rPr lang="en-US" sz="880" dirty="0">
                 <a:solidFill>
                   <a:srgbClr val="7A4E00"/>
                 </a:solidFill>
@@ -11128,7 +11128,7 @@
               </a:rPr>
               <a:t>打開之後先把四個型號各按一次，熟悉一下畫面。</a:t>
             </a:r>
-            <a:endParaRPr lang="en-US" sz="850" dirty="0"/>
+            <a:endParaRPr lang="en-US" sz="960" dirty="0"/>
           </a:p>
         </p:txBody>
       </p:sp>
@@ -11148,8 +11148,8 @@
         </p:blipFill>
         <p:spPr>
           <a:xfrm>
-            <a:off x="6663327" y="3338842"/>
-            <a:ext cx="779376" cy="172200"/>
+            <a:off x="7882128" y="109728"/>
+            <a:ext cx="1097280" cy="242439"/>
           </a:xfrm>
           <a:prstGeom prst="rect">
             <a:avLst/>
@@ -11164,8 +11164,8 @@
         </p:nvSpPr>
         <p:spPr>
           <a:xfrm>
-            <a:off x="1402536" y="3390800"/>
-            <a:ext cx="584532" cy="181855"/>
+            <a:off x="1015280" y="102037"/>
+            <a:ext cx="655952" cy="204074"/>
           </a:xfrm>
           <a:prstGeom prst="rect">
             <a:avLst/>
@@ -11181,7 +11181,7 @@
               <a:buNone/>
             </a:pPr>
             <a:r>
-              <a:rPr lang="en-US" sz="640" dirty="0">
+              <a:rPr lang="en-US" sz="720" dirty="0">
                 <a:solidFill>
                   <a:srgbClr val="5F7183"/>
                 </a:solidFill>
@@ -11191,7 +11191,7 @@
               </a:rPr>
               <a:t>2 / 14</a:t>
             </a:r>
-            <a:endParaRPr lang="en-US" sz="640" dirty="0"/>
+            <a:endParaRPr lang="en-US" sz="720" dirty="0"/>
           </a:p>
         </p:txBody>
       </p:sp>
@@ -11203,8 +11203,8 @@
         </p:nvSpPr>
         <p:spPr>
           <a:xfrm>
-            <a:off x="2006553" y="3390800"/>
-            <a:ext cx="1428857" cy="181855"/>
+            <a:off x="1693098" y="102037"/>
+            <a:ext cx="1603439" cy="204074"/>
           </a:xfrm>
           <a:prstGeom prst="rect">
             <a:avLst/>
@@ -11220,7 +11220,7 @@
               <a:buNone/>
             </a:pPr>
             <a:r>
-              <a:rPr lang="en-US" sz="640" dirty="0">
+              <a:rPr lang="en-US" sz="720" dirty="0">
                 <a:solidFill>
                   <a:srgbClr val="5F7183"/>
                 </a:solidFill>
@@ -11230,7 +11230,7 @@
               </a:rPr>
               <a:t>Tiết 1 · 第 1 節</a:t>
             </a:r>
-            <a:endParaRPr lang="en-US" sz="640" dirty="0"/>
+            <a:endParaRPr lang="en-US" sz="720" dirty="0"/>
           </a:p>
         </p:txBody>
       </p:sp>
@@ -11260,8 +11260,8 @@
       </p:nvGrpSpPr>
       <p:grpSpPr>
         <a:xfrm>
-          <a:off x="0" y="0"/>
-          <a:ext cx="0" cy="0"/>
+          <a:off x="898071" y="0"/>
+          <a:ext cx="1" cy="1"/>
           <a:chOff x="0" y="0"/>
           <a:chExt cx="0" cy="0"/>
         </a:xfrm>
@@ -11274,8 +11274,8 @@
         </p:nvSpPr>
         <p:spPr>
           <a:xfrm>
-            <a:off x="6130753" y="-947729"/>
-            <a:ext cx="2987610" cy="2987610"/>
+            <a:off x="6335486" y="-1102179"/>
+            <a:ext cx="3380014" cy="3380014"/>
           </a:xfrm>
           <a:prstGeom prst="ellipse">
             <a:avLst/>
@@ -11299,8 +11299,8 @@
         </p:nvSpPr>
         <p:spPr>
           <a:xfrm>
-            <a:off x="7104973" y="1520297"/>
-            <a:ext cx="1688649" cy="1688649"/>
+            <a:off x="7437664" y="1690007"/>
+            <a:ext cx="1910443" cy="1910443"/>
           </a:xfrm>
           <a:prstGeom prst="ellipse">
             <a:avLst/>
@@ -11321,8 +11321,8 @@
         </p:nvSpPr>
         <p:spPr>
           <a:xfrm>
-            <a:off x="1681812" y="1228031"/>
-            <a:ext cx="3247402" cy="220823"/>
+            <a:off x="1302204" y="1359354"/>
+            <a:ext cx="3673929" cy="249827"/>
           </a:xfrm>
           <a:prstGeom prst="rect">
             <a:avLst/>
@@ -11338,7 +11338,7 @@
               <a:buNone/>
             </a:pPr>
             <a:r>
-              <a:rPr lang="en-US" sz="960" b="1" dirty="0">
+              <a:rPr lang="en-US" sz="1080" b="1" dirty="0">
                 <a:solidFill>
                   <a:srgbClr val="FFB020"/>
                 </a:solidFill>
@@ -11348,7 +11348,7 @@
               </a:rPr>
               <a:t>Phần 1 / 3</a:t>
             </a:r>
-            <a:endParaRPr lang="en-US" sz="960" dirty="0"/>
+            <a:endParaRPr lang="en-US" sz="1080" dirty="0"/>
           </a:p>
         </p:txBody>
       </p:sp>
@@ -11360,8 +11360,8 @@
         </p:nvSpPr>
         <p:spPr>
           <a:xfrm>
-            <a:off x="1681812" y="1481328"/>
-            <a:ext cx="5195843" cy="844324"/>
+            <a:off x="1302204" y="1645920"/>
+            <a:ext cx="5878286" cy="955221"/>
           </a:xfrm>
           <a:prstGeom prst="rect">
             <a:avLst/>
@@ -11380,7 +11380,7 @@
               <a:buNone/>
             </a:pPr>
             <a:r>
-              <a:rPr lang="en-US" sz="2060" b="1" dirty="0">
+              <a:rPr lang="en-US" sz="2330" b="1" dirty="0">
                 <a:solidFill>
                   <a:srgbClr val="FFFFFF"/>
                 </a:solidFill>
@@ -11390,7 +11390,7 @@
               </a:rPr>
               <a:t>Ba thanh trượt của tuần trước, nằm ở đâu trên datasheet</a:t>
             </a:r>
-            <a:endParaRPr lang="en-US" sz="2060" dirty="0"/>
+            <a:endParaRPr lang="en-US" sz="2330" dirty="0"/>
           </a:p>
           <a:p>
             <a:pPr indent="0" marL="0">
@@ -11400,7 +11400,7 @@
               <a:buNone/>
             </a:pPr>
             <a:r>
-              <a:rPr lang="en-US" sz="1210" dirty="0">
+              <a:rPr lang="en-US" sz="1370" dirty="0">
                 <a:solidFill>
                   <a:srgbClr val="AFC3D4"/>
                 </a:solidFill>
@@ -11410,7 +11410,7 @@
               </a:rPr>
               <a:t>上週那三個滑桿，在規格表的哪一行</a:t>
             </a:r>
-            <a:endParaRPr lang="en-US" sz="2060" dirty="0"/>
+            <a:endParaRPr lang="en-US" sz="2330" dirty="0"/>
           </a:p>
         </p:txBody>
       </p:sp>
@@ -11422,8 +11422,8 @@
         </p:nvSpPr>
         <p:spPr>
           <a:xfrm>
-            <a:off x="1681812" y="2403590"/>
-            <a:ext cx="5195843" cy="454636"/>
+            <a:off x="1302204" y="2689316"/>
+            <a:ext cx="5878286" cy="514350"/>
           </a:xfrm>
           <a:prstGeom prst="rect">
             <a:avLst/>
@@ -11442,7 +11442,7 @@
               <a:buNone/>
             </a:pPr>
             <a:r>
-              <a:rPr lang="en-US" sz="960" dirty="0">
+              <a:rPr lang="en-US" sz="1080" dirty="0">
                 <a:solidFill>
                   <a:srgbClr val="AFC3D4"/>
                 </a:solidFill>
@@ -11452,7 +11452,7 @@
               </a:rPr>
               <a:t>Số tia · chiều dài tia · góc quét</a:t>
             </a:r>
-            <a:endParaRPr lang="en-US" sz="960" dirty="0"/>
+            <a:endParaRPr lang="en-US" sz="1080" dirty="0"/>
           </a:p>
           <a:p>
             <a:pPr indent="0" marL="0">
@@ -11462,7 +11462,7 @@
               <a:buNone/>
             </a:pPr>
             <a:r>
-              <a:rPr lang="en-US" sz="850" dirty="0">
+              <a:rPr lang="en-US" sz="960" dirty="0">
                 <a:solidFill>
                   <a:srgbClr val="8AA0B4"/>
                 </a:solidFill>
@@ -11472,7 +11472,7 @@
               </a:rPr>
               <a:t>射線數・射線長度・張角</a:t>
             </a:r>
-            <a:endParaRPr lang="en-US" sz="960" dirty="0"/>
+            <a:endParaRPr lang="en-US" sz="1080" dirty="0"/>
           </a:p>
         </p:txBody>
       </p:sp>
@@ -11484,8 +11484,8 @@
         </p:nvSpPr>
         <p:spPr>
           <a:xfrm>
-            <a:off x="1402536" y="3390800"/>
-            <a:ext cx="584532" cy="181855"/>
+            <a:off x="986246" y="102870"/>
+            <a:ext cx="661307" cy="205740"/>
           </a:xfrm>
           <a:prstGeom prst="rect">
             <a:avLst/>
@@ -11501,7 +11501,7 @@
               <a:buNone/>
             </a:pPr>
             <a:r>
-              <a:rPr lang="en-US" sz="640" dirty="0">
+              <a:rPr lang="en-US" sz="720" dirty="0">
                 <a:solidFill>
                   <a:srgbClr val="9FB3C8"/>
                 </a:solidFill>
@@ -11511,7 +11511,7 @@
               </a:rPr>
               <a:t>3 / 14</a:t>
             </a:r>
-            <a:endParaRPr lang="en-US" sz="640" dirty="0"/>
+            <a:endParaRPr lang="en-US" sz="720" dirty="0"/>
           </a:p>
         </p:txBody>
       </p:sp>
@@ -11523,8 +11523,8 @@
         </p:nvSpPr>
         <p:spPr>
           <a:xfrm>
-            <a:off x="2006553" y="3390800"/>
-            <a:ext cx="1428857" cy="181855"/>
+            <a:off x="1669596" y="102870"/>
+            <a:ext cx="1616529" cy="205740"/>
           </a:xfrm>
           <a:prstGeom prst="rect">
             <a:avLst/>
@@ -11540,7 +11540,7 @@
               <a:buNone/>
             </a:pPr>
             <a:r>
-              <a:rPr lang="en-US" sz="640" dirty="0">
+              <a:rPr lang="en-US" sz="720" dirty="0">
                 <a:solidFill>
                   <a:srgbClr val="9FB3C8"/>
                 </a:solidFill>
@@ -11550,7 +11550,7 @@
               </a:rPr>
               <a:t>Tiết 1 · 第 1 節</a:t>
             </a:r>
-            <a:endParaRPr lang="en-US" sz="640" dirty="0"/>
+            <a:endParaRPr lang="en-US" sz="720" dirty="0"/>
           </a:p>
         </p:txBody>
       </p:sp>
@@ -11573,8 +11573,8 @@
       </p:nvGrpSpPr>
       <p:grpSpPr>
         <a:xfrm>
-          <a:off x="0" y="0"/>
-          <a:ext cx="0" cy="0"/>
+          <a:off x="913006" y="0"/>
+          <a:ext cx="1" cy="1"/>
           <a:chOff x="0" y="0"/>
           <a:chExt cx="0" cy="0"/>
         </a:xfrm>
@@ -11587,8 +11587,8 @@
         </p:nvSpPr>
         <p:spPr>
           <a:xfrm>
-            <a:off x="1681812" y="286284"/>
-            <a:ext cx="5780375" cy="194844"/>
+            <a:off x="1315495" y="292720"/>
+            <a:ext cx="6513009" cy="219540"/>
           </a:xfrm>
           <a:prstGeom prst="rect">
             <a:avLst/>
@@ -11604,7 +11604,7 @@
               <a:buNone/>
             </a:pPr>
             <a:r>
-              <a:rPr lang="en-US" sz="920" b="1" dirty="0">
+              <a:rPr lang="en-US" sz="1040" b="1" dirty="0">
                 <a:solidFill>
                   <a:srgbClr val="007F72"/>
                 </a:solidFill>
@@ -11614,7 +11614,7 @@
               </a:rPr>
               <a:t>1 / 2　Ouster OS1-64</a:t>
             </a:r>
-            <a:endParaRPr lang="en-US" sz="920" dirty="0"/>
+            <a:endParaRPr lang="en-US" sz="1040" dirty="0"/>
           </a:p>
         </p:txBody>
       </p:sp>
@@ -11626,8 +11626,8 @@
         </p:nvSpPr>
         <p:spPr>
           <a:xfrm>
-            <a:off x="1681812" y="649993"/>
-            <a:ext cx="1052158" cy="1363909"/>
+            <a:off x="1315495" y="702527"/>
+            <a:ext cx="1185514" cy="1536777"/>
           </a:xfrm>
           <a:prstGeom prst="roundRect">
             <a:avLst>
@@ -11653,8 +11653,8 @@
         </p:nvSpPr>
         <p:spPr>
           <a:xfrm flipH="1" flipV="1">
-            <a:off x="1757969" y="1309813"/>
-            <a:ext cx="191689" cy="110671"/>
+            <a:off x="1401305" y="1445976"/>
+            <a:ext cx="215984" cy="124699"/>
           </a:xfrm>
           <a:prstGeom prst="line">
             <a:avLst/>
@@ -11676,8 +11676,8 @@
         </p:nvSpPr>
         <p:spPr>
           <a:xfrm flipH="1" flipV="1">
-            <a:off x="1807382" y="1250926"/>
-            <a:ext cx="142276" cy="169559"/>
+            <a:off x="1456980" y="1379625"/>
+            <a:ext cx="160309" cy="191050"/>
           </a:xfrm>
           <a:prstGeom prst="line">
             <a:avLst/>
@@ -11699,8 +11699,8 @@
         </p:nvSpPr>
         <p:spPr>
           <a:xfrm flipH="1" flipV="1">
-            <a:off x="1873954" y="1212490"/>
-            <a:ext cx="75704" cy="207994"/>
+            <a:off x="1531991" y="1336318"/>
+            <a:ext cx="85299" cy="234356"/>
           </a:xfrm>
           <a:prstGeom prst="line">
             <a:avLst/>
@@ -11722,8 +11722,8 @@
         </p:nvSpPr>
         <p:spPr>
           <a:xfrm flipV="1">
-            <a:off x="1949658" y="1199142"/>
-            <a:ext cx="0" cy="221343"/>
+            <a:off x="1617290" y="1321277"/>
+            <a:ext cx="1" cy="249397"/>
           </a:xfrm>
           <a:prstGeom prst="line">
             <a:avLst/>
@@ -11745,8 +11745,8 @@
         </p:nvSpPr>
         <p:spPr>
           <a:xfrm flipV="1">
-            <a:off x="1949658" y="1212490"/>
-            <a:ext cx="75704" cy="207994"/>
+            <a:off x="1617290" y="1336318"/>
+            <a:ext cx="85299" cy="234356"/>
           </a:xfrm>
           <a:prstGeom prst="line">
             <a:avLst/>
@@ -11768,8 +11768,8 @@
         </p:nvSpPr>
         <p:spPr>
           <a:xfrm flipV="1">
-            <a:off x="1949658" y="1250926"/>
-            <a:ext cx="142276" cy="169559"/>
+            <a:off x="1617290" y="1379625"/>
+            <a:ext cx="160309" cy="191050"/>
           </a:xfrm>
           <a:prstGeom prst="line">
             <a:avLst/>
@@ -11791,8 +11791,8 @@
         </p:nvSpPr>
         <p:spPr>
           <a:xfrm flipV="1">
-            <a:off x="1949658" y="1309813"/>
-            <a:ext cx="191689" cy="110671"/>
+            <a:off x="1617290" y="1445976"/>
+            <a:ext cx="215984" cy="124699"/>
           </a:xfrm>
           <a:prstGeom prst="line">
             <a:avLst/>
@@ -11814,8 +11814,8 @@
         </p:nvSpPr>
         <p:spPr>
           <a:xfrm>
-            <a:off x="1929368" y="1400195"/>
-            <a:ext cx="40580" cy="40580"/>
+            <a:off x="1594428" y="1547813"/>
+            <a:ext cx="45723" cy="45723"/>
           </a:xfrm>
           <a:prstGeom prst="ellipse">
             <a:avLst/>
@@ -11834,8 +11834,8 @@
         </p:nvSpPr>
         <p:spPr>
           <a:xfrm>
-            <a:off x="2318563" y="1184386"/>
-            <a:ext cx="295124" cy="295124"/>
+            <a:off x="2032951" y="1304651"/>
+            <a:ext cx="332529" cy="332529"/>
           </a:xfrm>
           <a:prstGeom prst="donut">
             <a:avLst/>
@@ -11856,8 +11856,8 @@
         </p:nvSpPr>
         <p:spPr>
           <a:xfrm>
-            <a:off x="2613687" y="1331948"/>
-            <a:ext cx="73781" cy="0"/>
+            <a:off x="2365480" y="1470916"/>
+            <a:ext cx="83132" cy="1"/>
           </a:xfrm>
           <a:prstGeom prst="line">
             <a:avLst/>
@@ -11879,8 +11879,8 @@
         </p:nvSpPr>
         <p:spPr>
           <a:xfrm>
-            <a:off x="2593917" y="1405728"/>
-            <a:ext cx="63896" cy="36890"/>
+            <a:off x="2343205" y="1554048"/>
+            <a:ext cx="71995" cy="41566"/>
           </a:xfrm>
           <a:prstGeom prst="line">
             <a:avLst/>
@@ -11902,8 +11902,8 @@
         </p:nvSpPr>
         <p:spPr>
           <a:xfrm>
-            <a:off x="2539906" y="1459740"/>
-            <a:ext cx="36890" cy="63896"/>
+            <a:off x="2282348" y="1614905"/>
+            <a:ext cx="41566" cy="71995"/>
           </a:xfrm>
           <a:prstGeom prst="line">
             <a:avLst/>
@@ -11925,8 +11925,8 @@
         </p:nvSpPr>
         <p:spPr>
           <a:xfrm>
-            <a:off x="2466125" y="1479509"/>
-            <a:ext cx="0" cy="73781"/>
+            <a:off x="2199215" y="1637180"/>
+            <a:ext cx="1" cy="83132"/>
           </a:xfrm>
           <a:prstGeom prst="line">
             <a:avLst/>
@@ -11948,8 +11948,8 @@
         </p:nvSpPr>
         <p:spPr>
           <a:xfrm flipH="1">
-            <a:off x="2355453" y="1459740"/>
-            <a:ext cx="36890" cy="63896"/>
+            <a:off x="2074517" y="1614905"/>
+            <a:ext cx="41566" cy="71995"/>
           </a:xfrm>
           <a:prstGeom prst="line">
             <a:avLst/>
@@ -11971,8 +11971,8 @@
         </p:nvSpPr>
         <p:spPr>
           <a:xfrm flipH="1">
-            <a:off x="2274436" y="1405728"/>
-            <a:ext cx="63896" cy="36890"/>
+            <a:off x="1983231" y="1554048"/>
+            <a:ext cx="71995" cy="41566"/>
           </a:xfrm>
           <a:prstGeom prst="line">
             <a:avLst/>
@@ -11994,8 +11994,8 @@
         </p:nvSpPr>
         <p:spPr>
           <a:xfrm flipH="1">
-            <a:off x="2244782" y="1331948"/>
-            <a:ext cx="73781" cy="0"/>
+            <a:off x="1949819" y="1470916"/>
+            <a:ext cx="83132" cy="1"/>
           </a:xfrm>
           <a:prstGeom prst="line">
             <a:avLst/>
@@ -12017,8 +12017,8 @@
         </p:nvSpPr>
         <p:spPr>
           <a:xfrm flipH="1" flipV="1">
-            <a:off x="2274436" y="1221276"/>
-            <a:ext cx="63896" cy="36890"/>
+            <a:off x="1983231" y="1346217"/>
+            <a:ext cx="71995" cy="41566"/>
           </a:xfrm>
           <a:prstGeom prst="line">
             <a:avLst/>
@@ -12040,8 +12040,8 @@
         </p:nvSpPr>
         <p:spPr>
           <a:xfrm flipH="1" flipV="1">
-            <a:off x="2355453" y="1140259"/>
-            <a:ext cx="36890" cy="63896"/>
+            <a:off x="2074517" y="1254932"/>
+            <a:ext cx="41566" cy="71995"/>
           </a:xfrm>
           <a:prstGeom prst="line">
             <a:avLst/>
@@ -12063,8 +12063,8 @@
         </p:nvSpPr>
         <p:spPr>
           <a:xfrm flipH="1" flipV="1">
-            <a:off x="2466125" y="1110605"/>
-            <a:ext cx="0" cy="73781"/>
+            <a:off x="2199215" y="1221518"/>
+            <a:ext cx="1" cy="83132"/>
           </a:xfrm>
           <a:prstGeom prst="line">
             <a:avLst/>
@@ -12086,8 +12086,8 @@
         </p:nvSpPr>
         <p:spPr>
           <a:xfrm flipV="1">
-            <a:off x="2539906" y="1140259"/>
-            <a:ext cx="36890" cy="63896"/>
+            <a:off x="2282348" y="1254932"/>
+            <a:ext cx="41566" cy="71995"/>
           </a:xfrm>
           <a:prstGeom prst="line">
             <a:avLst/>
@@ -12109,8 +12109,8 @@
         </p:nvSpPr>
         <p:spPr>
           <a:xfrm flipV="1">
-            <a:off x="2593917" y="1221276"/>
-            <a:ext cx="63896" cy="36890"/>
+            <a:off x="2343205" y="1346217"/>
+            <a:ext cx="71995" cy="41566"/>
           </a:xfrm>
           <a:prstGeom prst="line">
             <a:avLst/>
@@ -12132,8 +12132,8 @@
         </p:nvSpPr>
         <p:spPr>
           <a:xfrm>
-            <a:off x="2445835" y="1311658"/>
-            <a:ext cx="40580" cy="40580"/>
+            <a:off x="2176355" y="1448054"/>
+            <a:ext cx="45723" cy="45723"/>
           </a:xfrm>
           <a:prstGeom prst="ellipse">
             <a:avLst/>
@@ -12152,8 +12152,8 @@
         </p:nvSpPr>
         <p:spPr>
           <a:xfrm>
-            <a:off x="2171001" y="1295707"/>
-            <a:ext cx="73781" cy="72482"/>
+            <a:off x="1866686" y="1430081"/>
+            <a:ext cx="83132" cy="81669"/>
           </a:xfrm>
           <a:prstGeom prst="rightArrow">
             <a:avLst/>
@@ -12172,8 +12172,8 @@
         </p:nvSpPr>
         <p:spPr>
           <a:xfrm>
-            <a:off x="2954794" y="585045"/>
-            <a:ext cx="4507394" cy="371026"/>
+            <a:off x="2749821" y="629347"/>
+            <a:ext cx="5078684" cy="418052"/>
           </a:xfrm>
           <a:prstGeom prst="rect">
             <a:avLst/>
@@ -12192,7 +12192,7 @@
               <a:buNone/>
             </a:pPr>
             <a:r>
-              <a:rPr lang="en-US" sz="1280" b="1" dirty="0">
+              <a:rPr lang="en-US" sz="1440" b="1" dirty="0">
                 <a:solidFill>
                   <a:srgbClr val="0B1F3A"/>
                 </a:solidFill>
@@ -12202,7 +12202,7 @@
               </a:rPr>
               <a:t>Lidar quay 360°: rải điểm đều quanh xe</a:t>
             </a:r>
-            <a:endParaRPr lang="en-US" sz="1280" dirty="0"/>
+            <a:endParaRPr lang="en-US" sz="1440" dirty="0"/>
           </a:p>
           <a:p>
             <a:pPr indent="0" marL="0">
@@ -12212,7 +12212,7 @@
               <a:buNone/>
             </a:pPr>
             <a:r>
-              <a:rPr lang="en-US" sz="890" dirty="0">
+              <a:rPr lang="en-US" sz="1000" dirty="0">
                 <a:solidFill>
                   <a:srgbClr val="007F72"/>
                 </a:solidFill>
@@ -12222,7 +12222,7 @@
               </a:rPr>
               <a:t>旋轉式光達：點平均灑在車子周圍一整圈</a:t>
             </a:r>
-            <a:endParaRPr lang="en-US" sz="1280" dirty="0"/>
+            <a:endParaRPr lang="en-US" sz="1440" dirty="0"/>
           </a:p>
         </p:txBody>
       </p:sp>
@@ -12234,8 +12234,8 @@
         </p:nvSpPr>
         <p:spPr>
           <a:xfrm>
-            <a:off x="2954794" y="1021019"/>
-            <a:ext cx="753397" cy="284196"/>
+            <a:off x="2749821" y="1120579"/>
+            <a:ext cx="848887" cy="320216"/>
           </a:xfrm>
           <a:prstGeom prst="roundRect">
             <a:avLst>
@@ -12256,8 +12256,8 @@
         </p:nvSpPr>
         <p:spPr>
           <a:xfrm>
-            <a:off x="2993763" y="1046998"/>
-            <a:ext cx="675460" cy="245227"/>
+            <a:off x="2793729" y="1149851"/>
+            <a:ext cx="761071" cy="276308"/>
           </a:xfrm>
           <a:prstGeom prst="rect">
             <a:avLst/>
@@ -12276,7 +12276,7 @@
               <a:buNone/>
             </a:pPr>
             <a:r>
-              <a:rPr lang="en-US" sz="640" b="1" dirty="0">
+              <a:rPr lang="en-US" sz="720" b="1" dirty="0">
                 <a:solidFill>
                   <a:srgbClr val="FFFFFF"/>
                 </a:solidFill>
@@ -12286,7 +12286,7 @@
               </a:rPr>
               <a:t>Số kênh</a:t>
             </a:r>
-            <a:endParaRPr lang="en-US" sz="640" dirty="0"/>
+            <a:endParaRPr lang="en-US" sz="720" dirty="0"/>
           </a:p>
           <a:p>
             <a:pPr algn="ctr" indent="0" marL="0">
@@ -12296,7 +12296,7 @@
               <a:buNone/>
             </a:pPr>
             <a:r>
-              <a:rPr lang="en-US" sz="600" dirty="0">
+              <a:rPr lang="en-US" sz="680" dirty="0">
                 <a:solidFill>
                   <a:srgbClr val="FFFFFF"/>
                 </a:solidFill>
@@ -12306,7 +12306,7 @@
               </a:rPr>
               <a:t>線束數</a:t>
             </a:r>
-            <a:endParaRPr lang="en-US" sz="640" dirty="0"/>
+            <a:endParaRPr lang="en-US" sz="720" dirty="0"/>
           </a:p>
         </p:txBody>
       </p:sp>
@@ -12318,8 +12318,8 @@
         </p:nvSpPr>
         <p:spPr>
           <a:xfrm>
-            <a:off x="3812108" y="1021019"/>
-            <a:ext cx="3650080" cy="323165"/>
+            <a:off x="3715795" y="1120579"/>
+            <a:ext cx="4112709" cy="364124"/>
           </a:xfrm>
           <a:prstGeom prst="rect">
             <a:avLst/>
@@ -12338,7 +12338,7 @@
               <a:buNone/>
             </a:pPr>
             <a:r>
-              <a:rPr lang="en-US" sz="780" dirty="0">
+              <a:rPr lang="en-US" sz="880" dirty="0">
                 <a:solidFill>
                   <a:srgbClr val="1A2733"/>
                 </a:solidFill>
@@ -12348,7 +12348,7 @@
               </a:rPr>
               <a:t>32 / 64 / 128 channels — đây chính là thanh «số tia» của tuần trước</a:t>
             </a:r>
-            <a:endParaRPr lang="en-US" sz="780" dirty="0"/>
+            <a:endParaRPr lang="en-US" sz="880" dirty="0"/>
           </a:p>
           <a:p>
             <a:pPr indent="0" marL="0">
@@ -12358,7 +12358,7 @@
               <a:buNone/>
             </a:pPr>
             <a:r>
-              <a:rPr lang="en-US" sz="710" dirty="0">
+              <a:rPr lang="en-US" sz="800" dirty="0">
                 <a:solidFill>
                   <a:srgbClr val="5F7183"/>
                 </a:solidFill>
@@ -12368,7 +12368,7 @@
               </a:rPr>
               <a:t>32 / 64 / 128 channels——這就是上週那條「射線數」滑桿</a:t>
             </a:r>
-            <a:endParaRPr lang="en-US" sz="780" dirty="0"/>
+            <a:endParaRPr lang="en-US" sz="880" dirty="0"/>
           </a:p>
         </p:txBody>
       </p:sp>
@@ -12380,8 +12380,8 @@
         </p:nvSpPr>
         <p:spPr>
           <a:xfrm>
-            <a:off x="2954794" y="1389648"/>
-            <a:ext cx="753397" cy="284196"/>
+            <a:off x="2749821" y="1535929"/>
+            <a:ext cx="848887" cy="320216"/>
           </a:xfrm>
           <a:prstGeom prst="roundRect">
             <a:avLst>
@@ -12402,8 +12402,8 @@
         </p:nvSpPr>
         <p:spPr>
           <a:xfrm>
-            <a:off x="2993763" y="1415627"/>
-            <a:ext cx="675460" cy="245227"/>
+            <a:off x="2793729" y="1565201"/>
+            <a:ext cx="761071" cy="276308"/>
           </a:xfrm>
           <a:prstGeom prst="rect">
             <a:avLst/>
@@ -12422,7 +12422,7 @@
               <a:buNone/>
             </a:pPr>
             <a:r>
-              <a:rPr lang="en-US" sz="640" b="1" dirty="0">
+              <a:rPr lang="en-US" sz="720" b="1" dirty="0">
                 <a:solidFill>
                   <a:srgbClr val="FFFFFF"/>
                 </a:solidFill>
@@ -12432,7 +12432,7 @@
               </a:rPr>
               <a:t>Góc nhìn</a:t>
             </a:r>
-            <a:endParaRPr lang="en-US" sz="640" dirty="0"/>
+            <a:endParaRPr lang="en-US" sz="720" dirty="0"/>
           </a:p>
           <a:p>
             <a:pPr algn="ctr" indent="0" marL="0">
@@ -12442,7 +12442,7 @@
               <a:buNone/>
             </a:pPr>
             <a:r>
-              <a:rPr lang="en-US" sz="600" dirty="0">
+              <a:rPr lang="en-US" sz="680" dirty="0">
                 <a:solidFill>
                   <a:srgbClr val="FFFFFF"/>
                 </a:solidFill>
@@ -12452,7 +12452,7 @@
               </a:rPr>
               <a:t>視野</a:t>
             </a:r>
-            <a:endParaRPr lang="en-US" sz="640" dirty="0"/>
+            <a:endParaRPr lang="en-US" sz="720" dirty="0"/>
           </a:p>
         </p:txBody>
       </p:sp>
@@ -12464,8 +12464,8 @@
         </p:nvSpPr>
         <p:spPr>
           <a:xfrm>
-            <a:off x="3812108" y="1389648"/>
-            <a:ext cx="3650080" cy="451161"/>
+            <a:off x="3715795" y="1535929"/>
+            <a:ext cx="4112709" cy="508343"/>
           </a:xfrm>
           <a:prstGeom prst="rect">
             <a:avLst/>
@@ -12484,7 +12484,7 @@
               <a:buNone/>
             </a:pPr>
             <a:r>
-              <a:rPr lang="en-US" sz="780" dirty="0">
+              <a:rPr lang="en-US" sz="880" dirty="0">
                 <a:solidFill>
                   <a:srgbClr val="1A2733"/>
                 </a:solidFill>
@@ -12494,7 +12494,7 @@
               </a:rPr>
               <a:t>Vertical 42.4°, Horizontal 360° — thanh «góc quét», nhưng nó quay cả vòng</a:t>
             </a:r>
-            <a:endParaRPr lang="en-US" sz="780" dirty="0"/>
+            <a:endParaRPr lang="en-US" sz="880" dirty="0"/>
           </a:p>
           <a:p>
             <a:pPr indent="0" marL="0">
@@ -12504,7 +12504,7 @@
               <a:buNone/>
             </a:pPr>
             <a:r>
-              <a:rPr lang="en-US" sz="710" dirty="0">
+              <a:rPr lang="en-US" sz="800" dirty="0">
                 <a:solidFill>
                   <a:srgbClr val="5F7183"/>
                 </a:solidFill>
@@ -12514,7 +12514,7 @@
               </a:rPr>
               <a:t>垂直 42.4°、水平 360°——就是「張角」，只是它轉一整圈</a:t>
             </a:r>
-            <a:endParaRPr lang="en-US" sz="780" dirty="0"/>
+            <a:endParaRPr lang="en-US" sz="880" dirty="0"/>
           </a:p>
         </p:txBody>
       </p:sp>
@@ -12526,8 +12526,8 @@
         </p:nvSpPr>
         <p:spPr>
           <a:xfrm>
-            <a:off x="2954794" y="1886272"/>
-            <a:ext cx="753397" cy="284196"/>
+            <a:off x="2749821" y="2095498"/>
+            <a:ext cx="848887" cy="320216"/>
           </a:xfrm>
           <a:prstGeom prst="roundRect">
             <a:avLst>
@@ -12548,8 +12548,8 @@
         </p:nvSpPr>
         <p:spPr>
           <a:xfrm>
-            <a:off x="2993763" y="1912251"/>
-            <a:ext cx="675460" cy="245227"/>
+            <a:off x="2793729" y="2124770"/>
+            <a:ext cx="761071" cy="276308"/>
           </a:xfrm>
           <a:prstGeom prst="rect">
             <a:avLst/>
@@ -12568,7 +12568,7 @@
               <a:buNone/>
             </a:pPr>
             <a:r>
-              <a:rPr lang="en-US" sz="640" b="1" dirty="0">
+              <a:rPr lang="en-US" sz="720" b="1" dirty="0">
                 <a:solidFill>
                   <a:srgbClr val="3A2A00"/>
                 </a:solidFill>
@@ -12578,7 +12578,7 @@
               </a:rPr>
               <a:t>Tầm đo</a:t>
             </a:r>
-            <a:endParaRPr lang="en-US" sz="640" dirty="0"/>
+            <a:endParaRPr lang="en-US" sz="720" dirty="0"/>
           </a:p>
           <a:p>
             <a:pPr algn="ctr" indent="0" marL="0">
@@ -12588,7 +12588,7 @@
               <a:buNone/>
             </a:pPr>
             <a:r>
-              <a:rPr lang="en-US" sz="600" dirty="0">
+              <a:rPr lang="en-US" sz="680" dirty="0">
                 <a:solidFill>
                   <a:srgbClr val="3A2A00"/>
                 </a:solidFill>
@@ -12598,7 +12598,7 @@
               </a:rPr>
               <a:t>測距</a:t>
             </a:r>
-            <a:endParaRPr lang="en-US" sz="640" dirty="0"/>
+            <a:endParaRPr lang="en-US" sz="720" dirty="0"/>
           </a:p>
         </p:txBody>
       </p:sp>
@@ -12610,8 +12610,8 @@
         </p:nvSpPr>
         <p:spPr>
           <a:xfrm>
-            <a:off x="3812108" y="1886272"/>
-            <a:ext cx="3650080" cy="323165"/>
+            <a:off x="3715795" y="2095498"/>
+            <a:ext cx="4112709" cy="364124"/>
           </a:xfrm>
           <a:prstGeom prst="rect">
             <a:avLst/>
@@ -12630,7 +12630,7 @@
               <a:buNone/>
             </a:pPr>
             <a:r>
-              <a:rPr lang="en-US" sz="780" dirty="0">
+              <a:rPr lang="en-US" sz="880" dirty="0">
                 <a:solidFill>
                   <a:srgbClr val="1A2733"/>
                 </a:solidFill>
@@ -12640,7 +12640,7 @@
               </a:rPr>
               <a:t>90 m với vật phản xạ 10% — thanh «chiều dài tia»</a:t>
             </a:r>
-            <a:endParaRPr lang="en-US" sz="780" dirty="0"/>
+            <a:endParaRPr lang="en-US" sz="880" dirty="0"/>
           </a:p>
           <a:p>
             <a:pPr indent="0" marL="0">
@@ -12650,7 +12650,7 @@
               <a:buNone/>
             </a:pPr>
             <a:r>
-              <a:rPr lang="en-US" sz="710" dirty="0">
+              <a:rPr lang="en-US" sz="800" dirty="0">
                 <a:solidFill>
                   <a:srgbClr val="5F7183"/>
                 </a:solidFill>
@@ -12660,7 +12660,7 @@
               </a:rPr>
               <a:t>對 10% 反射率的目標 90 公尺——就是「射線長度」</a:t>
             </a:r>
-            <a:endParaRPr lang="en-US" sz="780" dirty="0"/>
+            <a:endParaRPr lang="en-US" sz="880" dirty="0"/>
           </a:p>
         </p:txBody>
       </p:sp>
@@ -12672,8 +12672,8 @@
         </p:nvSpPr>
         <p:spPr>
           <a:xfrm>
-            <a:off x="1681812" y="2819258"/>
-            <a:ext cx="5780375" cy="402678"/>
+            <a:off x="1315495" y="3146735"/>
+            <a:ext cx="6513009" cy="453715"/>
           </a:xfrm>
           <a:prstGeom prst="roundRect">
             <a:avLst>
@@ -12699,8 +12699,8 @@
         </p:nvSpPr>
         <p:spPr>
           <a:xfrm>
-            <a:off x="1811708" y="2864721"/>
-            <a:ext cx="5520583" cy="324740"/>
+            <a:off x="1461855" y="3197961"/>
+            <a:ext cx="6220290" cy="365899"/>
           </a:xfrm>
           <a:prstGeom prst="rect">
             <a:avLst/>
@@ -12719,7 +12719,7 @@
               <a:buNone/>
             </a:pPr>
             <a:r>
-              <a:rPr lang="en-US" sz="850" b="1" dirty="0">
+              <a:rPr lang="en-US" sz="960" b="1" dirty="0">
                 <a:solidFill>
                   <a:srgbClr val="7A4E00"/>
                 </a:solidFill>
@@ -12729,7 +12729,7 @@
               </a:rPr>
               <a:t>Ba dòng này chính là ba thanh trượt. Chỉ khác là hãng viết bằng tiếng Anh.</a:t>
             </a:r>
-            <a:endParaRPr lang="en-US" sz="850" dirty="0"/>
+            <a:endParaRPr lang="en-US" sz="960" dirty="0"/>
           </a:p>
           <a:p>
             <a:pPr indent="0" marL="0">
@@ -12739,7 +12739,7 @@
               <a:buNone/>
             </a:pPr>
             <a:r>
-              <a:rPr lang="en-US" sz="780" dirty="0">
+              <a:rPr lang="en-US" sz="880" dirty="0">
                 <a:solidFill>
                   <a:srgbClr val="7A4E00"/>
                 </a:solidFill>
@@ -12749,7 +12749,7 @@
               </a:rPr>
               <a:t>這三行就是那三個滑桿，只是廠商用英文寫。</a:t>
             </a:r>
-            <a:endParaRPr lang="en-US" sz="850" dirty="0"/>
+            <a:endParaRPr lang="en-US" sz="960" dirty="0"/>
           </a:p>
         </p:txBody>
       </p:sp>
@@ -12769,8 +12769,8 @@
         </p:blipFill>
         <p:spPr>
           <a:xfrm>
-            <a:off x="6663327" y="3338842"/>
-            <a:ext cx="779376" cy="172200"/>
+            <a:off x="7882128" y="109728"/>
+            <a:ext cx="1097280" cy="242439"/>
           </a:xfrm>
           <a:prstGeom prst="rect">
             <a:avLst/>
@@ -12785,8 +12785,8 @@
         </p:nvSpPr>
         <p:spPr>
           <a:xfrm>
-            <a:off x="1402536" y="3390800"/>
-            <a:ext cx="584532" cy="181855"/>
+            <a:off x="1000822" y="102452"/>
+            <a:ext cx="658619" cy="204904"/>
           </a:xfrm>
           <a:prstGeom prst="rect">
             <a:avLst/>
@@ -12802,7 +12802,7 @@
               <a:buNone/>
             </a:pPr>
             <a:r>
-              <a:rPr lang="en-US" sz="640" dirty="0">
+              <a:rPr lang="en-US" sz="720" dirty="0">
                 <a:solidFill>
                   <a:srgbClr val="5F7183"/>
                 </a:solidFill>
@@ -12812,7 +12812,7 @@
               </a:rPr>
               <a:t>4 / 14</a:t>
             </a:r>
-            <a:endParaRPr lang="en-US" sz="640" dirty="0"/>
+            <a:endParaRPr lang="en-US" sz="720" dirty="0"/>
           </a:p>
         </p:txBody>
       </p:sp>
@@ -12824,8 +12824,8 @@
         </p:nvSpPr>
         <p:spPr>
           <a:xfrm>
-            <a:off x="2006553" y="3390800"/>
-            <a:ext cx="1428857" cy="181855"/>
+            <a:off x="1681395" y="102452"/>
+            <a:ext cx="1609957" cy="204904"/>
           </a:xfrm>
           <a:prstGeom prst="rect">
             <a:avLst/>
@@ -12841,7 +12841,7 @@
               <a:buNone/>
             </a:pPr>
             <a:r>
-              <a:rPr lang="en-US" sz="640" dirty="0">
+              <a:rPr lang="en-US" sz="720" dirty="0">
                 <a:solidFill>
                   <a:srgbClr val="5F7183"/>
                 </a:solidFill>
@@ -12851,7 +12851,7 @@
               </a:rPr>
               <a:t>Tiết 1 · 第 1 節</a:t>
             </a:r>
-            <a:endParaRPr lang="en-US" sz="640" dirty="0"/>
+            <a:endParaRPr lang="en-US" sz="720" dirty="0"/>
           </a:p>
         </p:txBody>
       </p:sp>
@@ -12874,8 +12874,8 @@
       </p:nvGrpSpPr>
       <p:grpSpPr>
         <a:xfrm>
-          <a:off x="0" y="0"/>
-          <a:ext cx="0" cy="0"/>
+          <a:off x="913006" y="0"/>
+          <a:ext cx="1" cy="1"/>
           <a:chOff x="0" y="0"/>
           <a:chExt cx="0" cy="0"/>
         </a:xfrm>
@@ -12888,8 +12888,8 @@
         </p:nvSpPr>
         <p:spPr>
           <a:xfrm>
-            <a:off x="1681812" y="286284"/>
-            <a:ext cx="5780375" cy="194844"/>
+            <a:off x="1315495" y="292720"/>
+            <a:ext cx="6513009" cy="219540"/>
           </a:xfrm>
           <a:prstGeom prst="rect">
             <a:avLst/>
@@ -12905,7 +12905,7 @@
               <a:buNone/>
             </a:pPr>
             <a:r>
-              <a:rPr lang="en-US" sz="920" b="1" dirty="0">
+              <a:rPr lang="en-US" sz="1040" b="1" dirty="0">
                 <a:solidFill>
                   <a:srgbClr val="007F72"/>
                 </a:solidFill>
@@ -12915,7 +12915,7 @@
               </a:rPr>
               <a:t>2 / 2　Hesai AT128</a:t>
             </a:r>
-            <a:endParaRPr lang="en-US" sz="920" dirty="0"/>
+            <a:endParaRPr lang="en-US" sz="1040" dirty="0"/>
           </a:p>
         </p:txBody>
       </p:sp>
@@ -12927,8 +12927,8 @@
         </p:nvSpPr>
         <p:spPr>
           <a:xfrm>
-            <a:off x="1681812" y="649993"/>
-            <a:ext cx="1052158" cy="1363909"/>
+            <a:off x="1315495" y="702527"/>
+            <a:ext cx="1185514" cy="1536777"/>
           </a:xfrm>
           <a:prstGeom prst="roundRect">
             <a:avLst>
@@ -12954,8 +12954,8 @@
         </p:nvSpPr>
         <p:spPr>
           <a:xfrm flipH="1" flipV="1">
-            <a:off x="1978213" y="749829"/>
-            <a:ext cx="229678" cy="340512"/>
+            <a:off x="1649463" y="815016"/>
+            <a:ext cx="258789" cy="383670"/>
           </a:xfrm>
           <a:prstGeom prst="line">
             <a:avLst/>
@@ -12977,8 +12977,8 @@
         </p:nvSpPr>
         <p:spPr>
           <a:xfrm flipH="1" flipV="1">
-            <a:off x="2087805" y="697556"/>
-            <a:ext cx="120086" cy="392784"/>
+            <a:off x="1772946" y="756118"/>
+            <a:ext cx="135307" cy="442568"/>
           </a:xfrm>
           <a:prstGeom prst="line">
             <a:avLst/>
@@ -13000,8 +13000,8 @@
         </p:nvSpPr>
         <p:spPr>
           <a:xfrm flipV="1">
-            <a:off x="2207891" y="679609"/>
-            <a:ext cx="0" cy="410731"/>
+            <a:off x="1908252" y="735897"/>
+            <a:ext cx="1" cy="462790"/>
           </a:xfrm>
           <a:prstGeom prst="line">
             <a:avLst/>
@@ -13023,8 +13023,8 @@
         </p:nvSpPr>
         <p:spPr>
           <a:xfrm flipV="1">
-            <a:off x="2207891" y="697556"/>
-            <a:ext cx="120086" cy="392784"/>
+            <a:off x="1908252" y="756118"/>
+            <a:ext cx="135307" cy="442568"/>
           </a:xfrm>
           <a:prstGeom prst="line">
             <a:avLst/>
@@ -13046,8 +13046,8 @@
         </p:nvSpPr>
         <p:spPr>
           <a:xfrm flipV="1">
-            <a:off x="2207891" y="749829"/>
-            <a:ext cx="229678" cy="340512"/>
+            <a:off x="1908252" y="815016"/>
+            <a:ext cx="258789" cy="383670"/>
           </a:xfrm>
           <a:prstGeom prst="line">
             <a:avLst/>
@@ -13069,8 +13069,8 @@
         </p:nvSpPr>
         <p:spPr>
           <a:xfrm>
-            <a:off x="2182068" y="1064517"/>
-            <a:ext cx="51647" cy="51647"/>
+            <a:off x="1879156" y="1169590"/>
+            <a:ext cx="58193" cy="58193"/>
           </a:xfrm>
           <a:prstGeom prst="ellipse">
             <a:avLst/>
@@ -13089,8 +13089,8 @@
         </p:nvSpPr>
         <p:spPr>
           <a:xfrm flipH="1" flipV="1">
-            <a:off x="1806136" y="1584801"/>
-            <a:ext cx="401756" cy="85396"/>
+            <a:off x="1455576" y="1755817"/>
+            <a:ext cx="452676" cy="96219"/>
           </a:xfrm>
           <a:prstGeom prst="line">
             <a:avLst/>
@@ -13112,8 +13112,8 @@
         </p:nvSpPr>
         <p:spPr>
           <a:xfrm flipH="1" flipV="1">
-            <a:off x="1949410" y="1350999"/>
-            <a:ext cx="258482" cy="319198"/>
+            <a:off x="1617009" y="1492381"/>
+            <a:ext cx="291243" cy="359655"/>
           </a:xfrm>
           <a:prstGeom prst="line">
             <a:avLst/>
@@ -13135,8 +13135,8 @@
         </p:nvSpPr>
         <p:spPr>
           <a:xfrm flipV="1">
-            <a:off x="2207891" y="1259466"/>
-            <a:ext cx="0" cy="410731"/>
+            <a:off x="1908252" y="1389247"/>
+            <a:ext cx="1" cy="462790"/>
           </a:xfrm>
           <a:prstGeom prst="line">
             <a:avLst/>
@@ -13158,8 +13158,8 @@
         </p:nvSpPr>
         <p:spPr>
           <a:xfrm flipV="1">
-            <a:off x="2207891" y="1350999"/>
-            <a:ext cx="258482" cy="319198"/>
+            <a:off x="1908252" y="1492381"/>
+            <a:ext cx="291243" cy="359655"/>
           </a:xfrm>
           <a:prstGeom prst="line">
             <a:avLst/>
@@ -13181,8 +13181,8 @@
         </p:nvSpPr>
         <p:spPr>
           <a:xfrm flipV="1">
-            <a:off x="2207891" y="1584801"/>
-            <a:ext cx="401756" cy="85396"/>
+            <a:off x="1908252" y="1755817"/>
+            <a:ext cx="452676" cy="96219"/>
           </a:xfrm>
           <a:prstGeom prst="line">
             <a:avLst/>
@@ -13204,8 +13204,8 @@
         </p:nvSpPr>
         <p:spPr>
           <a:xfrm>
-            <a:off x="2182068" y="1644374"/>
-            <a:ext cx="51647" cy="51647"/>
+            <a:off x="1879156" y="1822940"/>
+            <a:ext cx="58193" cy="58193"/>
           </a:xfrm>
           <a:prstGeom prst="ellipse">
             <a:avLst/>
@@ -13224,8 +13224,8 @@
         </p:nvSpPr>
         <p:spPr>
           <a:xfrm>
-            <a:off x="2954794" y="585045"/>
-            <a:ext cx="4507394" cy="559328"/>
+            <a:off x="2749821" y="629347"/>
+            <a:ext cx="5078684" cy="630220"/>
           </a:xfrm>
           <a:prstGeom prst="rect">
             <a:avLst/>
@@ -13244,7 +13244,7 @@
               <a:buNone/>
             </a:pPr>
             <a:r>
-              <a:rPr lang="en-US" sz="1280" b="1" dirty="0">
+              <a:rPr lang="en-US" sz="1440" b="1" dirty="0">
                 <a:solidFill>
                   <a:srgbClr val="0B1F3A"/>
                 </a:solidFill>
@@ -13254,7 +13254,7 @@
               </a:rPr>
               <a:t>Lidar cố định hướng trước: dồn điểm vào 120° phía trước</a:t>
             </a:r>
-            <a:endParaRPr lang="en-US" sz="1280" dirty="0"/>
+            <a:endParaRPr lang="en-US" sz="1440" dirty="0"/>
           </a:p>
           <a:p>
             <a:pPr indent="0" marL="0">
@@ -13264,7 +13264,7 @@
               <a:buNone/>
             </a:pPr>
             <a:r>
-              <a:rPr lang="en-US" sz="890" dirty="0">
+              <a:rPr lang="en-US" sz="1000" dirty="0">
                 <a:solidFill>
                   <a:srgbClr val="007F72"/>
                 </a:solidFill>
@@ -13274,7 +13274,7 @@
               </a:rPr>
               <a:t>固定式前向光達：把點集中在前方 120 度</a:t>
             </a:r>
-            <a:endParaRPr lang="en-US" sz="1280" dirty="0"/>
+            <a:endParaRPr lang="en-US" sz="1440" dirty="0"/>
           </a:p>
         </p:txBody>
       </p:sp>
@@ -13286,8 +13286,8 @@
         </p:nvSpPr>
         <p:spPr>
           <a:xfrm>
-            <a:off x="2954794" y="1209321"/>
-            <a:ext cx="753397" cy="284196"/>
+            <a:off x="2749821" y="1332747"/>
+            <a:ext cx="848887" cy="320216"/>
           </a:xfrm>
           <a:prstGeom prst="roundRect">
             <a:avLst>
@@ -13308,8 +13308,8 @@
         </p:nvSpPr>
         <p:spPr>
           <a:xfrm>
-            <a:off x="2993763" y="1235301"/>
-            <a:ext cx="675460" cy="245227"/>
+            <a:off x="2793729" y="1362019"/>
+            <a:ext cx="761071" cy="276308"/>
           </a:xfrm>
           <a:prstGeom prst="rect">
             <a:avLst/>
@@ -13328,7 +13328,7 @@
               <a:buNone/>
             </a:pPr>
             <a:r>
-              <a:rPr lang="en-US" sz="640" b="1" dirty="0">
+              <a:rPr lang="en-US" sz="720" b="1" dirty="0">
                 <a:solidFill>
                   <a:srgbClr val="FFFFFF"/>
                 </a:solidFill>
@@ -13338,7 +13338,7 @@
               </a:rPr>
               <a:t>Số kênh</a:t>
             </a:r>
-            <a:endParaRPr lang="en-US" sz="640" dirty="0"/>
+            <a:endParaRPr lang="en-US" sz="720" dirty="0"/>
           </a:p>
           <a:p>
             <a:pPr algn="ctr" indent="0" marL="0">
@@ -13348,7 +13348,7 @@
               <a:buNone/>
             </a:pPr>
             <a:r>
-              <a:rPr lang="en-US" sz="600" dirty="0">
+              <a:rPr lang="en-US" sz="680" dirty="0">
                 <a:solidFill>
                   <a:srgbClr val="FFFFFF"/>
                 </a:solidFill>
@@ -13358,7 +13358,7 @@
               </a:rPr>
               <a:t>線束數</a:t>
             </a:r>
-            <a:endParaRPr lang="en-US" sz="640" dirty="0"/>
+            <a:endParaRPr lang="en-US" sz="720" dirty="0"/>
           </a:p>
         </p:txBody>
       </p:sp>
@@ -13370,8 +13370,8 @@
         </p:nvSpPr>
         <p:spPr>
           <a:xfrm>
-            <a:off x="3812108" y="1209321"/>
-            <a:ext cx="3650080" cy="323165"/>
+            <a:off x="3715795" y="1332747"/>
+            <a:ext cx="4112709" cy="364124"/>
           </a:xfrm>
           <a:prstGeom prst="rect">
             <a:avLst/>
@@ -13390,7 +13390,7 @@
               <a:buNone/>
             </a:pPr>
             <a:r>
-              <a:rPr lang="en-US" sz="780" dirty="0">
+              <a:rPr lang="en-US" sz="880" dirty="0">
                 <a:solidFill>
                   <a:srgbClr val="1A2733"/>
                 </a:solidFill>
@@ -13400,7 +13400,7 @@
               </a:rPr>
               <a:t>128 channels</a:t>
             </a:r>
-            <a:endParaRPr lang="en-US" sz="780" dirty="0"/>
+            <a:endParaRPr lang="en-US" sz="880" dirty="0"/>
           </a:p>
           <a:p>
             <a:pPr indent="0" marL="0">
@@ -13410,7 +13410,7 @@
               <a:buNone/>
             </a:pPr>
             <a:r>
-              <a:rPr lang="en-US" sz="710" dirty="0">
+              <a:rPr lang="en-US" sz="800" dirty="0">
                 <a:solidFill>
                   <a:srgbClr val="5F7183"/>
                 </a:solidFill>
@@ -13420,7 +13420,7 @@
               </a:rPr>
               <a:t>128 channels</a:t>
             </a:r>
-            <a:endParaRPr lang="en-US" sz="780" dirty="0"/>
+            <a:endParaRPr lang="en-US" sz="880" dirty="0"/>
           </a:p>
         </p:txBody>
       </p:sp>
@@ -13432,8 +13432,8 @@
         </p:nvSpPr>
         <p:spPr>
           <a:xfrm>
-            <a:off x="2954794" y="1577950"/>
-            <a:ext cx="753397" cy="284196"/>
+            <a:off x="2749821" y="1748097"/>
+            <a:ext cx="848887" cy="320216"/>
           </a:xfrm>
           <a:prstGeom prst="roundRect">
             <a:avLst>
@@ -13454,8 +13454,8 @@
         </p:nvSpPr>
         <p:spPr>
           <a:xfrm>
-            <a:off x="2993763" y="1603929"/>
-            <a:ext cx="675460" cy="245227"/>
+            <a:off x="2793729" y="1777369"/>
+            <a:ext cx="761071" cy="276308"/>
           </a:xfrm>
           <a:prstGeom prst="rect">
             <a:avLst/>
@@ -13474,7 +13474,7 @@
               <a:buNone/>
             </a:pPr>
             <a:r>
-              <a:rPr lang="en-US" sz="640" b="1" dirty="0">
+              <a:rPr lang="en-US" sz="720" b="1" dirty="0">
                 <a:solidFill>
                   <a:srgbClr val="FFFFFF"/>
                 </a:solidFill>
@@ -13484,7 +13484,7 @@
               </a:rPr>
               <a:t>Góc nhìn</a:t>
             </a:r>
-            <a:endParaRPr lang="en-US" sz="640" dirty="0"/>
+            <a:endParaRPr lang="en-US" sz="720" dirty="0"/>
           </a:p>
           <a:p>
             <a:pPr algn="ctr" indent="0" marL="0">
@@ -13494,7 +13494,7 @@
               <a:buNone/>
             </a:pPr>
             <a:r>
-              <a:rPr lang="en-US" sz="600" dirty="0">
+              <a:rPr lang="en-US" sz="680" dirty="0">
                 <a:solidFill>
                   <a:srgbClr val="FFFFFF"/>
                 </a:solidFill>
@@ -13504,7 +13504,7 @@
               </a:rPr>
               <a:t>視野</a:t>
             </a:r>
-            <a:endParaRPr lang="en-US" sz="640" dirty="0"/>
+            <a:endParaRPr lang="en-US" sz="720" dirty="0"/>
           </a:p>
         </p:txBody>
       </p:sp>
@@ -13516,8 +13516,8 @@
         </p:nvSpPr>
         <p:spPr>
           <a:xfrm>
-            <a:off x="3812108" y="1577950"/>
-            <a:ext cx="3650080" cy="323165"/>
+            <a:off x="3715795" y="1748097"/>
+            <a:ext cx="4112709" cy="364124"/>
           </a:xfrm>
           <a:prstGeom prst="rect">
             <a:avLst/>
@@ -13536,7 +13536,7 @@
               <a:buNone/>
             </a:pPr>
             <a:r>
-              <a:rPr lang="en-US" sz="780" dirty="0">
+              <a:rPr lang="en-US" sz="880" dirty="0">
                 <a:solidFill>
                   <a:srgbClr val="1A2733"/>
                 </a:solidFill>
@@ -13546,7 +13546,7 @@
               </a:rPr>
               <a:t>120° ngang × 25.4° dọc — không quay, chỉ nhìn phía trước</a:t>
             </a:r>
-            <a:endParaRPr lang="en-US" sz="780" dirty="0"/>
+            <a:endParaRPr lang="en-US" sz="880" dirty="0"/>
           </a:p>
           <a:p>
             <a:pPr indent="0" marL="0">
@@ -13556,7 +13556,7 @@
               <a:buNone/>
             </a:pPr>
             <a:r>
-              <a:rPr lang="en-US" sz="710" dirty="0">
+              <a:rPr lang="en-US" sz="800" dirty="0">
                 <a:solidFill>
                   <a:srgbClr val="5F7183"/>
                 </a:solidFill>
@@ -13566,7 +13566,7 @@
               </a:rPr>
               <a:t>水平 120°、垂直 25.4°——它不轉，只看前面</a:t>
             </a:r>
-            <a:endParaRPr lang="en-US" sz="780" dirty="0"/>
+            <a:endParaRPr lang="en-US" sz="880" dirty="0"/>
           </a:p>
         </p:txBody>
       </p:sp>
@@ -13578,8 +13578,8 @@
         </p:nvSpPr>
         <p:spPr>
           <a:xfrm>
-            <a:off x="2954794" y="1946578"/>
-            <a:ext cx="753397" cy="284196"/>
+            <a:off x="2749821" y="2163448"/>
+            <a:ext cx="848887" cy="320216"/>
           </a:xfrm>
           <a:prstGeom prst="roundRect">
             <a:avLst>
@@ -13600,8 +13600,8 @@
         </p:nvSpPr>
         <p:spPr>
           <a:xfrm>
-            <a:off x="2993763" y="1972558"/>
-            <a:ext cx="675460" cy="245227"/>
+            <a:off x="2793729" y="2192720"/>
+            <a:ext cx="761071" cy="276308"/>
           </a:xfrm>
           <a:prstGeom prst="rect">
             <a:avLst/>
@@ -13620,7 +13620,7 @@
               <a:buNone/>
             </a:pPr>
             <a:r>
-              <a:rPr lang="en-US" sz="640" b="1" dirty="0">
+              <a:rPr lang="en-US" sz="720" b="1" dirty="0">
                 <a:solidFill>
                   <a:srgbClr val="3A2A00"/>
                 </a:solidFill>
@@ -13630,7 +13630,7 @@
               </a:rPr>
               <a:t>Phân giải góc</a:t>
             </a:r>
-            <a:endParaRPr lang="en-US" sz="640" dirty="0"/>
+            <a:endParaRPr lang="en-US" sz="720" dirty="0"/>
           </a:p>
           <a:p>
             <a:pPr algn="ctr" indent="0" marL="0">
@@ -13640,7 +13640,7 @@
               <a:buNone/>
             </a:pPr>
             <a:r>
-              <a:rPr lang="en-US" sz="600" dirty="0">
+              <a:rPr lang="en-US" sz="680" dirty="0">
                 <a:solidFill>
                   <a:srgbClr val="3A2A00"/>
                 </a:solidFill>
@@ -13650,7 +13650,7 @@
               </a:rPr>
               <a:t>角解析度</a:t>
             </a:r>
-            <a:endParaRPr lang="en-US" sz="640" dirty="0"/>
+            <a:endParaRPr lang="en-US" sz="720" dirty="0"/>
           </a:p>
         </p:txBody>
       </p:sp>
@@ -13662,8 +13662,8 @@
         </p:nvSpPr>
         <p:spPr>
           <a:xfrm>
-            <a:off x="3812108" y="1946578"/>
-            <a:ext cx="3650080" cy="323165"/>
+            <a:off x="3715795" y="2163448"/>
+            <a:ext cx="4112709" cy="364124"/>
           </a:xfrm>
           <a:prstGeom prst="rect">
             <a:avLst/>
@@ -13682,7 +13682,7 @@
               <a:buNone/>
             </a:pPr>
             <a:r>
-              <a:rPr lang="en-US" sz="780" dirty="0">
+              <a:rPr lang="en-US" sz="880" dirty="0">
                 <a:solidFill>
                   <a:srgbClr val="1A2733"/>
                 </a:solidFill>
@@ -13692,7 +13692,7 @@
               </a:rPr>
               <a:t>0.1° ngang × 0.2° dọc — hãng viết thẳng ra góc, không phải chia ngược</a:t>
             </a:r>
-            <a:endParaRPr lang="en-US" sz="780" dirty="0"/>
+            <a:endParaRPr lang="en-US" sz="880" dirty="0"/>
           </a:p>
           <a:p>
             <a:pPr indent="0" marL="0">
@@ -13702,7 +13702,7 @@
               <a:buNone/>
             </a:pPr>
             <a:r>
-              <a:rPr lang="en-US" sz="710" dirty="0">
+              <a:rPr lang="en-US" sz="800" dirty="0">
                 <a:solidFill>
                   <a:srgbClr val="5F7183"/>
                 </a:solidFill>
@@ -13712,7 +13712,7 @@
               </a:rPr>
               <a:t>左右 0.1°、上下 0.2°——這一顆直接把角度寫出來，不用自己除</a:t>
             </a:r>
-            <a:endParaRPr lang="en-US" sz="780" dirty="0"/>
+            <a:endParaRPr lang="en-US" sz="880" dirty="0"/>
           </a:p>
         </p:txBody>
       </p:sp>
@@ -13724,8 +13724,8 @@
         </p:nvSpPr>
         <p:spPr>
           <a:xfrm>
-            <a:off x="1681812" y="2819258"/>
-            <a:ext cx="5780375" cy="402678"/>
+            <a:off x="1315495" y="3146735"/>
+            <a:ext cx="6513009" cy="453715"/>
           </a:xfrm>
           <a:prstGeom prst="roundRect">
             <a:avLst>
@@ -13751,8 +13751,8 @@
         </p:nvSpPr>
         <p:spPr>
           <a:xfrm>
-            <a:off x="1811708" y="2864721"/>
-            <a:ext cx="5520583" cy="324740"/>
+            <a:off x="1461855" y="3197961"/>
+            <a:ext cx="6220290" cy="365899"/>
           </a:xfrm>
           <a:prstGeom prst="rect">
             <a:avLst/>
@@ -13771,7 +13771,7 @@
               <a:buNone/>
             </a:pPr>
             <a:r>
-              <a:rPr lang="en-US" sz="850" b="1" dirty="0">
+              <a:rPr lang="en-US" sz="960" b="1" dirty="0">
                 <a:solidFill>
                   <a:srgbClr val="7A4E00"/>
                 </a:solidFill>
@@ -13781,7 +13781,7 @@
               </a:rPr>
               <a:t>Cùng là lidar, một cái rải quanh 360°, một cái dồn vào 120°.</a:t>
             </a:r>
-            <a:endParaRPr lang="en-US" sz="850" dirty="0"/>
+            <a:endParaRPr lang="en-US" sz="960" dirty="0"/>
           </a:p>
           <a:p>
             <a:pPr indent="0" marL="0">
@@ -13791,7 +13791,7 @@
               <a:buNone/>
             </a:pPr>
             <a:r>
-              <a:rPr lang="en-US" sz="780" dirty="0">
+              <a:rPr lang="en-US" sz="880" dirty="0">
                 <a:solidFill>
                   <a:srgbClr val="7A4E00"/>
                 </a:solidFill>
@@ -13801,7 +13801,7 @@
               </a:rPr>
               <a:t>同樣是光達，一個灑滿 360 度，一個集中在 120 度。</a:t>
             </a:r>
-            <a:endParaRPr lang="en-US" sz="850" dirty="0"/>
+            <a:endParaRPr lang="en-US" sz="960" dirty="0"/>
           </a:p>
         </p:txBody>
       </p:sp>
@@ -13821,8 +13821,8 @@
         </p:blipFill>
         <p:spPr>
           <a:xfrm>
-            <a:off x="6663327" y="3338842"/>
-            <a:ext cx="779376" cy="172200"/>
+            <a:off x="7882128" y="109728"/>
+            <a:ext cx="1097280" cy="242439"/>
           </a:xfrm>
           <a:prstGeom prst="rect">
             <a:avLst/>
@@ -13837,8 +13837,8 @@
         </p:nvSpPr>
         <p:spPr>
           <a:xfrm>
-            <a:off x="1402536" y="3390800"/>
-            <a:ext cx="584532" cy="181855"/>
+            <a:off x="1000822" y="102452"/>
+            <a:ext cx="658619" cy="204904"/>
           </a:xfrm>
           <a:prstGeom prst="rect">
             <a:avLst/>
@@ -13854,7 +13854,7 @@
               <a:buNone/>
             </a:pPr>
             <a:r>
-              <a:rPr lang="en-US" sz="640" dirty="0">
+              <a:rPr lang="en-US" sz="720" dirty="0">
                 <a:solidFill>
                   <a:srgbClr val="5F7183"/>
                 </a:solidFill>
@@ -13864,7 +13864,7 @@
               </a:rPr>
               <a:t>5 / 14</a:t>
             </a:r>
-            <a:endParaRPr lang="en-US" sz="640" dirty="0"/>
+            <a:endParaRPr lang="en-US" sz="720" dirty="0"/>
           </a:p>
         </p:txBody>
       </p:sp>
@@ -13876,8 +13876,8 @@
         </p:nvSpPr>
         <p:spPr>
           <a:xfrm>
-            <a:off x="2006553" y="3390800"/>
-            <a:ext cx="1428857" cy="181855"/>
+            <a:off x="1681395" y="102452"/>
+            <a:ext cx="1609957" cy="204904"/>
           </a:xfrm>
           <a:prstGeom prst="rect">
             <a:avLst/>
@@ -13893,7 +13893,7 @@
               <a:buNone/>
             </a:pPr>
             <a:r>
-              <a:rPr lang="en-US" sz="640" dirty="0">
+              <a:rPr lang="en-US" sz="720" dirty="0">
                 <a:solidFill>
                   <a:srgbClr val="5F7183"/>
                 </a:solidFill>
@@ -13903,7 +13903,7 @@
               </a:rPr>
               <a:t>Tiết 1 · 第 1 節</a:t>
             </a:r>
-            <a:endParaRPr lang="en-US" sz="640" dirty="0"/>
+            <a:endParaRPr lang="en-US" sz="720" dirty="0"/>
           </a:p>
         </p:txBody>
       </p:sp>
@@ -13926,8 +13926,8 @@
       </p:nvGrpSpPr>
       <p:grpSpPr>
         <a:xfrm>
-          <a:off x="0" y="0"/>
-          <a:ext cx="0" cy="0"/>
+          <a:off x="624258" y="0"/>
+          <a:ext cx="1" cy="1"/>
           <a:chOff x="0" y="0"/>
           <a:chExt cx="0" cy="0"/>
         </a:xfrm>
@@ -13940,8 +13940,8 @@
         </p:nvSpPr>
         <p:spPr>
           <a:xfrm>
-            <a:off x="1681812" y="234326"/>
-            <a:ext cx="5780375" cy="597522"/>
+            <a:off x="1058510" y="252655"/>
+            <a:ext cx="7026980" cy="726384"/>
           </a:xfrm>
           <a:prstGeom prst="rect">
             <a:avLst/>
@@ -13960,7 +13960,7 @@
               <a:buNone/>
             </a:pPr>
             <a:r>
-              <a:rPr lang="en-US" sz="1560" b="1" dirty="0">
+              <a:rPr lang="en-US" sz="1900" b="1" dirty="0">
                 <a:solidFill>
                   <a:srgbClr val="0B1F3A"/>
                 </a:solidFill>
@@ -13970,7 +13970,7 @@
               </a:rPr>
               <a:t>Cùng là lidar, hai cách tiêu tiền khác nhau</a:t>
             </a:r>
-            <a:endParaRPr lang="en-US" sz="1560" dirty="0"/>
+            <a:endParaRPr lang="en-US" sz="1900" dirty="0"/>
           </a:p>
           <a:p>
             <a:pPr indent="0" marL="0">
@@ -13980,7 +13980,7 @@
               <a:buNone/>
             </a:pPr>
             <a:r>
-              <a:rPr lang="en-US" sz="960" dirty="0">
+              <a:rPr lang="en-US" sz="1170" dirty="0">
                 <a:solidFill>
                   <a:srgbClr val="5F7183"/>
                 </a:solidFill>
@@ -13990,7 +13990,7 @@
               </a:rPr>
               <a:t>同樣是光達，兩種花錢的方式</a:t>
             </a:r>
-            <a:endParaRPr lang="en-US" sz="1560" dirty="0"/>
+            <a:endParaRPr lang="en-US" sz="1900" dirty="0"/>
           </a:p>
         </p:txBody>
       </p:sp>
@@ -14009,18 +14009,18 @@
           </p:nvPr>
         </p:nvGraphicFramePr>
         <p:xfrm>
-          <a:off x="1681812" y="831848"/>
-          <a:ext cx="5780375" cy="914400"/>
+          <a:off x="1058510" y="979040"/>
+          <a:ext cx="7026980" cy="789548"/>
         </p:xfrm>
         <a:graphic>
           <a:graphicData uri="http://schemas.openxmlformats.org/drawingml/2006/table">
             <a:tbl>
               <a:tblPr/>
               <a:tblGrid>
-                <a:gridCol w="1445094"/>
-                <a:gridCol w="1445094"/>
-                <a:gridCol w="1445094"/>
-                <a:gridCol w="1445094"/>
+                <a:gridCol w="2034540"/>
+                <a:gridCol w="2034540"/>
+                <a:gridCol w="2034540"/>
+                <a:gridCol w="2034540"/>
               </a:tblGrid>
               <a:tr h="384048">
                 <a:tc>
@@ -14032,7 +14032,7 @@
                         <a:buNone/>
                       </a:pPr>
                       <a:r>
-                        <a:rPr lang="en-US" sz="1100" b="1" dirty="0">
+                        <a:rPr lang="en-US" sz="950" b="1" dirty="0">
                           <a:solidFill>
                             <a:srgbClr val="FFFFFF"/>
                           </a:solidFill>
@@ -14042,14 +14042,14 @@
                         </a:rPr>
                         <a:t>Dòng trên datasheet</a:t>
                       </a:r>
-                      <a:endParaRPr lang="en-US" sz="1200" dirty="0"/>
+                      <a:endParaRPr lang="en-US" sz="1040" dirty="0"/>
                     </a:p>
                     <a:p>
                       <a:pPr algn="l" indent="0" marL="0">
                         <a:buNone/>
                       </a:pPr>
                       <a:r>
-                        <a:rPr lang="en-US" sz="950" dirty="0">
+                        <a:rPr lang="en-US" sz="820" dirty="0">
                           <a:solidFill>
                             <a:srgbClr val="CFE0EC"/>
                           </a:solidFill>
@@ -14059,7 +14059,7 @@
                         </a:rPr>
                         <a:t>規格表上那一行</a:t>
                       </a:r>
-                      <a:endParaRPr lang="en-US" sz="1200" dirty="0"/>
+                      <a:endParaRPr lang="en-US" sz="1040" dirty="0"/>
                     </a:p>
                   </a:txBody>
                   <a:tcPr marL="63500" marR="63500" marT="38100" marB="38100" anchor="ctr">
@@ -14113,7 +14113,7 @@
                         <a:buNone/>
                       </a:pPr>
                       <a:r>
-                        <a:rPr lang="en-US" sz="1100" b="1" dirty="0">
+                        <a:rPr lang="en-US" sz="950" b="1" dirty="0">
                           <a:solidFill>
                             <a:srgbClr val="FFFFFF"/>
                           </a:solidFill>
@@ -14123,14 +14123,14 @@
                         </a:rPr>
                         <a:t>Ouster OS1-64</a:t>
                       </a:r>
-                      <a:endParaRPr lang="en-US" sz="1200" dirty="0"/>
+                      <a:endParaRPr lang="en-US" sz="1040" dirty="0"/>
                     </a:p>
                     <a:p>
                       <a:pPr algn="l" indent="0" marL="0">
                         <a:buNone/>
                       </a:pPr>
                       <a:r>
-                        <a:rPr lang="en-US" sz="950" dirty="0">
+                        <a:rPr lang="en-US" sz="820" dirty="0">
                           <a:solidFill>
                             <a:srgbClr val="CFE0EC"/>
                           </a:solidFill>
@@ -14140,7 +14140,7 @@
                         </a:rPr>
                         <a:t>Ouster OS1-64</a:t>
                       </a:r>
-                      <a:endParaRPr lang="en-US" sz="1200" dirty="0"/>
+                      <a:endParaRPr lang="en-US" sz="1040" dirty="0"/>
                     </a:p>
                   </a:txBody>
                   <a:tcPr marL="63500" marR="63500" marT="38100" marB="38100" anchor="ctr">
@@ -14194,7 +14194,7 @@
                         <a:buNone/>
                       </a:pPr>
                       <a:r>
-                        <a:rPr lang="en-US" sz="1100" b="1" dirty="0">
+                        <a:rPr lang="en-US" sz="950" b="1" dirty="0">
                           <a:solidFill>
                             <a:srgbClr val="FFFFFF"/>
                           </a:solidFill>
@@ -14204,14 +14204,14 @@
                         </a:rPr>
                         <a:t>Hesai AT128</a:t>
                       </a:r>
-                      <a:endParaRPr lang="en-US" sz="1200" dirty="0"/>
+                      <a:endParaRPr lang="en-US" sz="1040" dirty="0"/>
                     </a:p>
                     <a:p>
                       <a:pPr algn="l" indent="0" marL="0">
                         <a:buNone/>
                       </a:pPr>
                       <a:r>
-                        <a:rPr lang="en-US" sz="950" dirty="0">
+                        <a:rPr lang="en-US" sz="820" dirty="0">
                           <a:solidFill>
                             <a:srgbClr val="CFE0EC"/>
                           </a:solidFill>
@@ -14221,7 +14221,7 @@
                         </a:rPr>
                         <a:t>Hesai AT128</a:t>
                       </a:r>
-                      <a:endParaRPr lang="en-US" sz="1200" dirty="0"/>
+                      <a:endParaRPr lang="en-US" sz="1040" dirty="0"/>
                     </a:p>
                   </a:txBody>
                   <a:tcPr marL="63500" marR="63500" marT="38100" marB="38100" anchor="ctr">
@@ -14275,7 +14275,7 @@
                         <a:buNone/>
                       </a:pPr>
                       <a:r>
-                        <a:rPr lang="en-US" sz="1100" b="1" dirty="0">
+                        <a:rPr lang="en-US" sz="950" b="1" dirty="0">
                           <a:solidFill>
                             <a:srgbClr val="FFFFFF"/>
                           </a:solidFill>
@@ -14285,14 +14285,14 @@
                         </a:rPr>
                         <a:t>Nghĩa là gì</a:t>
                       </a:r>
-                      <a:endParaRPr lang="en-US" sz="1200" dirty="0"/>
+                      <a:endParaRPr lang="en-US" sz="1040" dirty="0"/>
                     </a:p>
                     <a:p>
                       <a:pPr algn="l" indent="0" marL="0">
                         <a:buNone/>
                       </a:pPr>
                       <a:r>
-                        <a:rPr lang="en-US" sz="950" dirty="0">
+                        <a:rPr lang="en-US" sz="820" dirty="0">
                           <a:solidFill>
                             <a:srgbClr val="CFE0EC"/>
                           </a:solidFill>
@@ -14302,7 +14302,7 @@
                         </a:rPr>
                         <a:t>這代表什麼</a:t>
                       </a:r>
-                      <a:endParaRPr lang="en-US" sz="1200" dirty="0"/>
+                      <a:endParaRPr lang="en-US" sz="1040" dirty="0"/>
                     </a:p>
                   </a:txBody>
                   <a:tcPr marL="63500" marR="63500" marT="38100" marB="38100" anchor="ctr">
@@ -14358,7 +14358,7 @@
                         <a:buNone/>
                       </a:pPr>
                       <a:r>
-                        <a:rPr lang="en-US" sz="1100" b="1" dirty="0">
+                        <a:rPr lang="en-US" sz="950" b="1" dirty="0">
                           <a:solidFill>
                             <a:srgbClr val="0B1F3A"/>
                           </a:solidFill>
@@ -14368,14 +14368,14 @@
                         </a:rPr>
                         <a:t>Góc nhìn ngang</a:t>
                       </a:r>
-                      <a:endParaRPr lang="en-US" sz="1200" dirty="0"/>
+                      <a:endParaRPr lang="en-US" sz="1040" dirty="0"/>
                     </a:p>
                     <a:p>
                       <a:pPr algn="l" indent="0" marL="0">
                         <a:buNone/>
                       </a:pPr>
                       <a:r>
-                        <a:rPr lang="en-US" sz="950" dirty="0">
+                        <a:rPr lang="en-US" sz="820" dirty="0">
                           <a:solidFill>
                             <a:srgbClr val="5F7183"/>
                           </a:solidFill>
@@ -14385,7 +14385,7 @@
                         </a:rPr>
                         <a:t>水平視野</a:t>
                       </a:r>
-                      <a:endParaRPr lang="en-US" sz="1200" dirty="0"/>
+                      <a:endParaRPr lang="en-US" sz="1040" dirty="0"/>
                     </a:p>
                   </a:txBody>
                   <a:tcPr marL="63500" marR="63500" marT="38100" marB="38100" anchor="ctr">
@@ -14436,7 +14436,7 @@
                         <a:buNone/>
                       </a:pPr>
                       <a:r>
-                        <a:rPr lang="en-US" sz="1100" dirty="0">
+                        <a:rPr lang="en-US" sz="950" dirty="0">
                           <a:solidFill>
                             <a:srgbClr val="1A2733"/>
                           </a:solidFill>
@@ -14446,7 +14446,7 @@
                         </a:rPr>
                         <a:t>360°</a:t>
                       </a:r>
-                      <a:endParaRPr lang="en-US" sz="1200" dirty="0"/>
+                      <a:endParaRPr lang="en-US" sz="1040" dirty="0"/>
                     </a:p>
                   </a:txBody>
                   <a:tcPr marL="63500" marR="63500" marT="38100" marB="38100" anchor="ctr">
@@ -14497,7 +14497,7 @@
                         <a:buNone/>
                       </a:pPr>
                       <a:r>
-                        <a:rPr lang="en-US" sz="1100" dirty="0">
+                        <a:rPr lang="en-US" sz="950" dirty="0">
                           <a:solidFill>
                             <a:srgbClr val="1A2733"/>
                           </a:solidFill>
@@ -14507,7 +14507,7 @@
                         </a:rPr>
                         <a:t>120°</a:t>
                       </a:r>
-                      <a:endParaRPr lang="en-US" sz="1200" dirty="0"/>
+                      <a:endParaRPr lang="en-US" sz="1040" dirty="0"/>
                     </a:p>
                   </a:txBody>
                   <a:tcPr marL="63500" marR="63500" marT="38100" marB="38100" anchor="ctr">
@@ -14558,7 +14558,7 @@
                         <a:buNone/>
                       </a:pPr>
                       <a:r>
-                        <a:rPr lang="en-US" sz="1100" dirty="0">
+                        <a:rPr lang="en-US" sz="950" dirty="0">
                           <a:solidFill>
                             <a:srgbClr val="1A2733"/>
                           </a:solidFill>
@@ -14568,14 +14568,14 @@
                         </a:rPr>
                         <a:t>Một cái nhìn quanh, một cái nhìn trước</a:t>
                       </a:r>
-                      <a:endParaRPr lang="en-US" sz="1200" dirty="0"/>
+                      <a:endParaRPr lang="en-US" sz="1040" dirty="0"/>
                     </a:p>
                     <a:p>
                       <a:pPr algn="l" indent="0" marL="0">
                         <a:buNone/>
                       </a:pPr>
                       <a:r>
-                        <a:rPr lang="en-US" sz="950" dirty="0">
+                        <a:rPr lang="en-US" sz="820" dirty="0">
                           <a:solidFill>
                             <a:srgbClr val="5F7183"/>
                           </a:solidFill>
@@ -14585,7 +14585,7 @@
                         </a:rPr>
                         <a:t>一個看四周，一個只看前面</a:t>
                       </a:r>
-                      <a:endParaRPr lang="en-US" sz="1200" dirty="0"/>
+                      <a:endParaRPr lang="en-US" sz="1040" dirty="0"/>
                     </a:p>
                   </a:txBody>
                   <a:tcPr marL="63500" marR="63500" marT="38100" marB="38100" anchor="ctr">
@@ -14638,7 +14638,7 @@
                         <a:buNone/>
                       </a:pPr>
                       <a:r>
-                        <a:rPr lang="en-US" sz="1100" b="1" dirty="0">
+                        <a:rPr lang="en-US" sz="950" b="1" dirty="0">
                           <a:solidFill>
                             <a:srgbClr val="0B1F3A"/>
                           </a:solidFill>
@@ -14648,14 +14648,14 @@
                         </a:rPr>
                         <a:t>Phân giải ngang</a:t>
                       </a:r>
-                      <a:endParaRPr lang="en-US" sz="1200" dirty="0"/>
+                      <a:endParaRPr lang="en-US" sz="1040" dirty="0"/>
                     </a:p>
                     <a:p>
                       <a:pPr algn="l" indent="0" marL="0">
                         <a:buNone/>
                       </a:pPr>
                       <a:r>
-                        <a:rPr lang="en-US" sz="950" dirty="0">
+                        <a:rPr lang="en-US" sz="820" dirty="0">
                           <a:solidFill>
                             <a:srgbClr val="5F7183"/>
                           </a:solidFill>
@@ -14665,7 +14665,7 @@
                         </a:rPr>
                         <a:t>水平角解析度</a:t>
                       </a:r>
-                      <a:endParaRPr lang="en-US" sz="1200" dirty="0"/>
+                      <a:endParaRPr lang="en-US" sz="1040" dirty="0"/>
                     </a:p>
                   </a:txBody>
                   <a:tcPr marL="63500" marR="63500" marT="38100" marB="38100" anchor="ctr">
@@ -14716,7 +14716,7 @@
                         <a:buNone/>
                       </a:pPr>
                       <a:r>
-                        <a:rPr lang="en-US" sz="1100" dirty="0">
+                        <a:rPr lang="en-US" sz="950" dirty="0">
                           <a:solidFill>
                             <a:srgbClr val="1A2733"/>
                           </a:solidFill>
@@ -14726,7 +14726,7 @@
                         </a:rPr>
                         <a:t>0.35°</a:t>
                       </a:r>
-                      <a:endParaRPr lang="en-US" sz="1200" dirty="0"/>
+                      <a:endParaRPr lang="en-US" sz="1040" dirty="0"/>
                     </a:p>
                   </a:txBody>
                   <a:tcPr marL="63500" marR="63500" marT="38100" marB="38100" anchor="ctr">
@@ -14777,7 +14777,7 @@
                         <a:buNone/>
                       </a:pPr>
                       <a:r>
-                        <a:rPr lang="en-US" sz="1100" dirty="0">
+                        <a:rPr lang="en-US" sz="950" dirty="0">
                           <a:solidFill>
                             <a:srgbClr val="1A2733"/>
                           </a:solidFill>
@@ -14787,7 +14787,7 @@
                         </a:rPr>
                         <a:t>0.1°</a:t>
                       </a:r>
-                      <a:endParaRPr lang="en-US" sz="1200" dirty="0"/>
+                      <a:endParaRPr lang="en-US" sz="1040" dirty="0"/>
                     </a:p>
                   </a:txBody>
                   <a:tcPr marL="63500" marR="63500" marT="38100" marB="38100" anchor="ctr">
@@ -14838,7 +14838,7 @@
                         <a:buNone/>
                       </a:pPr>
                       <a:r>
-                        <a:rPr lang="en-US" sz="1100" dirty="0">
+                        <a:rPr lang="en-US" sz="950" dirty="0">
                           <a:solidFill>
                             <a:srgbClr val="1A2733"/>
                           </a:solidFill>
@@ -14848,14 +14848,14 @@
                         </a:rPr>
                         <a:t>AT128 dày hơn 3 lần theo chiều ngang</a:t>
                       </a:r>
-                      <a:endParaRPr lang="en-US" sz="1200" dirty="0"/>
+                      <a:endParaRPr lang="en-US" sz="1040" dirty="0"/>
                     </a:p>
                     <a:p>
                       <a:pPr algn="l" indent="0" marL="0">
                         <a:buNone/>
                       </a:pPr>
                       <a:r>
-                        <a:rPr lang="en-US" sz="950" dirty="0">
+                        <a:rPr lang="en-US" sz="820" dirty="0">
                           <a:solidFill>
                             <a:srgbClr val="5F7183"/>
                           </a:solidFill>
@@ -14865,7 +14865,7 @@
                         </a:rPr>
                         <a:t>AT128 左右密了三倍多</a:t>
                       </a:r>
-                      <a:endParaRPr lang="en-US" sz="1200" dirty="0"/>
+                      <a:endParaRPr lang="en-US" sz="1040" dirty="0"/>
                     </a:p>
                   </a:txBody>
                   <a:tcPr marL="63500" marR="63500" marT="38100" marB="38100" anchor="ctr">
@@ -14918,7 +14918,7 @@
                         <a:buNone/>
                       </a:pPr>
                       <a:r>
-                        <a:rPr lang="en-US" sz="1100" b="1" dirty="0">
+                        <a:rPr lang="en-US" sz="950" b="1" dirty="0">
                           <a:solidFill>
                             <a:srgbClr val="0B1F3A"/>
                           </a:solidFill>
@@ -14928,14 +14928,14 @@
                         </a:rPr>
                         <a:t>Tầm đo (10%)</a:t>
                       </a:r>
-                      <a:endParaRPr lang="en-US" sz="1200" dirty="0"/>
+                      <a:endParaRPr lang="en-US" sz="1040" dirty="0"/>
                     </a:p>
                     <a:p>
                       <a:pPr algn="l" indent="0" marL="0">
                         <a:buNone/>
                       </a:pPr>
                       <a:r>
-                        <a:rPr lang="en-US" sz="950" dirty="0">
+                        <a:rPr lang="en-US" sz="820" dirty="0">
                           <a:solidFill>
                             <a:srgbClr val="5F7183"/>
                           </a:solidFill>
@@ -14945,7 +14945,7 @@
                         </a:rPr>
                         <a:t>測距（10% 反射率）</a:t>
                       </a:r>
-                      <a:endParaRPr lang="en-US" sz="1200" dirty="0"/>
+                      <a:endParaRPr lang="en-US" sz="1040" dirty="0"/>
                     </a:p>
                   </a:txBody>
                   <a:tcPr marL="63500" marR="63500" marT="38100" marB="38100" anchor="ctr">
@@ -14996,7 +14996,7 @@
                         <a:buNone/>
                       </a:pPr>
                       <a:r>
-                        <a:rPr lang="en-US" sz="1100" dirty="0">
+                        <a:rPr lang="en-US" sz="950" dirty="0">
                           <a:solidFill>
                             <a:srgbClr val="1A2733"/>
                           </a:solidFill>
@@ -15006,7 +15006,7 @@
                         </a:rPr>
                         <a:t>90 m</a:t>
                       </a:r>
-                      <a:endParaRPr lang="en-US" sz="1200" dirty="0"/>
+                      <a:endParaRPr lang="en-US" sz="1040" dirty="0"/>
                     </a:p>
                   </a:txBody>
                   <a:tcPr marL="63500" marR="63500" marT="38100" marB="38100" anchor="ctr">
@@ -15057,7 +15057,7 @@
                         <a:buNone/>
                       </a:pPr>
                       <a:r>
-                        <a:rPr lang="en-US" sz="1100" dirty="0">
+                        <a:rPr lang="en-US" sz="950" dirty="0">
                           <a:solidFill>
                             <a:srgbClr val="1A2733"/>
                           </a:solidFill>
@@ -15067,7 +15067,7 @@
                         </a:rPr>
                         <a:t>210 m</a:t>
                       </a:r>
-                      <a:endParaRPr lang="en-US" sz="1200" dirty="0"/>
+                      <a:endParaRPr lang="en-US" sz="1040" dirty="0"/>
                     </a:p>
                   </a:txBody>
                   <a:tcPr marL="63500" marR="63500" marT="38100" marB="38100" anchor="ctr">
@@ -15118,7 +15118,7 @@
                         <a:buNone/>
                       </a:pPr>
                       <a:r>
-                        <a:rPr lang="en-US" sz="1100" dirty="0">
+                        <a:rPr lang="en-US" sz="950" dirty="0">
                           <a:solidFill>
                             <a:srgbClr val="1A2733"/>
                           </a:solidFill>
@@ -15128,14 +15128,14 @@
                         </a:rPr>
                         <a:t>Nhìn xa hơn gấp đôi</a:t>
                       </a:r>
-                      <a:endParaRPr lang="en-US" sz="1200" dirty="0"/>
+                      <a:endParaRPr lang="en-US" sz="1040" dirty="0"/>
                     </a:p>
                     <a:p>
                       <a:pPr algn="l" indent="0" marL="0">
                         <a:buNone/>
                       </a:pPr>
                       <a:r>
-                        <a:rPr lang="en-US" sz="950" dirty="0">
+                        <a:rPr lang="en-US" sz="820" dirty="0">
                           <a:solidFill>
                             <a:srgbClr val="5F7183"/>
                           </a:solidFill>
@@ -15145,7 +15145,7 @@
                         </a:rPr>
                         <a:t>看得遠一倍以上</a:t>
                       </a:r>
-                      <a:endParaRPr lang="en-US" sz="1200" dirty="0"/>
+                      <a:endParaRPr lang="en-US" sz="1040" dirty="0"/>
                     </a:p>
                   </a:txBody>
                   <a:tcPr marL="63500" marR="63500" marT="38100" marB="38100" anchor="ctr">
@@ -15198,7 +15198,7 @@
                         <a:buNone/>
                       </a:pPr>
                       <a:r>
-                        <a:rPr lang="en-US" sz="1100" b="1" dirty="0">
+                        <a:rPr lang="en-US" sz="950" b="1" dirty="0">
                           <a:solidFill>
                             <a:srgbClr val="0B1F3A"/>
                           </a:solidFill>
@@ -15208,14 +15208,14 @@
                         </a:rPr>
                         <a:t>Người ở 40 m</a:t>
                       </a:r>
-                      <a:endParaRPr lang="en-US" sz="1200" dirty="0"/>
+                      <a:endParaRPr lang="en-US" sz="1040" dirty="0"/>
                     </a:p>
                     <a:p>
                       <a:pPr algn="l" indent="0" marL="0">
                         <a:buNone/>
                       </a:pPr>
                       <a:r>
-                        <a:rPr lang="en-US" sz="950" dirty="0">
+                        <a:rPr lang="en-US" sz="820" dirty="0">
                           <a:solidFill>
                             <a:srgbClr val="5F7183"/>
                           </a:solidFill>
@@ -15225,7 +15225,7 @@
                         </a:rPr>
                         <a:t>40 公尺的行人</a:t>
                       </a:r>
-                      <a:endParaRPr lang="en-US" sz="1200" dirty="0"/>
+                      <a:endParaRPr lang="en-US" sz="1040" dirty="0"/>
                     </a:p>
                   </a:txBody>
                   <a:tcPr marL="63500" marR="63500" marT="38100" marB="38100" anchor="ctr">
@@ -15276,7 +15276,7 @@
                         <a:buNone/>
                       </a:pPr>
                       <a:r>
-                        <a:rPr lang="en-US" sz="1100" dirty="0">
+                        <a:rPr lang="en-US" sz="950" dirty="0">
                           <a:solidFill>
                             <a:srgbClr val="1A2733"/>
                           </a:solidFill>
@@ -15286,7 +15286,7 @@
                         </a:rPr>
                         <a:t>9 điểm</a:t>
                       </a:r>
-                      <a:endParaRPr lang="en-US" sz="1200" dirty="0"/>
+                      <a:endParaRPr lang="en-US" sz="1040" dirty="0"/>
                     </a:p>
                   </a:txBody>
                   <a:tcPr marL="63500" marR="63500" marT="38100" marB="38100" anchor="ctr">
@@ -15337,7 +15337,7 @@
                         <a:buNone/>
                       </a:pPr>
                       <a:r>
-                        <a:rPr lang="en-US" sz="1100" dirty="0">
+                        <a:rPr lang="en-US" sz="950" dirty="0">
                           <a:solidFill>
                             <a:srgbClr val="1A2733"/>
                           </a:solidFill>
@@ -15347,7 +15347,7 @@
                         </a:rPr>
                         <a:t>121 điểm</a:t>
                       </a:r>
-                      <a:endParaRPr lang="en-US" sz="1200" dirty="0"/>
+                      <a:endParaRPr lang="en-US" sz="1040" dirty="0"/>
                     </a:p>
                   </a:txBody>
                   <a:tcPr marL="63500" marR="63500" marT="38100" marB="38100" anchor="ctr">
@@ -15398,7 +15398,7 @@
                         <a:buNone/>
                       </a:pPr>
                       <a:r>
-                        <a:rPr lang="en-US" sz="1100" dirty="0">
+                        <a:rPr lang="en-US" sz="950" dirty="0">
                           <a:solidFill>
                             <a:srgbClr val="1A2733"/>
                           </a:solidFill>
@@ -15408,14 +15408,14 @@
                         </a:rPr>
                         <a:t>Đây mới là con số quyết định</a:t>
                       </a:r>
-                      <a:endParaRPr lang="en-US" sz="1200" dirty="0"/>
+                      <a:endParaRPr lang="en-US" sz="1040" dirty="0"/>
                     </a:p>
                     <a:p>
                       <a:pPr algn="l" indent="0" marL="0">
                         <a:buNone/>
                       </a:pPr>
                       <a:r>
-                        <a:rPr lang="en-US" sz="950" dirty="0">
+                        <a:rPr lang="en-US" sz="820" dirty="0">
                           <a:solidFill>
                             <a:srgbClr val="5F7183"/>
                           </a:solidFill>
@@ -15425,7 +15425,7 @@
                         </a:rPr>
                         <a:t>這才是真正決定用不用得了的數字</a:t>
                       </a:r>
-                      <a:endParaRPr lang="en-US" sz="1200" dirty="0"/>
+                      <a:endParaRPr lang="en-US" sz="1040" dirty="0"/>
                     </a:p>
                   </a:txBody>
                   <a:tcPr marL="63500" marR="63500" marT="38100" marB="38100" anchor="ctr">
@@ -15480,8 +15480,8 @@
         </p:nvSpPr>
         <p:spPr>
           <a:xfrm>
-            <a:off x="1681812" y="2663473"/>
-            <a:ext cx="5780375" cy="324740"/>
+            <a:off x="1058510" y="3205676"/>
+            <a:ext cx="7026980" cy="394774"/>
           </a:xfrm>
           <a:prstGeom prst="rect">
             <a:avLst/>
@@ -15500,7 +15500,7 @@
               <a:buNone/>
             </a:pPr>
             <a:r>
-              <a:rPr lang="en-US" sz="850" b="1" dirty="0">
+              <a:rPr lang="en-US" sz="1040" b="1" dirty="0">
                 <a:solidFill>
                   <a:srgbClr val="007F72"/>
                 </a:solidFill>
@@ -15510,7 +15510,7 @@
               </a:rPr>
               <a:t>Hàng cuối không nằm trên datasheet — nó là do ta tự tính từ ba dòng trên.</a:t>
             </a:r>
-            <a:endParaRPr lang="en-US" sz="850" dirty="0"/>
+            <a:endParaRPr lang="en-US" sz="1040" dirty="0"/>
           </a:p>
           <a:p>
             <a:pPr indent="0" marL="0">
@@ -15520,7 +15520,7 @@
               <a:buNone/>
             </a:pPr>
             <a:r>
-              <a:rPr lang="en-US" sz="780" dirty="0">
+              <a:rPr lang="en-US" sz="950" dirty="0">
                 <a:solidFill>
                   <a:srgbClr val="007F72"/>
                 </a:solidFill>
@@ -15530,7 +15530,7 @@
               </a:rPr>
               <a:t>最後一行規格表上沒有，是我們自己用上面三行算出來的。</a:t>
             </a:r>
-            <a:endParaRPr lang="en-US" sz="850" dirty="0"/>
+            <a:endParaRPr lang="en-US" sz="1040" dirty="0"/>
           </a:p>
         </p:txBody>
       </p:sp>
@@ -15550,8 +15550,8 @@
         </p:blipFill>
         <p:spPr>
           <a:xfrm>
-            <a:off x="6663327" y="3338842"/>
-            <a:ext cx="779376" cy="172200"/>
+            <a:off x="7882128" y="109728"/>
+            <a:ext cx="1097280" cy="242439"/>
           </a:xfrm>
           <a:prstGeom prst="rect">
             <a:avLst/>
@@ -15566,8 +15566,8 @@
         </p:nvSpPr>
         <p:spPr>
           <a:xfrm>
-            <a:off x="1402536" y="3390800"/>
-            <a:ext cx="584532" cy="181855"/>
+            <a:off x="719004" y="110537"/>
+            <a:ext cx="710593" cy="221074"/>
           </a:xfrm>
           <a:prstGeom prst="rect">
             <a:avLst/>
@@ -15583,7 +15583,7 @@
               <a:buNone/>
             </a:pPr>
             <a:r>
-              <a:rPr lang="en-US" sz="640" dirty="0">
+              <a:rPr lang="en-US" sz="780" dirty="0">
                 <a:solidFill>
                   <a:srgbClr val="5F7183"/>
                 </a:solidFill>
@@ -15593,7 +15593,7 @@
               </a:rPr>
               <a:t>6 / 14</a:t>
             </a:r>
-            <a:endParaRPr lang="en-US" sz="640" dirty="0"/>
+            <a:endParaRPr lang="en-US" sz="780" dirty="0"/>
           </a:p>
         </p:txBody>
       </p:sp>
@@ -15605,8 +15605,8 @@
         </p:nvSpPr>
         <p:spPr>
           <a:xfrm>
-            <a:off x="2006553" y="3390800"/>
-            <a:ext cx="1428857" cy="181855"/>
+            <a:off x="1453284" y="110537"/>
+            <a:ext cx="1737006" cy="221074"/>
           </a:xfrm>
           <a:prstGeom prst="rect">
             <a:avLst/>
@@ -15622,7 +15622,7 @@
               <a:buNone/>
             </a:pPr>
             <a:r>
-              <a:rPr lang="en-US" sz="640" dirty="0">
+              <a:rPr lang="en-US" sz="780" dirty="0">
                 <a:solidFill>
                   <a:srgbClr val="5F7183"/>
                 </a:solidFill>
@@ -15632,7 +15632,7 @@
               </a:rPr>
               <a:t>Tiết 1 · 第 1 節</a:t>
             </a:r>
-            <a:endParaRPr lang="en-US" sz="640" dirty="0"/>
+            <a:endParaRPr lang="en-US" sz="780" dirty="0"/>
           </a:p>
         </p:txBody>
       </p:sp>
@@ -15655,8 +15655,8 @@
       </p:nvGrpSpPr>
       <p:grpSpPr>
         <a:xfrm>
-          <a:off x="0" y="0"/>
-          <a:ext cx="0" cy="0"/>
+          <a:off x="942514" y="0"/>
+          <a:ext cx="1" cy="1"/>
           <a:chOff x="0" y="0"/>
           <a:chExt cx="0" cy="0"/>
         </a:xfrm>
@@ -15669,8 +15669,8 @@
         </p:nvSpPr>
         <p:spPr>
           <a:xfrm>
-            <a:off x="1681812" y="325253"/>
-            <a:ext cx="5780375" cy="194844"/>
+            <a:off x="1341758" y="333913"/>
+            <a:ext cx="6460485" cy="217769"/>
           </a:xfrm>
           <a:prstGeom prst="rect">
             <a:avLst/>
@@ -15686,7 +15686,7 @@
               <a:buNone/>
             </a:pPr>
             <a:r>
-              <a:rPr lang="en-US" sz="890" b="1" dirty="0">
+              <a:rPr lang="en-US" sz="990" b="1" dirty="0">
                 <a:solidFill>
                   <a:srgbClr val="007F72"/>
                 </a:solidFill>
@@ -15696,7 +15696,7 @@
               </a:rPr>
               <a:t>Thông số thứ tư · 第四個規格</a:t>
             </a:r>
-            <a:endParaRPr lang="en-US" sz="890" dirty="0"/>
+            <a:endParaRPr lang="en-US" sz="990" dirty="0"/>
           </a:p>
         </p:txBody>
       </p:sp>
@@ -15708,8 +15708,8 @@
         </p:nvSpPr>
         <p:spPr>
           <a:xfrm>
-            <a:off x="1681812" y="809116"/>
-            <a:ext cx="1753597" cy="1786071"/>
+            <a:off x="1341758" y="874706"/>
+            <a:ext cx="1959922" cy="1996217"/>
           </a:xfrm>
           <a:prstGeom prst="roundRect">
             <a:avLst>
@@ -15735,8 +15735,8 @@
         </p:nvSpPr>
         <p:spPr>
           <a:xfrm>
-            <a:off x="2385719" y="1591675"/>
-            <a:ext cx="660132" cy="536601"/>
+            <a:off x="2128485" y="1749340"/>
+            <a:ext cx="737802" cy="599736"/>
           </a:xfrm>
           <a:prstGeom prst="roundRect">
             <a:avLst>
@@ -15762,8 +15762,8 @@
         </p:nvSpPr>
         <p:spPr>
           <a:xfrm>
-            <a:off x="2275697" y="1481198"/>
-            <a:ext cx="660132" cy="536601"/>
+            <a:off x="2005518" y="1625864"/>
+            <a:ext cx="737802" cy="599736"/>
           </a:xfrm>
           <a:prstGeom prst="roundRect">
             <a:avLst>
@@ -15789,8 +15789,8 @@
         </p:nvSpPr>
         <p:spPr>
           <a:xfrm>
-            <a:off x="2165675" y="1370721"/>
-            <a:ext cx="660132" cy="536601"/>
+            <a:off x="1882551" y="1502390"/>
+            <a:ext cx="737802" cy="599736"/>
           </a:xfrm>
           <a:prstGeom prst="roundRect">
             <a:avLst>
@@ -15816,8 +15816,8 @@
         </p:nvSpPr>
         <p:spPr>
           <a:xfrm>
-            <a:off x="2055653" y="1260245"/>
-            <a:ext cx="660132" cy="536601"/>
+            <a:off x="1759584" y="1378914"/>
+            <a:ext cx="737802" cy="599736"/>
           </a:xfrm>
           <a:prstGeom prst="roundRect">
             <a:avLst>
@@ -15843,8 +15843,8 @@
         </p:nvSpPr>
         <p:spPr>
           <a:xfrm>
-            <a:off x="1772740" y="2080928"/>
-            <a:ext cx="1571743" cy="284083"/>
+            <a:off x="1443383" y="2296158"/>
+            <a:ext cx="1756671" cy="317508"/>
           </a:xfrm>
           <a:prstGeom prst="rect">
             <a:avLst/>
@@ -15860,7 +15860,7 @@
               <a:buNone/>
             </a:pPr>
             <a:r>
-              <a:rPr lang="en-US" sz="780" b="1" dirty="0">
+              <a:rPr lang="en-US" sz="870" b="1" dirty="0">
                 <a:solidFill>
                   <a:srgbClr val="8A5A00"/>
                 </a:solidFill>
@@ -15870,7 +15870,7 @@
               </a:rPr>
               <a:t>× 10 000</a:t>
             </a:r>
-            <a:endParaRPr lang="en-US" sz="780" dirty="0"/>
+            <a:endParaRPr lang="en-US" sz="870" dirty="0"/>
           </a:p>
         </p:txBody>
       </p:sp>
@@ -15882,8 +15882,8 @@
         </p:nvSpPr>
         <p:spPr>
           <a:xfrm>
-            <a:off x="3760150" y="1035502"/>
-            <a:ext cx="3702038" cy="714266"/>
+            <a:off x="3664629" y="1127729"/>
+            <a:ext cx="4137614" cy="798305"/>
           </a:xfrm>
           <a:prstGeom prst="rect">
             <a:avLst/>
@@ -15902,7 +15902,7 @@
               <a:buNone/>
             </a:pPr>
             <a:r>
-              <a:rPr lang="en-US" sz="1630" b="1" dirty="0">
+              <a:rPr lang="en-US" sz="1830" b="1" dirty="0">
                 <a:solidFill>
                   <a:srgbClr val="0B1F3A"/>
                 </a:solidFill>
@@ -15912,7 +15912,7 @@
               </a:rPr>
               <a:t>Tốc độ cập nhật: một giây nó nhìn mấy lần</a:t>
             </a:r>
-            <a:endParaRPr lang="en-US" sz="1630" dirty="0"/>
+            <a:endParaRPr lang="en-US" sz="1830" dirty="0"/>
           </a:p>
           <a:p>
             <a:pPr indent="0" marL="0">
@@ -15922,7 +15922,7 @@
               <a:buNone/>
             </a:pPr>
             <a:r>
-              <a:rPr lang="en-US" sz="990" dirty="0">
+              <a:rPr lang="en-US" sz="1110" dirty="0">
                 <a:solidFill>
                   <a:srgbClr val="007F72"/>
                 </a:solidFill>
@@ -15932,7 +15932,7 @@
               </a:rPr>
               <a:t>更新率：它一秒鐘看幾次</a:t>
             </a:r>
-            <a:endParaRPr lang="en-US" sz="1630" dirty="0"/>
+            <a:endParaRPr lang="en-US" sz="1830" dirty="0"/>
           </a:p>
         </p:txBody>
       </p:sp>
@@ -15944,8 +15944,8 @@
         </p:nvSpPr>
         <p:spPr>
           <a:xfrm>
-            <a:off x="3760150" y="1814716"/>
-            <a:ext cx="3702038" cy="619033"/>
+            <a:off x="3664629" y="1998623"/>
+            <a:ext cx="4137614" cy="691867"/>
           </a:xfrm>
           <a:prstGeom prst="rect">
             <a:avLst/>
@@ -15964,7 +15964,7 @@
               <a:buNone/>
             </a:pPr>
             <a:r>
-              <a:rPr lang="en-US" sz="890" dirty="0">
+              <a:rPr lang="en-US" sz="990" dirty="0">
                 <a:solidFill>
                   <a:srgbClr val="5F7183"/>
                 </a:solidFill>
@@ -15974,7 +15974,7 @@
               </a:rPr>
               <a:t>OS1 quay 10 hoặc 20 vòng mỗi giây. Ở 10 Hz, mỗi khung cách nhau 100 ms — chạy 40 km/h thì trong khoảng đó xe đã đi 1,1 m.</a:t>
             </a:r>
-            <a:endParaRPr lang="en-US" sz="890" dirty="0"/>
+            <a:endParaRPr lang="en-US" sz="990" dirty="0"/>
           </a:p>
           <a:p>
             <a:pPr indent="0" marL="0">
@@ -15984,7 +15984,7 @@
               <a:buNone/>
             </a:pPr>
             <a:r>
-              <a:rPr lang="en-US" sz="820" dirty="0">
+              <a:rPr lang="en-US" sz="910" dirty="0">
                 <a:solidFill>
                   <a:srgbClr val="5F7183"/>
                 </a:solidFill>
@@ -15994,7 +15994,7 @@
               </a:rPr>
               <a:t>OS1 每秒轉 10 圈或 20 圈。10 Hz 的話，每一張畫面隔 100 毫秒——時速 40 的時候，這段時間車子已經走了 1.1 公尺。</a:t>
             </a:r>
-            <a:endParaRPr lang="en-US" sz="890" dirty="0"/>
+            <a:endParaRPr lang="en-US" sz="990" dirty="0"/>
           </a:p>
         </p:txBody>
       </p:sp>
@@ -16006,8 +16006,8 @@
         </p:nvSpPr>
         <p:spPr>
           <a:xfrm>
-            <a:off x="1681812" y="2806268"/>
-            <a:ext cx="5780375" cy="441647"/>
+            <a:off x="1341758" y="3106840"/>
+            <a:ext cx="6460485" cy="493610"/>
           </a:xfrm>
           <a:prstGeom prst="roundRect">
             <a:avLst>
@@ -16033,8 +16033,8 @@
         </p:nvSpPr>
         <p:spPr>
           <a:xfrm>
-            <a:off x="1811708" y="2858226"/>
-            <a:ext cx="5520583" cy="350719"/>
+            <a:off x="1486937" y="3164912"/>
+            <a:ext cx="6170126" cy="391984"/>
           </a:xfrm>
           <a:prstGeom prst="rect">
             <a:avLst/>
@@ -16053,7 +16053,7 @@
               <a:buNone/>
             </a:pPr>
             <a:r>
-              <a:rPr lang="en-US" sz="890" b="1" dirty="0">
+              <a:rPr lang="en-US" sz="990" b="1" dirty="0">
                 <a:solidFill>
                   <a:srgbClr val="7A4E00"/>
                 </a:solidFill>
@@ -16063,7 +16063,7 @@
               </a:rPr>
               <a:t>Tuần 3 và 4 chưa từng nhắc tới thông số này, nhưng nó quyết định «xe thấy muộn bao nhiêu».</a:t>
             </a:r>
-            <a:endParaRPr lang="en-US" sz="890" dirty="0"/>
+            <a:endParaRPr lang="en-US" sz="990" dirty="0"/>
           </a:p>
           <a:p>
             <a:pPr indent="0" marL="0">
@@ -16073,7 +16073,7 @@
               <a:buNone/>
             </a:pPr>
             <a:r>
-              <a:rPr lang="en-US" sz="820" dirty="0">
+              <a:rPr lang="en-US" sz="910" dirty="0">
                 <a:solidFill>
                   <a:srgbClr val="7A4E00"/>
                 </a:solidFill>
@@ -16083,7 +16083,7 @@
               </a:rPr>
               <a:t>第三、四週從來沒提過這個規格，但它決定了「車子晚多久才知道」。</a:t>
             </a:r>
-            <a:endParaRPr lang="en-US" sz="890" dirty="0"/>
+            <a:endParaRPr lang="en-US" sz="990" dirty="0"/>
           </a:p>
         </p:txBody>
       </p:sp>
@@ -16103,8 +16103,8 @@
         </p:blipFill>
         <p:spPr>
           <a:xfrm>
-            <a:off x="6663327" y="3338842"/>
-            <a:ext cx="779376" cy="172200"/>
+            <a:off x="7882128" y="109728"/>
+            <a:ext cx="1097280" cy="242439"/>
           </a:xfrm>
           <a:prstGeom prst="rect">
             <a:avLst/>
@@ -16119,8 +16119,8 @@
         </p:nvSpPr>
         <p:spPr>
           <a:xfrm>
-            <a:off x="1402536" y="3390800"/>
-            <a:ext cx="584532" cy="181855"/>
+            <a:off x="1029622" y="101626"/>
+            <a:ext cx="653307" cy="203251"/>
           </a:xfrm>
           <a:prstGeom prst="rect">
             <a:avLst/>
@@ -16136,7 +16136,7 @@
               <a:buNone/>
             </a:pPr>
             <a:r>
-              <a:rPr lang="en-US" sz="640" dirty="0">
+              <a:rPr lang="en-US" sz="710" dirty="0">
                 <a:solidFill>
                   <a:srgbClr val="5F7183"/>
                 </a:solidFill>
@@ -16146,7 +16146,7 @@
               </a:rPr>
               <a:t>7 / 14</a:t>
             </a:r>
-            <a:endParaRPr lang="en-US" sz="640" dirty="0"/>
+            <a:endParaRPr lang="en-US" sz="710" dirty="0"/>
           </a:p>
         </p:txBody>
       </p:sp>
@@ -16158,8 +16158,8 @@
         </p:nvSpPr>
         <p:spPr>
           <a:xfrm>
-            <a:off x="2006553" y="3390800"/>
-            <a:ext cx="1428857" cy="181855"/>
+            <a:off x="1704706" y="101626"/>
+            <a:ext cx="1596974" cy="203251"/>
           </a:xfrm>
           <a:prstGeom prst="rect">
             <a:avLst/>
@@ -16175,7 +16175,7 @@
               <a:buNone/>
             </a:pPr>
             <a:r>
-              <a:rPr lang="en-US" sz="640" dirty="0">
+              <a:rPr lang="en-US" sz="710" dirty="0">
                 <a:solidFill>
                   <a:srgbClr val="5F7183"/>
                 </a:solidFill>
@@ -16185,7 +16185,7 @@
               </a:rPr>
               <a:t>Tiết 1 · 第 1 節</a:t>
             </a:r>
-            <a:endParaRPr lang="en-US" sz="640" dirty="0"/>
+            <a:endParaRPr lang="en-US" sz="710" dirty="0"/>
           </a:p>
         </p:txBody>
       </p:sp>
@@ -16215,8 +16215,8 @@
       </p:nvGrpSpPr>
       <p:grpSpPr>
         <a:xfrm>
-          <a:off x="0" y="0"/>
-          <a:ext cx="0" cy="0"/>
+          <a:off x="898071" y="0"/>
+          <a:ext cx="1" cy="1"/>
           <a:chOff x="0" y="0"/>
           <a:chExt cx="0" cy="0"/>
         </a:xfrm>
@@ -16229,8 +16229,8 @@
         </p:nvSpPr>
         <p:spPr>
           <a:xfrm>
-            <a:off x="6130753" y="-947729"/>
-            <a:ext cx="2987610" cy="2987610"/>
+            <a:off x="6335486" y="-1102179"/>
+            <a:ext cx="3380014" cy="3380014"/>
           </a:xfrm>
           <a:prstGeom prst="ellipse">
             <a:avLst/>
@@ -16254,8 +16254,8 @@
         </p:nvSpPr>
         <p:spPr>
           <a:xfrm>
-            <a:off x="7104973" y="1520297"/>
-            <a:ext cx="1688649" cy="1688649"/>
+            <a:off x="7437664" y="1690007"/>
+            <a:ext cx="1910443" cy="1910443"/>
           </a:xfrm>
           <a:prstGeom prst="ellipse">
             <a:avLst/>
@@ -16276,8 +16276,8 @@
         </p:nvSpPr>
         <p:spPr>
           <a:xfrm>
-            <a:off x="1681812" y="1228031"/>
-            <a:ext cx="3247402" cy="220823"/>
+            <a:off x="1302204" y="1359354"/>
+            <a:ext cx="3673929" cy="249827"/>
           </a:xfrm>
           <a:prstGeom prst="rect">
             <a:avLst/>
@@ -16293,7 +16293,7 @@
               <a:buNone/>
             </a:pPr>
             <a:r>
-              <a:rPr lang="en-US" sz="960" b="1" dirty="0">
+              <a:rPr lang="en-US" sz="1080" b="1" dirty="0">
                 <a:solidFill>
                   <a:srgbClr val="FFB020"/>
                 </a:solidFill>
@@ -16303,7 +16303,7 @@
               </a:rPr>
               <a:t>Phần 2 / 3</a:t>
             </a:r>
-            <a:endParaRPr lang="en-US" sz="960" dirty="0"/>
+            <a:endParaRPr lang="en-US" sz="1080" dirty="0"/>
           </a:p>
         </p:txBody>
       </p:sp>
@@ -16315,8 +16315,8 @@
         </p:nvSpPr>
         <p:spPr>
           <a:xfrm>
-            <a:off x="1681812" y="1481328"/>
-            <a:ext cx="5195843" cy="844324"/>
+            <a:off x="1302204" y="1645920"/>
+            <a:ext cx="5878286" cy="955221"/>
           </a:xfrm>
           <a:prstGeom prst="rect">
             <a:avLst/>
@@ -16335,7 +16335,7 @@
               <a:buNone/>
             </a:pPr>
             <a:r>
-              <a:rPr lang="en-US" sz="2060" b="1" dirty="0">
+              <a:rPr lang="en-US" sz="2330" b="1" dirty="0">
                 <a:solidFill>
                   <a:srgbClr val="FFFFFF"/>
                 </a:solidFill>
@@ -16345,7 +16345,7 @@
               </a:rPr>
               <a:t>Tại sao datasheet của camera không có góc nhìn</a:t>
             </a:r>
-            <a:endParaRPr lang="en-US" sz="2060" dirty="0"/>
+            <a:endParaRPr lang="en-US" sz="2330" dirty="0"/>
           </a:p>
           <a:p>
             <a:pPr indent="0" marL="0">
@@ -16355,7 +16355,7 @@
               <a:buNone/>
             </a:pPr>
             <a:r>
-              <a:rPr lang="en-US" sz="1210" dirty="0">
+              <a:rPr lang="en-US" sz="1370" dirty="0">
                 <a:solidFill>
                   <a:srgbClr val="AFC3D4"/>
                 </a:solidFill>
@@ -16365,7 +16365,7 @@
               </a:rPr>
               <a:t>為什麼相機的規格表上沒有視野</a:t>
             </a:r>
-            <a:endParaRPr lang="en-US" sz="2060" dirty="0"/>
+            <a:endParaRPr lang="en-US" sz="2330" dirty="0"/>
           </a:p>
         </p:txBody>
       </p:sp>
@@ -16377,8 +16377,8 @@
         </p:nvSpPr>
         <p:spPr>
           <a:xfrm>
-            <a:off x="1681812" y="2403590"/>
-            <a:ext cx="5195843" cy="454636"/>
+            <a:off x="1302204" y="2689316"/>
+            <a:ext cx="5878286" cy="514350"/>
           </a:xfrm>
           <a:prstGeom prst="rect">
             <a:avLst/>
@@ -16397,7 +16397,7 @@
               <a:buNone/>
             </a:pPr>
             <a:r>
-              <a:rPr lang="en-US" sz="960" dirty="0">
+              <a:rPr lang="en-US" sz="1080" dirty="0">
                 <a:solidFill>
                   <a:srgbClr val="AFC3D4"/>
                 </a:solidFill>
@@ -16407,7 +16407,7 @@
               </a:rPr>
               <a:t>Hai dòng quan trọng nhất lại không nằm trên đó</a:t>
             </a:r>
-            <a:endParaRPr lang="en-US" sz="960" dirty="0"/>
+            <a:endParaRPr lang="en-US" sz="1080" dirty="0"/>
           </a:p>
           <a:p>
             <a:pPr indent="0" marL="0">
@@ -16417,7 +16417,7 @@
               <a:buNone/>
             </a:pPr>
             <a:r>
-              <a:rPr lang="en-US" sz="850" dirty="0">
+              <a:rPr lang="en-US" sz="960" dirty="0">
                 <a:solidFill>
                   <a:srgbClr val="8AA0B4"/>
                 </a:solidFill>
@@ -16427,7 +16427,7 @@
               </a:rPr>
               <a:t>最重要的兩行，偏偏不在上面</a:t>
             </a:r>
-            <a:endParaRPr lang="en-US" sz="960" dirty="0"/>
+            <a:endParaRPr lang="en-US" sz="1080" dirty="0"/>
           </a:p>
         </p:txBody>
       </p:sp>
@@ -16439,8 +16439,8 @@
         </p:nvSpPr>
         <p:spPr>
           <a:xfrm>
-            <a:off x="1402536" y="3390800"/>
-            <a:ext cx="584532" cy="181855"/>
+            <a:off x="986246" y="102870"/>
+            <a:ext cx="661307" cy="205740"/>
           </a:xfrm>
           <a:prstGeom prst="rect">
             <a:avLst/>
@@ -16456,7 +16456,7 @@
               <a:buNone/>
             </a:pPr>
             <a:r>
-              <a:rPr lang="en-US" sz="640" dirty="0">
+              <a:rPr lang="en-US" sz="720" dirty="0">
                 <a:solidFill>
                   <a:srgbClr val="9FB3C8"/>
                 </a:solidFill>
@@ -16466,7 +16466,7 @@
               </a:rPr>
               <a:t>8 / 14</a:t>
             </a:r>
-            <a:endParaRPr lang="en-US" sz="640" dirty="0"/>
+            <a:endParaRPr lang="en-US" sz="720" dirty="0"/>
           </a:p>
         </p:txBody>
       </p:sp>
@@ -16478,8 +16478,8 @@
         </p:nvSpPr>
         <p:spPr>
           <a:xfrm>
-            <a:off x="2006553" y="3390800"/>
-            <a:ext cx="1428857" cy="181855"/>
+            <a:off x="1669596" y="102870"/>
+            <a:ext cx="1616529" cy="205740"/>
           </a:xfrm>
           <a:prstGeom prst="rect">
             <a:avLst/>
@@ -16495,7 +16495,7 @@
               <a:buNone/>
             </a:pPr>
             <a:r>
-              <a:rPr lang="en-US" sz="640" dirty="0">
+              <a:rPr lang="en-US" sz="720" dirty="0">
                 <a:solidFill>
                   <a:srgbClr val="9FB3C8"/>
                 </a:solidFill>
@@ -16505,7 +16505,7 @@
               </a:rPr>
               <a:t>Tiết 1 · 第 1 節</a:t>
             </a:r>
-            <a:endParaRPr lang="en-US" sz="640" dirty="0"/>
+            <a:endParaRPr lang="en-US" sz="720" dirty="0"/>
           </a:p>
         </p:txBody>
       </p:sp>
@@ -16528,8 +16528,8 @@
       </p:nvGrpSpPr>
       <p:grpSpPr>
         <a:xfrm>
-          <a:off x="0" y="0"/>
-          <a:ext cx="0" cy="0"/>
+          <a:off x="913006" y="0"/>
+          <a:ext cx="1" cy="1"/>
           <a:chOff x="0" y="0"/>
           <a:chExt cx="0" cy="0"/>
         </a:xfrm>
@@ -16542,8 +16542,8 @@
         </p:nvSpPr>
         <p:spPr>
           <a:xfrm>
-            <a:off x="1681812" y="286284"/>
-            <a:ext cx="5780375" cy="194844"/>
+            <a:off x="1315495" y="292720"/>
+            <a:ext cx="6513009" cy="219540"/>
           </a:xfrm>
           <a:prstGeom prst="rect">
             <a:avLst/>
@@ -16559,7 +16559,7 @@
               <a:buNone/>
             </a:pPr>
             <a:r>
-              <a:rPr lang="en-US" sz="920" b="1" dirty="0">
+              <a:rPr lang="en-US" sz="1040" b="1" dirty="0">
                 <a:solidFill>
                   <a:srgbClr val="007F72"/>
                 </a:solidFill>
@@ -16569,7 +16569,7 @@
               </a:rPr>
               <a:t>Camera · onsemi AR0233AT</a:t>
             </a:r>
-            <a:endParaRPr lang="en-US" sz="920" dirty="0"/>
+            <a:endParaRPr lang="en-US" sz="1040" dirty="0"/>
           </a:p>
         </p:txBody>
       </p:sp>
@@ -16581,8 +16581,8 @@
         </p:nvSpPr>
         <p:spPr>
           <a:xfrm>
-            <a:off x="1681812" y="649993"/>
-            <a:ext cx="1052158" cy="1363909"/>
+            <a:off x="1315495" y="702527"/>
+            <a:ext cx="1185514" cy="1536777"/>
           </a:xfrm>
           <a:prstGeom prst="roundRect">
             <a:avLst>
@@ -16608,8 +16608,8 @@
         </p:nvSpPr>
         <p:spPr>
           <a:xfrm>
-            <a:off x="1792873" y="1353521"/>
-            <a:ext cx="221343" cy="101818"/>
+            <a:off x="1440633" y="1495223"/>
+            <a:ext cx="249397" cy="114723"/>
           </a:xfrm>
           <a:prstGeom prst="roundRect">
             <a:avLst>
@@ -16630,8 +16630,8 @@
         </p:nvSpPr>
         <p:spPr>
           <a:xfrm>
-            <a:off x="1876984" y="1373884"/>
-            <a:ext cx="75257" cy="61091"/>
+            <a:off x="1535404" y="1518167"/>
+            <a:ext cx="84795" cy="68833"/>
           </a:xfrm>
           <a:prstGeom prst="roundRect">
             <a:avLst>
@@ -16652,8 +16652,8 @@
         </p:nvSpPr>
         <p:spPr>
           <a:xfrm>
-            <a:off x="2041884" y="1404430"/>
-            <a:ext cx="461131" cy="0"/>
+            <a:off x="1721204" y="1552584"/>
+            <a:ext cx="519577" cy="1"/>
           </a:xfrm>
           <a:prstGeom prst="line">
             <a:avLst/>
@@ -16676,8 +16676,8 @@
         </p:nvSpPr>
         <p:spPr>
           <a:xfrm>
-            <a:off x="2157167" y="1344028"/>
-            <a:ext cx="0" cy="120803"/>
+            <a:off x="1851099" y="1484527"/>
+            <a:ext cx="1" cy="136114"/>
           </a:xfrm>
           <a:prstGeom prst="line">
             <a:avLst/>
@@ -16699,8 +16699,8 @@
         </p:nvSpPr>
         <p:spPr>
           <a:xfrm>
-            <a:off x="2272450" y="1344028"/>
-            <a:ext cx="0" cy="120803"/>
+            <a:off x="1980993" y="1484527"/>
+            <a:ext cx="1" cy="136114"/>
           </a:xfrm>
           <a:prstGeom prst="line">
             <a:avLst/>
@@ -16722,8 +16722,8 @@
         </p:nvSpPr>
         <p:spPr>
           <a:xfrm>
-            <a:off x="2387733" y="1344028"/>
-            <a:ext cx="0" cy="120803"/>
+            <a:off x="2110887" y="1484527"/>
+            <a:ext cx="1" cy="136114"/>
           </a:xfrm>
           <a:prstGeom prst="line">
             <a:avLst/>
@@ -16745,8 +16745,8 @@
         </p:nvSpPr>
         <p:spPr>
           <a:xfrm>
-            <a:off x="2493793" y="1271546"/>
-            <a:ext cx="64558" cy="265767"/>
+            <a:off x="2230390" y="1402858"/>
+            <a:ext cx="72741" cy="299452"/>
           </a:xfrm>
           <a:prstGeom prst="roundRect">
             <a:avLst>
@@ -16767,8 +16767,8 @@
         </p:nvSpPr>
         <p:spPr>
           <a:xfrm>
-            <a:off x="2954794" y="585045"/>
-            <a:ext cx="4507394" cy="371026"/>
+            <a:off x="2749821" y="629347"/>
+            <a:ext cx="5078684" cy="418052"/>
           </a:xfrm>
           <a:prstGeom prst="rect">
             <a:avLst/>
@@ -16787,7 +16787,7 @@
               <a:buNone/>
             </a:pPr>
             <a:r>
-              <a:rPr lang="en-US" sz="1280" b="1" dirty="0">
+              <a:rPr lang="en-US" sz="1440" b="1" dirty="0">
                 <a:solidFill>
                   <a:srgbClr val="0B1F3A"/>
                 </a:solidFill>
@@ -16797,7 +16797,7 @@
               </a:rPr>
               <a:t>Datasheet cảm biến ảnh: tìm mãi không thấy góc nhìn</a:t>
             </a:r>
-            <a:endParaRPr lang="en-US" sz="1280" dirty="0"/>
+            <a:endParaRPr lang="en-US" sz="1440" dirty="0"/>
           </a:p>
           <a:p>
             <a:pPr indent="0" marL="0">
@@ -16807,7 +16807,7 @@
               <a:buNone/>
             </a:pPr>
             <a:r>
-              <a:rPr lang="en-US" sz="890" dirty="0">
+              <a:rPr lang="en-US" sz="1000" dirty="0">
                 <a:solidFill>
                   <a:srgbClr val="007F72"/>
                 </a:solidFill>
@@ -16817,7 +16817,7 @@
               </a:rPr>
               <a:t>影像感測器的規格表：怎麼找都找不到視野</a:t>
             </a:r>
-            <a:endParaRPr lang="en-US" sz="1280" dirty="0"/>
+            <a:endParaRPr lang="en-US" sz="1440" dirty="0"/>
           </a:p>
         </p:txBody>
       </p:sp>
@@ -16829,8 +16829,8 @@
         </p:nvSpPr>
         <p:spPr>
           <a:xfrm>
-            <a:off x="2954794" y="1021019"/>
-            <a:ext cx="753397" cy="284196"/>
+            <a:off x="2749821" y="1120579"/>
+            <a:ext cx="848887" cy="320216"/>
           </a:xfrm>
           <a:prstGeom prst="roundRect">
             <a:avLst>
@@ -16851,8 +16851,8 @@
         </p:nvSpPr>
         <p:spPr>
           <a:xfrm>
-            <a:off x="2993763" y="1046998"/>
-            <a:ext cx="675460" cy="245227"/>
+            <a:off x="2793729" y="1149851"/>
+            <a:ext cx="761071" cy="276308"/>
           </a:xfrm>
           <a:prstGeom prst="rect">
             <a:avLst/>
@@ -16871,7 +16871,7 @@
               <a:buNone/>
             </a:pPr>
             <a:r>
-              <a:rPr lang="en-US" sz="640" b="1" dirty="0">
+              <a:rPr lang="en-US" sz="720" b="1" dirty="0">
                 <a:solidFill>
                   <a:srgbClr val="FFFFFF"/>
                 </a:solidFill>
@@ -16881,7 +16881,7 @@
               </a:rPr>
               <a:t>Điểm ảnh</a:t>
             </a:r>
-            <a:endParaRPr lang="en-US" sz="640" dirty="0"/>
+            <a:endParaRPr lang="en-US" sz="720" dirty="0"/>
           </a:p>
           <a:p>
             <a:pPr algn="ctr" indent="0" marL="0">
@@ -16891,7 +16891,7 @@
               <a:buNone/>
             </a:pPr>
             <a:r>
-              <a:rPr lang="en-US" sz="600" dirty="0">
+              <a:rPr lang="en-US" sz="680" dirty="0">
                 <a:solidFill>
                   <a:srgbClr val="FFFFFF"/>
                 </a:solidFill>
@@ -16901,7 +16901,7 @@
               </a:rPr>
               <a:t>像素</a:t>
             </a:r>
-            <a:endParaRPr lang="en-US" sz="640" dirty="0"/>
+            <a:endParaRPr lang="en-US" sz="720" dirty="0"/>
           </a:p>
         </p:txBody>
       </p:sp>
@@ -16913,8 +16913,8 @@
         </p:nvSpPr>
         <p:spPr>
           <a:xfrm>
-            <a:off x="3812108" y="1021019"/>
-            <a:ext cx="3650080" cy="323165"/>
+            <a:off x="3715795" y="1120579"/>
+            <a:ext cx="4112709" cy="364124"/>
           </a:xfrm>
           <a:prstGeom prst="rect">
             <a:avLst/>
@@ -16933,7 +16933,7 @@
               <a:buNone/>
             </a:pPr>
             <a:r>
-              <a:rPr lang="en-US" sz="780" dirty="0">
+              <a:rPr lang="en-US" sz="880" dirty="0">
                 <a:solidFill>
                   <a:srgbClr val="1A2733"/>
                 </a:solidFill>
@@ -16943,7 +16943,7 @@
               </a:rPr>
               <a:t>2048 × 1280 (2.6 MP), mỗi điểm ảnh 3.0 µm vuông</a:t>
             </a:r>
-            <a:endParaRPr lang="en-US" sz="780" dirty="0"/>
+            <a:endParaRPr lang="en-US" sz="880" dirty="0"/>
           </a:p>
           <a:p>
             <a:pPr indent="0" marL="0">
@@ -16953,7 +16953,7 @@
               <a:buNone/>
             </a:pPr>
             <a:r>
-              <a:rPr lang="en-US" sz="710" dirty="0">
+              <a:rPr lang="en-US" sz="800" dirty="0">
                 <a:solidFill>
                   <a:srgbClr val="5F7183"/>
                 </a:solidFill>
@@ -16963,7 +16963,7 @@
               </a:rPr>
               <a:t>2048 × 1280（2.6 MP），一個像素 3 微米見方</a:t>
             </a:r>
-            <a:endParaRPr lang="en-US" sz="780" dirty="0"/>
+            <a:endParaRPr lang="en-US" sz="880" dirty="0"/>
           </a:p>
         </p:txBody>
       </p:sp>
@@ -16975,8 +16975,8 @@
         </p:nvSpPr>
         <p:spPr>
           <a:xfrm>
-            <a:off x="2954794" y="1389648"/>
-            <a:ext cx="753397" cy="284196"/>
+            <a:off x="2749821" y="1535929"/>
+            <a:ext cx="848887" cy="320216"/>
           </a:xfrm>
           <a:prstGeom prst="roundRect">
             <a:avLst>
@@ -16997,8 +16997,8 @@
         </p:nvSpPr>
         <p:spPr>
           <a:xfrm>
-            <a:off x="2993763" y="1415627"/>
-            <a:ext cx="675460" cy="245227"/>
+            <a:off x="2793729" y="1565201"/>
+            <a:ext cx="761071" cy="276308"/>
           </a:xfrm>
           <a:prstGeom prst="rect">
             <a:avLst/>
@@ -17017,7 +17017,7 @@
               <a:buNone/>
             </a:pPr>
             <a:r>
-              <a:rPr lang="en-US" sz="640" b="1" dirty="0">
+              <a:rPr lang="en-US" sz="720" b="1" dirty="0">
                 <a:solidFill>
                   <a:srgbClr val="FFFFFF"/>
                 </a:solidFill>
@@ -17027,7 +17027,7 @@
               </a:rPr>
               <a:t>Tốc độ</a:t>
             </a:r>
-            <a:endParaRPr lang="en-US" sz="640" dirty="0"/>
+            <a:endParaRPr lang="en-US" sz="720" dirty="0"/>
           </a:p>
           <a:p>
             <a:pPr algn="ctr" indent="0" marL="0">
@@ -17037,7 +17037,7 @@
               <a:buNone/>
             </a:pPr>
             <a:r>
-              <a:rPr lang="en-US" sz="600" dirty="0">
+              <a:rPr lang="en-US" sz="680" dirty="0">
                 <a:solidFill>
                   <a:srgbClr val="FFFFFF"/>
                 </a:solidFill>
@@ -17047,7 +17047,7 @@
               </a:rPr>
               <a:t>更新率</a:t>
             </a:r>
-            <a:endParaRPr lang="en-US" sz="640" dirty="0"/>
+            <a:endParaRPr lang="en-US" sz="720" dirty="0"/>
           </a:p>
         </p:txBody>
       </p:sp>
@@ -17059,8 +17059,8 @@
         </p:nvSpPr>
         <p:spPr>
           <a:xfrm>
-            <a:off x="3812108" y="1389648"/>
-            <a:ext cx="3650080" cy="323165"/>
+            <a:off x="3715795" y="1535929"/>
+            <a:ext cx="4112709" cy="364124"/>
           </a:xfrm>
           <a:prstGeom prst="rect">
             <a:avLst/>
@@ -17079,7 +17079,7 @@
               <a:buNone/>
             </a:pPr>
             <a:r>
-              <a:rPr lang="en-US" sz="780" dirty="0">
+              <a:rPr lang="en-US" sz="880" dirty="0">
                 <a:solidFill>
                   <a:srgbClr val="1A2733"/>
                 </a:solidFill>
@@ -17089,7 +17089,7 @@
               </a:rPr>
               <a:t>60 fps ở 1080p — nhanh hơn lidar sáu lần</a:t>
             </a:r>
-            <a:endParaRPr lang="en-US" sz="780" dirty="0"/>
+            <a:endParaRPr lang="en-US" sz="880" dirty="0"/>
           </a:p>
           <a:p>
             <a:pPr indent="0" marL="0">
@@ -17099,7 +17099,7 @@
               <a:buNone/>
             </a:pPr>
             <a:r>
-              <a:rPr lang="en-US" sz="710" dirty="0">
+              <a:rPr lang="en-US" sz="800" dirty="0">
                 <a:solidFill>
                   <a:srgbClr val="5F7183"/>
                 </a:solidFill>
@@ -17109,7 +17109,7 @@
               </a:rPr>
               <a:t>1080p 每秒 60 張——比光達快六倍</a:t>
             </a:r>
-            <a:endParaRPr lang="en-US" sz="780" dirty="0"/>
+            <a:endParaRPr lang="en-US" sz="880" dirty="0"/>
           </a:p>
         </p:txBody>
       </p:sp>
@@ -17121,8 +17121,8 @@
         </p:nvSpPr>
         <p:spPr>
           <a:xfrm>
-            <a:off x="2954794" y="1758276"/>
-            <a:ext cx="753397" cy="284196"/>
+            <a:off x="2749821" y="1951279"/>
+            <a:ext cx="848887" cy="320216"/>
           </a:xfrm>
           <a:prstGeom prst="roundRect">
             <a:avLst>
@@ -17143,8 +17143,8 @@
         </p:nvSpPr>
         <p:spPr>
           <a:xfrm>
-            <a:off x="2993763" y="1784255"/>
-            <a:ext cx="675460" cy="245227"/>
+            <a:off x="2793729" y="1980551"/>
+            <a:ext cx="761071" cy="276308"/>
           </a:xfrm>
           <a:prstGeom prst="rect">
             <a:avLst/>
@@ -17163,7 +17163,7 @@
               <a:buNone/>
             </a:pPr>
             <a:r>
-              <a:rPr lang="en-US" sz="640" b="1" dirty="0">
+              <a:rPr lang="en-US" sz="720" b="1" dirty="0">
                 <a:solidFill>
                   <a:srgbClr val="3A2A00"/>
                 </a:solidFill>
@@ -17173,7 +17173,7 @@
               </a:rPr>
               <a:t>Không có</a:t>
             </a:r>
-            <a:endParaRPr lang="en-US" sz="640" dirty="0"/>
+            <a:endParaRPr lang="en-US" sz="720" dirty="0"/>
           </a:p>
           <a:p>
             <a:pPr algn="ctr" indent="0" marL="0">
@@ -17183,7 +17183,7 @@
               <a:buNone/>
             </a:pPr>
             <a:r>
-              <a:rPr lang="en-US" sz="600" dirty="0">
+              <a:rPr lang="en-US" sz="680" dirty="0">
                 <a:solidFill>
                   <a:srgbClr val="3A2A00"/>
                 </a:solidFill>
@@ -17193,7 +17193,7 @@
               </a:rPr>
               <a:t>沒有的</a:t>
             </a:r>
-            <a:endParaRPr lang="en-US" sz="640" dirty="0"/>
+            <a:endParaRPr lang="en-US" sz="720" dirty="0"/>
           </a:p>
         </p:txBody>
       </p:sp>
@@ -17205,8 +17205,8 @@
         </p:nvSpPr>
         <p:spPr>
           <a:xfrm>
-            <a:off x="3812108" y="1758276"/>
-            <a:ext cx="3650080" cy="323165"/>
+            <a:off x="3715795" y="1951279"/>
+            <a:ext cx="4112709" cy="364124"/>
           </a:xfrm>
           <a:prstGeom prst="rect">
             <a:avLst/>
@@ -17225,7 +17225,7 @@
               <a:buNone/>
             </a:pPr>
             <a:r>
-              <a:rPr lang="en-US" sz="780" dirty="0">
+              <a:rPr lang="en-US" sz="880" dirty="0">
                 <a:solidFill>
                   <a:srgbClr val="1A2733"/>
                 </a:solidFill>
@@ -17235,7 +17235,7 @@
               </a:rPr>
               <a:t>Không có dòng góc nhìn, cũng không có dòng tầm đo</a:t>
             </a:r>
-            <a:endParaRPr lang="en-US" sz="780" dirty="0"/>
+            <a:endParaRPr lang="en-US" sz="880" dirty="0"/>
           </a:p>
           <a:p>
             <a:pPr indent="0" marL="0">
@@ -17245,7 +17245,7 @@
               <a:buNone/>
             </a:pPr>
             <a:r>
-              <a:rPr lang="en-US" sz="710" dirty="0">
+              <a:rPr lang="en-US" sz="800" dirty="0">
                 <a:solidFill>
                   <a:srgbClr val="5F7183"/>
                 </a:solidFill>
@@ -17255,7 +17255,7 @@
               </a:rPr>
               <a:t>沒有視野那一行，也沒有測距那一行</a:t>
             </a:r>
-            <a:endParaRPr lang="en-US" sz="780" dirty="0"/>
+            <a:endParaRPr lang="en-US" sz="880" dirty="0"/>
           </a:p>
         </p:txBody>
       </p:sp>
@@ -17267,8 +17267,8 @@
         </p:nvSpPr>
         <p:spPr>
           <a:xfrm>
-            <a:off x="1681812" y="2819258"/>
-            <a:ext cx="5780375" cy="402678"/>
+            <a:off x="1315495" y="3146735"/>
+            <a:ext cx="6513009" cy="453715"/>
           </a:xfrm>
           <a:prstGeom prst="roundRect">
             <a:avLst>
@@ -17294,8 +17294,8 @@
         </p:nvSpPr>
         <p:spPr>
           <a:xfrm>
-            <a:off x="1811708" y="2864721"/>
-            <a:ext cx="5520583" cy="324740"/>
+            <a:off x="1461855" y="3197961"/>
+            <a:ext cx="6220290" cy="365899"/>
           </a:xfrm>
           <a:prstGeom prst="rect">
             <a:avLst/>
@@ -17314,7 +17314,7 @@
               <a:buNone/>
             </a:pPr>
             <a:r>
-              <a:rPr lang="en-US" sz="850" b="1" dirty="0">
+              <a:rPr lang="en-US" sz="960" b="1" dirty="0">
                 <a:solidFill>
                   <a:srgbClr val="7A4E00"/>
                 </a:solidFill>
@@ -17324,7 +17324,7 @@
               </a:rPr>
               <a:t>Hai thứ ta cần nhất thì bảng này không hề có. Vì sao?</a:t>
             </a:r>
-            <a:endParaRPr lang="en-US" sz="850" dirty="0"/>
+            <a:endParaRPr lang="en-US" sz="960" dirty="0"/>
           </a:p>
           <a:p>
             <a:pPr indent="0" marL="0">
@@ -17334,7 +17334,7 @@
               <a:buNone/>
             </a:pPr>
             <a:r>
-              <a:rPr lang="en-US" sz="780" dirty="0">
+              <a:rPr lang="en-US" sz="880" dirty="0">
                 <a:solidFill>
                   <a:srgbClr val="7A4E00"/>
                 </a:solidFill>
@@ -17344,7 +17344,7 @@
               </a:rPr>
               <a:t>我們最需要的兩個東西，這張表上偏偏都沒有。為什麼？</a:t>
             </a:r>
-            <a:endParaRPr lang="en-US" sz="850" dirty="0"/>
+            <a:endParaRPr lang="en-US" sz="960" dirty="0"/>
           </a:p>
         </p:txBody>
       </p:sp>
@@ -17364,8 +17364,8 @@
         </p:blipFill>
         <p:spPr>
           <a:xfrm>
-            <a:off x="6663327" y="3338842"/>
-            <a:ext cx="779376" cy="172200"/>
+            <a:off x="7882128" y="109728"/>
+            <a:ext cx="1097280" cy="242439"/>
           </a:xfrm>
           <a:prstGeom prst="rect">
             <a:avLst/>
@@ -17380,8 +17380,8 @@
         </p:nvSpPr>
         <p:spPr>
           <a:xfrm>
-            <a:off x="1402536" y="3390800"/>
-            <a:ext cx="584532" cy="181855"/>
+            <a:off x="1000822" y="102452"/>
+            <a:ext cx="658619" cy="204904"/>
           </a:xfrm>
           <a:prstGeom prst="rect">
             <a:avLst/>
@@ -17397,7 +17397,7 @@
               <a:buNone/>
             </a:pPr>
             <a:r>
-              <a:rPr lang="en-US" sz="640" dirty="0">
+              <a:rPr lang="en-US" sz="720" dirty="0">
                 <a:solidFill>
                   <a:srgbClr val="5F7183"/>
                 </a:solidFill>
@@ -17407,7 +17407,7 @@
               </a:rPr>
               <a:t>9 / 14</a:t>
             </a:r>
-            <a:endParaRPr lang="en-US" sz="640" dirty="0"/>
+            <a:endParaRPr lang="en-US" sz="720" dirty="0"/>
           </a:p>
         </p:txBody>
       </p:sp>
@@ -17419,8 +17419,8 @@
         </p:nvSpPr>
         <p:spPr>
           <a:xfrm>
-            <a:off x="2006553" y="3390800"/>
-            <a:ext cx="1428857" cy="181855"/>
+            <a:off x="1681395" y="102452"/>
+            <a:ext cx="1609957" cy="204904"/>
           </a:xfrm>
           <a:prstGeom prst="rect">
             <a:avLst/>
@@ -17436,7 +17436,7 @@
               <a:buNone/>
             </a:pPr>
             <a:r>
-              <a:rPr lang="en-US" sz="640" dirty="0">
+              <a:rPr lang="en-US" sz="720" dirty="0">
                 <a:solidFill>
                   <a:srgbClr val="5F7183"/>
                 </a:solidFill>
@@ -17446,7 +17446,7 @@
               </a:rPr>
               <a:t>Tiết 1 · 第 1 節</a:t>
             </a:r>
-            <a:endParaRPr lang="en-US" sz="640" dirty="0"/>
+            <a:endParaRPr lang="en-US" sz="720" dirty="0"/>
           </a:p>
         </p:txBody>
       </p:sp>

--- a/第五週(10-08)/第五週_第1節_簡報.pptx
+++ b/第五週(10-08)/第五週_第1節_簡報.pptx
@@ -440,11 +440,154 @@
                 <a:spcPct val="115000"/>
               </a:lnSpc>
               <a:spcAft>
-                <a:spcPts val="550"/>
-              </a:spcAft>
-            </a:pPr>
-            <a:r>
-              <a:rPr sz="1100" lang="zh-TW" dirty="0">
+                <a:spcPts val="500"/>
+              </a:spcAft>
+            </a:pPr>
+            <a:r>
+              <a:rPr sz="1000" b="1" lang="zh-TW" dirty="0">
+                <a:solidFill>
+                  <a:srgbClr val="000000"/>
+                </a:solidFill>
+                <a:latin typeface="Arial Unicode MS"/>
+                <a:ea typeface="Arial Unicode MS"/>
+                <a:cs typeface="Arial Unicode MS"/>
+              </a:rPr>
+              <a:t>▍這一張要做什麼</a:t>
+            </a:r>
+            <a:r>
+              <a:rPr sz="1000" lang="zh-TW" dirty="0">
+                <a:solidFill>
+                  <a:srgbClr val="000000"/>
+                </a:solidFill>
+                <a:latin typeface="Arial Unicode MS"/>
+                <a:ea typeface="Arial Unicode MS"/>
+                <a:cs typeface="Arial Unicode MS"/>
+              </a:rPr>
+              <a:t>
+</a:t>
+            </a:r>
+          </a:p>
+          <a:p>
+            <a:pPr algn="l">
+              <a:lnSpc>
+                <a:spcPct val="115000"/>
+              </a:lnSpc>
+              <a:spcAft>
+                <a:spcPts val="500"/>
+              </a:spcAft>
+            </a:pPr>
+            <a:r>
+              <a:rPr sz="1000" lang="zh-TW" dirty="0">
+                <a:solidFill>
+                  <a:srgbClr val="000000"/>
+                </a:solidFill>
+                <a:latin typeface="Arial Unicode MS"/>
+                <a:ea typeface="Arial Unicode MS"/>
+                <a:cs typeface="Arial Unicode MS"/>
+              </a:rPr>
+              <a:t>第五週開場。把上週白板上那張「河內尖峰最低規格」拿出來，宣告今天要對真的規格表。
+</a:t>
+            </a:r>
+          </a:p>
+          <a:p>
+            <a:pPr algn="l">
+              <a:lnSpc>
+                <a:spcPct val="115000"/>
+              </a:lnSpc>
+              <a:spcAft>
+                <a:spcPts val="500"/>
+              </a:spcAft>
+            </a:pPr>
+            <a:r>
+              <a:rPr sz="1000" b="1" lang="zh-TW" dirty="0">
+                <a:solidFill>
+                  <a:srgbClr val="000000"/>
+                </a:solidFill>
+                <a:latin typeface="Arial Unicode MS"/>
+                <a:ea typeface="Arial Unicode MS"/>
+                <a:cs typeface="Arial Unicode MS"/>
+              </a:rPr>
+              <a:t>▍畫面上圈這裡</a:t>
+            </a:r>
+            <a:r>
+              <a:rPr sz="1000" lang="zh-TW" dirty="0">
+                <a:solidFill>
+                  <a:srgbClr val="000000"/>
+                </a:solidFill>
+                <a:latin typeface="Arial Unicode MS"/>
+                <a:ea typeface="Arial Unicode MS"/>
+                <a:cs typeface="Arial Unicode MS"/>
+              </a:rPr>
+              <a:t>
+</a:t>
+            </a:r>
+          </a:p>
+          <a:p>
+            <a:pPr algn="l">
+              <a:lnSpc>
+                <a:spcPct val="115000"/>
+              </a:lnSpc>
+              <a:spcAft>
+                <a:spcPts val="500"/>
+              </a:spcAft>
+            </a:pPr>
+            <a:r>
+              <a:rPr sz="1000" lang="zh-TW" dirty="0">
+                <a:solidFill>
+                  <a:srgbClr val="000000"/>
+                </a:solidFill>
+                <a:latin typeface="Arial Unicode MS"/>
+                <a:ea typeface="Arial Unicode MS"/>
+                <a:cs typeface="Arial Unicode MS"/>
+              </a:rPr>
+              <a:t>圈主標「真正的規格表」。如果有上週的白板照片，這時候投出來。
+</a:t>
+            </a:r>
+          </a:p>
+          <a:p>
+            <a:pPr algn="l">
+              <a:lnSpc>
+                <a:spcPct val="115000"/>
+              </a:lnSpc>
+              <a:spcAft>
+                <a:spcPts val="500"/>
+              </a:spcAft>
+            </a:pPr>
+            <a:r>
+              <a:rPr sz="1000" b="1" lang="zh-TW" dirty="0">
+                <a:solidFill>
+                  <a:srgbClr val="000000"/>
+                </a:solidFill>
+                <a:latin typeface="Arial Unicode MS"/>
+                <a:ea typeface="Arial Unicode MS"/>
+                <a:cs typeface="Arial Unicode MS"/>
+              </a:rPr>
+              <a:t>▍以下照著唸</a:t>
+            </a:r>
+            <a:r>
+              <a:rPr sz="1000" lang="zh-TW" dirty="0">
+                <a:solidFill>
+                  <a:srgbClr val="000000"/>
+                </a:solidFill>
+                <a:latin typeface="Arial Unicode MS"/>
+                <a:ea typeface="Arial Unicode MS"/>
+                <a:cs typeface="Arial Unicode MS"/>
+              </a:rPr>
+              <a:t>
+</a:t>
+            </a:r>
+          </a:p>
+          <a:p>
+            <a:pPr algn="l">
+              <a:lnSpc>
+                <a:spcPct val="115000"/>
+              </a:lnSpc>
+              <a:spcAft>
+                <a:spcPts val="500"/>
+              </a:spcAft>
+            </a:pPr>
+            <a:r>
+              <a:rPr sz="1000" lang="zh-TW" dirty="0">
                 <a:solidFill>
                   <a:srgbClr val="000000"/>
                 </a:solidFill>
@@ -462,11 +605,11 @@
                 <a:spcPct val="115000"/>
               </a:lnSpc>
               <a:spcAft>
-                <a:spcPts val="550"/>
-              </a:spcAft>
-            </a:pPr>
-            <a:r>
-              <a:rPr sz="1100" lang="zh-TW" dirty="0">
+                <a:spcPts val="500"/>
+              </a:spcAft>
+            </a:pPr>
+            <a:r>
+              <a:rPr sz="1000" lang="zh-TW" dirty="0">
                 <a:solidFill>
                   <a:srgbClr val="000000"/>
                 </a:solidFill>
@@ -484,11 +627,11 @@
                 <a:spcPct val="115000"/>
               </a:lnSpc>
               <a:spcAft>
-                <a:spcPts val="550"/>
-              </a:spcAft>
-            </a:pPr>
-            <a:r>
-              <a:rPr sz="1100" lang="zh-TW" dirty="0">
+                <a:spcPts val="500"/>
+              </a:spcAft>
+            </a:pPr>
+            <a:r>
+              <a:rPr sz="1000" lang="zh-TW" dirty="0">
                 <a:solidFill>
                   <a:srgbClr val="000000"/>
                 </a:solidFill>
@@ -506,11 +649,11 @@
                 <a:spcPct val="115000"/>
               </a:lnSpc>
               <a:spcAft>
-                <a:spcPts val="550"/>
-              </a:spcAft>
-            </a:pPr>
-            <a:r>
-              <a:rPr sz="1100" lang="zh-TW" dirty="0">
+                <a:spcPts val="500"/>
+              </a:spcAft>
+            </a:pPr>
+            <a:r>
+              <a:rPr sz="1000" lang="zh-TW" dirty="0">
                 <a:solidFill>
                   <a:srgbClr val="000000"/>
                 </a:solidFill>
@@ -521,7 +664,7 @@
               <a:t>那兩週用的數字，全部是</a:t>
             </a:r>
             <a:r>
-              <a:rPr sz="1100" b="1" lang="zh-TW" dirty="0">
+              <a:rPr sz="1000" b="1" lang="zh-TW" dirty="0">
                 <a:solidFill>
                   <a:srgbClr val="000000"/>
                 </a:solidFill>
@@ -532,7 +675,7 @@
               <a:t>我設定的教學模型</a:t>
             </a:r>
             <a:r>
-              <a:rPr sz="1100" lang="zh-TW" dirty="0">
+              <a:rPr sz="1000" lang="zh-TW" dirty="0">
                 <a:solidFill>
                   <a:srgbClr val="000000"/>
                 </a:solidFill>
@@ -550,11 +693,11 @@
                 <a:spcPct val="115000"/>
               </a:lnSpc>
               <a:spcAft>
-                <a:spcPts val="550"/>
-              </a:spcAft>
-            </a:pPr>
-            <a:r>
-              <a:rPr sz="1100" lang="zh-TW" dirty="0">
+                <a:spcPts val="500"/>
+              </a:spcAft>
+            </a:pPr>
+            <a:r>
+              <a:rPr sz="1000" lang="zh-TW" dirty="0">
                 <a:solidFill>
                   <a:srgbClr val="000000"/>
                 </a:solidFill>
@@ -565,7 +708,7 @@
               <a:t>今天不一樣。今天我把</a:t>
             </a:r>
             <a:r>
-              <a:rPr sz="1100" b="1" lang="zh-TW" dirty="0">
+              <a:rPr sz="1000" b="1" lang="zh-TW" dirty="0">
                 <a:solidFill>
                   <a:srgbClr val="000000"/>
                 </a:solidFill>
@@ -576,7 +719,7 @@
               <a:t>真的規格表</a:t>
             </a:r>
             <a:r>
-              <a:rPr sz="1100" lang="zh-TW" dirty="0">
+              <a:rPr sz="1000" lang="zh-TW" dirty="0">
                 <a:solidFill>
                   <a:srgbClr val="000000"/>
                 </a:solidFill>
@@ -587,7 +730,7 @@
               <a:t>攤開來，上面是真的廠商、真的型號、真的數字。我們要做的事只有一件：</a:t>
             </a:r>
             <a:r>
-              <a:rPr sz="1100" b="1" lang="zh-TW" dirty="0">
+              <a:rPr sz="1000" b="1" lang="zh-TW" dirty="0">
                 <a:solidFill>
                   <a:srgbClr val="000000"/>
                 </a:solidFill>
@@ -598,7 +741,7 @@
               <a:t>把前兩週拉過的那三個滑桿，在規格表上一行一行找出來。</a:t>
             </a:r>
             <a:r>
-              <a:rPr sz="1100" lang="zh-TW" dirty="0">
+              <a:rPr sz="1000" lang="zh-TW" dirty="0">
                 <a:solidFill>
                   <a:srgbClr val="000000"/>
                 </a:solidFill>
@@ -616,11 +759,11 @@
                 <a:spcPct val="115000"/>
               </a:lnSpc>
               <a:spcAft>
-                <a:spcPts val="550"/>
-              </a:spcAft>
-            </a:pPr>
-            <a:r>
-              <a:rPr sz="1100" lang="zh-TW" dirty="0">
+                <a:spcPts val="500"/>
+              </a:spcAft>
+            </a:pPr>
+            <a:r>
+              <a:rPr sz="1000" lang="zh-TW" dirty="0">
                 <a:solidFill>
                   <a:srgbClr val="000000"/>
                 </a:solidFill>
@@ -638,11 +781,11 @@
                 <a:spcPct val="115000"/>
               </a:lnSpc>
               <a:spcAft>
-                <a:spcPts val="550"/>
-              </a:spcAft>
-            </a:pPr>
-            <a:r>
-              <a:rPr sz="1100" lang="zh-TW" dirty="0">
+                <a:spcPts val="500"/>
+              </a:spcAft>
+            </a:pPr>
+            <a:r>
+              <a:rPr sz="1000" lang="zh-TW" dirty="0">
                 <a:solidFill>
                   <a:srgbClr val="000000"/>
                 </a:solidFill>
@@ -653,7 +796,7 @@
               <a:t>第一，規格表上有</a:t>
             </a:r>
             <a:r>
-              <a:rPr sz="1100" b="1" lang="zh-TW" dirty="0">
+              <a:rPr sz="1000" b="1" lang="zh-TW" dirty="0">
                 <a:solidFill>
                   <a:srgbClr val="000000"/>
                 </a:solidFill>
@@ -664,7 +807,7 @@
               <a:t>第四個數字</a:t>
             </a:r>
             <a:r>
-              <a:rPr sz="1100" lang="zh-TW" dirty="0">
+              <a:rPr sz="1000" lang="zh-TW" dirty="0">
                 <a:solidFill>
                   <a:srgbClr val="000000"/>
                 </a:solidFill>
@@ -682,11 +825,11 @@
                 <a:spcPct val="115000"/>
               </a:lnSpc>
               <a:spcAft>
-                <a:spcPts val="550"/>
-              </a:spcAft>
-            </a:pPr>
-            <a:r>
-              <a:rPr sz="1100" lang="zh-TW" dirty="0">
+                <a:spcPts val="500"/>
+              </a:spcAft>
+            </a:pPr>
+            <a:r>
+              <a:rPr sz="1000" lang="zh-TW" dirty="0">
                 <a:solidFill>
                   <a:srgbClr val="000000"/>
                 </a:solidFill>
@@ -697,7 +840,7 @@
               <a:t>第二，相機的規格表上，居然</a:t>
             </a:r>
             <a:r>
-              <a:rPr sz="1100" b="1" lang="zh-TW" dirty="0">
+              <a:rPr sz="1000" b="1" lang="zh-TW" dirty="0">
                 <a:solidFill>
                   <a:srgbClr val="000000"/>
                 </a:solidFill>
@@ -708,7 +851,7 @@
               <a:t>沒有視野、也沒有測距</a:t>
             </a:r>
             <a:r>
-              <a:rPr sz="1100" lang="zh-TW" dirty="0">
+              <a:rPr sz="1000" lang="zh-TW" dirty="0">
                 <a:solidFill>
                   <a:srgbClr val="000000"/>
                 </a:solidFill>
@@ -726,11 +869,11 @@
                 <a:spcPct val="115000"/>
               </a:lnSpc>
               <a:spcAft>
-                <a:spcPts val="550"/>
-              </a:spcAft>
-            </a:pPr>
-            <a:r>
-              <a:rPr sz="1100" lang="zh-TW" dirty="0">
+                <a:spcPts val="500"/>
+              </a:spcAft>
+            </a:pPr>
+            <a:r>
+              <a:rPr sz="1000" lang="zh-TW" dirty="0">
                 <a:solidFill>
                   <a:srgbClr val="000000"/>
                 </a:solidFill>
@@ -741,7 +884,7 @@
               <a:t>第三，同樣一顆光達，規格表上會寫</a:t>
             </a:r>
             <a:r>
-              <a:rPr sz="1100" b="1" lang="zh-TW" dirty="0">
+              <a:rPr sz="1000" b="1" lang="zh-TW" dirty="0">
                 <a:solidFill>
                   <a:srgbClr val="000000"/>
                 </a:solidFill>
@@ -752,7 +895,7 @@
               <a:t>兩個測距</a:t>
             </a:r>
             <a:r>
-              <a:rPr sz="1100" lang="zh-TW" dirty="0">
+              <a:rPr sz="1000" lang="zh-TW" dirty="0">
                 <a:solidFill>
                   <a:srgbClr val="000000"/>
                 </a:solidFill>
@@ -770,11 +913,11 @@
                 <a:spcPct val="115000"/>
               </a:lnSpc>
               <a:spcAft>
-                <a:spcPts val="550"/>
-              </a:spcAft>
-            </a:pPr>
-            <a:r>
-              <a:rPr sz="1100" lang="zh-TW" dirty="0">
+                <a:spcPts val="500"/>
+              </a:spcAft>
+            </a:pPr>
+            <a:r>
+              <a:rPr sz="1000" lang="zh-TW" dirty="0">
                 <a:solidFill>
                   <a:srgbClr val="000000"/>
                 </a:solidFill>
@@ -895,6 +1038,149 @@
               </a:spcAft>
             </a:pPr>
             <a:r>
+              <a:rPr sz="1000" b="1" lang="zh-TW" dirty="0">
+                <a:solidFill>
+                  <a:srgbClr val="000000"/>
+                </a:solidFill>
+                <a:latin typeface="Arial Unicode MS"/>
+                <a:ea typeface="Arial Unicode MS"/>
+                <a:cs typeface="Arial Unicode MS"/>
+              </a:rPr>
+              <a:t>▍這一張要做什麼</a:t>
+            </a:r>
+            <a:r>
+              <a:rPr sz="1000" lang="zh-TW" dirty="0">
+                <a:solidFill>
+                  <a:srgbClr val="000000"/>
+                </a:solidFill>
+                <a:latin typeface="Arial Unicode MS"/>
+                <a:ea typeface="Arial Unicode MS"/>
+                <a:cs typeface="Arial Unicode MS"/>
+              </a:rPr>
+              <a:t>
+</a:t>
+            </a:r>
+          </a:p>
+          <a:p>
+            <a:pPr algn="l">
+              <a:lnSpc>
+                <a:spcPct val="115000"/>
+              </a:lnSpc>
+              <a:spcAft>
+                <a:spcPts val="500"/>
+              </a:spcAft>
+            </a:pPr>
+            <a:r>
+              <a:rPr sz="1000" lang="zh-TW" dirty="0">
+                <a:solidFill>
+                  <a:srgbClr val="000000"/>
+                </a:solidFill>
+                <a:latin typeface="Arial Unicode MS"/>
+                <a:ea typeface="Arial Unicode MS"/>
+                <a:cs typeface="Arial Unicode MS"/>
+              </a:rPr>
+              <a:t>公布答案：視野不在感測器身上，在鏡頭身上。這是整份工具最重要的一題。
+</a:t>
+            </a:r>
+          </a:p>
+          <a:p>
+            <a:pPr algn="l">
+              <a:lnSpc>
+                <a:spcPct val="115000"/>
+              </a:lnSpc>
+              <a:spcAft>
+                <a:spcPts val="500"/>
+              </a:spcAft>
+            </a:pPr>
+            <a:r>
+              <a:rPr sz="1000" b="1" lang="zh-TW" dirty="0">
+                <a:solidFill>
+                  <a:srgbClr val="000000"/>
+                </a:solidFill>
+                <a:latin typeface="Arial Unicode MS"/>
+                <a:ea typeface="Arial Unicode MS"/>
+                <a:cs typeface="Arial Unicode MS"/>
+              </a:rPr>
+              <a:t>▍畫面上圈這裡</a:t>
+            </a:r>
+            <a:r>
+              <a:rPr sz="1000" lang="zh-TW" dirty="0">
+                <a:solidFill>
+                  <a:srgbClr val="000000"/>
+                </a:solidFill>
+                <a:latin typeface="Arial Unicode MS"/>
+                <a:ea typeface="Arial Unicode MS"/>
+                <a:cs typeface="Arial Unicode MS"/>
+              </a:rPr>
+              <a:t>
+</a:t>
+            </a:r>
+          </a:p>
+          <a:p>
+            <a:pPr algn="l">
+              <a:lnSpc>
+                <a:spcPct val="115000"/>
+              </a:lnSpc>
+              <a:spcAft>
+                <a:spcPts val="500"/>
+              </a:spcAft>
+            </a:pPr>
+            <a:r>
+              <a:rPr sz="1000" lang="zh-TW" dirty="0">
+                <a:solidFill>
+                  <a:srgbClr val="000000"/>
+                </a:solidFill>
+                <a:latin typeface="Arial Unicode MS"/>
+                <a:ea typeface="Arial Unicode MS"/>
+                <a:cs typeface="Arial Unicode MS"/>
+              </a:rPr>
+              <a:t>圈公式裡的焦距與感光元件寬度，再打開工具裡的第①個小工具現場算一次。
+</a:t>
+            </a:r>
+          </a:p>
+          <a:p>
+            <a:pPr algn="l">
+              <a:lnSpc>
+                <a:spcPct val="115000"/>
+              </a:lnSpc>
+              <a:spcAft>
+                <a:spcPts val="500"/>
+              </a:spcAft>
+            </a:pPr>
+            <a:r>
+              <a:rPr sz="1000" b="1" lang="zh-TW" dirty="0">
+                <a:solidFill>
+                  <a:srgbClr val="000000"/>
+                </a:solidFill>
+                <a:latin typeface="Arial Unicode MS"/>
+                <a:ea typeface="Arial Unicode MS"/>
+                <a:cs typeface="Arial Unicode MS"/>
+              </a:rPr>
+              <a:t>▍以下照著唸</a:t>
+            </a:r>
+            <a:r>
+              <a:rPr sz="1000" lang="zh-TW" dirty="0">
+                <a:solidFill>
+                  <a:srgbClr val="000000"/>
+                </a:solidFill>
+                <a:latin typeface="Arial Unicode MS"/>
+                <a:ea typeface="Arial Unicode MS"/>
+                <a:cs typeface="Arial Unicode MS"/>
+              </a:rPr>
+              <a:t>
+</a:t>
+            </a:r>
+          </a:p>
+          <a:p>
+            <a:pPr algn="l">
+              <a:lnSpc>
+                <a:spcPct val="115000"/>
+              </a:lnSpc>
+              <a:spcAft>
+                <a:spcPts val="500"/>
+              </a:spcAft>
+            </a:pPr>
+            <a:r>
               <a:rPr sz="1000" lang="zh-TW" dirty="0">
                 <a:solidFill>
                   <a:srgbClr val="000000"/>
@@ -1507,11 +1793,154 @@
                 <a:spcPct val="115000"/>
               </a:lnSpc>
               <a:spcAft>
-                <a:spcPts val="550"/>
-              </a:spcAft>
-            </a:pPr>
-            <a:r>
-              <a:rPr sz="1100" lang="zh-TW" dirty="0">
+                <a:spcPts val="500"/>
+              </a:spcAft>
+            </a:pPr>
+            <a:r>
+              <a:rPr sz="1000" b="1" lang="zh-TW" dirty="0">
+                <a:solidFill>
+                  <a:srgbClr val="000000"/>
+                </a:solidFill>
+                <a:latin typeface="Arial Unicode MS"/>
+                <a:ea typeface="Arial Unicode MS"/>
+                <a:cs typeface="Arial Unicode MS"/>
+              </a:rPr>
+              <a:t>▍這一張要做什麼</a:t>
+            </a:r>
+            <a:r>
+              <a:rPr sz="1000" lang="zh-TW" dirty="0">
+                <a:solidFill>
+                  <a:srgbClr val="000000"/>
+                </a:solidFill>
+                <a:latin typeface="Arial Unicode MS"/>
+                <a:ea typeface="Arial Unicode MS"/>
+                <a:cs typeface="Arial Unicode MS"/>
+              </a:rPr>
+              <a:t>
+</a:t>
+            </a:r>
+          </a:p>
+          <a:p>
+            <a:pPr algn="l">
+              <a:lnSpc>
+                <a:spcPct val="115000"/>
+              </a:lnSpc>
+              <a:spcAft>
+                <a:spcPts val="500"/>
+              </a:spcAft>
+            </a:pPr>
+            <a:r>
+              <a:rPr sz="1000" lang="zh-TW" dirty="0">
+                <a:solidFill>
+                  <a:srgbClr val="000000"/>
+                </a:solidFill>
+                <a:latin typeface="Arial Unicode MS"/>
+                <a:ea typeface="Arial Unicode MS"/>
+                <a:cs typeface="Arial Unicode MS"/>
+              </a:rPr>
+              <a:t>提醒一個容易讀錯的地方：寫著「可設定」的那一行是模式，不是定值。
+</a:t>
+            </a:r>
+          </a:p>
+          <a:p>
+            <a:pPr algn="l">
+              <a:lnSpc>
+                <a:spcPct val="115000"/>
+              </a:lnSpc>
+              <a:spcAft>
+                <a:spcPts val="500"/>
+              </a:spcAft>
+            </a:pPr>
+            <a:r>
+              <a:rPr sz="1000" b="1" lang="zh-TW" dirty="0">
+                <a:solidFill>
+                  <a:srgbClr val="000000"/>
+                </a:solidFill>
+                <a:latin typeface="Arial Unicode MS"/>
+                <a:ea typeface="Arial Unicode MS"/>
+                <a:cs typeface="Arial Unicode MS"/>
+              </a:rPr>
+              <a:t>▍畫面上圈這裡</a:t>
+            </a:r>
+            <a:r>
+              <a:rPr sz="1000" lang="zh-TW" dirty="0">
+                <a:solidFill>
+                  <a:srgbClr val="000000"/>
+                </a:solidFill>
+                <a:latin typeface="Arial Unicode MS"/>
+                <a:ea typeface="Arial Unicode MS"/>
+                <a:cs typeface="Arial Unicode MS"/>
+              </a:rPr>
+              <a:t>
+</a:t>
+            </a:r>
+          </a:p>
+          <a:p>
+            <a:pPr algn="l">
+              <a:lnSpc>
+                <a:spcPct val="115000"/>
+              </a:lnSpc>
+              <a:spcAft>
+                <a:spcPts val="500"/>
+              </a:spcAft>
+            </a:pPr>
+            <a:r>
+              <a:rPr sz="1000" lang="zh-TW" dirty="0">
+                <a:solidFill>
+                  <a:srgbClr val="000000"/>
+                </a:solidFill>
+                <a:latin typeface="Arial Unicode MS"/>
+                <a:ea typeface="Arial Unicode MS"/>
+                <a:cs typeface="Arial Unicode MS"/>
+              </a:rPr>
+              <a:t>圈規格表上「可設定」那幾個字，再現場切一次 OS1 的點數模式給他們看。
+</a:t>
+            </a:r>
+          </a:p>
+          <a:p>
+            <a:pPr algn="l">
+              <a:lnSpc>
+                <a:spcPct val="115000"/>
+              </a:lnSpc>
+              <a:spcAft>
+                <a:spcPts val="500"/>
+              </a:spcAft>
+            </a:pPr>
+            <a:r>
+              <a:rPr sz="1000" b="1" lang="zh-TW" dirty="0">
+                <a:solidFill>
+                  <a:srgbClr val="000000"/>
+                </a:solidFill>
+                <a:latin typeface="Arial Unicode MS"/>
+                <a:ea typeface="Arial Unicode MS"/>
+                <a:cs typeface="Arial Unicode MS"/>
+              </a:rPr>
+              <a:t>▍以下照著唸</a:t>
+            </a:r>
+            <a:r>
+              <a:rPr sz="1000" lang="zh-TW" dirty="0">
+                <a:solidFill>
+                  <a:srgbClr val="000000"/>
+                </a:solidFill>
+                <a:latin typeface="Arial Unicode MS"/>
+                <a:ea typeface="Arial Unicode MS"/>
+                <a:cs typeface="Arial Unicode MS"/>
+              </a:rPr>
+              <a:t>
+</a:t>
+            </a:r>
+          </a:p>
+          <a:p>
+            <a:pPr algn="l">
+              <a:lnSpc>
+                <a:spcPct val="115000"/>
+              </a:lnSpc>
+              <a:spcAft>
+                <a:spcPts val="500"/>
+              </a:spcAft>
+            </a:pPr>
+            <a:r>
+              <a:rPr sz="1000" lang="zh-TW" dirty="0">
                 <a:solidFill>
                   <a:srgbClr val="000000"/>
                 </a:solidFill>
@@ -1529,11 +1958,11 @@
                 <a:spcPct val="115000"/>
               </a:lnSpc>
               <a:spcAft>
-                <a:spcPts val="550"/>
-              </a:spcAft>
-            </a:pPr>
-            <a:r>
-              <a:rPr sz="1100" lang="zh-TW" dirty="0">
+                <a:spcPts val="500"/>
+              </a:spcAft>
+            </a:pPr>
+            <a:r>
+              <a:rPr sz="1000" lang="zh-TW" dirty="0">
                 <a:solidFill>
                   <a:srgbClr val="000000"/>
                 </a:solidFill>
@@ -1544,7 +1973,7 @@
               <a:t>OS1 的規格表上，水平解析度那一行寫的是 </a:t>
             </a:r>
             <a:r>
-              <a:rPr sz="1100" b="1" lang="zh-TW" dirty="0">
+              <a:rPr sz="1000" b="1" lang="zh-TW" dirty="0">
                 <a:solidFill>
                   <a:srgbClr val="000000"/>
                 </a:solidFill>
@@ -1555,7 +1984,7 @@
               <a:t>512 / 1024 / 2048 (configurable)</a:t>
             </a:r>
             <a:r>
-              <a:rPr sz="1100" lang="zh-TW" dirty="0">
+              <a:rPr sz="1000" lang="zh-TW" dirty="0">
                 <a:solidFill>
                   <a:srgbClr val="000000"/>
                 </a:solidFill>
@@ -1566,7 +1995,7 @@
               <a:t>。最後那個字很重要，configurable，</a:t>
             </a:r>
             <a:r>
-              <a:rPr sz="1100" b="1" lang="zh-TW" dirty="0">
+              <a:rPr sz="1000" b="1" lang="zh-TW" dirty="0">
                 <a:solidFill>
                   <a:srgbClr val="000000"/>
                 </a:solidFill>
@@ -1577,7 +2006,7 @@
               <a:t>可以設定</a:t>
             </a:r>
             <a:r>
-              <a:rPr sz="1100" lang="zh-TW" dirty="0">
+              <a:rPr sz="1000" lang="zh-TW" dirty="0">
                 <a:solidFill>
                   <a:srgbClr val="000000"/>
                 </a:solidFill>
@@ -1595,11 +2024,11 @@
                 <a:spcPct val="115000"/>
               </a:lnSpc>
               <a:spcAft>
-                <a:spcPts val="550"/>
-              </a:spcAft>
-            </a:pPr>
-            <a:r>
-              <a:rPr sz="1100" lang="zh-TW" dirty="0">
+                <a:spcPts val="500"/>
+              </a:spcAft>
+            </a:pPr>
+            <a:r>
+              <a:rPr sz="1000" lang="zh-TW" dirty="0">
                 <a:solidFill>
                   <a:srgbClr val="000000"/>
                 </a:solidFill>
@@ -1617,11 +2046,11 @@
                 <a:spcPct val="115000"/>
               </a:lnSpc>
               <a:spcAft>
-                <a:spcPts val="550"/>
-              </a:spcAft>
-            </a:pPr>
-            <a:r>
-              <a:rPr sz="1100" lang="zh-TW" dirty="0">
+                <a:spcPts val="500"/>
+              </a:spcAft>
+            </a:pPr>
+            <a:r>
+              <a:rPr sz="1000" lang="zh-TW" dirty="0">
                 <a:solidFill>
                   <a:srgbClr val="000000"/>
                 </a:solidFill>
@@ -1632,7 +2061,7 @@
               <a:t>這代表什麼？代表</a:t>
             </a:r>
             <a:r>
-              <a:rPr sz="1100" b="1" lang="zh-TW" dirty="0">
+              <a:rPr sz="1000" b="1" lang="zh-TW" dirty="0">
                 <a:solidFill>
                   <a:srgbClr val="000000"/>
                 </a:solidFill>
@@ -1643,7 +2072,7 @@
               <a:t>同一顆光達，你買回來之後還可以選模式</a:t>
             </a:r>
             <a:r>
-              <a:rPr sz="1100" lang="zh-TW" dirty="0">
+              <a:rPr sz="1000" lang="zh-TW" dirty="0">
                 <a:solidFill>
                   <a:srgbClr val="000000"/>
                 </a:solidFill>
@@ -1661,11 +2090,11 @@
                 <a:spcPct val="115000"/>
               </a:lnSpc>
               <a:spcAft>
-                <a:spcPts val="550"/>
-              </a:spcAft>
-            </a:pPr>
-            <a:r>
-              <a:rPr sz="1100" lang="zh-TW" dirty="0">
+                <a:spcPts val="500"/>
+              </a:spcAft>
+            </a:pPr>
+            <a:r>
+              <a:rPr sz="1000" lang="zh-TW" dirty="0">
                 <a:solidFill>
                   <a:srgbClr val="000000"/>
                 </a:solidFill>
@@ -1676,7 +2105,7 @@
               <a:t>剛剛那張表我算給各位看，四十公尺的行人身上 OS1 有九個點。那是在 1024 點一圈的模式下算的。如果你把它切到 2048 點一圈，左右的點會加倍，九個點就變成</a:t>
             </a:r>
             <a:r>
-              <a:rPr sz="1100" b="1" lang="zh-TW" dirty="0">
+              <a:rPr sz="1000" b="1" lang="zh-TW" dirty="0">
                 <a:solidFill>
                   <a:srgbClr val="000000"/>
                 </a:solidFill>
@@ -1687,7 +2116,7 @@
               <a:t>十八個點</a:t>
             </a:r>
             <a:r>
-              <a:rPr sz="1100" lang="zh-TW" dirty="0">
+              <a:rPr sz="1000" lang="zh-TW" dirty="0">
                 <a:solidFill>
                   <a:srgbClr val="000000"/>
                 </a:solidFill>
@@ -1705,11 +2134,11 @@
                 <a:spcPct val="115000"/>
               </a:lnSpc>
               <a:spcAft>
-                <a:spcPts val="550"/>
-              </a:spcAft>
-            </a:pPr>
-            <a:r>
-              <a:rPr sz="1100" lang="zh-TW" dirty="0">
+                <a:spcPts val="500"/>
+              </a:spcAft>
+            </a:pPr>
+            <a:r>
+              <a:rPr sz="1000" lang="zh-TW" dirty="0">
                 <a:solidFill>
                   <a:srgbClr val="000000"/>
                 </a:solidFill>
@@ -1727,11 +2156,11 @@
                 <a:spcPct val="115000"/>
               </a:lnSpc>
               <a:spcAft>
-                <a:spcPts val="550"/>
-              </a:spcAft>
-            </a:pPr>
-            <a:r>
-              <a:rPr sz="1100" lang="zh-TW" dirty="0">
+                <a:spcPts val="500"/>
+              </a:spcAft>
+            </a:pPr>
+            <a:r>
+              <a:rPr sz="1000" lang="zh-TW" dirty="0">
                 <a:solidFill>
                   <a:srgbClr val="000000"/>
                 </a:solidFill>
@@ -1742,7 +2171,7 @@
               <a:t>這件事在工程上很重要，因為它告訴你：</a:t>
             </a:r>
             <a:r>
-              <a:rPr sz="1100" b="1" lang="zh-TW" dirty="0">
+              <a:rPr sz="1000" b="1" lang="zh-TW" dirty="0">
                 <a:solidFill>
                   <a:srgbClr val="000000"/>
                 </a:solidFill>
@@ -1753,7 +2182,7 @@
               <a:t>買之前要問清楚，廠商標的那個漂亮數字，是在哪一個模式下量的。</a:t>
             </a:r>
             <a:r>
-              <a:rPr sz="1100" lang="zh-TW" dirty="0">
+              <a:rPr sz="1000" lang="zh-TW" dirty="0">
                 <a:solidFill>
                   <a:srgbClr val="000000"/>
                 </a:solidFill>
@@ -1771,11 +2200,11 @@
                 <a:spcPct val="115000"/>
               </a:lnSpc>
               <a:spcAft>
-                <a:spcPts val="550"/>
-              </a:spcAft>
-            </a:pPr>
-            <a:r>
-              <a:rPr sz="1100" lang="zh-TW" dirty="0">
+                <a:spcPts val="500"/>
+              </a:spcAft>
+            </a:pPr>
+            <a:r>
+              <a:rPr sz="1000" lang="zh-TW" dirty="0">
                 <a:solidFill>
                   <a:srgbClr val="000000"/>
                 </a:solidFill>
@@ -1793,11 +2222,11 @@
                 <a:spcPct val="115000"/>
               </a:lnSpc>
               <a:spcAft>
-                <a:spcPts val="550"/>
-              </a:spcAft>
-            </a:pPr>
-            <a:r>
-              <a:rPr sz="1100" lang="zh-TW" dirty="0">
+                <a:spcPts val="500"/>
+              </a:spcAft>
+            </a:pPr>
+            <a:r>
+              <a:rPr sz="1000" lang="zh-TW" dirty="0">
                 <a:solidFill>
                   <a:srgbClr val="000000"/>
                 </a:solidFill>
@@ -1918,6 +2347,149 @@
               </a:spcAft>
             </a:pPr>
             <a:r>
+              <a:rPr sz="1000" b="1" lang="zh-TW" dirty="0">
+                <a:solidFill>
+                  <a:srgbClr val="000000"/>
+                </a:solidFill>
+                <a:latin typeface="Arial Unicode MS"/>
+                <a:ea typeface="Arial Unicode MS"/>
+                <a:cs typeface="Arial Unicode MS"/>
+              </a:rPr>
+              <a:t>▍這一張要做什麼</a:t>
+            </a:r>
+            <a:r>
+              <a:rPr sz="1000" lang="zh-TW" dirty="0">
+                <a:solidFill>
+                  <a:srgbClr val="000000"/>
+                </a:solidFill>
+                <a:latin typeface="Arial Unicode MS"/>
+                <a:ea typeface="Arial Unicode MS"/>
+                <a:cs typeface="Arial Unicode MS"/>
+              </a:rPr>
+              <a:t>
+</a:t>
+            </a:r>
+          </a:p>
+          <a:p>
+            <a:pPr algn="l">
+              <a:lnSpc>
+                <a:spcPct val="115000"/>
+              </a:lnSpc>
+              <a:spcAft>
+                <a:spcPts val="500"/>
+              </a:spcAft>
+            </a:pPr>
+            <a:r>
+              <a:rPr sz="1000" lang="zh-TW" dirty="0">
+                <a:solidFill>
+                  <a:srgbClr val="000000"/>
+                </a:solidFill>
+                <a:latin typeface="Arial Unicode MS"/>
+                <a:ea typeface="Arial Unicode MS"/>
+                <a:cs typeface="Arial Unicode MS"/>
+              </a:rPr>
+              <a:t>同一顆光達兩個測距數字，差別在反射率。這一條第三節會直接用到。
+</a:t>
+            </a:r>
+          </a:p>
+          <a:p>
+            <a:pPr algn="l">
+              <a:lnSpc>
+                <a:spcPct val="115000"/>
+              </a:lnSpc>
+              <a:spcAft>
+                <a:spcPts val="500"/>
+              </a:spcAft>
+            </a:pPr>
+            <a:r>
+              <a:rPr sz="1000" b="1" lang="zh-TW" dirty="0">
+                <a:solidFill>
+                  <a:srgbClr val="000000"/>
+                </a:solidFill>
+                <a:latin typeface="Arial Unicode MS"/>
+                <a:ea typeface="Arial Unicode MS"/>
+                <a:cs typeface="Arial Unicode MS"/>
+              </a:rPr>
+              <a:t>▍畫面上圈這裡</a:t>
+            </a:r>
+            <a:r>
+              <a:rPr sz="1000" lang="zh-TW" dirty="0">
+                <a:solidFill>
+                  <a:srgbClr val="000000"/>
+                </a:solidFill>
+                <a:latin typeface="Arial Unicode MS"/>
+                <a:ea typeface="Arial Unicode MS"/>
+                <a:cs typeface="Arial Unicode MS"/>
+              </a:rPr>
+              <a:t>
+</a:t>
+            </a:r>
+          </a:p>
+          <a:p>
+            <a:pPr algn="l">
+              <a:lnSpc>
+                <a:spcPct val="115000"/>
+              </a:lnSpc>
+              <a:spcAft>
+                <a:spcPts val="500"/>
+              </a:spcAft>
+            </a:pPr>
+            <a:r>
+              <a:rPr sz="1000" lang="zh-TW" dirty="0">
+                <a:solidFill>
+                  <a:srgbClr val="000000"/>
+                </a:solidFill>
+                <a:latin typeface="Arial Unicode MS"/>
+                <a:ea typeface="Arial Unicode MS"/>
+                <a:cs typeface="Arial Unicode MS"/>
+              </a:rPr>
+              <a:t>圈 170 公尺與 90 公尺兩個數字，中間圈出 80% 與 10% 這兩個反射率。
+</a:t>
+            </a:r>
+          </a:p>
+          <a:p>
+            <a:pPr algn="l">
+              <a:lnSpc>
+                <a:spcPct val="115000"/>
+              </a:lnSpc>
+              <a:spcAft>
+                <a:spcPts val="500"/>
+              </a:spcAft>
+            </a:pPr>
+            <a:r>
+              <a:rPr sz="1000" b="1" lang="zh-TW" dirty="0">
+                <a:solidFill>
+                  <a:srgbClr val="000000"/>
+                </a:solidFill>
+                <a:latin typeface="Arial Unicode MS"/>
+                <a:ea typeface="Arial Unicode MS"/>
+                <a:cs typeface="Arial Unicode MS"/>
+              </a:rPr>
+              <a:t>▍以下照著唸</a:t>
+            </a:r>
+            <a:r>
+              <a:rPr sz="1000" lang="zh-TW" dirty="0">
+                <a:solidFill>
+                  <a:srgbClr val="000000"/>
+                </a:solidFill>
+                <a:latin typeface="Arial Unicode MS"/>
+                <a:ea typeface="Arial Unicode MS"/>
+                <a:cs typeface="Arial Unicode MS"/>
+              </a:rPr>
+              <a:t>
+</a:t>
+            </a:r>
+          </a:p>
+          <a:p>
+            <a:pPr algn="l">
+              <a:lnSpc>
+                <a:spcPct val="115000"/>
+              </a:lnSpc>
+              <a:spcAft>
+                <a:spcPts val="500"/>
+              </a:spcAft>
+            </a:pPr>
+            <a:r>
               <a:rPr sz="1000" lang="zh-TW" dirty="0">
                 <a:solidFill>
                   <a:srgbClr val="000000"/>
@@ -2464,11 +3036,154 @@
                 <a:spcPct val="115000"/>
               </a:lnSpc>
               <a:spcAft>
-                <a:spcPts val="525"/>
-              </a:spcAft>
-            </a:pPr>
-            <a:r>
-              <a:rPr sz="1050" lang="zh-TW" dirty="0">
+                <a:spcPts val="500"/>
+              </a:spcAft>
+            </a:pPr>
+            <a:r>
+              <a:rPr sz="1000" b="1" lang="zh-TW" dirty="0">
+                <a:solidFill>
+                  <a:srgbClr val="000000"/>
+                </a:solidFill>
+                <a:latin typeface="Arial Unicode MS"/>
+                <a:ea typeface="Arial Unicode MS"/>
+                <a:cs typeface="Arial Unicode MS"/>
+              </a:rPr>
+              <a:t>▍這一張要做什麼</a:t>
+            </a:r>
+            <a:r>
+              <a:rPr sz="1000" lang="zh-TW" dirty="0">
+                <a:solidFill>
+                  <a:srgbClr val="000000"/>
+                </a:solidFill>
+                <a:latin typeface="Arial Unicode MS"/>
+                <a:ea typeface="Arial Unicode MS"/>
+                <a:cs typeface="Arial Unicode MS"/>
+              </a:rPr>
+              <a:t>
+</a:t>
+            </a:r>
+          </a:p>
+          <a:p>
+            <a:pPr algn="l">
+              <a:lnSpc>
+                <a:spcPct val="115000"/>
+              </a:lnSpc>
+              <a:spcAft>
+                <a:spcPts val="500"/>
+              </a:spcAft>
+            </a:pPr>
+            <a:r>
+              <a:rPr sz="1000" lang="zh-TW" dirty="0">
+                <a:solidFill>
+                  <a:srgbClr val="000000"/>
+                </a:solidFill>
+                <a:latin typeface="Arial Unicode MS"/>
+                <a:ea typeface="Arial Unicode MS"/>
+                <a:cs typeface="Arial Unicode MS"/>
+              </a:rPr>
+              <a:t>第一節上機。每個人自己找出四個數字，工具會判對錯。
+</a:t>
+            </a:r>
+          </a:p>
+          <a:p>
+            <a:pPr algn="l">
+              <a:lnSpc>
+                <a:spcPct val="115000"/>
+              </a:lnSpc>
+              <a:spcAft>
+                <a:spcPts val="500"/>
+              </a:spcAft>
+            </a:pPr>
+            <a:r>
+              <a:rPr sz="1000" b="1" lang="zh-TW" dirty="0">
+                <a:solidFill>
+                  <a:srgbClr val="000000"/>
+                </a:solidFill>
+                <a:latin typeface="Arial Unicode MS"/>
+                <a:ea typeface="Arial Unicode MS"/>
+                <a:cs typeface="Arial Unicode MS"/>
+              </a:rPr>
+              <a:t>▍畫面上圈這裡</a:t>
+            </a:r>
+            <a:r>
+              <a:rPr sz="1000" lang="zh-TW" dirty="0">
+                <a:solidFill>
+                  <a:srgbClr val="000000"/>
+                </a:solidFill>
+                <a:latin typeface="Arial Unicode MS"/>
+                <a:ea typeface="Arial Unicode MS"/>
+                <a:cs typeface="Arial Unicode MS"/>
+              </a:rPr>
+              <a:t>
+</a:t>
+            </a:r>
+          </a:p>
+          <a:p>
+            <a:pPr algn="l">
+              <a:lnSpc>
+                <a:spcPct val="115000"/>
+              </a:lnSpc>
+              <a:spcAft>
+                <a:spcPts val="500"/>
+              </a:spcAft>
+            </a:pPr>
+            <a:r>
+              <a:rPr sz="1000" lang="zh-TW" dirty="0">
+                <a:solidFill>
+                  <a:srgbClr val="000000"/>
+                </a:solidFill>
+                <a:latin typeface="Arial Unicode MS"/>
+                <a:ea typeface="Arial Unicode MS"/>
+                <a:cs typeface="Arial Unicode MS"/>
+              </a:rPr>
+              <a:t>圈題目的「每個人自己做」。巡堂時特別看視野那一題——答案是「規格表上沒有這一行」。
+</a:t>
+            </a:r>
+          </a:p>
+          <a:p>
+            <a:pPr algn="l">
+              <a:lnSpc>
+                <a:spcPct val="115000"/>
+              </a:lnSpc>
+              <a:spcAft>
+                <a:spcPts val="500"/>
+              </a:spcAft>
+            </a:pPr>
+            <a:r>
+              <a:rPr sz="1000" b="1" lang="zh-TW" dirty="0">
+                <a:solidFill>
+                  <a:srgbClr val="000000"/>
+                </a:solidFill>
+                <a:latin typeface="Arial Unicode MS"/>
+                <a:ea typeface="Arial Unicode MS"/>
+                <a:cs typeface="Arial Unicode MS"/>
+              </a:rPr>
+              <a:t>▍以下照著唸</a:t>
+            </a:r>
+            <a:r>
+              <a:rPr sz="1000" lang="zh-TW" dirty="0">
+                <a:solidFill>
+                  <a:srgbClr val="000000"/>
+                </a:solidFill>
+                <a:latin typeface="Arial Unicode MS"/>
+                <a:ea typeface="Arial Unicode MS"/>
+                <a:cs typeface="Arial Unicode MS"/>
+              </a:rPr>
+              <a:t>
+</a:t>
+            </a:r>
+          </a:p>
+          <a:p>
+            <a:pPr algn="l">
+              <a:lnSpc>
+                <a:spcPct val="115000"/>
+              </a:lnSpc>
+              <a:spcAft>
+                <a:spcPts val="500"/>
+              </a:spcAft>
+            </a:pPr>
+            <a:r>
+              <a:rPr sz="1000" lang="zh-TW" dirty="0">
                 <a:solidFill>
                   <a:srgbClr val="000000"/>
                 </a:solidFill>
@@ -2486,11 +3201,11 @@
                 <a:spcPct val="115000"/>
               </a:lnSpc>
               <a:spcAft>
-                <a:spcPts val="525"/>
-              </a:spcAft>
-            </a:pPr>
-            <a:r>
-              <a:rPr sz="1050" lang="zh-TW" dirty="0">
+                <a:spcPts val="500"/>
+              </a:spcAft>
+            </a:pPr>
+            <a:r>
+              <a:rPr sz="1000" lang="zh-TW" dirty="0">
                 <a:solidFill>
                   <a:srgbClr val="000000"/>
                 </a:solidFill>
@@ -2508,11 +3223,11 @@
                 <a:spcPct val="115000"/>
               </a:lnSpc>
               <a:spcAft>
-                <a:spcPts val="525"/>
-              </a:spcAft>
-            </a:pPr>
-            <a:r>
-              <a:rPr sz="1050" lang="zh-TW" dirty="0">
+                <a:spcPts val="500"/>
+              </a:spcAft>
+            </a:pPr>
+            <a:r>
+              <a:rPr sz="1000" lang="zh-TW" dirty="0">
                 <a:solidFill>
                   <a:srgbClr val="000000"/>
                 </a:solidFill>
@@ -2530,11 +3245,11 @@
                 <a:spcPct val="115000"/>
               </a:lnSpc>
               <a:spcAft>
-                <a:spcPts val="525"/>
-              </a:spcAft>
-            </a:pPr>
-            <a:r>
-              <a:rPr sz="1050" lang="zh-TW" dirty="0">
+                <a:spcPts val="500"/>
+              </a:spcAft>
+            </a:pPr>
+            <a:r>
+              <a:rPr sz="1000" lang="zh-TW" dirty="0">
                 <a:solidFill>
                   <a:srgbClr val="000000"/>
                 </a:solidFill>
@@ -2552,11 +3267,11 @@
                 <a:spcPct val="115000"/>
               </a:lnSpc>
               <a:spcAft>
-                <a:spcPts val="525"/>
-              </a:spcAft>
-            </a:pPr>
-            <a:r>
-              <a:rPr sz="1050" b="1" lang="zh-TW" dirty="0">
+                <a:spcPts val="500"/>
+              </a:spcAft>
+            </a:pPr>
+            <a:r>
+              <a:rPr sz="1000" b="1" lang="zh-TW" dirty="0">
                 <a:solidFill>
                   <a:srgbClr val="000000"/>
                 </a:solidFill>
@@ -2567,7 +3282,7 @@
               <a:t>第一，答案都在左邊那張表上。</a:t>
             </a:r>
             <a:r>
-              <a:rPr sz="1050" lang="zh-TW" dirty="0">
+              <a:rPr sz="1000" lang="zh-TW" dirty="0">
                 <a:solidFill>
                   <a:srgbClr val="000000"/>
                 </a:solidFill>
@@ -2585,11 +3300,11 @@
                 <a:spcPct val="115000"/>
               </a:lnSpc>
               <a:spcAft>
-                <a:spcPts val="525"/>
-              </a:spcAft>
-            </a:pPr>
-            <a:r>
-              <a:rPr sz="1050" b="1" lang="zh-TW" dirty="0">
+                <a:spcPts val="500"/>
+              </a:spcAft>
+            </a:pPr>
+            <a:r>
+              <a:rPr sz="1000" b="1" lang="zh-TW" dirty="0">
                 <a:solidFill>
                   <a:srgbClr val="000000"/>
                 </a:solidFill>
@@ -2600,7 +3315,7 @@
               <a:t>第二，選錯的時候工具會告訴你錯在哪。</a:t>
             </a:r>
             <a:r>
-              <a:rPr sz="1050" lang="zh-TW" dirty="0">
+              <a:rPr sz="1000" lang="zh-TW" dirty="0">
                 <a:solidFill>
                   <a:srgbClr val="000000"/>
                 </a:solidFill>
@@ -2618,11 +3333,11 @@
                 <a:spcPct val="115000"/>
               </a:lnSpc>
               <a:spcAft>
-                <a:spcPts val="525"/>
-              </a:spcAft>
-            </a:pPr>
-            <a:r>
-              <a:rPr sz="1050" b="1" lang="zh-TW" dirty="0">
+                <a:spcPts val="500"/>
+              </a:spcAft>
+            </a:pPr>
+            <a:r>
+              <a:rPr sz="1000" b="1" lang="zh-TW" dirty="0">
                 <a:solidFill>
                   <a:srgbClr val="000000"/>
                 </a:solidFill>
@@ -2633,7 +3348,7 @@
               <a:t>第三，OS1 做完換 AT128 再做一次。</a:t>
             </a:r>
             <a:r>
-              <a:rPr sz="1050" lang="zh-TW" dirty="0">
+              <a:rPr sz="1000" lang="zh-TW" dirty="0">
                 <a:solidFill>
                   <a:srgbClr val="000000"/>
                 </a:solidFill>
@@ -2651,11 +3366,11 @@
                 <a:spcPct val="115000"/>
               </a:lnSpc>
               <a:spcAft>
-                <a:spcPts val="525"/>
-              </a:spcAft>
-            </a:pPr>
-            <a:r>
-              <a:rPr sz="1050" lang="zh-TW" dirty="0">
+                <a:spcPts val="500"/>
+              </a:spcAft>
+            </a:pPr>
+            <a:r>
+              <a:rPr sz="1000" lang="zh-TW" dirty="0">
                 <a:solidFill>
                   <a:srgbClr val="000000"/>
                 </a:solidFill>
@@ -2673,11 +3388,11 @@
                 <a:spcPct val="115000"/>
               </a:lnSpc>
               <a:spcAft>
-                <a:spcPts val="525"/>
-              </a:spcAft>
-            </a:pPr>
-            <a:r>
-              <a:rPr sz="1050" lang="zh-TW" dirty="0">
+                <a:spcPts val="500"/>
+              </a:spcAft>
+            </a:pPr>
+            <a:r>
+              <a:rPr sz="1000" lang="zh-TW" dirty="0">
                 <a:solidFill>
                   <a:srgbClr val="000000"/>
                 </a:solidFill>
@@ -2688,7 +3403,7 @@
               <a:t>我在教室裡走動看大家的畫面。如果有人做得快，先做相機那一顆 AR0233AT。我先警告各位：</a:t>
             </a:r>
             <a:r>
-              <a:rPr sz="1050" b="1" lang="zh-TW" dirty="0">
+              <a:rPr sz="1000" b="1" lang="zh-TW" dirty="0">
                 <a:solidFill>
                   <a:srgbClr val="000000"/>
                 </a:solidFill>
@@ -2699,7 +3414,7 @@
               <a:t>那顆有兩題的答案是「規格表上沒有這一行」。</a:t>
             </a:r>
             <a:r>
-              <a:rPr sz="1050" lang="zh-TW" dirty="0">
+              <a:rPr sz="1000" lang="zh-TW" dirty="0">
                 <a:solidFill>
                   <a:srgbClr val="000000"/>
                 </a:solidFill>
@@ -2717,11 +3432,11 @@
                 <a:spcPct val="115000"/>
               </a:lnSpc>
               <a:spcAft>
-                <a:spcPts val="525"/>
-              </a:spcAft>
-            </a:pPr>
-            <a:r>
-              <a:rPr sz="1050" lang="zh-TW" dirty="0">
+                <a:spcPts val="500"/>
+              </a:spcAft>
+            </a:pPr>
+            <a:r>
+              <a:rPr sz="1000" lang="zh-TW" dirty="0">
                 <a:solidFill>
                   <a:srgbClr val="000000"/>
                 </a:solidFill>
@@ -2838,11 +3553,154 @@
                 <a:spcPct val="115000"/>
               </a:lnSpc>
               <a:spcAft>
-                <a:spcPts val="600"/>
-              </a:spcAft>
-            </a:pPr>
-            <a:r>
-              <a:rPr sz="1200" lang="zh-TW" dirty="0">
+                <a:spcPts val="500"/>
+              </a:spcAft>
+            </a:pPr>
+            <a:r>
+              <a:rPr sz="1000" b="1" lang="zh-TW" dirty="0">
+                <a:solidFill>
+                  <a:srgbClr val="000000"/>
+                </a:solidFill>
+                <a:latin typeface="Arial Unicode MS"/>
+                <a:ea typeface="Arial Unicode MS"/>
+                <a:cs typeface="Arial Unicode MS"/>
+              </a:rPr>
+              <a:t>▍這一張要做什麼</a:t>
+            </a:r>
+            <a:r>
+              <a:rPr sz="1000" lang="zh-TW" dirty="0">
+                <a:solidFill>
+                  <a:srgbClr val="000000"/>
+                </a:solidFill>
+                <a:latin typeface="Arial Unicode MS"/>
+                <a:ea typeface="Arial Unicode MS"/>
+                <a:cs typeface="Arial Unicode MS"/>
+              </a:rPr>
+              <a:t>
+</a:t>
+            </a:r>
+          </a:p>
+          <a:p>
+            <a:pPr algn="l">
+              <a:lnSpc>
+                <a:spcPct val="115000"/>
+              </a:lnSpc>
+              <a:spcAft>
+                <a:spcPts val="500"/>
+              </a:spcAft>
+            </a:pPr>
+            <a:r>
+              <a:rPr sz="1000" lang="zh-TW" dirty="0">
+                <a:solidFill>
+                  <a:srgbClr val="000000"/>
+                </a:solidFill>
+                <a:latin typeface="Arial Unicode MS"/>
+                <a:ea typeface="Arial Unicode MS"/>
+                <a:cs typeface="Arial Unicode MS"/>
+              </a:rPr>
+              <a:t>第一節小結，三句話帶進第二節。
+</a:t>
+            </a:r>
+          </a:p>
+          <a:p>
+            <a:pPr algn="l">
+              <a:lnSpc>
+                <a:spcPct val="115000"/>
+              </a:lnSpc>
+              <a:spcAft>
+                <a:spcPts val="500"/>
+              </a:spcAft>
+            </a:pPr>
+            <a:r>
+              <a:rPr sz="1000" b="1" lang="zh-TW" dirty="0">
+                <a:solidFill>
+                  <a:srgbClr val="000000"/>
+                </a:solidFill>
+                <a:latin typeface="Arial Unicode MS"/>
+                <a:ea typeface="Arial Unicode MS"/>
+                <a:cs typeface="Arial Unicode MS"/>
+              </a:rPr>
+              <a:t>▍畫面上圈這裡</a:t>
+            </a:r>
+            <a:r>
+              <a:rPr sz="1000" lang="zh-TW" dirty="0">
+                <a:solidFill>
+                  <a:srgbClr val="000000"/>
+                </a:solidFill>
+                <a:latin typeface="Arial Unicode MS"/>
+                <a:ea typeface="Arial Unicode MS"/>
+                <a:cs typeface="Arial Unicode MS"/>
+              </a:rPr>
+              <a:t>
+</a:t>
+            </a:r>
+          </a:p>
+          <a:p>
+            <a:pPr algn="l">
+              <a:lnSpc>
+                <a:spcPct val="115000"/>
+              </a:lnSpc>
+              <a:spcAft>
+                <a:spcPts val="500"/>
+              </a:spcAft>
+            </a:pPr>
+            <a:r>
+              <a:rPr sz="1000" lang="zh-TW" dirty="0">
+                <a:solidFill>
+                  <a:srgbClr val="000000"/>
+                </a:solidFill>
+                <a:latin typeface="Arial Unicode MS"/>
+                <a:ea typeface="Arial Unicode MS"/>
+                <a:cs typeface="Arial Unicode MS"/>
+              </a:rPr>
+              <a:t>三條一條一條圈。第一條「視野在鏡頭身上」要念兩次。
+</a:t>
+            </a:r>
+          </a:p>
+          <a:p>
+            <a:pPr algn="l">
+              <a:lnSpc>
+                <a:spcPct val="115000"/>
+              </a:lnSpc>
+              <a:spcAft>
+                <a:spcPts val="500"/>
+              </a:spcAft>
+            </a:pPr>
+            <a:r>
+              <a:rPr sz="1000" b="1" lang="zh-TW" dirty="0">
+                <a:solidFill>
+                  <a:srgbClr val="000000"/>
+                </a:solidFill>
+                <a:latin typeface="Arial Unicode MS"/>
+                <a:ea typeface="Arial Unicode MS"/>
+                <a:cs typeface="Arial Unicode MS"/>
+              </a:rPr>
+              <a:t>▍以下照著唸</a:t>
+            </a:r>
+            <a:r>
+              <a:rPr sz="1000" lang="zh-TW" dirty="0">
+                <a:solidFill>
+                  <a:srgbClr val="000000"/>
+                </a:solidFill>
+                <a:latin typeface="Arial Unicode MS"/>
+                <a:ea typeface="Arial Unicode MS"/>
+                <a:cs typeface="Arial Unicode MS"/>
+              </a:rPr>
+              <a:t>
+</a:t>
+            </a:r>
+          </a:p>
+          <a:p>
+            <a:pPr algn="l">
+              <a:lnSpc>
+                <a:spcPct val="115000"/>
+              </a:lnSpc>
+              <a:spcAft>
+                <a:spcPts val="500"/>
+              </a:spcAft>
+            </a:pPr>
+            <a:r>
+              <a:rPr sz="1000" lang="zh-TW" dirty="0">
                 <a:solidFill>
                   <a:srgbClr val="000000"/>
                 </a:solidFill>
@@ -2860,11 +3718,11 @@
                 <a:spcPct val="115000"/>
               </a:lnSpc>
               <a:spcAft>
-                <a:spcPts val="600"/>
-              </a:spcAft>
-            </a:pPr>
-            <a:r>
-              <a:rPr sz="1200" b="1" lang="zh-TW" dirty="0">
+                <a:spcPts val="500"/>
+              </a:spcAft>
+            </a:pPr>
+            <a:r>
+              <a:rPr sz="1000" b="1" lang="zh-TW" dirty="0">
                 <a:solidFill>
                   <a:srgbClr val="000000"/>
                 </a:solidFill>
@@ -2875,7 +3733,7 @@
               <a:t>第一句，上禮拜那三個滑桿，就是規格表上的三行：</a:t>
             </a:r>
             <a:r>
-              <a:rPr sz="1200" lang="zh-TW" dirty="0">
+              <a:rPr sz="1000" lang="zh-TW" dirty="0">
                 <a:solidFill>
                   <a:srgbClr val="000000"/>
                 </a:solidFill>
@@ -2886,7 +3744,7 @@
               <a:t>線束數、視野、測距。而且規格表上還有第四行，是我們前兩週沒碰過的——</a:t>
             </a:r>
             <a:r>
-              <a:rPr sz="1200" b="1" lang="zh-TW" dirty="0">
+              <a:rPr sz="1000" b="1" lang="zh-TW" dirty="0">
                 <a:solidFill>
                   <a:srgbClr val="000000"/>
                 </a:solidFill>
@@ -2897,7 +3755,7 @@
               <a:t>更新率</a:t>
             </a:r>
             <a:r>
-              <a:rPr sz="1200" lang="zh-TW" dirty="0">
+              <a:rPr sz="1000" lang="zh-TW" dirty="0">
                 <a:solidFill>
                   <a:srgbClr val="000000"/>
                 </a:solidFill>
@@ -2915,11 +3773,11 @@
                 <a:spcPct val="115000"/>
               </a:lnSpc>
               <a:spcAft>
-                <a:spcPts val="600"/>
-              </a:spcAft>
-            </a:pPr>
-            <a:r>
-              <a:rPr sz="1200" b="1" lang="zh-TW" dirty="0">
+                <a:spcPts val="500"/>
+              </a:spcAft>
+            </a:pPr>
+            <a:r>
+              <a:rPr sz="1000" b="1" lang="zh-TW" dirty="0">
                 <a:solidFill>
                   <a:srgbClr val="000000"/>
                 </a:solidFill>
@@ -2930,7 +3788,7 @@
               <a:t>第二句，影像感測器的規格表上沒有視野、也沒有測距。</a:t>
             </a:r>
             <a:r>
-              <a:rPr sz="1200" lang="zh-TW" dirty="0">
+              <a:rPr sz="1000" lang="zh-TW" dirty="0">
                 <a:solidFill>
                   <a:srgbClr val="000000"/>
                 </a:solidFill>
@@ -2948,11 +3806,11 @@
                 <a:spcPct val="115000"/>
               </a:lnSpc>
               <a:spcAft>
-                <a:spcPts val="600"/>
-              </a:spcAft>
-            </a:pPr>
-            <a:r>
-              <a:rPr sz="1200" b="1" lang="zh-TW" dirty="0">
+                <a:spcPts val="500"/>
+              </a:spcAft>
+            </a:pPr>
+            <a:r>
+              <a:rPr sz="1000" b="1" lang="zh-TW" dirty="0">
                 <a:solidFill>
                   <a:srgbClr val="000000"/>
                 </a:solidFill>
@@ -2963,7 +3821,7 @@
               <a:t>第三句，看到測距要追問是對百分之幾反射率量的。</a:t>
             </a:r>
             <a:r>
-              <a:rPr sz="1200" lang="zh-TW" dirty="0">
+              <a:rPr sz="1000" lang="zh-TW" dirty="0">
                 <a:solidFill>
                   <a:srgbClr val="000000"/>
                 </a:solidFill>
@@ -2981,11 +3839,11 @@
                 <a:spcPct val="115000"/>
               </a:lnSpc>
               <a:spcAft>
-                <a:spcPts val="600"/>
-              </a:spcAft>
-            </a:pPr>
-            <a:r>
-              <a:rPr sz="1200" lang="zh-TW" dirty="0">
+                <a:spcPts val="500"/>
+              </a:spcAft>
+            </a:pPr>
+            <a:r>
+              <a:rPr sz="1000" lang="zh-TW" dirty="0">
                 <a:solidFill>
                   <a:srgbClr val="000000"/>
                 </a:solidFill>
@@ -3003,11 +3861,11 @@
                 <a:spcPct val="115000"/>
               </a:lnSpc>
               <a:spcAft>
-                <a:spcPts val="600"/>
-              </a:spcAft>
-            </a:pPr>
-            <a:r>
-              <a:rPr sz="1200" lang="zh-TW" dirty="0">
+                <a:spcPts val="500"/>
+              </a:spcAft>
+            </a:pPr>
+            <a:r>
+              <a:rPr sz="1000" lang="zh-TW" dirty="0">
                 <a:solidFill>
                   <a:srgbClr val="000000"/>
                 </a:solidFill>
@@ -3124,11 +3982,154 @@
                 <a:spcPct val="115000"/>
               </a:lnSpc>
               <a:spcAft>
-                <a:spcPts val="600"/>
-              </a:spcAft>
-            </a:pPr>
-            <a:r>
-              <a:rPr sz="1200" lang="zh-TW" dirty="0">
+                <a:spcPts val="525"/>
+              </a:spcAft>
+            </a:pPr>
+            <a:r>
+              <a:rPr sz="1050" b="1" lang="zh-TW" dirty="0">
+                <a:solidFill>
+                  <a:srgbClr val="000000"/>
+                </a:solidFill>
+                <a:latin typeface="Arial Unicode MS"/>
+                <a:ea typeface="Arial Unicode MS"/>
+                <a:cs typeface="Arial Unicode MS"/>
+              </a:rPr>
+              <a:t>▍這一張要做什麼</a:t>
+            </a:r>
+            <a:r>
+              <a:rPr sz="1050" lang="zh-TW" dirty="0">
+                <a:solidFill>
+                  <a:srgbClr val="000000"/>
+                </a:solidFill>
+                <a:latin typeface="Arial Unicode MS"/>
+                <a:ea typeface="Arial Unicode MS"/>
+                <a:cs typeface="Arial Unicode MS"/>
+              </a:rPr>
+              <a:t>
+</a:t>
+            </a:r>
+          </a:p>
+          <a:p>
+            <a:pPr algn="l">
+              <a:lnSpc>
+                <a:spcPct val="115000"/>
+              </a:lnSpc>
+              <a:spcAft>
+                <a:spcPts val="525"/>
+              </a:spcAft>
+            </a:pPr>
+            <a:r>
+              <a:rPr sz="1050" lang="zh-TW" dirty="0">
+                <a:solidFill>
+                  <a:srgbClr val="000000"/>
+                </a:solidFill>
+                <a:latin typeface="Arial Unicode MS"/>
+                <a:ea typeface="Arial Unicode MS"/>
+                <a:cs typeface="Arial Unicode MS"/>
+              </a:rPr>
+              <a:t>讓每個人打開規格判讀台，確認畫面一致再往下。
+</a:t>
+            </a:r>
+          </a:p>
+          <a:p>
+            <a:pPr algn="l">
+              <a:lnSpc>
+                <a:spcPct val="115000"/>
+              </a:lnSpc>
+              <a:spcAft>
+                <a:spcPts val="525"/>
+              </a:spcAft>
+            </a:pPr>
+            <a:r>
+              <a:rPr sz="1050" b="1" lang="zh-TW" dirty="0">
+                <a:solidFill>
+                  <a:srgbClr val="000000"/>
+                </a:solidFill>
+                <a:latin typeface="Arial Unicode MS"/>
+                <a:ea typeface="Arial Unicode MS"/>
+                <a:cs typeface="Arial Unicode MS"/>
+              </a:rPr>
+              <a:t>▍畫面上圈這裡</a:t>
+            </a:r>
+            <a:r>
+              <a:rPr sz="1050" lang="zh-TW" dirty="0">
+                <a:solidFill>
+                  <a:srgbClr val="000000"/>
+                </a:solidFill>
+                <a:latin typeface="Arial Unicode MS"/>
+                <a:ea typeface="Arial Unicode MS"/>
+                <a:cs typeface="Arial Unicode MS"/>
+              </a:rPr>
+              <a:t>
+</a:t>
+            </a:r>
+          </a:p>
+          <a:p>
+            <a:pPr algn="l">
+              <a:lnSpc>
+                <a:spcPct val="115000"/>
+              </a:lnSpc>
+              <a:spcAft>
+                <a:spcPts val="525"/>
+              </a:spcAft>
+            </a:pPr>
+            <a:r>
+              <a:rPr sz="1050" lang="zh-TW" dirty="0">
+                <a:solidFill>
+                  <a:srgbClr val="000000"/>
+                </a:solidFill>
+                <a:latin typeface="Arial Unicode MS"/>
+                <a:ea typeface="Arial Unicode MS"/>
+                <a:cs typeface="Arial Unicode MS"/>
+              </a:rPr>
+              <a:t>圈網址與 QR，再圈右上角的語言切換鈕，提醒越南同學可以切成越南文。
+</a:t>
+            </a:r>
+          </a:p>
+          <a:p>
+            <a:pPr algn="l">
+              <a:lnSpc>
+                <a:spcPct val="115000"/>
+              </a:lnSpc>
+              <a:spcAft>
+                <a:spcPts val="525"/>
+              </a:spcAft>
+            </a:pPr>
+            <a:r>
+              <a:rPr sz="1050" b="1" lang="zh-TW" dirty="0">
+                <a:solidFill>
+                  <a:srgbClr val="000000"/>
+                </a:solidFill>
+                <a:latin typeface="Arial Unicode MS"/>
+                <a:ea typeface="Arial Unicode MS"/>
+                <a:cs typeface="Arial Unicode MS"/>
+              </a:rPr>
+              <a:t>▍以下照著唸</a:t>
+            </a:r>
+            <a:r>
+              <a:rPr sz="1050" lang="zh-TW" dirty="0">
+                <a:solidFill>
+                  <a:srgbClr val="000000"/>
+                </a:solidFill>
+                <a:latin typeface="Arial Unicode MS"/>
+                <a:ea typeface="Arial Unicode MS"/>
+                <a:cs typeface="Arial Unicode MS"/>
+              </a:rPr>
+              <a:t>
+</a:t>
+            </a:r>
+          </a:p>
+          <a:p>
+            <a:pPr algn="l">
+              <a:lnSpc>
+                <a:spcPct val="115000"/>
+              </a:lnSpc>
+              <a:spcAft>
+                <a:spcPts val="525"/>
+              </a:spcAft>
+            </a:pPr>
+            <a:r>
+              <a:rPr sz="1050" lang="zh-TW" dirty="0">
                 <a:solidFill>
                   <a:srgbClr val="000000"/>
                 </a:solidFill>
@@ -3146,11 +4147,11 @@
                 <a:spcPct val="115000"/>
               </a:lnSpc>
               <a:spcAft>
-                <a:spcPts val="600"/>
-              </a:spcAft>
-            </a:pPr>
-            <a:r>
-              <a:rPr sz="1200" lang="zh-TW" dirty="0">
+                <a:spcPts val="525"/>
+              </a:spcAft>
+            </a:pPr>
+            <a:r>
+              <a:rPr sz="1050" lang="zh-TW" dirty="0">
                 <a:solidFill>
                   <a:srgbClr val="000000"/>
                 </a:solidFill>
@@ -3168,11 +4169,11 @@
                 <a:spcPct val="115000"/>
               </a:lnSpc>
               <a:spcAft>
-                <a:spcPts val="600"/>
-              </a:spcAft>
-            </a:pPr>
-            <a:r>
-              <a:rPr sz="1200" lang="zh-TW" dirty="0">
+                <a:spcPts val="525"/>
+              </a:spcAft>
+            </a:pPr>
+            <a:r>
+              <a:rPr sz="1050" lang="zh-TW" dirty="0">
                 <a:solidFill>
                   <a:srgbClr val="000000"/>
                 </a:solidFill>
@@ -3190,11 +4191,11 @@
                 <a:spcPct val="115000"/>
               </a:lnSpc>
               <a:spcAft>
-                <a:spcPts val="600"/>
-              </a:spcAft>
-            </a:pPr>
-            <a:r>
-              <a:rPr sz="1200" lang="zh-TW" dirty="0">
+                <a:spcPts val="525"/>
+              </a:spcAft>
+            </a:pPr>
+            <a:r>
+              <a:rPr sz="1050" lang="zh-TW" dirty="0">
                 <a:solidFill>
                   <a:srgbClr val="000000"/>
                 </a:solidFill>
@@ -3212,11 +4213,11 @@
                 <a:spcPct val="115000"/>
               </a:lnSpc>
               <a:spcAft>
-                <a:spcPts val="600"/>
-              </a:spcAft>
-            </a:pPr>
-            <a:r>
-              <a:rPr sz="1200" lang="zh-TW" dirty="0">
+                <a:spcPts val="525"/>
+              </a:spcAft>
+            </a:pPr>
+            <a:r>
+              <a:rPr sz="1050" lang="zh-TW" dirty="0">
                 <a:solidFill>
                   <a:srgbClr val="000000"/>
                 </a:solidFill>
@@ -3227,7 +4228,7 @@
               <a:t>這裡還有一個按鈕我要先提醒大家：規格表下面有「只看英文原文」。</a:t>
             </a:r>
             <a:r>
-              <a:rPr sz="1200" b="1" lang="zh-TW" dirty="0">
+              <a:rPr sz="1050" b="1" lang="zh-TW" dirty="0">
                 <a:solidFill>
                   <a:srgbClr val="000000"/>
                 </a:solidFill>
@@ -3238,7 +4239,7 @@
               <a:t>真正的規格表上是不會有中文或越南文的</a:t>
             </a:r>
             <a:r>
-              <a:rPr sz="1200" lang="zh-TW" dirty="0">
+              <a:rPr sz="1050" lang="zh-TW" dirty="0">
                 <a:solidFill>
                   <a:srgbClr val="000000"/>
                 </a:solidFill>
@@ -3256,11 +4257,11 @@
                 <a:spcPct val="115000"/>
               </a:lnSpc>
               <a:spcAft>
-                <a:spcPts val="600"/>
-              </a:spcAft>
-            </a:pPr>
-            <a:r>
-              <a:rPr sz="1200" lang="zh-TW" dirty="0">
+                <a:spcPts val="525"/>
+              </a:spcAft>
+            </a:pPr>
+            <a:r>
+              <a:rPr sz="1050" lang="zh-TW" dirty="0">
                 <a:solidFill>
                   <a:srgbClr val="000000"/>
                 </a:solidFill>
@@ -3381,6 +4382,149 @@
               </a:spcAft>
             </a:pPr>
             <a:r>
+              <a:rPr sz="1200" b="1" lang="zh-TW" dirty="0">
+                <a:solidFill>
+                  <a:srgbClr val="000000"/>
+                </a:solidFill>
+                <a:latin typeface="Arial Unicode MS"/>
+                <a:ea typeface="Arial Unicode MS"/>
+                <a:cs typeface="Arial Unicode MS"/>
+              </a:rPr>
+              <a:t>▍這一張要做什麼</a:t>
+            </a:r>
+            <a:r>
+              <a:rPr sz="1200" lang="zh-TW" dirty="0">
+                <a:solidFill>
+                  <a:srgbClr val="000000"/>
+                </a:solidFill>
+                <a:latin typeface="Arial Unicode MS"/>
+                <a:ea typeface="Arial Unicode MS"/>
+                <a:cs typeface="Arial Unicode MS"/>
+              </a:rPr>
+              <a:t>
+</a:t>
+            </a:r>
+          </a:p>
+          <a:p>
+            <a:pPr algn="l">
+              <a:lnSpc>
+                <a:spcPct val="115000"/>
+              </a:lnSpc>
+              <a:spcAft>
+                <a:spcPts val="600"/>
+              </a:spcAft>
+            </a:pPr>
+            <a:r>
+              <a:rPr sz="1200" lang="zh-TW" dirty="0">
+                <a:solidFill>
+                  <a:srgbClr val="000000"/>
+                </a:solidFill>
+                <a:latin typeface="Arial Unicode MS"/>
+                <a:ea typeface="Arial Unicode MS"/>
+                <a:cs typeface="Arial Unicode MS"/>
+              </a:rPr>
+              <a:t>段落分隔。宣告要把上週的三個滑桿一行一行指在真規格表上。
+</a:t>
+            </a:r>
+          </a:p>
+          <a:p>
+            <a:pPr algn="l">
+              <a:lnSpc>
+                <a:spcPct val="115000"/>
+              </a:lnSpc>
+              <a:spcAft>
+                <a:spcPts val="600"/>
+              </a:spcAft>
+            </a:pPr>
+            <a:r>
+              <a:rPr sz="1200" b="1" lang="zh-TW" dirty="0">
+                <a:solidFill>
+                  <a:srgbClr val="000000"/>
+                </a:solidFill>
+                <a:latin typeface="Arial Unicode MS"/>
+                <a:ea typeface="Arial Unicode MS"/>
+                <a:cs typeface="Arial Unicode MS"/>
+              </a:rPr>
+              <a:t>▍畫面上圈這裡</a:t>
+            </a:r>
+            <a:r>
+              <a:rPr sz="1200" lang="zh-TW" dirty="0">
+                <a:solidFill>
+                  <a:srgbClr val="000000"/>
+                </a:solidFill>
+                <a:latin typeface="Arial Unicode MS"/>
+                <a:ea typeface="Arial Unicode MS"/>
+                <a:cs typeface="Arial Unicode MS"/>
+              </a:rPr>
+              <a:t>
+</a:t>
+            </a:r>
+          </a:p>
+          <a:p>
+            <a:pPr algn="l">
+              <a:lnSpc>
+                <a:spcPct val="115000"/>
+              </a:lnSpc>
+              <a:spcAft>
+                <a:spcPts val="600"/>
+              </a:spcAft>
+            </a:pPr>
+            <a:r>
+              <a:rPr sz="1200" lang="zh-TW" dirty="0">
+                <a:solidFill>
+                  <a:srgbClr val="000000"/>
+                </a:solidFill>
+                <a:latin typeface="Arial Unicode MS"/>
+                <a:ea typeface="Arial Unicode MS"/>
+                <a:cs typeface="Arial Unicode MS"/>
+              </a:rPr>
+              <a:t>不用圈。
+</a:t>
+            </a:r>
+          </a:p>
+          <a:p>
+            <a:pPr algn="l">
+              <a:lnSpc>
+                <a:spcPct val="115000"/>
+              </a:lnSpc>
+              <a:spcAft>
+                <a:spcPts val="600"/>
+              </a:spcAft>
+            </a:pPr>
+            <a:r>
+              <a:rPr sz="1200" b="1" lang="zh-TW" dirty="0">
+                <a:solidFill>
+                  <a:srgbClr val="000000"/>
+                </a:solidFill>
+                <a:latin typeface="Arial Unicode MS"/>
+                <a:ea typeface="Arial Unicode MS"/>
+                <a:cs typeface="Arial Unicode MS"/>
+              </a:rPr>
+              <a:t>▍以下照著唸</a:t>
+            </a:r>
+            <a:r>
+              <a:rPr sz="1200" lang="zh-TW" dirty="0">
+                <a:solidFill>
+                  <a:srgbClr val="000000"/>
+                </a:solidFill>
+                <a:latin typeface="Arial Unicode MS"/>
+                <a:ea typeface="Arial Unicode MS"/>
+                <a:cs typeface="Arial Unicode MS"/>
+              </a:rPr>
+              <a:t>
+</a:t>
+            </a:r>
+          </a:p>
+          <a:p>
+            <a:pPr algn="l">
+              <a:lnSpc>
+                <a:spcPct val="115000"/>
+              </a:lnSpc>
+              <a:spcAft>
+                <a:spcPts val="600"/>
+              </a:spcAft>
+            </a:pPr>
+            <a:r>
               <a:rPr sz="1200" lang="zh-TW" dirty="0">
                 <a:solidFill>
                   <a:srgbClr val="000000"/>
@@ -3498,11 +4642,154 @@
                 <a:spcPct val="115000"/>
               </a:lnSpc>
               <a:spcAft>
-                <a:spcPts val="575"/>
-              </a:spcAft>
-            </a:pPr>
-            <a:r>
-              <a:rPr sz="1150" lang="zh-TW" dirty="0">
+                <a:spcPts val="500"/>
+              </a:spcAft>
+            </a:pPr>
+            <a:r>
+              <a:rPr sz="1000" b="1" lang="zh-TW" dirty="0">
+                <a:solidFill>
+                  <a:srgbClr val="000000"/>
+                </a:solidFill>
+                <a:latin typeface="Arial Unicode MS"/>
+                <a:ea typeface="Arial Unicode MS"/>
+                <a:cs typeface="Arial Unicode MS"/>
+              </a:rPr>
+              <a:t>▍這一張要做什麼</a:t>
+            </a:r>
+            <a:r>
+              <a:rPr sz="1000" lang="zh-TW" dirty="0">
+                <a:solidFill>
+                  <a:srgbClr val="000000"/>
+                </a:solidFill>
+                <a:latin typeface="Arial Unicode MS"/>
+                <a:ea typeface="Arial Unicode MS"/>
+                <a:cs typeface="Arial Unicode MS"/>
+              </a:rPr>
+              <a:t>
+</a:t>
+            </a:r>
+          </a:p>
+          <a:p>
+            <a:pPr algn="l">
+              <a:lnSpc>
+                <a:spcPct val="115000"/>
+              </a:lnSpc>
+              <a:spcAft>
+                <a:spcPts val="500"/>
+              </a:spcAft>
+            </a:pPr>
+            <a:r>
+              <a:rPr sz="1000" lang="zh-TW" dirty="0">
+                <a:solidFill>
+                  <a:srgbClr val="000000"/>
+                </a:solidFill>
+                <a:latin typeface="Arial Unicode MS"/>
+                <a:ea typeface="Arial Unicode MS"/>
+                <a:cs typeface="Arial Unicode MS"/>
+              </a:rPr>
+              <a:t>第一個真型號 OS1-64。重點是它把點平均灑在一整圈。
+</a:t>
+            </a:r>
+          </a:p>
+          <a:p>
+            <a:pPr algn="l">
+              <a:lnSpc>
+                <a:spcPct val="115000"/>
+              </a:lnSpc>
+              <a:spcAft>
+                <a:spcPts val="500"/>
+              </a:spcAft>
+            </a:pPr>
+            <a:r>
+              <a:rPr sz="1000" b="1" lang="zh-TW" dirty="0">
+                <a:solidFill>
+                  <a:srgbClr val="000000"/>
+                </a:solidFill>
+                <a:latin typeface="Arial Unicode MS"/>
+                <a:ea typeface="Arial Unicode MS"/>
+                <a:cs typeface="Arial Unicode MS"/>
+              </a:rPr>
+              <a:t>▍畫面上圈這裡</a:t>
+            </a:r>
+            <a:r>
+              <a:rPr sz="1000" lang="zh-TW" dirty="0">
+                <a:solidFill>
+                  <a:srgbClr val="000000"/>
+                </a:solidFill>
+                <a:latin typeface="Arial Unicode MS"/>
+                <a:ea typeface="Arial Unicode MS"/>
+                <a:cs typeface="Arial Unicode MS"/>
+              </a:rPr>
+              <a:t>
+</a:t>
+            </a:r>
+          </a:p>
+          <a:p>
+            <a:pPr algn="l">
+              <a:lnSpc>
+                <a:spcPct val="115000"/>
+              </a:lnSpc>
+              <a:spcAft>
+                <a:spcPts val="500"/>
+              </a:spcAft>
+            </a:pPr>
+            <a:r>
+              <a:rPr sz="1000" lang="zh-TW" dirty="0">
+                <a:solidFill>
+                  <a:srgbClr val="000000"/>
+                </a:solidFill>
+                <a:latin typeface="Arial Unicode MS"/>
+                <a:ea typeface="Arial Unicode MS"/>
+                <a:cs typeface="Arial Unicode MS"/>
+              </a:rPr>
+              <a:t>圈規格表上的線束數、視野、角解析度三行——那就是上週的三個滑桿。
+</a:t>
+            </a:r>
+          </a:p>
+          <a:p>
+            <a:pPr algn="l">
+              <a:lnSpc>
+                <a:spcPct val="115000"/>
+              </a:lnSpc>
+              <a:spcAft>
+                <a:spcPts val="500"/>
+              </a:spcAft>
+            </a:pPr>
+            <a:r>
+              <a:rPr sz="1000" b="1" lang="zh-TW" dirty="0">
+                <a:solidFill>
+                  <a:srgbClr val="000000"/>
+                </a:solidFill>
+                <a:latin typeface="Arial Unicode MS"/>
+                <a:ea typeface="Arial Unicode MS"/>
+                <a:cs typeface="Arial Unicode MS"/>
+              </a:rPr>
+              <a:t>▍以下照著唸</a:t>
+            </a:r>
+            <a:r>
+              <a:rPr sz="1000" lang="zh-TW" dirty="0">
+                <a:solidFill>
+                  <a:srgbClr val="000000"/>
+                </a:solidFill>
+                <a:latin typeface="Arial Unicode MS"/>
+                <a:ea typeface="Arial Unicode MS"/>
+                <a:cs typeface="Arial Unicode MS"/>
+              </a:rPr>
+              <a:t>
+</a:t>
+            </a:r>
+          </a:p>
+          <a:p>
+            <a:pPr algn="l">
+              <a:lnSpc>
+                <a:spcPct val="115000"/>
+              </a:lnSpc>
+              <a:spcAft>
+                <a:spcPts val="500"/>
+              </a:spcAft>
+            </a:pPr>
+            <a:r>
+              <a:rPr sz="1000" lang="zh-TW" dirty="0">
                 <a:solidFill>
                   <a:srgbClr val="000000"/>
                 </a:solidFill>
@@ -3513,7 +4800,7 @@
               <a:t>請大家在工具上選第一個型號，Ouster OS1-64。這是一顆</a:t>
             </a:r>
             <a:r>
-              <a:rPr sz="1150" b="1" lang="zh-TW" dirty="0">
+              <a:rPr sz="1000" b="1" lang="zh-TW" dirty="0">
                 <a:solidFill>
                   <a:srgbClr val="000000"/>
                 </a:solidFill>
@@ -3524,7 +4811,7 @@
               <a:t>旋轉式</a:t>
             </a:r>
             <a:r>
-              <a:rPr sz="1150" lang="zh-TW" dirty="0">
+              <a:rPr sz="1000" lang="zh-TW" dirty="0">
                 <a:solidFill>
                   <a:srgbClr val="000000"/>
                 </a:solidFill>
@@ -3542,11 +4829,11 @@
                 <a:spcPct val="115000"/>
               </a:lnSpc>
               <a:spcAft>
-                <a:spcPts val="575"/>
-              </a:spcAft>
-            </a:pPr>
-            <a:r>
-              <a:rPr sz="1150" lang="zh-TW" dirty="0">
+                <a:spcPts val="500"/>
+              </a:spcAft>
+            </a:pPr>
+            <a:r>
+              <a:rPr sz="1000" lang="zh-TW" dirty="0">
                 <a:solidFill>
                   <a:srgbClr val="000000"/>
                 </a:solidFill>
@@ -3564,11 +4851,11 @@
                 <a:spcPct val="115000"/>
               </a:lnSpc>
               <a:spcAft>
-                <a:spcPts val="575"/>
-              </a:spcAft>
-            </a:pPr>
-            <a:r>
-              <a:rPr sz="1150" b="1" lang="zh-TW" dirty="0">
+                <a:spcPts val="500"/>
+              </a:spcAft>
+            </a:pPr>
+            <a:r>
+              <a:rPr sz="1000" b="1" lang="zh-TW" dirty="0">
                 <a:solidFill>
                   <a:srgbClr val="000000"/>
                 </a:solidFill>
@@ -3579,7 +4866,7 @@
               <a:t>第一行，Vertical Resolution，垂直解析度。</a:t>
             </a:r>
             <a:r>
-              <a:rPr sz="1150" lang="zh-TW" dirty="0">
+              <a:rPr sz="1000" lang="zh-TW" dirty="0">
                 <a:solidFill>
                   <a:srgbClr val="000000"/>
                 </a:solidFill>
@@ -3590,7 +4877,7 @@
               <a:t>上面寫 32、64、128 channels。Channel 中文叫通道，也叫線束。這就是上禮拜那條</a:t>
             </a:r>
             <a:r>
-              <a:rPr sz="1150" b="1" lang="zh-TW" dirty="0">
+              <a:rPr sz="1000" b="1" lang="zh-TW" dirty="0">
                 <a:solidFill>
                   <a:srgbClr val="000000"/>
                 </a:solidFill>
@@ -3601,7 +4888,7 @@
               <a:t>射線數</a:t>
             </a:r>
             <a:r>
-              <a:rPr sz="1150" lang="zh-TW" dirty="0">
+              <a:rPr sz="1000" lang="zh-TW" dirty="0">
                 <a:solidFill>
                   <a:srgbClr val="000000"/>
                 </a:solidFill>
@@ -3619,11 +4906,11 @@
                 <a:spcPct val="115000"/>
               </a:lnSpc>
               <a:spcAft>
-                <a:spcPts val="575"/>
-              </a:spcAft>
-            </a:pPr>
-            <a:r>
-              <a:rPr sz="1150" b="1" lang="zh-TW" dirty="0">
+                <a:spcPts val="500"/>
+              </a:spcAft>
+            </a:pPr>
+            <a:r>
+              <a:rPr sz="1000" b="1" lang="zh-TW" dirty="0">
                 <a:solidFill>
                   <a:srgbClr val="000000"/>
                 </a:solidFill>
@@ -3634,7 +4921,7 @@
               <a:t>第二行，Field of View，視野。</a:t>
             </a:r>
             <a:r>
-              <a:rPr sz="1150" lang="zh-TW" dirty="0">
+              <a:rPr sz="1000" lang="zh-TW" dirty="0">
                 <a:solidFill>
                   <a:srgbClr val="000000"/>
                 </a:solidFill>
@@ -3652,11 +4939,11 @@
                 <a:spcPct val="115000"/>
               </a:lnSpc>
               <a:spcAft>
-                <a:spcPts val="575"/>
-              </a:spcAft>
-            </a:pPr>
-            <a:r>
-              <a:rPr sz="1150" b="1" lang="zh-TW" dirty="0">
+                <a:spcPts val="500"/>
+              </a:spcAft>
+            </a:pPr>
+            <a:r>
+              <a:rPr sz="1000" b="1" lang="zh-TW" dirty="0">
                 <a:solidFill>
                   <a:srgbClr val="000000"/>
                 </a:solidFill>
@@ -3667,7 +4954,7 @@
               <a:t>第三行，Range，測距。</a:t>
             </a:r>
             <a:r>
-              <a:rPr sz="1150" lang="zh-TW" dirty="0">
+              <a:rPr sz="1000" lang="zh-TW" dirty="0">
                 <a:solidFill>
                   <a:srgbClr val="000000"/>
                 </a:solidFill>
@@ -3685,11 +4972,11 @@
                 <a:spcPct val="115000"/>
               </a:lnSpc>
               <a:spcAft>
-                <a:spcPts val="575"/>
-              </a:spcAft>
-            </a:pPr>
-            <a:r>
-              <a:rPr sz="1150" lang="zh-TW" dirty="0">
+                <a:spcPts val="500"/>
+              </a:spcAft>
+            </a:pPr>
+            <a:r>
+              <a:rPr sz="1000" lang="zh-TW" dirty="0">
                 <a:solidFill>
                   <a:srgbClr val="000000"/>
                 </a:solidFill>
@@ -3707,11 +4994,11 @@
                 <a:spcPct val="115000"/>
               </a:lnSpc>
               <a:spcAft>
-                <a:spcPts val="575"/>
-              </a:spcAft>
-            </a:pPr>
-            <a:r>
-              <a:rPr sz="1150" lang="zh-TW" dirty="0">
+                <a:spcPts val="500"/>
+              </a:spcAft>
+            </a:pPr>
+            <a:r>
+              <a:rPr sz="1000" lang="zh-TW" dirty="0">
                 <a:solidFill>
                   <a:srgbClr val="000000"/>
                 </a:solidFill>
@@ -3722,7 +5009,7 @@
               <a:t>所以上禮拜各位在模擬器上拉來拉去的那三個東西，不是我編出來的遊戲設定，是</a:t>
             </a:r>
             <a:r>
-              <a:rPr sz="1150" b="1" lang="zh-TW" dirty="0">
+              <a:rPr sz="1000" b="1" lang="zh-TW" dirty="0">
                 <a:solidFill>
                   <a:srgbClr val="000000"/>
                 </a:solidFill>
@@ -3733,7 +5020,7 @@
               <a:t>你真的要花錢去買的規格</a:t>
             </a:r>
             <a:r>
-              <a:rPr sz="1150" lang="zh-TW" dirty="0">
+              <a:rPr sz="1000" lang="zh-TW" dirty="0">
                 <a:solidFill>
                   <a:srgbClr val="000000"/>
                 </a:solidFill>
@@ -3751,11 +5038,11 @@
                 <a:spcPct val="115000"/>
               </a:lnSpc>
               <a:spcAft>
-                <a:spcPts val="575"/>
-              </a:spcAft>
-            </a:pPr>
-            <a:r>
-              <a:rPr sz="1150" lang="zh-TW" dirty="0">
+                <a:spcPts val="500"/>
+              </a:spcAft>
+            </a:pPr>
+            <a:r>
+              <a:rPr sz="1000" lang="zh-TW" dirty="0">
                 <a:solidFill>
                   <a:srgbClr val="000000"/>
                 </a:solidFill>
@@ -3766,7 +5053,7 @@
               <a:t>還有一件事現在先記著，等一下第九張我們會回來算：這一行測距寫 90 公尺，但它後面跟了一串英文——</a:t>
             </a:r>
             <a:r>
-              <a:rPr sz="1150" b="1" lang="zh-TW" dirty="0">
+              <a:rPr sz="1000" b="1" lang="zh-TW" dirty="0">
                 <a:solidFill>
                   <a:srgbClr val="000000"/>
                 </a:solidFill>
@@ -3777,7 +5064,7 @@
               <a:t>10% reflectivity</a:t>
             </a:r>
             <a:r>
-              <a:rPr sz="1150" lang="zh-TW" dirty="0">
+              <a:rPr sz="1000" lang="zh-TW" dirty="0">
                 <a:solidFill>
                   <a:srgbClr val="000000"/>
                 </a:solidFill>
@@ -3898,6 +5185,149 @@
               </a:spcAft>
             </a:pPr>
             <a:r>
+              <a:rPr sz="1000" b="1" lang="zh-TW" dirty="0">
+                <a:solidFill>
+                  <a:srgbClr val="000000"/>
+                </a:solidFill>
+                <a:latin typeface="Arial Unicode MS"/>
+                <a:ea typeface="Arial Unicode MS"/>
+                <a:cs typeface="Arial Unicode MS"/>
+              </a:rPr>
+              <a:t>▍這一張要做什麼</a:t>
+            </a:r>
+            <a:r>
+              <a:rPr sz="1000" lang="zh-TW" dirty="0">
+                <a:solidFill>
+                  <a:srgbClr val="000000"/>
+                </a:solidFill>
+                <a:latin typeface="Arial Unicode MS"/>
+                <a:ea typeface="Arial Unicode MS"/>
+                <a:cs typeface="Arial Unicode MS"/>
+              </a:rPr>
+              <a:t>
+</a:t>
+            </a:r>
+          </a:p>
+          <a:p>
+            <a:pPr algn="l">
+              <a:lnSpc>
+                <a:spcPct val="115000"/>
+              </a:lnSpc>
+              <a:spcAft>
+                <a:spcPts val="500"/>
+              </a:spcAft>
+            </a:pPr>
+            <a:r>
+              <a:rPr sz="1000" lang="zh-TW" dirty="0">
+                <a:solidFill>
+                  <a:srgbClr val="000000"/>
+                </a:solidFill>
+                <a:latin typeface="Arial Unicode MS"/>
+                <a:ea typeface="Arial Unicode MS"/>
+                <a:cs typeface="Arial Unicode MS"/>
+              </a:rPr>
+              <a:t>第二個真型號 AT128。同樣是光達，但把點集中在前方 120 度。
+</a:t>
+            </a:r>
+          </a:p>
+          <a:p>
+            <a:pPr algn="l">
+              <a:lnSpc>
+                <a:spcPct val="115000"/>
+              </a:lnSpc>
+              <a:spcAft>
+                <a:spcPts val="500"/>
+              </a:spcAft>
+            </a:pPr>
+            <a:r>
+              <a:rPr sz="1000" b="1" lang="zh-TW" dirty="0">
+                <a:solidFill>
+                  <a:srgbClr val="000000"/>
+                </a:solidFill>
+                <a:latin typeface="Arial Unicode MS"/>
+                <a:ea typeface="Arial Unicode MS"/>
+                <a:cs typeface="Arial Unicode MS"/>
+              </a:rPr>
+              <a:t>▍畫面上圈這裡</a:t>
+            </a:r>
+            <a:r>
+              <a:rPr sz="1000" lang="zh-TW" dirty="0">
+                <a:solidFill>
+                  <a:srgbClr val="000000"/>
+                </a:solidFill>
+                <a:latin typeface="Arial Unicode MS"/>
+                <a:ea typeface="Arial Unicode MS"/>
+                <a:cs typeface="Arial Unicode MS"/>
+              </a:rPr>
+              <a:t>
+</a:t>
+            </a:r>
+          </a:p>
+          <a:p>
+            <a:pPr algn="l">
+              <a:lnSpc>
+                <a:spcPct val="115000"/>
+              </a:lnSpc>
+              <a:spcAft>
+                <a:spcPts val="500"/>
+              </a:spcAft>
+            </a:pPr>
+            <a:r>
+              <a:rPr sz="1000" lang="zh-TW" dirty="0">
+                <a:solidFill>
+                  <a:srgbClr val="000000"/>
+                </a:solidFill>
+                <a:latin typeface="Arial Unicode MS"/>
+                <a:ea typeface="Arial Unicode MS"/>
+                <a:cs typeface="Arial Unicode MS"/>
+              </a:rPr>
+              <a:t>圈視野那一行的 120°，再回頭指上一張 OS1 的 360°，兩個數字對著看。
+</a:t>
+            </a:r>
+          </a:p>
+          <a:p>
+            <a:pPr algn="l">
+              <a:lnSpc>
+                <a:spcPct val="115000"/>
+              </a:lnSpc>
+              <a:spcAft>
+                <a:spcPts val="500"/>
+              </a:spcAft>
+            </a:pPr>
+            <a:r>
+              <a:rPr sz="1000" b="1" lang="zh-TW" dirty="0">
+                <a:solidFill>
+                  <a:srgbClr val="000000"/>
+                </a:solidFill>
+                <a:latin typeface="Arial Unicode MS"/>
+                <a:ea typeface="Arial Unicode MS"/>
+                <a:cs typeface="Arial Unicode MS"/>
+              </a:rPr>
+              <a:t>▍以下照著唸</a:t>
+            </a:r>
+            <a:r>
+              <a:rPr sz="1000" lang="zh-TW" dirty="0">
+                <a:solidFill>
+                  <a:srgbClr val="000000"/>
+                </a:solidFill>
+                <a:latin typeface="Arial Unicode MS"/>
+                <a:ea typeface="Arial Unicode MS"/>
+                <a:cs typeface="Arial Unicode MS"/>
+              </a:rPr>
+              <a:t>
+</a:t>
+            </a:r>
+          </a:p>
+          <a:p>
+            <a:pPr algn="l">
+              <a:lnSpc>
+                <a:spcPct val="115000"/>
+              </a:lnSpc>
+              <a:spcAft>
+                <a:spcPts val="500"/>
+              </a:spcAft>
+            </a:pPr>
+            <a:r>
               <a:rPr sz="1000" lang="zh-TW" dirty="0">
                 <a:solidFill>
                   <a:srgbClr val="000000"/>
@@ -4345,11 +5775,154 @@
                 <a:spcPct val="115000"/>
               </a:lnSpc>
               <a:spcAft>
-                <a:spcPts val="575"/>
-              </a:spcAft>
-            </a:pPr>
-            <a:r>
-              <a:rPr sz="1150" lang="zh-TW" dirty="0">
+                <a:spcPts val="500"/>
+              </a:spcAft>
+            </a:pPr>
+            <a:r>
+              <a:rPr sz="1000" b="1" lang="zh-TW" dirty="0">
+                <a:solidFill>
+                  <a:srgbClr val="000000"/>
+                </a:solidFill>
+                <a:latin typeface="Arial Unicode MS"/>
+                <a:ea typeface="Arial Unicode MS"/>
+                <a:cs typeface="Arial Unicode MS"/>
+              </a:rPr>
+              <a:t>▍這一張要做什麼</a:t>
+            </a:r>
+            <a:r>
+              <a:rPr sz="1000" lang="zh-TW" dirty="0">
+                <a:solidFill>
+                  <a:srgbClr val="000000"/>
+                </a:solidFill>
+                <a:latin typeface="Arial Unicode MS"/>
+                <a:ea typeface="Arial Unicode MS"/>
+                <a:cs typeface="Arial Unicode MS"/>
+              </a:rPr>
+              <a:t>
+</a:t>
+            </a:r>
+          </a:p>
+          <a:p>
+            <a:pPr algn="l">
+              <a:lnSpc>
+                <a:spcPct val="115000"/>
+              </a:lnSpc>
+              <a:spcAft>
+                <a:spcPts val="500"/>
+              </a:spcAft>
+            </a:pPr>
+            <a:r>
+              <a:rPr sz="1000" lang="zh-TW" dirty="0">
+                <a:solidFill>
+                  <a:srgbClr val="000000"/>
+                </a:solidFill>
+                <a:latin typeface="Arial Unicode MS"/>
+                <a:ea typeface="Arial Unicode MS"/>
+                <a:cs typeface="Arial Unicode MS"/>
+              </a:rPr>
+              <a:t>把兩顆放在一起比，讓學生看到「同樣的錢，兩種花法」。
+</a:t>
+            </a:r>
+          </a:p>
+          <a:p>
+            <a:pPr algn="l">
+              <a:lnSpc>
+                <a:spcPct val="115000"/>
+              </a:lnSpc>
+              <a:spcAft>
+                <a:spcPts val="500"/>
+              </a:spcAft>
+            </a:pPr>
+            <a:r>
+              <a:rPr sz="1000" b="1" lang="zh-TW" dirty="0">
+                <a:solidFill>
+                  <a:srgbClr val="000000"/>
+                </a:solidFill>
+                <a:latin typeface="Arial Unicode MS"/>
+                <a:ea typeface="Arial Unicode MS"/>
+                <a:cs typeface="Arial Unicode MS"/>
+              </a:rPr>
+              <a:t>▍畫面上圈這裡</a:t>
+            </a:r>
+            <a:r>
+              <a:rPr sz="1000" lang="zh-TW" dirty="0">
+                <a:solidFill>
+                  <a:srgbClr val="000000"/>
+                </a:solidFill>
+                <a:latin typeface="Arial Unicode MS"/>
+                <a:ea typeface="Arial Unicode MS"/>
+                <a:cs typeface="Arial Unicode MS"/>
+              </a:rPr>
+              <a:t>
+</a:t>
+            </a:r>
+          </a:p>
+          <a:p>
+            <a:pPr algn="l">
+              <a:lnSpc>
+                <a:spcPct val="115000"/>
+              </a:lnSpc>
+              <a:spcAft>
+                <a:spcPts val="500"/>
+              </a:spcAft>
+            </a:pPr>
+            <a:r>
+              <a:rPr sz="1000" lang="zh-TW" dirty="0">
+                <a:solidFill>
+                  <a:srgbClr val="000000"/>
+                </a:solidFill>
+                <a:latin typeface="Arial Unicode MS"/>
+                <a:ea typeface="Arial Unicode MS"/>
+                <a:cs typeface="Arial Unicode MS"/>
+              </a:rPr>
+              <a:t>一列一列圈。重點在角解析度那一列——集中的那顆密很多。
+</a:t>
+            </a:r>
+          </a:p>
+          <a:p>
+            <a:pPr algn="l">
+              <a:lnSpc>
+                <a:spcPct val="115000"/>
+              </a:lnSpc>
+              <a:spcAft>
+                <a:spcPts val="500"/>
+              </a:spcAft>
+            </a:pPr>
+            <a:r>
+              <a:rPr sz="1000" b="1" lang="zh-TW" dirty="0">
+                <a:solidFill>
+                  <a:srgbClr val="000000"/>
+                </a:solidFill>
+                <a:latin typeface="Arial Unicode MS"/>
+                <a:ea typeface="Arial Unicode MS"/>
+                <a:cs typeface="Arial Unicode MS"/>
+              </a:rPr>
+              <a:t>▍以下照著唸</a:t>
+            </a:r>
+            <a:r>
+              <a:rPr sz="1000" lang="zh-TW" dirty="0">
+                <a:solidFill>
+                  <a:srgbClr val="000000"/>
+                </a:solidFill>
+                <a:latin typeface="Arial Unicode MS"/>
+                <a:ea typeface="Arial Unicode MS"/>
+                <a:cs typeface="Arial Unicode MS"/>
+              </a:rPr>
+              <a:t>
+</a:t>
+            </a:r>
+          </a:p>
+          <a:p>
+            <a:pPr algn="l">
+              <a:lnSpc>
+                <a:spcPct val="115000"/>
+              </a:lnSpc>
+              <a:spcAft>
+                <a:spcPts val="500"/>
+              </a:spcAft>
+            </a:pPr>
+            <a:r>
+              <a:rPr sz="1000" lang="zh-TW" dirty="0">
                 <a:solidFill>
                   <a:srgbClr val="000000"/>
                 </a:solidFill>
@@ -4360,7 +5933,7 @@
               <a:t>我們把兩顆並排比一次。前四行都是規格表上抄下來的，最後一行是</a:t>
             </a:r>
             <a:r>
-              <a:rPr sz="1150" b="1" lang="zh-TW" dirty="0">
+              <a:rPr sz="1000" b="1" lang="zh-TW" dirty="0">
                 <a:solidFill>
                   <a:srgbClr val="000000"/>
                 </a:solidFill>
@@ -4371,7 +5944,7 @@
               <a:t>我們自己算的</a:t>
             </a:r>
             <a:r>
-              <a:rPr sz="1150" lang="zh-TW" dirty="0">
+              <a:rPr sz="1000" lang="zh-TW" dirty="0">
                 <a:solidFill>
                   <a:srgbClr val="000000"/>
                 </a:solidFill>
@@ -4389,11 +5962,11 @@
                 <a:spcPct val="115000"/>
               </a:lnSpc>
               <a:spcAft>
-                <a:spcPts val="575"/>
-              </a:spcAft>
-            </a:pPr>
-            <a:r>
-              <a:rPr sz="1150" lang="zh-TW" dirty="0">
+                <a:spcPts val="500"/>
+              </a:spcAft>
+            </a:pPr>
+            <a:r>
+              <a:rPr sz="1000" lang="zh-TW" dirty="0">
                 <a:solidFill>
                   <a:srgbClr val="000000"/>
                 </a:solidFill>
@@ -4411,11 +5984,11 @@
                 <a:spcPct val="115000"/>
               </a:lnSpc>
               <a:spcAft>
-                <a:spcPts val="575"/>
-              </a:spcAft>
-            </a:pPr>
-            <a:r>
-              <a:rPr sz="1150" lang="zh-TW" dirty="0">
+                <a:spcPts val="500"/>
+              </a:spcAft>
+            </a:pPr>
+            <a:r>
+              <a:rPr sz="1000" lang="zh-TW" dirty="0">
                 <a:solidFill>
                   <a:srgbClr val="000000"/>
                 </a:solidFill>
@@ -4426,7 +5999,7 @@
               <a:t>再來是水平角解析度，這裡要算一下。OS1 的規格表沒有直接寫角度，它寫的是每一圈有 1024 個點。所以三百六十度除以一千零二十四，等於</a:t>
             </a:r>
             <a:r>
-              <a:rPr sz="1150" b="1" lang="zh-TW" dirty="0">
+              <a:rPr sz="1000" b="1" lang="zh-TW" dirty="0">
                 <a:solidFill>
                   <a:srgbClr val="000000"/>
                 </a:solidFill>
@@ -4437,7 +6010,7 @@
               <a:t>零點三五度</a:t>
             </a:r>
             <a:r>
-              <a:rPr sz="1150" lang="zh-TW" dirty="0">
+              <a:rPr sz="1000" lang="zh-TW" dirty="0">
                 <a:solidFill>
                   <a:srgbClr val="000000"/>
                 </a:solidFill>
@@ -4455,11 +6028,11 @@
                 <a:spcPct val="115000"/>
               </a:lnSpc>
               <a:spcAft>
-                <a:spcPts val="575"/>
-              </a:spcAft>
-            </a:pPr>
-            <a:r>
-              <a:rPr sz="1150" lang="zh-TW" dirty="0">
+                <a:spcPts val="500"/>
+              </a:spcAft>
+            </a:pPr>
+            <a:r>
+              <a:rPr sz="1000" lang="zh-TW" dirty="0">
                 <a:solidFill>
                   <a:srgbClr val="000000"/>
                 </a:solidFill>
@@ -4477,11 +6050,11 @@
                 <a:spcPct val="115000"/>
               </a:lnSpc>
               <a:spcAft>
-                <a:spcPts val="575"/>
-              </a:spcAft>
-            </a:pPr>
-            <a:r>
-              <a:rPr sz="1150" lang="zh-TW" dirty="0">
+                <a:spcPts val="500"/>
+              </a:spcAft>
+            </a:pPr>
+            <a:r>
+              <a:rPr sz="1000" lang="zh-TW" dirty="0">
                 <a:solidFill>
                   <a:srgbClr val="000000"/>
                 </a:solidFill>
@@ -4492,7 +6065,7 @@
               <a:t>好，現在看最後一行，這一行規格表上沒有，是我們用上面那些數字算出來的：</a:t>
             </a:r>
             <a:r>
-              <a:rPr sz="1150" b="1" lang="zh-TW" dirty="0">
+              <a:rPr sz="1000" b="1" lang="zh-TW" dirty="0">
                 <a:solidFill>
                   <a:srgbClr val="000000"/>
                 </a:solidFill>
@@ -4503,7 +6076,7 @@
               <a:t>同樣一個人站在四十公尺，OS1 身上有九個點，AT128 有一百二十一個點。</a:t>
             </a:r>
             <a:r>
-              <a:rPr sz="1150" lang="zh-TW" dirty="0">
+              <a:rPr sz="1000" lang="zh-TW" dirty="0">
                 <a:solidFill>
                   <a:srgbClr val="000000"/>
                 </a:solidFill>
@@ -4521,11 +6094,11 @@
                 <a:spcPct val="115000"/>
               </a:lnSpc>
               <a:spcAft>
-                <a:spcPts val="575"/>
-              </a:spcAft>
-            </a:pPr>
-            <a:r>
-              <a:rPr sz="1150" lang="zh-TW" dirty="0">
+                <a:spcPts val="500"/>
+              </a:spcAft>
+            </a:pPr>
+            <a:r>
+              <a:rPr sz="1000" lang="zh-TW" dirty="0">
                 <a:solidFill>
                   <a:srgbClr val="000000"/>
                 </a:solidFill>
@@ -4543,11 +6116,11 @@
                 <a:spcPct val="115000"/>
               </a:lnSpc>
               <a:spcAft>
-                <a:spcPts val="575"/>
-              </a:spcAft>
-            </a:pPr>
-            <a:r>
-              <a:rPr sz="1150" lang="zh-TW" dirty="0">
+                <a:spcPts val="500"/>
+              </a:spcAft>
+            </a:pPr>
+            <a:r>
+              <a:rPr sz="1000" lang="zh-TW" dirty="0">
                 <a:solidFill>
                   <a:srgbClr val="000000"/>
                 </a:solidFill>
@@ -4558,7 +6131,7 @@
               <a:t>這是今天第一個重要的觀念：</a:t>
             </a:r>
             <a:r>
-              <a:rPr sz="1150" b="1" lang="zh-TW" dirty="0">
+              <a:rPr sz="1000" b="1" lang="zh-TW" dirty="0">
                 <a:solidFill>
                   <a:srgbClr val="000000"/>
                 </a:solidFill>
@@ -4569,7 +6142,7 @@
               <a:t>規格表上的數字要換算成「我關心的那個場景會怎樣」，才有意義。</a:t>
             </a:r>
             <a:r>
-              <a:rPr sz="1150" lang="zh-TW" dirty="0">
+              <a:rPr sz="1000" lang="zh-TW" dirty="0">
                 <a:solidFill>
                   <a:srgbClr val="000000"/>
                 </a:solidFill>
@@ -4587,11 +6160,11 @@
                 <a:spcPct val="115000"/>
               </a:lnSpc>
               <a:spcAft>
-                <a:spcPts val="575"/>
-              </a:spcAft>
-            </a:pPr>
-            <a:r>
-              <a:rPr sz="1150" lang="zh-TW" dirty="0">
+                <a:spcPts val="500"/>
+              </a:spcAft>
+            </a:pPr>
+            <a:r>
+              <a:rPr sz="1000" lang="zh-TW" dirty="0">
                 <a:solidFill>
                   <a:srgbClr val="000000"/>
                 </a:solidFill>
@@ -4708,11 +6281,154 @@
                 <a:spcPct val="115000"/>
               </a:lnSpc>
               <a:spcAft>
-                <a:spcPts val="525"/>
-              </a:spcAft>
-            </a:pPr>
-            <a:r>
-              <a:rPr sz="1050" lang="zh-TW" dirty="0">
+                <a:spcPts val="500"/>
+              </a:spcAft>
+            </a:pPr>
+            <a:r>
+              <a:rPr sz="1000" b="1" lang="zh-TW" dirty="0">
+                <a:solidFill>
+                  <a:srgbClr val="000000"/>
+                </a:solidFill>
+                <a:latin typeface="Arial Unicode MS"/>
+                <a:ea typeface="Arial Unicode MS"/>
+                <a:cs typeface="Arial Unicode MS"/>
+              </a:rPr>
+              <a:t>▍這一張要做什麼</a:t>
+            </a:r>
+            <a:r>
+              <a:rPr sz="1000" lang="zh-TW" dirty="0">
+                <a:solidFill>
+                  <a:srgbClr val="000000"/>
+                </a:solidFill>
+                <a:latin typeface="Arial Unicode MS"/>
+                <a:ea typeface="Arial Unicode MS"/>
+                <a:cs typeface="Arial Unicode MS"/>
+              </a:rPr>
+              <a:t>
+</a:t>
+            </a:r>
+          </a:p>
+          <a:p>
+            <a:pPr algn="l">
+              <a:lnSpc>
+                <a:spcPct val="115000"/>
+              </a:lnSpc>
+              <a:spcAft>
+                <a:spcPts val="500"/>
+              </a:spcAft>
+            </a:pPr>
+            <a:r>
+              <a:rPr sz="1000" lang="zh-TW" dirty="0">
+                <a:solidFill>
+                  <a:srgbClr val="000000"/>
+                </a:solidFill>
+                <a:latin typeface="Arial Unicode MS"/>
+                <a:ea typeface="Arial Unicode MS"/>
+                <a:cs typeface="Arial Unicode MS"/>
+              </a:rPr>
+              <a:t>補上第四個規格：更新率。前三個是「看得多清楚」，這個是「多久看一次」。
+</a:t>
+            </a:r>
+          </a:p>
+          <a:p>
+            <a:pPr algn="l">
+              <a:lnSpc>
+                <a:spcPct val="115000"/>
+              </a:lnSpc>
+              <a:spcAft>
+                <a:spcPts val="500"/>
+              </a:spcAft>
+            </a:pPr>
+            <a:r>
+              <a:rPr sz="1000" b="1" lang="zh-TW" dirty="0">
+                <a:solidFill>
+                  <a:srgbClr val="000000"/>
+                </a:solidFill>
+                <a:latin typeface="Arial Unicode MS"/>
+                <a:ea typeface="Arial Unicode MS"/>
+                <a:cs typeface="Arial Unicode MS"/>
+              </a:rPr>
+              <a:t>▍畫面上圈這裡</a:t>
+            </a:r>
+            <a:r>
+              <a:rPr sz="1000" lang="zh-TW" dirty="0">
+                <a:solidFill>
+                  <a:srgbClr val="000000"/>
+                </a:solidFill>
+                <a:latin typeface="Arial Unicode MS"/>
+                <a:ea typeface="Arial Unicode MS"/>
+                <a:cs typeface="Arial Unicode MS"/>
+              </a:rPr>
+              <a:t>
+</a:t>
+            </a:r>
+          </a:p>
+          <a:p>
+            <a:pPr algn="l">
+              <a:lnSpc>
+                <a:spcPct val="115000"/>
+              </a:lnSpc>
+              <a:spcAft>
+                <a:spcPts val="500"/>
+              </a:spcAft>
+            </a:pPr>
+            <a:r>
+              <a:rPr sz="1000" lang="zh-TW" dirty="0">
+                <a:solidFill>
+                  <a:srgbClr val="000000"/>
+                </a:solidFill>
+                <a:latin typeface="Arial Unicode MS"/>
+                <a:ea typeface="Arial Unicode MS"/>
+                <a:cs typeface="Arial Unicode MS"/>
+              </a:rPr>
+              <a:t>圈主標的「一秒鐘看幾次」，再圈下方換算出來的移動距離。
+</a:t>
+            </a:r>
+          </a:p>
+          <a:p>
+            <a:pPr algn="l">
+              <a:lnSpc>
+                <a:spcPct val="115000"/>
+              </a:lnSpc>
+              <a:spcAft>
+                <a:spcPts val="500"/>
+              </a:spcAft>
+            </a:pPr>
+            <a:r>
+              <a:rPr sz="1000" b="1" lang="zh-TW" dirty="0">
+                <a:solidFill>
+                  <a:srgbClr val="000000"/>
+                </a:solidFill>
+                <a:latin typeface="Arial Unicode MS"/>
+                <a:ea typeface="Arial Unicode MS"/>
+                <a:cs typeface="Arial Unicode MS"/>
+              </a:rPr>
+              <a:t>▍以下照著唸</a:t>
+            </a:r>
+            <a:r>
+              <a:rPr sz="1000" lang="zh-TW" dirty="0">
+                <a:solidFill>
+                  <a:srgbClr val="000000"/>
+                </a:solidFill>
+                <a:latin typeface="Arial Unicode MS"/>
+                <a:ea typeface="Arial Unicode MS"/>
+                <a:cs typeface="Arial Unicode MS"/>
+              </a:rPr>
+              <a:t>
+</a:t>
+            </a:r>
+          </a:p>
+          <a:p>
+            <a:pPr algn="l">
+              <a:lnSpc>
+                <a:spcPct val="115000"/>
+              </a:lnSpc>
+              <a:spcAft>
+                <a:spcPts val="500"/>
+              </a:spcAft>
+            </a:pPr>
+            <a:r>
+              <a:rPr sz="1000" lang="zh-TW" dirty="0">
                 <a:solidFill>
                   <a:srgbClr val="000000"/>
                 </a:solidFill>
@@ -4730,11 +6446,11 @@
                 <a:spcPct val="115000"/>
               </a:lnSpc>
               <a:spcAft>
-                <a:spcPts val="525"/>
-              </a:spcAft>
-            </a:pPr>
-            <a:r>
-              <a:rPr sz="1050" lang="zh-TW" dirty="0">
+                <a:spcPts val="500"/>
+              </a:spcAft>
+            </a:pPr>
+            <a:r>
+              <a:rPr sz="1000" lang="zh-TW" dirty="0">
                 <a:solidFill>
                   <a:srgbClr val="000000"/>
                 </a:solidFill>
@@ -4745,7 +6461,7 @@
               <a:t>規格表上寫 </a:t>
             </a:r>
             <a:r>
-              <a:rPr sz="1050" b="1" lang="zh-TW" dirty="0">
+              <a:rPr sz="1000" b="1" lang="zh-TW" dirty="0">
                 <a:solidFill>
                   <a:srgbClr val="000000"/>
                 </a:solidFill>
@@ -4756,7 +6472,7 @@
               <a:t>Rotation Rate，10 or 20 Hz</a:t>
             </a:r>
             <a:r>
-              <a:rPr sz="1050" lang="zh-TW" dirty="0">
+              <a:rPr sz="1000" lang="zh-TW" dirty="0">
                 <a:solidFill>
                   <a:srgbClr val="000000"/>
                 </a:solidFill>
@@ -4774,11 +6490,11 @@
                 <a:spcPct val="115000"/>
               </a:lnSpc>
               <a:spcAft>
-                <a:spcPts val="525"/>
-              </a:spcAft>
-            </a:pPr>
-            <a:r>
-              <a:rPr sz="1050" lang="zh-TW" dirty="0">
+                <a:spcPts val="500"/>
+              </a:spcAft>
+            </a:pPr>
+            <a:r>
+              <a:rPr sz="1000" lang="zh-TW" dirty="0">
                 <a:solidFill>
                   <a:srgbClr val="000000"/>
                 </a:solidFill>
@@ -4789,7 +6505,7 @@
               <a:t>十赫茲就是一秒鐘轉十圈，也就是</a:t>
             </a:r>
             <a:r>
-              <a:rPr sz="1050" b="1" lang="zh-TW" dirty="0">
+              <a:rPr sz="1000" b="1" lang="zh-TW" dirty="0">
                 <a:solidFill>
                   <a:srgbClr val="000000"/>
                 </a:solidFill>
@@ -4800,7 +6516,7 @@
               <a:t>每一百毫秒給你一張畫面</a:t>
             </a:r>
             <a:r>
-              <a:rPr sz="1050" lang="zh-TW" dirty="0">
+              <a:rPr sz="1000" lang="zh-TW" dirty="0">
                 <a:solidFill>
                   <a:srgbClr val="000000"/>
                 </a:solidFill>
@@ -4818,11 +6534,11 @@
                 <a:spcPct val="115000"/>
               </a:lnSpc>
               <a:spcAft>
-                <a:spcPts val="525"/>
-              </a:spcAft>
-            </a:pPr>
-            <a:r>
-              <a:rPr sz="1050" lang="zh-TW" dirty="0">
+                <a:spcPts val="500"/>
+              </a:spcAft>
+            </a:pPr>
+            <a:r>
+              <a:rPr sz="1000" lang="zh-TW" dirty="0">
                 <a:solidFill>
                   <a:srgbClr val="000000"/>
                 </a:solidFill>
@@ -4840,11 +6556,11 @@
                 <a:spcPct val="115000"/>
               </a:lnSpc>
               <a:spcAft>
-                <a:spcPts val="525"/>
-              </a:spcAft>
-            </a:pPr>
-            <a:r>
-              <a:rPr sz="1050" lang="zh-TW" dirty="0">
+                <a:spcPts val="500"/>
+              </a:spcAft>
+            </a:pPr>
+            <a:r>
+              <a:rPr sz="1000" lang="zh-TW" dirty="0">
                 <a:solidFill>
                   <a:srgbClr val="000000"/>
                 </a:solidFill>
@@ -4855,7 +6571,7 @@
               <a:t>時速四十公里，換成每秒是十一點一公尺。一百毫秒就是零點一秒，所以在兩張畫面之間，車子已經往前跑了</a:t>
             </a:r>
             <a:r>
-              <a:rPr sz="1050" b="1" lang="zh-TW" dirty="0">
+              <a:rPr sz="1000" b="1" lang="zh-TW" dirty="0">
                 <a:solidFill>
                   <a:srgbClr val="000000"/>
                 </a:solidFill>
@@ -4866,7 +6582,7 @@
               <a:t>一點一公尺</a:t>
             </a:r>
             <a:r>
-              <a:rPr sz="1050" lang="zh-TW" dirty="0">
+              <a:rPr sz="1000" lang="zh-TW" dirty="0">
                 <a:solidFill>
                   <a:srgbClr val="000000"/>
                 </a:solidFill>
@@ -4884,11 +6600,11 @@
                 <a:spcPct val="115000"/>
               </a:lnSpc>
               <a:spcAft>
-                <a:spcPts val="525"/>
-              </a:spcAft>
-            </a:pPr>
-            <a:r>
-              <a:rPr sz="1050" lang="zh-TW" dirty="0">
+                <a:spcPts val="500"/>
+              </a:spcAft>
+            </a:pPr>
+            <a:r>
+              <a:rPr sz="1000" lang="zh-TW" dirty="0">
                 <a:solidFill>
                   <a:srgbClr val="000000"/>
                 </a:solidFill>
@@ -4906,11 +6622,11 @@
                 <a:spcPct val="115000"/>
               </a:lnSpc>
               <a:spcAft>
-                <a:spcPts val="525"/>
-              </a:spcAft>
-            </a:pPr>
-            <a:r>
-              <a:rPr sz="1050" lang="zh-TW" dirty="0">
+                <a:spcPts val="500"/>
+              </a:spcAft>
+            </a:pPr>
+            <a:r>
+              <a:rPr sz="1000" lang="zh-TW" dirty="0">
                 <a:solidFill>
                   <a:srgbClr val="000000"/>
                 </a:solidFill>
@@ -4921,7 +6637,7 @@
               <a:t>換到高速公路更可怕。時速一百，每秒二十七點八公尺，零點一秒就是</a:t>
             </a:r>
             <a:r>
-              <a:rPr sz="1050" b="1" lang="zh-TW" dirty="0">
+              <a:rPr sz="1000" b="1" lang="zh-TW" dirty="0">
                 <a:solidFill>
                   <a:srgbClr val="000000"/>
                 </a:solidFill>
@@ -4932,7 +6648,7 @@
               <a:t>兩點八公尺</a:t>
             </a:r>
             <a:r>
-              <a:rPr sz="1050" lang="zh-TW" dirty="0">
+              <a:rPr sz="1000" lang="zh-TW" dirty="0">
                 <a:solidFill>
                   <a:srgbClr val="000000"/>
                 </a:solidFill>
@@ -4950,11 +6666,11 @@
                 <a:spcPct val="115000"/>
               </a:lnSpc>
               <a:spcAft>
-                <a:spcPts val="525"/>
-              </a:spcAft>
-            </a:pPr>
-            <a:r>
-              <a:rPr sz="1050" lang="zh-TW" dirty="0">
+                <a:spcPts val="500"/>
+              </a:spcAft>
+            </a:pPr>
+            <a:r>
+              <a:rPr sz="1000" lang="zh-TW" dirty="0">
                 <a:solidFill>
                   <a:srgbClr val="000000"/>
                 </a:solidFill>
@@ -4965,7 +6681,7 @@
               <a:t>所以更新率這一行，講的是</a:t>
             </a:r>
             <a:r>
-              <a:rPr sz="1050" b="1" lang="zh-TW" dirty="0">
+              <a:rPr sz="1000" b="1" lang="zh-TW" dirty="0">
                 <a:solidFill>
                   <a:srgbClr val="000000"/>
                 </a:solidFill>
@@ -4976,7 +6692,7 @@
               <a:t>你晚多久才知道</a:t>
             </a:r>
             <a:r>
-              <a:rPr sz="1050" lang="zh-TW" dirty="0">
+              <a:rPr sz="1000" lang="zh-TW" dirty="0">
                 <a:solidFill>
                   <a:srgbClr val="000000"/>
                 </a:solidFill>
@@ -4994,11 +6710,11 @@
                 <a:spcPct val="115000"/>
               </a:lnSpc>
               <a:spcAft>
-                <a:spcPts val="525"/>
-              </a:spcAft>
-            </a:pPr>
-            <a:r>
-              <a:rPr sz="1050" lang="zh-TW" dirty="0">
+                <a:spcPts val="500"/>
+              </a:spcAft>
+            </a:pPr>
+            <a:r>
+              <a:rPr sz="1000" lang="zh-TW" dirty="0">
                 <a:solidFill>
                   <a:srgbClr val="000000"/>
                 </a:solidFill>
@@ -5016,11 +6732,11 @@
                 <a:spcPct val="115000"/>
               </a:lnSpc>
               <a:spcAft>
-                <a:spcPts val="525"/>
-              </a:spcAft>
-            </a:pPr>
-            <a:r>
-              <a:rPr sz="1050" b="1" lang="zh-TW" dirty="0">
+                <a:spcPts val="500"/>
+              </a:spcAft>
+            </a:pPr>
+            <a:r>
+              <a:rPr sz="1000" b="1" lang="zh-TW" dirty="0">
                 <a:solidFill>
                   <a:srgbClr val="000000"/>
                 </a:solidFill>
@@ -5031,7 +6747,7 @@
               <a:t>又是一個交換。</a:t>
             </a:r>
             <a:r>
-              <a:rPr sz="1050" lang="zh-TW" dirty="0">
+              <a:rPr sz="1000" lang="zh-TW" dirty="0">
                 <a:solidFill>
                   <a:srgbClr val="000000"/>
                 </a:solidFill>
@@ -5049,11 +6765,11 @@
                 <a:spcPct val="115000"/>
               </a:lnSpc>
               <a:spcAft>
-                <a:spcPts val="525"/>
-              </a:spcAft>
-            </a:pPr>
-            <a:r>
-              <a:rPr sz="1050" lang="zh-TW" dirty="0">
+                <a:spcPts val="500"/>
+              </a:spcAft>
+            </a:pPr>
+            <a:r>
+              <a:rPr sz="1000" lang="zh-TW" dirty="0">
                 <a:solidFill>
                   <a:srgbClr val="000000"/>
                 </a:solidFill>
@@ -5174,6 +6890,149 @@
               </a:spcAft>
             </a:pPr>
             <a:r>
+              <a:rPr sz="1200" b="1" lang="zh-TW" dirty="0">
+                <a:solidFill>
+                  <a:srgbClr val="000000"/>
+                </a:solidFill>
+                <a:latin typeface="Arial Unicode MS"/>
+                <a:ea typeface="Arial Unicode MS"/>
+                <a:cs typeface="Arial Unicode MS"/>
+              </a:rPr>
+              <a:t>▍這一張要做什麼</a:t>
+            </a:r>
+            <a:r>
+              <a:rPr sz="1200" lang="zh-TW" dirty="0">
+                <a:solidFill>
+                  <a:srgbClr val="000000"/>
+                </a:solidFill>
+                <a:latin typeface="Arial Unicode MS"/>
+                <a:ea typeface="Arial Unicode MS"/>
+                <a:cs typeface="Arial Unicode MS"/>
+              </a:rPr>
+              <a:t>
+</a:t>
+            </a:r>
+          </a:p>
+          <a:p>
+            <a:pPr algn="l">
+              <a:lnSpc>
+                <a:spcPct val="115000"/>
+              </a:lnSpc>
+              <a:spcAft>
+                <a:spcPts val="600"/>
+              </a:spcAft>
+            </a:pPr>
+            <a:r>
+              <a:rPr sz="1200" lang="zh-TW" dirty="0">
+                <a:solidFill>
+                  <a:srgbClr val="000000"/>
+                </a:solidFill>
+                <a:latin typeface="Arial Unicode MS"/>
+                <a:ea typeface="Arial Unicode MS"/>
+                <a:cs typeface="Arial Unicode MS"/>
+              </a:rPr>
+              <a:t>段落分隔。丟出今天最重要的一題：相機的規格表上為什麼沒有視野。
+</a:t>
+            </a:r>
+          </a:p>
+          <a:p>
+            <a:pPr algn="l">
+              <a:lnSpc>
+                <a:spcPct val="115000"/>
+              </a:lnSpc>
+              <a:spcAft>
+                <a:spcPts val="600"/>
+              </a:spcAft>
+            </a:pPr>
+            <a:r>
+              <a:rPr sz="1200" b="1" lang="zh-TW" dirty="0">
+                <a:solidFill>
+                  <a:srgbClr val="000000"/>
+                </a:solidFill>
+                <a:latin typeface="Arial Unicode MS"/>
+                <a:ea typeface="Arial Unicode MS"/>
+                <a:cs typeface="Arial Unicode MS"/>
+              </a:rPr>
+              <a:t>▍畫面上圈這裡</a:t>
+            </a:r>
+            <a:r>
+              <a:rPr sz="1200" lang="zh-TW" dirty="0">
+                <a:solidFill>
+                  <a:srgbClr val="000000"/>
+                </a:solidFill>
+                <a:latin typeface="Arial Unicode MS"/>
+                <a:ea typeface="Arial Unicode MS"/>
+                <a:cs typeface="Arial Unicode MS"/>
+              </a:rPr>
+              <a:t>
+</a:t>
+            </a:r>
+          </a:p>
+          <a:p>
+            <a:pPr algn="l">
+              <a:lnSpc>
+                <a:spcPct val="115000"/>
+              </a:lnSpc>
+              <a:spcAft>
+                <a:spcPts val="600"/>
+              </a:spcAft>
+            </a:pPr>
+            <a:r>
+              <a:rPr sz="1200" lang="zh-TW" dirty="0">
+                <a:solidFill>
+                  <a:srgbClr val="000000"/>
+                </a:solidFill>
+                <a:latin typeface="Arial Unicode MS"/>
+                <a:ea typeface="Arial Unicode MS"/>
+                <a:cs typeface="Arial Unicode MS"/>
+              </a:rPr>
+              <a:t>不用圈。先讓他們自己翻工具找，找不到才翻下一頁。
+</a:t>
+            </a:r>
+          </a:p>
+          <a:p>
+            <a:pPr algn="l">
+              <a:lnSpc>
+                <a:spcPct val="115000"/>
+              </a:lnSpc>
+              <a:spcAft>
+                <a:spcPts val="600"/>
+              </a:spcAft>
+            </a:pPr>
+            <a:r>
+              <a:rPr sz="1200" b="1" lang="zh-TW" dirty="0">
+                <a:solidFill>
+                  <a:srgbClr val="000000"/>
+                </a:solidFill>
+                <a:latin typeface="Arial Unicode MS"/>
+                <a:ea typeface="Arial Unicode MS"/>
+                <a:cs typeface="Arial Unicode MS"/>
+              </a:rPr>
+              <a:t>▍以下照著唸</a:t>
+            </a:r>
+            <a:r>
+              <a:rPr sz="1200" lang="zh-TW" dirty="0">
+                <a:solidFill>
+                  <a:srgbClr val="000000"/>
+                </a:solidFill>
+                <a:latin typeface="Arial Unicode MS"/>
+                <a:ea typeface="Arial Unicode MS"/>
+                <a:cs typeface="Arial Unicode MS"/>
+              </a:rPr>
+              <a:t>
+</a:t>
+            </a:r>
+          </a:p>
+          <a:p>
+            <a:pPr algn="l">
+              <a:lnSpc>
+                <a:spcPct val="115000"/>
+              </a:lnSpc>
+              <a:spcAft>
+                <a:spcPts val="600"/>
+              </a:spcAft>
+            </a:pPr>
+            <a:r>
               <a:rPr sz="1200" lang="zh-TW" dirty="0">
                 <a:solidFill>
                   <a:srgbClr val="000000"/>
@@ -5285,6 +7144,149 @@
         <p:txBody>
           <a:bodyPr vert="horz" wrap="square" anchor="t" lIns="91440" rIns="91440" tIns="45720" bIns="45720"/>
           <a:lstStyle/>
+          <a:p>
+            <a:pPr algn="l">
+              <a:lnSpc>
+                <a:spcPct val="115000"/>
+              </a:lnSpc>
+              <a:spcAft>
+                <a:spcPts val="500"/>
+              </a:spcAft>
+            </a:pPr>
+            <a:r>
+              <a:rPr sz="1000" b="1" lang="zh-TW" dirty="0">
+                <a:solidFill>
+                  <a:srgbClr val="000000"/>
+                </a:solidFill>
+                <a:latin typeface="Arial Unicode MS"/>
+                <a:ea typeface="Arial Unicode MS"/>
+                <a:cs typeface="Arial Unicode MS"/>
+              </a:rPr>
+              <a:t>▍這一張要做什麼</a:t>
+            </a:r>
+            <a:r>
+              <a:rPr sz="1000" lang="zh-TW" dirty="0">
+                <a:solidFill>
+                  <a:srgbClr val="000000"/>
+                </a:solidFill>
+                <a:latin typeface="Arial Unicode MS"/>
+                <a:ea typeface="Arial Unicode MS"/>
+                <a:cs typeface="Arial Unicode MS"/>
+              </a:rPr>
+              <a:t>
+</a:t>
+            </a:r>
+          </a:p>
+          <a:p>
+            <a:pPr algn="l">
+              <a:lnSpc>
+                <a:spcPct val="115000"/>
+              </a:lnSpc>
+              <a:spcAft>
+                <a:spcPts val="500"/>
+              </a:spcAft>
+            </a:pPr>
+            <a:r>
+              <a:rPr sz="1000" lang="zh-TW" dirty="0">
+                <a:solidFill>
+                  <a:srgbClr val="000000"/>
+                </a:solidFill>
+                <a:latin typeface="Arial Unicode MS"/>
+                <a:ea typeface="Arial Unicode MS"/>
+                <a:cs typeface="Arial Unicode MS"/>
+              </a:rPr>
+              <a:t>讓學生親眼確認：影像感測器的規格表上真的沒有視野這一行。
+</a:t>
+            </a:r>
+          </a:p>
+          <a:p>
+            <a:pPr algn="l">
+              <a:lnSpc>
+                <a:spcPct val="115000"/>
+              </a:lnSpc>
+              <a:spcAft>
+                <a:spcPts val="500"/>
+              </a:spcAft>
+            </a:pPr>
+            <a:r>
+              <a:rPr sz="1000" b="1" lang="zh-TW" dirty="0">
+                <a:solidFill>
+                  <a:srgbClr val="000000"/>
+                </a:solidFill>
+                <a:latin typeface="Arial Unicode MS"/>
+                <a:ea typeface="Arial Unicode MS"/>
+                <a:cs typeface="Arial Unicode MS"/>
+              </a:rPr>
+              <a:t>▍畫面上圈這裡</a:t>
+            </a:r>
+            <a:r>
+              <a:rPr sz="1000" lang="zh-TW" dirty="0">
+                <a:solidFill>
+                  <a:srgbClr val="000000"/>
+                </a:solidFill>
+                <a:latin typeface="Arial Unicode MS"/>
+                <a:ea typeface="Arial Unicode MS"/>
+                <a:cs typeface="Arial Unicode MS"/>
+              </a:rPr>
+              <a:t>
+</a:t>
+            </a:r>
+          </a:p>
+          <a:p>
+            <a:pPr algn="l">
+              <a:lnSpc>
+                <a:spcPct val="115000"/>
+              </a:lnSpc>
+              <a:spcAft>
+                <a:spcPts val="500"/>
+              </a:spcAft>
+            </a:pPr>
+            <a:r>
+              <a:rPr sz="1000" lang="zh-TW" dirty="0">
+                <a:solidFill>
+                  <a:srgbClr val="000000"/>
+                </a:solidFill>
+                <a:latin typeface="Arial Unicode MS"/>
+                <a:ea typeface="Arial Unicode MS"/>
+                <a:cs typeface="Arial Unicode MS"/>
+              </a:rPr>
+              <a:t>從上到下把整張規格表圈一遍，一邊圈一邊說「沒有、沒有、還是沒有」。
+</a:t>
+            </a:r>
+          </a:p>
+          <a:p>
+            <a:pPr algn="l">
+              <a:lnSpc>
+                <a:spcPct val="115000"/>
+              </a:lnSpc>
+              <a:spcAft>
+                <a:spcPts val="500"/>
+              </a:spcAft>
+            </a:pPr>
+            <a:r>
+              <a:rPr sz="1000" b="1" lang="zh-TW" dirty="0">
+                <a:solidFill>
+                  <a:srgbClr val="000000"/>
+                </a:solidFill>
+                <a:latin typeface="Arial Unicode MS"/>
+                <a:ea typeface="Arial Unicode MS"/>
+                <a:cs typeface="Arial Unicode MS"/>
+              </a:rPr>
+              <a:t>▍以下照著唸</a:t>
+            </a:r>
+            <a:r>
+              <a:rPr sz="1000" lang="zh-TW" dirty="0">
+                <a:solidFill>
+                  <a:srgbClr val="000000"/>
+                </a:solidFill>
+                <a:latin typeface="Arial Unicode MS"/>
+                <a:ea typeface="Arial Unicode MS"/>
+                <a:cs typeface="Arial Unicode MS"/>
+              </a:rPr>
+              <a:t>
+</a:t>
+            </a:r>
+          </a:p>
           <a:p>
             <a:pPr algn="l">
               <a:lnSpc>

--- a/第五週(10-08)/第五週_第1節_簡報.pptx
+++ b/第五週(10-08)/第五週_第1節_簡報.pptx
@@ -9883,7 +9883,7 @@
       </p:nvGrpSpPr>
       <p:grpSpPr>
         <a:xfrm>
-          <a:off x="124436" y="0"/>
+          <a:off x="310693" y="0"/>
           <a:ext cx="1" cy="1"/>
           <a:chOff x="0" y="0"/>
           <a:chExt cx="0" cy="0"/>
@@ -9897,8 +9897,8 @@
         </p:nvSpPr>
         <p:spPr>
           <a:xfrm>
-            <a:off x="613668" y="284644"/>
-            <a:ext cx="7916664" cy="818352"/>
+            <a:off x="779437" y="272724"/>
+            <a:ext cx="7585126" cy="784080"/>
           </a:xfrm>
           <a:prstGeom prst="rect">
             <a:avLst/>
@@ -9917,7 +9917,7 @@
               <a:buNone/>
             </a:pPr>
             <a:r>
-              <a:rPr lang="en-US" sz="2140" b="1" dirty="0">
+              <a:rPr lang="en-US" sz="2050" b="1" dirty="0">
                 <a:solidFill>
                   <a:srgbClr val="0B1F3A"/>
                 </a:solidFill>
@@ -9927,7 +9927,7 @@
               </a:rPr>
               <a:t>«90 m» hay «170 m»: cùng một con lidar, hai con số</a:t>
             </a:r>
-            <a:endParaRPr lang="en-US" sz="2140" dirty="0"/>
+            <a:endParaRPr lang="en-US" sz="2050" dirty="0"/>
           </a:p>
           <a:p>
             <a:pPr indent="0" marL="0">
@@ -9937,7 +9937,7 @@
               <a:buNone/>
             </a:pPr>
             <a:r>
-              <a:rPr lang="en-US" sz="1310" dirty="0">
+              <a:rPr lang="en-US" sz="1260" dirty="0">
                 <a:solidFill>
                   <a:srgbClr val="5F7183"/>
                 </a:solidFill>
@@ -9947,7 +9947,7 @@
               </a:rPr>
               <a:t>「90 公尺」還是「170 公尺」：同一顆光達，兩個數字</a:t>
             </a:r>
-            <a:endParaRPr lang="en-US" sz="2140" dirty="0"/>
+            <a:endParaRPr lang="en-US" sz="2050" dirty="0"/>
           </a:p>
         </p:txBody>
       </p:sp>
@@ -9959,8 +9959,8 @@
         </p:nvSpPr>
         <p:spPr>
           <a:xfrm>
-            <a:off x="613668" y="1102996"/>
-            <a:ext cx="7916664" cy="693820"/>
+            <a:off x="779437" y="1056804"/>
+            <a:ext cx="7585126" cy="664764"/>
           </a:xfrm>
           <a:prstGeom prst="roundRect">
             <a:avLst>
@@ -9981,8 +9981,8 @@
         </p:nvSpPr>
         <p:spPr>
           <a:xfrm>
-            <a:off x="755990" y="1174157"/>
-            <a:ext cx="7632020" cy="551498"/>
+            <a:off x="915799" y="1124985"/>
+            <a:ext cx="7312402" cy="528402"/>
           </a:xfrm>
           <a:prstGeom prst="rect">
             <a:avLst/>
@@ -10001,7 +10001,7 @@
               <a:buNone/>
             </a:pPr>
             <a:r>
-              <a:rPr lang="en-US" sz="1120" b="1" dirty="0">
+              <a:rPr lang="en-US" sz="1070" b="1" dirty="0">
                 <a:solidFill>
                   <a:srgbClr val="007F72"/>
                 </a:solidFill>
@@ -10011,7 +10011,7 @@
               </a:rPr>
               <a:t>Chép nguyên văn từ datasheet OS1. Chú ý phần chữ nhỏ phía sau.</a:t>
             </a:r>
-            <a:endParaRPr lang="en-US" sz="1120" dirty="0"/>
+            <a:endParaRPr lang="en-US" sz="1070" dirty="0"/>
           </a:p>
           <a:p>
             <a:pPr indent="0" marL="0">
@@ -10021,7 +10021,7 @@
               <a:buNone/>
             </a:pPr>
             <a:r>
-              <a:rPr lang="en-US" sz="970" dirty="0">
+              <a:rPr lang="en-US" sz="930" dirty="0">
                 <a:solidFill>
                   <a:srgbClr val="007F72"/>
                 </a:solidFill>
@@ -10031,7 +10031,7 @@
               </a:rPr>
               <a:t>照抄 OS1 規格表上的兩行。請注意後面那一串小字。</a:t>
             </a:r>
-            <a:endParaRPr lang="en-US" sz="1120" dirty="0"/>
+            <a:endParaRPr lang="en-US" sz="1070" dirty="0"/>
           </a:p>
         </p:txBody>
       </p:sp>
@@ -10050,20 +10050,20 @@
           </p:nvPr>
         </p:nvGraphicFramePr>
         <p:xfrm>
-          <a:off x="613668" y="1903557"/>
-          <a:ext cx="7916664" cy="889513"/>
+          <a:off x="779437" y="1823839"/>
+          <a:ext cx="7585126" cy="852261"/>
         </p:xfrm>
         <a:graphic>
           <a:graphicData uri="http://schemas.openxmlformats.org/drawingml/2006/table">
             <a:tbl>
               <a:tblPr/>
               <a:tblGrid>
-                <a:gridCol w="2034540"/>
-                <a:gridCol w="2034540"/>
-                <a:gridCol w="2034540"/>
-                <a:gridCol w="2034540"/>
+                <a:gridCol w="1896281"/>
+                <a:gridCol w="1896281"/>
+                <a:gridCol w="1896281"/>
+                <a:gridCol w="1896281"/>
               </a:tblGrid>
-              <a:tr h="384048">
+              <a:tr h="357950">
                 <a:tc>
                   <a:txBody>
                     <a:bodyPr/>
@@ -10073,7 +10073,7 @@
                         <a:buNone/>
                       </a:pPr>
                       <a:r>
-                        <a:rPr lang="en-US" sz="1070" b="1" dirty="0">
+                        <a:rPr lang="en-US" sz="1030" b="1" dirty="0">
                           <a:solidFill>
                             <a:srgbClr val="FFFFFF"/>
                           </a:solidFill>
@@ -10083,14 +10083,14 @@
                         </a:rPr>
                         <a:t>Dòng trên datasheet</a:t>
                       </a:r>
-                      <a:endParaRPr lang="en-US" sz="1170" dirty="0"/>
+                      <a:endParaRPr lang="en-US" sz="1120" dirty="0"/>
                     </a:p>
                     <a:p>
                       <a:pPr algn="l" indent="0" marL="0">
                         <a:buNone/>
                       </a:pPr>
                       <a:r>
-                        <a:rPr lang="en-US" sz="920" dirty="0">
+                        <a:rPr lang="en-US" sz="890" dirty="0">
                           <a:solidFill>
                             <a:srgbClr val="CFE0EC"/>
                           </a:solidFill>
@@ -10100,7 +10100,7 @@
                         </a:rPr>
                         <a:t>規格表上那一行</a:t>
                       </a:r>
-                      <a:endParaRPr lang="en-US" sz="1170" dirty="0"/>
+                      <a:endParaRPr lang="en-US" sz="1120" dirty="0"/>
                     </a:p>
                   </a:txBody>
                   <a:tcPr marL="63500" marR="63500" marT="38100" marB="38100" anchor="ctr">
@@ -10154,7 +10154,7 @@
                         <a:buNone/>
                       </a:pPr>
                       <a:r>
-                        <a:rPr lang="en-US" sz="1070" b="1" dirty="0">
+                        <a:rPr lang="en-US" sz="1030" b="1" dirty="0">
                           <a:solidFill>
                             <a:srgbClr val="FFFFFF"/>
                           </a:solidFill>
@@ -10164,14 +10164,14 @@
                         </a:rPr>
                         <a:t>Con số</a:t>
                       </a:r>
-                      <a:endParaRPr lang="en-US" sz="1170" dirty="0"/>
+                      <a:endParaRPr lang="en-US" sz="1120" dirty="0"/>
                     </a:p>
                     <a:p>
                       <a:pPr algn="l" indent="0" marL="0">
                         <a:buNone/>
                       </a:pPr>
                       <a:r>
-                        <a:rPr lang="en-US" sz="920" dirty="0">
+                        <a:rPr lang="en-US" sz="890" dirty="0">
                           <a:solidFill>
                             <a:srgbClr val="CFE0EC"/>
                           </a:solidFill>
@@ -10181,7 +10181,7 @@
                         </a:rPr>
                         <a:t>數字</a:t>
                       </a:r>
-                      <a:endParaRPr lang="en-US" sz="1170" dirty="0"/>
+                      <a:endParaRPr lang="en-US" sz="1120" dirty="0"/>
                     </a:p>
                   </a:txBody>
                   <a:tcPr marL="63500" marR="63500" marT="38100" marB="38100" anchor="ctr">
@@ -10235,7 +10235,7 @@
                         <a:buNone/>
                       </a:pPr>
                       <a:r>
-                        <a:rPr lang="en-US" sz="1070" b="1" dirty="0">
+                        <a:rPr lang="en-US" sz="1030" b="1" dirty="0">
                           <a:solidFill>
                             <a:srgbClr val="FFFFFF"/>
                           </a:solidFill>
@@ -10245,14 +10245,14 @@
                         </a:rPr>
                         <a:t>Vật gì</a:t>
                       </a:r>
-                      <a:endParaRPr lang="en-US" sz="1170" dirty="0"/>
+                      <a:endParaRPr lang="en-US" sz="1120" dirty="0"/>
                     </a:p>
                     <a:p>
                       <a:pPr algn="l" indent="0" marL="0">
                         <a:buNone/>
                       </a:pPr>
                       <a:r>
-                        <a:rPr lang="en-US" sz="920" dirty="0">
+                        <a:rPr lang="en-US" sz="890" dirty="0">
                           <a:solidFill>
                             <a:srgbClr val="CFE0EC"/>
                           </a:solidFill>
@@ -10262,7 +10262,7 @@
                         </a:rPr>
                         <a:t>量的是什麼東西</a:t>
                       </a:r>
-                      <a:endParaRPr lang="en-US" sz="1170" dirty="0"/>
+                      <a:endParaRPr lang="en-US" sz="1120" dirty="0"/>
                     </a:p>
                   </a:txBody>
                   <a:tcPr marL="63500" marR="63500" marT="38100" marB="38100" anchor="ctr">
@@ -10316,7 +10316,7 @@
                         <a:buNone/>
                       </a:pPr>
                       <a:r>
-                        <a:rPr lang="en-US" sz="1070" b="1" dirty="0">
+                        <a:rPr lang="en-US" sz="1030" b="1" dirty="0">
                           <a:solidFill>
                             <a:srgbClr val="FFFFFF"/>
                           </a:solidFill>
@@ -10326,14 +10326,14 @@
                         </a:rPr>
                         <a:t>Ngoài đường là ai</a:t>
                       </a:r>
-                      <a:endParaRPr lang="en-US" sz="1170" dirty="0"/>
+                      <a:endParaRPr lang="en-US" sz="1120" dirty="0"/>
                     </a:p>
                     <a:p>
                       <a:pPr algn="l" indent="0" marL="0">
                         <a:buNone/>
                       </a:pPr>
                       <a:r>
-                        <a:rPr lang="en-US" sz="920" dirty="0">
+                        <a:rPr lang="en-US" sz="890" dirty="0">
                           <a:solidFill>
                             <a:srgbClr val="CFE0EC"/>
                           </a:solidFill>
@@ -10343,7 +10343,7 @@
                         </a:rPr>
                         <a:t>路上是誰</a:t>
                       </a:r>
-                      <a:endParaRPr lang="en-US" sz="1170" dirty="0"/>
+                      <a:endParaRPr lang="en-US" sz="1120" dirty="0"/>
                     </a:p>
                   </a:txBody>
                   <a:tcPr marL="63500" marR="63500" marT="38100" marB="38100" anchor="ctr">
@@ -10389,7 +10389,7 @@
                   </a:tcPr>
                 </a:tc>
               </a:tr>
-              <a:tr h="384048">
+              <a:tr h="357950">
                 <a:tc>
                   <a:txBody>
                     <a:bodyPr/>
@@ -10399,7 +10399,7 @@
                         <a:buNone/>
                       </a:pPr>
                       <a:r>
-                        <a:rPr lang="en-US" sz="1070" b="1" dirty="0">
+                        <a:rPr lang="en-US" sz="1030" b="1" dirty="0">
                           <a:solidFill>
                             <a:srgbClr val="0B1F3A"/>
                           </a:solidFill>
@@ -10409,14 +10409,14 @@
                         </a:rPr>
                         <a:t>Range (80% reflectivity)</a:t>
                       </a:r>
-                      <a:endParaRPr lang="en-US" sz="1170" dirty="0"/>
+                      <a:endParaRPr lang="en-US" sz="1120" dirty="0"/>
                     </a:p>
                     <a:p>
                       <a:pPr algn="l" indent="0" marL="0">
                         <a:buNone/>
                       </a:pPr>
                       <a:r>
-                        <a:rPr lang="en-US" sz="920" dirty="0">
+                        <a:rPr lang="en-US" sz="890" dirty="0">
                           <a:solidFill>
                             <a:srgbClr val="5F7183"/>
                           </a:solidFill>
@@ -10426,7 +10426,7 @@
                         </a:rPr>
                         <a:t>Range（80% 反射率）</a:t>
                       </a:r>
-                      <a:endParaRPr lang="en-US" sz="1170" dirty="0"/>
+                      <a:endParaRPr lang="en-US" sz="1120" dirty="0"/>
                     </a:p>
                   </a:txBody>
                   <a:tcPr marL="63500" marR="63500" marT="38100" marB="38100" anchor="ctr">
@@ -10477,7 +10477,7 @@
                         <a:buNone/>
                       </a:pPr>
                       <a:r>
-                        <a:rPr lang="en-US" sz="1070" dirty="0">
+                        <a:rPr lang="en-US" sz="1030" dirty="0">
                           <a:solidFill>
                             <a:srgbClr val="1A2733"/>
                           </a:solidFill>
@@ -10487,7 +10487,7 @@
                         </a:rPr>
                         <a:t>170 m</a:t>
                       </a:r>
-                      <a:endParaRPr lang="en-US" sz="1170" dirty="0"/>
+                      <a:endParaRPr lang="en-US" sz="1120" dirty="0"/>
                     </a:p>
                   </a:txBody>
                   <a:tcPr marL="63500" marR="63500" marT="38100" marB="38100" anchor="ctr">
@@ -10538,7 +10538,7 @@
                         <a:buNone/>
                       </a:pPr>
                       <a:r>
-                        <a:rPr lang="en-US" sz="1070" dirty="0">
+                        <a:rPr lang="en-US" sz="1030" dirty="0">
                           <a:solidFill>
                             <a:srgbClr val="1A2733"/>
                           </a:solidFill>
@@ -10548,14 +10548,14 @@
                         </a:rPr>
                         <a:t>Vật sáng, phản xạ mạnh</a:t>
                       </a:r>
-                      <a:endParaRPr lang="en-US" sz="1170" dirty="0"/>
+                      <a:endParaRPr lang="en-US" sz="1120" dirty="0"/>
                     </a:p>
                     <a:p>
                       <a:pPr algn="l" indent="0" marL="0">
                         <a:buNone/>
                       </a:pPr>
                       <a:r>
-                        <a:rPr lang="en-US" sz="920" dirty="0">
+                        <a:rPr lang="en-US" sz="890" dirty="0">
                           <a:solidFill>
                             <a:srgbClr val="5F7183"/>
                           </a:solidFill>
@@ -10565,7 +10565,7 @@
                         </a:rPr>
                         <a:t>亮色、反射強的東西</a:t>
                       </a:r>
-                      <a:endParaRPr lang="en-US" sz="1170" dirty="0"/>
+                      <a:endParaRPr lang="en-US" sz="1120" dirty="0"/>
                     </a:p>
                   </a:txBody>
                   <a:tcPr marL="63500" marR="63500" marT="38100" marB="38100" anchor="ctr">
@@ -10616,7 +10616,7 @@
                         <a:buNone/>
                       </a:pPr>
                       <a:r>
-                        <a:rPr lang="en-US" sz="1070" dirty="0">
+                        <a:rPr lang="en-US" sz="1030" dirty="0">
                           <a:solidFill>
                             <a:srgbClr val="1A2733"/>
                           </a:solidFill>
@@ -10626,14 +10626,14 @@
                         </a:rPr>
                         <a:t>Xe trắng, áo phản quang</a:t>
                       </a:r>
-                      <a:endParaRPr lang="en-US" sz="1170" dirty="0"/>
+                      <a:endParaRPr lang="en-US" sz="1120" dirty="0"/>
                     </a:p>
                     <a:p>
                       <a:pPr algn="l" indent="0" marL="0">
                         <a:buNone/>
                       </a:pPr>
                       <a:r>
-                        <a:rPr lang="en-US" sz="920" dirty="0">
+                        <a:rPr lang="en-US" sz="890" dirty="0">
                           <a:solidFill>
                             <a:srgbClr val="5F7183"/>
                           </a:solidFill>
@@ -10643,7 +10643,7 @@
                         </a:rPr>
                         <a:t>白色的車、反光背心</a:t>
                       </a:r>
-                      <a:endParaRPr lang="en-US" sz="1170" dirty="0"/>
+                      <a:endParaRPr lang="en-US" sz="1120" dirty="0"/>
                     </a:p>
                   </a:txBody>
                   <a:tcPr marL="63500" marR="63500" marT="38100" marB="38100" anchor="ctr">
@@ -10686,7 +10686,7 @@
                   </a:tcPr>
                 </a:tc>
               </a:tr>
-              <a:tr h="384048">
+              <a:tr h="357950">
                 <a:tc>
                   <a:txBody>
                     <a:bodyPr/>
@@ -10696,7 +10696,7 @@
                         <a:buNone/>
                       </a:pPr>
                       <a:r>
-                        <a:rPr lang="en-US" sz="1070" b="1" dirty="0">
+                        <a:rPr lang="en-US" sz="1030" b="1" dirty="0">
                           <a:solidFill>
                             <a:srgbClr val="0B1F3A"/>
                           </a:solidFill>
@@ -10706,14 +10706,14 @@
                         </a:rPr>
                         <a:t>Range (10% reflectivity)</a:t>
                       </a:r>
-                      <a:endParaRPr lang="en-US" sz="1170" dirty="0"/>
+                      <a:endParaRPr lang="en-US" sz="1120" dirty="0"/>
                     </a:p>
                     <a:p>
                       <a:pPr algn="l" indent="0" marL="0">
                         <a:buNone/>
                       </a:pPr>
                       <a:r>
-                        <a:rPr lang="en-US" sz="920" dirty="0">
+                        <a:rPr lang="en-US" sz="890" dirty="0">
                           <a:solidFill>
                             <a:srgbClr val="5F7183"/>
                           </a:solidFill>
@@ -10723,7 +10723,7 @@
                         </a:rPr>
                         <a:t>Range（10% 反射率）</a:t>
                       </a:r>
-                      <a:endParaRPr lang="en-US" sz="1170" dirty="0"/>
+                      <a:endParaRPr lang="en-US" sz="1120" dirty="0"/>
                     </a:p>
                   </a:txBody>
                   <a:tcPr marL="63500" marR="63500" marT="38100" marB="38100" anchor="ctr">
@@ -10774,7 +10774,7 @@
                         <a:buNone/>
                       </a:pPr>
                       <a:r>
-                        <a:rPr lang="en-US" sz="1070" dirty="0">
+                        <a:rPr lang="en-US" sz="1030" dirty="0">
                           <a:solidFill>
                             <a:srgbClr val="1A2733"/>
                           </a:solidFill>
@@ -10784,7 +10784,7 @@
                         </a:rPr>
                         <a:t>90 m</a:t>
                       </a:r>
-                      <a:endParaRPr lang="en-US" sz="1170" dirty="0"/>
+                      <a:endParaRPr lang="en-US" sz="1120" dirty="0"/>
                     </a:p>
                   </a:txBody>
                   <a:tcPr marL="63500" marR="63500" marT="38100" marB="38100" anchor="ctr">
@@ -10835,7 +10835,7 @@
                         <a:buNone/>
                       </a:pPr>
                       <a:r>
-                        <a:rPr lang="en-US" sz="1070" dirty="0">
+                        <a:rPr lang="en-US" sz="1030" dirty="0">
                           <a:solidFill>
                             <a:srgbClr val="1A2733"/>
                           </a:solidFill>
@@ -10845,14 +10845,14 @@
                         </a:rPr>
                         <a:t>Vật tối, phản xạ yếu</a:t>
                       </a:r>
-                      <a:endParaRPr lang="en-US" sz="1170" dirty="0"/>
+                      <a:endParaRPr lang="en-US" sz="1120" dirty="0"/>
                     </a:p>
                     <a:p>
                       <a:pPr algn="l" indent="0" marL="0">
                         <a:buNone/>
                       </a:pPr>
                       <a:r>
-                        <a:rPr lang="en-US" sz="920" dirty="0">
+                        <a:rPr lang="en-US" sz="890" dirty="0">
                           <a:solidFill>
                             <a:srgbClr val="5F7183"/>
                           </a:solidFill>
@@ -10862,7 +10862,7 @@
                         </a:rPr>
                         <a:t>深色、反射弱的東西</a:t>
                       </a:r>
-                      <a:endParaRPr lang="en-US" sz="1170" dirty="0"/>
+                      <a:endParaRPr lang="en-US" sz="1120" dirty="0"/>
                     </a:p>
                   </a:txBody>
                   <a:tcPr marL="63500" marR="63500" marT="38100" marB="38100" anchor="ctr">
@@ -10913,7 +10913,7 @@
                         <a:buNone/>
                       </a:pPr>
                       <a:r>
-                        <a:rPr lang="en-US" sz="1070" dirty="0">
+                        <a:rPr lang="en-US" sz="1030" dirty="0">
                           <a:solidFill>
                             <a:srgbClr val="1A2733"/>
                           </a:solidFill>
@@ -10923,14 +10923,14 @@
                         </a:rPr>
                         <a:t>Xe đen, áo mưa sẫm màu</a:t>
                       </a:r>
-                      <a:endParaRPr lang="en-US" sz="1170" dirty="0"/>
+                      <a:endParaRPr lang="en-US" sz="1120" dirty="0"/>
                     </a:p>
                     <a:p>
                       <a:pPr algn="l" indent="0" marL="0">
                         <a:buNone/>
                       </a:pPr>
                       <a:r>
-                        <a:rPr lang="en-US" sz="920" dirty="0">
+                        <a:rPr lang="en-US" sz="890" dirty="0">
                           <a:solidFill>
                             <a:srgbClr val="5F7183"/>
                           </a:solidFill>
@@ -10940,7 +10940,7 @@
                         </a:rPr>
                         <a:t>黑色的車、深色雨衣</a:t>
                       </a:r>
-                      <a:endParaRPr lang="en-US" sz="1170" dirty="0"/>
+                      <a:endParaRPr lang="en-US" sz="1120" dirty="0"/>
                     </a:p>
                   </a:txBody>
                   <a:tcPr marL="63500" marR="63500" marT="38100" marB="38100" anchor="ctr">
@@ -10995,8 +10995,8 @@
         </p:nvSpPr>
         <p:spPr>
           <a:xfrm>
-            <a:off x="613668" y="3155694"/>
-            <a:ext cx="7916664" cy="444756"/>
+            <a:off x="779437" y="3174319"/>
+            <a:ext cx="7585126" cy="426131"/>
           </a:xfrm>
           <a:prstGeom prst="rect">
             <a:avLst/>
@@ -11015,7 +11015,7 @@
               <a:buNone/>
             </a:pPr>
             <a:r>
-              <a:rPr lang="en-US" sz="1170" b="1" dirty="0">
+              <a:rPr lang="en-US" sz="1120" b="1" dirty="0">
                 <a:solidFill>
                   <a:srgbClr val="007F72"/>
                 </a:solidFill>
@@ -11025,7 +11025,7 @@
               </a:rPr>
               <a:t>Quảng cáo hay ghi 170 m. Con số phải dùng để thiết kế là 90 m.</a:t>
             </a:r>
-            <a:endParaRPr lang="en-US" sz="1170" dirty="0"/>
+            <a:endParaRPr lang="en-US" sz="1120" dirty="0"/>
           </a:p>
           <a:p>
             <a:pPr indent="0" marL="0">
@@ -11035,7 +11035,7 @@
               <a:buNone/>
             </a:pPr>
             <a:r>
-              <a:rPr lang="en-US" sz="1070" dirty="0">
+              <a:rPr lang="en-US" sz="1030" dirty="0">
                 <a:solidFill>
                   <a:srgbClr val="007F72"/>
                 </a:solidFill>
@@ -11045,7 +11045,7 @@
               </a:rPr>
               <a:t>廣告上會寫 170 公尺。真正設計的時候要用的是 90 公尺。</a:t>
             </a:r>
-            <a:endParaRPr lang="en-US" sz="1170" dirty="0"/>
+            <a:endParaRPr lang="en-US" sz="1120" dirty="0"/>
           </a:p>
         </p:txBody>
       </p:sp>
@@ -11081,8 +11081,8 @@
         </p:nvSpPr>
         <p:spPr>
           <a:xfrm>
-            <a:off x="231177" y="124532"/>
-            <a:ext cx="800562" cy="249064"/>
+            <a:off x="412965" y="119317"/>
+            <a:ext cx="767035" cy="238633"/>
           </a:xfrm>
           <a:prstGeom prst="rect">
             <a:avLst/>
@@ -11098,7 +11098,7 @@
               <a:buNone/>
             </a:pPr>
             <a:r>
-              <a:rPr lang="en-US" sz="880" dirty="0">
+              <a:rPr lang="en-US" sz="840" dirty="0">
                 <a:solidFill>
                   <a:srgbClr val="5F7183"/>
                 </a:solidFill>
@@ -11108,7 +11108,7 @@
               </a:rPr>
               <a:t>12 / 14</a:t>
             </a:r>
-            <a:endParaRPr lang="en-US" sz="880" dirty="0"/>
+            <a:endParaRPr lang="en-US" sz="840" dirty="0"/>
           </a:p>
         </p:txBody>
       </p:sp>
@@ -11120,8 +11120,8 @@
         </p:nvSpPr>
         <p:spPr>
           <a:xfrm>
-            <a:off x="1058424" y="124532"/>
-            <a:ext cx="1956928" cy="249064"/>
+            <a:off x="1205568" y="119317"/>
+            <a:ext cx="1874975" cy="238633"/>
           </a:xfrm>
           <a:prstGeom prst="rect">
             <a:avLst/>
@@ -11137,7 +11137,7 @@
               <a:buNone/>
             </a:pPr>
             <a:r>
-              <a:rPr lang="en-US" sz="880" dirty="0">
+              <a:rPr lang="en-US" sz="840" dirty="0">
                 <a:solidFill>
                   <a:srgbClr val="5F7183"/>
                 </a:solidFill>
@@ -11147,7 +11147,7 @@
               </a:rPr>
               <a:t>Tiết 1 · 第 1 節</a:t>
             </a:r>
-            <a:endParaRPr lang="en-US" sz="880" dirty="0"/>
+            <a:endParaRPr lang="en-US" sz="840" dirty="0"/>
           </a:p>
         </p:txBody>
       </p:sp>
@@ -15928,7 +15928,7 @@
       </p:nvGrpSpPr>
       <p:grpSpPr>
         <a:xfrm>
-          <a:off x="624258" y="0"/>
+          <a:off x="902981" y="0"/>
           <a:ext cx="1" cy="1"/>
           <a:chOff x="0" y="0"/>
           <a:chExt cx="0" cy="0"/>
@@ -15942,8 +15942,8 @@
         </p:nvSpPr>
         <p:spPr>
           <a:xfrm>
-            <a:off x="1058510" y="252655"/>
-            <a:ext cx="7026980" cy="726384"/>
+            <a:off x="1306573" y="234817"/>
+            <a:ext cx="6530855" cy="675100"/>
           </a:xfrm>
           <a:prstGeom prst="rect">
             <a:avLst/>
@@ -15962,7 +15962,7 @@
               <a:buNone/>
             </a:pPr>
             <a:r>
-              <a:rPr lang="en-US" sz="1900" b="1" dirty="0">
+              <a:rPr lang="en-US" sz="1770" b="1" dirty="0">
                 <a:solidFill>
                   <a:srgbClr val="0B1F3A"/>
                 </a:solidFill>
@@ -15972,7 +15972,7 @@
               </a:rPr>
               <a:t>Cùng là lidar, hai cách tiêu tiền khác nhau</a:t>
             </a:r>
-            <a:endParaRPr lang="en-US" sz="1900" dirty="0"/>
+            <a:endParaRPr lang="en-US" sz="1770" dirty="0"/>
           </a:p>
           <a:p>
             <a:pPr indent="0" marL="0">
@@ -15982,7 +15982,7 @@
               <a:buNone/>
             </a:pPr>
             <a:r>
-              <a:rPr lang="en-US" sz="1170" dirty="0">
+              <a:rPr lang="en-US" sz="1080" dirty="0">
                 <a:solidFill>
                   <a:srgbClr val="5F7183"/>
                 </a:solidFill>
@@ -15992,7 +15992,7 @@
               </a:rPr>
               <a:t>同樣是光達，兩種花錢的方式</a:t>
             </a:r>
-            <a:endParaRPr lang="en-US" sz="1900" dirty="0"/>
+            <a:endParaRPr lang="en-US" sz="1770" dirty="0"/>
           </a:p>
         </p:txBody>
       </p:sp>
@@ -16011,20 +16011,20 @@
           </p:nvPr>
         </p:nvGraphicFramePr>
         <p:xfrm>
-          <a:off x="1058510" y="979040"/>
-          <a:ext cx="7026980" cy="789548"/>
+          <a:off x="1306573" y="909917"/>
+          <a:ext cx="6530855" cy="733804"/>
         </p:xfrm>
         <a:graphic>
           <a:graphicData uri="http://schemas.openxmlformats.org/drawingml/2006/table">
             <a:tbl>
               <a:tblPr/>
               <a:tblGrid>
-                <a:gridCol w="2034540"/>
-                <a:gridCol w="2034540"/>
-                <a:gridCol w="2034540"/>
-                <a:gridCol w="2034540"/>
+                <a:gridCol w="1632714"/>
+                <a:gridCol w="1632714"/>
+                <a:gridCol w="1632714"/>
+                <a:gridCol w="1632714"/>
               </a:tblGrid>
-              <a:tr h="384048">
+              <a:tr h="308198">
                 <a:tc>
                   <a:txBody>
                     <a:bodyPr/>
@@ -16034,7 +16034,7 @@
                         <a:buNone/>
                       </a:pPr>
                       <a:r>
-                        <a:rPr lang="en-US" sz="950" b="1" dirty="0">
+                        <a:rPr lang="en-US" sz="880" b="1" dirty="0">
                           <a:solidFill>
                             <a:srgbClr val="FFFFFF"/>
                           </a:solidFill>
@@ -16044,14 +16044,14 @@
                         </a:rPr>
                         <a:t>Dòng trên datasheet</a:t>
                       </a:r>
-                      <a:endParaRPr lang="en-US" sz="1040" dirty="0"/>
+                      <a:endParaRPr lang="en-US" sz="960" dirty="0"/>
                     </a:p>
                     <a:p>
                       <a:pPr algn="l" indent="0" marL="0">
                         <a:buNone/>
                       </a:pPr>
                       <a:r>
-                        <a:rPr lang="en-US" sz="820" dirty="0">
+                        <a:rPr lang="en-US" sz="760" dirty="0">
                           <a:solidFill>
                             <a:srgbClr val="CFE0EC"/>
                           </a:solidFill>
@@ -16061,7 +16061,7 @@
                         </a:rPr>
                         <a:t>規格表上那一行</a:t>
                       </a:r>
-                      <a:endParaRPr lang="en-US" sz="1040" dirty="0"/>
+                      <a:endParaRPr lang="en-US" sz="960" dirty="0"/>
                     </a:p>
                   </a:txBody>
                   <a:tcPr marL="63500" marR="63500" marT="38100" marB="38100" anchor="ctr">
@@ -16115,7 +16115,7 @@
                         <a:buNone/>
                       </a:pPr>
                       <a:r>
-                        <a:rPr lang="en-US" sz="950" b="1" dirty="0">
+                        <a:rPr lang="en-US" sz="880" b="1" dirty="0">
                           <a:solidFill>
                             <a:srgbClr val="FFFFFF"/>
                           </a:solidFill>
@@ -16125,14 +16125,14 @@
                         </a:rPr>
                         <a:t>Ouster OS1-64</a:t>
                       </a:r>
-                      <a:endParaRPr lang="en-US" sz="1040" dirty="0"/>
+                      <a:endParaRPr lang="en-US" sz="960" dirty="0"/>
                     </a:p>
                     <a:p>
                       <a:pPr algn="l" indent="0" marL="0">
                         <a:buNone/>
                       </a:pPr>
                       <a:r>
-                        <a:rPr lang="en-US" sz="820" dirty="0">
+                        <a:rPr lang="en-US" sz="760" dirty="0">
                           <a:solidFill>
                             <a:srgbClr val="CFE0EC"/>
                           </a:solidFill>
@@ -16142,7 +16142,7 @@
                         </a:rPr>
                         <a:t>Ouster OS1-64</a:t>
                       </a:r>
-                      <a:endParaRPr lang="en-US" sz="1040" dirty="0"/>
+                      <a:endParaRPr lang="en-US" sz="960" dirty="0"/>
                     </a:p>
                   </a:txBody>
                   <a:tcPr marL="63500" marR="63500" marT="38100" marB="38100" anchor="ctr">
@@ -16196,7 +16196,7 @@
                         <a:buNone/>
                       </a:pPr>
                       <a:r>
-                        <a:rPr lang="en-US" sz="950" b="1" dirty="0">
+                        <a:rPr lang="en-US" sz="880" b="1" dirty="0">
                           <a:solidFill>
                             <a:srgbClr val="FFFFFF"/>
                           </a:solidFill>
@@ -16206,14 +16206,14 @@
                         </a:rPr>
                         <a:t>Hesai AT128</a:t>
                       </a:r>
-                      <a:endParaRPr lang="en-US" sz="1040" dirty="0"/>
+                      <a:endParaRPr lang="en-US" sz="960" dirty="0"/>
                     </a:p>
                     <a:p>
                       <a:pPr algn="l" indent="0" marL="0">
                         <a:buNone/>
                       </a:pPr>
                       <a:r>
-                        <a:rPr lang="en-US" sz="820" dirty="0">
+                        <a:rPr lang="en-US" sz="760" dirty="0">
                           <a:solidFill>
                             <a:srgbClr val="CFE0EC"/>
                           </a:solidFill>
@@ -16223,7 +16223,7 @@
                         </a:rPr>
                         <a:t>Hesai AT128</a:t>
                       </a:r>
-                      <a:endParaRPr lang="en-US" sz="1040" dirty="0"/>
+                      <a:endParaRPr lang="en-US" sz="960" dirty="0"/>
                     </a:p>
                   </a:txBody>
                   <a:tcPr marL="63500" marR="63500" marT="38100" marB="38100" anchor="ctr">
@@ -16277,7 +16277,7 @@
                         <a:buNone/>
                       </a:pPr>
                       <a:r>
-                        <a:rPr lang="en-US" sz="950" b="1" dirty="0">
+                        <a:rPr lang="en-US" sz="880" b="1" dirty="0">
                           <a:solidFill>
                             <a:srgbClr val="FFFFFF"/>
                           </a:solidFill>
@@ -16287,14 +16287,14 @@
                         </a:rPr>
                         <a:t>Nghĩa là gì</a:t>
                       </a:r>
-                      <a:endParaRPr lang="en-US" sz="1040" dirty="0"/>
+                      <a:endParaRPr lang="en-US" sz="960" dirty="0"/>
                     </a:p>
                     <a:p>
                       <a:pPr algn="l" indent="0" marL="0">
                         <a:buNone/>
                       </a:pPr>
                       <a:r>
-                        <a:rPr lang="en-US" sz="820" dirty="0">
+                        <a:rPr lang="en-US" sz="760" dirty="0">
                           <a:solidFill>
                             <a:srgbClr val="CFE0EC"/>
                           </a:solidFill>
@@ -16304,7 +16304,7 @@
                         </a:rPr>
                         <a:t>這代表什麼</a:t>
                       </a:r>
-                      <a:endParaRPr lang="en-US" sz="1040" dirty="0"/>
+                      <a:endParaRPr lang="en-US" sz="960" dirty="0"/>
                     </a:p>
                   </a:txBody>
                   <a:tcPr marL="63500" marR="63500" marT="38100" marB="38100" anchor="ctr">
@@ -16350,7 +16350,7 @@
                   </a:tcPr>
                 </a:tc>
               </a:tr>
-              <a:tr h="384048">
+              <a:tr h="308198">
                 <a:tc>
                   <a:txBody>
                     <a:bodyPr/>
@@ -16360,7 +16360,7 @@
                         <a:buNone/>
                       </a:pPr>
                       <a:r>
-                        <a:rPr lang="en-US" sz="950" b="1" dirty="0">
+                        <a:rPr lang="en-US" sz="880" b="1" dirty="0">
                           <a:solidFill>
                             <a:srgbClr val="0B1F3A"/>
                           </a:solidFill>
@@ -16370,14 +16370,14 @@
                         </a:rPr>
                         <a:t>Góc nhìn ngang</a:t>
                       </a:r>
-                      <a:endParaRPr lang="en-US" sz="1040" dirty="0"/>
+                      <a:endParaRPr lang="en-US" sz="960" dirty="0"/>
                     </a:p>
                     <a:p>
                       <a:pPr algn="l" indent="0" marL="0">
                         <a:buNone/>
                       </a:pPr>
                       <a:r>
-                        <a:rPr lang="en-US" sz="820" dirty="0">
+                        <a:rPr lang="en-US" sz="760" dirty="0">
                           <a:solidFill>
                             <a:srgbClr val="5F7183"/>
                           </a:solidFill>
@@ -16387,7 +16387,7 @@
                         </a:rPr>
                         <a:t>水平視野</a:t>
                       </a:r>
-                      <a:endParaRPr lang="en-US" sz="1040" dirty="0"/>
+                      <a:endParaRPr lang="en-US" sz="960" dirty="0"/>
                     </a:p>
                   </a:txBody>
                   <a:tcPr marL="63500" marR="63500" marT="38100" marB="38100" anchor="ctr">
@@ -16438,7 +16438,7 @@
                         <a:buNone/>
                       </a:pPr>
                       <a:r>
-                        <a:rPr lang="en-US" sz="950" dirty="0">
+                        <a:rPr lang="en-US" sz="880" dirty="0">
                           <a:solidFill>
                             <a:srgbClr val="1A2733"/>
                           </a:solidFill>
@@ -16448,7 +16448,7 @@
                         </a:rPr>
                         <a:t>360°</a:t>
                       </a:r>
-                      <a:endParaRPr lang="en-US" sz="1040" dirty="0"/>
+                      <a:endParaRPr lang="en-US" sz="960" dirty="0"/>
                     </a:p>
                   </a:txBody>
                   <a:tcPr marL="63500" marR="63500" marT="38100" marB="38100" anchor="ctr">
@@ -16499,7 +16499,7 @@
                         <a:buNone/>
                       </a:pPr>
                       <a:r>
-                        <a:rPr lang="en-US" sz="950" dirty="0">
+                        <a:rPr lang="en-US" sz="880" dirty="0">
                           <a:solidFill>
                             <a:srgbClr val="1A2733"/>
                           </a:solidFill>
@@ -16509,7 +16509,7 @@
                         </a:rPr>
                         <a:t>120°</a:t>
                       </a:r>
-                      <a:endParaRPr lang="en-US" sz="1040" dirty="0"/>
+                      <a:endParaRPr lang="en-US" sz="960" dirty="0"/>
                     </a:p>
                   </a:txBody>
                   <a:tcPr marL="63500" marR="63500" marT="38100" marB="38100" anchor="ctr">
@@ -16560,7 +16560,7 @@
                         <a:buNone/>
                       </a:pPr>
                       <a:r>
-                        <a:rPr lang="en-US" sz="950" dirty="0">
+                        <a:rPr lang="en-US" sz="880" dirty="0">
                           <a:solidFill>
                             <a:srgbClr val="1A2733"/>
                           </a:solidFill>
@@ -16570,14 +16570,14 @@
                         </a:rPr>
                         <a:t>Một cái nhìn quanh, một cái nhìn trước</a:t>
                       </a:r>
-                      <a:endParaRPr lang="en-US" sz="1040" dirty="0"/>
+                      <a:endParaRPr lang="en-US" sz="960" dirty="0"/>
                     </a:p>
                     <a:p>
                       <a:pPr algn="l" indent="0" marL="0">
                         <a:buNone/>
                       </a:pPr>
                       <a:r>
-                        <a:rPr lang="en-US" sz="820" dirty="0">
+                        <a:rPr lang="en-US" sz="760" dirty="0">
                           <a:solidFill>
                             <a:srgbClr val="5F7183"/>
                           </a:solidFill>
@@ -16587,7 +16587,7 @@
                         </a:rPr>
                         <a:t>一個看四周，一個只看前面</a:t>
                       </a:r>
-                      <a:endParaRPr lang="en-US" sz="1040" dirty="0"/>
+                      <a:endParaRPr lang="en-US" sz="960" dirty="0"/>
                     </a:p>
                   </a:txBody>
                   <a:tcPr marL="63500" marR="63500" marT="38100" marB="38100" anchor="ctr">
@@ -16630,7 +16630,7 @@
                   </a:tcPr>
                 </a:tc>
               </a:tr>
-              <a:tr h="384048">
+              <a:tr h="308198">
                 <a:tc>
                   <a:txBody>
                     <a:bodyPr/>
@@ -16640,7 +16640,7 @@
                         <a:buNone/>
                       </a:pPr>
                       <a:r>
-                        <a:rPr lang="en-US" sz="950" b="1" dirty="0">
+                        <a:rPr lang="en-US" sz="880" b="1" dirty="0">
                           <a:solidFill>
                             <a:srgbClr val="0B1F3A"/>
                           </a:solidFill>
@@ -16650,14 +16650,14 @@
                         </a:rPr>
                         <a:t>Phân giải ngang</a:t>
                       </a:r>
-                      <a:endParaRPr lang="en-US" sz="1040" dirty="0"/>
+                      <a:endParaRPr lang="en-US" sz="960" dirty="0"/>
                     </a:p>
                     <a:p>
                       <a:pPr algn="l" indent="0" marL="0">
                         <a:buNone/>
                       </a:pPr>
                       <a:r>
-                        <a:rPr lang="en-US" sz="820" dirty="0">
+                        <a:rPr lang="en-US" sz="760" dirty="0">
                           <a:solidFill>
                             <a:srgbClr val="5F7183"/>
                           </a:solidFill>
@@ -16667,7 +16667,7 @@
                         </a:rPr>
                         <a:t>水平角解析度</a:t>
                       </a:r>
-                      <a:endParaRPr lang="en-US" sz="1040" dirty="0"/>
+                      <a:endParaRPr lang="en-US" sz="960" dirty="0"/>
                     </a:p>
                   </a:txBody>
                   <a:tcPr marL="63500" marR="63500" marT="38100" marB="38100" anchor="ctr">
@@ -16718,7 +16718,7 @@
                         <a:buNone/>
                       </a:pPr>
                       <a:r>
-                        <a:rPr lang="en-US" sz="950" dirty="0">
+                        <a:rPr lang="en-US" sz="880" dirty="0">
                           <a:solidFill>
                             <a:srgbClr val="1A2733"/>
                           </a:solidFill>
@@ -16728,7 +16728,7 @@
                         </a:rPr>
                         <a:t>0.35°</a:t>
                       </a:r>
-                      <a:endParaRPr lang="en-US" sz="1040" dirty="0"/>
+                      <a:endParaRPr lang="en-US" sz="960" dirty="0"/>
                     </a:p>
                   </a:txBody>
                   <a:tcPr marL="63500" marR="63500" marT="38100" marB="38100" anchor="ctr">
@@ -16779,7 +16779,7 @@
                         <a:buNone/>
                       </a:pPr>
                       <a:r>
-                        <a:rPr lang="en-US" sz="950" dirty="0">
+                        <a:rPr lang="en-US" sz="880" dirty="0">
                           <a:solidFill>
                             <a:srgbClr val="1A2733"/>
                           </a:solidFill>
@@ -16789,7 +16789,7 @@
                         </a:rPr>
                         <a:t>0.1°</a:t>
                       </a:r>
-                      <a:endParaRPr lang="en-US" sz="1040" dirty="0"/>
+                      <a:endParaRPr lang="en-US" sz="960" dirty="0"/>
                     </a:p>
                   </a:txBody>
                   <a:tcPr marL="63500" marR="63500" marT="38100" marB="38100" anchor="ctr">
@@ -16840,7 +16840,7 @@
                         <a:buNone/>
                       </a:pPr>
                       <a:r>
-                        <a:rPr lang="en-US" sz="950" dirty="0">
+                        <a:rPr lang="en-US" sz="880" dirty="0">
                           <a:solidFill>
                             <a:srgbClr val="1A2733"/>
                           </a:solidFill>
@@ -16850,14 +16850,14 @@
                         </a:rPr>
                         <a:t>AT128 dày hơn 3 lần theo chiều ngang</a:t>
                       </a:r>
-                      <a:endParaRPr lang="en-US" sz="1040" dirty="0"/>
+                      <a:endParaRPr lang="en-US" sz="960" dirty="0"/>
                     </a:p>
                     <a:p>
                       <a:pPr algn="l" indent="0" marL="0">
                         <a:buNone/>
                       </a:pPr>
                       <a:r>
-                        <a:rPr lang="en-US" sz="820" dirty="0">
+                        <a:rPr lang="en-US" sz="760" dirty="0">
                           <a:solidFill>
                             <a:srgbClr val="5F7183"/>
                           </a:solidFill>
@@ -16867,7 +16867,7 @@
                         </a:rPr>
                         <a:t>AT128 左右密了三倍多</a:t>
                       </a:r>
-                      <a:endParaRPr lang="en-US" sz="1040" dirty="0"/>
+                      <a:endParaRPr lang="en-US" sz="960" dirty="0"/>
                     </a:p>
                   </a:txBody>
                   <a:tcPr marL="63500" marR="63500" marT="38100" marB="38100" anchor="ctr">
@@ -16910,7 +16910,7 @@
                   </a:tcPr>
                 </a:tc>
               </a:tr>
-              <a:tr h="384048">
+              <a:tr h="308198">
                 <a:tc>
                   <a:txBody>
                     <a:bodyPr/>
@@ -16920,7 +16920,7 @@
                         <a:buNone/>
                       </a:pPr>
                       <a:r>
-                        <a:rPr lang="en-US" sz="950" b="1" dirty="0">
+                        <a:rPr lang="en-US" sz="880" b="1" dirty="0">
                           <a:solidFill>
                             <a:srgbClr val="0B1F3A"/>
                           </a:solidFill>
@@ -16930,14 +16930,14 @@
                         </a:rPr>
                         <a:t>Tầm đo (10%)</a:t>
                       </a:r>
-                      <a:endParaRPr lang="en-US" sz="1040" dirty="0"/>
+                      <a:endParaRPr lang="en-US" sz="960" dirty="0"/>
                     </a:p>
                     <a:p>
                       <a:pPr algn="l" indent="0" marL="0">
                         <a:buNone/>
                       </a:pPr>
                       <a:r>
-                        <a:rPr lang="en-US" sz="820" dirty="0">
+                        <a:rPr lang="en-US" sz="760" dirty="0">
                           <a:solidFill>
                             <a:srgbClr val="5F7183"/>
                           </a:solidFill>
@@ -16947,7 +16947,7 @@
                         </a:rPr>
                         <a:t>測距（10% 反射率）</a:t>
                       </a:r>
-                      <a:endParaRPr lang="en-US" sz="1040" dirty="0"/>
+                      <a:endParaRPr lang="en-US" sz="960" dirty="0"/>
                     </a:p>
                   </a:txBody>
                   <a:tcPr marL="63500" marR="63500" marT="38100" marB="38100" anchor="ctr">
@@ -16998,7 +16998,7 @@
                         <a:buNone/>
                       </a:pPr>
                       <a:r>
-                        <a:rPr lang="en-US" sz="950" dirty="0">
+                        <a:rPr lang="en-US" sz="880" dirty="0">
                           <a:solidFill>
                             <a:srgbClr val="1A2733"/>
                           </a:solidFill>
@@ -17008,7 +17008,7 @@
                         </a:rPr>
                         <a:t>90 m</a:t>
                       </a:r>
-                      <a:endParaRPr lang="en-US" sz="1040" dirty="0"/>
+                      <a:endParaRPr lang="en-US" sz="960" dirty="0"/>
                     </a:p>
                   </a:txBody>
                   <a:tcPr marL="63500" marR="63500" marT="38100" marB="38100" anchor="ctr">
@@ -17059,7 +17059,7 @@
                         <a:buNone/>
                       </a:pPr>
                       <a:r>
-                        <a:rPr lang="en-US" sz="950" dirty="0">
+                        <a:rPr lang="en-US" sz="880" dirty="0">
                           <a:solidFill>
                             <a:srgbClr val="1A2733"/>
                           </a:solidFill>
@@ -17069,7 +17069,7 @@
                         </a:rPr>
                         <a:t>210 m</a:t>
                       </a:r>
-                      <a:endParaRPr lang="en-US" sz="1040" dirty="0"/>
+                      <a:endParaRPr lang="en-US" sz="960" dirty="0"/>
                     </a:p>
                   </a:txBody>
                   <a:tcPr marL="63500" marR="63500" marT="38100" marB="38100" anchor="ctr">
@@ -17120,7 +17120,7 @@
                         <a:buNone/>
                       </a:pPr>
                       <a:r>
-                        <a:rPr lang="en-US" sz="950" dirty="0">
+                        <a:rPr lang="en-US" sz="880" dirty="0">
                           <a:solidFill>
                             <a:srgbClr val="1A2733"/>
                           </a:solidFill>
@@ -17130,14 +17130,14 @@
                         </a:rPr>
                         <a:t>Nhìn xa hơn gấp đôi</a:t>
                       </a:r>
-                      <a:endParaRPr lang="en-US" sz="1040" dirty="0"/>
+                      <a:endParaRPr lang="en-US" sz="960" dirty="0"/>
                     </a:p>
                     <a:p>
                       <a:pPr algn="l" indent="0" marL="0">
                         <a:buNone/>
                       </a:pPr>
                       <a:r>
-                        <a:rPr lang="en-US" sz="820" dirty="0">
+                        <a:rPr lang="en-US" sz="760" dirty="0">
                           <a:solidFill>
                             <a:srgbClr val="5F7183"/>
                           </a:solidFill>
@@ -17147,7 +17147,7 @@
                         </a:rPr>
                         <a:t>看得遠一倍以上</a:t>
                       </a:r>
-                      <a:endParaRPr lang="en-US" sz="1040" dirty="0"/>
+                      <a:endParaRPr lang="en-US" sz="960" dirty="0"/>
                     </a:p>
                   </a:txBody>
                   <a:tcPr marL="63500" marR="63500" marT="38100" marB="38100" anchor="ctr">
@@ -17190,7 +17190,7 @@
                   </a:tcPr>
                 </a:tc>
               </a:tr>
-              <a:tr h="384048">
+              <a:tr h="308198">
                 <a:tc>
                   <a:txBody>
                     <a:bodyPr/>
@@ -17200,7 +17200,7 @@
                         <a:buNone/>
                       </a:pPr>
                       <a:r>
-                        <a:rPr lang="en-US" sz="950" b="1" dirty="0">
+                        <a:rPr lang="en-US" sz="880" b="1" dirty="0">
                           <a:solidFill>
                             <a:srgbClr val="0B1F3A"/>
                           </a:solidFill>
@@ -17210,14 +17210,14 @@
                         </a:rPr>
                         <a:t>Người ở 40 m</a:t>
                       </a:r>
-                      <a:endParaRPr lang="en-US" sz="1040" dirty="0"/>
+                      <a:endParaRPr lang="en-US" sz="960" dirty="0"/>
                     </a:p>
                     <a:p>
                       <a:pPr algn="l" indent="0" marL="0">
                         <a:buNone/>
                       </a:pPr>
                       <a:r>
-                        <a:rPr lang="en-US" sz="820" dirty="0">
+                        <a:rPr lang="en-US" sz="760" dirty="0">
                           <a:solidFill>
                             <a:srgbClr val="5F7183"/>
                           </a:solidFill>
@@ -17227,7 +17227,7 @@
                         </a:rPr>
                         <a:t>40 公尺的行人</a:t>
                       </a:r>
-                      <a:endParaRPr lang="en-US" sz="1040" dirty="0"/>
+                      <a:endParaRPr lang="en-US" sz="960" dirty="0"/>
                     </a:p>
                   </a:txBody>
                   <a:tcPr marL="63500" marR="63500" marT="38100" marB="38100" anchor="ctr">
@@ -17278,7 +17278,7 @@
                         <a:buNone/>
                       </a:pPr>
                       <a:r>
-                        <a:rPr lang="en-US" sz="950" dirty="0">
+                        <a:rPr lang="en-US" sz="880" dirty="0">
                           <a:solidFill>
                             <a:srgbClr val="1A2733"/>
                           </a:solidFill>
@@ -17288,7 +17288,7 @@
                         </a:rPr>
                         <a:t>9 điểm</a:t>
                       </a:r>
-                      <a:endParaRPr lang="en-US" sz="1040" dirty="0"/>
+                      <a:endParaRPr lang="en-US" sz="960" dirty="0"/>
                     </a:p>
                   </a:txBody>
                   <a:tcPr marL="63500" marR="63500" marT="38100" marB="38100" anchor="ctr">
@@ -17339,7 +17339,7 @@
                         <a:buNone/>
                       </a:pPr>
                       <a:r>
-                        <a:rPr lang="en-US" sz="950" dirty="0">
+                        <a:rPr lang="en-US" sz="880" dirty="0">
                           <a:solidFill>
                             <a:srgbClr val="1A2733"/>
                           </a:solidFill>
@@ -17349,7 +17349,7 @@
                         </a:rPr>
                         <a:t>121 điểm</a:t>
                       </a:r>
-                      <a:endParaRPr lang="en-US" sz="1040" dirty="0"/>
+                      <a:endParaRPr lang="en-US" sz="960" dirty="0"/>
                     </a:p>
                   </a:txBody>
                   <a:tcPr marL="63500" marR="63500" marT="38100" marB="38100" anchor="ctr">
@@ -17400,7 +17400,7 @@
                         <a:buNone/>
                       </a:pPr>
                       <a:r>
-                        <a:rPr lang="en-US" sz="950" dirty="0">
+                        <a:rPr lang="en-US" sz="880" dirty="0">
                           <a:solidFill>
                             <a:srgbClr val="1A2733"/>
                           </a:solidFill>
@@ -17410,14 +17410,14 @@
                         </a:rPr>
                         <a:t>Đây mới là con số quyết định</a:t>
                       </a:r>
-                      <a:endParaRPr lang="en-US" sz="1040" dirty="0"/>
+                      <a:endParaRPr lang="en-US" sz="960" dirty="0"/>
                     </a:p>
                     <a:p>
                       <a:pPr algn="l" indent="0" marL="0">
                         <a:buNone/>
                       </a:pPr>
                       <a:r>
-                        <a:rPr lang="en-US" sz="820" dirty="0">
+                        <a:rPr lang="en-US" sz="760" dirty="0">
                           <a:solidFill>
                             <a:srgbClr val="5F7183"/>
                           </a:solidFill>
@@ -17427,7 +17427,7 @@
                         </a:rPr>
                         <a:t>這才是真正決定用不用得了的數字</a:t>
                       </a:r>
-                      <a:endParaRPr lang="en-US" sz="1040" dirty="0"/>
+                      <a:endParaRPr lang="en-US" sz="960" dirty="0"/>
                     </a:p>
                   </a:txBody>
                   <a:tcPr marL="63500" marR="63500" marT="38100" marB="38100" anchor="ctr">
@@ -17482,8 +17482,8 @@
         </p:nvSpPr>
         <p:spPr>
           <a:xfrm>
-            <a:off x="1058510" y="3205676"/>
-            <a:ext cx="7026980" cy="394774"/>
+            <a:off x="1306573" y="3233548"/>
+            <a:ext cx="6530855" cy="366902"/>
           </a:xfrm>
           <a:prstGeom prst="rect">
             <a:avLst/>
@@ -17502,7 +17502,7 @@
               <a:buNone/>
             </a:pPr>
             <a:r>
-              <a:rPr lang="en-US" sz="1040" b="1" dirty="0">
+              <a:rPr lang="en-US" sz="960" b="1" dirty="0">
                 <a:solidFill>
                   <a:srgbClr val="007F72"/>
                 </a:solidFill>
@@ -17512,7 +17512,7 @@
               </a:rPr>
               <a:t>Hàng cuối không nằm trên datasheet — nó là do ta tự tính từ ba dòng trên.</a:t>
             </a:r>
-            <a:endParaRPr lang="en-US" sz="1040" dirty="0"/>
+            <a:endParaRPr lang="en-US" sz="960" dirty="0"/>
           </a:p>
           <a:p>
             <a:pPr indent="0" marL="0">
@@ -17522,7 +17522,7 @@
               <a:buNone/>
             </a:pPr>
             <a:r>
-              <a:rPr lang="en-US" sz="950" dirty="0">
+              <a:rPr lang="en-US" sz="880" dirty="0">
                 <a:solidFill>
                   <a:srgbClr val="007F72"/>
                 </a:solidFill>
@@ -17532,7 +17532,7 @@
               </a:rPr>
               <a:t>最後一行規格表上沒有，是我們自己用上面三行算出來的。</a:t>
             </a:r>
-            <a:endParaRPr lang="en-US" sz="1040" dirty="0"/>
+            <a:endParaRPr lang="en-US" sz="960" dirty="0"/>
           </a:p>
         </p:txBody>
       </p:sp>
@@ -17568,8 +17568,8 @@
         </p:nvSpPr>
         <p:spPr>
           <a:xfrm>
-            <a:off x="719004" y="110537"/>
-            <a:ext cx="710593" cy="221074"/>
+            <a:off x="991037" y="102733"/>
+            <a:ext cx="660423" cy="205465"/>
           </a:xfrm>
           <a:prstGeom prst="rect">
             <a:avLst/>
@@ -17585,7 +17585,7 @@
               <a:buNone/>
             </a:pPr>
             <a:r>
-              <a:rPr lang="en-US" sz="780" dirty="0">
+              <a:rPr lang="en-US" sz="720" dirty="0">
                 <a:solidFill>
                   <a:srgbClr val="5F7183"/>
                 </a:solidFill>
@@ -17595,7 +17595,7 @@
               </a:rPr>
               <a:t>6 / 14</a:t>
             </a:r>
-            <a:endParaRPr lang="en-US" sz="780" dirty="0"/>
+            <a:endParaRPr lang="en-US" sz="720" dirty="0"/>
           </a:p>
         </p:txBody>
       </p:sp>
@@ -17607,8 +17607,8 @@
         </p:nvSpPr>
         <p:spPr>
           <a:xfrm>
-            <a:off x="1453284" y="110537"/>
-            <a:ext cx="1737006" cy="221074"/>
+            <a:off x="1673475" y="102733"/>
+            <a:ext cx="1614369" cy="205465"/>
           </a:xfrm>
           <a:prstGeom prst="rect">
             <a:avLst/>
@@ -17624,7 +17624,7 @@
               <a:buNone/>
             </a:pPr>
             <a:r>
-              <a:rPr lang="en-US" sz="780" dirty="0">
+              <a:rPr lang="en-US" sz="720" dirty="0">
                 <a:solidFill>
                   <a:srgbClr val="5F7183"/>
                 </a:solidFill>
@@ -17634,7 +17634,7 @@
               </a:rPr>
               <a:t>Tiết 1 · 第 1 節</a:t>
             </a:r>
-            <a:endParaRPr lang="en-US" sz="780" dirty="0"/>
+            <a:endParaRPr lang="en-US" sz="720" dirty="0"/>
           </a:p>
         </p:txBody>
       </p:sp>

--- a/第五週(10-08)/第五週_第1節_簡報.pptx
+++ b/第五週(10-08)/第五週_第1節_簡報.pptx
@@ -1189,7 +1189,7 @@
                 <a:ea typeface="Arial Unicode MS"/>
                 <a:cs typeface="Arial Unicode MS"/>
               </a:rPr>
-              <a:t>答案是這樣。
+              <a:t>答案剛剛已經在右邊那張表上了，我把它講清楚。
 </a:t>
             </a:r>
           </a:p>
@@ -7195,7 +7195,7 @@
                 <a:ea typeface="Arial Unicode MS"/>
                 <a:cs typeface="Arial Unicode MS"/>
               </a:rPr>
-              <a:t>讓學生親眼確認：影像感測器的規格表上真的沒有視野這一行。
+              <a:t>讓學生親眼確認：左邊的晶片規格表沒有視野這一行，右邊同樣是相機的規格表卻有三行。兩張都是原圖。
 </a:t>
             </a:r>
           </a:p>
@@ -7250,7 +7250,7 @@
                 <a:ea typeface="Arial Unicode MS"/>
                 <a:cs typeface="Arial Unicode MS"/>
               </a:rPr>
-              <a:t>從上到下把整張規格表圈一遍，一邊圈一邊說「沒有、沒有、還是沒有」。
+              <a:t>左表從上圈到下，一邊圈一邊說「沒有、沒有、還是沒有」；右表圈 field of view 三行，再往上圈 Focal length。
 </a:t>
             </a:r>
           </a:p>
@@ -7305,7 +7305,29 @@
                 <a:ea typeface="Arial Unicode MS"/>
                 <a:cs typeface="Arial Unicode MS"/>
               </a:rPr>
-              <a:t>第三個型號，onsemi 的 AR0233AT。這是一顆</a:t>
+              <a:t>第三個型號，onsemi 的 AR0233AT，就是相機裡面那塊晶片。左邊這張是從 onsemi 的公開文件直接剪下來的，出處印在圖下面。
+</a:t>
+            </a:r>
+          </a:p>
+          <a:p>
+            <a:pPr algn="l">
+              <a:lnSpc>
+                <a:spcPct val="115000"/>
+              </a:lnSpc>
+              <a:spcAft>
+                <a:spcPts val="500"/>
+              </a:spcAft>
+            </a:pPr>
+            <a:r>
+              <a:rPr sz="1000" lang="zh-TW" dirty="0">
+                <a:solidFill>
+                  <a:srgbClr val="000000"/>
+                </a:solidFill>
+                <a:latin typeface="Arial Unicode MS"/>
+                <a:ea typeface="Arial Unicode MS"/>
+                <a:cs typeface="Arial Unicode MS"/>
+              </a:rPr>
+              <a:t>先看有的：</a:t>
             </a:r>
             <a:r>
               <a:rPr sz="1000" b="1" lang="zh-TW" dirty="0">
@@ -7316,18 +7338,40 @@
                 <a:ea typeface="Arial Unicode MS"/>
                 <a:cs typeface="Arial Unicode MS"/>
               </a:rPr>
-              <a:t>車用的影像感測器</a:t>
-            </a:r>
-            <a:r>
-              <a:rPr sz="1000" lang="zh-TW" dirty="0">
-                <a:solidFill>
-                  <a:srgbClr val="000000"/>
-                </a:solidFill>
-                <a:latin typeface="Arial Unicode MS"/>
-                <a:ea typeface="Arial Unicode MS"/>
-                <a:cs typeface="Arial Unicode MS"/>
-              </a:rPr>
-              <a:t>，就是相機裡面那塊晶片。
+              <a:t>Active pixels 2048 乘 1280</a:t>
+            </a:r>
+            <a:r>
+              <a:rPr sz="1000" lang="zh-TW" dirty="0">
+                <a:solidFill>
+                  <a:srgbClr val="000000"/>
+                </a:solidFill>
+                <a:latin typeface="Arial Unicode MS"/>
+                <a:ea typeface="Arial Unicode MS"/>
+                <a:cs typeface="Arial Unicode MS"/>
+              </a:rPr>
+              <a:t>，就是第四週拉的那條水平解析度；</a:t>
+            </a:r>
+            <a:r>
+              <a:rPr sz="1000" b="1" lang="zh-TW" dirty="0">
+                <a:solidFill>
+                  <a:srgbClr val="000000"/>
+                </a:solidFill>
+                <a:latin typeface="Arial Unicode MS"/>
+                <a:ea typeface="Arial Unicode MS"/>
+                <a:cs typeface="Arial Unicode MS"/>
+              </a:rPr>
+              <a:t>Pixel size 3.0 微米</a:t>
+            </a:r>
+            <a:r>
+              <a:rPr sz="1000" lang="zh-TW" dirty="0">
+                <a:solidFill>
+                  <a:srgbClr val="000000"/>
+                </a:solidFill>
+                <a:latin typeface="Arial Unicode MS"/>
+                <a:ea typeface="Arial Unicode MS"/>
+                <a:cs typeface="Arial Unicode MS"/>
+              </a:rPr>
+              <a:t>，等一下有用。再往下是彩色濾波陣列、介面、動態範圍、封裝，總共七行。
 </a:t>
             </a:r>
           </a:p>
@@ -7349,7 +7393,7 @@
                 <a:ea typeface="Arial Unicode MS"/>
                 <a:cs typeface="Arial Unicode MS"/>
               </a:rPr>
-              <a:t>先看有的東西。
+              <a:t>現在請各位在左邊找「視野」，英文是 field of view；再找「測距」，range。找三十秒。都沒有——七行裡面一行都沒有。這兩行就是我們前兩週天天在拉的滑桿。
 </a:t>
             </a:r>
           </a:p>
@@ -7363,6 +7407,39 @@
               </a:spcAft>
             </a:pPr>
             <a:r>
+              <a:rPr sz="1000" lang="zh-TW" dirty="0">
+                <a:solidFill>
+                  <a:srgbClr val="000000"/>
+                </a:solidFill>
+                <a:latin typeface="Arial Unicode MS"/>
+                <a:ea typeface="Arial Unicode MS"/>
+                <a:cs typeface="Arial Unicode MS"/>
+              </a:rPr>
+              <a:t>看右邊。一樣是相機的規格表，Raspberry Pi 的 Camera Module 3。有沒有視野？有，而且有三行：對角、水平、垂直。為什麼一張有、一張沒有？先別急著回答。
+</a:t>
+            </a:r>
+          </a:p>
+          <a:p>
+            <a:pPr algn="l">
+              <a:lnSpc>
+                <a:spcPct val="115000"/>
+              </a:lnSpc>
+              <a:spcAft>
+                <a:spcPts val="500"/>
+              </a:spcAft>
+            </a:pPr>
+            <a:r>
+              <a:rPr sz="1000" lang="zh-TW" dirty="0">
+                <a:solidFill>
+                  <a:srgbClr val="000000"/>
+                </a:solidFill>
+                <a:latin typeface="Arial Unicode MS"/>
+                <a:ea typeface="Arial Unicode MS"/>
+                <a:cs typeface="Arial Unicode MS"/>
+              </a:rPr>
+              <a:t>右邊有一行叫 </a:t>
+            </a:r>
+            <a:r>
               <a:rPr sz="1000" b="1" lang="zh-TW" dirty="0">
                 <a:solidFill>
                   <a:srgbClr val="000000"/>
@@ -7371,18 +7448,40 @@
                 <a:ea typeface="Arial Unicode MS"/>
                 <a:cs typeface="Arial Unicode MS"/>
               </a:rPr>
-              <a:t>它有 2048 乘 1280 個像素</a:t>
-            </a:r>
-            <a:r>
-              <a:rPr sz="1000" lang="zh-TW" dirty="0">
-                <a:solidFill>
-                  <a:srgbClr val="000000"/>
-                </a:solidFill>
-                <a:latin typeface="Arial Unicode MS"/>
-                <a:ea typeface="Arial Unicode MS"/>
-                <a:cs typeface="Arial Unicode MS"/>
-              </a:rPr>
-              <a:t>，差不多兩百六十萬畫素。第四週我們在模擬器上拉的那條「水平解析度」，就是這個 2048。
+              <a:t>Focal length</a:t>
+            </a:r>
+            <a:r>
+              <a:rPr sz="1000" lang="zh-TW" dirty="0">
+                <a:solidFill>
+                  <a:srgbClr val="000000"/>
+                </a:solidFill>
+                <a:latin typeface="Arial Unicode MS"/>
+                <a:ea typeface="Arial Unicode MS"/>
+                <a:cs typeface="Arial Unicode MS"/>
+              </a:rPr>
+              <a:t>，焦距：前兩欄是 4.74 公釐，後兩欄是 2.75 公釐。往下看</a:t>
+            </a:r>
+            <a:r>
+              <a:rPr sz="1000" b="1" lang="zh-TW" dirty="0">
+                <a:solidFill>
+                  <a:srgbClr val="000000"/>
+                </a:solidFill>
+                <a:latin typeface="Arial Unicode MS"/>
+                <a:ea typeface="Arial Unicode MS"/>
+                <a:cs typeface="Arial Unicode MS"/>
+              </a:rPr>
+              <a:t>水平視野</a:t>
+            </a:r>
+            <a:r>
+              <a:rPr sz="1000" lang="zh-TW" dirty="0">
+                <a:solidFill>
+                  <a:srgbClr val="000000"/>
+                </a:solidFill>
+                <a:latin typeface="Arial Unicode MS"/>
+                <a:ea typeface="Arial Unicode MS"/>
+                <a:cs typeface="Arial Unicode MS"/>
+              </a:rPr>
+              <a:t>那一行：4.74 的那兩欄是 66 度，2.75 的那兩欄是 102 度。
 </a:t>
             </a:r>
           </a:p>
@@ -7396,301 +7495,15 @@
               </a:spcAft>
             </a:pPr>
             <a:r>
-              <a:rPr sz="1000" b="1" lang="zh-TW" dirty="0">
-                <a:solidFill>
-                  <a:srgbClr val="000000"/>
-                </a:solidFill>
-                <a:latin typeface="Arial Unicode MS"/>
-                <a:ea typeface="Arial Unicode MS"/>
-                <a:cs typeface="Arial Unicode MS"/>
-              </a:rPr>
-              <a:t>一個像素 3 微米見方。</a:t>
-            </a:r>
-            <a:r>
-              <a:rPr sz="1000" lang="zh-TW" dirty="0">
-                <a:solidFill>
-                  <a:srgbClr val="000000"/>
-                </a:solidFill>
-                <a:latin typeface="Arial Unicode MS"/>
-                <a:ea typeface="Arial Unicode MS"/>
-                <a:cs typeface="Arial Unicode MS"/>
-              </a:rPr>
-              <a:t>這個數字等一下有用，先記著。
-</a:t>
-            </a:r>
-          </a:p>
-          <a:p>
-            <a:pPr algn="l">
-              <a:lnSpc>
-                <a:spcPct val="115000"/>
-              </a:lnSpc>
-              <a:spcAft>
-                <a:spcPts val="500"/>
-              </a:spcAft>
-            </a:pPr>
-            <a:r>
-              <a:rPr sz="1000" b="1" lang="zh-TW" dirty="0">
-                <a:solidFill>
-                  <a:srgbClr val="000000"/>
-                </a:solidFill>
-                <a:latin typeface="Arial Unicode MS"/>
-                <a:ea typeface="Arial Unicode MS"/>
-                <a:cs typeface="Arial Unicode MS"/>
-              </a:rPr>
-              <a:t>更新率是 1080p 每秒 60 張。</a:t>
-            </a:r>
-            <a:r>
-              <a:rPr sz="1000" lang="zh-TW" dirty="0">
-                <a:solidFill>
-                  <a:srgbClr val="000000"/>
-                </a:solidFill>
-                <a:latin typeface="Arial Unicode MS"/>
-                <a:ea typeface="Arial Unicode MS"/>
-                <a:cs typeface="Arial Unicode MS"/>
-              </a:rPr>
-              <a:t>比光達的 10 Hz 快了六倍。這是相機的強項，第三週講過，它便宜又快。
-</a:t>
-            </a:r>
-          </a:p>
-          <a:p>
-            <a:pPr algn="l">
-              <a:lnSpc>
-                <a:spcPct val="115000"/>
-              </a:lnSpc>
-              <a:spcAft>
-                <a:spcPts val="500"/>
-              </a:spcAft>
-            </a:pPr>
-            <a:r>
-              <a:rPr sz="1000" lang="zh-TW" dirty="0">
-                <a:solidFill>
-                  <a:srgbClr val="000000"/>
-                </a:solidFill>
-                <a:latin typeface="Arial Unicode MS"/>
-                <a:ea typeface="Arial Unicode MS"/>
-                <a:cs typeface="Arial Unicode MS"/>
-              </a:rPr>
-              <a:t>好，現在看</a:t>
-            </a:r>
-            <a:r>
-              <a:rPr sz="1000" b="1" lang="zh-TW" dirty="0">
-                <a:solidFill>
-                  <a:srgbClr val="000000"/>
-                </a:solidFill>
-                <a:latin typeface="Arial Unicode MS"/>
-                <a:ea typeface="Arial Unicode MS"/>
-                <a:cs typeface="Arial Unicode MS"/>
-              </a:rPr>
-              <a:t>沒有的東西</a:t>
-            </a:r>
-            <a:r>
-              <a:rPr sz="1000" lang="zh-TW" dirty="0">
-                <a:solidFill>
-                  <a:srgbClr val="000000"/>
-                </a:solidFill>
-                <a:latin typeface="Arial Unicode MS"/>
-                <a:ea typeface="Arial Unicode MS"/>
-                <a:cs typeface="Arial Unicode MS"/>
-              </a:rPr>
-              <a:t>。
-</a:t>
-            </a:r>
-          </a:p>
-          <a:p>
-            <a:pPr algn="l">
-              <a:lnSpc>
-                <a:spcPct val="115000"/>
-              </a:lnSpc>
-              <a:spcAft>
-                <a:spcPts val="500"/>
-              </a:spcAft>
-            </a:pPr>
-            <a:r>
-              <a:rPr sz="1000" lang="zh-TW" dirty="0">
-                <a:solidFill>
-                  <a:srgbClr val="000000"/>
-                </a:solidFill>
-                <a:latin typeface="Arial Unicode MS"/>
-                <a:ea typeface="Arial Unicode MS"/>
-                <a:cs typeface="Arial Unicode MS"/>
-              </a:rPr>
-              <a:t>請大家在表上找找看有沒有「視野」那一行。
-</a:t>
-            </a:r>
-          </a:p>
-          <a:p>
-            <a:pPr algn="l">
-              <a:lnSpc>
-                <a:spcPct val="115000"/>
-              </a:lnSpc>
-              <a:spcAft>
-                <a:spcPts val="500"/>
-              </a:spcAft>
-            </a:pPr>
-            <a:r>
-              <a:rPr sz="1000" lang="zh-TW" dirty="0">
-                <a:solidFill>
-                  <a:srgbClr val="000000"/>
-                </a:solidFill>
-                <a:latin typeface="Arial Unicode MS"/>
-                <a:ea typeface="Arial Unicode MS"/>
-                <a:cs typeface="Arial Unicode MS"/>
-              </a:rPr>
-              <a:t>找三十秒，找不到的舉手。
-</a:t>
-            </a:r>
-          </a:p>
-          <a:p>
-            <a:pPr algn="l">
-              <a:lnSpc>
-                <a:spcPct val="115000"/>
-              </a:lnSpc>
-              <a:spcAft>
-                <a:spcPts val="500"/>
-              </a:spcAft>
-            </a:pPr>
-            <a:r>
-              <a:rPr sz="1000" lang="zh-TW" dirty="0">
-                <a:solidFill>
-                  <a:srgbClr val="000000"/>
-                </a:solidFill>
-                <a:latin typeface="Arial Unicode MS"/>
-                <a:ea typeface="Arial Unicode MS"/>
-                <a:cs typeface="Arial Unicode MS"/>
-              </a:rPr>
-              <a:t>沒有，表上真的沒有。
-</a:t>
-            </a:r>
-          </a:p>
-          <a:p>
-            <a:pPr algn="l">
-              <a:lnSpc>
-                <a:spcPct val="115000"/>
-              </a:lnSpc>
-              <a:spcAft>
-                <a:spcPts val="500"/>
-              </a:spcAft>
-            </a:pPr>
-            <a:r>
-              <a:rPr sz="1000" lang="zh-TW" dirty="0">
-                <a:solidFill>
-                  <a:srgbClr val="000000"/>
-                </a:solidFill>
-                <a:latin typeface="Arial Unicode MS"/>
-                <a:ea typeface="Arial Unicode MS"/>
-                <a:cs typeface="Arial Unicode MS"/>
-              </a:rPr>
-              <a:t>再找找看有沒有「測距」那一行。
-</a:t>
-            </a:r>
-          </a:p>
-          <a:p>
-            <a:pPr algn="l">
-              <a:lnSpc>
-                <a:spcPct val="115000"/>
-              </a:lnSpc>
-              <a:spcAft>
-                <a:spcPts val="500"/>
-              </a:spcAft>
-            </a:pPr>
-            <a:r>
-              <a:rPr sz="1000" lang="zh-TW" dirty="0">
-                <a:solidFill>
-                  <a:srgbClr val="000000"/>
-                </a:solidFill>
-                <a:latin typeface="Arial Unicode MS"/>
-                <a:ea typeface="Arial Unicode MS"/>
-                <a:cs typeface="Arial Unicode MS"/>
-              </a:rPr>
-              <a:t>也沒有。
-</a:t>
-            </a:r>
-          </a:p>
-          <a:p>
-            <a:pPr algn="l">
-              <a:lnSpc>
-                <a:spcPct val="115000"/>
-              </a:lnSpc>
-              <a:spcAft>
-                <a:spcPts val="500"/>
-              </a:spcAft>
-            </a:pPr>
-            <a:r>
-              <a:rPr sz="1000" lang="zh-TW" dirty="0">
-                <a:solidFill>
-                  <a:srgbClr val="000000"/>
-                </a:solidFill>
-                <a:latin typeface="Arial Unicode MS"/>
-                <a:ea typeface="Arial Unicode MS"/>
-                <a:cs typeface="Arial Unicode MS"/>
-              </a:rPr>
-              <a:t>這兩行，就是我們前兩週天天在拉的滑桿，可是這張規格表上</a:t>
-            </a:r>
-            <a:r>
-              <a:rPr sz="1000" b="1" lang="zh-TW" dirty="0">
-                <a:solidFill>
-                  <a:srgbClr val="000000"/>
-                </a:solidFill>
-                <a:latin typeface="Arial Unicode MS"/>
-                <a:ea typeface="Arial Unicode MS"/>
-                <a:cs typeface="Arial Unicode MS"/>
-              </a:rPr>
-              <a:t>完全沒有</a:t>
-            </a:r>
-            <a:r>
-              <a:rPr sz="1000" lang="zh-TW" dirty="0">
-                <a:solidFill>
-                  <a:srgbClr val="000000"/>
-                </a:solidFill>
-                <a:latin typeface="Arial Unicode MS"/>
-                <a:ea typeface="Arial Unicode MS"/>
-                <a:cs typeface="Arial Unicode MS"/>
-              </a:rPr>
-              <a:t>。
-</a:t>
-            </a:r>
-          </a:p>
-          <a:p>
-            <a:pPr algn="l">
-              <a:lnSpc>
-                <a:spcPct val="115000"/>
-              </a:lnSpc>
-              <a:spcAft>
-                <a:spcPts val="500"/>
-              </a:spcAft>
-            </a:pPr>
-            <a:r>
-              <a:rPr sz="1000" lang="zh-TW" dirty="0">
-                <a:solidFill>
-                  <a:srgbClr val="000000"/>
-                </a:solidFill>
-                <a:latin typeface="Arial Unicode MS"/>
-                <a:ea typeface="Arial Unicode MS"/>
-                <a:cs typeface="Arial Unicode MS"/>
-              </a:rPr>
-              <a:t>有沒有人猜得到為什麼？
-</a:t>
-            </a:r>
-          </a:p>
-          <a:p>
-            <a:pPr algn="l">
-              <a:lnSpc>
-                <a:spcPct val="115000"/>
-              </a:lnSpc>
-              <a:spcAft>
-                <a:spcPts val="500"/>
-              </a:spcAft>
-            </a:pPr>
-            <a:r>
-              <a:rPr sz="1000" lang="zh-TW" dirty="0">
-                <a:solidFill>
-                  <a:srgbClr val="000000"/>
-                </a:solidFill>
-                <a:latin typeface="Arial Unicode MS"/>
-                <a:ea typeface="Arial Unicode MS"/>
-                <a:cs typeface="Arial Unicode MS"/>
-              </a:rPr>
-              <a:t>下一頁我把答案講清楚。</a:t>
+              <a:rPr sz="1000" lang="zh-TW" dirty="0">
+                <a:solidFill>
+                  <a:srgbClr val="000000"/>
+                </a:solidFill>
+                <a:latin typeface="Arial Unicode MS"/>
+                <a:ea typeface="Arial Unicode MS"/>
+                <a:cs typeface="Arial Unicode MS"/>
+              </a:rPr>
+              <a:t>同一個產品系列、同一顆感光晶片，只有焦距不一樣，視野就差快一倍。答案藏在這裡，下一頁我把它講清楚。</a:t>
             </a:r>
           </a:p>
         </p:txBody>
@@ -12534,8 +12347,8 @@
         </p:blipFill>
         <p:spPr>
           <a:xfrm>
-            <a:off x="6492240" y="1243584"/>
-            <a:ext cx="2148840" cy="2148840"/>
+            <a:off x="6102556" y="991217"/>
+            <a:ext cx="1712765" cy="1712765"/>
           </a:xfrm>
           <a:prstGeom prst="rect">
             <a:avLst/>
@@ -18530,7 +18343,7 @@
       </p:nvGrpSpPr>
       <p:grpSpPr>
         <a:xfrm>
-          <a:off x="913006" y="0"/>
+          <a:off x="870573" y="0"/>
           <a:ext cx="1" cy="1"/>
           <a:chOff x="0" y="0"/>
           <a:chExt cx="0" cy="0"/>
@@ -18544,8 +18357,8 @@
         </p:nvSpPr>
         <p:spPr>
           <a:xfrm>
-            <a:off x="1315495" y="292720"/>
-            <a:ext cx="6513009" cy="219540"/>
+            <a:off x="1277730" y="296114"/>
+            <a:ext cx="6588540" cy="222086"/>
           </a:xfrm>
           <a:prstGeom prst="rect">
             <a:avLst/>
@@ -18561,7 +18374,7 @@
               <a:buNone/>
             </a:pPr>
             <a:r>
-              <a:rPr lang="en-US" sz="1040" b="1" dirty="0">
+              <a:rPr lang="en-US" sz="1050" b="1" dirty="0">
                 <a:solidFill>
                   <a:srgbClr val="007F72"/>
                 </a:solidFill>
@@ -18569,30 +18382,92 @@
                 <a:ea typeface="Arial" pitchFamily="34" charset="-122"/>
                 <a:cs typeface="Arial" pitchFamily="34" charset="-120"/>
               </a:rPr>
-              <a:t>Camera · onsemi AR0233AT</a:t>
-            </a:r>
-            <a:endParaRPr lang="en-US" sz="1040" dirty="0"/>
+              <a:t>Camera · onsemi AR0233AT ／ Raspberry Pi Camera Module 3</a:t>
+            </a:r>
+            <a:endParaRPr lang="en-US" sz="1050" dirty="0"/>
           </a:p>
         </p:txBody>
       </p:sp>
       <p:sp>
         <p:nvSpPr>
-          <p:cNvPr id="3" name="Shape 1"/>
+          <p:cNvPr id="3" name="Text 1"/>
+          <p:cNvSpPr txBox="1"/>
+          <p:nvPr/>
+        </p:nvSpPr>
+        <p:spPr>
+          <a:xfrm>
+            <a:off x="1277730" y="547811"/>
+            <a:ext cx="6588540" cy="453922"/>
+          </a:xfrm>
+          <a:prstGeom prst="rect">
+            <a:avLst/>
+          </a:prstGeom>
+          <a:noFill/>
+          <a:ln/>
+        </p:spPr>
+        <p:txBody>
+          <a:bodyPr wrap="square" lIns="0" tIns="0" rIns="0" bIns="0" rtlCol="0" anchor="t"/>
+          <a:lstStyle/>
+          <a:p>
+            <a:pPr indent="0" marL="0">
+              <a:lnSpc>
+                <a:spcPct val="116000"/>
+              </a:lnSpc>
+              <a:buNone/>
+            </a:pPr>
+            <a:r>
+              <a:rPr lang="en-US" sz="1380" b="1" dirty="0">
+                <a:solidFill>
+                  <a:srgbClr val="0B1F3A"/>
+                </a:solidFill>
+                <a:latin typeface="Arial" pitchFamily="34" charset="0"/>
+                <a:ea typeface="Arial" pitchFamily="34" charset="-122"/>
+                <a:cs typeface="Arial" pitchFamily="34" charset="-120"/>
+              </a:rPr>
+              <a:t>Datasheet cảm biến ảnh: tìm mãi không thấy góc nhìn</a:t>
+            </a:r>
+            <a:endParaRPr lang="en-US" sz="1380" dirty="0"/>
+          </a:p>
+          <a:p>
+            <a:pPr indent="0" marL="0">
+              <a:lnSpc>
+                <a:spcPct val="116000"/>
+              </a:lnSpc>
+              <a:buNone/>
+            </a:pPr>
+            <a:r>
+              <a:rPr lang="en-US" sz="1010" dirty="0">
+                <a:solidFill>
+                  <a:srgbClr val="5F7183"/>
+                </a:solidFill>
+                <a:latin typeface="微軟正黑體" pitchFamily="34" charset="0"/>
+                <a:ea typeface="微軟正黑體" pitchFamily="34" charset="-122"/>
+                <a:cs typeface="微軟正黑體" pitchFamily="34" charset="-120"/>
+              </a:rPr>
+              <a:t>影像感測器的規格表：怎麼找都找不到視野</a:t>
+            </a:r>
+            <a:endParaRPr lang="en-US" sz="1380" dirty="0"/>
+          </a:p>
+        </p:txBody>
+      </p:sp>
+      <p:sp>
+        <p:nvSpPr>
+          <p:cNvPr id="4" name="Shape 2"/>
           <p:cNvSpPr/>
           <p:nvPr/>
         </p:nvSpPr>
         <p:spPr>
           <a:xfrm>
-            <a:off x="1315495" y="702527"/>
-            <a:ext cx="1185514" cy="1536777"/>
+            <a:off x="1277730" y="1060956"/>
+            <a:ext cx="2679816" cy="1962071"/>
           </a:xfrm>
           <a:prstGeom prst="roundRect">
             <a:avLst>
-              <a:gd name="adj" fmla="val 7407"/>
+              <a:gd name="adj" fmla="val 3773"/>
             </a:avLst>
           </a:prstGeom>
           <a:solidFill>
-            <a:srgbClr val="F4F7FA"/>
+            <a:srgbClr val="FFFFFF"/>
           </a:solidFill>
           <a:ln w="12700">
             <a:solidFill>
@@ -18604,239 +18479,18 @@
       </p:sp>
       <p:sp>
         <p:nvSpPr>
-          <p:cNvPr id="4" name="Shape 2"/>
+          <p:cNvPr id="5" name="Shape 3"/>
           <p:cNvSpPr/>
           <p:nvPr/>
         </p:nvSpPr>
         <p:spPr>
           <a:xfrm>
-            <a:off x="1440633" y="1495223"/>
-            <a:ext cx="249397" cy="114723"/>
+            <a:off x="1351758" y="1134985"/>
+            <a:ext cx="2531758" cy="281261"/>
           </a:xfrm>
           <a:prstGeom prst="roundRect">
             <a:avLst>
-              <a:gd name="adj" fmla="val 22000"/>
-            </a:avLst>
-          </a:prstGeom>
-          <a:solidFill>
-            <a:srgbClr val="8FA3B5"/>
-          </a:solidFill>
-          <a:ln/>
-        </p:spPr>
-      </p:sp>
-      <p:sp>
-        <p:nvSpPr>
-          <p:cNvPr id="5" name="Shape 3"/>
-          <p:cNvSpPr/>
-          <p:nvPr/>
-        </p:nvSpPr>
-        <p:spPr>
-          <a:xfrm>
-            <a:off x="1535404" y="1518167"/>
-            <a:ext cx="84795" cy="68833"/>
-          </a:xfrm>
-          <a:prstGeom prst="roundRect">
-            <a:avLst>
-              <a:gd name="adj" fmla="val 23333"/>
-            </a:avLst>
-          </a:prstGeom>
-          <a:solidFill>
-            <a:srgbClr val="FFFFFF"/>
-          </a:solidFill>
-          <a:ln/>
-        </p:spPr>
-      </p:sp>
-      <p:sp>
-        <p:nvSpPr>
-          <p:cNvPr id="6" name="Shape 4"/>
-          <p:cNvSpPr/>
-          <p:nvPr/>
-        </p:nvSpPr>
-        <p:spPr>
-          <a:xfrm>
-            <a:off x="1721204" y="1552584"/>
-            <a:ext cx="519577" cy="1"/>
-          </a:xfrm>
-          <a:prstGeom prst="line">
-            <a:avLst/>
-          </a:prstGeom>
-          <a:noFill/>
-          <a:ln w="20320">
-            <a:solidFill>
-              <a:srgbClr val="1F4E79"/>
-            </a:solidFill>
-            <a:prstDash val="solid"/>
-            <a:tailEnd type="triangle"/>
-          </a:ln>
-        </p:spPr>
-      </p:sp>
-      <p:sp>
-        <p:nvSpPr>
-          <p:cNvPr id="7" name="Shape 5"/>
-          <p:cNvSpPr/>
-          <p:nvPr/>
-        </p:nvSpPr>
-        <p:spPr>
-          <a:xfrm>
-            <a:off x="1851099" y="1484527"/>
-            <a:ext cx="1" cy="136114"/>
-          </a:xfrm>
-          <a:prstGeom prst="line">
-            <a:avLst/>
-          </a:prstGeom>
-          <a:noFill/>
-          <a:ln w="12700">
-            <a:solidFill>
-              <a:srgbClr val="1F4E79"/>
-            </a:solidFill>
-            <a:prstDash val="solid"/>
-          </a:ln>
-        </p:spPr>
-      </p:sp>
-      <p:sp>
-        <p:nvSpPr>
-          <p:cNvPr id="8" name="Shape 6"/>
-          <p:cNvSpPr/>
-          <p:nvPr/>
-        </p:nvSpPr>
-        <p:spPr>
-          <a:xfrm>
-            <a:off x="1980993" y="1484527"/>
-            <a:ext cx="1" cy="136114"/>
-          </a:xfrm>
-          <a:prstGeom prst="line">
-            <a:avLst/>
-          </a:prstGeom>
-          <a:noFill/>
-          <a:ln w="12700">
-            <a:solidFill>
-              <a:srgbClr val="1F4E79"/>
-            </a:solidFill>
-            <a:prstDash val="solid"/>
-          </a:ln>
-        </p:spPr>
-      </p:sp>
-      <p:sp>
-        <p:nvSpPr>
-          <p:cNvPr id="9" name="Shape 7"/>
-          <p:cNvSpPr/>
-          <p:nvPr/>
-        </p:nvSpPr>
-        <p:spPr>
-          <a:xfrm>
-            <a:off x="2110887" y="1484527"/>
-            <a:ext cx="1" cy="136114"/>
-          </a:xfrm>
-          <a:prstGeom prst="line">
-            <a:avLst/>
-          </a:prstGeom>
-          <a:noFill/>
-          <a:ln w="12700">
-            <a:solidFill>
-              <a:srgbClr val="1F4E79"/>
-            </a:solidFill>
-            <a:prstDash val="solid"/>
-          </a:ln>
-        </p:spPr>
-      </p:sp>
-      <p:sp>
-        <p:nvSpPr>
-          <p:cNvPr id="10" name="Shape 8"/>
-          <p:cNvSpPr/>
-          <p:nvPr/>
-        </p:nvSpPr>
-        <p:spPr>
-          <a:xfrm>
-            <a:off x="2230390" y="1402858"/>
-            <a:ext cx="72741" cy="299452"/>
-          </a:xfrm>
-          <a:prstGeom prst="roundRect">
-            <a:avLst>
-              <a:gd name="adj" fmla="val 21429"/>
-            </a:avLst>
-          </a:prstGeom>
-          <a:solidFill>
-            <a:srgbClr val="D9463E"/>
-          </a:solidFill>
-          <a:ln/>
-        </p:spPr>
-      </p:sp>
-      <p:sp>
-        <p:nvSpPr>
-          <p:cNvPr id="11" name="Text 9"/>
-          <p:cNvSpPr txBox="1"/>
-          <p:nvPr/>
-        </p:nvSpPr>
-        <p:spPr>
-          <a:xfrm>
-            <a:off x="2749821" y="629347"/>
-            <a:ext cx="5078684" cy="418052"/>
-          </a:xfrm>
-          <a:prstGeom prst="rect">
-            <a:avLst/>
-          </a:prstGeom>
-          <a:noFill/>
-          <a:ln/>
-        </p:spPr>
-        <p:txBody>
-          <a:bodyPr wrap="square" lIns="0" tIns="0" rIns="0" bIns="0" rtlCol="0" anchor="t"/>
-          <a:lstStyle/>
-          <a:p>
-            <a:pPr indent="0" marL="0">
-              <a:lnSpc>
-                <a:spcPct val="116000"/>
-              </a:lnSpc>
-              <a:buNone/>
-            </a:pPr>
-            <a:r>
-              <a:rPr lang="en-US" sz="1440" b="1" dirty="0">
-                <a:solidFill>
-                  <a:srgbClr val="0B1F3A"/>
-                </a:solidFill>
-                <a:latin typeface="Arial" pitchFamily="34" charset="0"/>
-                <a:ea typeface="Arial" pitchFamily="34" charset="-122"/>
-                <a:cs typeface="Arial" pitchFamily="34" charset="-120"/>
-              </a:rPr>
-              <a:t>Datasheet cảm biến ảnh: tìm mãi không thấy góc nhìn</a:t>
-            </a:r>
-            <a:endParaRPr lang="en-US" sz="1440" dirty="0"/>
-          </a:p>
-          <a:p>
-            <a:pPr indent="0" marL="0">
-              <a:lnSpc>
-                <a:spcPct val="116000"/>
-              </a:lnSpc>
-              <a:buNone/>
-            </a:pPr>
-            <a:r>
-              <a:rPr lang="en-US" sz="1000" dirty="0">
-                <a:solidFill>
-                  <a:srgbClr val="007F72"/>
-                </a:solidFill>
-                <a:latin typeface="微軟正黑體" pitchFamily="34" charset="0"/>
-                <a:ea typeface="微軟正黑體" pitchFamily="34" charset="-122"/>
-                <a:cs typeface="微軟正黑體" pitchFamily="34" charset="-120"/>
-              </a:rPr>
-              <a:t>影像感測器的規格表：怎麼找都找不到視野</a:t>
-            </a:r>
-            <a:endParaRPr lang="en-US" sz="1440" dirty="0"/>
-          </a:p>
-        </p:txBody>
-      </p:sp>
-      <p:sp>
-        <p:nvSpPr>
-          <p:cNvPr id="12" name="Shape 10"/>
-          <p:cNvSpPr/>
-          <p:nvPr/>
-        </p:nvSpPr>
-        <p:spPr>
-          <a:xfrm>
-            <a:off x="2749821" y="1120579"/>
-            <a:ext cx="848887" cy="320216"/>
-          </a:xfrm>
-          <a:prstGeom prst="roundRect">
-            <a:avLst>
-              <a:gd name="adj" fmla="val 13712"/>
+              <a:gd name="adj" fmla="val 13160"/>
             </a:avLst>
           </a:prstGeom>
           <a:solidFill>
@@ -18847,14 +18501,14 @@
       </p:sp>
       <p:sp>
         <p:nvSpPr>
-          <p:cNvPr id="13" name="Text 11"/>
+          <p:cNvPr id="6" name="Text 4"/>
           <p:cNvSpPr txBox="1"/>
           <p:nvPr/>
         </p:nvSpPr>
         <p:spPr>
           <a:xfrm>
-            <a:off x="2793729" y="1149851"/>
-            <a:ext cx="761071" cy="276308"/>
+            <a:off x="1410981" y="1157193"/>
+            <a:ext cx="2413313" cy="251649"/>
           </a:xfrm>
           <a:prstGeom prst="rect">
             <a:avLst/>
@@ -18868,12 +18522,12 @@
           <a:p>
             <a:pPr algn="ctr" indent="0" marL="0">
               <a:lnSpc>
-                <a:spcPct val="106000"/>
+                <a:spcPct val="104000"/>
               </a:lnSpc>
               <a:buNone/>
             </a:pPr>
             <a:r>
-              <a:rPr lang="en-US" sz="720" b="1" dirty="0">
+              <a:rPr lang="en-US" sz="770" b="1" dirty="0">
                 <a:solidFill>
                   <a:srgbClr val="FFFFFF"/>
                 </a:solidFill>
@@ -18881,19 +18535,19 @@
                 <a:ea typeface="Arial" pitchFamily="34" charset="-122"/>
                 <a:cs typeface="Arial" pitchFamily="34" charset="-120"/>
               </a:rPr>
-              <a:t>Điểm ảnh</a:t>
-            </a:r>
-            <a:endParaRPr lang="en-US" sz="720" dirty="0"/>
+              <a:t>Chip cảm biến ảnh · onsemi AR0233AT</a:t>
+            </a:r>
+            <a:endParaRPr lang="en-US" sz="770" dirty="0"/>
           </a:p>
           <a:p>
             <a:pPr algn="ctr" indent="0" marL="0">
               <a:lnSpc>
-                <a:spcPct val="106000"/>
+                <a:spcPct val="104000"/>
               </a:lnSpc>
               <a:buNone/>
             </a:pPr>
             <a:r>
-              <a:rPr lang="en-US" sz="680" dirty="0">
+              <a:rPr lang="en-US" sz="690" dirty="0">
                 <a:solidFill>
                   <a:srgbClr val="FFFFFF"/>
                 </a:solidFill>
@@ -18901,22 +18555,46 @@
                 <a:ea typeface="微軟正黑體" pitchFamily="34" charset="-122"/>
                 <a:cs typeface="微軟正黑體" pitchFamily="34" charset="-120"/>
               </a:rPr>
-              <a:t>像素</a:t>
-            </a:r>
-            <a:endParaRPr lang="en-US" sz="720" dirty="0"/>
+              <a:t>影像感測器晶片 · onsemi AR0233AT</a:t>
+            </a:r>
+            <a:endParaRPr lang="en-US" sz="770" dirty="0"/>
           </a:p>
         </p:txBody>
       </p:sp>
-      <p:sp>
-        <p:nvSpPr>
-          <p:cNvPr id="14" name="Text 12"/>
+      <p:pic>
+        <p:nvPicPr>
+          <p:cNvPr id="7" name="Image 0" descr="/Users/tsengchenghsun/Class/carClass/Claude outputs/第五週(10-8)/src/img/w5_s09_sensor_spec.png">    </p:cNvPr>
+          <p:cNvPicPr>
+            <a:picLocks noChangeAspect="1"/>
+          </p:cNvPicPr>
+          <p:nvPr/>
+        </p:nvPicPr>
+        <p:blipFill>
+          <a:blip r:embed="rId1"/>
+          <a:stretch>
+            <a:fillRect/>
+          </a:stretch>
+        </p:blipFill>
+        <p:spPr>
+          <a:xfrm>
+            <a:off x="1351758" y="1460662"/>
+            <a:ext cx="2531758" cy="1256009"/>
+          </a:xfrm>
+          <a:prstGeom prst="rect">
+            <a:avLst/>
+          </a:prstGeom>
+        </p:spPr>
+      </p:pic>
+      <p:sp>
+        <p:nvSpPr>
+          <p:cNvPr id="8" name="Text 5"/>
           <p:cNvSpPr txBox="1"/>
           <p:nvPr/>
         </p:nvSpPr>
         <p:spPr>
           <a:xfrm>
-            <a:off x="3715795" y="1120579"/>
-            <a:ext cx="4112709" cy="364124"/>
+            <a:off x="1351758" y="2731477"/>
+            <a:ext cx="2531758" cy="202716"/>
           </a:xfrm>
           <a:prstGeom prst="rect">
             <a:avLst/>
@@ -18925,64 +18603,68 @@
           <a:ln/>
         </p:spPr>
         <p:txBody>
-          <a:bodyPr wrap="square" lIns="0" tIns="0" rIns="0" bIns="0" rtlCol="0" anchor="t"/>
+          <a:bodyPr wrap="square" lIns="0" tIns="0" rIns="0" bIns="0" rtlCol="0" anchor="ctr"/>
           <a:lstStyle/>
           <a:p>
-            <a:pPr indent="0" marL="0">
-              <a:lnSpc>
-                <a:spcPct val="126000"/>
-              </a:lnSpc>
+            <a:pPr algn="ctr" indent="0" marL="0">
               <a:buNone/>
             </a:pPr>
             <a:r>
-              <a:rPr lang="en-US" sz="880" dirty="0">
-                <a:solidFill>
-                  <a:srgbClr val="1A2733"/>
+              <a:rPr lang="en-US" sz="570" dirty="0">
+                <a:solidFill>
+                  <a:srgbClr val="5F7183"/>
                 </a:solidFill>
                 <a:latin typeface="Arial" pitchFamily="34" charset="0"/>
                 <a:ea typeface="Arial" pitchFamily="34" charset="-122"/>
                 <a:cs typeface="Arial" pitchFamily="34" charset="-120"/>
               </a:rPr>
-              <a:t>2048 × 1280 (2.6 MP), mỗi điểm ảnh 3.0 µm vuông</a:t>
-            </a:r>
-            <a:endParaRPr lang="en-US" sz="880" dirty="0"/>
-          </a:p>
-          <a:p>
-            <a:pPr indent="0" marL="0">
-              <a:lnSpc>
-                <a:spcPct val="126000"/>
-              </a:lnSpc>
-              <a:buNone/>
-            </a:pPr>
-            <a:r>
-              <a:rPr lang="en-US" sz="800" dirty="0">
-                <a:solidFill>
-                  <a:srgbClr val="5F7183"/>
-                </a:solidFill>
-                <a:latin typeface="微軟正黑體" pitchFamily="34" charset="0"/>
-                <a:ea typeface="微軟正黑體" pitchFamily="34" charset="-122"/>
-                <a:cs typeface="微軟正黑體" pitchFamily="34" charset="-120"/>
-              </a:rPr>
-              <a:t>2048 × 1280（2.6 MP），一個像素 3 微米見方</a:t>
-            </a:r>
-            <a:endParaRPr lang="en-US" sz="880" dirty="0"/>
+              <a:t>onsemi AR0233AT Product Preview Rev. P2 (11/2017) · 節錄 · 讀取 2026/10/02</a:t>
+            </a:r>
+            <a:endParaRPr lang="en-US" sz="570" dirty="0"/>
           </a:p>
         </p:txBody>
       </p:sp>
       <p:sp>
         <p:nvSpPr>
-          <p:cNvPr id="15" name="Shape 13"/>
+          <p:cNvPr id="9" name="Shape 6"/>
           <p:cNvSpPr/>
           <p:nvPr/>
         </p:nvSpPr>
         <p:spPr>
           <a:xfrm>
-            <a:off x="2749821" y="1535929"/>
-            <a:ext cx="848887" cy="320216"/>
+            <a:off x="4179631" y="1060956"/>
+            <a:ext cx="3686639" cy="1962071"/>
           </a:xfrm>
           <a:prstGeom prst="roundRect">
             <a:avLst>
-              <a:gd name="adj" fmla="val 13712"/>
+              <a:gd name="adj" fmla="val 3773"/>
+            </a:avLst>
+          </a:prstGeom>
+          <a:solidFill>
+            <a:srgbClr val="FFFFFF"/>
+          </a:solidFill>
+          <a:ln w="12700">
+            <a:solidFill>
+              <a:srgbClr val="DBE3EA"/>
+            </a:solidFill>
+            <a:prstDash val="solid"/>
+          </a:ln>
+        </p:spPr>
+      </p:sp>
+      <p:sp>
+        <p:nvSpPr>
+          <p:cNvPr id="10" name="Shape 7"/>
+          <p:cNvSpPr/>
+          <p:nvPr/>
+        </p:nvSpPr>
+        <p:spPr>
+          <a:xfrm>
+            <a:off x="4253659" y="1134985"/>
+            <a:ext cx="3538582" cy="281261"/>
+          </a:xfrm>
+          <a:prstGeom prst="roundRect">
+            <a:avLst>
+              <a:gd name="adj" fmla="val 13160"/>
             </a:avLst>
           </a:prstGeom>
           <a:solidFill>
@@ -18993,14 +18675,14 @@
       </p:sp>
       <p:sp>
         <p:nvSpPr>
-          <p:cNvPr id="16" name="Text 14"/>
+          <p:cNvPr id="11" name="Text 8"/>
           <p:cNvSpPr txBox="1"/>
           <p:nvPr/>
         </p:nvSpPr>
         <p:spPr>
           <a:xfrm>
-            <a:off x="2793729" y="1565201"/>
-            <a:ext cx="761071" cy="276308"/>
+            <a:off x="4312882" y="1157193"/>
+            <a:ext cx="3420137" cy="251649"/>
           </a:xfrm>
           <a:prstGeom prst="rect">
             <a:avLst/>
@@ -19014,12 +18696,12 @@
           <a:p>
             <a:pPr algn="ctr" indent="0" marL="0">
               <a:lnSpc>
-                <a:spcPct val="106000"/>
+                <a:spcPct val="104000"/>
               </a:lnSpc>
               <a:buNone/>
             </a:pPr>
             <a:r>
-              <a:rPr lang="en-US" sz="720" b="1" dirty="0">
+              <a:rPr lang="en-US" sz="770" b="1" dirty="0">
                 <a:solidFill>
                   <a:srgbClr val="FFFFFF"/>
                 </a:solidFill>
@@ -19027,19 +18709,19 @@
                 <a:ea typeface="Arial" pitchFamily="34" charset="-122"/>
                 <a:cs typeface="Arial" pitchFamily="34" charset="-120"/>
               </a:rPr>
-              <a:t>Tốc độ</a:t>
-            </a:r>
-            <a:endParaRPr lang="en-US" sz="720" dirty="0"/>
+              <a:t>Module camera · Raspberry Pi Camera Module 3</a:t>
+            </a:r>
+            <a:endParaRPr lang="en-US" sz="770" dirty="0"/>
           </a:p>
           <a:p>
             <a:pPr algn="ctr" indent="0" marL="0">
               <a:lnSpc>
-                <a:spcPct val="106000"/>
+                <a:spcPct val="104000"/>
               </a:lnSpc>
               <a:buNone/>
             </a:pPr>
             <a:r>
-              <a:rPr lang="en-US" sz="680" dirty="0">
+              <a:rPr lang="en-US" sz="690" dirty="0">
                 <a:solidFill>
                   <a:srgbClr val="FFFFFF"/>
                 </a:solidFill>
@@ -19047,22 +18729,46 @@
                 <a:ea typeface="微軟正黑體" pitchFamily="34" charset="-122"/>
                 <a:cs typeface="微軟正黑體" pitchFamily="34" charset="-120"/>
               </a:rPr>
-              <a:t>更新率</a:t>
-            </a:r>
-            <a:endParaRPr lang="en-US" sz="720" dirty="0"/>
+              <a:t>相機模組 · Raspberry Pi Camera Module 3</a:t>
+            </a:r>
+            <a:endParaRPr lang="en-US" sz="770" dirty="0"/>
           </a:p>
         </p:txBody>
       </p:sp>
-      <p:sp>
-        <p:nvSpPr>
-          <p:cNvPr id="17" name="Text 15"/>
+      <p:pic>
+        <p:nvPicPr>
+          <p:cNvPr id="12" name="Image 1" descr="/Users/tsengchenghsun/Class/carClass/Claude outputs/第五週(10-8)/src/img/w5_s09_module_spec.png">    </p:cNvPr>
+          <p:cNvPicPr>
+            <a:picLocks noChangeAspect="1"/>
+          </p:cNvPicPr>
+          <p:nvPr/>
+        </p:nvPicPr>
+        <p:blipFill>
+          <a:blip r:embed="rId2"/>
+          <a:stretch>
+            <a:fillRect/>
+          </a:stretch>
+        </p:blipFill>
+        <p:spPr>
+          <a:xfrm>
+            <a:off x="4253659" y="1460662"/>
+            <a:ext cx="3538582" cy="1256009"/>
+          </a:xfrm>
+          <a:prstGeom prst="rect">
+            <a:avLst/>
+          </a:prstGeom>
+        </p:spPr>
+      </p:pic>
+      <p:sp>
+        <p:nvSpPr>
+          <p:cNvPr id="13" name="Text 9"/>
           <p:cNvSpPr txBox="1"/>
           <p:nvPr/>
         </p:nvSpPr>
         <p:spPr>
           <a:xfrm>
-            <a:off x="3715795" y="1535929"/>
-            <a:ext cx="4112709" cy="364124"/>
+            <a:off x="4253659" y="2731477"/>
+            <a:ext cx="3538582" cy="202716"/>
           </a:xfrm>
           <a:prstGeom prst="rect">
             <a:avLst/>
@@ -19071,206 +18777,37 @@
           <a:ln/>
         </p:spPr>
         <p:txBody>
-          <a:bodyPr wrap="square" lIns="0" tIns="0" rIns="0" bIns="0" rtlCol="0" anchor="t"/>
+          <a:bodyPr wrap="square" lIns="0" tIns="0" rIns="0" bIns="0" rtlCol="0" anchor="ctr"/>
           <a:lstStyle/>
           <a:p>
-            <a:pPr indent="0" marL="0">
-              <a:lnSpc>
-                <a:spcPct val="126000"/>
-              </a:lnSpc>
+            <a:pPr algn="ctr" indent="0" marL="0">
               <a:buNone/>
             </a:pPr>
             <a:r>
-              <a:rPr lang="en-US" sz="880" dirty="0">
-                <a:solidFill>
-                  <a:srgbClr val="1A2733"/>
+              <a:rPr lang="en-US" sz="570" dirty="0">
+                <a:solidFill>
+                  <a:srgbClr val="5F7183"/>
                 </a:solidFill>
                 <a:latin typeface="Arial" pitchFamily="34" charset="0"/>
                 <a:ea typeface="Arial" pitchFamily="34" charset="-122"/>
                 <a:cs typeface="Arial" pitchFamily="34" charset="-120"/>
               </a:rPr>
-              <a:t>60 fps ở 1080p — nhanh hơn lidar sáu lần</a:t>
-            </a:r>
-            <a:endParaRPr lang="en-US" sz="880" dirty="0"/>
-          </a:p>
-          <a:p>
-            <a:pPr indent="0" marL="0">
-              <a:lnSpc>
-                <a:spcPct val="126000"/>
-              </a:lnSpc>
-              <a:buNone/>
-            </a:pPr>
-            <a:r>
-              <a:rPr lang="en-US" sz="800" dirty="0">
-                <a:solidFill>
-                  <a:srgbClr val="5F7183"/>
-                </a:solidFill>
-                <a:latin typeface="微軟正黑體" pitchFamily="34" charset="0"/>
-                <a:ea typeface="微軟正黑體" pitchFamily="34" charset="-122"/>
-                <a:cs typeface="微軟正黑體" pitchFamily="34" charset="-120"/>
-              </a:rPr>
-              <a:t>1080p 每秒 60 張——比光達快六倍</a:t>
-            </a:r>
-            <a:endParaRPr lang="en-US" sz="880" dirty="0"/>
+              <a:t>Raspberry Pi Camera Module 3 Product Brief, p.5 · 節錄 · 讀取 2026/10/02</a:t>
+            </a:r>
+            <a:endParaRPr lang="en-US" sz="570" dirty="0"/>
           </a:p>
         </p:txBody>
       </p:sp>
       <p:sp>
         <p:nvSpPr>
-          <p:cNvPr id="18" name="Shape 16"/>
+          <p:cNvPr id="14" name="Shape 10"/>
           <p:cNvSpPr/>
           <p:nvPr/>
         </p:nvSpPr>
         <p:spPr>
           <a:xfrm>
-            <a:off x="2749821" y="1951279"/>
-            <a:ext cx="848887" cy="320216"/>
-          </a:xfrm>
-          <a:prstGeom prst="roundRect">
-            <a:avLst>
-              <a:gd name="adj" fmla="val 13712"/>
-            </a:avLst>
-          </a:prstGeom>
-          <a:solidFill>
-            <a:srgbClr val="FFB020"/>
-          </a:solidFill>
-          <a:ln/>
-        </p:spPr>
-      </p:sp>
-      <p:sp>
-        <p:nvSpPr>
-          <p:cNvPr id="19" name="Text 17"/>
-          <p:cNvSpPr txBox="1"/>
-          <p:nvPr/>
-        </p:nvSpPr>
-        <p:spPr>
-          <a:xfrm>
-            <a:off x="2793729" y="1980551"/>
-            <a:ext cx="761071" cy="276308"/>
-          </a:xfrm>
-          <a:prstGeom prst="rect">
-            <a:avLst/>
-          </a:prstGeom>
-          <a:noFill/>
-          <a:ln/>
-        </p:spPr>
-        <p:txBody>
-          <a:bodyPr wrap="square" lIns="0" tIns="0" rIns="0" bIns="0" rtlCol="0" anchor="t"/>
-          <a:lstStyle/>
-          <a:p>
-            <a:pPr algn="ctr" indent="0" marL="0">
-              <a:lnSpc>
-                <a:spcPct val="106000"/>
-              </a:lnSpc>
-              <a:buNone/>
-            </a:pPr>
-            <a:r>
-              <a:rPr lang="en-US" sz="720" b="1" dirty="0">
-                <a:solidFill>
-                  <a:srgbClr val="3A2A00"/>
-                </a:solidFill>
-                <a:latin typeface="Arial" pitchFamily="34" charset="0"/>
-                <a:ea typeface="Arial" pitchFamily="34" charset="-122"/>
-                <a:cs typeface="Arial" pitchFamily="34" charset="-120"/>
-              </a:rPr>
-              <a:t>Không có</a:t>
-            </a:r>
-            <a:endParaRPr lang="en-US" sz="720" dirty="0"/>
-          </a:p>
-          <a:p>
-            <a:pPr algn="ctr" indent="0" marL="0">
-              <a:lnSpc>
-                <a:spcPct val="106000"/>
-              </a:lnSpc>
-              <a:buNone/>
-            </a:pPr>
-            <a:r>
-              <a:rPr lang="en-US" sz="680" dirty="0">
-                <a:solidFill>
-                  <a:srgbClr val="3A2A00"/>
-                </a:solidFill>
-                <a:latin typeface="微軟正黑體" pitchFamily="34" charset="0"/>
-                <a:ea typeface="微軟正黑體" pitchFamily="34" charset="-122"/>
-                <a:cs typeface="微軟正黑體" pitchFamily="34" charset="-120"/>
-              </a:rPr>
-              <a:t>沒有的</a:t>
-            </a:r>
-            <a:endParaRPr lang="en-US" sz="720" dirty="0"/>
-          </a:p>
-        </p:txBody>
-      </p:sp>
-      <p:sp>
-        <p:nvSpPr>
-          <p:cNvPr id="20" name="Text 18"/>
-          <p:cNvSpPr txBox="1"/>
-          <p:nvPr/>
-        </p:nvSpPr>
-        <p:spPr>
-          <a:xfrm>
-            <a:off x="3715795" y="1951279"/>
-            <a:ext cx="4112709" cy="364124"/>
-          </a:xfrm>
-          <a:prstGeom prst="rect">
-            <a:avLst/>
-          </a:prstGeom>
-          <a:noFill/>
-          <a:ln/>
-        </p:spPr>
-        <p:txBody>
-          <a:bodyPr wrap="square" lIns="0" tIns="0" rIns="0" bIns="0" rtlCol="0" anchor="t"/>
-          <a:lstStyle/>
-          <a:p>
-            <a:pPr indent="0" marL="0">
-              <a:lnSpc>
-                <a:spcPct val="126000"/>
-              </a:lnSpc>
-              <a:buNone/>
-            </a:pPr>
-            <a:r>
-              <a:rPr lang="en-US" sz="880" dirty="0">
-                <a:solidFill>
-                  <a:srgbClr val="1A2733"/>
-                </a:solidFill>
-                <a:latin typeface="Arial" pitchFamily="34" charset="0"/>
-                <a:ea typeface="Arial" pitchFamily="34" charset="-122"/>
-                <a:cs typeface="Arial" pitchFamily="34" charset="-120"/>
-              </a:rPr>
-              <a:t>Không có dòng góc nhìn, cũng không có dòng tầm đo</a:t>
-            </a:r>
-            <a:endParaRPr lang="en-US" sz="880" dirty="0"/>
-          </a:p>
-          <a:p>
-            <a:pPr indent="0" marL="0">
-              <a:lnSpc>
-                <a:spcPct val="126000"/>
-              </a:lnSpc>
-              <a:buNone/>
-            </a:pPr>
-            <a:r>
-              <a:rPr lang="en-US" sz="800" dirty="0">
-                <a:solidFill>
-                  <a:srgbClr val="5F7183"/>
-                </a:solidFill>
-                <a:latin typeface="微軟正黑體" pitchFamily="34" charset="0"/>
-                <a:ea typeface="微軟正黑體" pitchFamily="34" charset="-122"/>
-                <a:cs typeface="微軟正黑體" pitchFamily="34" charset="-120"/>
-              </a:rPr>
-              <a:t>沒有視野那一行，也沒有測距那一行</a:t>
-            </a:r>
-            <a:endParaRPr lang="en-US" sz="880" dirty="0"/>
-          </a:p>
-        </p:txBody>
-      </p:sp>
-      <p:sp>
-        <p:nvSpPr>
-          <p:cNvPr id="21" name="Shape 19"/>
-          <p:cNvSpPr/>
-          <p:nvPr/>
-        </p:nvSpPr>
-        <p:spPr>
-          <a:xfrm>
-            <a:off x="1315495" y="3146735"/>
-            <a:ext cx="6513009" cy="453715"/>
+            <a:off x="1277730" y="3141473"/>
+            <a:ext cx="6588540" cy="458977"/>
           </a:xfrm>
           <a:prstGeom prst="roundRect">
             <a:avLst>
@@ -19290,14 +18827,14 @@
       </p:sp>
       <p:sp>
         <p:nvSpPr>
-          <p:cNvPr id="22" name="Text 20"/>
+          <p:cNvPr id="15" name="Text 11"/>
           <p:cNvSpPr txBox="1"/>
           <p:nvPr/>
         </p:nvSpPr>
         <p:spPr>
           <a:xfrm>
-            <a:off x="1461855" y="3197961"/>
-            <a:ext cx="6220290" cy="365899"/>
+            <a:off x="1425787" y="3193293"/>
+            <a:ext cx="6292426" cy="370143"/>
           </a:xfrm>
           <a:prstGeom prst="rect">
             <a:avLst/>
@@ -19316,7 +18853,7 @@
               <a:buNone/>
             </a:pPr>
             <a:r>
-              <a:rPr lang="en-US" sz="960" b="1" dirty="0">
+              <a:rPr lang="en-US" sz="970" b="1" dirty="0">
                 <a:solidFill>
                   <a:srgbClr val="7A4E00"/>
                 </a:solidFill>
@@ -19324,9 +18861,9 @@
                 <a:ea typeface="Arial" pitchFamily="34" charset="-122"/>
                 <a:cs typeface="Arial" pitchFamily="34" charset="-120"/>
               </a:rPr>
-              <a:t>Hai thứ ta cần nhất thì bảng này không hề có. Vì sao?</a:t>
-            </a:r>
-            <a:endParaRPr lang="en-US" sz="960" dirty="0"/>
+              <a:t>Hai thứ ta cần nhất thì bảng bên trái không hề có. Vì sao?</a:t>
+            </a:r>
+            <a:endParaRPr lang="en-US" sz="970" dirty="0"/>
           </a:p>
           <a:p>
             <a:pPr indent="0" marL="0">
@@ -19336,7 +18873,7 @@
               <a:buNone/>
             </a:pPr>
             <a:r>
-              <a:rPr lang="en-US" sz="880" dirty="0">
+              <a:rPr lang="en-US" sz="890" dirty="0">
                 <a:solidFill>
                   <a:srgbClr val="7A4E00"/>
                 </a:solidFill>
@@ -19344,22 +18881,22 @@
                 <a:ea typeface="微軟正黑體" pitchFamily="34" charset="-122"/>
                 <a:cs typeface="微軟正黑體" pitchFamily="34" charset="-120"/>
               </a:rPr>
-              <a:t>我們最需要的兩個東西，這張表上偏偏都沒有。為什麼？</a:t>
-            </a:r>
-            <a:endParaRPr lang="en-US" sz="960" dirty="0"/>
+              <a:t>我們最需要的兩個東西，左邊這張偏偏都沒有。為什麼？</a:t>
+            </a:r>
+            <a:endParaRPr lang="en-US" sz="970" dirty="0"/>
           </a:p>
         </p:txBody>
       </p:sp>
       <p:pic>
         <p:nvPicPr>
-          <p:cNvPr id="24" name="Image 0" descr="/Users/tsengchenghsun/Class/carClass/Claude outputs/第五週(10-8)/src/logo.png">    </p:cNvPr>
+          <p:cNvPr id="17" name="Image 2" descr="/Users/tsengchenghsun/Class/carClass/Claude outputs/第五週(10-8)/src/logo.png">    </p:cNvPr>
           <p:cNvPicPr>
             <a:picLocks noChangeAspect="1"/>
           </p:cNvPicPr>
           <p:nvPr/>
         </p:nvPicPr>
         <p:blipFill>
-          <a:blip r:embed="rId1"/>
+          <a:blip r:embed="rId3"/>
           <a:stretch>
             <a:fillRect/>
           </a:stretch>
@@ -19376,14 +18913,14 @@
       </p:pic>
       <p:sp>
         <p:nvSpPr>
-          <p:cNvPr id="25" name="Text 21"/>
+          <p:cNvPr id="18" name="Text 12"/>
           <p:cNvSpPr txBox="1"/>
           <p:nvPr/>
         </p:nvSpPr>
         <p:spPr>
           <a:xfrm>
-            <a:off x="1000822" y="102452"/>
-            <a:ext cx="658619" cy="204904"/>
+            <a:off x="959407" y="103640"/>
+            <a:ext cx="666257" cy="207280"/>
           </a:xfrm>
           <a:prstGeom prst="rect">
             <a:avLst/>
@@ -19399,7 +18936,7 @@
               <a:buNone/>
             </a:pPr>
             <a:r>
-              <a:rPr lang="en-US" sz="720" dirty="0">
+              <a:rPr lang="en-US" sz="730" dirty="0">
                 <a:solidFill>
                   <a:srgbClr val="5F7183"/>
                 </a:solidFill>
@@ -19409,20 +18946,20 @@
               </a:rPr>
               <a:t>9 / 14</a:t>
             </a:r>
-            <a:endParaRPr lang="en-US" sz="720" dirty="0"/>
+            <a:endParaRPr lang="en-US" sz="730" dirty="0"/>
           </a:p>
         </p:txBody>
       </p:sp>
       <p:sp>
         <p:nvSpPr>
-          <p:cNvPr id="26" name="Text 22"/>
+          <p:cNvPr id="19" name="Text 13"/>
           <p:cNvSpPr txBox="1"/>
           <p:nvPr/>
         </p:nvSpPr>
         <p:spPr>
           <a:xfrm>
-            <a:off x="1681395" y="102452"/>
-            <a:ext cx="1609957" cy="204904"/>
+            <a:off x="1647872" y="103640"/>
+            <a:ext cx="1628628" cy="207280"/>
           </a:xfrm>
           <a:prstGeom prst="rect">
             <a:avLst/>
@@ -19438,7 +18975,7 @@
               <a:buNone/>
             </a:pPr>
             <a:r>
-              <a:rPr lang="en-US" sz="720" dirty="0">
+              <a:rPr lang="en-US" sz="730" dirty="0">
                 <a:solidFill>
                   <a:srgbClr val="5F7183"/>
                 </a:solidFill>
@@ -19448,7 +18985,7 @@
               </a:rPr>
               <a:t>Tiết 1 · 第 1 節</a:t>
             </a:r>
-            <a:endParaRPr lang="en-US" sz="720" dirty="0"/>
+            <a:endParaRPr lang="en-US" sz="730" dirty="0"/>
           </a:p>
         </p:txBody>
       </p:sp>

--- a/第五週(10-08)/第五週_第1節_簡報.pptx
+++ b/第五週(10-08)/第五週_第1節_簡報.pptx
@@ -7883,7 +7883,7 @@
       </p:nvGrpSpPr>
       <p:grpSpPr>
         <a:xfrm>
-          <a:off x="1028250" y="0"/>
+          <a:off x="15750" y="0"/>
           <a:ext cx="1" cy="1"/>
           <a:chOff x="0" y="0"/>
           <a:chExt cx="0" cy="0"/>
@@ -7897,8 +7897,8 @@
         </p:nvSpPr>
         <p:spPr>
           <a:xfrm>
-            <a:off x="6273000" y="-1063125"/>
-            <a:ext cx="3260250" cy="3260250"/>
+            <a:off x="6759000" y="-1366875"/>
+            <a:ext cx="4191750" cy="4191750"/>
           </a:xfrm>
           <a:prstGeom prst="ellipse">
             <a:avLst/>
@@ -7922,8 +7922,8 @@
         </p:nvSpPr>
         <p:spPr>
           <a:xfrm>
-            <a:off x="7336125" y="1630125"/>
-            <a:ext cx="1842750" cy="1842750"/>
+            <a:off x="8125875" y="2095875"/>
+            <a:ext cx="2369250" cy="2369250"/>
           </a:xfrm>
           <a:prstGeom prst="ellipse">
             <a:avLst/>
@@ -7944,8 +7944,8 @@
         </p:nvSpPr>
         <p:spPr>
           <a:xfrm>
-            <a:off x="1418063" y="935550"/>
-            <a:ext cx="5386500" cy="212625"/>
+            <a:off x="516938" y="1202850"/>
+            <a:ext cx="6925500" cy="273375"/>
           </a:xfrm>
           <a:prstGeom prst="rect">
             <a:avLst/>
@@ -7961,7 +7961,7 @@
               <a:buNone/>
             </a:pPr>
             <a:r>
-              <a:rPr lang="en-US" sz="970" b="1" dirty="0">
+              <a:rPr lang="en-US" sz="1250" b="1" dirty="0">
                 <a:solidFill>
                   <a:srgbClr val="00A896"/>
                 </a:solidFill>
@@ -7971,7 +7971,7 @@
               </a:rPr>
               <a:t>MITUST · Nguyên lý xe tự lái · Tuần 5</a:t>
             </a:r>
-            <a:endParaRPr lang="en-US" sz="970" dirty="0"/>
+            <a:endParaRPr lang="en-US" sz="1250" dirty="0"/>
           </a:p>
         </p:txBody>
       </p:sp>
@@ -7983,8 +7983,8 @@
         </p:nvSpPr>
         <p:spPr>
           <a:xfrm>
-            <a:off x="1418063" y="1219050"/>
-            <a:ext cx="5811750" cy="686349"/>
+            <a:off x="516938" y="1567350"/>
+            <a:ext cx="7472250" cy="882449"/>
           </a:xfrm>
           <a:prstGeom prst="rect">
             <a:avLst/>
@@ -8003,7 +8003,7 @@
               <a:buNone/>
             </a:pPr>
             <a:r>
-              <a:rPr lang="en-US" sz="2640" b="1" dirty="0">
+              <a:rPr lang="en-US" sz="3390" b="1" dirty="0">
                 <a:solidFill>
                   <a:srgbClr val="FFFFFF"/>
                 </a:solidFill>
@@ -8013,7 +8013,7 @@
               </a:rPr>
               <a:t>Hôm nay đọc bảng thông số thật</a:t>
             </a:r>
-            <a:endParaRPr lang="en-US" sz="2640" dirty="0"/>
+            <a:endParaRPr lang="en-US" sz="3390" dirty="0"/>
           </a:p>
           <a:p>
             <a:pPr indent="0" marL="0">
@@ -8023,7 +8023,7 @@
               <a:buNone/>
             </a:pPr>
             <a:r>
-              <a:rPr lang="en-US" sz="1470" dirty="0">
+              <a:rPr lang="en-US" sz="1890" dirty="0">
                 <a:solidFill>
                   <a:srgbClr val="C8D6E2"/>
                 </a:solidFill>
@@ -8033,7 +8033,7 @@
               </a:rPr>
               <a:t>今天來讀真正的規格表</a:t>
             </a:r>
-            <a:endParaRPr lang="en-US" sz="2640" dirty="0"/>
+            <a:endParaRPr lang="en-US" sz="3390" dirty="0"/>
           </a:p>
         </p:txBody>
       </p:sp>
@@ -8045,8 +8045,8 @@
         </p:nvSpPr>
         <p:spPr>
           <a:xfrm>
-            <a:off x="1418063" y="2331867"/>
-            <a:ext cx="1063125" cy="31894"/>
+            <a:off x="516938" y="2998115"/>
+            <a:ext cx="1366875" cy="41006"/>
           </a:xfrm>
           <a:prstGeom prst="rect">
             <a:avLst/>
@@ -8065,8 +8065,8 @@
         </p:nvSpPr>
         <p:spPr>
           <a:xfrm>
-            <a:off x="1418063" y="2487792"/>
-            <a:ext cx="5528250" cy="474783"/>
+            <a:off x="516938" y="3198590"/>
+            <a:ext cx="7107750" cy="610435"/>
           </a:xfrm>
           <a:prstGeom prst="rect">
             <a:avLst/>
@@ -8085,7 +8085,7 @@
               <a:buNone/>
             </a:pPr>
             <a:r>
-              <a:rPr lang="en-US" sz="1120" dirty="0">
+              <a:rPr lang="en-US" sz="1450" dirty="0">
                 <a:solidFill>
                   <a:srgbClr val="C8D6E2"/>
                 </a:solidFill>
@@ -8095,7 +8095,7 @@
               </a:rPr>
               <a:t>Ba thanh trượt hai tuần vừa rồi — hôm nay tìm chúng trên datasheet của hãng</a:t>
             </a:r>
-            <a:endParaRPr lang="en-US" sz="1120" dirty="0"/>
+            <a:endParaRPr lang="en-US" sz="1450" dirty="0"/>
           </a:p>
           <a:p>
             <a:pPr indent="0" marL="0">
@@ -8105,7 +8105,7 @@
               <a:buNone/>
             </a:pPr>
             <a:r>
-              <a:rPr lang="en-US" sz="970" dirty="0">
+              <a:rPr lang="en-US" sz="1250" dirty="0">
                 <a:solidFill>
                   <a:srgbClr val="8AA0B4"/>
                 </a:solidFill>
@@ -8115,7 +8115,7 @@
               </a:rPr>
               <a:t>前兩週拉的那三個滑桿，今天在廠商的規格表上把它們找出來</a:t>
             </a:r>
-            <a:endParaRPr lang="en-US" sz="1120" dirty="0"/>
+            <a:endParaRPr lang="en-US" sz="1450" dirty="0"/>
           </a:p>
         </p:txBody>
       </p:sp>
@@ -8127,8 +8127,8 @@
         </p:nvSpPr>
         <p:spPr>
           <a:xfrm>
-            <a:off x="1418063" y="3019275"/>
-            <a:ext cx="4606875" cy="297675"/>
+            <a:off x="516938" y="3881925"/>
+            <a:ext cx="5923125" cy="382725"/>
           </a:xfrm>
           <a:prstGeom prst="roundRect">
             <a:avLst>
@@ -8149,8 +8149,8 @@
         </p:nvSpPr>
         <p:spPr>
           <a:xfrm>
-            <a:off x="1517288" y="3054713"/>
-            <a:ext cx="4408425" cy="226800"/>
+            <a:off x="644513" y="3927488"/>
+            <a:ext cx="5667975" cy="291600"/>
           </a:xfrm>
           <a:prstGeom prst="rect">
             <a:avLst/>
@@ -8166,7 +8166,7 @@
               <a:buNone/>
             </a:pPr>
             <a:r>
-              <a:rPr lang="en-US" sz="810" b="1" dirty="0">
+              <a:rPr lang="en-US" sz="1050" b="1" dirty="0">
                 <a:solidFill>
                   <a:srgbClr val="9FD6CE"/>
                 </a:solidFill>
@@ -8176,7 +8176,7 @@
               </a:rPr>
               <a:t>工具｜Công cụ： ch-neural.github.io/MITUST-Principles-of-Self-Driving-Cars/week5/spec/</a:t>
             </a:r>
-            <a:endParaRPr lang="en-US" sz="810" dirty="0"/>
+            <a:endParaRPr lang="en-US" sz="1050" dirty="0"/>
           </a:p>
         </p:txBody>
       </p:sp>
@@ -8188,8 +8188,8 @@
         </p:nvSpPr>
         <p:spPr>
           <a:xfrm>
-            <a:off x="1418063" y="3387825"/>
-            <a:ext cx="5386500" cy="212625"/>
+            <a:off x="516938" y="4355775"/>
+            <a:ext cx="6925500" cy="273375"/>
           </a:xfrm>
           <a:prstGeom prst="rect">
             <a:avLst/>
@@ -8205,7 +8205,7 @@
               <a:buNone/>
             </a:pPr>
             <a:r>
-              <a:rPr lang="en-US" sz="890" dirty="0">
+              <a:rPr lang="en-US" sz="1150" dirty="0">
                 <a:solidFill>
                   <a:srgbClr val="8AA0B4"/>
                 </a:solidFill>
@@ -8215,7 +8215,7 @@
               </a:rPr>
               <a:t>第五週 第 1 節　2026/10/08（四）09:10–10:00　CH Tseng</a:t>
             </a:r>
-            <a:endParaRPr lang="en-US" sz="890" dirty="0"/>
+            <a:endParaRPr lang="en-US" sz="1150" dirty="0"/>
           </a:p>
         </p:txBody>
       </p:sp>
@@ -8227,8 +8227,8 @@
         </p:nvSpPr>
         <p:spPr>
           <a:xfrm>
-            <a:off x="1304663" y="240975"/>
-            <a:ext cx="1715175" cy="581175"/>
+            <a:off x="371138" y="309825"/>
+            <a:ext cx="2205225" cy="747225"/>
           </a:xfrm>
           <a:prstGeom prst="roundRect">
             <a:avLst>
@@ -8284,7 +8284,7 @@
       </p:nvGrpSpPr>
       <p:grpSpPr>
         <a:xfrm>
-          <a:off x="942514" y="0"/>
+          <a:off x="0" y="0"/>
           <a:ext cx="1" cy="1"/>
           <a:chOff x="0" y="0"/>
           <a:chExt cx="0" cy="0"/>
@@ -8298,8 +8298,8 @@
         </p:nvSpPr>
         <p:spPr>
           <a:xfrm>
-            <a:off x="1341758" y="333913"/>
-            <a:ext cx="6460485" cy="217769"/>
+            <a:off x="502920" y="420624"/>
+            <a:ext cx="8138160" cy="274320"/>
           </a:xfrm>
           <a:prstGeom prst="rect">
             <a:avLst/>
@@ -8315,7 +8315,7 @@
               <a:buNone/>
             </a:pPr>
             <a:r>
-              <a:rPr lang="en-US" sz="990" b="1" dirty="0">
+              <a:rPr lang="en-US" sz="1250" b="1" dirty="0">
                 <a:solidFill>
                   <a:srgbClr val="007F72"/>
                 </a:solidFill>
@@ -8325,7 +8325,7 @@
               </a:rPr>
               <a:t>Câu trả lời · 答案</a:t>
             </a:r>
-            <a:endParaRPr lang="en-US" sz="990" dirty="0"/>
+            <a:endParaRPr lang="en-US" sz="1250" dirty="0"/>
           </a:p>
         </p:txBody>
       </p:sp>
@@ -8337,8 +8337,8 @@
         </p:nvSpPr>
         <p:spPr>
           <a:xfrm>
-            <a:off x="1341758" y="874706"/>
-            <a:ext cx="1959922" cy="1996217"/>
+            <a:off x="502920" y="1101852"/>
+            <a:ext cx="2468880" cy="2514600"/>
           </a:xfrm>
           <a:prstGeom prst="roundRect">
             <a:avLst>
@@ -8364,8 +8364,8 @@
         </p:nvSpPr>
         <p:spPr>
           <a:xfrm flipH="1" flipV="1">
-            <a:off x="1986350" y="1022825"/>
-            <a:ext cx="335369" cy="497204"/>
+            <a:off x="1314902" y="1288435"/>
+            <a:ext cx="422458" cy="626319"/>
           </a:xfrm>
           <a:prstGeom prst="line">
             <a:avLst/>
@@ -8387,8 +8387,8 @@
         </p:nvSpPr>
         <p:spPr>
           <a:xfrm flipH="1" flipV="1">
-            <a:off x="2146373" y="946498"/>
-            <a:ext cx="175346" cy="573531"/>
+            <a:off x="1516480" y="1192287"/>
+            <a:ext cx="220880" cy="722467"/>
           </a:xfrm>
           <a:prstGeom prst="line">
             <a:avLst/>
@@ -8410,8 +8410,8 @@
         </p:nvSpPr>
         <p:spPr>
           <a:xfrm flipV="1">
-            <a:off x="2321719" y="920292"/>
-            <a:ext cx="1" cy="599736"/>
+            <a:off x="1737360" y="1159276"/>
+            <a:ext cx="1" cy="755477"/>
           </a:xfrm>
           <a:prstGeom prst="line">
             <a:avLst/>
@@ -8433,8 +8433,8 @@
         </p:nvSpPr>
         <p:spPr>
           <a:xfrm flipV="1">
-            <a:off x="2321719" y="946498"/>
-            <a:ext cx="175346" cy="573531"/>
+            <a:off x="1737360" y="1192287"/>
+            <a:ext cx="220880" cy="722467"/>
           </a:xfrm>
           <a:prstGeom prst="line">
             <a:avLst/>
@@ -8456,8 +8456,8 @@
         </p:nvSpPr>
         <p:spPr>
           <a:xfrm flipV="1">
-            <a:off x="2321719" y="1022825"/>
-            <a:ext cx="335369" cy="497204"/>
+            <a:off x="1737360" y="1288435"/>
+            <a:ext cx="422458" cy="626319"/>
           </a:xfrm>
           <a:prstGeom prst="line">
             <a:avLst/>
@@ -8479,8 +8479,8 @@
         </p:nvSpPr>
         <p:spPr>
           <a:xfrm>
-            <a:off x="2272532" y="1470842"/>
-            <a:ext cx="98373" cy="98373"/>
+            <a:off x="1675400" y="1852794"/>
+            <a:ext cx="123919" cy="123919"/>
           </a:xfrm>
           <a:prstGeom prst="ellipse">
             <a:avLst/>
@@ -8499,8 +8499,8 @@
         </p:nvSpPr>
         <p:spPr>
           <a:xfrm flipH="1" flipV="1">
-            <a:off x="1735088" y="2242023"/>
-            <a:ext cx="586630" cy="124693"/>
+            <a:off x="998392" y="2824237"/>
+            <a:ext cx="738968" cy="157073"/>
           </a:xfrm>
           <a:prstGeom prst="line">
             <a:avLst/>
@@ -8522,8 +8522,8 @@
         </p:nvSpPr>
         <p:spPr>
           <a:xfrm flipH="1" flipV="1">
-            <a:off x="1944293" y="1900633"/>
-            <a:ext cx="377426" cy="466083"/>
+            <a:off x="1261923" y="2394194"/>
+            <a:ext cx="475437" cy="587116"/>
           </a:xfrm>
           <a:prstGeom prst="line">
             <a:avLst/>
@@ -8545,8 +8545,8 @@
         </p:nvSpPr>
         <p:spPr>
           <a:xfrm flipV="1">
-            <a:off x="2321719" y="1766979"/>
-            <a:ext cx="1" cy="599736"/>
+            <a:off x="1737360" y="2225832"/>
+            <a:ext cx="1" cy="755477"/>
           </a:xfrm>
           <a:prstGeom prst="line">
             <a:avLst/>
@@ -8568,8 +8568,8 @@
         </p:nvSpPr>
         <p:spPr>
           <a:xfrm flipV="1">
-            <a:off x="2321719" y="1900633"/>
-            <a:ext cx="377426" cy="466083"/>
+            <a:off x="1737360" y="2394194"/>
+            <a:ext cx="475437" cy="587116"/>
           </a:xfrm>
           <a:prstGeom prst="line">
             <a:avLst/>
@@ -8591,8 +8591,8 @@
         </p:nvSpPr>
         <p:spPr>
           <a:xfrm flipV="1">
-            <a:off x="2321719" y="2242023"/>
-            <a:ext cx="586630" cy="124693"/>
+            <a:off x="1737360" y="2824237"/>
+            <a:ext cx="738968" cy="157073"/>
           </a:xfrm>
           <a:prstGeom prst="line">
             <a:avLst/>
@@ -8614,8 +8614,8 @@
         </p:nvSpPr>
         <p:spPr>
           <a:xfrm>
-            <a:off x="2272532" y="2317528"/>
-            <a:ext cx="98373" cy="98373"/>
+            <a:off x="1675400" y="2919350"/>
+            <a:ext cx="123919" cy="123919"/>
           </a:xfrm>
           <a:prstGeom prst="ellipse">
             <a:avLst/>
@@ -8634,8 +8634,8 @@
         </p:nvSpPr>
         <p:spPr>
           <a:xfrm>
-            <a:off x="3664629" y="1047093"/>
-            <a:ext cx="4137614" cy="798305"/>
+            <a:off x="3429000" y="1319005"/>
+            <a:ext cx="5212080" cy="1005611"/>
           </a:xfrm>
           <a:prstGeom prst="rect">
             <a:avLst/>
@@ -8654,7 +8654,7 @@
               <a:buNone/>
             </a:pPr>
             <a:r>
-              <a:rPr lang="en-US" sz="1830" b="1" dirty="0">
+              <a:rPr lang="en-US" sz="2300" b="1" dirty="0">
                 <a:solidFill>
                   <a:srgbClr val="0B1F3A"/>
                 </a:solidFill>
@@ -8664,7 +8664,7 @@
               </a:rPr>
               <a:t>Góc nhìn không nằm ở cảm biến — nó nằm ở ống kính</a:t>
             </a:r>
-            <a:endParaRPr lang="en-US" sz="1830" dirty="0"/>
+            <a:endParaRPr lang="en-US" sz="2300" dirty="0"/>
           </a:p>
           <a:p>
             <a:pPr indent="0" marL="0">
@@ -8674,7 +8674,7 @@
               <a:buNone/>
             </a:pPr>
             <a:r>
-              <a:rPr lang="en-US" sz="1110" dirty="0">
+              <a:rPr lang="en-US" sz="1400" dirty="0">
                 <a:solidFill>
                   <a:srgbClr val="007F72"/>
                 </a:solidFill>
@@ -8684,7 +8684,7 @@
               </a:rPr>
               <a:t>視野不在感測器身上——它在鏡頭身上</a:t>
             </a:r>
-            <a:endParaRPr lang="en-US" sz="1830" dirty="0"/>
+            <a:endParaRPr lang="en-US" sz="2300" dirty="0"/>
           </a:p>
         </p:txBody>
       </p:sp>
@@ -8696,8 +8696,8 @@
         </p:nvSpPr>
         <p:spPr>
           <a:xfrm>
-            <a:off x="3664629" y="1917989"/>
-            <a:ext cx="4137614" cy="853137"/>
+            <a:off x="3429000" y="2416057"/>
+            <a:ext cx="5212080" cy="1074682"/>
           </a:xfrm>
           <a:prstGeom prst="rect">
             <a:avLst/>
@@ -8716,7 +8716,7 @@
               <a:buNone/>
             </a:pPr>
             <a:r>
-              <a:rPr lang="en-US" sz="990" dirty="0">
+              <a:rPr lang="en-US" sz="1250" dirty="0">
                 <a:solidFill>
                   <a:srgbClr val="5F7183"/>
                 </a:solidFill>
@@ -8726,7 +8726,7 @@
               </a:rPr>
               <a:t>Cùng một con chip, lắp ống kính 8 mm thì nhìn được 42°, lắp ống kính 3.6 mm thì nhìn được 81°. Hãng bán chip không biết bạn sẽ lắp ống kính nào, nên họ không thể viết.</a:t>
             </a:r>
-            <a:endParaRPr lang="en-US" sz="990" dirty="0"/>
+            <a:endParaRPr lang="en-US" sz="1250" dirty="0"/>
           </a:p>
           <a:p>
             <a:pPr indent="0" marL="0">
@@ -8736,7 +8736,7 @@
               <a:buNone/>
             </a:pPr>
             <a:r>
-              <a:rPr lang="en-US" sz="910" dirty="0">
+              <a:rPr lang="en-US" sz="1150" dirty="0">
                 <a:solidFill>
                   <a:srgbClr val="5F7183"/>
                 </a:solidFill>
@@ -8746,7 +8746,7 @@
               </a:rPr>
               <a:t>同一塊晶片，配 8 mm 的鏡頭看得到 42 度，配 3.6 mm 的鏡頭看得到 81 度。賣晶片的廠商不知道你要配什麼鏡頭，所以寫不出來。</a:t>
             </a:r>
-            <a:endParaRPr lang="en-US" sz="990" dirty="0"/>
+            <a:endParaRPr lang="en-US" sz="1250" dirty="0"/>
           </a:p>
         </p:txBody>
       </p:sp>
@@ -8758,8 +8758,8 @@
         </p:nvSpPr>
         <p:spPr>
           <a:xfrm>
-            <a:off x="1341758" y="3106840"/>
-            <a:ext cx="6460485" cy="493610"/>
+            <a:off x="502920" y="3913632"/>
+            <a:ext cx="8138160" cy="621792"/>
           </a:xfrm>
           <a:prstGeom prst="roundRect">
             <a:avLst>
@@ -8785,8 +8785,8 @@
         </p:nvSpPr>
         <p:spPr>
           <a:xfrm>
-            <a:off x="1486937" y="3164912"/>
-            <a:ext cx="6170126" cy="391984"/>
+            <a:off x="685800" y="3986784"/>
+            <a:ext cx="7772400" cy="493776"/>
           </a:xfrm>
           <a:prstGeom prst="rect">
             <a:avLst/>
@@ -8805,7 +8805,7 @@
               <a:buNone/>
             </a:pPr>
             <a:r>
-              <a:rPr lang="en-US" sz="990" b="1" dirty="0">
+              <a:rPr lang="en-US" sz="1250" b="1" dirty="0">
                 <a:solidFill>
                   <a:srgbClr val="7A4E00"/>
                 </a:solidFill>
@@ -8815,7 +8815,7 @@
               </a:rPr>
               <a:t>Còn tầm đo: camera không hề đo khoảng cách — nó tính ra, như tuần 3 đã làm.</a:t>
             </a:r>
-            <a:endParaRPr lang="en-US" sz="990" dirty="0"/>
+            <a:endParaRPr lang="en-US" sz="1250" dirty="0"/>
           </a:p>
           <a:p>
             <a:pPr indent="0" marL="0">
@@ -8825,7 +8825,7 @@
               <a:buNone/>
             </a:pPr>
             <a:r>
-              <a:rPr lang="en-US" sz="910" dirty="0">
+              <a:rPr lang="en-US" sz="1150" dirty="0">
                 <a:solidFill>
                   <a:srgbClr val="7A4E00"/>
                 </a:solidFill>
@@ -8835,7 +8835,7 @@
               </a:rPr>
               <a:t>至於測距：相機根本不量距離，它是算出來的，第三週算過那條式子。</a:t>
             </a:r>
-            <a:endParaRPr lang="en-US" sz="990" dirty="0"/>
+            <a:endParaRPr lang="en-US" sz="1250" dirty="0"/>
           </a:p>
         </p:txBody>
       </p:sp>
@@ -8871,8 +8871,8 @@
         </p:nvSpPr>
         <p:spPr>
           <a:xfrm>
-            <a:off x="1029622" y="101626"/>
-            <a:ext cx="653307" cy="203251"/>
+            <a:off x="109728" y="128016"/>
+            <a:ext cx="822960" cy="256032"/>
           </a:xfrm>
           <a:prstGeom prst="rect">
             <a:avLst/>
@@ -8888,7 +8888,7 @@
               <a:buNone/>
             </a:pPr>
             <a:r>
-              <a:rPr lang="en-US" sz="710" dirty="0">
+              <a:rPr lang="en-US" sz="900" dirty="0">
                 <a:solidFill>
                   <a:srgbClr val="5F7183"/>
                 </a:solidFill>
@@ -8898,7 +8898,7 @@
               </a:rPr>
               <a:t>10 / 14</a:t>
             </a:r>
-            <a:endParaRPr lang="en-US" sz="710" dirty="0"/>
+            <a:endParaRPr lang="en-US" sz="900" dirty="0"/>
           </a:p>
         </p:txBody>
       </p:sp>
@@ -8910,8 +8910,8 @@
         </p:nvSpPr>
         <p:spPr>
           <a:xfrm>
-            <a:off x="1704706" y="101626"/>
-            <a:ext cx="1596974" cy="203251"/>
+            <a:off x="960120" y="128016"/>
+            <a:ext cx="2011680" cy="256032"/>
           </a:xfrm>
           <a:prstGeom prst="rect">
             <a:avLst/>
@@ -8927,7 +8927,7 @@
               <a:buNone/>
             </a:pPr>
             <a:r>
-              <a:rPr lang="en-US" sz="710" dirty="0">
+              <a:rPr lang="en-US" sz="900" dirty="0">
                 <a:solidFill>
                   <a:srgbClr val="5F7183"/>
                 </a:solidFill>
@@ -8937,7 +8937,7 @@
               </a:rPr>
               <a:t>Tiết 1 · 第 1 節</a:t>
             </a:r>
-            <a:endParaRPr lang="en-US" sz="710" dirty="0"/>
+            <a:endParaRPr lang="en-US" sz="900" dirty="0"/>
           </a:p>
         </p:txBody>
       </p:sp>
@@ -8960,7 +8960,7 @@
       </p:nvGrpSpPr>
       <p:grpSpPr>
         <a:xfrm>
-          <a:off x="942514" y="0"/>
+          <a:off x="0" y="0"/>
           <a:ext cx="1" cy="1"/>
           <a:chOff x="0" y="0"/>
           <a:chExt cx="0" cy="0"/>
@@ -8974,8 +8974,8 @@
         </p:nvSpPr>
         <p:spPr>
           <a:xfrm>
-            <a:off x="1341758" y="333913"/>
-            <a:ext cx="6460485" cy="217769"/>
+            <a:off x="502920" y="420624"/>
+            <a:ext cx="8138160" cy="274320"/>
           </a:xfrm>
           <a:prstGeom prst="rect">
             <a:avLst/>
@@ -8991,7 +8991,7 @@
               <a:buNone/>
             </a:pPr>
             <a:r>
-              <a:rPr lang="en-US" sz="990" b="1" dirty="0">
+              <a:rPr lang="en-US" sz="1250" b="1" dirty="0">
                 <a:solidFill>
                   <a:srgbClr val="007F72"/>
                 </a:solidFill>
@@ -9001,7 +9001,7 @@
               </a:rPr>
               <a:t>Đọc kỹ · 一行容易讀錯的字</a:t>
             </a:r>
-            <a:endParaRPr lang="en-US" sz="990" dirty="0"/>
+            <a:endParaRPr lang="en-US" sz="1250" dirty="0"/>
           </a:p>
         </p:txBody>
       </p:sp>
@@ -9013,8 +9013,8 @@
         </p:nvSpPr>
         <p:spPr>
           <a:xfrm>
-            <a:off x="1341758" y="874706"/>
-            <a:ext cx="1959922" cy="1996217"/>
+            <a:off x="502920" y="1101852"/>
+            <a:ext cx="2468880" cy="2514600"/>
           </a:xfrm>
           <a:prstGeom prst="roundRect">
             <a:avLst>
@@ -9040,8 +9040,8 @@
         </p:nvSpPr>
         <p:spPr>
           <a:xfrm>
-            <a:off x="1689317" y="1445944"/>
-            <a:ext cx="1264804" cy="77613"/>
+            <a:off x="940735" y="1821430"/>
+            <a:ext cx="1593251" cy="97768"/>
           </a:xfrm>
           <a:prstGeom prst="roundRect">
             <a:avLst>
@@ -9062,8 +9062,8 @@
         </p:nvSpPr>
         <p:spPr>
           <a:xfrm>
-            <a:off x="1889360" y="1431832"/>
-            <a:ext cx="105836" cy="105836"/>
+            <a:off x="1192725" y="1803654"/>
+            <a:ext cx="133320" cy="133320"/>
           </a:xfrm>
           <a:prstGeom prst="ellipse">
             <a:avLst/>
@@ -9082,8 +9082,8 @@
         </p:nvSpPr>
         <p:spPr>
           <a:xfrm>
-            <a:off x="2091728" y="1431832"/>
-            <a:ext cx="105836" cy="105836"/>
+            <a:off x="1447645" y="1803654"/>
+            <a:ext cx="133320" cy="133320"/>
           </a:xfrm>
           <a:prstGeom prst="ellipse">
             <a:avLst/>
@@ -9102,8 +9102,8 @@
         </p:nvSpPr>
         <p:spPr>
           <a:xfrm>
-            <a:off x="2294097" y="1431832"/>
-            <a:ext cx="105836" cy="105836"/>
+            <a:off x="1702565" y="1803654"/>
+            <a:ext cx="133320" cy="133320"/>
           </a:xfrm>
           <a:prstGeom prst="ellipse">
             <a:avLst/>
@@ -9122,8 +9122,8 @@
         </p:nvSpPr>
         <p:spPr>
           <a:xfrm>
-            <a:off x="2496465" y="1431832"/>
-            <a:ext cx="105836" cy="105836"/>
+            <a:off x="1957485" y="1803654"/>
+            <a:ext cx="133320" cy="133320"/>
           </a:xfrm>
           <a:prstGeom prst="ellipse">
             <a:avLst/>
@@ -9142,8 +9142,8 @@
         </p:nvSpPr>
         <p:spPr>
           <a:xfrm>
-            <a:off x="1689317" y="1834008"/>
-            <a:ext cx="1264804" cy="77613"/>
+            <a:off x="940735" y="2310268"/>
+            <a:ext cx="1593251" cy="97768"/>
           </a:xfrm>
           <a:prstGeom prst="roundRect">
             <a:avLst>
@@ -9164,8 +9164,8 @@
         </p:nvSpPr>
         <p:spPr>
           <a:xfrm>
-            <a:off x="1889360" y="1819897"/>
-            <a:ext cx="105836" cy="105836"/>
+            <a:off x="1192725" y="2292492"/>
+            <a:ext cx="133320" cy="133320"/>
           </a:xfrm>
           <a:prstGeom prst="ellipse">
             <a:avLst/>
@@ -9184,8 +9184,8 @@
         </p:nvSpPr>
         <p:spPr>
           <a:xfrm>
-            <a:off x="2091728" y="1819897"/>
-            <a:ext cx="105836" cy="105836"/>
+            <a:off x="1447645" y="2292492"/>
+            <a:ext cx="133320" cy="133320"/>
           </a:xfrm>
           <a:prstGeom prst="ellipse">
             <a:avLst/>
@@ -9204,8 +9204,8 @@
         </p:nvSpPr>
         <p:spPr>
           <a:xfrm>
-            <a:off x="2294097" y="1819897"/>
-            <a:ext cx="105836" cy="105836"/>
+            <a:off x="1702565" y="2292492"/>
+            <a:ext cx="133320" cy="133320"/>
           </a:xfrm>
           <a:prstGeom prst="ellipse">
             <a:avLst/>
@@ -9224,8 +9224,8 @@
         </p:nvSpPr>
         <p:spPr>
           <a:xfrm>
-            <a:off x="2496465" y="1819897"/>
-            <a:ext cx="105836" cy="105836"/>
+            <a:off x="1957485" y="2292492"/>
+            <a:ext cx="133320" cy="133320"/>
           </a:xfrm>
           <a:prstGeom prst="ellipse">
             <a:avLst/>
@@ -9244,8 +9244,8 @@
         </p:nvSpPr>
         <p:spPr>
           <a:xfrm>
-            <a:off x="2625271" y="1872815"/>
-            <a:ext cx="227665" cy="1"/>
+            <a:off x="2119740" y="2359152"/>
+            <a:ext cx="286785" cy="1"/>
           </a:xfrm>
           <a:prstGeom prst="line">
             <a:avLst/>
@@ -9268,8 +9268,8 @@
         </p:nvSpPr>
         <p:spPr>
           <a:xfrm>
-            <a:off x="1689317" y="2222073"/>
-            <a:ext cx="1264804" cy="77613"/>
+            <a:off x="940735" y="2799106"/>
+            <a:ext cx="1593251" cy="97768"/>
           </a:xfrm>
           <a:prstGeom prst="roundRect">
             <a:avLst>
@@ -9290,8 +9290,8 @@
         </p:nvSpPr>
         <p:spPr>
           <a:xfrm>
-            <a:off x="1889360" y="2207961"/>
-            <a:ext cx="105836" cy="105836"/>
+            <a:off x="1192725" y="2781330"/>
+            <a:ext cx="133320" cy="133320"/>
           </a:xfrm>
           <a:prstGeom prst="ellipse">
             <a:avLst/>
@@ -9310,8 +9310,8 @@
         </p:nvSpPr>
         <p:spPr>
           <a:xfrm>
-            <a:off x="2091728" y="2207961"/>
-            <a:ext cx="105836" cy="105836"/>
+            <a:off x="1447645" y="2781330"/>
+            <a:ext cx="133320" cy="133320"/>
           </a:xfrm>
           <a:prstGeom prst="ellipse">
             <a:avLst/>
@@ -9330,8 +9330,8 @@
         </p:nvSpPr>
         <p:spPr>
           <a:xfrm>
-            <a:off x="2294097" y="2207961"/>
-            <a:ext cx="105836" cy="105836"/>
+            <a:off x="1702565" y="2781330"/>
+            <a:ext cx="133320" cy="133320"/>
           </a:xfrm>
           <a:prstGeom prst="ellipse">
             <a:avLst/>
@@ -9350,8 +9350,8 @@
         </p:nvSpPr>
         <p:spPr>
           <a:xfrm>
-            <a:off x="2496465" y="2207961"/>
-            <a:ext cx="105836" cy="105836"/>
+            <a:off x="1957485" y="2781330"/>
+            <a:ext cx="133320" cy="133320"/>
           </a:xfrm>
           <a:prstGeom prst="ellipse">
             <a:avLst/>
@@ -9370,8 +9370,8 @@
         </p:nvSpPr>
         <p:spPr>
           <a:xfrm>
-            <a:off x="3664629" y="1047093"/>
-            <a:ext cx="4137614" cy="798305"/>
+            <a:off x="3429000" y="1319005"/>
+            <a:ext cx="5212080" cy="1005611"/>
           </a:xfrm>
           <a:prstGeom prst="rect">
             <a:avLst/>
@@ -9390,7 +9390,7 @@
               <a:buNone/>
             </a:pPr>
             <a:r>
-              <a:rPr lang="en-US" sz="1830" b="1" dirty="0">
+              <a:rPr lang="en-US" sz="2300" b="1" dirty="0">
                 <a:solidFill>
                   <a:srgbClr val="0B1F3A"/>
                 </a:solidFill>
@@ -9400,7 +9400,7 @@
               </a:rPr>
               <a:t>Có dòng ghi «configurable»: đó là chế độ, không phải con số cố định</a:t>
             </a:r>
-            <a:endParaRPr lang="en-US" sz="1830" dirty="0"/>
+            <a:endParaRPr lang="en-US" sz="2300" dirty="0"/>
           </a:p>
           <a:p>
             <a:pPr indent="0" marL="0">
@@ -9410,7 +9410,7 @@
               <a:buNone/>
             </a:pPr>
             <a:r>
-              <a:rPr lang="en-US" sz="1110" dirty="0">
+              <a:rPr lang="en-US" sz="1400" dirty="0">
                 <a:solidFill>
                   <a:srgbClr val="007F72"/>
                 </a:solidFill>
@@ -9420,7 +9420,7 @@
               </a:rPr>
               <a:t>有些行寫著「可設定」：那是模式，不是固定的數字</a:t>
             </a:r>
-            <a:endParaRPr lang="en-US" sz="1830" dirty="0"/>
+            <a:endParaRPr lang="en-US" sz="2300" dirty="0"/>
           </a:p>
         </p:txBody>
       </p:sp>
@@ -9432,8 +9432,8 @@
         </p:nvSpPr>
         <p:spPr>
           <a:xfrm>
-            <a:off x="3664629" y="1917989"/>
-            <a:ext cx="4137614" cy="853137"/>
+            <a:off x="3429000" y="2416057"/>
+            <a:ext cx="5212080" cy="1074682"/>
           </a:xfrm>
           <a:prstGeom prst="rect">
             <a:avLst/>
@@ -9452,7 +9452,7 @@
               <a:buNone/>
             </a:pPr>
             <a:r>
-              <a:rPr lang="en-US" sz="990" dirty="0">
+              <a:rPr lang="en-US" sz="1250" dirty="0">
                 <a:solidFill>
                   <a:srgbClr val="5F7183"/>
                 </a:solidFill>
@@ -9462,7 +9462,7 @@
               </a:rPr>
               <a:t>OS1: mỗi vòng 512 / 1024 / 2048 điểm, quay 10 hoặc 20 Hz. Cùng một con lidar, chọn chế độ khác thì số điểm trên người ở 40 m đổi hẳn.</a:t>
             </a:r>
-            <a:endParaRPr lang="en-US" sz="990" dirty="0"/>
+            <a:endParaRPr lang="en-US" sz="1250" dirty="0"/>
           </a:p>
           <a:p>
             <a:pPr indent="0" marL="0">
@@ -9472,7 +9472,7 @@
               <a:buNone/>
             </a:pPr>
             <a:r>
-              <a:rPr lang="en-US" sz="910" dirty="0">
+              <a:rPr lang="en-US" sz="1150" dirty="0">
                 <a:solidFill>
                   <a:srgbClr val="5F7183"/>
                 </a:solidFill>
@@ -9482,7 +9482,7 @@
               </a:rPr>
               <a:t>OS1 的每圈點數可以選 512 / 1024 / 2048，轉速可以選 10 或 20 Hz。同一顆光達，換一個模式，四十公尺行人身上的點數就整個不一樣。</a:t>
             </a:r>
-            <a:endParaRPr lang="en-US" sz="990" dirty="0"/>
+            <a:endParaRPr lang="en-US" sz="1250" dirty="0"/>
           </a:p>
         </p:txBody>
       </p:sp>
@@ -9494,8 +9494,8 @@
         </p:nvSpPr>
         <p:spPr>
           <a:xfrm>
-            <a:off x="1341758" y="3106840"/>
-            <a:ext cx="6460485" cy="493610"/>
+            <a:off x="502920" y="3913632"/>
+            <a:ext cx="8138160" cy="621792"/>
           </a:xfrm>
           <a:prstGeom prst="roundRect">
             <a:avLst>
@@ -9521,8 +9521,8 @@
         </p:nvSpPr>
         <p:spPr>
           <a:xfrm>
-            <a:off x="1486937" y="3164912"/>
-            <a:ext cx="6170126" cy="391984"/>
+            <a:off x="685800" y="3986784"/>
+            <a:ext cx="7772400" cy="493776"/>
           </a:xfrm>
           <a:prstGeom prst="rect">
             <a:avLst/>
@@ -9541,7 +9541,7 @@
               <a:buNone/>
             </a:pPr>
             <a:r>
-              <a:rPr lang="en-US" sz="990" b="1" dirty="0">
+              <a:rPr lang="en-US" sz="1250" b="1" dirty="0">
                 <a:solidFill>
                   <a:srgbClr val="7A4E00"/>
                 </a:solidFill>
@@ -9551,7 +9551,7 @@
               </a:rPr>
               <a:t>Tiết 3 các bạn sẽ tự đổi: 9 điểm thành 18 điểm, kết luận lật ngược.</a:t>
             </a:r>
-            <a:endParaRPr lang="en-US" sz="990" dirty="0"/>
+            <a:endParaRPr lang="en-US" sz="1250" dirty="0"/>
           </a:p>
           <a:p>
             <a:pPr indent="0" marL="0">
@@ -9561,7 +9561,7 @@
               <a:buNone/>
             </a:pPr>
             <a:r>
-              <a:rPr lang="en-US" sz="910" dirty="0">
+              <a:rPr lang="en-US" sz="1150" dirty="0">
                 <a:solidFill>
                   <a:srgbClr val="7A4E00"/>
                 </a:solidFill>
@@ -9571,7 +9571,7 @@
               </a:rPr>
               <a:t>第三節各位會自己切：9 個點變成 18 個點，結論整個翻過來。</a:t>
             </a:r>
-            <a:endParaRPr lang="en-US" sz="990" dirty="0"/>
+            <a:endParaRPr lang="en-US" sz="1250" dirty="0"/>
           </a:p>
         </p:txBody>
       </p:sp>
@@ -9607,8 +9607,8 @@
         </p:nvSpPr>
         <p:spPr>
           <a:xfrm>
-            <a:off x="1029622" y="101626"/>
-            <a:ext cx="653307" cy="203251"/>
+            <a:off x="109728" y="128016"/>
+            <a:ext cx="822960" cy="256032"/>
           </a:xfrm>
           <a:prstGeom prst="rect">
             <a:avLst/>
@@ -9624,7 +9624,7 @@
               <a:buNone/>
             </a:pPr>
             <a:r>
-              <a:rPr lang="en-US" sz="710" dirty="0">
+              <a:rPr lang="en-US" sz="900" dirty="0">
                 <a:solidFill>
                   <a:srgbClr val="5F7183"/>
                 </a:solidFill>
@@ -9634,7 +9634,7 @@
               </a:rPr>
               <a:t>11 / 14</a:t>
             </a:r>
-            <a:endParaRPr lang="en-US" sz="710" dirty="0"/>
+            <a:endParaRPr lang="en-US" sz="900" dirty="0"/>
           </a:p>
         </p:txBody>
       </p:sp>
@@ -9646,8 +9646,8 @@
         </p:nvSpPr>
         <p:spPr>
           <a:xfrm>
-            <a:off x="1704706" y="101626"/>
-            <a:ext cx="1596974" cy="203251"/>
+            <a:off x="960120" y="128016"/>
+            <a:ext cx="2011680" cy="256032"/>
           </a:xfrm>
           <a:prstGeom prst="rect">
             <a:avLst/>
@@ -9663,7 +9663,7 @@
               <a:buNone/>
             </a:pPr>
             <a:r>
-              <a:rPr lang="en-US" sz="710" dirty="0">
+              <a:rPr lang="en-US" sz="900" dirty="0">
                 <a:solidFill>
                   <a:srgbClr val="5F7183"/>
                 </a:solidFill>
@@ -9673,7 +9673,7 @@
               </a:rPr>
               <a:t>Tiết 1 · 第 1 節</a:t>
             </a:r>
-            <a:endParaRPr lang="en-US" sz="710" dirty="0"/>
+            <a:endParaRPr lang="en-US" sz="900" dirty="0"/>
           </a:p>
         </p:txBody>
       </p:sp>
@@ -9696,7 +9696,7 @@
       </p:nvGrpSpPr>
       <p:grpSpPr>
         <a:xfrm>
-          <a:off x="310693" y="0"/>
+          <a:off x="0" y="0"/>
           <a:ext cx="1" cy="1"/>
           <a:chOff x="0" y="0"/>
           <a:chExt cx="0" cy="0"/>
@@ -9710,8 +9710,8 @@
         </p:nvSpPr>
         <p:spPr>
           <a:xfrm>
-            <a:off x="779437" y="272724"/>
-            <a:ext cx="7585126" cy="784080"/>
+            <a:off x="502920" y="292608"/>
+            <a:ext cx="8138160" cy="841248"/>
           </a:xfrm>
           <a:prstGeom prst="rect">
             <a:avLst/>
@@ -9730,7 +9730,7 @@
               <a:buNone/>
             </a:pPr>
             <a:r>
-              <a:rPr lang="en-US" sz="2050" b="1" dirty="0">
+              <a:rPr lang="en-US" sz="2200" b="1" dirty="0">
                 <a:solidFill>
                   <a:srgbClr val="0B1F3A"/>
                 </a:solidFill>
@@ -9740,7 +9740,7 @@
               </a:rPr>
               <a:t>«90 m» hay «170 m»: cùng một con lidar, hai con số</a:t>
             </a:r>
-            <a:endParaRPr lang="en-US" sz="2050" dirty="0"/>
+            <a:endParaRPr lang="en-US" sz="2200" dirty="0"/>
           </a:p>
           <a:p>
             <a:pPr indent="0" marL="0">
@@ -9750,7 +9750,7 @@
               <a:buNone/>
             </a:pPr>
             <a:r>
-              <a:rPr lang="en-US" sz="1260" dirty="0">
+              <a:rPr lang="en-US" sz="1350" dirty="0">
                 <a:solidFill>
                   <a:srgbClr val="5F7183"/>
                 </a:solidFill>
@@ -9760,7 +9760,7 @@
               </a:rPr>
               <a:t>「90 公尺」還是「170 公尺」：同一顆光達，兩個數字</a:t>
             </a:r>
-            <a:endParaRPr lang="en-US" sz="2050" dirty="0"/>
+            <a:endParaRPr lang="en-US" sz="2200" dirty="0"/>
           </a:p>
         </p:txBody>
       </p:sp>
@@ -9772,8 +9772,8 @@
         </p:nvSpPr>
         <p:spPr>
           <a:xfrm>
-            <a:off x="779437" y="1056804"/>
-            <a:ext cx="7585126" cy="664764"/>
+            <a:off x="502920" y="1133856"/>
+            <a:ext cx="8138160" cy="713232"/>
           </a:xfrm>
           <a:prstGeom prst="roundRect">
             <a:avLst>
@@ -9794,8 +9794,8 @@
         </p:nvSpPr>
         <p:spPr>
           <a:xfrm>
-            <a:off x="915799" y="1124985"/>
-            <a:ext cx="7312402" cy="528402"/>
+            <a:off x="649224" y="1207008"/>
+            <a:ext cx="7845552" cy="566928"/>
           </a:xfrm>
           <a:prstGeom prst="rect">
             <a:avLst/>
@@ -9814,7 +9814,7 @@
               <a:buNone/>
             </a:pPr>
             <a:r>
-              <a:rPr lang="en-US" sz="1070" b="1" dirty="0">
+              <a:rPr lang="en-US" sz="1150" b="1" dirty="0">
                 <a:solidFill>
                   <a:srgbClr val="007F72"/>
                 </a:solidFill>
@@ -9824,7 +9824,7 @@
               </a:rPr>
               <a:t>Chép nguyên văn từ datasheet OS1. Chú ý phần chữ nhỏ phía sau.</a:t>
             </a:r>
-            <a:endParaRPr lang="en-US" sz="1070" dirty="0"/>
+            <a:endParaRPr lang="en-US" sz="1150" dirty="0"/>
           </a:p>
           <a:p>
             <a:pPr indent="0" marL="0">
@@ -9834,7 +9834,7 @@
               <a:buNone/>
             </a:pPr>
             <a:r>
-              <a:rPr lang="en-US" sz="930" dirty="0">
+              <a:rPr lang="en-US" sz="1000" dirty="0">
                 <a:solidFill>
                   <a:srgbClr val="007F72"/>
                 </a:solidFill>
@@ -9844,7 +9844,7 @@
               </a:rPr>
               <a:t>照抄 OS1 規格表上的兩行。請注意後面那一串小字。</a:t>
             </a:r>
-            <a:endParaRPr lang="en-US" sz="1070" dirty="0"/>
+            <a:endParaRPr lang="en-US" sz="1150" dirty="0"/>
           </a:p>
         </p:txBody>
       </p:sp>
@@ -9863,20 +9863,20 @@
           </p:nvPr>
         </p:nvGraphicFramePr>
         <p:xfrm>
-          <a:off x="779437" y="1823839"/>
-          <a:ext cx="7585126" cy="852261"/>
+          <a:off x="502920" y="1956816"/>
+          <a:ext cx="8138160" cy="914400"/>
         </p:xfrm>
         <a:graphic>
           <a:graphicData uri="http://schemas.openxmlformats.org/drawingml/2006/table">
             <a:tbl>
               <a:tblPr/>
               <a:tblGrid>
-                <a:gridCol w="1896281"/>
-                <a:gridCol w="1896281"/>
-                <a:gridCol w="1896281"/>
-                <a:gridCol w="1896281"/>
+                <a:gridCol w="2034540"/>
+                <a:gridCol w="2034540"/>
+                <a:gridCol w="2034540"/>
+                <a:gridCol w="2034540"/>
               </a:tblGrid>
-              <a:tr h="357950">
+              <a:tr h="384048">
                 <a:tc>
                   <a:txBody>
                     <a:bodyPr/>
@@ -9886,7 +9886,7 @@
                         <a:buNone/>
                       </a:pPr>
                       <a:r>
-                        <a:rPr lang="en-US" sz="1030" b="1" dirty="0">
+                        <a:rPr lang="en-US" sz="1100" b="1" dirty="0">
                           <a:solidFill>
                             <a:srgbClr val="FFFFFF"/>
                           </a:solidFill>
@@ -9896,14 +9896,14 @@
                         </a:rPr>
                         <a:t>Dòng trên datasheet</a:t>
                       </a:r>
-                      <a:endParaRPr lang="en-US" sz="1120" dirty="0"/>
+                      <a:endParaRPr lang="en-US" sz="1200" dirty="0"/>
                     </a:p>
                     <a:p>
                       <a:pPr algn="l" indent="0" marL="0">
                         <a:buNone/>
                       </a:pPr>
                       <a:r>
-                        <a:rPr lang="en-US" sz="890" dirty="0">
+                        <a:rPr lang="en-US" sz="950" dirty="0">
                           <a:solidFill>
                             <a:srgbClr val="CFE0EC"/>
                           </a:solidFill>
@@ -9913,7 +9913,7 @@
                         </a:rPr>
                         <a:t>規格表上那一行</a:t>
                       </a:r>
-                      <a:endParaRPr lang="en-US" sz="1120" dirty="0"/>
+                      <a:endParaRPr lang="en-US" sz="1200" dirty="0"/>
                     </a:p>
                   </a:txBody>
                   <a:tcPr marL="63500" marR="63500" marT="38100" marB="38100" anchor="ctr">
@@ -9967,7 +9967,7 @@
                         <a:buNone/>
                       </a:pPr>
                       <a:r>
-                        <a:rPr lang="en-US" sz="1030" b="1" dirty="0">
+                        <a:rPr lang="en-US" sz="1100" b="1" dirty="0">
                           <a:solidFill>
                             <a:srgbClr val="FFFFFF"/>
                           </a:solidFill>
@@ -9977,14 +9977,14 @@
                         </a:rPr>
                         <a:t>Con số</a:t>
                       </a:r>
-                      <a:endParaRPr lang="en-US" sz="1120" dirty="0"/>
+                      <a:endParaRPr lang="en-US" sz="1200" dirty="0"/>
                     </a:p>
                     <a:p>
                       <a:pPr algn="l" indent="0" marL="0">
                         <a:buNone/>
                       </a:pPr>
                       <a:r>
-                        <a:rPr lang="en-US" sz="890" dirty="0">
+                        <a:rPr lang="en-US" sz="950" dirty="0">
                           <a:solidFill>
                             <a:srgbClr val="CFE0EC"/>
                           </a:solidFill>
@@ -9994,7 +9994,7 @@
                         </a:rPr>
                         <a:t>數字</a:t>
                       </a:r>
-                      <a:endParaRPr lang="en-US" sz="1120" dirty="0"/>
+                      <a:endParaRPr lang="en-US" sz="1200" dirty="0"/>
                     </a:p>
                   </a:txBody>
                   <a:tcPr marL="63500" marR="63500" marT="38100" marB="38100" anchor="ctr">
@@ -10048,7 +10048,7 @@
                         <a:buNone/>
                       </a:pPr>
                       <a:r>
-                        <a:rPr lang="en-US" sz="1030" b="1" dirty="0">
+                        <a:rPr lang="en-US" sz="1100" b="1" dirty="0">
                           <a:solidFill>
                             <a:srgbClr val="FFFFFF"/>
                           </a:solidFill>
@@ -10058,14 +10058,14 @@
                         </a:rPr>
                         <a:t>Vật gì</a:t>
                       </a:r>
-                      <a:endParaRPr lang="en-US" sz="1120" dirty="0"/>
+                      <a:endParaRPr lang="en-US" sz="1200" dirty="0"/>
                     </a:p>
                     <a:p>
                       <a:pPr algn="l" indent="0" marL="0">
                         <a:buNone/>
                       </a:pPr>
                       <a:r>
-                        <a:rPr lang="en-US" sz="890" dirty="0">
+                        <a:rPr lang="en-US" sz="950" dirty="0">
                           <a:solidFill>
                             <a:srgbClr val="CFE0EC"/>
                           </a:solidFill>
@@ -10075,7 +10075,7 @@
                         </a:rPr>
                         <a:t>量的是什麼東西</a:t>
                       </a:r>
-                      <a:endParaRPr lang="en-US" sz="1120" dirty="0"/>
+                      <a:endParaRPr lang="en-US" sz="1200" dirty="0"/>
                     </a:p>
                   </a:txBody>
                   <a:tcPr marL="63500" marR="63500" marT="38100" marB="38100" anchor="ctr">
@@ -10129,7 +10129,7 @@
                         <a:buNone/>
                       </a:pPr>
                       <a:r>
-                        <a:rPr lang="en-US" sz="1030" b="1" dirty="0">
+                        <a:rPr lang="en-US" sz="1100" b="1" dirty="0">
                           <a:solidFill>
                             <a:srgbClr val="FFFFFF"/>
                           </a:solidFill>
@@ -10139,14 +10139,14 @@
                         </a:rPr>
                         <a:t>Ngoài đường là ai</a:t>
                       </a:r>
-                      <a:endParaRPr lang="en-US" sz="1120" dirty="0"/>
+                      <a:endParaRPr lang="en-US" sz="1200" dirty="0"/>
                     </a:p>
                     <a:p>
                       <a:pPr algn="l" indent="0" marL="0">
                         <a:buNone/>
                       </a:pPr>
                       <a:r>
-                        <a:rPr lang="en-US" sz="890" dirty="0">
+                        <a:rPr lang="en-US" sz="950" dirty="0">
                           <a:solidFill>
                             <a:srgbClr val="CFE0EC"/>
                           </a:solidFill>
@@ -10156,7 +10156,7 @@
                         </a:rPr>
                         <a:t>路上是誰</a:t>
                       </a:r>
-                      <a:endParaRPr lang="en-US" sz="1120" dirty="0"/>
+                      <a:endParaRPr lang="en-US" sz="1200" dirty="0"/>
                     </a:p>
                   </a:txBody>
                   <a:tcPr marL="63500" marR="63500" marT="38100" marB="38100" anchor="ctr">
@@ -10202,7 +10202,7 @@
                   </a:tcPr>
                 </a:tc>
               </a:tr>
-              <a:tr h="357950">
+              <a:tr h="384048">
                 <a:tc>
                   <a:txBody>
                     <a:bodyPr/>
@@ -10212,7 +10212,7 @@
                         <a:buNone/>
                       </a:pPr>
                       <a:r>
-                        <a:rPr lang="en-US" sz="1030" b="1" dirty="0">
+                        <a:rPr lang="en-US" sz="1100" b="1" dirty="0">
                           <a:solidFill>
                             <a:srgbClr val="0B1F3A"/>
                           </a:solidFill>
@@ -10222,14 +10222,14 @@
                         </a:rPr>
                         <a:t>Range (80% reflectivity)</a:t>
                       </a:r>
-                      <a:endParaRPr lang="en-US" sz="1120" dirty="0"/>
+                      <a:endParaRPr lang="en-US" sz="1200" dirty="0"/>
                     </a:p>
                     <a:p>
                       <a:pPr algn="l" indent="0" marL="0">
                         <a:buNone/>
                       </a:pPr>
                       <a:r>
-                        <a:rPr lang="en-US" sz="890" dirty="0">
+                        <a:rPr lang="en-US" sz="950" dirty="0">
                           <a:solidFill>
                             <a:srgbClr val="5F7183"/>
                           </a:solidFill>
@@ -10239,7 +10239,7 @@
                         </a:rPr>
                         <a:t>Range（80% 反射率）</a:t>
                       </a:r>
-                      <a:endParaRPr lang="en-US" sz="1120" dirty="0"/>
+                      <a:endParaRPr lang="en-US" sz="1200" dirty="0"/>
                     </a:p>
                   </a:txBody>
                   <a:tcPr marL="63500" marR="63500" marT="38100" marB="38100" anchor="ctr">
@@ -10290,7 +10290,7 @@
                         <a:buNone/>
                       </a:pPr>
                       <a:r>
-                        <a:rPr lang="en-US" sz="1030" dirty="0">
+                        <a:rPr lang="en-US" sz="1100" dirty="0">
                           <a:solidFill>
                             <a:srgbClr val="1A2733"/>
                           </a:solidFill>
@@ -10300,7 +10300,7 @@
                         </a:rPr>
                         <a:t>170 m</a:t>
                       </a:r>
-                      <a:endParaRPr lang="en-US" sz="1120" dirty="0"/>
+                      <a:endParaRPr lang="en-US" sz="1200" dirty="0"/>
                     </a:p>
                   </a:txBody>
                   <a:tcPr marL="63500" marR="63500" marT="38100" marB="38100" anchor="ctr">
@@ -10351,7 +10351,7 @@
                         <a:buNone/>
                       </a:pPr>
                       <a:r>
-                        <a:rPr lang="en-US" sz="1030" dirty="0">
+                        <a:rPr lang="en-US" sz="1100" dirty="0">
                           <a:solidFill>
                             <a:srgbClr val="1A2733"/>
                           </a:solidFill>
@@ -10361,14 +10361,14 @@
                         </a:rPr>
                         <a:t>Vật sáng, phản xạ mạnh</a:t>
                       </a:r>
-                      <a:endParaRPr lang="en-US" sz="1120" dirty="0"/>
+                      <a:endParaRPr lang="en-US" sz="1200" dirty="0"/>
                     </a:p>
                     <a:p>
                       <a:pPr algn="l" indent="0" marL="0">
                         <a:buNone/>
                       </a:pPr>
                       <a:r>
-                        <a:rPr lang="en-US" sz="890" dirty="0">
+                        <a:rPr lang="en-US" sz="950" dirty="0">
                           <a:solidFill>
                             <a:srgbClr val="5F7183"/>
                           </a:solidFill>
@@ -10378,7 +10378,7 @@
                         </a:rPr>
                         <a:t>亮色、反射強的東西</a:t>
                       </a:r>
-                      <a:endParaRPr lang="en-US" sz="1120" dirty="0"/>
+                      <a:endParaRPr lang="en-US" sz="1200" dirty="0"/>
                     </a:p>
                   </a:txBody>
                   <a:tcPr marL="63500" marR="63500" marT="38100" marB="38100" anchor="ctr">
@@ -10429,7 +10429,7 @@
                         <a:buNone/>
                       </a:pPr>
                       <a:r>
-                        <a:rPr lang="en-US" sz="1030" dirty="0">
+                        <a:rPr lang="en-US" sz="1100" dirty="0">
                           <a:solidFill>
                             <a:srgbClr val="1A2733"/>
                           </a:solidFill>
@@ -10439,14 +10439,14 @@
                         </a:rPr>
                         <a:t>Xe trắng, áo phản quang</a:t>
                       </a:r>
-                      <a:endParaRPr lang="en-US" sz="1120" dirty="0"/>
+                      <a:endParaRPr lang="en-US" sz="1200" dirty="0"/>
                     </a:p>
                     <a:p>
                       <a:pPr algn="l" indent="0" marL="0">
                         <a:buNone/>
                       </a:pPr>
                       <a:r>
-                        <a:rPr lang="en-US" sz="890" dirty="0">
+                        <a:rPr lang="en-US" sz="950" dirty="0">
                           <a:solidFill>
                             <a:srgbClr val="5F7183"/>
                           </a:solidFill>
@@ -10456,7 +10456,7 @@
                         </a:rPr>
                         <a:t>白色的車、反光背心</a:t>
                       </a:r>
-                      <a:endParaRPr lang="en-US" sz="1120" dirty="0"/>
+                      <a:endParaRPr lang="en-US" sz="1200" dirty="0"/>
                     </a:p>
                   </a:txBody>
                   <a:tcPr marL="63500" marR="63500" marT="38100" marB="38100" anchor="ctr">
@@ -10499,7 +10499,7 @@
                   </a:tcPr>
                 </a:tc>
               </a:tr>
-              <a:tr h="357950">
+              <a:tr h="384048">
                 <a:tc>
                   <a:txBody>
                     <a:bodyPr/>
@@ -10509,7 +10509,7 @@
                         <a:buNone/>
                       </a:pPr>
                       <a:r>
-                        <a:rPr lang="en-US" sz="1030" b="1" dirty="0">
+                        <a:rPr lang="en-US" sz="1100" b="1" dirty="0">
                           <a:solidFill>
                             <a:srgbClr val="0B1F3A"/>
                           </a:solidFill>
@@ -10519,14 +10519,14 @@
                         </a:rPr>
                         <a:t>Range (10% reflectivity)</a:t>
                       </a:r>
-                      <a:endParaRPr lang="en-US" sz="1120" dirty="0"/>
+                      <a:endParaRPr lang="en-US" sz="1200" dirty="0"/>
                     </a:p>
                     <a:p>
                       <a:pPr algn="l" indent="0" marL="0">
                         <a:buNone/>
                       </a:pPr>
                       <a:r>
-                        <a:rPr lang="en-US" sz="890" dirty="0">
+                        <a:rPr lang="en-US" sz="950" dirty="0">
                           <a:solidFill>
                             <a:srgbClr val="5F7183"/>
                           </a:solidFill>
@@ -10536,7 +10536,7 @@
                         </a:rPr>
                         <a:t>Range（10% 反射率）</a:t>
                       </a:r>
-                      <a:endParaRPr lang="en-US" sz="1120" dirty="0"/>
+                      <a:endParaRPr lang="en-US" sz="1200" dirty="0"/>
                     </a:p>
                   </a:txBody>
                   <a:tcPr marL="63500" marR="63500" marT="38100" marB="38100" anchor="ctr">
@@ -10587,7 +10587,7 @@
                         <a:buNone/>
                       </a:pPr>
                       <a:r>
-                        <a:rPr lang="en-US" sz="1030" dirty="0">
+                        <a:rPr lang="en-US" sz="1100" dirty="0">
                           <a:solidFill>
                             <a:srgbClr val="1A2733"/>
                           </a:solidFill>
@@ -10597,7 +10597,7 @@
                         </a:rPr>
                         <a:t>90 m</a:t>
                       </a:r>
-                      <a:endParaRPr lang="en-US" sz="1120" dirty="0"/>
+                      <a:endParaRPr lang="en-US" sz="1200" dirty="0"/>
                     </a:p>
                   </a:txBody>
                   <a:tcPr marL="63500" marR="63500" marT="38100" marB="38100" anchor="ctr">
@@ -10648,7 +10648,7 @@
                         <a:buNone/>
                       </a:pPr>
                       <a:r>
-                        <a:rPr lang="en-US" sz="1030" dirty="0">
+                        <a:rPr lang="en-US" sz="1100" dirty="0">
                           <a:solidFill>
                             <a:srgbClr val="1A2733"/>
                           </a:solidFill>
@@ -10658,14 +10658,14 @@
                         </a:rPr>
                         <a:t>Vật tối, phản xạ yếu</a:t>
                       </a:r>
-                      <a:endParaRPr lang="en-US" sz="1120" dirty="0"/>
+                      <a:endParaRPr lang="en-US" sz="1200" dirty="0"/>
                     </a:p>
                     <a:p>
                       <a:pPr algn="l" indent="0" marL="0">
                         <a:buNone/>
                       </a:pPr>
                       <a:r>
-                        <a:rPr lang="en-US" sz="890" dirty="0">
+                        <a:rPr lang="en-US" sz="950" dirty="0">
                           <a:solidFill>
                             <a:srgbClr val="5F7183"/>
                           </a:solidFill>
@@ -10675,7 +10675,7 @@
                         </a:rPr>
                         <a:t>深色、反射弱的東西</a:t>
                       </a:r>
-                      <a:endParaRPr lang="en-US" sz="1120" dirty="0"/>
+                      <a:endParaRPr lang="en-US" sz="1200" dirty="0"/>
                     </a:p>
                   </a:txBody>
                   <a:tcPr marL="63500" marR="63500" marT="38100" marB="38100" anchor="ctr">
@@ -10726,7 +10726,7 @@
                         <a:buNone/>
                       </a:pPr>
                       <a:r>
-                        <a:rPr lang="en-US" sz="1030" dirty="0">
+                        <a:rPr lang="en-US" sz="1100" dirty="0">
                           <a:solidFill>
                             <a:srgbClr val="1A2733"/>
                           </a:solidFill>
@@ -10736,14 +10736,14 @@
                         </a:rPr>
                         <a:t>Xe đen, áo mưa sẫm màu</a:t>
                       </a:r>
-                      <a:endParaRPr lang="en-US" sz="1120" dirty="0"/>
+                      <a:endParaRPr lang="en-US" sz="1200" dirty="0"/>
                     </a:p>
                     <a:p>
                       <a:pPr algn="l" indent="0" marL="0">
                         <a:buNone/>
                       </a:pPr>
                       <a:r>
-                        <a:rPr lang="en-US" sz="890" dirty="0">
+                        <a:rPr lang="en-US" sz="950" dirty="0">
                           <a:solidFill>
                             <a:srgbClr val="5F7183"/>
                           </a:solidFill>
@@ -10753,7 +10753,7 @@
                         </a:rPr>
                         <a:t>黑色的車、深色雨衣</a:t>
                       </a:r>
-                      <a:endParaRPr lang="en-US" sz="1120" dirty="0"/>
+                      <a:endParaRPr lang="en-US" sz="1200" dirty="0"/>
                     </a:p>
                   </a:txBody>
                   <a:tcPr marL="63500" marR="63500" marT="38100" marB="38100" anchor="ctr">
@@ -10808,8 +10808,8 @@
         </p:nvSpPr>
         <p:spPr>
           <a:xfrm>
-            <a:off x="779437" y="3174319"/>
-            <a:ext cx="7585126" cy="426131"/>
+            <a:off x="502920" y="3405760"/>
+            <a:ext cx="8138160" cy="457200"/>
           </a:xfrm>
           <a:prstGeom prst="rect">
             <a:avLst/>
@@ -10828,7 +10828,7 @@
               <a:buNone/>
             </a:pPr>
             <a:r>
-              <a:rPr lang="en-US" sz="1120" b="1" dirty="0">
+              <a:rPr lang="en-US" sz="1200" b="1" dirty="0">
                 <a:solidFill>
                   <a:srgbClr val="007F72"/>
                 </a:solidFill>
@@ -10838,7 +10838,7 @@
               </a:rPr>
               <a:t>Quảng cáo hay ghi 170 m. Con số phải dùng để thiết kế là 90 m.</a:t>
             </a:r>
-            <a:endParaRPr lang="en-US" sz="1120" dirty="0"/>
+            <a:endParaRPr lang="en-US" sz="1200" dirty="0"/>
           </a:p>
           <a:p>
             <a:pPr indent="0" marL="0">
@@ -10848,7 +10848,7 @@
               <a:buNone/>
             </a:pPr>
             <a:r>
-              <a:rPr lang="en-US" sz="1030" dirty="0">
+              <a:rPr lang="en-US" sz="1100" dirty="0">
                 <a:solidFill>
                   <a:srgbClr val="007F72"/>
                 </a:solidFill>
@@ -10858,7 +10858,7 @@
               </a:rPr>
               <a:t>廣告上會寫 170 公尺。真正設計的時候要用的是 90 公尺。</a:t>
             </a:r>
-            <a:endParaRPr lang="en-US" sz="1120" dirty="0"/>
+            <a:endParaRPr lang="en-US" sz="1200" dirty="0"/>
           </a:p>
         </p:txBody>
       </p:sp>
@@ -10894,8 +10894,8 @@
         </p:nvSpPr>
         <p:spPr>
           <a:xfrm>
-            <a:off x="412965" y="119317"/>
-            <a:ext cx="767035" cy="238633"/>
+            <a:off x="109728" y="128016"/>
+            <a:ext cx="822960" cy="256032"/>
           </a:xfrm>
           <a:prstGeom prst="rect">
             <a:avLst/>
@@ -10911,7 +10911,7 @@
               <a:buNone/>
             </a:pPr>
             <a:r>
-              <a:rPr lang="en-US" sz="840" dirty="0">
+              <a:rPr lang="en-US" sz="900" dirty="0">
                 <a:solidFill>
                   <a:srgbClr val="5F7183"/>
                 </a:solidFill>
@@ -10921,7 +10921,7 @@
               </a:rPr>
               <a:t>12 / 14</a:t>
             </a:r>
-            <a:endParaRPr lang="en-US" sz="840" dirty="0"/>
+            <a:endParaRPr lang="en-US" sz="900" dirty="0"/>
           </a:p>
         </p:txBody>
       </p:sp>
@@ -10933,8 +10933,8 @@
         </p:nvSpPr>
         <p:spPr>
           <a:xfrm>
-            <a:off x="1205568" y="119317"/>
-            <a:ext cx="1874975" cy="238633"/>
+            <a:off x="960120" y="128016"/>
+            <a:ext cx="2011680" cy="256032"/>
           </a:xfrm>
           <a:prstGeom prst="rect">
             <a:avLst/>
@@ -10950,7 +10950,7 @@
               <a:buNone/>
             </a:pPr>
             <a:r>
-              <a:rPr lang="en-US" sz="840" dirty="0">
+              <a:rPr lang="en-US" sz="900" dirty="0">
                 <a:solidFill>
                   <a:srgbClr val="5F7183"/>
                 </a:solidFill>
@@ -10960,7 +10960,7 @@
               </a:rPr>
               <a:t>Tiết 1 · 第 1 節</a:t>
             </a:r>
-            <a:endParaRPr lang="en-US" sz="840" dirty="0"/>
+            <a:endParaRPr lang="en-US" sz="900" dirty="0"/>
           </a:p>
         </p:txBody>
       </p:sp>
@@ -10990,7 +10990,7 @@
       </p:nvGrpSpPr>
       <p:grpSpPr>
         <a:xfrm>
-          <a:off x="925172" y="0"/>
+          <a:off x="0" y="0"/>
           <a:ext cx="1" cy="1"/>
           <a:chOff x="0" y="0"/>
           <a:chExt cx="0" cy="0"/>
@@ -11004,8 +11004,8 @@
         </p:nvSpPr>
         <p:spPr>
           <a:xfrm>
-            <a:off x="6322478" y="-1094048"/>
-            <a:ext cx="3355082" cy="3355082"/>
+            <a:off x="6766560" y="-1371600"/>
+            <a:ext cx="4206240" cy="4206240"/>
           </a:xfrm>
           <a:prstGeom prst="ellipse">
             <a:avLst/>
@@ -11029,8 +11029,8 @@
         </p:nvSpPr>
         <p:spPr>
           <a:xfrm>
-            <a:off x="7416526" y="1677541"/>
-            <a:ext cx="1896351" cy="1896351"/>
+            <a:off x="8138160" y="2103120"/>
+            <a:ext cx="2377440" cy="2377440"/>
           </a:xfrm>
           <a:prstGeom prst="ellipse">
             <a:avLst/>
@@ -11051,8 +11051,8 @@
         </p:nvSpPr>
         <p:spPr>
           <a:xfrm>
-            <a:off x="1326323" y="379270"/>
-            <a:ext cx="5397306" cy="218810"/>
+            <a:off x="502920" y="475488"/>
+            <a:ext cx="6766560" cy="274320"/>
           </a:xfrm>
           <a:prstGeom prst="rect">
             <a:avLst/>
@@ -11068,7 +11068,7 @@
               <a:buNone/>
             </a:pPr>
             <a:r>
-              <a:rPr lang="en-US" sz="1000" b="1" dirty="0">
+              <a:rPr lang="en-US" sz="1250" b="1" dirty="0">
                 <a:solidFill>
                   <a:srgbClr val="FFB020"/>
                 </a:solidFill>
@@ -11078,7 +11078,7 @@
               </a:rPr>
               <a:t>Lên máy · 上機（第一輪）</a:t>
             </a:r>
-            <a:endParaRPr lang="en-US" sz="1000" dirty="0"/>
+            <a:endParaRPr lang="en-US" sz="1250" dirty="0"/>
           </a:p>
         </p:txBody>
       </p:sp>
@@ -11090,8 +11090,8 @@
         </p:nvSpPr>
         <p:spPr>
           <a:xfrm>
-            <a:off x="1326323" y="627254"/>
-            <a:ext cx="6418418" cy="977350"/>
+            <a:off x="502920" y="786384"/>
+            <a:ext cx="8046720" cy="1225296"/>
           </a:xfrm>
           <a:prstGeom prst="rect">
             <a:avLst/>
@@ -11110,7 +11110,7 @@
               <a:buNone/>
             </a:pPr>
             <a:r>
-              <a:rPr lang="en-US" sz="1830" b="1" dirty="0">
+              <a:rPr lang="en-US" sz="2300" b="1" dirty="0">
                 <a:solidFill>
                   <a:srgbClr val="FFFFFF"/>
                 </a:solidFill>
@@ -11120,7 +11120,7 @@
               </a:rPr>
               <a:t>Mỗi người tự làm: chọn OS1, tìm bốn con số, bấm kiểm tra.</a:t>
             </a:r>
-            <a:endParaRPr lang="en-US" sz="1830" dirty="0"/>
+            <a:endParaRPr lang="en-US" sz="2300" dirty="0"/>
           </a:p>
           <a:p>
             <a:pPr indent="0" marL="0">
@@ -11130,7 +11130,7 @@
               <a:buNone/>
             </a:pPr>
             <a:r>
-              <a:rPr lang="en-US" sz="1200" dirty="0">
+              <a:rPr lang="en-US" sz="1500" dirty="0">
                 <a:solidFill>
                   <a:srgbClr val="AFC3D4"/>
                 </a:solidFill>
@@ -11140,7 +11140,7 @@
               </a:rPr>
               <a:t>每個人自己做：選 OS1，把四個數字找出來，按檢查。</a:t>
             </a:r>
-            <a:endParaRPr lang="en-US" sz="1830" dirty="0"/>
+            <a:endParaRPr lang="en-US" sz="2300" dirty="0"/>
           </a:p>
         </p:txBody>
       </p:sp>
@@ -11152,8 +11152,8 @@
         </p:nvSpPr>
         <p:spPr>
           <a:xfrm>
-            <a:off x="1326323" y="1499877"/>
-            <a:ext cx="6491354" cy="495969"/>
+            <a:off x="502920" y="1880384"/>
+            <a:ext cx="8138160" cy="621792"/>
           </a:xfrm>
           <a:prstGeom prst="roundRect">
             <a:avLst>
@@ -11174,8 +11174,8 @@
         </p:nvSpPr>
         <p:spPr>
           <a:xfrm>
-            <a:off x="1457609" y="1616575"/>
-            <a:ext cx="262572" cy="262572"/>
+            <a:off x="667512" y="2026688"/>
+            <a:ext cx="329184" cy="329184"/>
           </a:xfrm>
           <a:prstGeom prst="ellipse">
             <a:avLst/>
@@ -11194,8 +11194,8 @@
         </p:nvSpPr>
         <p:spPr>
           <a:xfrm>
-            <a:off x="1457609" y="1638456"/>
-            <a:ext cx="262572" cy="218810"/>
+            <a:off x="667512" y="2054120"/>
+            <a:ext cx="329184" cy="274320"/>
           </a:xfrm>
           <a:prstGeom prst="rect">
             <a:avLst/>
@@ -11211,7 +11211,7 @@
               <a:buNone/>
             </a:pPr>
             <a:r>
-              <a:rPr lang="en-US" sz="960" b="1" dirty="0">
+              <a:rPr lang="en-US" sz="1200" b="1" dirty="0">
                 <a:solidFill>
                   <a:srgbClr val="FFFFFF"/>
                 </a:solidFill>
@@ -11221,7 +11221,7 @@
               </a:rPr>
               <a:t>1</a:t>
             </a:r>
-            <a:endParaRPr lang="en-US" sz="960" dirty="0"/>
+            <a:endParaRPr lang="en-US" sz="1200" dirty="0"/>
           </a:p>
         </p:txBody>
       </p:sp>
@@ -11233,8 +11233,8 @@
         </p:nvSpPr>
         <p:spPr>
           <a:xfrm>
-            <a:off x="1851466" y="1536345"/>
-            <a:ext cx="5820338" cy="437619"/>
+            <a:off x="1161288" y="1926104"/>
+            <a:ext cx="7296912" cy="548640"/>
           </a:xfrm>
           <a:prstGeom prst="rect">
             <a:avLst/>
@@ -11253,7 +11253,7 @@
               <a:buNone/>
             </a:pPr>
             <a:r>
-              <a:rPr lang="en-US" sz="1000" b="1" dirty="0">
+              <a:rPr lang="en-US" sz="1250" b="1" dirty="0">
                 <a:solidFill>
                   <a:srgbClr val="FFFFFF"/>
                 </a:solidFill>
@@ -11263,7 +11263,7 @@
               </a:rPr>
               <a:t>Bốn câu: góc nhìn dọc · tầm đo với vật 10% · phân giải · tốc độ cập nhật</a:t>
             </a:r>
-            <a:endParaRPr lang="en-US" sz="1000" dirty="0"/>
+            <a:endParaRPr lang="en-US" sz="1250" dirty="0"/>
           </a:p>
           <a:p>
             <a:pPr indent="0" marL="0">
@@ -11273,7 +11273,7 @@
               <a:buNone/>
             </a:pPr>
             <a:r>
-              <a:rPr lang="en-US" sz="920" dirty="0">
+              <a:rPr lang="en-US" sz="1150" dirty="0">
                 <a:solidFill>
                   <a:srgbClr val="AFC3D4"/>
                 </a:solidFill>
@@ -11283,7 +11283,7 @@
               </a:rPr>
               <a:t>四題：垂直視野・對 10% 反射率的測距・解析度・更新率</a:t>
             </a:r>
-            <a:endParaRPr lang="en-US" sz="1000" dirty="0"/>
+            <a:endParaRPr lang="en-US" sz="1250" dirty="0"/>
           </a:p>
         </p:txBody>
       </p:sp>
@@ -11295,8 +11295,8 @@
         </p:nvSpPr>
         <p:spPr>
           <a:xfrm>
-            <a:off x="1326323" y="2068782"/>
-            <a:ext cx="6491354" cy="495969"/>
+            <a:off x="502920" y="2593616"/>
+            <a:ext cx="8138160" cy="621792"/>
           </a:xfrm>
           <a:prstGeom prst="roundRect">
             <a:avLst>
@@ -11317,8 +11317,8 @@
         </p:nvSpPr>
         <p:spPr>
           <a:xfrm>
-            <a:off x="1457609" y="2185481"/>
-            <a:ext cx="262572" cy="262572"/>
+            <a:off x="667512" y="2739920"/>
+            <a:ext cx="329184" cy="329184"/>
           </a:xfrm>
           <a:prstGeom prst="ellipse">
             <a:avLst/>
@@ -11337,8 +11337,8 @@
         </p:nvSpPr>
         <p:spPr>
           <a:xfrm>
-            <a:off x="1457609" y="2207362"/>
-            <a:ext cx="262572" cy="218810"/>
+            <a:off x="667512" y="2767352"/>
+            <a:ext cx="329184" cy="274320"/>
           </a:xfrm>
           <a:prstGeom prst="rect">
             <a:avLst/>
@@ -11354,7 +11354,7 @@
               <a:buNone/>
             </a:pPr>
             <a:r>
-              <a:rPr lang="en-US" sz="960" b="1" dirty="0">
+              <a:rPr lang="en-US" sz="1200" b="1" dirty="0">
                 <a:solidFill>
                   <a:srgbClr val="FFFFFF"/>
                 </a:solidFill>
@@ -11364,7 +11364,7 @@
               </a:rPr>
               <a:t>2</a:t>
             </a:r>
-            <a:endParaRPr lang="en-US" sz="960" dirty="0"/>
+            <a:endParaRPr lang="en-US" sz="1200" dirty="0"/>
           </a:p>
         </p:txBody>
       </p:sp>
@@ -11376,8 +11376,8 @@
         </p:nvSpPr>
         <p:spPr>
           <a:xfrm>
-            <a:off x="1851466" y="2105250"/>
-            <a:ext cx="5820338" cy="437619"/>
+            <a:off x="1161288" y="2639336"/>
+            <a:ext cx="7296912" cy="548640"/>
           </a:xfrm>
           <a:prstGeom prst="rect">
             <a:avLst/>
@@ -11396,7 +11396,7 @@
               <a:buNone/>
             </a:pPr>
             <a:r>
-              <a:rPr lang="en-US" sz="1000" b="1" dirty="0">
+              <a:rPr lang="en-US" sz="1250" b="1" dirty="0">
                 <a:solidFill>
                   <a:srgbClr val="FFFFFF"/>
                 </a:solidFill>
@@ -11406,7 +11406,7 @@
               </a:rPr>
               <a:t>Sai thì công cụ nói sai ở đâu — đọc xong sửa lại, đừng đoán bừa</a:t>
             </a:r>
-            <a:endParaRPr lang="en-US" sz="1000" dirty="0"/>
+            <a:endParaRPr lang="en-US" sz="1250" dirty="0"/>
           </a:p>
           <a:p>
             <a:pPr indent="0" marL="0">
@@ -11416,7 +11416,7 @@
               <a:buNone/>
             </a:pPr>
             <a:r>
-              <a:rPr lang="en-US" sz="920" dirty="0">
+              <a:rPr lang="en-US" sz="1150" dirty="0">
                 <a:solidFill>
                   <a:srgbClr val="AFC3D4"/>
                 </a:solidFill>
@@ -11426,7 +11426,7 @@
               </a:rPr>
               <a:t>選錯的話工具會告訴你錯在哪——看完再改，不要亂猜</a:t>
             </a:r>
-            <a:endParaRPr lang="en-US" sz="1000" dirty="0"/>
+            <a:endParaRPr lang="en-US" sz="1250" dirty="0"/>
           </a:p>
         </p:txBody>
       </p:sp>
@@ -11438,8 +11438,8 @@
         </p:nvSpPr>
         <p:spPr>
           <a:xfrm>
-            <a:off x="1326323" y="2637687"/>
-            <a:ext cx="6491354" cy="495969"/>
+            <a:off x="502920" y="3306848"/>
+            <a:ext cx="8138160" cy="621792"/>
           </a:xfrm>
           <a:prstGeom prst="roundRect">
             <a:avLst>
@@ -11460,8 +11460,8 @@
         </p:nvSpPr>
         <p:spPr>
           <a:xfrm>
-            <a:off x="1457609" y="2754386"/>
-            <a:ext cx="262572" cy="262572"/>
+            <a:off x="667512" y="3453152"/>
+            <a:ext cx="329184" cy="329184"/>
           </a:xfrm>
           <a:prstGeom prst="ellipse">
             <a:avLst/>
@@ -11480,8 +11480,8 @@
         </p:nvSpPr>
         <p:spPr>
           <a:xfrm>
-            <a:off x="1457609" y="2776267"/>
-            <a:ext cx="262572" cy="218810"/>
+            <a:off x="667512" y="3480584"/>
+            <a:ext cx="329184" cy="274320"/>
           </a:xfrm>
           <a:prstGeom prst="rect">
             <a:avLst/>
@@ -11497,7 +11497,7 @@
               <a:buNone/>
             </a:pPr>
             <a:r>
-              <a:rPr lang="en-US" sz="960" b="1" dirty="0">
+              <a:rPr lang="en-US" sz="1200" b="1" dirty="0">
                 <a:solidFill>
                   <a:srgbClr val="FFFFFF"/>
                 </a:solidFill>
@@ -11507,7 +11507,7 @@
               </a:rPr>
               <a:t>3</a:t>
             </a:r>
-            <a:endParaRPr lang="en-US" sz="960" dirty="0"/>
+            <a:endParaRPr lang="en-US" sz="1200" dirty="0"/>
           </a:p>
         </p:txBody>
       </p:sp>
@@ -11519,8 +11519,8 @@
         </p:nvSpPr>
         <p:spPr>
           <a:xfrm>
-            <a:off x="1851466" y="2674156"/>
-            <a:ext cx="5820338" cy="437619"/>
+            <a:off x="1161288" y="3352568"/>
+            <a:ext cx="7296912" cy="548640"/>
           </a:xfrm>
           <a:prstGeom prst="rect">
             <a:avLst/>
@@ -11539,7 +11539,7 @@
               <a:buNone/>
             </a:pPr>
             <a:r>
-              <a:rPr lang="en-US" sz="1000" b="1" dirty="0">
+              <a:rPr lang="en-US" sz="1250" b="1" dirty="0">
                 <a:solidFill>
                   <a:srgbClr val="FFFFFF"/>
                 </a:solidFill>
@@ -11549,7 +11549,7 @@
               </a:rPr>
               <a:t>Làm xong OS1 thì đổi sang AT128 làm lại một lượt</a:t>
             </a:r>
-            <a:endParaRPr lang="en-US" sz="1000" dirty="0"/>
+            <a:endParaRPr lang="en-US" sz="1250" dirty="0"/>
           </a:p>
           <a:p>
             <a:pPr indent="0" marL="0">
@@ -11559,7 +11559,7 @@
               <a:buNone/>
             </a:pPr>
             <a:r>
-              <a:rPr lang="en-US" sz="920" dirty="0">
+              <a:rPr lang="en-US" sz="1150" dirty="0">
                 <a:solidFill>
                   <a:srgbClr val="AFC3D4"/>
                 </a:solidFill>
@@ -11569,7 +11569,7 @@
               </a:rPr>
               <a:t>OS1 做完，換 AT128 再做一次</a:t>
             </a:r>
-            <a:endParaRPr lang="en-US" sz="1000" dirty="0"/>
+            <a:endParaRPr lang="en-US" sz="1250" dirty="0"/>
           </a:p>
         </p:txBody>
       </p:sp>
@@ -11581,8 +11581,8 @@
         </p:nvSpPr>
         <p:spPr>
           <a:xfrm>
-            <a:off x="1326323" y="3235767"/>
-            <a:ext cx="6418418" cy="364683"/>
+            <a:off x="502920" y="4056656"/>
+            <a:ext cx="8046720" cy="457200"/>
           </a:xfrm>
           <a:prstGeom prst="rect">
             <a:avLst/>
@@ -11601,7 +11601,7 @@
               <a:buNone/>
             </a:pPr>
             <a:r>
-              <a:rPr lang="en-US" sz="1000" b="1" dirty="0">
+              <a:rPr lang="en-US" sz="1250" b="1" dirty="0">
                 <a:solidFill>
                   <a:srgbClr val="FFB020"/>
                 </a:solidFill>
@@ -11611,7 +11611,7 @@
               </a:rPr>
               <a:t>Hai câu của camera sẽ khiến nhiều người bực mình. Đó là chủ ý.</a:t>
             </a:r>
-            <a:endParaRPr lang="en-US" sz="1000" dirty="0"/>
+            <a:endParaRPr lang="en-US" sz="1250" dirty="0"/>
           </a:p>
           <a:p>
             <a:pPr indent="0" marL="0">
@@ -11621,7 +11621,7 @@
               <a:buNone/>
             </a:pPr>
             <a:r>
-              <a:rPr lang="en-US" sz="920" dirty="0">
+              <a:rPr lang="en-US" sz="1150" dirty="0">
                 <a:solidFill>
                   <a:srgbClr val="FFB020"/>
                 </a:solidFill>
@@ -11631,7 +11631,7 @@
               </a:rPr>
               <a:t>相機那兩題會讓很多人火大。那是故意的。</a:t>
             </a:r>
-            <a:endParaRPr lang="en-US" sz="1000" dirty="0"/>
+            <a:endParaRPr lang="en-US" sz="1250" dirty="0"/>
           </a:p>
         </p:txBody>
       </p:sp>
@@ -11643,8 +11643,8 @@
         </p:nvSpPr>
         <p:spPr>
           <a:xfrm>
-            <a:off x="1012696" y="102111"/>
-            <a:ext cx="656429" cy="204222"/>
+            <a:off x="109728" y="128016"/>
+            <a:ext cx="822960" cy="256032"/>
           </a:xfrm>
           <a:prstGeom prst="rect">
             <a:avLst/>
@@ -11660,7 +11660,7 @@
               <a:buNone/>
             </a:pPr>
             <a:r>
-              <a:rPr lang="en-US" sz="720" dirty="0">
+              <a:rPr lang="en-US" sz="900" dirty="0">
                 <a:solidFill>
                   <a:srgbClr val="9FB3C8"/>
                 </a:solidFill>
@@ -11670,7 +11670,7 @@
               </a:rPr>
               <a:t>13 / 14</a:t>
             </a:r>
-            <a:endParaRPr lang="en-US" sz="720" dirty="0"/>
+            <a:endParaRPr lang="en-US" sz="900" dirty="0"/>
           </a:p>
         </p:txBody>
       </p:sp>
@@ -11682,8 +11682,8 @@
         </p:nvSpPr>
         <p:spPr>
           <a:xfrm>
-            <a:off x="1691006" y="102111"/>
-            <a:ext cx="1604604" cy="204222"/>
+            <a:off x="960120" y="128016"/>
+            <a:ext cx="2011680" cy="256032"/>
           </a:xfrm>
           <a:prstGeom prst="rect">
             <a:avLst/>
@@ -11699,7 +11699,7 @@
               <a:buNone/>
             </a:pPr>
             <a:r>
-              <a:rPr lang="en-US" sz="720" dirty="0">
+              <a:rPr lang="en-US" sz="900" dirty="0">
                 <a:solidFill>
                   <a:srgbClr val="9FB3C8"/>
                 </a:solidFill>
@@ -11709,7 +11709,7 @@
               </a:rPr>
               <a:t>Tiết 1 · 第 1 節</a:t>
             </a:r>
-            <a:endParaRPr lang="en-US" sz="720" dirty="0"/>
+            <a:endParaRPr lang="en-US" sz="900" dirty="0"/>
           </a:p>
         </p:txBody>
       </p:sp>
@@ -11739,7 +11739,7 @@
       </p:nvGrpSpPr>
       <p:grpSpPr>
         <a:xfrm>
-          <a:off x="898071" y="0"/>
+          <a:off x="0" y="0"/>
           <a:ext cx="1" cy="1"/>
           <a:chOff x="0" y="0"/>
           <a:chExt cx="0" cy="0"/>
@@ -11753,8 +11753,8 @@
         </p:nvSpPr>
         <p:spPr>
           <a:xfrm>
-            <a:off x="6335486" y="-1102179"/>
-            <a:ext cx="3380014" cy="3380014"/>
+            <a:off x="6766560" y="-1371600"/>
+            <a:ext cx="4206240" cy="4206240"/>
           </a:xfrm>
           <a:prstGeom prst="ellipse">
             <a:avLst/>
@@ -11778,8 +11778,8 @@
         </p:nvSpPr>
         <p:spPr>
           <a:xfrm>
-            <a:off x="7437664" y="1690007"/>
-            <a:ext cx="1910443" cy="1910443"/>
+            <a:off x="8138160" y="2103120"/>
+            <a:ext cx="2377440" cy="2377440"/>
           </a:xfrm>
           <a:prstGeom prst="ellipse">
             <a:avLst/>
@@ -11800,8 +11800,8 @@
         </p:nvSpPr>
         <p:spPr>
           <a:xfrm>
-            <a:off x="1302204" y="382089"/>
-            <a:ext cx="5437414" cy="220436"/>
+            <a:off x="502920" y="475488"/>
+            <a:ext cx="6766560" cy="274320"/>
           </a:xfrm>
           <a:prstGeom prst="rect">
             <a:avLst/>
@@ -11817,7 +11817,7 @@
               <a:buNone/>
             </a:pPr>
             <a:r>
-              <a:rPr lang="en-US" sz="1000" b="1" dirty="0">
+              <a:rPr lang="en-US" sz="1250" b="1" dirty="0">
                 <a:solidFill>
                   <a:srgbClr val="FFB020"/>
                 </a:solidFill>
@@ -11827,7 +11827,7 @@
               </a:rPr>
               <a:t>Tiết 1 · 第一節小結</a:t>
             </a:r>
-            <a:endParaRPr lang="en-US" sz="1000" dirty="0"/>
+            <a:endParaRPr lang="en-US" sz="1250" dirty="0"/>
           </a:p>
         </p:txBody>
       </p:sp>
@@ -11839,8 +11839,8 @@
         </p:nvSpPr>
         <p:spPr>
           <a:xfrm>
-            <a:off x="1302204" y="661307"/>
-            <a:ext cx="6466114" cy="852351"/>
+            <a:off x="502920" y="822960"/>
+            <a:ext cx="8046720" cy="1060704"/>
           </a:xfrm>
           <a:prstGeom prst="rect">
             <a:avLst/>
@@ -11859,7 +11859,7 @@
               <a:buNone/>
             </a:pPr>
             <a:r>
-              <a:rPr lang="en-US" sz="2010" b="1" dirty="0">
+              <a:rPr lang="en-US" sz="2500" b="1" dirty="0">
                 <a:solidFill>
                   <a:srgbClr val="FFFFFF"/>
                 </a:solidFill>
@@ -11869,7 +11869,7 @@
               </a:rPr>
               <a:t>Mang ba câu này sang tiết 2</a:t>
             </a:r>
-            <a:endParaRPr lang="en-US" sz="2010" dirty="0"/>
+            <a:endParaRPr lang="en-US" sz="2500" dirty="0"/>
           </a:p>
           <a:p>
             <a:pPr indent="0" marL="0">
@@ -11879,7 +11879,7 @@
               <a:buNone/>
             </a:pPr>
             <a:r>
-              <a:rPr lang="en-US" sz="1210" dirty="0">
+              <a:rPr lang="en-US" sz="1500" dirty="0">
                 <a:solidFill>
                   <a:srgbClr val="AFC3D4"/>
                 </a:solidFill>
@@ -11889,7 +11889,7 @@
               </a:rPr>
               <a:t>帶三句話進第二節</a:t>
             </a:r>
-            <a:endParaRPr lang="en-US" sz="2010" dirty="0"/>
+            <a:endParaRPr lang="en-US" sz="2500" dirty="0"/>
           </a:p>
         </p:txBody>
       </p:sp>
@@ -11901,8 +11901,8 @@
         </p:nvSpPr>
         <p:spPr>
           <a:xfrm>
-            <a:off x="1302204" y="1425484"/>
-            <a:ext cx="36739" cy="540573"/>
+            <a:off x="502920" y="1773936"/>
+            <a:ext cx="45720" cy="672713"/>
           </a:xfrm>
           <a:prstGeom prst="rect">
             <a:avLst/>
@@ -11921,8 +11921,8 @@
         </p:nvSpPr>
         <p:spPr>
           <a:xfrm>
-            <a:off x="1478552" y="1396093"/>
-            <a:ext cx="6319157" cy="628747"/>
+            <a:off x="722376" y="1737360"/>
+            <a:ext cx="7863840" cy="782441"/>
           </a:xfrm>
           <a:prstGeom prst="rect">
             <a:avLst/>
@@ -11941,7 +11941,7 @@
               <a:buNone/>
             </a:pPr>
             <a:r>
-              <a:rPr lang="en-US" sz="1080" b="1" dirty="0">
+              <a:rPr lang="en-US" sz="1350" b="1" dirty="0">
                 <a:solidFill>
                   <a:srgbClr val="FFFFFF"/>
                 </a:solidFill>
@@ -11951,7 +11951,7 @@
               </a:rPr>
               <a:t>Ba thanh trượt tuần trước = ba dòng trên datasheet: số kênh, góc nhìn, tầm đo. Cộng thêm dòng thứ tư: tốc độ cập nhật.</a:t>
             </a:r>
-            <a:endParaRPr lang="en-US" sz="1080" dirty="0"/>
+            <a:endParaRPr lang="en-US" sz="1350" dirty="0"/>
           </a:p>
           <a:p>
             <a:pPr indent="0" marL="0">
@@ -11961,7 +11961,7 @@
               <a:buNone/>
             </a:pPr>
             <a:r>
-              <a:rPr lang="en-US" sz="960" dirty="0">
+              <a:rPr lang="en-US" sz="1200" dirty="0">
                 <a:solidFill>
                   <a:srgbClr val="AFC3D4"/>
                 </a:solidFill>
@@ -11971,7 +11971,7 @@
               </a:rPr>
               <a:t>上週三個滑桿就是規格表上三行：線束數、視野、測距。再加第四行：更新率。</a:t>
             </a:r>
-            <a:endParaRPr lang="en-US" sz="1080" dirty="0"/>
+            <a:endParaRPr lang="en-US" sz="1350" dirty="0"/>
           </a:p>
         </p:txBody>
       </p:sp>
@@ -11983,8 +11983,8 @@
         </p:nvSpPr>
         <p:spPr>
           <a:xfrm>
-            <a:off x="1302204" y="2127710"/>
-            <a:ext cx="36739" cy="540573"/>
+            <a:off x="502920" y="2647817"/>
+            <a:ext cx="45720" cy="672713"/>
           </a:xfrm>
           <a:prstGeom prst="rect">
             <a:avLst/>
@@ -12003,8 +12003,8 @@
         </p:nvSpPr>
         <p:spPr>
           <a:xfrm>
-            <a:off x="1478552" y="2098319"/>
-            <a:ext cx="6319157" cy="628747"/>
+            <a:off x="722376" y="2611241"/>
+            <a:ext cx="7863840" cy="782441"/>
           </a:xfrm>
           <a:prstGeom prst="rect">
             <a:avLst/>
@@ -12023,7 +12023,7 @@
               <a:buNone/>
             </a:pPr>
             <a:r>
-              <a:rPr lang="en-US" sz="1080" b="1" dirty="0">
+              <a:rPr lang="en-US" sz="1350" b="1" dirty="0">
                 <a:solidFill>
                   <a:srgbClr val="FFFFFF"/>
                 </a:solidFill>
@@ -12033,7 +12033,7 @@
               </a:rPr>
               <a:t>Datasheet cảm biến ảnh không có góc nhìn và tầm đo — góc nhìn do ống kính, khoảng cách là tính ra.</a:t>
             </a:r>
-            <a:endParaRPr lang="en-US" sz="1080" dirty="0"/>
+            <a:endParaRPr lang="en-US" sz="1350" dirty="0"/>
           </a:p>
           <a:p>
             <a:pPr indent="0" marL="0">
@@ -12043,7 +12043,7 @@
               <a:buNone/>
             </a:pPr>
             <a:r>
-              <a:rPr lang="en-US" sz="960" dirty="0">
+              <a:rPr lang="en-US" sz="1200" dirty="0">
                 <a:solidFill>
                   <a:srgbClr val="AFC3D4"/>
                 </a:solidFill>
@@ -12053,7 +12053,7 @@
               </a:rPr>
               <a:t>影像感測器的規格表沒有視野和測距——視野看鏡頭，距離是算出來的。</a:t>
             </a:r>
-            <a:endParaRPr lang="en-US" sz="1080" dirty="0"/>
+            <a:endParaRPr lang="en-US" sz="1350" dirty="0"/>
           </a:p>
         </p:txBody>
       </p:sp>
@@ -12065,8 +12065,8 @@
         </p:nvSpPr>
         <p:spPr>
           <a:xfrm>
-            <a:off x="1302204" y="2829936"/>
-            <a:ext cx="36739" cy="540573"/>
+            <a:off x="502920" y="3521698"/>
+            <a:ext cx="45720" cy="672713"/>
           </a:xfrm>
           <a:prstGeom prst="rect">
             <a:avLst/>
@@ -12085,8 +12085,8 @@
         </p:nvSpPr>
         <p:spPr>
           <a:xfrm>
-            <a:off x="1478552" y="2800544"/>
-            <a:ext cx="6319157" cy="628747"/>
+            <a:off x="722376" y="3485122"/>
+            <a:ext cx="7863840" cy="782441"/>
           </a:xfrm>
           <a:prstGeom prst="rect">
             <a:avLst/>
@@ -12105,7 +12105,7 @@
               <a:buNone/>
             </a:pPr>
             <a:r>
-              <a:rPr lang="en-US" sz="1080" b="1" dirty="0">
+              <a:rPr lang="en-US" sz="1350" b="1" dirty="0">
                 <a:solidFill>
                   <a:srgbClr val="FFFFFF"/>
                 </a:solidFill>
@@ -12115,7 +12115,7 @@
               </a:rPr>
               <a:t>Tầm đo luôn phải hỏi: đo với vật phản xạ bao nhiêu phần trăm. 170 m hay 90 m là hai thế giới khác nhau.</a:t>
             </a:r>
-            <a:endParaRPr lang="en-US" sz="1080" dirty="0"/>
+            <a:endParaRPr lang="en-US" sz="1350" dirty="0"/>
           </a:p>
           <a:p>
             <a:pPr indent="0" marL="0">
@@ -12125,7 +12125,7 @@
               <a:buNone/>
             </a:pPr>
             <a:r>
-              <a:rPr lang="en-US" sz="960" dirty="0">
+              <a:rPr lang="en-US" sz="1200" dirty="0">
                 <a:solidFill>
                   <a:srgbClr val="AFC3D4"/>
                 </a:solidFill>
@@ -12135,7 +12135,7 @@
               </a:rPr>
               <a:t>看到測距一定要追問：對百分之幾反射率量的。170 公尺和 90 公尺是兩個世界。</a:t>
             </a:r>
-            <a:endParaRPr lang="en-US" sz="1080" dirty="0"/>
+            <a:endParaRPr lang="en-US" sz="1350" dirty="0"/>
           </a:p>
         </p:txBody>
       </p:sp>
@@ -12147,8 +12147,8 @@
         </p:nvSpPr>
         <p:spPr>
           <a:xfrm>
-            <a:off x="986246" y="102870"/>
-            <a:ext cx="661307" cy="205740"/>
+            <a:off x="109728" y="128016"/>
+            <a:ext cx="822960" cy="256032"/>
           </a:xfrm>
           <a:prstGeom prst="rect">
             <a:avLst/>
@@ -12164,7 +12164,7 @@
               <a:buNone/>
             </a:pPr>
             <a:r>
-              <a:rPr lang="en-US" sz="720" dirty="0">
+              <a:rPr lang="en-US" sz="900" dirty="0">
                 <a:solidFill>
                   <a:srgbClr val="9FB3C8"/>
                 </a:solidFill>
@@ -12174,7 +12174,7 @@
               </a:rPr>
               <a:t>14 / 14</a:t>
             </a:r>
-            <a:endParaRPr lang="en-US" sz="720" dirty="0"/>
+            <a:endParaRPr lang="en-US" sz="900" dirty="0"/>
           </a:p>
         </p:txBody>
       </p:sp>
@@ -12186,8 +12186,8 @@
         </p:nvSpPr>
         <p:spPr>
           <a:xfrm>
-            <a:off x="1669596" y="102870"/>
-            <a:ext cx="1616529" cy="205740"/>
+            <a:off x="960120" y="128016"/>
+            <a:ext cx="2011680" cy="256032"/>
           </a:xfrm>
           <a:prstGeom prst="rect">
             <a:avLst/>
@@ -12203,7 +12203,7 @@
               <a:buNone/>
             </a:pPr>
             <a:r>
-              <a:rPr lang="en-US" sz="720" dirty="0">
+              <a:rPr lang="en-US" sz="900" dirty="0">
                 <a:solidFill>
                   <a:srgbClr val="9FB3C8"/>
                 </a:solidFill>
@@ -12213,7 +12213,7 @@
               </a:rPr>
               <a:t>Tiết 1 · 第 1 節</a:t>
             </a:r>
-            <a:endParaRPr lang="en-US" sz="720" dirty="0"/>
+            <a:endParaRPr lang="en-US" sz="900" dirty="0"/>
           </a:p>
         </p:txBody>
       </p:sp>
@@ -12236,7 +12236,7 @@
       </p:nvGrpSpPr>
       <p:grpSpPr>
         <a:xfrm>
-          <a:off x="927820" y="0"/>
+          <a:off x="0" y="0"/>
           <a:ext cx="1" cy="1"/>
           <a:chOff x="0" y="0"/>
           <a:chExt cx="0" cy="0"/>
@@ -12250,8 +12250,8 @@
         </p:nvSpPr>
         <p:spPr>
           <a:xfrm>
-            <a:off x="1328680" y="233228"/>
-            <a:ext cx="6486641" cy="670529"/>
+            <a:off x="502920" y="292608"/>
+            <a:ext cx="8138160" cy="841248"/>
           </a:xfrm>
           <a:prstGeom prst="rect">
             <a:avLst/>
@@ -12270,7 +12270,7 @@
               <a:buNone/>
             </a:pPr>
             <a:r>
-              <a:rPr lang="en-US" sz="1750" b="1" dirty="0">
+              <a:rPr lang="en-US" sz="2200" b="1" dirty="0">
                 <a:solidFill>
                   <a:srgbClr val="0B1F3A"/>
                 </a:solidFill>
@@ -12280,7 +12280,7 @@
               </a:rPr>
               <a:t>Mở bàn đọc thông số</a:t>
             </a:r>
-            <a:endParaRPr lang="en-US" sz="1750" dirty="0"/>
+            <a:endParaRPr lang="en-US" sz="2200" dirty="0"/>
           </a:p>
           <a:p>
             <a:pPr indent="0" marL="0">
@@ -12290,7 +12290,7 @@
               <a:buNone/>
             </a:pPr>
             <a:r>
-              <a:rPr lang="en-US" sz="1080" dirty="0">
+              <a:rPr lang="en-US" sz="1350" dirty="0">
                 <a:solidFill>
                   <a:srgbClr val="5F7183"/>
                 </a:solidFill>
@@ -12300,7 +12300,7 @@
               </a:rPr>
               <a:t>打開規格判讀台</a:t>
             </a:r>
-            <a:endParaRPr lang="en-US" sz="1750" dirty="0"/>
+            <a:endParaRPr lang="en-US" sz="2200" dirty="0"/>
           </a:p>
         </p:txBody>
       </p:sp>
@@ -12312,8 +12312,8 @@
         </p:nvSpPr>
         <p:spPr>
           <a:xfrm>
-            <a:off x="6000519" y="903757"/>
-            <a:ext cx="1916839" cy="2091759"/>
+            <a:off x="6364224" y="1133856"/>
+            <a:ext cx="2404872" cy="2624328"/>
           </a:xfrm>
           <a:prstGeom prst="roundRect">
             <a:avLst>
@@ -12347,8 +12347,8 @@
         </p:blipFill>
         <p:spPr>
           <a:xfrm>
-            <a:off x="6102556" y="991217"/>
-            <a:ext cx="1712765" cy="1712765"/>
+            <a:off x="6492240" y="1243584"/>
+            <a:ext cx="2148840" cy="2148840"/>
           </a:xfrm>
           <a:prstGeom prst="rect">
             <a:avLst/>
@@ -12363,8 +12363,8 @@
         </p:nvSpPr>
         <p:spPr>
           <a:xfrm>
-            <a:off x="6029672" y="2733135"/>
-            <a:ext cx="1858532" cy="247804"/>
+            <a:off x="6400800" y="3429000"/>
+            <a:ext cx="2331720" cy="310896"/>
           </a:xfrm>
           <a:prstGeom prst="rect">
             <a:avLst/>
@@ -12383,7 +12383,7 @@
               <a:buNone/>
             </a:pPr>
             <a:r>
-              <a:rPr lang="en-US" sz="840" b="1" dirty="0">
+              <a:rPr lang="en-US" sz="1050" b="1" dirty="0">
                 <a:solidFill>
                   <a:srgbClr val="5F7183"/>
                 </a:solidFill>
@@ -12393,7 +12393,7 @@
               </a:rPr>
               <a:t>Quét mã QR bằng camera điện thoại</a:t>
             </a:r>
-            <a:endParaRPr lang="en-US" sz="840" dirty="0"/>
+            <a:endParaRPr lang="en-US" sz="1050" dirty="0"/>
           </a:p>
           <a:p>
             <a:pPr algn="ctr" indent="0" marL="0">
@@ -12403,7 +12403,7 @@
               <a:buNone/>
             </a:pPr>
             <a:r>
-              <a:rPr lang="en-US" sz="760" dirty="0">
+              <a:rPr lang="en-US" sz="950" dirty="0">
                 <a:solidFill>
                   <a:srgbClr val="5F7183"/>
                 </a:solidFill>
@@ -12413,7 +12413,7 @@
               </a:rPr>
               <a:t>用手機相機掃這個 QR</a:t>
             </a:r>
-            <a:endParaRPr lang="en-US" sz="840" dirty="0"/>
+            <a:endParaRPr lang="en-US" sz="1050" dirty="0"/>
           </a:p>
         </p:txBody>
       </p:sp>
@@ -12425,8 +12425,8 @@
         </p:nvSpPr>
         <p:spPr>
           <a:xfrm>
-            <a:off x="1328680" y="903757"/>
-            <a:ext cx="4526072" cy="670529"/>
+            <a:off x="502920" y="1133856"/>
+            <a:ext cx="5678424" cy="841248"/>
           </a:xfrm>
           <a:prstGeom prst="roundRect">
             <a:avLst>
@@ -12447,8 +12447,8 @@
         </p:nvSpPr>
         <p:spPr>
           <a:xfrm>
-            <a:off x="1445293" y="976640"/>
-            <a:ext cx="4292844" cy="524762"/>
+            <a:off x="649224" y="1225296"/>
+            <a:ext cx="5385816" cy="658368"/>
           </a:xfrm>
           <a:prstGeom prst="rect">
             <a:avLst/>
@@ -12464,7 +12464,7 @@
               <a:buNone/>
             </a:pPr>
             <a:r>
-              <a:rPr lang="en-US" sz="1000" b="1" dirty="0">
+              <a:rPr lang="en-US" sz="1250" b="1" dirty="0">
                 <a:solidFill>
                   <a:srgbClr val="FFFFFF"/>
                 </a:solidFill>
@@ -12474,14 +12474,14 @@
               </a:rPr>
               <a:t>https://ch-neural.github.io/</a:t>
             </a:r>
-            <a:endParaRPr lang="en-US" sz="1000" dirty="0"/>
+            <a:endParaRPr lang="en-US" sz="1250" dirty="0"/>
           </a:p>
           <a:p>
             <a:pPr algn="ctr" indent="0" marL="0">
               <a:buNone/>
             </a:pPr>
             <a:r>
-              <a:rPr lang="en-US" sz="1000" b="1" dirty="0">
+              <a:rPr lang="en-US" sz="1250" b="1" dirty="0">
                 <a:solidFill>
                   <a:srgbClr val="FFFFFF"/>
                 </a:solidFill>
@@ -12491,7 +12491,7 @@
               </a:rPr>
               <a:t>MITUST-Principles-of-Self-Driving-Cars/week5/spec/</a:t>
             </a:r>
-            <a:endParaRPr lang="en-US" sz="1000" dirty="0"/>
+            <a:endParaRPr lang="en-US" sz="1250" dirty="0"/>
           </a:p>
         </p:txBody>
       </p:sp>
@@ -12503,8 +12503,8 @@
         </p:nvSpPr>
         <p:spPr>
           <a:xfrm>
-            <a:off x="1357833" y="1720053"/>
-            <a:ext cx="233228" cy="233228"/>
+            <a:off x="539496" y="2157984"/>
+            <a:ext cx="292608" cy="292608"/>
           </a:xfrm>
           <a:prstGeom prst="ellipse">
             <a:avLst/>
@@ -12523,8 +12523,8 @@
         </p:nvSpPr>
         <p:spPr>
           <a:xfrm>
-            <a:off x="1357833" y="1727341"/>
-            <a:ext cx="233228" cy="218651"/>
+            <a:off x="539496" y="2167128"/>
+            <a:ext cx="292608" cy="274320"/>
           </a:xfrm>
           <a:prstGeom prst="rect">
             <a:avLst/>
@@ -12540,7 +12540,7 @@
               <a:buNone/>
             </a:pPr>
             <a:r>
-              <a:rPr lang="en-US" sz="880" b="1" dirty="0">
+              <a:rPr lang="en-US" sz="1100" b="1" dirty="0">
                 <a:solidFill>
                   <a:srgbClr val="FFFFFF"/>
                 </a:solidFill>
@@ -12550,7 +12550,7 @@
               </a:rPr>
               <a:t>1</a:t>
             </a:r>
-            <a:endParaRPr lang="en-US" sz="880" dirty="0"/>
+            <a:endParaRPr lang="en-US" sz="1100" dirty="0"/>
           </a:p>
         </p:txBody>
       </p:sp>
@@ -12562,8 +12562,8 @@
         </p:nvSpPr>
         <p:spPr>
           <a:xfrm>
-            <a:off x="1678521" y="1690900"/>
-            <a:ext cx="4117924" cy="364418"/>
+            <a:off x="941832" y="2121408"/>
+            <a:ext cx="5166360" cy="457200"/>
           </a:xfrm>
           <a:prstGeom prst="rect">
             <a:avLst/>
@@ -12582,7 +12582,7 @@
               <a:buNone/>
             </a:pPr>
             <a:r>
-              <a:rPr lang="en-US" sz="920" b="1" dirty="0">
+              <a:rPr lang="en-US" sz="1150" b="1" dirty="0">
                 <a:solidFill>
                   <a:srgbClr val="1A2733"/>
                 </a:solidFill>
@@ -12592,7 +12592,7 @@
               </a:rPr>
               <a:t>Bốn model: ba cái là hàng thật, một cái là model ảo để so sánh giá rẻ</a:t>
             </a:r>
-            <a:endParaRPr lang="en-US" sz="920" dirty="0"/>
+            <a:endParaRPr lang="en-US" sz="1150" dirty="0"/>
           </a:p>
           <a:p>
             <a:pPr indent="0" marL="0">
@@ -12602,7 +12602,7 @@
               <a:buNone/>
             </a:pPr>
             <a:r>
-              <a:rPr lang="en-US" sz="840" dirty="0">
+              <a:rPr lang="en-US" sz="1050" dirty="0">
                 <a:solidFill>
                   <a:srgbClr val="5F7183"/>
                 </a:solidFill>
@@ -12612,7 +12612,7 @@
               </a:rPr>
               <a:t>四個型號：三個是真的產品，一個是便宜的教學用型號，拿來比較</a:t>
             </a:r>
-            <a:endParaRPr lang="en-US" sz="920" dirty="0"/>
+            <a:endParaRPr lang="en-US" sz="1150" dirty="0"/>
           </a:p>
         </p:txBody>
       </p:sp>
@@ -12624,8 +12624,8 @@
         </p:nvSpPr>
         <p:spPr>
           <a:xfrm>
-            <a:off x="1357833" y="2113624"/>
-            <a:ext cx="233228" cy="233228"/>
+            <a:off x="539496" y="2651760"/>
+            <a:ext cx="292608" cy="292608"/>
           </a:xfrm>
           <a:prstGeom prst="ellipse">
             <a:avLst/>
@@ -12644,8 +12644,8 @@
         </p:nvSpPr>
         <p:spPr>
           <a:xfrm>
-            <a:off x="1357833" y="2120913"/>
-            <a:ext cx="233228" cy="218651"/>
+            <a:off x="539496" y="2660904"/>
+            <a:ext cx="292608" cy="274320"/>
           </a:xfrm>
           <a:prstGeom prst="rect">
             <a:avLst/>
@@ -12661,7 +12661,7 @@
               <a:buNone/>
             </a:pPr>
             <a:r>
-              <a:rPr lang="en-US" sz="880" b="1" dirty="0">
+              <a:rPr lang="en-US" sz="1100" b="1" dirty="0">
                 <a:solidFill>
                   <a:srgbClr val="FFFFFF"/>
                 </a:solidFill>
@@ -12671,7 +12671,7 @@
               </a:rPr>
               <a:t>2</a:t>
             </a:r>
-            <a:endParaRPr lang="en-US" sz="880" dirty="0"/>
+            <a:endParaRPr lang="en-US" sz="1100" dirty="0"/>
           </a:p>
         </p:txBody>
       </p:sp>
@@ -12683,8 +12683,8 @@
         </p:nvSpPr>
         <p:spPr>
           <a:xfrm>
-            <a:off x="1678521" y="2084471"/>
-            <a:ext cx="4117924" cy="364418"/>
+            <a:off x="941832" y="2615184"/>
+            <a:ext cx="5166360" cy="457200"/>
           </a:xfrm>
           <a:prstGeom prst="rect">
             <a:avLst/>
@@ -12703,7 +12703,7 @@
               <a:buNone/>
             </a:pPr>
             <a:r>
-              <a:rPr lang="en-US" sz="920" b="1" dirty="0">
+              <a:rPr lang="en-US" sz="1150" b="1" dirty="0">
                 <a:solidFill>
                   <a:srgbClr val="1A2733"/>
                 </a:solidFill>
@@ -12713,7 +12713,7 @@
               </a:rPr>
               <a:t>Có nút «chỉ tiếng Anh»: bảng thông số thật thì không có bản dịch</a:t>
             </a:r>
-            <a:endParaRPr lang="en-US" sz="920" dirty="0"/>
+            <a:endParaRPr lang="en-US" sz="1150" dirty="0"/>
           </a:p>
           <a:p>
             <a:pPr indent="0" marL="0">
@@ -12723,7 +12723,7 @@
               <a:buNone/>
             </a:pPr>
             <a:r>
-              <a:rPr lang="en-US" sz="840" dirty="0">
+              <a:rPr lang="en-US" sz="1050" dirty="0">
                 <a:solidFill>
                   <a:srgbClr val="5F7183"/>
                 </a:solidFill>
@@ -12733,7 +12733,7 @@
               </a:rPr>
               <a:t>有一個「只看英文原文」的按鈕：真的規格表上是不會有翻譯的</a:t>
             </a:r>
-            <a:endParaRPr lang="en-US" sz="920" dirty="0"/>
+            <a:endParaRPr lang="en-US" sz="1150" dirty="0"/>
           </a:p>
         </p:txBody>
       </p:sp>
@@ -12745,8 +12745,8 @@
         </p:nvSpPr>
         <p:spPr>
           <a:xfrm>
-            <a:off x="1357833" y="2507196"/>
-            <a:ext cx="233228" cy="233228"/>
+            <a:off x="539496" y="3145536"/>
+            <a:ext cx="292608" cy="292608"/>
           </a:xfrm>
           <a:prstGeom prst="ellipse">
             <a:avLst/>
@@ -12765,8 +12765,8 @@
         </p:nvSpPr>
         <p:spPr>
           <a:xfrm>
-            <a:off x="1357833" y="2514484"/>
-            <a:ext cx="233228" cy="218651"/>
+            <a:off x="539496" y="3154680"/>
+            <a:ext cx="292608" cy="274320"/>
           </a:xfrm>
           <a:prstGeom prst="rect">
             <a:avLst/>
@@ -12782,7 +12782,7 @@
               <a:buNone/>
             </a:pPr>
             <a:r>
-              <a:rPr lang="en-US" sz="880" b="1" dirty="0">
+              <a:rPr lang="en-US" sz="1100" b="1" dirty="0">
                 <a:solidFill>
                   <a:srgbClr val="FFFFFF"/>
                 </a:solidFill>
@@ -12792,7 +12792,7 @@
               </a:rPr>
               <a:t>3</a:t>
             </a:r>
-            <a:endParaRPr lang="en-US" sz="880" dirty="0"/>
+            <a:endParaRPr lang="en-US" sz="1100" dirty="0"/>
           </a:p>
         </p:txBody>
       </p:sp>
@@ -12804,8 +12804,8 @@
         </p:nvSpPr>
         <p:spPr>
           <a:xfrm>
-            <a:off x="1678521" y="2478043"/>
-            <a:ext cx="4117924" cy="364418"/>
+            <a:off x="941832" y="3108960"/>
+            <a:ext cx="5166360" cy="457200"/>
           </a:xfrm>
           <a:prstGeom prst="rect">
             <a:avLst/>
@@ -12824,7 +12824,7 @@
               <a:buNone/>
             </a:pPr>
             <a:r>
-              <a:rPr lang="en-US" sz="920" b="1" dirty="0">
+              <a:rPr lang="en-US" sz="1150" b="1" dirty="0">
                 <a:solidFill>
                   <a:srgbClr val="1A2733"/>
                 </a:solidFill>
@@ -12834,7 +12834,7 @@
               </a:rPr>
               <a:t>Tiết 3 sẽ dùng suốt 50 phút, mỗi người tự làm và nộp</a:t>
             </a:r>
-            <a:endParaRPr lang="en-US" sz="920" dirty="0"/>
+            <a:endParaRPr lang="en-US" sz="1150" dirty="0"/>
           </a:p>
           <a:p>
             <a:pPr indent="0" marL="0">
@@ -12844,7 +12844,7 @@
               <a:buNone/>
             </a:pPr>
             <a:r>
-              <a:rPr lang="en-US" sz="840" dirty="0">
+              <a:rPr lang="en-US" sz="1050" dirty="0">
                 <a:solidFill>
                   <a:srgbClr val="5F7183"/>
                 </a:solidFill>
@@ -12854,7 +12854,7 @@
               </a:rPr>
               <a:t>第三節整節都會用它，而且是每個人自己做、自己交</a:t>
             </a:r>
-            <a:endParaRPr lang="en-US" sz="920" dirty="0"/>
+            <a:endParaRPr lang="en-US" sz="1150" dirty="0"/>
           </a:p>
         </p:txBody>
       </p:sp>
@@ -12866,8 +12866,8 @@
         </p:nvSpPr>
         <p:spPr>
           <a:xfrm>
-            <a:off x="1328680" y="3119418"/>
-            <a:ext cx="6486641" cy="481032"/>
+            <a:off x="502920" y="3913632"/>
+            <a:ext cx="8138160" cy="603504"/>
           </a:xfrm>
           <a:prstGeom prst="roundRect">
             <a:avLst>
@@ -12893,8 +12893,8 @@
         </p:nvSpPr>
         <p:spPr>
           <a:xfrm>
-            <a:off x="1474447" y="3170437"/>
-            <a:ext cx="6195106" cy="393571"/>
+            <a:off x="685800" y="3977640"/>
+            <a:ext cx="7772400" cy="493776"/>
           </a:xfrm>
           <a:prstGeom prst="rect">
             <a:avLst/>
@@ -12913,7 +12913,7 @@
               <a:buNone/>
             </a:pPr>
             <a:r>
-              <a:rPr lang="en-US" sz="960" b="1" dirty="0">
+              <a:rPr lang="en-US" sz="1200" b="1" dirty="0">
                 <a:solidFill>
                   <a:srgbClr val="7A4E00"/>
                 </a:solidFill>
@@ -12923,7 +12923,7 @@
               </a:rPr>
               <a:t>Mở xong bấm thử từng model một lượt cho quen.</a:t>
             </a:r>
-            <a:endParaRPr lang="en-US" sz="960" dirty="0"/>
+            <a:endParaRPr lang="en-US" sz="1200" dirty="0"/>
           </a:p>
           <a:p>
             <a:pPr indent="0" marL="0">
@@ -12933,7 +12933,7 @@
               <a:buNone/>
             </a:pPr>
             <a:r>
-              <a:rPr lang="en-US" sz="880" dirty="0">
+              <a:rPr lang="en-US" sz="1100" dirty="0">
                 <a:solidFill>
                   <a:srgbClr val="7A4E00"/>
                 </a:solidFill>
@@ -12943,7 +12943,7 @@
               </a:rPr>
               <a:t>打開之後先把四個型號各按一次，熟悉一下畫面。</a:t>
             </a:r>
-            <a:endParaRPr lang="en-US" sz="960" dirty="0"/>
+            <a:endParaRPr lang="en-US" sz="1200" dirty="0"/>
           </a:p>
         </p:txBody>
       </p:sp>
@@ -12979,8 +12979,8 @@
         </p:nvSpPr>
         <p:spPr>
           <a:xfrm>
-            <a:off x="1015280" y="102037"/>
-            <a:ext cx="655952" cy="204074"/>
+            <a:off x="109728" y="128016"/>
+            <a:ext cx="822960" cy="256032"/>
           </a:xfrm>
           <a:prstGeom prst="rect">
             <a:avLst/>
@@ -12996,7 +12996,7 @@
               <a:buNone/>
             </a:pPr>
             <a:r>
-              <a:rPr lang="en-US" sz="720" dirty="0">
+              <a:rPr lang="en-US" sz="900" dirty="0">
                 <a:solidFill>
                   <a:srgbClr val="5F7183"/>
                 </a:solidFill>
@@ -13006,7 +13006,7 @@
               </a:rPr>
               <a:t>2 / 14</a:t>
             </a:r>
-            <a:endParaRPr lang="en-US" sz="720" dirty="0"/>
+            <a:endParaRPr lang="en-US" sz="900" dirty="0"/>
           </a:p>
         </p:txBody>
       </p:sp>
@@ -13018,8 +13018,8 @@
         </p:nvSpPr>
         <p:spPr>
           <a:xfrm>
-            <a:off x="1693098" y="102037"/>
-            <a:ext cx="1603439" cy="204074"/>
+            <a:off x="960120" y="128016"/>
+            <a:ext cx="2011680" cy="256032"/>
           </a:xfrm>
           <a:prstGeom prst="rect">
             <a:avLst/>
@@ -13035,7 +13035,7 @@
               <a:buNone/>
             </a:pPr>
             <a:r>
-              <a:rPr lang="en-US" sz="720" dirty="0">
+              <a:rPr lang="en-US" sz="900" dirty="0">
                 <a:solidFill>
                   <a:srgbClr val="5F7183"/>
                 </a:solidFill>
@@ -13045,7 +13045,7 @@
               </a:rPr>
               <a:t>Tiết 1 · 第 1 節</a:t>
             </a:r>
-            <a:endParaRPr lang="en-US" sz="720" dirty="0"/>
+            <a:endParaRPr lang="en-US" sz="900" dirty="0"/>
           </a:p>
         </p:txBody>
       </p:sp>
@@ -13075,7 +13075,7 @@
       </p:nvGrpSpPr>
       <p:grpSpPr>
         <a:xfrm>
-          <a:off x="898071" y="0"/>
+          <a:off x="0" y="0"/>
           <a:ext cx="1" cy="1"/>
           <a:chOff x="0" y="0"/>
           <a:chExt cx="0" cy="0"/>
@@ -13089,8 +13089,8 @@
         </p:nvSpPr>
         <p:spPr>
           <a:xfrm>
-            <a:off x="6335486" y="-1102179"/>
-            <a:ext cx="3380014" cy="3380014"/>
+            <a:off x="6766560" y="-1371600"/>
+            <a:ext cx="4206240" cy="4206240"/>
           </a:xfrm>
           <a:prstGeom prst="ellipse">
             <a:avLst/>
@@ -13114,8 +13114,8 @@
         </p:nvSpPr>
         <p:spPr>
           <a:xfrm>
-            <a:off x="7437664" y="1690007"/>
-            <a:ext cx="1910443" cy="1910443"/>
+            <a:off x="8138160" y="2103120"/>
+            <a:ext cx="2377440" cy="2377440"/>
           </a:xfrm>
           <a:prstGeom prst="ellipse">
             <a:avLst/>
@@ -13136,8 +13136,8 @@
         </p:nvSpPr>
         <p:spPr>
           <a:xfrm>
-            <a:off x="1302204" y="1359354"/>
-            <a:ext cx="3673929" cy="249827"/>
+            <a:off x="502920" y="1691640"/>
+            <a:ext cx="4572000" cy="310896"/>
           </a:xfrm>
           <a:prstGeom prst="rect">
             <a:avLst/>
@@ -13153,7 +13153,7 @@
               <a:buNone/>
             </a:pPr>
             <a:r>
-              <a:rPr lang="en-US" sz="1080" b="1" dirty="0">
+              <a:rPr lang="en-US" sz="1350" b="1" dirty="0">
                 <a:solidFill>
                   <a:srgbClr val="FFB020"/>
                 </a:solidFill>
@@ -13163,7 +13163,7 @@
               </a:rPr>
               <a:t>Phần 1 / 3</a:t>
             </a:r>
-            <a:endParaRPr lang="en-US" sz="1080" dirty="0"/>
+            <a:endParaRPr lang="en-US" sz="1350" dirty="0"/>
           </a:p>
         </p:txBody>
       </p:sp>
@@ -13175,8 +13175,8 @@
         </p:nvSpPr>
         <p:spPr>
           <a:xfrm>
-            <a:off x="1302204" y="1645920"/>
-            <a:ext cx="5878286" cy="955221"/>
+            <a:off x="502920" y="2048256"/>
+            <a:ext cx="7315200" cy="1188720"/>
           </a:xfrm>
           <a:prstGeom prst="rect">
             <a:avLst/>
@@ -13195,7 +13195,7 @@
               <a:buNone/>
             </a:pPr>
             <a:r>
-              <a:rPr lang="en-US" sz="2330" b="1" dirty="0">
+              <a:rPr lang="en-US" sz="2900" b="1" dirty="0">
                 <a:solidFill>
                   <a:srgbClr val="FFFFFF"/>
                 </a:solidFill>
@@ -13205,7 +13205,7 @@
               </a:rPr>
               <a:t>Ba thanh trượt của tuần trước, nằm ở đâu trên datasheet</a:t>
             </a:r>
-            <a:endParaRPr lang="en-US" sz="2330" dirty="0"/>
+            <a:endParaRPr lang="en-US" sz="2900" dirty="0"/>
           </a:p>
           <a:p>
             <a:pPr indent="0" marL="0">
@@ -13215,7 +13215,7 @@
               <a:buNone/>
             </a:pPr>
             <a:r>
-              <a:rPr lang="en-US" sz="1370" dirty="0">
+              <a:rPr lang="en-US" sz="1700" dirty="0">
                 <a:solidFill>
                   <a:srgbClr val="AFC3D4"/>
                 </a:solidFill>
@@ -13225,7 +13225,7 @@
               </a:rPr>
               <a:t>上週那三個滑桿，在規格表的哪一行</a:t>
             </a:r>
-            <a:endParaRPr lang="en-US" sz="2330" dirty="0"/>
+            <a:endParaRPr lang="en-US" sz="2900" dirty="0"/>
           </a:p>
         </p:txBody>
       </p:sp>
@@ -13237,8 +13237,8 @@
         </p:nvSpPr>
         <p:spPr>
           <a:xfrm>
-            <a:off x="1302204" y="2689316"/>
-            <a:ext cx="5878286" cy="514350"/>
+            <a:off x="502920" y="3346704"/>
+            <a:ext cx="7315200" cy="640080"/>
           </a:xfrm>
           <a:prstGeom prst="rect">
             <a:avLst/>
@@ -13257,7 +13257,7 @@
               <a:buNone/>
             </a:pPr>
             <a:r>
-              <a:rPr lang="en-US" sz="1080" dirty="0">
+              <a:rPr lang="en-US" sz="1350" dirty="0">
                 <a:solidFill>
                   <a:srgbClr val="AFC3D4"/>
                 </a:solidFill>
@@ -13267,7 +13267,7 @@
               </a:rPr>
               <a:t>Số tia · chiều dài tia · góc quét</a:t>
             </a:r>
-            <a:endParaRPr lang="en-US" sz="1080" dirty="0"/>
+            <a:endParaRPr lang="en-US" sz="1350" dirty="0"/>
           </a:p>
           <a:p>
             <a:pPr indent="0" marL="0">
@@ -13277,7 +13277,7 @@
               <a:buNone/>
             </a:pPr>
             <a:r>
-              <a:rPr lang="en-US" sz="960" dirty="0">
+              <a:rPr lang="en-US" sz="1200" dirty="0">
                 <a:solidFill>
                   <a:srgbClr val="8AA0B4"/>
                 </a:solidFill>
@@ -13287,7 +13287,7 @@
               </a:rPr>
               <a:t>射線數・射線長度・張角</a:t>
             </a:r>
-            <a:endParaRPr lang="en-US" sz="1080" dirty="0"/>
+            <a:endParaRPr lang="en-US" sz="1350" dirty="0"/>
           </a:p>
         </p:txBody>
       </p:sp>
@@ -13299,8 +13299,8 @@
         </p:nvSpPr>
         <p:spPr>
           <a:xfrm>
-            <a:off x="986246" y="102870"/>
-            <a:ext cx="661307" cy="205740"/>
+            <a:off x="109728" y="128016"/>
+            <a:ext cx="822960" cy="256032"/>
           </a:xfrm>
           <a:prstGeom prst="rect">
             <a:avLst/>
@@ -13316,7 +13316,7 @@
               <a:buNone/>
             </a:pPr>
             <a:r>
-              <a:rPr lang="en-US" sz="720" dirty="0">
+              <a:rPr lang="en-US" sz="900" dirty="0">
                 <a:solidFill>
                   <a:srgbClr val="9FB3C8"/>
                 </a:solidFill>
@@ -13326,7 +13326,7 @@
               </a:rPr>
               <a:t>3 / 14</a:t>
             </a:r>
-            <a:endParaRPr lang="en-US" sz="720" dirty="0"/>
+            <a:endParaRPr lang="en-US" sz="900" dirty="0"/>
           </a:p>
         </p:txBody>
       </p:sp>
@@ -13338,8 +13338,8 @@
         </p:nvSpPr>
         <p:spPr>
           <a:xfrm>
-            <a:off x="1669596" y="102870"/>
-            <a:ext cx="1616529" cy="205740"/>
+            <a:off x="960120" y="128016"/>
+            <a:ext cx="2011680" cy="256032"/>
           </a:xfrm>
           <a:prstGeom prst="rect">
             <a:avLst/>
@@ -13355,7 +13355,7 @@
               <a:buNone/>
             </a:pPr>
             <a:r>
-              <a:rPr lang="en-US" sz="720" dirty="0">
+              <a:rPr lang="en-US" sz="900" dirty="0">
                 <a:solidFill>
                   <a:srgbClr val="9FB3C8"/>
                 </a:solidFill>
@@ -13365,7 +13365,7 @@
               </a:rPr>
               <a:t>Tiết 1 · 第 1 節</a:t>
             </a:r>
-            <a:endParaRPr lang="en-US" sz="720" dirty="0"/>
+            <a:endParaRPr lang="en-US" sz="900" dirty="0"/>
           </a:p>
         </p:txBody>
       </p:sp>
@@ -13388,7 +13388,7 @@
       </p:nvGrpSpPr>
       <p:grpSpPr>
         <a:xfrm>
-          <a:off x="913006" y="0"/>
+          <a:off x="0" y="0"/>
           <a:ext cx="1" cy="1"/>
           <a:chOff x="0" y="0"/>
           <a:chExt cx="0" cy="0"/>
@@ -13402,8 +13402,8 @@
         </p:nvSpPr>
         <p:spPr>
           <a:xfrm>
-            <a:off x="1315495" y="292720"/>
-            <a:ext cx="6513009" cy="219540"/>
+            <a:off x="502920" y="365760"/>
+            <a:ext cx="8138160" cy="274320"/>
           </a:xfrm>
           <a:prstGeom prst="rect">
             <a:avLst/>
@@ -13419,7 +13419,7 @@
               <a:buNone/>
             </a:pPr>
             <a:r>
-              <a:rPr lang="en-US" sz="1040" b="1" dirty="0">
+              <a:rPr lang="en-US" sz="1300" b="1" dirty="0">
                 <a:solidFill>
                   <a:srgbClr val="007F72"/>
                 </a:solidFill>
@@ -13429,7 +13429,7 @@
               </a:rPr>
               <a:t>1 / 2　Ouster OS1-64</a:t>
             </a:r>
-            <a:endParaRPr lang="en-US" sz="1040" dirty="0"/>
+            <a:endParaRPr lang="en-US" sz="1300" dirty="0"/>
           </a:p>
         </p:txBody>
       </p:sp>
@@ -13441,8 +13441,8 @@
         </p:nvSpPr>
         <p:spPr>
           <a:xfrm>
-            <a:off x="1315495" y="702527"/>
-            <a:ext cx="1185514" cy="1536777"/>
+            <a:off x="502920" y="877824"/>
+            <a:ext cx="1481328" cy="1920240"/>
           </a:xfrm>
           <a:prstGeom prst="roundRect">
             <a:avLst>
@@ -13468,8 +13468,8 @@
         </p:nvSpPr>
         <p:spPr>
           <a:xfrm flipH="1" flipV="1">
-            <a:off x="1401305" y="1445976"/>
-            <a:ext cx="215984" cy="124699"/>
+            <a:off x="610141" y="1806781"/>
+            <a:ext cx="269877" cy="155814"/>
           </a:xfrm>
           <a:prstGeom prst="line">
             <a:avLst/>
@@ -13491,8 +13491,8 @@
         </p:nvSpPr>
         <p:spPr>
           <a:xfrm flipH="1" flipV="1">
-            <a:off x="1456980" y="1379625"/>
-            <a:ext cx="160309" cy="191050"/>
+            <a:off x="679708" y="1723874"/>
+            <a:ext cx="200310" cy="238721"/>
           </a:xfrm>
           <a:prstGeom prst="line">
             <a:avLst/>
@@ -13514,8 +13514,8 @@
         </p:nvSpPr>
         <p:spPr>
           <a:xfrm flipH="1" flipV="1">
-            <a:off x="1531991" y="1336318"/>
-            <a:ext cx="85299" cy="234356"/>
+            <a:off x="773436" y="1669761"/>
+            <a:ext cx="106583" cy="292834"/>
           </a:xfrm>
           <a:prstGeom prst="line">
             <a:avLst/>
@@ -13537,8 +13537,8 @@
         </p:nvSpPr>
         <p:spPr>
           <a:xfrm flipV="1">
-            <a:off x="1617290" y="1321277"/>
-            <a:ext cx="1" cy="249397"/>
+            <a:off x="880019" y="1650967"/>
+            <a:ext cx="1" cy="311628"/>
           </a:xfrm>
           <a:prstGeom prst="line">
             <a:avLst/>
@@ -13560,8 +13560,8 @@
         </p:nvSpPr>
         <p:spPr>
           <a:xfrm flipV="1">
-            <a:off x="1617290" y="1336318"/>
-            <a:ext cx="85299" cy="234356"/>
+            <a:off x="880019" y="1669761"/>
+            <a:ext cx="106583" cy="292834"/>
           </a:xfrm>
           <a:prstGeom prst="line">
             <a:avLst/>
@@ -13583,8 +13583,8 @@
         </p:nvSpPr>
         <p:spPr>
           <a:xfrm flipV="1">
-            <a:off x="1617290" y="1379625"/>
-            <a:ext cx="160309" cy="191050"/>
+            <a:off x="880019" y="1723874"/>
+            <a:ext cx="200310" cy="238721"/>
           </a:xfrm>
           <a:prstGeom prst="line">
             <a:avLst/>
@@ -13606,8 +13606,8 @@
         </p:nvSpPr>
         <p:spPr>
           <a:xfrm flipV="1">
-            <a:off x="1617290" y="1445976"/>
-            <a:ext cx="215984" cy="124699"/>
+            <a:off x="880019" y="1806781"/>
+            <a:ext cx="269877" cy="155814"/>
           </a:xfrm>
           <a:prstGeom prst="line">
             <a:avLst/>
@@ -13629,8 +13629,8 @@
         </p:nvSpPr>
         <p:spPr>
           <a:xfrm>
-            <a:off x="1594428" y="1547813"/>
-            <a:ext cx="45723" cy="45723"/>
+            <a:off x="851453" y="1934029"/>
+            <a:ext cx="57132" cy="57132"/>
           </a:xfrm>
           <a:prstGeom prst="ellipse">
             <a:avLst/>
@@ -13649,8 +13649,8 @@
         </p:nvSpPr>
         <p:spPr>
           <a:xfrm>
-            <a:off x="2032951" y="1304651"/>
-            <a:ext cx="332529" cy="332529"/>
+            <a:off x="1399398" y="1630192"/>
+            <a:ext cx="415503" cy="415503"/>
           </a:xfrm>
           <a:prstGeom prst="donut">
             <a:avLst/>
@@ -13671,8 +13671,8 @@
         </p:nvSpPr>
         <p:spPr>
           <a:xfrm>
-            <a:off x="2365480" y="1470916"/>
-            <a:ext cx="83132" cy="1"/>
+            <a:off x="1814901" y="1837944"/>
+            <a:ext cx="103876" cy="1"/>
           </a:xfrm>
           <a:prstGeom prst="line">
             <a:avLst/>
@@ -13694,8 +13694,8 @@
         </p:nvSpPr>
         <p:spPr>
           <a:xfrm>
-            <a:off x="2343205" y="1554048"/>
-            <a:ext cx="71995" cy="41566"/>
+            <a:off x="1787068" y="1941820"/>
+            <a:ext cx="89959" cy="51938"/>
           </a:xfrm>
           <a:prstGeom prst="line">
             <a:avLst/>
@@ -13717,8 +13717,8 @@
         </p:nvSpPr>
         <p:spPr>
           <a:xfrm>
-            <a:off x="2282348" y="1614905"/>
-            <a:ext cx="41566" cy="71995"/>
+            <a:off x="1711025" y="2017862"/>
+            <a:ext cx="51938" cy="89959"/>
           </a:xfrm>
           <a:prstGeom prst="line">
             <a:avLst/>
@@ -13740,8 +13740,8 @@
         </p:nvSpPr>
         <p:spPr>
           <a:xfrm>
-            <a:off x="2199215" y="1637180"/>
-            <a:ext cx="1" cy="83132"/>
+            <a:off x="1607149" y="2045696"/>
+            <a:ext cx="1" cy="103876"/>
           </a:xfrm>
           <a:prstGeom prst="line">
             <a:avLst/>
@@ -13763,8 +13763,8 @@
         </p:nvSpPr>
         <p:spPr>
           <a:xfrm flipH="1">
-            <a:off x="2074517" y="1614905"/>
-            <a:ext cx="41566" cy="71995"/>
+            <a:off x="1451336" y="2017862"/>
+            <a:ext cx="51938" cy="89959"/>
           </a:xfrm>
           <a:prstGeom prst="line">
             <a:avLst/>
@@ -13786,8 +13786,8 @@
         </p:nvSpPr>
         <p:spPr>
           <a:xfrm flipH="1">
-            <a:off x="1983231" y="1554048"/>
-            <a:ext cx="71995" cy="41566"/>
+            <a:off x="1337272" y="1941820"/>
+            <a:ext cx="89959" cy="51938"/>
           </a:xfrm>
           <a:prstGeom prst="line">
             <a:avLst/>
@@ -13809,8 +13809,8 @@
         </p:nvSpPr>
         <p:spPr>
           <a:xfrm flipH="1">
-            <a:off x="1949819" y="1470916"/>
-            <a:ext cx="83132" cy="1"/>
+            <a:off x="1295522" y="1837944"/>
+            <a:ext cx="103876" cy="1"/>
           </a:xfrm>
           <a:prstGeom prst="line">
             <a:avLst/>
@@ -13832,8 +13832,8 @@
         </p:nvSpPr>
         <p:spPr>
           <a:xfrm flipH="1" flipV="1">
-            <a:off x="1983231" y="1346217"/>
-            <a:ext cx="71995" cy="41566"/>
+            <a:off x="1337272" y="1682130"/>
+            <a:ext cx="89959" cy="51938"/>
           </a:xfrm>
           <a:prstGeom prst="line">
             <a:avLst/>
@@ -13855,8 +13855,8 @@
         </p:nvSpPr>
         <p:spPr>
           <a:xfrm flipH="1" flipV="1">
-            <a:off x="2074517" y="1254932"/>
-            <a:ext cx="41566" cy="71995"/>
+            <a:off x="1451336" y="1568067"/>
+            <a:ext cx="51938" cy="89959"/>
           </a:xfrm>
           <a:prstGeom prst="line">
             <a:avLst/>
@@ -13878,8 +13878,8 @@
         </p:nvSpPr>
         <p:spPr>
           <a:xfrm flipH="1" flipV="1">
-            <a:off x="2199215" y="1221518"/>
-            <a:ext cx="1" cy="83132"/>
+            <a:off x="1607149" y="1526316"/>
+            <a:ext cx="1" cy="103876"/>
           </a:xfrm>
           <a:prstGeom prst="line">
             <a:avLst/>
@@ -13901,8 +13901,8 @@
         </p:nvSpPr>
         <p:spPr>
           <a:xfrm flipV="1">
-            <a:off x="2282348" y="1254932"/>
-            <a:ext cx="41566" cy="71995"/>
+            <a:off x="1711025" y="1568067"/>
+            <a:ext cx="51938" cy="89959"/>
           </a:xfrm>
           <a:prstGeom prst="line">
             <a:avLst/>
@@ -13924,8 +13924,8 @@
         </p:nvSpPr>
         <p:spPr>
           <a:xfrm flipV="1">
-            <a:off x="2343205" y="1346217"/>
-            <a:ext cx="71995" cy="41566"/>
+            <a:off x="1787068" y="1682130"/>
+            <a:ext cx="89959" cy="51938"/>
           </a:xfrm>
           <a:prstGeom prst="line">
             <a:avLst/>
@@ -13947,8 +13947,8 @@
         </p:nvSpPr>
         <p:spPr>
           <a:xfrm>
-            <a:off x="2176355" y="1448054"/>
-            <a:ext cx="45723" cy="45723"/>
+            <a:off x="1578584" y="1809378"/>
+            <a:ext cx="57132" cy="57132"/>
           </a:xfrm>
           <a:prstGeom prst="ellipse">
             <a:avLst/>
@@ -13967,8 +13967,8 @@
         </p:nvSpPr>
         <p:spPr>
           <a:xfrm>
-            <a:off x="1866686" y="1430081"/>
-            <a:ext cx="83132" cy="81669"/>
+            <a:off x="1191646" y="1786920"/>
+            <a:ext cx="103876" cy="102047"/>
           </a:xfrm>
           <a:prstGeom prst="rightArrow">
             <a:avLst/>
@@ -13987,8 +13987,8 @@
         </p:nvSpPr>
         <p:spPr>
           <a:xfrm>
-            <a:off x="2749821" y="629347"/>
-            <a:ext cx="5078684" cy="418052"/>
+            <a:off x="2295144" y="786384"/>
+            <a:ext cx="6345936" cy="522366"/>
           </a:xfrm>
           <a:prstGeom prst="rect">
             <a:avLst/>
@@ -14007,7 +14007,7 @@
               <a:buNone/>
             </a:pPr>
             <a:r>
-              <a:rPr lang="en-US" sz="1440" b="1" dirty="0">
+              <a:rPr lang="en-US" sz="1800" b="1" dirty="0">
                 <a:solidFill>
                   <a:srgbClr val="0B1F3A"/>
                 </a:solidFill>
@@ -14017,7 +14017,7 @@
               </a:rPr>
               <a:t>Lidar quay 360°: rải điểm đều quanh xe</a:t>
             </a:r>
-            <a:endParaRPr lang="en-US" sz="1440" dirty="0"/>
+            <a:endParaRPr lang="en-US" sz="1800" dirty="0"/>
           </a:p>
           <a:p>
             <a:pPr indent="0" marL="0">
@@ -14027,7 +14027,7 @@
               <a:buNone/>
             </a:pPr>
             <a:r>
-              <a:rPr lang="en-US" sz="1000" dirty="0">
+              <a:rPr lang="en-US" sz="1250" dirty="0">
                 <a:solidFill>
                   <a:srgbClr val="007F72"/>
                 </a:solidFill>
@@ -14037,7 +14037,7 @@
               </a:rPr>
               <a:t>旋轉式光達：點平均灑在車子周圍一整圈</a:t>
             </a:r>
-            <a:endParaRPr lang="en-US" sz="1440" dirty="0"/>
+            <a:endParaRPr lang="en-US" sz="1800" dirty="0"/>
           </a:p>
         </p:txBody>
       </p:sp>
@@ -14049,8 +14049,8 @@
         </p:nvSpPr>
         <p:spPr>
           <a:xfrm>
-            <a:off x="2749821" y="1120579"/>
-            <a:ext cx="848887" cy="320216"/>
+            <a:off x="2295144" y="1400190"/>
+            <a:ext cx="1060704" cy="400118"/>
           </a:xfrm>
           <a:prstGeom prst="roundRect">
             <a:avLst>
@@ -14071,8 +14071,8 @@
         </p:nvSpPr>
         <p:spPr>
           <a:xfrm>
-            <a:off x="2793729" y="1149851"/>
-            <a:ext cx="761071" cy="276308"/>
+            <a:off x="2350008" y="1436766"/>
+            <a:ext cx="950976" cy="345254"/>
           </a:xfrm>
           <a:prstGeom prst="rect">
             <a:avLst/>
@@ -14091,7 +14091,7 @@
               <a:buNone/>
             </a:pPr>
             <a:r>
-              <a:rPr lang="en-US" sz="720" b="1" dirty="0">
+              <a:rPr lang="en-US" sz="900" b="1" dirty="0">
                 <a:solidFill>
                   <a:srgbClr val="FFFFFF"/>
                 </a:solidFill>
@@ -14101,7 +14101,7 @@
               </a:rPr>
               <a:t>Số kênh</a:t>
             </a:r>
-            <a:endParaRPr lang="en-US" sz="720" dirty="0"/>
+            <a:endParaRPr lang="en-US" sz="900" dirty="0"/>
           </a:p>
           <a:p>
             <a:pPr algn="ctr" indent="0" marL="0">
@@ -14111,7 +14111,7 @@
               <a:buNone/>
             </a:pPr>
             <a:r>
-              <a:rPr lang="en-US" sz="680" dirty="0">
+              <a:rPr lang="en-US" sz="850" dirty="0">
                 <a:solidFill>
                   <a:srgbClr val="FFFFFF"/>
                 </a:solidFill>
@@ -14121,7 +14121,7 @@
               </a:rPr>
               <a:t>線束數</a:t>
             </a:r>
-            <a:endParaRPr lang="en-US" sz="720" dirty="0"/>
+            <a:endParaRPr lang="en-US" sz="900" dirty="0"/>
           </a:p>
         </p:txBody>
       </p:sp>
@@ -14133,8 +14133,8 @@
         </p:nvSpPr>
         <p:spPr>
           <a:xfrm>
-            <a:off x="3715795" y="1120579"/>
-            <a:ext cx="4112709" cy="364124"/>
+            <a:off x="3502152" y="1400190"/>
+            <a:ext cx="5138928" cy="454982"/>
           </a:xfrm>
           <a:prstGeom prst="rect">
             <a:avLst/>
@@ -14153,7 +14153,7 @@
               <a:buNone/>
             </a:pPr>
             <a:r>
-              <a:rPr lang="en-US" sz="880" dirty="0">
+              <a:rPr lang="en-US" sz="1100" dirty="0">
                 <a:solidFill>
                   <a:srgbClr val="1A2733"/>
                 </a:solidFill>
@@ -14163,7 +14163,7 @@
               </a:rPr>
               <a:t>32 / 64 / 128 channels — đây chính là thanh «số tia» của tuần trước</a:t>
             </a:r>
-            <a:endParaRPr lang="en-US" sz="880" dirty="0"/>
+            <a:endParaRPr lang="en-US" sz="1100" dirty="0"/>
           </a:p>
           <a:p>
             <a:pPr indent="0" marL="0">
@@ -14173,7 +14173,7 @@
               <a:buNone/>
             </a:pPr>
             <a:r>
-              <a:rPr lang="en-US" sz="800" dirty="0">
+              <a:rPr lang="en-US" sz="1000" dirty="0">
                 <a:solidFill>
                   <a:srgbClr val="5F7183"/>
                 </a:solidFill>
@@ -14183,7 +14183,7 @@
               </a:rPr>
               <a:t>32 / 64 / 128 channels——這就是上週那條「射線數」滑桿</a:t>
             </a:r>
-            <a:endParaRPr lang="en-US" sz="880" dirty="0"/>
+            <a:endParaRPr lang="en-US" sz="1100" dirty="0"/>
           </a:p>
         </p:txBody>
       </p:sp>
@@ -14195,8 +14195,8 @@
         </p:nvSpPr>
         <p:spPr>
           <a:xfrm>
-            <a:off x="2749821" y="1535929"/>
-            <a:ext cx="848887" cy="320216"/>
+            <a:off x="2295144" y="1919180"/>
+            <a:ext cx="1060704" cy="400118"/>
           </a:xfrm>
           <a:prstGeom prst="roundRect">
             <a:avLst>
@@ -14217,8 +14217,8 @@
         </p:nvSpPr>
         <p:spPr>
           <a:xfrm>
-            <a:off x="2793729" y="1565201"/>
-            <a:ext cx="761071" cy="276308"/>
+            <a:off x="2350008" y="1955756"/>
+            <a:ext cx="950976" cy="345254"/>
           </a:xfrm>
           <a:prstGeom prst="rect">
             <a:avLst/>
@@ -14237,7 +14237,7 @@
               <a:buNone/>
             </a:pPr>
             <a:r>
-              <a:rPr lang="en-US" sz="720" b="1" dirty="0">
+              <a:rPr lang="en-US" sz="900" b="1" dirty="0">
                 <a:solidFill>
                   <a:srgbClr val="FFFFFF"/>
                 </a:solidFill>
@@ -14247,7 +14247,7 @@
               </a:rPr>
               <a:t>Góc nhìn</a:t>
             </a:r>
-            <a:endParaRPr lang="en-US" sz="720" dirty="0"/>
+            <a:endParaRPr lang="en-US" sz="900" dirty="0"/>
           </a:p>
           <a:p>
             <a:pPr algn="ctr" indent="0" marL="0">
@@ -14257,7 +14257,7 @@
               <a:buNone/>
             </a:pPr>
             <a:r>
-              <a:rPr lang="en-US" sz="680" dirty="0">
+              <a:rPr lang="en-US" sz="850" dirty="0">
                 <a:solidFill>
                   <a:srgbClr val="FFFFFF"/>
                 </a:solidFill>
@@ -14267,7 +14267,7 @@
               </a:rPr>
               <a:t>視野</a:t>
             </a:r>
-            <a:endParaRPr lang="en-US" sz="720" dirty="0"/>
+            <a:endParaRPr lang="en-US" sz="900" dirty="0"/>
           </a:p>
         </p:txBody>
       </p:sp>
@@ -14279,8 +14279,8 @@
         </p:nvSpPr>
         <p:spPr>
           <a:xfrm>
-            <a:off x="3715795" y="1535929"/>
-            <a:ext cx="4112709" cy="508343"/>
+            <a:off x="3502152" y="1919180"/>
+            <a:ext cx="5138928" cy="635187"/>
           </a:xfrm>
           <a:prstGeom prst="rect">
             <a:avLst/>
@@ -14299,7 +14299,7 @@
               <a:buNone/>
             </a:pPr>
             <a:r>
-              <a:rPr lang="en-US" sz="880" dirty="0">
+              <a:rPr lang="en-US" sz="1100" dirty="0">
                 <a:solidFill>
                   <a:srgbClr val="1A2733"/>
                 </a:solidFill>
@@ -14309,7 +14309,7 @@
               </a:rPr>
               <a:t>Vertical 42.4°, Horizontal 360° — thanh «góc quét», nhưng nó quay cả vòng</a:t>
             </a:r>
-            <a:endParaRPr lang="en-US" sz="880" dirty="0"/>
+            <a:endParaRPr lang="en-US" sz="1100" dirty="0"/>
           </a:p>
           <a:p>
             <a:pPr indent="0" marL="0">
@@ -14319,7 +14319,7 @@
               <a:buNone/>
             </a:pPr>
             <a:r>
-              <a:rPr lang="en-US" sz="800" dirty="0">
+              <a:rPr lang="en-US" sz="1000" dirty="0">
                 <a:solidFill>
                   <a:srgbClr val="5F7183"/>
                 </a:solidFill>
@@ -14329,7 +14329,7 @@
               </a:rPr>
               <a:t>垂直 42.4°、水平 360°——就是「張角」，只是它轉一整圈</a:t>
             </a:r>
-            <a:endParaRPr lang="en-US" sz="880" dirty="0"/>
+            <a:endParaRPr lang="en-US" sz="1100" dirty="0"/>
           </a:p>
         </p:txBody>
       </p:sp>
@@ -14341,8 +14341,8 @@
         </p:nvSpPr>
         <p:spPr>
           <a:xfrm>
-            <a:off x="2749821" y="2095498"/>
-            <a:ext cx="848887" cy="320216"/>
+            <a:off x="2295144" y="2618375"/>
+            <a:ext cx="1060704" cy="400118"/>
           </a:xfrm>
           <a:prstGeom prst="roundRect">
             <a:avLst>
@@ -14363,8 +14363,8 @@
         </p:nvSpPr>
         <p:spPr>
           <a:xfrm>
-            <a:off x="2793729" y="2124770"/>
-            <a:ext cx="761071" cy="276308"/>
+            <a:off x="2350008" y="2654951"/>
+            <a:ext cx="950976" cy="345254"/>
           </a:xfrm>
           <a:prstGeom prst="rect">
             <a:avLst/>
@@ -14383,7 +14383,7 @@
               <a:buNone/>
             </a:pPr>
             <a:r>
-              <a:rPr lang="en-US" sz="720" b="1" dirty="0">
+              <a:rPr lang="en-US" sz="900" b="1" dirty="0">
                 <a:solidFill>
                   <a:srgbClr val="3A2A00"/>
                 </a:solidFill>
@@ -14393,7 +14393,7 @@
               </a:rPr>
               <a:t>Tầm đo</a:t>
             </a:r>
-            <a:endParaRPr lang="en-US" sz="720" dirty="0"/>
+            <a:endParaRPr lang="en-US" sz="900" dirty="0"/>
           </a:p>
           <a:p>
             <a:pPr algn="ctr" indent="0" marL="0">
@@ -14403,7 +14403,7 @@
               <a:buNone/>
             </a:pPr>
             <a:r>
-              <a:rPr lang="en-US" sz="680" dirty="0">
+              <a:rPr lang="en-US" sz="850" dirty="0">
                 <a:solidFill>
                   <a:srgbClr val="3A2A00"/>
                 </a:solidFill>
@@ -14413,7 +14413,7 @@
               </a:rPr>
               <a:t>測距</a:t>
             </a:r>
-            <a:endParaRPr lang="en-US" sz="720" dirty="0"/>
+            <a:endParaRPr lang="en-US" sz="900" dirty="0"/>
           </a:p>
         </p:txBody>
       </p:sp>
@@ -14425,8 +14425,8 @@
         </p:nvSpPr>
         <p:spPr>
           <a:xfrm>
-            <a:off x="3715795" y="2095498"/>
-            <a:ext cx="4112709" cy="364124"/>
+            <a:off x="3502152" y="2618375"/>
+            <a:ext cx="5138928" cy="454982"/>
           </a:xfrm>
           <a:prstGeom prst="rect">
             <a:avLst/>
@@ -14445,7 +14445,7 @@
               <a:buNone/>
             </a:pPr>
             <a:r>
-              <a:rPr lang="en-US" sz="880" dirty="0">
+              <a:rPr lang="en-US" sz="1100" dirty="0">
                 <a:solidFill>
                   <a:srgbClr val="1A2733"/>
                 </a:solidFill>
@@ -14455,7 +14455,7 @@
               </a:rPr>
               <a:t>90 m với vật phản xạ 10% — thanh «chiều dài tia»</a:t>
             </a:r>
-            <a:endParaRPr lang="en-US" sz="880" dirty="0"/>
+            <a:endParaRPr lang="en-US" sz="1100" dirty="0"/>
           </a:p>
           <a:p>
             <a:pPr indent="0" marL="0">
@@ -14465,7 +14465,7 @@
               <a:buNone/>
             </a:pPr>
             <a:r>
-              <a:rPr lang="en-US" sz="800" dirty="0">
+              <a:rPr lang="en-US" sz="1000" dirty="0">
                 <a:solidFill>
                   <a:srgbClr val="5F7183"/>
                 </a:solidFill>
@@ -14475,7 +14475,7 @@
               </a:rPr>
               <a:t>對 10% 反射率的目標 90 公尺——就是「射線長度」</a:t>
             </a:r>
-            <a:endParaRPr lang="en-US" sz="880" dirty="0"/>
+            <a:endParaRPr lang="en-US" sz="1100" dirty="0"/>
           </a:p>
         </p:txBody>
       </p:sp>
@@ -14487,8 +14487,8 @@
         </p:nvSpPr>
         <p:spPr>
           <a:xfrm>
-            <a:off x="1315495" y="3146735"/>
-            <a:ext cx="6513009" cy="453715"/>
+            <a:off x="502920" y="3931920"/>
+            <a:ext cx="8138160" cy="566928"/>
           </a:xfrm>
           <a:prstGeom prst="roundRect">
             <a:avLst>
@@ -14514,8 +14514,8 @@
         </p:nvSpPr>
         <p:spPr>
           <a:xfrm>
-            <a:off x="1461855" y="3197961"/>
-            <a:ext cx="6220290" cy="365899"/>
+            <a:off x="685800" y="3995928"/>
+            <a:ext cx="7772400" cy="457200"/>
           </a:xfrm>
           <a:prstGeom prst="rect">
             <a:avLst/>
@@ -14534,7 +14534,7 @@
               <a:buNone/>
             </a:pPr>
             <a:r>
-              <a:rPr lang="en-US" sz="960" b="1" dirty="0">
+              <a:rPr lang="en-US" sz="1200" b="1" dirty="0">
                 <a:solidFill>
                   <a:srgbClr val="7A4E00"/>
                 </a:solidFill>
@@ -14544,7 +14544,7 @@
               </a:rPr>
               <a:t>Ba dòng này chính là ba thanh trượt. Chỉ khác là hãng viết bằng tiếng Anh.</a:t>
             </a:r>
-            <a:endParaRPr lang="en-US" sz="960" dirty="0"/>
+            <a:endParaRPr lang="en-US" sz="1200" dirty="0"/>
           </a:p>
           <a:p>
             <a:pPr indent="0" marL="0">
@@ -14554,7 +14554,7 @@
               <a:buNone/>
             </a:pPr>
             <a:r>
-              <a:rPr lang="en-US" sz="880" dirty="0">
+              <a:rPr lang="en-US" sz="1100" dirty="0">
                 <a:solidFill>
                   <a:srgbClr val="7A4E00"/>
                 </a:solidFill>
@@ -14564,7 +14564,7 @@
               </a:rPr>
               <a:t>這三行就是那三個滑桿，只是廠商用英文寫。</a:t>
             </a:r>
-            <a:endParaRPr lang="en-US" sz="960" dirty="0"/>
+            <a:endParaRPr lang="en-US" sz="1200" dirty="0"/>
           </a:p>
         </p:txBody>
       </p:sp>
@@ -14600,8 +14600,8 @@
         </p:nvSpPr>
         <p:spPr>
           <a:xfrm>
-            <a:off x="1000822" y="102452"/>
-            <a:ext cx="658619" cy="204904"/>
+            <a:off x="109728" y="128016"/>
+            <a:ext cx="822960" cy="256032"/>
           </a:xfrm>
           <a:prstGeom prst="rect">
             <a:avLst/>
@@ -14617,7 +14617,7 @@
               <a:buNone/>
             </a:pPr>
             <a:r>
-              <a:rPr lang="en-US" sz="720" dirty="0">
+              <a:rPr lang="en-US" sz="900" dirty="0">
                 <a:solidFill>
                   <a:srgbClr val="5F7183"/>
                 </a:solidFill>
@@ -14627,7 +14627,7 @@
               </a:rPr>
               <a:t>4 / 14</a:t>
             </a:r>
-            <a:endParaRPr lang="en-US" sz="720" dirty="0"/>
+            <a:endParaRPr lang="en-US" sz="900" dirty="0"/>
           </a:p>
         </p:txBody>
       </p:sp>
@@ -14639,8 +14639,8 @@
         </p:nvSpPr>
         <p:spPr>
           <a:xfrm>
-            <a:off x="1681395" y="102452"/>
-            <a:ext cx="1609957" cy="204904"/>
+            <a:off x="960120" y="128016"/>
+            <a:ext cx="2011680" cy="256032"/>
           </a:xfrm>
           <a:prstGeom prst="rect">
             <a:avLst/>
@@ -14656,7 +14656,7 @@
               <a:buNone/>
             </a:pPr>
             <a:r>
-              <a:rPr lang="en-US" sz="720" dirty="0">
+              <a:rPr lang="en-US" sz="900" dirty="0">
                 <a:solidFill>
                   <a:srgbClr val="5F7183"/>
                 </a:solidFill>
@@ -14666,7 +14666,7 @@
               </a:rPr>
               <a:t>Tiết 1 · 第 1 節</a:t>
             </a:r>
-            <a:endParaRPr lang="en-US" sz="720" dirty="0"/>
+            <a:endParaRPr lang="en-US" sz="900" dirty="0"/>
           </a:p>
         </p:txBody>
       </p:sp>
@@ -14689,7 +14689,7 @@
       </p:nvGrpSpPr>
       <p:grpSpPr>
         <a:xfrm>
-          <a:off x="913006" y="0"/>
+          <a:off x="0" y="0"/>
           <a:ext cx="1" cy="1"/>
           <a:chOff x="0" y="0"/>
           <a:chExt cx="0" cy="0"/>
@@ -14703,8 +14703,8 @@
         </p:nvSpPr>
         <p:spPr>
           <a:xfrm>
-            <a:off x="1315495" y="292720"/>
-            <a:ext cx="6513009" cy="219540"/>
+            <a:off x="502920" y="365760"/>
+            <a:ext cx="8138160" cy="274320"/>
           </a:xfrm>
           <a:prstGeom prst="rect">
             <a:avLst/>
@@ -14720,7 +14720,7 @@
               <a:buNone/>
             </a:pPr>
             <a:r>
-              <a:rPr lang="en-US" sz="1040" b="1" dirty="0">
+              <a:rPr lang="en-US" sz="1300" b="1" dirty="0">
                 <a:solidFill>
                   <a:srgbClr val="007F72"/>
                 </a:solidFill>
@@ -14730,7 +14730,7 @@
               </a:rPr>
               <a:t>2 / 2　Hesai AT128</a:t>
             </a:r>
-            <a:endParaRPr lang="en-US" sz="1040" dirty="0"/>
+            <a:endParaRPr lang="en-US" sz="1300" dirty="0"/>
           </a:p>
         </p:txBody>
       </p:sp>
@@ -14742,8 +14742,8 @@
         </p:nvSpPr>
         <p:spPr>
           <a:xfrm>
-            <a:off x="1315495" y="702527"/>
-            <a:ext cx="1185514" cy="1536777"/>
+            <a:off x="502920" y="877824"/>
+            <a:ext cx="1481328" cy="1920240"/>
           </a:xfrm>
           <a:prstGeom prst="roundRect">
             <a:avLst>
@@ -14769,8 +14769,8 @@
         </p:nvSpPr>
         <p:spPr>
           <a:xfrm flipH="1" flipV="1">
-            <a:off x="1649463" y="815016"/>
-            <a:ext cx="258789" cy="383670"/>
+            <a:off x="920221" y="1018382"/>
+            <a:ext cx="323363" cy="479405"/>
           </a:xfrm>
           <a:prstGeom prst="line">
             <a:avLst/>
@@ -14792,8 +14792,8 @@
         </p:nvSpPr>
         <p:spPr>
           <a:xfrm flipH="1" flipV="1">
-            <a:off x="1772946" y="756118"/>
-            <a:ext cx="135307" cy="442568"/>
+            <a:off x="1074515" y="944788"/>
+            <a:ext cx="169069" cy="552999"/>
           </a:xfrm>
           <a:prstGeom prst="line">
             <a:avLst/>
@@ -14815,8 +14815,8 @@
         </p:nvSpPr>
         <p:spPr>
           <a:xfrm flipV="1">
-            <a:off x="1908252" y="735897"/>
-            <a:ext cx="1" cy="462790"/>
+            <a:off x="1243584" y="919521"/>
+            <a:ext cx="1" cy="578267"/>
           </a:xfrm>
           <a:prstGeom prst="line">
             <a:avLst/>
@@ -14838,8 +14838,8 @@
         </p:nvSpPr>
         <p:spPr>
           <a:xfrm flipV="1">
-            <a:off x="1908252" y="756118"/>
-            <a:ext cx="135307" cy="442568"/>
+            <a:off x="1243584" y="944788"/>
+            <a:ext cx="169069" cy="552999"/>
           </a:xfrm>
           <a:prstGeom prst="line">
             <a:avLst/>
@@ -14861,8 +14861,8 @@
         </p:nvSpPr>
         <p:spPr>
           <a:xfrm flipV="1">
-            <a:off x="1908252" y="815016"/>
-            <a:ext cx="258789" cy="383670"/>
+            <a:off x="1243584" y="1018382"/>
+            <a:ext cx="323363" cy="479405"/>
           </a:xfrm>
           <a:prstGeom prst="line">
             <a:avLst/>
@@ -14884,8 +14884,8 @@
         </p:nvSpPr>
         <p:spPr>
           <a:xfrm>
-            <a:off x="1879156" y="1169590"/>
-            <a:ext cx="58193" cy="58193"/>
+            <a:off x="1207227" y="1461431"/>
+            <a:ext cx="72713" cy="72713"/>
           </a:xfrm>
           <a:prstGeom prst="ellipse">
             <a:avLst/>
@@ -14904,8 +14904,8 @@
         </p:nvSpPr>
         <p:spPr>
           <a:xfrm flipH="1" flipV="1">
-            <a:off x="1455576" y="1755817"/>
-            <a:ext cx="452676" cy="96219"/>
+            <a:off x="677954" y="2193935"/>
+            <a:ext cx="565630" cy="120228"/>
           </a:xfrm>
           <a:prstGeom prst="line">
             <a:avLst/>
@@ -14927,8 +14927,8 @@
         </p:nvSpPr>
         <p:spPr>
           <a:xfrm flipH="1" flipV="1">
-            <a:off x="1617009" y="1492381"/>
-            <a:ext cx="291243" cy="359655"/>
+            <a:off x="879669" y="1864766"/>
+            <a:ext cx="363915" cy="449398"/>
           </a:xfrm>
           <a:prstGeom prst="line">
             <a:avLst/>
@@ -14950,8 +14950,8 @@
         </p:nvSpPr>
         <p:spPr>
           <a:xfrm flipV="1">
-            <a:off x="1908252" y="1389247"/>
-            <a:ext cx="1" cy="462790"/>
+            <a:off x="1243584" y="1735897"/>
+            <a:ext cx="1" cy="578267"/>
           </a:xfrm>
           <a:prstGeom prst="line">
             <a:avLst/>
@@ -14973,8 +14973,8 @@
         </p:nvSpPr>
         <p:spPr>
           <a:xfrm flipV="1">
-            <a:off x="1908252" y="1492381"/>
-            <a:ext cx="291243" cy="359655"/>
+            <a:off x="1243584" y="1864766"/>
+            <a:ext cx="363915" cy="449398"/>
           </a:xfrm>
           <a:prstGeom prst="line">
             <a:avLst/>
@@ -14996,8 +14996,8 @@
         </p:nvSpPr>
         <p:spPr>
           <a:xfrm flipV="1">
-            <a:off x="1908252" y="1755817"/>
-            <a:ext cx="452676" cy="96219"/>
+            <a:off x="1243584" y="2193935"/>
+            <a:ext cx="565630" cy="120228"/>
           </a:xfrm>
           <a:prstGeom prst="line">
             <a:avLst/>
@@ -15019,8 +15019,8 @@
         </p:nvSpPr>
         <p:spPr>
           <a:xfrm>
-            <a:off x="1879156" y="1822940"/>
-            <a:ext cx="58193" cy="58193"/>
+            <a:off x="1207227" y="2277807"/>
+            <a:ext cx="72713" cy="72713"/>
           </a:xfrm>
           <a:prstGeom prst="ellipse">
             <a:avLst/>
@@ -15039,8 +15039,8 @@
         </p:nvSpPr>
         <p:spPr>
           <a:xfrm>
-            <a:off x="2749821" y="629347"/>
-            <a:ext cx="5078684" cy="630220"/>
+            <a:off x="2295144" y="786384"/>
+            <a:ext cx="6345936" cy="787475"/>
           </a:xfrm>
           <a:prstGeom prst="rect">
             <a:avLst/>
@@ -15059,7 +15059,7 @@
               <a:buNone/>
             </a:pPr>
             <a:r>
-              <a:rPr lang="en-US" sz="1440" b="1" dirty="0">
+              <a:rPr lang="en-US" sz="1800" b="1" dirty="0">
                 <a:solidFill>
                   <a:srgbClr val="0B1F3A"/>
                 </a:solidFill>
@@ -15069,7 +15069,7 @@
               </a:rPr>
               <a:t>Lidar cố định hướng trước: dồn điểm vào 120° phía trước</a:t>
             </a:r>
-            <a:endParaRPr lang="en-US" sz="1440" dirty="0"/>
+            <a:endParaRPr lang="en-US" sz="1800" dirty="0"/>
           </a:p>
           <a:p>
             <a:pPr indent="0" marL="0">
@@ -15079,7 +15079,7 @@
               <a:buNone/>
             </a:pPr>
             <a:r>
-              <a:rPr lang="en-US" sz="1000" dirty="0">
+              <a:rPr lang="en-US" sz="1250" dirty="0">
                 <a:solidFill>
                   <a:srgbClr val="007F72"/>
                 </a:solidFill>
@@ -15089,7 +15089,7 @@
               </a:rPr>
               <a:t>固定式前向光達：把點集中在前方 120 度</a:t>
             </a:r>
-            <a:endParaRPr lang="en-US" sz="1440" dirty="0"/>
+            <a:endParaRPr lang="en-US" sz="1800" dirty="0"/>
           </a:p>
         </p:txBody>
       </p:sp>
@@ -15101,8 +15101,8 @@
         </p:nvSpPr>
         <p:spPr>
           <a:xfrm>
-            <a:off x="2749821" y="1332747"/>
-            <a:ext cx="848887" cy="320216"/>
+            <a:off x="2295144" y="1665299"/>
+            <a:ext cx="1060704" cy="400118"/>
           </a:xfrm>
           <a:prstGeom prst="roundRect">
             <a:avLst>
@@ -15123,8 +15123,8 @@
         </p:nvSpPr>
         <p:spPr>
           <a:xfrm>
-            <a:off x="2793729" y="1362019"/>
-            <a:ext cx="761071" cy="276308"/>
+            <a:off x="2350008" y="1701875"/>
+            <a:ext cx="950976" cy="345254"/>
           </a:xfrm>
           <a:prstGeom prst="rect">
             <a:avLst/>
@@ -15143,7 +15143,7 @@
               <a:buNone/>
             </a:pPr>
             <a:r>
-              <a:rPr lang="en-US" sz="720" b="1" dirty="0">
+              <a:rPr lang="en-US" sz="900" b="1" dirty="0">
                 <a:solidFill>
                   <a:srgbClr val="FFFFFF"/>
                 </a:solidFill>
@@ -15153,7 +15153,7 @@
               </a:rPr>
               <a:t>Số kênh</a:t>
             </a:r>
-            <a:endParaRPr lang="en-US" sz="720" dirty="0"/>
+            <a:endParaRPr lang="en-US" sz="900" dirty="0"/>
           </a:p>
           <a:p>
             <a:pPr algn="ctr" indent="0" marL="0">
@@ -15163,7 +15163,7 @@
               <a:buNone/>
             </a:pPr>
             <a:r>
-              <a:rPr lang="en-US" sz="680" dirty="0">
+              <a:rPr lang="en-US" sz="850" dirty="0">
                 <a:solidFill>
                   <a:srgbClr val="FFFFFF"/>
                 </a:solidFill>
@@ -15173,7 +15173,7 @@
               </a:rPr>
               <a:t>線束數</a:t>
             </a:r>
-            <a:endParaRPr lang="en-US" sz="720" dirty="0"/>
+            <a:endParaRPr lang="en-US" sz="900" dirty="0"/>
           </a:p>
         </p:txBody>
       </p:sp>
@@ -15185,8 +15185,8 @@
         </p:nvSpPr>
         <p:spPr>
           <a:xfrm>
-            <a:off x="3715795" y="1332747"/>
-            <a:ext cx="4112709" cy="364124"/>
+            <a:off x="3502152" y="1665299"/>
+            <a:ext cx="5138928" cy="454982"/>
           </a:xfrm>
           <a:prstGeom prst="rect">
             <a:avLst/>
@@ -15205,7 +15205,7 @@
               <a:buNone/>
             </a:pPr>
             <a:r>
-              <a:rPr lang="en-US" sz="880" dirty="0">
+              <a:rPr lang="en-US" sz="1100" dirty="0">
                 <a:solidFill>
                   <a:srgbClr val="1A2733"/>
                 </a:solidFill>
@@ -15215,7 +15215,7 @@
               </a:rPr>
               <a:t>128 channels</a:t>
             </a:r>
-            <a:endParaRPr lang="en-US" sz="880" dirty="0"/>
+            <a:endParaRPr lang="en-US" sz="1100" dirty="0"/>
           </a:p>
           <a:p>
             <a:pPr indent="0" marL="0">
@@ -15225,7 +15225,7 @@
               <a:buNone/>
             </a:pPr>
             <a:r>
-              <a:rPr lang="en-US" sz="800" dirty="0">
+              <a:rPr lang="en-US" sz="1000" dirty="0">
                 <a:solidFill>
                   <a:srgbClr val="5F7183"/>
                 </a:solidFill>
@@ -15235,7 +15235,7 @@
               </a:rPr>
               <a:t>128 channels</a:t>
             </a:r>
-            <a:endParaRPr lang="en-US" sz="880" dirty="0"/>
+            <a:endParaRPr lang="en-US" sz="1100" dirty="0"/>
           </a:p>
         </p:txBody>
       </p:sp>
@@ -15247,8 +15247,8 @@
         </p:nvSpPr>
         <p:spPr>
           <a:xfrm>
-            <a:off x="2749821" y="1748097"/>
-            <a:ext cx="848887" cy="320216"/>
+            <a:off x="2295144" y="2184289"/>
+            <a:ext cx="1060704" cy="400118"/>
           </a:xfrm>
           <a:prstGeom prst="roundRect">
             <a:avLst>
@@ -15269,8 +15269,8 @@
         </p:nvSpPr>
         <p:spPr>
           <a:xfrm>
-            <a:off x="2793729" y="1777369"/>
-            <a:ext cx="761071" cy="276308"/>
+            <a:off x="2350008" y="2220865"/>
+            <a:ext cx="950976" cy="345254"/>
           </a:xfrm>
           <a:prstGeom prst="rect">
             <a:avLst/>
@@ -15289,7 +15289,7 @@
               <a:buNone/>
             </a:pPr>
             <a:r>
-              <a:rPr lang="en-US" sz="720" b="1" dirty="0">
+              <a:rPr lang="en-US" sz="900" b="1" dirty="0">
                 <a:solidFill>
                   <a:srgbClr val="FFFFFF"/>
                 </a:solidFill>
@@ -15299,7 +15299,7 @@
               </a:rPr>
               <a:t>Góc nhìn</a:t>
             </a:r>
-            <a:endParaRPr lang="en-US" sz="720" dirty="0"/>
+            <a:endParaRPr lang="en-US" sz="900" dirty="0"/>
           </a:p>
           <a:p>
             <a:pPr algn="ctr" indent="0" marL="0">
@@ -15309,7 +15309,7 @@
               <a:buNone/>
             </a:pPr>
             <a:r>
-              <a:rPr lang="en-US" sz="680" dirty="0">
+              <a:rPr lang="en-US" sz="850" dirty="0">
                 <a:solidFill>
                   <a:srgbClr val="FFFFFF"/>
                 </a:solidFill>
@@ -15319,7 +15319,7 @@
               </a:rPr>
               <a:t>視野</a:t>
             </a:r>
-            <a:endParaRPr lang="en-US" sz="720" dirty="0"/>
+            <a:endParaRPr lang="en-US" sz="900" dirty="0"/>
           </a:p>
         </p:txBody>
       </p:sp>
@@ -15331,8 +15331,8 @@
         </p:nvSpPr>
         <p:spPr>
           <a:xfrm>
-            <a:off x="3715795" y="1748097"/>
-            <a:ext cx="4112709" cy="364124"/>
+            <a:off x="3502152" y="2184289"/>
+            <a:ext cx="5138928" cy="454982"/>
           </a:xfrm>
           <a:prstGeom prst="rect">
             <a:avLst/>
@@ -15351,7 +15351,7 @@
               <a:buNone/>
             </a:pPr>
             <a:r>
-              <a:rPr lang="en-US" sz="880" dirty="0">
+              <a:rPr lang="en-US" sz="1100" dirty="0">
                 <a:solidFill>
                   <a:srgbClr val="1A2733"/>
                 </a:solidFill>
@@ -15361,7 +15361,7 @@
               </a:rPr>
               <a:t>120° ngang × 25.4° dọc — không quay, chỉ nhìn phía trước</a:t>
             </a:r>
-            <a:endParaRPr lang="en-US" sz="880" dirty="0"/>
+            <a:endParaRPr lang="en-US" sz="1100" dirty="0"/>
           </a:p>
           <a:p>
             <a:pPr indent="0" marL="0">
@@ -15371,7 +15371,7 @@
               <a:buNone/>
             </a:pPr>
             <a:r>
-              <a:rPr lang="en-US" sz="800" dirty="0">
+              <a:rPr lang="en-US" sz="1000" dirty="0">
                 <a:solidFill>
                   <a:srgbClr val="5F7183"/>
                 </a:solidFill>
@@ -15381,7 +15381,7 @@
               </a:rPr>
               <a:t>水平 120°、垂直 25.4°——它不轉，只看前面</a:t>
             </a:r>
-            <a:endParaRPr lang="en-US" sz="880" dirty="0"/>
+            <a:endParaRPr lang="en-US" sz="1100" dirty="0"/>
           </a:p>
         </p:txBody>
       </p:sp>
@@ -15393,8 +15393,8 @@
         </p:nvSpPr>
         <p:spPr>
           <a:xfrm>
-            <a:off x="2749821" y="2163448"/>
-            <a:ext cx="848887" cy="320216"/>
+            <a:off x="2295144" y="2703280"/>
+            <a:ext cx="1060704" cy="400118"/>
           </a:xfrm>
           <a:prstGeom prst="roundRect">
             <a:avLst>
@@ -15415,8 +15415,8 @@
         </p:nvSpPr>
         <p:spPr>
           <a:xfrm>
-            <a:off x="2793729" y="2192720"/>
-            <a:ext cx="761071" cy="276308"/>
+            <a:off x="2350008" y="2739856"/>
+            <a:ext cx="950976" cy="345254"/>
           </a:xfrm>
           <a:prstGeom prst="rect">
             <a:avLst/>
@@ -15435,7 +15435,7 @@
               <a:buNone/>
             </a:pPr>
             <a:r>
-              <a:rPr lang="en-US" sz="720" b="1" dirty="0">
+              <a:rPr lang="en-US" sz="900" b="1" dirty="0">
                 <a:solidFill>
                   <a:srgbClr val="3A2A00"/>
                 </a:solidFill>
@@ -15445,7 +15445,7 @@
               </a:rPr>
               <a:t>Phân giải góc</a:t>
             </a:r>
-            <a:endParaRPr lang="en-US" sz="720" dirty="0"/>
+            <a:endParaRPr lang="en-US" sz="900" dirty="0"/>
           </a:p>
           <a:p>
             <a:pPr algn="ctr" indent="0" marL="0">
@@ -15455,7 +15455,7 @@
               <a:buNone/>
             </a:pPr>
             <a:r>
-              <a:rPr lang="en-US" sz="680" dirty="0">
+              <a:rPr lang="en-US" sz="850" dirty="0">
                 <a:solidFill>
                   <a:srgbClr val="3A2A00"/>
                 </a:solidFill>
@@ -15465,7 +15465,7 @@
               </a:rPr>
               <a:t>角解析度</a:t>
             </a:r>
-            <a:endParaRPr lang="en-US" sz="720" dirty="0"/>
+            <a:endParaRPr lang="en-US" sz="900" dirty="0"/>
           </a:p>
         </p:txBody>
       </p:sp>
@@ -15477,8 +15477,8 @@
         </p:nvSpPr>
         <p:spPr>
           <a:xfrm>
-            <a:off x="3715795" y="2163448"/>
-            <a:ext cx="4112709" cy="364124"/>
+            <a:off x="3502152" y="2703280"/>
+            <a:ext cx="5138928" cy="454982"/>
           </a:xfrm>
           <a:prstGeom prst="rect">
             <a:avLst/>
@@ -15497,7 +15497,7 @@
               <a:buNone/>
             </a:pPr>
             <a:r>
-              <a:rPr lang="en-US" sz="880" dirty="0">
+              <a:rPr lang="en-US" sz="1100" dirty="0">
                 <a:solidFill>
                   <a:srgbClr val="1A2733"/>
                 </a:solidFill>
@@ -15507,7 +15507,7 @@
               </a:rPr>
               <a:t>0.1° ngang × 0.2° dọc — hãng viết thẳng ra góc, không phải chia ngược</a:t>
             </a:r>
-            <a:endParaRPr lang="en-US" sz="880" dirty="0"/>
+            <a:endParaRPr lang="en-US" sz="1100" dirty="0"/>
           </a:p>
           <a:p>
             <a:pPr indent="0" marL="0">
@@ -15517,7 +15517,7 @@
               <a:buNone/>
             </a:pPr>
             <a:r>
-              <a:rPr lang="en-US" sz="800" dirty="0">
+              <a:rPr lang="en-US" sz="1000" dirty="0">
                 <a:solidFill>
                   <a:srgbClr val="5F7183"/>
                 </a:solidFill>
@@ -15527,7 +15527,7 @@
               </a:rPr>
               <a:t>左右 0.1°、上下 0.2°——這一顆直接把角度寫出來，不用自己除</a:t>
             </a:r>
-            <a:endParaRPr lang="en-US" sz="880" dirty="0"/>
+            <a:endParaRPr lang="en-US" sz="1100" dirty="0"/>
           </a:p>
         </p:txBody>
       </p:sp>
@@ -15539,8 +15539,8 @@
         </p:nvSpPr>
         <p:spPr>
           <a:xfrm>
-            <a:off x="1315495" y="3146735"/>
-            <a:ext cx="6513009" cy="453715"/>
+            <a:off x="502920" y="3931920"/>
+            <a:ext cx="8138160" cy="566928"/>
           </a:xfrm>
           <a:prstGeom prst="roundRect">
             <a:avLst>
@@ -15566,8 +15566,8 @@
         </p:nvSpPr>
         <p:spPr>
           <a:xfrm>
-            <a:off x="1461855" y="3197961"/>
-            <a:ext cx="6220290" cy="365899"/>
+            <a:off x="685800" y="3995928"/>
+            <a:ext cx="7772400" cy="457200"/>
           </a:xfrm>
           <a:prstGeom prst="rect">
             <a:avLst/>
@@ -15586,7 +15586,7 @@
               <a:buNone/>
             </a:pPr>
             <a:r>
-              <a:rPr lang="en-US" sz="960" b="1" dirty="0">
+              <a:rPr lang="en-US" sz="1200" b="1" dirty="0">
                 <a:solidFill>
                   <a:srgbClr val="7A4E00"/>
                 </a:solidFill>
@@ -15596,7 +15596,7 @@
               </a:rPr>
               <a:t>Cùng là lidar, một cái rải quanh 360°, một cái dồn vào 120°.</a:t>
             </a:r>
-            <a:endParaRPr lang="en-US" sz="960" dirty="0"/>
+            <a:endParaRPr lang="en-US" sz="1200" dirty="0"/>
           </a:p>
           <a:p>
             <a:pPr indent="0" marL="0">
@@ -15606,7 +15606,7 @@
               <a:buNone/>
             </a:pPr>
             <a:r>
-              <a:rPr lang="en-US" sz="880" dirty="0">
+              <a:rPr lang="en-US" sz="1100" dirty="0">
                 <a:solidFill>
                   <a:srgbClr val="7A4E00"/>
                 </a:solidFill>
@@ -15616,7 +15616,7 @@
               </a:rPr>
               <a:t>同樣是光達，一個灑滿 360 度，一個集中在 120 度。</a:t>
             </a:r>
-            <a:endParaRPr lang="en-US" sz="960" dirty="0"/>
+            <a:endParaRPr lang="en-US" sz="1200" dirty="0"/>
           </a:p>
         </p:txBody>
       </p:sp>
@@ -15652,8 +15652,8 @@
         </p:nvSpPr>
         <p:spPr>
           <a:xfrm>
-            <a:off x="1000822" y="102452"/>
-            <a:ext cx="658619" cy="204904"/>
+            <a:off x="109728" y="128016"/>
+            <a:ext cx="822960" cy="256032"/>
           </a:xfrm>
           <a:prstGeom prst="rect">
             <a:avLst/>
@@ -15669,7 +15669,7 @@
               <a:buNone/>
             </a:pPr>
             <a:r>
-              <a:rPr lang="en-US" sz="720" dirty="0">
+              <a:rPr lang="en-US" sz="900" dirty="0">
                 <a:solidFill>
                   <a:srgbClr val="5F7183"/>
                 </a:solidFill>
@@ -15679,7 +15679,7 @@
               </a:rPr>
               <a:t>5 / 14</a:t>
             </a:r>
-            <a:endParaRPr lang="en-US" sz="720" dirty="0"/>
+            <a:endParaRPr lang="en-US" sz="900" dirty="0"/>
           </a:p>
         </p:txBody>
       </p:sp>
@@ -15691,8 +15691,8 @@
         </p:nvSpPr>
         <p:spPr>
           <a:xfrm>
-            <a:off x="1681395" y="102452"/>
-            <a:ext cx="1609957" cy="204904"/>
+            <a:off x="960120" y="128016"/>
+            <a:ext cx="2011680" cy="256032"/>
           </a:xfrm>
           <a:prstGeom prst="rect">
             <a:avLst/>
@@ -15708,7 +15708,7 @@
               <a:buNone/>
             </a:pPr>
             <a:r>
-              <a:rPr lang="en-US" sz="720" dirty="0">
+              <a:rPr lang="en-US" sz="900" dirty="0">
                 <a:solidFill>
                   <a:srgbClr val="5F7183"/>
                 </a:solidFill>
@@ -15718,7 +15718,7 @@
               </a:rPr>
               <a:t>Tiết 1 · 第 1 節</a:t>
             </a:r>
-            <a:endParaRPr lang="en-US" sz="720" dirty="0"/>
+            <a:endParaRPr lang="en-US" sz="900" dirty="0"/>
           </a:p>
         </p:txBody>
       </p:sp>
@@ -15741,7 +15741,7 @@
       </p:nvGrpSpPr>
       <p:grpSpPr>
         <a:xfrm>
-          <a:off x="902981" y="0"/>
+          <a:off x="0" y="0"/>
           <a:ext cx="1" cy="1"/>
           <a:chOff x="0" y="0"/>
           <a:chExt cx="0" cy="0"/>
@@ -15755,8 +15755,8 @@
         </p:nvSpPr>
         <p:spPr>
           <a:xfrm>
-            <a:off x="1306573" y="234817"/>
-            <a:ext cx="6530855" cy="675100"/>
+            <a:off x="502920" y="292608"/>
+            <a:ext cx="8138160" cy="841248"/>
           </a:xfrm>
           <a:prstGeom prst="rect">
             <a:avLst/>
@@ -15775,7 +15775,7 @@
               <a:buNone/>
             </a:pPr>
             <a:r>
-              <a:rPr lang="en-US" sz="1770" b="1" dirty="0">
+              <a:rPr lang="en-US" sz="2200" b="1" dirty="0">
                 <a:solidFill>
                   <a:srgbClr val="0B1F3A"/>
                 </a:solidFill>
@@ -15785,7 +15785,7 @@
               </a:rPr>
               <a:t>Cùng là lidar, hai cách tiêu tiền khác nhau</a:t>
             </a:r>
-            <a:endParaRPr lang="en-US" sz="1770" dirty="0"/>
+            <a:endParaRPr lang="en-US" sz="2200" dirty="0"/>
           </a:p>
           <a:p>
             <a:pPr indent="0" marL="0">
@@ -15795,7 +15795,7 @@
               <a:buNone/>
             </a:pPr>
             <a:r>
-              <a:rPr lang="en-US" sz="1080" dirty="0">
+              <a:rPr lang="en-US" sz="1350" dirty="0">
                 <a:solidFill>
                   <a:srgbClr val="5F7183"/>
                 </a:solidFill>
@@ -15805,7 +15805,7 @@
               </a:rPr>
               <a:t>同樣是光達，兩種花錢的方式</a:t>
             </a:r>
-            <a:endParaRPr lang="en-US" sz="1770" dirty="0"/>
+            <a:endParaRPr lang="en-US" sz="2200" dirty="0"/>
           </a:p>
         </p:txBody>
       </p:sp>
@@ -15824,20 +15824,20 @@
           </p:nvPr>
         </p:nvGraphicFramePr>
         <p:xfrm>
-          <a:off x="1306573" y="909917"/>
-          <a:ext cx="6530855" cy="733804"/>
+          <a:off x="502920" y="1133856"/>
+          <a:ext cx="8138160" cy="914400"/>
         </p:xfrm>
         <a:graphic>
           <a:graphicData uri="http://schemas.openxmlformats.org/drawingml/2006/table">
             <a:tbl>
               <a:tblPr/>
               <a:tblGrid>
-                <a:gridCol w="1632714"/>
-                <a:gridCol w="1632714"/>
-                <a:gridCol w="1632714"/>
-                <a:gridCol w="1632714"/>
+                <a:gridCol w="2034540"/>
+                <a:gridCol w="2034540"/>
+                <a:gridCol w="2034540"/>
+                <a:gridCol w="2034540"/>
               </a:tblGrid>
-              <a:tr h="308198">
+              <a:tr h="384048">
                 <a:tc>
                   <a:txBody>
                     <a:bodyPr/>
@@ -15847,7 +15847,7 @@
                         <a:buNone/>
                       </a:pPr>
                       <a:r>
-                        <a:rPr lang="en-US" sz="880" b="1" dirty="0">
+                        <a:rPr lang="en-US" sz="1100" b="1" dirty="0">
                           <a:solidFill>
                             <a:srgbClr val="FFFFFF"/>
                           </a:solidFill>
@@ -15857,14 +15857,14 @@
                         </a:rPr>
                         <a:t>Dòng trên datasheet</a:t>
                       </a:r>
-                      <a:endParaRPr lang="en-US" sz="960" dirty="0"/>
+                      <a:endParaRPr lang="en-US" sz="1200" dirty="0"/>
                     </a:p>
                     <a:p>
                       <a:pPr algn="l" indent="0" marL="0">
                         <a:buNone/>
                       </a:pPr>
                       <a:r>
-                        <a:rPr lang="en-US" sz="760" dirty="0">
+                        <a:rPr lang="en-US" sz="950" dirty="0">
                           <a:solidFill>
                             <a:srgbClr val="CFE0EC"/>
                           </a:solidFill>
@@ -15874,7 +15874,7 @@
                         </a:rPr>
                         <a:t>規格表上那一行</a:t>
                       </a:r>
-                      <a:endParaRPr lang="en-US" sz="960" dirty="0"/>
+                      <a:endParaRPr lang="en-US" sz="1200" dirty="0"/>
                     </a:p>
                   </a:txBody>
                   <a:tcPr marL="63500" marR="63500" marT="38100" marB="38100" anchor="ctr">
@@ -15928,7 +15928,7 @@
                         <a:buNone/>
                       </a:pPr>
                       <a:r>
-                        <a:rPr lang="en-US" sz="880" b="1" dirty="0">
+                        <a:rPr lang="en-US" sz="1100" b="1" dirty="0">
                           <a:solidFill>
                             <a:srgbClr val="FFFFFF"/>
                           </a:solidFill>
@@ -15938,14 +15938,14 @@
                         </a:rPr>
                         <a:t>Ouster OS1-64</a:t>
                       </a:r>
-                      <a:endParaRPr lang="en-US" sz="960" dirty="0"/>
+                      <a:endParaRPr lang="en-US" sz="1200" dirty="0"/>
                     </a:p>
                     <a:p>
                       <a:pPr algn="l" indent="0" marL="0">
                         <a:buNone/>
                       </a:pPr>
                       <a:r>
-                        <a:rPr lang="en-US" sz="760" dirty="0">
+                        <a:rPr lang="en-US" sz="950" dirty="0">
                           <a:solidFill>
                             <a:srgbClr val="CFE0EC"/>
                           </a:solidFill>
@@ -15955,7 +15955,7 @@
                         </a:rPr>
                         <a:t>Ouster OS1-64</a:t>
                       </a:r>
-                      <a:endParaRPr lang="en-US" sz="960" dirty="0"/>
+                      <a:endParaRPr lang="en-US" sz="1200" dirty="0"/>
                     </a:p>
                   </a:txBody>
                   <a:tcPr marL="63500" marR="63500" marT="38100" marB="38100" anchor="ctr">
@@ -16009,7 +16009,7 @@
                         <a:buNone/>
                       </a:pPr>
                       <a:r>
-                        <a:rPr lang="en-US" sz="880" b="1" dirty="0">
+                        <a:rPr lang="en-US" sz="1100" b="1" dirty="0">
                           <a:solidFill>
                             <a:srgbClr val="FFFFFF"/>
                           </a:solidFill>
@@ -16019,14 +16019,14 @@
                         </a:rPr>
                         <a:t>Hesai AT128</a:t>
                       </a:r>
-                      <a:endParaRPr lang="en-US" sz="960" dirty="0"/>
+                      <a:endParaRPr lang="en-US" sz="1200" dirty="0"/>
                     </a:p>
                     <a:p>
                       <a:pPr algn="l" indent="0" marL="0">
                         <a:buNone/>
                       </a:pPr>
                       <a:r>
-                        <a:rPr lang="en-US" sz="760" dirty="0">
+                        <a:rPr lang="en-US" sz="950" dirty="0">
                           <a:solidFill>
                             <a:srgbClr val="CFE0EC"/>
                           </a:solidFill>
@@ -16036,7 +16036,7 @@
                         </a:rPr>
                         <a:t>Hesai AT128</a:t>
                       </a:r>
-                      <a:endParaRPr lang="en-US" sz="960" dirty="0"/>
+                      <a:endParaRPr lang="en-US" sz="1200" dirty="0"/>
                     </a:p>
                   </a:txBody>
                   <a:tcPr marL="63500" marR="63500" marT="38100" marB="38100" anchor="ctr">
@@ -16090,7 +16090,7 @@
                         <a:buNone/>
                       </a:pPr>
                       <a:r>
-                        <a:rPr lang="en-US" sz="880" b="1" dirty="0">
+                        <a:rPr lang="en-US" sz="1100" b="1" dirty="0">
                           <a:solidFill>
                             <a:srgbClr val="FFFFFF"/>
                           </a:solidFill>
@@ -16100,14 +16100,14 @@
                         </a:rPr>
                         <a:t>Nghĩa là gì</a:t>
                       </a:r>
-                      <a:endParaRPr lang="en-US" sz="960" dirty="0"/>
+                      <a:endParaRPr lang="en-US" sz="1200" dirty="0"/>
                     </a:p>
                     <a:p>
                       <a:pPr algn="l" indent="0" marL="0">
                         <a:buNone/>
                       </a:pPr>
                       <a:r>
-                        <a:rPr lang="en-US" sz="760" dirty="0">
+                        <a:rPr lang="en-US" sz="950" dirty="0">
                           <a:solidFill>
                             <a:srgbClr val="CFE0EC"/>
                           </a:solidFill>
@@ -16117,7 +16117,7 @@
                         </a:rPr>
                         <a:t>這代表什麼</a:t>
                       </a:r>
-                      <a:endParaRPr lang="en-US" sz="960" dirty="0"/>
+                      <a:endParaRPr lang="en-US" sz="1200" dirty="0"/>
                     </a:p>
                   </a:txBody>
                   <a:tcPr marL="63500" marR="63500" marT="38100" marB="38100" anchor="ctr">
@@ -16163,7 +16163,7 @@
                   </a:tcPr>
                 </a:tc>
               </a:tr>
-              <a:tr h="308198">
+              <a:tr h="384048">
                 <a:tc>
                   <a:txBody>
                     <a:bodyPr/>
@@ -16173,7 +16173,7 @@
                         <a:buNone/>
                       </a:pPr>
                       <a:r>
-                        <a:rPr lang="en-US" sz="880" b="1" dirty="0">
+                        <a:rPr lang="en-US" sz="1100" b="1" dirty="0">
                           <a:solidFill>
                             <a:srgbClr val="0B1F3A"/>
                           </a:solidFill>
@@ -16183,14 +16183,14 @@
                         </a:rPr>
                         <a:t>Góc nhìn ngang</a:t>
                       </a:r>
-                      <a:endParaRPr lang="en-US" sz="960" dirty="0"/>
+                      <a:endParaRPr lang="en-US" sz="1200" dirty="0"/>
                     </a:p>
                     <a:p>
                       <a:pPr algn="l" indent="0" marL="0">
                         <a:buNone/>
                       </a:pPr>
                       <a:r>
-                        <a:rPr lang="en-US" sz="760" dirty="0">
+                        <a:rPr lang="en-US" sz="950" dirty="0">
                           <a:solidFill>
                             <a:srgbClr val="5F7183"/>
                           </a:solidFill>
@@ -16200,7 +16200,7 @@
                         </a:rPr>
                         <a:t>水平視野</a:t>
                       </a:r>
-                      <a:endParaRPr lang="en-US" sz="960" dirty="0"/>
+                      <a:endParaRPr lang="en-US" sz="1200" dirty="0"/>
                     </a:p>
                   </a:txBody>
                   <a:tcPr marL="63500" marR="63500" marT="38100" marB="38100" anchor="ctr">
@@ -16251,7 +16251,7 @@
                         <a:buNone/>
                       </a:pPr>
                       <a:r>
-                        <a:rPr lang="en-US" sz="880" dirty="0">
+                        <a:rPr lang="en-US" sz="1100" dirty="0">
                           <a:solidFill>
                             <a:srgbClr val="1A2733"/>
                           </a:solidFill>
@@ -16261,7 +16261,7 @@
                         </a:rPr>
                         <a:t>360°</a:t>
                       </a:r>
-                      <a:endParaRPr lang="en-US" sz="960" dirty="0"/>
+                      <a:endParaRPr lang="en-US" sz="1200" dirty="0"/>
                     </a:p>
                   </a:txBody>
                   <a:tcPr marL="63500" marR="63500" marT="38100" marB="38100" anchor="ctr">
@@ -16312,7 +16312,7 @@
                         <a:buNone/>
                       </a:pPr>
                       <a:r>
-                        <a:rPr lang="en-US" sz="880" dirty="0">
+                        <a:rPr lang="en-US" sz="1100" dirty="0">
                           <a:solidFill>
                             <a:srgbClr val="1A2733"/>
                           </a:solidFill>
@@ -16322,7 +16322,7 @@
                         </a:rPr>
                         <a:t>120°</a:t>
                       </a:r>
-                      <a:endParaRPr lang="en-US" sz="960" dirty="0"/>
+                      <a:endParaRPr lang="en-US" sz="1200" dirty="0"/>
                     </a:p>
                   </a:txBody>
                   <a:tcPr marL="63500" marR="63500" marT="38100" marB="38100" anchor="ctr">
@@ -16373,7 +16373,7 @@
                         <a:buNone/>
                       </a:pPr>
                       <a:r>
-                        <a:rPr lang="en-US" sz="880" dirty="0">
+                        <a:rPr lang="en-US" sz="1100" dirty="0">
                           <a:solidFill>
                             <a:srgbClr val="1A2733"/>
                           </a:solidFill>
@@ -16383,14 +16383,14 @@
                         </a:rPr>
                         <a:t>Một cái nhìn quanh, một cái nhìn trước</a:t>
                       </a:r>
-                      <a:endParaRPr lang="en-US" sz="960" dirty="0"/>
+                      <a:endParaRPr lang="en-US" sz="1200" dirty="0"/>
                     </a:p>
                     <a:p>
                       <a:pPr algn="l" indent="0" marL="0">
                         <a:buNone/>
                       </a:pPr>
                       <a:r>
-                        <a:rPr lang="en-US" sz="760" dirty="0">
+                        <a:rPr lang="en-US" sz="950" dirty="0">
                           <a:solidFill>
                             <a:srgbClr val="5F7183"/>
                           </a:solidFill>
@@ -16400,7 +16400,7 @@
                         </a:rPr>
                         <a:t>一個看四周，一個只看前面</a:t>
                       </a:r>
-                      <a:endParaRPr lang="en-US" sz="960" dirty="0"/>
+                      <a:endParaRPr lang="en-US" sz="1200" dirty="0"/>
                     </a:p>
                   </a:txBody>
                   <a:tcPr marL="63500" marR="63500" marT="38100" marB="38100" anchor="ctr">
@@ -16443,7 +16443,7 @@
                   </a:tcPr>
                 </a:tc>
               </a:tr>
-              <a:tr h="308198">
+              <a:tr h="384048">
                 <a:tc>
                   <a:txBody>
                     <a:bodyPr/>
@@ -16453,7 +16453,7 @@
                         <a:buNone/>
                       </a:pPr>
                       <a:r>
-                        <a:rPr lang="en-US" sz="880" b="1" dirty="0">
+                        <a:rPr lang="en-US" sz="1100" b="1" dirty="0">
                           <a:solidFill>
                             <a:srgbClr val="0B1F3A"/>
                           </a:solidFill>
@@ -16463,14 +16463,14 @@
                         </a:rPr>
                         <a:t>Phân giải ngang</a:t>
                       </a:r>
-                      <a:endParaRPr lang="en-US" sz="960" dirty="0"/>
+                      <a:endParaRPr lang="en-US" sz="1200" dirty="0"/>
                     </a:p>
                     <a:p>
                       <a:pPr algn="l" indent="0" marL="0">
                         <a:buNone/>
                       </a:pPr>
                       <a:r>
-                        <a:rPr lang="en-US" sz="760" dirty="0">
+                        <a:rPr lang="en-US" sz="950" dirty="0">
                           <a:solidFill>
                             <a:srgbClr val="5F7183"/>
                           </a:solidFill>
@@ -16480,7 +16480,7 @@
                         </a:rPr>
                         <a:t>水平角解析度</a:t>
                       </a:r>
-                      <a:endParaRPr lang="en-US" sz="960" dirty="0"/>
+                      <a:endParaRPr lang="en-US" sz="1200" dirty="0"/>
                     </a:p>
                   </a:txBody>
                   <a:tcPr marL="63500" marR="63500" marT="38100" marB="38100" anchor="ctr">
@@ -16531,7 +16531,7 @@
                         <a:buNone/>
                       </a:pPr>
                       <a:r>
-                        <a:rPr lang="en-US" sz="880" dirty="0">
+                        <a:rPr lang="en-US" sz="1100" dirty="0">
                           <a:solidFill>
                             <a:srgbClr val="1A2733"/>
                           </a:solidFill>
@@ -16541,7 +16541,7 @@
                         </a:rPr>
                         <a:t>0.35°</a:t>
                       </a:r>
-                      <a:endParaRPr lang="en-US" sz="960" dirty="0"/>
+                      <a:endParaRPr lang="en-US" sz="1200" dirty="0"/>
                     </a:p>
                   </a:txBody>
                   <a:tcPr marL="63500" marR="63500" marT="38100" marB="38100" anchor="ctr">
@@ -16592,7 +16592,7 @@
                         <a:buNone/>
                       </a:pPr>
                       <a:r>
-                        <a:rPr lang="en-US" sz="880" dirty="0">
+                        <a:rPr lang="en-US" sz="1100" dirty="0">
                           <a:solidFill>
                             <a:srgbClr val="1A2733"/>
                           </a:solidFill>
@@ -16602,7 +16602,7 @@
                         </a:rPr>
                         <a:t>0.1°</a:t>
                       </a:r>
-                      <a:endParaRPr lang="en-US" sz="960" dirty="0"/>
+                      <a:endParaRPr lang="en-US" sz="1200" dirty="0"/>
                     </a:p>
                   </a:txBody>
                   <a:tcPr marL="63500" marR="63500" marT="38100" marB="38100" anchor="ctr">
@@ -16653,7 +16653,7 @@
                         <a:buNone/>
                       </a:pPr>
                       <a:r>
-                        <a:rPr lang="en-US" sz="880" dirty="0">
+                        <a:rPr lang="en-US" sz="1100" dirty="0">
                           <a:solidFill>
                             <a:srgbClr val="1A2733"/>
                           </a:solidFill>
@@ -16663,14 +16663,14 @@
                         </a:rPr>
                         <a:t>AT128 dày hơn 3 lần theo chiều ngang</a:t>
                       </a:r>
-                      <a:endParaRPr lang="en-US" sz="960" dirty="0"/>
+                      <a:endParaRPr lang="en-US" sz="1200" dirty="0"/>
                     </a:p>
                     <a:p>
                       <a:pPr algn="l" indent="0" marL="0">
                         <a:buNone/>
                       </a:pPr>
                       <a:r>
-                        <a:rPr lang="en-US" sz="760" dirty="0">
+                        <a:rPr lang="en-US" sz="950" dirty="0">
                           <a:solidFill>
                             <a:srgbClr val="5F7183"/>
                           </a:solidFill>
@@ -16680,7 +16680,7 @@
                         </a:rPr>
                         <a:t>AT128 左右密了三倍多</a:t>
                       </a:r>
-                      <a:endParaRPr lang="en-US" sz="960" dirty="0"/>
+                      <a:endParaRPr lang="en-US" sz="1200" dirty="0"/>
                     </a:p>
                   </a:txBody>
                   <a:tcPr marL="63500" marR="63500" marT="38100" marB="38100" anchor="ctr">
@@ -16723,7 +16723,7 @@
                   </a:tcPr>
                 </a:tc>
               </a:tr>
-              <a:tr h="308198">
+              <a:tr h="384048">
                 <a:tc>
                   <a:txBody>
                     <a:bodyPr/>
@@ -16733,7 +16733,7 @@
                         <a:buNone/>
                       </a:pPr>
                       <a:r>
-                        <a:rPr lang="en-US" sz="880" b="1" dirty="0">
+                        <a:rPr lang="en-US" sz="1100" b="1" dirty="0">
                           <a:solidFill>
                             <a:srgbClr val="0B1F3A"/>
                           </a:solidFill>
@@ -16743,14 +16743,14 @@
                         </a:rPr>
                         <a:t>Tầm đo (10%)</a:t>
                       </a:r>
-                      <a:endParaRPr lang="en-US" sz="960" dirty="0"/>
+                      <a:endParaRPr lang="en-US" sz="1200" dirty="0"/>
                     </a:p>
                     <a:p>
                       <a:pPr algn="l" indent="0" marL="0">
                         <a:buNone/>
                       </a:pPr>
                       <a:r>
-                        <a:rPr lang="en-US" sz="760" dirty="0">
+                        <a:rPr lang="en-US" sz="950" dirty="0">
                           <a:solidFill>
                             <a:srgbClr val="5F7183"/>
                           </a:solidFill>
@@ -16760,7 +16760,7 @@
                         </a:rPr>
                         <a:t>測距（10% 反射率）</a:t>
                       </a:r>
-                      <a:endParaRPr lang="en-US" sz="960" dirty="0"/>
+                      <a:endParaRPr lang="en-US" sz="1200" dirty="0"/>
                     </a:p>
                   </a:txBody>
                   <a:tcPr marL="63500" marR="63500" marT="38100" marB="38100" anchor="ctr">
@@ -16811,7 +16811,7 @@
                         <a:buNone/>
                       </a:pPr>
                       <a:r>
-                        <a:rPr lang="en-US" sz="880" dirty="0">
+                        <a:rPr lang="en-US" sz="1100" dirty="0">
                           <a:solidFill>
                             <a:srgbClr val="1A2733"/>
                           </a:solidFill>
@@ -16821,7 +16821,7 @@
                         </a:rPr>
                         <a:t>90 m</a:t>
                       </a:r>
-                      <a:endParaRPr lang="en-US" sz="960" dirty="0"/>
+                      <a:endParaRPr lang="en-US" sz="1200" dirty="0"/>
                     </a:p>
                   </a:txBody>
                   <a:tcPr marL="63500" marR="63500" marT="38100" marB="38100" anchor="ctr">
@@ -16872,7 +16872,7 @@
                         <a:buNone/>
                       </a:pPr>
                       <a:r>
-                        <a:rPr lang="en-US" sz="880" dirty="0">
+                        <a:rPr lang="en-US" sz="1100" dirty="0">
                           <a:solidFill>
                             <a:srgbClr val="1A2733"/>
                           </a:solidFill>
@@ -16882,7 +16882,7 @@
                         </a:rPr>
                         <a:t>210 m</a:t>
                       </a:r>
-                      <a:endParaRPr lang="en-US" sz="960" dirty="0"/>
+                      <a:endParaRPr lang="en-US" sz="1200" dirty="0"/>
                     </a:p>
                   </a:txBody>
                   <a:tcPr marL="63500" marR="63500" marT="38100" marB="38100" anchor="ctr">
@@ -16933,7 +16933,7 @@
                         <a:buNone/>
                       </a:pPr>
                       <a:r>
-                        <a:rPr lang="en-US" sz="880" dirty="0">
+                        <a:rPr lang="en-US" sz="1100" dirty="0">
                           <a:solidFill>
                             <a:srgbClr val="1A2733"/>
                           </a:solidFill>
@@ -16943,14 +16943,14 @@
                         </a:rPr>
                         <a:t>Nhìn xa hơn gấp đôi</a:t>
                       </a:r>
-                      <a:endParaRPr lang="en-US" sz="960" dirty="0"/>
+                      <a:endParaRPr lang="en-US" sz="1200" dirty="0"/>
                     </a:p>
                     <a:p>
                       <a:pPr algn="l" indent="0" marL="0">
                         <a:buNone/>
                       </a:pPr>
                       <a:r>
-                        <a:rPr lang="en-US" sz="760" dirty="0">
+                        <a:rPr lang="en-US" sz="950" dirty="0">
                           <a:solidFill>
                             <a:srgbClr val="5F7183"/>
                           </a:solidFill>
@@ -16960,7 +16960,7 @@
                         </a:rPr>
                         <a:t>看得遠一倍以上</a:t>
                       </a:r>
-                      <a:endParaRPr lang="en-US" sz="960" dirty="0"/>
+                      <a:endParaRPr lang="en-US" sz="1200" dirty="0"/>
                     </a:p>
                   </a:txBody>
                   <a:tcPr marL="63500" marR="63500" marT="38100" marB="38100" anchor="ctr">
@@ -17003,7 +17003,7 @@
                   </a:tcPr>
                 </a:tc>
               </a:tr>
-              <a:tr h="308198">
+              <a:tr h="384048">
                 <a:tc>
                   <a:txBody>
                     <a:bodyPr/>
@@ -17013,7 +17013,7 @@
                         <a:buNone/>
                       </a:pPr>
                       <a:r>
-                        <a:rPr lang="en-US" sz="880" b="1" dirty="0">
+                        <a:rPr lang="en-US" sz="1100" b="1" dirty="0">
                           <a:solidFill>
                             <a:srgbClr val="0B1F3A"/>
                           </a:solidFill>
@@ -17023,14 +17023,14 @@
                         </a:rPr>
                         <a:t>Người ở 40 m</a:t>
                       </a:r>
-                      <a:endParaRPr lang="en-US" sz="960" dirty="0"/>
+                      <a:endParaRPr lang="en-US" sz="1200" dirty="0"/>
                     </a:p>
                     <a:p>
                       <a:pPr algn="l" indent="0" marL="0">
                         <a:buNone/>
                       </a:pPr>
                       <a:r>
-                        <a:rPr lang="en-US" sz="760" dirty="0">
+                        <a:rPr lang="en-US" sz="950" dirty="0">
                           <a:solidFill>
                             <a:srgbClr val="5F7183"/>
                           </a:solidFill>
@@ -17040,7 +17040,7 @@
                         </a:rPr>
                         <a:t>40 公尺的行人</a:t>
                       </a:r>
-                      <a:endParaRPr lang="en-US" sz="960" dirty="0"/>
+                      <a:endParaRPr lang="en-US" sz="1200" dirty="0"/>
                     </a:p>
                   </a:txBody>
                   <a:tcPr marL="63500" marR="63500" marT="38100" marB="38100" anchor="ctr">
@@ -17091,7 +17091,7 @@
                         <a:buNone/>
                       </a:pPr>
                       <a:r>
-                        <a:rPr lang="en-US" sz="880" dirty="0">
+                        <a:rPr lang="en-US" sz="1100" dirty="0">
                           <a:solidFill>
                             <a:srgbClr val="1A2733"/>
                           </a:solidFill>
@@ -17101,7 +17101,7 @@
                         </a:rPr>
                         <a:t>9 điểm</a:t>
                       </a:r>
-                      <a:endParaRPr lang="en-US" sz="960" dirty="0"/>
+                      <a:endParaRPr lang="en-US" sz="1200" dirty="0"/>
                     </a:p>
                   </a:txBody>
                   <a:tcPr marL="63500" marR="63500" marT="38100" marB="38100" anchor="ctr">
@@ -17152,7 +17152,7 @@
                         <a:buNone/>
                       </a:pPr>
                       <a:r>
-                        <a:rPr lang="en-US" sz="880" dirty="0">
+                        <a:rPr lang="en-US" sz="1100" dirty="0">
                           <a:solidFill>
                             <a:srgbClr val="1A2733"/>
                           </a:solidFill>
@@ -17162,7 +17162,7 @@
                         </a:rPr>
                         <a:t>121 điểm</a:t>
                       </a:r>
-                      <a:endParaRPr lang="en-US" sz="960" dirty="0"/>
+                      <a:endParaRPr lang="en-US" sz="1200" dirty="0"/>
                     </a:p>
                   </a:txBody>
                   <a:tcPr marL="63500" marR="63500" marT="38100" marB="38100" anchor="ctr">
@@ -17213,7 +17213,7 @@
                         <a:buNone/>
                       </a:pPr>
                       <a:r>
-                        <a:rPr lang="en-US" sz="880" dirty="0">
+                        <a:rPr lang="en-US" sz="1100" dirty="0">
                           <a:solidFill>
                             <a:srgbClr val="1A2733"/>
                           </a:solidFill>
@@ -17223,14 +17223,14 @@
                         </a:rPr>
                         <a:t>Đây mới là con số quyết định</a:t>
                       </a:r>
-                      <a:endParaRPr lang="en-US" sz="960" dirty="0"/>
+                      <a:endParaRPr lang="en-US" sz="1200" dirty="0"/>
                     </a:p>
                     <a:p>
                       <a:pPr algn="l" indent="0" marL="0">
                         <a:buNone/>
                       </a:pPr>
                       <a:r>
-                        <a:rPr lang="en-US" sz="760" dirty="0">
+                        <a:rPr lang="en-US" sz="950" dirty="0">
                           <a:solidFill>
                             <a:srgbClr val="5F7183"/>
                           </a:solidFill>
@@ -17240,7 +17240,7 @@
                         </a:rPr>
                         <a:t>這才是真正決定用不用得了的數字</a:t>
                       </a:r>
-                      <a:endParaRPr lang="en-US" sz="960" dirty="0"/>
+                      <a:endParaRPr lang="en-US" sz="1200" dirty="0"/>
                     </a:p>
                   </a:txBody>
                   <a:tcPr marL="63500" marR="63500" marT="38100" marB="38100" anchor="ctr">
@@ -17295,8 +17295,8 @@
         </p:nvSpPr>
         <p:spPr>
           <a:xfrm>
-            <a:off x="1306573" y="3233548"/>
-            <a:ext cx="6530855" cy="366902"/>
+            <a:off x="502920" y="4029355"/>
+            <a:ext cx="8138160" cy="457200"/>
           </a:xfrm>
           <a:prstGeom prst="rect">
             <a:avLst/>
@@ -17315,7 +17315,7 @@
               <a:buNone/>
             </a:pPr>
             <a:r>
-              <a:rPr lang="en-US" sz="960" b="1" dirty="0">
+              <a:rPr lang="en-US" sz="1200" b="1" dirty="0">
                 <a:solidFill>
                   <a:srgbClr val="007F72"/>
                 </a:solidFill>
@@ -17325,7 +17325,7 @@
               </a:rPr>
               <a:t>Hàng cuối không nằm trên datasheet — nó là do ta tự tính từ ba dòng trên.</a:t>
             </a:r>
-            <a:endParaRPr lang="en-US" sz="960" dirty="0"/>
+            <a:endParaRPr lang="en-US" sz="1200" dirty="0"/>
           </a:p>
           <a:p>
             <a:pPr indent="0" marL="0">
@@ -17335,7 +17335,7 @@
               <a:buNone/>
             </a:pPr>
             <a:r>
-              <a:rPr lang="en-US" sz="880" dirty="0">
+              <a:rPr lang="en-US" sz="1100" dirty="0">
                 <a:solidFill>
                   <a:srgbClr val="007F72"/>
                 </a:solidFill>
@@ -17345,7 +17345,7 @@
               </a:rPr>
               <a:t>最後一行規格表上沒有，是我們自己用上面三行算出來的。</a:t>
             </a:r>
-            <a:endParaRPr lang="en-US" sz="960" dirty="0"/>
+            <a:endParaRPr lang="en-US" sz="1200" dirty="0"/>
           </a:p>
         </p:txBody>
       </p:sp>
@@ -17381,8 +17381,8 @@
         </p:nvSpPr>
         <p:spPr>
           <a:xfrm>
-            <a:off x="991037" y="102733"/>
-            <a:ext cx="660423" cy="205465"/>
+            <a:off x="109728" y="128016"/>
+            <a:ext cx="822960" cy="256032"/>
           </a:xfrm>
           <a:prstGeom prst="rect">
             <a:avLst/>
@@ -17398,7 +17398,7 @@
               <a:buNone/>
             </a:pPr>
             <a:r>
-              <a:rPr lang="en-US" sz="720" dirty="0">
+              <a:rPr lang="en-US" sz="900" dirty="0">
                 <a:solidFill>
                   <a:srgbClr val="5F7183"/>
                 </a:solidFill>
@@ -17408,7 +17408,7 @@
               </a:rPr>
               <a:t>6 / 14</a:t>
             </a:r>
-            <a:endParaRPr lang="en-US" sz="720" dirty="0"/>
+            <a:endParaRPr lang="en-US" sz="900" dirty="0"/>
           </a:p>
         </p:txBody>
       </p:sp>
@@ -17420,8 +17420,8 @@
         </p:nvSpPr>
         <p:spPr>
           <a:xfrm>
-            <a:off x="1673475" y="102733"/>
-            <a:ext cx="1614369" cy="205465"/>
+            <a:off x="960120" y="128016"/>
+            <a:ext cx="2011680" cy="256032"/>
           </a:xfrm>
           <a:prstGeom prst="rect">
             <a:avLst/>
@@ -17437,7 +17437,7 @@
               <a:buNone/>
             </a:pPr>
             <a:r>
-              <a:rPr lang="en-US" sz="720" dirty="0">
+              <a:rPr lang="en-US" sz="900" dirty="0">
                 <a:solidFill>
                   <a:srgbClr val="5F7183"/>
                 </a:solidFill>
@@ -17447,7 +17447,7 @@
               </a:rPr>
               <a:t>Tiết 1 · 第 1 節</a:t>
             </a:r>
-            <a:endParaRPr lang="en-US" sz="720" dirty="0"/>
+            <a:endParaRPr lang="en-US" sz="900" dirty="0"/>
           </a:p>
         </p:txBody>
       </p:sp>
@@ -17470,7 +17470,7 @@
       </p:nvGrpSpPr>
       <p:grpSpPr>
         <a:xfrm>
-          <a:off x="942514" y="0"/>
+          <a:off x="0" y="0"/>
           <a:ext cx="1" cy="1"/>
           <a:chOff x="0" y="0"/>
           <a:chExt cx="0" cy="0"/>
@@ -17484,8 +17484,8 @@
         </p:nvSpPr>
         <p:spPr>
           <a:xfrm>
-            <a:off x="1341758" y="333913"/>
-            <a:ext cx="6460485" cy="217769"/>
+            <a:off x="502920" y="420624"/>
+            <a:ext cx="8138160" cy="274320"/>
           </a:xfrm>
           <a:prstGeom prst="rect">
             <a:avLst/>
@@ -17501,7 +17501,7 @@
               <a:buNone/>
             </a:pPr>
             <a:r>
-              <a:rPr lang="en-US" sz="990" b="1" dirty="0">
+              <a:rPr lang="en-US" sz="1250" b="1" dirty="0">
                 <a:solidFill>
                   <a:srgbClr val="007F72"/>
                 </a:solidFill>
@@ -17511,7 +17511,7 @@
               </a:rPr>
               <a:t>Thông số thứ tư · 第四個規格</a:t>
             </a:r>
-            <a:endParaRPr lang="en-US" sz="990" dirty="0"/>
+            <a:endParaRPr lang="en-US" sz="1250" dirty="0"/>
           </a:p>
         </p:txBody>
       </p:sp>
@@ -17523,8 +17523,8 @@
         </p:nvSpPr>
         <p:spPr>
           <a:xfrm>
-            <a:off x="1341758" y="874706"/>
-            <a:ext cx="1959922" cy="1996217"/>
+            <a:off x="502920" y="1101852"/>
+            <a:ext cx="2468880" cy="2514600"/>
           </a:xfrm>
           <a:prstGeom prst="roundRect">
             <a:avLst>
@@ -17550,8 +17550,8 @@
         </p:nvSpPr>
         <p:spPr>
           <a:xfrm>
-            <a:off x="2128485" y="1749340"/>
-            <a:ext cx="737802" cy="599736"/>
+            <a:off x="1493947" y="2203613"/>
+            <a:ext cx="929396" cy="755477"/>
           </a:xfrm>
           <a:prstGeom prst="roundRect">
             <a:avLst>
@@ -17577,8 +17577,8 @@
         </p:nvSpPr>
         <p:spPr>
           <a:xfrm>
-            <a:off x="2005518" y="1625864"/>
-            <a:ext cx="737802" cy="599736"/>
+            <a:off x="1339047" y="2048073"/>
+            <a:ext cx="929396" cy="755477"/>
           </a:xfrm>
           <a:prstGeom prst="roundRect">
             <a:avLst>
@@ -17604,8 +17604,8 @@
         </p:nvSpPr>
         <p:spPr>
           <a:xfrm>
-            <a:off x="1882551" y="1502390"/>
-            <a:ext cx="737802" cy="599736"/>
+            <a:off x="1184148" y="1892534"/>
+            <a:ext cx="929396" cy="755477"/>
           </a:xfrm>
           <a:prstGeom prst="roundRect">
             <a:avLst>
@@ -17631,8 +17631,8 @@
         </p:nvSpPr>
         <p:spPr>
           <a:xfrm>
-            <a:off x="1759584" y="1378914"/>
-            <a:ext cx="737802" cy="599736"/>
+            <a:off x="1029249" y="1736994"/>
+            <a:ext cx="929396" cy="755477"/>
           </a:xfrm>
           <a:prstGeom prst="roundRect">
             <a:avLst>
@@ -17658,8 +17658,8 @@
         </p:nvSpPr>
         <p:spPr>
           <a:xfrm>
-            <a:off x="1443383" y="2296158"/>
-            <a:ext cx="1756671" cy="317508"/>
+            <a:off x="630936" y="2892430"/>
+            <a:ext cx="2212848" cy="399959"/>
           </a:xfrm>
           <a:prstGeom prst="rect">
             <a:avLst/>
@@ -17675,7 +17675,7 @@
               <a:buNone/>
             </a:pPr>
             <a:r>
-              <a:rPr lang="en-US" sz="870" b="1" dirty="0">
+              <a:rPr lang="en-US" sz="1100" b="1" dirty="0">
                 <a:solidFill>
                   <a:srgbClr val="8A5A00"/>
                 </a:solidFill>
@@ -17685,7 +17685,7 @@
               </a:rPr>
               <a:t>× 10 000</a:t>
             </a:r>
-            <a:endParaRPr lang="en-US" sz="870" dirty="0"/>
+            <a:endParaRPr lang="en-US" sz="1100" dirty="0"/>
           </a:p>
         </p:txBody>
       </p:sp>
@@ -17697,8 +17697,8 @@
         </p:nvSpPr>
         <p:spPr>
           <a:xfrm>
-            <a:off x="3664629" y="1127729"/>
-            <a:ext cx="4137614" cy="798305"/>
+            <a:off x="3429000" y="1420580"/>
+            <a:ext cx="5212080" cy="1005611"/>
           </a:xfrm>
           <a:prstGeom prst="rect">
             <a:avLst/>
@@ -17717,7 +17717,7 @@
               <a:buNone/>
             </a:pPr>
             <a:r>
-              <a:rPr lang="en-US" sz="1830" b="1" dirty="0">
+              <a:rPr lang="en-US" sz="2300" b="1" dirty="0">
                 <a:solidFill>
                   <a:srgbClr val="0B1F3A"/>
                 </a:solidFill>
@@ -17727,7 +17727,7 @@
               </a:rPr>
               <a:t>Tốc độ cập nhật: một giây nó nhìn mấy lần</a:t>
             </a:r>
-            <a:endParaRPr lang="en-US" sz="1830" dirty="0"/>
+            <a:endParaRPr lang="en-US" sz="2300" dirty="0"/>
           </a:p>
           <a:p>
             <a:pPr indent="0" marL="0">
@@ -17737,7 +17737,7 @@
               <a:buNone/>
             </a:pPr>
             <a:r>
-              <a:rPr lang="en-US" sz="1110" dirty="0">
+              <a:rPr lang="en-US" sz="1400" dirty="0">
                 <a:solidFill>
                   <a:srgbClr val="007F72"/>
                 </a:solidFill>
@@ -17747,7 +17747,7 @@
               </a:rPr>
               <a:t>更新率：它一秒鐘看幾次</a:t>
             </a:r>
-            <a:endParaRPr lang="en-US" sz="1830" dirty="0"/>
+            <a:endParaRPr lang="en-US" sz="2300" dirty="0"/>
           </a:p>
         </p:txBody>
       </p:sp>
@@ -17759,8 +17759,8 @@
         </p:nvSpPr>
         <p:spPr>
           <a:xfrm>
-            <a:off x="3664629" y="1998623"/>
-            <a:ext cx="4137614" cy="691867"/>
+            <a:off x="3429000" y="2517631"/>
+            <a:ext cx="5212080" cy="871533"/>
           </a:xfrm>
           <a:prstGeom prst="rect">
             <a:avLst/>
@@ -17779,7 +17779,7 @@
               <a:buNone/>
             </a:pPr>
             <a:r>
-              <a:rPr lang="en-US" sz="990" dirty="0">
+              <a:rPr lang="en-US" sz="1250" dirty="0">
                 <a:solidFill>
                   <a:srgbClr val="5F7183"/>
                 </a:solidFill>
@@ -17789,7 +17789,7 @@
               </a:rPr>
               <a:t>OS1 quay 10 hoặc 20 vòng mỗi giây. Ở 10 Hz, mỗi khung cách nhau 100 ms — chạy 40 km/h thì trong khoảng đó xe đã đi 1,1 m.</a:t>
             </a:r>
-            <a:endParaRPr lang="en-US" sz="990" dirty="0"/>
+            <a:endParaRPr lang="en-US" sz="1250" dirty="0"/>
           </a:p>
           <a:p>
             <a:pPr indent="0" marL="0">
@@ -17799,7 +17799,7 @@
               <a:buNone/>
             </a:pPr>
             <a:r>
-              <a:rPr lang="en-US" sz="910" dirty="0">
+              <a:rPr lang="en-US" sz="1150" dirty="0">
                 <a:solidFill>
                   <a:srgbClr val="5F7183"/>
                 </a:solidFill>
@@ -17809,7 +17809,7 @@
               </a:rPr>
               <a:t>OS1 每秒轉 10 圈或 20 圈。10 Hz 的話，每一張畫面隔 100 毫秒——時速 40 的時候，這段時間車子已經走了 1.1 公尺。</a:t>
             </a:r>
-            <a:endParaRPr lang="en-US" sz="990" dirty="0"/>
+            <a:endParaRPr lang="en-US" sz="1250" dirty="0"/>
           </a:p>
         </p:txBody>
       </p:sp>
@@ -17821,8 +17821,8 @@
         </p:nvSpPr>
         <p:spPr>
           <a:xfrm>
-            <a:off x="1341758" y="3106840"/>
-            <a:ext cx="6460485" cy="493610"/>
+            <a:off x="502920" y="3913632"/>
+            <a:ext cx="8138160" cy="621792"/>
           </a:xfrm>
           <a:prstGeom prst="roundRect">
             <a:avLst>
@@ -17848,8 +17848,8 @@
         </p:nvSpPr>
         <p:spPr>
           <a:xfrm>
-            <a:off x="1486937" y="3164912"/>
-            <a:ext cx="6170126" cy="391984"/>
+            <a:off x="685800" y="3986784"/>
+            <a:ext cx="7772400" cy="493776"/>
           </a:xfrm>
           <a:prstGeom prst="rect">
             <a:avLst/>
@@ -17868,7 +17868,7 @@
               <a:buNone/>
             </a:pPr>
             <a:r>
-              <a:rPr lang="en-US" sz="990" b="1" dirty="0">
+              <a:rPr lang="en-US" sz="1250" b="1" dirty="0">
                 <a:solidFill>
                   <a:srgbClr val="7A4E00"/>
                 </a:solidFill>
@@ -17878,7 +17878,7 @@
               </a:rPr>
               <a:t>Tuần 3 và 4 chưa từng nhắc tới thông số này, nhưng nó quyết định «xe thấy muộn bao nhiêu».</a:t>
             </a:r>
-            <a:endParaRPr lang="en-US" sz="990" dirty="0"/>
+            <a:endParaRPr lang="en-US" sz="1250" dirty="0"/>
           </a:p>
           <a:p>
             <a:pPr indent="0" marL="0">
@@ -17888,7 +17888,7 @@
               <a:buNone/>
             </a:pPr>
             <a:r>
-              <a:rPr lang="en-US" sz="910" dirty="0">
+              <a:rPr lang="en-US" sz="1150" dirty="0">
                 <a:solidFill>
                   <a:srgbClr val="7A4E00"/>
                 </a:solidFill>
@@ -17898,7 +17898,7 @@
               </a:rPr>
               <a:t>第三、四週從來沒提過這個規格，但它決定了「車子晚多久才知道」。</a:t>
             </a:r>
-            <a:endParaRPr lang="en-US" sz="990" dirty="0"/>
+            <a:endParaRPr lang="en-US" sz="1250" dirty="0"/>
           </a:p>
         </p:txBody>
       </p:sp>
@@ -17934,8 +17934,8 @@
         </p:nvSpPr>
         <p:spPr>
           <a:xfrm>
-            <a:off x="1029622" y="101626"/>
-            <a:ext cx="653307" cy="203251"/>
+            <a:off x="109728" y="128016"/>
+            <a:ext cx="822960" cy="256032"/>
           </a:xfrm>
           <a:prstGeom prst="rect">
             <a:avLst/>
@@ -17951,7 +17951,7 @@
               <a:buNone/>
             </a:pPr>
             <a:r>
-              <a:rPr lang="en-US" sz="710" dirty="0">
+              <a:rPr lang="en-US" sz="900" dirty="0">
                 <a:solidFill>
                   <a:srgbClr val="5F7183"/>
                 </a:solidFill>
@@ -17961,7 +17961,7 @@
               </a:rPr>
               <a:t>7 / 14</a:t>
             </a:r>
-            <a:endParaRPr lang="en-US" sz="710" dirty="0"/>
+            <a:endParaRPr lang="en-US" sz="900" dirty="0"/>
           </a:p>
         </p:txBody>
       </p:sp>
@@ -17973,8 +17973,8 @@
         </p:nvSpPr>
         <p:spPr>
           <a:xfrm>
-            <a:off x="1704706" y="101626"/>
-            <a:ext cx="1596974" cy="203251"/>
+            <a:off x="960120" y="128016"/>
+            <a:ext cx="2011680" cy="256032"/>
           </a:xfrm>
           <a:prstGeom prst="rect">
             <a:avLst/>
@@ -17990,7 +17990,7 @@
               <a:buNone/>
             </a:pPr>
             <a:r>
-              <a:rPr lang="en-US" sz="710" dirty="0">
+              <a:rPr lang="en-US" sz="900" dirty="0">
                 <a:solidFill>
                   <a:srgbClr val="5F7183"/>
                 </a:solidFill>
@@ -18000,7 +18000,7 @@
               </a:rPr>
               <a:t>Tiết 1 · 第 1 節</a:t>
             </a:r>
-            <a:endParaRPr lang="en-US" sz="710" dirty="0"/>
+            <a:endParaRPr lang="en-US" sz="900" dirty="0"/>
           </a:p>
         </p:txBody>
       </p:sp>
@@ -18030,7 +18030,7 @@
       </p:nvGrpSpPr>
       <p:grpSpPr>
         <a:xfrm>
-          <a:off x="898071" y="0"/>
+          <a:off x="0" y="0"/>
           <a:ext cx="1" cy="1"/>
           <a:chOff x="0" y="0"/>
           <a:chExt cx="0" cy="0"/>
@@ -18044,8 +18044,8 @@
         </p:nvSpPr>
         <p:spPr>
           <a:xfrm>
-            <a:off x="6335486" y="-1102179"/>
-            <a:ext cx="3380014" cy="3380014"/>
+            <a:off x="6766560" y="-1371600"/>
+            <a:ext cx="4206240" cy="4206240"/>
           </a:xfrm>
           <a:prstGeom prst="ellipse">
             <a:avLst/>
@@ -18069,8 +18069,8 @@
         </p:nvSpPr>
         <p:spPr>
           <a:xfrm>
-            <a:off x="7437664" y="1690007"/>
-            <a:ext cx="1910443" cy="1910443"/>
+            <a:off x="8138160" y="2103120"/>
+            <a:ext cx="2377440" cy="2377440"/>
           </a:xfrm>
           <a:prstGeom prst="ellipse">
             <a:avLst/>
@@ -18091,8 +18091,8 @@
         </p:nvSpPr>
         <p:spPr>
           <a:xfrm>
-            <a:off x="1302204" y="1359354"/>
-            <a:ext cx="3673929" cy="249827"/>
+            <a:off x="502920" y="1691640"/>
+            <a:ext cx="4572000" cy="310896"/>
           </a:xfrm>
           <a:prstGeom prst="rect">
             <a:avLst/>
@@ -18108,7 +18108,7 @@
               <a:buNone/>
             </a:pPr>
             <a:r>
-              <a:rPr lang="en-US" sz="1080" b="1" dirty="0">
+              <a:rPr lang="en-US" sz="1350" b="1" dirty="0">
                 <a:solidFill>
                   <a:srgbClr val="FFB020"/>
                 </a:solidFill>
@@ -18118,7 +18118,7 @@
               </a:rPr>
               <a:t>Phần 2 / 3</a:t>
             </a:r>
-            <a:endParaRPr lang="en-US" sz="1080" dirty="0"/>
+            <a:endParaRPr lang="en-US" sz="1350" dirty="0"/>
           </a:p>
         </p:txBody>
       </p:sp>
@@ -18130,8 +18130,8 @@
         </p:nvSpPr>
         <p:spPr>
           <a:xfrm>
-            <a:off x="1302204" y="1645920"/>
-            <a:ext cx="5878286" cy="955221"/>
+            <a:off x="502920" y="2048256"/>
+            <a:ext cx="7315200" cy="1188720"/>
           </a:xfrm>
           <a:prstGeom prst="rect">
             <a:avLst/>
@@ -18150,7 +18150,7 @@
               <a:buNone/>
             </a:pPr>
             <a:r>
-              <a:rPr lang="en-US" sz="2330" b="1" dirty="0">
+              <a:rPr lang="en-US" sz="2900" b="1" dirty="0">
                 <a:solidFill>
                   <a:srgbClr val="FFFFFF"/>
                 </a:solidFill>
@@ -18160,7 +18160,7 @@
               </a:rPr>
               <a:t>Tại sao datasheet của camera không có góc nhìn</a:t>
             </a:r>
-            <a:endParaRPr lang="en-US" sz="2330" dirty="0"/>
+            <a:endParaRPr lang="en-US" sz="2900" dirty="0"/>
           </a:p>
           <a:p>
             <a:pPr indent="0" marL="0">
@@ -18170,7 +18170,7 @@
               <a:buNone/>
             </a:pPr>
             <a:r>
-              <a:rPr lang="en-US" sz="1370" dirty="0">
+              <a:rPr lang="en-US" sz="1700" dirty="0">
                 <a:solidFill>
                   <a:srgbClr val="AFC3D4"/>
                 </a:solidFill>
@@ -18180,7 +18180,7 @@
               </a:rPr>
               <a:t>為什麼相機的規格表上沒有視野</a:t>
             </a:r>
-            <a:endParaRPr lang="en-US" sz="2330" dirty="0"/>
+            <a:endParaRPr lang="en-US" sz="2900" dirty="0"/>
           </a:p>
         </p:txBody>
       </p:sp>
@@ -18192,8 +18192,8 @@
         </p:nvSpPr>
         <p:spPr>
           <a:xfrm>
-            <a:off x="1302204" y="2689316"/>
-            <a:ext cx="5878286" cy="514350"/>
+            <a:off x="502920" y="3346704"/>
+            <a:ext cx="7315200" cy="640080"/>
           </a:xfrm>
           <a:prstGeom prst="rect">
             <a:avLst/>
@@ -18212,7 +18212,7 @@
               <a:buNone/>
             </a:pPr>
             <a:r>
-              <a:rPr lang="en-US" sz="1080" dirty="0">
+              <a:rPr lang="en-US" sz="1350" dirty="0">
                 <a:solidFill>
                   <a:srgbClr val="AFC3D4"/>
                 </a:solidFill>
@@ -18222,7 +18222,7 @@
               </a:rPr>
               <a:t>Hai dòng quan trọng nhất lại không nằm trên đó</a:t>
             </a:r>
-            <a:endParaRPr lang="en-US" sz="1080" dirty="0"/>
+            <a:endParaRPr lang="en-US" sz="1350" dirty="0"/>
           </a:p>
           <a:p>
             <a:pPr indent="0" marL="0">
@@ -18232,7 +18232,7 @@
               <a:buNone/>
             </a:pPr>
             <a:r>
-              <a:rPr lang="en-US" sz="960" dirty="0">
+              <a:rPr lang="en-US" sz="1200" dirty="0">
                 <a:solidFill>
                   <a:srgbClr val="8AA0B4"/>
                 </a:solidFill>
@@ -18242,7 +18242,7 @@
               </a:rPr>
               <a:t>最重要的兩行，偏偏不在上面</a:t>
             </a:r>
-            <a:endParaRPr lang="en-US" sz="1080" dirty="0"/>
+            <a:endParaRPr lang="en-US" sz="1350" dirty="0"/>
           </a:p>
         </p:txBody>
       </p:sp>
@@ -18254,8 +18254,8 @@
         </p:nvSpPr>
         <p:spPr>
           <a:xfrm>
-            <a:off x="986246" y="102870"/>
-            <a:ext cx="661307" cy="205740"/>
+            <a:off x="109728" y="128016"/>
+            <a:ext cx="822960" cy="256032"/>
           </a:xfrm>
           <a:prstGeom prst="rect">
             <a:avLst/>
@@ -18271,7 +18271,7 @@
               <a:buNone/>
             </a:pPr>
             <a:r>
-              <a:rPr lang="en-US" sz="720" dirty="0">
+              <a:rPr lang="en-US" sz="900" dirty="0">
                 <a:solidFill>
                   <a:srgbClr val="9FB3C8"/>
                 </a:solidFill>
@@ -18281,7 +18281,7 @@
               </a:rPr>
               <a:t>8 / 14</a:t>
             </a:r>
-            <a:endParaRPr lang="en-US" sz="720" dirty="0"/>
+            <a:endParaRPr lang="en-US" sz="900" dirty="0"/>
           </a:p>
         </p:txBody>
       </p:sp>
@@ -18293,8 +18293,8 @@
         </p:nvSpPr>
         <p:spPr>
           <a:xfrm>
-            <a:off x="1669596" y="102870"/>
-            <a:ext cx="1616529" cy="205740"/>
+            <a:off x="960120" y="128016"/>
+            <a:ext cx="2011680" cy="256032"/>
           </a:xfrm>
           <a:prstGeom prst="rect">
             <a:avLst/>
@@ -18310,7 +18310,7 @@
               <a:buNone/>
             </a:pPr>
             <a:r>
-              <a:rPr lang="en-US" sz="720" dirty="0">
+              <a:rPr lang="en-US" sz="900" dirty="0">
                 <a:solidFill>
                   <a:srgbClr val="9FB3C8"/>
                 </a:solidFill>
@@ -18320,7 +18320,7 @@
               </a:rPr>
               <a:t>Tiết 1 · 第 1 節</a:t>
             </a:r>
-            <a:endParaRPr lang="en-US" sz="720" dirty="0"/>
+            <a:endParaRPr lang="en-US" sz="900" dirty="0"/>
           </a:p>
         </p:txBody>
       </p:sp>
@@ -18343,7 +18343,7 @@
       </p:nvGrpSpPr>
       <p:grpSpPr>
         <a:xfrm>
-          <a:off x="870573" y="0"/>
+          <a:off x="0" y="0"/>
           <a:ext cx="1" cy="1"/>
           <a:chOff x="0" y="0"/>
           <a:chExt cx="0" cy="0"/>
@@ -18357,8 +18357,8 @@
         </p:nvSpPr>
         <p:spPr>
           <a:xfrm>
-            <a:off x="1277730" y="296114"/>
-            <a:ext cx="6588540" cy="222086"/>
+            <a:off x="502920" y="365760"/>
+            <a:ext cx="8138160" cy="274320"/>
           </a:xfrm>
           <a:prstGeom prst="rect">
             <a:avLst/>
@@ -18374,7 +18374,7 @@
               <a:buNone/>
             </a:pPr>
             <a:r>
-              <a:rPr lang="en-US" sz="1050" b="1" dirty="0">
+              <a:rPr lang="en-US" sz="1300" b="1" dirty="0">
                 <a:solidFill>
                   <a:srgbClr val="007F72"/>
                 </a:solidFill>
@@ -18384,7 +18384,7 @@
               </a:rPr>
               <a:t>Camera · onsemi AR0233AT ／ Raspberry Pi Camera Module 3</a:t>
             </a:r>
-            <a:endParaRPr lang="en-US" sz="1050" dirty="0"/>
+            <a:endParaRPr lang="en-US" sz="1300" dirty="0"/>
           </a:p>
         </p:txBody>
       </p:sp>
@@ -18396,8 +18396,8 @@
         </p:nvSpPr>
         <p:spPr>
           <a:xfrm>
-            <a:off x="1277730" y="547811"/>
-            <a:ext cx="6588540" cy="453922"/>
+            <a:off x="502920" y="676656"/>
+            <a:ext cx="8138160" cy="560684"/>
           </a:xfrm>
           <a:prstGeom prst="rect">
             <a:avLst/>
@@ -18416,7 +18416,7 @@
               <a:buNone/>
             </a:pPr>
             <a:r>
-              <a:rPr lang="en-US" sz="1380" b="1" dirty="0">
+              <a:rPr lang="en-US" sz="1700" b="1" dirty="0">
                 <a:solidFill>
                   <a:srgbClr val="0B1F3A"/>
                 </a:solidFill>
@@ -18426,7 +18426,7 @@
               </a:rPr>
               <a:t>Datasheet cảm biến ảnh: tìm mãi không thấy góc nhìn</a:t>
             </a:r>
-            <a:endParaRPr lang="en-US" sz="1380" dirty="0"/>
+            <a:endParaRPr lang="en-US" sz="1700" dirty="0"/>
           </a:p>
           <a:p>
             <a:pPr indent="0" marL="0">
@@ -18436,7 +18436,7 @@
               <a:buNone/>
             </a:pPr>
             <a:r>
-              <a:rPr lang="en-US" sz="1010" dirty="0">
+              <a:rPr lang="en-US" sz="1250" dirty="0">
                 <a:solidFill>
                   <a:srgbClr val="5F7183"/>
                 </a:solidFill>
@@ -18446,7 +18446,7 @@
               </a:rPr>
               <a:t>影像感測器的規格表：怎麼找都找不到視野</a:t>
             </a:r>
-            <a:endParaRPr lang="en-US" sz="1380" dirty="0"/>
+            <a:endParaRPr lang="en-US" sz="1700" dirty="0"/>
           </a:p>
         </p:txBody>
       </p:sp>
@@ -18458,8 +18458,8 @@
         </p:nvSpPr>
         <p:spPr>
           <a:xfrm>
-            <a:off x="1277730" y="1060956"/>
-            <a:ext cx="2679816" cy="1962071"/>
+            <a:off x="502920" y="1310492"/>
+            <a:ext cx="3310106" cy="2423549"/>
           </a:xfrm>
           <a:prstGeom prst="roundRect">
             <a:avLst>
@@ -18485,8 +18485,8 @@
         </p:nvSpPr>
         <p:spPr>
           <a:xfrm>
-            <a:off x="1351758" y="1134985"/>
-            <a:ext cx="2531758" cy="281261"/>
+            <a:off x="594360" y="1401932"/>
+            <a:ext cx="3127226" cy="347413"/>
           </a:xfrm>
           <a:prstGeom prst="roundRect">
             <a:avLst>
@@ -18507,8 +18507,8 @@
         </p:nvSpPr>
         <p:spPr>
           <a:xfrm>
-            <a:off x="1410981" y="1157193"/>
-            <a:ext cx="2413313" cy="251649"/>
+            <a:off x="667512" y="1429364"/>
+            <a:ext cx="2980922" cy="310837"/>
           </a:xfrm>
           <a:prstGeom prst="rect">
             <a:avLst/>
@@ -18527,7 +18527,7 @@
               <a:buNone/>
             </a:pPr>
             <a:r>
-              <a:rPr lang="en-US" sz="770" b="1" dirty="0">
+              <a:rPr lang="en-US" sz="950" b="1" dirty="0">
                 <a:solidFill>
                   <a:srgbClr val="FFFFFF"/>
                 </a:solidFill>
@@ -18537,7 +18537,7 @@
               </a:rPr>
               <a:t>Chip cảm biến ảnh · onsemi AR0233AT</a:t>
             </a:r>
-            <a:endParaRPr lang="en-US" sz="770" dirty="0"/>
+            <a:endParaRPr lang="en-US" sz="950" dirty="0"/>
           </a:p>
           <a:p>
             <a:pPr algn="ctr" indent="0" marL="0">
@@ -18547,7 +18547,7 @@
               <a:buNone/>
             </a:pPr>
             <a:r>
-              <a:rPr lang="en-US" sz="690" dirty="0">
+              <a:rPr lang="en-US" sz="850" dirty="0">
                 <a:solidFill>
                   <a:srgbClr val="FFFFFF"/>
                 </a:solidFill>
@@ -18557,7 +18557,7 @@
               </a:rPr>
               <a:t>影像感測器晶片 · onsemi AR0233AT</a:t>
             </a:r>
-            <a:endParaRPr lang="en-US" sz="770" dirty="0"/>
+            <a:endParaRPr lang="en-US" sz="950" dirty="0"/>
           </a:p>
         </p:txBody>
       </p:sp>
@@ -18577,8 +18577,8 @@
         </p:blipFill>
         <p:spPr>
           <a:xfrm>
-            <a:off x="1351758" y="1460662"/>
-            <a:ext cx="2531758" cy="1256009"/>
+            <a:off x="594360" y="1804209"/>
+            <a:ext cx="3127226" cy="1551421"/>
           </a:xfrm>
           <a:prstGeom prst="rect">
             <a:avLst/>
@@ -18593,8 +18593,8 @@
         </p:nvSpPr>
         <p:spPr>
           <a:xfrm>
-            <a:off x="1351758" y="2731477"/>
-            <a:ext cx="2531758" cy="202716"/>
+            <a:off x="594360" y="3373918"/>
+            <a:ext cx="3127226" cy="250395"/>
           </a:xfrm>
           <a:prstGeom prst="rect">
             <a:avLst/>
@@ -18610,7 +18610,7 @@
               <a:buNone/>
             </a:pPr>
             <a:r>
-              <a:rPr lang="en-US" sz="570" dirty="0">
+              <a:rPr lang="en-US" sz="700" dirty="0">
                 <a:solidFill>
                   <a:srgbClr val="5F7183"/>
                 </a:solidFill>
@@ -18620,7 +18620,7 @@
               </a:rPr>
               <a:t>onsemi AR0233AT Product Preview Rev. P2 (11/2017) · 節錄 · 讀取 2026/10/02</a:t>
             </a:r>
-            <a:endParaRPr lang="en-US" sz="570" dirty="0"/>
+            <a:endParaRPr lang="en-US" sz="700" dirty="0"/>
           </a:p>
         </p:txBody>
       </p:sp>
@@ -18632,8 +18632,8 @@
         </p:nvSpPr>
         <p:spPr>
           <a:xfrm>
-            <a:off x="4179631" y="1060956"/>
-            <a:ext cx="3686639" cy="1962071"/>
+            <a:off x="4087346" y="1310492"/>
+            <a:ext cx="4553734" cy="2423549"/>
           </a:xfrm>
           <a:prstGeom prst="roundRect">
             <a:avLst>
@@ -18659,8 +18659,8 @@
         </p:nvSpPr>
         <p:spPr>
           <a:xfrm>
-            <a:off x="4253659" y="1134985"/>
-            <a:ext cx="3538582" cy="281261"/>
+            <a:off x="4178786" y="1401932"/>
+            <a:ext cx="4370854" cy="347413"/>
           </a:xfrm>
           <a:prstGeom prst="roundRect">
             <a:avLst>
@@ -18681,8 +18681,8 @@
         </p:nvSpPr>
         <p:spPr>
           <a:xfrm>
-            <a:off x="4312882" y="1157193"/>
-            <a:ext cx="3420137" cy="251649"/>
+            <a:off x="4251938" y="1429364"/>
+            <a:ext cx="4224550" cy="310837"/>
           </a:xfrm>
           <a:prstGeom prst="rect">
             <a:avLst/>
@@ -18701,7 +18701,7 @@
               <a:buNone/>
             </a:pPr>
             <a:r>
-              <a:rPr lang="en-US" sz="770" b="1" dirty="0">
+              <a:rPr lang="en-US" sz="950" b="1" dirty="0">
                 <a:solidFill>
                   <a:srgbClr val="FFFFFF"/>
                 </a:solidFill>
@@ -18711,7 +18711,7 @@
               </a:rPr>
               <a:t>Module camera · Raspberry Pi Camera Module 3</a:t>
             </a:r>
-            <a:endParaRPr lang="en-US" sz="770" dirty="0"/>
+            <a:endParaRPr lang="en-US" sz="950" dirty="0"/>
           </a:p>
           <a:p>
             <a:pPr algn="ctr" indent="0" marL="0">
@@ -18721,7 +18721,7 @@
               <a:buNone/>
             </a:pPr>
             <a:r>
-              <a:rPr lang="en-US" sz="690" dirty="0">
+              <a:rPr lang="en-US" sz="850" dirty="0">
                 <a:solidFill>
                   <a:srgbClr val="FFFFFF"/>
                 </a:solidFill>
@@ -18731,7 +18731,7 @@
               </a:rPr>
               <a:t>相機模組 · Raspberry Pi Camera Module 3</a:t>
             </a:r>
-            <a:endParaRPr lang="en-US" sz="770" dirty="0"/>
+            <a:endParaRPr lang="en-US" sz="950" dirty="0"/>
           </a:p>
         </p:txBody>
       </p:sp>
@@ -18751,8 +18751,8 @@
         </p:blipFill>
         <p:spPr>
           <a:xfrm>
-            <a:off x="4253659" y="1460662"/>
-            <a:ext cx="3538582" cy="1256009"/>
+            <a:off x="4178786" y="1804209"/>
+            <a:ext cx="4370854" cy="1551421"/>
           </a:xfrm>
           <a:prstGeom prst="rect">
             <a:avLst/>
@@ -18767,8 +18767,8 @@
         </p:nvSpPr>
         <p:spPr>
           <a:xfrm>
-            <a:off x="4253659" y="2731477"/>
-            <a:ext cx="3538582" cy="202716"/>
+            <a:off x="4178786" y="3373918"/>
+            <a:ext cx="4370854" cy="250395"/>
           </a:xfrm>
           <a:prstGeom prst="rect">
             <a:avLst/>
@@ -18784,7 +18784,7 @@
               <a:buNone/>
             </a:pPr>
             <a:r>
-              <a:rPr lang="en-US" sz="570" dirty="0">
+              <a:rPr lang="en-US" sz="700" dirty="0">
                 <a:solidFill>
                   <a:srgbClr val="5F7183"/>
                 </a:solidFill>
@@ -18794,7 +18794,7 @@
               </a:rPr>
               <a:t>Raspberry Pi Camera Module 3 Product Brief, p.5 · 節錄 · 讀取 2026/10/02</a:t>
             </a:r>
-            <a:endParaRPr lang="en-US" sz="570" dirty="0"/>
+            <a:endParaRPr lang="en-US" sz="700" dirty="0"/>
           </a:p>
         </p:txBody>
       </p:sp>
@@ -18806,8 +18806,8 @@
         </p:nvSpPr>
         <p:spPr>
           <a:xfrm>
-            <a:off x="1277730" y="3141473"/>
-            <a:ext cx="6588540" cy="458977"/>
+            <a:off x="502920" y="3880345"/>
+            <a:ext cx="8138160" cy="566928"/>
           </a:xfrm>
           <a:prstGeom prst="roundRect">
             <a:avLst>
@@ -18833,8 +18833,8 @@
         </p:nvSpPr>
         <p:spPr>
           <a:xfrm>
-            <a:off x="1425787" y="3193293"/>
-            <a:ext cx="6292426" cy="370143"/>
+            <a:off x="685800" y="3944353"/>
+            <a:ext cx="7772400" cy="457200"/>
           </a:xfrm>
           <a:prstGeom prst="rect">
             <a:avLst/>
@@ -18853,7 +18853,7 @@
               <a:buNone/>
             </a:pPr>
             <a:r>
-              <a:rPr lang="en-US" sz="970" b="1" dirty="0">
+              <a:rPr lang="en-US" sz="1200" b="1" dirty="0">
                 <a:solidFill>
                   <a:srgbClr val="7A4E00"/>
                 </a:solidFill>
@@ -18863,7 +18863,7 @@
               </a:rPr>
               <a:t>Hai thứ ta cần nhất thì bảng bên trái không hề có. Vì sao?</a:t>
             </a:r>
-            <a:endParaRPr lang="en-US" sz="970" dirty="0"/>
+            <a:endParaRPr lang="en-US" sz="1200" dirty="0"/>
           </a:p>
           <a:p>
             <a:pPr indent="0" marL="0">
@@ -18873,7 +18873,7 @@
               <a:buNone/>
             </a:pPr>
             <a:r>
-              <a:rPr lang="en-US" sz="890" dirty="0">
+              <a:rPr lang="en-US" sz="1100" dirty="0">
                 <a:solidFill>
                   <a:srgbClr val="7A4E00"/>
                 </a:solidFill>
@@ -18883,7 +18883,7 @@
               </a:rPr>
               <a:t>我們最需要的兩個東西，左邊這張偏偏都沒有。為什麼？</a:t>
             </a:r>
-            <a:endParaRPr lang="en-US" sz="970" dirty="0"/>
+            <a:endParaRPr lang="en-US" sz="1200" dirty="0"/>
           </a:p>
         </p:txBody>
       </p:sp>
@@ -18919,8 +18919,8 @@
         </p:nvSpPr>
         <p:spPr>
           <a:xfrm>
-            <a:off x="959407" y="103640"/>
-            <a:ext cx="666257" cy="207280"/>
+            <a:off x="109728" y="128016"/>
+            <a:ext cx="822960" cy="256032"/>
           </a:xfrm>
           <a:prstGeom prst="rect">
             <a:avLst/>
@@ -18936,7 +18936,7 @@
               <a:buNone/>
             </a:pPr>
             <a:r>
-              <a:rPr lang="en-US" sz="730" dirty="0">
+              <a:rPr lang="en-US" sz="900" dirty="0">
                 <a:solidFill>
                   <a:srgbClr val="5F7183"/>
                 </a:solidFill>
@@ -18946,7 +18946,7 @@
               </a:rPr>
               <a:t>9 / 14</a:t>
             </a:r>
-            <a:endParaRPr lang="en-US" sz="730" dirty="0"/>
+            <a:endParaRPr lang="en-US" sz="900" dirty="0"/>
           </a:p>
         </p:txBody>
       </p:sp>
@@ -18958,8 +18958,8 @@
         </p:nvSpPr>
         <p:spPr>
           <a:xfrm>
-            <a:off x="1647872" y="103640"/>
-            <a:ext cx="1628628" cy="207280"/>
+            <a:off x="960120" y="128016"/>
+            <a:ext cx="2011680" cy="256032"/>
           </a:xfrm>
           <a:prstGeom prst="rect">
             <a:avLst/>
@@ -18975,7 +18975,7 @@
               <a:buNone/>
             </a:pPr>
             <a:r>
-              <a:rPr lang="en-US" sz="730" dirty="0">
+              <a:rPr lang="en-US" sz="900" dirty="0">
                 <a:solidFill>
                   <a:srgbClr val="5F7183"/>
                 </a:solidFill>
@@ -18985,7 +18985,7 @@
               </a:rPr>
               <a:t>Tiết 1 · 第 1 節</a:t>
             </a:r>
-            <a:endParaRPr lang="en-US" sz="730" dirty="0"/>
+            <a:endParaRPr lang="en-US" sz="900" dirty="0"/>
           </a:p>
         </p:txBody>
       </p:sp>

--- a/第五週(10-08)/第五週_第1節_簡報.pptx
+++ b/第五週(10-08)/第五週_第1節_簡報.pptx
@@ -1893,7 +1893,7 @@
                 <a:ea typeface="Arial Unicode MS"/>
                 <a:cs typeface="Arial Unicode MS"/>
               </a:rPr>
-              <a:t>圈規格表上「可設定」那幾個字，再現場切一次 OS1 的點數模式給他們看。
+              <a:t>圈圖裡 Lidar Operating Modes 的三行，特別圈 x 1024 與 x 2048，再現場切一次模式給他們看。
 </a:t>
             </a:r>
           </a:p>
@@ -2388,7 +2388,7 @@
                 <a:ea typeface="Arial Unicode MS"/>
                 <a:cs typeface="Arial Unicode MS"/>
               </a:rPr>
-              <a:t>同一顆光達兩個測距數字，差別在反射率。這一條第三節會直接用到。
+              <a:t>同一顆光達兩個測距：讓學生在真的 datasheet 上看到 170 與 90 後面那串小字。
 </a:t>
             </a:r>
           </a:p>
@@ -2443,7 +2443,7 @@
                 <a:ea typeface="Arial Unicode MS"/>
                 <a:cs typeface="Arial Unicode MS"/>
               </a:rPr>
-              <a:t>圈 170 公尺與 90 公尺兩個數字，中間圈出 80% 與 10% 這兩個反射率。
+              <a:t>圈圖裡兩個括號：80% Lambertian reflectivity 與 10% Lambertian reflectivity，再圈 170 m 與 90 m。
 </a:t>
             </a:r>
           </a:p>
@@ -2498,29 +2498,7 @@
                 <a:ea typeface="Arial Unicode MS"/>
                 <a:cs typeface="Arial Unicode MS"/>
               </a:rPr>
-              <a:t>回到剛剛請大家圈起來的那一行。
-</a:t>
-            </a:r>
-          </a:p>
-          <a:p>
-            <a:pPr algn="l">
-              <a:lnSpc>
-                <a:spcPct val="115000"/>
-              </a:lnSpc>
-              <a:spcAft>
-                <a:spcPts val="500"/>
-              </a:spcAft>
-            </a:pPr>
-            <a:r>
-              <a:rPr sz="1000" lang="zh-TW" dirty="0">
-                <a:solidFill>
-                  <a:srgbClr val="000000"/>
-                </a:solidFill>
-                <a:latin typeface="Arial Unicode MS"/>
-                <a:ea typeface="Arial Unicode MS"/>
-                <a:cs typeface="Arial Unicode MS"/>
-              </a:rPr>
-              <a:t>OS1 的規格表上，測距寫了</a:t>
+              <a:t>回到剛剛請大家圈起來的那一行。左邊是 OS1 規格表上真正的那兩行，測距寫了</a:t>
             </a:r>
             <a:r>
               <a:rPr sz="1000" b="1" lang="zh-TW" dirty="0">
@@ -2564,7 +2542,7 @@
                 <a:ea typeface="Arial Unicode MS"/>
                 <a:cs typeface="Arial Unicode MS"/>
               </a:rPr>
-              <a:t>第一個：170 公尺，後面跟著 </a:t>
+              <a:t>第一個 170 公尺，括號裡是 </a:t>
             </a:r>
             <a:r>
               <a:rPr sz="1000" b="1" lang="zh-TW" dirty="0">
@@ -2575,7 +2553,95 @@
                 <a:ea typeface="Arial Unicode MS"/>
                 <a:cs typeface="Arial Unicode MS"/>
               </a:rPr>
-              <a:t>80% reflectivity</a:t>
+              <a:t>80% Lambertian reflectivity</a:t>
+            </a:r>
+            <a:r>
+              <a:rPr sz="1000" lang="zh-TW" dirty="0">
+                <a:solidFill>
+                  <a:srgbClr val="000000"/>
+                </a:solidFill>
+                <a:latin typeface="Arial Unicode MS"/>
+                <a:ea typeface="Arial Unicode MS"/>
+                <a:cs typeface="Arial Unicode MS"/>
+              </a:rPr>
+              <a:t>；第二個 90 公尺，括號裡是 </a:t>
+            </a:r>
+            <a:r>
+              <a:rPr sz="1000" b="1" lang="zh-TW" dirty="0">
+                <a:solidFill>
+                  <a:srgbClr val="000000"/>
+                </a:solidFill>
+                <a:latin typeface="Arial Unicode MS"/>
+                <a:ea typeface="Arial Unicode MS"/>
+                <a:cs typeface="Arial Unicode MS"/>
+              </a:rPr>
+              <a:t>10%</a:t>
+            </a:r>
+            <a:r>
+              <a:rPr sz="1000" lang="zh-TW" dirty="0">
+                <a:solidFill>
+                  <a:srgbClr val="000000"/>
+                </a:solidFill>
+                <a:latin typeface="Arial Unicode MS"/>
+                <a:ea typeface="Arial Unicode MS"/>
+                <a:cs typeface="Arial Unicode MS"/>
+              </a:rPr>
+              <a:t>。反射率的意思是：打出去的光，有幾成彈回來。
+</a:t>
+            </a:r>
+          </a:p>
+          <a:p>
+            <a:pPr algn="l">
+              <a:lnSpc>
+                <a:spcPct val="115000"/>
+              </a:lnSpc>
+              <a:spcAft>
+                <a:spcPts val="500"/>
+              </a:spcAft>
+            </a:pPr>
+            <a:r>
+              <a:rPr sz="1000" lang="zh-TW" dirty="0">
+                <a:solidFill>
+                  <a:srgbClr val="000000"/>
+                </a:solidFill>
+                <a:latin typeface="Arial Unicode MS"/>
+                <a:ea typeface="Arial Unicode MS"/>
+                <a:cs typeface="Arial Unicode MS"/>
+              </a:rPr>
+              <a:t>百分之八十是很亮、很會反光的東西——白色的車、反光背心、標誌牌。百分之十是深色、吃光的東西——黑色的車、深色的雨衣、柏油路面。
+</a:t>
+            </a:r>
+          </a:p>
+          <a:p>
+            <a:pPr algn="l">
+              <a:lnSpc>
+                <a:spcPct val="115000"/>
+              </a:lnSpc>
+              <a:spcAft>
+                <a:spcPts val="500"/>
+              </a:spcAft>
+            </a:pPr>
+            <a:r>
+              <a:rPr sz="1000" lang="zh-TW" dirty="0">
+                <a:solidFill>
+                  <a:srgbClr val="000000"/>
+                </a:solidFill>
+                <a:latin typeface="Arial Unicode MS"/>
+                <a:ea typeface="Arial Unicode MS"/>
+                <a:cs typeface="Arial Unicode MS"/>
+              </a:rPr>
+              <a:t>所以同一顆光達，看白色的車看得到一百七十公尺，看黑色的車只剩九十公尺，</a:t>
+            </a:r>
+            <a:r>
+              <a:rPr sz="1000" b="1" lang="zh-TW" dirty="0">
+                <a:solidFill>
+                  <a:srgbClr val="000000"/>
+                </a:solidFill>
+                <a:latin typeface="Arial Unicode MS"/>
+                <a:ea typeface="Arial Unicode MS"/>
+                <a:cs typeface="Arial Unicode MS"/>
+              </a:rPr>
+              <a:t>差了將近一倍</a:t>
             </a:r>
             <a:r>
               <a:rPr sz="1000" lang="zh-TW" dirty="0">
@@ -2608,7 +2674,29 @@
                 <a:ea typeface="Arial Unicode MS"/>
                 <a:cs typeface="Arial Unicode MS"/>
               </a:rPr>
-              <a:t>第二個：90 公尺，後面跟著 </a:t>
+              <a:t>現在想一件事：廠商在網站上、在型錄封面上，會寫哪一個數字？當然是一百七十。哪一家廣告會寫自己比較差的那個？
+</a:t>
+            </a:r>
+          </a:p>
+          <a:p>
+            <a:pPr algn="l">
+              <a:lnSpc>
+                <a:spcPct val="115000"/>
+              </a:lnSpc>
+              <a:spcAft>
+                <a:spcPts val="500"/>
+              </a:spcAft>
+            </a:pPr>
+            <a:r>
+              <a:rPr sz="1000" lang="zh-TW" dirty="0">
+                <a:solidFill>
+                  <a:srgbClr val="000000"/>
+                </a:solidFill>
+                <a:latin typeface="Arial Unicode MS"/>
+                <a:ea typeface="Arial Unicode MS"/>
+                <a:cs typeface="Arial Unicode MS"/>
+              </a:rPr>
+              <a:t>可是身為工程師，</a:t>
             </a:r>
             <a:r>
               <a:rPr sz="1000" b="1" lang="zh-TW" dirty="0">
@@ -2619,18 +2707,18 @@
                 <a:ea typeface="Arial Unicode MS"/>
                 <a:cs typeface="Arial Unicode MS"/>
               </a:rPr>
-              <a:t>10% reflectivity</a:t>
-            </a:r>
-            <a:r>
-              <a:rPr sz="1000" lang="zh-TW" dirty="0">
-                <a:solidFill>
-                  <a:srgbClr val="000000"/>
-                </a:solidFill>
-                <a:latin typeface="Arial Unicode MS"/>
-                <a:ea typeface="Arial Unicode MS"/>
-                <a:cs typeface="Arial Unicode MS"/>
-              </a:rPr>
-              <a:t>。
+              <a:t>你要拿來設計的是九十</a:t>
+            </a:r>
+            <a:r>
+              <a:rPr sz="1000" lang="zh-TW" dirty="0">
+                <a:solidFill>
+                  <a:srgbClr val="000000"/>
+                </a:solidFill>
+                <a:latin typeface="Arial Unicode MS"/>
+                <a:ea typeface="Arial Unicode MS"/>
+                <a:cs typeface="Arial Unicode MS"/>
+              </a:rPr>
+              <a:t>。路上一定會有黑色的車、穿深色雨衣的騎士，你不能假設全世界的東西都是白的。
 </a:t>
             </a:r>
           </a:p>
@@ -2652,85 +2740,8 @@
                 <a:ea typeface="Arial Unicode MS"/>
                 <a:cs typeface="Arial Unicode MS"/>
               </a:rPr>
-              <a:t>反射率的意思是：打出去的光，有幾成彈回來。
-</a:t>
-            </a:r>
-          </a:p>
-          <a:p>
-            <a:pPr algn="l">
-              <a:lnSpc>
-                <a:spcPct val="115000"/>
-              </a:lnSpc>
-              <a:spcAft>
-                <a:spcPts val="500"/>
-              </a:spcAft>
-            </a:pPr>
-            <a:r>
-              <a:rPr sz="1000" lang="zh-TW" dirty="0">
-                <a:solidFill>
-                  <a:srgbClr val="000000"/>
-                </a:solidFill>
-                <a:latin typeface="Arial Unicode MS"/>
-                <a:ea typeface="Arial Unicode MS"/>
-                <a:cs typeface="Arial Unicode MS"/>
-              </a:rPr>
-              <a:t>百分之八十，是很亮、很會反光的東西——白色的車、反光背心、路上的標誌牌。
-</a:t>
-            </a:r>
-          </a:p>
-          <a:p>
-            <a:pPr algn="l">
-              <a:lnSpc>
-                <a:spcPct val="115000"/>
-              </a:lnSpc>
-              <a:spcAft>
-                <a:spcPts val="500"/>
-              </a:spcAft>
-            </a:pPr>
-            <a:r>
-              <a:rPr sz="1000" lang="zh-TW" dirty="0">
-                <a:solidFill>
-                  <a:srgbClr val="000000"/>
-                </a:solidFill>
-                <a:latin typeface="Arial Unicode MS"/>
-                <a:ea typeface="Arial Unicode MS"/>
-                <a:cs typeface="Arial Unicode MS"/>
-              </a:rPr>
-              <a:t>百分之十，是深色、吃光的東西——黑色的車、深色的雨衣、柏油路面。
-</a:t>
-            </a:r>
-          </a:p>
-          <a:p>
-            <a:pPr algn="l">
-              <a:lnSpc>
-                <a:spcPct val="115000"/>
-              </a:lnSpc>
-              <a:spcAft>
-                <a:spcPts val="500"/>
-              </a:spcAft>
-            </a:pPr>
-            <a:r>
-              <a:rPr sz="1000" lang="zh-TW" dirty="0">
-                <a:solidFill>
-                  <a:srgbClr val="000000"/>
-                </a:solidFill>
-                <a:latin typeface="Arial Unicode MS"/>
-                <a:ea typeface="Arial Unicode MS"/>
-                <a:cs typeface="Arial Unicode MS"/>
-              </a:rPr>
-              <a:t>所以同一顆光達，看白色的車看得到一百七十公尺，看黑色的車只剩九十公尺。
-</a:t>
-            </a:r>
-          </a:p>
-          <a:p>
-            <a:pPr algn="l">
-              <a:lnSpc>
-                <a:spcPct val="115000"/>
-              </a:lnSpc>
-              <a:spcAft>
-                <a:spcPts val="500"/>
-              </a:spcAft>
-            </a:pPr>
+              <a:t>以後看到規格表寫「測距 200 公尺」，第一句話要問：</a:t>
+            </a:r>
             <a:r>
               <a:rPr sz="1000" b="1" lang="zh-TW" dirty="0">
                 <a:solidFill>
@@ -2740,194 +2751,18 @@
                 <a:ea typeface="Arial Unicode MS"/>
                 <a:cs typeface="Arial Unicode MS"/>
               </a:rPr>
-              <a:t>差了將近一倍。</a:t>
-            </a:r>
-            <a:r>
-              <a:rPr sz="1000" lang="zh-TW" dirty="0">
-                <a:solidFill>
-                  <a:srgbClr val="000000"/>
-                </a:solidFill>
-                <a:latin typeface="Arial Unicode MS"/>
-                <a:ea typeface="Arial Unicode MS"/>
-                <a:cs typeface="Arial Unicode MS"/>
-              </a:rPr>
-              <a:t>
-</a:t>
-            </a:r>
-          </a:p>
-          <a:p>
-            <a:pPr algn="l">
-              <a:lnSpc>
-                <a:spcPct val="115000"/>
-              </a:lnSpc>
-              <a:spcAft>
-                <a:spcPts val="500"/>
-              </a:spcAft>
-            </a:pPr>
-            <a:r>
-              <a:rPr sz="1000" lang="zh-TW" dirty="0">
-                <a:solidFill>
-                  <a:srgbClr val="000000"/>
-                </a:solidFill>
-                <a:latin typeface="Arial Unicode MS"/>
-                <a:ea typeface="Arial Unicode MS"/>
-                <a:cs typeface="Arial Unicode MS"/>
-              </a:rPr>
-              <a:t>現在請大家想一件事：廠商在網站上、在型錄封面上，會寫哪一個數字？
-</a:t>
-            </a:r>
-          </a:p>
-          <a:p>
-            <a:pPr algn="l">
-              <a:lnSpc>
-                <a:spcPct val="115000"/>
-              </a:lnSpc>
-              <a:spcAft>
-                <a:spcPts val="500"/>
-              </a:spcAft>
-            </a:pPr>
-            <a:r>
-              <a:rPr sz="1000" lang="zh-TW" dirty="0">
-                <a:solidFill>
-                  <a:srgbClr val="000000"/>
-                </a:solidFill>
-                <a:latin typeface="Arial Unicode MS"/>
-                <a:ea typeface="Arial Unicode MS"/>
-                <a:cs typeface="Arial Unicode MS"/>
-              </a:rPr>
-              <a:t>當然是一百七十。哪一家廣告會寫自己比較差的那個數字？
-</a:t>
-            </a:r>
-          </a:p>
-          <a:p>
-            <a:pPr algn="l">
-              <a:lnSpc>
-                <a:spcPct val="115000"/>
-              </a:lnSpc>
-              <a:spcAft>
-                <a:spcPts val="500"/>
-              </a:spcAft>
-            </a:pPr>
-            <a:r>
-              <a:rPr sz="1000" lang="zh-TW" dirty="0">
-                <a:solidFill>
-                  <a:srgbClr val="000000"/>
-                </a:solidFill>
-                <a:latin typeface="Arial Unicode MS"/>
-                <a:ea typeface="Arial Unicode MS"/>
-                <a:cs typeface="Arial Unicode MS"/>
-              </a:rPr>
-              <a:t>可是身為工程師，</a:t>
-            </a:r>
-            <a:r>
-              <a:rPr sz="1000" b="1" lang="zh-TW" dirty="0">
-                <a:solidFill>
-                  <a:srgbClr val="000000"/>
-                </a:solidFill>
-                <a:latin typeface="Arial Unicode MS"/>
-                <a:ea typeface="Arial Unicode MS"/>
-                <a:cs typeface="Arial Unicode MS"/>
-              </a:rPr>
-              <a:t>你要用來設計的是九十</a:t>
-            </a:r>
-            <a:r>
-              <a:rPr sz="1000" lang="zh-TW" dirty="0">
-                <a:solidFill>
-                  <a:srgbClr val="000000"/>
-                </a:solidFill>
-                <a:latin typeface="Arial Unicode MS"/>
-                <a:ea typeface="Arial Unicode MS"/>
-                <a:cs typeface="Arial Unicode MS"/>
-              </a:rPr>
-              <a:t>。因為路上一定會有黑色的車、穿深色雨衣的機車騎士。你不能假設全世界的東西都是白的。
-</a:t>
-            </a:r>
-          </a:p>
-          <a:p>
-            <a:pPr algn="l">
-              <a:lnSpc>
-                <a:spcPct val="115000"/>
-              </a:lnSpc>
-              <a:spcAft>
-                <a:spcPts val="500"/>
-              </a:spcAft>
-            </a:pPr>
-            <a:r>
-              <a:rPr sz="1000" lang="zh-TW" dirty="0">
-                <a:solidFill>
-                  <a:srgbClr val="000000"/>
-                </a:solidFill>
-                <a:latin typeface="Arial Unicode MS"/>
-                <a:ea typeface="Arial Unicode MS"/>
-                <a:cs typeface="Arial Unicode MS"/>
-              </a:rPr>
-              <a:t>所以以後看到規格表上寫「測距 200 公尺」，第一句話要問：</a:t>
-            </a:r>
-            <a:r>
-              <a:rPr sz="1000" b="1" lang="zh-TW" dirty="0">
-                <a:solidFill>
-                  <a:srgbClr val="000000"/>
-                </a:solidFill>
-                <a:latin typeface="Arial Unicode MS"/>
-                <a:ea typeface="Arial Unicode MS"/>
-                <a:cs typeface="Arial Unicode MS"/>
-              </a:rPr>
-              <a:t>那是對什麼顏色量的？</a:t>
-            </a:r>
-            <a:r>
-              <a:rPr sz="1000" lang="zh-TW" dirty="0">
-                <a:solidFill>
-                  <a:srgbClr val="000000"/>
-                </a:solidFill>
-                <a:latin typeface="Arial Unicode MS"/>
-                <a:ea typeface="Arial Unicode MS"/>
-                <a:cs typeface="Arial Unicode MS"/>
-              </a:rPr>
-              <a:t>如果他沒寫，那就是一個警訊。
-</a:t>
-            </a:r>
-          </a:p>
-          <a:p>
-            <a:pPr algn="l">
-              <a:lnSpc>
-                <a:spcPct val="115000"/>
-              </a:lnSpc>
-              <a:spcAft>
-                <a:spcPts val="500"/>
-              </a:spcAft>
-            </a:pPr>
-            <a:r>
-              <a:rPr sz="1000" lang="zh-TW" dirty="0">
-                <a:solidFill>
-                  <a:srgbClr val="000000"/>
-                </a:solidFill>
-                <a:latin typeface="Arial Unicode MS"/>
-                <a:ea typeface="Arial Unicode MS"/>
-                <a:cs typeface="Arial Unicode MS"/>
-              </a:rPr>
-              <a:t>好的規格表會把兩個都寫出來，像 OS1 這樣。這其實是一家廠商誠不誠實的指標。
-</a:t>
-            </a:r>
-          </a:p>
-          <a:p>
-            <a:pPr algn="l">
-              <a:lnSpc>
-                <a:spcPct val="115000"/>
-              </a:lnSpc>
-              <a:spcAft>
-                <a:spcPts val="500"/>
-              </a:spcAft>
-            </a:pPr>
-            <a:r>
-              <a:rPr sz="1000" lang="zh-TW" dirty="0">
-                <a:solidFill>
-                  <a:srgbClr val="000000"/>
-                </a:solidFill>
-                <a:latin typeface="Arial Unicode MS"/>
-                <a:ea typeface="Arial Unicode MS"/>
-                <a:cs typeface="Arial Unicode MS"/>
-              </a:rPr>
-              <a:t>右邊工具的第三個小工具就在講這件事，各位可以自己看一下。</a:t>
+              <a:t>那是對什麼反射率量的？</a:t>
+            </a:r>
+            <a:r>
+              <a:rPr sz="1000" lang="zh-TW" dirty="0">
+                <a:solidFill>
+                  <a:srgbClr val="000000"/>
+                </a:solidFill>
+                <a:latin typeface="Arial Unicode MS"/>
+                <a:ea typeface="Arial Unicode MS"/>
+                <a:cs typeface="Arial Unicode MS"/>
+              </a:rPr>
+              <a:t>沒寫就是警訊。好的規格表會把兩個都寫出來，像 OS1 這樣——這其實是一家廠商誠不誠實的指標。</a:t>
             </a:r>
           </a:p>
         </p:txBody>
@@ -3345,7 +3180,7 @@
                 <a:ea typeface="Arial Unicode MS"/>
                 <a:cs typeface="Arial Unicode MS"/>
               </a:rPr>
-              <a:t>第三，OS1 做完換 AT128 再做一次。</a:t>
+              <a:t>第三，OS1 做完換 AT128P 再做一次。</a:t>
             </a:r>
             <a:r>
               <a:rPr sz="1000" lang="zh-TW" dirty="0">
@@ -4742,7 +4577,7 @@
                 <a:ea typeface="Arial Unicode MS"/>
                 <a:cs typeface="Arial Unicode MS"/>
               </a:rPr>
-              <a:t>圈規格表上的線束數、視野、角解析度三行——那就是上週的三個滑桿。
+              <a:t>在左邊真表上圈三行：Vertical Resolution、Field of View、Range（10%）。每圈一行停一下，對到右邊那個滑桿。
 </a:t>
             </a:r>
           </a:p>
@@ -5226,7 +5061,7 @@
                 <a:ea typeface="Arial Unicode MS"/>
                 <a:cs typeface="Arial Unicode MS"/>
               </a:rPr>
-              <a:t>第二個真型號 AT128。同樣是光達，但把點集中在前方 120 度。
+              <a:t>第二個真型號 AT128P。同樣是光達，但把點集中在前方 120 度。
 </a:t>
             </a:r>
           </a:p>
@@ -5281,7 +5116,7 @@
                 <a:ea typeface="Arial Unicode MS"/>
                 <a:cs typeface="Arial Unicode MS"/>
               </a:rPr>
-              <a:t>圈視野那一行的 120°，再回頭指上一張 OS1 的 360°，兩個數字對著看。
+              <a:t>圈左表 Horizontal FOV 的 120°，再翻回上一張圈 OS1 的 360°，兩個數字對著看。
 </a:t>
             </a:r>
           </a:p>
@@ -5336,7 +5171,7 @@
                 <a:ea typeface="Arial Unicode MS"/>
                 <a:cs typeface="Arial Unicode MS"/>
               </a:rPr>
-              <a:t>第二個型號，Hesai AT128。這是一顆</a:t>
+              <a:t>第二個型號，Hesai AT128P。這是一顆</a:t>
             </a:r>
             <a:r>
               <a:rPr sz="1000" b="1" lang="zh-TW" dirty="0">
@@ -5578,7 +5413,7 @@
                 <a:ea typeface="Arial Unicode MS"/>
                 <a:cs typeface="Arial Unicode MS"/>
               </a:rPr>
-              <a:t>，AT128 把同樣多的點集中在</a:t>
+              <a:t>，AT128P 把同樣多的點集中在</a:t>
             </a:r>
             <a:r>
               <a:rPr sz="1000" b="1" lang="zh-TW" dirty="0">
@@ -6018,7 +5853,7 @@
                 <a:ea typeface="Arial Unicode MS"/>
                 <a:cs typeface="Arial Unicode MS"/>
               </a:rPr>
-              <a:t>。AT128 直接寫 0.1 度。所以左右方向，AT128 密了三倍多。
+              <a:t>。AT128P 直接寫 0.1 度。所以左右方向，AT128P 密了三倍多。
 </a:t>
             </a:r>
           </a:p>
@@ -6073,7 +5908,7 @@
                 <a:ea typeface="Arial Unicode MS"/>
                 <a:cs typeface="Arial Unicode MS"/>
               </a:rPr>
-              <a:t>同樣一個人站在四十公尺，OS1 身上有九個點，AT128 有一百二十一個點。</a:t>
+              <a:t>同樣一個人站在四十公尺，OS1 身上有九個點，AT128P 有一百二十一個點。</a:t>
             </a:r>
             <a:r>
               <a:rPr sz="1000" lang="zh-TW" dirty="0">
@@ -6381,7 +6216,7 @@
                 <a:ea typeface="Arial Unicode MS"/>
                 <a:cs typeface="Arial Unicode MS"/>
               </a:rPr>
-              <a:t>圈主標的「一秒鐘看幾次」，再圈下方換算出來的移動距離。
+              <a:t>圈圖裡 Rotation Rate 那一行的 10 or 20 Hz，再圈上面換算出來的 100 毫秒與 1.1 公尺。
 </a:t>
             </a:r>
           </a:p>
@@ -9007,22 +8842,146 @@
       </p:sp>
       <p:sp>
         <p:nvSpPr>
-          <p:cNvPr id="3" name="Shape 1"/>
+          <p:cNvPr id="3" name="Text 1"/>
+          <p:cNvSpPr txBox="1"/>
+          <p:nvPr/>
+        </p:nvSpPr>
+        <p:spPr>
+          <a:xfrm>
+            <a:off x="502920" y="1033416"/>
+            <a:ext cx="8138160" cy="853249"/>
+          </a:xfrm>
+          <a:prstGeom prst="rect">
+            <a:avLst/>
+          </a:prstGeom>
+          <a:noFill/>
+          <a:ln/>
+        </p:spPr>
+        <p:txBody>
+          <a:bodyPr wrap="square" lIns="0" tIns="0" rIns="0" bIns="0" rtlCol="0" anchor="t"/>
+          <a:lstStyle/>
+          <a:p>
+            <a:pPr indent="0" marL="0">
+              <a:lnSpc>
+                <a:spcPct val="120000"/>
+              </a:lnSpc>
+              <a:buNone/>
+            </a:pPr>
+            <a:r>
+              <a:rPr lang="en-US" sz="1900" b="1" dirty="0">
+                <a:solidFill>
+                  <a:srgbClr val="0B1F3A"/>
+                </a:solidFill>
+                <a:latin typeface="Arial" pitchFamily="34" charset="0"/>
+                <a:ea typeface="Arial" pitchFamily="34" charset="-122"/>
+                <a:cs typeface="Arial" pitchFamily="34" charset="-120"/>
+              </a:rPr>
+              <a:t>Có dòng ghi «configurable»: đó là chế độ, không phải con số cố định</a:t>
+            </a:r>
+            <a:endParaRPr lang="en-US" sz="1900" dirty="0"/>
+          </a:p>
+          <a:p>
+            <a:pPr indent="0" marL="0">
+              <a:lnSpc>
+                <a:spcPct val="120000"/>
+              </a:lnSpc>
+              <a:buNone/>
+            </a:pPr>
+            <a:r>
+              <a:rPr lang="en-US" sz="1200" dirty="0">
+                <a:solidFill>
+                  <a:srgbClr val="007F72"/>
+                </a:solidFill>
+                <a:latin typeface="微軟正黑體" pitchFamily="34" charset="0"/>
+                <a:ea typeface="微軟正黑體" pitchFamily="34" charset="-122"/>
+                <a:cs typeface="微軟正黑體" pitchFamily="34" charset="-120"/>
+              </a:rPr>
+              <a:t>有些行寫著「可設定」：那是模式，不是固定的數字</a:t>
+            </a:r>
+            <a:endParaRPr lang="en-US" sz="1900" dirty="0"/>
+          </a:p>
+        </p:txBody>
+      </p:sp>
+      <p:sp>
+        <p:nvSpPr>
+          <p:cNvPr id="4" name="Text 2"/>
+          <p:cNvSpPr txBox="1"/>
+          <p:nvPr/>
+        </p:nvSpPr>
+        <p:spPr>
+          <a:xfrm>
+            <a:off x="502920" y="1978106"/>
+            <a:ext cx="8138160" cy="481486"/>
+          </a:xfrm>
+          <a:prstGeom prst="rect">
+            <a:avLst/>
+          </a:prstGeom>
+          <a:noFill/>
+          <a:ln/>
+        </p:spPr>
+        <p:txBody>
+          <a:bodyPr wrap="square" lIns="0" tIns="0" rIns="0" bIns="0" rtlCol="0" anchor="t"/>
+          <a:lstStyle/>
+          <a:p>
+            <a:pPr indent="0" marL="0">
+              <a:lnSpc>
+                <a:spcPct val="128000"/>
+              </a:lnSpc>
+              <a:buNone/>
+            </a:pPr>
+            <a:r>
+              <a:rPr lang="en-US" sz="1250" dirty="0">
+                <a:solidFill>
+                  <a:srgbClr val="5F7183"/>
+                </a:solidFill>
+                <a:latin typeface="Arial" pitchFamily="34" charset="0"/>
+                <a:ea typeface="Arial" pitchFamily="34" charset="-122"/>
+                <a:cs typeface="Arial" pitchFamily="34" charset="-120"/>
+              </a:rPr>
+              <a:t>Cùng một con lidar, đổi chế độ thì số điểm trên người ở 40 m khác hẳn.</a:t>
+            </a:r>
+            <a:endParaRPr lang="en-US" sz="1250" dirty="0"/>
+          </a:p>
+          <a:p>
+            <a:pPr indent="0" marL="0">
+              <a:lnSpc>
+                <a:spcPct val="128000"/>
+              </a:lnSpc>
+              <a:buNone/>
+            </a:pPr>
+            <a:r>
+              <a:rPr lang="en-US" sz="1150" dirty="0">
+                <a:solidFill>
+                  <a:srgbClr val="5F7183"/>
+                </a:solidFill>
+                <a:latin typeface="微軟正黑體" pitchFamily="34" charset="0"/>
+                <a:ea typeface="微軟正黑體" pitchFamily="34" charset="-122"/>
+                <a:cs typeface="微軟正黑體" pitchFamily="34" charset="-120"/>
+              </a:rPr>
+              <a:t>同一顆光達，換一個模式，四十公尺行人身上的點數就整個不一樣。</a:t>
+            </a:r>
+            <a:endParaRPr lang="en-US" sz="1250" dirty="0"/>
+          </a:p>
+        </p:txBody>
+      </p:sp>
+      <p:sp>
+        <p:nvSpPr>
+          <p:cNvPr id="5" name="Shape 3"/>
           <p:cNvSpPr/>
           <p:nvPr/>
         </p:nvSpPr>
         <p:spPr>
           <a:xfrm>
-            <a:off x="502920" y="1101852"/>
-            <a:ext cx="2468880" cy="2514600"/>
+            <a:off x="502920" y="2615184"/>
+            <a:ext cx="8138160" cy="1261872"/>
           </a:xfrm>
           <a:prstGeom prst="roundRect">
             <a:avLst>
-              <a:gd name="adj" fmla="val 4444"/>
+              <a:gd name="adj" fmla="val 6522"/>
             </a:avLst>
           </a:prstGeom>
           <a:solidFill>
-            <a:srgbClr val="F4F7FA"/>
+            <a:srgbClr val="FFFFFF"/>
           </a:solidFill>
           <a:ln w="12700">
             <a:solidFill>
@@ -9032,463 +8991,72 @@
           </a:ln>
         </p:spPr>
       </p:sp>
-      <p:sp>
-        <p:nvSpPr>
-          <p:cNvPr id="4" name="Shape 2"/>
-          <p:cNvSpPr/>
-          <p:nvPr/>
-        </p:nvSpPr>
-        <p:spPr>
-          <a:xfrm>
-            <a:off x="940735" y="1821430"/>
-            <a:ext cx="1593251" cy="97768"/>
-          </a:xfrm>
-          <a:prstGeom prst="roundRect">
-            <a:avLst>
-              <a:gd name="adj" fmla="val 50000"/>
-            </a:avLst>
-          </a:prstGeom>
-          <a:solidFill>
-            <a:srgbClr val="D5DEE6"/>
-          </a:solidFill>
-          <a:ln/>
-        </p:spPr>
-      </p:sp>
-      <p:sp>
-        <p:nvSpPr>
-          <p:cNvPr id="5" name="Shape 3"/>
-          <p:cNvSpPr/>
-          <p:nvPr/>
-        </p:nvSpPr>
-        <p:spPr>
-          <a:xfrm>
-            <a:off x="1192725" y="1803654"/>
-            <a:ext cx="133320" cy="133320"/>
-          </a:xfrm>
-          <a:prstGeom prst="ellipse">
-            <a:avLst/>
-          </a:prstGeom>
-          <a:solidFill>
-            <a:srgbClr val="1F6F5C"/>
-          </a:solidFill>
-          <a:ln/>
-        </p:spPr>
-      </p:sp>
-      <p:sp>
-        <p:nvSpPr>
-          <p:cNvPr id="6" name="Shape 4"/>
-          <p:cNvSpPr/>
-          <p:nvPr/>
-        </p:nvSpPr>
-        <p:spPr>
-          <a:xfrm>
-            <a:off x="1447645" y="1803654"/>
-            <a:ext cx="133320" cy="133320"/>
-          </a:xfrm>
-          <a:prstGeom prst="ellipse">
-            <a:avLst/>
-          </a:prstGeom>
-          <a:solidFill>
-            <a:srgbClr val="1F6F5C"/>
-          </a:solidFill>
-          <a:ln/>
-        </p:spPr>
-      </p:sp>
-      <p:sp>
-        <p:nvSpPr>
-          <p:cNvPr id="7" name="Shape 5"/>
-          <p:cNvSpPr/>
-          <p:nvPr/>
-        </p:nvSpPr>
-        <p:spPr>
-          <a:xfrm>
-            <a:off x="1702565" y="1803654"/>
-            <a:ext cx="133320" cy="133320"/>
-          </a:xfrm>
-          <a:prstGeom prst="ellipse">
-            <a:avLst/>
-          </a:prstGeom>
-          <a:solidFill>
-            <a:srgbClr val="1F6F5C"/>
-          </a:solidFill>
-          <a:ln/>
-        </p:spPr>
-      </p:sp>
-      <p:sp>
-        <p:nvSpPr>
-          <p:cNvPr id="8" name="Shape 6"/>
-          <p:cNvSpPr/>
-          <p:nvPr/>
-        </p:nvSpPr>
-        <p:spPr>
-          <a:xfrm>
-            <a:off x="1957485" y="1803654"/>
-            <a:ext cx="133320" cy="133320"/>
-          </a:xfrm>
-          <a:prstGeom prst="ellipse">
-            <a:avLst/>
-          </a:prstGeom>
-          <a:solidFill>
-            <a:srgbClr val="1F6F5C"/>
-          </a:solidFill>
-          <a:ln/>
-        </p:spPr>
-      </p:sp>
-      <p:sp>
-        <p:nvSpPr>
-          <p:cNvPr id="9" name="Shape 7"/>
-          <p:cNvSpPr/>
-          <p:nvPr/>
-        </p:nvSpPr>
-        <p:spPr>
-          <a:xfrm>
-            <a:off x="940735" y="2310268"/>
-            <a:ext cx="1593251" cy="97768"/>
-          </a:xfrm>
-          <a:prstGeom prst="roundRect">
-            <a:avLst>
-              <a:gd name="adj" fmla="val 50000"/>
-            </a:avLst>
-          </a:prstGeom>
-          <a:solidFill>
-            <a:srgbClr val="D5DEE6"/>
-          </a:solidFill>
-          <a:ln/>
-        </p:spPr>
-      </p:sp>
-      <p:sp>
-        <p:nvSpPr>
-          <p:cNvPr id="10" name="Shape 8"/>
-          <p:cNvSpPr/>
-          <p:nvPr/>
-        </p:nvSpPr>
-        <p:spPr>
-          <a:xfrm>
-            <a:off x="1192725" y="2292492"/>
-            <a:ext cx="133320" cy="133320"/>
-          </a:xfrm>
-          <a:prstGeom prst="ellipse">
-            <a:avLst/>
-          </a:prstGeom>
-          <a:solidFill>
-            <a:srgbClr val="1F6F5C"/>
-          </a:solidFill>
-          <a:ln/>
-        </p:spPr>
-      </p:sp>
-      <p:sp>
-        <p:nvSpPr>
-          <p:cNvPr id="11" name="Shape 9"/>
-          <p:cNvSpPr/>
-          <p:nvPr/>
-        </p:nvSpPr>
-        <p:spPr>
-          <a:xfrm>
-            <a:off x="1447645" y="2292492"/>
-            <a:ext cx="133320" cy="133320"/>
-          </a:xfrm>
-          <a:prstGeom prst="ellipse">
-            <a:avLst/>
-          </a:prstGeom>
-          <a:solidFill>
-            <a:srgbClr val="1F6F5C"/>
-          </a:solidFill>
-          <a:ln/>
-        </p:spPr>
-      </p:sp>
-      <p:sp>
-        <p:nvSpPr>
-          <p:cNvPr id="12" name="Shape 10"/>
-          <p:cNvSpPr/>
-          <p:nvPr/>
-        </p:nvSpPr>
-        <p:spPr>
-          <a:xfrm>
-            <a:off x="1702565" y="2292492"/>
-            <a:ext cx="133320" cy="133320"/>
-          </a:xfrm>
-          <a:prstGeom prst="ellipse">
-            <a:avLst/>
-          </a:prstGeom>
-          <a:solidFill>
-            <a:srgbClr val="1F6F5C"/>
-          </a:solidFill>
-          <a:ln/>
-        </p:spPr>
-      </p:sp>
-      <p:sp>
-        <p:nvSpPr>
-          <p:cNvPr id="13" name="Shape 11"/>
-          <p:cNvSpPr/>
-          <p:nvPr/>
-        </p:nvSpPr>
-        <p:spPr>
-          <a:xfrm>
-            <a:off x="1957485" y="2292492"/>
-            <a:ext cx="133320" cy="133320"/>
-          </a:xfrm>
-          <a:prstGeom prst="ellipse">
-            <a:avLst/>
-          </a:prstGeom>
-          <a:solidFill>
-            <a:srgbClr val="D9463E"/>
-          </a:solidFill>
-          <a:ln/>
-        </p:spPr>
-      </p:sp>
-      <p:sp>
-        <p:nvSpPr>
-          <p:cNvPr id="14" name="Shape 12"/>
-          <p:cNvSpPr/>
-          <p:nvPr/>
-        </p:nvSpPr>
-        <p:spPr>
-          <a:xfrm>
-            <a:off x="2119740" y="2359152"/>
-            <a:ext cx="286785" cy="1"/>
-          </a:xfrm>
-          <a:prstGeom prst="line">
-            <a:avLst/>
-          </a:prstGeom>
-          <a:noFill/>
-          <a:ln w="20320">
-            <a:solidFill>
-              <a:srgbClr val="D9463E"/>
-            </a:solidFill>
-            <a:prstDash val="solid"/>
-            <a:tailEnd type="triangle"/>
-          </a:ln>
-        </p:spPr>
-      </p:sp>
-      <p:sp>
-        <p:nvSpPr>
-          <p:cNvPr id="15" name="Shape 13"/>
-          <p:cNvSpPr/>
-          <p:nvPr/>
-        </p:nvSpPr>
-        <p:spPr>
-          <a:xfrm>
-            <a:off x="940735" y="2799106"/>
-            <a:ext cx="1593251" cy="97768"/>
-          </a:xfrm>
-          <a:prstGeom prst="roundRect">
-            <a:avLst>
-              <a:gd name="adj" fmla="val 50000"/>
-            </a:avLst>
-          </a:prstGeom>
-          <a:solidFill>
-            <a:srgbClr val="D5DEE6"/>
-          </a:solidFill>
-          <a:ln/>
-        </p:spPr>
-      </p:sp>
-      <p:sp>
-        <p:nvSpPr>
-          <p:cNvPr id="16" name="Shape 14"/>
-          <p:cNvSpPr/>
-          <p:nvPr/>
-        </p:nvSpPr>
-        <p:spPr>
-          <a:xfrm>
-            <a:off x="1192725" y="2781330"/>
-            <a:ext cx="133320" cy="133320"/>
-          </a:xfrm>
-          <a:prstGeom prst="ellipse">
-            <a:avLst/>
-          </a:prstGeom>
-          <a:solidFill>
-            <a:srgbClr val="1F6F5C"/>
-          </a:solidFill>
-          <a:ln/>
-        </p:spPr>
-      </p:sp>
-      <p:sp>
-        <p:nvSpPr>
-          <p:cNvPr id="17" name="Shape 15"/>
-          <p:cNvSpPr/>
-          <p:nvPr/>
-        </p:nvSpPr>
-        <p:spPr>
-          <a:xfrm>
-            <a:off x="1447645" y="2781330"/>
-            <a:ext cx="133320" cy="133320"/>
-          </a:xfrm>
-          <a:prstGeom prst="ellipse">
-            <a:avLst/>
-          </a:prstGeom>
-          <a:solidFill>
-            <a:srgbClr val="1F6F5C"/>
-          </a:solidFill>
-          <a:ln/>
-        </p:spPr>
-      </p:sp>
-      <p:sp>
-        <p:nvSpPr>
-          <p:cNvPr id="18" name="Shape 16"/>
-          <p:cNvSpPr/>
-          <p:nvPr/>
-        </p:nvSpPr>
-        <p:spPr>
-          <a:xfrm>
-            <a:off x="1702565" y="2781330"/>
-            <a:ext cx="133320" cy="133320"/>
-          </a:xfrm>
-          <a:prstGeom prst="ellipse">
-            <a:avLst/>
-          </a:prstGeom>
-          <a:solidFill>
-            <a:srgbClr val="1F6F5C"/>
-          </a:solidFill>
-          <a:ln/>
-        </p:spPr>
-      </p:sp>
-      <p:sp>
-        <p:nvSpPr>
-          <p:cNvPr id="19" name="Shape 17"/>
-          <p:cNvSpPr/>
-          <p:nvPr/>
-        </p:nvSpPr>
-        <p:spPr>
-          <a:xfrm>
-            <a:off x="1957485" y="2781330"/>
-            <a:ext cx="133320" cy="133320"/>
-          </a:xfrm>
-          <a:prstGeom prst="ellipse">
-            <a:avLst/>
-          </a:prstGeom>
-          <a:solidFill>
-            <a:srgbClr val="1F6F5C"/>
-          </a:solidFill>
-          <a:ln/>
-        </p:spPr>
-      </p:sp>
-      <p:sp>
-        <p:nvSpPr>
-          <p:cNvPr id="20" name="Text 18"/>
-          <p:cNvSpPr txBox="1"/>
-          <p:nvPr/>
-        </p:nvSpPr>
-        <p:spPr>
-          <a:xfrm>
-            <a:off x="3429000" y="1319005"/>
-            <a:ext cx="5212080" cy="1005611"/>
+      <p:pic>
+        <p:nvPicPr>
+          <p:cNvPr id="6" name="Image 0" descr="/Users/tsengchenghsun/Class/carClass/Claude outputs/第五週(10-8)/src/img/w5_os1_modes.png">    </p:cNvPr>
+          <p:cNvPicPr>
+            <a:picLocks noChangeAspect="1"/>
+          </p:cNvPicPr>
+          <p:nvPr/>
+        </p:nvPicPr>
+        <p:blipFill>
+          <a:blip r:embed="rId1"/>
+          <a:stretch>
+            <a:fillRect/>
+          </a:stretch>
+        </p:blipFill>
+        <p:spPr>
+          <a:xfrm>
+            <a:off x="1363237" y="2706624"/>
+            <a:ext cx="6417527" cy="914400"/>
           </a:xfrm>
           <a:prstGeom prst="rect">
             <a:avLst/>
           </a:prstGeom>
+        </p:spPr>
+      </p:pic>
+      <p:sp>
+        <p:nvSpPr>
+          <p:cNvPr id="7" name="Text 4"/>
+          <p:cNvSpPr txBox="1"/>
+          <p:nvPr/>
+        </p:nvSpPr>
+        <p:spPr>
+          <a:xfrm>
+            <a:off x="576072" y="3657600"/>
+            <a:ext cx="7991856" cy="182880"/>
+          </a:xfrm>
+          <a:prstGeom prst="rect">
+            <a:avLst/>
+          </a:prstGeom>
           <a:noFill/>
           <a:ln/>
         </p:spPr>
         <p:txBody>
-          <a:bodyPr wrap="square" lIns="0" tIns="0" rIns="0" bIns="0" rtlCol="0" anchor="t"/>
+          <a:bodyPr wrap="square" lIns="0" tIns="0" rIns="0" bIns="0" rtlCol="0" anchor="ctr"/>
           <a:lstStyle/>
           <a:p>
-            <a:pPr indent="0" marL="0">
-              <a:lnSpc>
-                <a:spcPct val="120000"/>
-              </a:lnSpc>
+            <a:pPr algn="ctr" indent="0" marL="0">
               <a:buNone/>
             </a:pPr>
             <a:r>
-              <a:rPr lang="en-US" sz="2300" b="1" dirty="0">
-                <a:solidFill>
-                  <a:srgbClr val="0B1F3A"/>
+              <a:rPr lang="en-US" sz="700" dirty="0">
+                <a:solidFill>
+                  <a:srgbClr val="5F7183"/>
                 </a:solidFill>
                 <a:latin typeface="Arial" pitchFamily="34" charset="0"/>
                 <a:ea typeface="Arial" pitchFamily="34" charset="-122"/>
                 <a:cs typeface="Arial" pitchFamily="34" charset="-120"/>
               </a:rPr>
-              <a:t>Có dòng ghi «configurable»: đó là chế độ, không phải con số cố định</a:t>
-            </a:r>
-            <a:endParaRPr lang="en-US" sz="2300" dirty="0"/>
-          </a:p>
-          <a:p>
-            <a:pPr indent="0" marL="0">
-              <a:lnSpc>
-                <a:spcPct val="120000"/>
-              </a:lnSpc>
-              <a:buNone/>
-            </a:pPr>
-            <a:r>
-              <a:rPr lang="en-US" sz="1400" dirty="0">
-                <a:solidFill>
-                  <a:srgbClr val="007F72"/>
-                </a:solidFill>
-                <a:latin typeface="微軟正黑體" pitchFamily="34" charset="0"/>
-                <a:ea typeface="微軟正黑體" pitchFamily="34" charset="-122"/>
-                <a:cs typeface="微軟正黑體" pitchFamily="34" charset="-120"/>
-              </a:rPr>
-              <a:t>有些行寫著「可設定」：那是模式，不是固定的數字</a:t>
-            </a:r>
-            <a:endParaRPr lang="en-US" sz="2300" dirty="0"/>
+              <a:t>Ouster OS1 datasheet, Rev7 / FW 3.2, p.3 · 節錄 · 讀取 2026/10/02</a:t>
+            </a:r>
+            <a:endParaRPr lang="en-US" sz="700" dirty="0"/>
           </a:p>
         </p:txBody>
       </p:sp>
       <p:sp>
         <p:nvSpPr>
-          <p:cNvPr id="21" name="Text 19"/>
-          <p:cNvSpPr txBox="1"/>
-          <p:nvPr/>
-        </p:nvSpPr>
-        <p:spPr>
-          <a:xfrm>
-            <a:off x="3429000" y="2416057"/>
-            <a:ext cx="5212080" cy="1074682"/>
-          </a:xfrm>
-          <a:prstGeom prst="rect">
-            <a:avLst/>
-          </a:prstGeom>
-          <a:noFill/>
-          <a:ln/>
-        </p:spPr>
-        <p:txBody>
-          <a:bodyPr wrap="square" lIns="0" tIns="0" rIns="0" bIns="0" rtlCol="0" anchor="t"/>
-          <a:lstStyle/>
-          <a:p>
-            <a:pPr indent="0" marL="0">
-              <a:lnSpc>
-                <a:spcPct val="128000"/>
-              </a:lnSpc>
-              <a:buNone/>
-            </a:pPr>
-            <a:r>
-              <a:rPr lang="en-US" sz="1250" dirty="0">
-                <a:solidFill>
-                  <a:srgbClr val="5F7183"/>
-                </a:solidFill>
-                <a:latin typeface="Arial" pitchFamily="34" charset="0"/>
-                <a:ea typeface="Arial" pitchFamily="34" charset="-122"/>
-                <a:cs typeface="Arial" pitchFamily="34" charset="-120"/>
-              </a:rPr>
-              <a:t>OS1: mỗi vòng 512 / 1024 / 2048 điểm, quay 10 hoặc 20 Hz. Cùng một con lidar, chọn chế độ khác thì số điểm trên người ở 40 m đổi hẳn.</a:t>
-            </a:r>
-            <a:endParaRPr lang="en-US" sz="1250" dirty="0"/>
-          </a:p>
-          <a:p>
-            <a:pPr indent="0" marL="0">
-              <a:lnSpc>
-                <a:spcPct val="128000"/>
-              </a:lnSpc>
-              <a:buNone/>
-            </a:pPr>
-            <a:r>
-              <a:rPr lang="en-US" sz="1150" dirty="0">
-                <a:solidFill>
-                  <a:srgbClr val="5F7183"/>
-                </a:solidFill>
-                <a:latin typeface="微軟正黑體" pitchFamily="34" charset="0"/>
-                <a:ea typeface="微軟正黑體" pitchFamily="34" charset="-122"/>
-                <a:cs typeface="微軟正黑體" pitchFamily="34" charset="-120"/>
-              </a:rPr>
-              <a:t>OS1 的每圈點數可以選 512 / 1024 / 2048，轉速可以選 10 或 20 Hz。同一顆光達，換一個模式，四十公尺行人身上的點數就整個不一樣。</a:t>
-            </a:r>
-            <a:endParaRPr lang="en-US" sz="1250" dirty="0"/>
-          </a:p>
-        </p:txBody>
-      </p:sp>
-      <p:sp>
-        <p:nvSpPr>
-          <p:cNvPr id="22" name="Shape 20"/>
+          <p:cNvPr id="8" name="Shape 5"/>
           <p:cNvSpPr/>
           <p:nvPr/>
         </p:nvSpPr>
@@ -9515,7 +9083,7 @@
       </p:sp>
       <p:sp>
         <p:nvSpPr>
-          <p:cNvPr id="23" name="Text 21"/>
+          <p:cNvPr id="9" name="Text 6"/>
           <p:cNvSpPr txBox="1"/>
           <p:nvPr/>
         </p:nvSpPr>
@@ -9577,14 +9145,14 @@
       </p:sp>
       <p:pic>
         <p:nvPicPr>
-          <p:cNvPr id="25" name="Image 0" descr="/Users/tsengchenghsun/Class/carClass/Claude outputs/第五週(10-8)/src/logo.png">    </p:cNvPr>
+          <p:cNvPr id="11" name="Image 1" descr="/Users/tsengchenghsun/Class/carClass/Claude outputs/第五週(10-8)/src/logo.png">    </p:cNvPr>
           <p:cNvPicPr>
             <a:picLocks noChangeAspect="1"/>
           </p:cNvPicPr>
           <p:nvPr/>
         </p:nvPicPr>
         <p:blipFill>
-          <a:blip r:embed="rId1"/>
+          <a:blip r:embed="rId2"/>
           <a:stretch>
             <a:fillRect/>
           </a:stretch>
@@ -9601,7 +9169,7 @@
       </p:pic>
       <p:sp>
         <p:nvSpPr>
-          <p:cNvPr id="26" name="Text 22"/>
+          <p:cNvPr id="12" name="Text 7"/>
           <p:cNvSpPr txBox="1"/>
           <p:nvPr/>
         </p:nvSpPr>
@@ -9640,7 +9208,7 @@
       </p:sp>
       <p:sp>
         <p:nvSpPr>
-          <p:cNvPr id="27" name="Text 23"/>
+          <p:cNvPr id="13" name="Text 8"/>
           <p:cNvSpPr txBox="1"/>
           <p:nvPr/>
         </p:nvSpPr>
@@ -9710,8 +9278,8 @@
         </p:nvSpPr>
         <p:spPr>
           <a:xfrm>
-            <a:off x="502920" y="292608"/>
-            <a:ext cx="8138160" cy="841248"/>
+            <a:off x="502920" y="365760"/>
+            <a:ext cx="8138160" cy="274320"/>
           </a:xfrm>
           <a:prstGeom prst="rect">
             <a:avLst/>
@@ -9720,47 +9288,24 @@
           <a:ln/>
         </p:spPr>
         <p:txBody>
-          <a:bodyPr wrap="square" lIns="0" tIns="0" rIns="0" bIns="0" rtlCol="0" anchor="t"/>
+          <a:bodyPr wrap="square" lIns="0" tIns="0" rIns="0" bIns="0" rtlCol="0" anchor="ctr"/>
           <a:lstStyle/>
           <a:p>
             <a:pPr indent="0" marL="0">
-              <a:lnSpc>
-                <a:spcPct val="116000"/>
-              </a:lnSpc>
               <a:buNone/>
             </a:pPr>
             <a:r>
-              <a:rPr lang="en-US" sz="2200" b="1" dirty="0">
-                <a:solidFill>
-                  <a:srgbClr val="0B1F3A"/>
+              <a:rPr lang="en-US" sz="1300" b="1" dirty="0">
+                <a:solidFill>
+                  <a:srgbClr val="007F72"/>
                 </a:solidFill>
                 <a:latin typeface="Arial" pitchFamily="34" charset="0"/>
                 <a:ea typeface="Arial" pitchFamily="34" charset="-122"/>
                 <a:cs typeface="Arial" pitchFamily="34" charset="-120"/>
               </a:rPr>
-              <a:t>«90 m» hay «170 m»: cùng một con lidar, hai con số</a:t>
-            </a:r>
-            <a:endParaRPr lang="en-US" sz="2200" dirty="0"/>
-          </a:p>
-          <a:p>
-            <a:pPr indent="0" marL="0">
-              <a:lnSpc>
-                <a:spcPct val="116000"/>
-              </a:lnSpc>
-              <a:buNone/>
-            </a:pPr>
-            <a:r>
-              <a:rPr lang="en-US" sz="1350" dirty="0">
-                <a:solidFill>
-                  <a:srgbClr val="5F7183"/>
-                </a:solidFill>
-                <a:latin typeface="微軟正黑體" pitchFamily="34" charset="0"/>
-                <a:ea typeface="微軟正黑體" pitchFamily="34" charset="-122"/>
-                <a:cs typeface="微軟正黑體" pitchFamily="34" charset="-120"/>
-              </a:rPr>
-              <a:t>「90 公尺」還是「170 公尺」：同一顆光達，兩個數字</a:t>
-            </a:r>
-            <a:endParaRPr lang="en-US" sz="2200" dirty="0"/>
+              <a:t>Đọc kỹ · 同一行，兩個數字</a:t>
+            </a:r>
+            <a:endParaRPr lang="en-US" sz="1300" dirty="0"/>
           </a:p>
         </p:txBody>
       </p:sp>
@@ -9772,1099 +9317,28 @@
         </p:nvSpPr>
         <p:spPr>
           <a:xfrm>
-            <a:off x="502920" y="1133856"/>
-            <a:ext cx="8138160" cy="713232"/>
+            <a:off x="502920" y="877824"/>
+            <a:ext cx="4206240" cy="1172567"/>
           </a:xfrm>
           <a:prstGeom prst="roundRect">
             <a:avLst>
-              <a:gd name="adj" fmla="val 10256"/>
+              <a:gd name="adj" fmla="val 9358"/>
             </a:avLst>
           </a:prstGeom>
           <a:solidFill>
-            <a:srgbClr val="EAF6F4"/>
+            <a:srgbClr val="FFFFFF"/>
           </a:solidFill>
-          <a:ln/>
-        </p:spPr>
-      </p:sp>
-      <p:sp>
-        <p:nvSpPr>
-          <p:cNvPr id="4" name="Text 2"/>
-          <p:cNvSpPr txBox="1"/>
-          <p:nvPr/>
-        </p:nvSpPr>
-        <p:spPr>
-          <a:xfrm>
-            <a:off x="649224" y="1207008"/>
-            <a:ext cx="7845552" cy="566928"/>
-          </a:xfrm>
-          <a:prstGeom prst="rect">
-            <a:avLst/>
-          </a:prstGeom>
-          <a:noFill/>
-          <a:ln/>
-        </p:spPr>
-        <p:txBody>
-          <a:bodyPr wrap="square" lIns="0" tIns="0" rIns="0" bIns="0" rtlCol="0" anchor="t"/>
-          <a:lstStyle/>
-          <a:p>
-            <a:pPr indent="0" marL="0">
-              <a:lnSpc>
-                <a:spcPct val="110000"/>
-              </a:lnSpc>
-              <a:buNone/>
-            </a:pPr>
-            <a:r>
-              <a:rPr lang="en-US" sz="1150" b="1" dirty="0">
-                <a:solidFill>
-                  <a:srgbClr val="007F72"/>
-                </a:solidFill>
-                <a:latin typeface="Arial" pitchFamily="34" charset="0"/>
-                <a:ea typeface="Arial" pitchFamily="34" charset="-122"/>
-                <a:cs typeface="Arial" pitchFamily="34" charset="-120"/>
-              </a:rPr>
-              <a:t>Chép nguyên văn từ datasheet OS1. Chú ý phần chữ nhỏ phía sau.</a:t>
-            </a:r>
-            <a:endParaRPr lang="en-US" sz="1150" dirty="0"/>
-          </a:p>
-          <a:p>
-            <a:pPr indent="0" marL="0">
-              <a:lnSpc>
-                <a:spcPct val="110000"/>
-              </a:lnSpc>
-              <a:buNone/>
-            </a:pPr>
-            <a:r>
-              <a:rPr lang="en-US" sz="1000" dirty="0">
-                <a:solidFill>
-                  <a:srgbClr val="007F72"/>
-                </a:solidFill>
-                <a:latin typeface="微軟正黑體" pitchFamily="34" charset="0"/>
-                <a:ea typeface="微軟正黑體" pitchFamily="34" charset="-122"/>
-                <a:cs typeface="微軟正黑體" pitchFamily="34" charset="-120"/>
-              </a:rPr>
-              <a:t>照抄 OS1 規格表上的兩行。請注意後面那一串小字。</a:t>
-            </a:r>
-            <a:endParaRPr lang="en-US" sz="1150" dirty="0"/>
-          </a:p>
-        </p:txBody>
-      </p:sp>
-      <p:graphicFrame>
-        <p:nvGraphicFramePr>
-          <p:cNvPr id="13" name="Table 0"/>
-          <p:cNvGraphicFramePr>
-            <a:graphicFrameLocks noGrp="1"/>
-          </p:cNvGraphicFramePr>
-          <p:nvPr>
-            <p:extLst>
-              <p:ext uri="{D42A27DB-BD31-4B8C-83A1-F6EECF244321}">
-                <p14:modId xmlns:p14="http://schemas.microsoft.com/office/powerpoint/2010/main" val="1579011935"/>
-              </p:ext>
-            </p:extLst>
-          </p:nvPr>
-        </p:nvGraphicFramePr>
-        <p:xfrm>
-          <a:off x="502920" y="1956816"/>
-          <a:ext cx="8138160" cy="914400"/>
-        </p:xfrm>
-        <a:graphic>
-          <a:graphicData uri="http://schemas.openxmlformats.org/drawingml/2006/table">
-            <a:tbl>
-              <a:tblPr/>
-              <a:tblGrid>
-                <a:gridCol w="2034540"/>
-                <a:gridCol w="2034540"/>
-                <a:gridCol w="2034540"/>
-                <a:gridCol w="2034540"/>
-              </a:tblGrid>
-              <a:tr h="384048">
-                <a:tc>
-                  <a:txBody>
-                    <a:bodyPr/>
-                    <a:lstStyle/>
-                    <a:p>
-                      <a:pPr algn="l" indent="0" marL="0">
-                        <a:buNone/>
-                      </a:pPr>
-                      <a:r>
-                        <a:rPr lang="en-US" sz="1100" b="1" dirty="0">
-                          <a:solidFill>
-                            <a:srgbClr val="FFFFFF"/>
-                          </a:solidFill>
-                          <a:latin typeface="Arial" pitchFamily="34" charset="0"/>
-                          <a:ea typeface="Arial" pitchFamily="34" charset="-122"/>
-                          <a:cs typeface="Arial" pitchFamily="34" charset="-120"/>
-                        </a:rPr>
-                        <a:t>Dòng trên datasheet</a:t>
-                      </a:r>
-                      <a:endParaRPr lang="en-US" sz="1200" dirty="0"/>
-                    </a:p>
-                    <a:p>
-                      <a:pPr algn="l" indent="0" marL="0">
-                        <a:buNone/>
-                      </a:pPr>
-                      <a:r>
-                        <a:rPr lang="en-US" sz="950" dirty="0">
-                          <a:solidFill>
-                            <a:srgbClr val="CFE0EC"/>
-                          </a:solidFill>
-                          <a:latin typeface="微軟正黑體" pitchFamily="34" charset="0"/>
-                          <a:ea typeface="微軟正黑體" pitchFamily="34" charset="-122"/>
-                          <a:cs typeface="微軟正黑體" pitchFamily="34" charset="-120"/>
-                        </a:rPr>
-                        <a:t>規格表上那一行</a:t>
-                      </a:r>
-                      <a:endParaRPr lang="en-US" sz="1200" dirty="0"/>
-                    </a:p>
-                  </a:txBody>
-                  <a:tcPr marL="63500" marR="63500" marT="38100" marB="38100" anchor="ctr">
-                    <a:lnL w="6350" cap="flat" cmpd="sng" algn="ctr">
-                      <a:solidFill>
-                        <a:srgbClr val="DBE3EA"/>
-                      </a:solidFill>
-                      <a:prstDash val="solid"/>
-                      <a:round/>
-                      <a:headEnd type="none" w="med" len="med"/>
-                      <a:tailEnd type="none" w="med" len="med"/>
-                    </a:lnL>
-                    <a:lnR w="6350" cap="flat" cmpd="sng" algn="ctr">
-                      <a:solidFill>
-                        <a:srgbClr val="DBE3EA"/>
-                      </a:solidFill>
-                      <a:prstDash val="solid"/>
-                      <a:round/>
-                      <a:headEnd type="none" w="med" len="med"/>
-                      <a:tailEnd type="none" w="med" len="med"/>
-                    </a:lnR>
-                    <a:lnT w="6350" cap="flat" cmpd="sng" algn="ctr">
-                      <a:solidFill>
-                        <a:srgbClr val="DBE3EA"/>
-                      </a:solidFill>
-                      <a:prstDash val="solid"/>
-                      <a:round/>
-                      <a:headEnd type="none" w="med" len="med"/>
-                      <a:tailEnd type="none" w="med" len="med"/>
-                    </a:lnT>
-                    <a:lnB w="6350" cap="flat" cmpd="sng" algn="ctr">
-                      <a:solidFill>
-                        <a:srgbClr val="DBE3EA"/>
-                      </a:solidFill>
-                      <a:prstDash val="solid"/>
-                      <a:round/>
-                      <a:headEnd type="none" w="med" len="med"/>
-                      <a:tailEnd type="none" w="med" len="med"/>
-                    </a:lnB>
-                    <a:solidFill>
-                      <a:srgbClr val="0B1F3A"/>
-                    </a:solidFill>
-                  </a:tcPr>
-                </a:tc>
-                <a:tc>
-                  <a:txBody>
-                    <a:bodyPr/>
-                    <a:lstStyle/>
-                    <a:p>
-                      <a:pPr algn="l" indent="0" marL="0">
-                        <a:buNone/>
-                      </a:pPr>
-                      <a:r>
-                        <a:rPr lang="en-US" sz="1100" b="1" dirty="0">
-                          <a:solidFill>
-                            <a:srgbClr val="FFFFFF"/>
-                          </a:solidFill>
-                          <a:latin typeface="Arial" pitchFamily="34" charset="0"/>
-                          <a:ea typeface="Arial" pitchFamily="34" charset="-122"/>
-                          <a:cs typeface="Arial" pitchFamily="34" charset="-120"/>
-                        </a:rPr>
-                        <a:t>Con số</a:t>
-                      </a:r>
-                      <a:endParaRPr lang="en-US" sz="1200" dirty="0"/>
-                    </a:p>
-                    <a:p>
-                      <a:pPr algn="l" indent="0" marL="0">
-                        <a:buNone/>
-                      </a:pPr>
-                      <a:r>
-                        <a:rPr lang="en-US" sz="950" dirty="0">
-                          <a:solidFill>
-                            <a:srgbClr val="CFE0EC"/>
-                          </a:solidFill>
-                          <a:latin typeface="微軟正黑體" pitchFamily="34" charset="0"/>
-                          <a:ea typeface="微軟正黑體" pitchFamily="34" charset="-122"/>
-                          <a:cs typeface="微軟正黑體" pitchFamily="34" charset="-120"/>
-                        </a:rPr>
-                        <a:t>數字</a:t>
-                      </a:r>
-                      <a:endParaRPr lang="en-US" sz="1200" dirty="0"/>
-                    </a:p>
-                  </a:txBody>
-                  <a:tcPr marL="63500" marR="63500" marT="38100" marB="38100" anchor="ctr">
-                    <a:lnL w="6350" cap="flat" cmpd="sng" algn="ctr">
-                      <a:solidFill>
-                        <a:srgbClr val="DBE3EA"/>
-                      </a:solidFill>
-                      <a:prstDash val="solid"/>
-                      <a:round/>
-                      <a:headEnd type="none" w="med" len="med"/>
-                      <a:tailEnd type="none" w="med" len="med"/>
-                    </a:lnL>
-                    <a:lnR w="6350" cap="flat" cmpd="sng" algn="ctr">
-                      <a:solidFill>
-                        <a:srgbClr val="DBE3EA"/>
-                      </a:solidFill>
-                      <a:prstDash val="solid"/>
-                      <a:round/>
-                      <a:headEnd type="none" w="med" len="med"/>
-                      <a:tailEnd type="none" w="med" len="med"/>
-                    </a:lnR>
-                    <a:lnT w="6350" cap="flat" cmpd="sng" algn="ctr">
-                      <a:solidFill>
-                        <a:srgbClr val="DBE3EA"/>
-                      </a:solidFill>
-                      <a:prstDash val="solid"/>
-                      <a:round/>
-                      <a:headEnd type="none" w="med" len="med"/>
-                      <a:tailEnd type="none" w="med" len="med"/>
-                    </a:lnT>
-                    <a:lnB w="6350" cap="flat" cmpd="sng" algn="ctr">
-                      <a:solidFill>
-                        <a:srgbClr val="DBE3EA"/>
-                      </a:solidFill>
-                      <a:prstDash val="solid"/>
-                      <a:round/>
-                      <a:headEnd type="none" w="med" len="med"/>
-                      <a:tailEnd type="none" w="med" len="med"/>
-                    </a:lnB>
-                    <a:solidFill>
-                      <a:srgbClr val="0B1F3A"/>
-                    </a:solidFill>
-                  </a:tcPr>
-                </a:tc>
-                <a:tc>
-                  <a:txBody>
-                    <a:bodyPr/>
-                    <a:lstStyle/>
-                    <a:p>
-                      <a:pPr algn="l" indent="0" marL="0">
-                        <a:buNone/>
-                      </a:pPr>
-                      <a:r>
-                        <a:rPr lang="en-US" sz="1100" b="1" dirty="0">
-                          <a:solidFill>
-                            <a:srgbClr val="FFFFFF"/>
-                          </a:solidFill>
-                          <a:latin typeface="Arial" pitchFamily="34" charset="0"/>
-                          <a:ea typeface="Arial" pitchFamily="34" charset="-122"/>
-                          <a:cs typeface="Arial" pitchFamily="34" charset="-120"/>
-                        </a:rPr>
-                        <a:t>Vật gì</a:t>
-                      </a:r>
-                      <a:endParaRPr lang="en-US" sz="1200" dirty="0"/>
-                    </a:p>
-                    <a:p>
-                      <a:pPr algn="l" indent="0" marL="0">
-                        <a:buNone/>
-                      </a:pPr>
-                      <a:r>
-                        <a:rPr lang="en-US" sz="950" dirty="0">
-                          <a:solidFill>
-                            <a:srgbClr val="CFE0EC"/>
-                          </a:solidFill>
-                          <a:latin typeface="微軟正黑體" pitchFamily="34" charset="0"/>
-                          <a:ea typeface="微軟正黑體" pitchFamily="34" charset="-122"/>
-                          <a:cs typeface="微軟正黑體" pitchFamily="34" charset="-120"/>
-                        </a:rPr>
-                        <a:t>量的是什麼東西</a:t>
-                      </a:r>
-                      <a:endParaRPr lang="en-US" sz="1200" dirty="0"/>
-                    </a:p>
-                  </a:txBody>
-                  <a:tcPr marL="63500" marR="63500" marT="38100" marB="38100" anchor="ctr">
-                    <a:lnL w="6350" cap="flat" cmpd="sng" algn="ctr">
-                      <a:solidFill>
-                        <a:srgbClr val="DBE3EA"/>
-                      </a:solidFill>
-                      <a:prstDash val="solid"/>
-                      <a:round/>
-                      <a:headEnd type="none" w="med" len="med"/>
-                      <a:tailEnd type="none" w="med" len="med"/>
-                    </a:lnL>
-                    <a:lnR w="6350" cap="flat" cmpd="sng" algn="ctr">
-                      <a:solidFill>
-                        <a:srgbClr val="DBE3EA"/>
-                      </a:solidFill>
-                      <a:prstDash val="solid"/>
-                      <a:round/>
-                      <a:headEnd type="none" w="med" len="med"/>
-                      <a:tailEnd type="none" w="med" len="med"/>
-                    </a:lnR>
-                    <a:lnT w="6350" cap="flat" cmpd="sng" algn="ctr">
-                      <a:solidFill>
-                        <a:srgbClr val="DBE3EA"/>
-                      </a:solidFill>
-                      <a:prstDash val="solid"/>
-                      <a:round/>
-                      <a:headEnd type="none" w="med" len="med"/>
-                      <a:tailEnd type="none" w="med" len="med"/>
-                    </a:lnT>
-                    <a:lnB w="6350" cap="flat" cmpd="sng" algn="ctr">
-                      <a:solidFill>
-                        <a:srgbClr val="DBE3EA"/>
-                      </a:solidFill>
-                      <a:prstDash val="solid"/>
-                      <a:round/>
-                      <a:headEnd type="none" w="med" len="med"/>
-                      <a:tailEnd type="none" w="med" len="med"/>
-                    </a:lnB>
-                    <a:solidFill>
-                      <a:srgbClr val="0B1F3A"/>
-                    </a:solidFill>
-                  </a:tcPr>
-                </a:tc>
-                <a:tc>
-                  <a:txBody>
-                    <a:bodyPr/>
-                    <a:lstStyle/>
-                    <a:p>
-                      <a:pPr algn="l" indent="0" marL="0">
-                        <a:buNone/>
-                      </a:pPr>
-                      <a:r>
-                        <a:rPr lang="en-US" sz="1100" b="1" dirty="0">
-                          <a:solidFill>
-                            <a:srgbClr val="FFFFFF"/>
-                          </a:solidFill>
-                          <a:latin typeface="Arial" pitchFamily="34" charset="0"/>
-                          <a:ea typeface="Arial" pitchFamily="34" charset="-122"/>
-                          <a:cs typeface="Arial" pitchFamily="34" charset="-120"/>
-                        </a:rPr>
-                        <a:t>Ngoài đường là ai</a:t>
-                      </a:r>
-                      <a:endParaRPr lang="en-US" sz="1200" dirty="0"/>
-                    </a:p>
-                    <a:p>
-                      <a:pPr algn="l" indent="0" marL="0">
-                        <a:buNone/>
-                      </a:pPr>
-                      <a:r>
-                        <a:rPr lang="en-US" sz="950" dirty="0">
-                          <a:solidFill>
-                            <a:srgbClr val="CFE0EC"/>
-                          </a:solidFill>
-                          <a:latin typeface="微軟正黑體" pitchFamily="34" charset="0"/>
-                          <a:ea typeface="微軟正黑體" pitchFamily="34" charset="-122"/>
-                          <a:cs typeface="微軟正黑體" pitchFamily="34" charset="-120"/>
-                        </a:rPr>
-                        <a:t>路上是誰</a:t>
-                      </a:r>
-                      <a:endParaRPr lang="en-US" sz="1200" dirty="0"/>
-                    </a:p>
-                  </a:txBody>
-                  <a:tcPr marL="63500" marR="63500" marT="38100" marB="38100" anchor="ctr">
-                    <a:lnL w="6350" cap="flat" cmpd="sng" algn="ctr">
-                      <a:solidFill>
-                        <a:srgbClr val="DBE3EA"/>
-                      </a:solidFill>
-                      <a:prstDash val="solid"/>
-                      <a:round/>
-                      <a:headEnd type="none" w="med" len="med"/>
-                      <a:tailEnd type="none" w="med" len="med"/>
-                    </a:lnL>
-                    <a:lnR w="6350" cap="flat" cmpd="sng" algn="ctr">
-                      <a:solidFill>
-                        <a:srgbClr val="DBE3EA"/>
-                      </a:solidFill>
-                      <a:prstDash val="solid"/>
-                      <a:round/>
-                      <a:headEnd type="none" w="med" len="med"/>
-                      <a:tailEnd type="none" w="med" len="med"/>
-                    </a:lnR>
-                    <a:lnT w="6350" cap="flat" cmpd="sng" algn="ctr">
-                      <a:solidFill>
-                        <a:srgbClr val="DBE3EA"/>
-                      </a:solidFill>
-                      <a:prstDash val="solid"/>
-                      <a:round/>
-                      <a:headEnd type="none" w="med" len="med"/>
-                      <a:tailEnd type="none" w="med" len="med"/>
-                    </a:lnT>
-                    <a:lnB w="6350" cap="flat" cmpd="sng" algn="ctr">
-                      <a:solidFill>
-                        <a:srgbClr val="DBE3EA"/>
-                      </a:solidFill>
-                      <a:prstDash val="solid"/>
-                      <a:round/>
-                      <a:headEnd type="none" w="med" len="med"/>
-                      <a:tailEnd type="none" w="med" len="med"/>
-                    </a:lnB>
-                    <a:solidFill>
-                      <a:srgbClr val="0B1F3A"/>
-                    </a:solidFill>
-                  </a:tcPr>
-                </a:tc>
-              </a:tr>
-              <a:tr h="384048">
-                <a:tc>
-                  <a:txBody>
-                    <a:bodyPr/>
-                    <a:lstStyle/>
-                    <a:p>
-                      <a:pPr algn="l" indent="0" marL="0">
-                        <a:buNone/>
-                      </a:pPr>
-                      <a:r>
-                        <a:rPr lang="en-US" sz="1100" b="1" dirty="0">
-                          <a:solidFill>
-                            <a:srgbClr val="0B1F3A"/>
-                          </a:solidFill>
-                          <a:latin typeface="Arial" pitchFamily="34" charset="0"/>
-                          <a:ea typeface="Arial" pitchFamily="34" charset="-122"/>
-                          <a:cs typeface="Arial" pitchFamily="34" charset="-120"/>
-                        </a:rPr>
-                        <a:t>Range (80% reflectivity)</a:t>
-                      </a:r>
-                      <a:endParaRPr lang="en-US" sz="1200" dirty="0"/>
-                    </a:p>
-                    <a:p>
-                      <a:pPr algn="l" indent="0" marL="0">
-                        <a:buNone/>
-                      </a:pPr>
-                      <a:r>
-                        <a:rPr lang="en-US" sz="950" dirty="0">
-                          <a:solidFill>
-                            <a:srgbClr val="5F7183"/>
-                          </a:solidFill>
-                          <a:latin typeface="微軟正黑體" pitchFamily="34" charset="0"/>
-                          <a:ea typeface="微軟正黑體" pitchFamily="34" charset="-122"/>
-                          <a:cs typeface="微軟正黑體" pitchFamily="34" charset="-120"/>
-                        </a:rPr>
-                        <a:t>Range（80% 反射率）</a:t>
-                      </a:r>
-                      <a:endParaRPr lang="en-US" sz="1200" dirty="0"/>
-                    </a:p>
-                  </a:txBody>
-                  <a:tcPr marL="63500" marR="63500" marT="38100" marB="38100" anchor="ctr">
-                    <a:lnL w="6350" cap="flat" cmpd="sng" algn="ctr">
-                      <a:solidFill>
-                        <a:srgbClr val="DBE3EA"/>
-                      </a:solidFill>
-                      <a:prstDash val="solid"/>
-                      <a:round/>
-                      <a:headEnd type="none" w="med" len="med"/>
-                      <a:tailEnd type="none" w="med" len="med"/>
-                    </a:lnL>
-                    <a:lnR w="6350" cap="flat" cmpd="sng" algn="ctr">
-                      <a:solidFill>
-                        <a:srgbClr val="DBE3EA"/>
-                      </a:solidFill>
-                      <a:prstDash val="solid"/>
-                      <a:round/>
-                      <a:headEnd type="none" w="med" len="med"/>
-                      <a:tailEnd type="none" w="med" len="med"/>
-                    </a:lnR>
-                    <a:lnT w="6350" cap="flat" cmpd="sng" algn="ctr">
-                      <a:solidFill>
-                        <a:srgbClr val="DBE3EA"/>
-                      </a:solidFill>
-                      <a:prstDash val="solid"/>
-                      <a:round/>
-                      <a:headEnd type="none" w="med" len="med"/>
-                      <a:tailEnd type="none" w="med" len="med"/>
-                    </a:lnT>
-                    <a:lnB w="6350" cap="flat" cmpd="sng" algn="ctr">
-                      <a:solidFill>
-                        <a:srgbClr val="DBE3EA"/>
-                      </a:solidFill>
-                      <a:prstDash val="solid"/>
-                      <a:round/>
-                      <a:headEnd type="none" w="med" len="med"/>
-                      <a:tailEnd type="none" w="med" len="med"/>
-                    </a:lnB>
-                  </a:tcPr>
-                </a:tc>
-                <a:tc>
-                  <a:txBody>
-                    <a:bodyPr/>
-                    <a:lstStyle/>
-                    <a:p>
-                      <a:pPr algn="l" indent="0" marL="0">
-                        <a:buNone/>
-                      </a:pPr>
-                      <a:r>
-                        <a:rPr lang="en-US" sz="1100" dirty="0">
-                          <a:solidFill>
-                            <a:srgbClr val="1A2733"/>
-                          </a:solidFill>
-                          <a:latin typeface="Arial" pitchFamily="34" charset="0"/>
-                          <a:ea typeface="Arial" pitchFamily="34" charset="-122"/>
-                          <a:cs typeface="Arial" pitchFamily="34" charset="-120"/>
-                        </a:rPr>
-                        <a:t>170 m</a:t>
-                      </a:r>
-                      <a:endParaRPr lang="en-US" sz="1200" dirty="0"/>
-                    </a:p>
-                  </a:txBody>
-                  <a:tcPr marL="63500" marR="63500" marT="38100" marB="38100" anchor="ctr">
-                    <a:lnL w="6350" cap="flat" cmpd="sng" algn="ctr">
-                      <a:solidFill>
-                        <a:srgbClr val="DBE3EA"/>
-                      </a:solidFill>
-                      <a:prstDash val="solid"/>
-                      <a:round/>
-                      <a:headEnd type="none" w="med" len="med"/>
-                      <a:tailEnd type="none" w="med" len="med"/>
-                    </a:lnL>
-                    <a:lnR w="6350" cap="flat" cmpd="sng" algn="ctr">
-                      <a:solidFill>
-                        <a:srgbClr val="DBE3EA"/>
-                      </a:solidFill>
-                      <a:prstDash val="solid"/>
-                      <a:round/>
-                      <a:headEnd type="none" w="med" len="med"/>
-                      <a:tailEnd type="none" w="med" len="med"/>
-                    </a:lnR>
-                    <a:lnT w="6350" cap="flat" cmpd="sng" algn="ctr">
-                      <a:solidFill>
-                        <a:srgbClr val="DBE3EA"/>
-                      </a:solidFill>
-                      <a:prstDash val="solid"/>
-                      <a:round/>
-                      <a:headEnd type="none" w="med" len="med"/>
-                      <a:tailEnd type="none" w="med" len="med"/>
-                    </a:lnT>
-                    <a:lnB w="6350" cap="flat" cmpd="sng" algn="ctr">
-                      <a:solidFill>
-                        <a:srgbClr val="DBE3EA"/>
-                      </a:solidFill>
-                      <a:prstDash val="solid"/>
-                      <a:round/>
-                      <a:headEnd type="none" w="med" len="med"/>
-                      <a:tailEnd type="none" w="med" len="med"/>
-                    </a:lnB>
-                  </a:tcPr>
-                </a:tc>
-                <a:tc>
-                  <a:txBody>
-                    <a:bodyPr/>
-                    <a:lstStyle/>
-                    <a:p>
-                      <a:pPr algn="l" indent="0" marL="0">
-                        <a:buNone/>
-                      </a:pPr>
-                      <a:r>
-                        <a:rPr lang="en-US" sz="1100" dirty="0">
-                          <a:solidFill>
-                            <a:srgbClr val="1A2733"/>
-                          </a:solidFill>
-                          <a:latin typeface="Arial" pitchFamily="34" charset="0"/>
-                          <a:ea typeface="Arial" pitchFamily="34" charset="-122"/>
-                          <a:cs typeface="Arial" pitchFamily="34" charset="-120"/>
-                        </a:rPr>
-                        <a:t>Vật sáng, phản xạ mạnh</a:t>
-                      </a:r>
-                      <a:endParaRPr lang="en-US" sz="1200" dirty="0"/>
-                    </a:p>
-                    <a:p>
-                      <a:pPr algn="l" indent="0" marL="0">
-                        <a:buNone/>
-                      </a:pPr>
-                      <a:r>
-                        <a:rPr lang="en-US" sz="950" dirty="0">
-                          <a:solidFill>
-                            <a:srgbClr val="5F7183"/>
-                          </a:solidFill>
-                          <a:latin typeface="微軟正黑體" pitchFamily="34" charset="0"/>
-                          <a:ea typeface="微軟正黑體" pitchFamily="34" charset="-122"/>
-                          <a:cs typeface="微軟正黑體" pitchFamily="34" charset="-120"/>
-                        </a:rPr>
-                        <a:t>亮色、反射強的東西</a:t>
-                      </a:r>
-                      <a:endParaRPr lang="en-US" sz="1200" dirty="0"/>
-                    </a:p>
-                  </a:txBody>
-                  <a:tcPr marL="63500" marR="63500" marT="38100" marB="38100" anchor="ctr">
-                    <a:lnL w="6350" cap="flat" cmpd="sng" algn="ctr">
-                      <a:solidFill>
-                        <a:srgbClr val="DBE3EA"/>
-                      </a:solidFill>
-                      <a:prstDash val="solid"/>
-                      <a:round/>
-                      <a:headEnd type="none" w="med" len="med"/>
-                      <a:tailEnd type="none" w="med" len="med"/>
-                    </a:lnL>
-                    <a:lnR w="6350" cap="flat" cmpd="sng" algn="ctr">
-                      <a:solidFill>
-                        <a:srgbClr val="DBE3EA"/>
-                      </a:solidFill>
-                      <a:prstDash val="solid"/>
-                      <a:round/>
-                      <a:headEnd type="none" w="med" len="med"/>
-                      <a:tailEnd type="none" w="med" len="med"/>
-                    </a:lnR>
-                    <a:lnT w="6350" cap="flat" cmpd="sng" algn="ctr">
-                      <a:solidFill>
-                        <a:srgbClr val="DBE3EA"/>
-                      </a:solidFill>
-                      <a:prstDash val="solid"/>
-                      <a:round/>
-                      <a:headEnd type="none" w="med" len="med"/>
-                      <a:tailEnd type="none" w="med" len="med"/>
-                    </a:lnT>
-                    <a:lnB w="6350" cap="flat" cmpd="sng" algn="ctr">
-                      <a:solidFill>
-                        <a:srgbClr val="DBE3EA"/>
-                      </a:solidFill>
-                      <a:prstDash val="solid"/>
-                      <a:round/>
-                      <a:headEnd type="none" w="med" len="med"/>
-                      <a:tailEnd type="none" w="med" len="med"/>
-                    </a:lnB>
-                  </a:tcPr>
-                </a:tc>
-                <a:tc>
-                  <a:txBody>
-                    <a:bodyPr/>
-                    <a:lstStyle/>
-                    <a:p>
-                      <a:pPr algn="l" indent="0" marL="0">
-                        <a:buNone/>
-                      </a:pPr>
-                      <a:r>
-                        <a:rPr lang="en-US" sz="1100" dirty="0">
-                          <a:solidFill>
-                            <a:srgbClr val="1A2733"/>
-                          </a:solidFill>
-                          <a:latin typeface="Arial" pitchFamily="34" charset="0"/>
-                          <a:ea typeface="Arial" pitchFamily="34" charset="-122"/>
-                          <a:cs typeface="Arial" pitchFamily="34" charset="-120"/>
-                        </a:rPr>
-                        <a:t>Xe trắng, áo phản quang</a:t>
-                      </a:r>
-                      <a:endParaRPr lang="en-US" sz="1200" dirty="0"/>
-                    </a:p>
-                    <a:p>
-                      <a:pPr algn="l" indent="0" marL="0">
-                        <a:buNone/>
-                      </a:pPr>
-                      <a:r>
-                        <a:rPr lang="en-US" sz="950" dirty="0">
-                          <a:solidFill>
-                            <a:srgbClr val="5F7183"/>
-                          </a:solidFill>
-                          <a:latin typeface="微軟正黑體" pitchFamily="34" charset="0"/>
-                          <a:ea typeface="微軟正黑體" pitchFamily="34" charset="-122"/>
-                          <a:cs typeface="微軟正黑體" pitchFamily="34" charset="-120"/>
-                        </a:rPr>
-                        <a:t>白色的車、反光背心</a:t>
-                      </a:r>
-                      <a:endParaRPr lang="en-US" sz="1200" dirty="0"/>
-                    </a:p>
-                  </a:txBody>
-                  <a:tcPr marL="63500" marR="63500" marT="38100" marB="38100" anchor="ctr">
-                    <a:lnL w="6350" cap="flat" cmpd="sng" algn="ctr">
-                      <a:solidFill>
-                        <a:srgbClr val="DBE3EA"/>
-                      </a:solidFill>
-                      <a:prstDash val="solid"/>
-                      <a:round/>
-                      <a:headEnd type="none" w="med" len="med"/>
-                      <a:tailEnd type="none" w="med" len="med"/>
-                    </a:lnL>
-                    <a:lnR w="6350" cap="flat" cmpd="sng" algn="ctr">
-                      <a:solidFill>
-                        <a:srgbClr val="DBE3EA"/>
-                      </a:solidFill>
-                      <a:prstDash val="solid"/>
-                      <a:round/>
-                      <a:headEnd type="none" w="med" len="med"/>
-                      <a:tailEnd type="none" w="med" len="med"/>
-                    </a:lnR>
-                    <a:lnT w="6350" cap="flat" cmpd="sng" algn="ctr">
-                      <a:solidFill>
-                        <a:srgbClr val="DBE3EA"/>
-                      </a:solidFill>
-                      <a:prstDash val="solid"/>
-                      <a:round/>
-                      <a:headEnd type="none" w="med" len="med"/>
-                      <a:tailEnd type="none" w="med" len="med"/>
-                    </a:lnT>
-                    <a:lnB w="6350" cap="flat" cmpd="sng" algn="ctr">
-                      <a:solidFill>
-                        <a:srgbClr val="DBE3EA"/>
-                      </a:solidFill>
-                      <a:prstDash val="solid"/>
-                      <a:round/>
-                      <a:headEnd type="none" w="med" len="med"/>
-                      <a:tailEnd type="none" w="med" len="med"/>
-                    </a:lnB>
-                  </a:tcPr>
-                </a:tc>
-              </a:tr>
-              <a:tr h="384048">
-                <a:tc>
-                  <a:txBody>
-                    <a:bodyPr/>
-                    <a:lstStyle/>
-                    <a:p>
-                      <a:pPr algn="l" indent="0" marL="0">
-                        <a:buNone/>
-                      </a:pPr>
-                      <a:r>
-                        <a:rPr lang="en-US" sz="1100" b="1" dirty="0">
-                          <a:solidFill>
-                            <a:srgbClr val="0B1F3A"/>
-                          </a:solidFill>
-                          <a:latin typeface="Arial" pitchFamily="34" charset="0"/>
-                          <a:ea typeface="Arial" pitchFamily="34" charset="-122"/>
-                          <a:cs typeface="Arial" pitchFamily="34" charset="-120"/>
-                        </a:rPr>
-                        <a:t>Range (10% reflectivity)</a:t>
-                      </a:r>
-                      <a:endParaRPr lang="en-US" sz="1200" dirty="0"/>
-                    </a:p>
-                    <a:p>
-                      <a:pPr algn="l" indent="0" marL="0">
-                        <a:buNone/>
-                      </a:pPr>
-                      <a:r>
-                        <a:rPr lang="en-US" sz="950" dirty="0">
-                          <a:solidFill>
-                            <a:srgbClr val="5F7183"/>
-                          </a:solidFill>
-                          <a:latin typeface="微軟正黑體" pitchFamily="34" charset="0"/>
-                          <a:ea typeface="微軟正黑體" pitchFamily="34" charset="-122"/>
-                          <a:cs typeface="微軟正黑體" pitchFamily="34" charset="-120"/>
-                        </a:rPr>
-                        <a:t>Range（10% 反射率）</a:t>
-                      </a:r>
-                      <a:endParaRPr lang="en-US" sz="1200" dirty="0"/>
-                    </a:p>
-                  </a:txBody>
-                  <a:tcPr marL="63500" marR="63500" marT="38100" marB="38100" anchor="ctr">
-                    <a:lnL w="6350" cap="flat" cmpd="sng" algn="ctr">
-                      <a:solidFill>
-                        <a:srgbClr val="DBE3EA"/>
-                      </a:solidFill>
-                      <a:prstDash val="solid"/>
-                      <a:round/>
-                      <a:headEnd type="none" w="med" len="med"/>
-                      <a:tailEnd type="none" w="med" len="med"/>
-                    </a:lnL>
-                    <a:lnR w="6350" cap="flat" cmpd="sng" algn="ctr">
-                      <a:solidFill>
-                        <a:srgbClr val="DBE3EA"/>
-                      </a:solidFill>
-                      <a:prstDash val="solid"/>
-                      <a:round/>
-                      <a:headEnd type="none" w="med" len="med"/>
-                      <a:tailEnd type="none" w="med" len="med"/>
-                    </a:lnR>
-                    <a:lnT w="6350" cap="flat" cmpd="sng" algn="ctr">
-                      <a:solidFill>
-                        <a:srgbClr val="DBE3EA"/>
-                      </a:solidFill>
-                      <a:prstDash val="solid"/>
-                      <a:round/>
-                      <a:headEnd type="none" w="med" len="med"/>
-                      <a:tailEnd type="none" w="med" len="med"/>
-                    </a:lnT>
-                    <a:lnB w="6350" cap="flat" cmpd="sng" algn="ctr">
-                      <a:solidFill>
-                        <a:srgbClr val="DBE3EA"/>
-                      </a:solidFill>
-                      <a:prstDash val="solid"/>
-                      <a:round/>
-                      <a:headEnd type="none" w="med" len="med"/>
-                      <a:tailEnd type="none" w="med" len="med"/>
-                    </a:lnB>
-                  </a:tcPr>
-                </a:tc>
-                <a:tc>
-                  <a:txBody>
-                    <a:bodyPr/>
-                    <a:lstStyle/>
-                    <a:p>
-                      <a:pPr algn="l" indent="0" marL="0">
-                        <a:buNone/>
-                      </a:pPr>
-                      <a:r>
-                        <a:rPr lang="en-US" sz="1100" dirty="0">
-                          <a:solidFill>
-                            <a:srgbClr val="1A2733"/>
-                          </a:solidFill>
-                          <a:latin typeface="Arial" pitchFamily="34" charset="0"/>
-                          <a:ea typeface="Arial" pitchFamily="34" charset="-122"/>
-                          <a:cs typeface="Arial" pitchFamily="34" charset="-120"/>
-                        </a:rPr>
-                        <a:t>90 m</a:t>
-                      </a:r>
-                      <a:endParaRPr lang="en-US" sz="1200" dirty="0"/>
-                    </a:p>
-                  </a:txBody>
-                  <a:tcPr marL="63500" marR="63500" marT="38100" marB="38100" anchor="ctr">
-                    <a:lnL w="6350" cap="flat" cmpd="sng" algn="ctr">
-                      <a:solidFill>
-                        <a:srgbClr val="DBE3EA"/>
-                      </a:solidFill>
-                      <a:prstDash val="solid"/>
-                      <a:round/>
-                      <a:headEnd type="none" w="med" len="med"/>
-                      <a:tailEnd type="none" w="med" len="med"/>
-                    </a:lnL>
-                    <a:lnR w="6350" cap="flat" cmpd="sng" algn="ctr">
-                      <a:solidFill>
-                        <a:srgbClr val="DBE3EA"/>
-                      </a:solidFill>
-                      <a:prstDash val="solid"/>
-                      <a:round/>
-                      <a:headEnd type="none" w="med" len="med"/>
-                      <a:tailEnd type="none" w="med" len="med"/>
-                    </a:lnR>
-                    <a:lnT w="6350" cap="flat" cmpd="sng" algn="ctr">
-                      <a:solidFill>
-                        <a:srgbClr val="DBE3EA"/>
-                      </a:solidFill>
-                      <a:prstDash val="solid"/>
-                      <a:round/>
-                      <a:headEnd type="none" w="med" len="med"/>
-                      <a:tailEnd type="none" w="med" len="med"/>
-                    </a:lnT>
-                    <a:lnB w="6350" cap="flat" cmpd="sng" algn="ctr">
-                      <a:solidFill>
-                        <a:srgbClr val="DBE3EA"/>
-                      </a:solidFill>
-                      <a:prstDash val="solid"/>
-                      <a:round/>
-                      <a:headEnd type="none" w="med" len="med"/>
-                      <a:tailEnd type="none" w="med" len="med"/>
-                    </a:lnB>
-                  </a:tcPr>
-                </a:tc>
-                <a:tc>
-                  <a:txBody>
-                    <a:bodyPr/>
-                    <a:lstStyle/>
-                    <a:p>
-                      <a:pPr algn="l" indent="0" marL="0">
-                        <a:buNone/>
-                      </a:pPr>
-                      <a:r>
-                        <a:rPr lang="en-US" sz="1100" dirty="0">
-                          <a:solidFill>
-                            <a:srgbClr val="1A2733"/>
-                          </a:solidFill>
-                          <a:latin typeface="Arial" pitchFamily="34" charset="0"/>
-                          <a:ea typeface="Arial" pitchFamily="34" charset="-122"/>
-                          <a:cs typeface="Arial" pitchFamily="34" charset="-120"/>
-                        </a:rPr>
-                        <a:t>Vật tối, phản xạ yếu</a:t>
-                      </a:r>
-                      <a:endParaRPr lang="en-US" sz="1200" dirty="0"/>
-                    </a:p>
-                    <a:p>
-                      <a:pPr algn="l" indent="0" marL="0">
-                        <a:buNone/>
-                      </a:pPr>
-                      <a:r>
-                        <a:rPr lang="en-US" sz="950" dirty="0">
-                          <a:solidFill>
-                            <a:srgbClr val="5F7183"/>
-                          </a:solidFill>
-                          <a:latin typeface="微軟正黑體" pitchFamily="34" charset="0"/>
-                          <a:ea typeface="微軟正黑體" pitchFamily="34" charset="-122"/>
-                          <a:cs typeface="微軟正黑體" pitchFamily="34" charset="-120"/>
-                        </a:rPr>
-                        <a:t>深色、反射弱的東西</a:t>
-                      </a:r>
-                      <a:endParaRPr lang="en-US" sz="1200" dirty="0"/>
-                    </a:p>
-                  </a:txBody>
-                  <a:tcPr marL="63500" marR="63500" marT="38100" marB="38100" anchor="ctr">
-                    <a:lnL w="6350" cap="flat" cmpd="sng" algn="ctr">
-                      <a:solidFill>
-                        <a:srgbClr val="DBE3EA"/>
-                      </a:solidFill>
-                      <a:prstDash val="solid"/>
-                      <a:round/>
-                      <a:headEnd type="none" w="med" len="med"/>
-                      <a:tailEnd type="none" w="med" len="med"/>
-                    </a:lnL>
-                    <a:lnR w="6350" cap="flat" cmpd="sng" algn="ctr">
-                      <a:solidFill>
-                        <a:srgbClr val="DBE3EA"/>
-                      </a:solidFill>
-                      <a:prstDash val="solid"/>
-                      <a:round/>
-                      <a:headEnd type="none" w="med" len="med"/>
-                      <a:tailEnd type="none" w="med" len="med"/>
-                    </a:lnR>
-                    <a:lnT w="6350" cap="flat" cmpd="sng" algn="ctr">
-                      <a:solidFill>
-                        <a:srgbClr val="DBE3EA"/>
-                      </a:solidFill>
-                      <a:prstDash val="solid"/>
-                      <a:round/>
-                      <a:headEnd type="none" w="med" len="med"/>
-                      <a:tailEnd type="none" w="med" len="med"/>
-                    </a:lnT>
-                    <a:lnB w="6350" cap="flat" cmpd="sng" algn="ctr">
-                      <a:solidFill>
-                        <a:srgbClr val="DBE3EA"/>
-                      </a:solidFill>
-                      <a:prstDash val="solid"/>
-                      <a:round/>
-                      <a:headEnd type="none" w="med" len="med"/>
-                      <a:tailEnd type="none" w="med" len="med"/>
-                    </a:lnB>
-                  </a:tcPr>
-                </a:tc>
-                <a:tc>
-                  <a:txBody>
-                    <a:bodyPr/>
-                    <a:lstStyle/>
-                    <a:p>
-                      <a:pPr algn="l" indent="0" marL="0">
-                        <a:buNone/>
-                      </a:pPr>
-                      <a:r>
-                        <a:rPr lang="en-US" sz="1100" dirty="0">
-                          <a:solidFill>
-                            <a:srgbClr val="1A2733"/>
-                          </a:solidFill>
-                          <a:latin typeface="Arial" pitchFamily="34" charset="0"/>
-                          <a:ea typeface="Arial" pitchFamily="34" charset="-122"/>
-                          <a:cs typeface="Arial" pitchFamily="34" charset="-120"/>
-                        </a:rPr>
-                        <a:t>Xe đen, áo mưa sẫm màu</a:t>
-                      </a:r>
-                      <a:endParaRPr lang="en-US" sz="1200" dirty="0"/>
-                    </a:p>
-                    <a:p>
-                      <a:pPr algn="l" indent="0" marL="0">
-                        <a:buNone/>
-                      </a:pPr>
-                      <a:r>
-                        <a:rPr lang="en-US" sz="950" dirty="0">
-                          <a:solidFill>
-                            <a:srgbClr val="5F7183"/>
-                          </a:solidFill>
-                          <a:latin typeface="微軟正黑體" pitchFamily="34" charset="0"/>
-                          <a:ea typeface="微軟正黑體" pitchFamily="34" charset="-122"/>
-                          <a:cs typeface="微軟正黑體" pitchFamily="34" charset="-120"/>
-                        </a:rPr>
-                        <a:t>黑色的車、深色雨衣</a:t>
-                      </a:r>
-                      <a:endParaRPr lang="en-US" sz="1200" dirty="0"/>
-                    </a:p>
-                  </a:txBody>
-                  <a:tcPr marL="63500" marR="63500" marT="38100" marB="38100" anchor="ctr">
-                    <a:lnL w="6350" cap="flat" cmpd="sng" algn="ctr">
-                      <a:solidFill>
-                        <a:srgbClr val="DBE3EA"/>
-                      </a:solidFill>
-                      <a:prstDash val="solid"/>
-                      <a:round/>
-                      <a:headEnd type="none" w="med" len="med"/>
-                      <a:tailEnd type="none" w="med" len="med"/>
-                    </a:lnL>
-                    <a:lnR w="6350" cap="flat" cmpd="sng" algn="ctr">
-                      <a:solidFill>
-                        <a:srgbClr val="DBE3EA"/>
-                      </a:solidFill>
-                      <a:prstDash val="solid"/>
-                      <a:round/>
-                      <a:headEnd type="none" w="med" len="med"/>
-                      <a:tailEnd type="none" w="med" len="med"/>
-                    </a:lnR>
-                    <a:lnT w="6350" cap="flat" cmpd="sng" algn="ctr">
-                      <a:solidFill>
-                        <a:srgbClr val="DBE3EA"/>
-                      </a:solidFill>
-                      <a:prstDash val="solid"/>
-                      <a:round/>
-                      <a:headEnd type="none" w="med" len="med"/>
-                      <a:tailEnd type="none" w="med" len="med"/>
-                    </a:lnT>
-                    <a:lnB w="6350" cap="flat" cmpd="sng" algn="ctr">
-                      <a:solidFill>
-                        <a:srgbClr val="DBE3EA"/>
-                      </a:solidFill>
-                      <a:prstDash val="solid"/>
-                      <a:round/>
-                      <a:headEnd type="none" w="med" len="med"/>
-                      <a:tailEnd type="none" w="med" len="med"/>
-                    </a:lnB>
-                  </a:tcPr>
-                </a:tc>
-              </a:tr>
-            </a:tbl>
-          </a:graphicData>
-        </a:graphic>
-      </p:graphicFrame>
-      <p:sp>
-        <p:nvSpPr>
-          <p:cNvPr id="6" name="Text 3"/>
-          <p:cNvSpPr txBox="1"/>
-          <p:nvPr/>
-        </p:nvSpPr>
-        <p:spPr>
-          <a:xfrm>
-            <a:off x="502920" y="3405760"/>
-            <a:ext cx="8138160" cy="457200"/>
-          </a:xfrm>
-          <a:prstGeom prst="rect">
-            <a:avLst/>
-          </a:prstGeom>
-          <a:noFill/>
-          <a:ln/>
-        </p:spPr>
-        <p:txBody>
-          <a:bodyPr wrap="square" lIns="0" tIns="0" rIns="0" bIns="0" rtlCol="0" anchor="t"/>
-          <a:lstStyle/>
-          <a:p>
-            <a:pPr indent="0" marL="0">
-              <a:lnSpc>
-                <a:spcPct val="116000"/>
-              </a:lnSpc>
-              <a:buNone/>
-            </a:pPr>
-            <a:r>
-              <a:rPr lang="en-US" sz="1200" b="1" dirty="0">
-                <a:solidFill>
-                  <a:srgbClr val="007F72"/>
-                </a:solidFill>
-                <a:latin typeface="Arial" pitchFamily="34" charset="0"/>
-                <a:ea typeface="Arial" pitchFamily="34" charset="-122"/>
-                <a:cs typeface="Arial" pitchFamily="34" charset="-120"/>
-              </a:rPr>
-              <a:t>Quảng cáo hay ghi 170 m. Con số phải dùng để thiết kế là 90 m.</a:t>
-            </a:r>
-            <a:endParaRPr lang="en-US" sz="1200" dirty="0"/>
-          </a:p>
-          <a:p>
-            <a:pPr indent="0" marL="0">
-              <a:lnSpc>
-                <a:spcPct val="116000"/>
-              </a:lnSpc>
-              <a:buNone/>
-            </a:pPr>
-            <a:r>
-              <a:rPr lang="en-US" sz="1100" dirty="0">
-                <a:solidFill>
-                  <a:srgbClr val="007F72"/>
-                </a:solidFill>
-                <a:latin typeface="微軟正黑體" pitchFamily="34" charset="0"/>
-                <a:ea typeface="微軟正黑體" pitchFamily="34" charset="-122"/>
-                <a:cs typeface="微軟正黑體" pitchFamily="34" charset="-120"/>
-              </a:rPr>
-              <a:t>廣告上會寫 170 公尺。真正設計的時候要用的是 90 公尺。</a:t>
-            </a:r>
-            <a:endParaRPr lang="en-US" sz="1200" dirty="0"/>
-          </a:p>
-        </p:txBody>
+          <a:ln w="12700">
+            <a:solidFill>
+              <a:srgbClr val="DBE3EA"/>
+            </a:solidFill>
+            <a:prstDash val="solid"/>
+          </a:ln>
+        </p:spPr>
       </p:sp>
       <p:pic>
         <p:nvPicPr>
-          <p:cNvPr id="8" name="Image 0" descr="/Users/tsengchenghsun/Class/carClass/Claude outputs/第五週(10-8)/src/logo.png">    </p:cNvPr>
+          <p:cNvPr id="4" name="Image 0" descr="/Users/tsengchenghsun/Class/carClass/Claude outputs/第五週(10-8)/src/img/w5_os1_range2.png">    </p:cNvPr>
           <p:cNvPicPr>
             <a:picLocks noChangeAspect="1"/>
           </p:cNvPicPr>
@@ -10878,8 +9352,8 @@
         </p:blipFill>
         <p:spPr>
           <a:xfrm>
-            <a:off x="7882128" y="109728"/>
-            <a:ext cx="1097280" cy="242439"/>
+            <a:off x="576072" y="965644"/>
+            <a:ext cx="4059936" cy="814048"/>
           </a:xfrm>
           <a:prstGeom prst="rect">
             <a:avLst/>
@@ -10888,14 +9362,14 @@
       </p:pic>
       <p:sp>
         <p:nvSpPr>
-          <p:cNvPr id="9" name="Text 4"/>
+          <p:cNvPr id="5" name="Text 2"/>
           <p:cNvSpPr txBox="1"/>
           <p:nvPr/>
         </p:nvSpPr>
         <p:spPr>
           <a:xfrm>
-            <a:off x="109728" y="128016"/>
-            <a:ext cx="822960" cy="256032"/>
+            <a:off x="576072" y="1812647"/>
+            <a:ext cx="4059936" cy="182880"/>
           </a:xfrm>
           <a:prstGeom prst="rect">
             <a:avLst/>
@@ -10907,11 +9381,11 @@
           <a:bodyPr wrap="square" lIns="0" tIns="0" rIns="0" bIns="0" rtlCol="0" anchor="ctr"/>
           <a:lstStyle/>
           <a:p>
-            <a:pPr indent="0" marL="0">
+            <a:pPr algn="ctr" indent="0" marL="0">
               <a:buNone/>
             </a:pPr>
             <a:r>
-              <a:rPr lang="en-US" sz="900" dirty="0">
+              <a:rPr lang="en-US" sz="700" dirty="0">
                 <a:solidFill>
                   <a:srgbClr val="5F7183"/>
                 </a:solidFill>
@@ -10919,6 +9393,658 @@
                 <a:ea typeface="Arial" pitchFamily="34" charset="-122"/>
                 <a:cs typeface="Arial" pitchFamily="34" charset="-120"/>
               </a:rPr>
+              <a:t>Ouster OS1 datasheet, Rev7 / FW 3.2, p.1 · 節錄 · 讀取 2026/10/02</a:t>
+            </a:r>
+            <a:endParaRPr lang="en-US" sz="700" dirty="0"/>
+          </a:p>
+        </p:txBody>
+      </p:sp>
+      <p:sp>
+        <p:nvSpPr>
+          <p:cNvPr id="6" name="Text 3"/>
+          <p:cNvSpPr txBox="1"/>
+          <p:nvPr/>
+        </p:nvSpPr>
+        <p:spPr>
+          <a:xfrm>
+            <a:off x="4983480" y="786384"/>
+            <a:ext cx="3657600" cy="971579"/>
+          </a:xfrm>
+          <a:prstGeom prst="rect">
+            <a:avLst/>
+          </a:prstGeom>
+          <a:noFill/>
+          <a:ln/>
+        </p:spPr>
+        <p:txBody>
+          <a:bodyPr wrap="square" lIns="0" tIns="0" rIns="0" bIns="0" rtlCol="0" anchor="t"/>
+          <a:lstStyle/>
+          <a:p>
+            <a:pPr indent="0" marL="0">
+              <a:lnSpc>
+                <a:spcPct val="116000"/>
+              </a:lnSpc>
+              <a:buNone/>
+            </a:pPr>
+            <a:r>
+              <a:rPr lang="en-US" sz="1800" b="1" dirty="0">
+                <a:solidFill>
+                  <a:srgbClr val="0B1F3A"/>
+                </a:solidFill>
+                <a:latin typeface="Arial" pitchFamily="34" charset="0"/>
+                <a:ea typeface="Arial" pitchFamily="34" charset="-122"/>
+                <a:cs typeface="Arial" pitchFamily="34" charset="-120"/>
+              </a:rPr>
+              <a:t>«90 m» hay «170 m»: cùng một lidar, hai con số</a:t>
+            </a:r>
+            <a:endParaRPr lang="en-US" sz="1800" dirty="0"/>
+          </a:p>
+          <a:p>
+            <a:pPr indent="0" marL="0">
+              <a:lnSpc>
+                <a:spcPct val="116000"/>
+              </a:lnSpc>
+              <a:buNone/>
+            </a:pPr>
+            <a:r>
+              <a:rPr lang="en-US" sz="1250" dirty="0">
+                <a:solidFill>
+                  <a:srgbClr val="007F72"/>
+                </a:solidFill>
+                <a:latin typeface="微軟正黑體" pitchFamily="34" charset="0"/>
+                <a:ea typeface="微軟正黑體" pitchFamily="34" charset="-122"/>
+                <a:cs typeface="微軟正黑體" pitchFamily="34" charset="-120"/>
+              </a:rPr>
+              <a:t>「90 公尺」還是「170 公尺」：同一顆光達，兩個數字</a:t>
+            </a:r>
+            <a:endParaRPr lang="en-US" sz="1800" dirty="0"/>
+          </a:p>
+        </p:txBody>
+      </p:sp>
+      <p:sp>
+        <p:nvSpPr>
+          <p:cNvPr id="7" name="Shape 4"/>
+          <p:cNvSpPr/>
+          <p:nvPr/>
+        </p:nvSpPr>
+        <p:spPr>
+          <a:xfrm>
+            <a:off x="4983480" y="1849403"/>
+            <a:ext cx="1060704" cy="400118"/>
+          </a:xfrm>
+          <a:prstGeom prst="roundRect">
+            <a:avLst>
+              <a:gd name="adj" fmla="val 13712"/>
+            </a:avLst>
+          </a:prstGeom>
+          <a:solidFill>
+            <a:srgbClr val="0B1F3A"/>
+          </a:solidFill>
+          <a:ln/>
+        </p:spPr>
+      </p:sp>
+      <p:sp>
+        <p:nvSpPr>
+          <p:cNvPr id="8" name="Text 5"/>
+          <p:cNvSpPr txBox="1"/>
+          <p:nvPr/>
+        </p:nvSpPr>
+        <p:spPr>
+          <a:xfrm>
+            <a:off x="5038344" y="1885979"/>
+            <a:ext cx="950976" cy="345254"/>
+          </a:xfrm>
+          <a:prstGeom prst="rect">
+            <a:avLst/>
+          </a:prstGeom>
+          <a:noFill/>
+          <a:ln/>
+        </p:spPr>
+        <p:txBody>
+          <a:bodyPr wrap="square" lIns="0" tIns="0" rIns="0" bIns="0" rtlCol="0" anchor="t"/>
+          <a:lstStyle/>
+          <a:p>
+            <a:pPr algn="ctr" indent="0" marL="0">
+              <a:lnSpc>
+                <a:spcPct val="106000"/>
+              </a:lnSpc>
+              <a:buNone/>
+            </a:pPr>
+            <a:r>
+              <a:rPr lang="en-US" sz="900" b="1" dirty="0">
+                <a:solidFill>
+                  <a:srgbClr val="FFFFFF"/>
+                </a:solidFill>
+                <a:latin typeface="Arial" pitchFamily="34" charset="0"/>
+                <a:ea typeface="Arial" pitchFamily="34" charset="-122"/>
+                <a:cs typeface="Arial" pitchFamily="34" charset="-120"/>
+              </a:rPr>
+              <a:t>80%</a:t>
+            </a:r>
+            <a:endParaRPr lang="en-US" sz="900" dirty="0"/>
+          </a:p>
+          <a:p>
+            <a:pPr algn="ctr" indent="0" marL="0">
+              <a:lnSpc>
+                <a:spcPct val="106000"/>
+              </a:lnSpc>
+              <a:buNone/>
+            </a:pPr>
+            <a:r>
+              <a:rPr lang="en-US" sz="850" dirty="0">
+                <a:solidFill>
+                  <a:srgbClr val="FFFFFF"/>
+                </a:solidFill>
+                <a:latin typeface="微軟正黑體" pitchFamily="34" charset="0"/>
+                <a:ea typeface="微軟正黑體" pitchFamily="34" charset="-122"/>
+                <a:cs typeface="微軟正黑體" pitchFamily="34" charset="-120"/>
+              </a:rPr>
+              <a:t>80%</a:t>
+            </a:r>
+            <a:endParaRPr lang="en-US" sz="900" dirty="0"/>
+          </a:p>
+        </p:txBody>
+      </p:sp>
+      <p:sp>
+        <p:nvSpPr>
+          <p:cNvPr id="9" name="Text 6"/>
+          <p:cNvSpPr txBox="1"/>
+          <p:nvPr/>
+        </p:nvSpPr>
+        <p:spPr>
+          <a:xfrm>
+            <a:off x="6190488" y="1849403"/>
+            <a:ext cx="2450592" cy="454982"/>
+          </a:xfrm>
+          <a:prstGeom prst="rect">
+            <a:avLst/>
+          </a:prstGeom>
+          <a:noFill/>
+          <a:ln/>
+        </p:spPr>
+        <p:txBody>
+          <a:bodyPr wrap="square" lIns="0" tIns="0" rIns="0" bIns="0" rtlCol="0" anchor="t"/>
+          <a:lstStyle/>
+          <a:p>
+            <a:pPr indent="0" marL="0">
+              <a:lnSpc>
+                <a:spcPct val="126000"/>
+              </a:lnSpc>
+              <a:buNone/>
+            </a:pPr>
+            <a:r>
+              <a:rPr lang="en-US" sz="1100" dirty="0">
+                <a:solidFill>
+                  <a:srgbClr val="1A2733"/>
+                </a:solidFill>
+                <a:latin typeface="Arial" pitchFamily="34" charset="0"/>
+                <a:ea typeface="Arial" pitchFamily="34" charset="-122"/>
+                <a:cs typeface="Arial" pitchFamily="34" charset="-120"/>
+              </a:rPr>
+              <a:t>Vật sáng: xe trắng, áo phản quang</a:t>
+            </a:r>
+            <a:endParaRPr lang="en-US" sz="1100" dirty="0"/>
+          </a:p>
+          <a:p>
+            <a:pPr indent="0" marL="0">
+              <a:lnSpc>
+                <a:spcPct val="126000"/>
+              </a:lnSpc>
+              <a:buNone/>
+            </a:pPr>
+            <a:r>
+              <a:rPr lang="en-US" sz="1000" dirty="0">
+                <a:solidFill>
+                  <a:srgbClr val="5F7183"/>
+                </a:solidFill>
+                <a:latin typeface="微軟正黑體" pitchFamily="34" charset="0"/>
+                <a:ea typeface="微軟正黑體" pitchFamily="34" charset="-122"/>
+                <a:cs typeface="微軟正黑體" pitchFamily="34" charset="-120"/>
+              </a:rPr>
+              <a:t>亮色、反射強：白色的車、反光背心</a:t>
+            </a:r>
+            <a:endParaRPr lang="en-US" sz="1100" dirty="0"/>
+          </a:p>
+        </p:txBody>
+      </p:sp>
+      <p:sp>
+        <p:nvSpPr>
+          <p:cNvPr id="10" name="Shape 7"/>
+          <p:cNvSpPr/>
+          <p:nvPr/>
+        </p:nvSpPr>
+        <p:spPr>
+          <a:xfrm>
+            <a:off x="4983480" y="2368393"/>
+            <a:ext cx="1060704" cy="400118"/>
+          </a:xfrm>
+          <a:prstGeom prst="roundRect">
+            <a:avLst>
+              <a:gd name="adj" fmla="val 13712"/>
+            </a:avLst>
+          </a:prstGeom>
+          <a:solidFill>
+            <a:srgbClr val="007F72"/>
+          </a:solidFill>
+          <a:ln/>
+        </p:spPr>
+      </p:sp>
+      <p:sp>
+        <p:nvSpPr>
+          <p:cNvPr id="11" name="Text 8"/>
+          <p:cNvSpPr txBox="1"/>
+          <p:nvPr/>
+        </p:nvSpPr>
+        <p:spPr>
+          <a:xfrm>
+            <a:off x="5038344" y="2404969"/>
+            <a:ext cx="950976" cy="345254"/>
+          </a:xfrm>
+          <a:prstGeom prst="rect">
+            <a:avLst/>
+          </a:prstGeom>
+          <a:noFill/>
+          <a:ln/>
+        </p:spPr>
+        <p:txBody>
+          <a:bodyPr wrap="square" lIns="0" tIns="0" rIns="0" bIns="0" rtlCol="0" anchor="t"/>
+          <a:lstStyle/>
+          <a:p>
+            <a:pPr algn="ctr" indent="0" marL="0">
+              <a:lnSpc>
+                <a:spcPct val="106000"/>
+              </a:lnSpc>
+              <a:buNone/>
+            </a:pPr>
+            <a:r>
+              <a:rPr lang="en-US" sz="900" b="1" dirty="0">
+                <a:solidFill>
+                  <a:srgbClr val="FFFFFF"/>
+                </a:solidFill>
+                <a:latin typeface="Arial" pitchFamily="34" charset="0"/>
+                <a:ea typeface="Arial" pitchFamily="34" charset="-122"/>
+                <a:cs typeface="Arial" pitchFamily="34" charset="-120"/>
+              </a:rPr>
+              <a:t>10%</a:t>
+            </a:r>
+            <a:endParaRPr lang="en-US" sz="900" dirty="0"/>
+          </a:p>
+          <a:p>
+            <a:pPr algn="ctr" indent="0" marL="0">
+              <a:lnSpc>
+                <a:spcPct val="106000"/>
+              </a:lnSpc>
+              <a:buNone/>
+            </a:pPr>
+            <a:r>
+              <a:rPr lang="en-US" sz="850" dirty="0">
+                <a:solidFill>
+                  <a:srgbClr val="FFFFFF"/>
+                </a:solidFill>
+                <a:latin typeface="微軟正黑體" pitchFamily="34" charset="0"/>
+                <a:ea typeface="微軟正黑體" pitchFamily="34" charset="-122"/>
+                <a:cs typeface="微軟正黑體" pitchFamily="34" charset="-120"/>
+              </a:rPr>
+              <a:t>10%</a:t>
+            </a:r>
+            <a:endParaRPr lang="en-US" sz="900" dirty="0"/>
+          </a:p>
+        </p:txBody>
+      </p:sp>
+      <p:sp>
+        <p:nvSpPr>
+          <p:cNvPr id="12" name="Text 9"/>
+          <p:cNvSpPr txBox="1"/>
+          <p:nvPr/>
+        </p:nvSpPr>
+        <p:spPr>
+          <a:xfrm>
+            <a:off x="6190488" y="2368393"/>
+            <a:ext cx="2450592" cy="454982"/>
+          </a:xfrm>
+          <a:prstGeom prst="rect">
+            <a:avLst/>
+          </a:prstGeom>
+          <a:noFill/>
+          <a:ln/>
+        </p:spPr>
+        <p:txBody>
+          <a:bodyPr wrap="square" lIns="0" tIns="0" rIns="0" bIns="0" rtlCol="0" anchor="t"/>
+          <a:lstStyle/>
+          <a:p>
+            <a:pPr indent="0" marL="0">
+              <a:lnSpc>
+                <a:spcPct val="126000"/>
+              </a:lnSpc>
+              <a:buNone/>
+            </a:pPr>
+            <a:r>
+              <a:rPr lang="en-US" sz="1100" dirty="0">
+                <a:solidFill>
+                  <a:srgbClr val="1A2733"/>
+                </a:solidFill>
+                <a:latin typeface="Arial" pitchFamily="34" charset="0"/>
+                <a:ea typeface="Arial" pitchFamily="34" charset="-122"/>
+                <a:cs typeface="Arial" pitchFamily="34" charset="-120"/>
+              </a:rPr>
+              <a:t>Vật tối: xe đen, áo mưa sẫm màu</a:t>
+            </a:r>
+            <a:endParaRPr lang="en-US" sz="1100" dirty="0"/>
+          </a:p>
+          <a:p>
+            <a:pPr indent="0" marL="0">
+              <a:lnSpc>
+                <a:spcPct val="126000"/>
+              </a:lnSpc>
+              <a:buNone/>
+            </a:pPr>
+            <a:r>
+              <a:rPr lang="en-US" sz="1000" dirty="0">
+                <a:solidFill>
+                  <a:srgbClr val="5F7183"/>
+                </a:solidFill>
+                <a:latin typeface="微軟正黑體" pitchFamily="34" charset="0"/>
+                <a:ea typeface="微軟正黑體" pitchFamily="34" charset="-122"/>
+                <a:cs typeface="微軟正黑體" pitchFamily="34" charset="-120"/>
+              </a:rPr>
+              <a:t>深色、反射弱：黑色的車、深色雨衣</a:t>
+            </a:r>
+            <a:endParaRPr lang="en-US" sz="1100" dirty="0"/>
+          </a:p>
+        </p:txBody>
+      </p:sp>
+      <p:sp>
+        <p:nvSpPr>
+          <p:cNvPr id="13" name="Shape 10"/>
+          <p:cNvSpPr/>
+          <p:nvPr/>
+        </p:nvSpPr>
+        <p:spPr>
+          <a:xfrm>
+            <a:off x="4983480" y="2887384"/>
+            <a:ext cx="1060704" cy="400118"/>
+          </a:xfrm>
+          <a:prstGeom prst="roundRect">
+            <a:avLst>
+              <a:gd name="adj" fmla="val 13712"/>
+            </a:avLst>
+          </a:prstGeom>
+          <a:solidFill>
+            <a:srgbClr val="FFB020"/>
+          </a:solidFill>
+          <a:ln/>
+        </p:spPr>
+      </p:sp>
+      <p:sp>
+        <p:nvSpPr>
+          <p:cNvPr id="14" name="Text 11"/>
+          <p:cNvSpPr txBox="1"/>
+          <p:nvPr/>
+        </p:nvSpPr>
+        <p:spPr>
+          <a:xfrm>
+            <a:off x="5038344" y="2923960"/>
+            <a:ext cx="950976" cy="345254"/>
+          </a:xfrm>
+          <a:prstGeom prst="rect">
+            <a:avLst/>
+          </a:prstGeom>
+          <a:noFill/>
+          <a:ln/>
+        </p:spPr>
+        <p:txBody>
+          <a:bodyPr wrap="square" lIns="0" tIns="0" rIns="0" bIns="0" rtlCol="0" anchor="t"/>
+          <a:lstStyle/>
+          <a:p>
+            <a:pPr algn="ctr" indent="0" marL="0">
+              <a:lnSpc>
+                <a:spcPct val="106000"/>
+              </a:lnSpc>
+              <a:buNone/>
+            </a:pPr>
+            <a:r>
+              <a:rPr lang="en-US" sz="900" b="1" dirty="0">
+                <a:solidFill>
+                  <a:srgbClr val="3A2A00"/>
+                </a:solidFill>
+                <a:latin typeface="Arial" pitchFamily="34" charset="0"/>
+                <a:ea typeface="Arial" pitchFamily="34" charset="-122"/>
+                <a:cs typeface="Arial" pitchFamily="34" charset="-120"/>
+              </a:rPr>
+              <a:t>Dùng số nào</a:t>
+            </a:r>
+            <a:endParaRPr lang="en-US" sz="900" dirty="0"/>
+          </a:p>
+          <a:p>
+            <a:pPr algn="ctr" indent="0" marL="0">
+              <a:lnSpc>
+                <a:spcPct val="106000"/>
+              </a:lnSpc>
+              <a:buNone/>
+            </a:pPr>
+            <a:r>
+              <a:rPr lang="en-US" sz="850" dirty="0">
+                <a:solidFill>
+                  <a:srgbClr val="3A2A00"/>
+                </a:solidFill>
+                <a:latin typeface="微軟正黑體" pitchFamily="34" charset="0"/>
+                <a:ea typeface="微軟正黑體" pitchFamily="34" charset="-122"/>
+                <a:cs typeface="微軟正黑體" pitchFamily="34" charset="-120"/>
+              </a:rPr>
+              <a:t>要用哪個</a:t>
+            </a:r>
+            <a:endParaRPr lang="en-US" sz="900" dirty="0"/>
+          </a:p>
+        </p:txBody>
+      </p:sp>
+      <p:sp>
+        <p:nvSpPr>
+          <p:cNvPr id="15" name="Text 12"/>
+          <p:cNvSpPr txBox="1"/>
+          <p:nvPr/>
+        </p:nvSpPr>
+        <p:spPr>
+          <a:xfrm>
+            <a:off x="6190488" y="2887384"/>
+            <a:ext cx="2450592" cy="635187"/>
+          </a:xfrm>
+          <a:prstGeom prst="rect">
+            <a:avLst/>
+          </a:prstGeom>
+          <a:noFill/>
+          <a:ln/>
+        </p:spPr>
+        <p:txBody>
+          <a:bodyPr wrap="square" lIns="0" tIns="0" rIns="0" bIns="0" rtlCol="0" anchor="t"/>
+          <a:lstStyle/>
+          <a:p>
+            <a:pPr indent="0" marL="0">
+              <a:lnSpc>
+                <a:spcPct val="126000"/>
+              </a:lnSpc>
+              <a:buNone/>
+            </a:pPr>
+            <a:r>
+              <a:rPr lang="en-US" sz="1100" dirty="0">
+                <a:solidFill>
+                  <a:srgbClr val="1A2733"/>
+                </a:solidFill>
+                <a:latin typeface="Arial" pitchFamily="34" charset="0"/>
+                <a:ea typeface="Arial" pitchFamily="34" charset="-122"/>
+                <a:cs typeface="Arial" pitchFamily="34" charset="-120"/>
+              </a:rPr>
+              <a:t>Thiết kế dùng 90 m — ngoài đường có xe đen.</a:t>
+            </a:r>
+            <a:endParaRPr lang="en-US" sz="1100" dirty="0"/>
+          </a:p>
+          <a:p>
+            <a:pPr indent="0" marL="0">
+              <a:lnSpc>
+                <a:spcPct val="126000"/>
+              </a:lnSpc>
+              <a:buNone/>
+            </a:pPr>
+            <a:r>
+              <a:rPr lang="en-US" sz="1000" dirty="0">
+                <a:solidFill>
+                  <a:srgbClr val="5F7183"/>
+                </a:solidFill>
+                <a:latin typeface="微軟正黑體" pitchFamily="34" charset="0"/>
+                <a:ea typeface="微軟正黑體" pitchFamily="34" charset="-122"/>
+                <a:cs typeface="微軟正黑體" pitchFamily="34" charset="-120"/>
+              </a:rPr>
+              <a:t>設計用 90 公尺。路上一定有黑色的車。</a:t>
+            </a:r>
+            <a:endParaRPr lang="en-US" sz="1100" dirty="0"/>
+          </a:p>
+        </p:txBody>
+      </p:sp>
+      <p:sp>
+        <p:nvSpPr>
+          <p:cNvPr id="16" name="Shape 13"/>
+          <p:cNvSpPr/>
+          <p:nvPr/>
+        </p:nvSpPr>
+        <p:spPr>
+          <a:xfrm>
+            <a:off x="502920" y="3931920"/>
+            <a:ext cx="8138160" cy="566928"/>
+          </a:xfrm>
+          <a:prstGeom prst="roundRect">
+            <a:avLst>
+              <a:gd name="adj" fmla="val 14516"/>
+            </a:avLst>
+          </a:prstGeom>
+          <a:solidFill>
+            <a:srgbClr val="FFF6E3"/>
+          </a:solidFill>
+          <a:ln w="12700">
+            <a:solidFill>
+              <a:srgbClr val="FFB020"/>
+            </a:solidFill>
+            <a:prstDash val="solid"/>
+          </a:ln>
+        </p:spPr>
+      </p:sp>
+      <p:sp>
+        <p:nvSpPr>
+          <p:cNvPr id="17" name="Text 14"/>
+          <p:cNvSpPr txBox="1"/>
+          <p:nvPr/>
+        </p:nvSpPr>
+        <p:spPr>
+          <a:xfrm>
+            <a:off x="685800" y="3995928"/>
+            <a:ext cx="7772400" cy="457200"/>
+          </a:xfrm>
+          <a:prstGeom prst="rect">
+            <a:avLst/>
+          </a:prstGeom>
+          <a:noFill/>
+          <a:ln/>
+        </p:spPr>
+        <p:txBody>
+          <a:bodyPr wrap="square" lIns="0" tIns="0" rIns="0" bIns="0" rtlCol="0" anchor="t"/>
+          <a:lstStyle/>
+          <a:p>
+            <a:pPr indent="0" marL="0">
+              <a:lnSpc>
+                <a:spcPct val="116000"/>
+              </a:lnSpc>
+              <a:buNone/>
+            </a:pPr>
+            <a:r>
+              <a:rPr lang="en-US" sz="1200" b="1" dirty="0">
+                <a:solidFill>
+                  <a:srgbClr val="7A4E00"/>
+                </a:solidFill>
+                <a:latin typeface="Arial" pitchFamily="34" charset="0"/>
+                <a:ea typeface="Arial" pitchFamily="34" charset="-122"/>
+                <a:cs typeface="Arial" pitchFamily="34" charset="-120"/>
+              </a:rPr>
+              <a:t>Quảng cáo hay ghi 170 m. Con số phải dùng để thiết kế là 90 m.</a:t>
+            </a:r>
+            <a:endParaRPr lang="en-US" sz="1200" dirty="0"/>
+          </a:p>
+          <a:p>
+            <a:pPr indent="0" marL="0">
+              <a:lnSpc>
+                <a:spcPct val="116000"/>
+              </a:lnSpc>
+              <a:buNone/>
+            </a:pPr>
+            <a:r>
+              <a:rPr lang="en-US" sz="1100" dirty="0">
+                <a:solidFill>
+                  <a:srgbClr val="7A4E00"/>
+                </a:solidFill>
+                <a:latin typeface="微軟正黑體" pitchFamily="34" charset="0"/>
+                <a:ea typeface="微軟正黑體" pitchFamily="34" charset="-122"/>
+                <a:cs typeface="微軟正黑體" pitchFamily="34" charset="-120"/>
+              </a:rPr>
+              <a:t>廣告上會寫 170 公尺。真正設計的時候要用的是 90 公尺。</a:t>
+            </a:r>
+            <a:endParaRPr lang="en-US" sz="1200" dirty="0"/>
+          </a:p>
+        </p:txBody>
+      </p:sp>
+      <p:pic>
+        <p:nvPicPr>
+          <p:cNvPr id="19" name="Image 1" descr="/Users/tsengchenghsun/Class/carClass/Claude outputs/第五週(10-8)/src/logo.png">    </p:cNvPr>
+          <p:cNvPicPr>
+            <a:picLocks noChangeAspect="1"/>
+          </p:cNvPicPr>
+          <p:nvPr/>
+        </p:nvPicPr>
+        <p:blipFill>
+          <a:blip r:embed="rId2"/>
+          <a:stretch>
+            <a:fillRect/>
+          </a:stretch>
+        </p:blipFill>
+        <p:spPr>
+          <a:xfrm>
+            <a:off x="7882128" y="109728"/>
+            <a:ext cx="1097280" cy="242439"/>
+          </a:xfrm>
+          <a:prstGeom prst="rect">
+            <a:avLst/>
+          </a:prstGeom>
+        </p:spPr>
+      </p:pic>
+      <p:sp>
+        <p:nvSpPr>
+          <p:cNvPr id="20" name="Text 15"/>
+          <p:cNvSpPr txBox="1"/>
+          <p:nvPr/>
+        </p:nvSpPr>
+        <p:spPr>
+          <a:xfrm>
+            <a:off x="109728" y="128016"/>
+            <a:ext cx="822960" cy="256032"/>
+          </a:xfrm>
+          <a:prstGeom prst="rect">
+            <a:avLst/>
+          </a:prstGeom>
+          <a:noFill/>
+          <a:ln/>
+        </p:spPr>
+        <p:txBody>
+          <a:bodyPr wrap="square" lIns="0" tIns="0" rIns="0" bIns="0" rtlCol="0" anchor="ctr"/>
+          <a:lstStyle/>
+          <a:p>
+            <a:pPr indent="0" marL="0">
+              <a:buNone/>
+            </a:pPr>
+            <a:r>
+              <a:rPr lang="en-US" sz="900" dirty="0">
+                <a:solidFill>
+                  <a:srgbClr val="5F7183"/>
+                </a:solidFill>
+                <a:latin typeface="Arial" pitchFamily="34" charset="0"/>
+                <a:ea typeface="Arial" pitchFamily="34" charset="-122"/>
+                <a:cs typeface="Arial" pitchFamily="34" charset="-120"/>
+              </a:rPr>
               <a:t>12 / 14</a:t>
             </a:r>
             <a:endParaRPr lang="en-US" sz="900" dirty="0"/>
@@ -10927,7 +10053,7 @@
       </p:sp>
       <p:sp>
         <p:nvSpPr>
-          <p:cNvPr id="10" name="Text 5"/>
+          <p:cNvPr id="21" name="Text 16"/>
           <p:cNvSpPr txBox="1"/>
           <p:nvPr/>
         </p:nvSpPr>
@@ -11547,7 +10673,7 @@
                 <a:ea typeface="Arial" pitchFamily="34" charset="-122"/>
                 <a:cs typeface="Arial" pitchFamily="34" charset="-120"/>
               </a:rPr>
-              <a:t>Làm xong OS1 thì đổi sang AT128 làm lại một lượt</a:t>
+              <a:t>Làm xong OS1 thì đổi sang AT128P làm lại một lượt</a:t>
             </a:r>
             <a:endParaRPr lang="en-US" sz="1250" dirty="0"/>
           </a:p>
@@ -11567,7 +10693,7 @@
                 <a:ea typeface="微軟正黑體" pitchFamily="34" charset="-122"/>
                 <a:cs typeface="微軟正黑體" pitchFamily="34" charset="-120"/>
               </a:rPr>
-              <a:t>OS1 做完，換 AT128 再做一次</a:t>
+              <a:t>OS1 做完，換 AT128P 再做一次</a:t>
             </a:r>
             <a:endParaRPr lang="en-US" sz="1250" dirty="0"/>
           </a:p>
@@ -13442,15 +12568,15 @@
         <p:spPr>
           <a:xfrm>
             <a:off x="502920" y="877824"/>
-            <a:ext cx="1481328" cy="1920240"/>
+            <a:ext cx="4206240" cy="2006226"/>
           </a:xfrm>
           <a:prstGeom prst="roundRect">
             <a:avLst>
-              <a:gd name="adj" fmla="val 7407"/>
+              <a:gd name="adj" fmla="val 5469"/>
             </a:avLst>
           </a:prstGeom>
           <a:solidFill>
-            <a:srgbClr val="F4F7FA"/>
+            <a:srgbClr val="FFFFFF"/>
           </a:solidFill>
           <a:ln w="12700">
             <a:solidFill>
@@ -13460,535 +12586,79 @@
           </a:ln>
         </p:spPr>
       </p:sp>
-      <p:sp>
-        <p:nvSpPr>
-          <p:cNvPr id="4" name="Shape 2"/>
-          <p:cNvSpPr/>
-          <p:nvPr/>
-        </p:nvSpPr>
-        <p:spPr>
-          <a:xfrm flipH="1" flipV="1">
-            <a:off x="610141" y="1806781"/>
-            <a:ext cx="269877" cy="155814"/>
-          </a:xfrm>
-          <a:prstGeom prst="line">
+      <p:pic>
+        <p:nvPicPr>
+          <p:cNvPr id="4" name="Image 0" descr="/Users/tsengchenghsun/Class/carClass/Claude outputs/第五週(10-8)/src/img/w5_os1_optical.png">    </p:cNvPr>
+          <p:cNvPicPr>
+            <a:picLocks noChangeAspect="1"/>
+          </p:cNvPicPr>
+          <p:nvPr/>
+        </p:nvPicPr>
+        <p:blipFill>
+          <a:blip r:embed="rId1"/>
+          <a:stretch>
+            <a:fillRect/>
+          </a:stretch>
+        </p:blipFill>
+        <p:spPr>
+          <a:xfrm>
+            <a:off x="576072" y="980142"/>
+            <a:ext cx="4059936" cy="1618710"/>
+          </a:xfrm>
+          <a:prstGeom prst="rect">
             <a:avLst/>
           </a:prstGeom>
+        </p:spPr>
+      </p:pic>
+      <p:sp>
+        <p:nvSpPr>
+          <p:cNvPr id="5" name="Text 2"/>
+          <p:cNvSpPr txBox="1"/>
+          <p:nvPr/>
+        </p:nvSpPr>
+        <p:spPr>
+          <a:xfrm>
+            <a:off x="576072" y="2646306"/>
+            <a:ext cx="4059936" cy="182880"/>
+          </a:xfrm>
+          <a:prstGeom prst="rect">
+            <a:avLst/>
+          </a:prstGeom>
           <a:noFill/>
-          <a:ln w="15240">
-            <a:solidFill>
-              <a:srgbClr val="2E6E4E"/>
-            </a:solidFill>
-            <a:prstDash val="solid"/>
-          </a:ln>
-        </p:spPr>
-      </p:sp>
-      <p:sp>
-        <p:nvSpPr>
-          <p:cNvPr id="5" name="Shape 3"/>
-          <p:cNvSpPr/>
-          <p:nvPr/>
-        </p:nvSpPr>
-        <p:spPr>
-          <a:xfrm flipH="1" flipV="1">
-            <a:off x="679708" y="1723874"/>
-            <a:ext cx="200310" cy="238721"/>
-          </a:xfrm>
-          <a:prstGeom prst="line">
-            <a:avLst/>
-          </a:prstGeom>
-          <a:noFill/>
-          <a:ln w="15240">
-            <a:solidFill>
-              <a:srgbClr val="2E6E4E"/>
-            </a:solidFill>
-            <a:prstDash val="solid"/>
-          </a:ln>
-        </p:spPr>
-      </p:sp>
-      <p:sp>
-        <p:nvSpPr>
-          <p:cNvPr id="6" name="Shape 4"/>
-          <p:cNvSpPr/>
-          <p:nvPr/>
-        </p:nvSpPr>
-        <p:spPr>
-          <a:xfrm flipH="1" flipV="1">
-            <a:off x="773436" y="1669761"/>
-            <a:ext cx="106583" cy="292834"/>
-          </a:xfrm>
-          <a:prstGeom prst="line">
-            <a:avLst/>
-          </a:prstGeom>
-          <a:noFill/>
-          <a:ln w="15240">
-            <a:solidFill>
-              <a:srgbClr val="2E6E4E"/>
-            </a:solidFill>
-            <a:prstDash val="solid"/>
-          </a:ln>
-        </p:spPr>
-      </p:sp>
-      <p:sp>
-        <p:nvSpPr>
-          <p:cNvPr id="7" name="Shape 5"/>
-          <p:cNvSpPr/>
-          <p:nvPr/>
-        </p:nvSpPr>
-        <p:spPr>
-          <a:xfrm flipV="1">
-            <a:off x="880019" y="1650967"/>
-            <a:ext cx="1" cy="311628"/>
-          </a:xfrm>
-          <a:prstGeom prst="line">
-            <a:avLst/>
-          </a:prstGeom>
-          <a:noFill/>
-          <a:ln w="15240">
-            <a:solidFill>
-              <a:srgbClr val="2E6E4E"/>
-            </a:solidFill>
-            <a:prstDash val="solid"/>
-          </a:ln>
-        </p:spPr>
-      </p:sp>
-      <p:sp>
-        <p:nvSpPr>
-          <p:cNvPr id="8" name="Shape 6"/>
-          <p:cNvSpPr/>
-          <p:nvPr/>
-        </p:nvSpPr>
-        <p:spPr>
-          <a:xfrm flipV="1">
-            <a:off x="880019" y="1669761"/>
-            <a:ext cx="106583" cy="292834"/>
-          </a:xfrm>
-          <a:prstGeom prst="line">
-            <a:avLst/>
-          </a:prstGeom>
-          <a:noFill/>
-          <a:ln w="15240">
-            <a:solidFill>
-              <a:srgbClr val="2E6E4E"/>
-            </a:solidFill>
-            <a:prstDash val="solid"/>
-          </a:ln>
-        </p:spPr>
-      </p:sp>
-      <p:sp>
-        <p:nvSpPr>
-          <p:cNvPr id="9" name="Shape 7"/>
-          <p:cNvSpPr/>
-          <p:nvPr/>
-        </p:nvSpPr>
-        <p:spPr>
-          <a:xfrm flipV="1">
-            <a:off x="880019" y="1723874"/>
-            <a:ext cx="200310" cy="238721"/>
-          </a:xfrm>
-          <a:prstGeom prst="line">
-            <a:avLst/>
-          </a:prstGeom>
-          <a:noFill/>
-          <a:ln w="15240">
-            <a:solidFill>
-              <a:srgbClr val="2E6E4E"/>
-            </a:solidFill>
-            <a:prstDash val="solid"/>
-          </a:ln>
-        </p:spPr>
-      </p:sp>
-      <p:sp>
-        <p:nvSpPr>
-          <p:cNvPr id="10" name="Shape 8"/>
-          <p:cNvSpPr/>
-          <p:nvPr/>
-        </p:nvSpPr>
-        <p:spPr>
-          <a:xfrm flipV="1">
-            <a:off x="880019" y="1806781"/>
-            <a:ext cx="269877" cy="155814"/>
-          </a:xfrm>
-          <a:prstGeom prst="line">
-            <a:avLst/>
-          </a:prstGeom>
-          <a:noFill/>
-          <a:ln w="15240">
-            <a:solidFill>
-              <a:srgbClr val="2E6E4E"/>
-            </a:solidFill>
-            <a:prstDash val="solid"/>
-          </a:ln>
-        </p:spPr>
-      </p:sp>
-      <p:sp>
-        <p:nvSpPr>
-          <p:cNvPr id="11" name="Shape 9"/>
-          <p:cNvSpPr/>
-          <p:nvPr/>
-        </p:nvSpPr>
-        <p:spPr>
-          <a:xfrm>
-            <a:off x="851453" y="1934029"/>
-            <a:ext cx="57132" cy="57132"/>
-          </a:xfrm>
-          <a:prstGeom prst="ellipse">
-            <a:avLst/>
-          </a:prstGeom>
-          <a:solidFill>
-            <a:srgbClr val="2E6E4E"/>
-          </a:solidFill>
           <a:ln/>
         </p:spPr>
-      </p:sp>
-      <p:sp>
-        <p:nvSpPr>
-          <p:cNvPr id="12" name="Shape 10"/>
-          <p:cNvSpPr/>
-          <p:nvPr/>
-        </p:nvSpPr>
-        <p:spPr>
-          <a:xfrm>
-            <a:off x="1399398" y="1630192"/>
-            <a:ext cx="415503" cy="415503"/>
-          </a:xfrm>
-          <a:prstGeom prst="donut">
-            <a:avLst/>
-          </a:prstGeom>
-          <a:solidFill>
-            <a:srgbClr val="2E6E4E">
-              <a:alpha val="45000"/>
-            </a:srgbClr>
-          </a:solidFill>
-          <a:ln/>
-        </p:spPr>
-      </p:sp>
-      <p:sp>
-        <p:nvSpPr>
-          <p:cNvPr id="13" name="Shape 11"/>
-          <p:cNvSpPr/>
-          <p:nvPr/>
-        </p:nvSpPr>
-        <p:spPr>
-          <a:xfrm>
-            <a:off x="1814901" y="1837944"/>
-            <a:ext cx="103876" cy="1"/>
-          </a:xfrm>
-          <a:prstGeom prst="line">
-            <a:avLst/>
-          </a:prstGeom>
-          <a:noFill/>
-          <a:ln w="13970">
-            <a:solidFill>
-              <a:srgbClr val="2E6E4E"/>
-            </a:solidFill>
-            <a:prstDash val="solid"/>
-          </a:ln>
-        </p:spPr>
-      </p:sp>
-      <p:sp>
-        <p:nvSpPr>
-          <p:cNvPr id="14" name="Shape 12"/>
-          <p:cNvSpPr/>
-          <p:nvPr/>
-        </p:nvSpPr>
-        <p:spPr>
-          <a:xfrm>
-            <a:off x="1787068" y="1941820"/>
-            <a:ext cx="89959" cy="51938"/>
-          </a:xfrm>
-          <a:prstGeom prst="line">
-            <a:avLst/>
-          </a:prstGeom>
-          <a:noFill/>
-          <a:ln w="13970">
-            <a:solidFill>
-              <a:srgbClr val="2E6E4E"/>
-            </a:solidFill>
-            <a:prstDash val="solid"/>
-          </a:ln>
-        </p:spPr>
-      </p:sp>
-      <p:sp>
-        <p:nvSpPr>
-          <p:cNvPr id="15" name="Shape 13"/>
-          <p:cNvSpPr/>
-          <p:nvPr/>
-        </p:nvSpPr>
-        <p:spPr>
-          <a:xfrm>
-            <a:off x="1711025" y="2017862"/>
-            <a:ext cx="51938" cy="89959"/>
-          </a:xfrm>
-          <a:prstGeom prst="line">
-            <a:avLst/>
-          </a:prstGeom>
-          <a:noFill/>
-          <a:ln w="13970">
-            <a:solidFill>
-              <a:srgbClr val="2E6E4E"/>
-            </a:solidFill>
-            <a:prstDash val="solid"/>
-          </a:ln>
-        </p:spPr>
-      </p:sp>
-      <p:sp>
-        <p:nvSpPr>
-          <p:cNvPr id="16" name="Shape 14"/>
-          <p:cNvSpPr/>
-          <p:nvPr/>
-        </p:nvSpPr>
-        <p:spPr>
-          <a:xfrm>
-            <a:off x="1607149" y="2045696"/>
-            <a:ext cx="1" cy="103876"/>
-          </a:xfrm>
-          <a:prstGeom prst="line">
-            <a:avLst/>
-          </a:prstGeom>
-          <a:noFill/>
-          <a:ln w="13970">
-            <a:solidFill>
-              <a:srgbClr val="2E6E4E"/>
-            </a:solidFill>
-            <a:prstDash val="solid"/>
-          </a:ln>
-        </p:spPr>
-      </p:sp>
-      <p:sp>
-        <p:nvSpPr>
-          <p:cNvPr id="17" name="Shape 15"/>
-          <p:cNvSpPr/>
-          <p:nvPr/>
-        </p:nvSpPr>
-        <p:spPr>
-          <a:xfrm flipH="1">
-            <a:off x="1451336" y="2017862"/>
-            <a:ext cx="51938" cy="89959"/>
-          </a:xfrm>
-          <a:prstGeom prst="line">
-            <a:avLst/>
-          </a:prstGeom>
-          <a:noFill/>
-          <a:ln w="13970">
-            <a:solidFill>
-              <a:srgbClr val="2E6E4E"/>
-            </a:solidFill>
-            <a:prstDash val="solid"/>
-          </a:ln>
-        </p:spPr>
-      </p:sp>
-      <p:sp>
-        <p:nvSpPr>
-          <p:cNvPr id="18" name="Shape 16"/>
-          <p:cNvSpPr/>
-          <p:nvPr/>
-        </p:nvSpPr>
-        <p:spPr>
-          <a:xfrm flipH="1">
-            <a:off x="1337272" y="1941820"/>
-            <a:ext cx="89959" cy="51938"/>
-          </a:xfrm>
-          <a:prstGeom prst="line">
-            <a:avLst/>
-          </a:prstGeom>
-          <a:noFill/>
-          <a:ln w="13970">
-            <a:solidFill>
-              <a:srgbClr val="2E6E4E"/>
-            </a:solidFill>
-            <a:prstDash val="solid"/>
-          </a:ln>
-        </p:spPr>
-      </p:sp>
-      <p:sp>
-        <p:nvSpPr>
-          <p:cNvPr id="19" name="Shape 17"/>
-          <p:cNvSpPr/>
-          <p:nvPr/>
-        </p:nvSpPr>
-        <p:spPr>
-          <a:xfrm flipH="1">
-            <a:off x="1295522" y="1837944"/>
-            <a:ext cx="103876" cy="1"/>
-          </a:xfrm>
-          <a:prstGeom prst="line">
-            <a:avLst/>
-          </a:prstGeom>
-          <a:noFill/>
-          <a:ln w="13970">
-            <a:solidFill>
-              <a:srgbClr val="2E6E4E"/>
-            </a:solidFill>
-            <a:prstDash val="solid"/>
-          </a:ln>
-        </p:spPr>
-      </p:sp>
-      <p:sp>
-        <p:nvSpPr>
-          <p:cNvPr id="20" name="Shape 18"/>
-          <p:cNvSpPr/>
-          <p:nvPr/>
-        </p:nvSpPr>
-        <p:spPr>
-          <a:xfrm flipH="1" flipV="1">
-            <a:off x="1337272" y="1682130"/>
-            <a:ext cx="89959" cy="51938"/>
-          </a:xfrm>
-          <a:prstGeom prst="line">
-            <a:avLst/>
-          </a:prstGeom>
-          <a:noFill/>
-          <a:ln w="13970">
-            <a:solidFill>
-              <a:srgbClr val="2E6E4E"/>
-            </a:solidFill>
-            <a:prstDash val="solid"/>
-          </a:ln>
-        </p:spPr>
-      </p:sp>
-      <p:sp>
-        <p:nvSpPr>
-          <p:cNvPr id="21" name="Shape 19"/>
-          <p:cNvSpPr/>
-          <p:nvPr/>
-        </p:nvSpPr>
-        <p:spPr>
-          <a:xfrm flipH="1" flipV="1">
-            <a:off x="1451336" y="1568067"/>
-            <a:ext cx="51938" cy="89959"/>
-          </a:xfrm>
-          <a:prstGeom prst="line">
-            <a:avLst/>
-          </a:prstGeom>
-          <a:noFill/>
-          <a:ln w="13970">
-            <a:solidFill>
-              <a:srgbClr val="2E6E4E"/>
-            </a:solidFill>
-            <a:prstDash val="solid"/>
-          </a:ln>
-        </p:spPr>
-      </p:sp>
-      <p:sp>
-        <p:nvSpPr>
-          <p:cNvPr id="22" name="Shape 20"/>
-          <p:cNvSpPr/>
-          <p:nvPr/>
-        </p:nvSpPr>
-        <p:spPr>
-          <a:xfrm flipH="1" flipV="1">
-            <a:off x="1607149" y="1526316"/>
-            <a:ext cx="1" cy="103876"/>
-          </a:xfrm>
-          <a:prstGeom prst="line">
-            <a:avLst/>
-          </a:prstGeom>
-          <a:noFill/>
-          <a:ln w="13970">
-            <a:solidFill>
-              <a:srgbClr val="2E6E4E"/>
-            </a:solidFill>
-            <a:prstDash val="solid"/>
-          </a:ln>
-        </p:spPr>
-      </p:sp>
-      <p:sp>
-        <p:nvSpPr>
-          <p:cNvPr id="23" name="Shape 21"/>
-          <p:cNvSpPr/>
-          <p:nvPr/>
-        </p:nvSpPr>
-        <p:spPr>
-          <a:xfrm flipV="1">
-            <a:off x="1711025" y="1568067"/>
-            <a:ext cx="51938" cy="89959"/>
-          </a:xfrm>
-          <a:prstGeom prst="line">
-            <a:avLst/>
-          </a:prstGeom>
-          <a:noFill/>
-          <a:ln w="13970">
-            <a:solidFill>
-              <a:srgbClr val="2E6E4E"/>
-            </a:solidFill>
-            <a:prstDash val="solid"/>
-          </a:ln>
-        </p:spPr>
-      </p:sp>
-      <p:sp>
-        <p:nvSpPr>
-          <p:cNvPr id="24" name="Shape 22"/>
-          <p:cNvSpPr/>
-          <p:nvPr/>
-        </p:nvSpPr>
-        <p:spPr>
-          <a:xfrm flipV="1">
-            <a:off x="1787068" y="1682130"/>
-            <a:ext cx="89959" cy="51938"/>
-          </a:xfrm>
-          <a:prstGeom prst="line">
-            <a:avLst/>
-          </a:prstGeom>
-          <a:noFill/>
-          <a:ln w="13970">
-            <a:solidFill>
-              <a:srgbClr val="2E6E4E"/>
-            </a:solidFill>
-            <a:prstDash val="solid"/>
-          </a:ln>
-        </p:spPr>
-      </p:sp>
-      <p:sp>
-        <p:nvSpPr>
-          <p:cNvPr id="25" name="Shape 23"/>
-          <p:cNvSpPr/>
-          <p:nvPr/>
-        </p:nvSpPr>
-        <p:spPr>
-          <a:xfrm>
-            <a:off x="1578584" y="1809378"/>
-            <a:ext cx="57132" cy="57132"/>
-          </a:xfrm>
-          <a:prstGeom prst="ellipse">
-            <a:avLst/>
-          </a:prstGeom>
-          <a:solidFill>
-            <a:srgbClr val="2E6E4E"/>
-          </a:solidFill>
-          <a:ln/>
-        </p:spPr>
-      </p:sp>
-      <p:sp>
-        <p:nvSpPr>
-          <p:cNvPr id="26" name="Shape 24"/>
-          <p:cNvSpPr/>
-          <p:nvPr/>
-        </p:nvSpPr>
-        <p:spPr>
-          <a:xfrm>
-            <a:off x="1191646" y="1786920"/>
-            <a:ext cx="103876" cy="102047"/>
-          </a:xfrm>
-          <a:prstGeom prst="rightArrow">
-            <a:avLst/>
-          </a:prstGeom>
-          <a:solidFill>
-            <a:srgbClr val="9AA6B0"/>
-          </a:solidFill>
-          <a:ln/>
-        </p:spPr>
-      </p:sp>
-      <p:sp>
-        <p:nvSpPr>
-          <p:cNvPr id="27" name="Text 25"/>
+        <p:txBody>
+          <a:bodyPr wrap="square" lIns="0" tIns="0" rIns="0" bIns="0" rtlCol="0" anchor="ctr"/>
+          <a:lstStyle/>
+          <a:p>
+            <a:pPr algn="ctr" indent="0" marL="0">
+              <a:buNone/>
+            </a:pPr>
+            <a:r>
+              <a:rPr lang="en-US" sz="700" dirty="0">
+                <a:solidFill>
+                  <a:srgbClr val="5F7183"/>
+                </a:solidFill>
+                <a:latin typeface="Arial" pitchFamily="34" charset="0"/>
+                <a:ea typeface="Arial" pitchFamily="34" charset="-122"/>
+                <a:cs typeface="Arial" pitchFamily="34" charset="-120"/>
+              </a:rPr>
+              <a:t>Ouster OS1 datasheet, Rev7 / FW 3.2, p.1 · 節錄 · 讀取 2026/10/02</a:t>
+            </a:r>
+            <a:endParaRPr lang="en-US" sz="700" dirty="0"/>
+          </a:p>
+        </p:txBody>
+      </p:sp>
+      <p:sp>
+        <p:nvSpPr>
+          <p:cNvPr id="6" name="Text 3"/>
           <p:cNvSpPr txBox="1"/>
           <p:nvPr/>
         </p:nvSpPr>
         <p:spPr>
           <a:xfrm>
-            <a:off x="2295144" y="786384"/>
-            <a:ext cx="6345936" cy="522366"/>
+            <a:off x="4983480" y="786384"/>
+            <a:ext cx="3657600" cy="787475"/>
           </a:xfrm>
           <a:prstGeom prst="rect">
             <a:avLst/>
@@ -14043,13 +12713,13 @@
       </p:sp>
       <p:sp>
         <p:nvSpPr>
-          <p:cNvPr id="28" name="Shape 26"/>
+          <p:cNvPr id="7" name="Shape 4"/>
           <p:cNvSpPr/>
           <p:nvPr/>
         </p:nvSpPr>
         <p:spPr>
           <a:xfrm>
-            <a:off x="2295144" y="1400190"/>
+            <a:off x="4983480" y="1665299"/>
             <a:ext cx="1060704" cy="400118"/>
           </a:xfrm>
           <a:prstGeom prst="roundRect">
@@ -14065,13 +12735,13 @@
       </p:sp>
       <p:sp>
         <p:nvSpPr>
-          <p:cNvPr id="29" name="Text 27"/>
+          <p:cNvPr id="8" name="Text 5"/>
           <p:cNvSpPr txBox="1"/>
           <p:nvPr/>
         </p:nvSpPr>
         <p:spPr>
           <a:xfrm>
-            <a:off x="2350008" y="1436766"/>
+            <a:off x="5038344" y="1701875"/>
             <a:ext cx="950976" cy="345254"/>
           </a:xfrm>
           <a:prstGeom prst="rect">
@@ -14127,14 +12797,14 @@
       </p:sp>
       <p:sp>
         <p:nvSpPr>
-          <p:cNvPr id="30" name="Text 28"/>
+          <p:cNvPr id="9" name="Text 6"/>
           <p:cNvSpPr txBox="1"/>
           <p:nvPr/>
         </p:nvSpPr>
         <p:spPr>
           <a:xfrm>
-            <a:off x="3502152" y="1400190"/>
-            <a:ext cx="5138928" cy="454982"/>
+            <a:off x="6190488" y="1665299"/>
+            <a:ext cx="2450592" cy="454982"/>
           </a:xfrm>
           <a:prstGeom prst="rect">
             <a:avLst/>
@@ -14161,7 +12831,7 @@
                 <a:ea typeface="Arial" pitchFamily="34" charset="-122"/>
                 <a:cs typeface="Arial" pitchFamily="34" charset="-120"/>
               </a:rPr>
-              <a:t>32 / 64 / 128 channels — đây chính là thanh «số tia» của tuần trước</a:t>
+              <a:t>Chính là thanh «số tia» tuần trước</a:t>
             </a:r>
             <a:endParaRPr lang="en-US" sz="1100" dirty="0"/>
           </a:p>
@@ -14181,7 +12851,7 @@
                 <a:ea typeface="微軟正黑體" pitchFamily="34" charset="-122"/>
                 <a:cs typeface="微軟正黑體" pitchFamily="34" charset="-120"/>
               </a:rPr>
-              <a:t>32 / 64 / 128 channels——這就是上週那條「射線數」滑桿</a:t>
+              <a:t>就是上週那條「射線數」滑桿</a:t>
             </a:r>
             <a:endParaRPr lang="en-US" sz="1100" dirty="0"/>
           </a:p>
@@ -14189,13 +12859,13 @@
       </p:sp>
       <p:sp>
         <p:nvSpPr>
-          <p:cNvPr id="31" name="Shape 29"/>
+          <p:cNvPr id="10" name="Shape 7"/>
           <p:cNvSpPr/>
           <p:nvPr/>
         </p:nvSpPr>
         <p:spPr>
           <a:xfrm>
-            <a:off x="2295144" y="1919180"/>
+            <a:off x="4983480" y="2184289"/>
             <a:ext cx="1060704" cy="400118"/>
           </a:xfrm>
           <a:prstGeom prst="roundRect">
@@ -14211,13 +12881,13 @@
       </p:sp>
       <p:sp>
         <p:nvSpPr>
-          <p:cNvPr id="32" name="Text 30"/>
+          <p:cNvPr id="11" name="Text 8"/>
           <p:cNvSpPr txBox="1"/>
           <p:nvPr/>
         </p:nvSpPr>
         <p:spPr>
           <a:xfrm>
-            <a:off x="2350008" y="1955756"/>
+            <a:off x="5038344" y="2220865"/>
             <a:ext cx="950976" cy="345254"/>
           </a:xfrm>
           <a:prstGeom prst="rect">
@@ -14273,14 +12943,14 @@
       </p:sp>
       <p:sp>
         <p:nvSpPr>
-          <p:cNvPr id="33" name="Text 31"/>
+          <p:cNvPr id="12" name="Text 9"/>
           <p:cNvSpPr txBox="1"/>
           <p:nvPr/>
         </p:nvSpPr>
         <p:spPr>
           <a:xfrm>
-            <a:off x="3502152" y="1919180"/>
-            <a:ext cx="5138928" cy="635187"/>
+            <a:off x="6190488" y="2184289"/>
+            <a:ext cx="2450592" cy="635187"/>
           </a:xfrm>
           <a:prstGeom prst="rect">
             <a:avLst/>
@@ -14307,7 +12977,7 @@
                 <a:ea typeface="Arial" pitchFamily="34" charset="-122"/>
                 <a:cs typeface="Arial" pitchFamily="34" charset="-120"/>
               </a:rPr>
-              <a:t>Vertical 42.4°, Horizontal 360° — thanh «góc quét», nhưng nó quay cả vòng</a:t>
+              <a:t>Thanh «góc quét», nhưng nó quay cả vòng</a:t>
             </a:r>
             <a:endParaRPr lang="en-US" sz="1100" dirty="0"/>
           </a:p>
@@ -14327,7 +12997,7 @@
                 <a:ea typeface="微軟正黑體" pitchFamily="34" charset="-122"/>
                 <a:cs typeface="微軟正黑體" pitchFamily="34" charset="-120"/>
               </a:rPr>
-              <a:t>垂直 42.4°、水平 360°——就是「張角」，只是它轉一整圈</a:t>
+              <a:t>就是「張角」，只是它轉一整圈</a:t>
             </a:r>
             <a:endParaRPr lang="en-US" sz="1100" dirty="0"/>
           </a:p>
@@ -14335,13 +13005,13 @@
       </p:sp>
       <p:sp>
         <p:nvSpPr>
-          <p:cNvPr id="34" name="Shape 32"/>
+          <p:cNvPr id="13" name="Shape 10"/>
           <p:cNvSpPr/>
           <p:nvPr/>
         </p:nvSpPr>
         <p:spPr>
           <a:xfrm>
-            <a:off x="2295144" y="2618375"/>
+            <a:off x="4983480" y="2883484"/>
             <a:ext cx="1060704" cy="400118"/>
           </a:xfrm>
           <a:prstGeom prst="roundRect">
@@ -14357,13 +13027,13 @@
       </p:sp>
       <p:sp>
         <p:nvSpPr>
-          <p:cNvPr id="35" name="Text 33"/>
+          <p:cNvPr id="14" name="Text 11"/>
           <p:cNvSpPr txBox="1"/>
           <p:nvPr/>
         </p:nvSpPr>
         <p:spPr>
           <a:xfrm>
-            <a:off x="2350008" y="2654951"/>
+            <a:off x="5038344" y="2920060"/>
             <a:ext cx="950976" cy="345254"/>
           </a:xfrm>
           <a:prstGeom prst="rect">
@@ -14419,14 +13089,14 @@
       </p:sp>
       <p:sp>
         <p:nvSpPr>
-          <p:cNvPr id="36" name="Text 34"/>
+          <p:cNvPr id="15" name="Text 12"/>
           <p:cNvSpPr txBox="1"/>
           <p:nvPr/>
         </p:nvSpPr>
         <p:spPr>
           <a:xfrm>
-            <a:off x="3502152" y="2618375"/>
-            <a:ext cx="5138928" cy="454982"/>
+            <a:off x="6190488" y="2883484"/>
+            <a:ext cx="2450592" cy="635187"/>
           </a:xfrm>
           <a:prstGeom prst="rect">
             <a:avLst/>
@@ -14453,7 +13123,7 @@
                 <a:ea typeface="Arial" pitchFamily="34" charset="-122"/>
                 <a:cs typeface="Arial" pitchFamily="34" charset="-120"/>
               </a:rPr>
-              <a:t>90 m với vật phản xạ 10% — thanh «chiều dài tia»</a:t>
+              <a:t>Thanh «chiều dài tia» — đo với vật 10%</a:t>
             </a:r>
             <a:endParaRPr lang="en-US" sz="1100" dirty="0"/>
           </a:p>
@@ -14473,7 +13143,7 @@
                 <a:ea typeface="微軟正黑體" pitchFamily="34" charset="-122"/>
                 <a:cs typeface="微軟正黑體" pitchFamily="34" charset="-120"/>
               </a:rPr>
-              <a:t>對 10% 反射率的目標 90 公尺——就是「射線長度」</a:t>
+              <a:t>就是「射線長度」。注意是對 10% 量的</a:t>
             </a:r>
             <a:endParaRPr lang="en-US" sz="1100" dirty="0"/>
           </a:p>
@@ -14481,7 +13151,7 @@
       </p:sp>
       <p:sp>
         <p:nvSpPr>
-          <p:cNvPr id="37" name="Shape 35"/>
+          <p:cNvPr id="16" name="Shape 13"/>
           <p:cNvSpPr/>
           <p:nvPr/>
         </p:nvSpPr>
@@ -14508,7 +13178,7 @@
       </p:sp>
       <p:sp>
         <p:nvSpPr>
-          <p:cNvPr id="38" name="Text 36"/>
+          <p:cNvPr id="17" name="Text 14"/>
           <p:cNvSpPr txBox="1"/>
           <p:nvPr/>
         </p:nvSpPr>
@@ -14570,14 +13240,14 @@
       </p:sp>
       <p:pic>
         <p:nvPicPr>
-          <p:cNvPr id="40" name="Image 0" descr="/Users/tsengchenghsun/Class/carClass/Claude outputs/第五週(10-8)/src/logo.png">    </p:cNvPr>
+          <p:cNvPr id="19" name="Image 1" descr="/Users/tsengchenghsun/Class/carClass/Claude outputs/第五週(10-8)/src/logo.png">    </p:cNvPr>
           <p:cNvPicPr>
             <a:picLocks noChangeAspect="1"/>
           </p:cNvPicPr>
           <p:nvPr/>
         </p:nvPicPr>
         <p:blipFill>
-          <a:blip r:embed="rId1"/>
+          <a:blip r:embed="rId2"/>
           <a:stretch>
             <a:fillRect/>
           </a:stretch>
@@ -14594,7 +13264,7 @@
       </p:pic>
       <p:sp>
         <p:nvSpPr>
-          <p:cNvPr id="41" name="Text 37"/>
+          <p:cNvPr id="20" name="Text 15"/>
           <p:cNvSpPr txBox="1"/>
           <p:nvPr/>
         </p:nvSpPr>
@@ -14633,7 +13303,7 @@
       </p:sp>
       <p:sp>
         <p:nvSpPr>
-          <p:cNvPr id="42" name="Text 38"/>
+          <p:cNvPr id="21" name="Text 16"/>
           <p:cNvSpPr txBox="1"/>
           <p:nvPr/>
         </p:nvSpPr>
@@ -14728,7 +13398,7 @@
                 <a:ea typeface="Arial" pitchFamily="34" charset="-122"/>
                 <a:cs typeface="Arial" pitchFamily="34" charset="-120"/>
               </a:rPr>
-              <a:t>2 / 2　Hesai AT128</a:t>
+              <a:t>2 / 2　Hesai AT128P</a:t>
             </a:r>
             <a:endParaRPr lang="en-US" sz="1300" dirty="0"/>
           </a:p>
@@ -14743,15 +13413,15 @@
         <p:spPr>
           <a:xfrm>
             <a:off x="502920" y="877824"/>
-            <a:ext cx="1481328" cy="1920240"/>
+            <a:ext cx="4024140" cy="3072384"/>
           </a:xfrm>
           <a:prstGeom prst="roundRect">
             <a:avLst>
-              <a:gd name="adj" fmla="val 7407"/>
+              <a:gd name="adj" fmla="val 3571"/>
             </a:avLst>
           </a:prstGeom>
           <a:solidFill>
-            <a:srgbClr val="F4F7FA"/>
+            <a:srgbClr val="FFFFFF"/>
           </a:solidFill>
           <a:ln w="12700">
             <a:solidFill>
@@ -14761,286 +13431,79 @@
           </a:ln>
         </p:spPr>
       </p:sp>
-      <p:sp>
-        <p:nvSpPr>
-          <p:cNvPr id="4" name="Shape 2"/>
-          <p:cNvSpPr/>
-          <p:nvPr/>
-        </p:nvSpPr>
-        <p:spPr>
-          <a:xfrm flipH="1" flipV="1">
-            <a:off x="920221" y="1018382"/>
-            <a:ext cx="323363" cy="479405"/>
-          </a:xfrm>
-          <a:prstGeom prst="line">
+      <p:pic>
+        <p:nvPicPr>
+          <p:cNvPr id="4" name="Image 0" descr="/Users/tsengchenghsun/Class/carClass/Claude outputs/第五週(10-8)/src/img/w5_at128p_spec.png">    </p:cNvPr>
+          <p:cNvPicPr>
+            <a:picLocks noChangeAspect="1"/>
+          </p:cNvPicPr>
+          <p:nvPr/>
+        </p:nvPicPr>
+        <p:blipFill>
+          <a:blip r:embed="rId1"/>
+          <a:stretch>
+            <a:fillRect/>
+          </a:stretch>
+        </p:blipFill>
+        <p:spPr>
+          <a:xfrm>
+            <a:off x="576072" y="1000843"/>
+            <a:ext cx="3877836" cy="2643467"/>
+          </a:xfrm>
+          <a:prstGeom prst="rect">
             <a:avLst/>
           </a:prstGeom>
+        </p:spPr>
+      </p:pic>
+      <p:sp>
+        <p:nvSpPr>
+          <p:cNvPr id="5" name="Text 2"/>
+          <p:cNvSpPr txBox="1"/>
+          <p:nvPr/>
+        </p:nvSpPr>
+        <p:spPr>
+          <a:xfrm>
+            <a:off x="576072" y="3712464"/>
+            <a:ext cx="3877836" cy="182880"/>
+          </a:xfrm>
+          <a:prstGeom prst="rect">
+            <a:avLst/>
+          </a:prstGeom>
           <a:noFill/>
-          <a:ln w="15240">
-            <a:solidFill>
-              <a:srgbClr val="1F4E79"/>
-            </a:solidFill>
-            <a:prstDash val="solid"/>
-          </a:ln>
-        </p:spPr>
-      </p:sp>
-      <p:sp>
-        <p:nvSpPr>
-          <p:cNvPr id="5" name="Shape 3"/>
-          <p:cNvSpPr/>
-          <p:nvPr/>
-        </p:nvSpPr>
-        <p:spPr>
-          <a:xfrm flipH="1" flipV="1">
-            <a:off x="1074515" y="944788"/>
-            <a:ext cx="169069" cy="552999"/>
-          </a:xfrm>
-          <a:prstGeom prst="line">
-            <a:avLst/>
-          </a:prstGeom>
-          <a:noFill/>
-          <a:ln w="15240">
-            <a:solidFill>
-              <a:srgbClr val="1F4E79"/>
-            </a:solidFill>
-            <a:prstDash val="solid"/>
-          </a:ln>
-        </p:spPr>
-      </p:sp>
-      <p:sp>
-        <p:nvSpPr>
-          <p:cNvPr id="6" name="Shape 4"/>
-          <p:cNvSpPr/>
-          <p:nvPr/>
-        </p:nvSpPr>
-        <p:spPr>
-          <a:xfrm flipV="1">
-            <a:off x="1243584" y="919521"/>
-            <a:ext cx="1" cy="578267"/>
-          </a:xfrm>
-          <a:prstGeom prst="line">
-            <a:avLst/>
-          </a:prstGeom>
-          <a:noFill/>
-          <a:ln w="15240">
-            <a:solidFill>
-              <a:srgbClr val="1F4E79"/>
-            </a:solidFill>
-            <a:prstDash val="solid"/>
-          </a:ln>
-        </p:spPr>
-      </p:sp>
-      <p:sp>
-        <p:nvSpPr>
-          <p:cNvPr id="7" name="Shape 5"/>
-          <p:cNvSpPr/>
-          <p:nvPr/>
-        </p:nvSpPr>
-        <p:spPr>
-          <a:xfrm flipV="1">
-            <a:off x="1243584" y="944788"/>
-            <a:ext cx="169069" cy="552999"/>
-          </a:xfrm>
-          <a:prstGeom prst="line">
-            <a:avLst/>
-          </a:prstGeom>
-          <a:noFill/>
-          <a:ln w="15240">
-            <a:solidFill>
-              <a:srgbClr val="1F4E79"/>
-            </a:solidFill>
-            <a:prstDash val="solid"/>
-          </a:ln>
-        </p:spPr>
-      </p:sp>
-      <p:sp>
-        <p:nvSpPr>
-          <p:cNvPr id="8" name="Shape 6"/>
-          <p:cNvSpPr/>
-          <p:nvPr/>
-        </p:nvSpPr>
-        <p:spPr>
-          <a:xfrm flipV="1">
-            <a:off x="1243584" y="1018382"/>
-            <a:ext cx="323363" cy="479405"/>
-          </a:xfrm>
-          <a:prstGeom prst="line">
-            <a:avLst/>
-          </a:prstGeom>
-          <a:noFill/>
-          <a:ln w="15240">
-            <a:solidFill>
-              <a:srgbClr val="1F4E79"/>
-            </a:solidFill>
-            <a:prstDash val="solid"/>
-          </a:ln>
-        </p:spPr>
-      </p:sp>
-      <p:sp>
-        <p:nvSpPr>
-          <p:cNvPr id="9" name="Shape 7"/>
-          <p:cNvSpPr/>
-          <p:nvPr/>
-        </p:nvSpPr>
-        <p:spPr>
-          <a:xfrm>
-            <a:off x="1207227" y="1461431"/>
-            <a:ext cx="72713" cy="72713"/>
-          </a:xfrm>
-          <a:prstGeom prst="ellipse">
-            <a:avLst/>
-          </a:prstGeom>
-          <a:solidFill>
-            <a:srgbClr val="1F4E79"/>
-          </a:solidFill>
           <a:ln/>
         </p:spPr>
-      </p:sp>
-      <p:sp>
-        <p:nvSpPr>
-          <p:cNvPr id="10" name="Shape 8"/>
-          <p:cNvSpPr/>
-          <p:nvPr/>
-        </p:nvSpPr>
-        <p:spPr>
-          <a:xfrm flipH="1" flipV="1">
-            <a:off x="677954" y="2193935"/>
-            <a:ext cx="565630" cy="120228"/>
-          </a:xfrm>
-          <a:prstGeom prst="line">
-            <a:avLst/>
-          </a:prstGeom>
-          <a:noFill/>
-          <a:ln w="15240">
-            <a:solidFill>
-              <a:srgbClr val="1F4E79"/>
-            </a:solidFill>
-            <a:prstDash val="solid"/>
-          </a:ln>
-        </p:spPr>
-      </p:sp>
-      <p:sp>
-        <p:nvSpPr>
-          <p:cNvPr id="11" name="Shape 9"/>
-          <p:cNvSpPr/>
-          <p:nvPr/>
-        </p:nvSpPr>
-        <p:spPr>
-          <a:xfrm flipH="1" flipV="1">
-            <a:off x="879669" y="1864766"/>
-            <a:ext cx="363915" cy="449398"/>
-          </a:xfrm>
-          <a:prstGeom prst="line">
-            <a:avLst/>
-          </a:prstGeom>
-          <a:noFill/>
-          <a:ln w="15240">
-            <a:solidFill>
-              <a:srgbClr val="1F4E79"/>
-            </a:solidFill>
-            <a:prstDash val="solid"/>
-          </a:ln>
-        </p:spPr>
-      </p:sp>
-      <p:sp>
-        <p:nvSpPr>
-          <p:cNvPr id="12" name="Shape 10"/>
-          <p:cNvSpPr/>
-          <p:nvPr/>
-        </p:nvSpPr>
-        <p:spPr>
-          <a:xfrm flipV="1">
-            <a:off x="1243584" y="1735897"/>
-            <a:ext cx="1" cy="578267"/>
-          </a:xfrm>
-          <a:prstGeom prst="line">
-            <a:avLst/>
-          </a:prstGeom>
-          <a:noFill/>
-          <a:ln w="15240">
-            <a:solidFill>
-              <a:srgbClr val="1F4E79"/>
-            </a:solidFill>
-            <a:prstDash val="solid"/>
-          </a:ln>
-        </p:spPr>
-      </p:sp>
-      <p:sp>
-        <p:nvSpPr>
-          <p:cNvPr id="13" name="Shape 11"/>
-          <p:cNvSpPr/>
-          <p:nvPr/>
-        </p:nvSpPr>
-        <p:spPr>
-          <a:xfrm flipV="1">
-            <a:off x="1243584" y="1864766"/>
-            <a:ext cx="363915" cy="449398"/>
-          </a:xfrm>
-          <a:prstGeom prst="line">
-            <a:avLst/>
-          </a:prstGeom>
-          <a:noFill/>
-          <a:ln w="15240">
-            <a:solidFill>
-              <a:srgbClr val="1F4E79"/>
-            </a:solidFill>
-            <a:prstDash val="solid"/>
-          </a:ln>
-        </p:spPr>
-      </p:sp>
-      <p:sp>
-        <p:nvSpPr>
-          <p:cNvPr id="14" name="Shape 12"/>
-          <p:cNvSpPr/>
-          <p:nvPr/>
-        </p:nvSpPr>
-        <p:spPr>
-          <a:xfrm flipV="1">
-            <a:off x="1243584" y="2193935"/>
-            <a:ext cx="565630" cy="120228"/>
-          </a:xfrm>
-          <a:prstGeom prst="line">
-            <a:avLst/>
-          </a:prstGeom>
-          <a:noFill/>
-          <a:ln w="15240">
-            <a:solidFill>
-              <a:srgbClr val="1F4E79"/>
-            </a:solidFill>
-            <a:prstDash val="solid"/>
-          </a:ln>
-        </p:spPr>
-      </p:sp>
-      <p:sp>
-        <p:nvSpPr>
-          <p:cNvPr id="15" name="Shape 13"/>
-          <p:cNvSpPr/>
-          <p:nvPr/>
-        </p:nvSpPr>
-        <p:spPr>
-          <a:xfrm>
-            <a:off x="1207227" y="2277807"/>
-            <a:ext cx="72713" cy="72713"/>
-          </a:xfrm>
-          <a:prstGeom prst="ellipse">
-            <a:avLst/>
-          </a:prstGeom>
-          <a:solidFill>
-            <a:srgbClr val="1F4E79"/>
-          </a:solidFill>
-          <a:ln/>
-        </p:spPr>
-      </p:sp>
-      <p:sp>
-        <p:nvSpPr>
-          <p:cNvPr id="16" name="Text 14"/>
+        <p:txBody>
+          <a:bodyPr wrap="square" lIns="0" tIns="0" rIns="0" bIns="0" rtlCol="0" anchor="ctr"/>
+          <a:lstStyle/>
+          <a:p>
+            <a:pPr algn="ctr" indent="0" marL="0">
+              <a:buNone/>
+            </a:pPr>
+            <a:r>
+              <a:rPr lang="en-US" sz="700" dirty="0">
+                <a:solidFill>
+                  <a:srgbClr val="5F7183"/>
+                </a:solidFill>
+                <a:latin typeface="Arial" pitchFamily="34" charset="0"/>
+                <a:ea typeface="Arial" pitchFamily="34" charset="-122"/>
+                <a:cs typeface="Arial" pitchFamily="34" charset="-120"/>
+              </a:rPr>
+              <a:t>Hesai AT128P User Manual A02, §1.5 Specifications, p.13 · 節錄 · 讀取 2026/10/02</a:t>
+            </a:r>
+            <a:endParaRPr lang="en-US" sz="700" dirty="0"/>
+          </a:p>
+        </p:txBody>
+      </p:sp>
+      <p:sp>
+        <p:nvSpPr>
+          <p:cNvPr id="6" name="Text 3"/>
           <p:cNvSpPr txBox="1"/>
           <p:nvPr/>
         </p:nvSpPr>
         <p:spPr>
           <a:xfrm>
-            <a:off x="2295144" y="786384"/>
-            <a:ext cx="6345936" cy="787475"/>
+            <a:off x="4801380" y="786384"/>
+            <a:ext cx="3839700" cy="787475"/>
           </a:xfrm>
           <a:prstGeom prst="rect">
             <a:avLst/>
@@ -15095,13 +13558,13 @@
       </p:sp>
       <p:sp>
         <p:nvSpPr>
-          <p:cNvPr id="17" name="Shape 15"/>
+          <p:cNvPr id="7" name="Shape 4"/>
           <p:cNvSpPr/>
           <p:nvPr/>
         </p:nvSpPr>
         <p:spPr>
           <a:xfrm>
-            <a:off x="2295144" y="1665299"/>
+            <a:off x="4801380" y="1665299"/>
             <a:ext cx="1060704" cy="400118"/>
           </a:xfrm>
           <a:prstGeom prst="roundRect">
@@ -15117,13 +13580,13 @@
       </p:sp>
       <p:sp>
         <p:nvSpPr>
-          <p:cNvPr id="18" name="Text 16"/>
+          <p:cNvPr id="8" name="Text 5"/>
           <p:cNvSpPr txBox="1"/>
           <p:nvPr/>
         </p:nvSpPr>
         <p:spPr>
           <a:xfrm>
-            <a:off x="2350008" y="1701875"/>
+            <a:off x="4856244" y="1701875"/>
             <a:ext cx="950976" cy="345254"/>
           </a:xfrm>
           <a:prstGeom prst="rect">
@@ -15179,14 +13642,14 @@
       </p:sp>
       <p:sp>
         <p:nvSpPr>
-          <p:cNvPr id="19" name="Text 17"/>
+          <p:cNvPr id="9" name="Text 6"/>
           <p:cNvSpPr txBox="1"/>
           <p:nvPr/>
         </p:nvSpPr>
         <p:spPr>
           <a:xfrm>
-            <a:off x="3502152" y="1665299"/>
-            <a:ext cx="5138928" cy="454982"/>
+            <a:off x="6008388" y="1665299"/>
+            <a:ext cx="2632692" cy="454982"/>
           </a:xfrm>
           <a:prstGeom prst="rect">
             <a:avLst/>
@@ -15241,13 +13704,13 @@
       </p:sp>
       <p:sp>
         <p:nvSpPr>
-          <p:cNvPr id="20" name="Shape 18"/>
+          <p:cNvPr id="10" name="Shape 7"/>
           <p:cNvSpPr/>
           <p:nvPr/>
         </p:nvSpPr>
         <p:spPr>
           <a:xfrm>
-            <a:off x="2295144" y="2184289"/>
+            <a:off x="4801380" y="2184289"/>
             <a:ext cx="1060704" cy="400118"/>
           </a:xfrm>
           <a:prstGeom prst="roundRect">
@@ -15263,13 +13726,13 @@
       </p:sp>
       <p:sp>
         <p:nvSpPr>
-          <p:cNvPr id="21" name="Text 19"/>
+          <p:cNvPr id="11" name="Text 8"/>
           <p:cNvSpPr txBox="1"/>
           <p:nvPr/>
         </p:nvSpPr>
         <p:spPr>
           <a:xfrm>
-            <a:off x="2350008" y="2220865"/>
+            <a:off x="4856244" y="2220865"/>
             <a:ext cx="950976" cy="345254"/>
           </a:xfrm>
           <a:prstGeom prst="rect">
@@ -15325,14 +13788,14 @@
       </p:sp>
       <p:sp>
         <p:nvSpPr>
-          <p:cNvPr id="22" name="Text 20"/>
+          <p:cNvPr id="12" name="Text 9"/>
           <p:cNvSpPr txBox="1"/>
           <p:nvPr/>
         </p:nvSpPr>
         <p:spPr>
           <a:xfrm>
-            <a:off x="3502152" y="2184289"/>
-            <a:ext cx="5138928" cy="454982"/>
+            <a:off x="6008388" y="2184289"/>
+            <a:ext cx="2632692" cy="635187"/>
           </a:xfrm>
           <a:prstGeom prst="rect">
             <a:avLst/>
@@ -15387,13 +13850,13 @@
       </p:sp>
       <p:sp>
         <p:nvSpPr>
-          <p:cNvPr id="23" name="Shape 21"/>
+          <p:cNvPr id="13" name="Shape 10"/>
           <p:cNvSpPr/>
           <p:nvPr/>
         </p:nvSpPr>
         <p:spPr>
           <a:xfrm>
-            <a:off x="2295144" y="2703280"/>
+            <a:off x="4801380" y="2883484"/>
             <a:ext cx="1060704" cy="400118"/>
           </a:xfrm>
           <a:prstGeom prst="roundRect">
@@ -15409,13 +13872,13 @@
       </p:sp>
       <p:sp>
         <p:nvSpPr>
-          <p:cNvPr id="24" name="Text 22"/>
+          <p:cNvPr id="14" name="Text 11"/>
           <p:cNvSpPr txBox="1"/>
           <p:nvPr/>
         </p:nvSpPr>
         <p:spPr>
           <a:xfrm>
-            <a:off x="2350008" y="2739856"/>
+            <a:off x="4856244" y="2920060"/>
             <a:ext cx="950976" cy="345254"/>
           </a:xfrm>
           <a:prstGeom prst="rect">
@@ -15471,14 +13934,14 @@
       </p:sp>
       <p:sp>
         <p:nvSpPr>
-          <p:cNvPr id="25" name="Text 23"/>
+          <p:cNvPr id="15" name="Text 12"/>
           <p:cNvSpPr txBox="1"/>
           <p:nvPr/>
         </p:nvSpPr>
         <p:spPr>
           <a:xfrm>
-            <a:off x="3502152" y="2703280"/>
-            <a:ext cx="5138928" cy="454982"/>
+            <a:off x="6008388" y="2883484"/>
+            <a:ext cx="2632692" cy="807965"/>
           </a:xfrm>
           <a:prstGeom prst="rect">
             <a:avLst/>
@@ -15533,7 +13996,7 @@
       </p:sp>
       <p:sp>
         <p:nvSpPr>
-          <p:cNvPr id="26" name="Shape 24"/>
+          <p:cNvPr id="16" name="Shape 13"/>
           <p:cNvSpPr/>
           <p:nvPr/>
         </p:nvSpPr>
@@ -15560,7 +14023,7 @@
       </p:sp>
       <p:sp>
         <p:nvSpPr>
-          <p:cNvPr id="27" name="Text 25"/>
+          <p:cNvPr id="17" name="Text 14"/>
           <p:cNvSpPr txBox="1"/>
           <p:nvPr/>
         </p:nvSpPr>
@@ -15622,14 +14085,14 @@
       </p:sp>
       <p:pic>
         <p:nvPicPr>
-          <p:cNvPr id="29" name="Image 0" descr="/Users/tsengchenghsun/Class/carClass/Claude outputs/第五週(10-8)/src/logo.png">    </p:cNvPr>
+          <p:cNvPr id="19" name="Image 1" descr="/Users/tsengchenghsun/Class/carClass/Claude outputs/第五週(10-8)/src/logo.png">    </p:cNvPr>
           <p:cNvPicPr>
             <a:picLocks noChangeAspect="1"/>
           </p:cNvPicPr>
           <p:nvPr/>
         </p:nvPicPr>
         <p:blipFill>
-          <a:blip r:embed="rId1"/>
+          <a:blip r:embed="rId2"/>
           <a:stretch>
             <a:fillRect/>
           </a:stretch>
@@ -15646,7 +14109,7 @@
       </p:pic>
       <p:sp>
         <p:nvSpPr>
-          <p:cNvPr id="30" name="Text 26"/>
+          <p:cNvPr id="20" name="Text 15"/>
           <p:cNvSpPr txBox="1"/>
           <p:nvPr/>
         </p:nvSpPr>
@@ -15685,7 +14148,7 @@
       </p:sp>
       <p:sp>
         <p:nvSpPr>
-          <p:cNvPr id="31" name="Text 27"/>
+          <p:cNvPr id="21" name="Text 16"/>
           <p:cNvSpPr txBox="1"/>
           <p:nvPr/>
         </p:nvSpPr>
@@ -16017,7 +14480,7 @@
                           <a:ea typeface="Arial" pitchFamily="34" charset="-122"/>
                           <a:cs typeface="Arial" pitchFamily="34" charset="-120"/>
                         </a:rPr>
-                        <a:t>Hesai AT128</a:t>
+                        <a:t>Hesai AT128P</a:t>
                       </a:r>
                       <a:endParaRPr lang="en-US" sz="1200" dirty="0"/>
                     </a:p>
@@ -16034,7 +14497,7 @@
                           <a:ea typeface="微軟正黑體" pitchFamily="34" charset="-122"/>
                           <a:cs typeface="微軟正黑體" pitchFamily="34" charset="-120"/>
                         </a:rPr>
-                        <a:t>Hesai AT128</a:t>
+                        <a:t>Hesai AT128P</a:t>
                       </a:r>
                       <a:endParaRPr lang="en-US" sz="1200" dirty="0"/>
                     </a:p>
@@ -16661,7 +15124,7 @@
                           <a:ea typeface="Arial" pitchFamily="34" charset="-122"/>
                           <a:cs typeface="Arial" pitchFamily="34" charset="-120"/>
                         </a:rPr>
-                        <a:t>AT128 dày hơn 3 lần theo chiều ngang</a:t>
+                        <a:t>AT128P dày hơn 3 lần theo chiều ngang</a:t>
                       </a:r>
                       <a:endParaRPr lang="en-US" sz="1200" dirty="0"/>
                     </a:p>
@@ -16678,7 +15141,7 @@
                           <a:ea typeface="微軟正黑體" pitchFamily="34" charset="-122"/>
                           <a:cs typeface="微軟正黑體" pitchFamily="34" charset="-120"/>
                         </a:rPr>
-                        <a:t>AT128 左右密了三倍多</a:t>
+                        <a:t>AT128P 左右密了三倍多</a:t>
                       </a:r>
                       <a:endParaRPr lang="en-US" sz="1200" dirty="0"/>
                     </a:p>
@@ -17517,22 +15980,146 @@
       </p:sp>
       <p:sp>
         <p:nvSpPr>
-          <p:cNvPr id="3" name="Shape 1"/>
+          <p:cNvPr id="3" name="Text 1"/>
+          <p:cNvSpPr txBox="1"/>
+          <p:nvPr/>
+        </p:nvSpPr>
+        <p:spPr>
+          <a:xfrm>
+            <a:off x="502920" y="1178160"/>
+            <a:ext cx="8138160" cy="563762"/>
+          </a:xfrm>
+          <a:prstGeom prst="rect">
+            <a:avLst/>
+          </a:prstGeom>
+          <a:noFill/>
+          <a:ln/>
+        </p:spPr>
+        <p:txBody>
+          <a:bodyPr wrap="square" lIns="0" tIns="0" rIns="0" bIns="0" rtlCol="0" anchor="t"/>
+          <a:lstStyle/>
+          <a:p>
+            <a:pPr indent="0" marL="0">
+              <a:lnSpc>
+                <a:spcPct val="120000"/>
+              </a:lnSpc>
+              <a:buNone/>
+            </a:pPr>
+            <a:r>
+              <a:rPr lang="en-US" sz="1900" b="1" dirty="0">
+                <a:solidFill>
+                  <a:srgbClr val="0B1F3A"/>
+                </a:solidFill>
+                <a:latin typeface="Arial" pitchFamily="34" charset="0"/>
+                <a:ea typeface="Arial" pitchFamily="34" charset="-122"/>
+                <a:cs typeface="Arial" pitchFamily="34" charset="-120"/>
+              </a:rPr>
+              <a:t>Tốc độ cập nhật: một giây nó nhìn mấy lần</a:t>
+            </a:r>
+            <a:endParaRPr lang="en-US" sz="1900" dirty="0"/>
+          </a:p>
+          <a:p>
+            <a:pPr indent="0" marL="0">
+              <a:lnSpc>
+                <a:spcPct val="120000"/>
+              </a:lnSpc>
+              <a:buNone/>
+            </a:pPr>
+            <a:r>
+              <a:rPr lang="en-US" sz="1200" dirty="0">
+                <a:solidFill>
+                  <a:srgbClr val="007F72"/>
+                </a:solidFill>
+                <a:latin typeface="微軟正黑體" pitchFamily="34" charset="0"/>
+                <a:ea typeface="微軟正黑體" pitchFamily="34" charset="-122"/>
+                <a:cs typeface="微軟正黑體" pitchFamily="34" charset="-120"/>
+              </a:rPr>
+              <a:t>更新率：它一秒鐘看幾次</a:t>
+            </a:r>
+            <a:endParaRPr lang="en-US" sz="1900" dirty="0"/>
+          </a:p>
+        </p:txBody>
+      </p:sp>
+      <p:sp>
+        <p:nvSpPr>
+          <p:cNvPr id="4" name="Text 2"/>
+          <p:cNvSpPr txBox="1"/>
+          <p:nvPr/>
+        </p:nvSpPr>
+        <p:spPr>
+          <a:xfrm>
+            <a:off x="502920" y="1833362"/>
+            <a:ext cx="8138160" cy="481486"/>
+          </a:xfrm>
+          <a:prstGeom prst="rect">
+            <a:avLst/>
+          </a:prstGeom>
+          <a:noFill/>
+          <a:ln/>
+        </p:spPr>
+        <p:txBody>
+          <a:bodyPr wrap="square" lIns="0" tIns="0" rIns="0" bIns="0" rtlCol="0" anchor="t"/>
+          <a:lstStyle/>
+          <a:p>
+            <a:pPr indent="0" marL="0">
+              <a:lnSpc>
+                <a:spcPct val="128000"/>
+              </a:lnSpc>
+              <a:buNone/>
+            </a:pPr>
+            <a:r>
+              <a:rPr lang="en-US" sz="1250" dirty="0">
+                <a:solidFill>
+                  <a:srgbClr val="5F7183"/>
+                </a:solidFill>
+                <a:latin typeface="Arial" pitchFamily="34" charset="0"/>
+                <a:ea typeface="Arial" pitchFamily="34" charset="-122"/>
+                <a:cs typeface="Arial" pitchFamily="34" charset="-120"/>
+              </a:rPr>
+              <a:t>Ở 10 Hz, mỗi khung cách nhau 100 ms — chạy 40 km/h là xe đã đi 1,1 m.</a:t>
+            </a:r>
+            <a:endParaRPr lang="en-US" sz="1250" dirty="0"/>
+          </a:p>
+          <a:p>
+            <a:pPr indent="0" marL="0">
+              <a:lnSpc>
+                <a:spcPct val="128000"/>
+              </a:lnSpc>
+              <a:buNone/>
+            </a:pPr>
+            <a:r>
+              <a:rPr lang="en-US" sz="1150" dirty="0">
+                <a:solidFill>
+                  <a:srgbClr val="5F7183"/>
+                </a:solidFill>
+                <a:latin typeface="微軟正黑體" pitchFamily="34" charset="0"/>
+                <a:ea typeface="微軟正黑體" pitchFamily="34" charset="-122"/>
+                <a:cs typeface="微軟正黑體" pitchFamily="34" charset="-120"/>
+              </a:rPr>
+              <a:t>10 Hz 的話，每一張畫面隔 100 毫秒——時速 40 的時候，車子已經走了 1.1 公尺。</a:t>
+            </a:r>
+            <a:endParaRPr lang="en-US" sz="1250" dirty="0"/>
+          </a:p>
+        </p:txBody>
+      </p:sp>
+      <p:sp>
+        <p:nvSpPr>
+          <p:cNvPr id="5" name="Shape 3"/>
           <p:cNvSpPr/>
           <p:nvPr/>
         </p:nvSpPr>
         <p:spPr>
           <a:xfrm>
-            <a:off x="502920" y="1101852"/>
-            <a:ext cx="2468880" cy="2514600"/>
+            <a:off x="502920" y="2615184"/>
+            <a:ext cx="8138160" cy="1261872"/>
           </a:xfrm>
           <a:prstGeom prst="roundRect">
             <a:avLst>
-              <a:gd name="adj" fmla="val 4444"/>
+              <a:gd name="adj" fmla="val 6522"/>
             </a:avLst>
           </a:prstGeom>
           <a:solidFill>
-            <a:srgbClr val="F4F7FA"/>
+            <a:srgbClr val="FFFFFF"/>
           </a:solidFill>
           <a:ln w="12700">
             <a:solidFill>
@@ -17542,124 +16129,40 @@
           </a:ln>
         </p:spPr>
       </p:sp>
-      <p:sp>
-        <p:nvSpPr>
-          <p:cNvPr id="4" name="Shape 2"/>
-          <p:cNvSpPr/>
-          <p:nvPr/>
-        </p:nvSpPr>
-        <p:spPr>
-          <a:xfrm>
-            <a:off x="1493947" y="2203613"/>
-            <a:ext cx="929396" cy="755477"/>
-          </a:xfrm>
-          <a:prstGeom prst="roundRect">
-            <a:avLst>
-              <a:gd name="adj" fmla="val 6052"/>
-            </a:avLst>
-          </a:prstGeom>
-          <a:solidFill>
-            <a:srgbClr val="C8D3DE"/>
-          </a:solidFill>
-          <a:ln w="15240">
-            <a:solidFill>
-              <a:srgbClr val="F4F7FA"/>
-            </a:solidFill>
-            <a:prstDash val="solid"/>
-          </a:ln>
-        </p:spPr>
-      </p:sp>
-      <p:sp>
-        <p:nvSpPr>
-          <p:cNvPr id="5" name="Shape 3"/>
-          <p:cNvSpPr/>
-          <p:nvPr/>
-        </p:nvSpPr>
-        <p:spPr>
-          <a:xfrm>
-            <a:off x="1339047" y="2048073"/>
-            <a:ext cx="929396" cy="755477"/>
-          </a:xfrm>
-          <a:prstGeom prst="roundRect">
-            <a:avLst>
-              <a:gd name="adj" fmla="val 6052"/>
-            </a:avLst>
-          </a:prstGeom>
-          <a:solidFill>
-            <a:srgbClr val="C8D3DE"/>
-          </a:solidFill>
-          <a:ln w="15240">
-            <a:solidFill>
-              <a:srgbClr val="F4F7FA"/>
-            </a:solidFill>
-            <a:prstDash val="solid"/>
-          </a:ln>
-        </p:spPr>
-      </p:sp>
-      <p:sp>
-        <p:nvSpPr>
-          <p:cNvPr id="6" name="Shape 4"/>
-          <p:cNvSpPr/>
-          <p:nvPr/>
-        </p:nvSpPr>
-        <p:spPr>
-          <a:xfrm>
-            <a:off x="1184148" y="1892534"/>
-            <a:ext cx="929396" cy="755477"/>
-          </a:xfrm>
-          <a:prstGeom prst="roundRect">
-            <a:avLst>
-              <a:gd name="adj" fmla="val 6052"/>
-            </a:avLst>
-          </a:prstGeom>
-          <a:solidFill>
-            <a:srgbClr val="C8D3DE"/>
-          </a:solidFill>
-          <a:ln w="15240">
-            <a:solidFill>
-              <a:srgbClr val="F4F7FA"/>
-            </a:solidFill>
-            <a:prstDash val="solid"/>
-          </a:ln>
-        </p:spPr>
-      </p:sp>
-      <p:sp>
-        <p:nvSpPr>
-          <p:cNvPr id="7" name="Shape 5"/>
-          <p:cNvSpPr/>
-          <p:nvPr/>
-        </p:nvSpPr>
-        <p:spPr>
-          <a:xfrm>
-            <a:off x="1029249" y="1736994"/>
-            <a:ext cx="929396" cy="755477"/>
-          </a:xfrm>
-          <a:prstGeom prst="roundRect">
-            <a:avLst>
-              <a:gd name="adj" fmla="val 6052"/>
-            </a:avLst>
-          </a:prstGeom>
-          <a:solidFill>
-            <a:srgbClr val="8A5A00"/>
-          </a:solidFill>
-          <a:ln w="15240">
-            <a:solidFill>
-              <a:srgbClr val="F4F7FA"/>
-            </a:solidFill>
-            <a:prstDash val="solid"/>
-          </a:ln>
-        </p:spPr>
-      </p:sp>
-      <p:sp>
-        <p:nvSpPr>
-          <p:cNvPr id="8" name="Text 6"/>
+      <p:pic>
+        <p:nvPicPr>
+          <p:cNvPr id="6" name="Image 0" descr="/Users/tsengchenghsun/Class/carClass/Claude outputs/第五週(10-8)/src/img/w5_os1_rate.png">    </p:cNvPr>
+          <p:cNvPicPr>
+            <a:picLocks noChangeAspect="1"/>
+          </p:cNvPicPr>
+          <p:nvPr/>
+        </p:nvPicPr>
+        <p:blipFill>
+          <a:blip r:embed="rId1"/>
+          <a:stretch>
+            <a:fillRect/>
+          </a:stretch>
+        </p:blipFill>
+        <p:spPr>
+          <a:xfrm>
+            <a:off x="2130588" y="2706624"/>
+            <a:ext cx="4882824" cy="914400"/>
+          </a:xfrm>
+          <a:prstGeom prst="rect">
+            <a:avLst/>
+          </a:prstGeom>
+        </p:spPr>
+      </p:pic>
+      <p:sp>
+        <p:nvSpPr>
+          <p:cNvPr id="7" name="Text 4"/>
           <p:cNvSpPr txBox="1"/>
           <p:nvPr/>
         </p:nvSpPr>
         <p:spPr>
           <a:xfrm>
-            <a:off x="630936" y="2892430"/>
-            <a:ext cx="2212848" cy="399959"/>
+            <a:off x="576072" y="3657600"/>
+            <a:ext cx="7991856" cy="182880"/>
           </a:xfrm>
           <a:prstGeom prst="rect">
             <a:avLst/>
@@ -17675,147 +16178,23 @@
               <a:buNone/>
             </a:pPr>
             <a:r>
-              <a:rPr lang="en-US" sz="1100" b="1" dirty="0">
-                <a:solidFill>
-                  <a:srgbClr val="8A5A00"/>
+              <a:rPr lang="en-US" sz="700" dirty="0">
+                <a:solidFill>
+                  <a:srgbClr val="5F7183"/>
                 </a:solidFill>
                 <a:latin typeface="Arial" pitchFamily="34" charset="0"/>
                 <a:ea typeface="Arial" pitchFamily="34" charset="-122"/>
                 <a:cs typeface="Arial" pitchFamily="34" charset="-120"/>
               </a:rPr>
-              <a:t>× 10 000</a:t>
-            </a:r>
-            <a:endParaRPr lang="en-US" sz="1100" dirty="0"/>
+              <a:t>Ouster OS1 datasheet, Rev7 / FW 3.2, p.1 · 節錄 · 讀取 2026/10/02</a:t>
+            </a:r>
+            <a:endParaRPr lang="en-US" sz="700" dirty="0"/>
           </a:p>
         </p:txBody>
       </p:sp>
       <p:sp>
         <p:nvSpPr>
-          <p:cNvPr id="9" name="Text 7"/>
-          <p:cNvSpPr txBox="1"/>
-          <p:nvPr/>
-        </p:nvSpPr>
-        <p:spPr>
-          <a:xfrm>
-            <a:off x="3429000" y="1420580"/>
-            <a:ext cx="5212080" cy="1005611"/>
-          </a:xfrm>
-          <a:prstGeom prst="rect">
-            <a:avLst/>
-          </a:prstGeom>
-          <a:noFill/>
-          <a:ln/>
-        </p:spPr>
-        <p:txBody>
-          <a:bodyPr wrap="square" lIns="0" tIns="0" rIns="0" bIns="0" rtlCol="0" anchor="t"/>
-          <a:lstStyle/>
-          <a:p>
-            <a:pPr indent="0" marL="0">
-              <a:lnSpc>
-                <a:spcPct val="120000"/>
-              </a:lnSpc>
-              <a:buNone/>
-            </a:pPr>
-            <a:r>
-              <a:rPr lang="en-US" sz="2300" b="1" dirty="0">
-                <a:solidFill>
-                  <a:srgbClr val="0B1F3A"/>
-                </a:solidFill>
-                <a:latin typeface="Arial" pitchFamily="34" charset="0"/>
-                <a:ea typeface="Arial" pitchFamily="34" charset="-122"/>
-                <a:cs typeface="Arial" pitchFamily="34" charset="-120"/>
-              </a:rPr>
-              <a:t>Tốc độ cập nhật: một giây nó nhìn mấy lần</a:t>
-            </a:r>
-            <a:endParaRPr lang="en-US" sz="2300" dirty="0"/>
-          </a:p>
-          <a:p>
-            <a:pPr indent="0" marL="0">
-              <a:lnSpc>
-                <a:spcPct val="120000"/>
-              </a:lnSpc>
-              <a:buNone/>
-            </a:pPr>
-            <a:r>
-              <a:rPr lang="en-US" sz="1400" dirty="0">
-                <a:solidFill>
-                  <a:srgbClr val="007F72"/>
-                </a:solidFill>
-                <a:latin typeface="微軟正黑體" pitchFamily="34" charset="0"/>
-                <a:ea typeface="微軟正黑體" pitchFamily="34" charset="-122"/>
-                <a:cs typeface="微軟正黑體" pitchFamily="34" charset="-120"/>
-              </a:rPr>
-              <a:t>更新率：它一秒鐘看幾次</a:t>
-            </a:r>
-            <a:endParaRPr lang="en-US" sz="2300" dirty="0"/>
-          </a:p>
-        </p:txBody>
-      </p:sp>
-      <p:sp>
-        <p:nvSpPr>
-          <p:cNvPr id="10" name="Text 8"/>
-          <p:cNvSpPr txBox="1"/>
-          <p:nvPr/>
-        </p:nvSpPr>
-        <p:spPr>
-          <a:xfrm>
-            <a:off x="3429000" y="2517631"/>
-            <a:ext cx="5212080" cy="871533"/>
-          </a:xfrm>
-          <a:prstGeom prst="rect">
-            <a:avLst/>
-          </a:prstGeom>
-          <a:noFill/>
-          <a:ln/>
-        </p:spPr>
-        <p:txBody>
-          <a:bodyPr wrap="square" lIns="0" tIns="0" rIns="0" bIns="0" rtlCol="0" anchor="t"/>
-          <a:lstStyle/>
-          <a:p>
-            <a:pPr indent="0" marL="0">
-              <a:lnSpc>
-                <a:spcPct val="128000"/>
-              </a:lnSpc>
-              <a:buNone/>
-            </a:pPr>
-            <a:r>
-              <a:rPr lang="en-US" sz="1250" dirty="0">
-                <a:solidFill>
-                  <a:srgbClr val="5F7183"/>
-                </a:solidFill>
-                <a:latin typeface="Arial" pitchFamily="34" charset="0"/>
-                <a:ea typeface="Arial" pitchFamily="34" charset="-122"/>
-                <a:cs typeface="Arial" pitchFamily="34" charset="-120"/>
-              </a:rPr>
-              <a:t>OS1 quay 10 hoặc 20 vòng mỗi giây. Ở 10 Hz, mỗi khung cách nhau 100 ms — chạy 40 km/h thì trong khoảng đó xe đã đi 1,1 m.</a:t>
-            </a:r>
-            <a:endParaRPr lang="en-US" sz="1250" dirty="0"/>
-          </a:p>
-          <a:p>
-            <a:pPr indent="0" marL="0">
-              <a:lnSpc>
-                <a:spcPct val="128000"/>
-              </a:lnSpc>
-              <a:buNone/>
-            </a:pPr>
-            <a:r>
-              <a:rPr lang="en-US" sz="1150" dirty="0">
-                <a:solidFill>
-                  <a:srgbClr val="5F7183"/>
-                </a:solidFill>
-                <a:latin typeface="微軟正黑體" pitchFamily="34" charset="0"/>
-                <a:ea typeface="微軟正黑體" pitchFamily="34" charset="-122"/>
-                <a:cs typeface="微軟正黑體" pitchFamily="34" charset="-120"/>
-              </a:rPr>
-              <a:t>OS1 每秒轉 10 圈或 20 圈。10 Hz 的話，每一張畫面隔 100 毫秒——時速 40 的時候，這段時間車子已經走了 1.1 公尺。</a:t>
-            </a:r>
-            <a:endParaRPr lang="en-US" sz="1250" dirty="0"/>
-          </a:p>
-        </p:txBody>
-      </p:sp>
-      <p:sp>
-        <p:nvSpPr>
-          <p:cNvPr id="11" name="Shape 9"/>
+          <p:cNvPr id="8" name="Shape 5"/>
           <p:cNvSpPr/>
           <p:nvPr/>
         </p:nvSpPr>
@@ -17842,7 +16221,7 @@
       </p:sp>
       <p:sp>
         <p:nvSpPr>
-          <p:cNvPr id="12" name="Text 10"/>
+          <p:cNvPr id="9" name="Text 6"/>
           <p:cNvSpPr txBox="1"/>
           <p:nvPr/>
         </p:nvSpPr>
@@ -17904,14 +16283,14 @@
       </p:sp>
       <p:pic>
         <p:nvPicPr>
-          <p:cNvPr id="14" name="Image 0" descr="/Users/tsengchenghsun/Class/carClass/Claude outputs/第五週(10-8)/src/logo.png">    </p:cNvPr>
+          <p:cNvPr id="11" name="Image 1" descr="/Users/tsengchenghsun/Class/carClass/Claude outputs/第五週(10-8)/src/logo.png">    </p:cNvPr>
           <p:cNvPicPr>
             <a:picLocks noChangeAspect="1"/>
           </p:cNvPicPr>
           <p:nvPr/>
         </p:nvPicPr>
         <p:blipFill>
-          <a:blip r:embed="rId1"/>
+          <a:blip r:embed="rId2"/>
           <a:stretch>
             <a:fillRect/>
           </a:stretch>
@@ -17928,7 +16307,7 @@
       </p:pic>
       <p:sp>
         <p:nvSpPr>
-          <p:cNvPr id="15" name="Text 11"/>
+          <p:cNvPr id="12" name="Text 7"/>
           <p:cNvSpPr txBox="1"/>
           <p:nvPr/>
         </p:nvSpPr>
@@ -17967,7 +16346,7 @@
       </p:sp>
       <p:sp>
         <p:nvSpPr>
-          <p:cNvPr id="16" name="Text 12"/>
+          <p:cNvPr id="13" name="Text 8"/>
           <p:cNvSpPr txBox="1"/>
           <p:nvPr/>
         </p:nvSpPr>

--- a/第五週(10-08)/第五週_第1節_簡報.pptx
+++ b/第五週(10-08)/第五週_第1節_簡報.pptx
@@ -436,15 +436,15 @@
           <a:lstStyle/>
           <a:p>
             <a:pPr algn="l">
-              <a:lnSpc>
-                <a:spcPct val="115000"/>
-              </a:lnSpc>
-              <a:spcAft>
-                <a:spcPts val="500"/>
-              </a:spcAft>
-            </a:pPr>
-            <a:r>
-              <a:rPr sz="1000" b="1" lang="zh-TW" dirty="0">
+              <a:spcBef>
+                <a:spcPts val="0"/>
+              </a:spcBef>
+              <a:spcAft>
+                <a:spcPts val="142"/>
+              </a:spcAft>
+            </a:pPr>
+            <a:r>
+              <a:rPr sz="850" b="1" lang="zh-TW" dirty="0">
                 <a:solidFill>
                   <a:srgbClr val="000000"/>
                 </a:solidFill>
@@ -455,7 +455,7 @@
               <a:t>▍這一張要做什麼</a:t>
             </a:r>
             <a:r>
-              <a:rPr sz="1000" lang="zh-TW" dirty="0">
+              <a:rPr sz="850" lang="zh-TW" dirty="0">
                 <a:solidFill>
                   <a:srgbClr val="000000"/>
                 </a:solidFill>
@@ -469,15 +469,15 @@
           </a:p>
           <a:p>
             <a:pPr algn="l">
-              <a:lnSpc>
-                <a:spcPct val="115000"/>
-              </a:lnSpc>
-              <a:spcAft>
-                <a:spcPts val="500"/>
-              </a:spcAft>
-            </a:pPr>
-            <a:r>
-              <a:rPr sz="1000" lang="zh-TW" dirty="0">
+              <a:spcBef>
+                <a:spcPts val="0"/>
+              </a:spcBef>
+              <a:spcAft>
+                <a:spcPts val="142"/>
+              </a:spcAft>
+            </a:pPr>
+            <a:r>
+              <a:rPr sz="850" lang="zh-TW" dirty="0">
                 <a:solidFill>
                   <a:srgbClr val="000000"/>
                 </a:solidFill>
@@ -491,15 +491,15 @@
           </a:p>
           <a:p>
             <a:pPr algn="l">
-              <a:lnSpc>
-                <a:spcPct val="115000"/>
-              </a:lnSpc>
-              <a:spcAft>
-                <a:spcPts val="500"/>
-              </a:spcAft>
-            </a:pPr>
-            <a:r>
-              <a:rPr sz="1000" b="1" lang="zh-TW" dirty="0">
+              <a:spcBef>
+                <a:spcPts val="0"/>
+              </a:spcBef>
+              <a:spcAft>
+                <a:spcPts val="142"/>
+              </a:spcAft>
+            </a:pPr>
+            <a:r>
+              <a:rPr sz="850" b="1" lang="zh-TW" dirty="0">
                 <a:solidFill>
                   <a:srgbClr val="000000"/>
                 </a:solidFill>
@@ -510,7 +510,7 @@
               <a:t>▍畫面上圈這裡</a:t>
             </a:r>
             <a:r>
-              <a:rPr sz="1000" lang="zh-TW" dirty="0">
+              <a:rPr sz="850" lang="zh-TW" dirty="0">
                 <a:solidFill>
                   <a:srgbClr val="000000"/>
                 </a:solidFill>
@@ -524,15 +524,15 @@
           </a:p>
           <a:p>
             <a:pPr algn="l">
-              <a:lnSpc>
-                <a:spcPct val="115000"/>
-              </a:lnSpc>
-              <a:spcAft>
-                <a:spcPts val="500"/>
-              </a:spcAft>
-            </a:pPr>
-            <a:r>
-              <a:rPr sz="1000" lang="zh-TW" dirty="0">
+              <a:spcBef>
+                <a:spcPts val="0"/>
+              </a:spcBef>
+              <a:spcAft>
+                <a:spcPts val="142"/>
+              </a:spcAft>
+            </a:pPr>
+            <a:r>
+              <a:rPr sz="850" lang="zh-TW" dirty="0">
                 <a:solidFill>
                   <a:srgbClr val="000000"/>
                 </a:solidFill>
@@ -546,15 +546,15 @@
           </a:p>
           <a:p>
             <a:pPr algn="l">
-              <a:lnSpc>
-                <a:spcPct val="115000"/>
-              </a:lnSpc>
-              <a:spcAft>
-                <a:spcPts val="500"/>
-              </a:spcAft>
-            </a:pPr>
-            <a:r>
-              <a:rPr sz="1000" b="1" lang="zh-TW" dirty="0">
+              <a:spcBef>
+                <a:spcPts val="0"/>
+              </a:spcBef>
+              <a:spcAft>
+                <a:spcPts val="142"/>
+              </a:spcAft>
+            </a:pPr>
+            <a:r>
+              <a:rPr sz="850" b="1" lang="zh-TW" dirty="0">
                 <a:solidFill>
                   <a:srgbClr val="000000"/>
                 </a:solidFill>
@@ -565,7 +565,7 @@
               <a:t>▍以下照著唸</a:t>
             </a:r>
             <a:r>
-              <a:rPr sz="1000" lang="zh-TW" dirty="0">
+              <a:rPr sz="850" lang="zh-TW" dirty="0">
                 <a:solidFill>
                   <a:srgbClr val="000000"/>
                 </a:solidFill>
@@ -579,15 +579,15 @@
           </a:p>
           <a:p>
             <a:pPr algn="l">
-              <a:lnSpc>
-                <a:spcPct val="115000"/>
-              </a:lnSpc>
-              <a:spcAft>
-                <a:spcPts val="500"/>
-              </a:spcAft>
-            </a:pPr>
-            <a:r>
-              <a:rPr sz="1000" lang="zh-TW" dirty="0">
+              <a:spcBef>
+                <a:spcPts val="0"/>
+              </a:spcBef>
+              <a:spcAft>
+                <a:spcPts val="142"/>
+              </a:spcAft>
+            </a:pPr>
+            <a:r>
+              <a:rPr sz="850" lang="zh-TW" dirty="0">
                 <a:solidFill>
                   <a:srgbClr val="000000"/>
                 </a:solidFill>
@@ -601,15 +601,15 @@
           </a:p>
           <a:p>
             <a:pPr algn="l">
-              <a:lnSpc>
-                <a:spcPct val="115000"/>
-              </a:lnSpc>
-              <a:spcAft>
-                <a:spcPts val="500"/>
-              </a:spcAft>
-            </a:pPr>
-            <a:r>
-              <a:rPr sz="1000" lang="zh-TW" dirty="0">
+              <a:spcBef>
+                <a:spcPts val="0"/>
+              </a:spcBef>
+              <a:spcAft>
+                <a:spcPts val="142"/>
+              </a:spcAft>
+            </a:pPr>
+            <a:r>
+              <a:rPr sz="850" lang="zh-TW" dirty="0">
                 <a:solidFill>
                   <a:srgbClr val="000000"/>
                 </a:solidFill>
@@ -623,15 +623,15 @@
           </a:p>
           <a:p>
             <a:pPr algn="l">
-              <a:lnSpc>
-                <a:spcPct val="115000"/>
-              </a:lnSpc>
-              <a:spcAft>
-                <a:spcPts val="500"/>
-              </a:spcAft>
-            </a:pPr>
-            <a:r>
-              <a:rPr sz="1000" lang="zh-TW" dirty="0">
+              <a:spcBef>
+                <a:spcPts val="0"/>
+              </a:spcBef>
+              <a:spcAft>
+                <a:spcPts val="142"/>
+              </a:spcAft>
+            </a:pPr>
+            <a:r>
+              <a:rPr sz="850" lang="zh-TW" dirty="0">
                 <a:solidFill>
                   <a:srgbClr val="000000"/>
                 </a:solidFill>
@@ -645,15 +645,15 @@
           </a:p>
           <a:p>
             <a:pPr algn="l">
-              <a:lnSpc>
-                <a:spcPct val="115000"/>
-              </a:lnSpc>
-              <a:spcAft>
-                <a:spcPts val="500"/>
-              </a:spcAft>
-            </a:pPr>
-            <a:r>
-              <a:rPr sz="1000" lang="zh-TW" dirty="0">
+              <a:spcBef>
+                <a:spcPts val="0"/>
+              </a:spcBef>
+              <a:spcAft>
+                <a:spcPts val="142"/>
+              </a:spcAft>
+            </a:pPr>
+            <a:r>
+              <a:rPr sz="850" lang="zh-TW" dirty="0">
                 <a:solidFill>
                   <a:srgbClr val="000000"/>
                 </a:solidFill>
@@ -664,7 +664,7 @@
               <a:t>那兩週用的數字，全部是</a:t>
             </a:r>
             <a:r>
-              <a:rPr sz="1000" b="1" lang="zh-TW" dirty="0">
+              <a:rPr sz="850" b="1" lang="zh-TW" dirty="0">
                 <a:solidFill>
                   <a:srgbClr val="000000"/>
                 </a:solidFill>
@@ -675,7 +675,7 @@
               <a:t>我設定的教學模型</a:t>
             </a:r>
             <a:r>
-              <a:rPr sz="1000" lang="zh-TW" dirty="0">
+              <a:rPr sz="850" lang="zh-TW" dirty="0">
                 <a:solidFill>
                   <a:srgbClr val="000000"/>
                 </a:solidFill>
@@ -689,15 +689,15 @@
           </a:p>
           <a:p>
             <a:pPr algn="l">
-              <a:lnSpc>
-                <a:spcPct val="115000"/>
-              </a:lnSpc>
-              <a:spcAft>
-                <a:spcPts val="500"/>
-              </a:spcAft>
-            </a:pPr>
-            <a:r>
-              <a:rPr sz="1000" lang="zh-TW" dirty="0">
+              <a:spcBef>
+                <a:spcPts val="0"/>
+              </a:spcBef>
+              <a:spcAft>
+                <a:spcPts val="142"/>
+              </a:spcAft>
+            </a:pPr>
+            <a:r>
+              <a:rPr sz="850" lang="zh-TW" dirty="0">
                 <a:solidFill>
                   <a:srgbClr val="000000"/>
                 </a:solidFill>
@@ -708,7 +708,7 @@
               <a:t>今天不一樣。今天我把</a:t>
             </a:r>
             <a:r>
-              <a:rPr sz="1000" b="1" lang="zh-TW" dirty="0">
+              <a:rPr sz="850" b="1" lang="zh-TW" dirty="0">
                 <a:solidFill>
                   <a:srgbClr val="000000"/>
                 </a:solidFill>
@@ -719,7 +719,7 @@
               <a:t>真的規格表</a:t>
             </a:r>
             <a:r>
-              <a:rPr sz="1000" lang="zh-TW" dirty="0">
+              <a:rPr sz="850" lang="zh-TW" dirty="0">
                 <a:solidFill>
                   <a:srgbClr val="000000"/>
                 </a:solidFill>
@@ -730,7 +730,7 @@
               <a:t>攤開來，上面是真的廠商、真的型號、真的數字。我們要做的事只有一件：</a:t>
             </a:r>
             <a:r>
-              <a:rPr sz="1000" b="1" lang="zh-TW" dirty="0">
+              <a:rPr sz="850" b="1" lang="zh-TW" dirty="0">
                 <a:solidFill>
                   <a:srgbClr val="000000"/>
                 </a:solidFill>
@@ -741,7 +741,7 @@
               <a:t>把前兩週拉過的那三個滑桿，在規格表上一行一行找出來。</a:t>
             </a:r>
             <a:r>
-              <a:rPr sz="1000" lang="zh-TW" dirty="0">
+              <a:rPr sz="850" lang="zh-TW" dirty="0">
                 <a:solidFill>
                   <a:srgbClr val="000000"/>
                 </a:solidFill>
@@ -755,15 +755,15 @@
           </a:p>
           <a:p>
             <a:pPr algn="l">
-              <a:lnSpc>
-                <a:spcPct val="115000"/>
-              </a:lnSpc>
-              <a:spcAft>
-                <a:spcPts val="500"/>
-              </a:spcAft>
-            </a:pPr>
-            <a:r>
-              <a:rPr sz="1000" lang="zh-TW" dirty="0">
+              <a:spcBef>
+                <a:spcPts val="0"/>
+              </a:spcBef>
+              <a:spcAft>
+                <a:spcPts val="142"/>
+              </a:spcAft>
+            </a:pPr>
+            <a:r>
+              <a:rPr sz="850" lang="zh-TW" dirty="0">
                 <a:solidFill>
                   <a:srgbClr val="000000"/>
                 </a:solidFill>
@@ -777,15 +777,15 @@
           </a:p>
           <a:p>
             <a:pPr algn="l">
-              <a:lnSpc>
-                <a:spcPct val="115000"/>
-              </a:lnSpc>
-              <a:spcAft>
-                <a:spcPts val="500"/>
-              </a:spcAft>
-            </a:pPr>
-            <a:r>
-              <a:rPr sz="1000" lang="zh-TW" dirty="0">
+              <a:spcBef>
+                <a:spcPts val="0"/>
+              </a:spcBef>
+              <a:spcAft>
+                <a:spcPts val="142"/>
+              </a:spcAft>
+            </a:pPr>
+            <a:r>
+              <a:rPr sz="850" lang="zh-TW" dirty="0">
                 <a:solidFill>
                   <a:srgbClr val="000000"/>
                 </a:solidFill>
@@ -796,7 +796,7 @@
               <a:t>第一，規格表上有</a:t>
             </a:r>
             <a:r>
-              <a:rPr sz="1000" b="1" lang="zh-TW" dirty="0">
+              <a:rPr sz="850" b="1" lang="zh-TW" dirty="0">
                 <a:solidFill>
                   <a:srgbClr val="000000"/>
                 </a:solidFill>
@@ -807,7 +807,7 @@
               <a:t>第四個數字</a:t>
             </a:r>
             <a:r>
-              <a:rPr sz="1000" lang="zh-TW" dirty="0">
+              <a:rPr sz="850" lang="zh-TW" dirty="0">
                 <a:solidFill>
                   <a:srgbClr val="000000"/>
                 </a:solidFill>
@@ -821,15 +821,15 @@
           </a:p>
           <a:p>
             <a:pPr algn="l">
-              <a:lnSpc>
-                <a:spcPct val="115000"/>
-              </a:lnSpc>
-              <a:spcAft>
-                <a:spcPts val="500"/>
-              </a:spcAft>
-            </a:pPr>
-            <a:r>
-              <a:rPr sz="1000" lang="zh-TW" dirty="0">
+              <a:spcBef>
+                <a:spcPts val="0"/>
+              </a:spcBef>
+              <a:spcAft>
+                <a:spcPts val="142"/>
+              </a:spcAft>
+            </a:pPr>
+            <a:r>
+              <a:rPr sz="850" lang="zh-TW" dirty="0">
                 <a:solidFill>
                   <a:srgbClr val="000000"/>
                 </a:solidFill>
@@ -840,7 +840,7 @@
               <a:t>第二，相機的規格表上，居然</a:t>
             </a:r>
             <a:r>
-              <a:rPr sz="1000" b="1" lang="zh-TW" dirty="0">
+              <a:rPr sz="850" b="1" lang="zh-TW" dirty="0">
                 <a:solidFill>
                   <a:srgbClr val="000000"/>
                 </a:solidFill>
@@ -851,7 +851,7 @@
               <a:t>沒有視野、也沒有測距</a:t>
             </a:r>
             <a:r>
-              <a:rPr sz="1000" lang="zh-TW" dirty="0">
+              <a:rPr sz="850" lang="zh-TW" dirty="0">
                 <a:solidFill>
                   <a:srgbClr val="000000"/>
                 </a:solidFill>
@@ -865,15 +865,15 @@
           </a:p>
           <a:p>
             <a:pPr algn="l">
-              <a:lnSpc>
-                <a:spcPct val="115000"/>
-              </a:lnSpc>
-              <a:spcAft>
-                <a:spcPts val="500"/>
-              </a:spcAft>
-            </a:pPr>
-            <a:r>
-              <a:rPr sz="1000" lang="zh-TW" dirty="0">
+              <a:spcBef>
+                <a:spcPts val="0"/>
+              </a:spcBef>
+              <a:spcAft>
+                <a:spcPts val="142"/>
+              </a:spcAft>
+            </a:pPr>
+            <a:r>
+              <a:rPr sz="850" lang="zh-TW" dirty="0">
                 <a:solidFill>
                   <a:srgbClr val="000000"/>
                 </a:solidFill>
@@ -884,7 +884,7 @@
               <a:t>第三，同樣一顆光達，規格表上會寫</a:t>
             </a:r>
             <a:r>
-              <a:rPr sz="1000" b="1" lang="zh-TW" dirty="0">
+              <a:rPr sz="850" b="1" lang="zh-TW" dirty="0">
                 <a:solidFill>
                   <a:srgbClr val="000000"/>
                 </a:solidFill>
@@ -895,7 +895,7 @@
               <a:t>兩個測距</a:t>
             </a:r>
             <a:r>
-              <a:rPr sz="1000" lang="zh-TW" dirty="0">
+              <a:rPr sz="850" lang="zh-TW" dirty="0">
                 <a:solidFill>
                   <a:srgbClr val="000000"/>
                 </a:solidFill>
@@ -909,15 +909,15 @@
           </a:p>
           <a:p>
             <a:pPr algn="l">
-              <a:lnSpc>
-                <a:spcPct val="115000"/>
-              </a:lnSpc>
-              <a:spcAft>
-                <a:spcPts val="500"/>
-              </a:spcAft>
-            </a:pPr>
-            <a:r>
-              <a:rPr sz="1000" lang="zh-TW" dirty="0">
+              <a:spcBef>
+                <a:spcPts val="0"/>
+              </a:spcBef>
+              <a:spcAft>
+                <a:spcPts val="142"/>
+              </a:spcAft>
+            </a:pPr>
+            <a:r>
+              <a:rPr sz="850" lang="zh-TW" dirty="0">
                 <a:solidFill>
                   <a:srgbClr val="000000"/>
                 </a:solidFill>
@@ -951,11 +951,11 @@
           <a:lstStyle/>
           <a:p>
             <a:pPr algn="l">
-              <a:lnSpc>
-                <a:spcPct val="115000"/>
-              </a:lnSpc>
-              <a:spcAft>
-                <a:spcPts val="500"/>
+              <a:spcBef>
+                <a:spcPts val="0"/>
+              </a:spcBef>
+              <a:spcAft>
+                <a:spcPts val="167"/>
               </a:spcAft>
             </a:pPr>
             <a:r>
@@ -1030,15 +1030,15 @@
           <a:lstStyle/>
           <a:p>
             <a:pPr algn="l">
-              <a:lnSpc>
-                <a:spcPct val="115000"/>
-              </a:lnSpc>
-              <a:spcAft>
-                <a:spcPts val="500"/>
-              </a:spcAft>
-            </a:pPr>
-            <a:r>
-              <a:rPr sz="1000" b="1" lang="zh-TW" dirty="0">
+              <a:spcBef>
+                <a:spcPts val="0"/>
+              </a:spcBef>
+              <a:spcAft>
+                <a:spcPts val="133"/>
+              </a:spcAft>
+            </a:pPr>
+            <a:r>
+              <a:rPr sz="800" b="1" lang="zh-TW" dirty="0">
                 <a:solidFill>
                   <a:srgbClr val="000000"/>
                 </a:solidFill>
@@ -1049,7 +1049,7 @@
               <a:t>▍這一張要做什麼</a:t>
             </a:r>
             <a:r>
-              <a:rPr sz="1000" lang="zh-TW" dirty="0">
+              <a:rPr sz="800" lang="zh-TW" dirty="0">
                 <a:solidFill>
                   <a:srgbClr val="000000"/>
                 </a:solidFill>
@@ -1063,15 +1063,15 @@
           </a:p>
           <a:p>
             <a:pPr algn="l">
-              <a:lnSpc>
-                <a:spcPct val="115000"/>
-              </a:lnSpc>
-              <a:spcAft>
-                <a:spcPts val="500"/>
-              </a:spcAft>
-            </a:pPr>
-            <a:r>
-              <a:rPr sz="1000" lang="zh-TW" dirty="0">
+              <a:spcBef>
+                <a:spcPts val="0"/>
+              </a:spcBef>
+              <a:spcAft>
+                <a:spcPts val="133"/>
+              </a:spcAft>
+            </a:pPr>
+            <a:r>
+              <a:rPr sz="800" lang="zh-TW" dirty="0">
                 <a:solidFill>
                   <a:srgbClr val="000000"/>
                 </a:solidFill>
@@ -1085,15 +1085,15 @@
           </a:p>
           <a:p>
             <a:pPr algn="l">
-              <a:lnSpc>
-                <a:spcPct val="115000"/>
-              </a:lnSpc>
-              <a:spcAft>
-                <a:spcPts val="500"/>
-              </a:spcAft>
-            </a:pPr>
-            <a:r>
-              <a:rPr sz="1000" b="1" lang="zh-TW" dirty="0">
+              <a:spcBef>
+                <a:spcPts val="0"/>
+              </a:spcBef>
+              <a:spcAft>
+                <a:spcPts val="133"/>
+              </a:spcAft>
+            </a:pPr>
+            <a:r>
+              <a:rPr sz="800" b="1" lang="zh-TW" dirty="0">
                 <a:solidFill>
                   <a:srgbClr val="000000"/>
                 </a:solidFill>
@@ -1104,7 +1104,7 @@
               <a:t>▍畫面上圈這裡</a:t>
             </a:r>
             <a:r>
-              <a:rPr sz="1000" lang="zh-TW" dirty="0">
+              <a:rPr sz="800" lang="zh-TW" dirty="0">
                 <a:solidFill>
                   <a:srgbClr val="000000"/>
                 </a:solidFill>
@@ -1118,15 +1118,15 @@
           </a:p>
           <a:p>
             <a:pPr algn="l">
-              <a:lnSpc>
-                <a:spcPct val="115000"/>
-              </a:lnSpc>
-              <a:spcAft>
-                <a:spcPts val="500"/>
-              </a:spcAft>
-            </a:pPr>
-            <a:r>
-              <a:rPr sz="1000" lang="zh-TW" dirty="0">
+              <a:spcBef>
+                <a:spcPts val="0"/>
+              </a:spcBef>
+              <a:spcAft>
+                <a:spcPts val="133"/>
+              </a:spcAft>
+            </a:pPr>
+            <a:r>
+              <a:rPr sz="800" lang="zh-TW" dirty="0">
                 <a:solidFill>
                   <a:srgbClr val="000000"/>
                 </a:solidFill>
@@ -1140,15 +1140,15 @@
           </a:p>
           <a:p>
             <a:pPr algn="l">
-              <a:lnSpc>
-                <a:spcPct val="115000"/>
-              </a:lnSpc>
-              <a:spcAft>
-                <a:spcPts val="500"/>
-              </a:spcAft>
-            </a:pPr>
-            <a:r>
-              <a:rPr sz="1000" b="1" lang="zh-TW" dirty="0">
+              <a:spcBef>
+                <a:spcPts val="0"/>
+              </a:spcBef>
+              <a:spcAft>
+                <a:spcPts val="133"/>
+              </a:spcAft>
+            </a:pPr>
+            <a:r>
+              <a:rPr sz="800" b="1" lang="zh-TW" dirty="0">
                 <a:solidFill>
                   <a:srgbClr val="000000"/>
                 </a:solidFill>
@@ -1159,7 +1159,7 @@
               <a:t>▍以下照著唸</a:t>
             </a:r>
             <a:r>
-              <a:rPr sz="1000" lang="zh-TW" dirty="0">
+              <a:rPr sz="800" lang="zh-TW" dirty="0">
                 <a:solidFill>
                   <a:srgbClr val="000000"/>
                 </a:solidFill>
@@ -1173,15 +1173,15 @@
           </a:p>
           <a:p>
             <a:pPr algn="l">
-              <a:lnSpc>
-                <a:spcPct val="115000"/>
-              </a:lnSpc>
-              <a:spcAft>
-                <a:spcPts val="500"/>
-              </a:spcAft>
-            </a:pPr>
-            <a:r>
-              <a:rPr sz="1000" lang="zh-TW" dirty="0">
+              <a:spcBef>
+                <a:spcPts val="0"/>
+              </a:spcBef>
+              <a:spcAft>
+                <a:spcPts val="133"/>
+              </a:spcAft>
+            </a:pPr>
+            <a:r>
+              <a:rPr sz="800" lang="zh-TW" dirty="0">
                 <a:solidFill>
                   <a:srgbClr val="000000"/>
                 </a:solidFill>
@@ -1195,15 +1195,15 @@
           </a:p>
           <a:p>
             <a:pPr algn="l">
-              <a:lnSpc>
-                <a:spcPct val="115000"/>
-              </a:lnSpc>
-              <a:spcAft>
-                <a:spcPts val="500"/>
-              </a:spcAft>
-            </a:pPr>
-            <a:r>
-              <a:rPr sz="1000" b="1" lang="zh-TW" dirty="0">
+              <a:spcBef>
+                <a:spcPts val="0"/>
+              </a:spcBef>
+              <a:spcAft>
+                <a:spcPts val="133"/>
+              </a:spcAft>
+            </a:pPr>
+            <a:r>
+              <a:rPr sz="800" b="1" lang="zh-TW" dirty="0">
                 <a:solidFill>
                   <a:srgbClr val="000000"/>
                 </a:solidFill>
@@ -1214,7 +1214,7 @@
               <a:t>視野不是感測器決定的，是鏡頭決定的。</a:t>
             </a:r>
             <a:r>
-              <a:rPr sz="1000" lang="zh-TW" dirty="0">
+              <a:rPr sz="800" lang="zh-TW" dirty="0">
                 <a:solidFill>
                   <a:srgbClr val="000000"/>
                 </a:solidFill>
@@ -1228,15 +1228,15 @@
           </a:p>
           <a:p>
             <a:pPr algn="l">
-              <a:lnSpc>
-                <a:spcPct val="115000"/>
-              </a:lnSpc>
-              <a:spcAft>
-                <a:spcPts val="500"/>
-              </a:spcAft>
-            </a:pPr>
-            <a:r>
-              <a:rPr sz="1000" lang="zh-TW" dirty="0">
+              <a:spcBef>
+                <a:spcPts val="0"/>
+              </a:spcBef>
+              <a:spcAft>
+                <a:spcPts val="133"/>
+              </a:spcAft>
+            </a:pPr>
+            <a:r>
+              <a:rPr sz="800" lang="zh-TW" dirty="0">
                 <a:solidFill>
                   <a:srgbClr val="000000"/>
                 </a:solidFill>
@@ -1250,15 +1250,15 @@
           </a:p>
           <a:p>
             <a:pPr algn="l">
-              <a:lnSpc>
-                <a:spcPct val="115000"/>
-              </a:lnSpc>
-              <a:spcAft>
-                <a:spcPts val="500"/>
-              </a:spcAft>
-            </a:pPr>
-            <a:r>
-              <a:rPr sz="1000" lang="zh-TW" dirty="0">
+              <a:spcBef>
+                <a:spcPts val="0"/>
+              </a:spcBef>
+              <a:spcAft>
+                <a:spcPts val="133"/>
+              </a:spcAft>
+            </a:pPr>
+            <a:r>
+              <a:rPr sz="800" lang="zh-TW" dirty="0">
                 <a:solidFill>
                   <a:srgbClr val="000000"/>
                 </a:solidFill>
@@ -1272,15 +1272,15 @@
           </a:p>
           <a:p>
             <a:pPr algn="l">
-              <a:lnSpc>
-                <a:spcPct val="115000"/>
-              </a:lnSpc>
-              <a:spcAft>
-                <a:spcPts val="500"/>
-              </a:spcAft>
-            </a:pPr>
-            <a:r>
-              <a:rPr sz="1000" lang="zh-TW" dirty="0">
+              <a:spcBef>
+                <a:spcPts val="0"/>
+              </a:spcBef>
+              <a:spcAft>
+                <a:spcPts val="133"/>
+              </a:spcAft>
+            </a:pPr>
+            <a:r>
+              <a:rPr sz="800" lang="zh-TW" dirty="0">
                 <a:solidFill>
                   <a:srgbClr val="000000"/>
                 </a:solidFill>
@@ -1294,15 +1294,15 @@
           </a:p>
           <a:p>
             <a:pPr algn="l">
-              <a:lnSpc>
-                <a:spcPct val="115000"/>
-              </a:lnSpc>
-              <a:spcAft>
-                <a:spcPts val="500"/>
-              </a:spcAft>
-            </a:pPr>
-            <a:r>
-              <a:rPr sz="1000" lang="zh-TW" dirty="0">
+              <a:spcBef>
+                <a:spcPts val="0"/>
+              </a:spcBef>
+              <a:spcAft>
+                <a:spcPts val="133"/>
+              </a:spcAft>
+            </a:pPr>
+            <a:r>
+              <a:rPr sz="800" lang="zh-TW" dirty="0">
                 <a:solidFill>
                   <a:srgbClr val="000000"/>
                 </a:solidFill>
@@ -1313,7 +1313,7 @@
               <a:t>規則是這樣：</a:t>
             </a:r>
             <a:r>
-              <a:rPr sz="1000" b="1" lang="zh-TW" dirty="0">
+              <a:rPr sz="800" b="1" lang="zh-TW" dirty="0">
                 <a:solidFill>
                   <a:srgbClr val="000000"/>
                 </a:solidFill>
@@ -1324,7 +1324,7 @@
               <a:t>感光元件愈寬、鏡頭焦距愈短，看得愈廣。</a:t>
             </a:r>
             <a:r>
-              <a:rPr sz="1000" lang="zh-TW" dirty="0">
+              <a:rPr sz="800" lang="zh-TW" dirty="0">
                 <a:solidFill>
                   <a:srgbClr val="000000"/>
                 </a:solidFill>
@@ -1338,15 +1338,15 @@
           </a:p>
           <a:p>
             <a:pPr algn="l">
-              <a:lnSpc>
-                <a:spcPct val="115000"/>
-              </a:lnSpc>
-              <a:spcAft>
-                <a:spcPts val="500"/>
-              </a:spcAft>
-            </a:pPr>
-            <a:r>
-              <a:rPr sz="1000" lang="zh-TW" dirty="0">
+              <a:spcBef>
+                <a:spcPts val="0"/>
+              </a:spcBef>
+              <a:spcAft>
+                <a:spcPts val="133"/>
+              </a:spcAft>
+            </a:pPr>
+            <a:r>
+              <a:rPr sz="800" lang="zh-TW" dirty="0">
                 <a:solidFill>
                   <a:srgbClr val="000000"/>
                 </a:solidFill>
@@ -1357,7 +1357,7 @@
               <a:t>我們用真的數字算一次。這顆晶片是 2048 個像素，每個像素 3 微米，所以它的寬度是 2048 乘 3 微米，等於</a:t>
             </a:r>
             <a:r>
-              <a:rPr sz="1000" b="1" lang="zh-TW" dirty="0">
+              <a:rPr sz="800" b="1" lang="zh-TW" dirty="0">
                 <a:solidFill>
                   <a:srgbClr val="000000"/>
                 </a:solidFill>
@@ -1368,7 +1368,7 @@
               <a:t>六點一四公釐</a:t>
             </a:r>
             <a:r>
-              <a:rPr sz="1000" lang="zh-TW" dirty="0">
+              <a:rPr sz="800" lang="zh-TW" dirty="0">
                 <a:solidFill>
                   <a:srgbClr val="000000"/>
                 </a:solidFill>
@@ -1382,15 +1382,15 @@
           </a:p>
           <a:p>
             <a:pPr algn="l">
-              <a:lnSpc>
-                <a:spcPct val="115000"/>
-              </a:lnSpc>
-              <a:spcAft>
-                <a:spcPts val="500"/>
-              </a:spcAft>
-            </a:pPr>
-            <a:r>
-              <a:rPr sz="1000" lang="zh-TW" dirty="0">
+              <a:spcBef>
+                <a:spcPts val="0"/>
+              </a:spcBef>
+              <a:spcAft>
+                <a:spcPts val="133"/>
+              </a:spcAft>
+            </a:pPr>
+            <a:r>
+              <a:rPr sz="800" lang="zh-TW" dirty="0">
                 <a:solidFill>
                   <a:srgbClr val="000000"/>
                 </a:solidFill>
@@ -1401,7 +1401,7 @@
               <a:t>配一顆 8 公釐的鏡頭，算出來是</a:t>
             </a:r>
             <a:r>
-              <a:rPr sz="1000" b="1" lang="zh-TW" dirty="0">
+              <a:rPr sz="800" b="1" lang="zh-TW" dirty="0">
                 <a:solidFill>
                   <a:srgbClr val="000000"/>
                 </a:solidFill>
@@ -1412,7 +1412,7 @@
               <a:t>42 度</a:t>
             </a:r>
             <a:r>
-              <a:rPr sz="1000" lang="zh-TW" dirty="0">
+              <a:rPr sz="800" lang="zh-TW" dirty="0">
                 <a:solidFill>
                   <a:srgbClr val="000000"/>
                 </a:solidFill>
@@ -1426,15 +1426,15 @@
           </a:p>
           <a:p>
             <a:pPr algn="l">
-              <a:lnSpc>
-                <a:spcPct val="115000"/>
-              </a:lnSpc>
-              <a:spcAft>
-                <a:spcPts val="500"/>
-              </a:spcAft>
-            </a:pPr>
-            <a:r>
-              <a:rPr sz="1000" lang="zh-TW" dirty="0">
+              <a:spcBef>
+                <a:spcPts val="0"/>
+              </a:spcBef>
+              <a:spcAft>
+                <a:spcPts val="133"/>
+              </a:spcAft>
+            </a:pPr>
+            <a:r>
+              <a:rPr sz="800" lang="zh-TW" dirty="0">
                 <a:solidFill>
                   <a:srgbClr val="000000"/>
                 </a:solidFill>
@@ -1445,7 +1445,7 @@
               <a:t>配一顆 3.6 公釐的鏡頭，變成</a:t>
             </a:r>
             <a:r>
-              <a:rPr sz="1000" b="1" lang="zh-TW" dirty="0">
+              <a:rPr sz="800" b="1" lang="zh-TW" dirty="0">
                 <a:solidFill>
                   <a:srgbClr val="000000"/>
                 </a:solidFill>
@@ -1456,7 +1456,7 @@
               <a:t>81 度</a:t>
             </a:r>
             <a:r>
-              <a:rPr sz="1000" lang="zh-TW" dirty="0">
+              <a:rPr sz="800" lang="zh-TW" dirty="0">
                 <a:solidFill>
                   <a:srgbClr val="000000"/>
                 </a:solidFill>
@@ -1470,15 +1470,15 @@
           </a:p>
           <a:p>
             <a:pPr algn="l">
-              <a:lnSpc>
-                <a:spcPct val="115000"/>
-              </a:lnSpc>
-              <a:spcAft>
-                <a:spcPts val="500"/>
-              </a:spcAft>
-            </a:pPr>
-            <a:r>
-              <a:rPr sz="1000" lang="zh-TW" dirty="0">
+              <a:spcBef>
+                <a:spcPts val="0"/>
+              </a:spcBef>
+              <a:spcAft>
+                <a:spcPts val="133"/>
+              </a:spcAft>
+            </a:pPr>
+            <a:r>
+              <a:rPr sz="800" lang="zh-TW" dirty="0">
                 <a:solidFill>
                   <a:srgbClr val="000000"/>
                 </a:solidFill>
@@ -1489,7 +1489,7 @@
               <a:t>配一顆 16 公釐的鏡頭，只剩</a:t>
             </a:r>
             <a:r>
-              <a:rPr sz="1000" b="1" lang="zh-TW" dirty="0">
+              <a:rPr sz="800" b="1" lang="zh-TW" dirty="0">
                 <a:solidFill>
                   <a:srgbClr val="000000"/>
                 </a:solidFill>
@@ -1500,7 +1500,7 @@
               <a:t>21.7 度</a:t>
             </a:r>
             <a:r>
-              <a:rPr sz="1000" lang="zh-TW" dirty="0">
+              <a:rPr sz="800" lang="zh-TW" dirty="0">
                 <a:solidFill>
                   <a:srgbClr val="000000"/>
                 </a:solidFill>
@@ -1514,15 +1514,15 @@
           </a:p>
           <a:p>
             <a:pPr algn="l">
-              <a:lnSpc>
-                <a:spcPct val="115000"/>
-              </a:lnSpc>
-              <a:spcAft>
-                <a:spcPts val="500"/>
-              </a:spcAft>
-            </a:pPr>
-            <a:r>
-              <a:rPr sz="1000" lang="zh-TW" dirty="0">
+              <a:spcBef>
+                <a:spcPts val="0"/>
+              </a:spcBef>
+              <a:spcAft>
+                <a:spcPts val="133"/>
+              </a:spcAft>
+            </a:pPr>
+            <a:r>
+              <a:rPr sz="800" lang="zh-TW" dirty="0">
                 <a:solidFill>
                   <a:srgbClr val="000000"/>
                 </a:solidFill>
@@ -1536,15 +1536,15 @@
           </a:p>
           <a:p>
             <a:pPr algn="l">
-              <a:lnSpc>
-                <a:spcPct val="115000"/>
-              </a:lnSpc>
-              <a:spcAft>
-                <a:spcPts val="500"/>
-              </a:spcAft>
-            </a:pPr>
-            <a:r>
-              <a:rPr sz="1000" lang="zh-TW" dirty="0">
+              <a:spcBef>
+                <a:spcPts val="0"/>
+              </a:spcBef>
+              <a:spcAft>
+                <a:spcPts val="133"/>
+              </a:spcAft>
+            </a:pPr>
+            <a:r>
+              <a:rPr sz="800" lang="zh-TW" dirty="0">
                 <a:solidFill>
                   <a:srgbClr val="000000"/>
                 </a:solidFill>
@@ -1558,15 +1558,15 @@
           </a:p>
           <a:p>
             <a:pPr algn="l">
-              <a:lnSpc>
-                <a:spcPct val="115000"/>
-              </a:lnSpc>
-              <a:spcAft>
-                <a:spcPts val="500"/>
-              </a:spcAft>
-            </a:pPr>
-            <a:r>
-              <a:rPr sz="1000" lang="zh-TW" dirty="0">
+              <a:spcBef>
+                <a:spcPts val="0"/>
+              </a:spcBef>
+              <a:spcAft>
+                <a:spcPts val="133"/>
+              </a:spcAft>
+            </a:pPr>
+            <a:r>
+              <a:rPr sz="800" lang="zh-TW" dirty="0">
                 <a:solidFill>
                   <a:srgbClr val="000000"/>
                 </a:solidFill>
@@ -1580,15 +1580,15 @@
           </a:p>
           <a:p>
             <a:pPr algn="l">
-              <a:lnSpc>
-                <a:spcPct val="115000"/>
-              </a:lnSpc>
-              <a:spcAft>
-                <a:spcPts val="500"/>
-              </a:spcAft>
-            </a:pPr>
-            <a:r>
-              <a:rPr sz="1000" lang="zh-TW" dirty="0">
+              <a:spcBef>
+                <a:spcPts val="0"/>
+              </a:spcBef>
+              <a:spcAft>
+                <a:spcPts val="133"/>
+              </a:spcAft>
+            </a:pPr>
+            <a:r>
+              <a:rPr sz="800" lang="zh-TW" dirty="0">
                 <a:solidFill>
                   <a:srgbClr val="000000"/>
                 </a:solidFill>
@@ -1599,7 +1599,7 @@
               <a:t>有沒有發現：焦距加倍，視野大約減半，而且每一個像素代表的角度也跟著減半——</a:t>
             </a:r>
             <a:r>
-              <a:rPr sz="1000" b="1" lang="zh-TW" dirty="0">
+              <a:rPr sz="800" b="1" lang="zh-TW" dirty="0">
                 <a:solidFill>
                   <a:srgbClr val="000000"/>
                 </a:solidFill>
@@ -1610,7 +1610,7 @@
               <a:t>看得更準，但看得更窄</a:t>
             </a:r>
             <a:r>
-              <a:rPr sz="1000" lang="zh-TW" dirty="0">
+              <a:rPr sz="800" lang="zh-TW" dirty="0">
                 <a:solidFill>
                   <a:srgbClr val="000000"/>
                 </a:solidFill>
@@ -1624,15 +1624,15 @@
           </a:p>
           <a:p>
             <a:pPr algn="l">
-              <a:lnSpc>
-                <a:spcPct val="115000"/>
-              </a:lnSpc>
-              <a:spcAft>
-                <a:spcPts val="500"/>
-              </a:spcAft>
-            </a:pPr>
-            <a:r>
-              <a:rPr sz="1000" lang="zh-TW" dirty="0">
+              <a:spcBef>
+                <a:spcPts val="0"/>
+              </a:spcBef>
+              <a:spcAft>
+                <a:spcPts val="133"/>
+              </a:spcAft>
+            </a:pPr>
+            <a:r>
+              <a:rPr sz="800" lang="zh-TW" dirty="0">
                 <a:solidFill>
                   <a:srgbClr val="000000"/>
                 </a:solidFill>
@@ -1646,15 +1646,15 @@
           </a:p>
           <a:p>
             <a:pPr algn="l">
-              <a:lnSpc>
-                <a:spcPct val="115000"/>
-              </a:lnSpc>
-              <a:spcAft>
-                <a:spcPts val="500"/>
-              </a:spcAft>
-            </a:pPr>
-            <a:r>
-              <a:rPr sz="1000" lang="zh-TW" dirty="0">
+              <a:spcBef>
+                <a:spcPts val="0"/>
+              </a:spcBef>
+              <a:spcAft>
+                <a:spcPts val="133"/>
+              </a:spcAft>
+            </a:pPr>
+            <a:r>
+              <a:rPr sz="800" lang="zh-TW" dirty="0">
                 <a:solidFill>
                   <a:srgbClr val="000000"/>
                 </a:solidFill>
@@ -1665,7 +1665,7 @@
               <a:t>至於測距那一行為什麼沒有，答案更簡單：</a:t>
             </a:r>
             <a:r>
-              <a:rPr sz="1000" b="1" lang="zh-TW" dirty="0">
+              <a:rPr sz="800" b="1" lang="zh-TW" dirty="0">
                 <a:solidFill>
                   <a:srgbClr val="000000"/>
                 </a:solidFill>
@@ -1676,7 +1676,7 @@
               <a:t>相機不量距離，它是算出來的。</a:t>
             </a:r>
             <a:r>
-              <a:rPr sz="1000" lang="zh-TW" dirty="0">
+              <a:rPr sz="800" lang="zh-TW" dirty="0">
                 <a:solidFill>
                   <a:srgbClr val="000000"/>
                 </a:solidFill>
@@ -1710,11 +1710,11 @@
           <a:lstStyle/>
           <a:p>
             <a:pPr algn="l">
-              <a:lnSpc>
-                <a:spcPct val="115000"/>
-              </a:lnSpc>
-              <a:spcAft>
-                <a:spcPts val="500"/>
+              <a:spcBef>
+                <a:spcPts val="0"/>
+              </a:spcBef>
+              <a:spcAft>
+                <a:spcPts val="167"/>
               </a:spcAft>
             </a:pPr>
             <a:r>
@@ -1789,15 +1789,15 @@
           <a:lstStyle/>
           <a:p>
             <a:pPr algn="l">
-              <a:lnSpc>
-                <a:spcPct val="115000"/>
-              </a:lnSpc>
-              <a:spcAft>
-                <a:spcPts val="500"/>
-              </a:spcAft>
-            </a:pPr>
-            <a:r>
-              <a:rPr sz="1000" b="1" lang="zh-TW" dirty="0">
+              <a:spcBef>
+                <a:spcPts val="0"/>
+              </a:spcBef>
+              <a:spcAft>
+                <a:spcPts val="142"/>
+              </a:spcAft>
+            </a:pPr>
+            <a:r>
+              <a:rPr sz="850" b="1" lang="zh-TW" dirty="0">
                 <a:solidFill>
                   <a:srgbClr val="000000"/>
                 </a:solidFill>
@@ -1808,7 +1808,7 @@
               <a:t>▍這一張要做什麼</a:t>
             </a:r>
             <a:r>
-              <a:rPr sz="1000" lang="zh-TW" dirty="0">
+              <a:rPr sz="850" lang="zh-TW" dirty="0">
                 <a:solidFill>
                   <a:srgbClr val="000000"/>
                 </a:solidFill>
@@ -1822,15 +1822,15 @@
           </a:p>
           <a:p>
             <a:pPr algn="l">
-              <a:lnSpc>
-                <a:spcPct val="115000"/>
-              </a:lnSpc>
-              <a:spcAft>
-                <a:spcPts val="500"/>
-              </a:spcAft>
-            </a:pPr>
-            <a:r>
-              <a:rPr sz="1000" lang="zh-TW" dirty="0">
+              <a:spcBef>
+                <a:spcPts val="0"/>
+              </a:spcBef>
+              <a:spcAft>
+                <a:spcPts val="142"/>
+              </a:spcAft>
+            </a:pPr>
+            <a:r>
+              <a:rPr sz="850" lang="zh-TW" dirty="0">
                 <a:solidFill>
                   <a:srgbClr val="000000"/>
                 </a:solidFill>
@@ -1844,15 +1844,15 @@
           </a:p>
           <a:p>
             <a:pPr algn="l">
-              <a:lnSpc>
-                <a:spcPct val="115000"/>
-              </a:lnSpc>
-              <a:spcAft>
-                <a:spcPts val="500"/>
-              </a:spcAft>
-            </a:pPr>
-            <a:r>
-              <a:rPr sz="1000" b="1" lang="zh-TW" dirty="0">
+              <a:spcBef>
+                <a:spcPts val="0"/>
+              </a:spcBef>
+              <a:spcAft>
+                <a:spcPts val="142"/>
+              </a:spcAft>
+            </a:pPr>
+            <a:r>
+              <a:rPr sz="850" b="1" lang="zh-TW" dirty="0">
                 <a:solidFill>
                   <a:srgbClr val="000000"/>
                 </a:solidFill>
@@ -1863,7 +1863,7 @@
               <a:t>▍畫面上圈這裡</a:t>
             </a:r>
             <a:r>
-              <a:rPr sz="1000" lang="zh-TW" dirty="0">
+              <a:rPr sz="850" lang="zh-TW" dirty="0">
                 <a:solidFill>
                   <a:srgbClr val="000000"/>
                 </a:solidFill>
@@ -1877,15 +1877,15 @@
           </a:p>
           <a:p>
             <a:pPr algn="l">
-              <a:lnSpc>
-                <a:spcPct val="115000"/>
-              </a:lnSpc>
-              <a:spcAft>
-                <a:spcPts val="500"/>
-              </a:spcAft>
-            </a:pPr>
-            <a:r>
-              <a:rPr sz="1000" lang="zh-TW" dirty="0">
+              <a:spcBef>
+                <a:spcPts val="0"/>
+              </a:spcBef>
+              <a:spcAft>
+                <a:spcPts val="142"/>
+              </a:spcAft>
+            </a:pPr>
+            <a:r>
+              <a:rPr sz="850" lang="zh-TW" dirty="0">
                 <a:solidFill>
                   <a:srgbClr val="000000"/>
                 </a:solidFill>
@@ -1899,15 +1899,15 @@
           </a:p>
           <a:p>
             <a:pPr algn="l">
-              <a:lnSpc>
-                <a:spcPct val="115000"/>
-              </a:lnSpc>
-              <a:spcAft>
-                <a:spcPts val="500"/>
-              </a:spcAft>
-            </a:pPr>
-            <a:r>
-              <a:rPr sz="1000" b="1" lang="zh-TW" dirty="0">
+              <a:spcBef>
+                <a:spcPts val="0"/>
+              </a:spcBef>
+              <a:spcAft>
+                <a:spcPts val="142"/>
+              </a:spcAft>
+            </a:pPr>
+            <a:r>
+              <a:rPr sz="850" b="1" lang="zh-TW" dirty="0">
                 <a:solidFill>
                   <a:srgbClr val="000000"/>
                 </a:solidFill>
@@ -1918,7 +1918,7 @@
               <a:t>▍以下照著唸</a:t>
             </a:r>
             <a:r>
-              <a:rPr sz="1000" lang="zh-TW" dirty="0">
+              <a:rPr sz="850" lang="zh-TW" dirty="0">
                 <a:solidFill>
                   <a:srgbClr val="000000"/>
                 </a:solidFill>
@@ -1932,15 +1932,15 @@
           </a:p>
           <a:p>
             <a:pPr algn="l">
-              <a:lnSpc>
-                <a:spcPct val="115000"/>
-              </a:lnSpc>
-              <a:spcAft>
-                <a:spcPts val="500"/>
-              </a:spcAft>
-            </a:pPr>
-            <a:r>
-              <a:rPr sz="1000" lang="zh-TW" dirty="0">
+              <a:spcBef>
+                <a:spcPts val="0"/>
+              </a:spcBef>
+              <a:spcAft>
+                <a:spcPts val="142"/>
+              </a:spcAft>
+            </a:pPr>
+            <a:r>
+              <a:rPr sz="850" lang="zh-TW" dirty="0">
                 <a:solidFill>
                   <a:srgbClr val="000000"/>
                 </a:solidFill>
@@ -1954,15 +1954,15 @@
           </a:p>
           <a:p>
             <a:pPr algn="l">
-              <a:lnSpc>
-                <a:spcPct val="115000"/>
-              </a:lnSpc>
-              <a:spcAft>
-                <a:spcPts val="500"/>
-              </a:spcAft>
-            </a:pPr>
-            <a:r>
-              <a:rPr sz="1000" lang="zh-TW" dirty="0">
+              <a:spcBef>
+                <a:spcPts val="0"/>
+              </a:spcBef>
+              <a:spcAft>
+                <a:spcPts val="142"/>
+              </a:spcAft>
+            </a:pPr>
+            <a:r>
+              <a:rPr sz="850" lang="zh-TW" dirty="0">
                 <a:solidFill>
                   <a:srgbClr val="000000"/>
                 </a:solidFill>
@@ -1973,7 +1973,7 @@
               <a:t>OS1 的規格表上，水平解析度那一行寫的是 </a:t>
             </a:r>
             <a:r>
-              <a:rPr sz="1000" b="1" lang="zh-TW" dirty="0">
+              <a:rPr sz="850" b="1" lang="zh-TW" dirty="0">
                 <a:solidFill>
                   <a:srgbClr val="000000"/>
                 </a:solidFill>
@@ -1984,7 +1984,7 @@
               <a:t>512 / 1024 / 2048 (configurable)</a:t>
             </a:r>
             <a:r>
-              <a:rPr sz="1000" lang="zh-TW" dirty="0">
+              <a:rPr sz="850" lang="zh-TW" dirty="0">
                 <a:solidFill>
                   <a:srgbClr val="000000"/>
                 </a:solidFill>
@@ -1995,7 +1995,7 @@
               <a:t>。最後那個字很重要，configurable，</a:t>
             </a:r>
             <a:r>
-              <a:rPr sz="1000" b="1" lang="zh-TW" dirty="0">
+              <a:rPr sz="850" b="1" lang="zh-TW" dirty="0">
                 <a:solidFill>
                   <a:srgbClr val="000000"/>
                 </a:solidFill>
@@ -2006,7 +2006,7 @@
               <a:t>可以設定</a:t>
             </a:r>
             <a:r>
-              <a:rPr sz="1000" lang="zh-TW" dirty="0">
+              <a:rPr sz="850" lang="zh-TW" dirty="0">
                 <a:solidFill>
                   <a:srgbClr val="000000"/>
                 </a:solidFill>
@@ -2020,15 +2020,15 @@
           </a:p>
           <a:p>
             <a:pPr algn="l">
-              <a:lnSpc>
-                <a:spcPct val="115000"/>
-              </a:lnSpc>
-              <a:spcAft>
-                <a:spcPts val="500"/>
-              </a:spcAft>
-            </a:pPr>
-            <a:r>
-              <a:rPr sz="1000" lang="zh-TW" dirty="0">
+              <a:spcBef>
+                <a:spcPts val="0"/>
+              </a:spcBef>
+              <a:spcAft>
+                <a:spcPts val="142"/>
+              </a:spcAft>
+            </a:pPr>
+            <a:r>
+              <a:rPr sz="850" lang="zh-TW" dirty="0">
                 <a:solidFill>
                   <a:srgbClr val="000000"/>
                 </a:solidFill>
@@ -2042,15 +2042,15 @@
           </a:p>
           <a:p>
             <a:pPr algn="l">
-              <a:lnSpc>
-                <a:spcPct val="115000"/>
-              </a:lnSpc>
-              <a:spcAft>
-                <a:spcPts val="500"/>
-              </a:spcAft>
-            </a:pPr>
-            <a:r>
-              <a:rPr sz="1000" lang="zh-TW" dirty="0">
+              <a:spcBef>
+                <a:spcPts val="0"/>
+              </a:spcBef>
+              <a:spcAft>
+                <a:spcPts val="142"/>
+              </a:spcAft>
+            </a:pPr>
+            <a:r>
+              <a:rPr sz="850" lang="zh-TW" dirty="0">
                 <a:solidFill>
                   <a:srgbClr val="000000"/>
                 </a:solidFill>
@@ -2061,7 +2061,7 @@
               <a:t>這代表什麼？代表</a:t>
             </a:r>
             <a:r>
-              <a:rPr sz="1000" b="1" lang="zh-TW" dirty="0">
+              <a:rPr sz="850" b="1" lang="zh-TW" dirty="0">
                 <a:solidFill>
                   <a:srgbClr val="000000"/>
                 </a:solidFill>
@@ -2072,7 +2072,7 @@
               <a:t>同一顆光達，你買回來之後還可以選模式</a:t>
             </a:r>
             <a:r>
-              <a:rPr sz="1000" lang="zh-TW" dirty="0">
+              <a:rPr sz="850" lang="zh-TW" dirty="0">
                 <a:solidFill>
                   <a:srgbClr val="000000"/>
                 </a:solidFill>
@@ -2086,15 +2086,15 @@
           </a:p>
           <a:p>
             <a:pPr algn="l">
-              <a:lnSpc>
-                <a:spcPct val="115000"/>
-              </a:lnSpc>
-              <a:spcAft>
-                <a:spcPts val="500"/>
-              </a:spcAft>
-            </a:pPr>
-            <a:r>
-              <a:rPr sz="1000" lang="zh-TW" dirty="0">
+              <a:spcBef>
+                <a:spcPts val="0"/>
+              </a:spcBef>
+              <a:spcAft>
+                <a:spcPts val="142"/>
+              </a:spcAft>
+            </a:pPr>
+            <a:r>
+              <a:rPr sz="850" lang="zh-TW" dirty="0">
                 <a:solidFill>
                   <a:srgbClr val="000000"/>
                 </a:solidFill>
@@ -2105,7 +2105,7 @@
               <a:t>剛剛那張表我算給各位看，四十公尺的行人身上 OS1 有九個點。那是在 1024 點一圈的模式下算的。如果你把它切到 2048 點一圈，左右的點會加倍，九個點就變成</a:t>
             </a:r>
             <a:r>
-              <a:rPr sz="1000" b="1" lang="zh-TW" dirty="0">
+              <a:rPr sz="850" b="1" lang="zh-TW" dirty="0">
                 <a:solidFill>
                   <a:srgbClr val="000000"/>
                 </a:solidFill>
@@ -2116,7 +2116,7 @@
               <a:t>十八個點</a:t>
             </a:r>
             <a:r>
-              <a:rPr sz="1000" lang="zh-TW" dirty="0">
+              <a:rPr sz="850" lang="zh-TW" dirty="0">
                 <a:solidFill>
                   <a:srgbClr val="000000"/>
                 </a:solidFill>
@@ -2130,15 +2130,15 @@
           </a:p>
           <a:p>
             <a:pPr algn="l">
-              <a:lnSpc>
-                <a:spcPct val="115000"/>
-              </a:lnSpc>
-              <a:spcAft>
-                <a:spcPts val="500"/>
-              </a:spcAft>
-            </a:pPr>
-            <a:r>
-              <a:rPr sz="1000" lang="zh-TW" dirty="0">
+              <a:spcBef>
+                <a:spcPts val="0"/>
+              </a:spcBef>
+              <a:spcAft>
+                <a:spcPts val="142"/>
+              </a:spcAft>
+            </a:pPr>
+            <a:r>
+              <a:rPr sz="850" lang="zh-TW" dirty="0">
                 <a:solidFill>
                   <a:srgbClr val="000000"/>
                 </a:solidFill>
@@ -2152,15 +2152,15 @@
           </a:p>
           <a:p>
             <a:pPr algn="l">
-              <a:lnSpc>
-                <a:spcPct val="115000"/>
-              </a:lnSpc>
-              <a:spcAft>
-                <a:spcPts val="500"/>
-              </a:spcAft>
-            </a:pPr>
-            <a:r>
-              <a:rPr sz="1000" lang="zh-TW" dirty="0">
+              <a:spcBef>
+                <a:spcPts val="0"/>
+              </a:spcBef>
+              <a:spcAft>
+                <a:spcPts val="142"/>
+              </a:spcAft>
+            </a:pPr>
+            <a:r>
+              <a:rPr sz="850" lang="zh-TW" dirty="0">
                 <a:solidFill>
                   <a:srgbClr val="000000"/>
                 </a:solidFill>
@@ -2171,7 +2171,7 @@
               <a:t>這件事在工程上很重要，因為它告訴你：</a:t>
             </a:r>
             <a:r>
-              <a:rPr sz="1000" b="1" lang="zh-TW" dirty="0">
+              <a:rPr sz="850" b="1" lang="zh-TW" dirty="0">
                 <a:solidFill>
                   <a:srgbClr val="000000"/>
                 </a:solidFill>
@@ -2182,7 +2182,7 @@
               <a:t>買之前要問清楚，廠商標的那個漂亮數字，是在哪一個模式下量的。</a:t>
             </a:r>
             <a:r>
-              <a:rPr sz="1000" lang="zh-TW" dirty="0">
+              <a:rPr sz="850" lang="zh-TW" dirty="0">
                 <a:solidFill>
                   <a:srgbClr val="000000"/>
                 </a:solidFill>
@@ -2196,15 +2196,15 @@
           </a:p>
           <a:p>
             <a:pPr algn="l">
-              <a:lnSpc>
-                <a:spcPct val="115000"/>
-              </a:lnSpc>
-              <a:spcAft>
-                <a:spcPts val="500"/>
-              </a:spcAft>
-            </a:pPr>
-            <a:r>
-              <a:rPr sz="1000" lang="zh-TW" dirty="0">
+              <a:spcBef>
+                <a:spcPts val="0"/>
+              </a:spcBef>
+              <a:spcAft>
+                <a:spcPts val="142"/>
+              </a:spcAft>
+            </a:pPr>
+            <a:r>
+              <a:rPr sz="850" lang="zh-TW" dirty="0">
                 <a:solidFill>
                   <a:srgbClr val="000000"/>
                 </a:solidFill>
@@ -2218,15 +2218,15 @@
           </a:p>
           <a:p>
             <a:pPr algn="l">
-              <a:lnSpc>
-                <a:spcPct val="115000"/>
-              </a:lnSpc>
-              <a:spcAft>
-                <a:spcPts val="500"/>
-              </a:spcAft>
-            </a:pPr>
-            <a:r>
-              <a:rPr sz="1000" lang="zh-TW" dirty="0">
+              <a:spcBef>
+                <a:spcPts val="0"/>
+              </a:spcBef>
+              <a:spcAft>
+                <a:spcPts val="142"/>
+              </a:spcAft>
+            </a:pPr>
+            <a:r>
+              <a:rPr sz="850" lang="zh-TW" dirty="0">
                 <a:solidFill>
                   <a:srgbClr val="000000"/>
                 </a:solidFill>
@@ -2260,11 +2260,11 @@
           <a:lstStyle/>
           <a:p>
             <a:pPr algn="l">
-              <a:lnSpc>
-                <a:spcPct val="115000"/>
-              </a:lnSpc>
-              <a:spcAft>
-                <a:spcPts val="500"/>
+              <a:spcBef>
+                <a:spcPts val="0"/>
+              </a:spcBef>
+              <a:spcAft>
+                <a:spcPts val="167"/>
               </a:spcAft>
             </a:pPr>
             <a:r>
@@ -2339,15 +2339,15 @@
           <a:lstStyle/>
           <a:p>
             <a:pPr algn="l">
-              <a:lnSpc>
-                <a:spcPct val="115000"/>
-              </a:lnSpc>
-              <a:spcAft>
-                <a:spcPts val="500"/>
-              </a:spcAft>
-            </a:pPr>
-            <a:r>
-              <a:rPr sz="1000" b="1" lang="zh-TW" dirty="0">
+              <a:spcBef>
+                <a:spcPts val="0"/>
+              </a:spcBef>
+              <a:spcAft>
+                <a:spcPts val="158"/>
+              </a:spcAft>
+            </a:pPr>
+            <a:r>
+              <a:rPr sz="950" b="1" lang="zh-TW" dirty="0">
                 <a:solidFill>
                   <a:srgbClr val="000000"/>
                 </a:solidFill>
@@ -2358,7 +2358,7 @@
               <a:t>▍這一張要做什麼</a:t>
             </a:r>
             <a:r>
-              <a:rPr sz="1000" lang="zh-TW" dirty="0">
+              <a:rPr sz="950" lang="zh-TW" dirty="0">
                 <a:solidFill>
                   <a:srgbClr val="000000"/>
                 </a:solidFill>
@@ -2372,15 +2372,15 @@
           </a:p>
           <a:p>
             <a:pPr algn="l">
-              <a:lnSpc>
-                <a:spcPct val="115000"/>
-              </a:lnSpc>
-              <a:spcAft>
-                <a:spcPts val="500"/>
-              </a:spcAft>
-            </a:pPr>
-            <a:r>
-              <a:rPr sz="1000" lang="zh-TW" dirty="0">
+              <a:spcBef>
+                <a:spcPts val="0"/>
+              </a:spcBef>
+              <a:spcAft>
+                <a:spcPts val="158"/>
+              </a:spcAft>
+            </a:pPr>
+            <a:r>
+              <a:rPr sz="950" lang="zh-TW" dirty="0">
                 <a:solidFill>
                   <a:srgbClr val="000000"/>
                 </a:solidFill>
@@ -2394,15 +2394,15 @@
           </a:p>
           <a:p>
             <a:pPr algn="l">
-              <a:lnSpc>
-                <a:spcPct val="115000"/>
-              </a:lnSpc>
-              <a:spcAft>
-                <a:spcPts val="500"/>
-              </a:spcAft>
-            </a:pPr>
-            <a:r>
-              <a:rPr sz="1000" b="1" lang="zh-TW" dirty="0">
+              <a:spcBef>
+                <a:spcPts val="0"/>
+              </a:spcBef>
+              <a:spcAft>
+                <a:spcPts val="158"/>
+              </a:spcAft>
+            </a:pPr>
+            <a:r>
+              <a:rPr sz="950" b="1" lang="zh-TW" dirty="0">
                 <a:solidFill>
                   <a:srgbClr val="000000"/>
                 </a:solidFill>
@@ -2413,7 +2413,7 @@
               <a:t>▍畫面上圈這裡</a:t>
             </a:r>
             <a:r>
-              <a:rPr sz="1000" lang="zh-TW" dirty="0">
+              <a:rPr sz="950" lang="zh-TW" dirty="0">
                 <a:solidFill>
                   <a:srgbClr val="000000"/>
                 </a:solidFill>
@@ -2427,15 +2427,15 @@
           </a:p>
           <a:p>
             <a:pPr algn="l">
-              <a:lnSpc>
-                <a:spcPct val="115000"/>
-              </a:lnSpc>
-              <a:spcAft>
-                <a:spcPts val="500"/>
-              </a:spcAft>
-            </a:pPr>
-            <a:r>
-              <a:rPr sz="1000" lang="zh-TW" dirty="0">
+              <a:spcBef>
+                <a:spcPts val="0"/>
+              </a:spcBef>
+              <a:spcAft>
+                <a:spcPts val="158"/>
+              </a:spcAft>
+            </a:pPr>
+            <a:r>
+              <a:rPr sz="950" lang="zh-TW" dirty="0">
                 <a:solidFill>
                   <a:srgbClr val="000000"/>
                 </a:solidFill>
@@ -2449,15 +2449,15 @@
           </a:p>
           <a:p>
             <a:pPr algn="l">
-              <a:lnSpc>
-                <a:spcPct val="115000"/>
-              </a:lnSpc>
-              <a:spcAft>
-                <a:spcPts val="500"/>
-              </a:spcAft>
-            </a:pPr>
-            <a:r>
-              <a:rPr sz="1000" b="1" lang="zh-TW" dirty="0">
+              <a:spcBef>
+                <a:spcPts val="0"/>
+              </a:spcBef>
+              <a:spcAft>
+                <a:spcPts val="158"/>
+              </a:spcAft>
+            </a:pPr>
+            <a:r>
+              <a:rPr sz="950" b="1" lang="zh-TW" dirty="0">
                 <a:solidFill>
                   <a:srgbClr val="000000"/>
                 </a:solidFill>
@@ -2468,7 +2468,7 @@
               <a:t>▍以下照著唸</a:t>
             </a:r>
             <a:r>
-              <a:rPr sz="1000" lang="zh-TW" dirty="0">
+              <a:rPr sz="950" lang="zh-TW" dirty="0">
                 <a:solidFill>
                   <a:srgbClr val="000000"/>
                 </a:solidFill>
@@ -2482,15 +2482,15 @@
           </a:p>
           <a:p>
             <a:pPr algn="l">
-              <a:lnSpc>
-                <a:spcPct val="115000"/>
-              </a:lnSpc>
-              <a:spcAft>
-                <a:spcPts val="500"/>
-              </a:spcAft>
-            </a:pPr>
-            <a:r>
-              <a:rPr sz="1000" lang="zh-TW" dirty="0">
+              <a:spcBef>
+                <a:spcPts val="0"/>
+              </a:spcBef>
+              <a:spcAft>
+                <a:spcPts val="158"/>
+              </a:spcAft>
+            </a:pPr>
+            <a:r>
+              <a:rPr sz="950" lang="zh-TW" dirty="0">
                 <a:solidFill>
                   <a:srgbClr val="000000"/>
                 </a:solidFill>
@@ -2501,7 +2501,7 @@
               <a:t>回到剛剛請大家圈起來的那一行。左邊是 OS1 規格表上真正的那兩行，測距寫了</a:t>
             </a:r>
             <a:r>
-              <a:rPr sz="1000" b="1" lang="zh-TW" dirty="0">
+              <a:rPr sz="950" b="1" lang="zh-TW" dirty="0">
                 <a:solidFill>
                   <a:srgbClr val="000000"/>
                 </a:solidFill>
@@ -2512,7 +2512,7 @@
               <a:t>兩個數字</a:t>
             </a:r>
             <a:r>
-              <a:rPr sz="1000" lang="zh-TW" dirty="0">
+              <a:rPr sz="950" lang="zh-TW" dirty="0">
                 <a:solidFill>
                   <a:srgbClr val="000000"/>
                 </a:solidFill>
@@ -2526,15 +2526,15 @@
           </a:p>
           <a:p>
             <a:pPr algn="l">
-              <a:lnSpc>
-                <a:spcPct val="115000"/>
-              </a:lnSpc>
-              <a:spcAft>
-                <a:spcPts val="500"/>
-              </a:spcAft>
-            </a:pPr>
-            <a:r>
-              <a:rPr sz="1000" lang="zh-TW" dirty="0">
+              <a:spcBef>
+                <a:spcPts val="0"/>
+              </a:spcBef>
+              <a:spcAft>
+                <a:spcPts val="158"/>
+              </a:spcAft>
+            </a:pPr>
+            <a:r>
+              <a:rPr sz="950" lang="zh-TW" dirty="0">
                 <a:solidFill>
                   <a:srgbClr val="000000"/>
                 </a:solidFill>
@@ -2545,7 +2545,7 @@
               <a:t>第一個 170 公尺，括號裡是 </a:t>
             </a:r>
             <a:r>
-              <a:rPr sz="1000" b="1" lang="zh-TW" dirty="0">
+              <a:rPr sz="950" b="1" lang="zh-TW" dirty="0">
                 <a:solidFill>
                   <a:srgbClr val="000000"/>
                 </a:solidFill>
@@ -2556,7 +2556,7 @@
               <a:t>80% Lambertian reflectivity</a:t>
             </a:r>
             <a:r>
-              <a:rPr sz="1000" lang="zh-TW" dirty="0">
+              <a:rPr sz="950" lang="zh-TW" dirty="0">
                 <a:solidFill>
                   <a:srgbClr val="000000"/>
                 </a:solidFill>
@@ -2567,7 +2567,7 @@
               <a:t>；第二個 90 公尺，括號裡是 </a:t>
             </a:r>
             <a:r>
-              <a:rPr sz="1000" b="1" lang="zh-TW" dirty="0">
+              <a:rPr sz="950" b="1" lang="zh-TW" dirty="0">
                 <a:solidFill>
                   <a:srgbClr val="000000"/>
                 </a:solidFill>
@@ -2578,7 +2578,7 @@
               <a:t>10%</a:t>
             </a:r>
             <a:r>
-              <a:rPr sz="1000" lang="zh-TW" dirty="0">
+              <a:rPr sz="950" lang="zh-TW" dirty="0">
                 <a:solidFill>
                   <a:srgbClr val="000000"/>
                 </a:solidFill>
@@ -2592,15 +2592,15 @@
           </a:p>
           <a:p>
             <a:pPr algn="l">
-              <a:lnSpc>
-                <a:spcPct val="115000"/>
-              </a:lnSpc>
-              <a:spcAft>
-                <a:spcPts val="500"/>
-              </a:spcAft>
-            </a:pPr>
-            <a:r>
-              <a:rPr sz="1000" lang="zh-TW" dirty="0">
+              <a:spcBef>
+                <a:spcPts val="0"/>
+              </a:spcBef>
+              <a:spcAft>
+                <a:spcPts val="158"/>
+              </a:spcAft>
+            </a:pPr>
+            <a:r>
+              <a:rPr sz="950" lang="zh-TW" dirty="0">
                 <a:solidFill>
                   <a:srgbClr val="000000"/>
                 </a:solidFill>
@@ -2614,15 +2614,15 @@
           </a:p>
           <a:p>
             <a:pPr algn="l">
-              <a:lnSpc>
-                <a:spcPct val="115000"/>
-              </a:lnSpc>
-              <a:spcAft>
-                <a:spcPts val="500"/>
-              </a:spcAft>
-            </a:pPr>
-            <a:r>
-              <a:rPr sz="1000" lang="zh-TW" dirty="0">
+              <a:spcBef>
+                <a:spcPts val="0"/>
+              </a:spcBef>
+              <a:spcAft>
+                <a:spcPts val="158"/>
+              </a:spcAft>
+            </a:pPr>
+            <a:r>
+              <a:rPr sz="950" lang="zh-TW" dirty="0">
                 <a:solidFill>
                   <a:srgbClr val="000000"/>
                 </a:solidFill>
@@ -2633,7 +2633,7 @@
               <a:t>所以同一顆光達，看白色的車看得到一百七十公尺，看黑色的車只剩九十公尺，</a:t>
             </a:r>
             <a:r>
-              <a:rPr sz="1000" b="1" lang="zh-TW" dirty="0">
+              <a:rPr sz="950" b="1" lang="zh-TW" dirty="0">
                 <a:solidFill>
                   <a:srgbClr val="000000"/>
                 </a:solidFill>
@@ -2644,7 +2644,7 @@
               <a:t>差了將近一倍</a:t>
             </a:r>
             <a:r>
-              <a:rPr sz="1000" lang="zh-TW" dirty="0">
+              <a:rPr sz="950" lang="zh-TW" dirty="0">
                 <a:solidFill>
                   <a:srgbClr val="000000"/>
                 </a:solidFill>
@@ -2658,15 +2658,15 @@
           </a:p>
           <a:p>
             <a:pPr algn="l">
-              <a:lnSpc>
-                <a:spcPct val="115000"/>
-              </a:lnSpc>
-              <a:spcAft>
-                <a:spcPts val="500"/>
-              </a:spcAft>
-            </a:pPr>
-            <a:r>
-              <a:rPr sz="1000" lang="zh-TW" dirty="0">
+              <a:spcBef>
+                <a:spcPts val="0"/>
+              </a:spcBef>
+              <a:spcAft>
+                <a:spcPts val="158"/>
+              </a:spcAft>
+            </a:pPr>
+            <a:r>
+              <a:rPr sz="950" lang="zh-TW" dirty="0">
                 <a:solidFill>
                   <a:srgbClr val="000000"/>
                 </a:solidFill>
@@ -2680,15 +2680,15 @@
           </a:p>
           <a:p>
             <a:pPr algn="l">
-              <a:lnSpc>
-                <a:spcPct val="115000"/>
-              </a:lnSpc>
-              <a:spcAft>
-                <a:spcPts val="500"/>
-              </a:spcAft>
-            </a:pPr>
-            <a:r>
-              <a:rPr sz="1000" lang="zh-TW" dirty="0">
+              <a:spcBef>
+                <a:spcPts val="0"/>
+              </a:spcBef>
+              <a:spcAft>
+                <a:spcPts val="158"/>
+              </a:spcAft>
+            </a:pPr>
+            <a:r>
+              <a:rPr sz="950" lang="zh-TW" dirty="0">
                 <a:solidFill>
                   <a:srgbClr val="000000"/>
                 </a:solidFill>
@@ -2699,7 +2699,7 @@
               <a:t>可是身為工程師，</a:t>
             </a:r>
             <a:r>
-              <a:rPr sz="1000" b="1" lang="zh-TW" dirty="0">
+              <a:rPr sz="950" b="1" lang="zh-TW" dirty="0">
                 <a:solidFill>
                   <a:srgbClr val="000000"/>
                 </a:solidFill>
@@ -2710,7 +2710,7 @@
               <a:t>你要拿來設計的是九十</a:t>
             </a:r>
             <a:r>
-              <a:rPr sz="1000" lang="zh-TW" dirty="0">
+              <a:rPr sz="950" lang="zh-TW" dirty="0">
                 <a:solidFill>
                   <a:srgbClr val="000000"/>
                 </a:solidFill>
@@ -2724,15 +2724,15 @@
           </a:p>
           <a:p>
             <a:pPr algn="l">
-              <a:lnSpc>
-                <a:spcPct val="115000"/>
-              </a:lnSpc>
-              <a:spcAft>
-                <a:spcPts val="500"/>
-              </a:spcAft>
-            </a:pPr>
-            <a:r>
-              <a:rPr sz="1000" lang="zh-TW" dirty="0">
+              <a:spcBef>
+                <a:spcPts val="0"/>
+              </a:spcBef>
+              <a:spcAft>
+                <a:spcPts val="158"/>
+              </a:spcAft>
+            </a:pPr>
+            <a:r>
+              <a:rPr sz="950" lang="zh-TW" dirty="0">
                 <a:solidFill>
                   <a:srgbClr val="000000"/>
                 </a:solidFill>
@@ -2743,7 +2743,7 @@
               <a:t>以後看到規格表寫「測距 200 公尺」，第一句話要問：</a:t>
             </a:r>
             <a:r>
-              <a:rPr sz="1000" b="1" lang="zh-TW" dirty="0">
+              <a:rPr sz="950" b="1" lang="zh-TW" dirty="0">
                 <a:solidFill>
                   <a:srgbClr val="000000"/>
                 </a:solidFill>
@@ -2754,7 +2754,7 @@
               <a:t>那是對什麼反射率量的？</a:t>
             </a:r>
             <a:r>
-              <a:rPr sz="1000" lang="zh-TW" dirty="0">
+              <a:rPr sz="950" lang="zh-TW" dirty="0">
                 <a:solidFill>
                   <a:srgbClr val="000000"/>
                 </a:solidFill>
@@ -2788,11 +2788,11 @@
           <a:lstStyle/>
           <a:p>
             <a:pPr algn="l">
-              <a:lnSpc>
-                <a:spcPct val="115000"/>
-              </a:lnSpc>
-              <a:spcAft>
-                <a:spcPts val="500"/>
+              <a:spcBef>
+                <a:spcPts val="0"/>
+              </a:spcBef>
+              <a:spcAft>
+                <a:spcPts val="167"/>
               </a:spcAft>
             </a:pPr>
             <a:r>
@@ -2867,15 +2867,15 @@
           <a:lstStyle/>
           <a:p>
             <a:pPr algn="l">
-              <a:lnSpc>
-                <a:spcPct val="115000"/>
-              </a:lnSpc>
-              <a:spcAft>
-                <a:spcPts val="500"/>
-              </a:spcAft>
-            </a:pPr>
-            <a:r>
-              <a:rPr sz="1000" b="1" lang="zh-TW" dirty="0">
+              <a:spcBef>
+                <a:spcPts val="0"/>
+              </a:spcBef>
+              <a:spcAft>
+                <a:spcPts val="150"/>
+              </a:spcAft>
+            </a:pPr>
+            <a:r>
+              <a:rPr sz="900" b="1" lang="zh-TW" dirty="0">
                 <a:solidFill>
                   <a:srgbClr val="000000"/>
                 </a:solidFill>
@@ -2886,7 +2886,7 @@
               <a:t>▍這一張要做什麼</a:t>
             </a:r>
             <a:r>
-              <a:rPr sz="1000" lang="zh-TW" dirty="0">
+              <a:rPr sz="900" lang="zh-TW" dirty="0">
                 <a:solidFill>
                   <a:srgbClr val="000000"/>
                 </a:solidFill>
@@ -2900,15 +2900,15 @@
           </a:p>
           <a:p>
             <a:pPr algn="l">
-              <a:lnSpc>
-                <a:spcPct val="115000"/>
-              </a:lnSpc>
-              <a:spcAft>
-                <a:spcPts val="500"/>
-              </a:spcAft>
-            </a:pPr>
-            <a:r>
-              <a:rPr sz="1000" lang="zh-TW" dirty="0">
+              <a:spcBef>
+                <a:spcPts val="0"/>
+              </a:spcBef>
+              <a:spcAft>
+                <a:spcPts val="150"/>
+              </a:spcAft>
+            </a:pPr>
+            <a:r>
+              <a:rPr sz="900" lang="zh-TW" dirty="0">
                 <a:solidFill>
                   <a:srgbClr val="000000"/>
                 </a:solidFill>
@@ -2922,15 +2922,15 @@
           </a:p>
           <a:p>
             <a:pPr algn="l">
-              <a:lnSpc>
-                <a:spcPct val="115000"/>
-              </a:lnSpc>
-              <a:spcAft>
-                <a:spcPts val="500"/>
-              </a:spcAft>
-            </a:pPr>
-            <a:r>
-              <a:rPr sz="1000" b="1" lang="zh-TW" dirty="0">
+              <a:spcBef>
+                <a:spcPts val="0"/>
+              </a:spcBef>
+              <a:spcAft>
+                <a:spcPts val="150"/>
+              </a:spcAft>
+            </a:pPr>
+            <a:r>
+              <a:rPr sz="900" b="1" lang="zh-TW" dirty="0">
                 <a:solidFill>
                   <a:srgbClr val="000000"/>
                 </a:solidFill>
@@ -2941,7 +2941,7 @@
               <a:t>▍畫面上圈這裡</a:t>
             </a:r>
             <a:r>
-              <a:rPr sz="1000" lang="zh-TW" dirty="0">
+              <a:rPr sz="900" lang="zh-TW" dirty="0">
                 <a:solidFill>
                   <a:srgbClr val="000000"/>
                 </a:solidFill>
@@ -2955,15 +2955,15 @@
           </a:p>
           <a:p>
             <a:pPr algn="l">
-              <a:lnSpc>
-                <a:spcPct val="115000"/>
-              </a:lnSpc>
-              <a:spcAft>
-                <a:spcPts val="500"/>
-              </a:spcAft>
-            </a:pPr>
-            <a:r>
-              <a:rPr sz="1000" lang="zh-TW" dirty="0">
+              <a:spcBef>
+                <a:spcPts val="0"/>
+              </a:spcBef>
+              <a:spcAft>
+                <a:spcPts val="150"/>
+              </a:spcAft>
+            </a:pPr>
+            <a:r>
+              <a:rPr sz="900" lang="zh-TW" dirty="0">
                 <a:solidFill>
                   <a:srgbClr val="000000"/>
                 </a:solidFill>
@@ -2977,15 +2977,15 @@
           </a:p>
           <a:p>
             <a:pPr algn="l">
-              <a:lnSpc>
-                <a:spcPct val="115000"/>
-              </a:lnSpc>
-              <a:spcAft>
-                <a:spcPts val="500"/>
-              </a:spcAft>
-            </a:pPr>
-            <a:r>
-              <a:rPr sz="1000" b="1" lang="zh-TW" dirty="0">
+              <a:spcBef>
+                <a:spcPts val="0"/>
+              </a:spcBef>
+              <a:spcAft>
+                <a:spcPts val="150"/>
+              </a:spcAft>
+            </a:pPr>
+            <a:r>
+              <a:rPr sz="900" b="1" lang="zh-TW" dirty="0">
                 <a:solidFill>
                   <a:srgbClr val="000000"/>
                 </a:solidFill>
@@ -2996,7 +2996,7 @@
               <a:t>▍以下照著唸</a:t>
             </a:r>
             <a:r>
-              <a:rPr sz="1000" lang="zh-TW" dirty="0">
+              <a:rPr sz="900" lang="zh-TW" dirty="0">
                 <a:solidFill>
                   <a:srgbClr val="000000"/>
                 </a:solidFill>
@@ -3010,15 +3010,15 @@
           </a:p>
           <a:p>
             <a:pPr algn="l">
-              <a:lnSpc>
-                <a:spcPct val="115000"/>
-              </a:lnSpc>
-              <a:spcAft>
-                <a:spcPts val="500"/>
-              </a:spcAft>
-            </a:pPr>
-            <a:r>
-              <a:rPr sz="1000" lang="zh-TW" dirty="0">
+              <a:spcBef>
+                <a:spcPts val="0"/>
+              </a:spcBef>
+              <a:spcAft>
+                <a:spcPts val="150"/>
+              </a:spcAft>
+            </a:pPr>
+            <a:r>
+              <a:rPr sz="900" lang="zh-TW" dirty="0">
                 <a:solidFill>
                   <a:srgbClr val="000000"/>
                 </a:solidFill>
@@ -3032,15 +3032,15 @@
           </a:p>
           <a:p>
             <a:pPr algn="l">
-              <a:lnSpc>
-                <a:spcPct val="115000"/>
-              </a:lnSpc>
-              <a:spcAft>
-                <a:spcPts val="500"/>
-              </a:spcAft>
-            </a:pPr>
-            <a:r>
-              <a:rPr sz="1000" lang="zh-TW" dirty="0">
+              <a:spcBef>
+                <a:spcPts val="0"/>
+              </a:spcBef>
+              <a:spcAft>
+                <a:spcPts val="150"/>
+              </a:spcAft>
+            </a:pPr>
+            <a:r>
+              <a:rPr sz="900" lang="zh-TW" dirty="0">
                 <a:solidFill>
                   <a:srgbClr val="000000"/>
                 </a:solidFill>
@@ -3054,15 +3054,15 @@
           </a:p>
           <a:p>
             <a:pPr algn="l">
-              <a:lnSpc>
-                <a:spcPct val="115000"/>
-              </a:lnSpc>
-              <a:spcAft>
-                <a:spcPts val="500"/>
-              </a:spcAft>
-            </a:pPr>
-            <a:r>
-              <a:rPr sz="1000" lang="zh-TW" dirty="0">
+              <a:spcBef>
+                <a:spcPts val="0"/>
+              </a:spcBef>
+              <a:spcAft>
+                <a:spcPts val="150"/>
+              </a:spcAft>
+            </a:pPr>
+            <a:r>
+              <a:rPr sz="900" lang="zh-TW" dirty="0">
                 <a:solidFill>
                   <a:srgbClr val="000000"/>
                 </a:solidFill>
@@ -3076,15 +3076,15 @@
           </a:p>
           <a:p>
             <a:pPr algn="l">
-              <a:lnSpc>
-                <a:spcPct val="115000"/>
-              </a:lnSpc>
-              <a:spcAft>
-                <a:spcPts val="500"/>
-              </a:spcAft>
-            </a:pPr>
-            <a:r>
-              <a:rPr sz="1000" lang="zh-TW" dirty="0">
+              <a:spcBef>
+                <a:spcPts val="0"/>
+              </a:spcBef>
+              <a:spcAft>
+                <a:spcPts val="150"/>
+              </a:spcAft>
+            </a:pPr>
+            <a:r>
+              <a:rPr sz="900" lang="zh-TW" dirty="0">
                 <a:solidFill>
                   <a:srgbClr val="000000"/>
                 </a:solidFill>
@@ -3098,15 +3098,15 @@
           </a:p>
           <a:p>
             <a:pPr algn="l">
-              <a:lnSpc>
-                <a:spcPct val="115000"/>
-              </a:lnSpc>
-              <a:spcAft>
-                <a:spcPts val="500"/>
-              </a:spcAft>
-            </a:pPr>
-            <a:r>
-              <a:rPr sz="1000" b="1" lang="zh-TW" dirty="0">
+              <a:spcBef>
+                <a:spcPts val="0"/>
+              </a:spcBef>
+              <a:spcAft>
+                <a:spcPts val="150"/>
+              </a:spcAft>
+            </a:pPr>
+            <a:r>
+              <a:rPr sz="900" b="1" lang="zh-TW" dirty="0">
                 <a:solidFill>
                   <a:srgbClr val="000000"/>
                 </a:solidFill>
@@ -3117,7 +3117,7 @@
               <a:t>第一，答案都在左邊那張表上。</a:t>
             </a:r>
             <a:r>
-              <a:rPr sz="1000" lang="zh-TW" dirty="0">
+              <a:rPr sz="900" lang="zh-TW" dirty="0">
                 <a:solidFill>
                   <a:srgbClr val="000000"/>
                 </a:solidFill>
@@ -3131,15 +3131,15 @@
           </a:p>
           <a:p>
             <a:pPr algn="l">
-              <a:lnSpc>
-                <a:spcPct val="115000"/>
-              </a:lnSpc>
-              <a:spcAft>
-                <a:spcPts val="500"/>
-              </a:spcAft>
-            </a:pPr>
-            <a:r>
-              <a:rPr sz="1000" b="1" lang="zh-TW" dirty="0">
+              <a:spcBef>
+                <a:spcPts val="0"/>
+              </a:spcBef>
+              <a:spcAft>
+                <a:spcPts val="150"/>
+              </a:spcAft>
+            </a:pPr>
+            <a:r>
+              <a:rPr sz="900" b="1" lang="zh-TW" dirty="0">
                 <a:solidFill>
                   <a:srgbClr val="000000"/>
                 </a:solidFill>
@@ -3150,7 +3150,7 @@
               <a:t>第二，選錯的時候工具會告訴你錯在哪。</a:t>
             </a:r>
             <a:r>
-              <a:rPr sz="1000" lang="zh-TW" dirty="0">
+              <a:rPr sz="900" lang="zh-TW" dirty="0">
                 <a:solidFill>
                   <a:srgbClr val="000000"/>
                 </a:solidFill>
@@ -3164,15 +3164,15 @@
           </a:p>
           <a:p>
             <a:pPr algn="l">
-              <a:lnSpc>
-                <a:spcPct val="115000"/>
-              </a:lnSpc>
-              <a:spcAft>
-                <a:spcPts val="500"/>
-              </a:spcAft>
-            </a:pPr>
-            <a:r>
-              <a:rPr sz="1000" b="1" lang="zh-TW" dirty="0">
+              <a:spcBef>
+                <a:spcPts val="0"/>
+              </a:spcBef>
+              <a:spcAft>
+                <a:spcPts val="150"/>
+              </a:spcAft>
+            </a:pPr>
+            <a:r>
+              <a:rPr sz="900" b="1" lang="zh-TW" dirty="0">
                 <a:solidFill>
                   <a:srgbClr val="000000"/>
                 </a:solidFill>
@@ -3183,7 +3183,7 @@
               <a:t>第三，OS1 做完換 AT128P 再做一次。</a:t>
             </a:r>
             <a:r>
-              <a:rPr sz="1000" lang="zh-TW" dirty="0">
+              <a:rPr sz="900" lang="zh-TW" dirty="0">
                 <a:solidFill>
                   <a:srgbClr val="000000"/>
                 </a:solidFill>
@@ -3197,15 +3197,15 @@
           </a:p>
           <a:p>
             <a:pPr algn="l">
-              <a:lnSpc>
-                <a:spcPct val="115000"/>
-              </a:lnSpc>
-              <a:spcAft>
-                <a:spcPts val="500"/>
-              </a:spcAft>
-            </a:pPr>
-            <a:r>
-              <a:rPr sz="1000" lang="zh-TW" dirty="0">
+              <a:spcBef>
+                <a:spcPts val="0"/>
+              </a:spcBef>
+              <a:spcAft>
+                <a:spcPts val="150"/>
+              </a:spcAft>
+            </a:pPr>
+            <a:r>
+              <a:rPr sz="900" lang="zh-TW" dirty="0">
                 <a:solidFill>
                   <a:srgbClr val="000000"/>
                 </a:solidFill>
@@ -3219,15 +3219,15 @@
           </a:p>
           <a:p>
             <a:pPr algn="l">
-              <a:lnSpc>
-                <a:spcPct val="115000"/>
-              </a:lnSpc>
-              <a:spcAft>
-                <a:spcPts val="500"/>
-              </a:spcAft>
-            </a:pPr>
-            <a:r>
-              <a:rPr sz="1000" lang="zh-TW" dirty="0">
+              <a:spcBef>
+                <a:spcPts val="0"/>
+              </a:spcBef>
+              <a:spcAft>
+                <a:spcPts val="150"/>
+              </a:spcAft>
+            </a:pPr>
+            <a:r>
+              <a:rPr sz="900" lang="zh-TW" dirty="0">
                 <a:solidFill>
                   <a:srgbClr val="000000"/>
                 </a:solidFill>
@@ -3238,7 +3238,7 @@
               <a:t>我在教室裡走動看大家的畫面。如果有人做得快，先做相機那一顆 AR0233AT。我先警告各位：</a:t>
             </a:r>
             <a:r>
-              <a:rPr sz="1000" b="1" lang="zh-TW" dirty="0">
+              <a:rPr sz="900" b="1" lang="zh-TW" dirty="0">
                 <a:solidFill>
                   <a:srgbClr val="000000"/>
                 </a:solidFill>
@@ -3249,7 +3249,7 @@
               <a:t>那顆有兩題的答案是「規格表上沒有這一行」。</a:t>
             </a:r>
             <a:r>
-              <a:rPr sz="1000" lang="zh-TW" dirty="0">
+              <a:rPr sz="900" lang="zh-TW" dirty="0">
                 <a:solidFill>
                   <a:srgbClr val="000000"/>
                 </a:solidFill>
@@ -3263,15 +3263,15 @@
           </a:p>
           <a:p>
             <a:pPr algn="l">
-              <a:lnSpc>
-                <a:spcPct val="115000"/>
-              </a:lnSpc>
-              <a:spcAft>
-                <a:spcPts val="500"/>
-              </a:spcAft>
-            </a:pPr>
-            <a:r>
-              <a:rPr sz="1000" lang="zh-TW" dirty="0">
+              <a:spcBef>
+                <a:spcPts val="0"/>
+              </a:spcBef>
+              <a:spcAft>
+                <a:spcPts val="150"/>
+              </a:spcAft>
+            </a:pPr>
+            <a:r>
+              <a:rPr sz="900" lang="zh-TW" dirty="0">
                 <a:solidFill>
                   <a:srgbClr val="000000"/>
                 </a:solidFill>
@@ -3305,11 +3305,11 @@
           <a:lstStyle/>
           <a:p>
             <a:pPr algn="l">
-              <a:lnSpc>
-                <a:spcPct val="115000"/>
-              </a:lnSpc>
-              <a:spcAft>
-                <a:spcPts val="500"/>
+              <a:spcBef>
+                <a:spcPts val="0"/>
+              </a:spcBef>
+              <a:spcAft>
+                <a:spcPts val="167"/>
               </a:spcAft>
             </a:pPr>
             <a:r>
@@ -3384,15 +3384,15 @@
           <a:lstStyle/>
           <a:p>
             <a:pPr algn="l">
-              <a:lnSpc>
-                <a:spcPct val="115000"/>
-              </a:lnSpc>
-              <a:spcAft>
-                <a:spcPts val="500"/>
-              </a:spcAft>
-            </a:pPr>
-            <a:r>
-              <a:rPr sz="1000" b="1" lang="zh-TW" dirty="0">
+              <a:spcBef>
+                <a:spcPts val="0"/>
+              </a:spcBef>
+              <a:spcAft>
+                <a:spcPts val="183"/>
+              </a:spcAft>
+            </a:pPr>
+            <a:r>
+              <a:rPr sz="1100" b="1" lang="zh-TW" dirty="0">
                 <a:solidFill>
                   <a:srgbClr val="000000"/>
                 </a:solidFill>
@@ -3403,7 +3403,7 @@
               <a:t>▍這一張要做什麼</a:t>
             </a:r>
             <a:r>
-              <a:rPr sz="1000" lang="zh-TW" dirty="0">
+              <a:rPr sz="1100" lang="zh-TW" dirty="0">
                 <a:solidFill>
                   <a:srgbClr val="000000"/>
                 </a:solidFill>
@@ -3417,15 +3417,15 @@
           </a:p>
           <a:p>
             <a:pPr algn="l">
-              <a:lnSpc>
-                <a:spcPct val="115000"/>
-              </a:lnSpc>
-              <a:spcAft>
-                <a:spcPts val="500"/>
-              </a:spcAft>
-            </a:pPr>
-            <a:r>
-              <a:rPr sz="1000" lang="zh-TW" dirty="0">
+              <a:spcBef>
+                <a:spcPts val="0"/>
+              </a:spcBef>
+              <a:spcAft>
+                <a:spcPts val="183"/>
+              </a:spcAft>
+            </a:pPr>
+            <a:r>
+              <a:rPr sz="1100" lang="zh-TW" dirty="0">
                 <a:solidFill>
                   <a:srgbClr val="000000"/>
                 </a:solidFill>
@@ -3439,15 +3439,15 @@
           </a:p>
           <a:p>
             <a:pPr algn="l">
-              <a:lnSpc>
-                <a:spcPct val="115000"/>
-              </a:lnSpc>
-              <a:spcAft>
-                <a:spcPts val="500"/>
-              </a:spcAft>
-            </a:pPr>
-            <a:r>
-              <a:rPr sz="1000" b="1" lang="zh-TW" dirty="0">
+              <a:spcBef>
+                <a:spcPts val="0"/>
+              </a:spcBef>
+              <a:spcAft>
+                <a:spcPts val="183"/>
+              </a:spcAft>
+            </a:pPr>
+            <a:r>
+              <a:rPr sz="1100" b="1" lang="zh-TW" dirty="0">
                 <a:solidFill>
                   <a:srgbClr val="000000"/>
                 </a:solidFill>
@@ -3458,7 +3458,7 @@
               <a:t>▍畫面上圈這裡</a:t>
             </a:r>
             <a:r>
-              <a:rPr sz="1000" lang="zh-TW" dirty="0">
+              <a:rPr sz="1100" lang="zh-TW" dirty="0">
                 <a:solidFill>
                   <a:srgbClr val="000000"/>
                 </a:solidFill>
@@ -3472,15 +3472,15 @@
           </a:p>
           <a:p>
             <a:pPr algn="l">
-              <a:lnSpc>
-                <a:spcPct val="115000"/>
-              </a:lnSpc>
-              <a:spcAft>
-                <a:spcPts val="500"/>
-              </a:spcAft>
-            </a:pPr>
-            <a:r>
-              <a:rPr sz="1000" lang="zh-TW" dirty="0">
+              <a:spcBef>
+                <a:spcPts val="0"/>
+              </a:spcBef>
+              <a:spcAft>
+                <a:spcPts val="183"/>
+              </a:spcAft>
+            </a:pPr>
+            <a:r>
+              <a:rPr sz="1100" lang="zh-TW" dirty="0">
                 <a:solidFill>
                   <a:srgbClr val="000000"/>
                 </a:solidFill>
@@ -3494,15 +3494,15 @@
           </a:p>
           <a:p>
             <a:pPr algn="l">
-              <a:lnSpc>
-                <a:spcPct val="115000"/>
-              </a:lnSpc>
-              <a:spcAft>
-                <a:spcPts val="500"/>
-              </a:spcAft>
-            </a:pPr>
-            <a:r>
-              <a:rPr sz="1000" b="1" lang="zh-TW" dirty="0">
+              <a:spcBef>
+                <a:spcPts val="0"/>
+              </a:spcBef>
+              <a:spcAft>
+                <a:spcPts val="183"/>
+              </a:spcAft>
+            </a:pPr>
+            <a:r>
+              <a:rPr sz="1100" b="1" lang="zh-TW" dirty="0">
                 <a:solidFill>
                   <a:srgbClr val="000000"/>
                 </a:solidFill>
@@ -3513,7 +3513,7 @@
               <a:t>▍以下照著唸</a:t>
             </a:r>
             <a:r>
-              <a:rPr sz="1000" lang="zh-TW" dirty="0">
+              <a:rPr sz="1100" lang="zh-TW" dirty="0">
                 <a:solidFill>
                   <a:srgbClr val="000000"/>
                 </a:solidFill>
@@ -3527,15 +3527,15 @@
           </a:p>
           <a:p>
             <a:pPr algn="l">
-              <a:lnSpc>
-                <a:spcPct val="115000"/>
-              </a:lnSpc>
-              <a:spcAft>
-                <a:spcPts val="500"/>
-              </a:spcAft>
-            </a:pPr>
-            <a:r>
-              <a:rPr sz="1000" lang="zh-TW" dirty="0">
+              <a:spcBef>
+                <a:spcPts val="0"/>
+              </a:spcBef>
+              <a:spcAft>
+                <a:spcPts val="183"/>
+              </a:spcAft>
+            </a:pPr>
+            <a:r>
+              <a:rPr sz="1100" lang="zh-TW" dirty="0">
                 <a:solidFill>
                   <a:srgbClr val="000000"/>
                 </a:solidFill>
@@ -3549,15 +3549,15 @@
           </a:p>
           <a:p>
             <a:pPr algn="l">
-              <a:lnSpc>
-                <a:spcPct val="115000"/>
-              </a:lnSpc>
-              <a:spcAft>
-                <a:spcPts val="500"/>
-              </a:spcAft>
-            </a:pPr>
-            <a:r>
-              <a:rPr sz="1000" b="1" lang="zh-TW" dirty="0">
+              <a:spcBef>
+                <a:spcPts val="0"/>
+              </a:spcBef>
+              <a:spcAft>
+                <a:spcPts val="183"/>
+              </a:spcAft>
+            </a:pPr>
+            <a:r>
+              <a:rPr sz="1100" b="1" lang="zh-TW" dirty="0">
                 <a:solidFill>
                   <a:srgbClr val="000000"/>
                 </a:solidFill>
@@ -3568,7 +3568,7 @@
               <a:t>第一句，上禮拜那三個滑桿，就是規格表上的三行：</a:t>
             </a:r>
             <a:r>
-              <a:rPr sz="1000" lang="zh-TW" dirty="0">
+              <a:rPr sz="1100" lang="zh-TW" dirty="0">
                 <a:solidFill>
                   <a:srgbClr val="000000"/>
                 </a:solidFill>
@@ -3579,7 +3579,7 @@
               <a:t>線束數、視野、測距。而且規格表上還有第四行，是我們前兩週沒碰過的——</a:t>
             </a:r>
             <a:r>
-              <a:rPr sz="1000" b="1" lang="zh-TW" dirty="0">
+              <a:rPr sz="1100" b="1" lang="zh-TW" dirty="0">
                 <a:solidFill>
                   <a:srgbClr val="000000"/>
                 </a:solidFill>
@@ -3590,7 +3590,7 @@
               <a:t>更新率</a:t>
             </a:r>
             <a:r>
-              <a:rPr sz="1000" lang="zh-TW" dirty="0">
+              <a:rPr sz="1100" lang="zh-TW" dirty="0">
                 <a:solidFill>
                   <a:srgbClr val="000000"/>
                 </a:solidFill>
@@ -3604,15 +3604,15 @@
           </a:p>
           <a:p>
             <a:pPr algn="l">
-              <a:lnSpc>
-                <a:spcPct val="115000"/>
-              </a:lnSpc>
-              <a:spcAft>
-                <a:spcPts val="500"/>
-              </a:spcAft>
-            </a:pPr>
-            <a:r>
-              <a:rPr sz="1000" b="1" lang="zh-TW" dirty="0">
+              <a:spcBef>
+                <a:spcPts val="0"/>
+              </a:spcBef>
+              <a:spcAft>
+                <a:spcPts val="183"/>
+              </a:spcAft>
+            </a:pPr>
+            <a:r>
+              <a:rPr sz="1100" b="1" lang="zh-TW" dirty="0">
                 <a:solidFill>
                   <a:srgbClr val="000000"/>
                 </a:solidFill>
@@ -3623,7 +3623,7 @@
               <a:t>第二句，影像感測器的規格表上沒有視野、也沒有測距。</a:t>
             </a:r>
             <a:r>
-              <a:rPr sz="1000" lang="zh-TW" dirty="0">
+              <a:rPr sz="1100" lang="zh-TW" dirty="0">
                 <a:solidFill>
                   <a:srgbClr val="000000"/>
                 </a:solidFill>
@@ -3637,15 +3637,15 @@
           </a:p>
           <a:p>
             <a:pPr algn="l">
-              <a:lnSpc>
-                <a:spcPct val="115000"/>
-              </a:lnSpc>
-              <a:spcAft>
-                <a:spcPts val="500"/>
-              </a:spcAft>
-            </a:pPr>
-            <a:r>
-              <a:rPr sz="1000" b="1" lang="zh-TW" dirty="0">
+              <a:spcBef>
+                <a:spcPts val="0"/>
+              </a:spcBef>
+              <a:spcAft>
+                <a:spcPts val="183"/>
+              </a:spcAft>
+            </a:pPr>
+            <a:r>
+              <a:rPr sz="1100" b="1" lang="zh-TW" dirty="0">
                 <a:solidFill>
                   <a:srgbClr val="000000"/>
                 </a:solidFill>
@@ -3656,7 +3656,7 @@
               <a:t>第三句，看到測距要追問是對百分之幾反射率量的。</a:t>
             </a:r>
             <a:r>
-              <a:rPr sz="1000" lang="zh-TW" dirty="0">
+              <a:rPr sz="1100" lang="zh-TW" dirty="0">
                 <a:solidFill>
                   <a:srgbClr val="000000"/>
                 </a:solidFill>
@@ -3670,15 +3670,15 @@
           </a:p>
           <a:p>
             <a:pPr algn="l">
-              <a:lnSpc>
-                <a:spcPct val="115000"/>
-              </a:lnSpc>
-              <a:spcAft>
-                <a:spcPts val="500"/>
-              </a:spcAft>
-            </a:pPr>
-            <a:r>
-              <a:rPr sz="1000" lang="zh-TW" dirty="0">
+              <a:spcBef>
+                <a:spcPts val="0"/>
+              </a:spcBef>
+              <a:spcAft>
+                <a:spcPts val="183"/>
+              </a:spcAft>
+            </a:pPr>
+            <a:r>
+              <a:rPr sz="1100" lang="zh-TW" dirty="0">
                 <a:solidFill>
                   <a:srgbClr val="000000"/>
                 </a:solidFill>
@@ -3692,15 +3692,15 @@
           </a:p>
           <a:p>
             <a:pPr algn="l">
-              <a:lnSpc>
-                <a:spcPct val="115000"/>
-              </a:lnSpc>
-              <a:spcAft>
-                <a:spcPts val="500"/>
-              </a:spcAft>
-            </a:pPr>
-            <a:r>
-              <a:rPr sz="1000" lang="zh-TW" dirty="0">
+              <a:spcBef>
+                <a:spcPts val="0"/>
+              </a:spcBef>
+              <a:spcAft>
+                <a:spcPts val="183"/>
+              </a:spcAft>
+            </a:pPr>
+            <a:r>
+              <a:rPr sz="1100" lang="zh-TW" dirty="0">
                 <a:solidFill>
                   <a:srgbClr val="000000"/>
                 </a:solidFill>
@@ -3734,11 +3734,11 @@
           <a:lstStyle/>
           <a:p>
             <a:pPr algn="l">
-              <a:lnSpc>
-                <a:spcPct val="115000"/>
-              </a:lnSpc>
-              <a:spcAft>
-                <a:spcPts val="500"/>
+              <a:spcBef>
+                <a:spcPts val="0"/>
+              </a:spcBef>
+              <a:spcAft>
+                <a:spcPts val="167"/>
               </a:spcAft>
             </a:pPr>
             <a:r>
@@ -3813,15 +3813,15 @@
           <a:lstStyle/>
           <a:p>
             <a:pPr algn="l">
-              <a:lnSpc>
-                <a:spcPct val="115000"/>
-              </a:lnSpc>
-              <a:spcAft>
-                <a:spcPts val="525"/>
-              </a:spcAft>
-            </a:pPr>
-            <a:r>
-              <a:rPr sz="1050" b="1" lang="zh-TW" dirty="0">
+              <a:spcBef>
+                <a:spcPts val="0"/>
+              </a:spcBef>
+              <a:spcAft>
+                <a:spcPts val="183"/>
+              </a:spcAft>
+            </a:pPr>
+            <a:r>
+              <a:rPr sz="1100" b="1" lang="zh-TW" dirty="0">
                 <a:solidFill>
                   <a:srgbClr val="000000"/>
                 </a:solidFill>
@@ -3832,7 +3832,7 @@
               <a:t>▍這一張要做什麼</a:t>
             </a:r>
             <a:r>
-              <a:rPr sz="1050" lang="zh-TW" dirty="0">
+              <a:rPr sz="1100" lang="zh-TW" dirty="0">
                 <a:solidFill>
                   <a:srgbClr val="000000"/>
                 </a:solidFill>
@@ -3846,15 +3846,15 @@
           </a:p>
           <a:p>
             <a:pPr algn="l">
-              <a:lnSpc>
-                <a:spcPct val="115000"/>
-              </a:lnSpc>
-              <a:spcAft>
-                <a:spcPts val="525"/>
-              </a:spcAft>
-            </a:pPr>
-            <a:r>
-              <a:rPr sz="1050" lang="zh-TW" dirty="0">
+              <a:spcBef>
+                <a:spcPts val="0"/>
+              </a:spcBef>
+              <a:spcAft>
+                <a:spcPts val="183"/>
+              </a:spcAft>
+            </a:pPr>
+            <a:r>
+              <a:rPr sz="1100" lang="zh-TW" dirty="0">
                 <a:solidFill>
                   <a:srgbClr val="000000"/>
                 </a:solidFill>
@@ -3868,15 +3868,15 @@
           </a:p>
           <a:p>
             <a:pPr algn="l">
-              <a:lnSpc>
-                <a:spcPct val="115000"/>
-              </a:lnSpc>
-              <a:spcAft>
-                <a:spcPts val="525"/>
-              </a:spcAft>
-            </a:pPr>
-            <a:r>
-              <a:rPr sz="1050" b="1" lang="zh-TW" dirty="0">
+              <a:spcBef>
+                <a:spcPts val="0"/>
+              </a:spcBef>
+              <a:spcAft>
+                <a:spcPts val="183"/>
+              </a:spcAft>
+            </a:pPr>
+            <a:r>
+              <a:rPr sz="1100" b="1" lang="zh-TW" dirty="0">
                 <a:solidFill>
                   <a:srgbClr val="000000"/>
                 </a:solidFill>
@@ -3887,7 +3887,7 @@
               <a:t>▍畫面上圈這裡</a:t>
             </a:r>
             <a:r>
-              <a:rPr sz="1050" lang="zh-TW" dirty="0">
+              <a:rPr sz="1100" lang="zh-TW" dirty="0">
                 <a:solidFill>
                   <a:srgbClr val="000000"/>
                 </a:solidFill>
@@ -3901,15 +3901,15 @@
           </a:p>
           <a:p>
             <a:pPr algn="l">
-              <a:lnSpc>
-                <a:spcPct val="115000"/>
-              </a:lnSpc>
-              <a:spcAft>
-                <a:spcPts val="525"/>
-              </a:spcAft>
-            </a:pPr>
-            <a:r>
-              <a:rPr sz="1050" lang="zh-TW" dirty="0">
+              <a:spcBef>
+                <a:spcPts val="0"/>
+              </a:spcBef>
+              <a:spcAft>
+                <a:spcPts val="183"/>
+              </a:spcAft>
+            </a:pPr>
+            <a:r>
+              <a:rPr sz="1100" lang="zh-TW" dirty="0">
                 <a:solidFill>
                   <a:srgbClr val="000000"/>
                 </a:solidFill>
@@ -3923,15 +3923,15 @@
           </a:p>
           <a:p>
             <a:pPr algn="l">
-              <a:lnSpc>
-                <a:spcPct val="115000"/>
-              </a:lnSpc>
-              <a:spcAft>
-                <a:spcPts val="525"/>
-              </a:spcAft>
-            </a:pPr>
-            <a:r>
-              <a:rPr sz="1050" b="1" lang="zh-TW" dirty="0">
+              <a:spcBef>
+                <a:spcPts val="0"/>
+              </a:spcBef>
+              <a:spcAft>
+                <a:spcPts val="183"/>
+              </a:spcAft>
+            </a:pPr>
+            <a:r>
+              <a:rPr sz="1100" b="1" lang="zh-TW" dirty="0">
                 <a:solidFill>
                   <a:srgbClr val="000000"/>
                 </a:solidFill>
@@ -3942,7 +3942,7 @@
               <a:t>▍以下照著唸</a:t>
             </a:r>
             <a:r>
-              <a:rPr sz="1050" lang="zh-TW" dirty="0">
+              <a:rPr sz="1100" lang="zh-TW" dirty="0">
                 <a:solidFill>
                   <a:srgbClr val="000000"/>
                 </a:solidFill>
@@ -3956,15 +3956,15 @@
           </a:p>
           <a:p>
             <a:pPr algn="l">
-              <a:lnSpc>
-                <a:spcPct val="115000"/>
-              </a:lnSpc>
-              <a:spcAft>
-                <a:spcPts val="525"/>
-              </a:spcAft>
-            </a:pPr>
-            <a:r>
-              <a:rPr sz="1050" lang="zh-TW" dirty="0">
+              <a:spcBef>
+                <a:spcPts val="0"/>
+              </a:spcBef>
+              <a:spcAft>
+                <a:spcPts val="183"/>
+              </a:spcAft>
+            </a:pPr>
+            <a:r>
+              <a:rPr sz="1100" lang="zh-TW" dirty="0">
                 <a:solidFill>
                   <a:srgbClr val="000000"/>
                 </a:solidFill>
@@ -3978,15 +3978,15 @@
           </a:p>
           <a:p>
             <a:pPr algn="l">
-              <a:lnSpc>
-                <a:spcPct val="115000"/>
-              </a:lnSpc>
-              <a:spcAft>
-                <a:spcPts val="525"/>
-              </a:spcAft>
-            </a:pPr>
-            <a:r>
-              <a:rPr sz="1050" lang="zh-TW" dirty="0">
+              <a:spcBef>
+                <a:spcPts val="0"/>
+              </a:spcBef>
+              <a:spcAft>
+                <a:spcPts val="183"/>
+              </a:spcAft>
+            </a:pPr>
+            <a:r>
+              <a:rPr sz="1100" lang="zh-TW" dirty="0">
                 <a:solidFill>
                   <a:srgbClr val="000000"/>
                 </a:solidFill>
@@ -4000,15 +4000,15 @@
           </a:p>
           <a:p>
             <a:pPr algn="l">
-              <a:lnSpc>
-                <a:spcPct val="115000"/>
-              </a:lnSpc>
-              <a:spcAft>
-                <a:spcPts val="525"/>
-              </a:spcAft>
-            </a:pPr>
-            <a:r>
-              <a:rPr sz="1050" lang="zh-TW" dirty="0">
+              <a:spcBef>
+                <a:spcPts val="0"/>
+              </a:spcBef>
+              <a:spcAft>
+                <a:spcPts val="183"/>
+              </a:spcAft>
+            </a:pPr>
+            <a:r>
+              <a:rPr sz="1100" lang="zh-TW" dirty="0">
                 <a:solidFill>
                   <a:srgbClr val="000000"/>
                 </a:solidFill>
@@ -4022,15 +4022,15 @@
           </a:p>
           <a:p>
             <a:pPr algn="l">
-              <a:lnSpc>
-                <a:spcPct val="115000"/>
-              </a:lnSpc>
-              <a:spcAft>
-                <a:spcPts val="525"/>
-              </a:spcAft>
-            </a:pPr>
-            <a:r>
-              <a:rPr sz="1050" lang="zh-TW" dirty="0">
+              <a:spcBef>
+                <a:spcPts val="0"/>
+              </a:spcBef>
+              <a:spcAft>
+                <a:spcPts val="183"/>
+              </a:spcAft>
+            </a:pPr>
+            <a:r>
+              <a:rPr sz="1100" lang="zh-TW" dirty="0">
                 <a:solidFill>
                   <a:srgbClr val="000000"/>
                 </a:solidFill>
@@ -4044,15 +4044,15 @@
           </a:p>
           <a:p>
             <a:pPr algn="l">
-              <a:lnSpc>
-                <a:spcPct val="115000"/>
-              </a:lnSpc>
-              <a:spcAft>
-                <a:spcPts val="525"/>
-              </a:spcAft>
-            </a:pPr>
-            <a:r>
-              <a:rPr sz="1050" lang="zh-TW" dirty="0">
+              <a:spcBef>
+                <a:spcPts val="0"/>
+              </a:spcBef>
+              <a:spcAft>
+                <a:spcPts val="183"/>
+              </a:spcAft>
+            </a:pPr>
+            <a:r>
+              <a:rPr sz="1100" lang="zh-TW" dirty="0">
                 <a:solidFill>
                   <a:srgbClr val="000000"/>
                 </a:solidFill>
@@ -4063,7 +4063,7 @@
               <a:t>這裡還有一個按鈕我要先提醒大家：規格表下面有「只看英文原文」。</a:t>
             </a:r>
             <a:r>
-              <a:rPr sz="1050" b="1" lang="zh-TW" dirty="0">
+              <a:rPr sz="1100" b="1" lang="zh-TW" dirty="0">
                 <a:solidFill>
                   <a:srgbClr val="000000"/>
                 </a:solidFill>
@@ -4074,7 +4074,7 @@
               <a:t>真正的規格表上是不會有中文或越南文的</a:t>
             </a:r>
             <a:r>
-              <a:rPr sz="1050" lang="zh-TW" dirty="0">
+              <a:rPr sz="1100" lang="zh-TW" dirty="0">
                 <a:solidFill>
                   <a:srgbClr val="000000"/>
                 </a:solidFill>
@@ -4088,15 +4088,15 @@
           </a:p>
           <a:p>
             <a:pPr algn="l">
-              <a:lnSpc>
-                <a:spcPct val="115000"/>
-              </a:lnSpc>
-              <a:spcAft>
-                <a:spcPts val="525"/>
-              </a:spcAft>
-            </a:pPr>
-            <a:r>
-              <a:rPr sz="1050" lang="zh-TW" dirty="0">
+              <a:spcBef>
+                <a:spcPts val="0"/>
+              </a:spcBef>
+              <a:spcAft>
+                <a:spcPts val="183"/>
+              </a:spcAft>
+            </a:pPr>
+            <a:r>
+              <a:rPr sz="1100" lang="zh-TW" dirty="0">
                 <a:solidFill>
                   <a:srgbClr val="000000"/>
                 </a:solidFill>
@@ -4130,11 +4130,11 @@
           <a:lstStyle/>
           <a:p>
             <a:pPr algn="l">
-              <a:lnSpc>
-                <a:spcPct val="115000"/>
-              </a:lnSpc>
-              <a:spcAft>
-                <a:spcPts val="500"/>
+              <a:spcBef>
+                <a:spcPts val="0"/>
+              </a:spcBef>
+              <a:spcAft>
+                <a:spcPts val="167"/>
               </a:spcAft>
             </a:pPr>
             <a:r>
@@ -4209,11 +4209,11 @@
           <a:lstStyle/>
           <a:p>
             <a:pPr algn="l">
-              <a:lnSpc>
-                <a:spcPct val="115000"/>
-              </a:lnSpc>
-              <a:spcAft>
-                <a:spcPts val="600"/>
+              <a:spcBef>
+                <a:spcPts val="0"/>
+              </a:spcBef>
+              <a:spcAft>
+                <a:spcPts val="200"/>
               </a:spcAft>
             </a:pPr>
             <a:r>
@@ -4242,11 +4242,11 @@
           </a:p>
           <a:p>
             <a:pPr algn="l">
-              <a:lnSpc>
-                <a:spcPct val="115000"/>
-              </a:lnSpc>
-              <a:spcAft>
-                <a:spcPts val="600"/>
+              <a:spcBef>
+                <a:spcPts val="0"/>
+              </a:spcBef>
+              <a:spcAft>
+                <a:spcPts val="200"/>
               </a:spcAft>
             </a:pPr>
             <a:r>
@@ -4264,11 +4264,11 @@
           </a:p>
           <a:p>
             <a:pPr algn="l">
-              <a:lnSpc>
-                <a:spcPct val="115000"/>
-              </a:lnSpc>
-              <a:spcAft>
-                <a:spcPts val="600"/>
+              <a:spcBef>
+                <a:spcPts val="0"/>
+              </a:spcBef>
+              <a:spcAft>
+                <a:spcPts val="200"/>
               </a:spcAft>
             </a:pPr>
             <a:r>
@@ -4297,11 +4297,11 @@
           </a:p>
           <a:p>
             <a:pPr algn="l">
-              <a:lnSpc>
-                <a:spcPct val="115000"/>
-              </a:lnSpc>
-              <a:spcAft>
-                <a:spcPts val="600"/>
+              <a:spcBef>
+                <a:spcPts val="0"/>
+              </a:spcBef>
+              <a:spcAft>
+                <a:spcPts val="200"/>
               </a:spcAft>
             </a:pPr>
             <a:r>
@@ -4319,11 +4319,11 @@
           </a:p>
           <a:p>
             <a:pPr algn="l">
-              <a:lnSpc>
-                <a:spcPct val="115000"/>
-              </a:lnSpc>
-              <a:spcAft>
-                <a:spcPts val="600"/>
+              <a:spcBef>
+                <a:spcPts val="0"/>
+              </a:spcBef>
+              <a:spcAft>
+                <a:spcPts val="200"/>
               </a:spcAft>
             </a:pPr>
             <a:r>
@@ -4352,11 +4352,11 @@
           </a:p>
           <a:p>
             <a:pPr algn="l">
-              <a:lnSpc>
-                <a:spcPct val="115000"/>
-              </a:lnSpc>
-              <a:spcAft>
-                <a:spcPts val="600"/>
+              <a:spcBef>
+                <a:spcPts val="0"/>
+              </a:spcBef>
+              <a:spcAft>
+                <a:spcPts val="200"/>
               </a:spcAft>
             </a:pPr>
             <a:r>
@@ -4394,11 +4394,11 @@
           <a:lstStyle/>
           <a:p>
             <a:pPr algn="l">
-              <a:lnSpc>
-                <a:spcPct val="115000"/>
-              </a:lnSpc>
-              <a:spcAft>
-                <a:spcPts val="500"/>
+              <a:spcBef>
+                <a:spcPts val="0"/>
+              </a:spcBef>
+              <a:spcAft>
+                <a:spcPts val="167"/>
               </a:spcAft>
             </a:pPr>
             <a:r>
@@ -4473,15 +4473,15 @@
           <a:lstStyle/>
           <a:p>
             <a:pPr algn="l">
-              <a:lnSpc>
-                <a:spcPct val="115000"/>
-              </a:lnSpc>
-              <a:spcAft>
-                <a:spcPts val="500"/>
-              </a:spcAft>
-            </a:pPr>
-            <a:r>
-              <a:rPr sz="1000" b="1" lang="zh-TW" dirty="0">
+              <a:spcBef>
+                <a:spcPts val="0"/>
+              </a:spcBef>
+              <a:spcAft>
+                <a:spcPts val="150"/>
+              </a:spcAft>
+            </a:pPr>
+            <a:r>
+              <a:rPr sz="900" b="1" lang="zh-TW" dirty="0">
                 <a:solidFill>
                   <a:srgbClr val="000000"/>
                 </a:solidFill>
@@ -4492,7 +4492,7 @@
               <a:t>▍這一張要做什麼</a:t>
             </a:r>
             <a:r>
-              <a:rPr sz="1000" lang="zh-TW" dirty="0">
+              <a:rPr sz="900" lang="zh-TW" dirty="0">
                 <a:solidFill>
                   <a:srgbClr val="000000"/>
                 </a:solidFill>
@@ -4506,15 +4506,15 @@
           </a:p>
           <a:p>
             <a:pPr algn="l">
-              <a:lnSpc>
-                <a:spcPct val="115000"/>
-              </a:lnSpc>
-              <a:spcAft>
-                <a:spcPts val="500"/>
-              </a:spcAft>
-            </a:pPr>
-            <a:r>
-              <a:rPr sz="1000" lang="zh-TW" dirty="0">
+              <a:spcBef>
+                <a:spcPts val="0"/>
+              </a:spcBef>
+              <a:spcAft>
+                <a:spcPts val="150"/>
+              </a:spcAft>
+            </a:pPr>
+            <a:r>
+              <a:rPr sz="900" lang="zh-TW" dirty="0">
                 <a:solidFill>
                   <a:srgbClr val="000000"/>
                 </a:solidFill>
@@ -4528,15 +4528,15 @@
           </a:p>
           <a:p>
             <a:pPr algn="l">
-              <a:lnSpc>
-                <a:spcPct val="115000"/>
-              </a:lnSpc>
-              <a:spcAft>
-                <a:spcPts val="500"/>
-              </a:spcAft>
-            </a:pPr>
-            <a:r>
-              <a:rPr sz="1000" b="1" lang="zh-TW" dirty="0">
+              <a:spcBef>
+                <a:spcPts val="0"/>
+              </a:spcBef>
+              <a:spcAft>
+                <a:spcPts val="150"/>
+              </a:spcAft>
+            </a:pPr>
+            <a:r>
+              <a:rPr sz="900" b="1" lang="zh-TW" dirty="0">
                 <a:solidFill>
                   <a:srgbClr val="000000"/>
                 </a:solidFill>
@@ -4547,7 +4547,7 @@
               <a:t>▍畫面上圈這裡</a:t>
             </a:r>
             <a:r>
-              <a:rPr sz="1000" lang="zh-TW" dirty="0">
+              <a:rPr sz="900" lang="zh-TW" dirty="0">
                 <a:solidFill>
                   <a:srgbClr val="000000"/>
                 </a:solidFill>
@@ -4561,15 +4561,15 @@
           </a:p>
           <a:p>
             <a:pPr algn="l">
-              <a:lnSpc>
-                <a:spcPct val="115000"/>
-              </a:lnSpc>
-              <a:spcAft>
-                <a:spcPts val="500"/>
-              </a:spcAft>
-            </a:pPr>
-            <a:r>
-              <a:rPr sz="1000" lang="zh-TW" dirty="0">
+              <a:spcBef>
+                <a:spcPts val="0"/>
+              </a:spcBef>
+              <a:spcAft>
+                <a:spcPts val="150"/>
+              </a:spcAft>
+            </a:pPr>
+            <a:r>
+              <a:rPr sz="900" lang="zh-TW" dirty="0">
                 <a:solidFill>
                   <a:srgbClr val="000000"/>
                 </a:solidFill>
@@ -4583,15 +4583,15 @@
           </a:p>
           <a:p>
             <a:pPr algn="l">
-              <a:lnSpc>
-                <a:spcPct val="115000"/>
-              </a:lnSpc>
-              <a:spcAft>
-                <a:spcPts val="500"/>
-              </a:spcAft>
-            </a:pPr>
-            <a:r>
-              <a:rPr sz="1000" b="1" lang="zh-TW" dirty="0">
+              <a:spcBef>
+                <a:spcPts val="0"/>
+              </a:spcBef>
+              <a:spcAft>
+                <a:spcPts val="150"/>
+              </a:spcAft>
+            </a:pPr>
+            <a:r>
+              <a:rPr sz="900" b="1" lang="zh-TW" dirty="0">
                 <a:solidFill>
                   <a:srgbClr val="000000"/>
                 </a:solidFill>
@@ -4602,7 +4602,7 @@
               <a:t>▍以下照著唸</a:t>
             </a:r>
             <a:r>
-              <a:rPr sz="1000" lang="zh-TW" dirty="0">
+              <a:rPr sz="900" lang="zh-TW" dirty="0">
                 <a:solidFill>
                   <a:srgbClr val="000000"/>
                 </a:solidFill>
@@ -4616,15 +4616,15 @@
           </a:p>
           <a:p>
             <a:pPr algn="l">
-              <a:lnSpc>
-                <a:spcPct val="115000"/>
-              </a:lnSpc>
-              <a:spcAft>
-                <a:spcPts val="500"/>
-              </a:spcAft>
-            </a:pPr>
-            <a:r>
-              <a:rPr sz="1000" lang="zh-TW" dirty="0">
+              <a:spcBef>
+                <a:spcPts val="0"/>
+              </a:spcBef>
+              <a:spcAft>
+                <a:spcPts val="150"/>
+              </a:spcAft>
+            </a:pPr>
+            <a:r>
+              <a:rPr sz="900" lang="zh-TW" dirty="0">
                 <a:solidFill>
                   <a:srgbClr val="000000"/>
                 </a:solidFill>
@@ -4635,7 +4635,7 @@
               <a:t>請大家在工具上選第一個型號，Ouster OS1-64。這是一顆</a:t>
             </a:r>
             <a:r>
-              <a:rPr sz="1000" b="1" lang="zh-TW" dirty="0">
+              <a:rPr sz="900" b="1" lang="zh-TW" dirty="0">
                 <a:solidFill>
                   <a:srgbClr val="000000"/>
                 </a:solidFill>
@@ -4646,7 +4646,7 @@
               <a:t>旋轉式</a:t>
             </a:r>
             <a:r>
-              <a:rPr sz="1000" lang="zh-TW" dirty="0">
+              <a:rPr sz="900" lang="zh-TW" dirty="0">
                 <a:solidFill>
                   <a:srgbClr val="000000"/>
                 </a:solidFill>
@@ -4660,15 +4660,15 @@
           </a:p>
           <a:p>
             <a:pPr algn="l">
-              <a:lnSpc>
-                <a:spcPct val="115000"/>
-              </a:lnSpc>
-              <a:spcAft>
-                <a:spcPts val="500"/>
-              </a:spcAft>
-            </a:pPr>
-            <a:r>
-              <a:rPr sz="1000" lang="zh-TW" dirty="0">
+              <a:spcBef>
+                <a:spcPts val="0"/>
+              </a:spcBef>
+              <a:spcAft>
+                <a:spcPts val="150"/>
+              </a:spcAft>
+            </a:pPr>
+            <a:r>
+              <a:rPr sz="900" lang="zh-TW" dirty="0">
                 <a:solidFill>
                   <a:srgbClr val="000000"/>
                 </a:solidFill>
@@ -4682,15 +4682,15 @@
           </a:p>
           <a:p>
             <a:pPr algn="l">
-              <a:lnSpc>
-                <a:spcPct val="115000"/>
-              </a:lnSpc>
-              <a:spcAft>
-                <a:spcPts val="500"/>
-              </a:spcAft>
-            </a:pPr>
-            <a:r>
-              <a:rPr sz="1000" b="1" lang="zh-TW" dirty="0">
+              <a:spcBef>
+                <a:spcPts val="0"/>
+              </a:spcBef>
+              <a:spcAft>
+                <a:spcPts val="150"/>
+              </a:spcAft>
+            </a:pPr>
+            <a:r>
+              <a:rPr sz="900" b="1" lang="zh-TW" dirty="0">
                 <a:solidFill>
                   <a:srgbClr val="000000"/>
                 </a:solidFill>
@@ -4701,7 +4701,7 @@
               <a:t>第一行，Vertical Resolution，垂直解析度。</a:t>
             </a:r>
             <a:r>
-              <a:rPr sz="1000" lang="zh-TW" dirty="0">
+              <a:rPr sz="900" lang="zh-TW" dirty="0">
                 <a:solidFill>
                   <a:srgbClr val="000000"/>
                 </a:solidFill>
@@ -4712,7 +4712,7 @@
               <a:t>上面寫 32、64、128 channels。Channel 中文叫通道，也叫線束。這就是上禮拜那條</a:t>
             </a:r>
             <a:r>
-              <a:rPr sz="1000" b="1" lang="zh-TW" dirty="0">
+              <a:rPr sz="900" b="1" lang="zh-TW" dirty="0">
                 <a:solidFill>
                   <a:srgbClr val="000000"/>
                 </a:solidFill>
@@ -4723,7 +4723,7 @@
               <a:t>射線數</a:t>
             </a:r>
             <a:r>
-              <a:rPr sz="1000" lang="zh-TW" dirty="0">
+              <a:rPr sz="900" lang="zh-TW" dirty="0">
                 <a:solidFill>
                   <a:srgbClr val="000000"/>
                 </a:solidFill>
@@ -4737,15 +4737,15 @@
           </a:p>
           <a:p>
             <a:pPr algn="l">
-              <a:lnSpc>
-                <a:spcPct val="115000"/>
-              </a:lnSpc>
-              <a:spcAft>
-                <a:spcPts val="500"/>
-              </a:spcAft>
-            </a:pPr>
-            <a:r>
-              <a:rPr sz="1000" b="1" lang="zh-TW" dirty="0">
+              <a:spcBef>
+                <a:spcPts val="0"/>
+              </a:spcBef>
+              <a:spcAft>
+                <a:spcPts val="150"/>
+              </a:spcAft>
+            </a:pPr>
+            <a:r>
+              <a:rPr sz="900" b="1" lang="zh-TW" dirty="0">
                 <a:solidFill>
                   <a:srgbClr val="000000"/>
                 </a:solidFill>
@@ -4756,7 +4756,7 @@
               <a:t>第二行，Field of View，視野。</a:t>
             </a:r>
             <a:r>
-              <a:rPr sz="1000" lang="zh-TW" dirty="0">
+              <a:rPr sz="900" lang="zh-TW" dirty="0">
                 <a:solidFill>
                   <a:srgbClr val="000000"/>
                 </a:solidFill>
@@ -4770,15 +4770,15 @@
           </a:p>
           <a:p>
             <a:pPr algn="l">
-              <a:lnSpc>
-                <a:spcPct val="115000"/>
-              </a:lnSpc>
-              <a:spcAft>
-                <a:spcPts val="500"/>
-              </a:spcAft>
-            </a:pPr>
-            <a:r>
-              <a:rPr sz="1000" b="1" lang="zh-TW" dirty="0">
+              <a:spcBef>
+                <a:spcPts val="0"/>
+              </a:spcBef>
+              <a:spcAft>
+                <a:spcPts val="150"/>
+              </a:spcAft>
+            </a:pPr>
+            <a:r>
+              <a:rPr sz="900" b="1" lang="zh-TW" dirty="0">
                 <a:solidFill>
                   <a:srgbClr val="000000"/>
                 </a:solidFill>
@@ -4789,7 +4789,7 @@
               <a:t>第三行，Range，測距。</a:t>
             </a:r>
             <a:r>
-              <a:rPr sz="1000" lang="zh-TW" dirty="0">
+              <a:rPr sz="900" lang="zh-TW" dirty="0">
                 <a:solidFill>
                   <a:srgbClr val="000000"/>
                 </a:solidFill>
@@ -4803,15 +4803,15 @@
           </a:p>
           <a:p>
             <a:pPr algn="l">
-              <a:lnSpc>
-                <a:spcPct val="115000"/>
-              </a:lnSpc>
-              <a:spcAft>
-                <a:spcPts val="500"/>
-              </a:spcAft>
-            </a:pPr>
-            <a:r>
-              <a:rPr sz="1000" lang="zh-TW" dirty="0">
+              <a:spcBef>
+                <a:spcPts val="0"/>
+              </a:spcBef>
+              <a:spcAft>
+                <a:spcPts val="150"/>
+              </a:spcAft>
+            </a:pPr>
+            <a:r>
+              <a:rPr sz="900" lang="zh-TW" dirty="0">
                 <a:solidFill>
                   <a:srgbClr val="000000"/>
                 </a:solidFill>
@@ -4825,15 +4825,15 @@
           </a:p>
           <a:p>
             <a:pPr algn="l">
-              <a:lnSpc>
-                <a:spcPct val="115000"/>
-              </a:lnSpc>
-              <a:spcAft>
-                <a:spcPts val="500"/>
-              </a:spcAft>
-            </a:pPr>
-            <a:r>
-              <a:rPr sz="1000" lang="zh-TW" dirty="0">
+              <a:spcBef>
+                <a:spcPts val="0"/>
+              </a:spcBef>
+              <a:spcAft>
+                <a:spcPts val="150"/>
+              </a:spcAft>
+            </a:pPr>
+            <a:r>
+              <a:rPr sz="900" lang="zh-TW" dirty="0">
                 <a:solidFill>
                   <a:srgbClr val="000000"/>
                 </a:solidFill>
@@ -4844,7 +4844,7 @@
               <a:t>所以上禮拜各位在模擬器上拉來拉去的那三個東西，不是我編出來的遊戲設定，是</a:t>
             </a:r>
             <a:r>
-              <a:rPr sz="1000" b="1" lang="zh-TW" dirty="0">
+              <a:rPr sz="900" b="1" lang="zh-TW" dirty="0">
                 <a:solidFill>
                   <a:srgbClr val="000000"/>
                 </a:solidFill>
@@ -4855,7 +4855,7 @@
               <a:t>你真的要花錢去買的規格</a:t>
             </a:r>
             <a:r>
-              <a:rPr sz="1000" lang="zh-TW" dirty="0">
+              <a:rPr sz="900" lang="zh-TW" dirty="0">
                 <a:solidFill>
                   <a:srgbClr val="000000"/>
                 </a:solidFill>
@@ -4869,15 +4869,15 @@
           </a:p>
           <a:p>
             <a:pPr algn="l">
-              <a:lnSpc>
-                <a:spcPct val="115000"/>
-              </a:lnSpc>
-              <a:spcAft>
-                <a:spcPts val="500"/>
-              </a:spcAft>
-            </a:pPr>
-            <a:r>
-              <a:rPr sz="1000" lang="zh-TW" dirty="0">
+              <a:spcBef>
+                <a:spcPts val="0"/>
+              </a:spcBef>
+              <a:spcAft>
+                <a:spcPts val="150"/>
+              </a:spcAft>
+            </a:pPr>
+            <a:r>
+              <a:rPr sz="900" lang="zh-TW" dirty="0">
                 <a:solidFill>
                   <a:srgbClr val="000000"/>
                 </a:solidFill>
@@ -4888,7 +4888,7 @@
               <a:t>還有一件事現在先記著，等一下第九張我們會回來算：這一行測距寫 90 公尺，但它後面跟了一串英文——</a:t>
             </a:r>
             <a:r>
-              <a:rPr sz="1000" b="1" lang="zh-TW" dirty="0">
+              <a:rPr sz="900" b="1" lang="zh-TW" dirty="0">
                 <a:solidFill>
                   <a:srgbClr val="000000"/>
                 </a:solidFill>
@@ -4899,7 +4899,7 @@
               <a:t>10% reflectivity</a:t>
             </a:r>
             <a:r>
-              <a:rPr sz="1000" lang="zh-TW" dirty="0">
+              <a:rPr sz="900" lang="zh-TW" dirty="0">
                 <a:solidFill>
                   <a:srgbClr val="000000"/>
                 </a:solidFill>
@@ -4933,11 +4933,11 @@
           <a:lstStyle/>
           <a:p>
             <a:pPr algn="l">
-              <a:lnSpc>
-                <a:spcPct val="115000"/>
-              </a:lnSpc>
-              <a:spcAft>
-                <a:spcPts val="500"/>
+              <a:spcBef>
+                <a:spcPts val="0"/>
+              </a:spcBef>
+              <a:spcAft>
+                <a:spcPts val="167"/>
               </a:spcAft>
             </a:pPr>
             <a:r>
@@ -5012,15 +5012,15 @@
           <a:lstStyle/>
           <a:p>
             <a:pPr algn="l">
-              <a:lnSpc>
-                <a:spcPct val="115000"/>
-              </a:lnSpc>
-              <a:spcAft>
-                <a:spcPts val="500"/>
-              </a:spcAft>
-            </a:pPr>
-            <a:r>
-              <a:rPr sz="1000" b="1" lang="zh-TW" dirty="0">
+              <a:spcBef>
+                <a:spcPts val="0"/>
+              </a:spcBef>
+              <a:spcAft>
+                <a:spcPts val="133"/>
+              </a:spcAft>
+            </a:pPr>
+            <a:r>
+              <a:rPr sz="800" b="1" lang="zh-TW" dirty="0">
                 <a:solidFill>
                   <a:srgbClr val="000000"/>
                 </a:solidFill>
@@ -5031,7 +5031,7 @@
               <a:t>▍這一張要做什麼</a:t>
             </a:r>
             <a:r>
-              <a:rPr sz="1000" lang="zh-TW" dirty="0">
+              <a:rPr sz="800" lang="zh-TW" dirty="0">
                 <a:solidFill>
                   <a:srgbClr val="000000"/>
                 </a:solidFill>
@@ -5045,15 +5045,15 @@
           </a:p>
           <a:p>
             <a:pPr algn="l">
-              <a:lnSpc>
-                <a:spcPct val="115000"/>
-              </a:lnSpc>
-              <a:spcAft>
-                <a:spcPts val="500"/>
-              </a:spcAft>
-            </a:pPr>
-            <a:r>
-              <a:rPr sz="1000" lang="zh-TW" dirty="0">
+              <a:spcBef>
+                <a:spcPts val="0"/>
+              </a:spcBef>
+              <a:spcAft>
+                <a:spcPts val="133"/>
+              </a:spcAft>
+            </a:pPr>
+            <a:r>
+              <a:rPr sz="800" lang="zh-TW" dirty="0">
                 <a:solidFill>
                   <a:srgbClr val="000000"/>
                 </a:solidFill>
@@ -5067,15 +5067,15 @@
           </a:p>
           <a:p>
             <a:pPr algn="l">
-              <a:lnSpc>
-                <a:spcPct val="115000"/>
-              </a:lnSpc>
-              <a:spcAft>
-                <a:spcPts val="500"/>
-              </a:spcAft>
-            </a:pPr>
-            <a:r>
-              <a:rPr sz="1000" b="1" lang="zh-TW" dirty="0">
+              <a:spcBef>
+                <a:spcPts val="0"/>
+              </a:spcBef>
+              <a:spcAft>
+                <a:spcPts val="133"/>
+              </a:spcAft>
+            </a:pPr>
+            <a:r>
+              <a:rPr sz="800" b="1" lang="zh-TW" dirty="0">
                 <a:solidFill>
                   <a:srgbClr val="000000"/>
                 </a:solidFill>
@@ -5086,7 +5086,7 @@
               <a:t>▍畫面上圈這裡</a:t>
             </a:r>
             <a:r>
-              <a:rPr sz="1000" lang="zh-TW" dirty="0">
+              <a:rPr sz="800" lang="zh-TW" dirty="0">
                 <a:solidFill>
                   <a:srgbClr val="000000"/>
                 </a:solidFill>
@@ -5100,15 +5100,15 @@
           </a:p>
           <a:p>
             <a:pPr algn="l">
-              <a:lnSpc>
-                <a:spcPct val="115000"/>
-              </a:lnSpc>
-              <a:spcAft>
-                <a:spcPts val="500"/>
-              </a:spcAft>
-            </a:pPr>
-            <a:r>
-              <a:rPr sz="1000" lang="zh-TW" dirty="0">
+              <a:spcBef>
+                <a:spcPts val="0"/>
+              </a:spcBef>
+              <a:spcAft>
+                <a:spcPts val="133"/>
+              </a:spcAft>
+            </a:pPr>
+            <a:r>
+              <a:rPr sz="800" lang="zh-TW" dirty="0">
                 <a:solidFill>
                   <a:srgbClr val="000000"/>
                 </a:solidFill>
@@ -5122,15 +5122,15 @@
           </a:p>
           <a:p>
             <a:pPr algn="l">
-              <a:lnSpc>
-                <a:spcPct val="115000"/>
-              </a:lnSpc>
-              <a:spcAft>
-                <a:spcPts val="500"/>
-              </a:spcAft>
-            </a:pPr>
-            <a:r>
-              <a:rPr sz="1000" b="1" lang="zh-TW" dirty="0">
+              <a:spcBef>
+                <a:spcPts val="0"/>
+              </a:spcBef>
+              <a:spcAft>
+                <a:spcPts val="133"/>
+              </a:spcAft>
+            </a:pPr>
+            <a:r>
+              <a:rPr sz="800" b="1" lang="zh-TW" dirty="0">
                 <a:solidFill>
                   <a:srgbClr val="000000"/>
                 </a:solidFill>
@@ -5141,7 +5141,7 @@
               <a:t>▍以下照著唸</a:t>
             </a:r>
             <a:r>
-              <a:rPr sz="1000" lang="zh-TW" dirty="0">
+              <a:rPr sz="800" lang="zh-TW" dirty="0">
                 <a:solidFill>
                   <a:srgbClr val="000000"/>
                 </a:solidFill>
@@ -5155,15 +5155,15 @@
           </a:p>
           <a:p>
             <a:pPr algn="l">
-              <a:lnSpc>
-                <a:spcPct val="115000"/>
-              </a:lnSpc>
-              <a:spcAft>
-                <a:spcPts val="500"/>
-              </a:spcAft>
-            </a:pPr>
-            <a:r>
-              <a:rPr sz="1000" lang="zh-TW" dirty="0">
+              <a:spcBef>
+                <a:spcPts val="0"/>
+              </a:spcBef>
+              <a:spcAft>
+                <a:spcPts val="133"/>
+              </a:spcAft>
+            </a:pPr>
+            <a:r>
+              <a:rPr sz="800" lang="zh-TW" dirty="0">
                 <a:solidFill>
                   <a:srgbClr val="000000"/>
                 </a:solidFill>
@@ -5174,7 +5174,7 @@
               <a:t>第二個型號，Hesai AT128P。這是一顆</a:t>
             </a:r>
             <a:r>
-              <a:rPr sz="1000" b="1" lang="zh-TW" dirty="0">
+              <a:rPr sz="800" b="1" lang="zh-TW" dirty="0">
                 <a:solidFill>
                   <a:srgbClr val="000000"/>
                 </a:solidFill>
@@ -5185,7 +5185,7 @@
               <a:t>固定式</a:t>
             </a:r>
             <a:r>
-              <a:rPr sz="1000" lang="zh-TW" dirty="0">
+              <a:rPr sz="800" lang="zh-TW" dirty="0">
                 <a:solidFill>
                   <a:srgbClr val="000000"/>
                 </a:solidFill>
@@ -5199,15 +5199,15 @@
           </a:p>
           <a:p>
             <a:pPr algn="l">
-              <a:lnSpc>
-                <a:spcPct val="115000"/>
-              </a:lnSpc>
-              <a:spcAft>
-                <a:spcPts val="500"/>
-              </a:spcAft>
-            </a:pPr>
-            <a:r>
-              <a:rPr sz="1000" lang="zh-TW" dirty="0">
+              <a:spcBef>
+                <a:spcPts val="0"/>
+              </a:spcBef>
+              <a:spcAft>
+                <a:spcPts val="133"/>
+              </a:spcAft>
+            </a:pPr>
+            <a:r>
+              <a:rPr sz="800" lang="zh-TW" dirty="0">
                 <a:solidFill>
                   <a:srgbClr val="000000"/>
                 </a:solidFill>
@@ -5221,15 +5221,15 @@
           </a:p>
           <a:p>
             <a:pPr algn="l">
-              <a:lnSpc>
-                <a:spcPct val="115000"/>
-              </a:lnSpc>
-              <a:spcAft>
-                <a:spcPts val="500"/>
-              </a:spcAft>
-            </a:pPr>
-            <a:r>
-              <a:rPr sz="1000" lang="zh-TW" dirty="0">
+              <a:spcBef>
+                <a:spcPts val="0"/>
+              </a:spcBef>
+              <a:spcAft>
+                <a:spcPts val="133"/>
+              </a:spcAft>
+            </a:pPr>
+            <a:r>
+              <a:rPr sz="800" lang="zh-TW" dirty="0">
                 <a:solidFill>
                   <a:srgbClr val="000000"/>
                 </a:solidFill>
@@ -5243,15 +5243,15 @@
           </a:p>
           <a:p>
             <a:pPr algn="l">
-              <a:lnSpc>
-                <a:spcPct val="115000"/>
-              </a:lnSpc>
-              <a:spcAft>
-                <a:spcPts val="500"/>
-              </a:spcAft>
-            </a:pPr>
-            <a:r>
-              <a:rPr sz="1000" lang="zh-TW" dirty="0">
+              <a:spcBef>
+                <a:spcPts val="0"/>
+              </a:spcBef>
+              <a:spcAft>
+                <a:spcPts val="133"/>
+              </a:spcAft>
+            </a:pPr>
+            <a:r>
+              <a:rPr sz="800" lang="zh-TW" dirty="0">
                 <a:solidFill>
                   <a:srgbClr val="000000"/>
                 </a:solidFill>
@@ -5265,15 +5265,15 @@
           </a:p>
           <a:p>
             <a:pPr algn="l">
-              <a:lnSpc>
-                <a:spcPct val="115000"/>
-              </a:lnSpc>
-              <a:spcAft>
-                <a:spcPts val="500"/>
-              </a:spcAft>
-            </a:pPr>
-            <a:r>
-              <a:rPr sz="1000" lang="zh-TW" dirty="0">
+              <a:spcBef>
+                <a:spcPts val="0"/>
+              </a:spcBef>
+              <a:spcAft>
+                <a:spcPts val="133"/>
+              </a:spcAft>
+            </a:pPr>
+            <a:r>
+              <a:rPr sz="800" lang="zh-TW" dirty="0">
                 <a:solidFill>
                   <a:srgbClr val="000000"/>
                 </a:solidFill>
@@ -5284,7 +5284,7 @@
               <a:t>第三行不一樣了。這一顆的規格表上，直接寫了 </a:t>
             </a:r>
             <a:r>
-              <a:rPr sz="1000" b="1" lang="zh-TW" dirty="0">
+              <a:rPr sz="800" b="1" lang="zh-TW" dirty="0">
                 <a:solidFill>
                   <a:srgbClr val="000000"/>
                 </a:solidFill>
@@ -5295,7 +5295,7 @@
               <a:t>Angular Resolution，角解析度：水平 0.1 度、垂直 0.2 度</a:t>
             </a:r>
             <a:r>
-              <a:rPr sz="1000" lang="zh-TW" dirty="0">
+              <a:rPr sz="800" lang="zh-TW" dirty="0">
                 <a:solidFill>
                   <a:srgbClr val="000000"/>
                 </a:solidFill>
@@ -5309,15 +5309,15 @@
           </a:p>
           <a:p>
             <a:pPr algn="l">
-              <a:lnSpc>
-                <a:spcPct val="115000"/>
-              </a:lnSpc>
-              <a:spcAft>
-                <a:spcPts val="500"/>
-              </a:spcAft>
-            </a:pPr>
-            <a:r>
-              <a:rPr sz="1000" lang="zh-TW" dirty="0">
+              <a:spcBef>
+                <a:spcPts val="0"/>
+              </a:spcBef>
+              <a:spcAft>
+                <a:spcPts val="133"/>
+              </a:spcAft>
+            </a:pPr>
+            <a:r>
+              <a:rPr sz="800" lang="zh-TW" dirty="0">
                 <a:solidFill>
                   <a:srgbClr val="000000"/>
                 </a:solidFill>
@@ -5328,7 +5328,7 @@
               <a:t>這一行請大家特別注意，因為它就是第四週我們講了一整節的那件事——</a:t>
             </a:r>
             <a:r>
-              <a:rPr sz="1000" b="1" lang="zh-TW" dirty="0">
+              <a:rPr sz="800" b="1" lang="zh-TW" dirty="0">
                 <a:solidFill>
                   <a:srgbClr val="000000"/>
                 </a:solidFill>
@@ -5339,7 +5339,7 @@
               <a:t>相鄰兩條射線之間差幾度</a:t>
             </a:r>
             <a:r>
-              <a:rPr sz="1000" lang="zh-TW" dirty="0">
+              <a:rPr sz="800" lang="zh-TW" dirty="0">
                 <a:solidFill>
                   <a:srgbClr val="000000"/>
                 </a:solidFill>
@@ -5353,15 +5353,15 @@
           </a:p>
           <a:p>
             <a:pPr algn="l">
-              <a:lnSpc>
-                <a:spcPct val="115000"/>
-              </a:lnSpc>
-              <a:spcAft>
-                <a:spcPts val="500"/>
-              </a:spcAft>
-            </a:pPr>
-            <a:r>
-              <a:rPr sz="1000" lang="zh-TW" dirty="0">
+              <a:spcBef>
+                <a:spcPts val="0"/>
+              </a:spcBef>
+              <a:spcAft>
+                <a:spcPts val="133"/>
+              </a:spcAft>
+            </a:pPr>
+            <a:r>
+              <a:rPr sz="800" lang="zh-TW" dirty="0">
                 <a:solidFill>
                   <a:srgbClr val="000000"/>
                 </a:solidFill>
@@ -5375,15 +5375,15 @@
           </a:p>
           <a:p>
             <a:pPr algn="l">
-              <a:lnSpc>
-                <a:spcPct val="115000"/>
-              </a:lnSpc>
-              <a:spcAft>
-                <a:spcPts val="500"/>
-              </a:spcAft>
-            </a:pPr>
-            <a:r>
-              <a:rPr sz="1000" lang="zh-TW" dirty="0">
+              <a:spcBef>
+                <a:spcPts val="0"/>
+              </a:spcBef>
+              <a:spcAft>
+                <a:spcPts val="133"/>
+              </a:spcAft>
+            </a:pPr>
+            <a:r>
+              <a:rPr sz="800" lang="zh-TW" dirty="0">
                 <a:solidFill>
                   <a:srgbClr val="000000"/>
                 </a:solidFill>
@@ -5394,7 +5394,7 @@
               <a:t>OS1 把點灑在</a:t>
             </a:r>
             <a:r>
-              <a:rPr sz="1000" b="1" lang="zh-TW" dirty="0">
+              <a:rPr sz="800" b="1" lang="zh-TW" dirty="0">
                 <a:solidFill>
                   <a:srgbClr val="000000"/>
                 </a:solidFill>
@@ -5405,7 +5405,7 @@
               <a:t>一整圈</a:t>
             </a:r>
             <a:r>
-              <a:rPr sz="1000" lang="zh-TW" dirty="0">
+              <a:rPr sz="800" lang="zh-TW" dirty="0">
                 <a:solidFill>
                   <a:srgbClr val="000000"/>
                 </a:solidFill>
@@ -5416,7 +5416,7 @@
               <a:t>，AT128P 把同樣多的點集中在</a:t>
             </a:r>
             <a:r>
-              <a:rPr sz="1000" b="1" lang="zh-TW" dirty="0">
+              <a:rPr sz="800" b="1" lang="zh-TW" dirty="0">
                 <a:solidFill>
                   <a:srgbClr val="000000"/>
                 </a:solidFill>
@@ -5427,7 +5427,7 @@
               <a:t>前面 120 度</a:t>
             </a:r>
             <a:r>
-              <a:rPr sz="1000" lang="zh-TW" dirty="0">
+              <a:rPr sz="800" lang="zh-TW" dirty="0">
                 <a:solidFill>
                   <a:srgbClr val="000000"/>
                 </a:solidFill>
@@ -5441,15 +5441,15 @@
           </a:p>
           <a:p>
             <a:pPr algn="l">
-              <a:lnSpc>
-                <a:spcPct val="115000"/>
-              </a:lnSpc>
-              <a:spcAft>
-                <a:spcPts val="500"/>
-              </a:spcAft>
-            </a:pPr>
-            <a:r>
-              <a:rPr sz="1000" lang="zh-TW" dirty="0">
+              <a:spcBef>
+                <a:spcPts val="0"/>
+              </a:spcBef>
+              <a:spcAft>
+                <a:spcPts val="133"/>
+              </a:spcAft>
+            </a:pPr>
+            <a:r>
+              <a:rPr sz="800" lang="zh-TW" dirty="0">
                 <a:solidFill>
                   <a:srgbClr val="000000"/>
                 </a:solidFill>
@@ -5460,7 +5460,7 @@
               <a:t>所以這兩顆不是誰比較好，是</a:t>
             </a:r>
             <a:r>
-              <a:rPr sz="1000" b="1" lang="zh-TW" dirty="0">
+              <a:rPr sz="800" b="1" lang="zh-TW" dirty="0">
                 <a:solidFill>
                   <a:srgbClr val="000000"/>
                 </a:solidFill>
@@ -5471,7 +5471,7 @@
               <a:t>用途不一樣</a:t>
             </a:r>
             <a:r>
-              <a:rPr sz="1000" lang="zh-TW" dirty="0">
+              <a:rPr sz="800" lang="zh-TW" dirty="0">
                 <a:solidFill>
                   <a:srgbClr val="000000"/>
                 </a:solidFill>
@@ -5485,15 +5485,15 @@
           </a:p>
           <a:p>
             <a:pPr algn="l">
-              <a:lnSpc>
-                <a:spcPct val="115000"/>
-              </a:lnSpc>
-              <a:spcAft>
-                <a:spcPts val="500"/>
-              </a:spcAft>
-            </a:pPr>
-            <a:r>
-              <a:rPr sz="1000" lang="zh-TW" dirty="0">
+              <a:spcBef>
+                <a:spcPts val="0"/>
+              </a:spcBef>
+              <a:spcAft>
+                <a:spcPts val="133"/>
+              </a:spcAft>
+            </a:pPr>
+            <a:r>
+              <a:rPr sz="800" lang="zh-TW" dirty="0">
                 <a:solidFill>
                   <a:srgbClr val="000000"/>
                 </a:solidFill>
@@ -5527,11 +5527,11 @@
           <a:lstStyle/>
           <a:p>
             <a:pPr algn="l">
-              <a:lnSpc>
-                <a:spcPct val="115000"/>
-              </a:lnSpc>
-              <a:spcAft>
-                <a:spcPts val="500"/>
+              <a:spcBef>
+                <a:spcPts val="0"/>
+              </a:spcBef>
+              <a:spcAft>
+                <a:spcPts val="167"/>
               </a:spcAft>
             </a:pPr>
             <a:r>
@@ -5606,15 +5606,15 @@
           <a:lstStyle/>
           <a:p>
             <a:pPr algn="l">
-              <a:lnSpc>
-                <a:spcPct val="115000"/>
-              </a:lnSpc>
-              <a:spcAft>
-                <a:spcPts val="500"/>
-              </a:spcAft>
-            </a:pPr>
-            <a:r>
-              <a:rPr sz="1000" b="1" lang="zh-TW" dirty="0">
+              <a:spcBef>
+                <a:spcPts val="0"/>
+              </a:spcBef>
+              <a:spcAft>
+                <a:spcPts val="158"/>
+              </a:spcAft>
+            </a:pPr>
+            <a:r>
+              <a:rPr sz="950" b="1" lang="zh-TW" dirty="0">
                 <a:solidFill>
                   <a:srgbClr val="000000"/>
                 </a:solidFill>
@@ -5625,7 +5625,7 @@
               <a:t>▍這一張要做什麼</a:t>
             </a:r>
             <a:r>
-              <a:rPr sz="1000" lang="zh-TW" dirty="0">
+              <a:rPr sz="950" lang="zh-TW" dirty="0">
                 <a:solidFill>
                   <a:srgbClr val="000000"/>
                 </a:solidFill>
@@ -5639,15 +5639,15 @@
           </a:p>
           <a:p>
             <a:pPr algn="l">
-              <a:lnSpc>
-                <a:spcPct val="115000"/>
-              </a:lnSpc>
-              <a:spcAft>
-                <a:spcPts val="500"/>
-              </a:spcAft>
-            </a:pPr>
-            <a:r>
-              <a:rPr sz="1000" lang="zh-TW" dirty="0">
+              <a:spcBef>
+                <a:spcPts val="0"/>
+              </a:spcBef>
+              <a:spcAft>
+                <a:spcPts val="158"/>
+              </a:spcAft>
+            </a:pPr>
+            <a:r>
+              <a:rPr sz="950" lang="zh-TW" dirty="0">
                 <a:solidFill>
                   <a:srgbClr val="000000"/>
                 </a:solidFill>
@@ -5661,15 +5661,15 @@
           </a:p>
           <a:p>
             <a:pPr algn="l">
-              <a:lnSpc>
-                <a:spcPct val="115000"/>
-              </a:lnSpc>
-              <a:spcAft>
-                <a:spcPts val="500"/>
-              </a:spcAft>
-            </a:pPr>
-            <a:r>
-              <a:rPr sz="1000" b="1" lang="zh-TW" dirty="0">
+              <a:spcBef>
+                <a:spcPts val="0"/>
+              </a:spcBef>
+              <a:spcAft>
+                <a:spcPts val="158"/>
+              </a:spcAft>
+            </a:pPr>
+            <a:r>
+              <a:rPr sz="950" b="1" lang="zh-TW" dirty="0">
                 <a:solidFill>
                   <a:srgbClr val="000000"/>
                 </a:solidFill>
@@ -5680,7 +5680,7 @@
               <a:t>▍畫面上圈這裡</a:t>
             </a:r>
             <a:r>
-              <a:rPr sz="1000" lang="zh-TW" dirty="0">
+              <a:rPr sz="950" lang="zh-TW" dirty="0">
                 <a:solidFill>
                   <a:srgbClr val="000000"/>
                 </a:solidFill>
@@ -5694,15 +5694,15 @@
           </a:p>
           <a:p>
             <a:pPr algn="l">
-              <a:lnSpc>
-                <a:spcPct val="115000"/>
-              </a:lnSpc>
-              <a:spcAft>
-                <a:spcPts val="500"/>
-              </a:spcAft>
-            </a:pPr>
-            <a:r>
-              <a:rPr sz="1000" lang="zh-TW" dirty="0">
+              <a:spcBef>
+                <a:spcPts val="0"/>
+              </a:spcBef>
+              <a:spcAft>
+                <a:spcPts val="158"/>
+              </a:spcAft>
+            </a:pPr>
+            <a:r>
+              <a:rPr sz="950" lang="zh-TW" dirty="0">
                 <a:solidFill>
                   <a:srgbClr val="000000"/>
                 </a:solidFill>
@@ -5716,15 +5716,15 @@
           </a:p>
           <a:p>
             <a:pPr algn="l">
-              <a:lnSpc>
-                <a:spcPct val="115000"/>
-              </a:lnSpc>
-              <a:spcAft>
-                <a:spcPts val="500"/>
-              </a:spcAft>
-            </a:pPr>
-            <a:r>
-              <a:rPr sz="1000" b="1" lang="zh-TW" dirty="0">
+              <a:spcBef>
+                <a:spcPts val="0"/>
+              </a:spcBef>
+              <a:spcAft>
+                <a:spcPts val="158"/>
+              </a:spcAft>
+            </a:pPr>
+            <a:r>
+              <a:rPr sz="950" b="1" lang="zh-TW" dirty="0">
                 <a:solidFill>
                   <a:srgbClr val="000000"/>
                 </a:solidFill>
@@ -5735,7 +5735,7 @@
               <a:t>▍以下照著唸</a:t>
             </a:r>
             <a:r>
-              <a:rPr sz="1000" lang="zh-TW" dirty="0">
+              <a:rPr sz="950" lang="zh-TW" dirty="0">
                 <a:solidFill>
                   <a:srgbClr val="000000"/>
                 </a:solidFill>
@@ -5749,15 +5749,15 @@
           </a:p>
           <a:p>
             <a:pPr algn="l">
-              <a:lnSpc>
-                <a:spcPct val="115000"/>
-              </a:lnSpc>
-              <a:spcAft>
-                <a:spcPts val="500"/>
-              </a:spcAft>
-            </a:pPr>
-            <a:r>
-              <a:rPr sz="1000" lang="zh-TW" dirty="0">
+              <a:spcBef>
+                <a:spcPts val="0"/>
+              </a:spcBef>
+              <a:spcAft>
+                <a:spcPts val="158"/>
+              </a:spcAft>
+            </a:pPr>
+            <a:r>
+              <a:rPr sz="950" lang="zh-TW" dirty="0">
                 <a:solidFill>
                   <a:srgbClr val="000000"/>
                 </a:solidFill>
@@ -5768,7 +5768,7 @@
               <a:t>我們把兩顆並排比一次。前四行都是規格表上抄下來的，最後一行是</a:t>
             </a:r>
             <a:r>
-              <a:rPr sz="1000" b="1" lang="zh-TW" dirty="0">
+              <a:rPr sz="950" b="1" lang="zh-TW" dirty="0">
                 <a:solidFill>
                   <a:srgbClr val="000000"/>
                 </a:solidFill>
@@ -5779,7 +5779,7 @@
               <a:t>我們自己算的</a:t>
             </a:r>
             <a:r>
-              <a:rPr sz="1000" lang="zh-TW" dirty="0">
+              <a:rPr sz="950" lang="zh-TW" dirty="0">
                 <a:solidFill>
                   <a:srgbClr val="000000"/>
                 </a:solidFill>
@@ -5793,15 +5793,15 @@
           </a:p>
           <a:p>
             <a:pPr algn="l">
-              <a:lnSpc>
-                <a:spcPct val="115000"/>
-              </a:lnSpc>
-              <a:spcAft>
-                <a:spcPts val="500"/>
-              </a:spcAft>
-            </a:pPr>
-            <a:r>
-              <a:rPr sz="1000" lang="zh-TW" dirty="0">
+              <a:spcBef>
+                <a:spcPts val="0"/>
+              </a:spcBef>
+              <a:spcAft>
+                <a:spcPts val="158"/>
+              </a:spcAft>
+            </a:pPr>
+            <a:r>
+              <a:rPr sz="950" lang="zh-TW" dirty="0">
                 <a:solidFill>
                   <a:srgbClr val="000000"/>
                 </a:solidFill>
@@ -5815,15 +5815,15 @@
           </a:p>
           <a:p>
             <a:pPr algn="l">
-              <a:lnSpc>
-                <a:spcPct val="115000"/>
-              </a:lnSpc>
-              <a:spcAft>
-                <a:spcPts val="500"/>
-              </a:spcAft>
-            </a:pPr>
-            <a:r>
-              <a:rPr sz="1000" lang="zh-TW" dirty="0">
+              <a:spcBef>
+                <a:spcPts val="0"/>
+              </a:spcBef>
+              <a:spcAft>
+                <a:spcPts val="158"/>
+              </a:spcAft>
+            </a:pPr>
+            <a:r>
+              <a:rPr sz="950" lang="zh-TW" dirty="0">
                 <a:solidFill>
                   <a:srgbClr val="000000"/>
                 </a:solidFill>
@@ -5834,7 +5834,7 @@
               <a:t>再來是水平角解析度，這裡要算一下。OS1 的規格表沒有直接寫角度，它寫的是每一圈有 1024 個點。所以三百六十度除以一千零二十四，等於</a:t>
             </a:r>
             <a:r>
-              <a:rPr sz="1000" b="1" lang="zh-TW" dirty="0">
+              <a:rPr sz="950" b="1" lang="zh-TW" dirty="0">
                 <a:solidFill>
                   <a:srgbClr val="000000"/>
                 </a:solidFill>
@@ -5845,7 +5845,7 @@
               <a:t>零點三五度</a:t>
             </a:r>
             <a:r>
-              <a:rPr sz="1000" lang="zh-TW" dirty="0">
+              <a:rPr sz="950" lang="zh-TW" dirty="0">
                 <a:solidFill>
                   <a:srgbClr val="000000"/>
                 </a:solidFill>
@@ -5859,15 +5859,15 @@
           </a:p>
           <a:p>
             <a:pPr algn="l">
-              <a:lnSpc>
-                <a:spcPct val="115000"/>
-              </a:lnSpc>
-              <a:spcAft>
-                <a:spcPts val="500"/>
-              </a:spcAft>
-            </a:pPr>
-            <a:r>
-              <a:rPr sz="1000" lang="zh-TW" dirty="0">
+              <a:spcBef>
+                <a:spcPts val="0"/>
+              </a:spcBef>
+              <a:spcAft>
+                <a:spcPts val="158"/>
+              </a:spcAft>
+            </a:pPr>
+            <a:r>
+              <a:rPr sz="950" lang="zh-TW" dirty="0">
                 <a:solidFill>
                   <a:srgbClr val="000000"/>
                 </a:solidFill>
@@ -5881,15 +5881,15 @@
           </a:p>
           <a:p>
             <a:pPr algn="l">
-              <a:lnSpc>
-                <a:spcPct val="115000"/>
-              </a:lnSpc>
-              <a:spcAft>
-                <a:spcPts val="500"/>
-              </a:spcAft>
-            </a:pPr>
-            <a:r>
-              <a:rPr sz="1000" lang="zh-TW" dirty="0">
+              <a:spcBef>
+                <a:spcPts val="0"/>
+              </a:spcBef>
+              <a:spcAft>
+                <a:spcPts val="158"/>
+              </a:spcAft>
+            </a:pPr>
+            <a:r>
+              <a:rPr sz="950" lang="zh-TW" dirty="0">
                 <a:solidFill>
                   <a:srgbClr val="000000"/>
                 </a:solidFill>
@@ -5900,7 +5900,7 @@
               <a:t>好，現在看最後一行，這一行規格表上沒有，是我們用上面那些數字算出來的：</a:t>
             </a:r>
             <a:r>
-              <a:rPr sz="1000" b="1" lang="zh-TW" dirty="0">
+              <a:rPr sz="950" b="1" lang="zh-TW" dirty="0">
                 <a:solidFill>
                   <a:srgbClr val="000000"/>
                 </a:solidFill>
@@ -5911,7 +5911,7 @@
               <a:t>同樣一個人站在四十公尺，OS1 身上有九個點，AT128P 有一百二十一個點。</a:t>
             </a:r>
             <a:r>
-              <a:rPr sz="1000" lang="zh-TW" dirty="0">
+              <a:rPr sz="950" lang="zh-TW" dirty="0">
                 <a:solidFill>
                   <a:srgbClr val="000000"/>
                 </a:solidFill>
@@ -5925,15 +5925,15 @@
           </a:p>
           <a:p>
             <a:pPr algn="l">
-              <a:lnSpc>
-                <a:spcPct val="115000"/>
-              </a:lnSpc>
-              <a:spcAft>
-                <a:spcPts val="500"/>
-              </a:spcAft>
-            </a:pPr>
-            <a:r>
-              <a:rPr sz="1000" lang="zh-TW" dirty="0">
+              <a:spcBef>
+                <a:spcPts val="0"/>
+              </a:spcBef>
+              <a:spcAft>
+                <a:spcPts val="158"/>
+              </a:spcAft>
+            </a:pPr>
+            <a:r>
+              <a:rPr sz="950" lang="zh-TW" dirty="0">
                 <a:solidFill>
                   <a:srgbClr val="000000"/>
                 </a:solidFill>
@@ -5947,15 +5947,15 @@
           </a:p>
           <a:p>
             <a:pPr algn="l">
-              <a:lnSpc>
-                <a:spcPct val="115000"/>
-              </a:lnSpc>
-              <a:spcAft>
-                <a:spcPts val="500"/>
-              </a:spcAft>
-            </a:pPr>
-            <a:r>
-              <a:rPr sz="1000" lang="zh-TW" dirty="0">
+              <a:spcBef>
+                <a:spcPts val="0"/>
+              </a:spcBef>
+              <a:spcAft>
+                <a:spcPts val="158"/>
+              </a:spcAft>
+            </a:pPr>
+            <a:r>
+              <a:rPr sz="950" lang="zh-TW" dirty="0">
                 <a:solidFill>
                   <a:srgbClr val="000000"/>
                 </a:solidFill>
@@ -5966,7 +5966,7 @@
               <a:t>這是今天第一個重要的觀念：</a:t>
             </a:r>
             <a:r>
-              <a:rPr sz="1000" b="1" lang="zh-TW" dirty="0">
+              <a:rPr sz="950" b="1" lang="zh-TW" dirty="0">
                 <a:solidFill>
                   <a:srgbClr val="000000"/>
                 </a:solidFill>
@@ -5977,7 +5977,7 @@
               <a:t>規格表上的數字要換算成「我關心的那個場景會怎樣」，才有意義。</a:t>
             </a:r>
             <a:r>
-              <a:rPr sz="1000" lang="zh-TW" dirty="0">
+              <a:rPr sz="950" lang="zh-TW" dirty="0">
                 <a:solidFill>
                   <a:srgbClr val="000000"/>
                 </a:solidFill>
@@ -5991,15 +5991,15 @@
           </a:p>
           <a:p>
             <a:pPr algn="l">
-              <a:lnSpc>
-                <a:spcPct val="115000"/>
-              </a:lnSpc>
-              <a:spcAft>
-                <a:spcPts val="500"/>
-              </a:spcAft>
-            </a:pPr>
-            <a:r>
-              <a:rPr sz="1000" lang="zh-TW" dirty="0">
+              <a:spcBef>
+                <a:spcPts val="0"/>
+              </a:spcBef>
+              <a:spcAft>
+                <a:spcPts val="158"/>
+              </a:spcAft>
+            </a:pPr>
+            <a:r>
+              <a:rPr sz="950" lang="zh-TW" dirty="0">
                 <a:solidFill>
                   <a:srgbClr val="000000"/>
                 </a:solidFill>
@@ -6033,11 +6033,11 @@
           <a:lstStyle/>
           <a:p>
             <a:pPr algn="l">
-              <a:lnSpc>
-                <a:spcPct val="115000"/>
-              </a:lnSpc>
-              <a:spcAft>
-                <a:spcPts val="500"/>
+              <a:spcBef>
+                <a:spcPts val="0"/>
+              </a:spcBef>
+              <a:spcAft>
+                <a:spcPts val="167"/>
               </a:spcAft>
             </a:pPr>
             <a:r>
@@ -6112,15 +6112,15 @@
           <a:lstStyle/>
           <a:p>
             <a:pPr algn="l">
-              <a:lnSpc>
-                <a:spcPct val="115000"/>
-              </a:lnSpc>
-              <a:spcAft>
-                <a:spcPts val="500"/>
-              </a:spcAft>
-            </a:pPr>
-            <a:r>
-              <a:rPr sz="1000" b="1" lang="zh-TW" dirty="0">
+              <a:spcBef>
+                <a:spcPts val="0"/>
+              </a:spcBef>
+              <a:spcAft>
+                <a:spcPts val="133"/>
+              </a:spcAft>
+            </a:pPr>
+            <a:r>
+              <a:rPr sz="800" b="1" lang="zh-TW" dirty="0">
                 <a:solidFill>
                   <a:srgbClr val="000000"/>
                 </a:solidFill>
@@ -6131,7 +6131,7 @@
               <a:t>▍這一張要做什麼</a:t>
             </a:r>
             <a:r>
-              <a:rPr sz="1000" lang="zh-TW" dirty="0">
+              <a:rPr sz="800" lang="zh-TW" dirty="0">
                 <a:solidFill>
                   <a:srgbClr val="000000"/>
                 </a:solidFill>
@@ -6145,15 +6145,15 @@
           </a:p>
           <a:p>
             <a:pPr algn="l">
-              <a:lnSpc>
-                <a:spcPct val="115000"/>
-              </a:lnSpc>
-              <a:spcAft>
-                <a:spcPts val="500"/>
-              </a:spcAft>
-            </a:pPr>
-            <a:r>
-              <a:rPr sz="1000" lang="zh-TW" dirty="0">
+              <a:spcBef>
+                <a:spcPts val="0"/>
+              </a:spcBef>
+              <a:spcAft>
+                <a:spcPts val="133"/>
+              </a:spcAft>
+            </a:pPr>
+            <a:r>
+              <a:rPr sz="800" lang="zh-TW" dirty="0">
                 <a:solidFill>
                   <a:srgbClr val="000000"/>
                 </a:solidFill>
@@ -6167,15 +6167,15 @@
           </a:p>
           <a:p>
             <a:pPr algn="l">
-              <a:lnSpc>
-                <a:spcPct val="115000"/>
-              </a:lnSpc>
-              <a:spcAft>
-                <a:spcPts val="500"/>
-              </a:spcAft>
-            </a:pPr>
-            <a:r>
-              <a:rPr sz="1000" b="1" lang="zh-TW" dirty="0">
+              <a:spcBef>
+                <a:spcPts val="0"/>
+              </a:spcBef>
+              <a:spcAft>
+                <a:spcPts val="133"/>
+              </a:spcAft>
+            </a:pPr>
+            <a:r>
+              <a:rPr sz="800" b="1" lang="zh-TW" dirty="0">
                 <a:solidFill>
                   <a:srgbClr val="000000"/>
                 </a:solidFill>
@@ -6186,7 +6186,7 @@
               <a:t>▍畫面上圈這裡</a:t>
             </a:r>
             <a:r>
-              <a:rPr sz="1000" lang="zh-TW" dirty="0">
+              <a:rPr sz="800" lang="zh-TW" dirty="0">
                 <a:solidFill>
                   <a:srgbClr val="000000"/>
                 </a:solidFill>
@@ -6200,15 +6200,15 @@
           </a:p>
           <a:p>
             <a:pPr algn="l">
-              <a:lnSpc>
-                <a:spcPct val="115000"/>
-              </a:lnSpc>
-              <a:spcAft>
-                <a:spcPts val="500"/>
-              </a:spcAft>
-            </a:pPr>
-            <a:r>
-              <a:rPr sz="1000" lang="zh-TW" dirty="0">
+              <a:spcBef>
+                <a:spcPts val="0"/>
+              </a:spcBef>
+              <a:spcAft>
+                <a:spcPts val="133"/>
+              </a:spcAft>
+            </a:pPr>
+            <a:r>
+              <a:rPr sz="800" lang="zh-TW" dirty="0">
                 <a:solidFill>
                   <a:srgbClr val="000000"/>
                 </a:solidFill>
@@ -6222,15 +6222,15 @@
           </a:p>
           <a:p>
             <a:pPr algn="l">
-              <a:lnSpc>
-                <a:spcPct val="115000"/>
-              </a:lnSpc>
-              <a:spcAft>
-                <a:spcPts val="500"/>
-              </a:spcAft>
-            </a:pPr>
-            <a:r>
-              <a:rPr sz="1000" b="1" lang="zh-TW" dirty="0">
+              <a:spcBef>
+                <a:spcPts val="0"/>
+              </a:spcBef>
+              <a:spcAft>
+                <a:spcPts val="133"/>
+              </a:spcAft>
+            </a:pPr>
+            <a:r>
+              <a:rPr sz="800" b="1" lang="zh-TW" dirty="0">
                 <a:solidFill>
                   <a:srgbClr val="000000"/>
                 </a:solidFill>
@@ -6241,7 +6241,7 @@
               <a:t>▍以下照著唸</a:t>
             </a:r>
             <a:r>
-              <a:rPr sz="1000" lang="zh-TW" dirty="0">
+              <a:rPr sz="800" lang="zh-TW" dirty="0">
                 <a:solidFill>
                   <a:srgbClr val="000000"/>
                 </a:solidFill>
@@ -6255,15 +6255,15 @@
           </a:p>
           <a:p>
             <a:pPr algn="l">
-              <a:lnSpc>
-                <a:spcPct val="115000"/>
-              </a:lnSpc>
-              <a:spcAft>
-                <a:spcPts val="500"/>
-              </a:spcAft>
-            </a:pPr>
-            <a:r>
-              <a:rPr sz="1000" lang="zh-TW" dirty="0">
+              <a:spcBef>
+                <a:spcPts val="0"/>
+              </a:spcBef>
+              <a:spcAft>
+                <a:spcPts val="133"/>
+              </a:spcAft>
+            </a:pPr>
+            <a:r>
+              <a:rPr sz="800" lang="zh-TW" dirty="0">
                 <a:solidFill>
                   <a:srgbClr val="000000"/>
                 </a:solidFill>
@@ -6277,15 +6277,15 @@
           </a:p>
           <a:p>
             <a:pPr algn="l">
-              <a:lnSpc>
-                <a:spcPct val="115000"/>
-              </a:lnSpc>
-              <a:spcAft>
-                <a:spcPts val="500"/>
-              </a:spcAft>
-            </a:pPr>
-            <a:r>
-              <a:rPr sz="1000" lang="zh-TW" dirty="0">
+              <a:spcBef>
+                <a:spcPts val="0"/>
+              </a:spcBef>
+              <a:spcAft>
+                <a:spcPts val="133"/>
+              </a:spcAft>
+            </a:pPr>
+            <a:r>
+              <a:rPr sz="800" lang="zh-TW" dirty="0">
                 <a:solidFill>
                   <a:srgbClr val="000000"/>
                 </a:solidFill>
@@ -6296,7 +6296,7 @@
               <a:t>規格表上寫 </a:t>
             </a:r>
             <a:r>
-              <a:rPr sz="1000" b="1" lang="zh-TW" dirty="0">
+              <a:rPr sz="800" b="1" lang="zh-TW" dirty="0">
                 <a:solidFill>
                   <a:srgbClr val="000000"/>
                 </a:solidFill>
@@ -6307,7 +6307,7 @@
               <a:t>Rotation Rate，10 or 20 Hz</a:t>
             </a:r>
             <a:r>
-              <a:rPr sz="1000" lang="zh-TW" dirty="0">
+              <a:rPr sz="800" lang="zh-TW" dirty="0">
                 <a:solidFill>
                   <a:srgbClr val="000000"/>
                 </a:solidFill>
@@ -6321,15 +6321,15 @@
           </a:p>
           <a:p>
             <a:pPr algn="l">
-              <a:lnSpc>
-                <a:spcPct val="115000"/>
-              </a:lnSpc>
-              <a:spcAft>
-                <a:spcPts val="500"/>
-              </a:spcAft>
-            </a:pPr>
-            <a:r>
-              <a:rPr sz="1000" lang="zh-TW" dirty="0">
+              <a:spcBef>
+                <a:spcPts val="0"/>
+              </a:spcBef>
+              <a:spcAft>
+                <a:spcPts val="133"/>
+              </a:spcAft>
+            </a:pPr>
+            <a:r>
+              <a:rPr sz="800" lang="zh-TW" dirty="0">
                 <a:solidFill>
                   <a:srgbClr val="000000"/>
                 </a:solidFill>
@@ -6340,7 +6340,7 @@
               <a:t>十赫茲就是一秒鐘轉十圈，也就是</a:t>
             </a:r>
             <a:r>
-              <a:rPr sz="1000" b="1" lang="zh-TW" dirty="0">
+              <a:rPr sz="800" b="1" lang="zh-TW" dirty="0">
                 <a:solidFill>
                   <a:srgbClr val="000000"/>
                 </a:solidFill>
@@ -6351,7 +6351,7 @@
               <a:t>每一百毫秒給你一張畫面</a:t>
             </a:r>
             <a:r>
-              <a:rPr sz="1000" lang="zh-TW" dirty="0">
+              <a:rPr sz="800" lang="zh-TW" dirty="0">
                 <a:solidFill>
                   <a:srgbClr val="000000"/>
                 </a:solidFill>
@@ -6365,15 +6365,15 @@
           </a:p>
           <a:p>
             <a:pPr algn="l">
-              <a:lnSpc>
-                <a:spcPct val="115000"/>
-              </a:lnSpc>
-              <a:spcAft>
-                <a:spcPts val="500"/>
-              </a:spcAft>
-            </a:pPr>
-            <a:r>
-              <a:rPr sz="1000" lang="zh-TW" dirty="0">
+              <a:spcBef>
+                <a:spcPts val="0"/>
+              </a:spcBef>
+              <a:spcAft>
+                <a:spcPts val="133"/>
+              </a:spcAft>
+            </a:pPr>
+            <a:r>
+              <a:rPr sz="800" lang="zh-TW" dirty="0">
                 <a:solidFill>
                   <a:srgbClr val="000000"/>
                 </a:solidFill>
@@ -6387,15 +6387,15 @@
           </a:p>
           <a:p>
             <a:pPr algn="l">
-              <a:lnSpc>
-                <a:spcPct val="115000"/>
-              </a:lnSpc>
-              <a:spcAft>
-                <a:spcPts val="500"/>
-              </a:spcAft>
-            </a:pPr>
-            <a:r>
-              <a:rPr sz="1000" lang="zh-TW" dirty="0">
+              <a:spcBef>
+                <a:spcPts val="0"/>
+              </a:spcBef>
+              <a:spcAft>
+                <a:spcPts val="133"/>
+              </a:spcAft>
+            </a:pPr>
+            <a:r>
+              <a:rPr sz="800" lang="zh-TW" dirty="0">
                 <a:solidFill>
                   <a:srgbClr val="000000"/>
                 </a:solidFill>
@@ -6406,7 +6406,7 @@
               <a:t>時速四十公里，換成每秒是十一點一公尺。一百毫秒就是零點一秒，所以在兩張畫面之間，車子已經往前跑了</a:t>
             </a:r>
             <a:r>
-              <a:rPr sz="1000" b="1" lang="zh-TW" dirty="0">
+              <a:rPr sz="800" b="1" lang="zh-TW" dirty="0">
                 <a:solidFill>
                   <a:srgbClr val="000000"/>
                 </a:solidFill>
@@ -6417,7 +6417,7 @@
               <a:t>一點一公尺</a:t>
             </a:r>
             <a:r>
-              <a:rPr sz="1000" lang="zh-TW" dirty="0">
+              <a:rPr sz="800" lang="zh-TW" dirty="0">
                 <a:solidFill>
                   <a:srgbClr val="000000"/>
                 </a:solidFill>
@@ -6431,15 +6431,15 @@
           </a:p>
           <a:p>
             <a:pPr algn="l">
-              <a:lnSpc>
-                <a:spcPct val="115000"/>
-              </a:lnSpc>
-              <a:spcAft>
-                <a:spcPts val="500"/>
-              </a:spcAft>
-            </a:pPr>
-            <a:r>
-              <a:rPr sz="1000" lang="zh-TW" dirty="0">
+              <a:spcBef>
+                <a:spcPts val="0"/>
+              </a:spcBef>
+              <a:spcAft>
+                <a:spcPts val="133"/>
+              </a:spcAft>
+            </a:pPr>
+            <a:r>
+              <a:rPr sz="800" lang="zh-TW" dirty="0">
                 <a:solidFill>
                   <a:srgbClr val="000000"/>
                 </a:solidFill>
@@ -6453,15 +6453,15 @@
           </a:p>
           <a:p>
             <a:pPr algn="l">
-              <a:lnSpc>
-                <a:spcPct val="115000"/>
-              </a:lnSpc>
-              <a:spcAft>
-                <a:spcPts val="500"/>
-              </a:spcAft>
-            </a:pPr>
-            <a:r>
-              <a:rPr sz="1000" lang="zh-TW" dirty="0">
+              <a:spcBef>
+                <a:spcPts val="0"/>
+              </a:spcBef>
+              <a:spcAft>
+                <a:spcPts val="133"/>
+              </a:spcAft>
+            </a:pPr>
+            <a:r>
+              <a:rPr sz="800" lang="zh-TW" dirty="0">
                 <a:solidFill>
                   <a:srgbClr val="000000"/>
                 </a:solidFill>
@@ -6472,7 +6472,7 @@
               <a:t>換到高速公路更可怕。時速一百，每秒二十七點八公尺，零點一秒就是</a:t>
             </a:r>
             <a:r>
-              <a:rPr sz="1000" b="1" lang="zh-TW" dirty="0">
+              <a:rPr sz="800" b="1" lang="zh-TW" dirty="0">
                 <a:solidFill>
                   <a:srgbClr val="000000"/>
                 </a:solidFill>
@@ -6483,7 +6483,7 @@
               <a:t>兩點八公尺</a:t>
             </a:r>
             <a:r>
-              <a:rPr sz="1000" lang="zh-TW" dirty="0">
+              <a:rPr sz="800" lang="zh-TW" dirty="0">
                 <a:solidFill>
                   <a:srgbClr val="000000"/>
                 </a:solidFill>
@@ -6497,15 +6497,15 @@
           </a:p>
           <a:p>
             <a:pPr algn="l">
-              <a:lnSpc>
-                <a:spcPct val="115000"/>
-              </a:lnSpc>
-              <a:spcAft>
-                <a:spcPts val="500"/>
-              </a:spcAft>
-            </a:pPr>
-            <a:r>
-              <a:rPr sz="1000" lang="zh-TW" dirty="0">
+              <a:spcBef>
+                <a:spcPts val="0"/>
+              </a:spcBef>
+              <a:spcAft>
+                <a:spcPts val="133"/>
+              </a:spcAft>
+            </a:pPr>
+            <a:r>
+              <a:rPr sz="800" lang="zh-TW" dirty="0">
                 <a:solidFill>
                   <a:srgbClr val="000000"/>
                 </a:solidFill>
@@ -6516,7 +6516,7 @@
               <a:t>所以更新率這一行，講的是</a:t>
             </a:r>
             <a:r>
-              <a:rPr sz="1000" b="1" lang="zh-TW" dirty="0">
+              <a:rPr sz="800" b="1" lang="zh-TW" dirty="0">
                 <a:solidFill>
                   <a:srgbClr val="000000"/>
                 </a:solidFill>
@@ -6527,7 +6527,7 @@
               <a:t>你晚多久才知道</a:t>
             </a:r>
             <a:r>
-              <a:rPr sz="1000" lang="zh-TW" dirty="0">
+              <a:rPr sz="800" lang="zh-TW" dirty="0">
                 <a:solidFill>
                   <a:srgbClr val="000000"/>
                 </a:solidFill>
@@ -6541,15 +6541,15 @@
           </a:p>
           <a:p>
             <a:pPr algn="l">
-              <a:lnSpc>
-                <a:spcPct val="115000"/>
-              </a:lnSpc>
-              <a:spcAft>
-                <a:spcPts val="500"/>
-              </a:spcAft>
-            </a:pPr>
-            <a:r>
-              <a:rPr sz="1000" lang="zh-TW" dirty="0">
+              <a:spcBef>
+                <a:spcPts val="0"/>
+              </a:spcBef>
+              <a:spcAft>
+                <a:spcPts val="133"/>
+              </a:spcAft>
+            </a:pPr>
+            <a:r>
+              <a:rPr sz="800" lang="zh-TW" dirty="0">
                 <a:solidFill>
                   <a:srgbClr val="000000"/>
                 </a:solidFill>
@@ -6563,15 +6563,15 @@
           </a:p>
           <a:p>
             <a:pPr algn="l">
-              <a:lnSpc>
-                <a:spcPct val="115000"/>
-              </a:lnSpc>
-              <a:spcAft>
-                <a:spcPts val="500"/>
-              </a:spcAft>
-            </a:pPr>
-            <a:r>
-              <a:rPr sz="1000" b="1" lang="zh-TW" dirty="0">
+              <a:spcBef>
+                <a:spcPts val="0"/>
+              </a:spcBef>
+              <a:spcAft>
+                <a:spcPts val="133"/>
+              </a:spcAft>
+            </a:pPr>
+            <a:r>
+              <a:rPr sz="800" b="1" lang="zh-TW" dirty="0">
                 <a:solidFill>
                   <a:srgbClr val="000000"/>
                 </a:solidFill>
@@ -6582,7 +6582,7 @@
               <a:t>又是一個交換。</a:t>
             </a:r>
             <a:r>
-              <a:rPr sz="1000" lang="zh-TW" dirty="0">
+              <a:rPr sz="800" lang="zh-TW" dirty="0">
                 <a:solidFill>
                   <a:srgbClr val="000000"/>
                 </a:solidFill>
@@ -6596,15 +6596,15 @@
           </a:p>
           <a:p>
             <a:pPr algn="l">
-              <a:lnSpc>
-                <a:spcPct val="115000"/>
-              </a:lnSpc>
-              <a:spcAft>
-                <a:spcPts val="500"/>
-              </a:spcAft>
-            </a:pPr>
-            <a:r>
-              <a:rPr sz="1000" lang="zh-TW" dirty="0">
+              <a:spcBef>
+                <a:spcPts val="0"/>
+              </a:spcBef>
+              <a:spcAft>
+                <a:spcPts val="133"/>
+              </a:spcAft>
+            </a:pPr>
+            <a:r>
+              <a:rPr sz="800" lang="zh-TW" dirty="0">
                 <a:solidFill>
                   <a:srgbClr val="000000"/>
                 </a:solidFill>
@@ -6638,11 +6638,11 @@
           <a:lstStyle/>
           <a:p>
             <a:pPr algn="l">
-              <a:lnSpc>
-                <a:spcPct val="115000"/>
-              </a:lnSpc>
-              <a:spcAft>
-                <a:spcPts val="500"/>
+              <a:spcBef>
+                <a:spcPts val="0"/>
+              </a:spcBef>
+              <a:spcAft>
+                <a:spcPts val="167"/>
               </a:spcAft>
             </a:pPr>
             <a:r>
@@ -6717,11 +6717,11 @@
           <a:lstStyle/>
           <a:p>
             <a:pPr algn="l">
-              <a:lnSpc>
-                <a:spcPct val="115000"/>
-              </a:lnSpc>
-              <a:spcAft>
-                <a:spcPts val="600"/>
+              <a:spcBef>
+                <a:spcPts val="0"/>
+              </a:spcBef>
+              <a:spcAft>
+                <a:spcPts val="200"/>
               </a:spcAft>
             </a:pPr>
             <a:r>
@@ -6750,11 +6750,11 @@
           </a:p>
           <a:p>
             <a:pPr algn="l">
-              <a:lnSpc>
-                <a:spcPct val="115000"/>
-              </a:lnSpc>
-              <a:spcAft>
-                <a:spcPts val="600"/>
+              <a:spcBef>
+                <a:spcPts val="0"/>
+              </a:spcBef>
+              <a:spcAft>
+                <a:spcPts val="200"/>
               </a:spcAft>
             </a:pPr>
             <a:r>
@@ -6772,11 +6772,11 @@
           </a:p>
           <a:p>
             <a:pPr algn="l">
-              <a:lnSpc>
-                <a:spcPct val="115000"/>
-              </a:lnSpc>
-              <a:spcAft>
-                <a:spcPts val="600"/>
+              <a:spcBef>
+                <a:spcPts val="0"/>
+              </a:spcBef>
+              <a:spcAft>
+                <a:spcPts val="200"/>
               </a:spcAft>
             </a:pPr>
             <a:r>
@@ -6805,11 +6805,11 @@
           </a:p>
           <a:p>
             <a:pPr algn="l">
-              <a:lnSpc>
-                <a:spcPct val="115000"/>
-              </a:lnSpc>
-              <a:spcAft>
-                <a:spcPts val="600"/>
+              <a:spcBef>
+                <a:spcPts val="0"/>
+              </a:spcBef>
+              <a:spcAft>
+                <a:spcPts val="200"/>
               </a:spcAft>
             </a:pPr>
             <a:r>
@@ -6827,11 +6827,11 @@
           </a:p>
           <a:p>
             <a:pPr algn="l">
-              <a:lnSpc>
-                <a:spcPct val="115000"/>
-              </a:lnSpc>
-              <a:spcAft>
-                <a:spcPts val="600"/>
+              <a:spcBef>
+                <a:spcPts val="0"/>
+              </a:spcBef>
+              <a:spcAft>
+                <a:spcPts val="200"/>
               </a:spcAft>
             </a:pPr>
             <a:r>
@@ -6860,11 +6860,11 @@
           </a:p>
           <a:p>
             <a:pPr algn="l">
-              <a:lnSpc>
-                <a:spcPct val="115000"/>
-              </a:lnSpc>
-              <a:spcAft>
-                <a:spcPts val="600"/>
+              <a:spcBef>
+                <a:spcPts val="0"/>
+              </a:spcBef>
+              <a:spcAft>
+                <a:spcPts val="200"/>
               </a:spcAft>
             </a:pPr>
             <a:r>
@@ -6902,11 +6902,11 @@
           <a:lstStyle/>
           <a:p>
             <a:pPr algn="l">
-              <a:lnSpc>
-                <a:spcPct val="115000"/>
-              </a:lnSpc>
-              <a:spcAft>
-                <a:spcPts val="500"/>
+              <a:spcBef>
+                <a:spcPts val="0"/>
+              </a:spcBef>
+              <a:spcAft>
+                <a:spcPts val="167"/>
               </a:spcAft>
             </a:pPr>
             <a:r>
@@ -6981,11 +6981,11 @@
           <a:lstStyle/>
           <a:p>
             <a:pPr algn="l">
-              <a:lnSpc>
-                <a:spcPct val="115000"/>
-              </a:lnSpc>
-              <a:spcAft>
-                <a:spcPts val="500"/>
+              <a:spcBef>
+                <a:spcPts val="0"/>
+              </a:spcBef>
+              <a:spcAft>
+                <a:spcPts val="167"/>
               </a:spcAft>
             </a:pPr>
             <a:r>
@@ -7014,11 +7014,11 @@
           </a:p>
           <a:p>
             <a:pPr algn="l">
-              <a:lnSpc>
-                <a:spcPct val="115000"/>
-              </a:lnSpc>
-              <a:spcAft>
-                <a:spcPts val="500"/>
+              <a:spcBef>
+                <a:spcPts val="0"/>
+              </a:spcBef>
+              <a:spcAft>
+                <a:spcPts val="167"/>
               </a:spcAft>
             </a:pPr>
             <a:r>
@@ -7036,11 +7036,11 @@
           </a:p>
           <a:p>
             <a:pPr algn="l">
-              <a:lnSpc>
-                <a:spcPct val="115000"/>
-              </a:lnSpc>
-              <a:spcAft>
-                <a:spcPts val="500"/>
+              <a:spcBef>
+                <a:spcPts val="0"/>
+              </a:spcBef>
+              <a:spcAft>
+                <a:spcPts val="167"/>
               </a:spcAft>
             </a:pPr>
             <a:r>
@@ -7069,11 +7069,11 @@
           </a:p>
           <a:p>
             <a:pPr algn="l">
-              <a:lnSpc>
-                <a:spcPct val="115000"/>
-              </a:lnSpc>
-              <a:spcAft>
-                <a:spcPts val="500"/>
+              <a:spcBef>
+                <a:spcPts val="0"/>
+              </a:spcBef>
+              <a:spcAft>
+                <a:spcPts val="167"/>
               </a:spcAft>
             </a:pPr>
             <a:r>
@@ -7091,11 +7091,11 @@
           </a:p>
           <a:p>
             <a:pPr algn="l">
-              <a:lnSpc>
-                <a:spcPct val="115000"/>
-              </a:lnSpc>
-              <a:spcAft>
-                <a:spcPts val="500"/>
+              <a:spcBef>
+                <a:spcPts val="0"/>
+              </a:spcBef>
+              <a:spcAft>
+                <a:spcPts val="167"/>
               </a:spcAft>
             </a:pPr>
             <a:r>
@@ -7124,11 +7124,11 @@
           </a:p>
           <a:p>
             <a:pPr algn="l">
-              <a:lnSpc>
-                <a:spcPct val="115000"/>
-              </a:lnSpc>
-              <a:spcAft>
-                <a:spcPts val="500"/>
+              <a:spcBef>
+                <a:spcPts val="0"/>
+              </a:spcBef>
+              <a:spcAft>
+                <a:spcPts val="167"/>
               </a:spcAft>
             </a:pPr>
             <a:r>
@@ -7146,11 +7146,11 @@
           </a:p>
           <a:p>
             <a:pPr algn="l">
-              <a:lnSpc>
-                <a:spcPct val="115000"/>
-              </a:lnSpc>
-              <a:spcAft>
-                <a:spcPts val="500"/>
+              <a:spcBef>
+                <a:spcPts val="0"/>
+              </a:spcBef>
+              <a:spcAft>
+                <a:spcPts val="167"/>
               </a:spcAft>
             </a:pPr>
             <a:r>
@@ -7212,11 +7212,11 @@
           </a:p>
           <a:p>
             <a:pPr algn="l">
-              <a:lnSpc>
-                <a:spcPct val="115000"/>
-              </a:lnSpc>
-              <a:spcAft>
-                <a:spcPts val="500"/>
+              <a:spcBef>
+                <a:spcPts val="0"/>
+              </a:spcBef>
+              <a:spcAft>
+                <a:spcPts val="167"/>
               </a:spcAft>
             </a:pPr>
             <a:r>
@@ -7234,11 +7234,11 @@
           </a:p>
           <a:p>
             <a:pPr algn="l">
-              <a:lnSpc>
-                <a:spcPct val="115000"/>
-              </a:lnSpc>
-              <a:spcAft>
-                <a:spcPts val="500"/>
+              <a:spcBef>
+                <a:spcPts val="0"/>
+              </a:spcBef>
+              <a:spcAft>
+                <a:spcPts val="167"/>
               </a:spcAft>
             </a:pPr>
             <a:r>
@@ -7256,11 +7256,11 @@
           </a:p>
           <a:p>
             <a:pPr algn="l">
-              <a:lnSpc>
-                <a:spcPct val="115000"/>
-              </a:lnSpc>
-              <a:spcAft>
-                <a:spcPts val="500"/>
+              <a:spcBef>
+                <a:spcPts val="0"/>
+              </a:spcBef>
+              <a:spcAft>
+                <a:spcPts val="167"/>
               </a:spcAft>
             </a:pPr>
             <a:r>
@@ -7322,11 +7322,11 @@
           </a:p>
           <a:p>
             <a:pPr algn="l">
-              <a:lnSpc>
-                <a:spcPct val="115000"/>
-              </a:lnSpc>
-              <a:spcAft>
-                <a:spcPts val="500"/>
+              <a:spcBef>
+                <a:spcPts val="0"/>
+              </a:spcBef>
+              <a:spcAft>
+                <a:spcPts val="167"/>
               </a:spcAft>
             </a:pPr>
             <a:r>
@@ -7364,11 +7364,11 @@
           <a:lstStyle/>
           <a:p>
             <a:pPr algn="l">
-              <a:lnSpc>
-                <a:spcPct val="115000"/>
-              </a:lnSpc>
-              <a:spcAft>
-                <a:spcPts val="500"/>
+              <a:spcBef>
+                <a:spcPts val="0"/>
+              </a:spcBef>
+              <a:spcAft>
+                <a:spcPts val="167"/>
               </a:spcAft>
             </a:pPr>
             <a:r>

--- a/第五週(10-08)/第五週_第1節_簡報.pptx
+++ b/第五週(10-08)/第五週_第1節_簡報.pptx
@@ -4477,11 +4477,11 @@
                 <a:spcPts val="0"/>
               </a:spcBef>
               <a:spcAft>
-                <a:spcPts val="150"/>
-              </a:spcAft>
-            </a:pPr>
-            <a:r>
-              <a:rPr sz="900" b="1" lang="zh-TW" dirty="0">
+                <a:spcPts val="142"/>
+              </a:spcAft>
+            </a:pPr>
+            <a:r>
+              <a:rPr sz="850" b="1" lang="zh-TW" dirty="0">
                 <a:solidFill>
                   <a:srgbClr val="000000"/>
                 </a:solidFill>
@@ -4492,7 +4492,7 @@
               <a:t>▍這一張要做什麼</a:t>
             </a:r>
             <a:r>
-              <a:rPr sz="900" lang="zh-TW" dirty="0">
+              <a:rPr sz="850" lang="zh-TW" dirty="0">
                 <a:solidFill>
                   <a:srgbClr val="000000"/>
                 </a:solidFill>
@@ -4510,19 +4510,19 @@
                 <a:spcPts val="0"/>
               </a:spcBef>
               <a:spcAft>
-                <a:spcPts val="150"/>
-              </a:spcAft>
-            </a:pPr>
-            <a:r>
-              <a:rPr sz="900" lang="zh-TW" dirty="0">
-                <a:solidFill>
-                  <a:srgbClr val="000000"/>
-                </a:solidFill>
-                <a:latin typeface="Arial Unicode MS"/>
-                <a:ea typeface="Arial Unicode MS"/>
-                <a:cs typeface="Arial Unicode MS"/>
-              </a:rPr>
-              <a:t>第一個真型號 OS1-64。重點是它把點平均灑在一整圈。
+                <a:spcPts val="142"/>
+              </a:spcAft>
+            </a:pPr>
+            <a:r>
+              <a:rPr sz="850" lang="zh-TW" dirty="0">
+                <a:solidFill>
+                  <a:srgbClr val="000000"/>
+                </a:solidFill>
+                <a:latin typeface="Arial Unicode MS"/>
+                <a:ea typeface="Arial Unicode MS"/>
+                <a:cs typeface="Arial Unicode MS"/>
+              </a:rPr>
+              <a:t>第一個真型號 OS1-64。重點是它把點平均灑在一整圈。講解順序照著表由上往下走，不要跳來跳去。
 </a:t>
             </a:r>
           </a:p>
@@ -4532,11 +4532,11 @@
                 <a:spcPts val="0"/>
               </a:spcBef>
               <a:spcAft>
-                <a:spcPts val="150"/>
-              </a:spcAft>
-            </a:pPr>
-            <a:r>
-              <a:rPr sz="900" b="1" lang="zh-TW" dirty="0">
+                <a:spcPts val="142"/>
+              </a:spcAft>
+            </a:pPr>
+            <a:r>
+              <a:rPr sz="850" b="1" lang="zh-TW" dirty="0">
                 <a:solidFill>
                   <a:srgbClr val="000000"/>
                 </a:solidFill>
@@ -4547,7 +4547,7 @@
               <a:t>▍畫面上圈這裡</a:t>
             </a:r>
             <a:r>
-              <a:rPr sz="900" lang="zh-TW" dirty="0">
+              <a:rPr sz="850" lang="zh-TW" dirty="0">
                 <a:solidFill>
                   <a:srgbClr val="000000"/>
                 </a:solidFill>
@@ -4565,19 +4565,19 @@
                 <a:spcPts val="0"/>
               </a:spcBef>
               <a:spcAft>
-                <a:spcPts val="150"/>
-              </a:spcAft>
-            </a:pPr>
-            <a:r>
-              <a:rPr sz="900" lang="zh-TW" dirty="0">
-                <a:solidFill>
-                  <a:srgbClr val="000000"/>
-                </a:solidFill>
-                <a:latin typeface="Arial Unicode MS"/>
-                <a:ea typeface="Arial Unicode MS"/>
-                <a:cs typeface="Arial Unicode MS"/>
-              </a:rPr>
-              <a:t>在左邊真表上圈三行：Vertical Resolution、Field of View、Range（10%）。每圈一行停一下，對到右邊那個滑桿。
+                <a:spcPts val="142"/>
+              </a:spcAft>
+            </a:pPr>
+            <a:r>
+              <a:rPr sz="850" lang="zh-TW" dirty="0">
+                <a:solidFill>
+                  <a:srgbClr val="000000"/>
+                </a:solidFill>
+                <a:latin typeface="Arial Unicode MS"/>
+                <a:ea typeface="Arial Unicode MS"/>
+                <a:cs typeface="Arial Unicode MS"/>
+              </a:rPr>
+              <a:t>左表由上往下圈：第 1、2 行兩個 Range（圈出 80% 與 10% 的差別）、第 4 行 Vertical Resolution、最後一行 Field of View。第 3、5、6 行要明講「今天跳過」。
 </a:t>
             </a:r>
           </a:p>
@@ -4587,11 +4587,11 @@
                 <a:spcPts val="0"/>
               </a:spcBef>
               <a:spcAft>
-                <a:spcPts val="150"/>
-              </a:spcAft>
-            </a:pPr>
-            <a:r>
-              <a:rPr sz="900" b="1" lang="zh-TW" dirty="0">
+                <a:spcPts val="142"/>
+              </a:spcAft>
+            </a:pPr>
+            <a:r>
+              <a:rPr sz="850" b="1" lang="zh-TW" dirty="0">
                 <a:solidFill>
                   <a:srgbClr val="000000"/>
                 </a:solidFill>
@@ -4602,7 +4602,7 @@
               <a:t>▍以下照著唸</a:t>
             </a:r>
             <a:r>
-              <a:rPr sz="900" lang="zh-TW" dirty="0">
+              <a:rPr sz="850" lang="zh-TW" dirty="0">
                 <a:solidFill>
                   <a:srgbClr val="000000"/>
                 </a:solidFill>
@@ -4620,22 +4620,22 @@
                 <a:spcPts val="0"/>
               </a:spcBef>
               <a:spcAft>
-                <a:spcPts val="150"/>
-              </a:spcAft>
-            </a:pPr>
-            <a:r>
-              <a:rPr sz="900" lang="zh-TW" dirty="0">
-                <a:solidFill>
-                  <a:srgbClr val="000000"/>
-                </a:solidFill>
-                <a:latin typeface="Arial Unicode MS"/>
-                <a:ea typeface="Arial Unicode MS"/>
-                <a:cs typeface="Arial Unicode MS"/>
-              </a:rPr>
-              <a:t>請大家在工具上選第一個型號，Ouster OS1-64。這是一顆</a:t>
-            </a:r>
-            <a:r>
-              <a:rPr sz="900" b="1" lang="zh-TW" dirty="0">
+                <a:spcPts val="142"/>
+              </a:spcAft>
+            </a:pPr>
+            <a:r>
+              <a:rPr sz="850" lang="zh-TW" dirty="0">
+                <a:solidFill>
+                  <a:srgbClr val="000000"/>
+                </a:solidFill>
+                <a:latin typeface="Arial Unicode MS"/>
+                <a:ea typeface="Arial Unicode MS"/>
+                <a:cs typeface="Arial Unicode MS"/>
+              </a:rPr>
+              <a:t>請大家在工具上選第一個型號，Ouster OS1-64——</a:t>
+            </a:r>
+            <a:r>
+              <a:rPr sz="850" b="1" lang="zh-TW" dirty="0">
                 <a:solidFill>
                   <a:srgbClr val="000000"/>
                 </a:solidFill>
@@ -4646,15 +4646,15 @@
               <a:t>旋轉式</a:t>
             </a:r>
             <a:r>
-              <a:rPr sz="900" lang="zh-TW" dirty="0">
-                <a:solidFill>
-                  <a:srgbClr val="000000"/>
-                </a:solidFill>
-                <a:latin typeface="Arial Unicode MS"/>
-                <a:ea typeface="Arial Unicode MS"/>
-                <a:cs typeface="Arial Unicode MS"/>
-              </a:rPr>
-              <a:t>的光達，車頂上會轉的那一種，第三週影片裡看過。
+              <a:rPr sz="850" lang="zh-TW" dirty="0">
+                <a:solidFill>
+                  <a:srgbClr val="000000"/>
+                </a:solidFill>
+                <a:latin typeface="Arial Unicode MS"/>
+                <a:ea typeface="Arial Unicode MS"/>
+                <a:cs typeface="Arial Unicode MS"/>
+              </a:rPr>
+              <a:t>的光達，車頂上會轉的那一種，第三週影片裡看過。左邊這張是它 datasheet 上的 OPTICAL PERFORMANCE，一共七行，我們今天只用其中三行，從上往下看。
 </a:t>
             </a:r>
           </a:p>
@@ -4664,19 +4664,74 @@
                 <a:spcPts val="0"/>
               </a:spcBef>
               <a:spcAft>
-                <a:spcPts val="150"/>
-              </a:spcAft>
-            </a:pPr>
-            <a:r>
-              <a:rPr sz="900" lang="zh-TW" dirty="0">
-                <a:solidFill>
-                  <a:srgbClr val="000000"/>
-                </a:solidFill>
-                <a:latin typeface="Arial Unicode MS"/>
-                <a:ea typeface="Arial Unicode MS"/>
-                <a:cs typeface="Arial Unicode MS"/>
-              </a:rPr>
-              <a:t>現在看規格表，我們找三行。
+                <a:spcPts val="142"/>
+              </a:spcAft>
+            </a:pPr>
+            <a:r>
+              <a:rPr sz="850" b="1" lang="zh-TW" dirty="0">
+                <a:solidFill>
+                  <a:srgbClr val="000000"/>
+                </a:solidFill>
+                <a:latin typeface="Arial Unicode MS"/>
+                <a:ea typeface="Arial Unicode MS"/>
+                <a:cs typeface="Arial Unicode MS"/>
+              </a:rPr>
+              <a:t>最上面兩行都叫 Range</a:t>
+            </a:r>
+            <a:r>
+              <a:rPr sz="850" lang="zh-TW" dirty="0">
+                <a:solidFill>
+                  <a:srgbClr val="000000"/>
+                </a:solidFill>
+                <a:latin typeface="Arial Unicode MS"/>
+                <a:ea typeface="Arial Unicode MS"/>
+                <a:cs typeface="Arial Unicode MS"/>
+              </a:rPr>
+              <a:t>，測距。同一個東西為什麼寫兩次？因為括號裡不一樣：第一行是 80%，第二行是 10%。今天先看第二行的 </a:t>
+            </a:r>
+            <a:r>
+              <a:rPr sz="850" b="1" lang="zh-TW" dirty="0">
+                <a:solidFill>
+                  <a:srgbClr val="000000"/>
+                </a:solidFill>
+                <a:latin typeface="Arial Unicode MS"/>
+                <a:ea typeface="Arial Unicode MS"/>
+                <a:cs typeface="Arial Unicode MS"/>
+              </a:rPr>
+              <a:t>90 公尺</a:t>
+            </a:r>
+            <a:r>
+              <a:rPr sz="850" lang="zh-TW" dirty="0">
+                <a:solidFill>
+                  <a:srgbClr val="000000"/>
+                </a:solidFill>
+                <a:latin typeface="Arial Unicode MS"/>
+                <a:ea typeface="Arial Unicode MS"/>
+                <a:cs typeface="Arial Unicode MS"/>
+              </a:rPr>
+              <a:t>。這一行就是上禮拜那條</a:t>
+            </a:r>
+            <a:r>
+              <a:rPr sz="850" b="1" lang="zh-TW" dirty="0">
+                <a:solidFill>
+                  <a:srgbClr val="000000"/>
+                </a:solidFill>
+                <a:latin typeface="Arial Unicode MS"/>
+                <a:ea typeface="Arial Unicode MS"/>
+                <a:cs typeface="Arial Unicode MS"/>
+              </a:rPr>
+              <a:t>射線長度</a:t>
+            </a:r>
+            <a:r>
+              <a:rPr sz="850" lang="zh-TW" dirty="0">
+                <a:solidFill>
+                  <a:srgbClr val="000000"/>
+                </a:solidFill>
+                <a:latin typeface="Arial Unicode MS"/>
+                <a:ea typeface="Arial Unicode MS"/>
+                <a:cs typeface="Arial Unicode MS"/>
+              </a:rPr>
+              <a:t>的滑桿。
 </a:t>
             </a:r>
           </a:p>
@@ -4686,33 +4741,55 @@
                 <a:spcPts val="0"/>
               </a:spcBef>
               <a:spcAft>
-                <a:spcPts val="150"/>
-              </a:spcAft>
-            </a:pPr>
-            <a:r>
-              <a:rPr sz="900" b="1" lang="zh-TW" dirty="0">
-                <a:solidFill>
-                  <a:srgbClr val="000000"/>
-                </a:solidFill>
-                <a:latin typeface="Arial Unicode MS"/>
-                <a:ea typeface="Arial Unicode MS"/>
-                <a:cs typeface="Arial Unicode MS"/>
-              </a:rPr>
-              <a:t>第一行，Vertical Resolution，垂直解析度。</a:t>
-            </a:r>
-            <a:r>
-              <a:rPr sz="900" lang="zh-TW" dirty="0">
-                <a:solidFill>
-                  <a:srgbClr val="000000"/>
-                </a:solidFill>
-                <a:latin typeface="Arial Unicode MS"/>
-                <a:ea typeface="Arial Unicode MS"/>
-                <a:cs typeface="Arial Unicode MS"/>
-              </a:rPr>
-              <a:t>上面寫 32、64、128 channels。Channel 中文叫通道，也叫線束。這就是上禮拜那條</a:t>
-            </a:r>
-            <a:r>
-              <a:rPr sz="900" b="1" lang="zh-TW" dirty="0">
+                <a:spcPts val="142"/>
+              </a:spcAft>
+            </a:pPr>
+            <a:r>
+              <a:rPr sz="850" lang="zh-TW" dirty="0">
+                <a:solidFill>
+                  <a:srgbClr val="000000"/>
+                </a:solidFill>
+                <a:latin typeface="Arial Unicode MS"/>
+                <a:ea typeface="Arial Unicode MS"/>
+                <a:cs typeface="Arial Unicode MS"/>
+              </a:rPr>
+              <a:t>第三行 Minimum Range 是「最近能看多近」，今天用不到，跳過。
+</a:t>
+            </a:r>
+          </a:p>
+          <a:p>
+            <a:pPr algn="l">
+              <a:spcBef>
+                <a:spcPts val="0"/>
+              </a:spcBef>
+              <a:spcAft>
+                <a:spcPts val="142"/>
+              </a:spcAft>
+            </a:pPr>
+            <a:r>
+              <a:rPr sz="850" b="1" lang="zh-TW" dirty="0">
+                <a:solidFill>
+                  <a:srgbClr val="000000"/>
+                </a:solidFill>
+                <a:latin typeface="Arial Unicode MS"/>
+                <a:ea typeface="Arial Unicode MS"/>
+                <a:cs typeface="Arial Unicode MS"/>
+              </a:rPr>
+              <a:t>第四行，Vertical Resolution，垂直解析度</a:t>
+            </a:r>
+            <a:r>
+              <a:rPr sz="850" lang="zh-TW" dirty="0">
+                <a:solidFill>
+                  <a:srgbClr val="000000"/>
+                </a:solidFill>
+                <a:latin typeface="Arial Unicode MS"/>
+                <a:ea typeface="Arial Unicode MS"/>
+                <a:cs typeface="Arial Unicode MS"/>
+              </a:rPr>
+              <a:t>，寫 32、64、128 channels。Channel 中文叫通道，也叫線束。這就是上禮拜那條</a:t>
+            </a:r>
+            <a:r>
+              <a:rPr sz="850" b="1" lang="zh-TW" dirty="0">
                 <a:solidFill>
                   <a:srgbClr val="000000"/>
                 </a:solidFill>
@@ -4723,15 +4800,15 @@
               <a:t>射線數</a:t>
             </a:r>
             <a:r>
-              <a:rPr sz="900" lang="zh-TW" dirty="0">
-                <a:solidFill>
-                  <a:srgbClr val="000000"/>
-                </a:solidFill>
-                <a:latin typeface="Arial Unicode MS"/>
-                <a:ea typeface="Arial Unicode MS"/>
-                <a:cs typeface="Arial Unicode MS"/>
-              </a:rPr>
-              <a:t>的滑桿。你買的時候要選要幾線，線愈多愈貴。
+              <a:rPr sz="850" lang="zh-TW" dirty="0">
+                <a:solidFill>
+                  <a:srgbClr val="000000"/>
+                </a:solidFill>
+                <a:latin typeface="Arial Unicode MS"/>
+                <a:ea typeface="Arial Unicode MS"/>
+                <a:cs typeface="Arial Unicode MS"/>
+              </a:rPr>
+              <a:t>的滑桿。買的時候要選幾線，64 線和 128 線價錢差很多。
 </a:t>
             </a:r>
           </a:p>
@@ -4741,30 +4818,19 @@
                 <a:spcPts val="0"/>
               </a:spcBef>
               <a:spcAft>
-                <a:spcPts val="150"/>
-              </a:spcAft>
-            </a:pPr>
-            <a:r>
-              <a:rPr sz="900" b="1" lang="zh-TW" dirty="0">
-                <a:solidFill>
-                  <a:srgbClr val="000000"/>
-                </a:solidFill>
-                <a:latin typeface="Arial Unicode MS"/>
-                <a:ea typeface="Arial Unicode MS"/>
-                <a:cs typeface="Arial Unicode MS"/>
-              </a:rPr>
-              <a:t>第二行，Field of View，視野。</a:t>
-            </a:r>
-            <a:r>
-              <a:rPr sz="900" lang="zh-TW" dirty="0">
-                <a:solidFill>
-                  <a:srgbClr val="000000"/>
-                </a:solidFill>
-                <a:latin typeface="Arial Unicode MS"/>
-                <a:ea typeface="Arial Unicode MS"/>
-                <a:cs typeface="Arial Unicode MS"/>
-              </a:rPr>
-              <a:t>上面寫垂直 42.4 度、水平 360 度。上禮拜我們拉的張角，就是這一行。不過請注意，它的水平是 360 度，因為它會轉一整圈，所以「張角」對這一顆來說只剩垂直方向要選。
+                <a:spcPts val="142"/>
+              </a:spcAft>
+            </a:pPr>
+            <a:r>
+              <a:rPr sz="850" lang="zh-TW" dirty="0">
+                <a:solidFill>
+                  <a:srgbClr val="000000"/>
+                </a:solidFill>
+                <a:latin typeface="Arial Unicode MS"/>
+                <a:ea typeface="Arial Unicode MS"/>
+                <a:cs typeface="Arial Unicode MS"/>
+              </a:rPr>
+              <a:t>第五行 Horizontal Resolution、第六行 Rotation Rate 先跳過，第七張和第十一張會回來講。
 </a:t>
             </a:r>
           </a:p>
@@ -4774,30 +4840,30 @@
                 <a:spcPts val="0"/>
               </a:spcBef>
               <a:spcAft>
-                <a:spcPts val="150"/>
-              </a:spcAft>
-            </a:pPr>
-            <a:r>
-              <a:rPr sz="900" b="1" lang="zh-TW" dirty="0">
-                <a:solidFill>
-                  <a:srgbClr val="000000"/>
-                </a:solidFill>
-                <a:latin typeface="Arial Unicode MS"/>
-                <a:ea typeface="Arial Unicode MS"/>
-                <a:cs typeface="Arial Unicode MS"/>
-              </a:rPr>
-              <a:t>第三行，Range，測距。</a:t>
-            </a:r>
-            <a:r>
-              <a:rPr sz="900" lang="zh-TW" dirty="0">
-                <a:solidFill>
-                  <a:srgbClr val="000000"/>
-                </a:solidFill>
-                <a:latin typeface="Arial Unicode MS"/>
-                <a:ea typeface="Arial Unicode MS"/>
-                <a:cs typeface="Arial Unicode MS"/>
-              </a:rPr>
-              <a:t>上面寫的是 90 公尺。這就是射線長度那條滑桿。
+                <a:spcPts val="142"/>
+              </a:spcAft>
+            </a:pPr>
+            <a:r>
+              <a:rPr sz="850" b="1" lang="zh-TW" dirty="0">
+                <a:solidFill>
+                  <a:srgbClr val="000000"/>
+                </a:solidFill>
+                <a:latin typeface="Arial Unicode MS"/>
+                <a:ea typeface="Arial Unicode MS"/>
+                <a:cs typeface="Arial Unicode MS"/>
+              </a:rPr>
+              <a:t>最後一行，Field of View，視野</a:t>
+            </a:r>
+            <a:r>
+              <a:rPr sz="850" lang="zh-TW" dirty="0">
+                <a:solidFill>
+                  <a:srgbClr val="000000"/>
+                </a:solidFill>
+                <a:latin typeface="Arial Unicode MS"/>
+                <a:ea typeface="Arial Unicode MS"/>
+                <a:cs typeface="Arial Unicode MS"/>
+              </a:rPr>
+              <a:t>，寫垂直 42.4 度、水平 360 度。上禮拜拉的張角就是這一行。不過請注意它的水平是 360 度——它會轉一整圈，所以「張角」對這一顆來說，只剩垂直方向要選。
 </a:t>
             </a:r>
           </a:p>
@@ -4807,19 +4873,41 @@
                 <a:spcPts val="0"/>
               </a:spcBef>
               <a:spcAft>
-                <a:spcPts val="150"/>
-              </a:spcAft>
-            </a:pPr>
-            <a:r>
-              <a:rPr sz="900" lang="zh-TW" dirty="0">
-                <a:solidFill>
-                  <a:srgbClr val="000000"/>
-                </a:solidFill>
-                <a:latin typeface="Arial Unicode MS"/>
-                <a:ea typeface="Arial Unicode MS"/>
-                <a:cs typeface="Arial Unicode MS"/>
-              </a:rPr>
-              <a:t>三個滑桿，三行，都在這裡了。
+                <a:spcPts val="142"/>
+              </a:spcAft>
+            </a:pPr>
+            <a:r>
+              <a:rPr sz="850" lang="zh-TW" dirty="0">
+                <a:solidFill>
+                  <a:srgbClr val="000000"/>
+                </a:solidFill>
+                <a:latin typeface="Arial Unicode MS"/>
+                <a:ea typeface="Arial Unicode MS"/>
+                <a:cs typeface="Arial Unicode MS"/>
+              </a:rPr>
+              <a:t>三個滑桿，三行，都在這張表上了。所以上禮拜各位在模擬器上拉來拉去的那三個東西，不是我編出來的遊戲設定，是</a:t>
+            </a:r>
+            <a:r>
+              <a:rPr sz="850" b="1" lang="zh-TW" dirty="0">
+                <a:solidFill>
+                  <a:srgbClr val="000000"/>
+                </a:solidFill>
+                <a:latin typeface="Arial Unicode MS"/>
+                <a:ea typeface="Arial Unicode MS"/>
+                <a:cs typeface="Arial Unicode MS"/>
+              </a:rPr>
+              <a:t>你真的要花錢去買的規格</a:t>
+            </a:r>
+            <a:r>
+              <a:rPr sz="850" lang="zh-TW" dirty="0">
+                <a:solidFill>
+                  <a:srgbClr val="000000"/>
+                </a:solidFill>
+                <a:latin typeface="Arial Unicode MS"/>
+                <a:ea typeface="Arial Unicode MS"/>
+                <a:cs typeface="Arial Unicode MS"/>
+              </a:rPr>
+              <a:t>。
 </a:t>
             </a:r>
           </a:p>
@@ -4829,85 +4917,41 @@
                 <a:spcPts val="0"/>
               </a:spcBef>
               <a:spcAft>
-                <a:spcPts val="150"/>
-              </a:spcAft>
-            </a:pPr>
-            <a:r>
-              <a:rPr sz="900" lang="zh-TW" dirty="0">
-                <a:solidFill>
-                  <a:srgbClr val="000000"/>
-                </a:solidFill>
-                <a:latin typeface="Arial Unicode MS"/>
-                <a:ea typeface="Arial Unicode MS"/>
-                <a:cs typeface="Arial Unicode MS"/>
-              </a:rPr>
-              <a:t>所以上禮拜各位在模擬器上拉來拉去的那三個東西，不是我編出來的遊戲設定，是</a:t>
-            </a:r>
-            <a:r>
-              <a:rPr sz="900" b="1" lang="zh-TW" dirty="0">
-                <a:solidFill>
-                  <a:srgbClr val="000000"/>
-                </a:solidFill>
-                <a:latin typeface="Arial Unicode MS"/>
-                <a:ea typeface="Arial Unicode MS"/>
-                <a:cs typeface="Arial Unicode MS"/>
-              </a:rPr>
-              <a:t>你真的要花錢去買的規格</a:t>
-            </a:r>
-            <a:r>
-              <a:rPr sz="900" lang="zh-TW" dirty="0">
-                <a:solidFill>
-                  <a:srgbClr val="000000"/>
-                </a:solidFill>
-                <a:latin typeface="Arial Unicode MS"/>
-                <a:ea typeface="Arial Unicode MS"/>
-                <a:cs typeface="Arial Unicode MS"/>
-              </a:rPr>
-              <a:t>。買 64 線和買 128 線，價錢差很多。
-</a:t>
-            </a:r>
-          </a:p>
-          <a:p>
-            <a:pPr algn="l">
-              <a:spcBef>
-                <a:spcPts val="0"/>
-              </a:spcBef>
-              <a:spcAft>
-                <a:spcPts val="150"/>
-              </a:spcAft>
-            </a:pPr>
-            <a:r>
-              <a:rPr sz="900" lang="zh-TW" dirty="0">
-                <a:solidFill>
-                  <a:srgbClr val="000000"/>
-                </a:solidFill>
-                <a:latin typeface="Arial Unicode MS"/>
-                <a:ea typeface="Arial Unicode MS"/>
-                <a:cs typeface="Arial Unicode MS"/>
-              </a:rPr>
-              <a:t>還有一件事現在先記著，等一下第九張我們會回來算：這一行測距寫 90 公尺，但它後面跟了一串英文——</a:t>
-            </a:r>
-            <a:r>
-              <a:rPr sz="900" b="1" lang="zh-TW" dirty="0">
-                <a:solidFill>
-                  <a:srgbClr val="000000"/>
-                </a:solidFill>
-                <a:latin typeface="Arial Unicode MS"/>
-                <a:ea typeface="Arial Unicode MS"/>
-                <a:cs typeface="Arial Unicode MS"/>
-              </a:rPr>
-              <a:t>10% reflectivity</a:t>
-            </a:r>
-            <a:r>
-              <a:rPr sz="900" lang="zh-TW" dirty="0">
-                <a:solidFill>
-                  <a:srgbClr val="000000"/>
-                </a:solidFill>
-                <a:latin typeface="Arial Unicode MS"/>
-                <a:ea typeface="Arial Unicode MS"/>
-                <a:cs typeface="Arial Unicode MS"/>
-              </a:rPr>
-              <a:t>。那串字很重要，先把它圈起來。</a:t>
+                <a:spcPts val="142"/>
+              </a:spcAft>
+            </a:pPr>
+            <a:r>
+              <a:rPr sz="850" lang="zh-TW" dirty="0">
+                <a:solidFill>
+                  <a:srgbClr val="000000"/>
+                </a:solidFill>
+                <a:latin typeface="Arial Unicode MS"/>
+                <a:ea typeface="Arial Unicode MS"/>
+                <a:cs typeface="Arial Unicode MS"/>
+              </a:rPr>
+              <a:t>離開這一張之前，請把第二行 Range 後面那串 </a:t>
+            </a:r>
+            <a:r>
+              <a:rPr sz="850" b="1" lang="zh-TW" dirty="0">
+                <a:solidFill>
+                  <a:srgbClr val="000000"/>
+                </a:solidFill>
+                <a:latin typeface="Arial Unicode MS"/>
+                <a:ea typeface="Arial Unicode MS"/>
+                <a:cs typeface="Arial Unicode MS"/>
+              </a:rPr>
+              <a:t>10% Lambertian reflectivity</a:t>
+            </a:r>
+            <a:r>
+              <a:rPr sz="850" lang="zh-TW" dirty="0">
+                <a:solidFill>
+                  <a:srgbClr val="000000"/>
+                </a:solidFill>
+                <a:latin typeface="Arial Unicode MS"/>
+                <a:ea typeface="Arial Unicode MS"/>
+                <a:cs typeface="Arial Unicode MS"/>
+              </a:rPr>
+              <a:t> 圈起來。那串字等一下第十二張整張都在講它。</a:t>
             </a:r>
           </a:p>
         </p:txBody>
@@ -5061,7 +5105,7 @@
                 <a:ea typeface="Arial Unicode MS"/>
                 <a:cs typeface="Arial Unicode MS"/>
               </a:rPr>
-              <a:t>第二個真型號 AT128P。同樣是光達，但把點集中在前方 120 度。
+              <a:t>第二個真型號 AT128P。重點是它把同樣多的點集中在前面 120 度。一樣照表由上往下走。
 </a:t>
             </a:r>
           </a:p>
@@ -5116,7 +5160,7 @@
                 <a:ea typeface="Arial Unicode MS"/>
                 <a:cs typeface="Arial Unicode MS"/>
               </a:rPr>
-              <a:t>圈左表 Horizontal FOV 的 120°，再翻回上一張圈 OS1 的 360°，兩個數字對著看。
+              <a:t>左表由上往下圈：Number of channels、Horizontal FOV 與 Vertical FOV、再圈 Horizontal resolution 那一行的 Far-field 與 (10 Hz)。那兩個括號是今天的重點。
 </a:t>
             </a:r>
           </a:p>
@@ -5215,7 +5259,7 @@
                 <a:ea typeface="Arial Unicode MS"/>
                 <a:cs typeface="Arial Unicode MS"/>
               </a:rPr>
-              <a:t>一樣找那三行。
+              <a:t>這張表跟剛剛那張長得不一樣——是手冊裡的規格章節，一共九行。一樣從上往下看。
 </a:t>
             </a:r>
           </a:p>
@@ -5229,6 +5273,17 @@
               </a:spcAft>
             </a:pPr>
             <a:r>
+              <a:rPr sz="800" b="1" lang="zh-TW" dirty="0">
+                <a:solidFill>
+                  <a:srgbClr val="000000"/>
+                </a:solidFill>
+                <a:latin typeface="Arial Unicode MS"/>
+                <a:ea typeface="Arial Unicode MS"/>
+                <a:cs typeface="Arial Unicode MS"/>
+              </a:rPr>
+              <a:t>第一行，Number of channels，128。</a:t>
+            </a:r>
+            <a:r>
               <a:rPr sz="800" lang="zh-TW" dirty="0">
                 <a:solidFill>
                   <a:srgbClr val="000000"/>
@@ -5237,7 +5292,7 @@
                 <a:ea typeface="Arial Unicode MS"/>
                 <a:cs typeface="Arial Unicode MS"/>
               </a:rPr>
-              <a:t>線束數是 128。
+              <a:t>和 OS1 的 Vertical Resolution 是同一件事，只是這家公司換個寫法。這就是線束數。
 </a:t>
             </a:r>
           </a:p>
@@ -5259,7 +5314,7 @@
                 <a:ea typeface="Arial Unicode MS"/>
                 <a:cs typeface="Arial Unicode MS"/>
               </a:rPr>
-              <a:t>視野是水平 120 度、垂直 25.4 度。它不轉，所以只看得到前面那一塊。
+              <a:t>中間 Instrumented range 到 Ranging precision 那幾行是測距與精度，第三節上機會用到，今天先跳過。
 </a:t>
             </a:r>
           </a:p>
@@ -5273,6 +5328,17 @@
               </a:spcAft>
             </a:pPr>
             <a:r>
+              <a:rPr sz="800" b="1" lang="zh-TW" dirty="0">
+                <a:solidFill>
+                  <a:srgbClr val="000000"/>
+                </a:solidFill>
+                <a:latin typeface="Arial Unicode MS"/>
+                <a:ea typeface="Arial Unicode MS"/>
+                <a:cs typeface="Arial Unicode MS"/>
+              </a:rPr>
+              <a:t>Horizontal FOV 120 度、Vertical FOV 25.4 度。</a:t>
+            </a:r>
+            <a:r>
               <a:rPr sz="800" lang="zh-TW" dirty="0">
                 <a:solidFill>
                   <a:srgbClr val="000000"/>
@@ -5281,8 +5347,19 @@
                 <a:ea typeface="Arial Unicode MS"/>
                 <a:cs typeface="Arial Unicode MS"/>
               </a:rPr>
-              <a:t>第三行不一樣了。這一顆的規格表上，直接寫了 </a:t>
-            </a:r>
+              <a:t>注意這兩行在表上沒有排在一起，中間隔了一行。它不轉，所以只看得到前面那一塊。
+</a:t>
+            </a:r>
+          </a:p>
+          <a:p>
+            <a:pPr algn="l">
+              <a:spcBef>
+                <a:spcPts val="0"/>
+              </a:spcBef>
+              <a:spcAft>
+                <a:spcPts val="133"/>
+              </a:spcAft>
+            </a:pPr>
             <a:r>
               <a:rPr sz="800" b="1" lang="zh-TW" dirty="0">
                 <a:solidFill>
@@ -5292,7 +5369,7 @@
                 <a:ea typeface="Arial Unicode MS"/>
                 <a:cs typeface="Arial Unicode MS"/>
               </a:rPr>
-              <a:t>Angular Resolution，角解析度：水平 0.1 度、垂直 0.2 度</a:t>
+              <a:t>接下來是 Horizontal resolution 和 Vertical resolution，角解析度。</a:t>
             </a:r>
             <a:r>
               <a:rPr sz="800" lang="zh-TW" dirty="0">
@@ -5303,7 +5380,7 @@
                 <a:ea typeface="Arial Unicode MS"/>
                 <a:cs typeface="Arial Unicode MS"/>
               </a:rPr>
-              <a:t>。
+              <a:t>水平 0.1 度、垂直 0.2 度。這一行就是第四週講了一整節的那件事——相鄰兩條射線之間差幾度。上禮拜我要各位自己去感覺縫有多寬，這一顆的廠商直接把數字寫給你了。
 </a:t>
             </a:r>
           </a:p>
@@ -5325,7 +5402,7 @@
                 <a:ea typeface="Arial Unicode MS"/>
                 <a:cs typeface="Arial Unicode MS"/>
               </a:rPr>
-              <a:t>這一行請大家特別注意，因為它就是第四週我們講了一整節的那件事——</a:t>
+              <a:t>不過請各位看清楚：那個 0.1 度前面寫著 </a:t>
             </a:r>
             <a:r>
               <a:rPr sz="800" b="1" lang="zh-TW" dirty="0">
@@ -5336,7 +5413,7 @@
                 <a:ea typeface="Arial Unicode MS"/>
                 <a:cs typeface="Arial Unicode MS"/>
               </a:rPr>
-              <a:t>相鄰兩條射線之間差幾度</a:t>
+              <a:t>Far-field</a:t>
             </a:r>
             <a:r>
               <a:rPr sz="800" lang="zh-TW" dirty="0">
@@ -5347,7 +5424,29 @@
                 <a:ea typeface="Arial Unicode MS"/>
                 <a:cs typeface="Arial Unicode MS"/>
               </a:rPr>
-              <a:t>。上禮拜我要各位自己去感覺縫有多寬，這一顆的廠商直接把數字寫給你了。
+              <a:t>，後面還有個 </a:t>
+            </a:r>
+            <a:r>
+              <a:rPr sz="800" b="1" lang="zh-TW" dirty="0">
+                <a:solidFill>
+                  <a:srgbClr val="000000"/>
+                </a:solidFill>
+                <a:latin typeface="Arial Unicode MS"/>
+                <a:ea typeface="Arial Unicode MS"/>
+                <a:cs typeface="Arial Unicode MS"/>
+              </a:rPr>
+              <a:t>(10 Hz)</a:t>
+            </a:r>
+            <a:r>
+              <a:rPr sz="800" lang="zh-TW" dirty="0">
+                <a:solidFill>
+                  <a:srgbClr val="000000"/>
+                </a:solidFill>
+                <a:latin typeface="Arial Unicode MS"/>
+                <a:ea typeface="Arial Unicode MS"/>
+                <a:cs typeface="Arial Unicode MS"/>
+              </a:rPr>
+              <a:t>。換成 20 Hz 就變 0.2 度，近距離更是 0.2 到 0.8 度。又是一個「有條件的數字」，跟 OS1 的 80% 和 10% 是同一種陷阱。
 </a:t>
             </a:r>
           </a:p>
@@ -5369,29 +5468,7 @@
                 <a:ea typeface="Arial Unicode MS"/>
                 <a:cs typeface="Arial Unicode MS"/>
               </a:rPr>
-              <a:t>好，現在把兩顆放在一起想。
-</a:t>
-            </a:r>
-          </a:p>
-          <a:p>
-            <a:pPr algn="l">
-              <a:spcBef>
-                <a:spcPts val="0"/>
-              </a:spcBef>
-              <a:spcAft>
-                <a:spcPts val="133"/>
-              </a:spcAft>
-            </a:pPr>
-            <a:r>
-              <a:rPr sz="800" lang="zh-TW" dirty="0">
-                <a:solidFill>
-                  <a:srgbClr val="000000"/>
-                </a:solidFill>
-                <a:latin typeface="Arial Unicode MS"/>
-                <a:ea typeface="Arial Unicode MS"/>
-                <a:cs typeface="Arial Unicode MS"/>
-              </a:rPr>
-              <a:t>OS1 把點灑在</a:t>
+              <a:t>好，現在把兩顆放在一起想。OS1 把點灑在</a:t>
             </a:r>
             <a:r>
               <a:rPr sz="800" b="1" lang="zh-TW" dirty="0">
@@ -5479,29 +5556,7 @@
                 <a:ea typeface="Arial Unicode MS"/>
                 <a:cs typeface="Arial Unicode MS"/>
               </a:rPr>
-              <a:t>。要看路口四面八方，你要 360 度那一顆；要在高速公路上看遠方，你要把點集中在前面那一顆。
-</a:t>
-            </a:r>
-          </a:p>
-          <a:p>
-            <a:pPr algn="l">
-              <a:spcBef>
-                <a:spcPts val="0"/>
-              </a:spcBef>
-              <a:spcAft>
-                <a:spcPts val="133"/>
-              </a:spcAft>
-            </a:pPr>
-            <a:r>
-              <a:rPr sz="800" lang="zh-TW" dirty="0">
-                <a:solidFill>
-                  <a:srgbClr val="000000"/>
-                </a:solidFill>
-                <a:latin typeface="Arial Unicode MS"/>
-                <a:ea typeface="Arial Unicode MS"/>
-                <a:cs typeface="Arial Unicode MS"/>
-              </a:rPr>
-              <a:t>第三節上機的時候，各位會親眼看到這個差別有多大。</a:t>
+              <a:t>。要看路口四面八方，你要 360 度那一顆；要在高速公路上看遠方，你要把點集中在前面那一顆。第三節上機的時候，各位會親眼看到這個差別有多大。</a:t>
             </a:r>
           </a:p>
         </p:txBody>
@@ -12769,7 +12824,7 @@
                 <a:ea typeface="Arial" pitchFamily="34" charset="-122"/>
                 <a:cs typeface="Arial" pitchFamily="34" charset="-120"/>
               </a:rPr>
-              <a:t>Số kênh</a:t>
+              <a:t>Tầm đo</a:t>
             </a:r>
             <a:endParaRPr lang="en-US" sz="900" dirty="0"/>
           </a:p>
@@ -12789,7 +12844,7 @@
                 <a:ea typeface="微軟正黑體" pitchFamily="34" charset="-122"/>
                 <a:cs typeface="微軟正黑體" pitchFamily="34" charset="-120"/>
               </a:rPr>
-              <a:t>線束數</a:t>
+              <a:t>測距</a:t>
             </a:r>
             <a:endParaRPr lang="en-US" sz="900" dirty="0"/>
           </a:p>
@@ -12804,7 +12859,7 @@
         <p:spPr>
           <a:xfrm>
             <a:off x="6190488" y="1665299"/>
-            <a:ext cx="2450592" cy="454982"/>
+            <a:ext cx="2450592" cy="635187"/>
           </a:xfrm>
           <a:prstGeom prst="rect">
             <a:avLst/>
@@ -12831,7 +12886,7 @@
                 <a:ea typeface="Arial" pitchFamily="34" charset="-122"/>
                 <a:cs typeface="Arial" pitchFamily="34" charset="-120"/>
               </a:rPr>
-              <a:t>Chính là thanh «số tia» tuần trước</a:t>
+              <a:t>Range (lấy dòng 10%) = chiều dài tia</a:t>
             </a:r>
             <a:endParaRPr lang="en-US" sz="1100" dirty="0"/>
           </a:p>
@@ -12851,7 +12906,7 @@
                 <a:ea typeface="微軟正黑體" pitchFamily="34" charset="-122"/>
                 <a:cs typeface="微軟正黑體" pitchFamily="34" charset="-120"/>
               </a:rPr>
-              <a:t>就是上週那條「射線數」滑桿</a:t>
+              <a:t>Range 看 10% 那行＝射線長度</a:t>
             </a:r>
             <a:endParaRPr lang="en-US" sz="1100" dirty="0"/>
           </a:p>
@@ -12865,7 +12920,7 @@
         </p:nvSpPr>
         <p:spPr>
           <a:xfrm>
-            <a:off x="4983480" y="2184289"/>
+            <a:off x="4983480" y="2364494"/>
             <a:ext cx="1060704" cy="400118"/>
           </a:xfrm>
           <a:prstGeom prst="roundRect">
@@ -12887,7 +12942,7 @@
         </p:nvSpPr>
         <p:spPr>
           <a:xfrm>
-            <a:off x="5038344" y="2220865"/>
+            <a:off x="5038344" y="2401070"/>
             <a:ext cx="950976" cy="345254"/>
           </a:xfrm>
           <a:prstGeom prst="rect">
@@ -12915,7 +12970,7 @@
                 <a:ea typeface="Arial" pitchFamily="34" charset="-122"/>
                 <a:cs typeface="Arial" pitchFamily="34" charset="-120"/>
               </a:rPr>
-              <a:t>Góc nhìn</a:t>
+              <a:t>Số kênh</a:t>
             </a:r>
             <a:endParaRPr lang="en-US" sz="900" dirty="0"/>
           </a:p>
@@ -12935,7 +12990,7 @@
                 <a:ea typeface="微軟正黑體" pitchFamily="34" charset="-122"/>
                 <a:cs typeface="微軟正黑體" pitchFamily="34" charset="-120"/>
               </a:rPr>
-              <a:t>視野</a:t>
+              <a:t>線束數</a:t>
             </a:r>
             <a:endParaRPr lang="en-US" sz="900" dirty="0"/>
           </a:p>
@@ -12949,8 +13004,8 @@
         </p:nvSpPr>
         <p:spPr>
           <a:xfrm>
-            <a:off x="6190488" y="2184289"/>
-            <a:ext cx="2450592" cy="635187"/>
+            <a:off x="6190488" y="2364494"/>
+            <a:ext cx="2450592" cy="454982"/>
           </a:xfrm>
           <a:prstGeom prst="rect">
             <a:avLst/>
@@ -12977,7 +13032,7 @@
                 <a:ea typeface="Arial" pitchFamily="34" charset="-122"/>
                 <a:cs typeface="Arial" pitchFamily="34" charset="-120"/>
               </a:rPr>
-              <a:t>Thanh «góc quét», nhưng nó quay cả vòng</a:t>
+              <a:t>Vertical Resolution = số tia</a:t>
             </a:r>
             <a:endParaRPr lang="en-US" sz="1100" dirty="0"/>
           </a:p>
@@ -12997,7 +13052,7 @@
                 <a:ea typeface="微軟正黑體" pitchFamily="34" charset="-122"/>
                 <a:cs typeface="微軟正黑體" pitchFamily="34" charset="-120"/>
               </a:rPr>
-              <a:t>就是「張角」，只是它轉一整圈</a:t>
+              <a:t>Vertical Resolution＝射線數</a:t>
             </a:r>
             <a:endParaRPr lang="en-US" sz="1100" dirty="0"/>
           </a:p>
@@ -13061,7 +13116,7 @@
                 <a:ea typeface="Arial" pitchFamily="34" charset="-122"/>
                 <a:cs typeface="Arial" pitchFamily="34" charset="-120"/>
               </a:rPr>
-              <a:t>Tầm đo</a:t>
+              <a:t>Góc nhìn</a:t>
             </a:r>
             <a:endParaRPr lang="en-US" sz="900" dirty="0"/>
           </a:p>
@@ -13081,7 +13136,7 @@
                 <a:ea typeface="微軟正黑體" pitchFamily="34" charset="-122"/>
                 <a:cs typeface="微軟正黑體" pitchFamily="34" charset="-120"/>
               </a:rPr>
-              <a:t>測距</a:t>
+              <a:t>視野</a:t>
             </a:r>
             <a:endParaRPr lang="en-US" sz="900" dirty="0"/>
           </a:p>
@@ -13123,7 +13178,7 @@
                 <a:ea typeface="Arial" pitchFamily="34" charset="-122"/>
                 <a:cs typeface="Arial" pitchFamily="34" charset="-120"/>
               </a:rPr>
-              <a:t>Thanh «chiều dài tia» — đo với vật 10%</a:t>
+              <a:t>Field of View = góc quét, quay cả vòng</a:t>
             </a:r>
             <a:endParaRPr lang="en-US" sz="1100" dirty="0"/>
           </a:p>
@@ -13143,7 +13198,7 @@
                 <a:ea typeface="微軟正黑體" pitchFamily="34" charset="-122"/>
                 <a:cs typeface="微軟正黑體" pitchFamily="34" charset="-120"/>
               </a:rPr>
-              <a:t>就是「射線長度」。注意是對 10% 量的</a:t>
+              <a:t>Field of View＝張角，它轉一整圈</a:t>
             </a:r>
             <a:endParaRPr lang="en-US" sz="1100" dirty="0"/>
           </a:p>
@@ -13676,7 +13731,7 @@
                 <a:ea typeface="Arial" pitchFamily="34" charset="-122"/>
                 <a:cs typeface="Arial" pitchFamily="34" charset="-120"/>
               </a:rPr>
-              <a:t>128 channels</a:t>
+              <a:t>Number of channels = 128</a:t>
             </a:r>
             <a:endParaRPr lang="en-US" sz="1100" dirty="0"/>
           </a:p>
@@ -13696,7 +13751,7 @@
                 <a:ea typeface="微軟正黑體" pitchFamily="34" charset="-122"/>
                 <a:cs typeface="微軟正黑體" pitchFamily="34" charset="-120"/>
               </a:rPr>
-              <a:t>128 channels</a:t>
+              <a:t>Number of channels＝128</a:t>
             </a:r>
             <a:endParaRPr lang="en-US" sz="1100" dirty="0"/>
           </a:p>
@@ -13822,7 +13877,7 @@
                 <a:ea typeface="Arial" pitchFamily="34" charset="-122"/>
                 <a:cs typeface="Arial" pitchFamily="34" charset="-120"/>
               </a:rPr>
-              <a:t>120° ngang × 25.4° dọc — không quay, chỉ nhìn phía trước</a:t>
+              <a:t>Horizontal / Vertical FOV = 120° × 25,4°</a:t>
             </a:r>
             <a:endParaRPr lang="en-US" sz="1100" dirty="0"/>
           </a:p>
@@ -13842,7 +13897,7 @@
                 <a:ea typeface="微軟正黑體" pitchFamily="34" charset="-122"/>
                 <a:cs typeface="微軟正黑體" pitchFamily="34" charset="-120"/>
               </a:rPr>
-              <a:t>水平 120°、垂直 25.4°——它不轉，只看前面</a:t>
+              <a:t>Horizontal／Vertical FOV＝120°×25.4°</a:t>
             </a:r>
             <a:endParaRPr lang="en-US" sz="1100" dirty="0"/>
           </a:p>
@@ -13906,7 +13961,7 @@
                 <a:ea typeface="Arial" pitchFamily="34" charset="-122"/>
                 <a:cs typeface="Arial" pitchFamily="34" charset="-120"/>
               </a:rPr>
-              <a:t>Phân giải góc</a:t>
+              <a:t>Phân giải</a:t>
             </a:r>
             <a:endParaRPr lang="en-US" sz="900" dirty="0"/>
           </a:p>
@@ -13941,7 +13996,7 @@
         <p:spPr>
           <a:xfrm>
             <a:off x="6008388" y="2883484"/>
-            <a:ext cx="2632692" cy="807965"/>
+            <a:ext cx="2632692" cy="635187"/>
           </a:xfrm>
           <a:prstGeom prst="rect">
             <a:avLst/>
@@ -13968,7 +14023,7 @@
                 <a:ea typeface="Arial" pitchFamily="34" charset="-122"/>
                 <a:cs typeface="Arial" pitchFamily="34" charset="-120"/>
               </a:rPr>
-              <a:t>0.1° ngang × 0.2° dọc — hãng viết thẳng ra góc, không phải chia ngược</a:t>
+              <a:t>resolution 0,1° / 0,2° — Far-field, 10 Hz</a:t>
             </a:r>
             <a:endParaRPr lang="en-US" sz="1100" dirty="0"/>
           </a:p>
@@ -13988,7 +14043,7 @@
                 <a:ea typeface="微軟正黑體" pitchFamily="34" charset="-122"/>
                 <a:cs typeface="微軟正黑體" pitchFamily="34" charset="-120"/>
               </a:rPr>
-              <a:t>左右 0.1°、上下 0.2°——這一顆直接把角度寫出來，不用自己除</a:t>
+              <a:t>resolution 0.1°／0.2°——Far-field、10 Hz</a:t>
             </a:r>
             <a:endParaRPr lang="en-US" sz="1100" dirty="0"/>
           </a:p>

--- a/第五週(10-08)/第五週_第1節_簡報.pptx
+++ b/第五週(10-08)/第五週_第1節_簡報.pptx
@@ -1793,11 +1793,11 @@
                 <a:spcPts val="0"/>
               </a:spcBef>
               <a:spcAft>
-                <a:spcPts val="142"/>
-              </a:spcAft>
-            </a:pPr>
-            <a:r>
-              <a:rPr sz="850" b="1" lang="zh-TW" dirty="0">
+                <a:spcPts val="150"/>
+              </a:spcAft>
+            </a:pPr>
+            <a:r>
+              <a:rPr sz="900" b="1" lang="zh-TW" dirty="0">
                 <a:solidFill>
                   <a:srgbClr val="000000"/>
                 </a:solidFill>
@@ -1808,7 +1808,7 @@
               <a:t>▍這一張要做什麼</a:t>
             </a:r>
             <a:r>
-              <a:rPr sz="850" lang="zh-TW" dirty="0">
+              <a:rPr sz="900" lang="zh-TW" dirty="0">
                 <a:solidFill>
                   <a:srgbClr val="000000"/>
                 </a:solidFill>
@@ -1826,11 +1826,11 @@
                 <a:spcPts val="0"/>
               </a:spcBef>
               <a:spcAft>
-                <a:spcPts val="142"/>
-              </a:spcAft>
-            </a:pPr>
-            <a:r>
-              <a:rPr sz="850" lang="zh-TW" dirty="0">
+                <a:spcPts val="150"/>
+              </a:spcAft>
+            </a:pPr>
+            <a:r>
+              <a:rPr sz="900" lang="zh-TW" dirty="0">
                 <a:solidFill>
                   <a:srgbClr val="000000"/>
                 </a:solidFill>
@@ -1848,11 +1848,11 @@
                 <a:spcPts val="0"/>
               </a:spcBef>
               <a:spcAft>
-                <a:spcPts val="142"/>
-              </a:spcAft>
-            </a:pPr>
-            <a:r>
-              <a:rPr sz="850" b="1" lang="zh-TW" dirty="0">
+                <a:spcPts val="150"/>
+              </a:spcAft>
+            </a:pPr>
+            <a:r>
+              <a:rPr sz="900" b="1" lang="zh-TW" dirty="0">
                 <a:solidFill>
                   <a:srgbClr val="000000"/>
                 </a:solidFill>
@@ -1863,7 +1863,7 @@
               <a:t>▍畫面上圈這裡</a:t>
             </a:r>
             <a:r>
-              <a:rPr sz="850" lang="zh-TW" dirty="0">
+              <a:rPr sz="900" lang="zh-TW" dirty="0">
                 <a:solidFill>
                   <a:srgbClr val="000000"/>
                 </a:solidFill>
@@ -1881,19 +1881,19 @@
                 <a:spcPts val="0"/>
               </a:spcBef>
               <a:spcAft>
-                <a:spcPts val="142"/>
-              </a:spcAft>
-            </a:pPr>
-            <a:r>
-              <a:rPr sz="850" lang="zh-TW" dirty="0">
-                <a:solidFill>
-                  <a:srgbClr val="000000"/>
-                </a:solidFill>
-                <a:latin typeface="Arial Unicode MS"/>
-                <a:ea typeface="Arial Unicode MS"/>
-                <a:cs typeface="Arial Unicode MS"/>
-              </a:rPr>
-              <a:t>圈圖裡 Lidar Operating Modes 的三行，特別圈 x 1024 與 x 2048，再現場切一次模式給他們看。
+                <a:spcPts val="150"/>
+              </a:spcAft>
+            </a:pPr>
+            <a:r>
+              <a:rPr sz="900" lang="zh-TW" dirty="0">
+                <a:solidFill>
+                  <a:srgbClr val="000000"/>
+                </a:solidFill>
+                <a:latin typeface="Arial Unicode MS"/>
+                <a:ea typeface="Arial Unicode MS"/>
+                <a:cs typeface="Arial Unicode MS"/>
+              </a:rPr>
+              <a:t>圈圖裡三行模式，特別圈第三行的 x 2048 @ 10 Hz——只有 10 Hz。再現場切一次模式給他們看。
 </a:t>
             </a:r>
           </a:p>
@@ -1903,11 +1903,11 @@
                 <a:spcPts val="0"/>
               </a:spcBef>
               <a:spcAft>
-                <a:spcPts val="142"/>
-              </a:spcAft>
-            </a:pPr>
-            <a:r>
-              <a:rPr sz="850" b="1" lang="zh-TW" dirty="0">
+                <a:spcPts val="150"/>
+              </a:spcAft>
+            </a:pPr>
+            <a:r>
+              <a:rPr sz="900" b="1" lang="zh-TW" dirty="0">
                 <a:solidFill>
                   <a:srgbClr val="000000"/>
                 </a:solidFill>
@@ -1918,7 +1918,7 @@
               <a:t>▍以下照著唸</a:t>
             </a:r>
             <a:r>
-              <a:rPr sz="850" lang="zh-TW" dirty="0">
+              <a:rPr sz="900" lang="zh-TW" dirty="0">
                 <a:solidFill>
                   <a:srgbClr val="000000"/>
                 </a:solidFill>
@@ -1936,77 +1936,33 @@
                 <a:spcPts val="0"/>
               </a:spcBef>
               <a:spcAft>
-                <a:spcPts val="142"/>
-              </a:spcAft>
-            </a:pPr>
-            <a:r>
-              <a:rPr sz="850" lang="zh-TW" dirty="0">
-                <a:solidFill>
-                  <a:srgbClr val="000000"/>
-                </a:solidFill>
-                <a:latin typeface="Arial Unicode MS"/>
-                <a:ea typeface="Arial Unicode MS"/>
-                <a:cs typeface="Arial Unicode MS"/>
-              </a:rPr>
-              <a:t>再看一行很容易讀漏的字。
-</a:t>
-            </a:r>
-          </a:p>
-          <a:p>
-            <a:pPr algn="l">
-              <a:spcBef>
-                <a:spcPts val="0"/>
-              </a:spcBef>
-              <a:spcAft>
-                <a:spcPts val="142"/>
-              </a:spcAft>
-            </a:pPr>
-            <a:r>
-              <a:rPr sz="850" lang="zh-TW" dirty="0">
-                <a:solidFill>
-                  <a:srgbClr val="000000"/>
-                </a:solidFill>
-                <a:latin typeface="Arial Unicode MS"/>
-                <a:ea typeface="Arial Unicode MS"/>
-                <a:cs typeface="Arial Unicode MS"/>
-              </a:rPr>
-              <a:t>OS1 的規格表上，水平解析度那一行寫的是 </a:t>
-            </a:r>
-            <a:r>
-              <a:rPr sz="850" b="1" lang="zh-TW" dirty="0">
-                <a:solidFill>
-                  <a:srgbClr val="000000"/>
-                </a:solidFill>
-                <a:latin typeface="Arial Unicode MS"/>
-                <a:ea typeface="Arial Unicode MS"/>
-                <a:cs typeface="Arial Unicode MS"/>
-              </a:rPr>
-              <a:t>512 / 1024 / 2048 (configurable)</a:t>
-            </a:r>
-            <a:r>
-              <a:rPr sz="850" lang="zh-TW" dirty="0">
-                <a:solidFill>
-                  <a:srgbClr val="000000"/>
-                </a:solidFill>
-                <a:latin typeface="Arial Unicode MS"/>
-                <a:ea typeface="Arial Unicode MS"/>
-                <a:cs typeface="Arial Unicode MS"/>
-              </a:rPr>
-              <a:t>。最後那個字很重要，configurable，</a:t>
-            </a:r>
-            <a:r>
-              <a:rPr sz="850" b="1" lang="zh-TW" dirty="0">
-                <a:solidFill>
-                  <a:srgbClr val="000000"/>
-                </a:solidFill>
-                <a:latin typeface="Arial Unicode MS"/>
-                <a:ea typeface="Arial Unicode MS"/>
-                <a:cs typeface="Arial Unicode MS"/>
-              </a:rPr>
-              <a:t>可以設定</a:t>
-            </a:r>
-            <a:r>
-              <a:rPr sz="850" lang="zh-TW" dirty="0">
+                <a:spcPts val="150"/>
+              </a:spcAft>
+            </a:pPr>
+            <a:r>
+              <a:rPr sz="900" lang="zh-TW" dirty="0">
+                <a:solidFill>
+                  <a:srgbClr val="000000"/>
+                </a:solidFill>
+                <a:latin typeface="Arial Unicode MS"/>
+                <a:ea typeface="Arial Unicode MS"/>
+                <a:cs typeface="Arial Unicode MS"/>
+              </a:rPr>
+              <a:t>再看一個很容易讀漏的地方。第七張那張圖上，水平解析度和轉速後面都跟著一個字：</a:t>
+            </a:r>
+            <a:r>
+              <a:rPr sz="900" b="1" lang="zh-TW" dirty="0">
+                <a:solidFill>
+                  <a:srgbClr val="000000"/>
+                </a:solidFill>
+                <a:latin typeface="Arial Unicode MS"/>
+                <a:ea typeface="Arial Unicode MS"/>
+                <a:cs typeface="Arial Unicode MS"/>
+              </a:rPr>
+              <a:t>configurable，可以設定</a:t>
+            </a:r>
+            <a:r>
+              <a:rPr sz="900" lang="zh-TW" dirty="0">
                 <a:solidFill>
                   <a:srgbClr val="000000"/>
                 </a:solidFill>
@@ -2024,19 +1980,41 @@
                 <a:spcPts val="0"/>
               </a:spcBef>
               <a:spcAft>
-                <a:spcPts val="142"/>
-              </a:spcAft>
-            </a:pPr>
-            <a:r>
-              <a:rPr sz="850" lang="zh-TW" dirty="0">
-                <a:solidFill>
-                  <a:srgbClr val="000000"/>
-                </a:solidFill>
-                <a:latin typeface="Arial Unicode MS"/>
-                <a:ea typeface="Arial Unicode MS"/>
-                <a:cs typeface="Arial Unicode MS"/>
-              </a:rPr>
-              <a:t>轉速那一行也一樣：10 or 20 Hz，可以設定。
+                <a:spcPts val="150"/>
+              </a:spcAft>
+            </a:pPr>
+            <a:r>
+              <a:rPr sz="900" lang="zh-TW" dirty="0">
+                <a:solidFill>
+                  <a:srgbClr val="000000"/>
+                </a:solidFill>
+                <a:latin typeface="Arial Unicode MS"/>
+                <a:ea typeface="Arial Unicode MS"/>
+                <a:cs typeface="Arial Unicode MS"/>
+              </a:rPr>
+              <a:t>datasheet 後面幾頁就把可以設定的組合整個列出來，也就是左邊這一塊 </a:t>
+            </a:r>
+            <a:r>
+              <a:rPr sz="900" b="1" lang="zh-TW" dirty="0">
+                <a:solidFill>
+                  <a:srgbClr val="000000"/>
+                </a:solidFill>
+                <a:latin typeface="Arial Unicode MS"/>
+                <a:ea typeface="Arial Unicode MS"/>
+                <a:cs typeface="Arial Unicode MS"/>
+              </a:rPr>
+              <a:t>Lidar Operating Modes</a:t>
+            </a:r>
+            <a:r>
+              <a:rPr sz="900" lang="zh-TW" dirty="0">
+                <a:solidFill>
+                  <a:srgbClr val="000000"/>
+                </a:solidFill>
+                <a:latin typeface="Arial Unicode MS"/>
+                <a:ea typeface="Arial Unicode MS"/>
+                <a:cs typeface="Arial Unicode MS"/>
+              </a:rPr>
+              <a:t>：512 點一圈可以配 10 或 20 Hz，1024 點一圈也可以配 10 或 20 Hz。
 </a:t>
             </a:r>
           </a:p>
@@ -2046,11 +2024,55 @@
                 <a:spcPts val="0"/>
               </a:spcBef>
               <a:spcAft>
-                <a:spcPts val="142"/>
-              </a:spcAft>
-            </a:pPr>
-            <a:r>
-              <a:rPr sz="850" lang="zh-TW" dirty="0">
+                <a:spcPts val="150"/>
+              </a:spcAft>
+            </a:pPr>
+            <a:r>
+              <a:rPr sz="900" lang="zh-TW" dirty="0">
+                <a:solidFill>
+                  <a:srgbClr val="000000"/>
+                </a:solidFill>
+                <a:latin typeface="Arial Unicode MS"/>
+                <a:ea typeface="Arial Unicode MS"/>
+                <a:cs typeface="Arial Unicode MS"/>
+              </a:rPr>
+              <a:t>請各位特別看第三行：</a:t>
+            </a:r>
+            <a:r>
+              <a:rPr sz="900" b="1" lang="zh-TW" dirty="0">
+                <a:solidFill>
+                  <a:srgbClr val="000000"/>
+                </a:solidFill>
+                <a:latin typeface="Arial Unicode MS"/>
+                <a:ea typeface="Arial Unicode MS"/>
+                <a:cs typeface="Arial Unicode MS"/>
+              </a:rPr>
+              <a:t>x 2048 @ 10 Hz</a:t>
+            </a:r>
+            <a:r>
+              <a:rPr sz="900" lang="zh-TW" dirty="0">
+                <a:solidFill>
+                  <a:srgbClr val="000000"/>
+                </a:solidFill>
+                <a:latin typeface="Arial Unicode MS"/>
+                <a:ea typeface="Arial Unicode MS"/>
+                <a:cs typeface="Arial Unicode MS"/>
+              </a:rPr>
+              <a:t>，只有 10 Hz。想要最密的點，就不能跑 20 Hz——這張表自己就把「沒有免費的規格」寫出來了。
+</a:t>
+            </a:r>
+          </a:p>
+          <a:p>
+            <a:pPr algn="l">
+              <a:spcBef>
+                <a:spcPts val="0"/>
+              </a:spcBef>
+              <a:spcAft>
+                <a:spcPts val="150"/>
+              </a:spcAft>
+            </a:pPr>
+            <a:r>
+              <a:rPr sz="900" lang="zh-TW" dirty="0">
                 <a:solidFill>
                   <a:srgbClr val="000000"/>
                 </a:solidFill>
@@ -2061,7 +2083,7 @@
               <a:t>這代表什麼？代表</a:t>
             </a:r>
             <a:r>
-              <a:rPr sz="850" b="1" lang="zh-TW" dirty="0">
+              <a:rPr sz="900" b="1" lang="zh-TW" dirty="0">
                 <a:solidFill>
                   <a:srgbClr val="000000"/>
                 </a:solidFill>
@@ -2072,7 +2094,7 @@
               <a:t>同一顆光達，你買回來之後還可以選模式</a:t>
             </a:r>
             <a:r>
-              <a:rPr sz="850" lang="zh-TW" dirty="0">
+              <a:rPr sz="900" lang="zh-TW" dirty="0">
                 <a:solidFill>
                   <a:srgbClr val="000000"/>
                 </a:solidFill>
@@ -2090,22 +2112,22 @@
                 <a:spcPts val="0"/>
               </a:spcBef>
               <a:spcAft>
-                <a:spcPts val="142"/>
-              </a:spcAft>
-            </a:pPr>
-            <a:r>
-              <a:rPr sz="850" lang="zh-TW" dirty="0">
-                <a:solidFill>
-                  <a:srgbClr val="000000"/>
-                </a:solidFill>
-                <a:latin typeface="Arial Unicode MS"/>
-                <a:ea typeface="Arial Unicode MS"/>
-                <a:cs typeface="Arial Unicode MS"/>
-              </a:rPr>
-              <a:t>剛剛那張表我算給各位看，四十公尺的行人身上 OS1 有九個點。那是在 1024 點一圈的模式下算的。如果你把它切到 2048 點一圈，左右的點會加倍，九個點就變成</a:t>
-            </a:r>
-            <a:r>
-              <a:rPr sz="850" b="1" lang="zh-TW" dirty="0">
+                <a:spcPts val="150"/>
+              </a:spcAft>
+            </a:pPr>
+            <a:r>
+              <a:rPr sz="900" lang="zh-TW" dirty="0">
+                <a:solidFill>
+                  <a:srgbClr val="000000"/>
+                </a:solidFill>
+                <a:latin typeface="Arial Unicode MS"/>
+                <a:ea typeface="Arial Unicode MS"/>
+                <a:cs typeface="Arial Unicode MS"/>
+              </a:rPr>
+              <a:t>第六張那張表我算給各位看，四十公尺的行人身上 OS1 有九個點。那是在 1024 點一圈的模式下算的。切到 2048 點一圈，左右的點加倍，九個點就變成</a:t>
+            </a:r>
+            <a:r>
+              <a:rPr sz="900" b="1" lang="zh-TW" dirty="0">
                 <a:solidFill>
                   <a:srgbClr val="000000"/>
                 </a:solidFill>
@@ -2116,7 +2138,7 @@
               <a:t>十八個點</a:t>
             </a:r>
             <a:r>
-              <a:rPr sz="850" lang="zh-TW" dirty="0">
+              <a:rPr sz="900" lang="zh-TW" dirty="0">
                 <a:solidFill>
                   <a:srgbClr val="000000"/>
                 </a:solidFill>
@@ -2134,55 +2156,33 @@
                 <a:spcPts val="0"/>
               </a:spcBef>
               <a:spcAft>
-                <a:spcPts val="142"/>
-              </a:spcAft>
-            </a:pPr>
-            <a:r>
-              <a:rPr sz="850" lang="zh-TW" dirty="0">
-                <a:solidFill>
-                  <a:srgbClr val="000000"/>
-                </a:solidFill>
-                <a:latin typeface="Arial Unicode MS"/>
-                <a:ea typeface="Arial Unicode MS"/>
-                <a:cs typeface="Arial Unicode MS"/>
-              </a:rPr>
-              <a:t>所以同一顆硬體，同一個人站在同一個位置，因為設定不同，結果可以差一倍。
-</a:t>
-            </a:r>
-          </a:p>
-          <a:p>
-            <a:pPr algn="l">
-              <a:spcBef>
-                <a:spcPts val="0"/>
-              </a:spcBef>
-              <a:spcAft>
-                <a:spcPts val="142"/>
-              </a:spcAft>
-            </a:pPr>
-            <a:r>
-              <a:rPr sz="850" lang="zh-TW" dirty="0">
-                <a:solidFill>
-                  <a:srgbClr val="000000"/>
-                </a:solidFill>
-                <a:latin typeface="Arial Unicode MS"/>
-                <a:ea typeface="Arial Unicode MS"/>
-                <a:cs typeface="Arial Unicode MS"/>
-              </a:rPr>
-              <a:t>這件事在工程上很重要，因為它告訴你：</a:t>
-            </a:r>
-            <a:r>
-              <a:rPr sz="850" b="1" lang="zh-TW" dirty="0">
-                <a:solidFill>
-                  <a:srgbClr val="000000"/>
-                </a:solidFill>
-                <a:latin typeface="Arial Unicode MS"/>
-                <a:ea typeface="Arial Unicode MS"/>
-                <a:cs typeface="Arial Unicode MS"/>
-              </a:rPr>
-              <a:t>買之前要問清楚，廠商標的那個漂亮數字，是在哪一個模式下量的。</a:t>
-            </a:r>
-            <a:r>
-              <a:rPr sz="850" lang="zh-TW" dirty="0">
+                <a:spcPts val="150"/>
+              </a:spcAft>
+            </a:pPr>
+            <a:r>
+              <a:rPr sz="900" lang="zh-TW" dirty="0">
+                <a:solidFill>
+                  <a:srgbClr val="000000"/>
+                </a:solidFill>
+                <a:latin typeface="Arial Unicode MS"/>
+                <a:ea typeface="Arial Unicode MS"/>
+                <a:cs typeface="Arial Unicode MS"/>
+              </a:rPr>
+              <a:t>同一顆硬體、同一個人站在同一個位置，因為設定不同，結果差一倍。所以買之前要問清楚：</a:t>
+            </a:r>
+            <a:r>
+              <a:rPr sz="900" b="1" lang="zh-TW" dirty="0">
+                <a:solidFill>
+                  <a:srgbClr val="000000"/>
+                </a:solidFill>
+                <a:latin typeface="Arial Unicode MS"/>
+                <a:ea typeface="Arial Unicode MS"/>
+                <a:cs typeface="Arial Unicode MS"/>
+              </a:rPr>
+              <a:t>廠商標的那個漂亮數字，是在哪一個模式下量的？</a:t>
+            </a:r>
+            <a:r>
+              <a:rPr sz="900" lang="zh-TW" dirty="0">
                 <a:solidFill>
                   <a:srgbClr val="000000"/>
                 </a:solidFill>
@@ -2200,19 +2200,19 @@
                 <a:spcPts val="0"/>
               </a:spcBef>
               <a:spcAft>
-                <a:spcPts val="142"/>
-              </a:spcAft>
-            </a:pPr>
-            <a:r>
-              <a:rPr sz="850" lang="zh-TW" dirty="0">
-                <a:solidFill>
-                  <a:srgbClr val="000000"/>
-                </a:solidFill>
-                <a:latin typeface="Arial Unicode MS"/>
-                <a:ea typeface="Arial Unicode MS"/>
-                <a:cs typeface="Arial Unicode MS"/>
-              </a:rPr>
-              <a:t>第三節上機的時候，我會請各位親自切一次。各位會看到工具上的判定，從「不夠用」變成「夠用」——只是換了一個模式，什麼錢都沒多花。
+                <a:spcPts val="150"/>
+              </a:spcAft>
+            </a:pPr>
+            <a:r>
+              <a:rPr sz="900" lang="zh-TW" dirty="0">
+                <a:solidFill>
+                  <a:srgbClr val="000000"/>
+                </a:solidFill>
+                <a:latin typeface="Arial Unicode MS"/>
+                <a:ea typeface="Arial Unicode MS"/>
+                <a:cs typeface="Arial Unicode MS"/>
+              </a:rPr>
+              <a:t>第三節上機的時候，我會請各位親自切一次。工具上的判定會從「不夠用」變成「夠用」——只是換了一個模式，什麼錢都沒多花。
 </a:t>
             </a:r>
           </a:p>
@@ -2222,19 +2222,19 @@
                 <a:spcPts val="0"/>
               </a:spcBef>
               <a:spcAft>
-                <a:spcPts val="142"/>
-              </a:spcAft>
-            </a:pPr>
-            <a:r>
-              <a:rPr sz="850" lang="zh-TW" dirty="0">
-                <a:solidFill>
-                  <a:srgbClr val="000000"/>
-                </a:solidFill>
-                <a:latin typeface="Arial Unicode MS"/>
-                <a:ea typeface="Arial Unicode MS"/>
-                <a:cs typeface="Arial Unicode MS"/>
-              </a:rPr>
-              <a:t>當然天下沒有白吃的午餐。點數加倍，資料量也加倍，車上那台電腦要跟得上才行。第四週講過的那句話還是成立：沒有一個規格是免費的。</a:t>
+                <a:spcPts val="150"/>
+              </a:spcAft>
+            </a:pPr>
+            <a:r>
+              <a:rPr sz="900" lang="zh-TW" dirty="0">
+                <a:solidFill>
+                  <a:srgbClr val="000000"/>
+                </a:solidFill>
+                <a:latin typeface="Arial Unicode MS"/>
+                <a:ea typeface="Arial Unicode MS"/>
+                <a:cs typeface="Arial Unicode MS"/>
+              </a:rPr>
+              <a:t>當然天下沒有白吃的午餐。點數加倍，資料量也加倍，車上那台電腦要跟得上；而且剛剛看到，2048 還配不了 20 Hz。</a:t>
             </a:r>
           </a:p>
         </p:txBody>
@@ -6271,7 +6271,7 @@
                 <a:ea typeface="Arial Unicode MS"/>
                 <a:cs typeface="Arial Unicode MS"/>
               </a:rPr>
-              <a:t>圈圖裡 Rotation Rate 那一行的 10 or 20 Hz，再圈上面換算出來的 100 毫秒與 1.1 公尺。
+              <a:t>圖上有四行，只圈最後一行 Rotation Rate 的 10 or 20 Hz（上面三行第 4、11 張講過或等一下講）。再圈上面換算出來的 100 毫秒與 1.1 公尺。
 </a:t>
             </a:r>
           </a:p>

--- a/第五週(10-08)/第五週_第1節_簡報.pptx
+++ b/第五週(10-08)/第五週_第1節_簡報.pptx
@@ -3026,7 +3026,7 @@
                 <a:ea typeface="Arial Unicode MS"/>
                 <a:cs typeface="Arial Unicode MS"/>
               </a:rPr>
-              <a:t>現在請大家自己操作，十分鐘。
+              <a:t>現在請大家自己操作，八分鐘。
 </a:t>
             </a:r>
           </a:p>
@@ -3213,29 +3213,7 @@
                 <a:ea typeface="Arial Unicode MS"/>
                 <a:cs typeface="Arial Unicode MS"/>
               </a:rPr>
-              <a:t>我在教室裡走動，卡住的舉手。
-</a:t>
-            </a:r>
-          </a:p>
-          <a:p>
-            <a:pPr algn="l">
-              <a:spcBef>
-                <a:spcPts val="0"/>
-              </a:spcBef>
-              <a:spcAft>
-                <a:spcPts val="150"/>
-              </a:spcAft>
-            </a:pPr>
-            <a:r>
-              <a:rPr sz="900" lang="zh-TW" dirty="0">
-                <a:solidFill>
-                  <a:srgbClr val="000000"/>
-                </a:solidFill>
-                <a:latin typeface="Arial Unicode MS"/>
-                <a:ea typeface="Arial Unicode MS"/>
-                <a:cs typeface="Arial Unicode MS"/>
-              </a:rPr>
-              <a:t>我在教室裡走動看大家的畫面。如果有人做得快，先做相機那一顆 AR0233AT。我先警告各位：</a:t>
+              <a:t>我在教室裡走動看大家的畫面，卡住的舉手。如果有人做得快，先做相機那一顆 AR0233AT。我先警告各位：</a:t>
             </a:r>
             <a:r>
               <a:rPr sz="900" b="1" lang="zh-TW" dirty="0">
@@ -3279,7 +3257,7 @@
                 <a:ea typeface="Arial Unicode MS"/>
                 <a:cs typeface="Arial Unicode MS"/>
               </a:rPr>
-              <a:t>十分鐘到了我們就收，接著講下一件事。</a:t>
+              <a:t>八分鐘到了我們就收，接著講下一件事。</a:t>
             </a:r>
           </a:p>
         </p:txBody>
@@ -4632,7 +4610,7 @@
                 <a:ea typeface="Arial Unicode MS"/>
                 <a:cs typeface="Arial Unicode MS"/>
               </a:rPr>
-              <a:t>請大家在工具上選第一個型號，Ouster OS1-64——</a:t>
+              <a:t>請大家在工具上選 Ouster OS1-64，</a:t>
             </a:r>
             <a:r>
               <a:rPr sz="850" b="1" lang="zh-TW" dirty="0">
@@ -4654,7 +4632,7 @@
                 <a:ea typeface="Arial Unicode MS"/>
                 <a:cs typeface="Arial Unicode MS"/>
               </a:rPr>
-              <a:t>的光達，車頂上會轉的那一種，第三週影片裡看過。左邊這張是它 datasheet 上的 OPTICAL PERFORMANCE，一共七行，我們今天只用其中三行，從上往下看。
+              <a:t>的光達，車頂上會轉的那一種。左邊這張是它 datasheet 上的 OPTICAL PERFORMANCE，一共七行，今天只用其中三行，從上往下看。
 </a:t>
             </a:r>
           </a:p>
@@ -4687,7 +4665,7 @@
                 <a:ea typeface="Arial Unicode MS"/>
                 <a:cs typeface="Arial Unicode MS"/>
               </a:rPr>
-              <a:t>，測距。同一個東西為什麼寫兩次？因為括號裡不一樣：第一行是 80%，第二行是 10%。今天先看第二行的 </a:t>
+              <a:t>，同一個東西寫了兩次。原因是這樣：光達要把雷射打出去、等它彈回來，才算得出距離。所以</a:t>
             </a:r>
             <a:r>
               <a:rPr sz="850" b="1" lang="zh-TW" dirty="0">
@@ -4698,6 +4676,94 @@
                 <a:ea typeface="Arial Unicode MS"/>
                 <a:cs typeface="Arial Unicode MS"/>
               </a:rPr>
+              <a:t>看得到多遠，不是只看機器，還要看目標把光彈回來多少</a:t>
+            </a:r>
+            <a:r>
+              <a:rPr sz="850" lang="zh-TW" dirty="0">
+                <a:solidFill>
+                  <a:srgbClr val="000000"/>
+                </a:solidFill>
+                <a:latin typeface="Arial Unicode MS"/>
+                <a:ea typeface="Arial Unicode MS"/>
+                <a:cs typeface="Arial Unicode MS"/>
+              </a:rPr>
+              <a:t>。括號裡那個百分比，講的就是目標有多會反光。
+</a:t>
+            </a:r>
+          </a:p>
+          <a:p>
+            <a:pPr algn="l">
+              <a:spcBef>
+                <a:spcPts val="0"/>
+              </a:spcBef>
+              <a:spcAft>
+                <a:spcPts val="142"/>
+              </a:spcAft>
+            </a:pPr>
+            <a:r>
+              <a:rPr sz="850" lang="zh-TW" dirty="0">
+                <a:solidFill>
+                  <a:srgbClr val="000000"/>
+                </a:solidFill>
+                <a:latin typeface="Arial Unicode MS"/>
+                <a:ea typeface="Arial Unicode MS"/>
+                <a:cs typeface="Arial Unicode MS"/>
+              </a:rPr>
+              <a:t>第一行 </a:t>
+            </a:r>
+            <a:r>
+              <a:rPr sz="850" b="1" lang="zh-TW" dirty="0">
+                <a:solidFill>
+                  <a:srgbClr val="000000"/>
+                </a:solidFill>
+                <a:latin typeface="Arial Unicode MS"/>
+                <a:ea typeface="Arial Unicode MS"/>
+                <a:cs typeface="Arial Unicode MS"/>
+              </a:rPr>
+              <a:t>80%</a:t>
+            </a:r>
+            <a:r>
+              <a:rPr sz="850" lang="zh-TW" dirty="0">
+                <a:solidFill>
+                  <a:srgbClr val="000000"/>
+                </a:solidFill>
+                <a:latin typeface="Arial Unicode MS"/>
+                <a:ea typeface="Arial Unicode MS"/>
+                <a:cs typeface="Arial Unicode MS"/>
+              </a:rPr>
+              <a:t>，亮色、很會反光，彈回來的光強，量得到 170 公尺；第二行 </a:t>
+            </a:r>
+            <a:r>
+              <a:rPr sz="850" b="1" lang="zh-TW" dirty="0">
+                <a:solidFill>
+                  <a:srgbClr val="000000"/>
+                </a:solidFill>
+                <a:latin typeface="Arial Unicode MS"/>
+                <a:ea typeface="Arial Unicode MS"/>
+                <a:cs typeface="Arial Unicode MS"/>
+              </a:rPr>
+              <a:t>10%</a:t>
+            </a:r>
+            <a:r>
+              <a:rPr sz="850" lang="zh-TW" dirty="0">
+                <a:solidFill>
+                  <a:srgbClr val="000000"/>
+                </a:solidFill>
+                <a:latin typeface="Arial Unicode MS"/>
+                <a:ea typeface="Arial Unicode MS"/>
+                <a:cs typeface="Arial Unicode MS"/>
+              </a:rPr>
+              <a:t>，深色、吃光，彈回來的光弱，就只剩 90 公尺。同一顆光達、同一個位置，差別只在它看的是什麼顏色的東西。今天先看 </a:t>
+            </a:r>
+            <a:r>
+              <a:rPr sz="850" b="1" lang="zh-TW" dirty="0">
+                <a:solidFill>
+                  <a:srgbClr val="000000"/>
+                </a:solidFill>
+                <a:latin typeface="Arial Unicode MS"/>
+                <a:ea typeface="Arial Unicode MS"/>
+                <a:cs typeface="Arial Unicode MS"/>
+              </a:rPr>
               <a:t>90 公尺</a:t>
             </a:r>
             <a:r>
@@ -4709,7 +4775,29 @@
                 <a:ea typeface="Arial Unicode MS"/>
                 <a:cs typeface="Arial Unicode MS"/>
               </a:rPr>
-              <a:t>。這一行就是上禮拜那條</a:t>
+              <a:t>，順手把後面那串 </a:t>
+            </a:r>
+            <a:r>
+              <a:rPr sz="850" b="1" lang="zh-TW" dirty="0">
+                <a:solidFill>
+                  <a:srgbClr val="000000"/>
+                </a:solidFill>
+                <a:latin typeface="Arial Unicode MS"/>
+                <a:ea typeface="Arial Unicode MS"/>
+                <a:cs typeface="Arial Unicode MS"/>
+              </a:rPr>
+              <a:t>10% Lambertian reflectivity</a:t>
+            </a:r>
+            <a:r>
+              <a:rPr sz="850" lang="zh-TW" dirty="0">
+                <a:solidFill>
+                  <a:srgbClr val="000000"/>
+                </a:solidFill>
+                <a:latin typeface="Arial Unicode MS"/>
+                <a:ea typeface="Arial Unicode MS"/>
+                <a:cs typeface="Arial Unicode MS"/>
+              </a:rPr>
+              <a:t> 圈起來——為什麼要看那一行，第十二張整張都在講。這一行就是上禮拜那條</a:t>
             </a:r>
             <a:r>
               <a:rPr sz="850" b="1" lang="zh-TW" dirty="0">
@@ -4775,7 +4863,7 @@
                 <a:ea typeface="Arial Unicode MS"/>
                 <a:cs typeface="Arial Unicode MS"/>
               </a:rPr>
-              <a:t>第四行，Vertical Resolution，垂直解析度</a:t>
+              <a:t>第四行，Vertical Resolution</a:t>
             </a:r>
             <a:r>
               <a:rPr sz="850" lang="zh-TW" dirty="0">
@@ -4786,7 +4874,7 @@
                 <a:ea typeface="Arial Unicode MS"/>
                 <a:cs typeface="Arial Unicode MS"/>
               </a:rPr>
-              <a:t>，寫 32、64、128 channels。Channel 中文叫通道，也叫線束。這就是上禮拜那條</a:t>
+              <a:t>，32、64、128 channels。Channel 中文叫通道，也叫線束，就是上禮拜那條</a:t>
             </a:r>
             <a:r>
               <a:rPr sz="850" b="1" lang="zh-TW" dirty="0">
@@ -4852,7 +4940,7 @@
                 <a:ea typeface="Arial Unicode MS"/>
                 <a:cs typeface="Arial Unicode MS"/>
               </a:rPr>
-              <a:t>最後一行，Field of View，視野</a:t>
+              <a:t>最後一行，Field of View</a:t>
             </a:r>
             <a:r>
               <a:rPr sz="850" lang="zh-TW" dirty="0">
@@ -4863,7 +4951,7 @@
                 <a:ea typeface="Arial Unicode MS"/>
                 <a:cs typeface="Arial Unicode MS"/>
               </a:rPr>
-              <a:t>，寫垂直 42.4 度、水平 360 度。上禮拜拉的張角就是這一行。不過請注意它的水平是 360 度——它會轉一整圈，所以「張角」對這一顆來說，只剩垂直方向要選。
+              <a:t>，垂直 42.4 度、水平 360 度，就是上禮拜拉的張角。不過注意它水平是 360 度——它轉一整圈，所以「張角」對這一顆來說，只剩垂直方向要選。
 </a:t>
             </a:r>
           </a:p>
@@ -4885,7 +4973,7 @@
                 <a:ea typeface="Arial Unicode MS"/>
                 <a:cs typeface="Arial Unicode MS"/>
               </a:rPr>
-              <a:t>三個滑桿，三行，都在這張表上了。所以上禮拜各位在模擬器上拉來拉去的那三個東西，不是我編出來的遊戲設定，是</a:t>
+              <a:t>三個滑桿，三行，都在這張表上了。上禮拜各位在模擬器上拉來拉去的那三個東西，不是我編出來的遊戲設定，是</a:t>
             </a:r>
             <a:r>
               <a:rPr sz="850" b="1" lang="zh-TW" dirty="0">
@@ -4907,51 +4995,7 @@
                 <a:ea typeface="Arial Unicode MS"/>
                 <a:cs typeface="Arial Unicode MS"/>
               </a:rPr>
-              <a:t>。
-</a:t>
-            </a:r>
-          </a:p>
-          <a:p>
-            <a:pPr algn="l">
-              <a:spcBef>
-                <a:spcPts val="0"/>
-              </a:spcBef>
-              <a:spcAft>
-                <a:spcPts val="142"/>
-              </a:spcAft>
-            </a:pPr>
-            <a:r>
-              <a:rPr sz="850" lang="zh-TW" dirty="0">
-                <a:solidFill>
-                  <a:srgbClr val="000000"/>
-                </a:solidFill>
-                <a:latin typeface="Arial Unicode MS"/>
-                <a:ea typeface="Arial Unicode MS"/>
-                <a:cs typeface="Arial Unicode MS"/>
-              </a:rPr>
-              <a:t>離開這一張之前，請把第二行 Range 後面那串 </a:t>
-            </a:r>
-            <a:r>
-              <a:rPr sz="850" b="1" lang="zh-TW" dirty="0">
-                <a:solidFill>
-                  <a:srgbClr val="000000"/>
-                </a:solidFill>
-                <a:latin typeface="Arial Unicode MS"/>
-                <a:ea typeface="Arial Unicode MS"/>
-                <a:cs typeface="Arial Unicode MS"/>
-              </a:rPr>
-              <a:t>10% Lambertian reflectivity</a:t>
-            </a:r>
-            <a:r>
-              <a:rPr sz="850" lang="zh-TW" dirty="0">
-                <a:solidFill>
-                  <a:srgbClr val="000000"/>
-                </a:solidFill>
-                <a:latin typeface="Arial Unicode MS"/>
-                <a:ea typeface="Arial Unicode MS"/>
-                <a:cs typeface="Arial Unicode MS"/>
-              </a:rPr>
-              <a:t> 圈起來。那串字等一下第十二張整張都在講它。</a:t>
+              <a:t>。</a:t>
             </a:r>
           </a:p>
         </p:txBody>
@@ -5060,11 +5104,11 @@
                 <a:spcPts val="0"/>
               </a:spcBef>
               <a:spcAft>
-                <a:spcPts val="133"/>
-              </a:spcAft>
-            </a:pPr>
-            <a:r>
-              <a:rPr sz="800" b="1" lang="zh-TW" dirty="0">
+                <a:spcPts val="142"/>
+              </a:spcAft>
+            </a:pPr>
+            <a:r>
+              <a:rPr sz="850" b="1" lang="zh-TW" dirty="0">
                 <a:solidFill>
                   <a:srgbClr val="000000"/>
                 </a:solidFill>
@@ -5075,7 +5119,7 @@
               <a:t>▍這一張要做什麼</a:t>
             </a:r>
             <a:r>
-              <a:rPr sz="800" lang="zh-TW" dirty="0">
+              <a:rPr sz="850" lang="zh-TW" dirty="0">
                 <a:solidFill>
                   <a:srgbClr val="000000"/>
                 </a:solidFill>
@@ -5093,11 +5137,11 @@
                 <a:spcPts val="0"/>
               </a:spcBef>
               <a:spcAft>
-                <a:spcPts val="133"/>
-              </a:spcAft>
-            </a:pPr>
-            <a:r>
-              <a:rPr sz="800" lang="zh-TW" dirty="0">
+                <a:spcPts val="142"/>
+              </a:spcAft>
+            </a:pPr>
+            <a:r>
+              <a:rPr sz="850" lang="zh-TW" dirty="0">
                 <a:solidFill>
                   <a:srgbClr val="000000"/>
                 </a:solidFill>
@@ -5115,11 +5159,11 @@
                 <a:spcPts val="0"/>
               </a:spcBef>
               <a:spcAft>
-                <a:spcPts val="133"/>
-              </a:spcAft>
-            </a:pPr>
-            <a:r>
-              <a:rPr sz="800" b="1" lang="zh-TW" dirty="0">
+                <a:spcPts val="142"/>
+              </a:spcAft>
+            </a:pPr>
+            <a:r>
+              <a:rPr sz="850" b="1" lang="zh-TW" dirty="0">
                 <a:solidFill>
                   <a:srgbClr val="000000"/>
                 </a:solidFill>
@@ -5130,7 +5174,7 @@
               <a:t>▍畫面上圈這裡</a:t>
             </a:r>
             <a:r>
-              <a:rPr sz="800" lang="zh-TW" dirty="0">
+              <a:rPr sz="850" lang="zh-TW" dirty="0">
                 <a:solidFill>
                   <a:srgbClr val="000000"/>
                 </a:solidFill>
@@ -5148,11 +5192,11 @@
                 <a:spcPts val="0"/>
               </a:spcBef>
               <a:spcAft>
-                <a:spcPts val="133"/>
-              </a:spcAft>
-            </a:pPr>
-            <a:r>
-              <a:rPr sz="800" lang="zh-TW" dirty="0">
+                <a:spcPts val="142"/>
+              </a:spcAft>
+            </a:pPr>
+            <a:r>
+              <a:rPr sz="850" lang="zh-TW" dirty="0">
                 <a:solidFill>
                   <a:srgbClr val="000000"/>
                 </a:solidFill>
@@ -5170,11 +5214,11 @@
                 <a:spcPts val="0"/>
               </a:spcBef>
               <a:spcAft>
-                <a:spcPts val="133"/>
-              </a:spcAft>
-            </a:pPr>
-            <a:r>
-              <a:rPr sz="800" b="1" lang="zh-TW" dirty="0">
+                <a:spcPts val="142"/>
+              </a:spcAft>
+            </a:pPr>
+            <a:r>
+              <a:rPr sz="850" b="1" lang="zh-TW" dirty="0">
                 <a:solidFill>
                   <a:srgbClr val="000000"/>
                 </a:solidFill>
@@ -5185,7 +5229,7 @@
               <a:t>▍以下照著唸</a:t>
             </a:r>
             <a:r>
-              <a:rPr sz="800" lang="zh-TW" dirty="0">
+              <a:rPr sz="850" lang="zh-TW" dirty="0">
                 <a:solidFill>
                   <a:srgbClr val="000000"/>
                 </a:solidFill>
@@ -5203,11 +5247,11 @@
                 <a:spcPts val="0"/>
               </a:spcBef>
               <a:spcAft>
-                <a:spcPts val="133"/>
-              </a:spcAft>
-            </a:pPr>
-            <a:r>
-              <a:rPr sz="800" lang="zh-TW" dirty="0">
+                <a:spcPts val="142"/>
+              </a:spcAft>
+            </a:pPr>
+            <a:r>
+              <a:rPr sz="850" lang="zh-TW" dirty="0">
                 <a:solidFill>
                   <a:srgbClr val="000000"/>
                 </a:solidFill>
@@ -5218,7 +5262,7 @@
               <a:t>第二個型號，Hesai AT128P。這是一顆</a:t>
             </a:r>
             <a:r>
-              <a:rPr sz="800" b="1" lang="zh-TW" dirty="0">
+              <a:rPr sz="850" b="1" lang="zh-TW" dirty="0">
                 <a:solidFill>
                   <a:srgbClr val="000000"/>
                 </a:solidFill>
@@ -5229,7 +5273,7 @@
               <a:t>固定式</a:t>
             </a:r>
             <a:r>
-              <a:rPr sz="800" lang="zh-TW" dirty="0">
+              <a:rPr sz="850" lang="zh-TW" dirty="0">
                 <a:solidFill>
                   <a:srgbClr val="000000"/>
                 </a:solidFill>
@@ -5247,11 +5291,11 @@
                 <a:spcPts val="0"/>
               </a:spcBef>
               <a:spcAft>
-                <a:spcPts val="133"/>
-              </a:spcAft>
-            </a:pPr>
-            <a:r>
-              <a:rPr sz="800" lang="zh-TW" dirty="0">
+                <a:spcPts val="142"/>
+              </a:spcAft>
+            </a:pPr>
+            <a:r>
+              <a:rPr sz="850" lang="zh-TW" dirty="0">
                 <a:solidFill>
                   <a:srgbClr val="000000"/>
                 </a:solidFill>
@@ -5269,11 +5313,11 @@
                 <a:spcPts val="0"/>
               </a:spcBef>
               <a:spcAft>
-                <a:spcPts val="133"/>
-              </a:spcAft>
-            </a:pPr>
-            <a:r>
-              <a:rPr sz="800" b="1" lang="zh-TW" dirty="0">
+                <a:spcPts val="142"/>
+              </a:spcAft>
+            </a:pPr>
+            <a:r>
+              <a:rPr sz="850" b="1" lang="zh-TW" dirty="0">
                 <a:solidFill>
                   <a:srgbClr val="000000"/>
                 </a:solidFill>
@@ -5284,7 +5328,7 @@
               <a:t>第一行，Number of channels，128。</a:t>
             </a:r>
             <a:r>
-              <a:rPr sz="800" lang="zh-TW" dirty="0">
+              <a:rPr sz="850" lang="zh-TW" dirty="0">
                 <a:solidFill>
                   <a:srgbClr val="000000"/>
                 </a:solidFill>
@@ -5302,19 +5346,19 @@
                 <a:spcPts val="0"/>
               </a:spcBef>
               <a:spcAft>
-                <a:spcPts val="133"/>
-              </a:spcAft>
-            </a:pPr>
-            <a:r>
-              <a:rPr sz="800" lang="zh-TW" dirty="0">
-                <a:solidFill>
-                  <a:srgbClr val="000000"/>
-                </a:solidFill>
-                <a:latin typeface="Arial Unicode MS"/>
-                <a:ea typeface="Arial Unicode MS"/>
-                <a:cs typeface="Arial Unicode MS"/>
-              </a:rPr>
-              <a:t>中間 Instrumented range 到 Ranging precision 那幾行是測距與精度，第三節上機會用到，今天先跳過。
+                <a:spcPts val="142"/>
+              </a:spcAft>
+            </a:pPr>
+            <a:r>
+              <a:rPr sz="850" lang="zh-TW" dirty="0">
+                <a:solidFill>
+                  <a:srgbClr val="000000"/>
+                </a:solidFill>
+                <a:latin typeface="Arial Unicode MS"/>
+                <a:ea typeface="Arial Unicode MS"/>
+                <a:cs typeface="Arial Unicode MS"/>
+              </a:rPr>
+              <a:t>中間幾行是測距與精度，第三節上機會用到，今天跳過。
 </a:t>
             </a:r>
           </a:p>
@@ -5324,11 +5368,11 @@
                 <a:spcPts val="0"/>
               </a:spcBef>
               <a:spcAft>
-                <a:spcPts val="133"/>
-              </a:spcAft>
-            </a:pPr>
-            <a:r>
-              <a:rPr sz="800" b="1" lang="zh-TW" dirty="0">
+                <a:spcPts val="142"/>
+              </a:spcAft>
+            </a:pPr>
+            <a:r>
+              <a:rPr sz="850" b="1" lang="zh-TW" dirty="0">
                 <a:solidFill>
                   <a:srgbClr val="000000"/>
                 </a:solidFill>
@@ -5339,7 +5383,7 @@
               <a:t>Horizontal FOV 120 度、Vertical FOV 25.4 度。</a:t>
             </a:r>
             <a:r>
-              <a:rPr sz="800" lang="zh-TW" dirty="0">
+              <a:rPr sz="850" lang="zh-TW" dirty="0">
                 <a:solidFill>
                   <a:srgbClr val="000000"/>
                 </a:solidFill>
@@ -5357,30 +5401,30 @@
                 <a:spcPts val="0"/>
               </a:spcBef>
               <a:spcAft>
-                <a:spcPts val="133"/>
-              </a:spcAft>
-            </a:pPr>
-            <a:r>
-              <a:rPr sz="800" b="1" lang="zh-TW" dirty="0">
-                <a:solidFill>
-                  <a:srgbClr val="000000"/>
-                </a:solidFill>
-                <a:latin typeface="Arial Unicode MS"/>
-                <a:ea typeface="Arial Unicode MS"/>
-                <a:cs typeface="Arial Unicode MS"/>
-              </a:rPr>
-              <a:t>接下來是 Horizontal resolution 和 Vertical resolution，角解析度。</a:t>
-            </a:r>
-            <a:r>
-              <a:rPr sz="800" lang="zh-TW" dirty="0">
-                <a:solidFill>
-                  <a:srgbClr val="000000"/>
-                </a:solidFill>
-                <a:latin typeface="Arial Unicode MS"/>
-                <a:ea typeface="Arial Unicode MS"/>
-                <a:cs typeface="Arial Unicode MS"/>
-              </a:rPr>
-              <a:t>水平 0.1 度、垂直 0.2 度。這一行就是第四週講了一整節的那件事——相鄰兩條射線之間差幾度。上禮拜我要各位自己去感覺縫有多寬，這一顆的廠商直接把數字寫給你了。
+                <a:spcPts val="142"/>
+              </a:spcAft>
+            </a:pPr>
+            <a:r>
+              <a:rPr sz="850" b="1" lang="zh-TW" dirty="0">
+                <a:solidFill>
+                  <a:srgbClr val="000000"/>
+                </a:solidFill>
+                <a:latin typeface="Arial Unicode MS"/>
+                <a:ea typeface="Arial Unicode MS"/>
+                <a:cs typeface="Arial Unicode MS"/>
+              </a:rPr>
+              <a:t>再來是 Horizontal resolution 和 Vertical resolution</a:t>
+            </a:r>
+            <a:r>
+              <a:rPr sz="850" lang="zh-TW" dirty="0">
+                <a:solidFill>
+                  <a:srgbClr val="000000"/>
+                </a:solidFill>
+                <a:latin typeface="Arial Unicode MS"/>
+                <a:ea typeface="Arial Unicode MS"/>
+                <a:cs typeface="Arial Unicode MS"/>
+              </a:rPr>
+              <a:t>，角解析度：水平 0.1 度、垂直 0.2 度。這就是第四週講了一整節的那件事——相鄰兩條射線之間差幾度。上禮拜要各位自己去感覺縫有多寬，這一顆直接把數字寫給你。
 </a:t>
             </a:r>
           </a:p>
@@ -5390,22 +5434,22 @@
                 <a:spcPts val="0"/>
               </a:spcBef>
               <a:spcAft>
-                <a:spcPts val="133"/>
-              </a:spcAft>
-            </a:pPr>
-            <a:r>
-              <a:rPr sz="800" lang="zh-TW" dirty="0">
-                <a:solidFill>
-                  <a:srgbClr val="000000"/>
-                </a:solidFill>
-                <a:latin typeface="Arial Unicode MS"/>
-                <a:ea typeface="Arial Unicode MS"/>
-                <a:cs typeface="Arial Unicode MS"/>
-              </a:rPr>
-              <a:t>不過請各位看清楚：那個 0.1 度前面寫著 </a:t>
-            </a:r>
-            <a:r>
-              <a:rPr sz="800" b="1" lang="zh-TW" dirty="0">
+                <a:spcPts val="142"/>
+              </a:spcAft>
+            </a:pPr>
+            <a:r>
+              <a:rPr sz="850" lang="zh-TW" dirty="0">
+                <a:solidFill>
+                  <a:srgbClr val="000000"/>
+                </a:solidFill>
+                <a:latin typeface="Arial Unicode MS"/>
+                <a:ea typeface="Arial Unicode MS"/>
+                <a:cs typeface="Arial Unicode MS"/>
+              </a:rPr>
+              <a:t>不過請看清楚：那個 0.1 度前面寫著 </a:t>
+            </a:r>
+            <a:r>
+              <a:rPr sz="850" b="1" lang="zh-TW" dirty="0">
                 <a:solidFill>
                   <a:srgbClr val="000000"/>
                 </a:solidFill>
@@ -5416,7 +5460,7 @@
               <a:t>Far-field</a:t>
             </a:r>
             <a:r>
-              <a:rPr sz="800" lang="zh-TW" dirty="0">
+              <a:rPr sz="850" lang="zh-TW" dirty="0">
                 <a:solidFill>
                   <a:srgbClr val="000000"/>
                 </a:solidFill>
@@ -5427,7 +5471,7 @@
               <a:t>，後面還有個 </a:t>
             </a:r>
             <a:r>
-              <a:rPr sz="800" b="1" lang="zh-TW" dirty="0">
+              <a:rPr sz="850" b="1" lang="zh-TW" dirty="0">
                 <a:solidFill>
                   <a:srgbClr val="000000"/>
                 </a:solidFill>
@@ -5438,15 +5482,15 @@
               <a:t>(10 Hz)</a:t>
             </a:r>
             <a:r>
-              <a:rPr sz="800" lang="zh-TW" dirty="0">
-                <a:solidFill>
-                  <a:srgbClr val="000000"/>
-                </a:solidFill>
-                <a:latin typeface="Arial Unicode MS"/>
-                <a:ea typeface="Arial Unicode MS"/>
-                <a:cs typeface="Arial Unicode MS"/>
-              </a:rPr>
-              <a:t>。換成 20 Hz 就變 0.2 度，近距離更是 0.2 到 0.8 度。又是一個「有條件的數字」，跟 OS1 的 80% 和 10% 是同一種陷阱。
+              <a:rPr sz="850" lang="zh-TW" dirty="0">
+                <a:solidFill>
+                  <a:srgbClr val="000000"/>
+                </a:solidFill>
+                <a:latin typeface="Arial Unicode MS"/>
+                <a:ea typeface="Arial Unicode MS"/>
+                <a:cs typeface="Arial Unicode MS"/>
+              </a:rPr>
+              <a:t>。換成 20 Hz 就變 0.2 度。又是一個「有條件的數字」，跟剛剛 OS1 的 80% 和 10% 是同一種陷阱。
 </a:t>
             </a:r>
           </a:p>
@@ -5456,22 +5500,22 @@
                 <a:spcPts val="0"/>
               </a:spcBef>
               <a:spcAft>
-                <a:spcPts val="133"/>
-              </a:spcAft>
-            </a:pPr>
-            <a:r>
-              <a:rPr sz="800" lang="zh-TW" dirty="0">
-                <a:solidFill>
-                  <a:srgbClr val="000000"/>
-                </a:solidFill>
-                <a:latin typeface="Arial Unicode MS"/>
-                <a:ea typeface="Arial Unicode MS"/>
-                <a:cs typeface="Arial Unicode MS"/>
-              </a:rPr>
-              <a:t>好，現在把兩顆放在一起想。OS1 把點灑在</a:t>
-            </a:r>
-            <a:r>
-              <a:rPr sz="800" b="1" lang="zh-TW" dirty="0">
+                <a:spcPts val="142"/>
+              </a:spcAft>
+            </a:pPr>
+            <a:r>
+              <a:rPr sz="850" lang="zh-TW" dirty="0">
+                <a:solidFill>
+                  <a:srgbClr val="000000"/>
+                </a:solidFill>
+                <a:latin typeface="Arial Unicode MS"/>
+                <a:ea typeface="Arial Unicode MS"/>
+                <a:cs typeface="Arial Unicode MS"/>
+              </a:rPr>
+              <a:t>現在把兩顆放在一起想。OS1 把點灑在</a:t>
+            </a:r>
+            <a:r>
+              <a:rPr sz="850" b="1" lang="zh-TW" dirty="0">
                 <a:solidFill>
                   <a:srgbClr val="000000"/>
                 </a:solidFill>
@@ -5482,7 +5526,7 @@
               <a:t>一整圈</a:t>
             </a:r>
             <a:r>
-              <a:rPr sz="800" lang="zh-TW" dirty="0">
+              <a:rPr sz="850" lang="zh-TW" dirty="0">
                 <a:solidFill>
                   <a:srgbClr val="000000"/>
                 </a:solidFill>
@@ -5493,7 +5537,7 @@
               <a:t>，AT128P 把同樣多的點集中在</a:t>
             </a:r>
             <a:r>
-              <a:rPr sz="800" b="1" lang="zh-TW" dirty="0">
+              <a:rPr sz="850" b="1" lang="zh-TW" dirty="0">
                 <a:solidFill>
                   <a:srgbClr val="000000"/>
                 </a:solidFill>
@@ -5504,40 +5548,18 @@
               <a:t>前面 120 度</a:t>
             </a:r>
             <a:r>
-              <a:rPr sz="800" lang="zh-TW" dirty="0">
-                <a:solidFill>
-                  <a:srgbClr val="000000"/>
-                </a:solidFill>
-                <a:latin typeface="Arial Unicode MS"/>
-                <a:ea typeface="Arial Unicode MS"/>
-                <a:cs typeface="Arial Unicode MS"/>
-              </a:rPr>
-              <a:t>。第四週我們講過什麼？同樣那些射線，攤得愈廣就愈稀，集中起來就愈密。
-</a:t>
-            </a:r>
-          </a:p>
-          <a:p>
-            <a:pPr algn="l">
-              <a:spcBef>
-                <a:spcPts val="0"/>
-              </a:spcBef>
-              <a:spcAft>
-                <a:spcPts val="133"/>
-              </a:spcAft>
-            </a:pPr>
-            <a:r>
-              <a:rPr sz="800" lang="zh-TW" dirty="0">
-                <a:solidFill>
-                  <a:srgbClr val="000000"/>
-                </a:solidFill>
-                <a:latin typeface="Arial Unicode MS"/>
-                <a:ea typeface="Arial Unicode MS"/>
-                <a:cs typeface="Arial Unicode MS"/>
-              </a:rPr>
-              <a:t>所以這兩顆不是誰比較好，是</a:t>
-            </a:r>
-            <a:r>
-              <a:rPr sz="800" b="1" lang="zh-TW" dirty="0">
+              <a:rPr sz="850" lang="zh-TW" dirty="0">
+                <a:solidFill>
+                  <a:srgbClr val="000000"/>
+                </a:solidFill>
+                <a:latin typeface="Arial Unicode MS"/>
+                <a:ea typeface="Arial Unicode MS"/>
+                <a:cs typeface="Arial Unicode MS"/>
+              </a:rPr>
+              <a:t>——第四週講過，同樣那些射線，攤得愈廣就愈稀。所以這兩顆不是誰比較好，是</a:t>
+            </a:r>
+            <a:r>
+              <a:rPr sz="850" b="1" lang="zh-TW" dirty="0">
                 <a:solidFill>
                   <a:srgbClr val="000000"/>
                 </a:solidFill>
@@ -5548,15 +5570,15 @@
               <a:t>用途不一樣</a:t>
             </a:r>
             <a:r>
-              <a:rPr sz="800" lang="zh-TW" dirty="0">
-                <a:solidFill>
-                  <a:srgbClr val="000000"/>
-                </a:solidFill>
-                <a:latin typeface="Arial Unicode MS"/>
-                <a:ea typeface="Arial Unicode MS"/>
-                <a:cs typeface="Arial Unicode MS"/>
-              </a:rPr>
-              <a:t>。要看路口四面八方，你要 360 度那一顆；要在高速公路上看遠方，你要把點集中在前面那一顆。第三節上機的時候，各位會親眼看到這個差別有多大。</a:t>
+              <a:rPr sz="850" lang="zh-TW" dirty="0">
+                <a:solidFill>
+                  <a:srgbClr val="000000"/>
+                </a:solidFill>
+                <a:latin typeface="Arial Unicode MS"/>
+                <a:ea typeface="Arial Unicode MS"/>
+                <a:cs typeface="Arial Unicode MS"/>
+              </a:rPr>
+              <a:t>：要看路口四面八方，你要 360 度那一顆；要在高速公路上看遠方，你要把點集中在前面那一顆。第三節上機的時候，各位會親眼看到這個差別有多大。</a:t>
             </a:r>
           </a:p>
         </p:txBody>

--- a/第五週(10-08)/第五週_第1節_簡報.pptx
+++ b/第五週(10-08)/第五週_第1節_簡報.pptx
@@ -1793,11 +1793,11 @@
                 <a:spcPts val="0"/>
               </a:spcBef>
               <a:spcAft>
-                <a:spcPts val="150"/>
-              </a:spcAft>
-            </a:pPr>
-            <a:r>
-              <a:rPr sz="900" b="1" lang="zh-TW" dirty="0">
+                <a:spcPts val="142"/>
+              </a:spcAft>
+            </a:pPr>
+            <a:r>
+              <a:rPr sz="850" b="1" lang="zh-TW" dirty="0">
                 <a:solidFill>
                   <a:srgbClr val="000000"/>
                 </a:solidFill>
@@ -1808,7 +1808,7 @@
               <a:t>▍這一張要做什麼</a:t>
             </a:r>
             <a:r>
-              <a:rPr sz="900" lang="zh-TW" dirty="0">
+              <a:rPr sz="850" lang="zh-TW" dirty="0">
                 <a:solidFill>
                   <a:srgbClr val="000000"/>
                 </a:solidFill>
@@ -1826,11 +1826,11 @@
                 <a:spcPts val="0"/>
               </a:spcBef>
               <a:spcAft>
-                <a:spcPts val="150"/>
-              </a:spcAft>
-            </a:pPr>
-            <a:r>
-              <a:rPr sz="900" lang="zh-TW" dirty="0">
+                <a:spcPts val="142"/>
+              </a:spcAft>
+            </a:pPr>
+            <a:r>
+              <a:rPr sz="850" lang="zh-TW" dirty="0">
                 <a:solidFill>
                   <a:srgbClr val="000000"/>
                 </a:solidFill>
@@ -1848,11 +1848,11 @@
                 <a:spcPts val="0"/>
               </a:spcBef>
               <a:spcAft>
-                <a:spcPts val="150"/>
-              </a:spcAft>
-            </a:pPr>
-            <a:r>
-              <a:rPr sz="900" b="1" lang="zh-TW" dirty="0">
+                <a:spcPts val="142"/>
+              </a:spcAft>
+            </a:pPr>
+            <a:r>
+              <a:rPr sz="850" b="1" lang="zh-TW" dirty="0">
                 <a:solidFill>
                   <a:srgbClr val="000000"/>
                 </a:solidFill>
@@ -1863,7 +1863,7 @@
               <a:t>▍畫面上圈這裡</a:t>
             </a:r>
             <a:r>
-              <a:rPr sz="900" lang="zh-TW" dirty="0">
+              <a:rPr sz="850" lang="zh-TW" dirty="0">
                 <a:solidFill>
                   <a:srgbClr val="000000"/>
                 </a:solidFill>
@@ -1881,11 +1881,11 @@
                 <a:spcPts val="0"/>
               </a:spcBef>
               <a:spcAft>
-                <a:spcPts val="150"/>
-              </a:spcAft>
-            </a:pPr>
-            <a:r>
-              <a:rPr sz="900" lang="zh-TW" dirty="0">
+                <a:spcPts val="142"/>
+              </a:spcAft>
+            </a:pPr>
+            <a:r>
+              <a:rPr sz="850" lang="zh-TW" dirty="0">
                 <a:solidFill>
                   <a:srgbClr val="000000"/>
                 </a:solidFill>
@@ -1903,11 +1903,11 @@
                 <a:spcPts val="0"/>
               </a:spcBef>
               <a:spcAft>
-                <a:spcPts val="150"/>
-              </a:spcAft>
-            </a:pPr>
-            <a:r>
-              <a:rPr sz="900" b="1" lang="zh-TW" dirty="0">
+                <a:spcPts val="142"/>
+              </a:spcAft>
+            </a:pPr>
+            <a:r>
+              <a:rPr sz="850" b="1" lang="zh-TW" dirty="0">
                 <a:solidFill>
                   <a:srgbClr val="000000"/>
                 </a:solidFill>
@@ -1918,7 +1918,7 @@
               <a:t>▍以下照著唸</a:t>
             </a:r>
             <a:r>
-              <a:rPr sz="900" lang="zh-TW" dirty="0">
+              <a:rPr sz="850" lang="zh-TW" dirty="0">
                 <a:solidFill>
                   <a:srgbClr val="000000"/>
                 </a:solidFill>
@@ -1936,33 +1936,165 @@
                 <a:spcPts val="0"/>
               </a:spcBef>
               <a:spcAft>
-                <a:spcPts val="150"/>
-              </a:spcAft>
-            </a:pPr>
-            <a:r>
-              <a:rPr sz="900" lang="zh-TW" dirty="0">
-                <a:solidFill>
-                  <a:srgbClr val="000000"/>
-                </a:solidFill>
-                <a:latin typeface="Arial Unicode MS"/>
-                <a:ea typeface="Arial Unicode MS"/>
-                <a:cs typeface="Arial Unicode MS"/>
-              </a:rPr>
-              <a:t>再看一個很容易讀漏的地方。第七張那張圖上，水平解析度和轉速後面都跟著一個字：</a:t>
-            </a:r>
-            <a:r>
-              <a:rPr sz="900" b="1" lang="zh-TW" dirty="0">
-                <a:solidFill>
-                  <a:srgbClr val="000000"/>
-                </a:solidFill>
-                <a:latin typeface="Arial Unicode MS"/>
-                <a:ea typeface="Arial Unicode MS"/>
-                <a:cs typeface="Arial Unicode MS"/>
-              </a:rPr>
-              <a:t>configurable，可以設定</a:t>
-            </a:r>
-            <a:r>
-              <a:rPr sz="900" lang="zh-TW" dirty="0">
+                <a:spcPts val="142"/>
+              </a:spcAft>
+            </a:pPr>
+            <a:r>
+              <a:rPr sz="850" lang="zh-TW" dirty="0">
+                <a:solidFill>
+                  <a:srgbClr val="000000"/>
+                </a:solidFill>
+                <a:latin typeface="Arial Unicode MS"/>
+                <a:ea typeface="Arial Unicode MS"/>
+                <a:cs typeface="Arial Unicode MS"/>
+              </a:rPr>
+              <a:t>再看一個很容易讀漏的地方。第七張那張圖上，水平解析度和轉速後面都跟著同一個字：</a:t>
+            </a:r>
+            <a:r>
+              <a:rPr sz="850" b="1" lang="zh-TW" dirty="0">
+                <a:solidFill>
+                  <a:srgbClr val="000000"/>
+                </a:solidFill>
+                <a:latin typeface="Arial Unicode MS"/>
+                <a:ea typeface="Arial Unicode MS"/>
+                <a:cs typeface="Arial Unicode MS"/>
+              </a:rPr>
+              <a:t>configurable</a:t>
+            </a:r>
+            <a:r>
+              <a:rPr sz="850" lang="zh-TW" dirty="0">
+                <a:solidFill>
+                  <a:srgbClr val="000000"/>
+                </a:solidFill>
+                <a:latin typeface="Arial Unicode MS"/>
+                <a:ea typeface="Arial Unicode MS"/>
+                <a:cs typeface="Arial Unicode MS"/>
+              </a:rPr>
+              <a:t>，可以設定。
+</a:t>
+            </a:r>
+          </a:p>
+          <a:p>
+            <a:pPr algn="l">
+              <a:spcBef>
+                <a:spcPts val="0"/>
+              </a:spcBef>
+              <a:spcAft>
+                <a:spcPts val="142"/>
+              </a:spcAft>
+            </a:pPr>
+            <a:r>
+              <a:rPr sz="850" lang="zh-TW" dirty="0">
+                <a:solidFill>
+                  <a:srgbClr val="000000"/>
+                </a:solidFill>
+                <a:latin typeface="Arial Unicode MS"/>
+                <a:ea typeface="Arial Unicode MS"/>
+                <a:cs typeface="Arial Unicode MS"/>
+              </a:rPr>
+              <a:t>datasheet 後面幾頁就把可以設定的組合整個列出來，也就是左邊這一塊，</a:t>
+            </a:r>
+            <a:r>
+              <a:rPr sz="850" b="1" lang="zh-TW" dirty="0">
+                <a:solidFill>
+                  <a:srgbClr val="000000"/>
+                </a:solidFill>
+                <a:latin typeface="Arial Unicode MS"/>
+                <a:ea typeface="Arial Unicode MS"/>
+                <a:cs typeface="Arial Unicode MS"/>
+              </a:rPr>
+              <a:t>Lidar Operating Modes</a:t>
+            </a:r>
+            <a:r>
+              <a:rPr sz="850" lang="zh-TW" dirty="0">
+                <a:solidFill>
+                  <a:srgbClr val="000000"/>
+                </a:solidFill>
+                <a:latin typeface="Arial Unicode MS"/>
+                <a:ea typeface="Arial Unicode MS"/>
+                <a:cs typeface="Arial Unicode MS"/>
+              </a:rPr>
+              <a:t>。512 點一圈，可以配 10 Hz 或 20 Hz。1024 點一圈，也可以配 10 Hz 或 20 Hz。
+</a:t>
+            </a:r>
+          </a:p>
+          <a:p>
+            <a:pPr algn="l">
+              <a:spcBef>
+                <a:spcPts val="0"/>
+              </a:spcBef>
+              <a:spcAft>
+                <a:spcPts val="142"/>
+              </a:spcAft>
+            </a:pPr>
+            <a:r>
+              <a:rPr sz="850" lang="zh-TW" dirty="0">
+                <a:solidFill>
+                  <a:srgbClr val="000000"/>
+                </a:solidFill>
+                <a:latin typeface="Arial Unicode MS"/>
+                <a:ea typeface="Arial Unicode MS"/>
+                <a:cs typeface="Arial Unicode MS"/>
+              </a:rPr>
+              <a:t>請各位特別看第三行：</a:t>
+            </a:r>
+            <a:r>
+              <a:rPr sz="850" b="1" lang="zh-TW" dirty="0">
+                <a:solidFill>
+                  <a:srgbClr val="000000"/>
+                </a:solidFill>
+                <a:latin typeface="Arial Unicode MS"/>
+                <a:ea typeface="Arial Unicode MS"/>
+                <a:cs typeface="Arial Unicode MS"/>
+              </a:rPr>
+              <a:t>x 2048，只有 @ 10 Hz</a:t>
+            </a:r>
+            <a:r>
+              <a:rPr sz="850" lang="zh-TW" dirty="0">
+                <a:solidFill>
+                  <a:srgbClr val="000000"/>
+                </a:solidFill>
+                <a:latin typeface="Arial Unicode MS"/>
+                <a:ea typeface="Arial Unicode MS"/>
+                <a:cs typeface="Arial Unicode MS"/>
+              </a:rPr>
+              <a:t>。想要最密的點，就不能跑 20 Hz。廠商自己把這件事寫在表上了——要最密，就得轉慢一點。
+</a:t>
+            </a:r>
+          </a:p>
+          <a:p>
+            <a:pPr algn="l">
+              <a:spcBef>
+                <a:spcPts val="0"/>
+              </a:spcBef>
+              <a:spcAft>
+                <a:spcPts val="142"/>
+              </a:spcAft>
+            </a:pPr>
+            <a:r>
+              <a:rPr sz="850" lang="zh-TW" dirty="0">
+                <a:solidFill>
+                  <a:srgbClr val="000000"/>
+                </a:solidFill>
+                <a:latin typeface="Arial Unicode MS"/>
+                <a:ea typeface="Arial Unicode MS"/>
+                <a:cs typeface="Arial Unicode MS"/>
+              </a:rPr>
+              <a:t>這代表什麼？代表</a:t>
+            </a:r>
+            <a:r>
+              <a:rPr sz="850" b="1" lang="zh-TW" dirty="0">
+                <a:solidFill>
+                  <a:srgbClr val="000000"/>
+                </a:solidFill>
+                <a:latin typeface="Arial Unicode MS"/>
+                <a:ea typeface="Arial Unicode MS"/>
+                <a:cs typeface="Arial Unicode MS"/>
+              </a:rPr>
+              <a:t>同一顆光達，你買回來之後還可以選模式</a:t>
+            </a:r>
+            <a:r>
+              <a:rPr sz="850" lang="zh-TW" dirty="0">
                 <a:solidFill>
                   <a:srgbClr val="000000"/>
                 </a:solidFill>
@@ -1980,121 +2112,33 @@
                 <a:spcPts val="0"/>
               </a:spcBef>
               <a:spcAft>
-                <a:spcPts val="150"/>
-              </a:spcAft>
-            </a:pPr>
-            <a:r>
-              <a:rPr sz="900" lang="zh-TW" dirty="0">
-                <a:solidFill>
-                  <a:srgbClr val="000000"/>
-                </a:solidFill>
-                <a:latin typeface="Arial Unicode MS"/>
-                <a:ea typeface="Arial Unicode MS"/>
-                <a:cs typeface="Arial Unicode MS"/>
-              </a:rPr>
-              <a:t>datasheet 後面幾頁就把可以設定的組合整個列出來，也就是左邊這一塊 </a:t>
-            </a:r>
-            <a:r>
-              <a:rPr sz="900" b="1" lang="zh-TW" dirty="0">
-                <a:solidFill>
-                  <a:srgbClr val="000000"/>
-                </a:solidFill>
-                <a:latin typeface="Arial Unicode MS"/>
-                <a:ea typeface="Arial Unicode MS"/>
-                <a:cs typeface="Arial Unicode MS"/>
-              </a:rPr>
-              <a:t>Lidar Operating Modes</a:t>
-            </a:r>
-            <a:r>
-              <a:rPr sz="900" lang="zh-TW" dirty="0">
-                <a:solidFill>
-                  <a:srgbClr val="000000"/>
-                </a:solidFill>
-                <a:latin typeface="Arial Unicode MS"/>
-                <a:ea typeface="Arial Unicode MS"/>
-                <a:cs typeface="Arial Unicode MS"/>
-              </a:rPr>
-              <a:t>：512 點一圈可以配 10 或 20 Hz，1024 點一圈也可以配 10 或 20 Hz。
-</a:t>
-            </a:r>
-          </a:p>
-          <a:p>
-            <a:pPr algn="l">
-              <a:spcBef>
-                <a:spcPts val="0"/>
-              </a:spcBef>
-              <a:spcAft>
-                <a:spcPts val="150"/>
-              </a:spcAft>
-            </a:pPr>
-            <a:r>
-              <a:rPr sz="900" lang="zh-TW" dirty="0">
-                <a:solidFill>
-                  <a:srgbClr val="000000"/>
-                </a:solidFill>
-                <a:latin typeface="Arial Unicode MS"/>
-                <a:ea typeface="Arial Unicode MS"/>
-                <a:cs typeface="Arial Unicode MS"/>
-              </a:rPr>
-              <a:t>請各位特別看第三行：</a:t>
-            </a:r>
-            <a:r>
-              <a:rPr sz="900" b="1" lang="zh-TW" dirty="0">
-                <a:solidFill>
-                  <a:srgbClr val="000000"/>
-                </a:solidFill>
-                <a:latin typeface="Arial Unicode MS"/>
-                <a:ea typeface="Arial Unicode MS"/>
-                <a:cs typeface="Arial Unicode MS"/>
-              </a:rPr>
-              <a:t>x 2048 @ 10 Hz</a:t>
-            </a:r>
-            <a:r>
-              <a:rPr sz="900" lang="zh-TW" dirty="0">
-                <a:solidFill>
-                  <a:srgbClr val="000000"/>
-                </a:solidFill>
-                <a:latin typeface="Arial Unicode MS"/>
-                <a:ea typeface="Arial Unicode MS"/>
-                <a:cs typeface="Arial Unicode MS"/>
-              </a:rPr>
-              <a:t>，只有 10 Hz。想要最密的點，就不能跑 20 Hz——這張表自己就把「沒有免費的規格」寫出來了。
-</a:t>
-            </a:r>
-          </a:p>
-          <a:p>
-            <a:pPr algn="l">
-              <a:spcBef>
-                <a:spcPts val="0"/>
-              </a:spcBef>
-              <a:spcAft>
-                <a:spcPts val="150"/>
-              </a:spcAft>
-            </a:pPr>
-            <a:r>
-              <a:rPr sz="900" lang="zh-TW" dirty="0">
-                <a:solidFill>
-                  <a:srgbClr val="000000"/>
-                </a:solidFill>
-                <a:latin typeface="Arial Unicode MS"/>
-                <a:ea typeface="Arial Unicode MS"/>
-                <a:cs typeface="Arial Unicode MS"/>
-              </a:rPr>
-              <a:t>這代表什麼？代表</a:t>
-            </a:r>
-            <a:r>
-              <a:rPr sz="900" b="1" lang="zh-TW" dirty="0">
-                <a:solidFill>
-                  <a:srgbClr val="000000"/>
-                </a:solidFill>
-                <a:latin typeface="Arial Unicode MS"/>
-                <a:ea typeface="Arial Unicode MS"/>
-                <a:cs typeface="Arial Unicode MS"/>
-              </a:rPr>
-              <a:t>同一顆光達，你買回來之後還可以選模式</a:t>
-            </a:r>
-            <a:r>
-              <a:rPr sz="900" lang="zh-TW" dirty="0">
+                <a:spcPts val="142"/>
+              </a:spcAft>
+            </a:pPr>
+            <a:r>
+              <a:rPr sz="850" lang="zh-TW" dirty="0">
+                <a:solidFill>
+                  <a:srgbClr val="000000"/>
+                </a:solidFill>
+                <a:latin typeface="Arial Unicode MS"/>
+                <a:ea typeface="Arial Unicode MS"/>
+                <a:cs typeface="Arial Unicode MS"/>
+              </a:rPr>
+              <a:t>第六張那張表我算給各位看，四十公尺的行人身上，OS1 有九個點。那是在 1024 點一圈的模式下算的。切到 2048 點一圈，左右的點加倍，九個點就變成</a:t>
+            </a:r>
+            <a:r>
+              <a:rPr sz="850" b="1" lang="zh-TW" dirty="0">
+                <a:solidFill>
+                  <a:srgbClr val="000000"/>
+                </a:solidFill>
+                <a:latin typeface="Arial Unicode MS"/>
+                <a:ea typeface="Arial Unicode MS"/>
+                <a:cs typeface="Arial Unicode MS"/>
+              </a:rPr>
+              <a:t>十八個點</a:t>
+            </a:r>
+            <a:r>
+              <a:rPr sz="850" lang="zh-TW" dirty="0">
                 <a:solidFill>
                   <a:srgbClr val="000000"/>
                 </a:solidFill>
@@ -2112,66 +2156,22 @@
                 <a:spcPts val="0"/>
               </a:spcBef>
               <a:spcAft>
-                <a:spcPts val="150"/>
-              </a:spcAft>
-            </a:pPr>
-            <a:r>
-              <a:rPr sz="900" lang="zh-TW" dirty="0">
-                <a:solidFill>
-                  <a:srgbClr val="000000"/>
-                </a:solidFill>
-                <a:latin typeface="Arial Unicode MS"/>
-                <a:ea typeface="Arial Unicode MS"/>
-                <a:cs typeface="Arial Unicode MS"/>
-              </a:rPr>
-              <a:t>第六張那張表我算給各位看，四十公尺的行人身上 OS1 有九個點。那是在 1024 點一圈的模式下算的。切到 2048 點一圈，左右的點加倍，九個點就變成</a:t>
-            </a:r>
-            <a:r>
-              <a:rPr sz="900" b="1" lang="zh-TW" dirty="0">
-                <a:solidFill>
-                  <a:srgbClr val="000000"/>
-                </a:solidFill>
-                <a:latin typeface="Arial Unicode MS"/>
-                <a:ea typeface="Arial Unicode MS"/>
-                <a:cs typeface="Arial Unicode MS"/>
-              </a:rPr>
-              <a:t>十八個點</a:t>
-            </a:r>
-            <a:r>
-              <a:rPr sz="900" lang="zh-TW" dirty="0">
-                <a:solidFill>
-                  <a:srgbClr val="000000"/>
-                </a:solidFill>
-                <a:latin typeface="Arial Unicode MS"/>
-                <a:ea typeface="Arial Unicode MS"/>
-                <a:cs typeface="Arial Unicode MS"/>
-              </a:rPr>
-              <a:t>。
-</a:t>
-            </a:r>
-          </a:p>
-          <a:p>
-            <a:pPr algn="l">
-              <a:spcBef>
-                <a:spcPts val="0"/>
-              </a:spcBef>
-              <a:spcAft>
-                <a:spcPts val="150"/>
-              </a:spcAft>
-            </a:pPr>
-            <a:r>
-              <a:rPr sz="900" lang="zh-TW" dirty="0">
-                <a:solidFill>
-                  <a:srgbClr val="000000"/>
-                </a:solidFill>
-                <a:latin typeface="Arial Unicode MS"/>
-                <a:ea typeface="Arial Unicode MS"/>
-                <a:cs typeface="Arial Unicode MS"/>
-              </a:rPr>
-              <a:t>同一顆硬體、同一個人站在同一個位置，因為設定不同，結果差一倍。所以買之前要問清楚：</a:t>
-            </a:r>
-            <a:r>
-              <a:rPr sz="900" b="1" lang="zh-TW" dirty="0">
+                <a:spcPts val="142"/>
+              </a:spcAft>
+            </a:pPr>
+            <a:r>
+              <a:rPr sz="850" lang="zh-TW" dirty="0">
+                <a:solidFill>
+                  <a:srgbClr val="000000"/>
+                </a:solidFill>
+                <a:latin typeface="Arial Unicode MS"/>
+                <a:ea typeface="Arial Unicode MS"/>
+                <a:cs typeface="Arial Unicode MS"/>
+              </a:rPr>
+              <a:t>同一顆硬體，同一個人站在同一個位置，設定不一樣，結果就差一倍。所以買之前要問清楚：</a:t>
+            </a:r>
+            <a:r>
+              <a:rPr sz="850" b="1" lang="zh-TW" dirty="0">
                 <a:solidFill>
                   <a:srgbClr val="000000"/>
                 </a:solidFill>
@@ -2182,7 +2182,7 @@
               <a:t>廠商標的那個漂亮數字，是在哪一個模式下量的？</a:t>
             </a:r>
             <a:r>
-              <a:rPr sz="900" lang="zh-TW" dirty="0">
+              <a:rPr sz="850" lang="zh-TW" dirty="0">
                 <a:solidFill>
                   <a:srgbClr val="000000"/>
                 </a:solidFill>
@@ -2200,19 +2200,19 @@
                 <a:spcPts val="0"/>
               </a:spcBef>
               <a:spcAft>
-                <a:spcPts val="150"/>
-              </a:spcAft>
-            </a:pPr>
-            <a:r>
-              <a:rPr sz="900" lang="zh-TW" dirty="0">
-                <a:solidFill>
-                  <a:srgbClr val="000000"/>
-                </a:solidFill>
-                <a:latin typeface="Arial Unicode MS"/>
-                <a:ea typeface="Arial Unicode MS"/>
-                <a:cs typeface="Arial Unicode MS"/>
-              </a:rPr>
-              <a:t>第三節上機的時候，我會請各位親自切一次。工具上的判定會從「不夠用」變成「夠用」——只是換了一個模式，什麼錢都沒多花。
+                <a:spcPts val="142"/>
+              </a:spcAft>
+            </a:pPr>
+            <a:r>
+              <a:rPr sz="850" lang="zh-TW" dirty="0">
+                <a:solidFill>
+                  <a:srgbClr val="000000"/>
+                </a:solidFill>
+                <a:latin typeface="Arial Unicode MS"/>
+                <a:ea typeface="Arial Unicode MS"/>
+                <a:cs typeface="Arial Unicode MS"/>
+              </a:rPr>
+              <a:t>第三節上機的時候，我會請各位親自切一次。工具上的判定會從「不夠用」變成「夠用」，只是換了一個模式，什麼錢都沒多花。
 </a:t>
             </a:r>
           </a:p>
@@ -2222,19 +2222,19 @@
                 <a:spcPts val="0"/>
               </a:spcBef>
               <a:spcAft>
-                <a:spcPts val="150"/>
-              </a:spcAft>
-            </a:pPr>
-            <a:r>
-              <a:rPr sz="900" lang="zh-TW" dirty="0">
-                <a:solidFill>
-                  <a:srgbClr val="000000"/>
-                </a:solidFill>
-                <a:latin typeface="Arial Unicode MS"/>
-                <a:ea typeface="Arial Unicode MS"/>
-                <a:cs typeface="Arial Unicode MS"/>
-              </a:rPr>
-              <a:t>當然天下沒有白吃的午餐。點數加倍，資料量也加倍，車上那台電腦要跟得上；而且剛剛看到，2048 還配不了 20 Hz。</a:t>
+                <a:spcPts val="142"/>
+              </a:spcAft>
+            </a:pPr>
+            <a:r>
+              <a:rPr sz="850" lang="zh-TW" dirty="0">
+                <a:solidFill>
+                  <a:srgbClr val="000000"/>
+                </a:solidFill>
+                <a:latin typeface="Arial Unicode MS"/>
+                <a:ea typeface="Arial Unicode MS"/>
+                <a:cs typeface="Arial Unicode MS"/>
+              </a:rPr>
+              <a:t>當然天下沒有白吃的午餐。點數加倍，資料量也跟著加倍，車上那台電腦要算得完才行。而且剛剛看到了，2048 還配不了 20 Hz。</a:t>
             </a:r>
           </a:p>
         </p:txBody>
@@ -2762,7 +2762,7 @@
                 <a:ea typeface="Arial Unicode MS"/>
                 <a:cs typeface="Arial Unicode MS"/>
               </a:rPr>
-              <a:t>沒寫就是警訊。好的規格表會把兩個都寫出來，像 OS1 這樣——這其實是一家廠商誠不誠實的指標。</a:t>
+              <a:t>他沒寫，你就要小心。好的規格表會把兩個都寫出來，像 OS1 這樣。願不願意把比較難看的那個也印上去，其實看得出一家廠商老不老實。</a:t>
             </a:r>
           </a:p>
         </p:txBody>
@@ -3026,7 +3026,7 @@
                 <a:ea typeface="Arial Unicode MS"/>
                 <a:cs typeface="Arial Unicode MS"/>
               </a:rPr>
-              <a:t>現在請大家自己操作，八分鐘。
+              <a:t>現在請大家自己操作，十分鐘。
 </a:t>
             </a:r>
           </a:p>
@@ -3257,7 +3257,7 @@
                 <a:ea typeface="Arial Unicode MS"/>
                 <a:cs typeface="Arial Unicode MS"/>
               </a:rPr>
-              <a:t>八分鐘到了我們就收，接著講下一件事。</a:t>
+              <a:t>十分鐘到了我們就收，接著講下一件事。</a:t>
             </a:r>
           </a:p>
         </p:txBody>
@@ -4455,11 +4455,11 @@
                 <a:spcPts val="0"/>
               </a:spcBef>
               <a:spcAft>
-                <a:spcPts val="142"/>
-              </a:spcAft>
-            </a:pPr>
-            <a:r>
-              <a:rPr sz="850" b="1" lang="zh-TW" dirty="0">
+                <a:spcPts val="133"/>
+              </a:spcAft>
+            </a:pPr>
+            <a:r>
+              <a:rPr sz="800" b="1" lang="zh-TW" dirty="0">
                 <a:solidFill>
                   <a:srgbClr val="000000"/>
                 </a:solidFill>
@@ -4470,7 +4470,7 @@
               <a:t>▍這一張要做什麼</a:t>
             </a:r>
             <a:r>
-              <a:rPr sz="850" lang="zh-TW" dirty="0">
+              <a:rPr sz="800" lang="zh-TW" dirty="0">
                 <a:solidFill>
                   <a:srgbClr val="000000"/>
                 </a:solidFill>
@@ -4488,11 +4488,11 @@
                 <a:spcPts val="0"/>
               </a:spcBef>
               <a:spcAft>
-                <a:spcPts val="142"/>
-              </a:spcAft>
-            </a:pPr>
-            <a:r>
-              <a:rPr sz="850" lang="zh-TW" dirty="0">
+                <a:spcPts val="133"/>
+              </a:spcAft>
+            </a:pPr>
+            <a:r>
+              <a:rPr sz="800" lang="zh-TW" dirty="0">
                 <a:solidFill>
                   <a:srgbClr val="000000"/>
                 </a:solidFill>
@@ -4510,11 +4510,11 @@
                 <a:spcPts val="0"/>
               </a:spcBef>
               <a:spcAft>
-                <a:spcPts val="142"/>
-              </a:spcAft>
-            </a:pPr>
-            <a:r>
-              <a:rPr sz="850" b="1" lang="zh-TW" dirty="0">
+                <a:spcPts val="133"/>
+              </a:spcAft>
+            </a:pPr>
+            <a:r>
+              <a:rPr sz="800" b="1" lang="zh-TW" dirty="0">
                 <a:solidFill>
                   <a:srgbClr val="000000"/>
                 </a:solidFill>
@@ -4525,7 +4525,7 @@
               <a:t>▍畫面上圈這裡</a:t>
             </a:r>
             <a:r>
-              <a:rPr sz="850" lang="zh-TW" dirty="0">
+              <a:rPr sz="800" lang="zh-TW" dirty="0">
                 <a:solidFill>
                   <a:srgbClr val="000000"/>
                 </a:solidFill>
@@ -4543,11 +4543,11 @@
                 <a:spcPts val="0"/>
               </a:spcBef>
               <a:spcAft>
-                <a:spcPts val="142"/>
-              </a:spcAft>
-            </a:pPr>
-            <a:r>
-              <a:rPr sz="850" lang="zh-TW" dirty="0">
+                <a:spcPts val="133"/>
+              </a:spcAft>
+            </a:pPr>
+            <a:r>
+              <a:rPr sz="800" lang="zh-TW" dirty="0">
                 <a:solidFill>
                   <a:srgbClr val="000000"/>
                 </a:solidFill>
@@ -4565,11 +4565,11 @@
                 <a:spcPts val="0"/>
               </a:spcBef>
               <a:spcAft>
-                <a:spcPts val="142"/>
-              </a:spcAft>
-            </a:pPr>
-            <a:r>
-              <a:rPr sz="850" b="1" lang="zh-TW" dirty="0">
+                <a:spcPts val="133"/>
+              </a:spcAft>
+            </a:pPr>
+            <a:r>
+              <a:rPr sz="800" b="1" lang="zh-TW" dirty="0">
                 <a:solidFill>
                   <a:srgbClr val="000000"/>
                 </a:solidFill>
@@ -4580,7 +4580,7 @@
               <a:t>▍以下照著唸</a:t>
             </a:r>
             <a:r>
-              <a:rPr sz="850" lang="zh-TW" dirty="0">
+              <a:rPr sz="800" lang="zh-TW" dirty="0">
                 <a:solidFill>
                   <a:srgbClr val="000000"/>
                 </a:solidFill>
@@ -4598,11 +4598,11 @@
                 <a:spcPts val="0"/>
               </a:spcBef>
               <a:spcAft>
-                <a:spcPts val="142"/>
-              </a:spcAft>
-            </a:pPr>
-            <a:r>
-              <a:rPr sz="850" lang="zh-TW" dirty="0">
+                <a:spcPts val="133"/>
+              </a:spcAft>
+            </a:pPr>
+            <a:r>
+              <a:rPr sz="800" lang="zh-TW" dirty="0">
                 <a:solidFill>
                   <a:srgbClr val="000000"/>
                 </a:solidFill>
@@ -4613,7 +4613,7 @@
               <a:t>請大家在工具上選 Ouster OS1-64，</a:t>
             </a:r>
             <a:r>
-              <a:rPr sz="850" b="1" lang="zh-TW" dirty="0">
+              <a:rPr sz="800" b="1" lang="zh-TW" dirty="0">
                 <a:solidFill>
                   <a:srgbClr val="000000"/>
                 </a:solidFill>
@@ -4624,7 +4624,7 @@
               <a:t>旋轉式</a:t>
             </a:r>
             <a:r>
-              <a:rPr sz="850" lang="zh-TW" dirty="0">
+              <a:rPr sz="800" lang="zh-TW" dirty="0">
                 <a:solidFill>
                   <a:srgbClr val="000000"/>
                 </a:solidFill>
@@ -4642,11 +4642,11 @@
                 <a:spcPts val="0"/>
               </a:spcBef>
               <a:spcAft>
-                <a:spcPts val="142"/>
-              </a:spcAft>
-            </a:pPr>
-            <a:r>
-              <a:rPr sz="850" b="1" lang="zh-TW" dirty="0">
+                <a:spcPts val="133"/>
+              </a:spcAft>
+            </a:pPr>
+            <a:r>
+              <a:rPr sz="800" b="1" lang="zh-TW" dirty="0">
                 <a:solidFill>
                   <a:srgbClr val="000000"/>
                 </a:solidFill>
@@ -4657,37 +4657,15 @@
               <a:t>最上面兩行都叫 Range</a:t>
             </a:r>
             <a:r>
-              <a:rPr sz="850" lang="zh-TW" dirty="0">
-                <a:solidFill>
-                  <a:srgbClr val="000000"/>
-                </a:solidFill>
-                <a:latin typeface="Arial Unicode MS"/>
-                <a:ea typeface="Arial Unicode MS"/>
-                <a:cs typeface="Arial Unicode MS"/>
-              </a:rPr>
-              <a:t>，同一個東西寫了兩次。原因是這樣：光達要把雷射打出去、等它彈回來，才算得出距離。所以</a:t>
-            </a:r>
-            <a:r>
-              <a:rPr sz="850" b="1" lang="zh-TW" dirty="0">
-                <a:solidFill>
-                  <a:srgbClr val="000000"/>
-                </a:solidFill>
-                <a:latin typeface="Arial Unicode MS"/>
-                <a:ea typeface="Arial Unicode MS"/>
-                <a:cs typeface="Arial Unicode MS"/>
-              </a:rPr>
-              <a:t>看得到多遠，不是只看機器，還要看目標把光彈回來多少</a:t>
-            </a:r>
-            <a:r>
-              <a:rPr sz="850" lang="zh-TW" dirty="0">
-                <a:solidFill>
-                  <a:srgbClr val="000000"/>
-                </a:solidFill>
-                <a:latin typeface="Arial Unicode MS"/>
-                <a:ea typeface="Arial Unicode MS"/>
-                <a:cs typeface="Arial Unicode MS"/>
-              </a:rPr>
-              <a:t>。括號裡那個百分比，講的就是目標有多會反光。
+              <a:rPr sz="800" lang="zh-TW" dirty="0">
+                <a:solidFill>
+                  <a:srgbClr val="000000"/>
+                </a:solidFill>
+                <a:latin typeface="Arial Unicode MS"/>
+                <a:ea typeface="Arial Unicode MS"/>
+                <a:cs typeface="Arial Unicode MS"/>
+              </a:rPr>
+              <a:t>，同一個東西寫了兩次。為什麼？因為光達是把雷射打出去，等它彈回來，再算時間差。所以看得到多遠，不是機器自己一個人決定的，對面那個東西肯彈多少光回來，也算一半。括號裡那個百分比，講的就是它有多會反光。
 </a:t>
             </a:r>
           </a:p>
@@ -4697,22 +4675,22 @@
                 <a:spcPts val="0"/>
               </a:spcBef>
               <a:spcAft>
-                <a:spcPts val="142"/>
-              </a:spcAft>
-            </a:pPr>
-            <a:r>
-              <a:rPr sz="850" lang="zh-TW" dirty="0">
-                <a:solidFill>
-                  <a:srgbClr val="000000"/>
-                </a:solidFill>
-                <a:latin typeface="Arial Unicode MS"/>
-                <a:ea typeface="Arial Unicode MS"/>
-                <a:cs typeface="Arial Unicode MS"/>
-              </a:rPr>
-              <a:t>第一行 </a:t>
-            </a:r>
-            <a:r>
-              <a:rPr sz="850" b="1" lang="zh-TW" dirty="0">
+                <a:spcPts val="133"/>
+              </a:spcAft>
+            </a:pPr>
+            <a:r>
+              <a:rPr sz="800" lang="zh-TW" dirty="0">
+                <a:solidFill>
+                  <a:srgbClr val="000000"/>
+                </a:solidFill>
+                <a:latin typeface="Arial Unicode MS"/>
+                <a:ea typeface="Arial Unicode MS"/>
+                <a:cs typeface="Arial Unicode MS"/>
+              </a:rPr>
+              <a:t>第一行是 </a:t>
+            </a:r>
+            <a:r>
+              <a:rPr sz="800" b="1" lang="zh-TW" dirty="0">
                 <a:solidFill>
                   <a:srgbClr val="000000"/>
                 </a:solidFill>
@@ -4723,18 +4701,40 @@
               <a:t>80%</a:t>
             </a:r>
             <a:r>
-              <a:rPr sz="850" lang="zh-TW" dirty="0">
-                <a:solidFill>
-                  <a:srgbClr val="000000"/>
-                </a:solidFill>
-                <a:latin typeface="Arial Unicode MS"/>
-                <a:ea typeface="Arial Unicode MS"/>
-                <a:cs typeface="Arial Unicode MS"/>
-              </a:rPr>
-              <a:t>，亮色、很會反光，彈回來的光強，量得到 170 公尺；第二行 </a:t>
-            </a:r>
-            <a:r>
-              <a:rPr sz="850" b="1" lang="zh-TW" dirty="0">
+              <a:rPr sz="800" lang="zh-TW" dirty="0">
+                <a:solidFill>
+                  <a:srgbClr val="000000"/>
+                </a:solidFill>
+                <a:latin typeface="Arial Unicode MS"/>
+                <a:ea typeface="Arial Unicode MS"/>
+                <a:cs typeface="Arial Unicode MS"/>
+              </a:rPr>
+              <a:t>。那是很亮、很會反光的表面，彈回來的光很強，所以量得到 170 公尺。
+</a:t>
+            </a:r>
+          </a:p>
+          <a:p>
+            <a:pPr algn="l">
+              <a:spcBef>
+                <a:spcPts val="0"/>
+              </a:spcBef>
+              <a:spcAft>
+                <a:spcPts val="133"/>
+              </a:spcAft>
+            </a:pPr>
+            <a:r>
+              <a:rPr sz="800" lang="zh-TW" dirty="0">
+                <a:solidFill>
+                  <a:srgbClr val="000000"/>
+                </a:solidFill>
+                <a:latin typeface="Arial Unicode MS"/>
+                <a:ea typeface="Arial Unicode MS"/>
+                <a:cs typeface="Arial Unicode MS"/>
+              </a:rPr>
+              <a:t>第二行是 </a:t>
+            </a:r>
+            <a:r>
+              <a:rPr sz="800" b="1" lang="zh-TW" dirty="0">
                 <a:solidFill>
                   <a:srgbClr val="000000"/>
                 </a:solidFill>
@@ -4745,40 +4745,40 @@
               <a:t>10%</a:t>
             </a:r>
             <a:r>
-              <a:rPr sz="850" lang="zh-TW" dirty="0">
-                <a:solidFill>
-                  <a:srgbClr val="000000"/>
-                </a:solidFill>
-                <a:latin typeface="Arial Unicode MS"/>
-                <a:ea typeface="Arial Unicode MS"/>
-                <a:cs typeface="Arial Unicode MS"/>
-              </a:rPr>
-              <a:t>，深色、吃光，彈回來的光弱，就只剩 90 公尺。同一顆光達、同一個位置，差別只在它看的是什麼顏色的東西。今天先看 </a:t>
-            </a:r>
-            <a:r>
-              <a:rPr sz="850" b="1" lang="zh-TW" dirty="0">
-                <a:solidFill>
-                  <a:srgbClr val="000000"/>
-                </a:solidFill>
-                <a:latin typeface="Arial Unicode MS"/>
-                <a:ea typeface="Arial Unicode MS"/>
-                <a:cs typeface="Arial Unicode MS"/>
-              </a:rPr>
-              <a:t>90 公尺</a:t>
-            </a:r>
-            <a:r>
-              <a:rPr sz="850" lang="zh-TW" dirty="0">
-                <a:solidFill>
-                  <a:srgbClr val="000000"/>
-                </a:solidFill>
-                <a:latin typeface="Arial Unicode MS"/>
-                <a:ea typeface="Arial Unicode MS"/>
-                <a:cs typeface="Arial Unicode MS"/>
-              </a:rPr>
-              <a:t>，順手把後面那串 </a:t>
-            </a:r>
-            <a:r>
-              <a:rPr sz="850" b="1" lang="zh-TW" dirty="0">
+              <a:rPr sz="800" lang="zh-TW" dirty="0">
+                <a:solidFill>
+                  <a:srgbClr val="000000"/>
+                </a:solidFill>
+                <a:latin typeface="Arial Unicode MS"/>
+                <a:ea typeface="Arial Unicode MS"/>
+                <a:cs typeface="Arial Unicode MS"/>
+              </a:rPr>
+              <a:t>。深色的東西會把光吃掉，彈回來很弱，就只剩 90 公尺。同一顆光達，放在同一個地方，差別只在它看的東西是什麼顏色。
+</a:t>
+            </a:r>
+          </a:p>
+          <a:p>
+            <a:pPr algn="l">
+              <a:spcBef>
+                <a:spcPts val="0"/>
+              </a:spcBef>
+              <a:spcAft>
+                <a:spcPts val="133"/>
+              </a:spcAft>
+            </a:pPr>
+            <a:r>
+              <a:rPr sz="800" lang="zh-TW" dirty="0">
+                <a:solidFill>
+                  <a:srgbClr val="000000"/>
+                </a:solidFill>
+                <a:latin typeface="Arial Unicode MS"/>
+                <a:ea typeface="Arial Unicode MS"/>
+                <a:cs typeface="Arial Unicode MS"/>
+              </a:rPr>
+              <a:t>今天我們先看 90 公尺這一行。請順手把後面那串 </a:t>
+            </a:r>
+            <a:r>
+              <a:rPr sz="800" b="1" lang="zh-TW" dirty="0">
                 <a:solidFill>
                   <a:srgbClr val="000000"/>
                 </a:solidFill>
@@ -4789,18 +4789,18 @@
               <a:t>10% Lambertian reflectivity</a:t>
             </a:r>
             <a:r>
-              <a:rPr sz="850" lang="zh-TW" dirty="0">
-                <a:solidFill>
-                  <a:srgbClr val="000000"/>
-                </a:solidFill>
-                <a:latin typeface="Arial Unicode MS"/>
-                <a:ea typeface="Arial Unicode MS"/>
-                <a:cs typeface="Arial Unicode MS"/>
-              </a:rPr>
-              <a:t> 圈起來——為什麼要看那一行，第十二張整張都在講。這一行就是上禮拜那條</a:t>
-            </a:r>
-            <a:r>
-              <a:rPr sz="850" b="1" lang="zh-TW" dirty="0">
+              <a:rPr sz="800" lang="zh-TW" dirty="0">
+                <a:solidFill>
+                  <a:srgbClr val="000000"/>
+                </a:solidFill>
+                <a:latin typeface="Arial Unicode MS"/>
+                <a:ea typeface="Arial Unicode MS"/>
+                <a:cs typeface="Arial Unicode MS"/>
+              </a:rPr>
+              <a:t> 圈起來。為什麼要看那一行？第十二張整張都在講這件事。這一行就是上禮拜那條</a:t>
+            </a:r>
+            <a:r>
+              <a:rPr sz="800" b="1" lang="zh-TW" dirty="0">
                 <a:solidFill>
                   <a:srgbClr val="000000"/>
                 </a:solidFill>
@@ -4811,7 +4811,7 @@
               <a:t>射線長度</a:t>
             </a:r>
             <a:r>
-              <a:rPr sz="850" lang="zh-TW" dirty="0">
+              <a:rPr sz="800" lang="zh-TW" dirty="0">
                 <a:solidFill>
                   <a:srgbClr val="000000"/>
                 </a:solidFill>
@@ -4829,11 +4829,11 @@
                 <a:spcPts val="0"/>
               </a:spcBef>
               <a:spcAft>
-                <a:spcPts val="142"/>
-              </a:spcAft>
-            </a:pPr>
-            <a:r>
-              <a:rPr sz="850" lang="zh-TW" dirty="0">
+                <a:spcPts val="133"/>
+              </a:spcAft>
+            </a:pPr>
+            <a:r>
+              <a:rPr sz="800" lang="zh-TW" dirty="0">
                 <a:solidFill>
                   <a:srgbClr val="000000"/>
                 </a:solidFill>
@@ -4851,11 +4851,11 @@
                 <a:spcPts val="0"/>
               </a:spcBef>
               <a:spcAft>
-                <a:spcPts val="142"/>
-              </a:spcAft>
-            </a:pPr>
-            <a:r>
-              <a:rPr sz="850" b="1" lang="zh-TW" dirty="0">
+                <a:spcPts val="133"/>
+              </a:spcAft>
+            </a:pPr>
+            <a:r>
+              <a:rPr sz="800" b="1" lang="zh-TW" dirty="0">
                 <a:solidFill>
                   <a:srgbClr val="000000"/>
                 </a:solidFill>
@@ -4866,18 +4866,18 @@
               <a:t>第四行，Vertical Resolution</a:t>
             </a:r>
             <a:r>
-              <a:rPr sz="850" lang="zh-TW" dirty="0">
-                <a:solidFill>
-                  <a:srgbClr val="000000"/>
-                </a:solidFill>
-                <a:latin typeface="Arial Unicode MS"/>
-                <a:ea typeface="Arial Unicode MS"/>
-                <a:cs typeface="Arial Unicode MS"/>
-              </a:rPr>
-              <a:t>，32、64、128 channels。Channel 中文叫通道，也叫線束，就是上禮拜那條</a:t>
-            </a:r>
-            <a:r>
-              <a:rPr sz="850" b="1" lang="zh-TW" dirty="0">
+              <a:rPr sz="800" lang="zh-TW" dirty="0">
+                <a:solidFill>
+                  <a:srgbClr val="000000"/>
+                </a:solidFill>
+                <a:latin typeface="Arial Unicode MS"/>
+                <a:ea typeface="Arial Unicode MS"/>
+                <a:cs typeface="Arial Unicode MS"/>
+              </a:rPr>
+              <a:t>，寫 32、64、128 channels。Channel 中文叫通道，也叫線束。這就是上禮拜那條</a:t>
+            </a:r>
+            <a:r>
+              <a:rPr sz="800" b="1" lang="zh-TW" dirty="0">
                 <a:solidFill>
                   <a:srgbClr val="000000"/>
                 </a:solidFill>
@@ -4888,7 +4888,7 @@
               <a:t>射線數</a:t>
             </a:r>
             <a:r>
-              <a:rPr sz="850" lang="zh-TW" dirty="0">
+              <a:rPr sz="800" lang="zh-TW" dirty="0">
                 <a:solidFill>
                   <a:srgbClr val="000000"/>
                 </a:solidFill>
@@ -4906,11 +4906,11 @@
                 <a:spcPts val="0"/>
               </a:spcBef>
               <a:spcAft>
-                <a:spcPts val="142"/>
-              </a:spcAft>
-            </a:pPr>
-            <a:r>
-              <a:rPr sz="850" lang="zh-TW" dirty="0">
+                <a:spcPts val="133"/>
+              </a:spcAft>
+            </a:pPr>
+            <a:r>
+              <a:rPr sz="800" lang="zh-TW" dirty="0">
                 <a:solidFill>
                   <a:srgbClr val="000000"/>
                 </a:solidFill>
@@ -4928,11 +4928,11 @@
                 <a:spcPts val="0"/>
               </a:spcBef>
               <a:spcAft>
-                <a:spcPts val="142"/>
-              </a:spcAft>
-            </a:pPr>
-            <a:r>
-              <a:rPr sz="850" b="1" lang="zh-TW" dirty="0">
+                <a:spcPts val="133"/>
+              </a:spcAft>
+            </a:pPr>
+            <a:r>
+              <a:rPr sz="800" b="1" lang="zh-TW" dirty="0">
                 <a:solidFill>
                   <a:srgbClr val="000000"/>
                 </a:solidFill>
@@ -4943,15 +4943,15 @@
               <a:t>最後一行，Field of View</a:t>
             </a:r>
             <a:r>
-              <a:rPr sz="850" lang="zh-TW" dirty="0">
-                <a:solidFill>
-                  <a:srgbClr val="000000"/>
-                </a:solidFill>
-                <a:latin typeface="Arial Unicode MS"/>
-                <a:ea typeface="Arial Unicode MS"/>
-                <a:cs typeface="Arial Unicode MS"/>
-              </a:rPr>
-              <a:t>，垂直 42.4 度、水平 360 度，就是上禮拜拉的張角。不過注意它水平是 360 度——它轉一整圈，所以「張角」對這一顆來說，只剩垂直方向要選。
+              <a:rPr sz="800" lang="zh-TW" dirty="0">
+                <a:solidFill>
+                  <a:srgbClr val="000000"/>
+                </a:solidFill>
+                <a:latin typeface="Arial Unicode MS"/>
+                <a:ea typeface="Arial Unicode MS"/>
+                <a:cs typeface="Arial Unicode MS"/>
+              </a:rPr>
+              <a:t>，垂直 42.4 度、水平 360 度，就是上禮拜拉的張角。不過它的水平是 360 度，因為它轉一整圈。所以這一顆的張角，你只能選上下，左右不用選。
 </a:t>
             </a:r>
           </a:p>
@@ -4961,11 +4961,11 @@
                 <a:spcPts val="0"/>
               </a:spcBef>
               <a:spcAft>
-                <a:spcPts val="142"/>
-              </a:spcAft>
-            </a:pPr>
-            <a:r>
-              <a:rPr sz="850" lang="zh-TW" dirty="0">
+                <a:spcPts val="133"/>
+              </a:spcAft>
+            </a:pPr>
+            <a:r>
+              <a:rPr sz="800" lang="zh-TW" dirty="0">
                 <a:solidFill>
                   <a:srgbClr val="000000"/>
                 </a:solidFill>
@@ -4976,7 +4976,7 @@
               <a:t>三個滑桿，三行，都在這張表上了。上禮拜各位在模擬器上拉來拉去的那三個東西，不是我編出來的遊戲設定，是</a:t>
             </a:r>
             <a:r>
-              <a:rPr sz="850" b="1" lang="zh-TW" dirty="0">
+              <a:rPr sz="800" b="1" lang="zh-TW" dirty="0">
                 <a:solidFill>
                   <a:srgbClr val="000000"/>
                 </a:solidFill>
@@ -4987,7 +4987,7 @@
               <a:t>你真的要花錢去買的規格</a:t>
             </a:r>
             <a:r>
-              <a:rPr sz="850" lang="zh-TW" dirty="0">
+              <a:rPr sz="800" lang="zh-TW" dirty="0">
                 <a:solidFill>
                   <a:srgbClr val="000000"/>
                 </a:solidFill>
@@ -5104,11 +5104,11 @@
                 <a:spcPts val="0"/>
               </a:spcBef>
               <a:spcAft>
-                <a:spcPts val="142"/>
-              </a:spcAft>
-            </a:pPr>
-            <a:r>
-              <a:rPr sz="850" b="1" lang="zh-TW" dirty="0">
+                <a:spcPts val="133"/>
+              </a:spcAft>
+            </a:pPr>
+            <a:r>
+              <a:rPr sz="800" b="1" lang="zh-TW" dirty="0">
                 <a:solidFill>
                   <a:srgbClr val="000000"/>
                 </a:solidFill>
@@ -5119,7 +5119,7 @@
               <a:t>▍這一張要做什麼</a:t>
             </a:r>
             <a:r>
-              <a:rPr sz="850" lang="zh-TW" dirty="0">
+              <a:rPr sz="800" lang="zh-TW" dirty="0">
                 <a:solidFill>
                   <a:srgbClr val="000000"/>
                 </a:solidFill>
@@ -5137,11 +5137,11 @@
                 <a:spcPts val="0"/>
               </a:spcBef>
               <a:spcAft>
-                <a:spcPts val="142"/>
-              </a:spcAft>
-            </a:pPr>
-            <a:r>
-              <a:rPr sz="850" lang="zh-TW" dirty="0">
+                <a:spcPts val="133"/>
+              </a:spcAft>
+            </a:pPr>
+            <a:r>
+              <a:rPr sz="800" lang="zh-TW" dirty="0">
                 <a:solidFill>
                   <a:srgbClr val="000000"/>
                 </a:solidFill>
@@ -5159,11 +5159,11 @@
                 <a:spcPts val="0"/>
               </a:spcBef>
               <a:spcAft>
-                <a:spcPts val="142"/>
-              </a:spcAft>
-            </a:pPr>
-            <a:r>
-              <a:rPr sz="850" b="1" lang="zh-TW" dirty="0">
+                <a:spcPts val="133"/>
+              </a:spcAft>
+            </a:pPr>
+            <a:r>
+              <a:rPr sz="800" b="1" lang="zh-TW" dirty="0">
                 <a:solidFill>
                   <a:srgbClr val="000000"/>
                 </a:solidFill>
@@ -5174,7 +5174,7 @@
               <a:t>▍畫面上圈這裡</a:t>
             </a:r>
             <a:r>
-              <a:rPr sz="850" lang="zh-TW" dirty="0">
+              <a:rPr sz="800" lang="zh-TW" dirty="0">
                 <a:solidFill>
                   <a:srgbClr val="000000"/>
                 </a:solidFill>
@@ -5192,11 +5192,11 @@
                 <a:spcPts val="0"/>
               </a:spcBef>
               <a:spcAft>
-                <a:spcPts val="142"/>
-              </a:spcAft>
-            </a:pPr>
-            <a:r>
-              <a:rPr sz="850" lang="zh-TW" dirty="0">
+                <a:spcPts val="133"/>
+              </a:spcAft>
+            </a:pPr>
+            <a:r>
+              <a:rPr sz="800" lang="zh-TW" dirty="0">
                 <a:solidFill>
                   <a:srgbClr val="000000"/>
                 </a:solidFill>
@@ -5214,11 +5214,11 @@
                 <a:spcPts val="0"/>
               </a:spcBef>
               <a:spcAft>
-                <a:spcPts val="142"/>
-              </a:spcAft>
-            </a:pPr>
-            <a:r>
-              <a:rPr sz="850" b="1" lang="zh-TW" dirty="0">
+                <a:spcPts val="133"/>
+              </a:spcAft>
+            </a:pPr>
+            <a:r>
+              <a:rPr sz="800" b="1" lang="zh-TW" dirty="0">
                 <a:solidFill>
                   <a:srgbClr val="000000"/>
                 </a:solidFill>
@@ -5229,7 +5229,7 @@
               <a:t>▍以下照著唸</a:t>
             </a:r>
             <a:r>
-              <a:rPr sz="850" lang="zh-TW" dirty="0">
+              <a:rPr sz="800" lang="zh-TW" dirty="0">
                 <a:solidFill>
                   <a:srgbClr val="000000"/>
                 </a:solidFill>
@@ -5247,11 +5247,11 @@
                 <a:spcPts val="0"/>
               </a:spcBef>
               <a:spcAft>
-                <a:spcPts val="142"/>
-              </a:spcAft>
-            </a:pPr>
-            <a:r>
-              <a:rPr sz="850" lang="zh-TW" dirty="0">
+                <a:spcPts val="133"/>
+              </a:spcAft>
+            </a:pPr>
+            <a:r>
+              <a:rPr sz="800" lang="zh-TW" dirty="0">
                 <a:solidFill>
                   <a:srgbClr val="000000"/>
                 </a:solidFill>
@@ -5262,7 +5262,7 @@
               <a:t>第二個型號，Hesai AT128P。這是一顆</a:t>
             </a:r>
             <a:r>
-              <a:rPr sz="850" b="1" lang="zh-TW" dirty="0">
+              <a:rPr sz="800" b="1" lang="zh-TW" dirty="0">
                 <a:solidFill>
                   <a:srgbClr val="000000"/>
                 </a:solidFill>
@@ -5273,7 +5273,7 @@
               <a:t>固定式</a:t>
             </a:r>
             <a:r>
-              <a:rPr sz="850" lang="zh-TW" dirty="0">
+              <a:rPr sz="800" lang="zh-TW" dirty="0">
                 <a:solidFill>
                   <a:srgbClr val="000000"/>
                 </a:solidFill>
@@ -5291,19 +5291,19 @@
                 <a:spcPts val="0"/>
               </a:spcBef>
               <a:spcAft>
-                <a:spcPts val="142"/>
-              </a:spcAft>
-            </a:pPr>
-            <a:r>
-              <a:rPr sz="850" lang="zh-TW" dirty="0">
-                <a:solidFill>
-                  <a:srgbClr val="000000"/>
-                </a:solidFill>
-                <a:latin typeface="Arial Unicode MS"/>
-                <a:ea typeface="Arial Unicode MS"/>
-                <a:cs typeface="Arial Unicode MS"/>
-              </a:rPr>
-              <a:t>這張表跟剛剛那張長得不一樣——是手冊裡的規格章節，一共九行。一樣從上往下看。
+                <a:spcPts val="133"/>
+              </a:spcAft>
+            </a:pPr>
+            <a:r>
+              <a:rPr sz="800" lang="zh-TW" dirty="0">
+                <a:solidFill>
+                  <a:srgbClr val="000000"/>
+                </a:solidFill>
+                <a:latin typeface="Arial Unicode MS"/>
+                <a:ea typeface="Arial Unicode MS"/>
+                <a:cs typeface="Arial Unicode MS"/>
+              </a:rPr>
+              <a:t>這一份跟剛剛那張不一樣。它不是 datasheet，是使用手冊裡面的規格那一節，一共九行。一樣從上往下看。
 </a:t>
             </a:r>
           </a:p>
@@ -5313,11 +5313,11 @@
                 <a:spcPts val="0"/>
               </a:spcBef>
               <a:spcAft>
-                <a:spcPts val="142"/>
-              </a:spcAft>
-            </a:pPr>
-            <a:r>
-              <a:rPr sz="850" b="1" lang="zh-TW" dirty="0">
+                <a:spcPts val="133"/>
+              </a:spcAft>
+            </a:pPr>
+            <a:r>
+              <a:rPr sz="800" b="1" lang="zh-TW" dirty="0">
                 <a:solidFill>
                   <a:srgbClr val="000000"/>
                 </a:solidFill>
@@ -5328,7 +5328,7 @@
               <a:t>第一行，Number of channels，128。</a:t>
             </a:r>
             <a:r>
-              <a:rPr sz="850" lang="zh-TW" dirty="0">
+              <a:rPr sz="800" lang="zh-TW" dirty="0">
                 <a:solidFill>
                   <a:srgbClr val="000000"/>
                 </a:solidFill>
@@ -5346,19 +5346,19 @@
                 <a:spcPts val="0"/>
               </a:spcBef>
               <a:spcAft>
-                <a:spcPts val="142"/>
-              </a:spcAft>
-            </a:pPr>
-            <a:r>
-              <a:rPr sz="850" lang="zh-TW" dirty="0">
-                <a:solidFill>
-                  <a:srgbClr val="000000"/>
-                </a:solidFill>
-                <a:latin typeface="Arial Unicode MS"/>
-                <a:ea typeface="Arial Unicode MS"/>
-                <a:cs typeface="Arial Unicode MS"/>
-              </a:rPr>
-              <a:t>中間幾行是測距與精度，第三節上機會用到，今天跳過。
+                <a:spcPts val="133"/>
+              </a:spcAft>
+            </a:pPr>
+            <a:r>
+              <a:rPr sz="800" lang="zh-TW" dirty="0">
+                <a:solidFill>
+                  <a:srgbClr val="000000"/>
+                </a:solidFill>
+                <a:latin typeface="Arial Unicode MS"/>
+                <a:ea typeface="Arial Unicode MS"/>
+                <a:cs typeface="Arial Unicode MS"/>
+              </a:rPr>
+              <a:t>中間幾行講的是測距跟準不準，第三節上機會用到，今天先跳過。
 </a:t>
             </a:r>
           </a:p>
@@ -5368,11 +5368,11 @@
                 <a:spcPts val="0"/>
               </a:spcBef>
               <a:spcAft>
-                <a:spcPts val="142"/>
-              </a:spcAft>
-            </a:pPr>
-            <a:r>
-              <a:rPr sz="850" b="1" lang="zh-TW" dirty="0">
+                <a:spcPts val="133"/>
+              </a:spcAft>
+            </a:pPr>
+            <a:r>
+              <a:rPr sz="800" b="1" lang="zh-TW" dirty="0">
                 <a:solidFill>
                   <a:srgbClr val="000000"/>
                 </a:solidFill>
@@ -5383,15 +5383,15 @@
               <a:t>Horizontal FOV 120 度、Vertical FOV 25.4 度。</a:t>
             </a:r>
             <a:r>
-              <a:rPr sz="850" lang="zh-TW" dirty="0">
-                <a:solidFill>
-                  <a:srgbClr val="000000"/>
-                </a:solidFill>
-                <a:latin typeface="Arial Unicode MS"/>
-                <a:ea typeface="Arial Unicode MS"/>
-                <a:cs typeface="Arial Unicode MS"/>
-              </a:rPr>
-              <a:t>注意這兩行在表上沒有排在一起，中間隔了一行。它不轉，所以只看得到前面那一塊。
+              <a:rPr sz="800" lang="zh-TW" dirty="0">
+                <a:solidFill>
+                  <a:srgbClr val="000000"/>
+                </a:solidFill>
+                <a:latin typeface="Arial Unicode MS"/>
+                <a:ea typeface="Arial Unicode MS"/>
+                <a:cs typeface="Arial Unicode MS"/>
+              </a:rPr>
+              <a:t>這兩行在表上沒有排在一起，中間還隔了一行，要看仔細。它不會轉，所以只看得到前面那一塊。
 </a:t>
             </a:r>
           </a:p>
@@ -5401,11 +5401,11 @@
                 <a:spcPts val="0"/>
               </a:spcBef>
               <a:spcAft>
-                <a:spcPts val="142"/>
-              </a:spcAft>
-            </a:pPr>
-            <a:r>
-              <a:rPr sz="850" b="1" lang="zh-TW" dirty="0">
+                <a:spcPts val="133"/>
+              </a:spcAft>
+            </a:pPr>
+            <a:r>
+              <a:rPr sz="800" b="1" lang="zh-TW" dirty="0">
                 <a:solidFill>
                   <a:srgbClr val="000000"/>
                 </a:solidFill>
@@ -5416,15 +5416,15 @@
               <a:t>再來是 Horizontal resolution 和 Vertical resolution</a:t>
             </a:r>
             <a:r>
-              <a:rPr sz="850" lang="zh-TW" dirty="0">
-                <a:solidFill>
-                  <a:srgbClr val="000000"/>
-                </a:solidFill>
-                <a:latin typeface="Arial Unicode MS"/>
-                <a:ea typeface="Arial Unicode MS"/>
-                <a:cs typeface="Arial Unicode MS"/>
-              </a:rPr>
-              <a:t>，角解析度：水平 0.1 度、垂直 0.2 度。這就是第四週講了一整節的那件事——相鄰兩條射線之間差幾度。上禮拜要各位自己去感覺縫有多寬，這一顆直接把數字寫給你。
+              <a:rPr sz="800" lang="zh-TW" dirty="0">
+                <a:solidFill>
+                  <a:srgbClr val="000000"/>
+                </a:solidFill>
+                <a:latin typeface="Arial Unicode MS"/>
+                <a:ea typeface="Arial Unicode MS"/>
+                <a:cs typeface="Arial Unicode MS"/>
+              </a:rPr>
+              <a:t>，角解析度：左右 0.1 度、上下 0.2 度。這就是第四週講了一整節的那件事——相鄰兩條射線之間差幾度。上禮拜我要各位自己去感覺那個縫有多寬，這一顆直接把數字寫給你。
 </a:t>
             </a:r>
           </a:p>
@@ -5434,22 +5434,22 @@
                 <a:spcPts val="0"/>
               </a:spcBef>
               <a:spcAft>
-                <a:spcPts val="142"/>
-              </a:spcAft>
-            </a:pPr>
-            <a:r>
-              <a:rPr sz="850" lang="zh-TW" dirty="0">
-                <a:solidFill>
-                  <a:srgbClr val="000000"/>
-                </a:solidFill>
-                <a:latin typeface="Arial Unicode MS"/>
-                <a:ea typeface="Arial Unicode MS"/>
-                <a:cs typeface="Arial Unicode MS"/>
-              </a:rPr>
-              <a:t>不過請看清楚：那個 0.1 度前面寫著 </a:t>
-            </a:r>
-            <a:r>
-              <a:rPr sz="850" b="1" lang="zh-TW" dirty="0">
+                <a:spcPts val="133"/>
+              </a:spcAft>
+            </a:pPr>
+            <a:r>
+              <a:rPr sz="800" lang="zh-TW" dirty="0">
+                <a:solidFill>
+                  <a:srgbClr val="000000"/>
+                </a:solidFill>
+                <a:latin typeface="Arial Unicode MS"/>
+                <a:ea typeface="Arial Unicode MS"/>
+                <a:cs typeface="Arial Unicode MS"/>
+              </a:rPr>
+              <a:t>不過請看清楚，那個 0.1 度前面寫著 </a:t>
+            </a:r>
+            <a:r>
+              <a:rPr sz="800" b="1" lang="zh-TW" dirty="0">
                 <a:solidFill>
                   <a:srgbClr val="000000"/>
                 </a:solidFill>
@@ -5460,7 +5460,7 @@
               <a:t>Far-field</a:t>
             </a:r>
             <a:r>
-              <a:rPr sz="850" lang="zh-TW" dirty="0">
+              <a:rPr sz="800" lang="zh-TW" dirty="0">
                 <a:solidFill>
                   <a:srgbClr val="000000"/>
                 </a:solidFill>
@@ -5471,7 +5471,7 @@
               <a:t>，後面還有個 </a:t>
             </a:r>
             <a:r>
-              <a:rPr sz="850" b="1" lang="zh-TW" dirty="0">
+              <a:rPr sz="800" b="1" lang="zh-TW" dirty="0">
                 <a:solidFill>
                   <a:srgbClr val="000000"/>
                 </a:solidFill>
@@ -5482,15 +5482,15 @@
               <a:t>(10 Hz)</a:t>
             </a:r>
             <a:r>
-              <a:rPr sz="850" lang="zh-TW" dirty="0">
-                <a:solidFill>
-                  <a:srgbClr val="000000"/>
-                </a:solidFill>
-                <a:latin typeface="Arial Unicode MS"/>
-                <a:ea typeface="Arial Unicode MS"/>
-                <a:cs typeface="Arial Unicode MS"/>
-              </a:rPr>
-              <a:t>。換成 20 Hz 就變 0.2 度。又是一個「有條件的數字」，跟剛剛 OS1 的 80% 和 10% 是同一種陷阱。
+              <a:rPr sz="800" lang="zh-TW" dirty="0">
+                <a:solidFill>
+                  <a:srgbClr val="000000"/>
+                </a:solidFill>
+                <a:latin typeface="Arial Unicode MS"/>
+                <a:ea typeface="Arial Unicode MS"/>
+                <a:cs typeface="Arial Unicode MS"/>
+              </a:rPr>
+              <a:t>。換成 20 Hz 就變 0.2 度。又是一個有條件的數字，跟剛剛 OS1 的 80% 和 10% 是同一種陷阱。
 </a:t>
             </a:r>
           </a:p>
@@ -5500,66 +5500,44 @@
                 <a:spcPts val="0"/>
               </a:spcBef>
               <a:spcAft>
-                <a:spcPts val="142"/>
-              </a:spcAft>
-            </a:pPr>
-            <a:r>
-              <a:rPr sz="850" lang="zh-TW" dirty="0">
-                <a:solidFill>
-                  <a:srgbClr val="000000"/>
-                </a:solidFill>
-                <a:latin typeface="Arial Unicode MS"/>
-                <a:ea typeface="Arial Unicode MS"/>
-                <a:cs typeface="Arial Unicode MS"/>
-              </a:rPr>
-              <a:t>現在把兩顆放在一起想。OS1 把點灑在</a:t>
-            </a:r>
-            <a:r>
-              <a:rPr sz="850" b="1" lang="zh-TW" dirty="0">
-                <a:solidFill>
-                  <a:srgbClr val="000000"/>
-                </a:solidFill>
-                <a:latin typeface="Arial Unicode MS"/>
-                <a:ea typeface="Arial Unicode MS"/>
-                <a:cs typeface="Arial Unicode MS"/>
-              </a:rPr>
-              <a:t>一整圈</a:t>
-            </a:r>
-            <a:r>
-              <a:rPr sz="850" lang="zh-TW" dirty="0">
-                <a:solidFill>
-                  <a:srgbClr val="000000"/>
-                </a:solidFill>
-                <a:latin typeface="Arial Unicode MS"/>
-                <a:ea typeface="Arial Unicode MS"/>
-                <a:cs typeface="Arial Unicode MS"/>
-              </a:rPr>
-              <a:t>，AT128P 把同樣多的點集中在</a:t>
-            </a:r>
-            <a:r>
-              <a:rPr sz="850" b="1" lang="zh-TW" dirty="0">
-                <a:solidFill>
-                  <a:srgbClr val="000000"/>
-                </a:solidFill>
-                <a:latin typeface="Arial Unicode MS"/>
-                <a:ea typeface="Arial Unicode MS"/>
-                <a:cs typeface="Arial Unicode MS"/>
-              </a:rPr>
-              <a:t>前面 120 度</a:t>
-            </a:r>
-            <a:r>
-              <a:rPr sz="850" lang="zh-TW" dirty="0">
-                <a:solidFill>
-                  <a:srgbClr val="000000"/>
-                </a:solidFill>
-                <a:latin typeface="Arial Unicode MS"/>
-                <a:ea typeface="Arial Unicode MS"/>
-                <a:cs typeface="Arial Unicode MS"/>
-              </a:rPr>
-              <a:t>——第四週講過，同樣那些射線，攤得愈廣就愈稀。所以這兩顆不是誰比較好，是</a:t>
-            </a:r>
-            <a:r>
-              <a:rPr sz="850" b="1" lang="zh-TW" dirty="0">
+                <a:spcPts val="133"/>
+              </a:spcAft>
+            </a:pPr>
+            <a:r>
+              <a:rPr sz="800" lang="zh-TW" dirty="0">
+                <a:solidFill>
+                  <a:srgbClr val="000000"/>
+                </a:solidFill>
+                <a:latin typeface="Arial Unicode MS"/>
+                <a:ea typeface="Arial Unicode MS"/>
+                <a:cs typeface="Arial Unicode MS"/>
+              </a:rPr>
+              <a:t>現在把兩顆放在一起想。OS1 把點灑在一整圈，AT128P 把同樣多的點集中在前面 120 度。第四週講過，同樣那些射線，攤得愈廣就愈稀。
+</a:t>
+            </a:r>
+          </a:p>
+          <a:p>
+            <a:pPr algn="l">
+              <a:spcBef>
+                <a:spcPts val="0"/>
+              </a:spcBef>
+              <a:spcAft>
+                <a:spcPts val="133"/>
+              </a:spcAft>
+            </a:pPr>
+            <a:r>
+              <a:rPr sz="800" lang="zh-TW" dirty="0">
+                <a:solidFill>
+                  <a:srgbClr val="000000"/>
+                </a:solidFill>
+                <a:latin typeface="Arial Unicode MS"/>
+                <a:ea typeface="Arial Unicode MS"/>
+                <a:cs typeface="Arial Unicode MS"/>
+              </a:rPr>
+              <a:t>所以這兩顆沒有誰比較好，是</a:t>
+            </a:r>
+            <a:r>
+              <a:rPr sz="800" b="1" lang="zh-TW" dirty="0">
                 <a:solidFill>
                   <a:srgbClr val="000000"/>
                 </a:solidFill>
@@ -5570,15 +5548,15 @@
               <a:t>用途不一樣</a:t>
             </a:r>
             <a:r>
-              <a:rPr sz="850" lang="zh-TW" dirty="0">
-                <a:solidFill>
-                  <a:srgbClr val="000000"/>
-                </a:solidFill>
-                <a:latin typeface="Arial Unicode MS"/>
-                <a:ea typeface="Arial Unicode MS"/>
-                <a:cs typeface="Arial Unicode MS"/>
-              </a:rPr>
-              <a:t>：要看路口四面八方，你要 360 度那一顆；要在高速公路上看遠方，你要把點集中在前面那一顆。第三節上機的時候，各位會親眼看到這個差別有多大。</a:t>
+              <a:rPr sz="800" lang="zh-TW" dirty="0">
+                <a:solidFill>
+                  <a:srgbClr val="000000"/>
+                </a:solidFill>
+                <a:latin typeface="Arial Unicode MS"/>
+                <a:ea typeface="Arial Unicode MS"/>
+                <a:cs typeface="Arial Unicode MS"/>
+              </a:rPr>
+              <a:t>。要看路口四面八方，你就要 360 度那一顆。要在高速公路上看遠方，你就要把點集中在前面那一顆。第三節上機的時候，各位會親眼看到這個差別有多大。</a:t>
             </a:r>
           </a:p>
         </p:txBody>
@@ -7062,11 +7040,11 @@
                 <a:spcPts val="0"/>
               </a:spcBef>
               <a:spcAft>
-                <a:spcPts val="167"/>
-              </a:spcAft>
-            </a:pPr>
-            <a:r>
-              <a:rPr sz="1000" b="1" lang="zh-TW" dirty="0">
+                <a:spcPts val="150"/>
+              </a:spcAft>
+            </a:pPr>
+            <a:r>
+              <a:rPr sz="900" b="1" lang="zh-TW" dirty="0">
                 <a:solidFill>
                   <a:srgbClr val="000000"/>
                 </a:solidFill>
@@ -7077,7 +7055,7 @@
               <a:t>▍這一張要做什麼</a:t>
             </a:r>
             <a:r>
-              <a:rPr sz="1000" lang="zh-TW" dirty="0">
+              <a:rPr sz="900" lang="zh-TW" dirty="0">
                 <a:solidFill>
                   <a:srgbClr val="000000"/>
                 </a:solidFill>
@@ -7095,11 +7073,11 @@
                 <a:spcPts val="0"/>
               </a:spcBef>
               <a:spcAft>
-                <a:spcPts val="167"/>
-              </a:spcAft>
-            </a:pPr>
-            <a:r>
-              <a:rPr sz="1000" lang="zh-TW" dirty="0">
+                <a:spcPts val="150"/>
+              </a:spcAft>
+            </a:pPr>
+            <a:r>
+              <a:rPr sz="900" lang="zh-TW" dirty="0">
                 <a:solidFill>
                   <a:srgbClr val="000000"/>
                 </a:solidFill>
@@ -7117,11 +7095,11 @@
                 <a:spcPts val="0"/>
               </a:spcBef>
               <a:spcAft>
-                <a:spcPts val="167"/>
-              </a:spcAft>
-            </a:pPr>
-            <a:r>
-              <a:rPr sz="1000" b="1" lang="zh-TW" dirty="0">
+                <a:spcPts val="150"/>
+              </a:spcAft>
+            </a:pPr>
+            <a:r>
+              <a:rPr sz="900" b="1" lang="zh-TW" dirty="0">
                 <a:solidFill>
                   <a:srgbClr val="000000"/>
                 </a:solidFill>
@@ -7132,7 +7110,7 @@
               <a:t>▍畫面上圈這裡</a:t>
             </a:r>
             <a:r>
-              <a:rPr sz="1000" lang="zh-TW" dirty="0">
+              <a:rPr sz="900" lang="zh-TW" dirty="0">
                 <a:solidFill>
                   <a:srgbClr val="000000"/>
                 </a:solidFill>
@@ -7150,11 +7128,11 @@
                 <a:spcPts val="0"/>
               </a:spcBef>
               <a:spcAft>
-                <a:spcPts val="167"/>
-              </a:spcAft>
-            </a:pPr>
-            <a:r>
-              <a:rPr sz="1000" lang="zh-TW" dirty="0">
+                <a:spcPts val="150"/>
+              </a:spcAft>
+            </a:pPr>
+            <a:r>
+              <a:rPr sz="900" lang="zh-TW" dirty="0">
                 <a:solidFill>
                   <a:srgbClr val="000000"/>
                 </a:solidFill>
@@ -7172,11 +7150,11 @@
                 <a:spcPts val="0"/>
               </a:spcBef>
               <a:spcAft>
-                <a:spcPts val="167"/>
-              </a:spcAft>
-            </a:pPr>
-            <a:r>
-              <a:rPr sz="1000" b="1" lang="zh-TW" dirty="0">
+                <a:spcPts val="150"/>
+              </a:spcAft>
+            </a:pPr>
+            <a:r>
+              <a:rPr sz="900" b="1" lang="zh-TW" dirty="0">
                 <a:solidFill>
                   <a:srgbClr val="000000"/>
                 </a:solidFill>
@@ -7187,7 +7165,7 @@
               <a:t>▍以下照著唸</a:t>
             </a:r>
             <a:r>
-              <a:rPr sz="1000" lang="zh-TW" dirty="0">
+              <a:rPr sz="900" lang="zh-TW" dirty="0">
                 <a:solidFill>
                   <a:srgbClr val="000000"/>
                 </a:solidFill>
@@ -7205,11 +7183,11 @@
                 <a:spcPts val="0"/>
               </a:spcBef>
               <a:spcAft>
-                <a:spcPts val="167"/>
-              </a:spcAft>
-            </a:pPr>
-            <a:r>
-              <a:rPr sz="1000" lang="zh-TW" dirty="0">
+                <a:spcPts val="150"/>
+              </a:spcAft>
+            </a:pPr>
+            <a:r>
+              <a:rPr sz="900" lang="zh-TW" dirty="0">
                 <a:solidFill>
                   <a:srgbClr val="000000"/>
                 </a:solidFill>
@@ -7227,63 +7205,63 @@
                 <a:spcPts val="0"/>
               </a:spcBef>
               <a:spcAft>
-                <a:spcPts val="167"/>
-              </a:spcAft>
-            </a:pPr>
-            <a:r>
-              <a:rPr sz="1000" lang="zh-TW" dirty="0">
-                <a:solidFill>
-                  <a:srgbClr val="000000"/>
-                </a:solidFill>
-                <a:latin typeface="Arial Unicode MS"/>
-                <a:ea typeface="Arial Unicode MS"/>
-                <a:cs typeface="Arial Unicode MS"/>
-              </a:rPr>
-              <a:t>先看有的：</a:t>
-            </a:r>
-            <a:r>
-              <a:rPr sz="1000" b="1" lang="zh-TW" dirty="0">
-                <a:solidFill>
-                  <a:srgbClr val="000000"/>
-                </a:solidFill>
-                <a:latin typeface="Arial Unicode MS"/>
-                <a:ea typeface="Arial Unicode MS"/>
-                <a:cs typeface="Arial Unicode MS"/>
-              </a:rPr>
-              <a:t>Active pixels 2048 乘 1280</a:t>
-            </a:r>
-            <a:r>
-              <a:rPr sz="1000" lang="zh-TW" dirty="0">
-                <a:solidFill>
-                  <a:srgbClr val="000000"/>
-                </a:solidFill>
-                <a:latin typeface="Arial Unicode MS"/>
-                <a:ea typeface="Arial Unicode MS"/>
-                <a:cs typeface="Arial Unicode MS"/>
-              </a:rPr>
-              <a:t>，就是第四週拉的那條水平解析度；</a:t>
-            </a:r>
-            <a:r>
-              <a:rPr sz="1000" b="1" lang="zh-TW" dirty="0">
-                <a:solidFill>
-                  <a:srgbClr val="000000"/>
-                </a:solidFill>
-                <a:latin typeface="Arial Unicode MS"/>
-                <a:ea typeface="Arial Unicode MS"/>
-                <a:cs typeface="Arial Unicode MS"/>
-              </a:rPr>
-              <a:t>Pixel size 3.0 微米</a:t>
-            </a:r>
-            <a:r>
-              <a:rPr sz="1000" lang="zh-TW" dirty="0">
-                <a:solidFill>
-                  <a:srgbClr val="000000"/>
-                </a:solidFill>
-                <a:latin typeface="Arial Unicode MS"/>
-                <a:ea typeface="Arial Unicode MS"/>
-                <a:cs typeface="Arial Unicode MS"/>
-              </a:rPr>
-              <a:t>，等一下有用。再往下是彩色濾波陣列、介面、動態範圍、封裝，總共七行。
+                <a:spcPts val="150"/>
+              </a:spcAft>
+            </a:pPr>
+            <a:r>
+              <a:rPr sz="900" lang="zh-TW" dirty="0">
+                <a:solidFill>
+                  <a:srgbClr val="000000"/>
+                </a:solidFill>
+                <a:latin typeface="Arial Unicode MS"/>
+                <a:ea typeface="Arial Unicode MS"/>
+                <a:cs typeface="Arial Unicode MS"/>
+              </a:rPr>
+              <a:t>我們先看它有什麼。最上面一行 Optical format，是感光面的大小。第二行 </a:t>
+            </a:r>
+            <a:r>
+              <a:rPr sz="900" b="1" lang="zh-TW" dirty="0">
+                <a:solidFill>
+                  <a:srgbClr val="000000"/>
+                </a:solidFill>
+                <a:latin typeface="Arial Unicode MS"/>
+                <a:ea typeface="Arial Unicode MS"/>
+                <a:cs typeface="Arial Unicode MS"/>
+              </a:rPr>
+              <a:t>Active pixels，2048 乘 1280</a:t>
+            </a:r>
+            <a:r>
+              <a:rPr sz="900" lang="zh-TW" dirty="0">
+                <a:solidFill>
+                  <a:srgbClr val="000000"/>
+                </a:solidFill>
+                <a:latin typeface="Arial Unicode MS"/>
+                <a:ea typeface="Arial Unicode MS"/>
+                <a:cs typeface="Arial Unicode MS"/>
+              </a:rPr>
+              <a:t>，就是第四週拉的那條水平解析度。第三行 </a:t>
+            </a:r>
+            <a:r>
+              <a:rPr sz="900" b="1" lang="zh-TW" dirty="0">
+                <a:solidFill>
+                  <a:srgbClr val="000000"/>
+                </a:solidFill>
+                <a:latin typeface="Arial Unicode MS"/>
+                <a:ea typeface="Arial Unicode MS"/>
+                <a:cs typeface="Arial Unicode MS"/>
+              </a:rPr>
+              <a:t>Pixel size，3.0 微米</a:t>
+            </a:r>
+            <a:r>
+              <a:rPr sz="900" lang="zh-TW" dirty="0">
+                <a:solidFill>
+                  <a:srgbClr val="000000"/>
+                </a:solidFill>
+                <a:latin typeface="Arial Unicode MS"/>
+                <a:ea typeface="Arial Unicode MS"/>
+                <a:cs typeface="Arial Unicode MS"/>
+              </a:rPr>
+              <a:t>，一個像素三微米見方，這個數字等一下有用。
 </a:t>
             </a:r>
           </a:p>
@@ -7293,19 +7271,19 @@
                 <a:spcPts val="0"/>
               </a:spcBef>
               <a:spcAft>
-                <a:spcPts val="167"/>
-              </a:spcAft>
-            </a:pPr>
-            <a:r>
-              <a:rPr sz="1000" lang="zh-TW" dirty="0">
-                <a:solidFill>
-                  <a:srgbClr val="000000"/>
-                </a:solidFill>
-                <a:latin typeface="Arial Unicode MS"/>
-                <a:ea typeface="Arial Unicode MS"/>
-                <a:cs typeface="Arial Unicode MS"/>
-              </a:rPr>
-              <a:t>現在請各位在左邊找「視野」，英文是 field of view；再找「測距」，range。找三十秒。都沒有——七行裡面一行都沒有。這兩行就是我們前兩週天天在拉的滑桿。
+                <a:spcPts val="150"/>
+              </a:spcAft>
+            </a:pPr>
+            <a:r>
+              <a:rPr sz="900" lang="zh-TW" dirty="0">
+                <a:solidFill>
+                  <a:srgbClr val="000000"/>
+                </a:solidFill>
+                <a:latin typeface="Arial Unicode MS"/>
+                <a:ea typeface="Arial Unicode MS"/>
+                <a:cs typeface="Arial Unicode MS"/>
+              </a:rPr>
+              <a:t>再往下四行：彩色濾波陣列、介面、動態範圍、封裝。七行就這樣，沒了。
 </a:t>
             </a:r>
           </a:p>
@@ -7315,19 +7293,19 @@
                 <a:spcPts val="0"/>
               </a:spcBef>
               <a:spcAft>
-                <a:spcPts val="167"/>
-              </a:spcAft>
-            </a:pPr>
-            <a:r>
-              <a:rPr sz="1000" lang="zh-TW" dirty="0">
-                <a:solidFill>
-                  <a:srgbClr val="000000"/>
-                </a:solidFill>
-                <a:latin typeface="Arial Unicode MS"/>
-                <a:ea typeface="Arial Unicode MS"/>
-                <a:cs typeface="Arial Unicode MS"/>
-              </a:rPr>
-              <a:t>看右邊。一樣是相機的規格表，Raspberry Pi 的 Camera Module 3。有沒有視野？有，而且有三行：對角、水平、垂直。為什麼一張有、一張沒有？先別急著回答。
+                <a:spcPts val="150"/>
+              </a:spcAft>
+            </a:pPr>
+            <a:r>
+              <a:rPr sz="900" lang="zh-TW" dirty="0">
+                <a:solidFill>
+                  <a:srgbClr val="000000"/>
+                </a:solidFill>
+                <a:latin typeface="Arial Unicode MS"/>
+                <a:ea typeface="Arial Unicode MS"/>
+                <a:cs typeface="Arial Unicode MS"/>
+              </a:rPr>
+              <a:t>現在請各位在左邊找「視野」，英文是 field of view。再找「測距」，range。給各位三十秒。
 </a:t>
             </a:r>
           </a:p>
@@ -7337,22 +7315,66 @@
                 <a:spcPts val="0"/>
               </a:spcBef>
               <a:spcAft>
-                <a:spcPts val="167"/>
-              </a:spcAft>
-            </a:pPr>
-            <a:r>
-              <a:rPr sz="1000" lang="zh-TW" dirty="0">
-                <a:solidFill>
-                  <a:srgbClr val="000000"/>
-                </a:solidFill>
-                <a:latin typeface="Arial Unicode MS"/>
-                <a:ea typeface="Arial Unicode MS"/>
-                <a:cs typeface="Arial Unicode MS"/>
-              </a:rPr>
-              <a:t>右邊有一行叫 </a:t>
-            </a:r>
-            <a:r>
-              <a:rPr sz="1000" b="1" lang="zh-TW" dirty="0">
+                <a:spcPts val="150"/>
+              </a:spcAft>
+            </a:pPr>
+            <a:r>
+              <a:rPr sz="900" lang="zh-TW" dirty="0">
+                <a:solidFill>
+                  <a:srgbClr val="000000"/>
+                </a:solidFill>
+                <a:latin typeface="Arial Unicode MS"/>
+                <a:ea typeface="Arial Unicode MS"/>
+                <a:cs typeface="Arial Unicode MS"/>
+              </a:rPr>
+              <a:t>都沒有。七行裡面一行都沒有。可是這兩行，就是我們前兩週天天在拉的滑桿。
+</a:t>
+            </a:r>
+          </a:p>
+          <a:p>
+            <a:pPr algn="l">
+              <a:spcBef>
+                <a:spcPts val="0"/>
+              </a:spcBef>
+              <a:spcAft>
+                <a:spcPts val="150"/>
+              </a:spcAft>
+            </a:pPr>
+            <a:r>
+              <a:rPr sz="900" lang="zh-TW" dirty="0">
+                <a:solidFill>
+                  <a:srgbClr val="000000"/>
+                </a:solidFill>
+                <a:latin typeface="Arial Unicode MS"/>
+                <a:ea typeface="Arial Unicode MS"/>
+                <a:cs typeface="Arial Unicode MS"/>
+              </a:rPr>
+              <a:t>現在看右邊。一樣是相機的規格表，Raspberry Pi 的 Camera Module 3。這張上面有沒有視野？有，而且有三行：對角、水平、垂直。同樣是相機的東西，為什麼一張有、一張沒有？先別急著回答。
+</a:t>
+            </a:r>
+          </a:p>
+          <a:p>
+            <a:pPr algn="l">
+              <a:spcBef>
+                <a:spcPts val="0"/>
+              </a:spcBef>
+              <a:spcAft>
+                <a:spcPts val="150"/>
+              </a:spcAft>
+            </a:pPr>
+            <a:r>
+              <a:rPr sz="900" lang="zh-TW" dirty="0">
+                <a:solidFill>
+                  <a:srgbClr val="000000"/>
+                </a:solidFill>
+                <a:latin typeface="Arial Unicode MS"/>
+                <a:ea typeface="Arial Unicode MS"/>
+                <a:cs typeface="Arial Unicode MS"/>
+              </a:rPr>
+              <a:t>右邊還有一行叫 </a:t>
+            </a:r>
+            <a:r>
+              <a:rPr sz="900" b="1" lang="zh-TW" dirty="0">
                 <a:solidFill>
                   <a:srgbClr val="000000"/>
                 </a:solidFill>
@@ -7363,18 +7385,18 @@
               <a:t>Focal length</a:t>
             </a:r>
             <a:r>
-              <a:rPr sz="1000" lang="zh-TW" dirty="0">
-                <a:solidFill>
-                  <a:srgbClr val="000000"/>
-                </a:solidFill>
-                <a:latin typeface="Arial Unicode MS"/>
-                <a:ea typeface="Arial Unicode MS"/>
-                <a:cs typeface="Arial Unicode MS"/>
-              </a:rPr>
-              <a:t>，焦距：前兩欄是 4.74 公釐，後兩欄是 2.75 公釐。往下看</a:t>
-            </a:r>
-            <a:r>
-              <a:rPr sz="1000" b="1" lang="zh-TW" dirty="0">
+              <a:rPr sz="900" lang="zh-TW" dirty="0">
+                <a:solidFill>
+                  <a:srgbClr val="000000"/>
+                </a:solidFill>
+                <a:latin typeface="Arial Unicode MS"/>
+                <a:ea typeface="Arial Unicode MS"/>
+                <a:cs typeface="Arial Unicode MS"/>
+              </a:rPr>
+              <a:t>，焦距。前面兩欄是 4.74 公釐，後面兩欄是 2.75 公釐。往下看</a:t>
+            </a:r>
+            <a:r>
+              <a:rPr sz="900" b="1" lang="zh-TW" dirty="0">
                 <a:solidFill>
                   <a:srgbClr val="000000"/>
                 </a:solidFill>
@@ -7385,7 +7407,7 @@
               <a:t>水平視野</a:t>
             </a:r>
             <a:r>
-              <a:rPr sz="1000" lang="zh-TW" dirty="0">
+              <a:rPr sz="900" lang="zh-TW" dirty="0">
                 <a:solidFill>
                   <a:srgbClr val="000000"/>
                 </a:solidFill>
@@ -7403,11 +7425,11 @@
                 <a:spcPts val="0"/>
               </a:spcBef>
               <a:spcAft>
-                <a:spcPts val="167"/>
-              </a:spcAft>
-            </a:pPr>
-            <a:r>
-              <a:rPr sz="1000" lang="zh-TW" dirty="0">
+                <a:spcPts val="150"/>
+              </a:spcAft>
+            </a:pPr>
+            <a:r>
+              <a:rPr sz="900" lang="zh-TW" dirty="0">
                 <a:solidFill>
                   <a:srgbClr val="000000"/>
                 </a:solidFill>

--- a/第五週(10-08)/第五週_第1節_簡報.pptx
+++ b/第五週(10-08)/第五週_第1節_簡報.pptx
@@ -1288,7 +1288,7 @@
                 <a:ea typeface="Arial Unicode MS"/>
                 <a:cs typeface="Arial Unicode MS"/>
               </a:rPr>
-              <a:t>那視野要怎麼算？右邊工具裡的第一個小工具就在做這件事，現在請大家打開來玩一下。
+              <a:t>那視野要怎麼算？規格判讀台上有三個小工具，第一個就在做這件事。現在請大家打開來玩一下。
 </a:t>
             </a:r>
           </a:p>
@@ -3950,7 +3950,29 @@
                 <a:ea typeface="Arial Unicode MS"/>
                 <a:cs typeface="Arial Unicode MS"/>
               </a:rPr>
-              <a:t>螢幕上這個網址，今天三節課都會用到，現在請大家打開。
+              <a:t>螢幕上這個網址，今天三節課都會用到，現在請大家打開。我們就叫它</a:t>
+            </a:r>
+            <a:r>
+              <a:rPr sz="1100" b="1" lang="zh-TW" dirty="0">
+                <a:solidFill>
+                  <a:srgbClr val="000000"/>
+                </a:solidFill>
+                <a:latin typeface="Arial Unicode MS"/>
+                <a:ea typeface="Arial Unicode MS"/>
+                <a:cs typeface="Arial Unicode MS"/>
+              </a:rPr>
+              <a:t>規格判讀台</a:t>
+            </a:r>
+            <a:r>
+              <a:rPr sz="1100" lang="zh-TW" dirty="0">
+                <a:solidFill>
+                  <a:srgbClr val="000000"/>
+                </a:solidFill>
+                <a:latin typeface="Arial Unicode MS"/>
+                <a:ea typeface="Arial Unicode MS"/>
+                <a:cs typeface="Arial Unicode MS"/>
+              </a:rPr>
+              <a:t>。
 </a:t>
             </a:r>
           </a:p>
@@ -4610,7 +4632,7 @@
                 <a:ea typeface="Arial Unicode MS"/>
                 <a:cs typeface="Arial Unicode MS"/>
               </a:rPr>
-              <a:t>請大家在工具上選 Ouster OS1-64，</a:t>
+              <a:t>請大家回到</a:t>
             </a:r>
             <a:r>
               <a:rPr sz="800" b="1" lang="zh-TW" dirty="0">
@@ -4621,6 +4643,28 @@
                 <a:ea typeface="Arial Unicode MS"/>
                 <a:cs typeface="Arial Unicode MS"/>
               </a:rPr>
+              <a:t>規格判讀台</a:t>
+            </a:r>
+            <a:r>
+              <a:rPr sz="800" lang="zh-TW" dirty="0">
+                <a:solidFill>
+                  <a:srgbClr val="000000"/>
+                </a:solidFill>
+                <a:latin typeface="Arial Unicode MS"/>
+                <a:ea typeface="Arial Unicode MS"/>
+                <a:cs typeface="Arial Unicode MS"/>
+              </a:rPr>
+              <a:t>，左邊選第一個型號，Ouster OS1-64——</a:t>
+            </a:r>
+            <a:r>
+              <a:rPr sz="800" b="1" lang="zh-TW" dirty="0">
+                <a:solidFill>
+                  <a:srgbClr val="000000"/>
+                </a:solidFill>
+                <a:latin typeface="Arial Unicode MS"/>
+                <a:ea typeface="Arial Unicode MS"/>
+                <a:cs typeface="Arial Unicode MS"/>
+              </a:rPr>
               <a:t>旋轉式</a:t>
             </a:r>
             <a:r>
@@ -4632,7 +4676,73 @@
                 <a:ea typeface="Arial Unicode MS"/>
                 <a:cs typeface="Arial Unicode MS"/>
               </a:rPr>
-              <a:t>的光達，車頂上會轉的那一種。左邊這張是它 datasheet 上的 OPTICAL PERFORMANCE，一共七行，今天只用其中三行，從上往下看。
+              <a:t>的光達，車頂上會轉的那一種。
+</a:t>
+            </a:r>
+          </a:p>
+          <a:p>
+            <a:pPr algn="l">
+              <a:spcBef>
+                <a:spcPts val="0"/>
+              </a:spcBef>
+              <a:spcAft>
+                <a:spcPts val="133"/>
+              </a:spcAft>
+            </a:pPr>
+            <a:r>
+              <a:rPr sz="800" lang="zh-TW" dirty="0">
+                <a:solidFill>
+                  <a:srgbClr val="000000"/>
+                </a:solidFill>
+                <a:latin typeface="Arial Unicode MS"/>
+                <a:ea typeface="Arial Unicode MS"/>
+                <a:cs typeface="Arial Unicode MS"/>
+              </a:rPr>
+              <a:t>投影片上這張是它 datasheet 的原圖，各位螢幕上那張是同一份規格，我重排過、加了中文對照。等一下對照著看。
+</a:t>
+            </a:r>
+          </a:p>
+          <a:p>
+            <a:pPr algn="l">
+              <a:spcBef>
+                <a:spcPts val="0"/>
+              </a:spcBef>
+              <a:spcAft>
+                <a:spcPts val="133"/>
+              </a:spcAft>
+            </a:pPr>
+            <a:r>
+              <a:rPr sz="800" lang="zh-TW" dirty="0">
+                <a:solidFill>
+                  <a:srgbClr val="000000"/>
+                </a:solidFill>
+                <a:latin typeface="Arial Unicode MS"/>
+                <a:ea typeface="Arial Unicode MS"/>
+                <a:cs typeface="Arial Unicode MS"/>
+              </a:rPr>
+              <a:t>我們看 </a:t>
+            </a:r>
+            <a:r>
+              <a:rPr sz="800" b="1" lang="zh-TW" dirty="0">
+                <a:solidFill>
+                  <a:srgbClr val="000000"/>
+                </a:solidFill>
+                <a:latin typeface="Arial Unicode MS"/>
+                <a:ea typeface="Arial Unicode MS"/>
+                <a:cs typeface="Arial Unicode MS"/>
+              </a:rPr>
+              <a:t>OPTICAL PERFORMANCE</a:t>
+            </a:r>
+            <a:r>
+              <a:rPr sz="800" lang="zh-TW" dirty="0">
+                <a:solidFill>
+                  <a:srgbClr val="000000"/>
+                </a:solidFill>
+                <a:latin typeface="Arial Unicode MS"/>
+                <a:ea typeface="Arial Unicode MS"/>
+                <a:cs typeface="Arial Unicode MS"/>
+              </a:rPr>
+              <a:t> 這一塊，一共七行，今天只用其中三行，從上往下看。
 </a:t>
             </a:r>
           </a:p>

--- a/第五週(10-08)/第五週_第1節_簡報.pptx
+++ b/第五週(10-08)/第五週_第1節_簡報.pptx
@@ -13358,9 +13358,72 @@
           </a:p>
         </p:txBody>
       </p:sp>
-      <p:sp>
-        <p:nvSpPr>
-          <p:cNvPr id="16" name="Shape 13"/>
+      <p:pic>
+        <p:nvPicPr>
+          <p:cNvPr id="16" name="Image 1" descr="/Users/tsengchenghsun/Class/carClass/Claude outputs/第五週(10-8)/src/img/w5_pic_os1.jpg">    </p:cNvPr>
+          <p:cNvPicPr>
+            <a:picLocks noChangeAspect="1"/>
+          </p:cNvPicPr>
+          <p:nvPr/>
+        </p:nvPicPr>
+        <p:blipFill>
+          <a:blip r:embed="rId2"/>
+          <a:stretch>
+            <a:fillRect/>
+          </a:stretch>
+        </p:blipFill>
+        <p:spPr>
+          <a:xfrm>
+            <a:off x="2213463" y="2902338"/>
+            <a:ext cx="785154" cy="736974"/>
+          </a:xfrm>
+          <a:prstGeom prst="rect">
+            <a:avLst/>
+          </a:prstGeom>
+        </p:spPr>
+      </p:pic>
+      <p:sp>
+        <p:nvSpPr>
+          <p:cNvPr id="17" name="Text 13"/>
+          <p:cNvSpPr txBox="1"/>
+          <p:nvPr/>
+        </p:nvSpPr>
+        <p:spPr>
+          <a:xfrm>
+            <a:off x="502920" y="3675888"/>
+            <a:ext cx="4206240" cy="164592"/>
+          </a:xfrm>
+          <a:prstGeom prst="rect">
+            <a:avLst/>
+          </a:prstGeom>
+          <a:noFill/>
+          <a:ln/>
+        </p:spPr>
+        <p:txBody>
+          <a:bodyPr wrap="square" lIns="0" tIns="0" rIns="0" bIns="0" rtlCol="0" anchor="ctr"/>
+          <a:lstStyle/>
+          <a:p>
+            <a:pPr algn="ctr" indent="0" marL="0">
+              <a:buNone/>
+            </a:pPr>
+            <a:r>
+              <a:rPr lang="en-US" sz="700" dirty="0">
+                <a:solidFill>
+                  <a:srgbClr val="5F7183"/>
+                </a:solidFill>
+                <a:latin typeface="Arial" pitchFamily="34" charset="0"/>
+                <a:ea typeface="Arial" pitchFamily="34" charset="-122"/>
+                <a:cs typeface="Arial" pitchFamily="34" charset="-120"/>
+              </a:rPr>
+              <a:t>Ouster OS1　圖：Ouster（ouster.com）</a:t>
+            </a:r>
+            <a:endParaRPr lang="en-US" sz="700" dirty="0"/>
+          </a:p>
+        </p:txBody>
+      </p:sp>
+      <p:sp>
+        <p:nvSpPr>
+          <p:cNvPr id="18" name="Shape 14"/>
           <p:cNvSpPr/>
           <p:nvPr/>
         </p:nvSpPr>
@@ -13387,7 +13450,7 @@
       </p:sp>
       <p:sp>
         <p:nvSpPr>
-          <p:cNvPr id="17" name="Text 14"/>
+          <p:cNvPr id="19" name="Text 15"/>
           <p:cNvSpPr txBox="1"/>
           <p:nvPr/>
         </p:nvSpPr>
@@ -13449,14 +13512,14 @@
       </p:sp>
       <p:pic>
         <p:nvPicPr>
-          <p:cNvPr id="19" name="Image 1" descr="/Users/tsengchenghsun/Class/carClass/Claude outputs/第五週(10-8)/src/logo.png">    </p:cNvPr>
+          <p:cNvPr id="21" name="Image 2" descr="/Users/tsengchenghsun/Class/carClass/Claude outputs/第五週(10-8)/src/logo.png">    </p:cNvPr>
           <p:cNvPicPr>
             <a:picLocks noChangeAspect="1"/>
           </p:cNvPicPr>
           <p:nvPr/>
         </p:nvPicPr>
         <p:blipFill>
-          <a:blip r:embed="rId2"/>
+          <a:blip r:embed="rId3"/>
           <a:stretch>
             <a:fillRect/>
           </a:stretch>
@@ -13473,7 +13536,7 @@
       </p:pic>
       <p:sp>
         <p:nvSpPr>
-          <p:cNvPr id="20" name="Text 15"/>
+          <p:cNvPr id="22" name="Text 16"/>
           <p:cNvSpPr txBox="1"/>
           <p:nvPr/>
         </p:nvSpPr>
@@ -13512,7 +13575,7 @@
       </p:sp>
       <p:sp>
         <p:nvSpPr>
-          <p:cNvPr id="21" name="Text 16"/>
+          <p:cNvPr id="23" name="Text 17"/>
           <p:cNvSpPr txBox="1"/>
           <p:nvPr/>
         </p:nvSpPr>
@@ -14203,9 +14266,72 @@
           </a:p>
         </p:txBody>
       </p:sp>
-      <p:sp>
-        <p:nvSpPr>
-          <p:cNvPr id="16" name="Shape 13"/>
+      <p:pic>
+        <p:nvPicPr>
+          <p:cNvPr id="16" name="Image 1" descr="/Users/tsengchenghsun/Class/carClass/Claude outputs/第五週(10-8)/src/img/w5_pic_at128p.png">    </p:cNvPr>
+          <p:cNvPicPr>
+            <a:picLocks noChangeAspect="1"/>
+          </p:cNvPicPr>
+          <p:nvPr/>
+        </p:nvPicPr>
+        <p:blipFill>
+          <a:blip r:embed="rId2"/>
+          <a:stretch>
+            <a:fillRect/>
+          </a:stretch>
+        </p:blipFill>
+        <p:spPr>
+          <a:xfrm>
+            <a:off x="7103133" y="365760"/>
+            <a:ext cx="623547" cy="384048"/>
+          </a:xfrm>
+          <a:prstGeom prst="rect">
+            <a:avLst/>
+          </a:prstGeom>
+        </p:spPr>
+      </p:pic>
+      <p:sp>
+        <p:nvSpPr>
+          <p:cNvPr id="17" name="Text 13"/>
+          <p:cNvSpPr txBox="1"/>
+          <p:nvPr/>
+        </p:nvSpPr>
+        <p:spPr>
+          <a:xfrm>
+            <a:off x="4801380" y="475488"/>
+            <a:ext cx="2210314" cy="182880"/>
+          </a:xfrm>
+          <a:prstGeom prst="rect">
+            <a:avLst/>
+          </a:prstGeom>
+          <a:noFill/>
+          <a:ln/>
+        </p:spPr>
+        <p:txBody>
+          <a:bodyPr wrap="square" lIns="0" tIns="0" rIns="0" bIns="0" rtlCol="0" anchor="ctr"/>
+          <a:lstStyle/>
+          <a:p>
+            <a:pPr algn="r" indent="0" marL="0">
+              <a:buNone/>
+            </a:pPr>
+            <a:r>
+              <a:rPr lang="en-US" sz="650" dirty="0">
+                <a:solidFill>
+                  <a:srgbClr val="5F7183"/>
+                </a:solidFill>
+                <a:latin typeface="Arial" pitchFamily="34" charset="0"/>
+                <a:ea typeface="Arial" pitchFamily="34" charset="-122"/>
+                <a:cs typeface="Arial" pitchFamily="34" charset="-120"/>
+              </a:rPr>
+              <a:t>Hesai AT128　圖：Hesai（hesaitech.com）</a:t>
+            </a:r>
+            <a:endParaRPr lang="en-US" sz="650" dirty="0"/>
+          </a:p>
+        </p:txBody>
+      </p:sp>
+      <p:sp>
+        <p:nvSpPr>
+          <p:cNvPr id="18" name="Shape 14"/>
           <p:cNvSpPr/>
           <p:nvPr/>
         </p:nvSpPr>
@@ -14232,7 +14358,7 @@
       </p:sp>
       <p:sp>
         <p:nvSpPr>
-          <p:cNvPr id="17" name="Text 14"/>
+          <p:cNvPr id="19" name="Text 15"/>
           <p:cNvSpPr txBox="1"/>
           <p:nvPr/>
         </p:nvSpPr>
@@ -14294,14 +14420,14 @@
       </p:sp>
       <p:pic>
         <p:nvPicPr>
-          <p:cNvPr id="19" name="Image 1" descr="/Users/tsengchenghsun/Class/carClass/Claude outputs/第五週(10-8)/src/logo.png">    </p:cNvPr>
+          <p:cNvPr id="21" name="Image 2" descr="/Users/tsengchenghsun/Class/carClass/Claude outputs/第五週(10-8)/src/logo.png">    </p:cNvPr>
           <p:cNvPicPr>
             <a:picLocks noChangeAspect="1"/>
           </p:cNvPicPr>
           <p:nvPr/>
         </p:nvPicPr>
         <p:blipFill>
-          <a:blip r:embed="rId2"/>
+          <a:blip r:embed="rId3"/>
           <a:stretch>
             <a:fillRect/>
           </a:stretch>
@@ -14318,7 +14444,7 @@
       </p:pic>
       <p:sp>
         <p:nvSpPr>
-          <p:cNvPr id="20" name="Text 15"/>
+          <p:cNvPr id="22" name="Text 16"/>
           <p:cNvSpPr txBox="1"/>
           <p:nvPr/>
         </p:nvSpPr>
@@ -14357,7 +14483,7 @@
       </p:sp>
       <p:sp>
         <p:nvSpPr>
-          <p:cNvPr id="21" name="Text 16"/>
+          <p:cNvPr id="23" name="Text 17"/>
           <p:cNvSpPr txBox="1"/>
           <p:nvPr/>
         </p:nvSpPr>

--- a/第五週(10-08)/第五週_第1節_簡報.pptx
+++ b/第五週(10-08)/第五週_第1節_簡報.pptx
@@ -2608,7 +2608,7 @@
                 <a:ea typeface="Arial Unicode MS"/>
                 <a:cs typeface="Arial Unicode MS"/>
               </a:rPr>
-              <a:t>百分之八十是很亮、很會反光的東西——白色的車、反光背心、標誌牌。百分之十是深色、吃光的東西——黑色的車、深色的雨衣、柏油路面。
+              <a:t>百分之八十是淺色、會把光均勻散回來的東西——白色的車、淺色的牆、水泥路面。百分之十是深色、吃光的東西——黑色的車、深色的雨衣、柏油路面。
 </a:t>
             </a:r>
           </a:p>
@@ -4819,7 +4819,7 @@
                 <a:ea typeface="Arial Unicode MS"/>
                 <a:cs typeface="Arial Unicode MS"/>
               </a:rPr>
-              <a:t>。那是很亮、很會反光的表面，彈回來的光很強，所以量得到 170 公尺。
+              <a:t>。那是把光均勻散回來的淺色表面，散回來的光很強，所以量得到 170 公尺。
 </a:t>
             </a:r>
           </a:p>
@@ -4863,7 +4863,7 @@
                 <a:ea typeface="Arial Unicode MS"/>
                 <a:cs typeface="Arial Unicode MS"/>
               </a:rPr>
-              <a:t>。深色的東西會把光吃掉，彈回來很弱，就只剩 90 公尺。同一顆光達，放在同一個地方，差別只在它看的東西是什麼顏色。
+              <a:t>。深色的東西會把光吃掉，散回來的很弱，就只剩 90 公尺。同一顆光達，放在同一個地方，差別只在它看的東西是什麼顏色。
 </a:t>
             </a:r>
           </a:p>
@@ -9790,7 +9790,7 @@
                 <a:ea typeface="Arial" pitchFamily="34" charset="-122"/>
                 <a:cs typeface="Arial" pitchFamily="34" charset="-120"/>
               </a:rPr>
-              <a:t>Vật sáng: xe trắng, áo phản quang</a:t>
+              <a:t>Vật sáng: xe trắng, tường màu nhạt</a:t>
             </a:r>
             <a:endParaRPr lang="en-US" sz="1100" dirty="0"/>
           </a:p>
@@ -9810,7 +9810,7 @@
                 <a:ea typeface="微軟正黑體" pitchFamily="34" charset="-122"/>
                 <a:cs typeface="微軟正黑體" pitchFamily="34" charset="-120"/>
               </a:rPr>
-              <a:t>亮色、反射強：白色的車、反光背心</a:t>
+              <a:t>淺色、散得回來：白色的車、淺色的牆</a:t>
             </a:r>
             <a:endParaRPr lang="en-US" sz="1100" dirty="0"/>
           </a:p>
@@ -12776,7 +12776,7 @@
         </p:nvSpPr>
         <p:spPr>
           <a:xfrm>
-            <a:off x="502920" y="877824"/>
+            <a:off x="502920" y="1682496"/>
             <a:ext cx="4206240" cy="2006226"/>
           </a:xfrm>
           <a:prstGeom prst="roundRect">
@@ -12811,7 +12811,7 @@
         </p:blipFill>
         <p:spPr>
           <a:xfrm>
-            <a:off x="576072" y="980142"/>
+            <a:off x="576072" y="1784814"/>
             <a:ext cx="4059936" cy="1618710"/>
           </a:xfrm>
           <a:prstGeom prst="rect">
@@ -12827,7 +12827,7 @@
         </p:nvSpPr>
         <p:spPr>
           <a:xfrm>
-            <a:off x="576072" y="2646306"/>
+            <a:off x="576072" y="3450978"/>
             <a:ext cx="4059936" cy="182880"/>
           </a:xfrm>
           <a:prstGeom prst="rect">
@@ -13374,8 +13374,8 @@
         </p:blipFill>
         <p:spPr>
           <a:xfrm>
-            <a:off x="2213463" y="2902338"/>
-            <a:ext cx="785154" cy="736974"/>
+            <a:off x="594360" y="649224"/>
+            <a:ext cx="1003683" cy="987552"/>
           </a:xfrm>
           <a:prstGeom prst="rect">
             <a:avLst/>
@@ -13390,8 +13390,8 @@
         </p:nvSpPr>
         <p:spPr>
           <a:xfrm>
-            <a:off x="502920" y="3675888"/>
-            <a:ext cx="4206240" cy="164592"/>
+            <a:off x="1707771" y="1417320"/>
+            <a:ext cx="3001389" cy="164592"/>
           </a:xfrm>
           <a:prstGeom prst="rect">
             <a:avLst/>
@@ -13403,7 +13403,7 @@
           <a:bodyPr wrap="square" lIns="0" tIns="0" rIns="0" bIns="0" rtlCol="0" anchor="ctr"/>
           <a:lstStyle/>
           <a:p>
-            <a:pPr algn="ctr" indent="0" marL="0">
+            <a:pPr algn="l" indent="0" marL="0">
               <a:buNone/>
             </a:pPr>
             <a:r>
@@ -13415,7 +13415,7 @@
                 <a:ea typeface="Arial" pitchFamily="34" charset="-122"/>
                 <a:cs typeface="Arial" pitchFamily="34" charset="-120"/>
               </a:rPr>
-              <a:t>Ouster OS1　圖：Ouster（ouster.com）</a:t>
+              <a:t>Ouster OS1</a:t>
             </a:r>
             <a:endParaRPr lang="en-US" sz="700" dirty="0"/>
           </a:p>
@@ -14299,7 +14299,7 @@
         <p:spPr>
           <a:xfrm>
             <a:off x="4801380" y="475488"/>
-            <a:ext cx="2210314" cy="182880"/>
+            <a:ext cx="2210314" cy="164592"/>
           </a:xfrm>
           <a:prstGeom prst="rect">
             <a:avLst/>
@@ -14315,7 +14315,7 @@
               <a:buNone/>
             </a:pPr>
             <a:r>
-              <a:rPr lang="en-US" sz="650" dirty="0">
+              <a:rPr lang="en-US" sz="700" dirty="0">
                 <a:solidFill>
                   <a:srgbClr val="5F7183"/>
                 </a:solidFill>
@@ -14325,7 +14325,7 @@
               </a:rPr>
               <a:t>Hesai AT128　圖：Hesai（hesaitech.com）</a:t>
             </a:r>
-            <a:endParaRPr lang="en-US" sz="650" dirty="0"/>
+            <a:endParaRPr lang="en-US" sz="700" dirty="0"/>
           </a:p>
         </p:txBody>
       </p:sp>
@@ -17299,9 +17299,33 @@
           </a:prstGeom>
         </p:spPr>
       </p:pic>
-      <p:sp>
-        <p:nvSpPr>
-          <p:cNvPr id="8" name="Text 5"/>
+      <p:pic>
+        <p:nvPicPr>
+          <p:cNvPr id="8" name="Image 1" descr="/Users/tsengchenghsun/Class/carClass/Claude outputs/第五週(10-8)/src/img/w5_pic_ar0233at.png">    </p:cNvPr>
+          <p:cNvPicPr>
+            <a:picLocks noChangeAspect="1"/>
+          </p:cNvPicPr>
+          <p:nvPr/>
+        </p:nvPicPr>
+        <p:blipFill>
+          <a:blip r:embed="rId2"/>
+          <a:stretch>
+            <a:fillRect/>
+          </a:stretch>
+        </p:blipFill>
+        <p:spPr>
+          <a:xfrm>
+            <a:off x="2498705" y="1804209"/>
+            <a:ext cx="1076577" cy="768096"/>
+          </a:xfrm>
+          <a:prstGeom prst="rect">
+            <a:avLst/>
+          </a:prstGeom>
+        </p:spPr>
+      </p:pic>
+      <p:sp>
+        <p:nvSpPr>
+          <p:cNvPr id="9" name="Text 5"/>
           <p:cNvSpPr txBox="1"/>
           <p:nvPr/>
         </p:nvSpPr>
@@ -17340,7 +17364,7 @@
       </p:sp>
       <p:sp>
         <p:nvSpPr>
-          <p:cNvPr id="9" name="Shape 6"/>
+          <p:cNvPr id="10" name="Shape 6"/>
           <p:cNvSpPr/>
           <p:nvPr/>
         </p:nvSpPr>
@@ -17367,7 +17391,7 @@
       </p:sp>
       <p:sp>
         <p:nvSpPr>
-          <p:cNvPr id="10" name="Shape 7"/>
+          <p:cNvPr id="11" name="Shape 7"/>
           <p:cNvSpPr/>
           <p:nvPr/>
         </p:nvSpPr>
@@ -17389,7 +17413,7 @@
       </p:sp>
       <p:sp>
         <p:nvSpPr>
-          <p:cNvPr id="11" name="Text 8"/>
+          <p:cNvPr id="12" name="Text 8"/>
           <p:cNvSpPr txBox="1"/>
           <p:nvPr/>
         </p:nvSpPr>
@@ -17451,14 +17475,14 @@
       </p:sp>
       <p:pic>
         <p:nvPicPr>
-          <p:cNvPr id="12" name="Image 1" descr="/Users/tsengchenghsun/Class/carClass/Claude outputs/第五週(10-8)/src/img/w5_s09_module_spec.png">    </p:cNvPr>
+          <p:cNvPr id="13" name="Image 2" descr="/Users/tsengchenghsun/Class/carClass/Claude outputs/第五週(10-8)/src/img/w5_s09_module_spec.png">    </p:cNvPr>
           <p:cNvPicPr>
             <a:picLocks noChangeAspect="1"/>
           </p:cNvPicPr>
           <p:nvPr/>
         </p:nvPicPr>
         <p:blipFill>
-          <a:blip r:embed="rId2"/>
+          <a:blip r:embed="rId3"/>
           <a:stretch>
             <a:fillRect/>
           </a:stretch>
@@ -17475,7 +17499,7 @@
       </p:pic>
       <p:sp>
         <p:nvSpPr>
-          <p:cNvPr id="13" name="Text 9"/>
+          <p:cNvPr id="14" name="Text 9"/>
           <p:cNvSpPr txBox="1"/>
           <p:nvPr/>
         </p:nvSpPr>
@@ -17514,7 +17538,7 @@
       </p:sp>
       <p:sp>
         <p:nvSpPr>
-          <p:cNvPr id="14" name="Shape 10"/>
+          <p:cNvPr id="15" name="Shape 10"/>
           <p:cNvSpPr/>
           <p:nvPr/>
         </p:nvSpPr>
@@ -17541,7 +17565,7 @@
       </p:sp>
       <p:sp>
         <p:nvSpPr>
-          <p:cNvPr id="15" name="Text 11"/>
+          <p:cNvPr id="16" name="Text 11"/>
           <p:cNvSpPr txBox="1"/>
           <p:nvPr/>
         </p:nvSpPr>
@@ -17603,14 +17627,14 @@
       </p:sp>
       <p:pic>
         <p:nvPicPr>
-          <p:cNvPr id="17" name="Image 2" descr="/Users/tsengchenghsun/Class/carClass/Claude outputs/第五週(10-8)/src/logo.png">    </p:cNvPr>
+          <p:cNvPr id="18" name="Image 3" descr="/Users/tsengchenghsun/Class/carClass/Claude outputs/第五週(10-8)/src/logo.png">    </p:cNvPr>
           <p:cNvPicPr>
             <a:picLocks noChangeAspect="1"/>
           </p:cNvPicPr>
           <p:nvPr/>
         </p:nvPicPr>
         <p:blipFill>
-          <a:blip r:embed="rId3"/>
+          <a:blip r:embed="rId4"/>
           <a:stretch>
             <a:fillRect/>
           </a:stretch>
@@ -17627,7 +17651,7 @@
       </p:pic>
       <p:sp>
         <p:nvSpPr>
-          <p:cNvPr id="18" name="Text 12"/>
+          <p:cNvPr id="19" name="Text 12"/>
           <p:cNvSpPr txBox="1"/>
           <p:nvPr/>
         </p:nvSpPr>
@@ -17666,7 +17690,7 @@
       </p:sp>
       <p:sp>
         <p:nvSpPr>
-          <p:cNvPr id="19" name="Text 13"/>
+          <p:cNvPr id="20" name="Text 13"/>
           <p:cNvSpPr txBox="1"/>
           <p:nvPr/>
         </p:nvSpPr>

--- a/第五週(10-08)/第五週_第1節_簡報.pptx
+++ b/第五週(10-08)/第五週_第1節_簡報.pptx
@@ -4863,7 +4863,7 @@
                 <a:ea typeface="Arial Unicode MS"/>
                 <a:cs typeface="Arial Unicode MS"/>
               </a:rPr>
-              <a:t>。深色的東西會把光吃掉，散回來的很弱，就只剩 90 公尺。同一顆光達，放在同一個地方，差別只在它看的東西是什麼顏色。
+              <a:t>。深色的東西會把光吃掉，散回來的很弱，就只剩 90 公尺。
 </a:t>
             </a:r>
           </a:p>

--- a/第五週(10-08)/第五週_第1節_簡報.pptx
+++ b/第五週(10-08)/第五週_第1節_簡報.pptx
@@ -2343,11 +2343,11 @@
                 <a:spcPts val="0"/>
               </a:spcBef>
               <a:spcAft>
-                <a:spcPts val="158"/>
-              </a:spcAft>
-            </a:pPr>
-            <a:r>
-              <a:rPr sz="950" b="1" lang="zh-TW" dirty="0">
+                <a:spcPts val="142"/>
+              </a:spcAft>
+            </a:pPr>
+            <a:r>
+              <a:rPr sz="850" b="1" lang="zh-TW" dirty="0">
                 <a:solidFill>
                   <a:srgbClr val="000000"/>
                 </a:solidFill>
@@ -2358,7 +2358,7 @@
               <a:t>▍這一張要做什麼</a:t>
             </a:r>
             <a:r>
-              <a:rPr sz="950" lang="zh-TW" dirty="0">
+              <a:rPr sz="850" lang="zh-TW" dirty="0">
                 <a:solidFill>
                   <a:srgbClr val="000000"/>
                 </a:solidFill>
@@ -2376,19 +2376,19 @@
                 <a:spcPts val="0"/>
               </a:spcBef>
               <a:spcAft>
-                <a:spcPts val="158"/>
-              </a:spcAft>
-            </a:pPr>
-            <a:r>
-              <a:rPr sz="950" lang="zh-TW" dirty="0">
-                <a:solidFill>
-                  <a:srgbClr val="000000"/>
-                </a:solidFill>
-                <a:latin typeface="Arial Unicode MS"/>
-                <a:ea typeface="Arial Unicode MS"/>
-                <a:cs typeface="Arial Unicode MS"/>
-              </a:rPr>
-              <a:t>同一顆光達兩個測距：讓學生在真的 datasheet 上看到 170 與 90 後面那串小字。
+                <a:spcPts val="142"/>
+              </a:spcAft>
+            </a:pPr>
+            <a:r>
+              <a:rPr sz="850" lang="zh-TW" dirty="0">
+                <a:solidFill>
+                  <a:srgbClr val="000000"/>
+                </a:solidFill>
+                <a:latin typeface="Arial Unicode MS"/>
+                <a:ea typeface="Arial Unicode MS"/>
+                <a:cs typeface="Arial Unicode MS"/>
+              </a:rPr>
+              <a:t>同一顆光達兩個測距：讓學生在真的 datasheet 上看到 170 與 90 後面那串小字。最後補一句光達看的是紅外線、不是顏色。
 </a:t>
             </a:r>
           </a:p>
@@ -2398,11 +2398,11 @@
                 <a:spcPts val="0"/>
               </a:spcBef>
               <a:spcAft>
-                <a:spcPts val="158"/>
-              </a:spcAft>
-            </a:pPr>
-            <a:r>
-              <a:rPr sz="950" b="1" lang="zh-TW" dirty="0">
+                <a:spcPts val="142"/>
+              </a:spcAft>
+            </a:pPr>
+            <a:r>
+              <a:rPr sz="850" b="1" lang="zh-TW" dirty="0">
                 <a:solidFill>
                   <a:srgbClr val="000000"/>
                 </a:solidFill>
@@ -2413,7 +2413,7 @@
               <a:t>▍畫面上圈這裡</a:t>
             </a:r>
             <a:r>
-              <a:rPr sz="950" lang="zh-TW" dirty="0">
+              <a:rPr sz="850" lang="zh-TW" dirty="0">
                 <a:solidFill>
                   <a:srgbClr val="000000"/>
                 </a:solidFill>
@@ -2431,11 +2431,11 @@
                 <a:spcPts val="0"/>
               </a:spcBef>
               <a:spcAft>
-                <a:spcPts val="158"/>
-              </a:spcAft>
-            </a:pPr>
-            <a:r>
-              <a:rPr sz="950" lang="zh-TW" dirty="0">
+                <a:spcPts val="142"/>
+              </a:spcAft>
+            </a:pPr>
+            <a:r>
+              <a:rPr sz="850" lang="zh-TW" dirty="0">
                 <a:solidFill>
                   <a:srgbClr val="000000"/>
                 </a:solidFill>
@@ -2453,11 +2453,11 @@
                 <a:spcPts val="0"/>
               </a:spcBef>
               <a:spcAft>
-                <a:spcPts val="158"/>
-              </a:spcAft>
-            </a:pPr>
-            <a:r>
-              <a:rPr sz="950" b="1" lang="zh-TW" dirty="0">
+                <a:spcPts val="142"/>
+              </a:spcAft>
+            </a:pPr>
+            <a:r>
+              <a:rPr sz="850" b="1" lang="zh-TW" dirty="0">
                 <a:solidFill>
                   <a:srgbClr val="000000"/>
                 </a:solidFill>
@@ -2468,7 +2468,7 @@
               <a:t>▍以下照著唸</a:t>
             </a:r>
             <a:r>
-              <a:rPr sz="950" lang="zh-TW" dirty="0">
+              <a:rPr sz="850" lang="zh-TW" dirty="0">
                 <a:solidFill>
                   <a:srgbClr val="000000"/>
                 </a:solidFill>
@@ -2486,11 +2486,11 @@
                 <a:spcPts val="0"/>
               </a:spcBef>
               <a:spcAft>
-                <a:spcPts val="158"/>
-              </a:spcAft>
-            </a:pPr>
-            <a:r>
-              <a:rPr sz="950" lang="zh-TW" dirty="0">
+                <a:spcPts val="142"/>
+              </a:spcAft>
+            </a:pPr>
+            <a:r>
+              <a:rPr sz="850" lang="zh-TW" dirty="0">
                 <a:solidFill>
                   <a:srgbClr val="000000"/>
                 </a:solidFill>
@@ -2501,7 +2501,7 @@
               <a:t>回到剛剛請大家圈起來的那一行。左邊是 OS1 規格表上真正的那兩行，測距寫了</a:t>
             </a:r>
             <a:r>
-              <a:rPr sz="950" b="1" lang="zh-TW" dirty="0">
+              <a:rPr sz="850" b="1" lang="zh-TW" dirty="0">
                 <a:solidFill>
                   <a:srgbClr val="000000"/>
                 </a:solidFill>
@@ -2512,7 +2512,7 @@
               <a:t>兩個數字</a:t>
             </a:r>
             <a:r>
-              <a:rPr sz="950" lang="zh-TW" dirty="0">
+              <a:rPr sz="850" lang="zh-TW" dirty="0">
                 <a:solidFill>
                   <a:srgbClr val="000000"/>
                 </a:solidFill>
@@ -2530,11 +2530,11 @@
                 <a:spcPts val="0"/>
               </a:spcBef>
               <a:spcAft>
-                <a:spcPts val="158"/>
-              </a:spcAft>
-            </a:pPr>
-            <a:r>
-              <a:rPr sz="950" lang="zh-TW" dirty="0">
+                <a:spcPts val="142"/>
+              </a:spcAft>
+            </a:pPr>
+            <a:r>
+              <a:rPr sz="850" lang="zh-TW" dirty="0">
                 <a:solidFill>
                   <a:srgbClr val="000000"/>
                 </a:solidFill>
@@ -2545,7 +2545,7 @@
               <a:t>第一個 170 公尺，括號裡是 </a:t>
             </a:r>
             <a:r>
-              <a:rPr sz="950" b="1" lang="zh-TW" dirty="0">
+              <a:rPr sz="850" b="1" lang="zh-TW" dirty="0">
                 <a:solidFill>
                   <a:srgbClr val="000000"/>
                 </a:solidFill>
@@ -2556,7 +2556,7 @@
               <a:t>80% Lambertian reflectivity</a:t>
             </a:r>
             <a:r>
-              <a:rPr sz="950" lang="zh-TW" dirty="0">
+              <a:rPr sz="850" lang="zh-TW" dirty="0">
                 <a:solidFill>
                   <a:srgbClr val="000000"/>
                 </a:solidFill>
@@ -2567,7 +2567,7 @@
               <a:t>；第二個 90 公尺，括號裡是 </a:t>
             </a:r>
             <a:r>
-              <a:rPr sz="950" b="1" lang="zh-TW" dirty="0">
+              <a:rPr sz="850" b="1" lang="zh-TW" dirty="0">
                 <a:solidFill>
                   <a:srgbClr val="000000"/>
                 </a:solidFill>
@@ -2578,7 +2578,7 @@
               <a:t>10%</a:t>
             </a:r>
             <a:r>
-              <a:rPr sz="950" lang="zh-TW" dirty="0">
+              <a:rPr sz="850" lang="zh-TW" dirty="0">
                 <a:solidFill>
                   <a:srgbClr val="000000"/>
                 </a:solidFill>
@@ -2596,11 +2596,11 @@
                 <a:spcPts val="0"/>
               </a:spcBef>
               <a:spcAft>
-                <a:spcPts val="158"/>
-              </a:spcAft>
-            </a:pPr>
-            <a:r>
-              <a:rPr sz="950" lang="zh-TW" dirty="0">
+                <a:spcPts val="142"/>
+              </a:spcAft>
+            </a:pPr>
+            <a:r>
+              <a:rPr sz="850" lang="zh-TW" dirty="0">
                 <a:solidFill>
                   <a:srgbClr val="000000"/>
                 </a:solidFill>
@@ -2618,11 +2618,11 @@
                 <a:spcPts val="0"/>
               </a:spcBef>
               <a:spcAft>
-                <a:spcPts val="158"/>
-              </a:spcAft>
-            </a:pPr>
-            <a:r>
-              <a:rPr sz="950" lang="zh-TW" dirty="0">
+                <a:spcPts val="142"/>
+              </a:spcAft>
+            </a:pPr>
+            <a:r>
+              <a:rPr sz="850" lang="zh-TW" dirty="0">
                 <a:solidFill>
                   <a:srgbClr val="000000"/>
                 </a:solidFill>
@@ -2633,7 +2633,7 @@
               <a:t>所以同一顆光達，看白色的車看得到一百七十公尺，看黑色的車只剩九十公尺，</a:t>
             </a:r>
             <a:r>
-              <a:rPr sz="950" b="1" lang="zh-TW" dirty="0">
+              <a:rPr sz="850" b="1" lang="zh-TW" dirty="0">
                 <a:solidFill>
                   <a:srgbClr val="000000"/>
                 </a:solidFill>
@@ -2644,7 +2644,7 @@
               <a:t>差了將近一倍</a:t>
             </a:r>
             <a:r>
-              <a:rPr sz="950" lang="zh-TW" dirty="0">
+              <a:rPr sz="850" lang="zh-TW" dirty="0">
                 <a:solidFill>
                   <a:srgbClr val="000000"/>
                 </a:solidFill>
@@ -2662,11 +2662,55 @@
                 <a:spcPts val="0"/>
               </a:spcBef>
               <a:spcAft>
-                <a:spcPts val="158"/>
-              </a:spcAft>
-            </a:pPr>
-            <a:r>
-              <a:rPr sz="950" lang="zh-TW" dirty="0">
+                <a:spcPts val="142"/>
+              </a:spcAft>
+            </a:pPr>
+            <a:r>
+              <a:rPr sz="850" lang="zh-TW" dirty="0">
+                <a:solidFill>
+                  <a:srgbClr val="000000"/>
+                </a:solidFill>
+                <a:latin typeface="Arial Unicode MS"/>
+                <a:ea typeface="Arial Unicode MS"/>
+                <a:cs typeface="Arial Unicode MS"/>
+              </a:rPr>
+              <a:t>不過這裡要補一件事，不然各位會記成錯的：</a:t>
+            </a:r>
+            <a:r>
+              <a:rPr sz="850" b="1" lang="zh-TW" dirty="0">
+                <a:solidFill>
+                  <a:srgbClr val="000000"/>
+                </a:solidFill>
+                <a:latin typeface="Arial Unicode MS"/>
+                <a:ea typeface="Arial Unicode MS"/>
+                <a:cs typeface="Arial Unicode MS"/>
+              </a:rPr>
+              <a:t>光達看的其實不是顏色</a:t>
+            </a:r>
+            <a:r>
+              <a:rPr sz="850" lang="zh-TW" dirty="0">
+                <a:solidFill>
+                  <a:srgbClr val="000000"/>
+                </a:solidFill>
+                <a:latin typeface="Arial Unicode MS"/>
+                <a:ea typeface="Arial Unicode MS"/>
+                <a:cs typeface="Arial Unicode MS"/>
+              </a:rPr>
+              <a:t>。它只打一個波長——OS1 是 865 奈米的紅外線，AT128P 是 905 奈米。它量的是「我打出去那個波長，回來多少」，跟人眼看到的深淺只是大概相關。樹葉在我們眼裡是深綠色，在紅外線下卻很亮；有些黑色車漆看起來一樣黑，對紅外線卻反得特別好。業界現在真的在做「對光達友善的黑漆」——可見光反射率不到一成，看起來還是黑的，紅外線卻反回六成以上。
+</a:t>
+            </a:r>
+          </a:p>
+          <a:p>
+            <a:pPr algn="l">
+              <a:spcBef>
+                <a:spcPts val="0"/>
+              </a:spcBef>
+              <a:spcAft>
+                <a:spcPts val="142"/>
+              </a:spcAft>
+            </a:pPr>
+            <a:r>
+              <a:rPr sz="850" lang="zh-TW" dirty="0">
                 <a:solidFill>
                   <a:srgbClr val="000000"/>
                 </a:solidFill>
@@ -2684,11 +2728,11 @@
                 <a:spcPts val="0"/>
               </a:spcBef>
               <a:spcAft>
-                <a:spcPts val="158"/>
-              </a:spcAft>
-            </a:pPr>
-            <a:r>
-              <a:rPr sz="950" lang="zh-TW" dirty="0">
+                <a:spcPts val="142"/>
+              </a:spcAft>
+            </a:pPr>
+            <a:r>
+              <a:rPr sz="850" lang="zh-TW" dirty="0">
                 <a:solidFill>
                   <a:srgbClr val="000000"/>
                 </a:solidFill>
@@ -2699,7 +2743,7 @@
               <a:t>可是身為工程師，</a:t>
             </a:r>
             <a:r>
-              <a:rPr sz="950" b="1" lang="zh-TW" dirty="0">
+              <a:rPr sz="850" b="1" lang="zh-TW" dirty="0">
                 <a:solidFill>
                   <a:srgbClr val="000000"/>
                 </a:solidFill>
@@ -2710,7 +2754,7 @@
               <a:t>你要拿來設計的是九十</a:t>
             </a:r>
             <a:r>
-              <a:rPr sz="950" lang="zh-TW" dirty="0">
+              <a:rPr sz="850" lang="zh-TW" dirty="0">
                 <a:solidFill>
                   <a:srgbClr val="000000"/>
                 </a:solidFill>
@@ -2728,11 +2772,11 @@
                 <a:spcPts val="0"/>
               </a:spcBef>
               <a:spcAft>
-                <a:spcPts val="158"/>
-              </a:spcAft>
-            </a:pPr>
-            <a:r>
-              <a:rPr sz="950" lang="zh-TW" dirty="0">
+                <a:spcPts val="142"/>
+              </a:spcAft>
+            </a:pPr>
+            <a:r>
+              <a:rPr sz="850" lang="zh-TW" dirty="0">
                 <a:solidFill>
                   <a:srgbClr val="000000"/>
                 </a:solidFill>
@@ -2743,7 +2787,7 @@
               <a:t>以後看到規格表寫「測距 200 公尺」，第一句話要問：</a:t>
             </a:r>
             <a:r>
-              <a:rPr sz="950" b="1" lang="zh-TW" dirty="0">
+              <a:rPr sz="850" b="1" lang="zh-TW" dirty="0">
                 <a:solidFill>
                   <a:srgbClr val="000000"/>
                 </a:solidFill>
@@ -2754,7 +2798,7 @@
               <a:t>那是對什麼反射率量的？</a:t>
             </a:r>
             <a:r>
-              <a:rPr sz="950" lang="zh-TW" dirty="0">
+              <a:rPr sz="850" lang="zh-TW" dirty="0">
                 <a:solidFill>
                   <a:srgbClr val="000000"/>
                 </a:solidFill>

--- a/第五週(10-08)/第五週_第1節_簡報.pptx
+++ b/第五週(10-08)/第五週_第1節_簡報.pptx
@@ -7437,11 +7437,11 @@
                 <a:spcPts val="0"/>
               </a:spcBef>
               <a:spcAft>
-                <a:spcPts val="142"/>
-              </a:spcAft>
-            </a:pPr>
-            <a:r>
-              <a:rPr sz="850" b="1" lang="zh-TW" dirty="0">
+                <a:spcPts val="133"/>
+              </a:spcAft>
+            </a:pPr>
+            <a:r>
+              <a:rPr sz="800" b="1" lang="zh-TW" dirty="0">
                 <a:solidFill>
                   <a:srgbClr val="000000"/>
                 </a:solidFill>
@@ -7452,7 +7452,7 @@
               <a:t>▍這一張要做什麼</a:t>
             </a:r>
             <a:r>
-              <a:rPr sz="850" lang="zh-TW" dirty="0">
+              <a:rPr sz="800" lang="zh-TW" dirty="0">
                 <a:solidFill>
                   <a:srgbClr val="000000"/>
                 </a:solidFill>
@@ -7470,11 +7470,11 @@
                 <a:spcPts val="0"/>
               </a:spcBef>
               <a:spcAft>
-                <a:spcPts val="142"/>
-              </a:spcAft>
-            </a:pPr>
-            <a:r>
-              <a:rPr sz="850" lang="zh-TW" dirty="0">
+                <a:spcPts val="133"/>
+              </a:spcAft>
+            </a:pPr>
+            <a:r>
+              <a:rPr sz="800" lang="zh-TW" dirty="0">
                 <a:solidFill>
                   <a:srgbClr val="000000"/>
                 </a:solidFill>
@@ -7492,11 +7492,11 @@
                 <a:spcPts val="0"/>
               </a:spcBef>
               <a:spcAft>
-                <a:spcPts val="142"/>
-              </a:spcAft>
-            </a:pPr>
-            <a:r>
-              <a:rPr sz="850" b="1" lang="zh-TW" dirty="0">
+                <a:spcPts val="133"/>
+              </a:spcAft>
+            </a:pPr>
+            <a:r>
+              <a:rPr sz="800" b="1" lang="zh-TW" dirty="0">
                 <a:solidFill>
                   <a:srgbClr val="000000"/>
                 </a:solidFill>
@@ -7507,7 +7507,7 @@
               <a:t>▍畫面上圈這裡</a:t>
             </a:r>
             <a:r>
-              <a:rPr sz="850" lang="zh-TW" dirty="0">
+              <a:rPr sz="800" lang="zh-TW" dirty="0">
                 <a:solidFill>
                   <a:srgbClr val="000000"/>
                 </a:solidFill>
@@ -7525,19 +7525,19 @@
                 <a:spcPts val="0"/>
               </a:spcBef>
               <a:spcAft>
-                <a:spcPts val="142"/>
-              </a:spcAft>
-            </a:pPr>
-            <a:r>
-              <a:rPr sz="850" lang="zh-TW" dirty="0">
-                <a:solidFill>
-                  <a:srgbClr val="000000"/>
-                </a:solidFill>
-                <a:latin typeface="Arial Unicode MS"/>
-                <a:ea typeface="Arial Unicode MS"/>
-                <a:cs typeface="Arial Unicode MS"/>
-              </a:rPr>
-              <a:t>播第一次只看一圈一圈的線；第二次只看顏色。播完再圈下面第三條。
+                <a:spcPts val="133"/>
+              </a:spcAft>
+            </a:pPr>
+            <a:r>
+              <a:rPr sz="800" lang="zh-TW" dirty="0">
+                <a:solidFill>
+                  <a:srgbClr val="000000"/>
+                </a:solidFill>
+                <a:latin typeface="Arial Unicode MS"/>
+                <a:ea typeface="Arial Unicode MS"/>
+                <a:cs typeface="Arial Unicode MS"/>
+              </a:rPr>
+              <a:t>播第一次只看一圈一圈的線；第二次只看顏色。播完問「最亮的是什麼」——答案是路邊的桿子、淺色的牆、停著的車身，最暗的是柏油路面。最後指畫面中央那個黑洞。
 </a:t>
             </a:r>
           </a:p>
@@ -7547,11 +7547,11 @@
                 <a:spcPts val="0"/>
               </a:spcBef>
               <a:spcAft>
-                <a:spcPts val="142"/>
-              </a:spcAft>
-            </a:pPr>
-            <a:r>
-              <a:rPr sz="850" b="1" lang="zh-TW" dirty="0">
+                <a:spcPts val="133"/>
+              </a:spcAft>
+            </a:pPr>
+            <a:r>
+              <a:rPr sz="800" b="1" lang="zh-TW" dirty="0">
                 <a:solidFill>
                   <a:srgbClr val="000000"/>
                 </a:solidFill>
@@ -7562,7 +7562,7 @@
               <a:t>▍以下照著唸</a:t>
             </a:r>
             <a:r>
-              <a:rPr sz="850" lang="zh-TW" dirty="0">
+              <a:rPr sz="800" lang="zh-TW" dirty="0">
                 <a:solidFill>
                   <a:srgbClr val="000000"/>
                 </a:solidFill>
@@ -7580,11 +7580,11 @@
                 <a:spcPts val="0"/>
               </a:spcBef>
               <a:spcAft>
-                <a:spcPts val="142"/>
-              </a:spcAft>
-            </a:pPr>
-            <a:r>
-              <a:rPr sz="850" lang="zh-TW" dirty="0">
+                <a:spcPts val="133"/>
+              </a:spcAft>
+            </a:pPr>
+            <a:r>
+              <a:rPr sz="800" lang="zh-TW" dirty="0">
                 <a:solidFill>
                   <a:srgbClr val="000000"/>
                 </a:solidFill>
@@ -7602,11 +7602,11 @@
                 <a:spcPts val="0"/>
               </a:spcBef>
               <a:spcAft>
-                <a:spcPts val="142"/>
-              </a:spcAft>
-            </a:pPr>
-            <a:r>
-              <a:rPr sz="850" lang="zh-TW" dirty="0">
+                <a:spcPts val="133"/>
+              </a:spcAft>
+            </a:pPr>
+            <a:r>
+              <a:rPr sz="800" lang="zh-TW" dirty="0">
                 <a:solidFill>
                   <a:srgbClr val="000000"/>
                 </a:solidFill>
@@ -7624,11 +7624,11 @@
                 <a:spcPts val="0"/>
               </a:spcBef>
               <a:spcAft>
-                <a:spcPts val="142"/>
-              </a:spcAft>
-            </a:pPr>
-            <a:r>
-              <a:rPr sz="850" b="1" lang="zh-TW" dirty="0">
+                <a:spcPts val="133"/>
+              </a:spcAft>
+            </a:pPr>
+            <a:r>
+              <a:rPr sz="800" b="1" lang="zh-TW" dirty="0">
                 <a:solidFill>
                   <a:srgbClr val="000000"/>
                 </a:solidFill>
@@ -7639,7 +7639,7 @@
               <a:t>第一次，只看線。</a:t>
             </a:r>
             <a:r>
-              <a:rPr sz="850" lang="zh-TW" dirty="0">
+              <a:rPr sz="800" lang="zh-TW" dirty="0">
                 <a:solidFill>
                   <a:srgbClr val="000000"/>
                 </a:solidFill>
@@ -7650,7 +7650,7 @@
               <a:t>各位會看到點雲上有一圈一圈、一層一層的線。那就是</a:t>
             </a:r>
             <a:r>
-              <a:rPr sz="850" b="1" lang="zh-TW" dirty="0">
+              <a:rPr sz="800" b="1" lang="zh-TW" dirty="0">
                 <a:solidFill>
                   <a:srgbClr val="000000"/>
                 </a:solidFill>
@@ -7661,7 +7661,7 @@
               <a:t>64 線束</a:t>
             </a:r>
             <a:r>
-              <a:rPr sz="850" lang="zh-TW" dirty="0">
+              <a:rPr sz="800" lang="zh-TW" dirty="0">
                 <a:solidFill>
                   <a:srgbClr val="000000"/>
                 </a:solidFill>
@@ -7679,11 +7679,11 @@
                 <a:spcPts val="0"/>
               </a:spcBef>
               <a:spcAft>
-                <a:spcPts val="142"/>
-              </a:spcAft>
-            </a:pPr>
-            <a:r>
-              <a:rPr sz="850" lang="zh-TW" dirty="0">
+                <a:spcPts val="133"/>
+              </a:spcAft>
+            </a:pPr>
+            <a:r>
+              <a:rPr sz="800" lang="zh-TW" dirty="0">
                 <a:solidFill>
                   <a:srgbClr val="000000"/>
                 </a:solidFill>
@@ -7694,7 +7694,7 @@
               <a:t>順便看第二件事：近的地方點很密，遠的地方很疏。</a:t>
             </a:r>
             <a:r>
-              <a:rPr sz="850" b="1" lang="zh-TW" dirty="0">
+              <a:rPr sz="800" b="1" lang="zh-TW" dirty="0">
                 <a:solidFill>
                   <a:srgbClr val="000000"/>
                 </a:solidFill>
@@ -7705,7 +7705,7 @@
               <a:t>同樣的角度，距離愈遠，兩個點之間的縫就愈寬。</a:t>
             </a:r>
             <a:r>
-              <a:rPr sz="850" lang="zh-TW" dirty="0">
+              <a:rPr sz="800" lang="zh-TW" dirty="0">
                 <a:solidFill>
                   <a:srgbClr val="000000"/>
                 </a:solidFill>
@@ -7723,11 +7723,11 @@
                 <a:spcPts val="0"/>
               </a:spcBef>
               <a:spcAft>
-                <a:spcPts val="142"/>
-              </a:spcAft>
-            </a:pPr>
-            <a:r>
-              <a:rPr sz="850" lang="zh-TW" dirty="0">
+                <a:spcPts val="133"/>
+              </a:spcAft>
+            </a:pPr>
+            <a:r>
+              <a:rPr sz="800" lang="zh-TW" dirty="0">
                 <a:solidFill>
                   <a:srgbClr val="000000"/>
                 </a:solidFill>
@@ -7738,7 +7738,7 @@
               <a:t>好，第二次播。</a:t>
             </a:r>
             <a:r>
-              <a:rPr sz="850" b="1" lang="zh-TW" dirty="0">
+              <a:rPr sz="800" b="1" lang="zh-TW" dirty="0">
                 <a:solidFill>
                   <a:srgbClr val="000000"/>
                 </a:solidFill>
@@ -7749,7 +7749,7 @@
               <a:t>這次只看顏色。</a:t>
             </a:r>
             <a:r>
-              <a:rPr sz="850" lang="zh-TW" dirty="0">
+              <a:rPr sz="800" lang="zh-TW" dirty="0">
                 <a:solidFill>
                   <a:srgbClr val="000000"/>
                 </a:solidFill>
@@ -7767,11 +7767,11 @@
                 <a:spcPts val="0"/>
               </a:spcBef>
               <a:spcAft>
-                <a:spcPts val="142"/>
-              </a:spcAft>
-            </a:pPr>
-            <a:r>
-              <a:rPr sz="850" lang="zh-TW" dirty="0">
+                <a:spcPts val="133"/>
+              </a:spcAft>
+            </a:pPr>
+            <a:r>
+              <a:rPr sz="800" lang="zh-TW" dirty="0">
                 <a:solidFill>
                   <a:srgbClr val="000000"/>
                 </a:solidFill>
@@ -7789,11 +7789,11 @@
                 <a:spcPts val="0"/>
               </a:spcBef>
               <a:spcAft>
-                <a:spcPts val="142"/>
-              </a:spcAft>
-            </a:pPr>
-            <a:r>
-              <a:rPr sz="850" lang="zh-TW" dirty="0">
+                <a:spcPts val="133"/>
+              </a:spcAft>
+            </a:pPr>
+            <a:r>
+              <a:rPr sz="800" lang="zh-TW" dirty="0">
                 <a:solidFill>
                   <a:srgbClr val="000000"/>
                 </a:solidFill>
@@ -7804,7 +7804,7 @@
               <a:t>不是。光達沒有顏色。影片裡那個顏色是</a:t>
             </a:r>
             <a:r>
-              <a:rPr sz="850" b="1" lang="zh-TW" dirty="0">
+              <a:rPr sz="800" b="1" lang="zh-TW" dirty="0">
                 <a:solidFill>
                   <a:srgbClr val="000000"/>
                 </a:solidFill>
@@ -7815,7 +7815,7 @@
               <a:t>反射強度</a:t>
             </a:r>
             <a:r>
-              <a:rPr sz="850" lang="zh-TW" dirty="0">
+              <a:rPr sz="800" lang="zh-TW" dirty="0">
                 <a:solidFill>
                   <a:srgbClr val="000000"/>
                 </a:solidFill>
@@ -7833,11 +7833,11 @@
                 <a:spcPts val="0"/>
               </a:spcBef>
               <a:spcAft>
-                <a:spcPts val="142"/>
-              </a:spcAft>
-            </a:pPr>
-            <a:r>
-              <a:rPr sz="850" lang="zh-TW" dirty="0">
+                <a:spcPts val="133"/>
+              </a:spcAft>
+            </a:pPr>
+            <a:r>
+              <a:rPr sz="800" lang="zh-TW" dirty="0">
                 <a:solidFill>
                   <a:srgbClr val="000000"/>
                 </a:solidFill>
@@ -7848,7 +7848,7 @@
               <a:t>所以各位現在看到的，就是規格表上那兩行 Range 在講的事：</a:t>
             </a:r>
             <a:r>
-              <a:rPr sz="850" b="1" lang="zh-TW" dirty="0">
+              <a:rPr sz="800" b="1" lang="zh-TW" dirty="0">
                 <a:solidFill>
                   <a:srgbClr val="000000"/>
                 </a:solidFill>
@@ -7859,7 +7859,7 @@
               <a:t>同一顆光達，同一個距離，有些東西亮、有些東西暗</a:t>
             </a:r>
             <a:r>
-              <a:rPr sz="850" lang="zh-TW" dirty="0">
+              <a:rPr sz="800" lang="zh-TW" dirty="0">
                 <a:solidFill>
                   <a:srgbClr val="000000"/>
                 </a:solidFill>
@@ -7877,11 +7877,11 @@
                 <a:spcPts val="0"/>
               </a:spcBef>
               <a:spcAft>
-                <a:spcPts val="142"/>
-              </a:spcAft>
-            </a:pPr>
-            <a:r>
-              <a:rPr sz="850" lang="zh-TW" dirty="0">
+                <a:spcPts val="133"/>
+              </a:spcAft>
+            </a:pPr>
+            <a:r>
+              <a:rPr sz="800" lang="zh-TW" dirty="0">
                 <a:solidFill>
                   <a:srgbClr val="000000"/>
                 </a:solidFill>
@@ -7892,7 +7892,7 @@
               <a:t>播完之後我要問一個問題：</a:t>
             </a:r>
             <a:r>
-              <a:rPr sz="850" b="1" lang="zh-TW" dirty="0">
+              <a:rPr sz="800" b="1" lang="zh-TW" dirty="0">
                 <a:solidFill>
                   <a:srgbClr val="000000"/>
                 </a:solidFill>
@@ -7901,6 +7901,138 @@
                 <a:cs typeface="Arial Unicode MS"/>
               </a:rPr>
               <a:t>影片裡最亮的是什麼？</a:t>
+            </a:r>
+            <a:r>
+              <a:rPr sz="800" lang="zh-TW" dirty="0">
+                <a:solidFill>
+                  <a:srgbClr val="000000"/>
+                </a:solidFill>
+                <a:latin typeface="Arial Unicode MS"/>
+                <a:ea typeface="Arial Unicode MS"/>
+                <a:cs typeface="Arial Unicode MS"/>
+              </a:rPr>
+              <a:t>
+</a:t>
+            </a:r>
+          </a:p>
+          <a:p>
+            <a:pPr algn="l">
+              <a:spcBef>
+                <a:spcPts val="0"/>
+              </a:spcBef>
+              <a:spcAft>
+                <a:spcPts val="133"/>
+              </a:spcAft>
+            </a:pPr>
+            <a:r>
+              <a:rPr sz="800" lang="zh-TW" dirty="0">
+                <a:solidFill>
+                  <a:srgbClr val="000000"/>
+                </a:solidFill>
+                <a:latin typeface="Arial Unicode MS"/>
+                <a:ea typeface="Arial Unicode MS"/>
+                <a:cs typeface="Arial Unicode MS"/>
+              </a:rPr>
+              <a:t>答案是</a:t>
+            </a:r>
+            <a:r>
+              <a:rPr sz="800" b="1" lang="zh-TW" dirty="0">
+                <a:solidFill>
+                  <a:srgbClr val="000000"/>
+                </a:solidFill>
+                <a:latin typeface="Arial Unicode MS"/>
+                <a:ea typeface="Arial Unicode MS"/>
+                <a:cs typeface="Arial Unicode MS"/>
+              </a:rPr>
+              <a:t>路邊那幾根桿子、淺色的牆面、還有停在路邊的車身</a:t>
+            </a:r>
+            <a:r>
+              <a:rPr sz="800" lang="zh-TW" dirty="0">
+                <a:solidFill>
+                  <a:srgbClr val="000000"/>
+                </a:solidFill>
+                <a:latin typeface="Arial Unicode MS"/>
+                <a:ea typeface="Arial Unicode MS"/>
+                <a:cs typeface="Arial Unicode MS"/>
+              </a:rPr>
+              <a:t>——那些都是會把光散回來的東西。最暗的呢？</a:t>
+            </a:r>
+            <a:r>
+              <a:rPr sz="800" b="1" lang="zh-TW" dirty="0">
+                <a:solidFill>
+                  <a:srgbClr val="000000"/>
+                </a:solidFill>
+                <a:latin typeface="Arial Unicode MS"/>
+                <a:ea typeface="Arial Unicode MS"/>
+                <a:cs typeface="Arial Unicode MS"/>
+              </a:rPr>
+              <a:t>腳下的柏油路面</a:t>
+            </a:r>
+            <a:r>
+              <a:rPr sz="800" lang="zh-TW" dirty="0">
+                <a:solidFill>
+                  <a:srgbClr val="000000"/>
+                </a:solidFill>
+                <a:latin typeface="Arial Unicode MS"/>
+                <a:ea typeface="Arial Unicode MS"/>
+                <a:cs typeface="Arial Unicode MS"/>
+              </a:rPr>
+              <a:t>，整片是深紫紅色，幾乎看不到。各位現在看到的，就是 80% 和 10% 的差別，只是它變成了顏色。
+</a:t>
+            </a:r>
+          </a:p>
+          <a:p>
+            <a:pPr algn="l">
+              <a:spcBef>
+                <a:spcPts val="0"/>
+              </a:spcBef>
+              <a:spcAft>
+                <a:spcPts val="133"/>
+              </a:spcAft>
+            </a:pPr>
+            <a:r>
+              <a:rPr sz="800" lang="zh-TW" dirty="0">
+                <a:solidFill>
+                  <a:srgbClr val="000000"/>
+                </a:solidFill>
+                <a:latin typeface="Arial Unicode MS"/>
+                <a:ea typeface="Arial Unicode MS"/>
+                <a:cs typeface="Arial Unicode MS"/>
+              </a:rPr>
+              <a:t>最後再看一個東西：畫面正中央有一個</a:t>
+            </a:r>
+            <a:r>
+              <a:rPr sz="800" b="1" lang="zh-TW" dirty="0">
+                <a:solidFill>
+                  <a:srgbClr val="000000"/>
+                </a:solidFill>
+                <a:latin typeface="Arial Unicode MS"/>
+                <a:ea typeface="Arial Unicode MS"/>
+                <a:cs typeface="Arial Unicode MS"/>
+              </a:rPr>
+              <a:t>黑洞</a:t>
+            </a:r>
+            <a:r>
+              <a:rPr sz="800" lang="zh-TW" dirty="0">
+                <a:solidFill>
+                  <a:srgbClr val="000000"/>
+                </a:solidFill>
+                <a:latin typeface="Arial Unicode MS"/>
+                <a:ea typeface="Arial Unicode MS"/>
+                <a:cs typeface="Arial Unicode MS"/>
+              </a:rPr>
+              <a:t>，車子周圍一圈完全沒有點。為什麼？回去看第四張的 Field of View：垂直只有 42.4 度，也就是往下最多看 21 度。光達裝在車頂，往下 21 度打出去，落地的地方離車還有好幾公尺——那一圈裡面，它看不到。</a:t>
+            </a:r>
+            <a:r>
+              <a:rPr sz="800" b="1" lang="zh-TW" dirty="0">
+                <a:solidFill>
+                  <a:srgbClr val="000000"/>
+                </a:solidFill>
+                <a:latin typeface="Arial Unicode MS"/>
+                <a:ea typeface="Arial Unicode MS"/>
+                <a:cs typeface="Arial Unicode MS"/>
+              </a:rPr>
+              <a:t>規格表上那一行，決定了這台車腳邊有多大一塊是瞎的。</a:t>
             </a:r>
           </a:p>
         </p:txBody>

--- a/第五週(10-08)/第五週_第1節_簡報.pptx
+++ b/第五週(10-08)/第五週_第1節_簡報.pptx
@@ -7537,7 +7537,7 @@
                 <a:ea typeface="Arial Unicode MS"/>
                 <a:cs typeface="Arial Unicode MS"/>
               </a:rPr>
-              <a:t>播第一次只看一圈一圈的線；第二次只看顏色。播完問「最亮的是什麼」——答案是路邊的桿子、淺色的牆、停著的車身，最暗的是柏油路面。最後指畫面中央那個黑洞。
+              <a:t>播第一次只看線，前 15 秒內要暫停一次，指出環是收口的（拉近之後會像廣角，其實是 360 度）；第二次只看顏色。播完問「最亮的是什麼」——答案是路邊的桿子、淺色的牆、停著的車身，最暗的是柏油路面。最後指畫面中央那個黑洞。
 </a:t>
             </a:r>
           </a:p>
@@ -7683,6 +7683,83 @@
               </a:spcAft>
             </a:pPr>
             <a:r>
+              <a:rPr sz="800" b="1" lang="zh-TW" dirty="0">
+                <a:solidFill>
+                  <a:srgbClr val="000000"/>
+                </a:solidFill>
+                <a:latin typeface="Arial Unicode MS"/>
+                <a:ea typeface="Arial Unicode MS"/>
+                <a:cs typeface="Arial Unicode MS"/>
+              </a:rPr>
+              <a:t>這裡請在前十五秒之內按暫停。</a:t>
+            </a:r>
+            <a:r>
+              <a:rPr sz="800" lang="zh-TW" dirty="0">
+                <a:solidFill>
+                  <a:srgbClr val="000000"/>
+                </a:solidFill>
+                <a:latin typeface="Arial Unicode MS"/>
+                <a:ea typeface="Arial Unicode MS"/>
+                <a:cs typeface="Arial Unicode MS"/>
+              </a:rPr>
+              <a:t>各位看那些環——它們是</a:t>
+            </a:r>
+            <a:r>
+              <a:rPr sz="800" b="1" lang="zh-TW" dirty="0">
+                <a:solidFill>
+                  <a:srgbClr val="000000"/>
+                </a:solidFill>
+                <a:latin typeface="Arial Unicode MS"/>
+                <a:ea typeface="Arial Unicode MS"/>
+                <a:cs typeface="Arial Unicode MS"/>
+              </a:rPr>
+              <a:t>完整繞一圈</a:t>
+            </a:r>
+            <a:r>
+              <a:rPr sz="800" lang="zh-TW" dirty="0">
+                <a:solidFill>
+                  <a:srgbClr val="000000"/>
+                </a:solidFill>
+                <a:latin typeface="Arial Unicode MS"/>
+                <a:ea typeface="Arial Unicode MS"/>
+                <a:cs typeface="Arial Unicode MS"/>
+              </a:rPr>
+              <a:t>的，中間圍出一個封閉的洞。這一點很重要：影片後半段鏡頭拉近，看起來會很像前方廣角，其實不是，它是 360 度。</a:t>
+            </a:r>
+            <a:r>
+              <a:rPr sz="800" b="1" lang="zh-TW" dirty="0">
+                <a:solidFill>
+                  <a:srgbClr val="000000"/>
+                </a:solidFill>
+                <a:latin typeface="Arial Unicode MS"/>
+                <a:ea typeface="Arial Unicode MS"/>
+                <a:cs typeface="Arial Unicode MS"/>
+              </a:rPr>
+              <a:t>環有沒有收口，就是判斷的方法。</a:t>
+            </a:r>
+            <a:r>
+              <a:rPr sz="800" lang="zh-TW" dirty="0">
+                <a:solidFill>
+                  <a:srgbClr val="000000"/>
+                </a:solidFill>
+                <a:latin typeface="Arial Unicode MS"/>
+                <a:ea typeface="Arial Unicode MS"/>
+                <a:cs typeface="Arial Unicode MS"/>
+              </a:rPr>
+              <a:t>
+</a:t>
+            </a:r>
+          </a:p>
+          <a:p>
+            <a:pPr algn="l">
+              <a:spcBef>
+                <a:spcPts val="0"/>
+              </a:spcBef>
+              <a:spcAft>
+                <a:spcPts val="133"/>
+              </a:spcAft>
+            </a:pPr>
+            <a:r>
               <a:rPr sz="800" lang="zh-TW" dirty="0">
                 <a:solidFill>
                   <a:srgbClr val="000000"/>
@@ -7748,28 +7825,6 @@
               </a:rPr>
               <a:t>這次只看顏色。</a:t>
             </a:r>
-            <a:r>
-              <a:rPr sz="800" lang="zh-TW" dirty="0">
-                <a:solidFill>
-                  <a:srgbClr val="000000"/>
-                </a:solidFill>
-                <a:latin typeface="Arial Unicode MS"/>
-                <a:ea typeface="Arial Unicode MS"/>
-                <a:cs typeface="Arial Unicode MS"/>
-              </a:rPr>
-              <a:t>
-</a:t>
-            </a:r>
-          </a:p>
-          <a:p>
-            <a:pPr algn="l">
-              <a:spcBef>
-                <a:spcPts val="0"/>
-              </a:spcBef>
-              <a:spcAft>
-                <a:spcPts val="133"/>
-              </a:spcAft>
-            </a:pPr>
             <a:r>
               <a:rPr sz="800" lang="zh-TW" dirty="0">
                 <a:solidFill>

--- a/第五週(10-08)/第五週_第1節_簡報.pptx
+++ b/第五週(10-08)/第五週_第1節_簡報.pptx
@@ -7537,7 +7537,7 @@
                 <a:ea typeface="Arial Unicode MS"/>
                 <a:cs typeface="Arial Unicode MS"/>
               </a:rPr>
-              <a:t>播第一次只看線，前 15 秒內要暫停一次，指出環是收口的（拉近之後會像廣角，其實是 360 度）；第二次只看顏色。播完問「最亮的是什麼」——答案是路邊的桿子、淺色的牆、停著的車身，最暗的是柏油路面。最後指畫面中央那個黑洞。
+              <a:t>播第一次只看線，中間暫停一次指出環是收口的——整支影片都看得到（第一眼容易以為是前方廣角，因為有東西的都在前面）；第二次只看顏色。播完問「最亮的是什麼」——答案是路邊的桿子、淺色的牆、停著的車身，最暗的是柏油路面。最後指畫面中央那個黑洞。
 </a:t>
             </a:r>
           </a:p>
@@ -7691,7 +7691,7 @@
                 <a:ea typeface="Arial Unicode MS"/>
                 <a:cs typeface="Arial Unicode MS"/>
               </a:rPr>
-              <a:t>這裡請在前十五秒之內按暫停。</a:t>
+              <a:t>這裡按一次暫停</a:t>
             </a:r>
             <a:r>
               <a:rPr sz="800" lang="zh-TW" dirty="0">
@@ -7702,7 +7702,7 @@
                 <a:ea typeface="Arial Unicode MS"/>
                 <a:cs typeface="Arial Unicode MS"/>
               </a:rPr>
-              <a:t>各位看那些環——它們是</a:t>
+              <a:t>，什麼時候都可以，整支影片都看得到。各位看那些環——它們是</a:t>
             </a:r>
             <a:r>
               <a:rPr sz="800" b="1" lang="zh-TW" dirty="0">
@@ -7724,7 +7724,29 @@
                 <a:ea typeface="Arial Unicode MS"/>
                 <a:cs typeface="Arial Unicode MS"/>
               </a:rPr>
-              <a:t>的，中間圍出一個封閉的洞。這一點很重要：影片後半段鏡頭拉近，看起來會很像前方廣角，其實不是，它是 360 度。</a:t>
+              <a:t>的，中間圍出一個封閉的洞。這很重要，因為第一眼很容易覺得這是前方的廣角畫面。為什麼會有那種錯覺？因為</a:t>
+            </a:r>
+            <a:r>
+              <a:rPr sz="800" b="1" lang="zh-TW" dirty="0">
+                <a:solidFill>
+                  <a:srgbClr val="000000"/>
+                </a:solidFill>
+                <a:latin typeface="Arial Unicode MS"/>
+                <a:ea typeface="Arial Unicode MS"/>
+                <a:cs typeface="Arial Unicode MS"/>
+              </a:rPr>
+              <a:t>有東西的地方都集中在前面</a:t>
+            </a:r>
+            <a:r>
+              <a:rPr sz="800" lang="zh-TW" dirty="0">
+                <a:solidFill>
+                  <a:srgbClr val="000000"/>
+                </a:solidFill>
+                <a:latin typeface="Arial Unicode MS"/>
+                <a:ea typeface="Arial Unicode MS"/>
+                <a:cs typeface="Arial Unicode MS"/>
+              </a:rPr>
+              <a:t>——建築、停著的車、行人；後面那半圈大多是空的路面，暗到不容易注意。但環是收口的，所以它真的繞了一整圈。</a:t>
             </a:r>
             <a:r>
               <a:rPr sz="800" b="1" lang="zh-TW" dirty="0">

--- a/第五週(10-08)/第五週_第1節_簡報.pptx
+++ b/第五週(10-08)/第五週_第1節_簡報.pptx
@@ -7437,11 +7437,11 @@
                 <a:spcPts val="0"/>
               </a:spcBef>
               <a:spcAft>
-                <a:spcPts val="133"/>
-              </a:spcAft>
-            </a:pPr>
-            <a:r>
-              <a:rPr sz="800" b="1" lang="zh-TW" dirty="0">
+                <a:spcPts val="142"/>
+              </a:spcAft>
+            </a:pPr>
+            <a:r>
+              <a:rPr sz="850" b="1" lang="zh-TW" dirty="0">
                 <a:solidFill>
                   <a:srgbClr val="000000"/>
                 </a:solidFill>
@@ -7452,7 +7452,7 @@
               <a:t>▍這一張要做什麼</a:t>
             </a:r>
             <a:r>
-              <a:rPr sz="800" lang="zh-TW" dirty="0">
+              <a:rPr sz="850" lang="zh-TW" dirty="0">
                 <a:solidFill>
                   <a:srgbClr val="000000"/>
                 </a:solidFill>
@@ -7470,19 +7470,19 @@
                 <a:spcPts val="0"/>
               </a:spcBef>
               <a:spcAft>
-                <a:spcPts val="133"/>
-              </a:spcAft>
-            </a:pPr>
-            <a:r>
-              <a:rPr sz="800" lang="zh-TW" dirty="0">
-                <a:solidFill>
-                  <a:srgbClr val="000000"/>
-                </a:solidFill>
-                <a:latin typeface="Arial Unicode MS"/>
-                <a:ea typeface="Arial Unicode MS"/>
-                <a:cs typeface="Arial Unicode MS"/>
-              </a:rPr>
-              <a:t>光達這一段的收尾：把剛剛讀的三行，變成看得見的東西。重點在「顏色是強度不是真實顏色」。
+                <a:spcPts val="142"/>
+              </a:spcAft>
+            </a:pPr>
+            <a:r>
+              <a:rPr sz="850" lang="zh-TW" dirty="0">
+                <a:solidFill>
+                  <a:srgbClr val="000000"/>
+                </a:solidFill>
+                <a:latin typeface="Arial Unicode MS"/>
+                <a:ea typeface="Arial Unicode MS"/>
+                <a:cs typeface="Arial Unicode MS"/>
+              </a:rPr>
+              <a:t>讓學生第一次看懂點雲——靠下半格的相機畫面對照。順便埋兩個伏筆：夜間與隧道都是第 2 節動態範圍那張的素材。
 </a:t>
             </a:r>
           </a:p>
@@ -7492,11 +7492,11 @@
                 <a:spcPts val="0"/>
               </a:spcBef>
               <a:spcAft>
-                <a:spcPts val="133"/>
-              </a:spcAft>
-            </a:pPr>
-            <a:r>
-              <a:rPr sz="800" b="1" lang="zh-TW" dirty="0">
+                <a:spcPts val="142"/>
+              </a:spcAft>
+            </a:pPr>
+            <a:r>
+              <a:rPr sz="850" b="1" lang="zh-TW" dirty="0">
                 <a:solidFill>
                   <a:srgbClr val="000000"/>
                 </a:solidFill>
@@ -7507,7 +7507,7 @@
               <a:t>▍畫面上圈這裡</a:t>
             </a:r>
             <a:r>
-              <a:rPr sz="800" lang="zh-TW" dirty="0">
+              <a:rPr sz="850" lang="zh-TW" dirty="0">
                 <a:solidFill>
                   <a:srgbClr val="000000"/>
                 </a:solidFill>
@@ -7525,19 +7525,19 @@
                 <a:spcPts val="0"/>
               </a:spcBef>
               <a:spcAft>
-                <a:spcPts val="133"/>
-              </a:spcAft>
-            </a:pPr>
-            <a:r>
-              <a:rPr sz="800" lang="zh-TW" dirty="0">
-                <a:solidFill>
-                  <a:srgbClr val="000000"/>
-                </a:solidFill>
-                <a:latin typeface="Arial Unicode MS"/>
-                <a:ea typeface="Arial Unicode MS"/>
-                <a:cs typeface="Arial Unicode MS"/>
-              </a:rPr>
-              <a:t>播第一次只看線，中間暫停一次指出環是收口的——整支影片都看得到（第一眼容易以為是前方廣角，因為有東西的都在前面）；第二次只看顏色。播完問「最亮的是什麼」——答案是路邊的桿子、淺色的牆、停著的車身，最暗的是柏油路面。最後指畫面中央那個黑洞。
+                <a:spcPts val="142"/>
+              </a:spcAft>
+            </a:pPr>
+            <a:r>
+              <a:rPr sz="850" lang="zh-TW" dirty="0">
+                <a:solidFill>
+                  <a:srgbClr val="000000"/>
+                </a:solidFill>
+                <a:latin typeface="Arial Unicode MS"/>
+                <a:ea typeface="Arial Unicode MS"/>
+                <a:cs typeface="Arial Unicode MS"/>
+              </a:rPr>
+              <a:t>第一次播只要他們上下找同一台車；第二次播圈夜間那段相機的黑，和隧道出口那一片白。
 </a:t>
             </a:r>
           </a:p>
@@ -7547,11 +7547,11 @@
                 <a:spcPts val="0"/>
               </a:spcBef>
               <a:spcAft>
-                <a:spcPts val="133"/>
-              </a:spcAft>
-            </a:pPr>
-            <a:r>
-              <a:rPr sz="800" b="1" lang="zh-TW" dirty="0">
+                <a:spcPts val="142"/>
+              </a:spcAft>
+            </a:pPr>
+            <a:r>
+              <a:rPr sz="850" b="1" lang="zh-TW" dirty="0">
                 <a:solidFill>
                   <a:srgbClr val="000000"/>
                 </a:solidFill>
@@ -7562,7 +7562,7 @@
               <a:t>▍以下照著唸</a:t>
             </a:r>
             <a:r>
-              <a:rPr sz="800" lang="zh-TW" dirty="0">
+              <a:rPr sz="850" lang="zh-TW" dirty="0">
                 <a:solidFill>
                   <a:srgbClr val="000000"/>
                 </a:solidFill>
@@ -7580,19 +7580,19 @@
                 <a:spcPts val="0"/>
               </a:spcBef>
               <a:spcAft>
-                <a:spcPts val="133"/>
-              </a:spcAft>
-            </a:pPr>
-            <a:r>
-              <a:rPr sz="800" lang="zh-TW" dirty="0">
-                <a:solidFill>
-                  <a:srgbClr val="000000"/>
-                </a:solidFill>
-                <a:latin typeface="Arial Unicode MS"/>
-                <a:ea typeface="Arial Unicode MS"/>
-                <a:cs typeface="Arial Unicode MS"/>
-              </a:rPr>
-              <a:t>光達這一段的最後，我們看一下這顆 OS1-64 實際吐出來的東西。這是 Ouster 原廠自己放的影片，在舊金山開車拍的，一分四十二秒。
+                <a:spcPts val="142"/>
+              </a:spcAft>
+            </a:pPr>
+            <a:r>
+              <a:rPr sz="850" lang="zh-TW" dirty="0">
+                <a:solidFill>
+                  <a:srgbClr val="000000"/>
+                </a:solidFill>
+                <a:latin typeface="Arial Unicode MS"/>
+                <a:ea typeface="Arial Unicode MS"/>
+                <a:cs typeface="Arial Unicode MS"/>
+              </a:rPr>
+              <a:t>光達這一段的最後，我們看一下點雲到底長什麼樣。這支是 Hesai 原廠放的，三十七秒，講的就是第五張那顆 AT128。
 </a:t>
             </a:r>
           </a:p>
@@ -7602,19 +7602,19 @@
                 <a:spcPts val="0"/>
               </a:spcBef>
               <a:spcAft>
-                <a:spcPts val="133"/>
-              </a:spcAft>
-            </a:pPr>
-            <a:r>
-              <a:rPr sz="800" lang="zh-TW" dirty="0">
-                <a:solidFill>
-                  <a:srgbClr val="000000"/>
-                </a:solidFill>
-                <a:latin typeface="Arial Unicode MS"/>
-                <a:ea typeface="Arial Unicode MS"/>
-                <a:cs typeface="Arial Unicode MS"/>
-              </a:rPr>
-              <a:t>我要播兩次，每一次只看一件事。
+                <a:spcPts val="142"/>
+              </a:spcAft>
+            </a:pPr>
+            <a:r>
+              <a:rPr sz="850" lang="zh-TW" dirty="0">
+                <a:solidFill>
+                  <a:srgbClr val="000000"/>
+                </a:solidFill>
+                <a:latin typeface="Arial Unicode MS"/>
+                <a:ea typeface="Arial Unicode MS"/>
+                <a:cs typeface="Arial Unicode MS"/>
+              </a:rPr>
+              <a:t>畫面分上下兩半：上面是 AT128 的點雲，下面是同一個時刻、同一台車上的相機畫面。影片會跳三個情境，每一個左下角都有字。
 </a:t>
             </a:r>
           </a:p>
@@ -7624,52 +7624,41 @@
                 <a:spcPts val="0"/>
               </a:spcBef>
               <a:spcAft>
-                <a:spcPts val="133"/>
-              </a:spcAft>
-            </a:pPr>
-            <a:r>
-              <a:rPr sz="800" b="1" lang="zh-TW" dirty="0">
-                <a:solidFill>
-                  <a:srgbClr val="000000"/>
-                </a:solidFill>
-                <a:latin typeface="Arial Unicode MS"/>
-                <a:ea typeface="Arial Unicode MS"/>
-                <a:cs typeface="Arial Unicode MS"/>
-              </a:rPr>
-              <a:t>第一次，只看線。</a:t>
-            </a:r>
-            <a:r>
-              <a:rPr sz="800" lang="zh-TW" dirty="0">
-                <a:solidFill>
-                  <a:srgbClr val="000000"/>
-                </a:solidFill>
-                <a:latin typeface="Arial Unicode MS"/>
-                <a:ea typeface="Arial Unicode MS"/>
-                <a:cs typeface="Arial Unicode MS"/>
-              </a:rPr>
-              <a:t>各位會看到點雲上有一圈一圈、一層一層的線。那就是</a:t>
-            </a:r>
-            <a:r>
-              <a:rPr sz="800" b="1" lang="zh-TW" dirty="0">
-                <a:solidFill>
-                  <a:srgbClr val="000000"/>
-                </a:solidFill>
-                <a:latin typeface="Arial Unicode MS"/>
-                <a:ea typeface="Arial Unicode MS"/>
-                <a:cs typeface="Arial Unicode MS"/>
-              </a:rPr>
-              <a:t>64 線束</a:t>
-            </a:r>
-            <a:r>
-              <a:rPr sz="800" lang="zh-TW" dirty="0">
-                <a:solidFill>
-                  <a:srgbClr val="000000"/>
-                </a:solidFill>
-                <a:latin typeface="Arial Unicode MS"/>
-                <a:ea typeface="Arial Unicode MS"/>
-                <a:cs typeface="Arial Unicode MS"/>
-              </a:rPr>
-              <a:t>——剛剛第四張 Vertical Resolution 那一行寫的 32 / 64 / 128，64 就是這個。數不出來沒關係，看得出「它是一層一層的」就夠了。
+                <a:spcPts val="142"/>
+              </a:spcAft>
+            </a:pPr>
+            <a:r>
+              <a:rPr sz="850" lang="zh-TW" dirty="0">
+                <a:solidFill>
+                  <a:srgbClr val="000000"/>
+                </a:solidFill>
+                <a:latin typeface="Arial Unicode MS"/>
+                <a:ea typeface="Arial Unicode MS"/>
+                <a:cs typeface="Arial Unicode MS"/>
+              </a:rPr>
+              <a:t>第一次播，各位只做一件事：</a:t>
+            </a:r>
+            <a:r>
+              <a:rPr sz="850" b="1" lang="zh-TW" dirty="0">
+                <a:solidFill>
+                  <a:srgbClr val="000000"/>
+                </a:solidFill>
+                <a:latin typeface="Arial Unicode MS"/>
+                <a:ea typeface="Arial Unicode MS"/>
+                <a:cs typeface="Arial Unicode MS"/>
+              </a:rPr>
+              <a:t>上下對照</a:t>
+            </a:r>
+            <a:r>
+              <a:rPr sz="850" lang="zh-TW" dirty="0">
+                <a:solidFill>
+                  <a:srgbClr val="000000"/>
+                </a:solidFill>
+                <a:latin typeface="Arial Unicode MS"/>
+                <a:ea typeface="Arial Unicode MS"/>
+                <a:cs typeface="Arial Unicode MS"/>
+              </a:rPr>
+              <a:t>。在上面的點雲裡挑一台車，然後到下面的相機畫面找到同一台。對得上，你就知道那一堆點是什麼了。
 </a:t>
             </a:r>
           </a:p>
@@ -7679,96 +7668,19 @@
                 <a:spcPts val="0"/>
               </a:spcBef>
               <a:spcAft>
-                <a:spcPts val="133"/>
-              </a:spcAft>
-            </a:pPr>
-            <a:r>
-              <a:rPr sz="800" b="1" lang="zh-TW" dirty="0">
-                <a:solidFill>
-                  <a:srgbClr val="000000"/>
-                </a:solidFill>
-                <a:latin typeface="Arial Unicode MS"/>
-                <a:ea typeface="Arial Unicode MS"/>
-                <a:cs typeface="Arial Unicode MS"/>
-              </a:rPr>
-              <a:t>這裡按一次暫停</a:t>
-            </a:r>
-            <a:r>
-              <a:rPr sz="800" lang="zh-TW" dirty="0">
-                <a:solidFill>
-                  <a:srgbClr val="000000"/>
-                </a:solidFill>
-                <a:latin typeface="Arial Unicode MS"/>
-                <a:ea typeface="Arial Unicode MS"/>
-                <a:cs typeface="Arial Unicode MS"/>
-              </a:rPr>
-              <a:t>，什麼時候都可以，整支影片都看得到。各位看那些環——它們是</a:t>
-            </a:r>
-            <a:r>
-              <a:rPr sz="800" b="1" lang="zh-TW" dirty="0">
-                <a:solidFill>
-                  <a:srgbClr val="000000"/>
-                </a:solidFill>
-                <a:latin typeface="Arial Unicode MS"/>
-                <a:ea typeface="Arial Unicode MS"/>
-                <a:cs typeface="Arial Unicode MS"/>
-              </a:rPr>
-              <a:t>完整繞一圈</a:t>
-            </a:r>
-            <a:r>
-              <a:rPr sz="800" lang="zh-TW" dirty="0">
-                <a:solidFill>
-                  <a:srgbClr val="000000"/>
-                </a:solidFill>
-                <a:latin typeface="Arial Unicode MS"/>
-                <a:ea typeface="Arial Unicode MS"/>
-                <a:cs typeface="Arial Unicode MS"/>
-              </a:rPr>
-              <a:t>的，中間圍出一個封閉的洞。這很重要，因為第一眼很容易覺得這是前方的廣角畫面。為什麼會有那種錯覺？因為</a:t>
-            </a:r>
-            <a:r>
-              <a:rPr sz="800" b="1" lang="zh-TW" dirty="0">
-                <a:solidFill>
-                  <a:srgbClr val="000000"/>
-                </a:solidFill>
-                <a:latin typeface="Arial Unicode MS"/>
-                <a:ea typeface="Arial Unicode MS"/>
-                <a:cs typeface="Arial Unicode MS"/>
-              </a:rPr>
-              <a:t>有東西的地方都集中在前面</a:t>
-            </a:r>
-            <a:r>
-              <a:rPr sz="800" lang="zh-TW" dirty="0">
-                <a:solidFill>
-                  <a:srgbClr val="000000"/>
-                </a:solidFill>
-                <a:latin typeface="Arial Unicode MS"/>
-                <a:ea typeface="Arial Unicode MS"/>
-                <a:cs typeface="Arial Unicode MS"/>
-              </a:rPr>
-              <a:t>——建築、停著的車、行人；後面那半圈大多是空的路面，暗到不容易注意。但環是收口的，所以它真的繞了一整圈。</a:t>
-            </a:r>
-            <a:r>
-              <a:rPr sz="800" b="1" lang="zh-TW" dirty="0">
-                <a:solidFill>
-                  <a:srgbClr val="000000"/>
-                </a:solidFill>
-                <a:latin typeface="Arial Unicode MS"/>
-                <a:ea typeface="Arial Unicode MS"/>
-                <a:cs typeface="Arial Unicode MS"/>
-              </a:rPr>
-              <a:t>環有沒有收口，就是判斷的方法。</a:t>
-            </a:r>
-            <a:r>
-              <a:rPr sz="800" lang="zh-TW" dirty="0">
-                <a:solidFill>
-                  <a:srgbClr val="000000"/>
-                </a:solidFill>
-                <a:latin typeface="Arial Unicode MS"/>
-                <a:ea typeface="Arial Unicode MS"/>
-                <a:cs typeface="Arial Unicode MS"/>
-              </a:rPr>
-              <a:t>
+                <a:spcPts val="142"/>
+              </a:spcAft>
+            </a:pPr>
+            <a:r>
+              <a:rPr sz="850" lang="zh-TW" dirty="0">
+                <a:solidFill>
+                  <a:srgbClr val="000000"/>
+                </a:solidFill>
+                <a:latin typeface="Arial Unicode MS"/>
+                <a:ea typeface="Arial Unicode MS"/>
+                <a:cs typeface="Arial Unicode MS"/>
+              </a:rPr>
+              <a:t>第二次播，看另外兩件事。
 </a:t>
             </a:r>
           </a:p>
@@ -7778,41 +7690,52 @@
                 <a:spcPts val="0"/>
               </a:spcBef>
               <a:spcAft>
-                <a:spcPts val="133"/>
-              </a:spcAft>
-            </a:pPr>
-            <a:r>
-              <a:rPr sz="800" lang="zh-TW" dirty="0">
-                <a:solidFill>
-                  <a:srgbClr val="000000"/>
-                </a:solidFill>
-                <a:latin typeface="Arial Unicode MS"/>
-                <a:ea typeface="Arial Unicode MS"/>
-                <a:cs typeface="Arial Unicode MS"/>
-              </a:rPr>
-              <a:t>順便看第二件事：近的地方點很密，遠的地方很疏。</a:t>
-            </a:r>
-            <a:r>
-              <a:rPr sz="800" b="1" lang="zh-TW" dirty="0">
-                <a:solidFill>
-                  <a:srgbClr val="000000"/>
-                </a:solidFill>
-                <a:latin typeface="Arial Unicode MS"/>
-                <a:ea typeface="Arial Unicode MS"/>
-                <a:cs typeface="Arial Unicode MS"/>
-              </a:rPr>
-              <a:t>同樣的角度，距離愈遠，兩個點之間的縫就愈寬。</a:t>
-            </a:r>
-            <a:r>
-              <a:rPr sz="800" lang="zh-TW" dirty="0">
-                <a:solidFill>
-                  <a:srgbClr val="000000"/>
-                </a:solidFill>
-                <a:latin typeface="Arial Unicode MS"/>
-                <a:ea typeface="Arial Unicode MS"/>
-                <a:cs typeface="Arial Unicode MS"/>
-              </a:rPr>
-              <a:t>這就是為什麼四十公尺的行人身上只有九個點。
+                <a:spcPts val="142"/>
+              </a:spcAft>
+            </a:pPr>
+            <a:r>
+              <a:rPr sz="850" b="1" lang="zh-TW" dirty="0">
+                <a:solidFill>
+                  <a:srgbClr val="000000"/>
+                </a:solidFill>
+                <a:latin typeface="Arial Unicode MS"/>
+                <a:ea typeface="Arial Unicode MS"/>
+                <a:cs typeface="Arial Unicode MS"/>
+              </a:rPr>
+              <a:t>第二個情境，Dark Road at Night。</a:t>
+            </a:r>
+            <a:r>
+              <a:rPr sz="850" lang="zh-TW" dirty="0">
+                <a:solidFill>
+                  <a:srgbClr val="000000"/>
+                </a:solidFill>
+                <a:latin typeface="Arial Unicode MS"/>
+                <a:ea typeface="Arial Unicode MS"/>
+                <a:cs typeface="Arial Unicode MS"/>
+              </a:rPr>
+              <a:t>各位看下面的相機——幾乎全黑，只剩幾盞燈。再看上面的點雲：整排行道樹、路面、路邊的東西，清清楚楚。為什麼差這麼多？因為光達</a:t>
+            </a:r>
+            <a:r>
+              <a:rPr sz="850" b="1" lang="zh-TW" dirty="0">
+                <a:solidFill>
+                  <a:srgbClr val="000000"/>
+                </a:solidFill>
+                <a:latin typeface="Arial Unicode MS"/>
+                <a:ea typeface="Arial Unicode MS"/>
+                <a:cs typeface="Arial Unicode MS"/>
+              </a:rPr>
+              <a:t>自己帶光源</a:t>
+            </a:r>
+            <a:r>
+              <a:rPr sz="850" lang="zh-TW" dirty="0">
+                <a:solidFill>
+                  <a:srgbClr val="000000"/>
+                </a:solidFill>
+                <a:latin typeface="Arial Unicode MS"/>
+                <a:ea typeface="Arial Unicode MS"/>
+                <a:cs typeface="Arial Unicode MS"/>
+              </a:rPr>
+              <a:t>。它打自己的雷射出去，不靠路燈、不靠太陽，所以晚上和白天對它沒有差別。
 </a:t>
             </a:r>
           </a:p>
@@ -7822,41 +7745,30 @@
                 <a:spcPts val="0"/>
               </a:spcBef>
               <a:spcAft>
-                <a:spcPts val="133"/>
-              </a:spcAft>
-            </a:pPr>
-            <a:r>
-              <a:rPr sz="800" lang="zh-TW" dirty="0">
-                <a:solidFill>
-                  <a:srgbClr val="000000"/>
-                </a:solidFill>
-                <a:latin typeface="Arial Unicode MS"/>
-                <a:ea typeface="Arial Unicode MS"/>
-                <a:cs typeface="Arial Unicode MS"/>
-              </a:rPr>
-              <a:t>好，第二次播。</a:t>
-            </a:r>
-            <a:r>
-              <a:rPr sz="800" b="1" lang="zh-TW" dirty="0">
-                <a:solidFill>
-                  <a:srgbClr val="000000"/>
-                </a:solidFill>
-                <a:latin typeface="Arial Unicode MS"/>
-                <a:ea typeface="Arial Unicode MS"/>
-                <a:cs typeface="Arial Unicode MS"/>
-              </a:rPr>
-              <a:t>這次只看顏色。</a:t>
-            </a:r>
-            <a:r>
-              <a:rPr sz="800" lang="zh-TW" dirty="0">
-                <a:solidFill>
-                  <a:srgbClr val="000000"/>
-                </a:solidFill>
-                <a:latin typeface="Arial Unicode MS"/>
-                <a:ea typeface="Arial Unicode MS"/>
-                <a:cs typeface="Arial Unicode MS"/>
-              </a:rPr>
-              <a:t>請問各位，那個顏色是真的顏色嗎？
+                <a:spcPts val="142"/>
+              </a:spcAft>
+            </a:pPr>
+            <a:r>
+              <a:rPr sz="850" b="1" lang="zh-TW" dirty="0">
+                <a:solidFill>
+                  <a:srgbClr val="000000"/>
+                </a:solidFill>
+                <a:latin typeface="Arial Unicode MS"/>
+                <a:ea typeface="Arial Unicode MS"/>
+                <a:cs typeface="Arial Unicode MS"/>
+              </a:rPr>
+              <a:t>第三個情境，Vehicle Exiting Tunnel。</a:t>
+            </a:r>
+            <a:r>
+              <a:rPr sz="850" lang="zh-TW" dirty="0">
+                <a:solidFill>
+                  <a:srgbClr val="000000"/>
+                </a:solidFill>
+                <a:latin typeface="Arial Unicode MS"/>
+                <a:ea typeface="Arial Unicode MS"/>
+                <a:cs typeface="Arial Unicode MS"/>
+              </a:rPr>
+              <a:t>這個更明顯。下面的相機，隧道出口整片死白，前面那幾台車完全看不到。上面的點雲，那幾台車清清楚楚。
 </a:t>
             </a:r>
           </a:p>
@@ -7866,41 +7778,41 @@
                 <a:spcPts val="0"/>
               </a:spcBef>
               <a:spcAft>
-                <a:spcPts val="133"/>
-              </a:spcAft>
-            </a:pPr>
-            <a:r>
-              <a:rPr sz="800" lang="zh-TW" dirty="0">
-                <a:solidFill>
-                  <a:srgbClr val="000000"/>
-                </a:solidFill>
-                <a:latin typeface="Arial Unicode MS"/>
-                <a:ea typeface="Arial Unicode MS"/>
-                <a:cs typeface="Arial Unicode MS"/>
-              </a:rPr>
-              <a:t>不是。光達沒有顏色。影片裡那個顏色是</a:t>
-            </a:r>
-            <a:r>
-              <a:rPr sz="800" b="1" lang="zh-TW" dirty="0">
-                <a:solidFill>
-                  <a:srgbClr val="000000"/>
-                </a:solidFill>
-                <a:latin typeface="Arial Unicode MS"/>
-                <a:ea typeface="Arial Unicode MS"/>
-                <a:cs typeface="Arial Unicode MS"/>
-              </a:rPr>
-              <a:t>反射強度</a:t>
-            </a:r>
-            <a:r>
-              <a:rPr sz="800" lang="zh-TW" dirty="0">
-                <a:solidFill>
-                  <a:srgbClr val="000000"/>
-                </a:solidFill>
-                <a:latin typeface="Arial Unicode MS"/>
-                <a:ea typeface="Arial Unicode MS"/>
-                <a:cs typeface="Arial Unicode MS"/>
-              </a:rPr>
-              <a:t>——亮的地方是散回來多的，暗的地方是被吃掉的。
+                <a:spcPts val="142"/>
+              </a:spcAft>
+            </a:pPr>
+            <a:r>
+              <a:rPr sz="850" lang="zh-TW" dirty="0">
+                <a:solidFill>
+                  <a:srgbClr val="000000"/>
+                </a:solidFill>
+                <a:latin typeface="Arial Unicode MS"/>
+                <a:ea typeface="Arial Unicode MS"/>
+                <a:cs typeface="Arial Unicode MS"/>
+              </a:rPr>
+              <a:t>這一段請各位記住，</a:t>
+            </a:r>
+            <a:r>
+              <a:rPr sz="850" b="1" lang="zh-TW" dirty="0">
+                <a:solidFill>
+                  <a:srgbClr val="000000"/>
+                </a:solidFill>
+                <a:latin typeface="Arial Unicode MS"/>
+                <a:ea typeface="Arial Unicode MS"/>
+                <a:cs typeface="Arial Unicode MS"/>
+              </a:rPr>
+              <a:t>第二節第四張我們會回來重看一次</a:t>
+            </a:r>
+            <a:r>
+              <a:rPr sz="850" lang="zh-TW" dirty="0">
+                <a:solidFill>
+                  <a:srgbClr val="000000"/>
+                </a:solidFill>
+                <a:latin typeface="Arial Unicode MS"/>
+                <a:ea typeface="Arial Unicode MS"/>
+                <a:cs typeface="Arial Unicode MS"/>
+              </a:rPr>
+              <a:t>。那張在講相機的「動態範圍」——隧道裡很暗、隧道外很亮，同一張畫面裝不下，所以不是裡面黑掉就是外面白掉。各位剛剛看到的，就是白掉。
 </a:t>
             </a:r>
           </a:p>
@@ -7910,206 +7822,41 @@
                 <a:spcPts val="0"/>
               </a:spcBef>
               <a:spcAft>
-                <a:spcPts val="133"/>
-              </a:spcAft>
-            </a:pPr>
-            <a:r>
-              <a:rPr sz="800" lang="zh-TW" dirty="0">
-                <a:solidFill>
-                  <a:srgbClr val="000000"/>
-                </a:solidFill>
-                <a:latin typeface="Arial Unicode MS"/>
-                <a:ea typeface="Arial Unicode MS"/>
-                <a:cs typeface="Arial Unicode MS"/>
-              </a:rPr>
-              <a:t>所以各位現在看到的，就是規格表上那兩行 Range 在講的事：</a:t>
-            </a:r>
-            <a:r>
-              <a:rPr sz="800" b="1" lang="zh-TW" dirty="0">
-                <a:solidFill>
-                  <a:srgbClr val="000000"/>
-                </a:solidFill>
-                <a:latin typeface="Arial Unicode MS"/>
-                <a:ea typeface="Arial Unicode MS"/>
-                <a:cs typeface="Arial Unicode MS"/>
-              </a:rPr>
-              <a:t>同一顆光達，同一個距離，有些東西亮、有些東西暗</a:t>
-            </a:r>
-            <a:r>
-              <a:rPr sz="800" lang="zh-TW" dirty="0">
-                <a:solidFill>
-                  <a:srgbClr val="000000"/>
-                </a:solidFill>
-                <a:latin typeface="Arial Unicode MS"/>
-                <a:ea typeface="Arial Unicode MS"/>
-                <a:cs typeface="Arial Unicode MS"/>
-              </a:rPr>
-              <a:t>。等一下第十三張整張都在講這件事。
-</a:t>
-            </a:r>
-          </a:p>
-          <a:p>
-            <a:pPr algn="l">
-              <a:spcBef>
-                <a:spcPts val="0"/>
-              </a:spcBef>
-              <a:spcAft>
-                <a:spcPts val="133"/>
-              </a:spcAft>
-            </a:pPr>
-            <a:r>
-              <a:rPr sz="800" lang="zh-TW" dirty="0">
-                <a:solidFill>
-                  <a:srgbClr val="000000"/>
-                </a:solidFill>
-                <a:latin typeface="Arial Unicode MS"/>
-                <a:ea typeface="Arial Unicode MS"/>
-                <a:cs typeface="Arial Unicode MS"/>
-              </a:rPr>
-              <a:t>播完之後我要問一個問題：</a:t>
-            </a:r>
-            <a:r>
-              <a:rPr sz="800" b="1" lang="zh-TW" dirty="0">
-                <a:solidFill>
-                  <a:srgbClr val="000000"/>
-                </a:solidFill>
-                <a:latin typeface="Arial Unicode MS"/>
-                <a:ea typeface="Arial Unicode MS"/>
-                <a:cs typeface="Arial Unicode MS"/>
-              </a:rPr>
-              <a:t>影片裡最亮的是什麼？</a:t>
-            </a:r>
-            <a:r>
-              <a:rPr sz="800" lang="zh-TW" dirty="0">
-                <a:solidFill>
-                  <a:srgbClr val="000000"/>
-                </a:solidFill>
-                <a:latin typeface="Arial Unicode MS"/>
-                <a:ea typeface="Arial Unicode MS"/>
-                <a:cs typeface="Arial Unicode MS"/>
-              </a:rPr>
-              <a:t>
-</a:t>
-            </a:r>
-          </a:p>
-          <a:p>
-            <a:pPr algn="l">
-              <a:spcBef>
-                <a:spcPts val="0"/>
-              </a:spcBef>
-              <a:spcAft>
-                <a:spcPts val="133"/>
-              </a:spcAft>
-            </a:pPr>
-            <a:r>
-              <a:rPr sz="800" lang="zh-TW" dirty="0">
-                <a:solidFill>
-                  <a:srgbClr val="000000"/>
-                </a:solidFill>
-                <a:latin typeface="Arial Unicode MS"/>
-                <a:ea typeface="Arial Unicode MS"/>
-                <a:cs typeface="Arial Unicode MS"/>
-              </a:rPr>
-              <a:t>答案是</a:t>
-            </a:r>
-            <a:r>
-              <a:rPr sz="800" b="1" lang="zh-TW" dirty="0">
-                <a:solidFill>
-                  <a:srgbClr val="000000"/>
-                </a:solidFill>
-                <a:latin typeface="Arial Unicode MS"/>
-                <a:ea typeface="Arial Unicode MS"/>
-                <a:cs typeface="Arial Unicode MS"/>
-              </a:rPr>
-              <a:t>路邊那幾根桿子、淺色的牆面、還有停在路邊的車身</a:t>
-            </a:r>
-            <a:r>
-              <a:rPr sz="800" lang="zh-TW" dirty="0">
-                <a:solidFill>
-                  <a:srgbClr val="000000"/>
-                </a:solidFill>
-                <a:latin typeface="Arial Unicode MS"/>
-                <a:ea typeface="Arial Unicode MS"/>
-                <a:cs typeface="Arial Unicode MS"/>
-              </a:rPr>
-              <a:t>——那些都是會把光散回來的東西。最暗的呢？</a:t>
-            </a:r>
-            <a:r>
-              <a:rPr sz="800" b="1" lang="zh-TW" dirty="0">
-                <a:solidFill>
-                  <a:srgbClr val="000000"/>
-                </a:solidFill>
-                <a:latin typeface="Arial Unicode MS"/>
-                <a:ea typeface="Arial Unicode MS"/>
-                <a:cs typeface="Arial Unicode MS"/>
-              </a:rPr>
-              <a:t>腳下的柏油路面</a:t>
-            </a:r>
-            <a:r>
-              <a:rPr sz="800" lang="zh-TW" dirty="0">
-                <a:solidFill>
-                  <a:srgbClr val="000000"/>
-                </a:solidFill>
-                <a:latin typeface="Arial Unicode MS"/>
-                <a:ea typeface="Arial Unicode MS"/>
-                <a:cs typeface="Arial Unicode MS"/>
-              </a:rPr>
-              <a:t>，整片是深紫紅色，幾乎看不到。各位現在看到的，就是 80% 和 10% 的差別，只是它變成了顏色。
-</a:t>
-            </a:r>
-          </a:p>
-          <a:p>
-            <a:pPr algn="l">
-              <a:spcBef>
-                <a:spcPts val="0"/>
-              </a:spcBef>
-              <a:spcAft>
-                <a:spcPts val="133"/>
-              </a:spcAft>
-            </a:pPr>
-            <a:r>
-              <a:rPr sz="800" lang="zh-TW" dirty="0">
-                <a:solidFill>
-                  <a:srgbClr val="000000"/>
-                </a:solidFill>
-                <a:latin typeface="Arial Unicode MS"/>
-                <a:ea typeface="Arial Unicode MS"/>
-                <a:cs typeface="Arial Unicode MS"/>
-              </a:rPr>
-              <a:t>最後再看一個東西：畫面正中央有一個</a:t>
-            </a:r>
-            <a:r>
-              <a:rPr sz="800" b="1" lang="zh-TW" dirty="0">
-                <a:solidFill>
-                  <a:srgbClr val="000000"/>
-                </a:solidFill>
-                <a:latin typeface="Arial Unicode MS"/>
-                <a:ea typeface="Arial Unicode MS"/>
-                <a:cs typeface="Arial Unicode MS"/>
-              </a:rPr>
-              <a:t>黑洞</a:t>
-            </a:r>
-            <a:r>
-              <a:rPr sz="800" lang="zh-TW" dirty="0">
-                <a:solidFill>
-                  <a:srgbClr val="000000"/>
-                </a:solidFill>
-                <a:latin typeface="Arial Unicode MS"/>
-                <a:ea typeface="Arial Unicode MS"/>
-                <a:cs typeface="Arial Unicode MS"/>
-              </a:rPr>
-              <a:t>，車子周圍一圈完全沒有點。為什麼？回去看第四張的 Field of View：垂直只有 42.4 度，也就是往下最多看 21 度。光達裝在車頂，往下 21 度打出去，落地的地方離車還有好幾公尺——那一圈裡面，它看不到。</a:t>
-            </a:r>
-            <a:r>
-              <a:rPr sz="800" b="1" lang="zh-TW" dirty="0">
-                <a:solidFill>
-                  <a:srgbClr val="000000"/>
-                </a:solidFill>
-                <a:latin typeface="Arial Unicode MS"/>
-                <a:ea typeface="Arial Unicode MS"/>
-                <a:cs typeface="Arial Unicode MS"/>
-              </a:rPr>
-              <a:t>規格表上那一行，決定了這台車腳邊有多大一塊是瞎的。</a:t>
+                <a:spcPts val="142"/>
+              </a:spcAft>
+            </a:pPr>
+            <a:r>
+              <a:rPr sz="850" lang="zh-TW" dirty="0">
+                <a:solidFill>
+                  <a:srgbClr val="000000"/>
+                </a:solidFill>
+                <a:latin typeface="Arial Unicode MS"/>
+                <a:ea typeface="Arial Unicode MS"/>
+                <a:cs typeface="Arial Unicode MS"/>
+              </a:rPr>
+              <a:t>所以這支影片真正在講的事情是：光達和相機</a:t>
+            </a:r>
+            <a:r>
+              <a:rPr sz="850" b="1" lang="zh-TW" dirty="0">
+                <a:solidFill>
+                  <a:srgbClr val="000000"/>
+                </a:solidFill>
+                <a:latin typeface="Arial Unicode MS"/>
+                <a:ea typeface="Arial Unicode MS"/>
+                <a:cs typeface="Arial Unicode MS"/>
+              </a:rPr>
+              <a:t>不是誰取代誰，是弱點不一樣</a:t>
+            </a:r>
+            <a:r>
+              <a:rPr sz="850" lang="zh-TW" dirty="0">
+                <a:solidFill>
+                  <a:srgbClr val="000000"/>
+                </a:solidFill>
+                <a:latin typeface="Arial Unicode MS"/>
+                <a:ea typeface="Arial Unicode MS"/>
+                <a:cs typeface="Arial Unicode MS"/>
+              </a:rPr>
+              <a:t>。相機沒光就瞎，光達不怕黑；相機看得到顏色和文字，光達看不到。第三節選感測器的時候，各位會一直用到這句話。</a:t>
             </a:r>
           </a:p>
         </p:txBody>
@@ -18291,7 +18038,7 @@
                 <a:ea typeface="Arial" pitchFamily="34" charset="-122"/>
                 <a:cs typeface="Arial" pitchFamily="34" charset="-120"/>
               </a:rPr>
-              <a:t>Xem thử · 看一下它真的吐出什麼</a:t>
+              <a:t>Xem thử · 點雲到底長什麼樣</a:t>
             </a:r>
             <a:endParaRPr lang="en-US" sz="1300" dirty="0"/>
           </a:p>
@@ -18333,7 +18080,7 @@
                 <a:ea typeface="Arial" pitchFamily="34" charset="-122"/>
                 <a:cs typeface="Arial" pitchFamily="34" charset="-120"/>
               </a:rPr>
-              <a:t>Ba dòng vừa đọc, ra ngoài đời trông như thế này</a:t>
+              <a:t>Point cloud là gì: xem cùng lúc với ảnh camera</a:t>
             </a:r>
             <a:endParaRPr lang="en-US" sz="1700" dirty="0"/>
           </a:p>
@@ -18353,7 +18100,7 @@
                 <a:ea typeface="微軟正黑體" pitchFamily="34" charset="-122"/>
                 <a:cs typeface="微軟正黑體" pitchFamily="34" charset="-120"/>
               </a:rPr>
-              <a:t>剛剛讀的那三行，吐出來是這個樣子</a:t>
+              <a:t>點雲到底是什麼：和相機畫面擺在一起看</a:t>
             </a:r>
             <a:endParaRPr lang="en-US" sz="1700" dirty="0"/>
           </a:p>
@@ -18388,7 +18135,7 @@
       </p:sp>
       <p:pic>
         <p:nvPicPr>
-          <p:cNvPr id="5" name="Image 0" descr="/Users/tsengchenghsun/Class/carClass/Claude outputs/第五週(10-8)/src/img/w5_pic_os1.jpg">    </p:cNvPr>
+          <p:cNvPr id="5" name="Image 0" descr="/Users/tsengchenghsun/Class/carClass/Claude outputs/第五週(10-8)/src/img/w5_pic_at128p.png">    </p:cNvPr>
           <p:cNvPicPr>
             <a:picLocks noChangeAspect="1"/>
           </p:cNvPicPr>
@@ -18402,8 +18149,8 @@
         </p:blipFill>
         <p:spPr>
           <a:xfrm>
-            <a:off x="1290321" y="1301348"/>
-            <a:ext cx="2329685" cy="2292244"/>
+            <a:off x="594302" y="1301348"/>
+            <a:ext cx="3721724" cy="2292244"/>
           </a:xfrm>
           <a:prstGeom prst="rect">
             <a:avLst/>
@@ -18443,7 +18190,7 @@
                 <a:ea typeface="Arial" pitchFamily="34" charset="-122"/>
                 <a:cs typeface="Arial" pitchFamily="34" charset="-120"/>
               </a:rPr>
-              <a:t>圖：Ouster（ouster.com）</a:t>
+              <a:t>圖：Hesai（hesaitech.com）</a:t>
             </a:r>
             <a:endParaRPr lang="en-US" sz="750" dirty="0"/>
           </a:p>
@@ -18568,7 +18315,7 @@
                 <a:ea typeface="Arial" pitchFamily="34" charset="-122"/>
                 <a:cs typeface="Arial" pitchFamily="34" charset="-120"/>
               </a:rPr>
-              <a:t>OS1-64 Raw Point Cloud (Close-up)</a:t>
+              <a:t>Hesai AT128 Lidar Point Cloud View vs Camera View</a:t>
             </a:r>
             <a:endParaRPr lang="en-US" sz="1050" dirty="0"/>
           </a:p>
@@ -18607,7 +18354,7 @@
                 <a:ea typeface="Arial" pitchFamily="34" charset="-122"/>
                 <a:cs typeface="Arial" pitchFamily="34" charset="-120"/>
               </a:rPr>
-              <a:t>Ouster（原廠官方頻道）　·　1:42（播兩次，每次只看一件事）</a:t>
+              <a:t>Hesai Technology（原廠官方頻道）　·　0:37（三個情境，播兩次）</a:t>
             </a:r>
             <a:endParaRPr lang="en-US" sz="900" dirty="0"/>
           </a:p>
@@ -18655,7 +18402,7 @@
                   </a:extLst>
                 </a:hlinkClick>
               </a:rPr>
-              <a:t>https://youtu.be/Q-LE3o9TnX0</a:t>
+              <a:t>https://youtu.be/OkV0Lj-uATE</a:t>
             </a:r>
             <a:endParaRPr lang="en-US" sz="850" dirty="0"/>
           </a:p>
@@ -18717,7 +18464,7 @@
                 <a:ea typeface="Arial" pitchFamily="34" charset="-122"/>
                 <a:cs typeface="Arial" pitchFamily="34" charset="-120"/>
               </a:rPr>
-              <a:t>Những vòng tròn đồng tâm chính là 64 kênh — dòng Vertical Resolution</a:t>
+              <a:t>Trên là point cloud, dưới là camera cùng lúc — tìm cùng một chiếc xe ở hai bên</a:t>
             </a:r>
             <a:endParaRPr lang="en-US" sz="950" dirty="0"/>
           </a:p>
@@ -18737,7 +18484,7 @@
                 <a:ea typeface="微軟正黑體" pitchFamily="34" charset="-122"/>
                 <a:cs typeface="微軟正黑體" pitchFamily="34" charset="-120"/>
               </a:rPr>
-              <a:t>那一圈一圈的線，就是 64 線束——Vertical Resolution 那一行</a:t>
+              <a:t>上面是點雲、下面是同一時刻的相機——先在兩邊找出同一台車</a:t>
             </a:r>
             <a:endParaRPr lang="en-US" sz="950" dirty="0"/>
           </a:p>
@@ -18799,7 +18546,7 @@
                 <a:ea typeface="Arial" pitchFamily="34" charset="-122"/>
                 <a:cs typeface="Arial" pitchFamily="34" charset="-120"/>
               </a:rPr>
-              <a:t>Gần thì điểm dày, xa thì thưa: cùng một góc, càng xa khe càng rộng</a:t>
+              <a:t>Đường tối ban đêm: camera gần như đen hết, point cloud vẫn thấy cả hàng cây</a:t>
             </a:r>
             <a:endParaRPr lang="en-US" sz="950" dirty="0"/>
           </a:p>
@@ -18819,7 +18566,7 @@
                 <a:ea typeface="微軟正黑體" pitchFamily="34" charset="-122"/>
                 <a:cs typeface="微軟正黑體" pitchFamily="34" charset="-120"/>
               </a:rPr>
-              <a:t>近的地方點很密、遠的地方很疏：同樣的角度，愈遠縫愈寬</a:t>
+              <a:t>夜間暗路：相機幾乎全黑，點雲整排樹都還在</a:t>
             </a:r>
             <a:endParaRPr lang="en-US" sz="950" dirty="0"/>
           </a:p>
@@ -18881,7 +18628,7 @@
                 <a:ea typeface="Arial" pitchFamily="34" charset="-122"/>
                 <a:cs typeface="Arial" pitchFamily="34" charset="-120"/>
               </a:rPr>
-              <a:t>Màu KHÔNG phải màu thật — là cường độ phản hồi: sáng = tán về nhiều</a:t>
+              <a:t>Ra khỏi hầm: camera cháy trắng cửa hầm, point cloud vẫn thấy rõ mấy chiếc xe</a:t>
             </a:r>
             <a:endParaRPr lang="en-US" sz="950" dirty="0"/>
           </a:p>
@@ -18901,7 +18648,7 @@
                 <a:ea typeface="微軟正黑體" pitchFamily="34" charset="-122"/>
                 <a:cs typeface="微軟正黑體" pitchFamily="34" charset="-120"/>
               </a:rPr>
-              <a:t>顏色不是真實顏色，是反射強度：亮的散回來多，暗的被吃掉</a:t>
+              <a:t>出隧道：相機出口一片死白，點雲那幾台車看得清清楚楚</a:t>
             </a:r>
             <a:endParaRPr lang="en-US" sz="950" dirty="0"/>
           </a:p>
@@ -18970,7 +18717,7 @@
                 <a:ea typeface="Arial" pitchFamily="34" charset="-122"/>
                 <a:cs typeface="Arial" pitchFamily="34" charset="-120"/>
               </a:rPr>
-              <a:t>Màu trong video chính là 80% và 10% trong bảng thông số.</a:t>
+              <a:t>Lidar tự mang nguồn sáng. Đó là lý do nó và camera phải đi cùng nhau.</a:t>
             </a:r>
             <a:endParaRPr lang="en-US" sz="1150" dirty="0"/>
           </a:p>
@@ -18990,7 +18737,7 @@
                 <a:ea typeface="微軟正黑體" pitchFamily="34" charset="-122"/>
                 <a:cs typeface="微軟正黑體" pitchFamily="34" charset="-120"/>
               </a:rPr>
-              <a:t>影片裡那個顏色，就是規格表上 80% 和 10% 的差別。</a:t>
+              <a:t>光達自己帶光源。這就是為什麼它和相機要一起裝。</a:t>
             </a:r>
             <a:endParaRPr lang="en-US" sz="1150" dirty="0"/>
           </a:p>

--- a/第五週(10-08)/第五週_第1節_簡報.pptx
+++ b/第五週(10-08)/第五週_第1節_簡報.pptx
@@ -1696,19 +1696,8 @@
                 <a:ea typeface="Arial Unicode MS"/>
                 <a:cs typeface="Arial Unicode MS"/>
               </a:rPr>
-              <a:t>答案剛剛已經在右邊那張表上了，我把它講清楚。
-</a:t>
-            </a:r>
-          </a:p>
-          <a:p>
-            <a:pPr algn="l">
-              <a:spcBef>
-                <a:spcPts val="0"/>
-              </a:spcBef>
-              <a:spcAft>
-                <a:spcPts val="133"/>
-              </a:spcAft>
-            </a:pPr>
+              <a:t>答案剛剛已經在右邊那張表上了，我把它講清楚。</a:t>
+            </a:r>
             <a:r>
               <a:rPr sz="800" b="1" lang="zh-TW" dirty="0">
                 <a:solidFill>
@@ -1927,6 +1916,50 @@
                 <a:ea typeface="Arial Unicode MS"/>
                 <a:cs typeface="Arial Unicode MS"/>
               </a:rPr>
+              <a:t>。配一顆 3.6 公釐的鏡頭，變成</a:t>
+            </a:r>
+            <a:r>
+              <a:rPr sz="800" b="1" lang="zh-TW" dirty="0">
+                <a:solidFill>
+                  <a:srgbClr val="000000"/>
+                </a:solidFill>
+                <a:latin typeface="Arial Unicode MS"/>
+                <a:ea typeface="Arial Unicode MS"/>
+                <a:cs typeface="Arial Unicode MS"/>
+              </a:rPr>
+              <a:t>81 度</a:t>
+            </a:r>
+            <a:r>
+              <a:rPr sz="800" lang="zh-TW" dirty="0">
+                <a:solidFill>
+                  <a:srgbClr val="000000"/>
+                </a:solidFill>
+                <a:latin typeface="Arial Unicode MS"/>
+                <a:ea typeface="Arial Unicode MS"/>
+                <a:cs typeface="Arial Unicode MS"/>
+              </a:rPr>
+              <a:t>。配一顆 16 公釐的鏡頭，只剩</a:t>
+            </a:r>
+            <a:r>
+              <a:rPr sz="800" b="1" lang="zh-TW" dirty="0">
+                <a:solidFill>
+                  <a:srgbClr val="000000"/>
+                </a:solidFill>
+                <a:latin typeface="Arial Unicode MS"/>
+                <a:ea typeface="Arial Unicode MS"/>
+                <a:cs typeface="Arial Unicode MS"/>
+              </a:rPr>
+              <a:t>21.7 度</a:t>
+            </a:r>
+            <a:r>
+              <a:rPr sz="800" lang="zh-TW" dirty="0">
+                <a:solidFill>
+                  <a:srgbClr val="000000"/>
+                </a:solidFill>
+                <a:latin typeface="Arial Unicode MS"/>
+                <a:ea typeface="Arial Unicode MS"/>
+                <a:cs typeface="Arial Unicode MS"/>
+              </a:rPr>
               <a:t>。
 </a:t>
             </a:r>
@@ -1949,7 +1982,51 @@
                 <a:ea typeface="Arial Unicode MS"/>
                 <a:cs typeface="Arial Unicode MS"/>
               </a:rPr>
-              <a:t>配一顆 3.6 公釐的鏡頭，變成</a:t>
+              <a:t>同一塊晶片，換鏡頭，視野差了四倍。
+</a:t>
+            </a:r>
+          </a:p>
+          <a:p>
+            <a:pPr algn="l">
+              <a:spcBef>
+                <a:spcPts val="0"/>
+              </a:spcBef>
+              <a:spcAft>
+                <a:spcPts val="133"/>
+              </a:spcAft>
+            </a:pPr>
+            <a:r>
+              <a:rPr sz="800" lang="zh-TW" dirty="0">
+                <a:solidFill>
+                  <a:srgbClr val="000000"/>
+                </a:solidFill>
+                <a:latin typeface="Arial Unicode MS"/>
+                <a:ea typeface="Arial Unicode MS"/>
+                <a:cs typeface="Arial Unicode MS"/>
+              </a:rPr>
+              <a:t>請大家自己拉一下那個滑桿，看焦距和視野是怎麼變的。給大家一分鐘。
+</a:t>
+            </a:r>
+          </a:p>
+          <a:p>
+            <a:pPr algn="l">
+              <a:spcBef>
+                <a:spcPts val="0"/>
+              </a:spcBef>
+              <a:spcAft>
+                <a:spcPts val="133"/>
+              </a:spcAft>
+            </a:pPr>
+            <a:r>
+              <a:rPr sz="800" lang="zh-TW" dirty="0">
+                <a:solidFill>
+                  <a:srgbClr val="000000"/>
+                </a:solidFill>
+                <a:latin typeface="Arial Unicode MS"/>
+                <a:ea typeface="Arial Unicode MS"/>
+                <a:cs typeface="Arial Unicode MS"/>
+              </a:rPr>
+              <a:t>有沒有發現：焦距加倍，視野大約減半，而且每一個像素代表的角度也跟著減半——</a:t>
             </a:r>
             <a:r>
               <a:rPr sz="800" b="1" lang="zh-TW" dirty="0">
@@ -1960,7 +2037,7 @@
                 <a:ea typeface="Arial Unicode MS"/>
                 <a:cs typeface="Arial Unicode MS"/>
               </a:rPr>
-              <a:t>81 度</a:t>
+              <a:t>看得更準，但看得更窄</a:t>
             </a:r>
             <a:r>
               <a:rPr sz="800" lang="zh-TW" dirty="0">
@@ -1993,7 +2070,29 @@
                 <a:ea typeface="Arial Unicode MS"/>
                 <a:cs typeface="Arial Unicode MS"/>
               </a:rPr>
-              <a:t>配一顆 16 公釐的鏡頭，只剩</a:t>
+              <a:t>這件事對自駕有多要緊，看左邊這張動圖。這是同一幀河內街景，我把它降到各個鏡頭在四十公尺該有的像素數，再放大給各位看。
+</a:t>
+            </a:r>
+          </a:p>
+          <a:p>
+            <a:pPr algn="l">
+              <a:spcBef>
+                <a:spcPts val="0"/>
+              </a:spcBef>
+              <a:spcAft>
+                <a:spcPts val="133"/>
+              </a:spcAft>
+            </a:pPr>
+            <a:r>
+              <a:rPr sz="800" lang="zh-TW" dirty="0">
+                <a:solidFill>
+                  <a:srgbClr val="000000"/>
+                </a:solidFill>
+                <a:latin typeface="Arial Unicode MS"/>
+                <a:ea typeface="Arial Unicode MS"/>
+                <a:cs typeface="Arial Unicode MS"/>
+              </a:rPr>
+              <a:t>四十公尺外一台機車大概寬零點八公尺，張角一點一五度。配 </a:t>
             </a:r>
             <a:r>
               <a:rPr sz="800" b="1" lang="zh-TW" dirty="0">
@@ -2004,7 +2103,73 @@
                 <a:ea typeface="Arial Unicode MS"/>
                 <a:cs typeface="Arial Unicode MS"/>
               </a:rPr>
-              <a:t>21.7 度</a:t>
+              <a:t>8 公釐</a:t>
+            </a:r>
+            <a:r>
+              <a:rPr sz="800" lang="zh-TW" dirty="0">
+                <a:solidFill>
+                  <a:srgbClr val="000000"/>
+                </a:solidFill>
+                <a:latin typeface="Arial Unicode MS"/>
+                <a:ea typeface="Arial Unicode MS"/>
+                <a:cs typeface="Arial Unicode MS"/>
+              </a:rPr>
+              <a:t>的鏡頭，每個像素零點零二度，機車身上有 </a:t>
+            </a:r>
+            <a:r>
+              <a:rPr sz="800" b="1" lang="zh-TW" dirty="0">
+                <a:solidFill>
+                  <a:srgbClr val="000000"/>
+                </a:solidFill>
+                <a:latin typeface="Arial Unicode MS"/>
+                <a:ea typeface="Arial Unicode MS"/>
+                <a:cs typeface="Arial Unicode MS"/>
+              </a:rPr>
+              <a:t>56 個像素</a:t>
+            </a:r>
+            <a:r>
+              <a:rPr sz="800" lang="zh-TW" dirty="0">
+                <a:solidFill>
+                  <a:srgbClr val="000000"/>
+                </a:solidFill>
+                <a:latin typeface="Arial Unicode MS"/>
+                <a:ea typeface="Arial Unicode MS"/>
+                <a:cs typeface="Arial Unicode MS"/>
+              </a:rPr>
+              <a:t>。換成 </a:t>
+            </a:r>
+            <a:r>
+              <a:rPr sz="800" b="1" lang="zh-TW" dirty="0">
+                <a:solidFill>
+                  <a:srgbClr val="000000"/>
+                </a:solidFill>
+                <a:latin typeface="Arial Unicode MS"/>
+                <a:ea typeface="Arial Unicode MS"/>
+                <a:cs typeface="Arial Unicode MS"/>
+              </a:rPr>
+              <a:t>3.6 公釐</a:t>
+            </a:r>
+            <a:r>
+              <a:rPr sz="800" lang="zh-TW" dirty="0">
+                <a:solidFill>
+                  <a:srgbClr val="000000"/>
+                </a:solidFill>
+                <a:latin typeface="Arial Unicode MS"/>
+                <a:ea typeface="Arial Unicode MS"/>
+                <a:cs typeface="Arial Unicode MS"/>
+              </a:rPr>
+              <a:t>，每個像素零點零四度，只剩 </a:t>
+            </a:r>
+            <a:r>
+              <a:rPr sz="800" b="1" lang="zh-TW" dirty="0">
+                <a:solidFill>
+                  <a:srgbClr val="000000"/>
+                </a:solidFill>
+                <a:latin typeface="Arial Unicode MS"/>
+                <a:ea typeface="Arial Unicode MS"/>
+                <a:cs typeface="Arial Unicode MS"/>
+              </a:rPr>
+              <a:t>29 個像素</a:t>
             </a:r>
             <a:r>
               <a:rPr sz="800" lang="zh-TW" dirty="0">
@@ -2037,19 +2202,19 @@
                 <a:ea typeface="Arial Unicode MS"/>
                 <a:cs typeface="Arial Unicode MS"/>
               </a:rPr>
-              <a:t>同一塊晶片，換鏡頭，視野差了四倍。
-</a:t>
-            </a:r>
-          </a:p>
-          <a:p>
-            <a:pPr algn="l">
-              <a:spcBef>
-                <a:spcPts val="0"/>
-              </a:spcBef>
-              <a:spcAft>
-                <a:spcPts val="133"/>
-              </a:spcAft>
-            </a:pPr>
+              <a:t>各位看畫面：左邊還看得出是一台機車、有個人坐在上面；右邊就只剩一團東西。</a:t>
+            </a:r>
+            <a:r>
+              <a:rPr sz="800" b="1" lang="zh-TW" dirty="0">
+                <a:solidFill>
+                  <a:srgbClr val="000000"/>
+                </a:solidFill>
+                <a:latin typeface="Arial Unicode MS"/>
+                <a:ea typeface="Arial Unicode MS"/>
+                <a:cs typeface="Arial Unicode MS"/>
+              </a:rPr>
+              <a:t>同一顆晶片、同一台機車、同一個距離，只是換了鏡頭。</a:t>
+            </a:r>
             <a:r>
               <a:rPr sz="800" lang="zh-TW" dirty="0">
                 <a:solidFill>
@@ -2059,51 +2224,7 @@
                 <a:ea typeface="Arial Unicode MS"/>
                 <a:cs typeface="Arial Unicode MS"/>
               </a:rPr>
-              <a:t>請大家自己拉一下那個滑桿，看焦距和視野是怎麼變的。
-</a:t>
-            </a:r>
-          </a:p>
-          <a:p>
-            <a:pPr algn="l">
-              <a:spcBef>
-                <a:spcPts val="0"/>
-              </a:spcBef>
-              <a:spcAft>
-                <a:spcPts val="133"/>
-              </a:spcAft>
-            </a:pPr>
-            <a:r>
-              <a:rPr sz="800" lang="zh-TW" dirty="0">
-                <a:solidFill>
-                  <a:srgbClr val="000000"/>
-                </a:solidFill>
-                <a:latin typeface="Arial Unicode MS"/>
-                <a:ea typeface="Arial Unicode MS"/>
-                <a:cs typeface="Arial Unicode MS"/>
-              </a:rPr>
-              <a:t>給大家一分鐘。
-</a:t>
-            </a:r>
-          </a:p>
-          <a:p>
-            <a:pPr algn="l">
-              <a:spcBef>
-                <a:spcPts val="0"/>
-              </a:spcBef>
-              <a:spcAft>
-                <a:spcPts val="133"/>
-              </a:spcAft>
-            </a:pPr>
-            <a:r>
-              <a:rPr sz="800" lang="zh-TW" dirty="0">
-                <a:solidFill>
-                  <a:srgbClr val="000000"/>
-                </a:solidFill>
-                <a:latin typeface="Arial Unicode MS"/>
-                <a:ea typeface="Arial Unicode MS"/>
-                <a:cs typeface="Arial Unicode MS"/>
-              </a:rPr>
-              <a:t>有沒有發現：焦距加倍，視野大約減半，而且每一個像素代表的角度也跟著減半——</a:t>
+              <a:t>廣角不是畫質比較差——整張畫面的像素一樣多，是</a:t>
             </a:r>
             <a:r>
               <a:rPr sz="800" b="1" lang="zh-TW" dirty="0">
@@ -2114,7 +2235,7 @@
                 <a:ea typeface="Arial Unicode MS"/>
                 <a:cs typeface="Arial Unicode MS"/>
               </a:rPr>
-              <a:t>看得更準，但看得更窄</a:t>
+              <a:t>遠處那個目標分到的像素變少了</a:t>
             </a:r>
             <a:r>
               <a:rPr sz="800" lang="zh-TW" dirty="0">
@@ -9644,15 +9765,15 @@
         <p:spPr>
           <a:xfrm>
             <a:off x="502920" y="1101852"/>
-            <a:ext cx="2468880" cy="2514600"/>
+            <a:ext cx="3566160" cy="2514600"/>
           </a:xfrm>
           <a:prstGeom prst="roundRect">
             <a:avLst>
-              <a:gd name="adj" fmla="val 4444"/>
+              <a:gd name="adj" fmla="val 4364"/>
             </a:avLst>
           </a:prstGeom>
           <a:solidFill>
-            <a:srgbClr val="F4F7FA"/>
+            <a:srgbClr val="FFFFFF"/>
           </a:solidFill>
           <a:ln w="12700">
             <a:solidFill>
@@ -9662,286 +9783,79 @@
           </a:ln>
         </p:spPr>
       </p:sp>
-      <p:sp>
-        <p:nvSpPr>
-          <p:cNvPr id="4" name="Shape 2"/>
-          <p:cNvSpPr/>
-          <p:nvPr/>
-        </p:nvSpPr>
-        <p:spPr>
-          <a:xfrm flipH="1" flipV="1">
-            <a:off x="1314902" y="1288435"/>
-            <a:ext cx="422458" cy="626319"/>
-          </a:xfrm>
-          <a:prstGeom prst="line">
+      <p:pic>
+        <p:nvPicPr>
+          <p:cNvPr id="4" name="Image 0" descr="/Users/tsengchenghsun/Class/carClass/Claude outputs/第五週(10-8)/src/img/w5_s11_lens.gif">    </p:cNvPr>
+          <p:cNvPicPr>
+            <a:picLocks noChangeAspect="1"/>
+          </p:cNvPicPr>
+          <p:nvPr/>
+        </p:nvPicPr>
+        <p:blipFill>
+          <a:blip r:embed="rId1"/>
+          <a:stretch>
+            <a:fillRect/>
+          </a:stretch>
+        </p:blipFill>
+        <p:spPr>
+          <a:xfrm>
+            <a:off x="576072" y="1480642"/>
+            <a:ext cx="3419856" cy="1574140"/>
+          </a:xfrm>
+          <a:prstGeom prst="rect">
             <a:avLst/>
           </a:prstGeom>
+        </p:spPr>
+      </p:pic>
+      <p:sp>
+        <p:nvSpPr>
+          <p:cNvPr id="5" name="Text 2"/>
+          <p:cNvSpPr txBox="1"/>
+          <p:nvPr/>
+        </p:nvSpPr>
+        <p:spPr>
+          <a:xfrm>
+            <a:off x="576072" y="3396996"/>
+            <a:ext cx="3419856" cy="182880"/>
+          </a:xfrm>
+          <a:prstGeom prst="rect">
+            <a:avLst/>
+          </a:prstGeom>
           <a:noFill/>
-          <a:ln w="15240">
-            <a:solidFill>
-              <a:srgbClr val="1F4E79"/>
-            </a:solidFill>
-            <a:prstDash val="solid"/>
-          </a:ln>
-        </p:spPr>
-      </p:sp>
-      <p:sp>
-        <p:nvSpPr>
-          <p:cNvPr id="5" name="Shape 3"/>
-          <p:cNvSpPr/>
-          <p:nvPr/>
-        </p:nvSpPr>
-        <p:spPr>
-          <a:xfrm flipH="1" flipV="1">
-            <a:off x="1516480" y="1192287"/>
-            <a:ext cx="220880" cy="722467"/>
-          </a:xfrm>
-          <a:prstGeom prst="line">
-            <a:avLst/>
-          </a:prstGeom>
-          <a:noFill/>
-          <a:ln w="15240">
-            <a:solidFill>
-              <a:srgbClr val="1F4E79"/>
-            </a:solidFill>
-            <a:prstDash val="solid"/>
-          </a:ln>
-        </p:spPr>
-      </p:sp>
-      <p:sp>
-        <p:nvSpPr>
-          <p:cNvPr id="6" name="Shape 4"/>
-          <p:cNvSpPr/>
-          <p:nvPr/>
-        </p:nvSpPr>
-        <p:spPr>
-          <a:xfrm flipV="1">
-            <a:off x="1737360" y="1159276"/>
-            <a:ext cx="1" cy="755477"/>
-          </a:xfrm>
-          <a:prstGeom prst="line">
-            <a:avLst/>
-          </a:prstGeom>
-          <a:noFill/>
-          <a:ln w="15240">
-            <a:solidFill>
-              <a:srgbClr val="1F4E79"/>
-            </a:solidFill>
-            <a:prstDash val="solid"/>
-          </a:ln>
-        </p:spPr>
-      </p:sp>
-      <p:sp>
-        <p:nvSpPr>
-          <p:cNvPr id="7" name="Shape 5"/>
-          <p:cNvSpPr/>
-          <p:nvPr/>
-        </p:nvSpPr>
-        <p:spPr>
-          <a:xfrm flipV="1">
-            <a:off x="1737360" y="1192287"/>
-            <a:ext cx="220880" cy="722467"/>
-          </a:xfrm>
-          <a:prstGeom prst="line">
-            <a:avLst/>
-          </a:prstGeom>
-          <a:noFill/>
-          <a:ln w="15240">
-            <a:solidFill>
-              <a:srgbClr val="1F4E79"/>
-            </a:solidFill>
-            <a:prstDash val="solid"/>
-          </a:ln>
-        </p:spPr>
-      </p:sp>
-      <p:sp>
-        <p:nvSpPr>
-          <p:cNvPr id="8" name="Shape 6"/>
-          <p:cNvSpPr/>
-          <p:nvPr/>
-        </p:nvSpPr>
-        <p:spPr>
-          <a:xfrm flipV="1">
-            <a:off x="1737360" y="1288435"/>
-            <a:ext cx="422458" cy="626319"/>
-          </a:xfrm>
-          <a:prstGeom prst="line">
-            <a:avLst/>
-          </a:prstGeom>
-          <a:noFill/>
-          <a:ln w="15240">
-            <a:solidFill>
-              <a:srgbClr val="1F4E79"/>
-            </a:solidFill>
-            <a:prstDash val="solid"/>
-          </a:ln>
-        </p:spPr>
-      </p:sp>
-      <p:sp>
-        <p:nvSpPr>
-          <p:cNvPr id="9" name="Shape 7"/>
-          <p:cNvSpPr/>
-          <p:nvPr/>
-        </p:nvSpPr>
-        <p:spPr>
-          <a:xfrm>
-            <a:off x="1675400" y="1852794"/>
-            <a:ext cx="123919" cy="123919"/>
-          </a:xfrm>
-          <a:prstGeom prst="ellipse">
-            <a:avLst/>
-          </a:prstGeom>
-          <a:solidFill>
-            <a:srgbClr val="1F4E79"/>
-          </a:solidFill>
           <a:ln/>
         </p:spPr>
-      </p:sp>
-      <p:sp>
-        <p:nvSpPr>
-          <p:cNvPr id="10" name="Shape 8"/>
-          <p:cNvSpPr/>
-          <p:nvPr/>
-        </p:nvSpPr>
-        <p:spPr>
-          <a:xfrm flipH="1" flipV="1">
-            <a:off x="998392" y="2824237"/>
-            <a:ext cx="738968" cy="157073"/>
-          </a:xfrm>
-          <a:prstGeom prst="line">
-            <a:avLst/>
-          </a:prstGeom>
-          <a:noFill/>
-          <a:ln w="15240">
-            <a:solidFill>
-              <a:srgbClr val="1F4E79"/>
-            </a:solidFill>
-            <a:prstDash val="solid"/>
-          </a:ln>
-        </p:spPr>
-      </p:sp>
-      <p:sp>
-        <p:nvSpPr>
-          <p:cNvPr id="11" name="Shape 9"/>
-          <p:cNvSpPr/>
-          <p:nvPr/>
-        </p:nvSpPr>
-        <p:spPr>
-          <a:xfrm flipH="1" flipV="1">
-            <a:off x="1261923" y="2394194"/>
-            <a:ext cx="475437" cy="587116"/>
-          </a:xfrm>
-          <a:prstGeom prst="line">
-            <a:avLst/>
-          </a:prstGeom>
-          <a:noFill/>
-          <a:ln w="15240">
-            <a:solidFill>
-              <a:srgbClr val="1F4E79"/>
-            </a:solidFill>
-            <a:prstDash val="solid"/>
-          </a:ln>
-        </p:spPr>
-      </p:sp>
-      <p:sp>
-        <p:nvSpPr>
-          <p:cNvPr id="12" name="Shape 10"/>
-          <p:cNvSpPr/>
-          <p:nvPr/>
-        </p:nvSpPr>
-        <p:spPr>
-          <a:xfrm flipV="1">
-            <a:off x="1737360" y="2225832"/>
-            <a:ext cx="1" cy="755477"/>
-          </a:xfrm>
-          <a:prstGeom prst="line">
-            <a:avLst/>
-          </a:prstGeom>
-          <a:noFill/>
-          <a:ln w="15240">
-            <a:solidFill>
-              <a:srgbClr val="1F4E79"/>
-            </a:solidFill>
-            <a:prstDash val="solid"/>
-          </a:ln>
-        </p:spPr>
-      </p:sp>
-      <p:sp>
-        <p:nvSpPr>
-          <p:cNvPr id="13" name="Shape 11"/>
-          <p:cNvSpPr/>
-          <p:nvPr/>
-        </p:nvSpPr>
-        <p:spPr>
-          <a:xfrm flipV="1">
-            <a:off x="1737360" y="2394194"/>
-            <a:ext cx="475437" cy="587116"/>
-          </a:xfrm>
-          <a:prstGeom prst="line">
-            <a:avLst/>
-          </a:prstGeom>
-          <a:noFill/>
-          <a:ln w="15240">
-            <a:solidFill>
-              <a:srgbClr val="1F4E79"/>
-            </a:solidFill>
-            <a:prstDash val="solid"/>
-          </a:ln>
-        </p:spPr>
-      </p:sp>
-      <p:sp>
-        <p:nvSpPr>
-          <p:cNvPr id="14" name="Shape 12"/>
-          <p:cNvSpPr/>
-          <p:nvPr/>
-        </p:nvSpPr>
-        <p:spPr>
-          <a:xfrm flipV="1">
-            <a:off x="1737360" y="2824237"/>
-            <a:ext cx="738968" cy="157073"/>
-          </a:xfrm>
-          <a:prstGeom prst="line">
-            <a:avLst/>
-          </a:prstGeom>
-          <a:noFill/>
-          <a:ln w="15240">
-            <a:solidFill>
-              <a:srgbClr val="1F4E79"/>
-            </a:solidFill>
-            <a:prstDash val="solid"/>
-          </a:ln>
-        </p:spPr>
-      </p:sp>
-      <p:sp>
-        <p:nvSpPr>
-          <p:cNvPr id="15" name="Shape 13"/>
-          <p:cNvSpPr/>
-          <p:nvPr/>
-        </p:nvSpPr>
-        <p:spPr>
-          <a:xfrm>
-            <a:off x="1675400" y="2919350"/>
-            <a:ext cx="123919" cy="123919"/>
-          </a:xfrm>
-          <a:prstGeom prst="ellipse">
-            <a:avLst/>
-          </a:prstGeom>
-          <a:solidFill>
-            <a:srgbClr val="1F4E79"/>
-          </a:solidFill>
-          <a:ln/>
-        </p:spPr>
-      </p:sp>
-      <p:sp>
-        <p:nvSpPr>
-          <p:cNvPr id="16" name="Text 14"/>
+        <p:txBody>
+          <a:bodyPr wrap="square" lIns="0" tIns="0" rIns="0" bIns="0" rtlCol="0" anchor="ctr"/>
+          <a:lstStyle/>
+          <a:p>
+            <a:pPr algn="ctr" indent="0" marL="0">
+              <a:buNone/>
+            </a:pPr>
+            <a:r>
+              <a:rPr lang="en-US" sz="700" dirty="0">
+                <a:solidFill>
+                  <a:srgbClr val="5F7183"/>
+                </a:solidFill>
+                <a:latin typeface="Arial" pitchFamily="34" charset="0"/>
+                <a:ea typeface="Arial" pitchFamily="34" charset="-122"/>
+                <a:cs typeface="Arial" pitchFamily="34" charset="-120"/>
+              </a:rPr>
+              <a:t>同一幀河內街景，降到各鏡頭在 40 公尺該有的像素數再放大</a:t>
+            </a:r>
+            <a:endParaRPr lang="en-US" sz="700" dirty="0"/>
+          </a:p>
+        </p:txBody>
+      </p:sp>
+      <p:sp>
+        <p:nvSpPr>
+          <p:cNvPr id="6" name="Text 3"/>
           <p:cNvSpPr txBox="1"/>
           <p:nvPr/>
         </p:nvSpPr>
         <p:spPr>
           <a:xfrm>
-            <a:off x="3429000" y="1319005"/>
-            <a:ext cx="5212080" cy="1005611"/>
+            <a:off x="4379976" y="1123982"/>
+            <a:ext cx="4261104" cy="1005611"/>
           </a:xfrm>
           <a:prstGeom prst="rect">
             <a:avLst/>
@@ -9968,7 +9882,7 @@
                 <a:ea typeface="Arial" pitchFamily="34" charset="-122"/>
                 <a:cs typeface="Arial" pitchFamily="34" charset="-120"/>
               </a:rPr>
-              <a:t>Góc nhìn không nằm ở cảm biến — nó nằm ở ống kính</a:t>
+              <a:t>Góc nhìn nằm ở ống kính, không ở cảm biến</a:t>
             </a:r>
             <a:endParaRPr lang="en-US" sz="2300" dirty="0"/>
           </a:p>
@@ -9996,14 +9910,14 @@
       </p:sp>
       <p:sp>
         <p:nvSpPr>
-          <p:cNvPr id="17" name="Text 15"/>
+          <p:cNvPr id="7" name="Text 4"/>
           <p:cNvSpPr txBox="1"/>
           <p:nvPr/>
         </p:nvSpPr>
         <p:spPr>
           <a:xfrm>
-            <a:off x="3429000" y="2416057"/>
-            <a:ext cx="5212080" cy="1074682"/>
+            <a:off x="4379976" y="2221033"/>
+            <a:ext cx="4261104" cy="1464729"/>
           </a:xfrm>
           <a:prstGeom prst="rect">
             <a:avLst/>
@@ -10058,7 +9972,7 @@
       </p:sp>
       <p:sp>
         <p:nvSpPr>
-          <p:cNvPr id="18" name="Shape 16"/>
+          <p:cNvPr id="8" name="Shape 5"/>
           <p:cNvSpPr/>
           <p:nvPr/>
         </p:nvSpPr>
@@ -10085,7 +9999,7 @@
       </p:sp>
       <p:sp>
         <p:nvSpPr>
-          <p:cNvPr id="19" name="Text 17"/>
+          <p:cNvPr id="9" name="Text 6"/>
           <p:cNvSpPr txBox="1"/>
           <p:nvPr/>
         </p:nvSpPr>
@@ -10147,14 +10061,14 @@
       </p:sp>
       <p:pic>
         <p:nvPicPr>
-          <p:cNvPr id="21" name="Image 0" descr="/Users/tsengchenghsun/Class/carClass/Claude outputs/第五週(10-8)/src/logo.png">    </p:cNvPr>
+          <p:cNvPr id="11" name="Image 1" descr="/Users/tsengchenghsun/Class/carClass/Claude outputs/第五週(10-8)/src/logo.png">    </p:cNvPr>
           <p:cNvPicPr>
             <a:picLocks noChangeAspect="1"/>
           </p:cNvPicPr>
           <p:nvPr/>
         </p:nvPicPr>
         <p:blipFill>
-          <a:blip r:embed="rId1"/>
+          <a:blip r:embed="rId2"/>
           <a:stretch>
             <a:fillRect/>
           </a:stretch>
@@ -10171,7 +10085,7 @@
       </p:pic>
       <p:sp>
         <p:nvSpPr>
-          <p:cNvPr id="22" name="Text 18"/>
+          <p:cNvPr id="12" name="Text 7"/>
           <p:cNvSpPr txBox="1"/>
           <p:nvPr/>
         </p:nvSpPr>
@@ -10210,7 +10124,7 @@
       </p:sp>
       <p:sp>
         <p:nvSpPr>
-          <p:cNvPr id="23" name="Text 19"/>
+          <p:cNvPr id="13" name="Text 8"/>
           <p:cNvSpPr txBox="1"/>
           <p:nvPr/>
         </p:nvSpPr>

--- a/第五週(10-08)/第五週_第1節_簡報.pptx
+++ b/第五週(10-08)/第五週_第1節_簡報.pptx
@@ -1641,7 +1641,7 @@
                 <a:ea typeface="Arial Unicode MS"/>
                 <a:cs typeface="Arial Unicode MS"/>
               </a:rPr>
-              <a:t>圈公式裡的焦距與感光元件寬度，再打開工具裡的第①個小工具現場算一次。
+              <a:t>動圖在開頭停一次（兩格取景不一樣，右邊看得比較寬）、結尾再停一次（框到同一台車，右邊糊掉）。再打開判讀台第①個小工具現場算一次。
 </a:t>
             </a:r>
           </a:p>
@@ -2070,7 +2070,29 @@
                 <a:ea typeface="Arial Unicode MS"/>
                 <a:cs typeface="Arial Unicode MS"/>
               </a:rPr>
-              <a:t>這件事對自駕有多要緊，看左邊這張動圖。這是同一幀河內街景，我把它降到各個鏡頭在四十公尺該有的像素數，再放大給各位看。
+              <a:t>這件事對自駕有多要緊，看左邊這張動圖。一開始兩格是同一個路口、同一個位置，但是</a:t>
+            </a:r>
+            <a:r>
+              <a:rPr sz="800" b="1" lang="zh-TW" dirty="0">
+                <a:solidFill>
+                  <a:srgbClr val="000000"/>
+                </a:solidFill>
+                <a:latin typeface="Arial Unicode MS"/>
+                <a:ea typeface="Arial Unicode MS"/>
+                <a:cs typeface="Arial Unicode MS"/>
+              </a:rPr>
+              <a:t>右邊那格看到的範圍大得多</a:t>
+            </a:r>
+            <a:r>
+              <a:rPr sz="800" lang="zh-TW" dirty="0">
+                <a:solidFill>
+                  <a:srgbClr val="000000"/>
+                </a:solidFill>
+                <a:latin typeface="Arial Unicode MS"/>
+                <a:ea typeface="Arial Unicode MS"/>
+                <a:cs typeface="Arial Unicode MS"/>
+              </a:rPr>
+              <a:t>——那就是 81 度的鏡頭。同樣的 2048 個像素，它攤在更寬的場景上。
 </a:t>
             </a:r>
           </a:p>
@@ -2092,7 +2114,7 @@
                 <a:ea typeface="Arial Unicode MS"/>
                 <a:cs typeface="Arial Unicode MS"/>
               </a:rPr>
-              <a:t>四十公尺外一台機車大概寬零點八公尺，張角一點一五度。配 </a:t>
+              <a:t>接下來兩格會一起拉近，框到</a:t>
             </a:r>
             <a:r>
               <a:rPr sz="800" b="1" lang="zh-TW" dirty="0">
@@ -2103,6 +2125,28 @@
                 <a:ea typeface="Arial Unicode MS"/>
                 <a:cs typeface="Arial Unicode MS"/>
               </a:rPr>
+              <a:t>同一台機車</a:t>
+            </a:r>
+            <a:r>
+              <a:rPr sz="800" lang="zh-TW" dirty="0">
+                <a:solidFill>
+                  <a:srgbClr val="000000"/>
+                </a:solidFill>
+                <a:latin typeface="Arial Unicode MS"/>
+                <a:ea typeface="Arial Unicode MS"/>
+                <a:cs typeface="Arial Unicode MS"/>
+              </a:rPr>
+              <a:t>。四十公尺外一台機車大概寬零點八公尺，張角一點一五度。配 </a:t>
+            </a:r>
+            <a:r>
+              <a:rPr sz="800" b="1" lang="zh-TW" dirty="0">
+                <a:solidFill>
+                  <a:srgbClr val="000000"/>
+                </a:solidFill>
+                <a:latin typeface="Arial Unicode MS"/>
+                <a:ea typeface="Arial Unicode MS"/>
+                <a:cs typeface="Arial Unicode MS"/>
+              </a:rPr>
               <a:t>8 公釐</a:t>
             </a:r>
             <a:r>
@@ -2136,7 +2180,7 @@
                 <a:ea typeface="Arial Unicode MS"/>
                 <a:cs typeface="Arial Unicode MS"/>
               </a:rPr>
-              <a:t>。換成 </a:t>
+              <a:t>；換成 </a:t>
             </a:r>
             <a:r>
               <a:rPr sz="800" b="1" lang="zh-TW" dirty="0">
@@ -2169,7 +2213,7 @@
                 <a:ea typeface="Arial Unicode MS"/>
                 <a:cs typeface="Arial Unicode MS"/>
               </a:rPr>
-              <a:t>29 個像素</a:t>
+              <a:t>29 個</a:t>
             </a:r>
             <a:r>
               <a:rPr sz="800" lang="zh-TW" dirty="0">
@@ -2202,7 +2246,7 @@
                 <a:ea typeface="Arial Unicode MS"/>
                 <a:cs typeface="Arial Unicode MS"/>
               </a:rPr>
-              <a:t>各位看畫面：左邊還看得出是一台機車、有個人坐在上面；右邊就只剩一團東西。</a:t>
+              <a:t>各位看最後那一格：左邊還看得出是一台機車、有個人坐在上面；右邊就只剩一團方塊。</a:t>
             </a:r>
             <a:r>
               <a:rPr sz="800" b="1" lang="zh-TW" dirty="0">
@@ -9799,8 +9843,8 @@
         </p:blipFill>
         <p:spPr>
           <a:xfrm>
-            <a:off x="576072" y="1480642"/>
-            <a:ext cx="3419856" cy="1574140"/>
+            <a:off x="576072" y="1470584"/>
+            <a:ext cx="3419856" cy="1594256"/>
           </a:xfrm>
           <a:prstGeom prst="rect">
             <a:avLst/>
@@ -9840,7 +9884,7 @@
                 <a:ea typeface="Arial" pitchFamily="34" charset="-122"/>
                 <a:cs typeface="Arial" pitchFamily="34" charset="-120"/>
               </a:rPr>
-              <a:t>同一幀河內街景，降到各鏡頭在 40 公尺該有的像素數再放大</a:t>
+              <a:t>同一幀河內街景：先照各鏡頭的視野取景，再一起框到同一台機車</a:t>
             </a:r>
             <a:endParaRPr lang="en-US" sz="700" dirty="0"/>
           </a:p>

--- a/第五週(10-08)/第五週_第1節_簡報.pptx
+++ b/第五週(10-08)/第五週_第1節_簡報.pptx
@@ -1784,7 +1784,29 @@
                 <a:ea typeface="Arial Unicode MS"/>
                 <a:cs typeface="Arial Unicode MS"/>
               </a:rPr>
-              <a:t>那視野要怎麼算？規格判讀台上有三個小工具，第一個就在做這件事。現在請大家打開來玩一下。
+              <a:t>那視野要怎麼算？規格判讀台右邊有三個小工具，</a:t>
+            </a:r>
+            <a:r>
+              <a:rPr sz="800" b="1" lang="zh-TW" dirty="0">
+                <a:solidFill>
+                  <a:srgbClr val="000000"/>
+                </a:solidFill>
+                <a:latin typeface="Arial Unicode MS"/>
+                <a:ea typeface="Arial Unicode MS"/>
+                <a:cs typeface="Arial Unicode MS"/>
+              </a:rPr>
+              <a:t>第①個「焦距 → 視野」</a:t>
+            </a:r>
+            <a:r>
+              <a:rPr sz="800" lang="zh-TW" dirty="0">
+                <a:solidFill>
+                  <a:srgbClr val="000000"/>
+                </a:solidFill>
+                <a:latin typeface="Arial Unicode MS"/>
+                <a:ea typeface="Arial Unicode MS"/>
+                <a:cs typeface="Arial Unicode MS"/>
+              </a:rPr>
+              <a:t>就在做這件事。現在請大家打開來。
 </a:t>
             </a:r>
           </a:p>
@@ -2004,7 +2026,29 @@
                 <a:ea typeface="Arial Unicode MS"/>
                 <a:cs typeface="Arial Unicode MS"/>
               </a:rPr>
-              <a:t>請大家自己拉一下那個滑桿，看焦距和視野是怎麼變的。給大家一分鐘。
+              <a:t>現在請各位自己拉</a:t>
+            </a:r>
+            <a:r>
+              <a:rPr sz="800" b="1" lang="zh-TW" dirty="0">
+                <a:solidFill>
+                  <a:srgbClr val="000000"/>
+                </a:solidFill>
+                <a:latin typeface="Arial Unicode MS"/>
+                <a:ea typeface="Arial Unicode MS"/>
+                <a:cs typeface="Arial Unicode MS"/>
+              </a:rPr>
+              <a:t>第①個小工具裡那條「鏡頭焦距 mm」的滑桿</a:t>
+            </a:r>
+            <a:r>
+              <a:rPr sz="800" lang="zh-TW" dirty="0">
+                <a:solidFill>
+                  <a:srgbClr val="000000"/>
+                </a:solidFill>
+                <a:latin typeface="Arial Unicode MS"/>
+                <a:ea typeface="Arial Unicode MS"/>
+                <a:cs typeface="Arial Unicode MS"/>
+              </a:rPr>
+              <a:t>，從 2 公釐拉到 24 公釐，看視野怎麼變。給大家一分鐘。
 </a:t>
             </a:r>
           </a:p>

--- a/第五週(10-08)/第五週_第1節_簡報.pptx
+++ b/第五週(10-08)/第五週_第1節_簡報.pptx
@@ -1850,28 +1850,6 @@
                 <a:ea typeface="Arial Unicode MS"/>
                 <a:cs typeface="Arial Unicode MS"/>
               </a:rPr>
-              <a:t>
-</a:t>
-            </a:r>
-          </a:p>
-          <a:p>
-            <a:pPr algn="l">
-              <a:spcBef>
-                <a:spcPts val="0"/>
-              </a:spcBef>
-              <a:spcAft>
-                <a:spcPts val="133"/>
-              </a:spcAft>
-            </a:pPr>
-            <a:r>
-              <a:rPr sz="800" lang="zh-TW" dirty="0">
-                <a:solidFill>
-                  <a:srgbClr val="000000"/>
-                </a:solidFill>
-                <a:latin typeface="Arial Unicode MS"/>
-                <a:ea typeface="Arial Unicode MS"/>
-                <a:cs typeface="Arial Unicode MS"/>
-              </a:rPr>
               <a:t>我們用真的數字算一次。這顆晶片是 2048 個像素，每個像素 3 微米，所以它的寬度是 2048 乘 3 微米，等於</a:t>
             </a:r>
             <a:r>
@@ -2048,7 +2026,51 @@
                 <a:ea typeface="Arial Unicode MS"/>
                 <a:cs typeface="Arial Unicode MS"/>
               </a:rPr>
-              <a:t>，從 2 公釐拉到 24 公釐，看視野怎麼變。給大家一分鐘。
+              <a:t>，從 2 公釐拉到 24 公釐。滑桿下面有兩張圖會跟著動：</a:t>
+            </a:r>
+            <a:r>
+              <a:rPr sz="800" b="1" lang="zh-TW" dirty="0">
+                <a:solidFill>
+                  <a:srgbClr val="000000"/>
+                </a:solidFill>
+                <a:latin typeface="Arial Unicode MS"/>
+                <a:ea typeface="Arial Unicode MS"/>
+                <a:cs typeface="Arial Unicode MS"/>
+              </a:rPr>
+              <a:t>左邊</a:t>
+            </a:r>
+            <a:r>
+              <a:rPr sz="800" lang="zh-TW" dirty="0">
+                <a:solidFill>
+                  <a:srgbClr val="000000"/>
+                </a:solidFill>
+                <a:latin typeface="Arial Unicode MS"/>
+                <a:ea typeface="Arial Unicode MS"/>
+                <a:cs typeface="Arial Unicode MS"/>
+              </a:rPr>
+              <a:t>是這顆鏡頭看到的範圍，</a:t>
+            </a:r>
+            <a:r>
+              <a:rPr sz="800" b="1" lang="zh-TW" dirty="0">
+                <a:solidFill>
+                  <a:srgbClr val="000000"/>
+                </a:solidFill>
+                <a:latin typeface="Arial Unicode MS"/>
+                <a:ea typeface="Arial Unicode MS"/>
+                <a:cs typeface="Arial Unicode MS"/>
+              </a:rPr>
+              <a:t>右邊</a:t>
+            </a:r>
+            <a:r>
+              <a:rPr sz="800" lang="zh-TW" dirty="0">
+                <a:solidFill>
+                  <a:srgbClr val="000000"/>
+                </a:solidFill>
+                <a:latin typeface="Arial Unicode MS"/>
+                <a:ea typeface="Arial Unicode MS"/>
+                <a:cs typeface="Arial Unicode MS"/>
+              </a:rPr>
+              <a:t>是四十公尺外那台機車在這顆鏡頭下剩幾個像素。拉到 2 公釐，機車只剩二十一個像素，整個糊掉；拉到 16 公釐，一百零八個像素，看得清清楚楚。給大家一分鐘，自己拉到底再拉回來。
 </a:t>
             </a:r>
           </a:p>

--- a/第五週(10-08)/第五週_第1節_簡報.pptx
+++ b/第五週(10-08)/第五週_第1節_簡報.pptx
@@ -3081,11 +3081,11 @@
                 <a:spcPts val="0"/>
               </a:spcBef>
               <a:spcAft>
-                <a:spcPts val="142"/>
-              </a:spcAft>
-            </a:pPr>
-            <a:r>
-              <a:rPr sz="850" b="1" lang="zh-TW" dirty="0">
+                <a:spcPts val="133"/>
+              </a:spcAft>
+            </a:pPr>
+            <a:r>
+              <a:rPr sz="800" b="1" lang="zh-TW" dirty="0">
                 <a:solidFill>
                   <a:srgbClr val="000000"/>
                 </a:solidFill>
@@ -3096,7 +3096,7 @@
               <a:t>▍這一張要做什麼</a:t>
             </a:r>
             <a:r>
-              <a:rPr sz="850" lang="zh-TW" dirty="0">
+              <a:rPr sz="800" lang="zh-TW" dirty="0">
                 <a:solidFill>
                   <a:srgbClr val="000000"/>
                 </a:solidFill>
@@ -3114,11 +3114,11 @@
                 <a:spcPts val="0"/>
               </a:spcBef>
               <a:spcAft>
-                <a:spcPts val="142"/>
-              </a:spcAft>
-            </a:pPr>
-            <a:r>
-              <a:rPr sz="850" lang="zh-TW" dirty="0">
+                <a:spcPts val="133"/>
+              </a:spcAft>
+            </a:pPr>
+            <a:r>
+              <a:rPr sz="800" lang="zh-TW" dirty="0">
                 <a:solidFill>
                   <a:srgbClr val="000000"/>
                 </a:solidFill>
@@ -3136,11 +3136,11 @@
                 <a:spcPts val="0"/>
               </a:spcBef>
               <a:spcAft>
-                <a:spcPts val="142"/>
-              </a:spcAft>
-            </a:pPr>
-            <a:r>
-              <a:rPr sz="850" b="1" lang="zh-TW" dirty="0">
+                <a:spcPts val="133"/>
+              </a:spcAft>
+            </a:pPr>
+            <a:r>
+              <a:rPr sz="800" b="1" lang="zh-TW" dirty="0">
                 <a:solidFill>
                   <a:srgbClr val="000000"/>
                 </a:solidFill>
@@ -3151,7 +3151,7 @@
               <a:t>▍畫面上圈這裡</a:t>
             </a:r>
             <a:r>
-              <a:rPr sz="850" lang="zh-TW" dirty="0">
+              <a:rPr sz="800" lang="zh-TW" dirty="0">
                 <a:solidFill>
                   <a:srgbClr val="000000"/>
                 </a:solidFill>
@@ -3169,11 +3169,11 @@
                 <a:spcPts val="0"/>
               </a:spcBef>
               <a:spcAft>
-                <a:spcPts val="142"/>
-              </a:spcAft>
-            </a:pPr>
-            <a:r>
-              <a:rPr sz="850" lang="zh-TW" dirty="0">
+                <a:spcPts val="133"/>
+              </a:spcAft>
+            </a:pPr>
+            <a:r>
+              <a:rPr sz="800" lang="zh-TW" dirty="0">
                 <a:solidFill>
                   <a:srgbClr val="000000"/>
                 </a:solidFill>
@@ -3191,11 +3191,11 @@
                 <a:spcPts val="0"/>
               </a:spcBef>
               <a:spcAft>
-                <a:spcPts val="142"/>
-              </a:spcAft>
-            </a:pPr>
-            <a:r>
-              <a:rPr sz="850" b="1" lang="zh-TW" dirty="0">
+                <a:spcPts val="133"/>
+              </a:spcAft>
+            </a:pPr>
+            <a:r>
+              <a:rPr sz="800" b="1" lang="zh-TW" dirty="0">
                 <a:solidFill>
                   <a:srgbClr val="000000"/>
                 </a:solidFill>
@@ -3206,7 +3206,7 @@
               <a:t>▍以下照著唸</a:t>
             </a:r>
             <a:r>
-              <a:rPr sz="850" lang="zh-TW" dirty="0">
+              <a:rPr sz="800" lang="zh-TW" dirty="0">
                 <a:solidFill>
                   <a:srgbClr val="000000"/>
                 </a:solidFill>
@@ -3224,11 +3224,11 @@
                 <a:spcPts val="0"/>
               </a:spcBef>
               <a:spcAft>
-                <a:spcPts val="142"/>
-              </a:spcAft>
-            </a:pPr>
-            <a:r>
-              <a:rPr sz="850" lang="zh-TW" dirty="0">
+                <a:spcPts val="133"/>
+              </a:spcAft>
+            </a:pPr>
+            <a:r>
+              <a:rPr sz="800" lang="zh-TW" dirty="0">
                 <a:solidFill>
                   <a:srgbClr val="000000"/>
                 </a:solidFill>
@@ -3239,7 +3239,7 @@
               <a:t>回到剛剛請大家圈起來的那一行。左邊是 OS1 規格表上真正的那兩行，測距寫了</a:t>
             </a:r>
             <a:r>
-              <a:rPr sz="850" b="1" lang="zh-TW" dirty="0">
+              <a:rPr sz="800" b="1" lang="zh-TW" dirty="0">
                 <a:solidFill>
                   <a:srgbClr val="000000"/>
                 </a:solidFill>
@@ -3250,7 +3250,7 @@
               <a:t>兩個數字</a:t>
             </a:r>
             <a:r>
-              <a:rPr sz="850" lang="zh-TW" dirty="0">
+              <a:rPr sz="800" lang="zh-TW" dirty="0">
                 <a:solidFill>
                   <a:srgbClr val="000000"/>
                 </a:solidFill>
@@ -3268,11 +3268,11 @@
                 <a:spcPts val="0"/>
               </a:spcBef>
               <a:spcAft>
-                <a:spcPts val="142"/>
-              </a:spcAft>
-            </a:pPr>
-            <a:r>
-              <a:rPr sz="850" lang="zh-TW" dirty="0">
+                <a:spcPts val="133"/>
+              </a:spcAft>
+            </a:pPr>
+            <a:r>
+              <a:rPr sz="800" lang="zh-TW" dirty="0">
                 <a:solidFill>
                   <a:srgbClr val="000000"/>
                 </a:solidFill>
@@ -3283,7 +3283,7 @@
               <a:t>第一個 170 公尺，括號裡是 </a:t>
             </a:r>
             <a:r>
-              <a:rPr sz="850" b="1" lang="zh-TW" dirty="0">
+              <a:rPr sz="800" b="1" lang="zh-TW" dirty="0">
                 <a:solidFill>
                   <a:srgbClr val="000000"/>
                 </a:solidFill>
@@ -3294,7 +3294,7 @@
               <a:t>80% Lambertian reflectivity</a:t>
             </a:r>
             <a:r>
-              <a:rPr sz="850" lang="zh-TW" dirty="0">
+              <a:rPr sz="800" lang="zh-TW" dirty="0">
                 <a:solidFill>
                   <a:srgbClr val="000000"/>
                 </a:solidFill>
@@ -3305,7 +3305,7 @@
               <a:t>；第二個 90 公尺，括號裡是 </a:t>
             </a:r>
             <a:r>
-              <a:rPr sz="850" b="1" lang="zh-TW" dirty="0">
+              <a:rPr sz="800" b="1" lang="zh-TW" dirty="0">
                 <a:solidFill>
                   <a:srgbClr val="000000"/>
                 </a:solidFill>
@@ -3316,7 +3316,7 @@
               <a:t>10%</a:t>
             </a:r>
             <a:r>
-              <a:rPr sz="850" lang="zh-TW" dirty="0">
+              <a:rPr sz="800" lang="zh-TW" dirty="0">
                 <a:solidFill>
                   <a:srgbClr val="000000"/>
                 </a:solidFill>
@@ -3334,11 +3334,11 @@
                 <a:spcPts val="0"/>
               </a:spcBef>
               <a:spcAft>
-                <a:spcPts val="142"/>
-              </a:spcAft>
-            </a:pPr>
-            <a:r>
-              <a:rPr sz="850" lang="zh-TW" dirty="0">
+                <a:spcPts val="133"/>
+              </a:spcAft>
+            </a:pPr>
+            <a:r>
+              <a:rPr sz="800" lang="zh-TW" dirty="0">
                 <a:solidFill>
                   <a:srgbClr val="000000"/>
                 </a:solidFill>
@@ -3356,11 +3356,11 @@
                 <a:spcPts val="0"/>
               </a:spcBef>
               <a:spcAft>
-                <a:spcPts val="142"/>
-              </a:spcAft>
-            </a:pPr>
-            <a:r>
-              <a:rPr sz="850" lang="zh-TW" dirty="0">
+                <a:spcPts val="133"/>
+              </a:spcAft>
+            </a:pPr>
+            <a:r>
+              <a:rPr sz="800" lang="zh-TW" dirty="0">
                 <a:solidFill>
                   <a:srgbClr val="000000"/>
                 </a:solidFill>
@@ -3371,7 +3371,7 @@
               <a:t>所以同一顆光達，看白色的車看得到一百七十公尺，看黑色的車只剩九十公尺，</a:t>
             </a:r>
             <a:r>
-              <a:rPr sz="850" b="1" lang="zh-TW" dirty="0">
+              <a:rPr sz="800" b="1" lang="zh-TW" dirty="0">
                 <a:solidFill>
                   <a:srgbClr val="000000"/>
                 </a:solidFill>
@@ -3382,7 +3382,7 @@
               <a:t>差了將近一倍</a:t>
             </a:r>
             <a:r>
-              <a:rPr sz="850" lang="zh-TW" dirty="0">
+              <a:rPr sz="800" lang="zh-TW" dirty="0">
                 <a:solidFill>
                   <a:srgbClr val="000000"/>
                 </a:solidFill>
@@ -3400,11 +3400,11 @@
                 <a:spcPts val="0"/>
               </a:spcBef>
               <a:spcAft>
-                <a:spcPts val="142"/>
-              </a:spcAft>
-            </a:pPr>
-            <a:r>
-              <a:rPr sz="850" lang="zh-TW" dirty="0">
+                <a:spcPts val="133"/>
+              </a:spcAft>
+            </a:pPr>
+            <a:r>
+              <a:rPr sz="800" lang="zh-TW" dirty="0">
                 <a:solidFill>
                   <a:srgbClr val="000000"/>
                 </a:solidFill>
@@ -3415,7 +3415,7 @@
               <a:t>不過這裡要補一件事，不然各位會記成錯的：</a:t>
             </a:r>
             <a:r>
-              <a:rPr sz="850" b="1" lang="zh-TW" dirty="0">
+              <a:rPr sz="800" b="1" lang="zh-TW" dirty="0">
                 <a:solidFill>
                   <a:srgbClr val="000000"/>
                 </a:solidFill>
@@ -3426,7 +3426,7 @@
               <a:t>光達看的其實不是顏色</a:t>
             </a:r>
             <a:r>
-              <a:rPr sz="850" lang="zh-TW" dirty="0">
+              <a:rPr sz="800" lang="zh-TW" dirty="0">
                 <a:solidFill>
                   <a:srgbClr val="000000"/>
                 </a:solidFill>
@@ -3444,11 +3444,11 @@
                 <a:spcPts val="0"/>
               </a:spcBef>
               <a:spcAft>
-                <a:spcPts val="142"/>
-              </a:spcAft>
-            </a:pPr>
-            <a:r>
-              <a:rPr sz="850" lang="zh-TW" dirty="0">
+                <a:spcPts val="133"/>
+              </a:spcAft>
+            </a:pPr>
+            <a:r>
+              <a:rPr sz="800" lang="zh-TW" dirty="0">
                 <a:solidFill>
                   <a:srgbClr val="000000"/>
                 </a:solidFill>
@@ -3466,11 +3466,11 @@
                 <a:spcPts val="0"/>
               </a:spcBef>
               <a:spcAft>
-                <a:spcPts val="142"/>
-              </a:spcAft>
-            </a:pPr>
-            <a:r>
-              <a:rPr sz="850" lang="zh-TW" dirty="0">
+                <a:spcPts val="133"/>
+              </a:spcAft>
+            </a:pPr>
+            <a:r>
+              <a:rPr sz="800" lang="zh-TW" dirty="0">
                 <a:solidFill>
                   <a:srgbClr val="000000"/>
                 </a:solidFill>
@@ -3481,7 +3481,7 @@
               <a:t>可是身為工程師，</a:t>
             </a:r>
             <a:r>
-              <a:rPr sz="850" b="1" lang="zh-TW" dirty="0">
+              <a:rPr sz="800" b="1" lang="zh-TW" dirty="0">
                 <a:solidFill>
                   <a:srgbClr val="000000"/>
                 </a:solidFill>
@@ -3492,7 +3492,7 @@
               <a:t>你要拿來設計的是九十</a:t>
             </a:r>
             <a:r>
-              <a:rPr sz="850" lang="zh-TW" dirty="0">
+              <a:rPr sz="800" lang="zh-TW" dirty="0">
                 <a:solidFill>
                   <a:srgbClr val="000000"/>
                 </a:solidFill>
@@ -3510,11 +3510,11 @@
                 <a:spcPts val="0"/>
               </a:spcBef>
               <a:spcAft>
-                <a:spcPts val="142"/>
-              </a:spcAft>
-            </a:pPr>
-            <a:r>
-              <a:rPr sz="850" lang="zh-TW" dirty="0">
+                <a:spcPts val="133"/>
+              </a:spcAft>
+            </a:pPr>
+            <a:r>
+              <a:rPr sz="800" lang="zh-TW" dirty="0">
                 <a:solidFill>
                   <a:srgbClr val="000000"/>
                 </a:solidFill>
@@ -3525,7 +3525,7 @@
               <a:t>以後看到規格表寫「測距 200 公尺」，第一句話要問：</a:t>
             </a:r>
             <a:r>
-              <a:rPr sz="850" b="1" lang="zh-TW" dirty="0">
+              <a:rPr sz="800" b="1" lang="zh-TW" dirty="0">
                 <a:solidFill>
                   <a:srgbClr val="000000"/>
                 </a:solidFill>
@@ -3536,15 +3536,81 @@
               <a:t>那是對什麼反射率量的？</a:t>
             </a:r>
             <a:r>
-              <a:rPr sz="850" lang="zh-TW" dirty="0">
-                <a:solidFill>
-                  <a:srgbClr val="000000"/>
-                </a:solidFill>
-                <a:latin typeface="Arial Unicode MS"/>
-                <a:ea typeface="Arial Unicode MS"/>
-                <a:cs typeface="Arial Unicode MS"/>
-              </a:rPr>
-              <a:t>他沒寫，你就要小心。好的規格表會把兩個都寫出來，像 OS1 這樣。願不願意把比較難看的那個也印上去，其實看得出一家廠商老不老實。</a:t>
+              <a:rPr sz="800" lang="zh-TW" dirty="0">
+                <a:solidFill>
+                  <a:srgbClr val="000000"/>
+                </a:solidFill>
+                <a:latin typeface="Arial Unicode MS"/>
+                <a:ea typeface="Arial Unicode MS"/>
+                <a:cs typeface="Arial Unicode MS"/>
+              </a:rPr>
+              <a:t>他沒寫，你就要小心。好的規格表會把兩個都寫出來，像 OS1 這樣。願不願意把比較難看的那個也印上去，其實看得出一家廠商老不老實。
+</a:t>
+            </a:r>
+          </a:p>
+          <a:p>
+            <a:pPr algn="l">
+              <a:spcBef>
+                <a:spcPts val="0"/>
+              </a:spcBef>
+              <a:spcAft>
+                <a:spcPts val="133"/>
+              </a:spcAft>
+            </a:pPr>
+            <a:r>
+              <a:rPr sz="800" lang="zh-TW" dirty="0">
+                <a:solidFill>
+                  <a:srgbClr val="000000"/>
+                </a:solidFill>
+                <a:latin typeface="Arial Unicode MS"/>
+                <a:ea typeface="Arial Unicode MS"/>
+                <a:cs typeface="Arial Unicode MS"/>
+              </a:rPr>
+              <a:t>判讀台的</a:t>
+            </a:r>
+            <a:r>
+              <a:rPr sz="800" b="1" lang="zh-TW" dirty="0">
+                <a:solidFill>
+                  <a:srgbClr val="000000"/>
+                </a:solidFill>
+                <a:latin typeface="Arial Unicode MS"/>
+                <a:ea typeface="Arial Unicode MS"/>
+                <a:cs typeface="Arial Unicode MS"/>
+              </a:rPr>
+              <a:t>第③個小工具</a:t>
+            </a:r>
+            <a:r>
+              <a:rPr sz="800" lang="zh-TW" dirty="0">
+                <a:solidFill>
+                  <a:srgbClr val="000000"/>
+                </a:solidFill>
+                <a:latin typeface="Arial Unicode MS"/>
+                <a:ea typeface="Arial Unicode MS"/>
+                <a:cs typeface="Arial Unicode MS"/>
+              </a:rPr>
+              <a:t>可以自己拉：一條距離軸，白色車畫到 170 公尺、黑色車只畫到 90 公尺。把目標距離拉到 </a:t>
+            </a:r>
+            <a:r>
+              <a:rPr sz="800" b="1" lang="zh-TW" dirty="0">
+                <a:solidFill>
+                  <a:srgbClr val="000000"/>
+                </a:solidFill>
+                <a:latin typeface="Arial Unicode MS"/>
+                <a:ea typeface="Arial Unicode MS"/>
+                <a:cs typeface="Arial Unicode MS"/>
+              </a:rPr>
+              <a:t>120 公尺</a:t>
+            </a:r>
+            <a:r>
+              <a:rPr sz="800" lang="zh-TW" dirty="0">
+                <a:solidFill>
+                  <a:srgbClr val="000000"/>
+                </a:solidFill>
+                <a:latin typeface="Arial Unicode MS"/>
+                <a:ea typeface="Arial Unicode MS"/>
+                <a:cs typeface="Arial Unicode MS"/>
+              </a:rPr>
+              <a:t>，白色車還看得到，黑色車已經看不到了——同一個距離、同一顆光達，只是換個顏色。</a:t>
             </a:r>
           </a:p>
         </p:txBody>

--- a/第五週(10-08)/第五週_第1節_簡報.pptx
+++ b/第五週(10-08)/第五週_第1節_簡報.pptx
@@ -10030,8 +10030,8 @@
         </p:nvSpPr>
         <p:spPr>
           <a:xfrm>
-            <a:off x="4379976" y="1123982"/>
-            <a:ext cx="4261104" cy="1005611"/>
+            <a:off x="4379976" y="914400"/>
+            <a:ext cx="4261104" cy="2889504"/>
           </a:xfrm>
           <a:prstGeom prst="rect">
             <a:avLst/>
@@ -10040,7 +10040,7 @@
           <a:ln/>
         </p:spPr>
         <p:txBody>
-          <a:bodyPr wrap="square" lIns="0" tIns="0" rIns="0" bIns="0" rtlCol="0" anchor="t"/>
+          <a:bodyPr wrap="square" lIns="0" tIns="0" rIns="0" bIns="0" rtlCol="0" anchor="ctr"/>
           <a:lstStyle/>
           <a:p>
             <a:pPr indent="0" marL="0">
@@ -10070,7 +10070,7 @@
               <a:buNone/>
             </a:pPr>
             <a:r>
-              <a:rPr lang="en-US" sz="1400" dirty="0">
+              <a:rPr lang="en-US" sz="1400" b="1" dirty="0">
                 <a:solidFill>
                   <a:srgbClr val="007F72"/>
                 </a:solidFill>
@@ -10082,33 +10082,14 @@
             </a:r>
             <a:endParaRPr lang="en-US" sz="2300" dirty="0"/>
           </a:p>
-        </p:txBody>
-      </p:sp>
-      <p:sp>
-        <p:nvSpPr>
-          <p:cNvPr id="7" name="Text 4"/>
-          <p:cNvSpPr txBox="1"/>
-          <p:nvPr/>
-        </p:nvSpPr>
-        <p:spPr>
-          <a:xfrm>
-            <a:off x="4379976" y="2221033"/>
-            <a:ext cx="4261104" cy="1464729"/>
-          </a:xfrm>
-          <a:prstGeom prst="rect">
-            <a:avLst/>
-          </a:prstGeom>
-          <a:noFill/>
-          <a:ln/>
-        </p:spPr>
-        <p:txBody>
-          <a:bodyPr wrap="square" lIns="0" tIns="0" rIns="0" bIns="0" rtlCol="0" anchor="t"/>
-          <a:lstStyle/>
           <a:p>
             <a:pPr indent="0" marL="0">
               <a:lnSpc>
-                <a:spcPct val="128000"/>
+                <a:spcPct val="120000"/>
               </a:lnSpc>
+              <a:spcBef>
+                <a:spcPts val="1440"/>
+              </a:spcBef>
               <a:buNone/>
             </a:pPr>
             <a:r>
@@ -10122,12 +10103,12 @@
               </a:rPr>
               <a:t>Cùng một con chip, lắp ống kính 8 mm thì nhìn được 42°, lắp ống kính 3.6 mm thì nhìn được 81°. Hãng bán chip không biết bạn sẽ lắp ống kính nào, nên họ không thể viết.</a:t>
             </a:r>
-            <a:endParaRPr lang="en-US" sz="1250" dirty="0"/>
+            <a:endParaRPr lang="en-US" sz="2300" dirty="0"/>
           </a:p>
           <a:p>
             <a:pPr indent="0" marL="0">
               <a:lnSpc>
-                <a:spcPct val="128000"/>
+                <a:spcPct val="120000"/>
               </a:lnSpc>
               <a:buNone/>
             </a:pPr>
@@ -10142,13 +10123,13 @@
               </a:rPr>
               <a:t>同一塊晶片，配 8 mm 的鏡頭看得到 42 度，配 3.6 mm 的鏡頭看得到 81 度。賣晶片的廠商不知道你要配什麼鏡頭，所以寫不出來。</a:t>
             </a:r>
-            <a:endParaRPr lang="en-US" sz="1250" dirty="0"/>
+            <a:endParaRPr lang="en-US" sz="2300" dirty="0"/>
           </a:p>
         </p:txBody>
       </p:sp>
       <p:sp>
         <p:nvSpPr>
-          <p:cNvPr id="8" name="Shape 5"/>
+          <p:cNvPr id="7" name="Shape 4"/>
           <p:cNvSpPr/>
           <p:nvPr/>
         </p:nvSpPr>
@@ -10175,7 +10156,7 @@
       </p:sp>
       <p:sp>
         <p:nvSpPr>
-          <p:cNvPr id="9" name="Text 6"/>
+          <p:cNvPr id="8" name="Text 5"/>
           <p:cNvSpPr txBox="1"/>
           <p:nvPr/>
         </p:nvSpPr>
@@ -10237,7 +10218,7 @@
       </p:sp>
       <p:pic>
         <p:nvPicPr>
-          <p:cNvPr id="11" name="Image 1" descr="/Users/tsengchenghsun/Class/carClass/Claude outputs/第五週(10-8)/src/logo.png">    </p:cNvPr>
+          <p:cNvPr id="10" name="Image 1" descr="/Users/tsengchenghsun/Class/carClass/Claude outputs/第五週(10-8)/src/logo.png">    </p:cNvPr>
           <p:cNvPicPr>
             <a:picLocks noChangeAspect="1"/>
           </p:cNvPicPr>
@@ -10261,7 +10242,7 @@
       </p:pic>
       <p:sp>
         <p:nvSpPr>
-          <p:cNvPr id="12" name="Text 7"/>
+          <p:cNvPr id="11" name="Text 6"/>
           <p:cNvSpPr txBox="1"/>
           <p:nvPr/>
         </p:nvSpPr>
@@ -10300,7 +10281,7 @@
       </p:sp>
       <p:sp>
         <p:nvSpPr>
-          <p:cNvPr id="13" name="Text 8"/>
+          <p:cNvPr id="12" name="Text 7"/>
           <p:cNvSpPr txBox="1"/>
           <p:nvPr/>
         </p:nvSpPr>
@@ -10409,8 +10390,8 @@
         </p:nvSpPr>
         <p:spPr>
           <a:xfrm>
-            <a:off x="502920" y="1033416"/>
-            <a:ext cx="8138160" cy="853249"/>
+            <a:off x="502920" y="914400"/>
+            <a:ext cx="8138160" cy="1572768"/>
           </a:xfrm>
           <a:prstGeom prst="rect">
             <a:avLst/>
@@ -10419,7 +10400,7 @@
           <a:ln/>
         </p:spPr>
         <p:txBody>
-          <a:bodyPr wrap="square" lIns="0" tIns="0" rIns="0" bIns="0" rtlCol="0" anchor="t"/>
+          <a:bodyPr wrap="square" lIns="0" tIns="0" rIns="0" bIns="0" rtlCol="0" anchor="ctr"/>
           <a:lstStyle/>
           <a:p>
             <a:pPr indent="0" marL="0">
@@ -10449,7 +10430,7 @@
               <a:buNone/>
             </a:pPr>
             <a:r>
-              <a:rPr lang="en-US" sz="1200" dirty="0">
+              <a:rPr lang="en-US" sz="1200" b="1" dirty="0">
                 <a:solidFill>
                   <a:srgbClr val="007F72"/>
                 </a:solidFill>
@@ -10461,33 +10442,14 @@
             </a:r>
             <a:endParaRPr lang="en-US" sz="1900" dirty="0"/>
           </a:p>
-        </p:txBody>
-      </p:sp>
-      <p:sp>
-        <p:nvSpPr>
-          <p:cNvPr id="4" name="Text 2"/>
-          <p:cNvSpPr txBox="1"/>
-          <p:nvPr/>
-        </p:nvSpPr>
-        <p:spPr>
-          <a:xfrm>
-            <a:off x="502920" y="1978106"/>
-            <a:ext cx="8138160" cy="481486"/>
-          </a:xfrm>
-          <a:prstGeom prst="rect">
-            <a:avLst/>
-          </a:prstGeom>
-          <a:noFill/>
-          <a:ln/>
-        </p:spPr>
-        <p:txBody>
-          <a:bodyPr wrap="square" lIns="0" tIns="0" rIns="0" bIns="0" rtlCol="0" anchor="t"/>
-          <a:lstStyle/>
           <a:p>
             <a:pPr indent="0" marL="0">
               <a:lnSpc>
-                <a:spcPct val="128000"/>
+                <a:spcPct val="120000"/>
               </a:lnSpc>
+              <a:spcBef>
+                <a:spcPts val="1440"/>
+              </a:spcBef>
               <a:buNone/>
             </a:pPr>
             <a:r>
@@ -10501,12 +10463,12 @@
               </a:rPr>
               <a:t>Cùng một con lidar, đổi chế độ thì số điểm trên người ở 40 m khác hẳn.</a:t>
             </a:r>
-            <a:endParaRPr lang="en-US" sz="1250" dirty="0"/>
+            <a:endParaRPr lang="en-US" sz="1900" dirty="0"/>
           </a:p>
           <a:p>
             <a:pPr indent="0" marL="0">
               <a:lnSpc>
-                <a:spcPct val="128000"/>
+                <a:spcPct val="120000"/>
               </a:lnSpc>
               <a:buNone/>
             </a:pPr>
@@ -10521,13 +10483,13 @@
               </a:rPr>
               <a:t>同一顆光達，換一個模式，四十公尺行人身上的點數就整個不一樣。</a:t>
             </a:r>
-            <a:endParaRPr lang="en-US" sz="1250" dirty="0"/>
+            <a:endParaRPr lang="en-US" sz="1900" dirty="0"/>
           </a:p>
         </p:txBody>
       </p:sp>
       <p:sp>
         <p:nvSpPr>
-          <p:cNvPr id="5" name="Shape 3"/>
+          <p:cNvPr id="4" name="Shape 2"/>
           <p:cNvSpPr/>
           <p:nvPr/>
         </p:nvSpPr>
@@ -10554,7 +10516,7 @@
       </p:sp>
       <p:pic>
         <p:nvPicPr>
-          <p:cNvPr id="6" name="Image 0" descr="/Users/tsengchenghsun/Class/carClass/Claude outputs/第五週(10-8)/src/img/w5_os1_modes.png">    </p:cNvPr>
+          <p:cNvPr id="5" name="Image 0" descr="/Users/tsengchenghsun/Class/carClass/Claude outputs/第五週(10-8)/src/img/w5_os1_modes.png">    </p:cNvPr>
           <p:cNvPicPr>
             <a:picLocks noChangeAspect="1"/>
           </p:cNvPicPr>
@@ -10578,7 +10540,7 @@
       </p:pic>
       <p:sp>
         <p:nvSpPr>
-          <p:cNvPr id="7" name="Text 4"/>
+          <p:cNvPr id="6" name="Text 3"/>
           <p:cNvSpPr txBox="1"/>
           <p:nvPr/>
         </p:nvSpPr>
@@ -10617,7 +10579,7 @@
       </p:sp>
       <p:sp>
         <p:nvSpPr>
-          <p:cNvPr id="8" name="Shape 5"/>
+          <p:cNvPr id="7" name="Shape 4"/>
           <p:cNvSpPr/>
           <p:nvPr/>
         </p:nvSpPr>
@@ -10644,7 +10606,7 @@
       </p:sp>
       <p:sp>
         <p:nvSpPr>
-          <p:cNvPr id="9" name="Text 6"/>
+          <p:cNvPr id="8" name="Text 5"/>
           <p:cNvSpPr txBox="1"/>
           <p:nvPr/>
         </p:nvSpPr>
@@ -10706,7 +10668,7 @@
       </p:sp>
       <p:pic>
         <p:nvPicPr>
-          <p:cNvPr id="11" name="Image 1" descr="/Users/tsengchenghsun/Class/carClass/Claude outputs/第五週(10-8)/src/logo.png">    </p:cNvPr>
+          <p:cNvPr id="10" name="Image 1" descr="/Users/tsengchenghsun/Class/carClass/Claude outputs/第五週(10-8)/src/logo.png">    </p:cNvPr>
           <p:cNvPicPr>
             <a:picLocks noChangeAspect="1"/>
           </p:cNvPicPr>
@@ -10730,7 +10692,7 @@
       </p:pic>
       <p:sp>
         <p:nvSpPr>
-          <p:cNvPr id="12" name="Text 7"/>
+          <p:cNvPr id="11" name="Text 6"/>
           <p:cNvSpPr txBox="1"/>
           <p:nvPr/>
         </p:nvSpPr>
@@ -10769,7 +10731,7 @@
       </p:sp>
       <p:sp>
         <p:nvSpPr>
-          <p:cNvPr id="13" name="Text 8"/>
+          <p:cNvPr id="12" name="Text 7"/>
           <p:cNvSpPr txBox="1"/>
           <p:nvPr/>
         </p:nvSpPr>
@@ -17673,8 +17635,8 @@
         </p:nvSpPr>
         <p:spPr>
           <a:xfrm>
-            <a:off x="502920" y="1178160"/>
-            <a:ext cx="8138160" cy="563762"/>
+            <a:off x="502920" y="914400"/>
+            <a:ext cx="8138160" cy="1572768"/>
           </a:xfrm>
           <a:prstGeom prst="rect">
             <a:avLst/>
@@ -17683,7 +17645,7 @@
           <a:ln/>
         </p:spPr>
         <p:txBody>
-          <a:bodyPr wrap="square" lIns="0" tIns="0" rIns="0" bIns="0" rtlCol="0" anchor="t"/>
+          <a:bodyPr wrap="square" lIns="0" tIns="0" rIns="0" bIns="0" rtlCol="0" anchor="ctr"/>
           <a:lstStyle/>
           <a:p>
             <a:pPr indent="0" marL="0">
@@ -17713,7 +17675,7 @@
               <a:buNone/>
             </a:pPr>
             <a:r>
-              <a:rPr lang="en-US" sz="1200" dirty="0">
+              <a:rPr lang="en-US" sz="1200" b="1" dirty="0">
                 <a:solidFill>
                   <a:srgbClr val="007F72"/>
                 </a:solidFill>
@@ -17725,33 +17687,14 @@
             </a:r>
             <a:endParaRPr lang="en-US" sz="1900" dirty="0"/>
           </a:p>
-        </p:txBody>
-      </p:sp>
-      <p:sp>
-        <p:nvSpPr>
-          <p:cNvPr id="4" name="Text 2"/>
-          <p:cNvSpPr txBox="1"/>
-          <p:nvPr/>
-        </p:nvSpPr>
-        <p:spPr>
-          <a:xfrm>
-            <a:off x="502920" y="1833362"/>
-            <a:ext cx="8138160" cy="481486"/>
-          </a:xfrm>
-          <a:prstGeom prst="rect">
-            <a:avLst/>
-          </a:prstGeom>
-          <a:noFill/>
-          <a:ln/>
-        </p:spPr>
-        <p:txBody>
-          <a:bodyPr wrap="square" lIns="0" tIns="0" rIns="0" bIns="0" rtlCol="0" anchor="t"/>
-          <a:lstStyle/>
           <a:p>
             <a:pPr indent="0" marL="0">
               <a:lnSpc>
-                <a:spcPct val="128000"/>
+                <a:spcPct val="120000"/>
               </a:lnSpc>
+              <a:spcBef>
+                <a:spcPts val="1440"/>
+              </a:spcBef>
               <a:buNone/>
             </a:pPr>
             <a:r>
@@ -17765,12 +17708,12 @@
               </a:rPr>
               <a:t>Ở 10 Hz, mỗi khung cách nhau 100 ms — chạy 40 km/h là xe đã đi 1,1 m.</a:t>
             </a:r>
-            <a:endParaRPr lang="en-US" sz="1250" dirty="0"/>
+            <a:endParaRPr lang="en-US" sz="1900" dirty="0"/>
           </a:p>
           <a:p>
             <a:pPr indent="0" marL="0">
               <a:lnSpc>
-                <a:spcPct val="128000"/>
+                <a:spcPct val="120000"/>
               </a:lnSpc>
               <a:buNone/>
             </a:pPr>
@@ -17785,13 +17728,13 @@
               </a:rPr>
               <a:t>10 Hz 的話，每一張畫面隔 100 毫秒——時速 40 的時候，車子已經走了 1.1 公尺。</a:t>
             </a:r>
-            <a:endParaRPr lang="en-US" sz="1250" dirty="0"/>
+            <a:endParaRPr lang="en-US" sz="1900" dirty="0"/>
           </a:p>
         </p:txBody>
       </p:sp>
       <p:sp>
         <p:nvSpPr>
-          <p:cNvPr id="5" name="Shape 3"/>
+          <p:cNvPr id="4" name="Shape 2"/>
           <p:cNvSpPr/>
           <p:nvPr/>
         </p:nvSpPr>
@@ -17818,7 +17761,7 @@
       </p:sp>
       <p:pic>
         <p:nvPicPr>
-          <p:cNvPr id="6" name="Image 0" descr="/Users/tsengchenghsun/Class/carClass/Claude outputs/第五週(10-8)/src/img/w5_os1_rate.png">    </p:cNvPr>
+          <p:cNvPr id="5" name="Image 0" descr="/Users/tsengchenghsun/Class/carClass/Claude outputs/第五週(10-8)/src/img/w5_os1_rate.png">    </p:cNvPr>
           <p:cNvPicPr>
             <a:picLocks noChangeAspect="1"/>
           </p:cNvPicPr>
@@ -17842,7 +17785,7 @@
       </p:pic>
       <p:sp>
         <p:nvSpPr>
-          <p:cNvPr id="7" name="Text 4"/>
+          <p:cNvPr id="6" name="Text 3"/>
           <p:cNvSpPr txBox="1"/>
           <p:nvPr/>
         </p:nvSpPr>
@@ -17881,7 +17824,7 @@
       </p:sp>
       <p:sp>
         <p:nvSpPr>
-          <p:cNvPr id="8" name="Shape 5"/>
+          <p:cNvPr id="7" name="Shape 4"/>
           <p:cNvSpPr/>
           <p:nvPr/>
         </p:nvSpPr>
@@ -17908,7 +17851,7 @@
       </p:sp>
       <p:sp>
         <p:nvSpPr>
-          <p:cNvPr id="9" name="Text 6"/>
+          <p:cNvPr id="8" name="Text 5"/>
           <p:cNvSpPr txBox="1"/>
           <p:nvPr/>
         </p:nvSpPr>
@@ -17970,7 +17913,7 @@
       </p:sp>
       <p:pic>
         <p:nvPicPr>
-          <p:cNvPr id="11" name="Image 1" descr="/Users/tsengchenghsun/Class/carClass/Claude outputs/第五週(10-8)/src/logo.png">    </p:cNvPr>
+          <p:cNvPr id="10" name="Image 1" descr="/Users/tsengchenghsun/Class/carClass/Claude outputs/第五週(10-8)/src/logo.png">    </p:cNvPr>
           <p:cNvPicPr>
             <a:picLocks noChangeAspect="1"/>
           </p:cNvPicPr>
@@ -17994,7 +17937,7 @@
       </p:pic>
       <p:sp>
         <p:nvSpPr>
-          <p:cNvPr id="12" name="Text 7"/>
+          <p:cNvPr id="11" name="Text 6"/>
           <p:cNvSpPr txBox="1"/>
           <p:nvPr/>
         </p:nvSpPr>
@@ -18033,7 +17976,7 @@
       </p:sp>
       <p:sp>
         <p:nvSpPr>
-          <p:cNvPr id="13" name="Text 8"/>
+          <p:cNvPr id="12" name="Text 7"/>
           <p:cNvSpPr txBox="1"/>
           <p:nvPr/>
         </p:nvSpPr>

--- a/第五週(10-08)/第五週_第1節_簡報.pptx
+++ b/第五週(10-08)/第五週_第1節_簡報.pptx
@@ -5216,7 +5216,117 @@
                 <a:ea typeface="Arial Unicode MS"/>
                 <a:cs typeface="Arial Unicode MS"/>
               </a:rPr>
-              <a:t>第一段，我們把上禮拜那三個滑桿，一個一個在規格表上找出來。</a:t>
+              <a:t>第一段，我們把上禮拜那三個滑桿，一個一個在規格表上找出來。
+</a:t>
+            </a:r>
+          </a:p>
+          <a:p>
+            <a:pPr algn="l">
+              <a:spcBef>
+                <a:spcPts val="0"/>
+              </a:spcBef>
+              <a:spcAft>
+                <a:spcPts val="200"/>
+              </a:spcAft>
+            </a:pPr>
+            <a:r>
+              <a:rPr sz="1200" lang="zh-TW" dirty="0">
+                <a:solidFill>
+                  <a:srgbClr val="000000"/>
+                </a:solidFill>
+                <a:latin typeface="Arial Unicode MS"/>
+                <a:ea typeface="Arial Unicode MS"/>
+                <a:cs typeface="Arial Unicode MS"/>
+              </a:rPr>
+              <a:t>各位回想一下模擬器上那三條：</a:t>
+            </a:r>
+            <a:r>
+              <a:rPr sz="1200" b="1" lang="zh-TW" dirty="0">
+                <a:solidFill>
+                  <a:srgbClr val="000000"/>
+                </a:solidFill>
+                <a:latin typeface="Arial Unicode MS"/>
+                <a:ea typeface="Arial Unicode MS"/>
+                <a:cs typeface="Arial Unicode MS"/>
+              </a:rPr>
+              <a:t>射線數、射線長度、張角</a:t>
+            </a:r>
+            <a:r>
+              <a:rPr sz="1200" lang="zh-TW" dirty="0">
+                <a:solidFill>
+                  <a:srgbClr val="000000"/>
+                </a:solidFill>
+                <a:latin typeface="Arial Unicode MS"/>
+                <a:ea typeface="Arial Unicode MS"/>
+                <a:cs typeface="Arial Unicode MS"/>
+              </a:rPr>
+              <a:t>。拉一拉，車子就撞或不撞。
+</a:t>
+            </a:r>
+          </a:p>
+          <a:p>
+            <a:pPr algn="l">
+              <a:spcBef>
+                <a:spcPts val="0"/>
+              </a:spcBef>
+              <a:spcAft>
+                <a:spcPts val="200"/>
+              </a:spcAft>
+            </a:pPr>
+            <a:r>
+              <a:rPr sz="1200" lang="zh-TW" dirty="0">
+                <a:solidFill>
+                  <a:srgbClr val="000000"/>
+                </a:solidFill>
+                <a:latin typeface="Arial Unicode MS"/>
+                <a:ea typeface="Arial Unicode MS"/>
+                <a:cs typeface="Arial Unicode MS"/>
+              </a:rPr>
+              <a:t>今天要做的事是翻開真的規格表，把這三條指出來。它們在表上不叫這個名字，廠商寫的是英文，而且分散在不同的行。等一下我一行一行帶各位找。
+</a:t>
+            </a:r>
+          </a:p>
+          <a:p>
+            <a:pPr algn="l">
+              <a:spcBef>
+                <a:spcPts val="0"/>
+              </a:spcBef>
+              <a:spcAft>
+                <a:spcPts val="200"/>
+              </a:spcAft>
+            </a:pPr>
+            <a:r>
+              <a:rPr sz="1200" lang="zh-TW" dirty="0">
+                <a:solidFill>
+                  <a:srgbClr val="000000"/>
+                </a:solidFill>
+                <a:latin typeface="Arial Unicode MS"/>
+                <a:ea typeface="Arial Unicode MS"/>
+                <a:cs typeface="Arial Unicode MS"/>
+              </a:rPr>
+              <a:t>找完各位會發現：那三條不是遊戲的設定，是</a:t>
+            </a:r>
+            <a:r>
+              <a:rPr sz="1200" b="1" lang="zh-TW" dirty="0">
+                <a:solidFill>
+                  <a:srgbClr val="000000"/>
+                </a:solidFill>
+                <a:latin typeface="Arial Unicode MS"/>
+                <a:ea typeface="Arial Unicode MS"/>
+                <a:cs typeface="Arial Unicode MS"/>
+              </a:rPr>
+              <a:t>要花錢買的東西</a:t>
+            </a:r>
+            <a:r>
+              <a:rPr sz="1200" lang="zh-TW" dirty="0">
+                <a:solidFill>
+                  <a:srgbClr val="000000"/>
+                </a:solidFill>
+                <a:latin typeface="Arial Unicode MS"/>
+                <a:ea typeface="Arial Unicode MS"/>
+                <a:cs typeface="Arial Unicode MS"/>
+              </a:rPr>
+              <a:t>。</a:t>
             </a:r>
           </a:p>
         </p:txBody>
@@ -8362,7 +8472,7 @@
                 <a:ea typeface="Arial Unicode MS"/>
                 <a:cs typeface="Arial Unicode MS"/>
               </a:rPr>
-              <a:t>不用圈。先讓他們自己翻工具找，找不到才翻下一頁。
+              <a:t>不用圈。唸完真的停三十秒讓他們自己找，找不到才翻下一頁——自己找過才記得住。
 </a:t>
             </a:r>
           </a:p>
@@ -8417,7 +8527,106 @@
                 <a:ea typeface="Arial Unicode MS"/>
                 <a:cs typeface="Arial Unicode MS"/>
               </a:rPr>
-              <a:t>第二段，我們看相機。這一段會出現今天最有意思的一題。</a:t>
+              <a:t>第二段，我們看相機。這一段會出現今天最有意思的一題。
+</a:t>
+            </a:r>
+          </a:p>
+          <a:p>
+            <a:pPr algn="l">
+              <a:spcBef>
+                <a:spcPts val="0"/>
+              </a:spcBef>
+              <a:spcAft>
+                <a:spcPts val="200"/>
+              </a:spcAft>
+            </a:pPr>
+            <a:r>
+              <a:rPr sz="1200" lang="zh-TW" dirty="0">
+                <a:solidFill>
+                  <a:srgbClr val="000000"/>
+                </a:solidFill>
+                <a:latin typeface="Arial Unicode MS"/>
+                <a:ea typeface="Arial Unicode MS"/>
+                <a:cs typeface="Arial Unicode MS"/>
+              </a:rPr>
+              <a:t>題目我先講出來：</a:t>
+            </a:r>
+            <a:r>
+              <a:rPr sz="1200" b="1" lang="zh-TW" dirty="0">
+                <a:solidFill>
+                  <a:srgbClr val="000000"/>
+                </a:solidFill>
+                <a:latin typeface="Arial Unicode MS"/>
+                <a:ea typeface="Arial Unicode MS"/>
+                <a:cs typeface="Arial Unicode MS"/>
+              </a:rPr>
+              <a:t>相機的規格表上，找不到視野。</a:t>
+            </a:r>
+            <a:r>
+              <a:rPr sz="1200" lang="zh-TW" dirty="0">
+                <a:solidFill>
+                  <a:srgbClr val="000000"/>
+                </a:solidFill>
+                <a:latin typeface="Arial Unicode MS"/>
+                <a:ea typeface="Arial Unicode MS"/>
+                <a:cs typeface="Arial Unicode MS"/>
+              </a:rPr>
+              <a:t>
+</a:t>
+            </a:r>
+          </a:p>
+          <a:p>
+            <a:pPr algn="l">
+              <a:spcBef>
+                <a:spcPts val="0"/>
+              </a:spcBef>
+              <a:spcAft>
+                <a:spcPts val="200"/>
+              </a:spcAft>
+            </a:pPr>
+            <a:r>
+              <a:rPr sz="1200" lang="zh-TW" dirty="0">
+                <a:solidFill>
+                  <a:srgbClr val="000000"/>
+                </a:solidFill>
+                <a:latin typeface="Arial Unicode MS"/>
+                <a:ea typeface="Arial Unicode MS"/>
+                <a:cs typeface="Arial Unicode MS"/>
+              </a:rPr>
+              <a:t>各位現在就打開判讀台，切到 AR0233AT 那一頁，從上到下找——找「視野」、找 FOV、找「幾度」。先不要翻下一頁，自己找三十秒。
+</a:t>
+            </a:r>
+          </a:p>
+          <a:p>
+            <a:pPr algn="l">
+              <a:spcBef>
+                <a:spcPts val="0"/>
+              </a:spcBef>
+              <a:spcAft>
+                <a:spcPts val="200"/>
+              </a:spcAft>
+            </a:pPr>
+            <a:r>
+              <a:rPr sz="1200" lang="zh-TW" dirty="0">
+                <a:solidFill>
+                  <a:srgbClr val="000000"/>
+                </a:solidFill>
+                <a:latin typeface="Arial Unicode MS"/>
+                <a:ea typeface="Arial Unicode MS"/>
+                <a:cs typeface="Arial Unicode MS"/>
+              </a:rPr>
+              <a:t>提醒一句：找不到不是你不會找，也不是廠商漏寫。</a:t>
+            </a:r>
+            <a:r>
+              <a:rPr sz="1200" b="1" lang="zh-TW" dirty="0">
+                <a:solidFill>
+                  <a:srgbClr val="000000"/>
+                </a:solidFill>
+                <a:latin typeface="Arial Unicode MS"/>
+                <a:ea typeface="Arial Unicode MS"/>
+                <a:cs typeface="Arial Unicode MS"/>
+              </a:rPr>
+              <a:t>那一行本來就不該在那裡。</a:t>
             </a:r>
           </a:p>
         </p:txBody>

--- a/第五週(10-08)/第五週_第1節_簡報.pptx
+++ b/第五週(10-08)/第五週_第1節_簡報.pptx
@@ -5,7 +5,7 @@
     <p:sldMasterId id="2147483648" r:id="rId1"/>
   </p:sldMasterIdLst>
   <p:notesMasterIdLst>
-    <p:notesMasterId r:id="rId17"/>
+    <p:notesMasterId r:id="rId18"/>
   </p:notesMasterIdLst>
   <p:sldIdLst>
     <p:sldId id="256" r:id="rId2"/>
@@ -23,6 +23,7 @@
     <p:sldId id="268" r:id="rId14"/>
     <p:sldId id="269" r:id="rId15"/>
     <p:sldId id="270" r:id="rId16"/>
+    <p:sldId id="271" r:id="rId17"/>
   </p:sldIdLst>
   <p:sldSz cx="9144000" cy="5143500"/>
   <p:notesSz cx="7560000" cy="10692000"/>
@@ -4577,6 +4578,380 @@
                 <a:cs typeface="Arial Unicode MS"/>
               </a:rPr>
               <a:t>15</a:t>
+            </a:r>
+          </a:p>
+        </p:txBody>
+      </p:sp>
+    </p:spTree>
+  </p:cSld>
+  <p:clrMapOvr>
+    <a:masterClrMapping/>
+  </p:clrMapOvr>
+</p:notes>
+</file>
+
+<file path=ppt/notesSlides/notesSlide16.xml><?xml version="1.0" encoding="utf-8"?>
+<p:notes xmlns:a="http://schemas.openxmlformats.org/drawingml/2006/main" xmlns:p="http://schemas.openxmlformats.org/presentationml/2006/main">
+  <p:cSld>
+    <p:spTree>
+      <p:nvGrpSpPr>
+        <p:cNvPr id="1" name=""/>
+        <p:cNvGrpSpPr/>
+        <p:nvPr/>
+      </p:nvGrpSpPr>
+      <p:grpSpPr>
+        <a:xfrm/>
+      </p:grpSpPr>
+      <p:sp>
+        <p:nvSpPr>
+          <p:cNvPr id="2" name="Slide Image Placeholder 1"/>
+          <p:cNvSpPr>
+            <a:spLocks noGrp="1"/>
+          </p:cNvSpPr>
+          <p:nvPr>
+            <p:ph type="sldImg" idx="2"/>
+          </p:nvPr>
+        </p:nvSpPr>
+        <p:spPr>
+          <a:xfrm>
+            <a:off x="540000" y="540000"/>
+            <a:ext cx="6480000" cy="3645000"/>
+          </a:xfrm>
+        </p:spPr>
+      </p:sp>
+      <p:sp>
+        <p:nvSpPr>
+          <p:cNvPr id="3" name="Notes Placeholder 2"/>
+          <p:cNvSpPr>
+            <a:spLocks noGrp="1"/>
+          </p:cNvSpPr>
+          <p:nvPr>
+            <p:ph type="body" idx="3"/>
+          </p:nvPr>
+        </p:nvSpPr>
+        <p:spPr>
+          <a:xfrm>
+            <a:off x="540000" y="4440000"/>
+            <a:ext cx="6480000" cy="5500000"/>
+          </a:xfrm>
+        </p:spPr>
+        <p:txBody>
+          <a:bodyPr vert="horz" wrap="square" anchor="t" lIns="91440" rIns="91440" tIns="45720" bIns="45720"/>
+          <a:lstStyle/>
+          <a:p>
+            <a:pPr algn="l">
+              <a:spcBef>
+                <a:spcPts val="0"/>
+              </a:spcBef>
+              <a:spcAft>
+                <a:spcPts val="200"/>
+              </a:spcAft>
+            </a:pPr>
+            <a:r>
+              <a:rPr sz="1200" b="1" lang="zh-TW" dirty="0">
+                <a:solidFill>
+                  <a:srgbClr val="000000"/>
+                </a:solidFill>
+                <a:latin typeface="Arial Unicode MS"/>
+                <a:ea typeface="Arial Unicode MS"/>
+                <a:cs typeface="Arial Unicode MS"/>
+              </a:rPr>
+              <a:t>▍這一張要做什麼</a:t>
+            </a:r>
+            <a:r>
+              <a:rPr sz="1200" lang="zh-TW" dirty="0">
+                <a:solidFill>
+                  <a:srgbClr val="000000"/>
+                </a:solidFill>
+                <a:latin typeface="Arial Unicode MS"/>
+                <a:ea typeface="Arial Unicode MS"/>
+                <a:cs typeface="Arial Unicode MS"/>
+              </a:rPr>
+              <a:t>
+</a:t>
+            </a:r>
+          </a:p>
+          <a:p>
+            <a:pPr algn="l">
+              <a:spcBef>
+                <a:spcPts val="0"/>
+              </a:spcBef>
+              <a:spcAft>
+                <a:spcPts val="200"/>
+              </a:spcAft>
+            </a:pPr>
+            <a:r>
+              <a:rPr sz="1200" lang="zh-TW" dirty="0">
+                <a:solidFill>
+                  <a:srgbClr val="000000"/>
+                </a:solidFill>
+                <a:latin typeface="Arial Unicode MS"/>
+                <a:ea typeface="Arial Unicode MS"/>
+                <a:cs typeface="Arial Unicode MS"/>
+              </a:rPr>
+              <a:t>附錄：相機那份規格書的完整原頁，備查用。
+</a:t>
+            </a:r>
+          </a:p>
+          <a:p>
+            <a:pPr algn="l">
+              <a:spcBef>
+                <a:spcPts val="0"/>
+              </a:spcBef>
+              <a:spcAft>
+                <a:spcPts val="200"/>
+              </a:spcAft>
+            </a:pPr>
+            <a:r>
+              <a:rPr sz="1200" b="1" lang="zh-TW" dirty="0">
+                <a:solidFill>
+                  <a:srgbClr val="000000"/>
+                </a:solidFill>
+                <a:latin typeface="Arial Unicode MS"/>
+                <a:ea typeface="Arial Unicode MS"/>
+                <a:cs typeface="Arial Unicode MS"/>
+              </a:rPr>
+              <a:t>▍畫面上圈這裡</a:t>
+            </a:r>
+            <a:r>
+              <a:rPr sz="1200" lang="zh-TW" dirty="0">
+                <a:solidFill>
+                  <a:srgbClr val="000000"/>
+                </a:solidFill>
+                <a:latin typeface="Arial Unicode MS"/>
+                <a:ea typeface="Arial Unicode MS"/>
+                <a:cs typeface="Arial Unicode MS"/>
+              </a:rPr>
+              <a:t>
+</a:t>
+            </a:r>
+          </a:p>
+          <a:p>
+            <a:pPr algn="l">
+              <a:spcBef>
+                <a:spcPts val="0"/>
+              </a:spcBef>
+              <a:spcAft>
+                <a:spcPts val="200"/>
+              </a:spcAft>
+            </a:pPr>
+            <a:r>
+              <a:rPr sz="1200" lang="zh-TW" dirty="0">
+                <a:solidFill>
+                  <a:srgbClr val="000000"/>
+                </a:solidFill>
+                <a:latin typeface="Arial Unicode MS"/>
+                <a:ea typeface="Arial Unicode MS"/>
+                <a:cs typeface="Arial Unicode MS"/>
+              </a:rPr>
+              <a:t>上課不唸。學生問「你圈的那一行在哪」的時候翻到這裡，或放映時放大看。
+</a:t>
+            </a:r>
+          </a:p>
+          <a:p>
+            <a:pPr algn="l">
+              <a:spcBef>
+                <a:spcPts val="0"/>
+              </a:spcBef>
+              <a:spcAft>
+                <a:spcPts val="200"/>
+              </a:spcAft>
+            </a:pPr>
+            <a:r>
+              <a:rPr sz="1200" b="1" lang="zh-TW" dirty="0">
+                <a:solidFill>
+                  <a:srgbClr val="000000"/>
+                </a:solidFill>
+                <a:latin typeface="Arial Unicode MS"/>
+                <a:ea typeface="Arial Unicode MS"/>
+                <a:cs typeface="Arial Unicode MS"/>
+              </a:rPr>
+              <a:t>▍以下照著唸</a:t>
+            </a:r>
+            <a:r>
+              <a:rPr sz="1200" lang="zh-TW" dirty="0">
+                <a:solidFill>
+                  <a:srgbClr val="000000"/>
+                </a:solidFill>
+                <a:latin typeface="Arial Unicode MS"/>
+                <a:ea typeface="Arial Unicode MS"/>
+                <a:cs typeface="Arial Unicode MS"/>
+              </a:rPr>
+              <a:t>
+</a:t>
+            </a:r>
+          </a:p>
+          <a:p>
+            <a:pPr algn="l">
+              <a:spcBef>
+                <a:spcPts val="0"/>
+              </a:spcBef>
+              <a:spcAft>
+                <a:spcPts val="200"/>
+              </a:spcAft>
+            </a:pPr>
+            <a:r>
+              <a:rPr sz="1200" lang="zh-TW" dirty="0">
+                <a:solidFill>
+                  <a:srgbClr val="000000"/>
+                </a:solidFill>
+                <a:latin typeface="Arial Unicode MS"/>
+                <a:ea typeface="Arial Unicode MS"/>
+                <a:cs typeface="Arial Unicode MS"/>
+              </a:rPr>
+              <a:t>這一張不唸，是附錄。
+</a:t>
+            </a:r>
+          </a:p>
+          <a:p>
+            <a:pPr algn="l">
+              <a:spcBef>
+                <a:spcPts val="0"/>
+              </a:spcBef>
+              <a:spcAft>
+                <a:spcPts val="200"/>
+              </a:spcAft>
+            </a:pPr>
+            <a:r>
+              <a:rPr sz="1200" lang="zh-TW" dirty="0">
+                <a:solidFill>
+                  <a:srgbClr val="000000"/>
+                </a:solidFill>
+                <a:latin typeface="Arial Unicode MS"/>
+                <a:ea typeface="Arial Unicode MS"/>
+                <a:cs typeface="Arial Unicode MS"/>
+              </a:rPr>
+              <a:t>第一節我們圈過的那幾行——有效像素、像素尺寸、動態範圍、LED 閃爍抑制——全部都在左邊那一頁上。右邊第二頁是封裝尺寸，上面寫 TBD，那是因為這份是 </a:t>
+            </a:r>
+            <a:r>
+              <a:rPr sz="1200" b="1" lang="zh-TW" dirty="0">
+                <a:solidFill>
+                  <a:srgbClr val="000000"/>
+                </a:solidFill>
+                <a:latin typeface="Arial Unicode MS"/>
+                <a:ea typeface="Arial Unicode MS"/>
+                <a:cs typeface="Arial Unicode MS"/>
+              </a:rPr>
+              <a:t>Product Preview</a:t>
+            </a:r>
+            <a:r>
+              <a:rPr sz="1200" lang="zh-TW" dirty="0">
+                <a:solidFill>
+                  <a:srgbClr val="000000"/>
+                </a:solidFill>
+                <a:latin typeface="Arial Unicode MS"/>
+                <a:ea typeface="Arial Unicode MS"/>
+                <a:cs typeface="Arial Unicode MS"/>
+              </a:rPr>
+              <a:t>，還不是正式規格書。
+</a:t>
+            </a:r>
+          </a:p>
+          <a:p>
+            <a:pPr algn="l">
+              <a:spcBef>
+                <a:spcPts val="0"/>
+              </a:spcBef>
+              <a:spcAft>
+                <a:spcPts val="200"/>
+              </a:spcAft>
+            </a:pPr>
+            <a:r>
+              <a:rPr sz="1200" lang="zh-TW" dirty="0">
+                <a:solidFill>
+                  <a:srgbClr val="000000"/>
+                </a:solidFill>
+                <a:latin typeface="Arial Unicode MS"/>
+                <a:ea typeface="Arial Unicode MS"/>
+                <a:cs typeface="Arial Unicode MS"/>
+              </a:rPr>
+              <a:t>各位記得第二張我說過的：</a:t>
+            </a:r>
+            <a:r>
+              <a:rPr sz="1200" b="1" lang="zh-TW" dirty="0">
+                <a:solidFill>
+                  <a:srgbClr val="000000"/>
+                </a:solidFill>
+                <a:latin typeface="Arial Unicode MS"/>
+                <a:ea typeface="Arial Unicode MS"/>
+                <a:cs typeface="Arial Unicode MS"/>
+              </a:rPr>
+              <a:t>快門方式這一行，這兩頁上都沒有。</a:t>
+            </a:r>
+            <a:r>
+              <a:rPr sz="1200" lang="zh-TW" dirty="0">
+                <a:solidFill>
+                  <a:srgbClr val="000000"/>
+                </a:solidFill>
+                <a:latin typeface="Arial Unicode MS"/>
+                <a:ea typeface="Arial Unicode MS"/>
+                <a:cs typeface="Arial Unicode MS"/>
+              </a:rPr>
+              <a:t>各位現在可以自己確認一次。要看快門方式，得去 onsemi 的產品頁。
+</a:t>
+            </a:r>
+          </a:p>
+          <a:p>
+            <a:pPr algn="l">
+              <a:spcBef>
+                <a:spcPts val="0"/>
+              </a:spcBef>
+              <a:spcAft>
+                <a:spcPts val="200"/>
+              </a:spcAft>
+            </a:pPr>
+            <a:r>
+              <a:rPr sz="1200" lang="zh-TW" dirty="0">
+                <a:solidFill>
+                  <a:srgbClr val="000000"/>
+                </a:solidFill>
+                <a:latin typeface="Arial Unicode MS"/>
+                <a:ea typeface="Arial Unicode MS"/>
+                <a:cs typeface="Arial Unicode MS"/>
+              </a:rPr>
+              <a:t>放映的時候可以放大看；發下去的 PDF 也印得出來。</a:t>
+            </a:r>
+          </a:p>
+        </p:txBody>
+      </p:sp>
+      <p:sp>
+        <p:nvSpPr>
+          <p:cNvPr id="4" name="Slide Number Placeholder 3"/>
+          <p:cNvSpPr>
+            <a:spLocks noGrp="1"/>
+          </p:cNvSpPr>
+          <p:nvPr>
+            <p:ph type="sldNum" idx="5"/>
+          </p:nvPr>
+        </p:nvSpPr>
+        <p:spPr>
+          <a:xfrm>
+            <a:off x="6500000" y="10200000"/>
+            <a:ext cx="500000" cy="300000"/>
+          </a:xfrm>
+        </p:spPr>
+        <p:txBody>
+          <a:bodyPr vert="horz" wrap="square" anchor="t" lIns="91440" rIns="91440" tIns="45720" bIns="45720"/>
+          <a:lstStyle/>
+          <a:p>
+            <a:pPr algn="l">
+              <a:spcBef>
+                <a:spcPts val="0"/>
+              </a:spcBef>
+              <a:spcAft>
+                <a:spcPts val="167"/>
+              </a:spcAft>
+            </a:pPr>
+            <a:r>
+              <a:rPr sz="1000" lang="zh-TW" dirty="0">
+                <a:solidFill>
+                  <a:srgbClr val="000000"/>
+                </a:solidFill>
+                <a:latin typeface="Arial Unicode MS"/>
+                <a:ea typeface="Arial Unicode MS"/>
+                <a:cs typeface="Arial Unicode MS"/>
+              </a:rPr>
+              <a:t>16</a:t>
             </a:r>
           </a:p>
         </p:txBody>
@@ -10032,7 +10407,7 @@
                 <a:ea typeface="Arial" pitchFamily="34" charset="-122"/>
                 <a:cs typeface="Arial" pitchFamily="34" charset="-120"/>
               </a:rPr>
-              <a:t>10 / 15</a:t>
+              <a:t>10 / 16</a:t>
             </a:r>
             <a:endParaRPr lang="en-US" sz="900" dirty="0"/>
           </a:p>
@@ -10482,7 +10857,7 @@
                 <a:ea typeface="Arial" pitchFamily="34" charset="-122"/>
                 <a:cs typeface="Arial" pitchFamily="34" charset="-120"/>
               </a:rPr>
-              <a:t>11 / 15</a:t>
+              <a:t>11 / 16</a:t>
             </a:r>
             <a:endParaRPr lang="en-US" sz="900" dirty="0"/>
           </a:p>
@@ -10932,7 +11307,7 @@
                 <a:ea typeface="Arial" pitchFamily="34" charset="-122"/>
                 <a:cs typeface="Arial" pitchFamily="34" charset="-120"/>
               </a:rPr>
-              <a:t>12 / 15</a:t>
+              <a:t>12 / 16</a:t>
             </a:r>
             <a:endParaRPr lang="en-US" sz="900" dirty="0"/>
           </a:p>
@@ -11777,7 +12152,7 @@
                 <a:ea typeface="Arial" pitchFamily="34" charset="-122"/>
                 <a:cs typeface="Arial" pitchFamily="34" charset="-120"/>
               </a:rPr>
-              <a:t>13 / 15</a:t>
+              <a:t>13 / 16</a:t>
             </a:r>
             <a:endParaRPr lang="en-US" sz="900" dirty="0"/>
           </a:p>
@@ -12526,7 +12901,7 @@
                 <a:ea typeface="Arial" pitchFamily="34" charset="-122"/>
                 <a:cs typeface="Arial" pitchFamily="34" charset="-120"/>
               </a:rPr>
-              <a:t>14 / 15</a:t>
+              <a:t>14 / 16</a:t>
             </a:r>
             <a:endParaRPr lang="en-US" sz="900" dirty="0"/>
           </a:p>
@@ -13030,7 +13405,7 @@
                 <a:ea typeface="Arial" pitchFamily="34" charset="-122"/>
                 <a:cs typeface="Arial" pitchFamily="34" charset="-120"/>
               </a:rPr>
-              <a:t>15 / 15</a:t>
+              <a:t>15 / 16</a:t>
             </a:r>
             <a:endParaRPr lang="en-US" sz="900" dirty="0"/>
           </a:p>
@@ -13064,6 +13439,371 @@
               <a:rPr lang="en-US" sz="900" dirty="0">
                 <a:solidFill>
                   <a:srgbClr val="9FB3C8"/>
+                </a:solidFill>
+                <a:latin typeface="Arial" pitchFamily="34" charset="0"/>
+                <a:ea typeface="Arial" pitchFamily="34" charset="-122"/>
+                <a:cs typeface="Arial" pitchFamily="34" charset="-120"/>
+              </a:rPr>
+              <a:t>Tiết 1 · 第 1 節</a:t>
+            </a:r>
+            <a:endParaRPr lang="en-US" sz="900" dirty="0"/>
+          </a:p>
+        </p:txBody>
+      </p:sp>
+    </p:spTree>
+  </p:cSld>
+  <p:clrMapOvr>
+    <a:masterClrMapping/>
+  </p:clrMapOvr>
+</p:sld>
+</file>
+
+<file path=ppt/slides/slide16.xml><?xml version="1.0" encoding="utf-8"?>
+<p:sld xmlns:a="http://schemas.openxmlformats.org/drawingml/2006/main" xmlns:r="http://schemas.openxmlformats.org/officeDocument/2006/relationships" xmlns:p="http://schemas.openxmlformats.org/presentationml/2006/main">
+  <p:cSld name="Slide 16">
+    <p:spTree>
+      <p:nvGrpSpPr>
+        <p:cNvPr id="1" name=""/>
+        <p:cNvGrpSpPr/>
+        <p:nvPr/>
+      </p:nvGrpSpPr>
+      <p:grpSpPr>
+        <a:xfrm>
+          <a:off x="0" y="0"/>
+          <a:ext cx="1" cy="1"/>
+          <a:chOff x="0" y="0"/>
+          <a:chExt cx="0" cy="0"/>
+        </a:xfrm>
+      </p:grpSpPr>
+      <p:sp>
+        <p:nvSpPr>
+          <p:cNvPr id="2" name="Text 0"/>
+          <p:cNvSpPr txBox="1"/>
+          <p:nvPr/>
+        </p:nvSpPr>
+        <p:spPr>
+          <a:xfrm>
+            <a:off x="502920" y="420624"/>
+            <a:ext cx="8138160" cy="274320"/>
+          </a:xfrm>
+          <a:prstGeom prst="rect">
+            <a:avLst/>
+          </a:prstGeom>
+          <a:noFill/>
+          <a:ln/>
+        </p:spPr>
+        <p:txBody>
+          <a:bodyPr wrap="square" lIns="0" tIns="0" rIns="0" bIns="0" rtlCol="0" anchor="ctr"/>
+          <a:lstStyle/>
+          <a:p>
+            <a:pPr indent="0" marL="0">
+              <a:buNone/>
+            </a:pPr>
+            <a:r>
+              <a:rPr lang="en-US" sz="1250" b="1" dirty="0">
+                <a:solidFill>
+                  <a:srgbClr val="007F72"/>
+                </a:solidFill>
+                <a:latin typeface="Arial" pitchFamily="34" charset="0"/>
+                <a:ea typeface="Arial" pitchFamily="34" charset="-122"/>
+                <a:cs typeface="Arial" pitchFamily="34" charset="-120"/>
+              </a:rPr>
+              <a:t>Phụ lục · 附錄（不計時）</a:t>
+            </a:r>
+            <a:endParaRPr lang="en-US" sz="1250" dirty="0"/>
+          </a:p>
+        </p:txBody>
+      </p:sp>
+      <p:sp>
+        <p:nvSpPr>
+          <p:cNvPr id="3" name="Text 1"/>
+          <p:cNvSpPr txBox="1"/>
+          <p:nvPr/>
+        </p:nvSpPr>
+        <p:spPr>
+          <a:xfrm>
+            <a:off x="502920" y="731520"/>
+            <a:ext cx="8138160" cy="585216"/>
+          </a:xfrm>
+          <a:prstGeom prst="rect">
+            <a:avLst/>
+          </a:prstGeom>
+          <a:noFill/>
+          <a:ln/>
+        </p:spPr>
+        <p:txBody>
+          <a:bodyPr wrap="square" lIns="0" tIns="0" rIns="0" bIns="0" rtlCol="0" anchor="t"/>
+          <a:lstStyle/>
+          <a:p>
+            <a:pPr indent="0" marL="0">
+              <a:lnSpc>
+                <a:spcPct val="120000"/>
+              </a:lnSpc>
+              <a:buNone/>
+            </a:pPr>
+            <a:r>
+              <a:rPr lang="en-US" sz="1700" b="1" dirty="0">
+                <a:solidFill>
+                  <a:srgbClr val="0B1F3A"/>
+                </a:solidFill>
+                <a:latin typeface="Arial" pitchFamily="34" charset="0"/>
+                <a:ea typeface="Arial" pitchFamily="34" charset="-122"/>
+                <a:cs typeface="Arial" pitchFamily="34" charset="-120"/>
+              </a:rPr>
+              <a:t>onsemi AR0233AT — toàn bộ datasheet gốc (2 trang)</a:t>
+            </a:r>
+            <a:endParaRPr lang="en-US" sz="1700" dirty="0"/>
+          </a:p>
+          <a:p>
+            <a:pPr indent="0" marL="0">
+              <a:lnSpc>
+                <a:spcPct val="120000"/>
+              </a:lnSpc>
+              <a:buNone/>
+            </a:pPr>
+            <a:r>
+              <a:rPr lang="en-US" sz="1300" dirty="0">
+                <a:solidFill>
+                  <a:srgbClr val="007F72"/>
+                </a:solidFill>
+                <a:latin typeface="微軟正黑體" pitchFamily="34" charset="0"/>
+                <a:ea typeface="微軟正黑體" pitchFamily="34" charset="-122"/>
+                <a:cs typeface="微軟正黑體" pitchFamily="34" charset="-120"/>
+              </a:rPr>
+              <a:t>onsemi AR0233AT — 廠商規格書原頁（全兩頁）</a:t>
+            </a:r>
+            <a:endParaRPr lang="en-US" sz="1700" dirty="0"/>
+          </a:p>
+        </p:txBody>
+      </p:sp>
+      <p:sp>
+        <p:nvSpPr>
+          <p:cNvPr id="4" name="Shape 2"/>
+          <p:cNvSpPr/>
+          <p:nvPr/>
+        </p:nvSpPr>
+        <p:spPr>
+          <a:xfrm>
+            <a:off x="2186247" y="1371600"/>
+            <a:ext cx="2340033" cy="3017520"/>
+          </a:xfrm>
+          <a:prstGeom prst="rect">
+            <a:avLst/>
+          </a:prstGeom>
+          <a:solidFill>
+            <a:srgbClr val="FFFFFF"/>
+          </a:solidFill>
+          <a:ln w="12700">
+            <a:solidFill>
+              <a:srgbClr val="DBE3EA"/>
+            </a:solidFill>
+            <a:prstDash val="solid"/>
+          </a:ln>
+        </p:spPr>
+      </p:sp>
+      <p:pic>
+        <p:nvPicPr>
+          <p:cNvPr id="5" name="Image 0" descr="/Users/tsengchenghsun/Class/carClass/Claude outputs/第五週(10-8)/src/img/w5_ds_ar0233at_p1.png">    </p:cNvPr>
+          <p:cNvPicPr>
+            <a:picLocks noChangeAspect="1"/>
+          </p:cNvPicPr>
+          <p:nvPr/>
+        </p:nvPicPr>
+        <p:blipFill>
+          <a:blip r:embed="rId1"/>
+          <a:stretch>
+            <a:fillRect/>
+          </a:stretch>
+        </p:blipFill>
+        <p:spPr>
+          <a:xfrm>
+            <a:off x="2204535" y="1389888"/>
+            <a:ext cx="2303457" cy="2980944"/>
+          </a:xfrm>
+          <a:prstGeom prst="rect">
+            <a:avLst/>
+          </a:prstGeom>
+        </p:spPr>
+      </p:pic>
+      <p:sp>
+        <p:nvSpPr>
+          <p:cNvPr id="6" name="Shape 3"/>
+          <p:cNvSpPr/>
+          <p:nvPr/>
+        </p:nvSpPr>
+        <p:spPr>
+          <a:xfrm>
+            <a:off x="4617720" y="1371600"/>
+            <a:ext cx="2340033" cy="3017520"/>
+          </a:xfrm>
+          <a:prstGeom prst="rect">
+            <a:avLst/>
+          </a:prstGeom>
+          <a:solidFill>
+            <a:srgbClr val="FFFFFF"/>
+          </a:solidFill>
+          <a:ln w="12700">
+            <a:solidFill>
+              <a:srgbClr val="DBE3EA"/>
+            </a:solidFill>
+            <a:prstDash val="solid"/>
+          </a:ln>
+        </p:spPr>
+      </p:sp>
+      <p:pic>
+        <p:nvPicPr>
+          <p:cNvPr id="7" name="Image 1" descr="/Users/tsengchenghsun/Class/carClass/Claude outputs/第五週(10-8)/src/img/w5_ds_ar0233at_p2.png">    </p:cNvPr>
+          <p:cNvPicPr>
+            <a:picLocks noChangeAspect="1"/>
+          </p:cNvPicPr>
+          <p:nvPr/>
+        </p:nvPicPr>
+        <p:blipFill>
+          <a:blip r:embed="rId2"/>
+          <a:stretch>
+            <a:fillRect/>
+          </a:stretch>
+        </p:blipFill>
+        <p:spPr>
+          <a:xfrm>
+            <a:off x="4636008" y="1389888"/>
+            <a:ext cx="2303457" cy="2980944"/>
+          </a:xfrm>
+          <a:prstGeom prst="rect">
+            <a:avLst/>
+          </a:prstGeom>
+        </p:spPr>
+      </p:pic>
+      <p:sp>
+        <p:nvSpPr>
+          <p:cNvPr id="8" name="Text 4"/>
+          <p:cNvSpPr txBox="1"/>
+          <p:nvPr/>
+        </p:nvSpPr>
+        <p:spPr>
+          <a:xfrm>
+            <a:off x="502920" y="4407408"/>
+            <a:ext cx="8138160" cy="201168"/>
+          </a:xfrm>
+          <a:prstGeom prst="rect">
+            <a:avLst/>
+          </a:prstGeom>
+          <a:noFill/>
+          <a:ln/>
+        </p:spPr>
+        <p:txBody>
+          <a:bodyPr wrap="square" lIns="0" tIns="0" rIns="0" bIns="0" rtlCol="0" anchor="ctr"/>
+          <a:lstStyle/>
+          <a:p>
+            <a:pPr algn="ctr" indent="0" marL="0">
+              <a:buNone/>
+            </a:pPr>
+            <a:r>
+              <a:rPr lang="en-US" sz="850" dirty="0">
+                <a:solidFill>
+                  <a:srgbClr val="5F7183"/>
+                </a:solidFill>
+                <a:latin typeface="Arial" pitchFamily="34" charset="0"/>
+                <a:ea typeface="Arial" pitchFamily="34" charset="-122"/>
+                <a:cs typeface="Arial" pitchFamily="34" charset="-120"/>
+              </a:rPr>
+              <a:t>onsemi, AR0233AT Product Preview, Rev. P2, 11/2017（Publication Order Number AR0233AT/D）· 原頁全文 · 讀取 2026/10/02 · 版權歸 onsemi，課堂引用</a:t>
+            </a:r>
+            <a:endParaRPr lang="en-US" sz="850" dirty="0"/>
+          </a:p>
+        </p:txBody>
+      </p:sp>
+      <p:pic>
+        <p:nvPicPr>
+          <p:cNvPr id="10" name="Image 2" descr="/Users/tsengchenghsun/Class/carClass/Claude outputs/第五週(10-8)/src/logo.png">    </p:cNvPr>
+          <p:cNvPicPr>
+            <a:picLocks noChangeAspect="1"/>
+          </p:cNvPicPr>
+          <p:nvPr/>
+        </p:nvPicPr>
+        <p:blipFill>
+          <a:blip r:embed="rId3"/>
+          <a:stretch>
+            <a:fillRect/>
+          </a:stretch>
+        </p:blipFill>
+        <p:spPr>
+          <a:xfrm>
+            <a:off x="7882128" y="109728"/>
+            <a:ext cx="1097280" cy="242439"/>
+          </a:xfrm>
+          <a:prstGeom prst="rect">
+            <a:avLst/>
+          </a:prstGeom>
+        </p:spPr>
+      </p:pic>
+      <p:sp>
+        <p:nvSpPr>
+          <p:cNvPr id="11" name="Text 5"/>
+          <p:cNvSpPr txBox="1"/>
+          <p:nvPr/>
+        </p:nvSpPr>
+        <p:spPr>
+          <a:xfrm>
+            <a:off x="109728" y="128016"/>
+            <a:ext cx="822960" cy="256032"/>
+          </a:xfrm>
+          <a:prstGeom prst="rect">
+            <a:avLst/>
+          </a:prstGeom>
+          <a:noFill/>
+          <a:ln/>
+        </p:spPr>
+        <p:txBody>
+          <a:bodyPr wrap="square" lIns="0" tIns="0" rIns="0" bIns="0" rtlCol="0" anchor="ctr"/>
+          <a:lstStyle/>
+          <a:p>
+            <a:pPr indent="0" marL="0">
+              <a:buNone/>
+            </a:pPr>
+            <a:r>
+              <a:rPr lang="en-US" sz="900" dirty="0">
+                <a:solidFill>
+                  <a:srgbClr val="5F7183"/>
+                </a:solidFill>
+                <a:latin typeface="Arial" pitchFamily="34" charset="0"/>
+                <a:ea typeface="Arial" pitchFamily="34" charset="-122"/>
+                <a:cs typeface="Arial" pitchFamily="34" charset="-120"/>
+              </a:rPr>
+              <a:t>16 / 16</a:t>
+            </a:r>
+            <a:endParaRPr lang="en-US" sz="900" dirty="0"/>
+          </a:p>
+        </p:txBody>
+      </p:sp>
+      <p:sp>
+        <p:nvSpPr>
+          <p:cNvPr id="12" name="Text 6"/>
+          <p:cNvSpPr txBox="1"/>
+          <p:nvPr/>
+        </p:nvSpPr>
+        <p:spPr>
+          <a:xfrm>
+            <a:off x="960120" y="128016"/>
+            <a:ext cx="2011680" cy="256032"/>
+          </a:xfrm>
+          <a:prstGeom prst="rect">
+            <a:avLst/>
+          </a:prstGeom>
+          <a:noFill/>
+          <a:ln/>
+        </p:spPr>
+        <p:txBody>
+          <a:bodyPr wrap="square" lIns="0" tIns="0" rIns="0" bIns="0" rtlCol="0" anchor="ctr"/>
+          <a:lstStyle/>
+          <a:p>
+            <a:pPr indent="0" marL="0">
+              <a:buNone/>
+            </a:pPr>
+            <a:r>
+              <a:rPr lang="en-US" sz="900" dirty="0">
+                <a:solidFill>
+                  <a:srgbClr val="5F7183"/>
                 </a:solidFill>
                 <a:latin typeface="Arial" pitchFamily="34" charset="0"/>
                 <a:ea typeface="Arial" pitchFamily="34" charset="-122"/>
@@ -13862,7 +14602,7 @@
                 <a:ea typeface="Arial" pitchFamily="34" charset="-122"/>
                 <a:cs typeface="Arial" pitchFamily="34" charset="-120"/>
               </a:rPr>
-              <a:t>2 / 15</a:t>
+              <a:t>2 / 16</a:t>
             </a:r>
             <a:endParaRPr lang="en-US" sz="900" dirty="0"/>
           </a:p>
@@ -14182,7 +14922,7 @@
                 <a:ea typeface="Arial" pitchFamily="34" charset="-122"/>
                 <a:cs typeface="Arial" pitchFamily="34" charset="-120"/>
               </a:rPr>
-              <a:t>3 / 15</a:t>
+              <a:t>3 / 16</a:t>
             </a:r>
             <a:endParaRPr lang="en-US" sz="900" dirty="0"/>
           </a:p>
@@ -15090,7 +15830,7 @@
                 <a:ea typeface="Arial" pitchFamily="34" charset="-122"/>
                 <a:cs typeface="Arial" pitchFamily="34" charset="-120"/>
               </a:rPr>
-              <a:t>4 / 15</a:t>
+              <a:t>4 / 16</a:t>
             </a:r>
             <a:endParaRPr lang="en-US" sz="900" dirty="0"/>
           </a:p>
@@ -15998,7 +16738,7 @@
                 <a:ea typeface="Arial" pitchFamily="34" charset="-122"/>
                 <a:cs typeface="Arial" pitchFamily="34" charset="-120"/>
               </a:rPr>
-              <a:t>5 / 15</a:t>
+              <a:t>5 / 16</a:t>
             </a:r>
             <a:endParaRPr lang="en-US" sz="900" dirty="0"/>
           </a:p>
@@ -17727,7 +18467,7 @@
                 <a:ea typeface="Arial" pitchFamily="34" charset="-122"/>
                 <a:cs typeface="Arial" pitchFamily="34" charset="-120"/>
               </a:rPr>
-              <a:t>6 / 15</a:t>
+              <a:t>6 / 16</a:t>
             </a:r>
             <a:endParaRPr lang="en-US" sz="900" dirty="0"/>
           </a:p>
@@ -18177,7 +18917,7 @@
                 <a:ea typeface="Arial" pitchFamily="34" charset="-122"/>
                 <a:cs typeface="Arial" pitchFamily="34" charset="-120"/>
               </a:rPr>
-              <a:t>7 / 15</a:t>
+              <a:t>7 / 16</a:t>
             </a:r>
             <a:endParaRPr lang="en-US" sz="900" dirty="0"/>
           </a:p>
@@ -19042,7 +19782,7 @@
                 <a:ea typeface="Arial" pitchFamily="34" charset="-122"/>
                 <a:cs typeface="Arial" pitchFamily="34" charset="-120"/>
               </a:rPr>
-              <a:t>8 / 15</a:t>
+              <a:t>8 / 16</a:t>
             </a:r>
             <a:endParaRPr lang="en-US" sz="900" dirty="0"/>
           </a:p>
@@ -19362,7 +20102,7 @@
                 <a:ea typeface="Arial" pitchFamily="34" charset="-122"/>
                 <a:cs typeface="Arial" pitchFamily="34" charset="-120"/>
               </a:rPr>
-              <a:t>9 / 15</a:t>
+              <a:t>9 / 16</a:t>
             </a:r>
             <a:endParaRPr lang="en-US" sz="900" dirty="0"/>
           </a:p>

--- a/第五週(10-08)/第五週_第1節_簡報.pptx
+++ b/第五週(10-08)/第五週_第1節_簡報.pptx
@@ -3182,7 +3182,7 @@
                 <a:ea typeface="Arial Unicode MS"/>
                 <a:cs typeface="Arial Unicode MS"/>
               </a:rPr>
-              <a:t>圈圖裡兩個括號：80% Lambertian reflectivity 與 10% Lambertian reflectivity，再圈 170 m 與 90 m。
+              <a:t>先圈兩個括號 80%／10% Lambertian reflectivity 與 170 m／90 m；再把後面那串條件一個一個圈：1024 @ 10 Hz mode、&gt;90% detection probability、100 klx sunlight。四個條件要數得出來。
 </a:t>
             </a:r>
           </a:p>
@@ -3436,6 +3436,237 @@
                 <a:cs typeface="Arial Unicode MS"/>
               </a:rPr>
               <a:t>。它只打一個波長——OS1 是 865 奈米的紅外線，AT128P 是 905 奈米。它量的是「我打出去那個波長，回來多少」，跟人眼看到的深淺只是大概相關。樹葉在我們眼裡是深綠色，在紅外線下卻很亮；有些黑色車漆看起來一樣黑，對紅外線卻反得特別好。業界現在真的在做「對光達友善的黑漆」——可見光反射率不到一成，看起來還是黑的，紅外線卻反回六成以上。
+</a:t>
+            </a:r>
+          </a:p>
+          <a:p>
+            <a:pPr algn="l">
+              <a:spcBef>
+                <a:spcPts val="0"/>
+              </a:spcBef>
+              <a:spcAft>
+                <a:spcPts val="133"/>
+              </a:spcAft>
+            </a:pPr>
+            <a:r>
+              <a:rPr sz="800" lang="zh-TW" dirty="0">
+                <a:solidFill>
+                  <a:srgbClr val="000000"/>
+                </a:solidFill>
+                <a:latin typeface="Arial Unicode MS"/>
+                <a:ea typeface="Arial Unicode MS"/>
+                <a:cs typeface="Arial Unicode MS"/>
+              </a:rPr>
+              <a:t>還有一件事，各位看那兩行的</a:t>
+            </a:r>
+            <a:r>
+              <a:rPr sz="800" b="1" lang="zh-TW" dirty="0">
+                <a:solidFill>
+                  <a:srgbClr val="000000"/>
+                </a:solidFill>
+                <a:latin typeface="Arial Unicode MS"/>
+                <a:ea typeface="Arial Unicode MS"/>
+                <a:cs typeface="Arial Unicode MS"/>
+              </a:rPr>
+              <a:t>後面</a:t>
+            </a:r>
+            <a:r>
+              <a:rPr sz="800" lang="zh-TW" dirty="0">
+                <a:solidFill>
+                  <a:srgbClr val="000000"/>
+                </a:solidFill>
+                <a:latin typeface="Arial Unicode MS"/>
+                <a:ea typeface="Arial Unicode MS"/>
+                <a:cs typeface="Arial Unicode MS"/>
+              </a:rPr>
+              <a:t>——它不是只寫一個公尺數，後面還跟著一串條件。</a:t>
+            </a:r>
+            <a:r>
+              <a:rPr sz="800" b="1" lang="zh-TW" dirty="0">
+                <a:solidFill>
+                  <a:srgbClr val="000000"/>
+                </a:solidFill>
+                <a:latin typeface="Arial Unicode MS"/>
+                <a:ea typeface="Arial Unicode MS"/>
+                <a:cs typeface="Arial Unicode MS"/>
+              </a:rPr>
+              <a:t>Lambertian</a:t>
+            </a:r>
+            <a:r>
+              <a:rPr sz="800" lang="zh-TW" dirty="0">
+                <a:solidFill>
+                  <a:srgbClr val="000000"/>
+                </a:solidFill>
+                <a:latin typeface="Arial Unicode MS"/>
+                <a:ea typeface="Arial Unicode MS"/>
+                <a:cs typeface="Arial Unicode MS"/>
+              </a:rPr>
+              <a:t>，意思是「均勻散回來的表面」，鏡子和反光背心都不算，那兩種第二節會講。</a:t>
+            </a:r>
+            <a:r>
+              <a:rPr sz="800" b="1" lang="zh-TW" dirty="0">
+                <a:solidFill>
+                  <a:srgbClr val="000000"/>
+                </a:solidFill>
+                <a:latin typeface="Arial Unicode MS"/>
+                <a:ea typeface="Arial Unicode MS"/>
+                <a:cs typeface="Arial Unicode MS"/>
+              </a:rPr>
+              <a:t>1024 @ 10 Hz mode</a:t>
+            </a:r>
+            <a:r>
+              <a:rPr sz="800" lang="zh-TW" dirty="0">
+                <a:solidFill>
+                  <a:srgbClr val="000000"/>
+                </a:solidFill>
+                <a:latin typeface="Arial Unicode MS"/>
+                <a:ea typeface="Arial Unicode MS"/>
+                <a:cs typeface="Arial Unicode MS"/>
+              </a:rPr>
+              <a:t>，是用哪一個模式量的；換成 2048 點或 20 赫茲，這個數字就不是這個數字了——這就是第十二張講的「可設定」。</a:t>
+            </a:r>
+            <a:r>
+              <a:rPr sz="800" b="1" lang="zh-TW" dirty="0">
+                <a:solidFill>
+                  <a:srgbClr val="000000"/>
+                </a:solidFill>
+                <a:latin typeface="Arial Unicode MS"/>
+                <a:ea typeface="Arial Unicode MS"/>
+                <a:cs typeface="Arial Unicode MS"/>
+              </a:rPr>
+              <a:t>&gt;90% detection probability</a:t>
+            </a:r>
+            <a:r>
+              <a:rPr sz="800" lang="zh-TW" dirty="0">
+                <a:solidFill>
+                  <a:srgbClr val="000000"/>
+                </a:solidFill>
+                <a:latin typeface="Arial Unicode MS"/>
+                <a:ea typeface="Arial Unicode MS"/>
+                <a:cs typeface="Arial Unicode MS"/>
+              </a:rPr>
+              <a:t>，這個最多人漏掉：</a:t>
+            </a:r>
+            <a:r>
+              <a:rPr sz="800" b="1" lang="zh-TW" dirty="0">
+                <a:solidFill>
+                  <a:srgbClr val="000000"/>
+                </a:solidFill>
+                <a:latin typeface="Arial Unicode MS"/>
+                <a:ea typeface="Arial Unicode MS"/>
+                <a:cs typeface="Arial Unicode MS"/>
+              </a:rPr>
+              <a:t>它不是保證看得到，是十次裡面超過九次看得到。</a:t>
+            </a:r>
+            <a:r>
+              <a:rPr sz="800" b="1" lang="zh-TW" dirty="0">
+                <a:solidFill>
+                  <a:srgbClr val="000000"/>
+                </a:solidFill>
+                <a:latin typeface="Arial Unicode MS"/>
+                <a:ea typeface="Arial Unicode MS"/>
+                <a:cs typeface="Arial Unicode MS"/>
+              </a:rPr>
+              <a:t>100 klx sunlight</a:t>
+            </a:r>
+            <a:r>
+              <a:rPr sz="800" lang="zh-TW" dirty="0">
+                <a:solidFill>
+                  <a:srgbClr val="000000"/>
+                </a:solidFill>
+                <a:latin typeface="Arial Unicode MS"/>
+                <a:ea typeface="Arial Unicode MS"/>
+                <a:cs typeface="Arial Unicode MS"/>
+              </a:rPr>
+              <a:t>，十萬勒克斯，正午直射的大太陽——陽光對光達是</a:t>
+            </a:r>
+            <a:r>
+              <a:rPr sz="800" b="1" lang="zh-TW" dirty="0">
+                <a:solidFill>
+                  <a:srgbClr val="000000"/>
+                </a:solidFill>
+                <a:latin typeface="Arial Unicode MS"/>
+                <a:ea typeface="Arial Unicode MS"/>
+                <a:cs typeface="Arial Unicode MS"/>
+              </a:rPr>
+              <a:t>雜訊</a:t>
+            </a:r>
+            <a:r>
+              <a:rPr sz="800" lang="zh-TW" dirty="0">
+                <a:solidFill>
+                  <a:srgbClr val="000000"/>
+                </a:solidFill>
+                <a:latin typeface="Arial Unicode MS"/>
+                <a:ea typeface="Arial Unicode MS"/>
+                <a:cs typeface="Arial Unicode MS"/>
+              </a:rPr>
+              <a:t>，所以這是</a:t>
+            </a:r>
+            <a:r>
+              <a:rPr sz="800" b="1" lang="zh-TW" dirty="0">
+                <a:solidFill>
+                  <a:srgbClr val="000000"/>
+                </a:solidFill>
+                <a:latin typeface="Arial Unicode MS"/>
+                <a:ea typeface="Arial Unicode MS"/>
+                <a:cs typeface="Arial Unicode MS"/>
+              </a:rPr>
+              <a:t>嚴苛</a:t>
+            </a:r>
+            <a:r>
+              <a:rPr sz="800" lang="zh-TW" dirty="0">
+                <a:solidFill>
+                  <a:srgbClr val="000000"/>
+                </a:solidFill>
+                <a:latin typeface="Arial Unicode MS"/>
+                <a:ea typeface="Arial Unicode MS"/>
+                <a:cs typeface="Arial Unicode MS"/>
+              </a:rPr>
+              <a:t>條件，不是放水：它在說最壞的情況下還有九十公尺。
+</a:t>
+            </a:r>
+          </a:p>
+          <a:p>
+            <a:pPr algn="l">
+              <a:spcBef>
+                <a:spcPts val="0"/>
+              </a:spcBef>
+              <a:spcAft>
+                <a:spcPts val="133"/>
+              </a:spcAft>
+            </a:pPr>
+            <a:r>
+              <a:rPr sz="800" lang="zh-TW" dirty="0">
+                <a:solidFill>
+                  <a:srgbClr val="000000"/>
+                </a:solidFill>
+                <a:latin typeface="Arial Unicode MS"/>
+                <a:ea typeface="Arial Unicode MS"/>
+                <a:cs typeface="Arial Unicode MS"/>
+              </a:rPr>
+              <a:t>所以那一行真正的意思是：</a:t>
+            </a:r>
+            <a:r>
+              <a:rPr sz="800" b="1" lang="zh-TW" dirty="0">
+                <a:solidFill>
+                  <a:srgbClr val="000000"/>
+                </a:solidFill>
+                <a:latin typeface="Arial Unicode MS"/>
+                <a:ea typeface="Arial Unicode MS"/>
+                <a:cs typeface="Arial Unicode MS"/>
+              </a:rPr>
+              <a:t>對一個深色的漫反射目標、在 1024 乘 10 赫茲模式下、在正午大太陽底下，九十公尺處有九成以上的機率看得到。</a:t>
+            </a:r>
+            <a:r>
+              <a:rPr sz="800" lang="zh-TW" dirty="0">
+                <a:solidFill>
+                  <a:srgbClr val="000000"/>
+                </a:solidFill>
+                <a:latin typeface="Arial Unicode MS"/>
+                <a:ea typeface="Arial Unicode MS"/>
+                <a:cs typeface="Arial Unicode MS"/>
+              </a:rPr>
+              <a:t>一行數字，四個條件。
 </a:t>
             </a:r>
           </a:p>

--- a/第五週(10-08)/第五週_第1節_簡報.pptx
+++ b/第五週(10-08)/第五週_第1節_簡報.pptx
@@ -3347,29 +3347,7 @@
                 <a:ea typeface="Arial Unicode MS"/>
                 <a:cs typeface="Arial Unicode MS"/>
               </a:rPr>
-              <a:t>百分之八十是淺色、會把光均勻散回來的東西——白色的車、淺色的牆、水泥路面。百分之十是深色、吃光的東西——黑色的車、深色的雨衣、柏油路面。
-</a:t>
-            </a:r>
-          </a:p>
-          <a:p>
-            <a:pPr algn="l">
-              <a:spcBef>
-                <a:spcPts val="0"/>
-              </a:spcBef>
-              <a:spcAft>
-                <a:spcPts val="133"/>
-              </a:spcAft>
-            </a:pPr>
-            <a:r>
-              <a:rPr sz="800" lang="zh-TW" dirty="0">
-                <a:solidFill>
-                  <a:srgbClr val="000000"/>
-                </a:solidFill>
-                <a:latin typeface="Arial Unicode MS"/>
-                <a:ea typeface="Arial Unicode MS"/>
-                <a:cs typeface="Arial Unicode MS"/>
-              </a:rPr>
-              <a:t>所以同一顆光達，看白色的車看得到一百七十公尺，看黑色的車只剩九十公尺，</a:t>
+              <a:t>百分之八十是淺色、會把光均勻散回來的東西——白色的車、淺色的牆、水泥路面。百分之十是深色、吃光的東西——黑色的車、深色的雨衣、柏油路面。所以同一顆光達，看白色的車看得到一百七十公尺，看黑色的車只剩九十公尺，</a:t>
             </a:r>
             <a:r>
               <a:rPr sz="800" b="1" lang="zh-TW" dirty="0">
@@ -3578,7 +3556,7 @@
                 <a:ea typeface="Arial Unicode MS"/>
                 <a:cs typeface="Arial Unicode MS"/>
               </a:rPr>
-              <a:t>，十萬勒克斯，正午直射的大太陽——陽光對光達是</a:t>
+              <a:t>，十萬勒克斯，正午直射的大太陽——陰天大概一萬，室內只有五百，所以十萬是最亮的情況。為什麼要寫這個？因為</a:t>
             </a:r>
             <a:r>
               <a:rPr sz="800" b="1" lang="zh-TW" dirty="0">
@@ -3589,7 +3567,7 @@
                 <a:ea typeface="Arial Unicode MS"/>
                 <a:cs typeface="Arial Unicode MS"/>
               </a:rPr>
-              <a:t>雜訊</a:t>
+              <a:t>陽光裡面也有 865 奈米</a:t>
             </a:r>
             <a:r>
               <a:rPr sz="800" lang="zh-TW" dirty="0">
@@ -3600,7 +3578,7 @@
                 <a:ea typeface="Arial Unicode MS"/>
                 <a:cs typeface="Arial Unicode MS"/>
               </a:rPr>
-              <a:t>，所以這是</a:t>
+              <a:t>。接收器不會分那個光子是誰打出去的，陽光一起進來就變成背景，雷射那一下要從背景裡</a:t>
             </a:r>
             <a:r>
               <a:rPr sz="800" b="1" lang="zh-TW" dirty="0">
@@ -3611,6 +3589,72 @@
                 <a:ea typeface="Arial Unicode MS"/>
                 <a:cs typeface="Arial Unicode MS"/>
               </a:rPr>
+              <a:t>冒得出來</a:t>
+            </a:r>
+            <a:r>
+              <a:rPr sz="800" lang="zh-TW" dirty="0">
+                <a:solidFill>
+                  <a:srgbClr val="000000"/>
+                </a:solidFill>
+                <a:latin typeface="Arial Unicode MS"/>
+                <a:ea typeface="Arial Unicode MS"/>
+                <a:cs typeface="Arial Unicode MS"/>
+              </a:rPr>
+              <a:t>才算數。所以</a:t>
+            </a:r>
+            <a:r>
+              <a:rPr sz="800" b="1" lang="zh-TW" dirty="0">
+                <a:solidFill>
+                  <a:srgbClr val="000000"/>
+                </a:solidFill>
+                <a:latin typeface="Arial Unicode MS"/>
+                <a:ea typeface="Arial Unicode MS"/>
+                <a:cs typeface="Arial Unicode MS"/>
+              </a:rPr>
+              <a:t>太陽愈大，光達看得愈近</a:t>
+            </a:r>
+            <a:r>
+              <a:rPr sz="800" lang="zh-TW" dirty="0">
+                <a:solidFill>
+                  <a:srgbClr val="000000"/>
+                </a:solidFill>
+                <a:latin typeface="Arial Unicode MS"/>
+                <a:ea typeface="Arial Unicode MS"/>
+                <a:cs typeface="Arial Unicode MS"/>
+              </a:rPr>
+              <a:t>。這跟第八張那支影片剛好相反：相機沒光就瞎，光達是</a:t>
+            </a:r>
+            <a:r>
+              <a:rPr sz="800" b="1" lang="zh-TW" dirty="0">
+                <a:solidFill>
+                  <a:srgbClr val="000000"/>
+                </a:solidFill>
+                <a:latin typeface="Arial Unicode MS"/>
+                <a:ea typeface="Arial Unicode MS"/>
+                <a:cs typeface="Arial Unicode MS"/>
+              </a:rPr>
+              <a:t>光太多會被吵</a:t>
+            </a:r>
+            <a:r>
+              <a:rPr sz="800" lang="zh-TW" dirty="0">
+                <a:solidFill>
+                  <a:srgbClr val="000000"/>
+                </a:solidFill>
+                <a:latin typeface="Arial Unicode MS"/>
+                <a:ea typeface="Arial Unicode MS"/>
+                <a:cs typeface="Arial Unicode MS"/>
+              </a:rPr>
+              <a:t>。所以這一條是</a:t>
+            </a:r>
+            <a:r>
+              <a:rPr sz="800" b="1" lang="zh-TW" dirty="0">
+                <a:solidFill>
+                  <a:srgbClr val="000000"/>
+                </a:solidFill>
+                <a:latin typeface="Arial Unicode MS"/>
+                <a:ea typeface="Arial Unicode MS"/>
+                <a:cs typeface="Arial Unicode MS"/>
+              </a:rPr>
               <a:t>嚴苛</a:t>
             </a:r>
             <a:r>
@@ -3622,7 +3666,7 @@
                 <a:ea typeface="Arial Unicode MS"/>
                 <a:cs typeface="Arial Unicode MS"/>
               </a:rPr>
-              <a:t>條件，不是放水：它在說最壞的情況下還有九十公尺。
+              <a:t>條件，不是放水——它在說最壞的情況下還有九十公尺。
 </a:t>
             </a:r>
           </a:p>
@@ -3688,29 +3732,7 @@
                 <a:ea typeface="Arial Unicode MS"/>
                 <a:cs typeface="Arial Unicode MS"/>
               </a:rPr>
-              <a:t>現在想一件事：廠商在網站上、在型錄封面上，會寫哪一個數字？當然是一百七十。哪一家廣告會寫自己比較差的那個？
-</a:t>
-            </a:r>
-          </a:p>
-          <a:p>
-            <a:pPr algn="l">
-              <a:spcBef>
-                <a:spcPts val="0"/>
-              </a:spcBef>
-              <a:spcAft>
-                <a:spcPts val="133"/>
-              </a:spcAft>
-            </a:pPr>
-            <a:r>
-              <a:rPr sz="800" lang="zh-TW" dirty="0">
-                <a:solidFill>
-                  <a:srgbClr val="000000"/>
-                </a:solidFill>
-                <a:latin typeface="Arial Unicode MS"/>
-                <a:ea typeface="Arial Unicode MS"/>
-                <a:cs typeface="Arial Unicode MS"/>
-              </a:rPr>
-              <a:t>可是身為工程師，</a:t>
+              <a:t>現在想一件事：廠商在網站上、在型錄封面上，會寫哪一個數字？當然是一百七十。哪一家廣告會寫自己比較差的那個？可是身為工程師，</a:t>
             </a:r>
             <a:r>
               <a:rPr sz="800" b="1" lang="zh-TW" dirty="0">

--- a/第五週(10-08)/第五週_第1節_簡報.pptx
+++ b/第五週(10-08)/第五週_第1節_簡報.pptx
@@ -3688,6 +3688,116 @@
                 <a:ea typeface="Arial Unicode MS"/>
                 <a:cs typeface="Arial Unicode MS"/>
               </a:rPr>
+              <a:t>那廠商怎麼對付太陽？三招。第一，</a:t>
+            </a:r>
+            <a:r>
+              <a:rPr sz="800" b="1" lang="zh-TW" dirty="0">
+                <a:solidFill>
+                  <a:srgbClr val="000000"/>
+                </a:solidFill>
+                <a:latin typeface="Arial Unicode MS"/>
+                <a:ea typeface="Arial Unicode MS"/>
+                <a:cs typeface="Arial Unicode MS"/>
+              </a:rPr>
+              <a:t>裝一片只讓 865 奈米通過的濾光片</a:t>
+            </a:r>
+            <a:r>
+              <a:rPr sz="800" lang="zh-TW" dirty="0">
+                <a:solidFill>
+                  <a:srgbClr val="000000"/>
+                </a:solidFill>
+                <a:latin typeface="Arial Unicode MS"/>
+                <a:ea typeface="Arial Unicode MS"/>
+                <a:cs typeface="Arial Unicode MS"/>
+              </a:rPr>
+              <a:t>，把其他波長的陽光擋在外面——濾得愈窄，進來的背景愈少。第二，</a:t>
+            </a:r>
+            <a:r>
+              <a:rPr sz="800" b="1" lang="zh-TW" dirty="0">
+                <a:solidFill>
+                  <a:srgbClr val="000000"/>
+                </a:solidFill>
+                <a:latin typeface="Arial Unicode MS"/>
+                <a:ea typeface="Arial Unicode MS"/>
+                <a:cs typeface="Arial Unicode MS"/>
+              </a:rPr>
+              <a:t>只在該回來的那一小段時間裡聽</a:t>
+            </a:r>
+            <a:r>
+              <a:rPr sz="800" lang="zh-TW" dirty="0">
+                <a:solidFill>
+                  <a:srgbClr val="000000"/>
+                </a:solidFill>
+                <a:latin typeface="Arial Unicode MS"/>
+                <a:ea typeface="Arial Unicode MS"/>
+                <a:cs typeface="Arial Unicode MS"/>
+              </a:rPr>
+              <a:t>，其他時間進來的光不算。第三，</a:t>
+            </a:r>
+            <a:r>
+              <a:rPr sz="800" b="1" lang="zh-TW" dirty="0">
+                <a:solidFill>
+                  <a:srgbClr val="000000"/>
+                </a:solidFill>
+                <a:latin typeface="Arial Unicode MS"/>
+                <a:ea typeface="Arial Unicode MS"/>
+                <a:cs typeface="Arial Unicode MS"/>
+              </a:rPr>
+              <a:t>把能量擠進一個很短很強的脈衝</a:t>
+            </a:r>
+            <a:r>
+              <a:rPr sz="800" lang="zh-TW" dirty="0">
+                <a:solidFill>
+                  <a:srgbClr val="000000"/>
+                </a:solidFill>
+                <a:latin typeface="Arial Unicode MS"/>
+                <a:ea typeface="Arial Unicode MS"/>
+                <a:cs typeface="Arial Unicode MS"/>
+              </a:rPr>
+              <a:t>，讓它在背景上凸得出來。第二節講波長的時候各位會看到，1550 奈米在這件事上天生有利：它可以打比較強，而且</a:t>
+            </a:r>
+            <a:r>
+              <a:rPr sz="800" b="1" lang="zh-TW" dirty="0">
+                <a:solidFill>
+                  <a:srgbClr val="000000"/>
+                </a:solidFill>
+                <a:latin typeface="Arial Unicode MS"/>
+                <a:ea typeface="Arial Unicode MS"/>
+                <a:cs typeface="Arial Unicode MS"/>
+              </a:rPr>
+              <a:t>太陽在 1550 這個波長的輻射本來就比較弱</a:t>
+            </a:r>
+            <a:r>
+              <a:rPr sz="800" lang="zh-TW" dirty="0">
+                <a:solidFill>
+                  <a:srgbClr val="000000"/>
+                </a:solidFill>
+                <a:latin typeface="Arial Unicode MS"/>
+                <a:ea typeface="Arial Unicode MS"/>
+                <a:cs typeface="Arial Unicode MS"/>
+              </a:rPr>
+              <a:t>。
+</a:t>
+            </a:r>
+          </a:p>
+          <a:p>
+            <a:pPr algn="l">
+              <a:spcBef>
+                <a:spcPts val="0"/>
+              </a:spcBef>
+              <a:spcAft>
+                <a:spcPts val="133"/>
+              </a:spcAft>
+            </a:pPr>
+            <a:r>
+              <a:rPr sz="800" lang="zh-TW" dirty="0">
+                <a:solidFill>
+                  <a:srgbClr val="000000"/>
+                </a:solidFill>
+                <a:latin typeface="Arial Unicode MS"/>
+                <a:ea typeface="Arial Unicode MS"/>
+                <a:cs typeface="Arial Unicode MS"/>
+              </a:rPr>
               <a:t>所以那一行真正的意思是：</a:t>
             </a:r>
             <a:r>
@@ -3798,29 +3908,7 @@
                 <a:ea typeface="Arial Unicode MS"/>
                 <a:cs typeface="Arial Unicode MS"/>
               </a:rPr>
-              <a:t>他沒寫，你就要小心。好的規格表會把兩個都寫出來，像 OS1 這樣。願不願意把比較難看的那個也印上去，其實看得出一家廠商老不老實。
-</a:t>
-            </a:r>
-          </a:p>
-          <a:p>
-            <a:pPr algn="l">
-              <a:spcBef>
-                <a:spcPts val="0"/>
-              </a:spcBef>
-              <a:spcAft>
-                <a:spcPts val="133"/>
-              </a:spcAft>
-            </a:pPr>
-            <a:r>
-              <a:rPr sz="800" lang="zh-TW" dirty="0">
-                <a:solidFill>
-                  <a:srgbClr val="000000"/>
-                </a:solidFill>
-                <a:latin typeface="Arial Unicode MS"/>
-                <a:ea typeface="Arial Unicode MS"/>
-                <a:cs typeface="Arial Unicode MS"/>
-              </a:rPr>
-              <a:t>判讀台的</a:t>
+              <a:t>他沒寫，你就要小心。願不願意把比較難看的那個也印上去，其實看得出一家廠商老不老實。判讀台的</a:t>
             </a:r>
             <a:r>
               <a:rPr sz="800" b="1" lang="zh-TW" dirty="0">

--- a/第五週(10-08)/第五週_第1節_簡報.pptx
+++ b/第五週(10-08)/第五週_第1節_簡報.pptx
@@ -7449,11 +7449,11 @@
                 <a:spcPts val="0"/>
               </a:spcBef>
               <a:spcAft>
-                <a:spcPts val="158"/>
-              </a:spcAft>
-            </a:pPr>
-            <a:r>
-              <a:rPr sz="950" b="1" lang="zh-TW" dirty="0">
+                <a:spcPts val="133"/>
+              </a:spcAft>
+            </a:pPr>
+            <a:r>
+              <a:rPr sz="800" b="1" lang="zh-TW" dirty="0">
                 <a:solidFill>
                   <a:srgbClr val="000000"/>
                 </a:solidFill>
@@ -7464,7 +7464,7 @@
               <a:t>▍這一張要做什麼</a:t>
             </a:r>
             <a:r>
-              <a:rPr sz="950" lang="zh-TW" dirty="0">
+              <a:rPr sz="800" lang="zh-TW" dirty="0">
                 <a:solidFill>
                   <a:srgbClr val="000000"/>
                 </a:solidFill>
@@ -7482,11 +7482,11 @@
                 <a:spcPts val="0"/>
               </a:spcBef>
               <a:spcAft>
-                <a:spcPts val="158"/>
-              </a:spcAft>
-            </a:pPr>
-            <a:r>
-              <a:rPr sz="950" lang="zh-TW" dirty="0">
+                <a:spcPts val="133"/>
+              </a:spcAft>
+            </a:pPr>
+            <a:r>
+              <a:rPr sz="800" lang="zh-TW" dirty="0">
                 <a:solidFill>
                   <a:srgbClr val="000000"/>
                 </a:solidFill>
@@ -7504,11 +7504,11 @@
                 <a:spcPts val="0"/>
               </a:spcBef>
               <a:spcAft>
-                <a:spcPts val="158"/>
-              </a:spcAft>
-            </a:pPr>
-            <a:r>
-              <a:rPr sz="950" b="1" lang="zh-TW" dirty="0">
+                <a:spcPts val="133"/>
+              </a:spcAft>
+            </a:pPr>
+            <a:r>
+              <a:rPr sz="800" b="1" lang="zh-TW" dirty="0">
                 <a:solidFill>
                   <a:srgbClr val="000000"/>
                 </a:solidFill>
@@ -7519,7 +7519,7 @@
               <a:t>▍畫面上圈這裡</a:t>
             </a:r>
             <a:r>
-              <a:rPr sz="950" lang="zh-TW" dirty="0">
+              <a:rPr sz="800" lang="zh-TW" dirty="0">
                 <a:solidFill>
                   <a:srgbClr val="000000"/>
                 </a:solidFill>
@@ -7537,11 +7537,11 @@
                 <a:spcPts val="0"/>
               </a:spcBef>
               <a:spcAft>
-                <a:spcPts val="158"/>
-              </a:spcAft>
-            </a:pPr>
-            <a:r>
-              <a:rPr sz="950" lang="zh-TW" dirty="0">
+                <a:spcPts val="133"/>
+              </a:spcAft>
+            </a:pPr>
+            <a:r>
+              <a:rPr sz="800" lang="zh-TW" dirty="0">
                 <a:solidFill>
                   <a:srgbClr val="000000"/>
                 </a:solidFill>
@@ -7559,11 +7559,11 @@
                 <a:spcPts val="0"/>
               </a:spcBef>
               <a:spcAft>
-                <a:spcPts val="158"/>
-              </a:spcAft>
-            </a:pPr>
-            <a:r>
-              <a:rPr sz="950" b="1" lang="zh-TW" dirty="0">
+                <a:spcPts val="133"/>
+              </a:spcAft>
+            </a:pPr>
+            <a:r>
+              <a:rPr sz="800" b="1" lang="zh-TW" dirty="0">
                 <a:solidFill>
                   <a:srgbClr val="000000"/>
                 </a:solidFill>
@@ -7574,7 +7574,7 @@
               <a:t>▍以下照著唸</a:t>
             </a:r>
             <a:r>
-              <a:rPr sz="950" lang="zh-TW" dirty="0">
+              <a:rPr sz="800" lang="zh-TW" dirty="0">
                 <a:solidFill>
                   <a:srgbClr val="000000"/>
                 </a:solidFill>
@@ -7592,11 +7592,11 @@
                 <a:spcPts val="0"/>
               </a:spcBef>
               <a:spcAft>
-                <a:spcPts val="158"/>
-              </a:spcAft>
-            </a:pPr>
-            <a:r>
-              <a:rPr sz="950" lang="zh-TW" dirty="0">
+                <a:spcPts val="133"/>
+              </a:spcAft>
+            </a:pPr>
+            <a:r>
+              <a:rPr sz="800" lang="zh-TW" dirty="0">
                 <a:solidFill>
                   <a:srgbClr val="000000"/>
                 </a:solidFill>
@@ -7607,7 +7607,7 @@
               <a:t>我們把兩顆並排比一次。前四行都是規格表上抄下來的，最後一行是</a:t>
             </a:r>
             <a:r>
-              <a:rPr sz="950" b="1" lang="zh-TW" dirty="0">
+              <a:rPr sz="800" b="1" lang="zh-TW" dirty="0">
                 <a:solidFill>
                   <a:srgbClr val="000000"/>
                 </a:solidFill>
@@ -7618,7 +7618,7 @@
               <a:t>我們自己算的</a:t>
             </a:r>
             <a:r>
-              <a:rPr sz="950" lang="zh-TW" dirty="0">
+              <a:rPr sz="800" lang="zh-TW" dirty="0">
                 <a:solidFill>
                   <a:srgbClr val="000000"/>
                 </a:solidFill>
@@ -7636,11 +7636,11 @@
                 <a:spcPts val="0"/>
               </a:spcBef>
               <a:spcAft>
-                <a:spcPts val="158"/>
-              </a:spcAft>
-            </a:pPr>
-            <a:r>
-              <a:rPr sz="950" lang="zh-TW" dirty="0">
+                <a:spcPts val="133"/>
+              </a:spcAft>
+            </a:pPr>
+            <a:r>
+              <a:rPr sz="800" lang="zh-TW" dirty="0">
                 <a:solidFill>
                   <a:srgbClr val="000000"/>
                 </a:solidFill>
@@ -7658,11 +7658,11 @@
                 <a:spcPts val="0"/>
               </a:spcBef>
               <a:spcAft>
-                <a:spcPts val="158"/>
-              </a:spcAft>
-            </a:pPr>
-            <a:r>
-              <a:rPr sz="950" lang="zh-TW" dirty="0">
+                <a:spcPts val="133"/>
+              </a:spcAft>
+            </a:pPr>
+            <a:r>
+              <a:rPr sz="800" lang="zh-TW" dirty="0">
                 <a:solidFill>
                   <a:srgbClr val="000000"/>
                 </a:solidFill>
@@ -7673,7 +7673,7 @@
               <a:t>再來是水平角解析度，這裡要算一下。OS1 的規格表沒有直接寫角度，它寫的是每一圈有 1024 個點。所以三百六十度除以一千零二十四，等於</a:t>
             </a:r>
             <a:r>
-              <a:rPr sz="950" b="1" lang="zh-TW" dirty="0">
+              <a:rPr sz="800" b="1" lang="zh-TW" dirty="0">
                 <a:solidFill>
                   <a:srgbClr val="000000"/>
                 </a:solidFill>
@@ -7684,7 +7684,7 @@
               <a:t>零點三五度</a:t>
             </a:r>
             <a:r>
-              <a:rPr sz="950" lang="zh-TW" dirty="0">
+              <a:rPr sz="800" lang="zh-TW" dirty="0">
                 <a:solidFill>
                   <a:srgbClr val="000000"/>
                 </a:solidFill>
@@ -7702,11 +7702,11 @@
                 <a:spcPts val="0"/>
               </a:spcBef>
               <a:spcAft>
-                <a:spcPts val="158"/>
-              </a:spcAft>
-            </a:pPr>
-            <a:r>
-              <a:rPr sz="950" lang="zh-TW" dirty="0">
+                <a:spcPts val="133"/>
+              </a:spcAft>
+            </a:pPr>
+            <a:r>
+              <a:rPr sz="800" lang="zh-TW" dirty="0">
                 <a:solidFill>
                   <a:srgbClr val="000000"/>
                 </a:solidFill>
@@ -7724,11 +7724,11 @@
                 <a:spcPts val="0"/>
               </a:spcBef>
               <a:spcAft>
-                <a:spcPts val="158"/>
-              </a:spcAft>
-            </a:pPr>
-            <a:r>
-              <a:rPr sz="950" lang="zh-TW" dirty="0">
+                <a:spcPts val="133"/>
+              </a:spcAft>
+            </a:pPr>
+            <a:r>
+              <a:rPr sz="800" lang="zh-TW" dirty="0">
                 <a:solidFill>
                   <a:srgbClr val="000000"/>
                 </a:solidFill>
@@ -7739,7 +7739,7 @@
               <a:t>好，現在看最後一行，這一行規格表上沒有，是我們用上面那些數字算出來的：</a:t>
             </a:r>
             <a:r>
-              <a:rPr sz="950" b="1" lang="zh-TW" dirty="0">
+              <a:rPr sz="800" b="1" lang="zh-TW" dirty="0">
                 <a:solidFill>
                   <a:srgbClr val="000000"/>
                 </a:solidFill>
@@ -7750,7 +7750,7 @@
               <a:t>同樣一個人站在四十公尺，OS1 身上有九個點，AT128P 有一百二十一個點。</a:t>
             </a:r>
             <a:r>
-              <a:rPr sz="950" lang="zh-TW" dirty="0">
+              <a:rPr sz="800" lang="zh-TW" dirty="0">
                 <a:solidFill>
                   <a:srgbClr val="000000"/>
                 </a:solidFill>
@@ -7768,11 +7768,11 @@
                 <a:spcPts val="0"/>
               </a:spcBef>
               <a:spcAft>
-                <a:spcPts val="158"/>
-              </a:spcAft>
-            </a:pPr>
-            <a:r>
-              <a:rPr sz="950" lang="zh-TW" dirty="0">
+                <a:spcPts val="133"/>
+              </a:spcAft>
+            </a:pPr>
+            <a:r>
+              <a:rPr sz="800" lang="zh-TW" dirty="0">
                 <a:solidFill>
                   <a:srgbClr val="000000"/>
                 </a:solidFill>
@@ -7790,11 +7790,121 @@
                 <a:spcPts val="0"/>
               </a:spcBef>
               <a:spcAft>
-                <a:spcPts val="158"/>
-              </a:spcAft>
-            </a:pPr>
-            <a:r>
-              <a:rPr sz="950" lang="zh-TW" dirty="0">
+                <a:spcPts val="133"/>
+              </a:spcAft>
+            </a:pPr>
+            <a:r>
+              <a:rPr sz="800" lang="zh-TW" dirty="0">
+                <a:solidFill>
+                  <a:srgbClr val="000000"/>
+                </a:solidFill>
+                <a:latin typeface="Arial Unicode MS"/>
+                <a:ea typeface="Arial Unicode MS"/>
+                <a:cs typeface="Arial Unicode MS"/>
+              </a:rPr>
+              <a:t>那</a:t>
+            </a:r>
+            <a:r>
+              <a:rPr sz="800" b="1" lang="zh-TW" dirty="0">
+                <a:solidFill>
+                  <a:srgbClr val="000000"/>
+                </a:solidFill>
+                <a:latin typeface="Arial Unicode MS"/>
+                <a:ea typeface="Arial Unicode MS"/>
+                <a:cs typeface="Arial Unicode MS"/>
+              </a:rPr>
+              <a:t>到底幾個點才夠</a:t>
+            </a:r>
+            <a:r>
+              <a:rPr sz="800" lang="zh-TW" dirty="0">
+                <a:solidFill>
+                  <a:srgbClr val="000000"/>
+                </a:solidFill>
+                <a:latin typeface="Arial Unicode MS"/>
+                <a:ea typeface="Arial Unicode MS"/>
+                <a:cs typeface="Arial Unicode MS"/>
+              </a:rPr>
+              <a:t>？這件事沒有國際標準，</a:t>
+            </a:r>
+            <a:r>
+              <a:rPr sz="800" b="1" lang="zh-TW" dirty="0">
+                <a:solidFill>
+                  <a:srgbClr val="000000"/>
+                </a:solidFill>
+                <a:latin typeface="Arial Unicode MS"/>
+                <a:ea typeface="Arial Unicode MS"/>
+                <a:cs typeface="Arial Unicode MS"/>
+              </a:rPr>
+              <a:t>本課訂十個點當門檻</a:t>
+            </a:r>
+            <a:r>
+              <a:rPr sz="800" lang="zh-TW" dirty="0">
+                <a:solidFill>
+                  <a:srgbClr val="000000"/>
+                </a:solidFill>
+                <a:latin typeface="Arial Unicode MS"/>
+                <a:ea typeface="Arial Unicode MS"/>
+                <a:cs typeface="Arial Unicode MS"/>
+              </a:rPr>
+              <a:t>，判讀台上的判定也是用這個數字——各位等一下會在工具上看到「門檻 10 個」。為什麼是十？因為點太少的時候，演算法大概只能說「那裡有東西」，說不出那是人還是電線桿；要認出</a:t>
+            </a:r>
+            <a:r>
+              <a:rPr sz="800" b="1" lang="zh-TW" dirty="0">
+                <a:solidFill>
+                  <a:srgbClr val="000000"/>
+                </a:solidFill>
+                <a:latin typeface="Arial Unicode MS"/>
+                <a:ea typeface="Arial Unicode MS"/>
+                <a:cs typeface="Arial Unicode MS"/>
+              </a:rPr>
+              <a:t>是什麼</a:t>
+            </a:r>
+            <a:r>
+              <a:rPr sz="800" lang="zh-TW" dirty="0">
+                <a:solidFill>
+                  <a:srgbClr val="000000"/>
+                </a:solidFill>
+                <a:latin typeface="Arial Unicode MS"/>
+                <a:ea typeface="Arial Unicode MS"/>
+                <a:cs typeface="Arial Unicode MS"/>
+              </a:rPr>
+              <a:t>，身上大概要十幾個點以上才有機會。所以 OS1 的九個點是</a:t>
+            </a:r>
+            <a:r>
+              <a:rPr sz="800" b="1" lang="zh-TW" dirty="0">
+                <a:solidFill>
+                  <a:srgbClr val="000000"/>
+                </a:solidFill>
+                <a:latin typeface="Arial Unicode MS"/>
+                <a:ea typeface="Arial Unicode MS"/>
+                <a:cs typeface="Arial Unicode MS"/>
+              </a:rPr>
+              <a:t>差一個點</a:t>
+            </a:r>
+            <a:r>
+              <a:rPr sz="800" lang="zh-TW" dirty="0">
+                <a:solidFill>
+                  <a:srgbClr val="000000"/>
+                </a:solidFill>
+                <a:latin typeface="Arial Unicode MS"/>
+                <a:ea typeface="Arial Unicode MS"/>
+                <a:cs typeface="Arial Unicode MS"/>
+              </a:rPr>
+              <a:t>不及格，AT128P 的一百二十一個點遠遠有餘。
+</a:t>
+            </a:r>
+          </a:p>
+          <a:p>
+            <a:pPr algn="l">
+              <a:spcBef>
+                <a:spcPts val="0"/>
+              </a:spcBef>
+              <a:spcAft>
+                <a:spcPts val="133"/>
+              </a:spcAft>
+            </a:pPr>
+            <a:r>
+              <a:rPr sz="800" lang="zh-TW" dirty="0">
                 <a:solidFill>
                   <a:srgbClr val="000000"/>
                 </a:solidFill>
@@ -7805,7 +7915,7 @@
               <a:t>這是今天第一個重要的觀念：</a:t>
             </a:r>
             <a:r>
-              <a:rPr sz="950" b="1" lang="zh-TW" dirty="0">
+              <a:rPr sz="800" b="1" lang="zh-TW" dirty="0">
                 <a:solidFill>
                   <a:srgbClr val="000000"/>
                 </a:solidFill>
@@ -7816,7 +7926,7 @@
               <a:t>規格表上的數字要換算成「我關心的那個場景會怎樣」，才有意義。</a:t>
             </a:r>
             <a:r>
-              <a:rPr sz="950" lang="zh-TW" dirty="0">
+              <a:rPr sz="800" lang="zh-TW" dirty="0">
                 <a:solidFill>
                   <a:srgbClr val="000000"/>
                 </a:solidFill>
@@ -7834,11 +7944,11 @@
                 <a:spcPts val="0"/>
               </a:spcBef>
               <a:spcAft>
-                <a:spcPts val="158"/>
-              </a:spcAft>
-            </a:pPr>
-            <a:r>
-              <a:rPr sz="950" lang="zh-TW" dirty="0">
+                <a:spcPts val="133"/>
+              </a:spcAft>
+            </a:pPr>
+            <a:r>
+              <a:rPr sz="800" lang="zh-TW" dirty="0">
                 <a:solidFill>
                   <a:srgbClr val="000000"/>
                 </a:solidFill>

--- a/第五週(10-08)/第五週_第1節_簡報.pptx
+++ b/第五週(10-08)/第五週_第1節_簡報.pptx
@@ -4061,11 +4061,11 @@
                 <a:spcPts val="0"/>
               </a:spcBef>
               <a:spcAft>
-                <a:spcPts val="150"/>
-              </a:spcAft>
-            </a:pPr>
-            <a:r>
-              <a:rPr sz="900" b="1" lang="zh-TW" dirty="0">
+                <a:spcPts val="142"/>
+              </a:spcAft>
+            </a:pPr>
+            <a:r>
+              <a:rPr sz="850" b="1" lang="zh-TW" dirty="0">
                 <a:solidFill>
                   <a:srgbClr val="000000"/>
                 </a:solidFill>
@@ -4076,7 +4076,7 @@
               <a:t>▍這一張要做什麼</a:t>
             </a:r>
             <a:r>
-              <a:rPr sz="900" lang="zh-TW" dirty="0">
+              <a:rPr sz="850" lang="zh-TW" dirty="0">
                 <a:solidFill>
                   <a:srgbClr val="000000"/>
                 </a:solidFill>
@@ -4094,11 +4094,11 @@
                 <a:spcPts val="0"/>
               </a:spcBef>
               <a:spcAft>
-                <a:spcPts val="150"/>
-              </a:spcAft>
-            </a:pPr>
-            <a:r>
-              <a:rPr sz="900" lang="zh-TW" dirty="0">
+                <a:spcPts val="142"/>
+              </a:spcAft>
+            </a:pPr>
+            <a:r>
+              <a:rPr sz="850" lang="zh-TW" dirty="0">
                 <a:solidFill>
                   <a:srgbClr val="000000"/>
                 </a:solidFill>
@@ -4116,11 +4116,11 @@
                 <a:spcPts val="0"/>
               </a:spcBef>
               <a:spcAft>
-                <a:spcPts val="150"/>
-              </a:spcAft>
-            </a:pPr>
-            <a:r>
-              <a:rPr sz="900" b="1" lang="zh-TW" dirty="0">
+                <a:spcPts val="142"/>
+              </a:spcAft>
+            </a:pPr>
+            <a:r>
+              <a:rPr sz="850" b="1" lang="zh-TW" dirty="0">
                 <a:solidFill>
                   <a:srgbClr val="000000"/>
                 </a:solidFill>
@@ -4131,7 +4131,7 @@
               <a:t>▍畫面上圈這裡</a:t>
             </a:r>
             <a:r>
-              <a:rPr sz="900" lang="zh-TW" dirty="0">
+              <a:rPr sz="850" lang="zh-TW" dirty="0">
                 <a:solidFill>
                   <a:srgbClr val="000000"/>
                 </a:solidFill>
@@ -4149,11 +4149,11 @@
                 <a:spcPts val="0"/>
               </a:spcBef>
               <a:spcAft>
-                <a:spcPts val="150"/>
-              </a:spcAft>
-            </a:pPr>
-            <a:r>
-              <a:rPr sz="900" lang="zh-TW" dirty="0">
+                <a:spcPts val="142"/>
+              </a:spcAft>
+            </a:pPr>
+            <a:r>
+              <a:rPr sz="850" lang="zh-TW" dirty="0">
                 <a:solidFill>
                   <a:srgbClr val="000000"/>
                 </a:solidFill>
@@ -4171,11 +4171,11 @@
                 <a:spcPts val="0"/>
               </a:spcBef>
               <a:spcAft>
-                <a:spcPts val="150"/>
-              </a:spcAft>
-            </a:pPr>
-            <a:r>
-              <a:rPr sz="900" b="1" lang="zh-TW" dirty="0">
+                <a:spcPts val="142"/>
+              </a:spcAft>
+            </a:pPr>
+            <a:r>
+              <a:rPr sz="850" b="1" lang="zh-TW" dirty="0">
                 <a:solidFill>
                   <a:srgbClr val="000000"/>
                 </a:solidFill>
@@ -4186,7 +4186,7 @@
               <a:t>▍以下照著唸</a:t>
             </a:r>
             <a:r>
-              <a:rPr sz="900" lang="zh-TW" dirty="0">
+              <a:rPr sz="850" lang="zh-TW" dirty="0">
                 <a:solidFill>
                   <a:srgbClr val="000000"/>
                 </a:solidFill>
@@ -4204,11 +4204,11 @@
                 <a:spcPts val="0"/>
               </a:spcBef>
               <a:spcAft>
-                <a:spcPts val="150"/>
-              </a:spcAft>
-            </a:pPr>
-            <a:r>
-              <a:rPr sz="900" lang="zh-TW" dirty="0">
+                <a:spcPts val="142"/>
+              </a:spcAft>
+            </a:pPr>
+            <a:r>
+              <a:rPr sz="850" lang="zh-TW" dirty="0">
                 <a:solidFill>
                   <a:srgbClr val="000000"/>
                 </a:solidFill>
@@ -4226,11 +4226,11 @@
                 <a:spcPts val="0"/>
               </a:spcBef>
               <a:spcAft>
-                <a:spcPts val="150"/>
-              </a:spcAft>
-            </a:pPr>
-            <a:r>
-              <a:rPr sz="900" lang="zh-TW" dirty="0">
+                <a:spcPts val="142"/>
+              </a:spcAft>
+            </a:pPr>
+            <a:r>
+              <a:rPr sz="850" lang="zh-TW" dirty="0">
                 <a:solidFill>
                   <a:srgbClr val="000000"/>
                 </a:solidFill>
@@ -4248,19 +4248,63 @@
                 <a:spcPts val="0"/>
               </a:spcBef>
               <a:spcAft>
-                <a:spcPts val="150"/>
-              </a:spcAft>
-            </a:pPr>
-            <a:r>
-              <a:rPr sz="900" lang="zh-TW" dirty="0">
-                <a:solidFill>
-                  <a:srgbClr val="000000"/>
-                </a:solidFill>
-                <a:latin typeface="Arial Unicode MS"/>
-                <a:ea typeface="Arial Unicode MS"/>
-                <a:cs typeface="Arial Unicode MS"/>
-              </a:rPr>
-              <a:t>四題分別問垂直視野、對百分之十反射率的測距、解析度那一行寫什麼，還有更新率。
+                <a:spcPts val="142"/>
+              </a:spcAft>
+            </a:pPr>
+            <a:r>
+              <a:rPr sz="850" lang="zh-TW" dirty="0">
+                <a:solidFill>
+                  <a:srgbClr val="000000"/>
+                </a:solidFill>
+                <a:latin typeface="Arial Unicode MS"/>
+                <a:ea typeface="Arial Unicode MS"/>
+                <a:cs typeface="Arial Unicode MS"/>
+              </a:rPr>
+              <a:t>四題分別問垂直視野、對百分之十反射率的測距、解析度那一行寫什麼，還有更新率。</a:t>
+            </a:r>
+            <a:r>
+              <a:rPr sz="850" b="1" lang="zh-TW" dirty="0">
+                <a:solidFill>
+                  <a:srgbClr val="000000"/>
+                </a:solidFill>
+                <a:latin typeface="Arial Unicode MS"/>
+                <a:ea typeface="Arial Unicode MS"/>
+                <a:cs typeface="Arial Unicode MS"/>
+              </a:rPr>
+              <a:t>解析度那一題要注意：光達的表上有兩行 Resolution。</a:t>
+            </a:r>
+            <a:r>
+              <a:rPr sz="850" lang="zh-TW" dirty="0">
+                <a:solidFill>
+                  <a:srgbClr val="000000"/>
+                </a:solidFill>
+                <a:latin typeface="Arial Unicode MS"/>
+                <a:ea typeface="Arial Unicode MS"/>
+                <a:cs typeface="Arial Unicode MS"/>
+              </a:rPr>
+              <a:t>題目下面的小字會告訴你這一題問的是哪一行——OS1 和 LD-16 問的是</a:t>
+            </a:r>
+            <a:r>
+              <a:rPr sz="850" b="1" lang="zh-TW" dirty="0">
+                <a:solidFill>
+                  <a:srgbClr val="000000"/>
+                </a:solidFill>
+                <a:latin typeface="Arial Unicode MS"/>
+                <a:ea typeface="Arial Unicode MS"/>
+                <a:cs typeface="Arial Unicode MS"/>
+              </a:rPr>
+              <a:t>垂直</a:t>
+            </a:r>
+            <a:r>
+              <a:rPr sz="850" lang="zh-TW" dirty="0">
+                <a:solidFill>
+                  <a:srgbClr val="000000"/>
+                </a:solidFill>
+                <a:latin typeface="Arial Unicode MS"/>
+                <a:ea typeface="Arial Unicode MS"/>
+                <a:cs typeface="Arial Unicode MS"/>
+              </a:rPr>
+              <a:t>那一行，也就是線束數；AT128P 的表直接把角度寫出來；相機看的是像素數。
 </a:t>
             </a:r>
           </a:p>
@@ -4270,11 +4314,11 @@
                 <a:spcPts val="0"/>
               </a:spcBef>
               <a:spcAft>
-                <a:spcPts val="150"/>
-              </a:spcAft>
-            </a:pPr>
-            <a:r>
-              <a:rPr sz="900" lang="zh-TW" dirty="0">
+                <a:spcPts val="142"/>
+              </a:spcAft>
+            </a:pPr>
+            <a:r>
+              <a:rPr sz="850" lang="zh-TW" dirty="0">
                 <a:solidFill>
                   <a:srgbClr val="000000"/>
                 </a:solidFill>
@@ -4292,11 +4336,11 @@
                 <a:spcPts val="0"/>
               </a:spcBef>
               <a:spcAft>
-                <a:spcPts val="150"/>
-              </a:spcAft>
-            </a:pPr>
-            <a:r>
-              <a:rPr sz="900" b="1" lang="zh-TW" dirty="0">
+                <a:spcPts val="142"/>
+              </a:spcAft>
+            </a:pPr>
+            <a:r>
+              <a:rPr sz="850" b="1" lang="zh-TW" dirty="0">
                 <a:solidFill>
                   <a:srgbClr val="000000"/>
                 </a:solidFill>
@@ -4307,7 +4351,7 @@
               <a:t>第一，答案都在左邊那張表上。</a:t>
             </a:r>
             <a:r>
-              <a:rPr sz="900" lang="zh-TW" dirty="0">
+              <a:rPr sz="850" lang="zh-TW" dirty="0">
                 <a:solidFill>
                   <a:srgbClr val="000000"/>
                 </a:solidFill>
@@ -4325,11 +4369,11 @@
                 <a:spcPts val="0"/>
               </a:spcBef>
               <a:spcAft>
-                <a:spcPts val="150"/>
-              </a:spcAft>
-            </a:pPr>
-            <a:r>
-              <a:rPr sz="900" b="1" lang="zh-TW" dirty="0">
+                <a:spcPts val="142"/>
+              </a:spcAft>
+            </a:pPr>
+            <a:r>
+              <a:rPr sz="850" b="1" lang="zh-TW" dirty="0">
                 <a:solidFill>
                   <a:srgbClr val="000000"/>
                 </a:solidFill>
@@ -4340,7 +4384,7 @@
               <a:t>第二，選錯的時候工具會告訴你錯在哪。</a:t>
             </a:r>
             <a:r>
-              <a:rPr sz="900" lang="zh-TW" dirty="0">
+              <a:rPr sz="850" lang="zh-TW" dirty="0">
                 <a:solidFill>
                   <a:srgbClr val="000000"/>
                 </a:solidFill>
@@ -4358,11 +4402,11 @@
                 <a:spcPts val="0"/>
               </a:spcBef>
               <a:spcAft>
-                <a:spcPts val="150"/>
-              </a:spcAft>
-            </a:pPr>
-            <a:r>
-              <a:rPr sz="900" b="1" lang="zh-TW" dirty="0">
+                <a:spcPts val="142"/>
+              </a:spcAft>
+            </a:pPr>
+            <a:r>
+              <a:rPr sz="850" b="1" lang="zh-TW" dirty="0">
                 <a:solidFill>
                   <a:srgbClr val="000000"/>
                 </a:solidFill>
@@ -4373,7 +4417,7 @@
               <a:t>第三，OS1 做完換 AT128P 再做一次。</a:t>
             </a:r>
             <a:r>
-              <a:rPr sz="900" lang="zh-TW" dirty="0">
+              <a:rPr sz="850" lang="zh-TW" dirty="0">
                 <a:solidFill>
                   <a:srgbClr val="000000"/>
                 </a:solidFill>
@@ -4391,11 +4435,11 @@
                 <a:spcPts val="0"/>
               </a:spcBef>
               <a:spcAft>
-                <a:spcPts val="150"/>
-              </a:spcAft>
-            </a:pPr>
-            <a:r>
-              <a:rPr sz="900" lang="zh-TW" dirty="0">
+                <a:spcPts val="142"/>
+              </a:spcAft>
+            </a:pPr>
+            <a:r>
+              <a:rPr sz="850" lang="zh-TW" dirty="0">
                 <a:solidFill>
                   <a:srgbClr val="000000"/>
                 </a:solidFill>
@@ -4406,7 +4450,7 @@
               <a:t>我在教室裡走動看大家的畫面，卡住的舉手。如果有人做得快，先做相機那一顆 AR0233AT。我先警告各位：</a:t>
             </a:r>
             <a:r>
-              <a:rPr sz="900" b="1" lang="zh-TW" dirty="0">
+              <a:rPr sz="850" b="1" lang="zh-TW" dirty="0">
                 <a:solidFill>
                   <a:srgbClr val="000000"/>
                 </a:solidFill>
@@ -4417,7 +4461,7 @@
               <a:t>那顆有兩題的答案是「規格表上沒有這一行」。</a:t>
             </a:r>
             <a:r>
-              <a:rPr sz="900" lang="zh-TW" dirty="0">
+              <a:rPr sz="850" lang="zh-TW" dirty="0">
                 <a:solidFill>
                   <a:srgbClr val="000000"/>
                 </a:solidFill>
@@ -4435,11 +4479,11 @@
                 <a:spcPts val="0"/>
               </a:spcBef>
               <a:spcAft>
-                <a:spcPts val="150"/>
-              </a:spcAft>
-            </a:pPr>
-            <a:r>
-              <a:rPr sz="900" lang="zh-TW" dirty="0">
+                <a:spcPts val="142"/>
+              </a:spcAft>
+            </a:pPr>
+            <a:r>
+              <a:rPr sz="850" lang="zh-TW" dirty="0">
                 <a:solidFill>
                   <a:srgbClr val="000000"/>
                 </a:solidFill>

--- a/第五週(10-08)/第五週_第1節_簡報.pptx
+++ b/第五週(10-08)/第五週_第1節_簡報.pptx
@@ -2532,11 +2532,11 @@
                 <a:spcPts val="0"/>
               </a:spcBef>
               <a:spcAft>
-                <a:spcPts val="142"/>
-              </a:spcAft>
-            </a:pPr>
-            <a:r>
-              <a:rPr sz="850" b="1" lang="zh-TW" dirty="0">
+                <a:spcPts val="133"/>
+              </a:spcAft>
+            </a:pPr>
+            <a:r>
+              <a:rPr sz="800" b="1" lang="zh-TW" dirty="0">
                 <a:solidFill>
                   <a:srgbClr val="000000"/>
                 </a:solidFill>
@@ -2547,7 +2547,7 @@
               <a:t>▍這一張要做什麼</a:t>
             </a:r>
             <a:r>
-              <a:rPr sz="850" lang="zh-TW" dirty="0">
+              <a:rPr sz="800" lang="zh-TW" dirty="0">
                 <a:solidFill>
                   <a:srgbClr val="000000"/>
                 </a:solidFill>
@@ -2565,11 +2565,11 @@
                 <a:spcPts val="0"/>
               </a:spcBef>
               <a:spcAft>
-                <a:spcPts val="142"/>
-              </a:spcAft>
-            </a:pPr>
-            <a:r>
-              <a:rPr sz="850" lang="zh-TW" dirty="0">
+                <a:spcPts val="133"/>
+              </a:spcAft>
+            </a:pPr>
+            <a:r>
+              <a:rPr sz="800" lang="zh-TW" dirty="0">
                 <a:solidFill>
                   <a:srgbClr val="000000"/>
                 </a:solidFill>
@@ -2587,11 +2587,11 @@
                 <a:spcPts val="0"/>
               </a:spcBef>
               <a:spcAft>
-                <a:spcPts val="142"/>
-              </a:spcAft>
-            </a:pPr>
-            <a:r>
-              <a:rPr sz="850" b="1" lang="zh-TW" dirty="0">
+                <a:spcPts val="133"/>
+              </a:spcAft>
+            </a:pPr>
+            <a:r>
+              <a:rPr sz="800" b="1" lang="zh-TW" dirty="0">
                 <a:solidFill>
                   <a:srgbClr val="000000"/>
                 </a:solidFill>
@@ -2602,7 +2602,7 @@
               <a:t>▍畫面上圈這裡</a:t>
             </a:r>
             <a:r>
-              <a:rPr sz="850" lang="zh-TW" dirty="0">
+              <a:rPr sz="800" lang="zh-TW" dirty="0">
                 <a:solidFill>
                   <a:srgbClr val="000000"/>
                 </a:solidFill>
@@ -2620,11 +2620,11 @@
                 <a:spcPts val="0"/>
               </a:spcBef>
               <a:spcAft>
-                <a:spcPts val="142"/>
-              </a:spcAft>
-            </a:pPr>
-            <a:r>
-              <a:rPr sz="850" lang="zh-TW" dirty="0">
+                <a:spcPts val="133"/>
+              </a:spcAft>
+            </a:pPr>
+            <a:r>
+              <a:rPr sz="800" lang="zh-TW" dirty="0">
                 <a:solidFill>
                   <a:srgbClr val="000000"/>
                 </a:solidFill>
@@ -2642,11 +2642,11 @@
                 <a:spcPts val="0"/>
               </a:spcBef>
               <a:spcAft>
-                <a:spcPts val="142"/>
-              </a:spcAft>
-            </a:pPr>
-            <a:r>
-              <a:rPr sz="850" b="1" lang="zh-TW" dirty="0">
+                <a:spcPts val="133"/>
+              </a:spcAft>
+            </a:pPr>
+            <a:r>
+              <a:rPr sz="800" b="1" lang="zh-TW" dirty="0">
                 <a:solidFill>
                   <a:srgbClr val="000000"/>
                 </a:solidFill>
@@ -2657,7 +2657,7 @@
               <a:t>▍以下照著唸</a:t>
             </a:r>
             <a:r>
-              <a:rPr sz="850" lang="zh-TW" dirty="0">
+              <a:rPr sz="800" lang="zh-TW" dirty="0">
                 <a:solidFill>
                   <a:srgbClr val="000000"/>
                 </a:solidFill>
@@ -2675,11 +2675,11 @@
                 <a:spcPts val="0"/>
               </a:spcBef>
               <a:spcAft>
-                <a:spcPts val="142"/>
-              </a:spcAft>
-            </a:pPr>
-            <a:r>
-              <a:rPr sz="850" lang="zh-TW" dirty="0">
+                <a:spcPts val="133"/>
+              </a:spcAft>
+            </a:pPr>
+            <a:r>
+              <a:rPr sz="800" lang="zh-TW" dirty="0">
                 <a:solidFill>
                   <a:srgbClr val="000000"/>
                 </a:solidFill>
@@ -2690,7 +2690,7 @@
               <a:t>再看一個很容易讀漏的地方。第七張那張圖上，水平解析度和轉速後面都跟著同一個字：</a:t>
             </a:r>
             <a:r>
-              <a:rPr sz="850" b="1" lang="zh-TW" dirty="0">
+              <a:rPr sz="800" b="1" lang="zh-TW" dirty="0">
                 <a:solidFill>
                   <a:srgbClr val="000000"/>
                 </a:solidFill>
@@ -2701,7 +2701,7 @@
               <a:t>configurable</a:t>
             </a:r>
             <a:r>
-              <a:rPr sz="850" lang="zh-TW" dirty="0">
+              <a:rPr sz="800" lang="zh-TW" dirty="0">
                 <a:solidFill>
                   <a:srgbClr val="000000"/>
                 </a:solidFill>
@@ -2719,11 +2719,11 @@
                 <a:spcPts val="0"/>
               </a:spcBef>
               <a:spcAft>
-                <a:spcPts val="142"/>
-              </a:spcAft>
-            </a:pPr>
-            <a:r>
-              <a:rPr sz="850" lang="zh-TW" dirty="0">
+                <a:spcPts val="133"/>
+              </a:spcAft>
+            </a:pPr>
+            <a:r>
+              <a:rPr sz="800" lang="zh-TW" dirty="0">
                 <a:solidFill>
                   <a:srgbClr val="000000"/>
                 </a:solidFill>
@@ -2734,7 +2734,7 @@
               <a:t>datasheet 後面幾頁就把可以設定的組合整個列出來，也就是左邊這一塊，</a:t>
             </a:r>
             <a:r>
-              <a:rPr sz="850" b="1" lang="zh-TW" dirty="0">
+              <a:rPr sz="800" b="1" lang="zh-TW" dirty="0">
                 <a:solidFill>
                   <a:srgbClr val="000000"/>
                 </a:solidFill>
@@ -2745,7 +2745,7 @@
               <a:t>Lidar Operating Modes</a:t>
             </a:r>
             <a:r>
-              <a:rPr sz="850" lang="zh-TW" dirty="0">
+              <a:rPr sz="800" lang="zh-TW" dirty="0">
                 <a:solidFill>
                   <a:srgbClr val="000000"/>
                 </a:solidFill>
@@ -2763,11 +2763,11 @@
                 <a:spcPts val="0"/>
               </a:spcBef>
               <a:spcAft>
-                <a:spcPts val="142"/>
-              </a:spcAft>
-            </a:pPr>
-            <a:r>
-              <a:rPr sz="850" lang="zh-TW" dirty="0">
+                <a:spcPts val="133"/>
+              </a:spcAft>
+            </a:pPr>
+            <a:r>
+              <a:rPr sz="800" lang="zh-TW" dirty="0">
                 <a:solidFill>
                   <a:srgbClr val="000000"/>
                 </a:solidFill>
@@ -2778,7 +2778,7 @@
               <a:t>請各位特別看第三行：</a:t>
             </a:r>
             <a:r>
-              <a:rPr sz="850" b="1" lang="zh-TW" dirty="0">
+              <a:rPr sz="800" b="1" lang="zh-TW" dirty="0">
                 <a:solidFill>
                   <a:srgbClr val="000000"/>
                 </a:solidFill>
@@ -2789,7 +2789,7 @@
               <a:t>x 2048，只有 @ 10 Hz</a:t>
             </a:r>
             <a:r>
-              <a:rPr sz="850" lang="zh-TW" dirty="0">
+              <a:rPr sz="800" lang="zh-TW" dirty="0">
                 <a:solidFill>
                   <a:srgbClr val="000000"/>
                 </a:solidFill>
@@ -2807,11 +2807,11 @@
                 <a:spcPts val="0"/>
               </a:spcBef>
               <a:spcAft>
-                <a:spcPts val="142"/>
-              </a:spcAft>
-            </a:pPr>
-            <a:r>
-              <a:rPr sz="850" lang="zh-TW" dirty="0">
+                <a:spcPts val="133"/>
+              </a:spcAft>
+            </a:pPr>
+            <a:r>
+              <a:rPr sz="800" lang="zh-TW" dirty="0">
                 <a:solidFill>
                   <a:srgbClr val="000000"/>
                 </a:solidFill>
@@ -2822,7 +2822,7 @@
               <a:t>這代表什麼？代表</a:t>
             </a:r>
             <a:r>
-              <a:rPr sz="850" b="1" lang="zh-TW" dirty="0">
+              <a:rPr sz="800" b="1" lang="zh-TW" dirty="0">
                 <a:solidFill>
                   <a:srgbClr val="000000"/>
                 </a:solidFill>
@@ -2833,7 +2833,7 @@
               <a:t>同一顆光達，你買回來之後還可以選模式</a:t>
             </a:r>
             <a:r>
-              <a:rPr sz="850" lang="zh-TW" dirty="0">
+              <a:rPr sz="800" lang="zh-TW" dirty="0">
                 <a:solidFill>
                   <a:srgbClr val="000000"/>
                 </a:solidFill>
@@ -2851,11 +2851,165 @@
                 <a:spcPts val="0"/>
               </a:spcBef>
               <a:spcAft>
-                <a:spcPts val="142"/>
-              </a:spcAft>
-            </a:pPr>
-            <a:r>
-              <a:rPr sz="850" lang="zh-TW" dirty="0">
+                <a:spcPts val="133"/>
+              </a:spcAft>
+            </a:pPr>
+            <a:r>
+              <a:rPr sz="800" lang="zh-TW" dirty="0">
+                <a:solidFill>
+                  <a:srgbClr val="000000"/>
+                </a:solidFill>
+                <a:latin typeface="Arial Unicode MS"/>
+                <a:ea typeface="Arial Unicode MS"/>
+                <a:cs typeface="Arial Unicode MS"/>
+              </a:rPr>
+              <a:t>這裡要停一下，因為有一個坑：</a:t>
+            </a:r>
+            <a:r>
+              <a:rPr sz="800" b="1" lang="zh-TW" dirty="0">
+                <a:solidFill>
+                  <a:srgbClr val="000000"/>
+                </a:solidFill>
+                <a:latin typeface="Arial Unicode MS"/>
+                <a:ea typeface="Arial Unicode MS"/>
+                <a:cs typeface="Arial Unicode MS"/>
+              </a:rPr>
+              <a:t>同樣是用斜線隔開的三個數字，意思可能完全不一樣。</a:t>
+            </a:r>
+            <a:r>
+              <a:rPr sz="800" lang="zh-TW" dirty="0">
+                <a:solidFill>
+                  <a:srgbClr val="000000"/>
+                </a:solidFill>
+                <a:latin typeface="Arial Unicode MS"/>
+                <a:ea typeface="Arial Unicode MS"/>
+                <a:cs typeface="Arial Unicode MS"/>
+              </a:rPr>
+              <a:t>各位回頭看規格表最上面那兩行——Vertical Resolution 寫 </a:t>
+            </a:r>
+            <a:r>
+              <a:rPr sz="800" b="1" lang="zh-TW" dirty="0">
+                <a:solidFill>
+                  <a:srgbClr val="000000"/>
+                </a:solidFill>
+                <a:latin typeface="Arial Unicode MS"/>
+                <a:ea typeface="Arial Unicode MS"/>
+                <a:cs typeface="Arial Unicode MS"/>
+              </a:rPr>
+              <a:t>32 / 64 / 128</a:t>
+            </a:r>
+            <a:r>
+              <a:rPr sz="800" lang="zh-TW" dirty="0">
+                <a:solidFill>
+                  <a:srgbClr val="000000"/>
+                </a:solidFill>
+                <a:latin typeface="Arial Unicode MS"/>
+                <a:ea typeface="Arial Unicode MS"/>
+                <a:cs typeface="Arial Unicode MS"/>
+              </a:rPr>
+              <a:t>，Horizontal Resolution 寫 </a:t>
+            </a:r>
+            <a:r>
+              <a:rPr sz="800" b="1" lang="zh-TW" dirty="0">
+                <a:solidFill>
+                  <a:srgbClr val="000000"/>
+                </a:solidFill>
+                <a:latin typeface="Arial Unicode MS"/>
+                <a:ea typeface="Arial Unicode MS"/>
+                <a:cs typeface="Arial Unicode MS"/>
+              </a:rPr>
+              <a:t>512 / 1024 / 2048</a:t>
+            </a:r>
+            <a:r>
+              <a:rPr sz="800" lang="zh-TW" dirty="0">
+                <a:solidFill>
+                  <a:srgbClr val="000000"/>
+                </a:solidFill>
+                <a:latin typeface="Arial Unicode MS"/>
+                <a:ea typeface="Arial Unicode MS"/>
+                <a:cs typeface="Arial Unicode MS"/>
+              </a:rPr>
+              <a:t>。長得一模一樣，可是：上面那排是</a:t>
+            </a:r>
+            <a:r>
+              <a:rPr sz="800" b="1" lang="zh-TW" dirty="0">
+                <a:solidFill>
+                  <a:srgbClr val="000000"/>
+                </a:solidFill>
+                <a:latin typeface="Arial Unicode MS"/>
+                <a:ea typeface="Arial Unicode MS"/>
+                <a:cs typeface="Arial Unicode MS"/>
+              </a:rPr>
+              <a:t>三種不同的產品</a:t>
+            </a:r>
+            <a:r>
+              <a:rPr sz="800" lang="zh-TW" dirty="0">
+                <a:solidFill>
+                  <a:srgbClr val="000000"/>
+                </a:solidFill>
+                <a:latin typeface="Arial Unicode MS"/>
+                <a:ea typeface="Arial Unicode MS"/>
+                <a:cs typeface="Arial Unicode MS"/>
+              </a:rPr>
+              <a:t>，這份 datasheet 整個 OS1 家族共用，你買的這一顆是 OS1-64，另外兩個買不到；下面那排才是</a:t>
+            </a:r>
+            <a:r>
+              <a:rPr sz="800" b="1" lang="zh-TW" dirty="0">
+                <a:solidFill>
+                  <a:srgbClr val="000000"/>
+                </a:solidFill>
+                <a:latin typeface="Arial Unicode MS"/>
+                <a:ea typeface="Arial Unicode MS"/>
+                <a:cs typeface="Arial Unicode MS"/>
+              </a:rPr>
+              <a:t>同一顆的三種模式</a:t>
+            </a:r>
+            <a:r>
+              <a:rPr sz="800" lang="zh-TW" dirty="0">
+                <a:solidFill>
+                  <a:srgbClr val="000000"/>
+                </a:solidFill>
+                <a:latin typeface="Arial Unicode MS"/>
+                <a:ea typeface="Arial Unicode MS"/>
+                <a:cs typeface="Arial Unicode MS"/>
+              </a:rPr>
+              <a:t>，可以自己切。所以看到斜線先問一句：</a:t>
+            </a:r>
+            <a:r>
+              <a:rPr sz="800" b="1" lang="zh-TW" dirty="0">
+                <a:solidFill>
+                  <a:srgbClr val="000000"/>
+                </a:solidFill>
+                <a:latin typeface="Arial Unicode MS"/>
+                <a:ea typeface="Arial Unicode MS"/>
+                <a:cs typeface="Arial Unicode MS"/>
+              </a:rPr>
+              <a:t>這是三種貨，還是一種貨的三個模式？</a:t>
+            </a:r>
+            <a:r>
+              <a:rPr sz="800" lang="zh-TW" dirty="0">
+                <a:solidFill>
+                  <a:srgbClr val="000000"/>
+                </a:solidFill>
+                <a:latin typeface="Arial Unicode MS"/>
+                <a:ea typeface="Arial Unicode MS"/>
+                <a:cs typeface="Arial Unicode MS"/>
+              </a:rPr>
+              <a:t>
+</a:t>
+            </a:r>
+          </a:p>
+          <a:p>
+            <a:pPr algn="l">
+              <a:spcBef>
+                <a:spcPts val="0"/>
+              </a:spcBef>
+              <a:spcAft>
+                <a:spcPts val="133"/>
+              </a:spcAft>
+            </a:pPr>
+            <a:r>
+              <a:rPr sz="800" lang="zh-TW" dirty="0">
                 <a:solidFill>
                   <a:srgbClr val="000000"/>
                 </a:solidFill>
@@ -2866,7 +3020,7 @@
               <a:t>第六張那張表我算給各位看，四十公尺的行人身上，OS1 有九個點。那是在 1024 點一圈的模式下算的。切到 2048 點一圈，左右的點加倍，九個點就變成</a:t>
             </a:r>
             <a:r>
-              <a:rPr sz="850" b="1" lang="zh-TW" dirty="0">
+              <a:rPr sz="800" b="1" lang="zh-TW" dirty="0">
                 <a:solidFill>
                   <a:srgbClr val="000000"/>
                 </a:solidFill>
@@ -2877,7 +3031,7 @@
               <a:t>十八個點</a:t>
             </a:r>
             <a:r>
-              <a:rPr sz="850" lang="zh-TW" dirty="0">
+              <a:rPr sz="800" lang="zh-TW" dirty="0">
                 <a:solidFill>
                   <a:srgbClr val="000000"/>
                 </a:solidFill>
@@ -2895,11 +3049,11 @@
                 <a:spcPts val="0"/>
               </a:spcBef>
               <a:spcAft>
-                <a:spcPts val="142"/>
-              </a:spcAft>
-            </a:pPr>
-            <a:r>
-              <a:rPr sz="850" lang="zh-TW" dirty="0">
+                <a:spcPts val="133"/>
+              </a:spcAft>
+            </a:pPr>
+            <a:r>
+              <a:rPr sz="800" lang="zh-TW" dirty="0">
                 <a:solidFill>
                   <a:srgbClr val="000000"/>
                 </a:solidFill>
@@ -2910,7 +3064,7 @@
               <a:t>同一顆硬體，同一個人站在同一個位置，設定不一樣，結果就差一倍。所以買之前要問清楚：</a:t>
             </a:r>
             <a:r>
-              <a:rPr sz="850" b="1" lang="zh-TW" dirty="0">
+              <a:rPr sz="800" b="1" lang="zh-TW" dirty="0">
                 <a:solidFill>
                   <a:srgbClr val="000000"/>
                 </a:solidFill>
@@ -2921,7 +3075,7 @@
               <a:t>廠商標的那個漂亮數字，是在哪一個模式下量的？</a:t>
             </a:r>
             <a:r>
-              <a:rPr sz="850" lang="zh-TW" dirty="0">
+              <a:rPr sz="800" lang="zh-TW" dirty="0">
                 <a:solidFill>
                   <a:srgbClr val="000000"/>
                 </a:solidFill>
@@ -2939,11 +3093,11 @@
                 <a:spcPts val="0"/>
               </a:spcBef>
               <a:spcAft>
-                <a:spcPts val="142"/>
-              </a:spcAft>
-            </a:pPr>
-            <a:r>
-              <a:rPr sz="850" lang="zh-TW" dirty="0">
+                <a:spcPts val="133"/>
+              </a:spcAft>
+            </a:pPr>
+            <a:r>
+              <a:rPr sz="800" lang="zh-TW" dirty="0">
                 <a:solidFill>
                   <a:srgbClr val="000000"/>
                 </a:solidFill>
@@ -2961,11 +3115,11 @@
                 <a:spcPts val="0"/>
               </a:spcBef>
               <a:spcAft>
-                <a:spcPts val="142"/>
-              </a:spcAft>
-            </a:pPr>
-            <a:r>
-              <a:rPr sz="850" lang="zh-TW" dirty="0">
+                <a:spcPts val="133"/>
+              </a:spcAft>
+            </a:pPr>
+            <a:r>
+              <a:rPr sz="800" lang="zh-TW" dirty="0">
                 <a:solidFill>
                   <a:srgbClr val="000000"/>
                 </a:solidFill>

--- a/第五週(10-08)/第五週_第1節_簡報.pptx
+++ b/第五週(10-08)/第五週_第1節_簡報.pptx
@@ -442,11 +442,11 @@
                 <a:spcPts val="0"/>
               </a:spcBef>
               <a:spcAft>
-                <a:spcPts val="142"/>
-              </a:spcAft>
-            </a:pPr>
-            <a:r>
-              <a:rPr sz="850" b="1" lang="zh-TW" dirty="0">
+                <a:spcPts val="133"/>
+              </a:spcAft>
+            </a:pPr>
+            <a:r>
+              <a:rPr sz="800" b="1" lang="zh-TW" dirty="0">
                 <a:solidFill>
                   <a:srgbClr val="000000"/>
                 </a:solidFill>
@@ -457,7 +457,7 @@
               <a:t>▍這一張要做什麼</a:t>
             </a:r>
             <a:r>
-              <a:rPr sz="850" lang="zh-TW" dirty="0">
+              <a:rPr sz="800" lang="zh-TW" dirty="0">
                 <a:solidFill>
                   <a:srgbClr val="000000"/>
                 </a:solidFill>
@@ -475,11 +475,11 @@
                 <a:spcPts val="0"/>
               </a:spcBef>
               <a:spcAft>
-                <a:spcPts val="142"/>
-              </a:spcAft>
-            </a:pPr>
-            <a:r>
-              <a:rPr sz="850" lang="zh-TW" dirty="0">
+                <a:spcPts val="133"/>
+              </a:spcAft>
+            </a:pPr>
+            <a:r>
+              <a:rPr sz="800" lang="zh-TW" dirty="0">
                 <a:solidFill>
                   <a:srgbClr val="000000"/>
                 </a:solidFill>
@@ -497,11 +497,11 @@
                 <a:spcPts val="0"/>
               </a:spcBef>
               <a:spcAft>
-                <a:spcPts val="142"/>
-              </a:spcAft>
-            </a:pPr>
-            <a:r>
-              <a:rPr sz="850" b="1" lang="zh-TW" dirty="0">
+                <a:spcPts val="133"/>
+              </a:spcAft>
+            </a:pPr>
+            <a:r>
+              <a:rPr sz="800" b="1" lang="zh-TW" dirty="0">
                 <a:solidFill>
                   <a:srgbClr val="000000"/>
                 </a:solidFill>
@@ -512,7 +512,7 @@
               <a:t>▍畫面上圈這裡</a:t>
             </a:r>
             <a:r>
-              <a:rPr sz="850" lang="zh-TW" dirty="0">
+              <a:rPr sz="800" lang="zh-TW" dirty="0">
                 <a:solidFill>
                   <a:srgbClr val="000000"/>
                 </a:solidFill>
@@ -530,11 +530,11 @@
                 <a:spcPts val="0"/>
               </a:spcBef>
               <a:spcAft>
-                <a:spcPts val="142"/>
-              </a:spcAft>
-            </a:pPr>
-            <a:r>
-              <a:rPr sz="850" lang="zh-TW" dirty="0">
+                <a:spcPts val="133"/>
+              </a:spcAft>
+            </a:pPr>
+            <a:r>
+              <a:rPr sz="800" lang="zh-TW" dirty="0">
                 <a:solidFill>
                   <a:srgbClr val="000000"/>
                 </a:solidFill>
@@ -552,11 +552,11 @@
                 <a:spcPts val="0"/>
               </a:spcBef>
               <a:spcAft>
-                <a:spcPts val="142"/>
-              </a:spcAft>
-            </a:pPr>
-            <a:r>
-              <a:rPr sz="850" b="1" lang="zh-TW" dirty="0">
+                <a:spcPts val="133"/>
+              </a:spcAft>
+            </a:pPr>
+            <a:r>
+              <a:rPr sz="800" b="1" lang="zh-TW" dirty="0">
                 <a:solidFill>
                   <a:srgbClr val="000000"/>
                 </a:solidFill>
@@ -567,7 +567,7 @@
               <a:t>▍以下照著唸</a:t>
             </a:r>
             <a:r>
-              <a:rPr sz="850" lang="zh-TW" dirty="0">
+              <a:rPr sz="800" lang="zh-TW" dirty="0">
                 <a:solidFill>
                   <a:srgbClr val="000000"/>
                 </a:solidFill>
@@ -585,11 +585,11 @@
                 <a:spcPts val="0"/>
               </a:spcBef>
               <a:spcAft>
-                <a:spcPts val="142"/>
-              </a:spcAft>
-            </a:pPr>
-            <a:r>
-              <a:rPr sz="850" lang="zh-TW" dirty="0">
+                <a:spcPts val="133"/>
+              </a:spcAft>
+            </a:pPr>
+            <a:r>
+              <a:rPr sz="800" lang="zh-TW" dirty="0">
                 <a:solidFill>
                   <a:srgbClr val="000000"/>
                 </a:solidFill>
@@ -607,11 +607,11 @@
                 <a:spcPts val="0"/>
               </a:spcBef>
               <a:spcAft>
-                <a:spcPts val="142"/>
-              </a:spcAft>
-            </a:pPr>
-            <a:r>
-              <a:rPr sz="850" lang="zh-TW" dirty="0">
+                <a:spcPts val="133"/>
+              </a:spcAft>
+            </a:pPr>
+            <a:r>
+              <a:rPr sz="800" lang="zh-TW" dirty="0">
                 <a:solidFill>
                   <a:srgbClr val="000000"/>
                 </a:solidFill>
@@ -629,11 +629,11 @@
                 <a:spcPts val="0"/>
               </a:spcBef>
               <a:spcAft>
-                <a:spcPts val="142"/>
-              </a:spcAft>
-            </a:pPr>
-            <a:r>
-              <a:rPr sz="850" lang="zh-TW" dirty="0">
+                <a:spcPts val="133"/>
+              </a:spcAft>
+            </a:pPr>
+            <a:r>
+              <a:rPr sz="800" lang="zh-TW" dirty="0">
                 <a:solidFill>
                   <a:srgbClr val="000000"/>
                 </a:solidFill>
@@ -651,11 +651,11 @@
                 <a:spcPts val="0"/>
               </a:spcBef>
               <a:spcAft>
-                <a:spcPts val="142"/>
-              </a:spcAft>
-            </a:pPr>
-            <a:r>
-              <a:rPr sz="850" lang="zh-TW" dirty="0">
+                <a:spcPts val="133"/>
+              </a:spcAft>
+            </a:pPr>
+            <a:r>
+              <a:rPr sz="800" lang="zh-TW" dirty="0">
                 <a:solidFill>
                   <a:srgbClr val="000000"/>
                 </a:solidFill>
@@ -666,7 +666,7 @@
               <a:t>那兩週用的數字，全部是</a:t>
             </a:r>
             <a:r>
-              <a:rPr sz="850" b="1" lang="zh-TW" dirty="0">
+              <a:rPr sz="800" b="1" lang="zh-TW" dirty="0">
                 <a:solidFill>
                   <a:srgbClr val="000000"/>
                 </a:solidFill>
@@ -677,7 +677,7 @@
               <a:t>我設定的教學模型</a:t>
             </a:r>
             <a:r>
-              <a:rPr sz="850" lang="zh-TW" dirty="0">
+              <a:rPr sz="800" lang="zh-TW" dirty="0">
                 <a:solidFill>
                   <a:srgbClr val="000000"/>
                 </a:solidFill>
@@ -695,11 +695,11 @@
                 <a:spcPts val="0"/>
               </a:spcBef>
               <a:spcAft>
-                <a:spcPts val="142"/>
-              </a:spcAft>
-            </a:pPr>
-            <a:r>
-              <a:rPr sz="850" lang="zh-TW" dirty="0">
+                <a:spcPts val="133"/>
+              </a:spcAft>
+            </a:pPr>
+            <a:r>
+              <a:rPr sz="800" lang="zh-TW" dirty="0">
                 <a:solidFill>
                   <a:srgbClr val="000000"/>
                 </a:solidFill>
@@ -710,7 +710,7 @@
               <a:t>今天不一樣。今天我把</a:t>
             </a:r>
             <a:r>
-              <a:rPr sz="850" b="1" lang="zh-TW" dirty="0">
+              <a:rPr sz="800" b="1" lang="zh-TW" dirty="0">
                 <a:solidFill>
                   <a:srgbClr val="000000"/>
                 </a:solidFill>
@@ -721,7 +721,7 @@
               <a:t>真的規格表</a:t>
             </a:r>
             <a:r>
-              <a:rPr sz="850" lang="zh-TW" dirty="0">
+              <a:rPr sz="800" lang="zh-TW" dirty="0">
                 <a:solidFill>
                   <a:srgbClr val="000000"/>
                 </a:solidFill>
@@ -732,7 +732,7 @@
               <a:t>攤開來，上面是真的廠商、真的型號、真的數字。我們要做的事只有一件：</a:t>
             </a:r>
             <a:r>
-              <a:rPr sz="850" b="1" lang="zh-TW" dirty="0">
+              <a:rPr sz="800" b="1" lang="zh-TW" dirty="0">
                 <a:solidFill>
                   <a:srgbClr val="000000"/>
                 </a:solidFill>
@@ -743,7 +743,7 @@
               <a:t>把前兩週拉過的那三個滑桿，在規格表上一行一行找出來。</a:t>
             </a:r>
             <a:r>
-              <a:rPr sz="850" lang="zh-TW" dirty="0">
+              <a:rPr sz="800" lang="zh-TW" dirty="0">
                 <a:solidFill>
                   <a:srgbClr val="000000"/>
                 </a:solidFill>
@@ -761,11 +761,11 @@
                 <a:spcPts val="0"/>
               </a:spcBef>
               <a:spcAft>
-                <a:spcPts val="142"/>
-              </a:spcAft>
-            </a:pPr>
-            <a:r>
-              <a:rPr sz="850" lang="zh-TW" dirty="0">
+                <a:spcPts val="133"/>
+              </a:spcAft>
+            </a:pPr>
+            <a:r>
+              <a:rPr sz="800" lang="zh-TW" dirty="0">
                 <a:solidFill>
                   <a:srgbClr val="000000"/>
                 </a:solidFill>
@@ -783,11 +783,11 @@
                 <a:spcPts val="0"/>
               </a:spcBef>
               <a:spcAft>
-                <a:spcPts val="142"/>
-              </a:spcAft>
-            </a:pPr>
-            <a:r>
-              <a:rPr sz="850" lang="zh-TW" dirty="0">
+                <a:spcPts val="133"/>
+              </a:spcAft>
+            </a:pPr>
+            <a:r>
+              <a:rPr sz="800" lang="zh-TW" dirty="0">
                 <a:solidFill>
                   <a:srgbClr val="000000"/>
                 </a:solidFill>
@@ -798,7 +798,7 @@
               <a:t>第一，規格表上有</a:t>
             </a:r>
             <a:r>
-              <a:rPr sz="850" b="1" lang="zh-TW" dirty="0">
+              <a:rPr sz="800" b="1" lang="zh-TW" dirty="0">
                 <a:solidFill>
                   <a:srgbClr val="000000"/>
                 </a:solidFill>
@@ -809,7 +809,7 @@
               <a:t>第四個數字</a:t>
             </a:r>
             <a:r>
-              <a:rPr sz="850" lang="zh-TW" dirty="0">
+              <a:rPr sz="800" lang="zh-TW" dirty="0">
                 <a:solidFill>
                   <a:srgbClr val="000000"/>
                 </a:solidFill>
@@ -827,11 +827,11 @@
                 <a:spcPts val="0"/>
               </a:spcBef>
               <a:spcAft>
-                <a:spcPts val="142"/>
-              </a:spcAft>
-            </a:pPr>
-            <a:r>
-              <a:rPr sz="850" lang="zh-TW" dirty="0">
+                <a:spcPts val="133"/>
+              </a:spcAft>
+            </a:pPr>
+            <a:r>
+              <a:rPr sz="800" lang="zh-TW" dirty="0">
                 <a:solidFill>
                   <a:srgbClr val="000000"/>
                 </a:solidFill>
@@ -842,7 +842,7 @@
               <a:t>第二，相機的規格表上，居然</a:t>
             </a:r>
             <a:r>
-              <a:rPr sz="850" b="1" lang="zh-TW" dirty="0">
+              <a:rPr sz="800" b="1" lang="zh-TW" dirty="0">
                 <a:solidFill>
                   <a:srgbClr val="000000"/>
                 </a:solidFill>
@@ -853,7 +853,7 @@
               <a:t>沒有視野、也沒有測距</a:t>
             </a:r>
             <a:r>
-              <a:rPr sz="850" lang="zh-TW" dirty="0">
+              <a:rPr sz="800" lang="zh-TW" dirty="0">
                 <a:solidFill>
                   <a:srgbClr val="000000"/>
                 </a:solidFill>
@@ -871,11 +871,11 @@
                 <a:spcPts val="0"/>
               </a:spcBef>
               <a:spcAft>
-                <a:spcPts val="142"/>
-              </a:spcAft>
-            </a:pPr>
-            <a:r>
-              <a:rPr sz="850" lang="zh-TW" dirty="0">
+                <a:spcPts val="133"/>
+              </a:spcAft>
+            </a:pPr>
+            <a:r>
+              <a:rPr sz="800" lang="zh-TW" dirty="0">
                 <a:solidFill>
                   <a:srgbClr val="000000"/>
                 </a:solidFill>
@@ -886,7 +886,7 @@
               <a:t>第三，同樣一顆光達，規格表上會寫</a:t>
             </a:r>
             <a:r>
-              <a:rPr sz="850" b="1" lang="zh-TW" dirty="0">
+              <a:rPr sz="800" b="1" lang="zh-TW" dirty="0">
                 <a:solidFill>
                   <a:srgbClr val="000000"/>
                 </a:solidFill>
@@ -897,7 +897,7 @@
               <a:t>兩個測距</a:t>
             </a:r>
             <a:r>
-              <a:rPr sz="850" lang="zh-TW" dirty="0">
+              <a:rPr sz="800" lang="zh-TW" dirty="0">
                 <a:solidFill>
                   <a:srgbClr val="000000"/>
                 </a:solidFill>
@@ -915,19 +915,173 @@
                 <a:spcPts val="0"/>
               </a:spcBef>
               <a:spcAft>
-                <a:spcPts val="142"/>
-              </a:spcAft>
-            </a:pPr>
-            <a:r>
-              <a:rPr sz="850" lang="zh-TW" dirty="0">
-                <a:solidFill>
-                  <a:srgbClr val="000000"/>
-                </a:solidFill>
-                <a:latin typeface="Arial Unicode MS"/>
-                <a:ea typeface="Arial Unicode MS"/>
-                <a:cs typeface="Arial Unicode MS"/>
-              </a:rPr>
-              <a:t>下課前我希望每一位都做得到一件事：拿到一張沒看過的規格表，找得出這四個數字，而且知道哪一行在騙你。</a:t>
+                <a:spcPts val="133"/>
+              </a:spcAft>
+            </a:pPr>
+            <a:r>
+              <a:rPr sz="800" lang="zh-TW" dirty="0">
+                <a:solidFill>
+                  <a:srgbClr val="000000"/>
+                </a:solidFill>
+                <a:latin typeface="Arial Unicode MS"/>
+                <a:ea typeface="Arial Unicode MS"/>
+                <a:cs typeface="Arial Unicode MS"/>
+              </a:rPr>
+              <a:t>下課前我希望每一位都做得到一件事：拿到一張沒看過的規格表，找得出這四個數字，而且</a:t>
+            </a:r>
+            <a:r>
+              <a:rPr sz="800" b="1" lang="zh-TW" dirty="0">
+                <a:solidFill>
+                  <a:srgbClr val="000000"/>
+                </a:solidFill>
+                <a:latin typeface="Arial Unicode MS"/>
+                <a:ea typeface="Arial Unicode MS"/>
+                <a:cs typeface="Arial Unicode MS"/>
+              </a:rPr>
+              <a:t>知道每一個數字後面綁著什麼條件</a:t>
+            </a:r>
+            <a:r>
+              <a:rPr sz="800" lang="zh-TW" dirty="0">
+                <a:solidFill>
+                  <a:srgbClr val="000000"/>
+                </a:solidFill>
+                <a:latin typeface="Arial Unicode MS"/>
+                <a:ea typeface="Arial Unicode MS"/>
+                <a:cs typeface="Arial Unicode MS"/>
+              </a:rPr>
+              <a:t>。
+</a:t>
+            </a:r>
+          </a:p>
+          <a:p>
+            <a:pPr algn="l">
+              <a:spcBef>
+                <a:spcPts val="0"/>
+              </a:spcBef>
+              <a:spcAft>
+                <a:spcPts val="133"/>
+              </a:spcAft>
+            </a:pPr>
+            <a:r>
+              <a:rPr sz="800" lang="zh-TW" dirty="0">
+                <a:solidFill>
+                  <a:srgbClr val="000000"/>
+                </a:solidFill>
+                <a:latin typeface="Arial Unicode MS"/>
+                <a:ea typeface="Arial Unicode MS"/>
+                <a:cs typeface="Arial Unicode MS"/>
+              </a:rPr>
+              <a:t>先講清楚一件事，免得各位誤會：</a:t>
+            </a:r>
+            <a:r>
+              <a:rPr sz="800" b="1" lang="zh-TW" dirty="0">
+                <a:solidFill>
+                  <a:srgbClr val="000000"/>
+                </a:solidFill>
+                <a:latin typeface="Arial Unicode MS"/>
+                <a:ea typeface="Arial Unicode MS"/>
+                <a:cs typeface="Arial Unicode MS"/>
+              </a:rPr>
+              <a:t>規格表不會騙人。</a:t>
+            </a:r>
+            <a:r>
+              <a:rPr sz="800" lang="zh-TW" dirty="0">
+                <a:solidFill>
+                  <a:srgbClr val="000000"/>
+                </a:solidFill>
+                <a:latin typeface="Arial Unicode MS"/>
+                <a:ea typeface="Arial Unicode MS"/>
+                <a:cs typeface="Arial Unicode MS"/>
+              </a:rPr>
+              <a:t>今天會看的三份都是真的廠商文件，上面每一行都是真的。問題出在三個地方：廠商在型錄封面上</a:t>
+            </a:r>
+            <a:r>
+              <a:rPr sz="800" b="1" lang="zh-TW" dirty="0">
+                <a:solidFill>
+                  <a:srgbClr val="000000"/>
+                </a:solidFill>
+                <a:latin typeface="Arial Unicode MS"/>
+                <a:ea typeface="Arial Unicode MS"/>
+                <a:cs typeface="Arial Unicode MS"/>
+              </a:rPr>
+              <a:t>只挑好看的那個數字印</a:t>
+            </a:r>
+            <a:r>
+              <a:rPr sz="800" lang="zh-TW" dirty="0">
+                <a:solidFill>
+                  <a:srgbClr val="000000"/>
+                </a:solidFill>
+                <a:latin typeface="Arial Unicode MS"/>
+                <a:ea typeface="Arial Unicode MS"/>
+                <a:cs typeface="Arial Unicode MS"/>
+              </a:rPr>
+              <a:t>；轉手的賣家把條件</a:t>
+            </a:r>
+            <a:r>
+              <a:rPr sz="800" b="1" lang="zh-TW" dirty="0">
+                <a:solidFill>
+                  <a:srgbClr val="000000"/>
+                </a:solidFill>
+                <a:latin typeface="Arial Unicode MS"/>
+                <a:ea typeface="Arial Unicode MS"/>
+                <a:cs typeface="Arial Unicode MS"/>
+              </a:rPr>
+              <a:t>抄掉了</a:t>
+            </a:r>
+            <a:r>
+              <a:rPr sz="800" lang="zh-TW" dirty="0">
+                <a:solidFill>
+                  <a:srgbClr val="000000"/>
+                </a:solidFill>
+                <a:latin typeface="Arial Unicode MS"/>
+                <a:ea typeface="Arial Unicode MS"/>
+                <a:cs typeface="Arial Unicode MS"/>
+              </a:rPr>
+              <a:t>；還有最常見的——</a:t>
+            </a:r>
+            <a:r>
+              <a:rPr sz="800" b="1" lang="zh-TW" dirty="0">
+                <a:solidFill>
+                  <a:srgbClr val="000000"/>
+                </a:solidFill>
+                <a:latin typeface="Arial Unicode MS"/>
+                <a:ea typeface="Arial Unicode MS"/>
+                <a:cs typeface="Arial Unicode MS"/>
+              </a:rPr>
+              <a:t>我們自己讀漏</a:t>
+            </a:r>
+            <a:r>
+              <a:rPr sz="800" lang="zh-TW" dirty="0">
+                <a:solidFill>
+                  <a:srgbClr val="000000"/>
+                </a:solidFill>
+                <a:latin typeface="Arial Unicode MS"/>
+                <a:ea typeface="Arial Unicode MS"/>
+                <a:cs typeface="Arial Unicode MS"/>
+              </a:rPr>
+              <a:t>，看到大數字就以為它大。各位今天要練的不是懷疑廠商，是</a:t>
+            </a:r>
+            <a:r>
+              <a:rPr sz="800" b="1" lang="zh-TW" dirty="0">
+                <a:solidFill>
+                  <a:srgbClr val="000000"/>
+                </a:solidFill>
+                <a:latin typeface="Arial Unicode MS"/>
+                <a:ea typeface="Arial Unicode MS"/>
+                <a:cs typeface="Arial Unicode MS"/>
+              </a:rPr>
+              <a:t>把條件讀出來</a:t>
+            </a:r>
+            <a:r>
+              <a:rPr sz="800" lang="zh-TW" dirty="0">
+                <a:solidFill>
+                  <a:srgbClr val="000000"/>
+                </a:solidFill>
+                <a:latin typeface="Arial Unicode MS"/>
+                <a:ea typeface="Arial Unicode MS"/>
+                <a:cs typeface="Arial Unicode MS"/>
+              </a:rPr>
+              <a:t>。</a:t>
             </a:r>
           </a:p>
         </p:txBody>

--- a/第五週(10-08)/第五週_第1節_簡報.pptx
+++ b/第五週(10-08)/第五週_第1節_簡報.pptx
@@ -5206,7 +5206,51 @@
                 <a:ea typeface="Arial Unicode MS"/>
                 <a:cs typeface="Arial Unicode MS"/>
               </a:rPr>
-              <a:t>下一節我們往規格表的更裡面走。今天講的這幾行，其實只是表的第一頁；第二頁還有一堆數字，我挑三個最容易害你出事的來講。
+              <a:t>下一節我們往規格表的更裡面走。今天講的這幾行，是</a:t>
+            </a:r>
+            <a:r>
+              <a:rPr sz="1100" b="1" lang="zh-TW" dirty="0">
+                <a:solidFill>
+                  <a:srgbClr val="000000"/>
+                </a:solidFill>
+                <a:latin typeface="Arial Unicode MS"/>
+                <a:ea typeface="Arial Unicode MS"/>
+                <a:cs typeface="Arial Unicode MS"/>
+              </a:rPr>
+              <a:t>第一層</a:t>
+            </a:r>
+            <a:r>
+              <a:rPr sz="1100" lang="zh-TW" dirty="0">
+                <a:solidFill>
+                  <a:srgbClr val="000000"/>
+                </a:solidFill>
+                <a:latin typeface="Arial Unicode MS"/>
+                <a:ea typeface="Arial Unicode MS"/>
+                <a:cs typeface="Arial Unicode MS"/>
+              </a:rPr>
+              <a:t>——所有人都會看的那幾行；</a:t>
+            </a:r>
+            <a:r>
+              <a:rPr sz="1100" b="1" lang="zh-TW" dirty="0">
+                <a:solidFill>
+                  <a:srgbClr val="000000"/>
+                </a:solidFill>
+                <a:latin typeface="Arial Unicode MS"/>
+                <a:ea typeface="Arial Unicode MS"/>
+                <a:cs typeface="Arial Unicode MS"/>
+              </a:rPr>
+              <a:t>第二層</a:t>
+            </a:r>
+            <a:r>
+              <a:rPr sz="1100" lang="zh-TW" dirty="0">
+                <a:solidFill>
+                  <a:srgbClr val="000000"/>
+                </a:solidFill>
+                <a:latin typeface="Arial Unicode MS"/>
+                <a:ea typeface="Arial Unicode MS"/>
+                <a:cs typeface="Arial Unicode MS"/>
+              </a:rPr>
+              <a:t>還有一堆數字很少人讀，我挑三個最容易害你出事的來講。（第一層、第二層是我分的，不是 PDF 的頁碼。）
 </a:t>
             </a:r>
           </a:p>

--- a/第五週(10-08)/第五週_第1節_簡報.pptx
+++ b/第五週(10-08)/第五週_第1節_簡報.pptx
@@ -7384,7 +7384,7 @@
                 <a:ea typeface="Arial Unicode MS"/>
                 <a:cs typeface="Arial Unicode MS"/>
               </a:rPr>
-              <a:t>左表由上往下圈：Number of channels、Horizontal FOV 與 Vertical FOV、再圈 Horizontal resolution 那一行的 Far-field 與 (10 Hz)。那兩個括號是今天的重點。
+              <a:t>左表由上往下圈：Number of channels、Horizontal FOV 與 Vertical FOV、再圈 Horizontal resolution 那一行的 Far-field 與 (10 Hz)。那兩個條件是今天的重點；白板上寫「遠場 &gt;7.2 m、近場 0.5–7.2 m」。
 </a:t>
             </a:r>
           </a:p>
@@ -7483,19 +7483,8 @@
                 <a:ea typeface="Arial Unicode MS"/>
                 <a:cs typeface="Arial Unicode MS"/>
               </a:rPr>
-              <a:t>這一份跟剛剛那張不一樣。它不是 datasheet，是使用手冊裡面的規格那一節，一共九行。一樣從上往下看。
-</a:t>
-            </a:r>
-          </a:p>
-          <a:p>
-            <a:pPr algn="l">
-              <a:spcBef>
-                <a:spcPts val="0"/>
-              </a:spcBef>
-              <a:spcAft>
-                <a:spcPts val="133"/>
-              </a:spcAft>
-            </a:pPr>
+              <a:t>這一份跟剛剛那張不一樣：它不是 datasheet，是使用手冊裡面的規格那一節，一共九行。一樣從上往下看。</a:t>
+            </a:r>
             <a:r>
               <a:rPr sz="800" b="1" lang="zh-TW" dirty="0">
                 <a:solidFill>
@@ -7670,7 +7659,227 @@
                 <a:ea typeface="Arial Unicode MS"/>
                 <a:cs typeface="Arial Unicode MS"/>
               </a:rPr>
-              <a:t>。換成 20 Hz 就變 0.2 度。又是一個有條件的數字，跟剛剛 OS1 的 80% 和 10% 是同一種陷阱。
+              <a:t>。一個數字，兩個條件。
+</a:t>
+            </a:r>
+          </a:p>
+          <a:p>
+            <a:pPr algn="l">
+              <a:spcBef>
+                <a:spcPts val="0"/>
+              </a:spcBef>
+              <a:spcAft>
+                <a:spcPts val="133"/>
+              </a:spcAft>
+            </a:pPr>
+            <a:r>
+              <a:rPr sz="800" lang="zh-TW" dirty="0">
+                <a:solidFill>
+                  <a:srgbClr val="000000"/>
+                </a:solidFill>
+                <a:latin typeface="Arial Unicode MS"/>
+                <a:ea typeface="Arial Unicode MS"/>
+                <a:cs typeface="Arial Unicode MS"/>
+              </a:rPr>
+              <a:t>先講 </a:t>
+            </a:r>
+            <a:r>
+              <a:rPr sz="800" b="1" lang="zh-TW" dirty="0">
+                <a:solidFill>
+                  <a:srgbClr val="000000"/>
+                </a:solidFill>
+                <a:latin typeface="Arial Unicode MS"/>
+                <a:ea typeface="Arial Unicode MS"/>
+                <a:cs typeface="Arial Unicode MS"/>
+              </a:rPr>
+              <a:t>Far-field</a:t>
+            </a:r>
+            <a:r>
+              <a:rPr sz="800" lang="zh-TW" dirty="0">
+                <a:solidFill>
+                  <a:srgbClr val="000000"/>
+                </a:solidFill>
+                <a:latin typeface="Arial Unicode MS"/>
+                <a:ea typeface="Arial Unicode MS"/>
+                <a:cs typeface="Arial Unicode MS"/>
+              </a:rPr>
+              <a:t>。手冊上寫得很清楚：</a:t>
+            </a:r>
+            <a:r>
+              <a:rPr sz="800" b="1" lang="zh-TW" dirty="0">
+                <a:solidFill>
+                  <a:srgbClr val="000000"/>
+                </a:solidFill>
+                <a:latin typeface="Arial Unicode MS"/>
+                <a:ea typeface="Arial Unicode MS"/>
+                <a:cs typeface="Arial Unicode MS"/>
+              </a:rPr>
+              <a:t>遠場是超過七點二公尺，近場是零點五到七點二公尺</a:t>
+            </a:r>
+            <a:r>
+              <a:rPr sz="800" lang="zh-TW" dirty="0">
+                <a:solidFill>
+                  <a:srgbClr val="000000"/>
+                </a:solidFill>
+                <a:latin typeface="Arial Unicode MS"/>
+                <a:ea typeface="Arial Unicode MS"/>
+                <a:cs typeface="Arial Unicode MS"/>
+              </a:rPr>
+              <a:t>。這兩段的解析度不一樣——遠場左右 0.1 度、上下 0.2 度；</a:t>
+            </a:r>
+            <a:r>
+              <a:rPr sz="800" b="1" lang="zh-TW" dirty="0">
+                <a:solidFill>
+                  <a:srgbClr val="000000"/>
+                </a:solidFill>
+                <a:latin typeface="Arial Unicode MS"/>
+                <a:ea typeface="Arial Unicode MS"/>
+                <a:cs typeface="Arial Unicode MS"/>
+              </a:rPr>
+              <a:t>近場左右 0.2 度、上下 0.8 度</a:t>
+            </a:r>
+            <a:r>
+              <a:rPr sz="800" lang="zh-TW" dirty="0">
+                <a:solidFill>
+                  <a:srgbClr val="000000"/>
+                </a:solidFill>
+                <a:latin typeface="Arial Unicode MS"/>
+                <a:ea typeface="Arial Unicode MS"/>
+                <a:cs typeface="Arial Unicode MS"/>
+              </a:rPr>
+              <a:t>。
+</a:t>
+            </a:r>
+          </a:p>
+          <a:p>
+            <a:pPr algn="l">
+              <a:spcBef>
+                <a:spcPts val="0"/>
+              </a:spcBef>
+              <a:spcAft>
+                <a:spcPts val="133"/>
+              </a:spcAft>
+            </a:pPr>
+            <a:r>
+              <a:rPr sz="800" lang="zh-TW" dirty="0">
+                <a:solidFill>
+                  <a:srgbClr val="000000"/>
+                </a:solidFill>
+                <a:latin typeface="Arial Unicode MS"/>
+                <a:ea typeface="Arial Unicode MS"/>
+                <a:cs typeface="Arial Unicode MS"/>
+              </a:rPr>
+              <a:t>各位注意方向：</a:t>
+            </a:r>
+            <a:r>
+              <a:rPr sz="800" b="1" lang="zh-TW" dirty="0">
+                <a:solidFill>
+                  <a:srgbClr val="000000"/>
+                </a:solidFill>
+                <a:latin typeface="Arial Unicode MS"/>
+                <a:ea typeface="Arial Unicode MS"/>
+                <a:cs typeface="Arial Unicode MS"/>
+              </a:rPr>
+              <a:t>近的地方反而比較粗</a:t>
+            </a:r>
+            <a:r>
+              <a:rPr sz="800" lang="zh-TW" dirty="0">
+                <a:solidFill>
+                  <a:srgbClr val="000000"/>
+                </a:solidFill>
+                <a:latin typeface="Arial Unicode MS"/>
+                <a:ea typeface="Arial Unicode MS"/>
+                <a:cs typeface="Arial Unicode MS"/>
+              </a:rPr>
+              <a:t>，上下差了四倍。這跟直覺相反，為什麼？因為一百二十八條通道</a:t>
+            </a:r>
+            <a:r>
+              <a:rPr sz="800" b="1" lang="zh-TW" dirty="0">
+                <a:solidFill>
+                  <a:srgbClr val="000000"/>
+                </a:solidFill>
+                <a:latin typeface="Arial Unicode MS"/>
+                <a:ea typeface="Arial Unicode MS"/>
+                <a:cs typeface="Arial Unicode MS"/>
+              </a:rPr>
+              <a:t>全部</a:t>
+            </a:r>
+            <a:r>
+              <a:rPr sz="800" lang="zh-TW" dirty="0">
+                <a:solidFill>
+                  <a:srgbClr val="000000"/>
+                </a:solidFill>
+                <a:latin typeface="Arial Unicode MS"/>
+                <a:ea typeface="Arial Unicode MS"/>
+                <a:cs typeface="Arial Unicode MS"/>
+              </a:rPr>
+              <a:t>都在量遠場，可是只有</a:t>
+            </a:r>
+            <a:r>
+              <a:rPr sz="800" b="1" lang="zh-TW" dirty="0">
+                <a:solidFill>
+                  <a:srgbClr val="000000"/>
+                </a:solidFill>
+                <a:latin typeface="Arial Unicode MS"/>
+                <a:ea typeface="Arial Unicode MS"/>
+                <a:cs typeface="Arial Unicode MS"/>
+              </a:rPr>
+              <a:t>三十二條</a:t>
+            </a:r>
+            <a:r>
+              <a:rPr sz="800" lang="zh-TW" dirty="0">
+                <a:solidFill>
+                  <a:srgbClr val="000000"/>
+                </a:solidFill>
+                <a:latin typeface="Arial Unicode MS"/>
+                <a:ea typeface="Arial Unicode MS"/>
+                <a:cs typeface="Arial Unicode MS"/>
+              </a:rPr>
+              <a:t>另外再發一次脈衝去量近場。量近場的通道少，點自然就疏。
+</a:t>
+            </a:r>
+          </a:p>
+          <a:p>
+            <a:pPr algn="l">
+              <a:spcBef>
+                <a:spcPts val="0"/>
+              </a:spcBef>
+              <a:spcAft>
+                <a:spcPts val="133"/>
+              </a:spcAft>
+            </a:pPr>
+            <a:r>
+              <a:rPr sz="800" lang="zh-TW" dirty="0">
+                <a:solidFill>
+                  <a:srgbClr val="000000"/>
+                </a:solidFill>
+                <a:latin typeface="Arial Unicode MS"/>
+                <a:ea typeface="Arial Unicode MS"/>
+                <a:cs typeface="Arial Unicode MS"/>
+              </a:rPr>
+              <a:t>那為什麼要這樣設計？因為七點二公尺以內是保險桿前面那一塊，那裡的東西又近又大，本來就不需要那麼細；把通道省下來留給遠處，才看得到一百五十公尺外那台車。廠商是故意這樣分的，不是做不好。後面那個 </a:t>
+            </a:r>
+            <a:r>
+              <a:rPr sz="800" b="1" lang="zh-TW" dirty="0">
+                <a:solidFill>
+                  <a:srgbClr val="000000"/>
+                </a:solidFill>
+                <a:latin typeface="Arial Unicode MS"/>
+                <a:ea typeface="Arial Unicode MS"/>
+                <a:cs typeface="Arial Unicode MS"/>
+              </a:rPr>
+              <a:t>(10 Hz)</a:t>
+            </a:r>
+            <a:r>
+              <a:rPr sz="800" lang="zh-TW" dirty="0">
+                <a:solidFill>
+                  <a:srgbClr val="000000"/>
+                </a:solidFill>
+                <a:latin typeface="Arial Unicode MS"/>
+                <a:ea typeface="Arial Unicode MS"/>
+                <a:cs typeface="Arial Unicode MS"/>
+              </a:rPr>
+              <a:t> 是第二個條件：換成 20 Hz，左右就從 0.1 度變 0.2 度——轉快一倍，點就少一半。所以這一行是一個數字綁兩個條件，跟剛剛 OS1 的 80% 和 10% 是同一種陷阱。
 </a:t>
             </a:r>
           </a:p>

--- a/第五週(10-08)/第五週_第1節_簡報.pptx
+++ b/第五週(10-08)/第五週_第1節_簡報.pptx
@@ -7527,19 +7527,8 @@
                 <a:ea typeface="Arial Unicode MS"/>
                 <a:cs typeface="Arial Unicode MS"/>
               </a:rPr>
-              <a:t>中間幾行講的是測距跟準不準，第三節上機會用到，今天先跳過。
-</a:t>
-            </a:r>
-          </a:p>
-          <a:p>
-            <a:pPr algn="l">
-              <a:spcBef>
-                <a:spcPts val="0"/>
-              </a:spcBef>
-              <a:spcAft>
-                <a:spcPts val="133"/>
-              </a:spcAft>
-            </a:pPr>
+              <a:t>中間幾行講的是測距跟準不準，第三節上機會用到，今天先跳過。</a:t>
+            </a:r>
             <a:r>
               <a:rPr sz="800" b="1" lang="zh-TW" dirty="0">
                 <a:solidFill>
@@ -7703,7 +7692,7 @@
                 <a:ea typeface="Arial Unicode MS"/>
                 <a:cs typeface="Arial Unicode MS"/>
               </a:rPr>
-              <a:t>。手冊上寫得很清楚：</a:t>
+              <a:t>。手冊寫得很清楚：</a:t>
             </a:r>
             <a:r>
               <a:rPr sz="800" b="1" lang="zh-TW" dirty="0">
@@ -7725,7 +7714,7 @@
                 <a:ea typeface="Arial Unicode MS"/>
                 <a:cs typeface="Arial Unicode MS"/>
               </a:rPr>
-              <a:t>。這兩段的解析度不一樣——遠場左右 0.1 度、上下 0.2 度；</a:t>
+              <a:t>，兩段的解析度不一樣——遠場左右 0.1 度、上下 0.2 度；</a:t>
             </a:r>
             <a:r>
               <a:rPr sz="800" b="1" lang="zh-TW" dirty="0">
@@ -7747,7 +7736,73 @@
                 <a:ea typeface="Arial Unicode MS"/>
                 <a:cs typeface="Arial Unicode MS"/>
               </a:rPr>
-              <a:t>。
+              <a:t>。各位注意方向：</a:t>
+            </a:r>
+            <a:r>
+              <a:rPr sz="800" b="1" lang="zh-TW" dirty="0">
+                <a:solidFill>
+                  <a:srgbClr val="000000"/>
+                </a:solidFill>
+                <a:latin typeface="Arial Unicode MS"/>
+                <a:ea typeface="Arial Unicode MS"/>
+                <a:cs typeface="Arial Unicode MS"/>
+              </a:rPr>
+              <a:t>近的地方反而比較粗</a:t>
+            </a:r>
+            <a:r>
+              <a:rPr sz="800" lang="zh-TW" dirty="0">
+                <a:solidFill>
+                  <a:srgbClr val="000000"/>
+                </a:solidFill>
+                <a:latin typeface="Arial Unicode MS"/>
+                <a:ea typeface="Arial Unicode MS"/>
+                <a:cs typeface="Arial Unicode MS"/>
+              </a:rPr>
+              <a:t>，上下差了四倍。為什麼？因為一百二十八條通道</a:t>
+            </a:r>
+            <a:r>
+              <a:rPr sz="800" b="1" lang="zh-TW" dirty="0">
+                <a:solidFill>
+                  <a:srgbClr val="000000"/>
+                </a:solidFill>
+                <a:latin typeface="Arial Unicode MS"/>
+                <a:ea typeface="Arial Unicode MS"/>
+                <a:cs typeface="Arial Unicode MS"/>
+              </a:rPr>
+              <a:t>全部</a:t>
+            </a:r>
+            <a:r>
+              <a:rPr sz="800" lang="zh-TW" dirty="0">
+                <a:solidFill>
+                  <a:srgbClr val="000000"/>
+                </a:solidFill>
+                <a:latin typeface="Arial Unicode MS"/>
+                <a:ea typeface="Arial Unicode MS"/>
+                <a:cs typeface="Arial Unicode MS"/>
+              </a:rPr>
+              <a:t>都在量遠場，可是只有</a:t>
+            </a:r>
+            <a:r>
+              <a:rPr sz="800" b="1" lang="zh-TW" dirty="0">
+                <a:solidFill>
+                  <a:srgbClr val="000000"/>
+                </a:solidFill>
+                <a:latin typeface="Arial Unicode MS"/>
+                <a:ea typeface="Arial Unicode MS"/>
+                <a:cs typeface="Arial Unicode MS"/>
+              </a:rPr>
+              <a:t>三十二條</a:t>
+            </a:r>
+            <a:r>
+              <a:rPr sz="800" lang="zh-TW" dirty="0">
+                <a:solidFill>
+                  <a:srgbClr val="000000"/>
+                </a:solidFill>
+                <a:latin typeface="Arial Unicode MS"/>
+                <a:ea typeface="Arial Unicode MS"/>
+                <a:cs typeface="Arial Unicode MS"/>
+              </a:rPr>
+              <a:t>另外再發一次脈衝去量近場——量近場的通道少，點自然就疏。
 </a:t>
             </a:r>
           </a:p>
@@ -7769,7 +7824,7 @@
                 <a:ea typeface="Arial Unicode MS"/>
                 <a:cs typeface="Arial Unicode MS"/>
               </a:rPr>
-              <a:t>各位注意方向：</a:t>
+              <a:t>那為什麼要這樣設計？因為七點二公尺以內是保險桿前面那一塊，那裡的東西又近又大，本來就不需要那麼細；把通道省下來留給遠處，才看得到一百五十公尺外那台車。廠商是故意這樣分的，不是做不好。後面那個 </a:t>
             </a:r>
             <a:r>
               <a:rPr sz="800" b="1" lang="zh-TW" dirty="0">
@@ -7780,18 +7835,40 @@
                 <a:ea typeface="Arial Unicode MS"/>
                 <a:cs typeface="Arial Unicode MS"/>
               </a:rPr>
-              <a:t>近的地方反而比較粗</a:t>
-            </a:r>
-            <a:r>
-              <a:rPr sz="800" lang="zh-TW" dirty="0">
-                <a:solidFill>
-                  <a:srgbClr val="000000"/>
-                </a:solidFill>
-                <a:latin typeface="Arial Unicode MS"/>
-                <a:ea typeface="Arial Unicode MS"/>
-                <a:cs typeface="Arial Unicode MS"/>
-              </a:rPr>
-              <a:t>，上下差了四倍。這跟直覺相反，為什麼？因為一百二十八條通道</a:t>
+              <a:t>(10 Hz)</a:t>
+            </a:r>
+            <a:r>
+              <a:rPr sz="800" lang="zh-TW" dirty="0">
+                <a:solidFill>
+                  <a:srgbClr val="000000"/>
+                </a:solidFill>
+                <a:latin typeface="Arial Unicode MS"/>
+                <a:ea typeface="Arial Unicode MS"/>
+                <a:cs typeface="Arial Unicode MS"/>
+              </a:rPr>
+              <a:t> 是第二個條件：換成 20 Hz，左右就從 0.1 度變 0.2 度——轉快一倍，點就少一半。所以這一行是一個數字綁兩個條件，跟剛剛 OS1 的 80% 和 10% 是同一種陷阱。
+</a:t>
+            </a:r>
+          </a:p>
+          <a:p>
+            <a:pPr algn="l">
+              <a:spcBef>
+                <a:spcPts val="0"/>
+              </a:spcBef>
+              <a:spcAft>
+                <a:spcPts val="133"/>
+              </a:spcAft>
+            </a:pPr>
+            <a:r>
+              <a:rPr sz="800" lang="zh-TW" dirty="0">
+                <a:solidFill>
+                  <a:srgbClr val="000000"/>
+                </a:solidFill>
+                <a:latin typeface="Arial Unicode MS"/>
+                <a:ea typeface="Arial Unicode MS"/>
+                <a:cs typeface="Arial Unicode MS"/>
+              </a:rPr>
+              <a:t>會有同學問：那剛剛那顆 OS1 呢？</a:t>
             </a:r>
             <a:r>
               <a:rPr sz="800" b="1" lang="zh-TW" dirty="0">
@@ -7802,18 +7879,18 @@
                 <a:ea typeface="Arial Unicode MS"/>
                 <a:cs typeface="Arial Unicode MS"/>
               </a:rPr>
-              <a:t>全部</a:t>
-            </a:r>
-            <a:r>
-              <a:rPr sz="800" lang="zh-TW" dirty="0">
-                <a:solidFill>
-                  <a:srgbClr val="000000"/>
-                </a:solidFill>
-                <a:latin typeface="Arial Unicode MS"/>
-                <a:ea typeface="Arial Unicode MS"/>
-                <a:cs typeface="Arial Unicode MS"/>
-              </a:rPr>
-              <a:t>都在量遠場，可是只有</a:t>
+              <a:t>OS1 沒有分遠近場。</a:t>
+            </a:r>
+            <a:r>
+              <a:rPr sz="800" lang="zh-TW" dirty="0">
+                <a:solidFill>
+                  <a:srgbClr val="000000"/>
+                </a:solidFill>
+                <a:latin typeface="Arial Unicode MS"/>
+                <a:ea typeface="Arial Unicode MS"/>
+                <a:cs typeface="Arial Unicode MS"/>
+              </a:rPr>
+              <a:t>各位翻回上一張看，它的表上只有一行 Vertical Resolution、一行 Horizontal Resolution，從零點五公尺到九十公尺都是同一個角解析度。差別在</a:t>
             </a:r>
             <a:r>
               <a:rPr sz="800" b="1" lang="zh-TW" dirty="0">
@@ -7824,18 +7901,40 @@
                 <a:ea typeface="Arial Unicode MS"/>
                 <a:cs typeface="Arial Unicode MS"/>
               </a:rPr>
-              <a:t>三十二條</a:t>
-            </a:r>
-            <a:r>
-              <a:rPr sz="800" lang="zh-TW" dirty="0">
-                <a:solidFill>
-                  <a:srgbClr val="000000"/>
-                </a:solidFill>
-                <a:latin typeface="Arial Unicode MS"/>
-                <a:ea typeface="Arial Unicode MS"/>
-                <a:cs typeface="Arial Unicode MS"/>
-              </a:rPr>
-              <a:t>另外再發一次脈衝去量近場。量近場的通道少，點自然就疏。
+              <a:t>架構</a:t>
+            </a:r>
+            <a:r>
+              <a:rPr sz="800" lang="zh-TW" dirty="0">
+                <a:solidFill>
+                  <a:srgbClr val="000000"/>
+                </a:solidFill>
+                <a:latin typeface="Arial Unicode MS"/>
+                <a:ea typeface="Arial Unicode MS"/>
+                <a:cs typeface="Arial Unicode MS"/>
+              </a:rPr>
+              <a:t>：OS1 是旋轉式，六十四組雷射和接收器裝在會轉的頭上，每一組在每一個角度都發一次，所以所有距離走的是同一套角度網格；AT128 是固定式，靠鏡面掃描，一百二十八條裡只有三十二條另外發近場脈衝，才會分兩段。</a:t>
+            </a:r>
+            <a:r>
+              <a:rPr sz="800" b="1" lang="zh-TW" dirty="0">
+                <a:solidFill>
+                  <a:srgbClr val="000000"/>
+                </a:solidFill>
+                <a:latin typeface="Arial Unicode MS"/>
+                <a:ea typeface="Arial Unicode MS"/>
+                <a:cs typeface="Arial Unicode MS"/>
+              </a:rPr>
+              <a:t>所以遠近場不是光達的通則，是這一顆的設計。</a:t>
+            </a:r>
+            <a:r>
+              <a:rPr sz="800" lang="zh-TW" dirty="0">
+                <a:solidFill>
+                  <a:srgbClr val="000000"/>
+                </a:solidFill>
+                <a:latin typeface="Arial Unicode MS"/>
+                <a:ea typeface="Arial Unicode MS"/>
+                <a:cs typeface="Arial Unicode MS"/>
+              </a:rPr>
+              <a:t>
 </a:t>
             </a:r>
           </a:p>
@@ -7857,7 +7956,7 @@
                 <a:ea typeface="Arial Unicode MS"/>
                 <a:cs typeface="Arial Unicode MS"/>
               </a:rPr>
-              <a:t>那為什麼要這樣設計？因為七點二公尺以內是保險桿前面那一塊，那裡的東西又近又大，本來就不需要那麼細；把通道省下來留給遠處，才看得到一百五十公尺外那台車。廠商是故意這樣分的，不是做不好。後面那個 </a:t>
+              <a:t>不過「近的地方另有規則」倒是每一顆都有：那一行叫 </a:t>
             </a:r>
             <a:r>
               <a:rPr sz="800" b="1" lang="zh-TW" dirty="0">
@@ -7868,18 +7967,18 @@
                 <a:ea typeface="Arial Unicode MS"/>
                 <a:cs typeface="Arial Unicode MS"/>
               </a:rPr>
-              <a:t>(10 Hz)</a:t>
-            </a:r>
-            <a:r>
-              <a:rPr sz="800" lang="zh-TW" dirty="0">
-                <a:solidFill>
-                  <a:srgbClr val="000000"/>
-                </a:solidFill>
-                <a:latin typeface="Arial Unicode MS"/>
-                <a:ea typeface="Arial Unicode MS"/>
-                <a:cs typeface="Arial Unicode MS"/>
-              </a:rPr>
-              <a:t> 是第二個條件：換成 20 Hz，左右就從 0.1 度變 0.2 度——轉快一倍，點就少一半。所以這一行是一個數字綁兩個條件，跟剛剛 OS1 的 80% 和 10% 是同一種陷阱。
+              <a:t>Minimum Range</a:t>
+            </a:r>
+            <a:r>
+              <a:rPr sz="800" lang="zh-TW" dirty="0">
+                <a:solidFill>
+                  <a:srgbClr val="000000"/>
+                </a:solidFill>
+                <a:latin typeface="Arial Unicode MS"/>
+                <a:ea typeface="Arial Unicode MS"/>
+                <a:cs typeface="Arial Unicode MS"/>
+              </a:rPr>
+              <a:t>，OS1 預設零點五公尺。比那個近的點直接不回報——那管的是「量不量得到」，不是「量得多細」。
 </a:t>
             </a:r>
           </a:p>

--- a/第五週(10-08)/第五週_第1節_簡報.pptx
+++ b/第五週(10-08)/第五週_第1節_簡報.pptx
@@ -7384,7 +7384,7 @@
                 <a:ea typeface="Arial Unicode MS"/>
                 <a:cs typeface="Arial Unicode MS"/>
               </a:rPr>
-              <a:t>左表由上往下圈：Number of channels、Horizontal FOV 與 Vertical FOV、再圈 Horizontal resolution 那一行的 Far-field 與 (10 Hz)。那兩個條件是今天的重點；白板上寫「遠場 &gt;7.2 m、近場 0.5–7.2 m」。
+              <a:t>左表由上往下圈：Number of channels、Horizontal FOV 與 Vertical FOV、再圈 Horizontal resolution 那一行的 Far-field 與 (10 Hz)。那兩個條件是今天的重點；白板上寫「遠場 &gt;7.2 m、近場 0.5–7.2 m」。備答：有人會問近場和遠場是不是同一批線束——是同一批，但不是同一次發射。128 條全部發遠場，其中 32 條另外再發一次只量近場，時間錯開。垂直 0.8÷0.2＝4 倍剛好等於 128÷32，可以當場算給他看。細節在講義 3.1 那個方塊。
 </a:t>
             </a:r>
           </a:p>

--- a/第五週(10-08)/第五週_第1節_簡報.pptx
+++ b/第五週(10-08)/第五週_第1節_簡報.pptx
@@ -1190,11 +1190,11 @@
                 <a:spcPts val="0"/>
               </a:spcBef>
               <a:spcAft>
-                <a:spcPts val="150"/>
-              </a:spcAft>
-            </a:pPr>
-            <a:r>
-              <a:rPr sz="900" b="1" lang="zh-TW" dirty="0">
+                <a:spcPts val="133"/>
+              </a:spcAft>
+            </a:pPr>
+            <a:r>
+              <a:rPr sz="800" b="1" lang="zh-TW" dirty="0">
                 <a:solidFill>
                   <a:srgbClr val="000000"/>
                 </a:solidFill>
@@ -1205,7 +1205,7 @@
               <a:t>▍這一張要做什麼</a:t>
             </a:r>
             <a:r>
-              <a:rPr sz="900" lang="zh-TW" dirty="0">
+              <a:rPr sz="800" lang="zh-TW" dirty="0">
                 <a:solidFill>
                   <a:srgbClr val="000000"/>
                 </a:solidFill>
@@ -1223,11 +1223,11 @@
                 <a:spcPts val="0"/>
               </a:spcBef>
               <a:spcAft>
-                <a:spcPts val="150"/>
-              </a:spcAft>
-            </a:pPr>
-            <a:r>
-              <a:rPr sz="900" lang="zh-TW" dirty="0">
+                <a:spcPts val="133"/>
+              </a:spcAft>
+            </a:pPr>
+            <a:r>
+              <a:rPr sz="800" lang="zh-TW" dirty="0">
                 <a:solidFill>
                   <a:srgbClr val="000000"/>
                 </a:solidFill>
@@ -1245,11 +1245,11 @@
                 <a:spcPts val="0"/>
               </a:spcBef>
               <a:spcAft>
-                <a:spcPts val="150"/>
-              </a:spcAft>
-            </a:pPr>
-            <a:r>
-              <a:rPr sz="900" b="1" lang="zh-TW" dirty="0">
+                <a:spcPts val="133"/>
+              </a:spcAft>
+            </a:pPr>
+            <a:r>
+              <a:rPr sz="800" b="1" lang="zh-TW" dirty="0">
                 <a:solidFill>
                   <a:srgbClr val="000000"/>
                 </a:solidFill>
@@ -1260,7 +1260,7 @@
               <a:t>▍畫面上圈這裡</a:t>
             </a:r>
             <a:r>
-              <a:rPr sz="900" lang="zh-TW" dirty="0">
+              <a:rPr sz="800" lang="zh-TW" dirty="0">
                 <a:solidFill>
                   <a:srgbClr val="000000"/>
                 </a:solidFill>
@@ -1278,11 +1278,11 @@
                 <a:spcPts val="0"/>
               </a:spcBef>
               <a:spcAft>
-                <a:spcPts val="150"/>
-              </a:spcAft>
-            </a:pPr>
-            <a:r>
-              <a:rPr sz="900" lang="zh-TW" dirty="0">
+                <a:spcPts val="133"/>
+              </a:spcAft>
+            </a:pPr>
+            <a:r>
+              <a:rPr sz="800" lang="zh-TW" dirty="0">
                 <a:solidFill>
                   <a:srgbClr val="000000"/>
                 </a:solidFill>
@@ -1300,11 +1300,11 @@
                 <a:spcPts val="0"/>
               </a:spcBef>
               <a:spcAft>
-                <a:spcPts val="150"/>
-              </a:spcAft>
-            </a:pPr>
-            <a:r>
-              <a:rPr sz="900" b="1" lang="zh-TW" dirty="0">
+                <a:spcPts val="133"/>
+              </a:spcAft>
+            </a:pPr>
+            <a:r>
+              <a:rPr sz="800" b="1" lang="zh-TW" dirty="0">
                 <a:solidFill>
                   <a:srgbClr val="000000"/>
                 </a:solidFill>
@@ -1315,7 +1315,7 @@
               <a:t>▍以下照著唸</a:t>
             </a:r>
             <a:r>
-              <a:rPr sz="900" lang="zh-TW" dirty="0">
+              <a:rPr sz="800" lang="zh-TW" dirty="0">
                 <a:solidFill>
                   <a:srgbClr val="000000"/>
                 </a:solidFill>
@@ -1333,19 +1333,19 @@
                 <a:spcPts val="0"/>
               </a:spcBef>
               <a:spcAft>
-                <a:spcPts val="150"/>
-              </a:spcAft>
-            </a:pPr>
-            <a:r>
-              <a:rPr sz="900" lang="zh-TW" dirty="0">
-                <a:solidFill>
-                  <a:srgbClr val="000000"/>
-                </a:solidFill>
-                <a:latin typeface="Arial Unicode MS"/>
-                <a:ea typeface="Arial Unicode MS"/>
-                <a:cs typeface="Arial Unicode MS"/>
-              </a:rPr>
-              <a:t>第三個型號，onsemi 的 AR0233AT，就是相機裡面那塊晶片。左邊這張是從 onsemi 的公開文件直接剪下來的，出處印在圖下面。
+                <a:spcPts val="133"/>
+              </a:spcAft>
+            </a:pPr>
+            <a:r>
+              <a:rPr sz="800" lang="zh-TW" dirty="0">
+                <a:solidFill>
+                  <a:srgbClr val="000000"/>
+                </a:solidFill>
+                <a:latin typeface="Arial Unicode MS"/>
+                <a:ea typeface="Arial Unicode MS"/>
+                <a:cs typeface="Arial Unicode MS"/>
+              </a:rPr>
+              <a:t>第三個型號，onsemi 的 AR0233AT。這一顆各位比較陌生，我用三句話介紹。
 </a:t>
             </a:r>
           </a:p>
@@ -1355,11 +1355,198 @@
                 <a:spcPts val="0"/>
               </a:spcBef>
               <a:spcAft>
-                <a:spcPts val="150"/>
-              </a:spcAft>
-            </a:pPr>
-            <a:r>
-              <a:rPr sz="900" lang="zh-TW" dirty="0">
+                <a:spcPts val="133"/>
+              </a:spcAft>
+            </a:pPr>
+            <a:r>
+              <a:rPr sz="800" b="1" lang="zh-TW" dirty="0">
+                <a:solidFill>
+                  <a:srgbClr val="000000"/>
+                </a:solidFill>
+                <a:latin typeface="Arial Unicode MS"/>
+                <a:ea typeface="Arial Unicode MS"/>
+                <a:cs typeface="Arial Unicode MS"/>
+              </a:rPr>
+              <a:t>onsemi 是一家美國的半導體公司</a:t>
+            </a:r>
+            <a:r>
+              <a:rPr sz="800" lang="zh-TW" dirty="0">
+                <a:solidFill>
+                  <a:srgbClr val="000000"/>
+                </a:solidFill>
+                <a:latin typeface="Arial Unicode MS"/>
+                <a:ea typeface="Arial Unicode MS"/>
+                <a:cs typeface="Arial Unicode MS"/>
+              </a:rPr>
+              <a:t>，以前叫 ON Semiconductor，二〇二一年改成現在這個全小寫的寫法。它的影像感測器是二〇一四年買下一家叫 </a:t>
+            </a:r>
+            <a:r>
+              <a:rPr sz="800" b="1" lang="zh-TW" dirty="0">
+                <a:solidFill>
+                  <a:srgbClr val="000000"/>
+                </a:solidFill>
+                <a:latin typeface="Arial Unicode MS"/>
+                <a:ea typeface="Arial Unicode MS"/>
+                <a:cs typeface="Arial Unicode MS"/>
+              </a:rPr>
+              <a:t>Aptina</a:t>
+            </a:r>
+            <a:r>
+              <a:rPr sz="800" lang="zh-TW" dirty="0">
+                <a:solidFill>
+                  <a:srgbClr val="000000"/>
+                </a:solidFill>
+                <a:latin typeface="Arial Unicode MS"/>
+                <a:ea typeface="Arial Unicode MS"/>
+                <a:cs typeface="Arial Unicode MS"/>
+              </a:rPr>
+              <a:t> 的公司來的——所以型號才是 </a:t>
+            </a:r>
+            <a:r>
+              <a:rPr sz="800" b="1" lang="zh-TW" dirty="0">
+                <a:solidFill>
+                  <a:srgbClr val="000000"/>
+                </a:solidFill>
+                <a:latin typeface="Arial Unicode MS"/>
+                <a:ea typeface="Arial Unicode MS"/>
+                <a:cs typeface="Arial Unicode MS"/>
+              </a:rPr>
+              <a:t>AR</a:t>
+            </a:r>
+            <a:r>
+              <a:rPr sz="800" lang="zh-TW" dirty="0">
+                <a:solidFill>
+                  <a:srgbClr val="000000"/>
+                </a:solidFill>
+                <a:latin typeface="Arial Unicode MS"/>
+                <a:ea typeface="Arial Unicode MS"/>
+                <a:cs typeface="Arial Unicode MS"/>
+              </a:rPr>
+              <a:t> 開頭，那是 Aptina 留下來的產品線代號。車用影像感測器這一塊，最常碰到的就是 onsemi、Sony、OmniVision 這三家。
+</a:t>
+            </a:r>
+          </a:p>
+          <a:p>
+            <a:pPr algn="l">
+              <a:spcBef>
+                <a:spcPts val="0"/>
+              </a:spcBef>
+              <a:spcAft>
+                <a:spcPts val="133"/>
+              </a:spcAft>
+            </a:pPr>
+            <a:r>
+              <a:rPr sz="800" b="1" lang="zh-TW" dirty="0">
+                <a:solidFill>
+                  <a:srgbClr val="000000"/>
+                </a:solidFill>
+                <a:latin typeface="Arial Unicode MS"/>
+                <a:ea typeface="Arial Unicode MS"/>
+                <a:cs typeface="Arial Unicode MS"/>
+              </a:rPr>
+              <a:t>第二句，看型號的結尾。</a:t>
+            </a:r>
+            <a:r>
+              <a:rPr sz="800" lang="zh-TW" dirty="0">
+                <a:solidFill>
+                  <a:srgbClr val="000000"/>
+                </a:solidFill>
+                <a:latin typeface="Arial Unicode MS"/>
+                <a:ea typeface="Arial Unicode MS"/>
+                <a:cs typeface="Arial Unicode MS"/>
+              </a:rPr>
+              <a:t>onsemi 的車規型號習慣用 </a:t>
+            </a:r>
+            <a:r>
+              <a:rPr sz="800" b="1" lang="zh-TW" dirty="0">
+                <a:solidFill>
+                  <a:srgbClr val="000000"/>
+                </a:solidFill>
+                <a:latin typeface="Arial Unicode MS"/>
+                <a:ea typeface="Arial Unicode MS"/>
+                <a:cs typeface="Arial Unicode MS"/>
+              </a:rPr>
+              <a:t>AT</a:t>
+            </a:r>
+            <a:r>
+              <a:rPr sz="800" lang="zh-TW" dirty="0">
+                <a:solidFill>
+                  <a:srgbClr val="000000"/>
+                </a:solidFill>
+                <a:latin typeface="Arial Unicode MS"/>
+                <a:ea typeface="Arial Unicode MS"/>
+                <a:cs typeface="Arial Unicode MS"/>
+              </a:rPr>
+              <a:t> 結尾——AR0233AT、AR0234AT 都是；同一顆晶片的非車規版本會換成別的後綴，像 AR0234CS。看到 AT，大概就知道它是衝著車用來的。
+</a:t>
+            </a:r>
+          </a:p>
+          <a:p>
+            <a:pPr algn="l">
+              <a:spcBef>
+                <a:spcPts val="0"/>
+              </a:spcBef>
+              <a:spcAft>
+                <a:spcPts val="133"/>
+              </a:spcAft>
+            </a:pPr>
+            <a:r>
+              <a:rPr sz="800" b="1" lang="zh-TW" dirty="0">
+                <a:solidFill>
+                  <a:srgbClr val="000000"/>
+                </a:solidFill>
+                <a:latin typeface="Arial Unicode MS"/>
+                <a:ea typeface="Arial Unicode MS"/>
+                <a:cs typeface="Arial Unicode MS"/>
+              </a:rPr>
+              <a:t>第三句，也是今天最重要的一句：onsemi 賣的是「晶片」，不是「相機」。</a:t>
+            </a:r>
+            <a:r>
+              <a:rPr sz="800" lang="zh-TW" dirty="0">
+                <a:solidFill>
+                  <a:srgbClr val="000000"/>
+                </a:solidFill>
+                <a:latin typeface="Arial Unicode MS"/>
+                <a:ea typeface="Arial Unicode MS"/>
+                <a:cs typeface="Arial Unicode MS"/>
+              </a:rPr>
+              <a:t>它出貨的是一塊方方的感光晶片，鏡頭要你自己配。各位先把這句話記著，等一下找不到視野的時候會用到。
+</a:t>
+            </a:r>
+          </a:p>
+          <a:p>
+            <a:pPr algn="l">
+              <a:spcBef>
+                <a:spcPts val="0"/>
+              </a:spcBef>
+              <a:spcAft>
+                <a:spcPts val="133"/>
+              </a:spcAft>
+            </a:pPr>
+            <a:r>
+              <a:rPr sz="800" lang="zh-TW" dirty="0">
+                <a:solidFill>
+                  <a:srgbClr val="000000"/>
+                </a:solidFill>
+                <a:latin typeface="Arial Unicode MS"/>
+                <a:ea typeface="Arial Unicode MS"/>
+                <a:cs typeface="Arial Unicode MS"/>
+              </a:rPr>
+              <a:t>左邊這張是從 onsemi 的公開文件直接剪下來的，出處印在圖下面。
+</a:t>
+            </a:r>
+          </a:p>
+          <a:p>
+            <a:pPr algn="l">
+              <a:spcBef>
+                <a:spcPts val="0"/>
+              </a:spcBef>
+              <a:spcAft>
+                <a:spcPts val="133"/>
+              </a:spcAft>
+            </a:pPr>
+            <a:r>
+              <a:rPr sz="800" lang="zh-TW" dirty="0">
                 <a:solidFill>
                   <a:srgbClr val="000000"/>
                 </a:solidFill>
@@ -1370,7 +1557,7 @@
               <a:t>我們先看它有什麼。最上面一行 Optical format，是感光面的大小。第二行 </a:t>
             </a:r>
             <a:r>
-              <a:rPr sz="900" b="1" lang="zh-TW" dirty="0">
+              <a:rPr sz="800" b="1" lang="zh-TW" dirty="0">
                 <a:solidFill>
                   <a:srgbClr val="000000"/>
                 </a:solidFill>
@@ -1381,7 +1568,7 @@
               <a:t>Active pixels，2048 乘 1280</a:t>
             </a:r>
             <a:r>
-              <a:rPr sz="900" lang="zh-TW" dirty="0">
+              <a:rPr sz="800" lang="zh-TW" dirty="0">
                 <a:solidFill>
                   <a:srgbClr val="000000"/>
                 </a:solidFill>
@@ -1392,7 +1579,7 @@
               <a:t>，就是第四週拉的那條水平解析度。第三行 </a:t>
             </a:r>
             <a:r>
-              <a:rPr sz="900" b="1" lang="zh-TW" dirty="0">
+              <a:rPr sz="800" b="1" lang="zh-TW" dirty="0">
                 <a:solidFill>
                   <a:srgbClr val="000000"/>
                 </a:solidFill>
@@ -1403,7 +1590,7 @@
               <a:t>Pixel size，3.0 微米</a:t>
             </a:r>
             <a:r>
-              <a:rPr sz="900" lang="zh-TW" dirty="0">
+              <a:rPr sz="800" lang="zh-TW" dirty="0">
                 <a:solidFill>
                   <a:srgbClr val="000000"/>
                 </a:solidFill>
@@ -1421,11 +1608,11 @@
                 <a:spcPts val="0"/>
               </a:spcBef>
               <a:spcAft>
-                <a:spcPts val="150"/>
-              </a:spcAft>
-            </a:pPr>
-            <a:r>
-              <a:rPr sz="900" lang="zh-TW" dirty="0">
+                <a:spcPts val="133"/>
+              </a:spcAft>
+            </a:pPr>
+            <a:r>
+              <a:rPr sz="800" lang="zh-TW" dirty="0">
                 <a:solidFill>
                   <a:srgbClr val="000000"/>
                 </a:solidFill>
@@ -1443,11 +1630,11 @@
                 <a:spcPts val="0"/>
               </a:spcBef>
               <a:spcAft>
-                <a:spcPts val="150"/>
-              </a:spcAft>
-            </a:pPr>
-            <a:r>
-              <a:rPr sz="900" lang="zh-TW" dirty="0">
+                <a:spcPts val="133"/>
+              </a:spcAft>
+            </a:pPr>
+            <a:r>
+              <a:rPr sz="800" lang="zh-TW" dirty="0">
                 <a:solidFill>
                   <a:srgbClr val="000000"/>
                 </a:solidFill>
@@ -1465,11 +1652,11 @@
                 <a:spcPts val="0"/>
               </a:spcBef>
               <a:spcAft>
-                <a:spcPts val="150"/>
-              </a:spcAft>
-            </a:pPr>
-            <a:r>
-              <a:rPr sz="900" lang="zh-TW" dirty="0">
+                <a:spcPts val="133"/>
+              </a:spcAft>
+            </a:pPr>
+            <a:r>
+              <a:rPr sz="800" lang="zh-TW" dirty="0">
                 <a:solidFill>
                   <a:srgbClr val="000000"/>
                 </a:solidFill>
@@ -1487,11 +1674,11 @@
                 <a:spcPts val="0"/>
               </a:spcBef>
               <a:spcAft>
-                <a:spcPts val="150"/>
-              </a:spcAft>
-            </a:pPr>
-            <a:r>
-              <a:rPr sz="900" lang="zh-TW" dirty="0">
+                <a:spcPts val="133"/>
+              </a:spcAft>
+            </a:pPr>
+            <a:r>
+              <a:rPr sz="800" lang="zh-TW" dirty="0">
                 <a:solidFill>
                   <a:srgbClr val="000000"/>
                 </a:solidFill>
@@ -1509,11 +1696,11 @@
                 <a:spcPts val="0"/>
               </a:spcBef>
               <a:spcAft>
-                <a:spcPts val="150"/>
-              </a:spcAft>
-            </a:pPr>
-            <a:r>
-              <a:rPr sz="900" lang="zh-TW" dirty="0">
+                <a:spcPts val="133"/>
+              </a:spcAft>
+            </a:pPr>
+            <a:r>
+              <a:rPr sz="800" lang="zh-TW" dirty="0">
                 <a:solidFill>
                   <a:srgbClr val="000000"/>
                 </a:solidFill>
@@ -1524,7 +1711,7 @@
               <a:t>右邊還有一行叫 </a:t>
             </a:r>
             <a:r>
-              <a:rPr sz="900" b="1" lang="zh-TW" dirty="0">
+              <a:rPr sz="800" b="1" lang="zh-TW" dirty="0">
                 <a:solidFill>
                   <a:srgbClr val="000000"/>
                 </a:solidFill>
@@ -1535,7 +1722,7 @@
               <a:t>Focal length</a:t>
             </a:r>
             <a:r>
-              <a:rPr sz="900" lang="zh-TW" dirty="0">
+              <a:rPr sz="800" lang="zh-TW" dirty="0">
                 <a:solidFill>
                   <a:srgbClr val="000000"/>
                 </a:solidFill>
@@ -1546,7 +1733,7 @@
               <a:t>，焦距。前面兩欄是 4.74 公釐，後面兩欄是 2.75 公釐。往下看</a:t>
             </a:r>
             <a:r>
-              <a:rPr sz="900" b="1" lang="zh-TW" dirty="0">
+              <a:rPr sz="800" b="1" lang="zh-TW" dirty="0">
                 <a:solidFill>
                   <a:srgbClr val="000000"/>
                 </a:solidFill>
@@ -1557,7 +1744,7 @@
               <a:t>水平視野</a:t>
             </a:r>
             <a:r>
-              <a:rPr sz="900" lang="zh-TW" dirty="0">
+              <a:rPr sz="800" lang="zh-TW" dirty="0">
                 <a:solidFill>
                   <a:srgbClr val="000000"/>
                 </a:solidFill>
@@ -1575,11 +1762,11 @@
                 <a:spcPts val="0"/>
               </a:spcBef>
               <a:spcAft>
-                <a:spcPts val="150"/>
-              </a:spcAft>
-            </a:pPr>
-            <a:r>
-              <a:rPr sz="900" lang="zh-TW" dirty="0">
+                <a:spcPts val="133"/>
+              </a:spcAft>
+            </a:pPr>
+            <a:r>
+              <a:rPr sz="800" lang="zh-TW" dirty="0">
                 <a:solidFill>
                   <a:srgbClr val="000000"/>
                 </a:solidFill>

--- a/第五週(10-08)/第五週_第1節_簡報.pptx
+++ b/第五週(10-08)/第五週_第1節_簡報.pptx
@@ -5,7 +5,7 @@
     <p:sldMasterId id="2147483648" r:id="rId1"/>
   </p:sldMasterIdLst>
   <p:notesMasterIdLst>
-    <p:notesMasterId r:id="rId18"/>
+    <p:notesMasterId r:id="rId20"/>
   </p:notesMasterIdLst>
   <p:sldIdLst>
     <p:sldId id="256" r:id="rId2"/>
@@ -24,6 +24,8 @@
     <p:sldId id="269" r:id="rId15"/>
     <p:sldId id="270" r:id="rId16"/>
     <p:sldId id="271" r:id="rId17"/>
+    <p:sldId id="272" r:id="rId18"/>
+    <p:sldId id="273" r:id="rId19"/>
   </p:sldIdLst>
   <p:sldSz cx="9144000" cy="5143500"/>
   <p:notesSz cx="7560000" cy="10692000"/>
@@ -5613,7 +5615,7 @@
                 <a:ea typeface="Arial Unicode MS"/>
                 <a:cs typeface="Arial Unicode MS"/>
               </a:rPr>
-              <a:t>附錄：相機那份規格書的完整原頁，備查用。
+              <a:t>附錄：光達那份規格書的完整原頁（規格那三頁），備查用。
 </a:t>
             </a:r>
           </a:p>
@@ -5745,19 +5747,19 @@
                 <a:ea typeface="Arial Unicode MS"/>
                 <a:cs typeface="Arial Unicode MS"/>
               </a:rPr>
-              <a:t>第一節我們圈過的那幾行——有效像素、像素尺寸、動態範圍、LED 閃爍抑制——全部都在左邊那一頁上。右邊第二頁是封裝尺寸，上面寫 TBD，那是因為這份是 </a:t>
-            </a:r>
-            <a:r>
-              <a:rPr sz="1200" b="1" lang="zh-TW" dirty="0">
-                <a:solidFill>
-                  <a:srgbClr val="000000"/>
-                </a:solidFill>
-                <a:latin typeface="Arial Unicode MS"/>
-                <a:ea typeface="Arial Unicode MS"/>
-                <a:cs typeface="Arial Unicode MS"/>
-              </a:rPr>
-              <a:t>Product Preview</a:t>
-            </a:r>
+              <a:t>今天圈過的光達那幾行，全部都在這三頁上：PDF 第 1 頁是 HIGHLIGHTS 和 OPTICAL PERFORMANCE——測距、視野、通道數、每圈點數都在那裡；第 2 頁有 LASER 那一段，Class 1、865 奈米、光束寬度和發散角；第 3 頁有 Additional Programmability，multi-sensor phase lock 那一行。
+</a:t>
+            </a:r>
+          </a:p>
+          <a:p>
+            <a:pPr algn="l">
+              <a:spcBef>
+                <a:spcPts val="0"/>
+              </a:spcBef>
+              <a:spcAft>
+                <a:spcPts val="200"/>
+              </a:spcAft>
+            </a:pPr>
             <a:r>
               <a:rPr sz="1200" lang="zh-TW" dirty="0">
                 <a:solidFill>
@@ -5767,7 +5769,7 @@
                 <a:ea typeface="Arial Unicode MS"/>
                 <a:cs typeface="Arial Unicode MS"/>
               </a:rPr>
-              <a:t>，還不是正式規格書。
+              <a:t>原始 PDF 總共八頁，後面五頁是外觀尺寸、配件和接線圖，和今天要讀的規格沒有關係，所以沒有放進來。
 </a:t>
             </a:r>
           </a:p>
@@ -5789,51 +5791,7 @@
                 <a:ea typeface="Arial Unicode MS"/>
                 <a:cs typeface="Arial Unicode MS"/>
               </a:rPr>
-              <a:t>各位記得第二張我說過的：</a:t>
-            </a:r>
-            <a:r>
-              <a:rPr sz="1200" b="1" lang="zh-TW" dirty="0">
-                <a:solidFill>
-                  <a:srgbClr val="000000"/>
-                </a:solidFill>
-                <a:latin typeface="Arial Unicode MS"/>
-                <a:ea typeface="Arial Unicode MS"/>
-                <a:cs typeface="Arial Unicode MS"/>
-              </a:rPr>
-              <a:t>快門方式這一行，這兩頁上都沒有。</a:t>
-            </a:r>
-            <a:r>
-              <a:rPr sz="1200" lang="zh-TW" dirty="0">
-                <a:solidFill>
-                  <a:srgbClr val="000000"/>
-                </a:solidFill>
-                <a:latin typeface="Arial Unicode MS"/>
-                <a:ea typeface="Arial Unicode MS"/>
-                <a:cs typeface="Arial Unicode MS"/>
-              </a:rPr>
-              <a:t>各位現在可以自己確認一次。要看快門方式，得去 onsemi 的產品頁。
-</a:t>
-            </a:r>
-          </a:p>
-          <a:p>
-            <a:pPr algn="l">
-              <a:spcBef>
-                <a:spcPts val="0"/>
-              </a:spcBef>
-              <a:spcAft>
-                <a:spcPts val="200"/>
-              </a:spcAft>
-            </a:pPr>
-            <a:r>
-              <a:rPr sz="1200" lang="zh-TW" dirty="0">
-                <a:solidFill>
-                  <a:srgbClr val="000000"/>
-                </a:solidFill>
-                <a:latin typeface="Arial Unicode MS"/>
-                <a:ea typeface="Arial Unicode MS"/>
-                <a:cs typeface="Arial Unicode MS"/>
-              </a:rPr>
-              <a:t>放映的時候可以放大看；發下去的 PDF 也印得出來。</a:t>
+              <a:t>放映的時候可以放大看；要看完整的八頁，到 Ouster 官網下載。</a:t>
             </a:r>
           </a:p>
         </p:txBody>
@@ -5876,6 +5834,710 @@
                 <a:cs typeface="Arial Unicode MS"/>
               </a:rPr>
               <a:t>16</a:t>
+            </a:r>
+          </a:p>
+        </p:txBody>
+      </p:sp>
+    </p:spTree>
+  </p:cSld>
+  <p:clrMapOvr>
+    <a:masterClrMapping/>
+  </p:clrMapOvr>
+</p:notes>
+</file>
+
+<file path=ppt/notesSlides/notesSlide17.xml><?xml version="1.0" encoding="utf-8"?>
+<p:notes xmlns:a="http://schemas.openxmlformats.org/drawingml/2006/main" xmlns:p="http://schemas.openxmlformats.org/presentationml/2006/main">
+  <p:cSld>
+    <p:spTree>
+      <p:nvGrpSpPr>
+        <p:cNvPr id="1" name=""/>
+        <p:cNvGrpSpPr/>
+        <p:nvPr/>
+      </p:nvGrpSpPr>
+      <p:grpSpPr>
+        <a:xfrm/>
+      </p:grpSpPr>
+      <p:sp>
+        <p:nvSpPr>
+          <p:cNvPr id="2" name="Slide Image Placeholder 1"/>
+          <p:cNvSpPr>
+            <a:spLocks noGrp="1"/>
+          </p:cNvSpPr>
+          <p:nvPr>
+            <p:ph type="sldImg" idx="2"/>
+          </p:nvPr>
+        </p:nvSpPr>
+        <p:spPr>
+          <a:xfrm>
+            <a:off x="540000" y="540000"/>
+            <a:ext cx="6480000" cy="3645000"/>
+          </a:xfrm>
+        </p:spPr>
+      </p:sp>
+      <p:sp>
+        <p:nvSpPr>
+          <p:cNvPr id="3" name="Notes Placeholder 2"/>
+          <p:cNvSpPr>
+            <a:spLocks noGrp="1"/>
+          </p:cNvSpPr>
+          <p:nvPr>
+            <p:ph type="body" idx="3"/>
+          </p:nvPr>
+        </p:nvSpPr>
+        <p:spPr>
+          <a:xfrm>
+            <a:off x="540000" y="4440000"/>
+            <a:ext cx="6480000" cy="5500000"/>
+          </a:xfrm>
+        </p:spPr>
+        <p:txBody>
+          <a:bodyPr vert="horz" wrap="square" anchor="t" lIns="91440" rIns="91440" tIns="45720" bIns="45720"/>
+          <a:lstStyle/>
+          <a:p>
+            <a:pPr algn="l">
+              <a:spcBef>
+                <a:spcPts val="0"/>
+              </a:spcBef>
+              <a:spcAft>
+                <a:spcPts val="200"/>
+              </a:spcAft>
+            </a:pPr>
+            <a:r>
+              <a:rPr sz="1200" b="1" lang="zh-TW" dirty="0">
+                <a:solidFill>
+                  <a:srgbClr val="000000"/>
+                </a:solidFill>
+                <a:latin typeface="Arial Unicode MS"/>
+                <a:ea typeface="Arial Unicode MS"/>
+                <a:cs typeface="Arial Unicode MS"/>
+              </a:rPr>
+              <a:t>▍這一張要做什麼</a:t>
+            </a:r>
+            <a:r>
+              <a:rPr sz="1200" lang="zh-TW" dirty="0">
+                <a:solidFill>
+                  <a:srgbClr val="000000"/>
+                </a:solidFill>
+                <a:latin typeface="Arial Unicode MS"/>
+                <a:ea typeface="Arial Unicode MS"/>
+                <a:cs typeface="Arial Unicode MS"/>
+              </a:rPr>
+              <a:t>
+</a:t>
+            </a:r>
+          </a:p>
+          <a:p>
+            <a:pPr algn="l">
+              <a:spcBef>
+                <a:spcPts val="0"/>
+              </a:spcBef>
+              <a:spcAft>
+                <a:spcPts val="200"/>
+              </a:spcAft>
+            </a:pPr>
+            <a:r>
+              <a:rPr sz="1200" lang="zh-TW" dirty="0">
+                <a:solidFill>
+                  <a:srgbClr val="000000"/>
+                </a:solidFill>
+                <a:latin typeface="Arial Unicode MS"/>
+                <a:ea typeface="Arial Unicode MS"/>
+                <a:cs typeface="Arial Unicode MS"/>
+              </a:rPr>
+              <a:t>附錄：AT128P 使用手冊的規格那兩頁，備查用。
+</a:t>
+            </a:r>
+          </a:p>
+          <a:p>
+            <a:pPr algn="l">
+              <a:spcBef>
+                <a:spcPts val="0"/>
+              </a:spcBef>
+              <a:spcAft>
+                <a:spcPts val="200"/>
+              </a:spcAft>
+            </a:pPr>
+            <a:r>
+              <a:rPr sz="1200" b="1" lang="zh-TW" dirty="0">
+                <a:solidFill>
+                  <a:srgbClr val="000000"/>
+                </a:solidFill>
+                <a:latin typeface="Arial Unicode MS"/>
+                <a:ea typeface="Arial Unicode MS"/>
+                <a:cs typeface="Arial Unicode MS"/>
+              </a:rPr>
+              <a:t>▍畫面上圈這裡</a:t>
+            </a:r>
+            <a:r>
+              <a:rPr sz="1200" lang="zh-TW" dirty="0">
+                <a:solidFill>
+                  <a:srgbClr val="000000"/>
+                </a:solidFill>
+                <a:latin typeface="Arial Unicode MS"/>
+                <a:ea typeface="Arial Unicode MS"/>
+                <a:cs typeface="Arial Unicode MS"/>
+              </a:rPr>
+              <a:t>
+</a:t>
+            </a:r>
+          </a:p>
+          <a:p>
+            <a:pPr algn="l">
+              <a:spcBef>
+                <a:spcPts val="0"/>
+              </a:spcBef>
+              <a:spcAft>
+                <a:spcPts val="200"/>
+              </a:spcAft>
+            </a:pPr>
+            <a:r>
+              <a:rPr sz="1200" lang="zh-TW" dirty="0">
+                <a:solidFill>
+                  <a:srgbClr val="000000"/>
+                </a:solidFill>
+                <a:latin typeface="Arial Unicode MS"/>
+                <a:ea typeface="Arial Unicode MS"/>
+                <a:cs typeface="Arial Unicode MS"/>
+              </a:rPr>
+              <a:t>上課不唸。第 1 節第 5 張圈的 Far-field 與 (10 Hz)，原文就在左邊那一頁。
+</a:t>
+            </a:r>
+          </a:p>
+          <a:p>
+            <a:pPr algn="l">
+              <a:spcBef>
+                <a:spcPts val="0"/>
+              </a:spcBef>
+              <a:spcAft>
+                <a:spcPts val="200"/>
+              </a:spcAft>
+            </a:pPr>
+            <a:r>
+              <a:rPr sz="1200" b="1" lang="zh-TW" dirty="0">
+                <a:solidFill>
+                  <a:srgbClr val="000000"/>
+                </a:solidFill>
+                <a:latin typeface="Arial Unicode MS"/>
+                <a:ea typeface="Arial Unicode MS"/>
+                <a:cs typeface="Arial Unicode MS"/>
+              </a:rPr>
+              <a:t>▍以下照著唸</a:t>
+            </a:r>
+            <a:r>
+              <a:rPr sz="1200" lang="zh-TW" dirty="0">
+                <a:solidFill>
+                  <a:srgbClr val="000000"/>
+                </a:solidFill>
+                <a:latin typeface="Arial Unicode MS"/>
+                <a:ea typeface="Arial Unicode MS"/>
+                <a:cs typeface="Arial Unicode MS"/>
+              </a:rPr>
+              <a:t>
+</a:t>
+            </a:r>
+          </a:p>
+          <a:p>
+            <a:pPr algn="l">
+              <a:spcBef>
+                <a:spcPts val="0"/>
+              </a:spcBef>
+              <a:spcAft>
+                <a:spcPts val="200"/>
+              </a:spcAft>
+            </a:pPr>
+            <a:r>
+              <a:rPr sz="1200" lang="zh-TW" dirty="0">
+                <a:solidFill>
+                  <a:srgbClr val="000000"/>
+                </a:solidFill>
+                <a:latin typeface="Arial Unicode MS"/>
+                <a:ea typeface="Arial Unicode MS"/>
+                <a:cs typeface="Arial Unicode MS"/>
+              </a:rPr>
+              <a:t>這一張也不唸，是附錄。
+</a:t>
+            </a:r>
+          </a:p>
+          <a:p>
+            <a:pPr algn="l">
+              <a:spcBef>
+                <a:spcPts val="0"/>
+              </a:spcBef>
+              <a:spcAft>
+                <a:spcPts val="200"/>
+              </a:spcAft>
+            </a:pPr>
+            <a:r>
+              <a:rPr sz="1200" lang="zh-TW" dirty="0">
+                <a:solidFill>
+                  <a:srgbClr val="000000"/>
+                </a:solidFill>
+                <a:latin typeface="Arial Unicode MS"/>
+                <a:ea typeface="Arial Unicode MS"/>
+                <a:cs typeface="Arial Unicode MS"/>
+              </a:rPr>
+              <a:t>左邊那一頁是 §1.5 Specifications，第 1 節第 5 張圈過的東西都在上面：Number of channels 128、Horizontal FOV 120 度、Vertical FOV 25.4 度，還有那兩行寫著 Far-field 和 Near-field 的解析度。
+</a:t>
+            </a:r>
+          </a:p>
+          <a:p>
+            <a:pPr algn="l">
+              <a:spcBef>
+                <a:spcPts val="0"/>
+              </a:spcBef>
+              <a:spcAft>
+                <a:spcPts val="200"/>
+              </a:spcAft>
+            </a:pPr>
+            <a:r>
+              <a:rPr sz="1200" lang="zh-TW" dirty="0">
+                <a:solidFill>
+                  <a:srgbClr val="000000"/>
+                </a:solidFill>
+                <a:latin typeface="Arial Unicode MS"/>
+                <a:ea typeface="Arial Unicode MS"/>
+                <a:cs typeface="Arial Unicode MS"/>
+              </a:rPr>
+              <a:t>右邊那一頁是同一節的註解。註②就是遠近場的定義——遠場超過 7.2 公尺、近場 0.5 到 7.2 公尺；註①說量測範圍是由分配給每一條通道的飛行時間決定的；註⑥還把每秒點數怎麼算整個列出來，1200 乘 128 乘 10 等於一百五十三萬六千。
+</a:t>
+            </a:r>
+          </a:p>
+          <a:p>
+            <a:pPr algn="l">
+              <a:spcBef>
+                <a:spcPts val="0"/>
+              </a:spcBef>
+              <a:spcAft>
+                <a:spcPts val="200"/>
+              </a:spcAft>
+            </a:pPr>
+            <a:r>
+              <a:rPr sz="1200" lang="zh-TW" dirty="0">
+                <a:solidFill>
+                  <a:srgbClr val="000000"/>
+                </a:solidFill>
+                <a:latin typeface="Arial Unicode MS"/>
+                <a:ea typeface="Arial Unicode MS"/>
+                <a:cs typeface="Arial Unicode MS"/>
+              </a:rPr>
+              <a:t>各位如果對「那個 0.1 度為什麼有兩個條件」還有疑問，答案就在右邊那一頁。</a:t>
+            </a:r>
+          </a:p>
+        </p:txBody>
+      </p:sp>
+      <p:sp>
+        <p:nvSpPr>
+          <p:cNvPr id="4" name="Slide Number Placeholder 3"/>
+          <p:cNvSpPr>
+            <a:spLocks noGrp="1"/>
+          </p:cNvSpPr>
+          <p:nvPr>
+            <p:ph type="sldNum" idx="5"/>
+          </p:nvPr>
+        </p:nvSpPr>
+        <p:spPr>
+          <a:xfrm>
+            <a:off x="6500000" y="10200000"/>
+            <a:ext cx="500000" cy="300000"/>
+          </a:xfrm>
+        </p:spPr>
+        <p:txBody>
+          <a:bodyPr vert="horz" wrap="square" anchor="t" lIns="91440" rIns="91440" tIns="45720" bIns="45720"/>
+          <a:lstStyle/>
+          <a:p>
+            <a:pPr algn="l">
+              <a:spcBef>
+                <a:spcPts val="0"/>
+              </a:spcBef>
+              <a:spcAft>
+                <a:spcPts val="167"/>
+              </a:spcAft>
+            </a:pPr>
+            <a:r>
+              <a:rPr sz="1000" lang="zh-TW" dirty="0">
+                <a:solidFill>
+                  <a:srgbClr val="000000"/>
+                </a:solidFill>
+                <a:latin typeface="Arial Unicode MS"/>
+                <a:ea typeface="Arial Unicode MS"/>
+                <a:cs typeface="Arial Unicode MS"/>
+              </a:rPr>
+              <a:t>17</a:t>
+            </a:r>
+          </a:p>
+        </p:txBody>
+      </p:sp>
+    </p:spTree>
+  </p:cSld>
+  <p:clrMapOvr>
+    <a:masterClrMapping/>
+  </p:clrMapOvr>
+</p:notes>
+</file>
+
+<file path=ppt/notesSlides/notesSlide18.xml><?xml version="1.0" encoding="utf-8"?>
+<p:notes xmlns:a="http://schemas.openxmlformats.org/drawingml/2006/main" xmlns:p="http://schemas.openxmlformats.org/presentationml/2006/main">
+  <p:cSld>
+    <p:spTree>
+      <p:nvGrpSpPr>
+        <p:cNvPr id="1" name=""/>
+        <p:cNvGrpSpPr/>
+        <p:nvPr/>
+      </p:nvGrpSpPr>
+      <p:grpSpPr>
+        <a:xfrm/>
+      </p:grpSpPr>
+      <p:sp>
+        <p:nvSpPr>
+          <p:cNvPr id="2" name="Slide Image Placeholder 1"/>
+          <p:cNvSpPr>
+            <a:spLocks noGrp="1"/>
+          </p:cNvSpPr>
+          <p:nvPr>
+            <p:ph type="sldImg" idx="2"/>
+          </p:nvPr>
+        </p:nvSpPr>
+        <p:spPr>
+          <a:xfrm>
+            <a:off x="540000" y="540000"/>
+            <a:ext cx="6480000" cy="3645000"/>
+          </a:xfrm>
+        </p:spPr>
+      </p:sp>
+      <p:sp>
+        <p:nvSpPr>
+          <p:cNvPr id="3" name="Notes Placeholder 2"/>
+          <p:cNvSpPr>
+            <a:spLocks noGrp="1"/>
+          </p:cNvSpPr>
+          <p:nvPr>
+            <p:ph type="body" idx="3"/>
+          </p:nvPr>
+        </p:nvSpPr>
+        <p:spPr>
+          <a:xfrm>
+            <a:off x="540000" y="4440000"/>
+            <a:ext cx="6480000" cy="5500000"/>
+          </a:xfrm>
+        </p:spPr>
+        <p:txBody>
+          <a:bodyPr vert="horz" wrap="square" anchor="t" lIns="91440" rIns="91440" tIns="45720" bIns="45720"/>
+          <a:lstStyle/>
+          <a:p>
+            <a:pPr algn="l">
+              <a:spcBef>
+                <a:spcPts val="0"/>
+              </a:spcBef>
+              <a:spcAft>
+                <a:spcPts val="200"/>
+              </a:spcAft>
+            </a:pPr>
+            <a:r>
+              <a:rPr sz="1200" b="1" lang="zh-TW" dirty="0">
+                <a:solidFill>
+                  <a:srgbClr val="000000"/>
+                </a:solidFill>
+                <a:latin typeface="Arial Unicode MS"/>
+                <a:ea typeface="Arial Unicode MS"/>
+                <a:cs typeface="Arial Unicode MS"/>
+              </a:rPr>
+              <a:t>▍這一張要做什麼</a:t>
+            </a:r>
+            <a:r>
+              <a:rPr sz="1200" lang="zh-TW" dirty="0">
+                <a:solidFill>
+                  <a:srgbClr val="000000"/>
+                </a:solidFill>
+                <a:latin typeface="Arial Unicode MS"/>
+                <a:ea typeface="Arial Unicode MS"/>
+                <a:cs typeface="Arial Unicode MS"/>
+              </a:rPr>
+              <a:t>
+</a:t>
+            </a:r>
+          </a:p>
+          <a:p>
+            <a:pPr algn="l">
+              <a:spcBef>
+                <a:spcPts val="0"/>
+              </a:spcBef>
+              <a:spcAft>
+                <a:spcPts val="200"/>
+              </a:spcAft>
+            </a:pPr>
+            <a:r>
+              <a:rPr sz="1200" lang="zh-TW" dirty="0">
+                <a:solidFill>
+                  <a:srgbClr val="000000"/>
+                </a:solidFill>
+                <a:latin typeface="Arial Unicode MS"/>
+                <a:ea typeface="Arial Unicode MS"/>
+                <a:cs typeface="Arial Unicode MS"/>
+              </a:rPr>
+              <a:t>附錄：相機那份規格書的完整原頁，備查用。
+</a:t>
+            </a:r>
+          </a:p>
+          <a:p>
+            <a:pPr algn="l">
+              <a:spcBef>
+                <a:spcPts val="0"/>
+              </a:spcBef>
+              <a:spcAft>
+                <a:spcPts val="200"/>
+              </a:spcAft>
+            </a:pPr>
+            <a:r>
+              <a:rPr sz="1200" b="1" lang="zh-TW" dirty="0">
+                <a:solidFill>
+                  <a:srgbClr val="000000"/>
+                </a:solidFill>
+                <a:latin typeface="Arial Unicode MS"/>
+                <a:ea typeface="Arial Unicode MS"/>
+                <a:cs typeface="Arial Unicode MS"/>
+              </a:rPr>
+              <a:t>▍畫面上圈這裡</a:t>
+            </a:r>
+            <a:r>
+              <a:rPr sz="1200" lang="zh-TW" dirty="0">
+                <a:solidFill>
+                  <a:srgbClr val="000000"/>
+                </a:solidFill>
+                <a:latin typeface="Arial Unicode MS"/>
+                <a:ea typeface="Arial Unicode MS"/>
+                <a:cs typeface="Arial Unicode MS"/>
+              </a:rPr>
+              <a:t>
+</a:t>
+            </a:r>
+          </a:p>
+          <a:p>
+            <a:pPr algn="l">
+              <a:spcBef>
+                <a:spcPts val="0"/>
+              </a:spcBef>
+              <a:spcAft>
+                <a:spcPts val="200"/>
+              </a:spcAft>
+            </a:pPr>
+            <a:r>
+              <a:rPr sz="1200" lang="zh-TW" dirty="0">
+                <a:solidFill>
+                  <a:srgbClr val="000000"/>
+                </a:solidFill>
+                <a:latin typeface="Arial Unicode MS"/>
+                <a:ea typeface="Arial Unicode MS"/>
+                <a:cs typeface="Arial Unicode MS"/>
+              </a:rPr>
+              <a:t>上課不唸。學生問「你圈的那一行在哪」的時候翻到這裡，或放映時放大看。
+</a:t>
+            </a:r>
+          </a:p>
+          <a:p>
+            <a:pPr algn="l">
+              <a:spcBef>
+                <a:spcPts val="0"/>
+              </a:spcBef>
+              <a:spcAft>
+                <a:spcPts val="200"/>
+              </a:spcAft>
+            </a:pPr>
+            <a:r>
+              <a:rPr sz="1200" b="1" lang="zh-TW" dirty="0">
+                <a:solidFill>
+                  <a:srgbClr val="000000"/>
+                </a:solidFill>
+                <a:latin typeface="Arial Unicode MS"/>
+                <a:ea typeface="Arial Unicode MS"/>
+                <a:cs typeface="Arial Unicode MS"/>
+              </a:rPr>
+              <a:t>▍以下照著唸</a:t>
+            </a:r>
+            <a:r>
+              <a:rPr sz="1200" lang="zh-TW" dirty="0">
+                <a:solidFill>
+                  <a:srgbClr val="000000"/>
+                </a:solidFill>
+                <a:latin typeface="Arial Unicode MS"/>
+                <a:ea typeface="Arial Unicode MS"/>
+                <a:cs typeface="Arial Unicode MS"/>
+              </a:rPr>
+              <a:t>
+</a:t>
+            </a:r>
+          </a:p>
+          <a:p>
+            <a:pPr algn="l">
+              <a:spcBef>
+                <a:spcPts val="0"/>
+              </a:spcBef>
+              <a:spcAft>
+                <a:spcPts val="200"/>
+              </a:spcAft>
+            </a:pPr>
+            <a:r>
+              <a:rPr sz="1200" lang="zh-TW" dirty="0">
+                <a:solidFill>
+                  <a:srgbClr val="000000"/>
+                </a:solidFill>
+                <a:latin typeface="Arial Unicode MS"/>
+                <a:ea typeface="Arial Unicode MS"/>
+                <a:cs typeface="Arial Unicode MS"/>
+              </a:rPr>
+              <a:t>這一張也不唸，是附錄。
+</a:t>
+            </a:r>
+          </a:p>
+          <a:p>
+            <a:pPr algn="l">
+              <a:spcBef>
+                <a:spcPts val="0"/>
+              </a:spcBef>
+              <a:spcAft>
+                <a:spcPts val="200"/>
+              </a:spcAft>
+            </a:pPr>
+            <a:r>
+              <a:rPr sz="1200" lang="zh-TW" dirty="0">
+                <a:solidFill>
+                  <a:srgbClr val="000000"/>
+                </a:solidFill>
+                <a:latin typeface="Arial Unicode MS"/>
+                <a:ea typeface="Arial Unicode MS"/>
+                <a:cs typeface="Arial Unicode MS"/>
+              </a:rPr>
+              <a:t>今天圈過的那幾行——有效像素、像素尺寸、動態範圍、LED 閃爍抑制——全部都在左邊那一頁的 Specifications 那一欄上。右邊第二頁是封裝尺寸，整頁寫 TBD，那是因為這份是 </a:t>
+            </a:r>
+            <a:r>
+              <a:rPr sz="1200" b="1" lang="zh-TW" dirty="0">
+                <a:solidFill>
+                  <a:srgbClr val="000000"/>
+                </a:solidFill>
+                <a:latin typeface="Arial Unicode MS"/>
+                <a:ea typeface="Arial Unicode MS"/>
+                <a:cs typeface="Arial Unicode MS"/>
+              </a:rPr>
+              <a:t>Product Preview</a:t>
+            </a:r>
+            <a:r>
+              <a:rPr sz="1200" lang="zh-TW" dirty="0">
+                <a:solidFill>
+                  <a:srgbClr val="000000"/>
+                </a:solidFill>
+                <a:latin typeface="Arial Unicode MS"/>
+                <a:ea typeface="Arial Unicode MS"/>
+                <a:cs typeface="Arial Unicode MS"/>
+              </a:rPr>
+              <a:t>，還不是正式規格書。
+</a:t>
+            </a:r>
+          </a:p>
+          <a:p>
+            <a:pPr algn="l">
+              <a:spcBef>
+                <a:spcPts val="0"/>
+              </a:spcBef>
+              <a:spcAft>
+                <a:spcPts val="200"/>
+              </a:spcAft>
+            </a:pPr>
+            <a:r>
+              <a:rPr sz="1200" lang="zh-TW" dirty="0">
+                <a:solidFill>
+                  <a:srgbClr val="000000"/>
+                </a:solidFill>
+                <a:latin typeface="Arial Unicode MS"/>
+                <a:ea typeface="Arial Unicode MS"/>
+                <a:cs typeface="Arial Unicode MS"/>
+              </a:rPr>
+              <a:t>各位記得第 1 節第 2 張說過的：</a:t>
+            </a:r>
+            <a:r>
+              <a:rPr sz="1200" b="1" lang="zh-TW" dirty="0">
+                <a:solidFill>
+                  <a:srgbClr val="000000"/>
+                </a:solidFill>
+                <a:latin typeface="Arial Unicode MS"/>
+                <a:ea typeface="Arial Unicode MS"/>
+                <a:cs typeface="Arial Unicode MS"/>
+              </a:rPr>
+              <a:t>快門方式這一行，這兩頁上都沒有。</a:t>
+            </a:r>
+            <a:r>
+              <a:rPr sz="1200" lang="zh-TW" dirty="0">
+                <a:solidFill>
+                  <a:srgbClr val="000000"/>
+                </a:solidFill>
+                <a:latin typeface="Arial Unicode MS"/>
+                <a:ea typeface="Arial Unicode MS"/>
+                <a:cs typeface="Arial Unicode MS"/>
+              </a:rPr>
+              <a:t>現在可以自己確認一次。要看快門方式，得去 onsemi 的產品頁。
+</a:t>
+            </a:r>
+          </a:p>
+          <a:p>
+            <a:pPr algn="l">
+              <a:spcBef>
+                <a:spcPts val="0"/>
+              </a:spcBef>
+              <a:spcAft>
+                <a:spcPts val="200"/>
+              </a:spcAft>
+            </a:pPr>
+            <a:r>
+              <a:rPr sz="1200" lang="zh-TW" dirty="0">
+                <a:solidFill>
+                  <a:srgbClr val="000000"/>
+                </a:solidFill>
+                <a:latin typeface="Arial Unicode MS"/>
+                <a:ea typeface="Arial Unicode MS"/>
+                <a:cs typeface="Arial Unicode MS"/>
+              </a:rPr>
+              <a:t>放映的時候可以放大看；發下去的 PDF 也印得出來。</a:t>
+            </a:r>
+          </a:p>
+        </p:txBody>
+      </p:sp>
+      <p:sp>
+        <p:nvSpPr>
+          <p:cNvPr id="4" name="Slide Number Placeholder 3"/>
+          <p:cNvSpPr>
+            <a:spLocks noGrp="1"/>
+          </p:cNvSpPr>
+          <p:nvPr>
+            <p:ph type="sldNum" idx="5"/>
+          </p:nvPr>
+        </p:nvSpPr>
+        <p:spPr>
+          <a:xfrm>
+            <a:off x="6500000" y="10200000"/>
+            <a:ext cx="500000" cy="300000"/>
+          </a:xfrm>
+        </p:spPr>
+        <p:txBody>
+          <a:bodyPr vert="horz" wrap="square" anchor="t" lIns="91440" rIns="91440" tIns="45720" bIns="45720"/>
+          <a:lstStyle/>
+          <a:p>
+            <a:pPr algn="l">
+              <a:spcBef>
+                <a:spcPts val="0"/>
+              </a:spcBef>
+              <a:spcAft>
+                <a:spcPts val="167"/>
+              </a:spcAft>
+            </a:pPr>
+            <a:r>
+              <a:rPr sz="1000" lang="zh-TW" dirty="0">
+                <a:solidFill>
+                  <a:srgbClr val="000000"/>
+                </a:solidFill>
+                <a:latin typeface="Arial Unicode MS"/>
+                <a:ea typeface="Arial Unicode MS"/>
+                <a:cs typeface="Arial Unicode MS"/>
+              </a:rPr>
+              <a:t>18</a:t>
             </a:r>
           </a:p>
         </p:txBody>
@@ -11749,7 +12411,7 @@
                 <a:ea typeface="Arial" pitchFamily="34" charset="-122"/>
                 <a:cs typeface="Arial" pitchFamily="34" charset="-120"/>
               </a:rPr>
-              <a:t>10 / 16</a:t>
+              <a:t>10 / 18</a:t>
             </a:r>
             <a:endParaRPr lang="en-US" sz="900" dirty="0"/>
           </a:p>
@@ -12199,7 +12861,7 @@
                 <a:ea typeface="Arial" pitchFamily="34" charset="-122"/>
                 <a:cs typeface="Arial" pitchFamily="34" charset="-120"/>
               </a:rPr>
-              <a:t>11 / 16</a:t>
+              <a:t>11 / 18</a:t>
             </a:r>
             <a:endParaRPr lang="en-US" sz="900" dirty="0"/>
           </a:p>
@@ -12649,7 +13311,7 @@
                 <a:ea typeface="Arial" pitchFamily="34" charset="-122"/>
                 <a:cs typeface="Arial" pitchFamily="34" charset="-120"/>
               </a:rPr>
-              <a:t>12 / 16</a:t>
+              <a:t>12 / 18</a:t>
             </a:r>
             <a:endParaRPr lang="en-US" sz="900" dirty="0"/>
           </a:p>
@@ -13494,7 +14156,7 @@
                 <a:ea typeface="Arial" pitchFamily="34" charset="-122"/>
                 <a:cs typeface="Arial" pitchFamily="34" charset="-120"/>
               </a:rPr>
-              <a:t>13 / 16</a:t>
+              <a:t>13 / 18</a:t>
             </a:r>
             <a:endParaRPr lang="en-US" sz="900" dirty="0"/>
           </a:p>
@@ -14243,7 +14905,7 @@
                 <a:ea typeface="Arial" pitchFamily="34" charset="-122"/>
                 <a:cs typeface="Arial" pitchFamily="34" charset="-120"/>
               </a:rPr>
-              <a:t>14 / 16</a:t>
+              <a:t>14 / 18</a:t>
             </a:r>
             <a:endParaRPr lang="en-US" sz="900" dirty="0"/>
           </a:p>
@@ -14747,7 +15409,7 @@
                 <a:ea typeface="Arial" pitchFamily="34" charset="-122"/>
                 <a:cs typeface="Arial" pitchFamily="34" charset="-120"/>
               </a:rPr>
-              <a:t>15 / 16</a:t>
+              <a:t>15 / 18</a:t>
             </a:r>
             <a:endParaRPr lang="en-US" sz="900" dirty="0"/>
           </a:p>
@@ -14892,7 +15554,7 @@
                 <a:ea typeface="Arial" pitchFamily="34" charset="-122"/>
                 <a:cs typeface="Arial" pitchFamily="34" charset="-120"/>
               </a:rPr>
-              <a:t>onsemi AR0233AT — toàn bộ datasheet gốc (2 trang)</a:t>
+              <a:t>Ouster OS1 — toàn bộ datasheet gốc (3 trang thông số)</a:t>
             </a:r>
             <a:endParaRPr lang="en-US" sz="1700" dirty="0"/>
           </a:p>
@@ -14912,7 +15574,7 @@
                 <a:ea typeface="微軟正黑體" pitchFamily="34" charset="-122"/>
                 <a:cs typeface="微軟正黑體" pitchFamily="34" charset="-120"/>
               </a:rPr>
-              <a:t>onsemi AR0233AT — 廠商規格書原頁（全兩頁）</a:t>
+              <a:t>Ouster OS1 — 廠商規格書原頁（規格那三頁）</a:t>
             </a:r>
             <a:endParaRPr lang="en-US" sz="1700" dirty="0"/>
           </a:p>
@@ -14926,7 +15588,7 @@
         </p:nvSpPr>
         <p:spPr>
           <a:xfrm>
-            <a:off x="2186247" y="1371600"/>
+            <a:off x="970511" y="1371600"/>
             <a:ext cx="2340033" cy="3017520"/>
           </a:xfrm>
           <a:prstGeom prst="rect">
@@ -14945,7 +15607,7 @@
       </p:sp>
       <p:pic>
         <p:nvPicPr>
-          <p:cNvPr id="5" name="Image 0" descr="/Users/tsengchenghsun/Class/carClass/Claude outputs/第五週(10-8)/src/img/w5_ds_ar0233at_p1.png">    </p:cNvPr>
+          <p:cNvPr id="5" name="Image 0" descr="/Users/tsengchenghsun/Class/carClass/Claude outputs/第五週(10-8)/src/img/w5_ds_os1_p1.png">    </p:cNvPr>
           <p:cNvPicPr>
             <a:picLocks noChangeAspect="1"/>
           </p:cNvPicPr>
@@ -14959,7 +15621,7 @@
         </p:blipFill>
         <p:spPr>
           <a:xfrm>
-            <a:off x="2204535" y="1389888"/>
+            <a:off x="988799" y="1389888"/>
             <a:ext cx="2303457" cy="2980944"/>
           </a:xfrm>
           <a:prstGeom prst="rect">
@@ -14975,7 +15637,7 @@
         </p:nvSpPr>
         <p:spPr>
           <a:xfrm>
-            <a:off x="4617720" y="1371600"/>
+            <a:off x="3401984" y="1371600"/>
             <a:ext cx="2340033" cy="3017520"/>
           </a:xfrm>
           <a:prstGeom prst="rect">
@@ -14994,7 +15656,7 @@
       </p:sp>
       <p:pic>
         <p:nvPicPr>
-          <p:cNvPr id="7" name="Image 1" descr="/Users/tsengchenghsun/Class/carClass/Claude outputs/第五週(10-8)/src/img/w5_ds_ar0233at_p2.png">    </p:cNvPr>
+          <p:cNvPr id="7" name="Image 1" descr="/Users/tsengchenghsun/Class/carClass/Claude outputs/第五週(10-8)/src/img/w5_ds_os1_p2.png">    </p:cNvPr>
           <p:cNvPicPr>
             <a:picLocks noChangeAspect="1"/>
           </p:cNvPicPr>
@@ -15008,7 +15670,7 @@
         </p:blipFill>
         <p:spPr>
           <a:xfrm>
-            <a:off x="4636008" y="1389888"/>
+            <a:off x="3420272" y="1389888"/>
             <a:ext cx="2303457" cy="2980944"/>
           </a:xfrm>
           <a:prstGeom prst="rect">
@@ -15018,46 +15680,32 @@
       </p:pic>
       <p:sp>
         <p:nvSpPr>
-          <p:cNvPr id="8" name="Text 4"/>
-          <p:cNvSpPr txBox="1"/>
-          <p:nvPr/>
-        </p:nvSpPr>
-        <p:spPr>
-          <a:xfrm>
-            <a:off x="502920" y="4407408"/>
-            <a:ext cx="8138160" cy="201168"/>
+          <p:cNvPr id="8" name="Shape 4"/>
+          <p:cNvSpPr/>
+          <p:nvPr/>
+        </p:nvSpPr>
+        <p:spPr>
+          <a:xfrm>
+            <a:off x="5833456" y="1371600"/>
+            <a:ext cx="2340033" cy="3017520"/>
           </a:xfrm>
           <a:prstGeom prst="rect">
             <a:avLst/>
           </a:prstGeom>
-          <a:noFill/>
-          <a:ln/>
-        </p:spPr>
-        <p:txBody>
-          <a:bodyPr wrap="square" lIns="0" tIns="0" rIns="0" bIns="0" rtlCol="0" anchor="ctr"/>
-          <a:lstStyle/>
-          <a:p>
-            <a:pPr algn="ctr" indent="0" marL="0">
-              <a:buNone/>
-            </a:pPr>
-            <a:r>
-              <a:rPr lang="en-US" sz="850" dirty="0">
-                <a:solidFill>
-                  <a:srgbClr val="5F7183"/>
-                </a:solidFill>
-                <a:latin typeface="Arial" pitchFamily="34" charset="0"/>
-                <a:ea typeface="Arial" pitchFamily="34" charset="-122"/>
-                <a:cs typeface="Arial" pitchFamily="34" charset="-120"/>
-              </a:rPr>
-              <a:t>onsemi, AR0233AT Product Preview, Rev. P2, 11/2017（Publication Order Number AR0233AT/D）· 原頁全文 · 讀取 2026/10/02 · 版權歸 onsemi，課堂引用</a:t>
-            </a:r>
-            <a:endParaRPr lang="en-US" sz="850" dirty="0"/>
-          </a:p>
-        </p:txBody>
+          <a:solidFill>
+            <a:srgbClr val="FFFFFF"/>
+          </a:solidFill>
+          <a:ln w="12700">
+            <a:solidFill>
+              <a:srgbClr val="DBE3EA"/>
+            </a:solidFill>
+            <a:prstDash val="solid"/>
+          </a:ln>
+        </p:spPr>
       </p:sp>
       <p:pic>
         <p:nvPicPr>
-          <p:cNvPr id="10" name="Image 2" descr="/Users/tsengchenghsun/Class/carClass/Claude outputs/第五週(10-8)/src/logo.png">    </p:cNvPr>
+          <p:cNvPr id="9" name="Image 2" descr="/Users/tsengchenghsun/Class/carClass/Claude outputs/第五週(10-8)/src/img/w5_ds_os1_p3.png">    </p:cNvPr>
           <p:cNvPicPr>
             <a:picLocks noChangeAspect="1"/>
           </p:cNvPicPr>
@@ -15071,8 +15719,8 @@
         </p:blipFill>
         <p:spPr>
           <a:xfrm>
-            <a:off x="7882128" y="109728"/>
-            <a:ext cx="1097280" cy="242439"/>
+            <a:off x="5851744" y="1389888"/>
+            <a:ext cx="2303457" cy="2980944"/>
           </a:xfrm>
           <a:prstGeom prst="rect">
             <a:avLst/>
@@ -15081,14 +15729,14 @@
       </p:pic>
       <p:sp>
         <p:nvSpPr>
-          <p:cNvPr id="11" name="Text 5"/>
+          <p:cNvPr id="10" name="Text 5"/>
           <p:cNvSpPr txBox="1"/>
           <p:nvPr/>
         </p:nvSpPr>
         <p:spPr>
           <a:xfrm>
-            <a:off x="109728" y="128016"/>
-            <a:ext cx="822960" cy="256032"/>
+            <a:off x="502920" y="4407408"/>
+            <a:ext cx="8138160" cy="201168"/>
           </a:xfrm>
           <a:prstGeom prst="rect">
             <a:avLst/>
@@ -15100,11 +15748,11 @@
           <a:bodyPr wrap="square" lIns="0" tIns="0" rIns="0" bIns="0" rtlCol="0" anchor="ctr"/>
           <a:lstStyle/>
           <a:p>
-            <a:pPr indent="0" marL="0">
+            <a:pPr algn="ctr" indent="0" marL="0">
               <a:buNone/>
             </a:pPr>
             <a:r>
-              <a:rPr lang="en-US" sz="900" dirty="0">
+              <a:rPr lang="en-US" sz="850" dirty="0">
                 <a:solidFill>
                   <a:srgbClr val="5F7183"/>
                 </a:solidFill>
@@ -15112,7 +15760,800 @@
                 <a:ea typeface="Arial" pitchFamily="34" charset="-122"/>
                 <a:cs typeface="Arial" pitchFamily="34" charset="-120"/>
               </a:rPr>
-              <a:t>16 / 16</a:t>
+              <a:t>Ouster OS1 datasheet, hardware Rev7 / firmware 3.2 · 官方 PDF 第 1–3 頁原頁全文 · 讀取 2026/10/02 · 版權歸 Ouster，課堂引用</a:t>
+            </a:r>
+            <a:endParaRPr lang="en-US" sz="850" dirty="0"/>
+          </a:p>
+        </p:txBody>
+      </p:sp>
+      <p:pic>
+        <p:nvPicPr>
+          <p:cNvPr id="12" name="Image 3" descr="/Users/tsengchenghsun/Class/carClass/Claude outputs/第五週(10-8)/src/logo.png">    </p:cNvPr>
+          <p:cNvPicPr>
+            <a:picLocks noChangeAspect="1"/>
+          </p:cNvPicPr>
+          <p:nvPr/>
+        </p:nvPicPr>
+        <p:blipFill>
+          <a:blip r:embed="rId4"/>
+          <a:stretch>
+            <a:fillRect/>
+          </a:stretch>
+        </p:blipFill>
+        <p:spPr>
+          <a:xfrm>
+            <a:off x="7882128" y="109728"/>
+            <a:ext cx="1097280" cy="242439"/>
+          </a:xfrm>
+          <a:prstGeom prst="rect">
+            <a:avLst/>
+          </a:prstGeom>
+        </p:spPr>
+      </p:pic>
+      <p:sp>
+        <p:nvSpPr>
+          <p:cNvPr id="13" name="Text 6"/>
+          <p:cNvSpPr txBox="1"/>
+          <p:nvPr/>
+        </p:nvSpPr>
+        <p:spPr>
+          <a:xfrm>
+            <a:off x="109728" y="128016"/>
+            <a:ext cx="822960" cy="256032"/>
+          </a:xfrm>
+          <a:prstGeom prst="rect">
+            <a:avLst/>
+          </a:prstGeom>
+          <a:noFill/>
+          <a:ln/>
+        </p:spPr>
+        <p:txBody>
+          <a:bodyPr wrap="square" lIns="0" tIns="0" rIns="0" bIns="0" rtlCol="0" anchor="ctr"/>
+          <a:lstStyle/>
+          <a:p>
+            <a:pPr indent="0" marL="0">
+              <a:buNone/>
+            </a:pPr>
+            <a:r>
+              <a:rPr lang="en-US" sz="900" dirty="0">
+                <a:solidFill>
+                  <a:srgbClr val="5F7183"/>
+                </a:solidFill>
+                <a:latin typeface="Arial" pitchFamily="34" charset="0"/>
+                <a:ea typeface="Arial" pitchFamily="34" charset="-122"/>
+                <a:cs typeface="Arial" pitchFamily="34" charset="-120"/>
+              </a:rPr>
+              <a:t>16 / 18</a:t>
+            </a:r>
+            <a:endParaRPr lang="en-US" sz="900" dirty="0"/>
+          </a:p>
+        </p:txBody>
+      </p:sp>
+      <p:sp>
+        <p:nvSpPr>
+          <p:cNvPr id="14" name="Text 7"/>
+          <p:cNvSpPr txBox="1"/>
+          <p:nvPr/>
+        </p:nvSpPr>
+        <p:spPr>
+          <a:xfrm>
+            <a:off x="960120" y="128016"/>
+            <a:ext cx="2011680" cy="256032"/>
+          </a:xfrm>
+          <a:prstGeom prst="rect">
+            <a:avLst/>
+          </a:prstGeom>
+          <a:noFill/>
+          <a:ln/>
+        </p:spPr>
+        <p:txBody>
+          <a:bodyPr wrap="square" lIns="0" tIns="0" rIns="0" bIns="0" rtlCol="0" anchor="ctr"/>
+          <a:lstStyle/>
+          <a:p>
+            <a:pPr indent="0" marL="0">
+              <a:buNone/>
+            </a:pPr>
+            <a:r>
+              <a:rPr lang="en-US" sz="900" dirty="0">
+                <a:solidFill>
+                  <a:srgbClr val="5F7183"/>
+                </a:solidFill>
+                <a:latin typeface="Arial" pitchFamily="34" charset="0"/>
+                <a:ea typeface="Arial" pitchFamily="34" charset="-122"/>
+                <a:cs typeface="Arial" pitchFamily="34" charset="-120"/>
+              </a:rPr>
+              <a:t>Tiết 1 · 第 1 節</a:t>
+            </a:r>
+            <a:endParaRPr lang="en-US" sz="900" dirty="0"/>
+          </a:p>
+        </p:txBody>
+      </p:sp>
+    </p:spTree>
+  </p:cSld>
+  <p:clrMapOvr>
+    <a:masterClrMapping/>
+  </p:clrMapOvr>
+</p:sld>
+</file>
+
+<file path=ppt/slides/slide17.xml><?xml version="1.0" encoding="utf-8"?>
+<p:sld xmlns:a="http://schemas.openxmlformats.org/drawingml/2006/main" xmlns:r="http://schemas.openxmlformats.org/officeDocument/2006/relationships" xmlns:p="http://schemas.openxmlformats.org/presentationml/2006/main">
+  <p:cSld name="Slide 17">
+    <p:spTree>
+      <p:nvGrpSpPr>
+        <p:cNvPr id="1" name=""/>
+        <p:cNvGrpSpPr/>
+        <p:nvPr/>
+      </p:nvGrpSpPr>
+      <p:grpSpPr>
+        <a:xfrm>
+          <a:off x="0" y="0"/>
+          <a:ext cx="1" cy="1"/>
+          <a:chOff x="0" y="0"/>
+          <a:chExt cx="0" cy="0"/>
+        </a:xfrm>
+      </p:grpSpPr>
+      <p:sp>
+        <p:nvSpPr>
+          <p:cNvPr id="2" name="Text 0"/>
+          <p:cNvSpPr txBox="1"/>
+          <p:nvPr/>
+        </p:nvSpPr>
+        <p:spPr>
+          <a:xfrm>
+            <a:off x="502920" y="420624"/>
+            <a:ext cx="8138160" cy="274320"/>
+          </a:xfrm>
+          <a:prstGeom prst="rect">
+            <a:avLst/>
+          </a:prstGeom>
+          <a:noFill/>
+          <a:ln/>
+        </p:spPr>
+        <p:txBody>
+          <a:bodyPr wrap="square" lIns="0" tIns="0" rIns="0" bIns="0" rtlCol="0" anchor="ctr"/>
+          <a:lstStyle/>
+          <a:p>
+            <a:pPr indent="0" marL="0">
+              <a:buNone/>
+            </a:pPr>
+            <a:r>
+              <a:rPr lang="en-US" sz="1250" b="1" dirty="0">
+                <a:solidFill>
+                  <a:srgbClr val="007F72"/>
+                </a:solidFill>
+                <a:latin typeface="Arial" pitchFamily="34" charset="0"/>
+                <a:ea typeface="Arial" pitchFamily="34" charset="-122"/>
+                <a:cs typeface="Arial" pitchFamily="34" charset="-120"/>
+              </a:rPr>
+              <a:t>Phụ lục · 附錄（不計時）</a:t>
+            </a:r>
+            <a:endParaRPr lang="en-US" sz="1250" dirty="0"/>
+          </a:p>
+        </p:txBody>
+      </p:sp>
+      <p:sp>
+        <p:nvSpPr>
+          <p:cNvPr id="3" name="Text 1"/>
+          <p:cNvSpPr txBox="1"/>
+          <p:nvPr/>
+        </p:nvSpPr>
+        <p:spPr>
+          <a:xfrm>
+            <a:off x="502920" y="731520"/>
+            <a:ext cx="8138160" cy="585216"/>
+          </a:xfrm>
+          <a:prstGeom prst="rect">
+            <a:avLst/>
+          </a:prstGeom>
+          <a:noFill/>
+          <a:ln/>
+        </p:spPr>
+        <p:txBody>
+          <a:bodyPr wrap="square" lIns="0" tIns="0" rIns="0" bIns="0" rtlCol="0" anchor="t"/>
+          <a:lstStyle/>
+          <a:p>
+            <a:pPr indent="0" marL="0">
+              <a:lnSpc>
+                <a:spcPct val="120000"/>
+              </a:lnSpc>
+              <a:buNone/>
+            </a:pPr>
+            <a:r>
+              <a:rPr lang="en-US" sz="1700" b="1" dirty="0">
+                <a:solidFill>
+                  <a:srgbClr val="0B1F3A"/>
+                </a:solidFill>
+                <a:latin typeface="Arial" pitchFamily="34" charset="0"/>
+                <a:ea typeface="Arial" pitchFamily="34" charset="-122"/>
+                <a:cs typeface="Arial" pitchFamily="34" charset="-120"/>
+              </a:rPr>
+              <a:t>Hesai AT128P — nguyên trang sổ tay (phần thông số)</a:t>
+            </a:r>
+            <a:endParaRPr lang="en-US" sz="1700" dirty="0"/>
+          </a:p>
+          <a:p>
+            <a:pPr indent="0" marL="0">
+              <a:lnSpc>
+                <a:spcPct val="120000"/>
+              </a:lnSpc>
+              <a:buNone/>
+            </a:pPr>
+            <a:r>
+              <a:rPr lang="en-US" sz="1300" dirty="0">
+                <a:solidFill>
+                  <a:srgbClr val="007F72"/>
+                </a:solidFill>
+                <a:latin typeface="微軟正黑體" pitchFamily="34" charset="0"/>
+                <a:ea typeface="微軟正黑體" pitchFamily="34" charset="-122"/>
+                <a:cs typeface="微軟正黑體" pitchFamily="34" charset="-120"/>
+              </a:rPr>
+              <a:t>Hesai AT128P — 使用手冊原頁（規格那兩頁）</a:t>
+            </a:r>
+            <a:endParaRPr lang="en-US" sz="1700" dirty="0"/>
+          </a:p>
+        </p:txBody>
+      </p:sp>
+      <p:sp>
+        <p:nvSpPr>
+          <p:cNvPr id="4" name="Shape 2"/>
+          <p:cNvSpPr/>
+          <p:nvPr/>
+        </p:nvSpPr>
+        <p:spPr>
+          <a:xfrm>
+            <a:off x="484632" y="1445999"/>
+            <a:ext cx="4041648" cy="2868722"/>
+          </a:xfrm>
+          <a:prstGeom prst="rect">
+            <a:avLst/>
+          </a:prstGeom>
+          <a:solidFill>
+            <a:srgbClr val="FFFFFF"/>
+          </a:solidFill>
+          <a:ln w="12700">
+            <a:solidFill>
+              <a:srgbClr val="DBE3EA"/>
+            </a:solidFill>
+            <a:prstDash val="solid"/>
+          </a:ln>
+        </p:spPr>
+      </p:sp>
+      <p:pic>
+        <p:nvPicPr>
+          <p:cNvPr id="5" name="Image 0" descr="/Users/tsengchenghsun/Class/carClass/Claude outputs/第五週(10-8)/src/img/w5_ds_at128p_p13.png">    </p:cNvPr>
+          <p:cNvPicPr>
+            <a:picLocks noChangeAspect="1"/>
+          </p:cNvPicPr>
+          <p:nvPr/>
+        </p:nvPicPr>
+        <p:blipFill>
+          <a:blip r:embed="rId1"/>
+          <a:stretch>
+            <a:fillRect/>
+          </a:stretch>
+        </p:blipFill>
+        <p:spPr>
+          <a:xfrm>
+            <a:off x="502920" y="1464287"/>
+            <a:ext cx="4005072" cy="2832146"/>
+          </a:xfrm>
+          <a:prstGeom prst="rect">
+            <a:avLst/>
+          </a:prstGeom>
+        </p:spPr>
+      </p:pic>
+      <p:sp>
+        <p:nvSpPr>
+          <p:cNvPr id="6" name="Shape 3"/>
+          <p:cNvSpPr/>
+          <p:nvPr/>
+        </p:nvSpPr>
+        <p:spPr>
+          <a:xfrm>
+            <a:off x="4617720" y="1445999"/>
+            <a:ext cx="4041648" cy="2868722"/>
+          </a:xfrm>
+          <a:prstGeom prst="rect">
+            <a:avLst/>
+          </a:prstGeom>
+          <a:solidFill>
+            <a:srgbClr val="FFFFFF"/>
+          </a:solidFill>
+          <a:ln w="12700">
+            <a:solidFill>
+              <a:srgbClr val="DBE3EA"/>
+            </a:solidFill>
+            <a:prstDash val="solid"/>
+          </a:ln>
+        </p:spPr>
+      </p:sp>
+      <p:pic>
+        <p:nvPicPr>
+          <p:cNvPr id="7" name="Image 1" descr="/Users/tsengchenghsun/Class/carClass/Claude outputs/第五週(10-8)/src/img/w5_ds_at128p_p15.png">    </p:cNvPr>
+          <p:cNvPicPr>
+            <a:picLocks noChangeAspect="1"/>
+          </p:cNvPicPr>
+          <p:nvPr/>
+        </p:nvPicPr>
+        <p:blipFill>
+          <a:blip r:embed="rId2"/>
+          <a:stretch>
+            <a:fillRect/>
+          </a:stretch>
+        </p:blipFill>
+        <p:spPr>
+          <a:xfrm>
+            <a:off x="4636008" y="1464287"/>
+            <a:ext cx="4005072" cy="2832146"/>
+          </a:xfrm>
+          <a:prstGeom prst="rect">
+            <a:avLst/>
+          </a:prstGeom>
+        </p:spPr>
+      </p:pic>
+      <p:sp>
+        <p:nvSpPr>
+          <p:cNvPr id="8" name="Text 4"/>
+          <p:cNvSpPr txBox="1"/>
+          <p:nvPr/>
+        </p:nvSpPr>
+        <p:spPr>
+          <a:xfrm>
+            <a:off x="502920" y="4407408"/>
+            <a:ext cx="8138160" cy="201168"/>
+          </a:xfrm>
+          <a:prstGeom prst="rect">
+            <a:avLst/>
+          </a:prstGeom>
+          <a:noFill/>
+          <a:ln/>
+        </p:spPr>
+        <p:txBody>
+          <a:bodyPr wrap="square" lIns="0" tIns="0" rIns="0" bIns="0" rtlCol="0" anchor="ctr"/>
+          <a:lstStyle/>
+          <a:p>
+            <a:pPr algn="ctr" indent="0" marL="0">
+              <a:buNone/>
+            </a:pPr>
+            <a:r>
+              <a:rPr lang="en-US" sz="850" dirty="0">
+                <a:solidFill>
+                  <a:srgbClr val="5F7183"/>
+                </a:solidFill>
+                <a:latin typeface="Arial" pitchFamily="34" charset="0"/>
+                <a:ea typeface="Arial" pitchFamily="34" charset="-122"/>
+                <a:cs typeface="Arial" pitchFamily="34" charset="-120"/>
+              </a:rPr>
+              <a:t>Hesai AT128P User Manual A02（en-250410）· §1.5 Specifications 第 13 頁與註解第 15 頁原頁全文 · 讀取 2026/10/02 · 版權歸 Hesai，課堂引用</a:t>
+            </a:r>
+            <a:endParaRPr lang="en-US" sz="850" dirty="0"/>
+          </a:p>
+        </p:txBody>
+      </p:sp>
+      <p:pic>
+        <p:nvPicPr>
+          <p:cNvPr id="10" name="Image 2" descr="/Users/tsengchenghsun/Class/carClass/Claude outputs/第五週(10-8)/src/logo.png">    </p:cNvPr>
+          <p:cNvPicPr>
+            <a:picLocks noChangeAspect="1"/>
+          </p:cNvPicPr>
+          <p:nvPr/>
+        </p:nvPicPr>
+        <p:blipFill>
+          <a:blip r:embed="rId3"/>
+          <a:stretch>
+            <a:fillRect/>
+          </a:stretch>
+        </p:blipFill>
+        <p:spPr>
+          <a:xfrm>
+            <a:off x="7882128" y="109728"/>
+            <a:ext cx="1097280" cy="242439"/>
+          </a:xfrm>
+          <a:prstGeom prst="rect">
+            <a:avLst/>
+          </a:prstGeom>
+        </p:spPr>
+      </p:pic>
+      <p:sp>
+        <p:nvSpPr>
+          <p:cNvPr id="11" name="Text 5"/>
+          <p:cNvSpPr txBox="1"/>
+          <p:nvPr/>
+        </p:nvSpPr>
+        <p:spPr>
+          <a:xfrm>
+            <a:off x="109728" y="128016"/>
+            <a:ext cx="822960" cy="256032"/>
+          </a:xfrm>
+          <a:prstGeom prst="rect">
+            <a:avLst/>
+          </a:prstGeom>
+          <a:noFill/>
+          <a:ln/>
+        </p:spPr>
+        <p:txBody>
+          <a:bodyPr wrap="square" lIns="0" tIns="0" rIns="0" bIns="0" rtlCol="0" anchor="ctr"/>
+          <a:lstStyle/>
+          <a:p>
+            <a:pPr indent="0" marL="0">
+              <a:buNone/>
+            </a:pPr>
+            <a:r>
+              <a:rPr lang="en-US" sz="900" dirty="0">
+                <a:solidFill>
+                  <a:srgbClr val="5F7183"/>
+                </a:solidFill>
+                <a:latin typeface="Arial" pitchFamily="34" charset="0"/>
+                <a:ea typeface="Arial" pitchFamily="34" charset="-122"/>
+                <a:cs typeface="Arial" pitchFamily="34" charset="-120"/>
+              </a:rPr>
+              <a:t>17 / 18</a:t>
+            </a:r>
+            <a:endParaRPr lang="en-US" sz="900" dirty="0"/>
+          </a:p>
+        </p:txBody>
+      </p:sp>
+      <p:sp>
+        <p:nvSpPr>
+          <p:cNvPr id="12" name="Text 6"/>
+          <p:cNvSpPr txBox="1"/>
+          <p:nvPr/>
+        </p:nvSpPr>
+        <p:spPr>
+          <a:xfrm>
+            <a:off x="960120" y="128016"/>
+            <a:ext cx="2011680" cy="256032"/>
+          </a:xfrm>
+          <a:prstGeom prst="rect">
+            <a:avLst/>
+          </a:prstGeom>
+          <a:noFill/>
+          <a:ln/>
+        </p:spPr>
+        <p:txBody>
+          <a:bodyPr wrap="square" lIns="0" tIns="0" rIns="0" bIns="0" rtlCol="0" anchor="ctr"/>
+          <a:lstStyle/>
+          <a:p>
+            <a:pPr indent="0" marL="0">
+              <a:buNone/>
+            </a:pPr>
+            <a:r>
+              <a:rPr lang="en-US" sz="900" dirty="0">
+                <a:solidFill>
+                  <a:srgbClr val="5F7183"/>
+                </a:solidFill>
+                <a:latin typeface="Arial" pitchFamily="34" charset="0"/>
+                <a:ea typeface="Arial" pitchFamily="34" charset="-122"/>
+                <a:cs typeface="Arial" pitchFamily="34" charset="-120"/>
+              </a:rPr>
+              <a:t>Tiết 1 · 第 1 節</a:t>
+            </a:r>
+            <a:endParaRPr lang="en-US" sz="900" dirty="0"/>
+          </a:p>
+        </p:txBody>
+      </p:sp>
+    </p:spTree>
+  </p:cSld>
+  <p:clrMapOvr>
+    <a:masterClrMapping/>
+  </p:clrMapOvr>
+</p:sld>
+</file>
+
+<file path=ppt/slides/slide18.xml><?xml version="1.0" encoding="utf-8"?>
+<p:sld xmlns:a="http://schemas.openxmlformats.org/drawingml/2006/main" xmlns:r="http://schemas.openxmlformats.org/officeDocument/2006/relationships" xmlns:p="http://schemas.openxmlformats.org/presentationml/2006/main">
+  <p:cSld name="Slide 18">
+    <p:spTree>
+      <p:nvGrpSpPr>
+        <p:cNvPr id="1" name=""/>
+        <p:cNvGrpSpPr/>
+        <p:nvPr/>
+      </p:nvGrpSpPr>
+      <p:grpSpPr>
+        <a:xfrm>
+          <a:off x="0" y="0"/>
+          <a:ext cx="1" cy="1"/>
+          <a:chOff x="0" y="0"/>
+          <a:chExt cx="0" cy="0"/>
+        </a:xfrm>
+      </p:grpSpPr>
+      <p:sp>
+        <p:nvSpPr>
+          <p:cNvPr id="2" name="Text 0"/>
+          <p:cNvSpPr txBox="1"/>
+          <p:nvPr/>
+        </p:nvSpPr>
+        <p:spPr>
+          <a:xfrm>
+            <a:off x="502920" y="420624"/>
+            <a:ext cx="8138160" cy="274320"/>
+          </a:xfrm>
+          <a:prstGeom prst="rect">
+            <a:avLst/>
+          </a:prstGeom>
+          <a:noFill/>
+          <a:ln/>
+        </p:spPr>
+        <p:txBody>
+          <a:bodyPr wrap="square" lIns="0" tIns="0" rIns="0" bIns="0" rtlCol="0" anchor="ctr"/>
+          <a:lstStyle/>
+          <a:p>
+            <a:pPr indent="0" marL="0">
+              <a:buNone/>
+            </a:pPr>
+            <a:r>
+              <a:rPr lang="en-US" sz="1250" b="1" dirty="0">
+                <a:solidFill>
+                  <a:srgbClr val="007F72"/>
+                </a:solidFill>
+                <a:latin typeface="Arial" pitchFamily="34" charset="0"/>
+                <a:ea typeface="Arial" pitchFamily="34" charset="-122"/>
+                <a:cs typeface="Arial" pitchFamily="34" charset="-120"/>
+              </a:rPr>
+              <a:t>Phụ lục · 附錄（不計時）</a:t>
+            </a:r>
+            <a:endParaRPr lang="en-US" sz="1250" dirty="0"/>
+          </a:p>
+        </p:txBody>
+      </p:sp>
+      <p:sp>
+        <p:nvSpPr>
+          <p:cNvPr id="3" name="Text 1"/>
+          <p:cNvSpPr txBox="1"/>
+          <p:nvPr/>
+        </p:nvSpPr>
+        <p:spPr>
+          <a:xfrm>
+            <a:off x="502920" y="731520"/>
+            <a:ext cx="8138160" cy="585216"/>
+          </a:xfrm>
+          <a:prstGeom prst="rect">
+            <a:avLst/>
+          </a:prstGeom>
+          <a:noFill/>
+          <a:ln/>
+        </p:spPr>
+        <p:txBody>
+          <a:bodyPr wrap="square" lIns="0" tIns="0" rIns="0" bIns="0" rtlCol="0" anchor="t"/>
+          <a:lstStyle/>
+          <a:p>
+            <a:pPr indent="0" marL="0">
+              <a:lnSpc>
+                <a:spcPct val="120000"/>
+              </a:lnSpc>
+              <a:buNone/>
+            </a:pPr>
+            <a:r>
+              <a:rPr lang="en-US" sz="1700" b="1" dirty="0">
+                <a:solidFill>
+                  <a:srgbClr val="0B1F3A"/>
+                </a:solidFill>
+                <a:latin typeface="Arial" pitchFamily="34" charset="0"/>
+                <a:ea typeface="Arial" pitchFamily="34" charset="-122"/>
+                <a:cs typeface="Arial" pitchFamily="34" charset="-120"/>
+              </a:rPr>
+              <a:t>onsemi AR0233AT — toàn bộ datasheet gốc (2 trang)</a:t>
+            </a:r>
+            <a:endParaRPr lang="en-US" sz="1700" dirty="0"/>
+          </a:p>
+          <a:p>
+            <a:pPr indent="0" marL="0">
+              <a:lnSpc>
+                <a:spcPct val="120000"/>
+              </a:lnSpc>
+              <a:buNone/>
+            </a:pPr>
+            <a:r>
+              <a:rPr lang="en-US" sz="1300" dirty="0">
+                <a:solidFill>
+                  <a:srgbClr val="007F72"/>
+                </a:solidFill>
+                <a:latin typeface="微軟正黑體" pitchFamily="34" charset="0"/>
+                <a:ea typeface="微軟正黑體" pitchFamily="34" charset="-122"/>
+                <a:cs typeface="微軟正黑體" pitchFamily="34" charset="-120"/>
+              </a:rPr>
+              <a:t>onsemi AR0233AT — 廠商規格書原頁（全兩頁）</a:t>
+            </a:r>
+            <a:endParaRPr lang="en-US" sz="1700" dirty="0"/>
+          </a:p>
+        </p:txBody>
+      </p:sp>
+      <p:sp>
+        <p:nvSpPr>
+          <p:cNvPr id="4" name="Shape 2"/>
+          <p:cNvSpPr/>
+          <p:nvPr/>
+        </p:nvSpPr>
+        <p:spPr>
+          <a:xfrm>
+            <a:off x="2186247" y="1371600"/>
+            <a:ext cx="2340033" cy="3017520"/>
+          </a:xfrm>
+          <a:prstGeom prst="rect">
+            <a:avLst/>
+          </a:prstGeom>
+          <a:solidFill>
+            <a:srgbClr val="FFFFFF"/>
+          </a:solidFill>
+          <a:ln w="12700">
+            <a:solidFill>
+              <a:srgbClr val="DBE3EA"/>
+            </a:solidFill>
+            <a:prstDash val="solid"/>
+          </a:ln>
+        </p:spPr>
+      </p:sp>
+      <p:pic>
+        <p:nvPicPr>
+          <p:cNvPr id="5" name="Image 0" descr="/Users/tsengchenghsun/Class/carClass/Claude outputs/第五週(10-8)/src/img/w5_ds_ar0233at_p1.png">    </p:cNvPr>
+          <p:cNvPicPr>
+            <a:picLocks noChangeAspect="1"/>
+          </p:cNvPicPr>
+          <p:nvPr/>
+        </p:nvPicPr>
+        <p:blipFill>
+          <a:blip r:embed="rId1"/>
+          <a:stretch>
+            <a:fillRect/>
+          </a:stretch>
+        </p:blipFill>
+        <p:spPr>
+          <a:xfrm>
+            <a:off x="2204535" y="1389888"/>
+            <a:ext cx="2303457" cy="2980944"/>
+          </a:xfrm>
+          <a:prstGeom prst="rect">
+            <a:avLst/>
+          </a:prstGeom>
+        </p:spPr>
+      </p:pic>
+      <p:sp>
+        <p:nvSpPr>
+          <p:cNvPr id="6" name="Shape 3"/>
+          <p:cNvSpPr/>
+          <p:nvPr/>
+        </p:nvSpPr>
+        <p:spPr>
+          <a:xfrm>
+            <a:off x="4617720" y="1371600"/>
+            <a:ext cx="2340033" cy="3017520"/>
+          </a:xfrm>
+          <a:prstGeom prst="rect">
+            <a:avLst/>
+          </a:prstGeom>
+          <a:solidFill>
+            <a:srgbClr val="FFFFFF"/>
+          </a:solidFill>
+          <a:ln w="12700">
+            <a:solidFill>
+              <a:srgbClr val="DBE3EA"/>
+            </a:solidFill>
+            <a:prstDash val="solid"/>
+          </a:ln>
+        </p:spPr>
+      </p:sp>
+      <p:pic>
+        <p:nvPicPr>
+          <p:cNvPr id="7" name="Image 1" descr="/Users/tsengchenghsun/Class/carClass/Claude outputs/第五週(10-8)/src/img/w5_ds_ar0233at_p2.png">    </p:cNvPr>
+          <p:cNvPicPr>
+            <a:picLocks noChangeAspect="1"/>
+          </p:cNvPicPr>
+          <p:nvPr/>
+        </p:nvPicPr>
+        <p:blipFill>
+          <a:blip r:embed="rId2"/>
+          <a:stretch>
+            <a:fillRect/>
+          </a:stretch>
+        </p:blipFill>
+        <p:spPr>
+          <a:xfrm>
+            <a:off x="4636008" y="1389888"/>
+            <a:ext cx="2303457" cy="2980944"/>
+          </a:xfrm>
+          <a:prstGeom prst="rect">
+            <a:avLst/>
+          </a:prstGeom>
+        </p:spPr>
+      </p:pic>
+      <p:sp>
+        <p:nvSpPr>
+          <p:cNvPr id="8" name="Text 4"/>
+          <p:cNvSpPr txBox="1"/>
+          <p:nvPr/>
+        </p:nvSpPr>
+        <p:spPr>
+          <a:xfrm>
+            <a:off x="502920" y="4407408"/>
+            <a:ext cx="8138160" cy="201168"/>
+          </a:xfrm>
+          <a:prstGeom prst="rect">
+            <a:avLst/>
+          </a:prstGeom>
+          <a:noFill/>
+          <a:ln/>
+        </p:spPr>
+        <p:txBody>
+          <a:bodyPr wrap="square" lIns="0" tIns="0" rIns="0" bIns="0" rtlCol="0" anchor="ctr"/>
+          <a:lstStyle/>
+          <a:p>
+            <a:pPr algn="ctr" indent="0" marL="0">
+              <a:buNone/>
+            </a:pPr>
+            <a:r>
+              <a:rPr lang="en-US" sz="850" dirty="0">
+                <a:solidFill>
+                  <a:srgbClr val="5F7183"/>
+                </a:solidFill>
+                <a:latin typeface="Arial" pitchFamily="34" charset="0"/>
+                <a:ea typeface="Arial" pitchFamily="34" charset="-122"/>
+                <a:cs typeface="Arial" pitchFamily="34" charset="-120"/>
+              </a:rPr>
+              <a:t>onsemi, AR0233AT Product Preview, Rev. P2, 11/2017（Publication Order Number AR0233AT/D）· 原頁全文 · 讀取 2026/10/02 · 版權歸 onsemi，課堂引用</a:t>
+            </a:r>
+            <a:endParaRPr lang="en-US" sz="850" dirty="0"/>
+          </a:p>
+        </p:txBody>
+      </p:sp>
+      <p:pic>
+        <p:nvPicPr>
+          <p:cNvPr id="10" name="Image 2" descr="/Users/tsengchenghsun/Class/carClass/Claude outputs/第五週(10-8)/src/logo.png">    </p:cNvPr>
+          <p:cNvPicPr>
+            <a:picLocks noChangeAspect="1"/>
+          </p:cNvPicPr>
+          <p:nvPr/>
+        </p:nvPicPr>
+        <p:blipFill>
+          <a:blip r:embed="rId3"/>
+          <a:stretch>
+            <a:fillRect/>
+          </a:stretch>
+        </p:blipFill>
+        <p:spPr>
+          <a:xfrm>
+            <a:off x="7882128" y="109728"/>
+            <a:ext cx="1097280" cy="242439"/>
+          </a:xfrm>
+          <a:prstGeom prst="rect">
+            <a:avLst/>
+          </a:prstGeom>
+        </p:spPr>
+      </p:pic>
+      <p:sp>
+        <p:nvSpPr>
+          <p:cNvPr id="11" name="Text 5"/>
+          <p:cNvSpPr txBox="1"/>
+          <p:nvPr/>
+        </p:nvSpPr>
+        <p:spPr>
+          <a:xfrm>
+            <a:off x="109728" y="128016"/>
+            <a:ext cx="822960" cy="256032"/>
+          </a:xfrm>
+          <a:prstGeom prst="rect">
+            <a:avLst/>
+          </a:prstGeom>
+          <a:noFill/>
+          <a:ln/>
+        </p:spPr>
+        <p:txBody>
+          <a:bodyPr wrap="square" lIns="0" tIns="0" rIns="0" bIns="0" rtlCol="0" anchor="ctr"/>
+          <a:lstStyle/>
+          <a:p>
+            <a:pPr indent="0" marL="0">
+              <a:buNone/>
+            </a:pPr>
+            <a:r>
+              <a:rPr lang="en-US" sz="900" dirty="0">
+                <a:solidFill>
+                  <a:srgbClr val="5F7183"/>
+                </a:solidFill>
+                <a:latin typeface="Arial" pitchFamily="34" charset="0"/>
+                <a:ea typeface="Arial" pitchFamily="34" charset="-122"/>
+                <a:cs typeface="Arial" pitchFamily="34" charset="-120"/>
+              </a:rPr>
+              <a:t>18 / 18</a:t>
             </a:r>
             <a:endParaRPr lang="en-US" sz="900" dirty="0"/>
           </a:p>
@@ -15944,7 +17385,7 @@
                 <a:ea typeface="Arial" pitchFamily="34" charset="-122"/>
                 <a:cs typeface="Arial" pitchFamily="34" charset="-120"/>
               </a:rPr>
-              <a:t>2 / 16</a:t>
+              <a:t>2 / 18</a:t>
             </a:r>
             <a:endParaRPr lang="en-US" sz="900" dirty="0"/>
           </a:p>
@@ -16264,7 +17705,7 @@
                 <a:ea typeface="Arial" pitchFamily="34" charset="-122"/>
                 <a:cs typeface="Arial" pitchFamily="34" charset="-120"/>
               </a:rPr>
-              <a:t>3 / 16</a:t>
+              <a:t>3 / 18</a:t>
             </a:r>
             <a:endParaRPr lang="en-US" sz="900" dirty="0"/>
           </a:p>
@@ -17172,7 +18613,7 @@
                 <a:ea typeface="Arial" pitchFamily="34" charset="-122"/>
                 <a:cs typeface="Arial" pitchFamily="34" charset="-120"/>
               </a:rPr>
-              <a:t>4 / 16</a:t>
+              <a:t>4 / 18</a:t>
             </a:r>
             <a:endParaRPr lang="en-US" sz="900" dirty="0"/>
           </a:p>
@@ -18080,7 +19521,7 @@
                 <a:ea typeface="Arial" pitchFamily="34" charset="-122"/>
                 <a:cs typeface="Arial" pitchFamily="34" charset="-120"/>
               </a:rPr>
-              <a:t>5 / 16</a:t>
+              <a:t>5 / 18</a:t>
             </a:r>
             <a:endParaRPr lang="en-US" sz="900" dirty="0"/>
           </a:p>
@@ -19809,7 +21250,7 @@
                 <a:ea typeface="Arial" pitchFamily="34" charset="-122"/>
                 <a:cs typeface="Arial" pitchFamily="34" charset="-120"/>
               </a:rPr>
-              <a:t>6 / 16</a:t>
+              <a:t>6 / 18</a:t>
             </a:r>
             <a:endParaRPr lang="en-US" sz="900" dirty="0"/>
           </a:p>
@@ -20259,7 +21700,7 @@
                 <a:ea typeface="Arial" pitchFamily="34" charset="-122"/>
                 <a:cs typeface="Arial" pitchFamily="34" charset="-120"/>
               </a:rPr>
-              <a:t>7 / 16</a:t>
+              <a:t>7 / 18</a:t>
             </a:r>
             <a:endParaRPr lang="en-US" sz="900" dirty="0"/>
           </a:p>
@@ -21124,7 +22565,7 @@
                 <a:ea typeface="Arial" pitchFamily="34" charset="-122"/>
                 <a:cs typeface="Arial" pitchFamily="34" charset="-120"/>
               </a:rPr>
-              <a:t>8 / 16</a:t>
+              <a:t>8 / 18</a:t>
             </a:r>
             <a:endParaRPr lang="en-US" sz="900" dirty="0"/>
           </a:p>
@@ -21444,7 +22885,7 @@
                 <a:ea typeface="Arial" pitchFamily="34" charset="-122"/>
                 <a:cs typeface="Arial" pitchFamily="34" charset="-120"/>
               </a:rPr>
-              <a:t>9 / 16</a:t>
+              <a:t>9 / 18</a:t>
             </a:r>
             <a:endParaRPr lang="en-US" sz="900" dirty="0"/>
           </a:p>

--- a/第五週(10-08)/第五週_第1節_簡報.pptx
+++ b/第五週(10-08)/第五週_第1節_簡報.pptx
@@ -10587,7 +10587,7 @@
                 <a:ea typeface="Arial Unicode MS"/>
                 <a:cs typeface="Arial Unicode MS"/>
               </a:rPr>
-              <a:t>第二節第四張我們會回來重看一次</a:t>
+              <a:t>第二節第五張我們會回來重看一次</a:t>
             </a:r>
             <a:r>
               <a:rPr sz="850" lang="zh-TW" dirty="0">

--- a/第五週(10-08)/第五週_第1節_簡報.pptx
+++ b/第五週(10-08)/第五週_第1節_簡報.pptx
@@ -8233,7 +8233,7 @@
                 <a:ea typeface="Arial Unicode MS"/>
                 <a:cs typeface="Arial Unicode MS"/>
               </a:rPr>
-              <a:t>左表由上往下圈：Number of channels、Horizontal FOV 與 Vertical FOV、再圈 Horizontal resolution 那一行的 Far-field 與 (10 Hz)。那兩個條件是今天的重點；白板上寫「遠場 &gt;7.2 m、近場 0.5–7.2 m」。備答：有人會問近場和遠場是不是同一批線束——是同一批，但不是同一次發射。128 條全部發遠場，其中 32 條另外再發一次只量近場，時間錯開。垂直 0.8÷0.2＝4 倍剛好等於 128÷32，可以當場算給他看。細節在講義 3.1 那個方塊。
+              <a:t>左表由上往下圈：Number of channels、Horizontal FOV 與 Vertical FOV、再圈 Horizontal resolution 那一行的 Far-field 與 (10 Hz)。那兩個條件是今天的重點。先圈那兩行後面的②，再圈圖下面那條註解——7.2 就印在那裡，不必寫白板。備答：有人會問近場和遠場是不是同一批線束——是同一批，但不是同一次發射。128 條全部發遠場，其中 32 條另外再發一次只量近場，時間錯開。垂直 0.8÷0.2＝4 倍剛好等於 128÷32，可以當場算給他看。細節在講義 3.1 那個方塊。
 </a:t>
             </a:r>
           </a:p>
@@ -8497,7 +8497,51 @@
                 <a:ea typeface="Arial Unicode MS"/>
                 <a:cs typeface="Arial Unicode MS"/>
               </a:rPr>
-              <a:t>。一個數字，兩個條件。
+              <a:t>。一個數字，兩個條件。先講 </a:t>
+            </a:r>
+            <a:r>
+              <a:rPr sz="800" b="1" lang="zh-TW" dirty="0">
+                <a:solidFill>
+                  <a:srgbClr val="000000"/>
+                </a:solidFill>
+                <a:latin typeface="Arial Unicode MS"/>
+                <a:ea typeface="Arial Unicode MS"/>
+                <a:cs typeface="Arial Unicode MS"/>
+              </a:rPr>
+              <a:t>Far-field</a:t>
+            </a:r>
+            <a:r>
+              <a:rPr sz="800" lang="zh-TW" dirty="0">
+                <a:solidFill>
+                  <a:srgbClr val="000000"/>
+                </a:solidFill>
+                <a:latin typeface="Arial Unicode MS"/>
+                <a:ea typeface="Arial Unicode MS"/>
+                <a:cs typeface="Arial Unicode MS"/>
+              </a:rPr>
+              <a:t>。各位先看一件事：Horizontal resolution 和 Vertical resolution 這兩行的後面，都跟著一個</a:t>
+            </a:r>
+            <a:r>
+              <a:rPr sz="800" b="1" lang="zh-TW" dirty="0">
+                <a:solidFill>
+                  <a:srgbClr val="000000"/>
+                </a:solidFill>
+                <a:latin typeface="Arial Unicode MS"/>
+                <a:ea typeface="Arial Unicode MS"/>
+                <a:cs typeface="Arial Unicode MS"/>
+              </a:rPr>
+              <a:t>圈起來的②</a:t>
+            </a:r>
+            <a:r>
+              <a:rPr sz="800" lang="zh-TW" dirty="0">
+                <a:solidFill>
+                  <a:srgbClr val="000000"/>
+                </a:solidFill>
+                <a:latin typeface="Arial Unicode MS"/>
+                <a:ea typeface="Arial Unicode MS"/>
+                <a:cs typeface="Arial Unicode MS"/>
+              </a:rPr>
+              <a:t>。那是手冊的註腳記號。
 </a:t>
             </a:r>
           </a:p>
@@ -8511,17 +8555,6 @@
               </a:spcAft>
             </a:pPr>
             <a:r>
-              <a:rPr sz="800" lang="zh-TW" dirty="0">
-                <a:solidFill>
-                  <a:srgbClr val="000000"/>
-                </a:solidFill>
-                <a:latin typeface="Arial Unicode MS"/>
-                <a:ea typeface="Arial Unicode MS"/>
-                <a:cs typeface="Arial Unicode MS"/>
-              </a:rPr>
-              <a:t>先講 </a:t>
-            </a:r>
-            <a:r>
               <a:rPr sz="800" b="1" lang="zh-TW" dirty="0">
                 <a:solidFill>
                   <a:srgbClr val="000000"/>
@@ -8530,18 +8563,18 @@
                 <a:ea typeface="Arial Unicode MS"/>
                 <a:cs typeface="Arial Unicode MS"/>
               </a:rPr>
-              <a:t>Far-field</a:t>
-            </a:r>
-            <a:r>
-              <a:rPr sz="800" lang="zh-TW" dirty="0">
-                <a:solidFill>
-                  <a:srgbClr val="000000"/>
-                </a:solidFill>
-                <a:latin typeface="Arial Unicode MS"/>
-                <a:ea typeface="Arial Unicode MS"/>
-                <a:cs typeface="Arial Unicode MS"/>
-              </a:rPr>
-              <a:t>。手冊寫得很清楚：</a:t>
+              <a:t>遠場到底從幾公尺開始？這個數字不在表上，在註腳裡。</a:t>
+            </a:r>
+            <a:r>
+              <a:rPr sz="800" lang="zh-TW" dirty="0">
+                <a:solidFill>
+                  <a:srgbClr val="000000"/>
+                </a:solidFill>
+                <a:latin typeface="Arial Unicode MS"/>
+                <a:ea typeface="Arial Unicode MS"/>
+                <a:cs typeface="Arial Unicode MS"/>
+              </a:rPr>
+              <a:t>我把那條註解接在表格下面了，各位看——</a:t>
             </a:r>
             <a:r>
               <a:rPr sz="800" b="1" lang="zh-TW" dirty="0">
@@ -8552,18 +8585,40 @@
                 <a:ea typeface="Arial Unicode MS"/>
                 <a:cs typeface="Arial Unicode MS"/>
               </a:rPr>
-              <a:t>遠場是超過七點二公尺，近場是零點五到七點二公尺</a:t>
-            </a:r>
-            <a:r>
-              <a:rPr sz="800" lang="zh-TW" dirty="0">
-                <a:solidFill>
-                  <a:srgbClr val="000000"/>
-                </a:solidFill>
-                <a:latin typeface="Arial Unicode MS"/>
-                <a:ea typeface="Arial Unicode MS"/>
-                <a:cs typeface="Arial Unicode MS"/>
-              </a:rPr>
-              <a:t>，兩段的解析度不一樣——遠場左右 0.1 度、上下 0.2 度；</a:t>
+              <a:t>②：遠場是超過七點二公尺，近場是零點五到七點二公尺。</a:t>
+            </a:r>
+            <a:r>
+              <a:rPr sz="800" lang="zh-TW" dirty="0">
+                <a:solidFill>
+                  <a:srgbClr val="000000"/>
+                </a:solidFill>
+                <a:latin typeface="Arial Unicode MS"/>
+                <a:ea typeface="Arial Unicode MS"/>
+                <a:cs typeface="Arial Unicode MS"/>
+              </a:rPr>
+              <a:t>
+</a:t>
+            </a:r>
+          </a:p>
+          <a:p>
+            <a:pPr algn="l">
+              <a:spcBef>
+                <a:spcPts val="0"/>
+              </a:spcBef>
+              <a:spcAft>
+                <a:spcPts val="133"/>
+              </a:spcAft>
+            </a:pPr>
+            <a:r>
+              <a:rPr sz="800" lang="zh-TW" dirty="0">
+                <a:solidFill>
+                  <a:srgbClr val="000000"/>
+                </a:solidFill>
+                <a:latin typeface="Arial Unicode MS"/>
+                <a:ea typeface="Arial Unicode MS"/>
+                <a:cs typeface="Arial Unicode MS"/>
+              </a:rPr>
+              <a:t>這件事本身就要記住：</a:t>
             </a:r>
             <a:r>
               <a:rPr sz="800" b="1" lang="zh-TW" dirty="0">
@@ -8574,6 +8629,72 @@
                 <a:ea typeface="Arial Unicode MS"/>
                 <a:cs typeface="Arial Unicode MS"/>
               </a:rPr>
+              <a:t>規格表上最關鍵的定義，常常不在表格裡，在那個小小的記號後面。</a:t>
+            </a:r>
+            <a:r>
+              <a:rPr sz="800" lang="zh-TW" dirty="0">
+                <a:solidFill>
+                  <a:srgbClr val="000000"/>
+                </a:solidFill>
+                <a:latin typeface="Arial Unicode MS"/>
+                <a:ea typeface="Arial Unicode MS"/>
+                <a:cs typeface="Arial Unicode MS"/>
+              </a:rPr>
+              <a:t>在原始手冊裡，這張表在第 13 頁，這條註解在</a:t>
+            </a:r>
+            <a:r>
+              <a:rPr sz="800" b="1" lang="zh-TW" dirty="0">
+                <a:solidFill>
+                  <a:srgbClr val="000000"/>
+                </a:solidFill>
+                <a:latin typeface="Arial Unicode MS"/>
+                <a:ea typeface="Arial Unicode MS"/>
+                <a:cs typeface="Arial Unicode MS"/>
+              </a:rPr>
+              <a:t>第 15 頁</a:t>
+            </a:r>
+            <a:r>
+              <a:rPr sz="800" lang="zh-TW" dirty="0">
+                <a:solidFill>
+                  <a:srgbClr val="000000"/>
+                </a:solidFill>
+                <a:latin typeface="Arial Unicode MS"/>
+                <a:ea typeface="Arial Unicode MS"/>
+                <a:cs typeface="Arial Unicode MS"/>
+              </a:rPr>
+              <a:t>，隔了兩頁。講義最後的附錄兩頁都附了，各位可以自己翻去對。
+</a:t>
+            </a:r>
+          </a:p>
+          <a:p>
+            <a:pPr algn="l">
+              <a:spcBef>
+                <a:spcPts val="0"/>
+              </a:spcBef>
+              <a:spcAft>
+                <a:spcPts val="133"/>
+              </a:spcAft>
+            </a:pPr>
+            <a:r>
+              <a:rPr sz="800" lang="zh-TW" dirty="0">
+                <a:solidFill>
+                  <a:srgbClr val="000000"/>
+                </a:solidFill>
+                <a:latin typeface="Arial Unicode MS"/>
+                <a:ea typeface="Arial Unicode MS"/>
+                <a:cs typeface="Arial Unicode MS"/>
+              </a:rPr>
+              <a:t>知道分界在哪裡，才看得懂那兩行：遠場左右 0.1 度、上下 0.2 度；</a:t>
+            </a:r>
+            <a:r>
+              <a:rPr sz="800" b="1" lang="zh-TW" dirty="0">
+                <a:solidFill>
+                  <a:srgbClr val="000000"/>
+                </a:solidFill>
+                <a:latin typeface="Arial Unicode MS"/>
+                <a:ea typeface="Arial Unicode MS"/>
+                <a:cs typeface="Arial Unicode MS"/>
+              </a:rPr>
               <a:t>近場左右 0.2 度、上下 0.8 度</a:t>
             </a:r>
             <a:r>
@@ -8651,29 +8772,7 @@
                 <a:ea typeface="Arial Unicode MS"/>
                 <a:cs typeface="Arial Unicode MS"/>
               </a:rPr>
-              <a:t>另外再發一次脈衝去量近場——量近場的通道少，點自然就疏。
-</a:t>
-            </a:r>
-          </a:p>
-          <a:p>
-            <a:pPr algn="l">
-              <a:spcBef>
-                <a:spcPts val="0"/>
-              </a:spcBef>
-              <a:spcAft>
-                <a:spcPts val="133"/>
-              </a:spcAft>
-            </a:pPr>
-            <a:r>
-              <a:rPr sz="800" lang="zh-TW" dirty="0">
-                <a:solidFill>
-                  <a:srgbClr val="000000"/>
-                </a:solidFill>
-                <a:latin typeface="Arial Unicode MS"/>
-                <a:ea typeface="Arial Unicode MS"/>
-                <a:cs typeface="Arial Unicode MS"/>
-              </a:rPr>
-              <a:t>那為什麼要這樣設計？因為七點二公尺以內是保險桿前面那一塊，那裡的東西又近又大，本來就不需要那麼細；把通道省下來留給遠處，才看得到一百五十公尺外那台車。廠商是故意這樣分的，不是做不好。後面那個 </a:t>
+              <a:t>另外再發一次脈衝去量近場——量近場的通道少，點自然就疏。那為什麼要這樣設計？因為七點二公尺以內是保險桿前面那一塊，那裡的東西又近又大，本來就不需要那麼細；把通道省下來留給遠處，才看得到一百五十公尺外那台車。廠商是故意這樣分的，不是做不好。後面那個 </a:t>
             </a:r>
             <a:r>
               <a:rPr sz="800" b="1" lang="zh-TW" dirty="0">
@@ -8783,28 +8882,6 @@
                 <a:ea typeface="Arial Unicode MS"/>
                 <a:cs typeface="Arial Unicode MS"/>
               </a:rPr>
-              <a:t>
-</a:t>
-            </a:r>
-          </a:p>
-          <a:p>
-            <a:pPr algn="l">
-              <a:spcBef>
-                <a:spcPts val="0"/>
-              </a:spcBef>
-              <a:spcAft>
-                <a:spcPts val="133"/>
-              </a:spcAft>
-            </a:pPr>
-            <a:r>
-              <a:rPr sz="800" lang="zh-TW" dirty="0">
-                <a:solidFill>
-                  <a:srgbClr val="000000"/>
-                </a:solidFill>
-                <a:latin typeface="Arial Unicode MS"/>
-                <a:ea typeface="Arial Unicode MS"/>
-                <a:cs typeface="Arial Unicode MS"/>
-              </a:rPr>
               <a:t>不過「近的地方另有規則」倒是每一顆都有：那一行叫 </a:t>
             </a:r>
             <a:r>
@@ -8849,29 +8926,7 @@
                 <a:ea typeface="Arial Unicode MS"/>
                 <a:cs typeface="Arial Unicode MS"/>
               </a:rPr>
-              <a:t>現在把兩顆放在一起想。OS1 把點灑在一整圈，AT128P 把同樣多的點集中在前面 120 度。第四週講過，同樣那些射線，攤得愈廣就愈稀。
-</a:t>
-            </a:r>
-          </a:p>
-          <a:p>
-            <a:pPr algn="l">
-              <a:spcBef>
-                <a:spcPts val="0"/>
-              </a:spcBef>
-              <a:spcAft>
-                <a:spcPts val="133"/>
-              </a:spcAft>
-            </a:pPr>
-            <a:r>
-              <a:rPr sz="800" lang="zh-TW" dirty="0">
-                <a:solidFill>
-                  <a:srgbClr val="000000"/>
-                </a:solidFill>
-                <a:latin typeface="Arial Unicode MS"/>
-                <a:ea typeface="Arial Unicode MS"/>
-                <a:cs typeface="Arial Unicode MS"/>
-              </a:rPr>
-              <a:t>所以這兩顆沒有誰比較好，是</a:t>
+              <a:t>現在把兩顆放在一起想。OS1 把點灑在一整圈，AT128P 把同樣多的點集中在前面 120 度。第四週講過，同樣那些射線，攤得愈廣就愈稀。所以這兩顆沒有誰比較好，是</a:t>
             </a:r>
             <a:r>
               <a:rPr sz="800" b="1" lang="zh-TW" dirty="0">
@@ -18731,7 +18786,7 @@
         <p:spPr>
           <a:xfrm>
             <a:off x="502920" y="877824"/>
-            <a:ext cx="4024140" cy="3072384"/>
+            <a:ext cx="3406718" cy="3072384"/>
           </a:xfrm>
           <a:prstGeom prst="roundRect">
             <a:avLst>
@@ -18765,8 +18820,8 @@
         </p:blipFill>
         <p:spPr>
           <a:xfrm>
-            <a:off x="576072" y="1000843"/>
-            <a:ext cx="3877836" cy="2643467"/>
+            <a:off x="576072" y="1009880"/>
+            <a:ext cx="3260414" cy="2625391"/>
           </a:xfrm>
           <a:prstGeom prst="rect">
             <a:avLst/>
@@ -18782,7 +18837,7 @@
         <p:spPr>
           <a:xfrm>
             <a:off x="576072" y="3712464"/>
-            <a:ext cx="3877836" cy="182880"/>
+            <a:ext cx="3260414" cy="182880"/>
           </a:xfrm>
           <a:prstGeom prst="rect">
             <a:avLst/>
@@ -18806,7 +18861,7 @@
                 <a:ea typeface="Arial" pitchFamily="34" charset="-122"/>
                 <a:cs typeface="Arial" pitchFamily="34" charset="-120"/>
               </a:rPr>
-              <a:t>Hesai AT128P User Manual A02, §1.5 Specifications, p.13 · 節錄 · 讀取 2026/10/02</a:t>
+              <a:t>Hesai AT128P User Manual A02, §1.5, p.13 的表 ＋ p.15 的註解② · 節錄 · 讀取 2026/10/02</a:t>
             </a:r>
             <a:endParaRPr lang="en-US" sz="700" dirty="0"/>
           </a:p>
@@ -18820,8 +18875,8 @@
         </p:nvSpPr>
         <p:spPr>
           <a:xfrm>
-            <a:off x="4801380" y="786384"/>
-            <a:ext cx="3839700" cy="787475"/>
+            <a:off x="4183958" y="786384"/>
+            <a:ext cx="4457122" cy="787475"/>
           </a:xfrm>
           <a:prstGeom prst="rect">
             <a:avLst/>
@@ -18882,7 +18937,7 @@
         </p:nvSpPr>
         <p:spPr>
           <a:xfrm>
-            <a:off x="4801380" y="1665299"/>
+            <a:off x="4183958" y="1665299"/>
             <a:ext cx="1060704" cy="400118"/>
           </a:xfrm>
           <a:prstGeom prst="roundRect">
@@ -18904,7 +18959,7 @@
         </p:nvSpPr>
         <p:spPr>
           <a:xfrm>
-            <a:off x="4856244" y="1701875"/>
+            <a:off x="4238822" y="1701875"/>
             <a:ext cx="950976" cy="345254"/>
           </a:xfrm>
           <a:prstGeom prst="rect">
@@ -18966,8 +19021,8 @@
         </p:nvSpPr>
         <p:spPr>
           <a:xfrm>
-            <a:off x="6008388" y="1665299"/>
-            <a:ext cx="2632692" cy="454982"/>
+            <a:off x="5390966" y="1665299"/>
+            <a:ext cx="3250114" cy="454982"/>
           </a:xfrm>
           <a:prstGeom prst="rect">
             <a:avLst/>
@@ -19028,7 +19083,7 @@
         </p:nvSpPr>
         <p:spPr>
           <a:xfrm>
-            <a:off x="4801380" y="2184289"/>
+            <a:off x="4183958" y="2184289"/>
             <a:ext cx="1060704" cy="400118"/>
           </a:xfrm>
           <a:prstGeom prst="roundRect">
@@ -19050,7 +19105,7 @@
         </p:nvSpPr>
         <p:spPr>
           <a:xfrm>
-            <a:off x="4856244" y="2220865"/>
+            <a:off x="4238822" y="2220865"/>
             <a:ext cx="950976" cy="345254"/>
           </a:xfrm>
           <a:prstGeom prst="rect">
@@ -19112,8 +19167,8 @@
         </p:nvSpPr>
         <p:spPr>
           <a:xfrm>
-            <a:off x="6008388" y="2184289"/>
-            <a:ext cx="2632692" cy="635187"/>
+            <a:off x="5390966" y="2184289"/>
+            <a:ext cx="3250114" cy="454982"/>
           </a:xfrm>
           <a:prstGeom prst="rect">
             <a:avLst/>
@@ -19174,7 +19229,7 @@
         </p:nvSpPr>
         <p:spPr>
           <a:xfrm>
-            <a:off x="4801380" y="2883484"/>
+            <a:off x="4183958" y="2703280"/>
             <a:ext cx="1060704" cy="400118"/>
           </a:xfrm>
           <a:prstGeom prst="roundRect">
@@ -19196,7 +19251,7 @@
         </p:nvSpPr>
         <p:spPr>
           <a:xfrm>
-            <a:off x="4856244" y="2920060"/>
+            <a:off x="4238822" y="2739856"/>
             <a:ext cx="950976" cy="345254"/>
           </a:xfrm>
           <a:prstGeom prst="rect">
@@ -19258,8 +19313,8 @@
         </p:nvSpPr>
         <p:spPr>
           <a:xfrm>
-            <a:off x="6008388" y="2883484"/>
-            <a:ext cx="2632692" cy="635187"/>
+            <a:off x="5390966" y="2703280"/>
+            <a:ext cx="3250114" cy="454982"/>
           </a:xfrm>
           <a:prstGeom prst="rect">
             <a:avLst/>
@@ -19344,8 +19399,8 @@
         </p:nvSpPr>
         <p:spPr>
           <a:xfrm>
-            <a:off x="4801380" y="475488"/>
-            <a:ext cx="2210314" cy="164592"/>
+            <a:off x="4183958" y="475488"/>
+            <a:ext cx="2827736" cy="164592"/>
           </a:xfrm>
           <a:prstGeom prst="rect">
             <a:avLst/>

--- a/第五週(10-08)/第五週_第1節_簡報.pptx
+++ b/第五週(10-08)/第五週_第1節_簡報.pptx
@@ -3360,7 +3360,7 @@
                 <a:ea typeface="Arial Unicode MS"/>
                 <a:cs typeface="Arial Unicode MS"/>
               </a:rPr>
-              <a:t>第六張那張表我算給各位看，四十公尺的行人身上，OS1 有九個點。那是在 1024 點一圈的模式下算的。切到 2048 點一圈，左右的點加倍，九個點就變成</a:t>
+              <a:t>第六張那張表我算給各位看，四十公尺的機車身上，OS1 有九個點。那是在 1024 點一圈的模式下算的。切到 2048 點一圈，左右的點加倍，九個點就變成</a:t>
             </a:r>
             <a:r>
               <a:rPr sz="800" b="1" lang="zh-TW" dirty="0">
@@ -9157,7 +9157,29 @@
                 <a:ea typeface="Arial Unicode MS"/>
                 <a:cs typeface="Arial Unicode MS"/>
               </a:rPr>
-              <a:t>一列一列圈。重點在角解析度那一列——集中的那顆密很多。
+              <a:t>一列一列圈。重點在角解析度那一列——集中的那顆密很多。想現場把最後一列演一次：切到判讀台的「判讀與試算」，最上面的情境選「河內尖峰」（40 公尺的機車），再用判定上方那排型號鈕切 OS1（9 點）和 AT128P（121 點）。</a:t>
+            </a:r>
+            <a:r>
+              <a:rPr sz="800" b="1" lang="zh-TW" dirty="0">
+                <a:solidFill>
+                  <a:srgbClr val="000000"/>
+                </a:solidFill>
+                <a:latin typeface="Arial Unicode MS"/>
+                <a:ea typeface="Arial Unicode MS"/>
+                <a:cs typeface="Arial Unicode MS"/>
+              </a:rPr>
+              <a:t>不要用小工具②</a:t>
+            </a:r>
+            <a:r>
+              <a:rPr sz="800" lang="zh-TW" dirty="0">
+                <a:solidFill>
+                  <a:srgbClr val="000000"/>
+                </a:solidFill>
+                <a:latin typeface="Arial Unicode MS"/>
+                <a:ea typeface="Arial Unicode MS"/>
+                <a:cs typeface="Arial Unicode MS"/>
+              </a:rPr>
+              <a:t>——它寫死 360 度和 42.4 度垂直視野，只模擬旋轉式，拿它算 AT128P 會得到 18 不是 121。
 </a:t>
             </a:r>
           </a:p>
@@ -9355,7 +9377,7 @@
                 <a:ea typeface="Arial Unicode MS"/>
                 <a:cs typeface="Arial Unicode MS"/>
               </a:rPr>
-              <a:t>同樣一個人站在四十公尺，OS1 身上有九個點，AT128P 有一百二十一個點。</a:t>
+              <a:t>同樣一台機車停在四十公尺外，OS1 在它身上打到九個點，AT128P 打到一百二十一個點。</a:t>
             </a:r>
             <a:r>
               <a:rPr sz="800" lang="zh-TW" dirty="0">
@@ -9542,7 +9564,7 @@
                 <a:ea typeface="Arial Unicode MS"/>
                 <a:cs typeface="Arial Unicode MS"/>
               </a:rPr>
-              <a:t>光看「64 線」和「128 線」，你只會覺得差一倍；算到四十公尺的行人身上，差的是十三倍。
+              <a:t>光看「64 線」和「128 線」，你只會覺得差一倍；算到四十公尺的機車身上，差的是十三倍。
 </a:t>
             </a:r>
           </a:p>
@@ -13104,7 +13126,7 @@
                 <a:ea typeface="Arial" pitchFamily="34" charset="-122"/>
                 <a:cs typeface="Arial" pitchFamily="34" charset="-120"/>
               </a:rPr>
-              <a:t>Cùng một con lidar, đổi chế độ thì số điểm trên người ở 40 m khác hẳn.</a:t>
+              <a:t>Cùng một con lidar, đổi chế độ thì số điểm trên xe máy ở 40 m khác hẳn.</a:t>
             </a:r>
             <a:endParaRPr lang="en-US" sz="1900" dirty="0"/>
           </a:p>
@@ -13124,7 +13146,7 @@
                 <a:ea typeface="微軟正黑體" pitchFamily="34" charset="-122"/>
                 <a:cs typeface="微軟正黑體" pitchFamily="34" charset="-120"/>
               </a:rPr>
-              <a:t>同一顆光達，換一個模式，四十公尺行人身上的點數就整個不一樣。</a:t>
+              <a:t>同一顆光達，換一個模式，四十公尺機車身上的點數就整個不一樣。</a:t>
             </a:r>
             <a:endParaRPr lang="en-US" sz="1900" dirty="0"/>
           </a:p>
@@ -20920,7 +20942,7 @@
                           <a:ea typeface="Arial" pitchFamily="34" charset="-122"/>
                           <a:cs typeface="Arial" pitchFamily="34" charset="-120"/>
                         </a:rPr>
-                        <a:t>Người ở 40 m</a:t>
+                        <a:t>Xe máy ở 40 m</a:t>
                       </a:r>
                       <a:endParaRPr lang="en-US" sz="1200" dirty="0"/>
                     </a:p>
@@ -20937,7 +20959,7 @@
                           <a:ea typeface="微軟正黑體" pitchFamily="34" charset="-122"/>
                           <a:cs typeface="微軟正黑體" pitchFamily="34" charset="-120"/>
                         </a:rPr>
-                        <a:t>40 公尺的行人</a:t>
+                        <a:t>40 公尺的機車</a:t>
                       </a:r>
                       <a:endParaRPr lang="en-US" sz="1200" dirty="0"/>
                     </a:p>

--- a/第五週(10-08)/第五週_第1節_簡報.pptx
+++ b/第五週(10-08)/第五週_第1節_簡報.pptx
@@ -444,30 +444,19 @@
                 <a:spcPts val="0"/>
               </a:spcBef>
               <a:spcAft>
-                <a:spcPts val="133"/>
+                <a:spcPts val="175"/>
               </a:spcAft>
             </a:pPr>
             <a:r>
-              <a:rPr sz="800" b="1" lang="zh-TW" dirty="0">
-                <a:solidFill>
-                  <a:srgbClr val="000000"/>
-                </a:solidFill>
-                <a:latin typeface="Arial Unicode MS"/>
-                <a:ea typeface="Arial Unicode MS"/>
-                <a:cs typeface="Arial Unicode MS"/>
-              </a:rPr>
-              <a:t>▍這一張要做什麼</a:t>
-            </a:r>
-            <a:r>
-              <a:rPr sz="800" lang="zh-TW" dirty="0">
-                <a:solidFill>
-                  <a:srgbClr val="000000"/>
-                </a:solidFill>
-                <a:latin typeface="Arial Unicode MS"/>
-                <a:ea typeface="Arial Unicode MS"/>
-                <a:cs typeface="Arial Unicode MS"/>
-              </a:rPr>
-              <a:t>
+              <a:rPr sz="1050" lang="zh-TW" dirty="0">
+                <a:solidFill>
+                  <a:srgbClr val="000000"/>
+                </a:solidFill>
+                <a:latin typeface="Arial Unicode MS"/>
+                <a:ea typeface="Arial Unicode MS"/>
+                <a:cs typeface="Arial Unicode MS"/>
+              </a:rPr>
+              <a:t>各位早，我們開始第五週。
 </a:t>
             </a:r>
           </a:p>
@@ -477,19 +466,19 @@
                 <a:spcPts val="0"/>
               </a:spcBef>
               <a:spcAft>
-                <a:spcPts val="133"/>
+                <a:spcPts val="175"/>
               </a:spcAft>
             </a:pPr>
             <a:r>
-              <a:rPr sz="800" lang="zh-TW" dirty="0">
-                <a:solidFill>
-                  <a:srgbClr val="000000"/>
-                </a:solidFill>
-                <a:latin typeface="Arial Unicode MS"/>
-                <a:ea typeface="Arial Unicode MS"/>
-                <a:cs typeface="Arial Unicode MS"/>
-              </a:rPr>
-              <a:t>第五週開場。把上週白板上那張「河內尖峰最低規格」拿出來，宣告今天要對真的規格表。
+              <a:rPr sz="1050" lang="zh-TW" dirty="0">
+                <a:solidFill>
+                  <a:srgbClr val="000000"/>
+                </a:solidFill>
+                <a:latin typeface="Arial Unicode MS"/>
+                <a:ea typeface="Arial Unicode MS"/>
+                <a:cs typeface="Arial Unicode MS"/>
+              </a:rPr>
+              <a:t>先回顧一下這三個禮拜在做什麼。
 </a:t>
             </a:r>
           </a:p>
@@ -499,30 +488,19 @@
                 <a:spcPts val="0"/>
               </a:spcBef>
               <a:spcAft>
-                <a:spcPts val="133"/>
+                <a:spcPts val="175"/>
               </a:spcAft>
             </a:pPr>
             <a:r>
-              <a:rPr sz="800" b="1" lang="zh-TW" dirty="0">
-                <a:solidFill>
-                  <a:srgbClr val="000000"/>
-                </a:solidFill>
-                <a:latin typeface="Arial Unicode MS"/>
-                <a:ea typeface="Arial Unicode MS"/>
-                <a:cs typeface="Arial Unicode MS"/>
-              </a:rPr>
-              <a:t>▍畫面上圈這裡</a:t>
-            </a:r>
-            <a:r>
-              <a:rPr sz="800" lang="zh-TW" dirty="0">
-                <a:solidFill>
-                  <a:srgbClr val="000000"/>
-                </a:solidFill>
-                <a:latin typeface="Arial Unicode MS"/>
-                <a:ea typeface="Arial Unicode MS"/>
-                <a:cs typeface="Arial Unicode MS"/>
-              </a:rPr>
-              <a:t>
+              <a:rPr sz="1050" lang="zh-TW" dirty="0">
+                <a:solidFill>
+                  <a:srgbClr val="000000"/>
+                </a:solidFill>
+                <a:latin typeface="Arial Unicode MS"/>
+                <a:ea typeface="Arial Unicode MS"/>
+                <a:cs typeface="Arial Unicode MS"/>
+              </a:rPr>
+              <a:t>第三週，我們打開一個實驗室，看六種感測器各自量到什麼、什麼時候壞掉。第四週，我們打開一個模擬器，拉三個滑桿——射線數、射線長度、張角——看參數怎麼影響車子會不會撞。
 </a:t>
             </a:r>
           </a:p>
@@ -532,19 +510,41 @@
                 <a:spcPts val="0"/>
               </a:spcBef>
               <a:spcAft>
-                <a:spcPts val="133"/>
+                <a:spcPts val="175"/>
               </a:spcAft>
             </a:pPr>
             <a:r>
-              <a:rPr sz="800" lang="zh-TW" dirty="0">
-                <a:solidFill>
-                  <a:srgbClr val="000000"/>
-                </a:solidFill>
-                <a:latin typeface="Arial Unicode MS"/>
-                <a:ea typeface="Arial Unicode MS"/>
-                <a:cs typeface="Arial Unicode MS"/>
-              </a:rPr>
-              <a:t>圈主標「真正的規格表」。如果有上週的白板照片，這時候投出來。
+              <a:rPr sz="1050" lang="zh-TW" dirty="0">
+                <a:solidFill>
+                  <a:srgbClr val="000000"/>
+                </a:solidFill>
+                <a:latin typeface="Arial Unicode MS"/>
+                <a:ea typeface="Arial Unicode MS"/>
+                <a:cs typeface="Arial Unicode MS"/>
+              </a:rPr>
+              <a:t>那兩週用的數字，全部是</a:t>
+            </a:r>
+            <a:r>
+              <a:rPr sz="1050" b="1" lang="zh-TW" dirty="0">
+                <a:solidFill>
+                  <a:srgbClr val="000000"/>
+                </a:solidFill>
+                <a:latin typeface="Arial Unicode MS"/>
+                <a:ea typeface="Arial Unicode MS"/>
+                <a:cs typeface="Arial Unicode MS"/>
+              </a:rPr>
+              <a:t>我設定的教學模型</a:t>
+            </a:r>
+            <a:r>
+              <a:rPr sz="1050" lang="zh-TW" dirty="0">
+                <a:solidFill>
+                  <a:srgbClr val="000000"/>
+                </a:solidFill>
+                <a:latin typeface="Arial Unicode MS"/>
+                <a:ea typeface="Arial Unicode MS"/>
+                <a:cs typeface="Arial Unicode MS"/>
+              </a:rPr>
+              <a:t>。我每一節課都提醒各位，那些不是產品的規格。
 </a:t>
             </a:r>
           </a:p>
@@ -554,22 +554,55 @@
                 <a:spcPts val="0"/>
               </a:spcBef>
               <a:spcAft>
-                <a:spcPts val="133"/>
+                <a:spcPts val="175"/>
               </a:spcAft>
             </a:pPr>
             <a:r>
-              <a:rPr sz="800" b="1" lang="zh-TW" dirty="0">
-                <a:solidFill>
-                  <a:srgbClr val="000000"/>
-                </a:solidFill>
-                <a:latin typeface="Arial Unicode MS"/>
-                <a:ea typeface="Arial Unicode MS"/>
-                <a:cs typeface="Arial Unicode MS"/>
-              </a:rPr>
-              <a:t>▍以下照著唸</a:t>
-            </a:r>
-            <a:r>
-              <a:rPr sz="800" lang="zh-TW" dirty="0">
+              <a:rPr sz="1050" lang="zh-TW" dirty="0">
+                <a:solidFill>
+                  <a:srgbClr val="000000"/>
+                </a:solidFill>
+                <a:latin typeface="Arial Unicode MS"/>
+                <a:ea typeface="Arial Unicode MS"/>
+                <a:cs typeface="Arial Unicode MS"/>
+              </a:rPr>
+              <a:t>今天不一樣。今天我把</a:t>
+            </a:r>
+            <a:r>
+              <a:rPr sz="1050" b="1" lang="zh-TW" dirty="0">
+                <a:solidFill>
+                  <a:srgbClr val="000000"/>
+                </a:solidFill>
+                <a:latin typeface="Arial Unicode MS"/>
+                <a:ea typeface="Arial Unicode MS"/>
+                <a:cs typeface="Arial Unicode MS"/>
+              </a:rPr>
+              <a:t>真的規格表</a:t>
+            </a:r>
+            <a:r>
+              <a:rPr sz="1050" lang="zh-TW" dirty="0">
+                <a:solidFill>
+                  <a:srgbClr val="000000"/>
+                </a:solidFill>
+                <a:latin typeface="Arial Unicode MS"/>
+                <a:ea typeface="Arial Unicode MS"/>
+                <a:cs typeface="Arial Unicode MS"/>
+              </a:rPr>
+              <a:t>攤開來，上面是真的廠商、真的型號、真的數字。我們要做的事只有一件：</a:t>
+            </a:r>
+            <a:r>
+              <a:rPr sz="1050" b="1" lang="zh-TW" dirty="0">
+                <a:solidFill>
+                  <a:srgbClr val="000000"/>
+                </a:solidFill>
+                <a:latin typeface="Arial Unicode MS"/>
+                <a:ea typeface="Arial Unicode MS"/>
+                <a:cs typeface="Arial Unicode MS"/>
+              </a:rPr>
+              <a:t>把前兩週拉過的那三個滑桿，在規格表上一行一行找出來。</a:t>
+            </a:r>
+            <a:r>
+              <a:rPr sz="1050" lang="zh-TW" dirty="0">
                 <a:solidFill>
                   <a:srgbClr val="000000"/>
                 </a:solidFill>
@@ -587,19 +620,19 @@
                 <a:spcPts val="0"/>
               </a:spcBef>
               <a:spcAft>
-                <a:spcPts val="133"/>
+                <a:spcPts val="175"/>
               </a:spcAft>
             </a:pPr>
             <a:r>
-              <a:rPr sz="800" lang="zh-TW" dirty="0">
-                <a:solidFill>
-                  <a:srgbClr val="000000"/>
-                </a:solidFill>
-                <a:latin typeface="Arial Unicode MS"/>
-                <a:ea typeface="Arial Unicode MS"/>
-                <a:cs typeface="Arial Unicode MS"/>
-              </a:rPr>
-              <a:t>各位早，我們開始第五週。
+              <a:rPr sz="1050" lang="zh-TW" dirty="0">
+                <a:solidFill>
+                  <a:srgbClr val="000000"/>
+                </a:solidFill>
+                <a:latin typeface="Arial Unicode MS"/>
+                <a:ea typeface="Arial Unicode MS"/>
+                <a:cs typeface="Arial Unicode MS"/>
+              </a:rPr>
+              <a:t>找出來之後，各位會發現三件事。
 </a:t>
             </a:r>
           </a:p>
@@ -609,19 +642,41 @@
                 <a:spcPts val="0"/>
               </a:spcBef>
               <a:spcAft>
-                <a:spcPts val="133"/>
+                <a:spcPts val="175"/>
               </a:spcAft>
             </a:pPr>
             <a:r>
-              <a:rPr sz="800" lang="zh-TW" dirty="0">
-                <a:solidFill>
-                  <a:srgbClr val="000000"/>
-                </a:solidFill>
-                <a:latin typeface="Arial Unicode MS"/>
-                <a:ea typeface="Arial Unicode MS"/>
-                <a:cs typeface="Arial Unicode MS"/>
-              </a:rPr>
-              <a:t>先回顧一下這三個禮拜在做什麼。
+              <a:rPr sz="1050" lang="zh-TW" dirty="0">
+                <a:solidFill>
+                  <a:srgbClr val="000000"/>
+                </a:solidFill>
+                <a:latin typeface="Arial Unicode MS"/>
+                <a:ea typeface="Arial Unicode MS"/>
+                <a:cs typeface="Arial Unicode MS"/>
+              </a:rPr>
+              <a:t>第一，規格表上有</a:t>
+            </a:r>
+            <a:r>
+              <a:rPr sz="1050" b="1" lang="zh-TW" dirty="0">
+                <a:solidFill>
+                  <a:srgbClr val="000000"/>
+                </a:solidFill>
+                <a:latin typeface="Arial Unicode MS"/>
+                <a:ea typeface="Arial Unicode MS"/>
+                <a:cs typeface="Arial Unicode MS"/>
+              </a:rPr>
+              <a:t>第四個數字</a:t>
+            </a:r>
+            <a:r>
+              <a:rPr sz="1050" lang="zh-TW" dirty="0">
+                <a:solidFill>
+                  <a:srgbClr val="000000"/>
+                </a:solidFill>
+                <a:latin typeface="Arial Unicode MS"/>
+                <a:ea typeface="Arial Unicode MS"/>
+                <a:cs typeface="Arial Unicode MS"/>
+              </a:rPr>
+              <a:t>，前兩週我沒有給各位，但它很重要。
 </a:t>
             </a:r>
           </a:p>
@@ -631,19 +686,41 @@
                 <a:spcPts val="0"/>
               </a:spcBef>
               <a:spcAft>
-                <a:spcPts val="133"/>
+                <a:spcPts val="175"/>
               </a:spcAft>
             </a:pPr>
             <a:r>
-              <a:rPr sz="800" lang="zh-TW" dirty="0">
-                <a:solidFill>
-                  <a:srgbClr val="000000"/>
-                </a:solidFill>
-                <a:latin typeface="Arial Unicode MS"/>
-                <a:ea typeface="Arial Unicode MS"/>
-                <a:cs typeface="Arial Unicode MS"/>
-              </a:rPr>
-              <a:t>第三週，我們打開一個實驗室，看六種感測器各自量到什麼、什麼時候壞掉。第四週，我們打開一個模擬器，拉三個滑桿——射線數、射線長度、張角——看參數怎麼影響車子會不會撞。
+              <a:rPr sz="1050" lang="zh-TW" dirty="0">
+                <a:solidFill>
+                  <a:srgbClr val="000000"/>
+                </a:solidFill>
+                <a:latin typeface="Arial Unicode MS"/>
+                <a:ea typeface="Arial Unicode MS"/>
+                <a:cs typeface="Arial Unicode MS"/>
+              </a:rPr>
+              <a:t>第二，相機的規格表上，居然</a:t>
+            </a:r>
+            <a:r>
+              <a:rPr sz="1050" b="1" lang="zh-TW" dirty="0">
+                <a:solidFill>
+                  <a:srgbClr val="000000"/>
+                </a:solidFill>
+                <a:latin typeface="Arial Unicode MS"/>
+                <a:ea typeface="Arial Unicode MS"/>
+                <a:cs typeface="Arial Unicode MS"/>
+              </a:rPr>
+              <a:t>沒有視野、也沒有測距</a:t>
+            </a:r>
+            <a:r>
+              <a:rPr sz="1050" lang="zh-TW" dirty="0">
+                <a:solidFill>
+                  <a:srgbClr val="000000"/>
+                </a:solidFill>
+                <a:latin typeface="Arial Unicode MS"/>
+                <a:ea typeface="Arial Unicode MS"/>
+                <a:cs typeface="Arial Unicode MS"/>
+              </a:rPr>
+              <a:t>這兩行。為什麼？這是今天最有意思的一題。
 </a:t>
             </a:r>
           </a:p>
@@ -653,41 +730,41 @@
                 <a:spcPts val="0"/>
               </a:spcBef>
               <a:spcAft>
-                <a:spcPts val="133"/>
+                <a:spcPts val="175"/>
               </a:spcAft>
             </a:pPr>
             <a:r>
-              <a:rPr sz="800" lang="zh-TW" dirty="0">
-                <a:solidFill>
-                  <a:srgbClr val="000000"/>
-                </a:solidFill>
-                <a:latin typeface="Arial Unicode MS"/>
-                <a:ea typeface="Arial Unicode MS"/>
-                <a:cs typeface="Arial Unicode MS"/>
-              </a:rPr>
-              <a:t>那兩週用的數字，全部是</a:t>
-            </a:r>
-            <a:r>
-              <a:rPr sz="800" b="1" lang="zh-TW" dirty="0">
-                <a:solidFill>
-                  <a:srgbClr val="000000"/>
-                </a:solidFill>
-                <a:latin typeface="Arial Unicode MS"/>
-                <a:ea typeface="Arial Unicode MS"/>
-                <a:cs typeface="Arial Unicode MS"/>
-              </a:rPr>
-              <a:t>我設定的教學模型</a:t>
-            </a:r>
-            <a:r>
-              <a:rPr sz="800" lang="zh-TW" dirty="0">
-                <a:solidFill>
-                  <a:srgbClr val="000000"/>
-                </a:solidFill>
-                <a:latin typeface="Arial Unicode MS"/>
-                <a:ea typeface="Arial Unicode MS"/>
-                <a:cs typeface="Arial Unicode MS"/>
-              </a:rPr>
-              <a:t>。我每一節課都提醒各位，那些不是產品的規格。
+              <a:rPr sz="1050" lang="zh-TW" dirty="0">
+                <a:solidFill>
+                  <a:srgbClr val="000000"/>
+                </a:solidFill>
+                <a:latin typeface="Arial Unicode MS"/>
+                <a:ea typeface="Arial Unicode MS"/>
+                <a:cs typeface="Arial Unicode MS"/>
+              </a:rPr>
+              <a:t>第三，同樣一顆光達，規格表上會寫</a:t>
+            </a:r>
+            <a:r>
+              <a:rPr sz="1050" b="1" lang="zh-TW" dirty="0">
+                <a:solidFill>
+                  <a:srgbClr val="000000"/>
+                </a:solidFill>
+                <a:latin typeface="Arial Unicode MS"/>
+                <a:ea typeface="Arial Unicode MS"/>
+                <a:cs typeface="Arial Unicode MS"/>
+              </a:rPr>
+              <a:t>兩個測距</a:t>
+            </a:r>
+            <a:r>
+              <a:rPr sz="1050" lang="zh-TW" dirty="0">
+                <a:solidFill>
+                  <a:srgbClr val="000000"/>
+                </a:solidFill>
+                <a:latin typeface="Arial Unicode MS"/>
+                <a:ea typeface="Arial Unicode MS"/>
+                <a:cs typeface="Arial Unicode MS"/>
+              </a:rPr>
+              <a:t>，一個一百七十公尺、一個九十公尺。哪一個才算數？
 </a:t>
             </a:r>
           </a:p>
@@ -697,63 +774,41 @@
                 <a:spcPts val="0"/>
               </a:spcBef>
               <a:spcAft>
-                <a:spcPts val="133"/>
+                <a:spcPts val="175"/>
               </a:spcAft>
             </a:pPr>
             <a:r>
-              <a:rPr sz="800" lang="zh-TW" dirty="0">
-                <a:solidFill>
-                  <a:srgbClr val="000000"/>
-                </a:solidFill>
-                <a:latin typeface="Arial Unicode MS"/>
-                <a:ea typeface="Arial Unicode MS"/>
-                <a:cs typeface="Arial Unicode MS"/>
-              </a:rPr>
-              <a:t>今天不一樣。今天我把</a:t>
-            </a:r>
-            <a:r>
-              <a:rPr sz="800" b="1" lang="zh-TW" dirty="0">
-                <a:solidFill>
-                  <a:srgbClr val="000000"/>
-                </a:solidFill>
-                <a:latin typeface="Arial Unicode MS"/>
-                <a:ea typeface="Arial Unicode MS"/>
-                <a:cs typeface="Arial Unicode MS"/>
-              </a:rPr>
-              <a:t>真的規格表</a:t>
-            </a:r>
-            <a:r>
-              <a:rPr sz="800" lang="zh-TW" dirty="0">
-                <a:solidFill>
-                  <a:srgbClr val="000000"/>
-                </a:solidFill>
-                <a:latin typeface="Arial Unicode MS"/>
-                <a:ea typeface="Arial Unicode MS"/>
-                <a:cs typeface="Arial Unicode MS"/>
-              </a:rPr>
-              <a:t>攤開來，上面是真的廠商、真的型號、真的數字。我們要做的事只有一件：</a:t>
-            </a:r>
-            <a:r>
-              <a:rPr sz="800" b="1" lang="zh-TW" dirty="0">
-                <a:solidFill>
-                  <a:srgbClr val="000000"/>
-                </a:solidFill>
-                <a:latin typeface="Arial Unicode MS"/>
-                <a:ea typeface="Arial Unicode MS"/>
-                <a:cs typeface="Arial Unicode MS"/>
-              </a:rPr>
-              <a:t>把前兩週拉過的那三個滑桿，在規格表上一行一行找出來。</a:t>
-            </a:r>
-            <a:r>
-              <a:rPr sz="800" lang="zh-TW" dirty="0">
-                <a:solidFill>
-                  <a:srgbClr val="000000"/>
-                </a:solidFill>
-                <a:latin typeface="Arial Unicode MS"/>
-                <a:ea typeface="Arial Unicode MS"/>
-                <a:cs typeface="Arial Unicode MS"/>
-              </a:rPr>
-              <a:t>
+              <a:rPr sz="1050" lang="zh-TW" dirty="0">
+                <a:solidFill>
+                  <a:srgbClr val="000000"/>
+                </a:solidFill>
+                <a:latin typeface="Arial Unicode MS"/>
+                <a:ea typeface="Arial Unicode MS"/>
+                <a:cs typeface="Arial Unicode MS"/>
+              </a:rPr>
+              <a:t>下課前我希望每一位都做得到一件事：拿到一張沒看過的規格表，找得出這四個數字，而且</a:t>
+            </a:r>
+            <a:r>
+              <a:rPr sz="1050" b="1" lang="zh-TW" dirty="0">
+                <a:solidFill>
+                  <a:srgbClr val="000000"/>
+                </a:solidFill>
+                <a:latin typeface="Arial Unicode MS"/>
+                <a:ea typeface="Arial Unicode MS"/>
+                <a:cs typeface="Arial Unicode MS"/>
+              </a:rPr>
+              <a:t>知道每一個數字後面綁著什麼條件</a:t>
+            </a:r>
+            <a:r>
+              <a:rPr sz="1050" lang="zh-TW" dirty="0">
+                <a:solidFill>
+                  <a:srgbClr val="000000"/>
+                </a:solidFill>
+                <a:latin typeface="Arial Unicode MS"/>
+                <a:ea typeface="Arial Unicode MS"/>
+                <a:cs typeface="Arial Unicode MS"/>
+              </a:rPr>
+              <a:t>。
 </a:t>
             </a:r>
           </a:p>
@@ -763,209 +818,11 @@
                 <a:spcPts val="0"/>
               </a:spcBef>
               <a:spcAft>
-                <a:spcPts val="133"/>
+                <a:spcPts val="175"/>
               </a:spcAft>
             </a:pPr>
             <a:r>
-              <a:rPr sz="800" lang="zh-TW" dirty="0">
-                <a:solidFill>
-                  <a:srgbClr val="000000"/>
-                </a:solidFill>
-                <a:latin typeface="Arial Unicode MS"/>
-                <a:ea typeface="Arial Unicode MS"/>
-                <a:cs typeface="Arial Unicode MS"/>
-              </a:rPr>
-              <a:t>找出來之後，各位會發現三件事。
-</a:t>
-            </a:r>
-          </a:p>
-          <a:p>
-            <a:pPr algn="l">
-              <a:spcBef>
-                <a:spcPts val="0"/>
-              </a:spcBef>
-              <a:spcAft>
-                <a:spcPts val="133"/>
-              </a:spcAft>
-            </a:pPr>
-            <a:r>
-              <a:rPr sz="800" lang="zh-TW" dirty="0">
-                <a:solidFill>
-                  <a:srgbClr val="000000"/>
-                </a:solidFill>
-                <a:latin typeface="Arial Unicode MS"/>
-                <a:ea typeface="Arial Unicode MS"/>
-                <a:cs typeface="Arial Unicode MS"/>
-              </a:rPr>
-              <a:t>第一，規格表上有</a:t>
-            </a:r>
-            <a:r>
-              <a:rPr sz="800" b="1" lang="zh-TW" dirty="0">
-                <a:solidFill>
-                  <a:srgbClr val="000000"/>
-                </a:solidFill>
-                <a:latin typeface="Arial Unicode MS"/>
-                <a:ea typeface="Arial Unicode MS"/>
-                <a:cs typeface="Arial Unicode MS"/>
-              </a:rPr>
-              <a:t>第四個數字</a:t>
-            </a:r>
-            <a:r>
-              <a:rPr sz="800" lang="zh-TW" dirty="0">
-                <a:solidFill>
-                  <a:srgbClr val="000000"/>
-                </a:solidFill>
-                <a:latin typeface="Arial Unicode MS"/>
-                <a:ea typeface="Arial Unicode MS"/>
-                <a:cs typeface="Arial Unicode MS"/>
-              </a:rPr>
-              <a:t>，前兩週我沒有給各位，但它很重要。
-</a:t>
-            </a:r>
-          </a:p>
-          <a:p>
-            <a:pPr algn="l">
-              <a:spcBef>
-                <a:spcPts val="0"/>
-              </a:spcBef>
-              <a:spcAft>
-                <a:spcPts val="133"/>
-              </a:spcAft>
-            </a:pPr>
-            <a:r>
-              <a:rPr sz="800" lang="zh-TW" dirty="0">
-                <a:solidFill>
-                  <a:srgbClr val="000000"/>
-                </a:solidFill>
-                <a:latin typeface="Arial Unicode MS"/>
-                <a:ea typeface="Arial Unicode MS"/>
-                <a:cs typeface="Arial Unicode MS"/>
-              </a:rPr>
-              <a:t>第二，相機的規格表上，居然</a:t>
-            </a:r>
-            <a:r>
-              <a:rPr sz="800" b="1" lang="zh-TW" dirty="0">
-                <a:solidFill>
-                  <a:srgbClr val="000000"/>
-                </a:solidFill>
-                <a:latin typeface="Arial Unicode MS"/>
-                <a:ea typeface="Arial Unicode MS"/>
-                <a:cs typeface="Arial Unicode MS"/>
-              </a:rPr>
-              <a:t>沒有視野、也沒有測距</a:t>
-            </a:r>
-            <a:r>
-              <a:rPr sz="800" lang="zh-TW" dirty="0">
-                <a:solidFill>
-                  <a:srgbClr val="000000"/>
-                </a:solidFill>
-                <a:latin typeface="Arial Unicode MS"/>
-                <a:ea typeface="Arial Unicode MS"/>
-                <a:cs typeface="Arial Unicode MS"/>
-              </a:rPr>
-              <a:t>這兩行。為什麼？這是今天最有意思的一題。
-</a:t>
-            </a:r>
-          </a:p>
-          <a:p>
-            <a:pPr algn="l">
-              <a:spcBef>
-                <a:spcPts val="0"/>
-              </a:spcBef>
-              <a:spcAft>
-                <a:spcPts val="133"/>
-              </a:spcAft>
-            </a:pPr>
-            <a:r>
-              <a:rPr sz="800" lang="zh-TW" dirty="0">
-                <a:solidFill>
-                  <a:srgbClr val="000000"/>
-                </a:solidFill>
-                <a:latin typeface="Arial Unicode MS"/>
-                <a:ea typeface="Arial Unicode MS"/>
-                <a:cs typeface="Arial Unicode MS"/>
-              </a:rPr>
-              <a:t>第三，同樣一顆光達，規格表上會寫</a:t>
-            </a:r>
-            <a:r>
-              <a:rPr sz="800" b="1" lang="zh-TW" dirty="0">
-                <a:solidFill>
-                  <a:srgbClr val="000000"/>
-                </a:solidFill>
-                <a:latin typeface="Arial Unicode MS"/>
-                <a:ea typeface="Arial Unicode MS"/>
-                <a:cs typeface="Arial Unicode MS"/>
-              </a:rPr>
-              <a:t>兩個測距</a:t>
-            </a:r>
-            <a:r>
-              <a:rPr sz="800" lang="zh-TW" dirty="0">
-                <a:solidFill>
-                  <a:srgbClr val="000000"/>
-                </a:solidFill>
-                <a:latin typeface="Arial Unicode MS"/>
-                <a:ea typeface="Arial Unicode MS"/>
-                <a:cs typeface="Arial Unicode MS"/>
-              </a:rPr>
-              <a:t>，一個一百七十公尺、一個九十公尺。哪一個才算數？
-</a:t>
-            </a:r>
-          </a:p>
-          <a:p>
-            <a:pPr algn="l">
-              <a:spcBef>
-                <a:spcPts val="0"/>
-              </a:spcBef>
-              <a:spcAft>
-                <a:spcPts val="133"/>
-              </a:spcAft>
-            </a:pPr>
-            <a:r>
-              <a:rPr sz="800" lang="zh-TW" dirty="0">
-                <a:solidFill>
-                  <a:srgbClr val="000000"/>
-                </a:solidFill>
-                <a:latin typeface="Arial Unicode MS"/>
-                <a:ea typeface="Arial Unicode MS"/>
-                <a:cs typeface="Arial Unicode MS"/>
-              </a:rPr>
-              <a:t>下課前我希望每一位都做得到一件事：拿到一張沒看過的規格表，找得出這四個數字，而且</a:t>
-            </a:r>
-            <a:r>
-              <a:rPr sz="800" b="1" lang="zh-TW" dirty="0">
-                <a:solidFill>
-                  <a:srgbClr val="000000"/>
-                </a:solidFill>
-                <a:latin typeface="Arial Unicode MS"/>
-                <a:ea typeface="Arial Unicode MS"/>
-                <a:cs typeface="Arial Unicode MS"/>
-              </a:rPr>
-              <a:t>知道每一個數字後面綁著什麼條件</a:t>
-            </a:r>
-            <a:r>
-              <a:rPr sz="800" lang="zh-TW" dirty="0">
-                <a:solidFill>
-                  <a:srgbClr val="000000"/>
-                </a:solidFill>
-                <a:latin typeface="Arial Unicode MS"/>
-                <a:ea typeface="Arial Unicode MS"/>
-                <a:cs typeface="Arial Unicode MS"/>
-              </a:rPr>
-              <a:t>。
-</a:t>
-            </a:r>
-          </a:p>
-          <a:p>
-            <a:pPr algn="l">
-              <a:spcBef>
-                <a:spcPts val="0"/>
-              </a:spcBef>
-              <a:spcAft>
-                <a:spcPts val="133"/>
-              </a:spcAft>
-            </a:pPr>
-            <a:r>
-              <a:rPr sz="800" lang="zh-TW" dirty="0">
+              <a:rPr sz="1050" lang="zh-TW" dirty="0">
                 <a:solidFill>
                   <a:srgbClr val="000000"/>
                 </a:solidFill>
@@ -976,7 +833,7 @@
               <a:t>先講清楚一件事，免得各位誤會：</a:t>
             </a:r>
             <a:r>
-              <a:rPr sz="800" b="1" lang="zh-TW" dirty="0">
+              <a:rPr sz="1050" b="1" lang="zh-TW" dirty="0">
                 <a:solidFill>
                   <a:srgbClr val="000000"/>
                 </a:solidFill>
@@ -987,7 +844,7 @@
               <a:t>規格表不會騙人。</a:t>
             </a:r>
             <a:r>
-              <a:rPr sz="800" lang="zh-TW" dirty="0">
+              <a:rPr sz="1050" lang="zh-TW" dirty="0">
                 <a:solidFill>
                   <a:srgbClr val="000000"/>
                 </a:solidFill>
@@ -998,7 +855,7 @@
               <a:t>今天會看的三份都是真的廠商文件，上面每一行都是真的。問題出在三個地方：廠商在型錄封面上</a:t>
             </a:r>
             <a:r>
-              <a:rPr sz="800" b="1" lang="zh-TW" dirty="0">
+              <a:rPr sz="1050" b="1" lang="zh-TW" dirty="0">
                 <a:solidFill>
                   <a:srgbClr val="000000"/>
                 </a:solidFill>
@@ -1009,7 +866,7 @@
               <a:t>只挑好看的那個數字印</a:t>
             </a:r>
             <a:r>
-              <a:rPr sz="800" lang="zh-TW" dirty="0">
+              <a:rPr sz="1050" lang="zh-TW" dirty="0">
                 <a:solidFill>
                   <a:srgbClr val="000000"/>
                 </a:solidFill>
@@ -1020,7 +877,7 @@
               <a:t>；轉手的賣家把條件</a:t>
             </a:r>
             <a:r>
-              <a:rPr sz="800" b="1" lang="zh-TW" dirty="0">
+              <a:rPr sz="1050" b="1" lang="zh-TW" dirty="0">
                 <a:solidFill>
                   <a:srgbClr val="000000"/>
                 </a:solidFill>
@@ -1031,7 +888,7 @@
               <a:t>抄掉了</a:t>
             </a:r>
             <a:r>
-              <a:rPr sz="800" lang="zh-TW" dirty="0">
+              <a:rPr sz="1050" lang="zh-TW" dirty="0">
                 <a:solidFill>
                   <a:srgbClr val="000000"/>
                 </a:solidFill>
@@ -1042,7 +899,7 @@
               <a:t>；還有最常見的——</a:t>
             </a:r>
             <a:r>
-              <a:rPr sz="800" b="1" lang="zh-TW" dirty="0">
+              <a:rPr sz="1050" b="1" lang="zh-TW" dirty="0">
                 <a:solidFill>
                   <a:srgbClr val="000000"/>
                 </a:solidFill>
@@ -1053,7 +910,7 @@
               <a:t>我們自己讀漏</a:t>
             </a:r>
             <a:r>
-              <a:rPr sz="800" lang="zh-TW" dirty="0">
+              <a:rPr sz="1050" lang="zh-TW" dirty="0">
                 <a:solidFill>
                   <a:srgbClr val="000000"/>
                 </a:solidFill>
@@ -1064,7 +921,7 @@
               <a:t>，看到大數字就以為它大。各位今天要練的不是懷疑廠商，是</a:t>
             </a:r>
             <a:r>
-              <a:rPr sz="800" b="1" lang="zh-TW" dirty="0">
+              <a:rPr sz="1050" b="1" lang="zh-TW" dirty="0">
                 <a:solidFill>
                   <a:srgbClr val="000000"/>
                 </a:solidFill>
@@ -1075,7 +932,7 @@
               <a:t>把條件讀出來</a:t>
             </a:r>
             <a:r>
-              <a:rPr sz="800" lang="zh-TW" dirty="0">
+              <a:rPr sz="1050" lang="zh-TW" dirty="0">
                 <a:solidFill>
                   <a:srgbClr val="000000"/>
                 </a:solidFill>
@@ -1192,30 +1049,19 @@
                 <a:spcPts val="0"/>
               </a:spcBef>
               <a:spcAft>
-                <a:spcPts val="133"/>
+                <a:spcPts val="150"/>
               </a:spcAft>
             </a:pPr>
             <a:r>
-              <a:rPr sz="800" b="1" lang="zh-TW" dirty="0">
-                <a:solidFill>
-                  <a:srgbClr val="000000"/>
-                </a:solidFill>
-                <a:latin typeface="Arial Unicode MS"/>
-                <a:ea typeface="Arial Unicode MS"/>
-                <a:cs typeface="Arial Unicode MS"/>
-              </a:rPr>
-              <a:t>▍這一張要做什麼</a:t>
-            </a:r>
-            <a:r>
-              <a:rPr sz="800" lang="zh-TW" dirty="0">
-                <a:solidFill>
-                  <a:srgbClr val="000000"/>
-                </a:solidFill>
-                <a:latin typeface="Arial Unicode MS"/>
-                <a:ea typeface="Arial Unicode MS"/>
-                <a:cs typeface="Arial Unicode MS"/>
-              </a:rPr>
-              <a:t>
+              <a:rPr sz="900" lang="zh-TW" dirty="0">
+                <a:solidFill>
+                  <a:srgbClr val="000000"/>
+                </a:solidFill>
+                <a:latin typeface="Arial Unicode MS"/>
+                <a:ea typeface="Arial Unicode MS"/>
+                <a:cs typeface="Arial Unicode MS"/>
+              </a:rPr>
+              <a:t>第三個型號，onsemi 的 AR0233AT。這一顆各位比較陌生，我用三句話介紹。
 </a:t>
             </a:r>
           </a:p>
@@ -1225,19 +1071,74 @@
                 <a:spcPts val="0"/>
               </a:spcBef>
               <a:spcAft>
-                <a:spcPts val="133"/>
+                <a:spcPts val="150"/>
               </a:spcAft>
             </a:pPr>
             <a:r>
-              <a:rPr sz="800" lang="zh-TW" dirty="0">
-                <a:solidFill>
-                  <a:srgbClr val="000000"/>
-                </a:solidFill>
-                <a:latin typeface="Arial Unicode MS"/>
-                <a:ea typeface="Arial Unicode MS"/>
-                <a:cs typeface="Arial Unicode MS"/>
-              </a:rPr>
-              <a:t>讓學生親眼確認：左邊的晶片規格表沒有視野這一行，右邊同樣是相機的規格表卻有三行。兩張都是原圖。
+              <a:rPr sz="900" b="1" lang="zh-TW" dirty="0">
+                <a:solidFill>
+                  <a:srgbClr val="000000"/>
+                </a:solidFill>
+                <a:latin typeface="Arial Unicode MS"/>
+                <a:ea typeface="Arial Unicode MS"/>
+                <a:cs typeface="Arial Unicode MS"/>
+              </a:rPr>
+              <a:t>onsemi 是一家美國的半導體公司</a:t>
+            </a:r>
+            <a:r>
+              <a:rPr sz="900" lang="zh-TW" dirty="0">
+                <a:solidFill>
+                  <a:srgbClr val="000000"/>
+                </a:solidFill>
+                <a:latin typeface="Arial Unicode MS"/>
+                <a:ea typeface="Arial Unicode MS"/>
+                <a:cs typeface="Arial Unicode MS"/>
+              </a:rPr>
+              <a:t>，以前叫 ON Semiconductor，二〇二一年改成現在這個全小寫的寫法。它的影像感測器是二〇一四年買下一家叫 </a:t>
+            </a:r>
+            <a:r>
+              <a:rPr sz="900" b="1" lang="zh-TW" dirty="0">
+                <a:solidFill>
+                  <a:srgbClr val="000000"/>
+                </a:solidFill>
+                <a:latin typeface="Arial Unicode MS"/>
+                <a:ea typeface="Arial Unicode MS"/>
+                <a:cs typeface="Arial Unicode MS"/>
+              </a:rPr>
+              <a:t>Aptina</a:t>
+            </a:r>
+            <a:r>
+              <a:rPr sz="900" lang="zh-TW" dirty="0">
+                <a:solidFill>
+                  <a:srgbClr val="000000"/>
+                </a:solidFill>
+                <a:latin typeface="Arial Unicode MS"/>
+                <a:ea typeface="Arial Unicode MS"/>
+                <a:cs typeface="Arial Unicode MS"/>
+              </a:rPr>
+              <a:t> 的公司來的——所以型號才是 </a:t>
+            </a:r>
+            <a:r>
+              <a:rPr sz="900" b="1" lang="zh-TW" dirty="0">
+                <a:solidFill>
+                  <a:srgbClr val="000000"/>
+                </a:solidFill>
+                <a:latin typeface="Arial Unicode MS"/>
+                <a:ea typeface="Arial Unicode MS"/>
+                <a:cs typeface="Arial Unicode MS"/>
+              </a:rPr>
+              <a:t>AR</a:t>
+            </a:r>
+            <a:r>
+              <a:rPr sz="900" lang="zh-TW" dirty="0">
+                <a:solidFill>
+                  <a:srgbClr val="000000"/>
+                </a:solidFill>
+                <a:latin typeface="Arial Unicode MS"/>
+                <a:ea typeface="Arial Unicode MS"/>
+                <a:cs typeface="Arial Unicode MS"/>
+              </a:rPr>
+              <a:t> 開頭，那是 Aptina 留下來的產品線代號。車用影像感測器這一塊，最常碰到的就是 onsemi、Sony、OmniVision 這三家。
 </a:t>
             </a:r>
           </a:p>
@@ -1247,30 +1148,52 @@
                 <a:spcPts val="0"/>
               </a:spcBef>
               <a:spcAft>
-                <a:spcPts val="133"/>
+                <a:spcPts val="150"/>
               </a:spcAft>
             </a:pPr>
             <a:r>
-              <a:rPr sz="800" b="1" lang="zh-TW" dirty="0">
-                <a:solidFill>
-                  <a:srgbClr val="000000"/>
-                </a:solidFill>
-                <a:latin typeface="Arial Unicode MS"/>
-                <a:ea typeface="Arial Unicode MS"/>
-                <a:cs typeface="Arial Unicode MS"/>
-              </a:rPr>
-              <a:t>▍畫面上圈這裡</a:t>
-            </a:r>
-            <a:r>
-              <a:rPr sz="800" lang="zh-TW" dirty="0">
-                <a:solidFill>
-                  <a:srgbClr val="000000"/>
-                </a:solidFill>
-                <a:latin typeface="Arial Unicode MS"/>
-                <a:ea typeface="Arial Unicode MS"/>
-                <a:cs typeface="Arial Unicode MS"/>
-              </a:rPr>
-              <a:t>
+              <a:rPr sz="900" b="1" lang="zh-TW" dirty="0">
+                <a:solidFill>
+                  <a:srgbClr val="000000"/>
+                </a:solidFill>
+                <a:latin typeface="Arial Unicode MS"/>
+                <a:ea typeface="Arial Unicode MS"/>
+                <a:cs typeface="Arial Unicode MS"/>
+              </a:rPr>
+              <a:t>第二句，看型號的結尾。</a:t>
+            </a:r>
+            <a:r>
+              <a:rPr sz="900" lang="zh-TW" dirty="0">
+                <a:solidFill>
+                  <a:srgbClr val="000000"/>
+                </a:solidFill>
+                <a:latin typeface="Arial Unicode MS"/>
+                <a:ea typeface="Arial Unicode MS"/>
+                <a:cs typeface="Arial Unicode MS"/>
+              </a:rPr>
+              <a:t>onsemi 的車規型號習慣用 </a:t>
+            </a:r>
+            <a:r>
+              <a:rPr sz="900" b="1" lang="zh-TW" dirty="0">
+                <a:solidFill>
+                  <a:srgbClr val="000000"/>
+                </a:solidFill>
+                <a:latin typeface="Arial Unicode MS"/>
+                <a:ea typeface="Arial Unicode MS"/>
+                <a:cs typeface="Arial Unicode MS"/>
+              </a:rPr>
+              <a:t>AT</a:t>
+            </a:r>
+            <a:r>
+              <a:rPr sz="900" lang="zh-TW" dirty="0">
+                <a:solidFill>
+                  <a:srgbClr val="000000"/>
+                </a:solidFill>
+                <a:latin typeface="Arial Unicode MS"/>
+                <a:ea typeface="Arial Unicode MS"/>
+                <a:cs typeface="Arial Unicode MS"/>
+              </a:rPr>
+              <a:t> 結尾——AR0233AT、AR0234AT 都是；同一顆晶片的非車規版本會換成別的後綴，像 AR0234CS。看到 AT，大概就知道它是衝著車用來的。
 </a:t>
             </a:r>
           </a:p>
@@ -1280,19 +1203,30 @@
                 <a:spcPts val="0"/>
               </a:spcBef>
               <a:spcAft>
-                <a:spcPts val="133"/>
+                <a:spcPts val="150"/>
               </a:spcAft>
             </a:pPr>
             <a:r>
-              <a:rPr sz="800" lang="zh-TW" dirty="0">
-                <a:solidFill>
-                  <a:srgbClr val="000000"/>
-                </a:solidFill>
-                <a:latin typeface="Arial Unicode MS"/>
-                <a:ea typeface="Arial Unicode MS"/>
-                <a:cs typeface="Arial Unicode MS"/>
-              </a:rPr>
-              <a:t>左表從上圈到下，一邊圈一邊說「沒有、沒有、還是沒有」；右表圈 field of view 三行，再往上圈 Focal length。
+              <a:rPr sz="900" b="1" lang="zh-TW" dirty="0">
+                <a:solidFill>
+                  <a:srgbClr val="000000"/>
+                </a:solidFill>
+                <a:latin typeface="Arial Unicode MS"/>
+                <a:ea typeface="Arial Unicode MS"/>
+                <a:cs typeface="Arial Unicode MS"/>
+              </a:rPr>
+              <a:t>第三句，也是今天最重要的一句：onsemi 賣的是「晶片」，不是「相機」。</a:t>
+            </a:r>
+            <a:r>
+              <a:rPr sz="900" lang="zh-TW" dirty="0">
+                <a:solidFill>
+                  <a:srgbClr val="000000"/>
+                </a:solidFill>
+                <a:latin typeface="Arial Unicode MS"/>
+                <a:ea typeface="Arial Unicode MS"/>
+                <a:cs typeface="Arial Unicode MS"/>
+              </a:rPr>
+              <a:t>它出貨的是一塊方方的感光晶片，鏡頭要你自己配。各位先把這句話記著，等一下找不到視野的時候會用到。
 </a:t>
             </a:r>
           </a:p>
@@ -1302,30 +1236,19 @@
                 <a:spcPts val="0"/>
               </a:spcBef>
               <a:spcAft>
-                <a:spcPts val="133"/>
+                <a:spcPts val="150"/>
               </a:spcAft>
             </a:pPr>
             <a:r>
-              <a:rPr sz="800" b="1" lang="zh-TW" dirty="0">
-                <a:solidFill>
-                  <a:srgbClr val="000000"/>
-                </a:solidFill>
-                <a:latin typeface="Arial Unicode MS"/>
-                <a:ea typeface="Arial Unicode MS"/>
-                <a:cs typeface="Arial Unicode MS"/>
-              </a:rPr>
-              <a:t>▍以下照著唸</a:t>
-            </a:r>
-            <a:r>
-              <a:rPr sz="800" lang="zh-TW" dirty="0">
-                <a:solidFill>
-                  <a:srgbClr val="000000"/>
-                </a:solidFill>
-                <a:latin typeface="Arial Unicode MS"/>
-                <a:ea typeface="Arial Unicode MS"/>
-                <a:cs typeface="Arial Unicode MS"/>
-              </a:rPr>
-              <a:t>
+              <a:rPr sz="900" lang="zh-TW" dirty="0">
+                <a:solidFill>
+                  <a:srgbClr val="000000"/>
+                </a:solidFill>
+                <a:latin typeface="Arial Unicode MS"/>
+                <a:ea typeface="Arial Unicode MS"/>
+                <a:cs typeface="Arial Unicode MS"/>
+              </a:rPr>
+              <a:t>左邊這張是從 onsemi 的公開文件直接剪下來的，出處印在圖下面。
 </a:t>
             </a:r>
           </a:p>
@@ -1335,19 +1258,63 @@
                 <a:spcPts val="0"/>
               </a:spcBef>
               <a:spcAft>
-                <a:spcPts val="133"/>
+                <a:spcPts val="150"/>
               </a:spcAft>
             </a:pPr>
             <a:r>
-              <a:rPr sz="800" lang="zh-TW" dirty="0">
-                <a:solidFill>
-                  <a:srgbClr val="000000"/>
-                </a:solidFill>
-                <a:latin typeface="Arial Unicode MS"/>
-                <a:ea typeface="Arial Unicode MS"/>
-                <a:cs typeface="Arial Unicode MS"/>
-              </a:rPr>
-              <a:t>第三個型號，onsemi 的 AR0233AT。這一顆各位比較陌生，我用三句話介紹。
+              <a:rPr sz="900" lang="zh-TW" dirty="0">
+                <a:solidFill>
+                  <a:srgbClr val="000000"/>
+                </a:solidFill>
+                <a:latin typeface="Arial Unicode MS"/>
+                <a:ea typeface="Arial Unicode MS"/>
+                <a:cs typeface="Arial Unicode MS"/>
+              </a:rPr>
+              <a:t>我們先看它有什麼。最上面一行 Optical format，是感光面的大小。第二行 </a:t>
+            </a:r>
+            <a:r>
+              <a:rPr sz="900" b="1" lang="zh-TW" dirty="0">
+                <a:solidFill>
+                  <a:srgbClr val="000000"/>
+                </a:solidFill>
+                <a:latin typeface="Arial Unicode MS"/>
+                <a:ea typeface="Arial Unicode MS"/>
+                <a:cs typeface="Arial Unicode MS"/>
+              </a:rPr>
+              <a:t>Active pixels，2048 乘 1280</a:t>
+            </a:r>
+            <a:r>
+              <a:rPr sz="900" lang="zh-TW" dirty="0">
+                <a:solidFill>
+                  <a:srgbClr val="000000"/>
+                </a:solidFill>
+                <a:latin typeface="Arial Unicode MS"/>
+                <a:ea typeface="Arial Unicode MS"/>
+                <a:cs typeface="Arial Unicode MS"/>
+              </a:rPr>
+              <a:t>，就是第四週拉的那條水平解析度。第三行 </a:t>
+            </a:r>
+            <a:r>
+              <a:rPr sz="900" b="1" lang="zh-TW" dirty="0">
+                <a:solidFill>
+                  <a:srgbClr val="000000"/>
+                </a:solidFill>
+                <a:latin typeface="Arial Unicode MS"/>
+                <a:ea typeface="Arial Unicode MS"/>
+                <a:cs typeface="Arial Unicode MS"/>
+              </a:rPr>
+              <a:t>Pixel size，3.0 微米</a:t>
+            </a:r>
+            <a:r>
+              <a:rPr sz="900" lang="zh-TW" dirty="0">
+                <a:solidFill>
+                  <a:srgbClr val="000000"/>
+                </a:solidFill>
+                <a:latin typeface="Arial Unicode MS"/>
+                <a:ea typeface="Arial Unicode MS"/>
+                <a:cs typeface="Arial Unicode MS"/>
+              </a:rPr>
+              <a:t>，一個像素三微米見方，這個數字等一下有用。
 </a:t>
             </a:r>
           </a:p>
@@ -1357,74 +1324,19 @@
                 <a:spcPts val="0"/>
               </a:spcBef>
               <a:spcAft>
-                <a:spcPts val="133"/>
+                <a:spcPts val="150"/>
               </a:spcAft>
             </a:pPr>
             <a:r>
-              <a:rPr sz="800" b="1" lang="zh-TW" dirty="0">
-                <a:solidFill>
-                  <a:srgbClr val="000000"/>
-                </a:solidFill>
-                <a:latin typeface="Arial Unicode MS"/>
-                <a:ea typeface="Arial Unicode MS"/>
-                <a:cs typeface="Arial Unicode MS"/>
-              </a:rPr>
-              <a:t>onsemi 是一家美國的半導體公司</a:t>
-            </a:r>
-            <a:r>
-              <a:rPr sz="800" lang="zh-TW" dirty="0">
-                <a:solidFill>
-                  <a:srgbClr val="000000"/>
-                </a:solidFill>
-                <a:latin typeface="Arial Unicode MS"/>
-                <a:ea typeface="Arial Unicode MS"/>
-                <a:cs typeface="Arial Unicode MS"/>
-              </a:rPr>
-              <a:t>，以前叫 ON Semiconductor，二〇二一年改成現在這個全小寫的寫法。它的影像感測器是二〇一四年買下一家叫 </a:t>
-            </a:r>
-            <a:r>
-              <a:rPr sz="800" b="1" lang="zh-TW" dirty="0">
-                <a:solidFill>
-                  <a:srgbClr val="000000"/>
-                </a:solidFill>
-                <a:latin typeface="Arial Unicode MS"/>
-                <a:ea typeface="Arial Unicode MS"/>
-                <a:cs typeface="Arial Unicode MS"/>
-              </a:rPr>
-              <a:t>Aptina</a:t>
-            </a:r>
-            <a:r>
-              <a:rPr sz="800" lang="zh-TW" dirty="0">
-                <a:solidFill>
-                  <a:srgbClr val="000000"/>
-                </a:solidFill>
-                <a:latin typeface="Arial Unicode MS"/>
-                <a:ea typeface="Arial Unicode MS"/>
-                <a:cs typeface="Arial Unicode MS"/>
-              </a:rPr>
-              <a:t> 的公司來的——所以型號才是 </a:t>
-            </a:r>
-            <a:r>
-              <a:rPr sz="800" b="1" lang="zh-TW" dirty="0">
-                <a:solidFill>
-                  <a:srgbClr val="000000"/>
-                </a:solidFill>
-                <a:latin typeface="Arial Unicode MS"/>
-                <a:ea typeface="Arial Unicode MS"/>
-                <a:cs typeface="Arial Unicode MS"/>
-              </a:rPr>
-              <a:t>AR</a:t>
-            </a:r>
-            <a:r>
-              <a:rPr sz="800" lang="zh-TW" dirty="0">
-                <a:solidFill>
-                  <a:srgbClr val="000000"/>
-                </a:solidFill>
-                <a:latin typeface="Arial Unicode MS"/>
-                <a:ea typeface="Arial Unicode MS"/>
-                <a:cs typeface="Arial Unicode MS"/>
-              </a:rPr>
-              <a:t> 開頭，那是 Aptina 留下來的產品線代號。車用影像感測器這一塊，最常碰到的就是 onsemi、Sony、OmniVision 這三家。
+              <a:rPr sz="900" lang="zh-TW" dirty="0">
+                <a:solidFill>
+                  <a:srgbClr val="000000"/>
+                </a:solidFill>
+                <a:latin typeface="Arial Unicode MS"/>
+                <a:ea typeface="Arial Unicode MS"/>
+                <a:cs typeface="Arial Unicode MS"/>
+              </a:rPr>
+              <a:t>再往下四行：彩色濾波陣列、介面、動態範圍、封裝。七行就這樣，沒了。
 </a:t>
             </a:r>
           </a:p>
@@ -1434,52 +1346,19 @@
                 <a:spcPts val="0"/>
               </a:spcBef>
               <a:spcAft>
-                <a:spcPts val="133"/>
+                <a:spcPts val="150"/>
               </a:spcAft>
             </a:pPr>
             <a:r>
-              <a:rPr sz="800" b="1" lang="zh-TW" dirty="0">
-                <a:solidFill>
-                  <a:srgbClr val="000000"/>
-                </a:solidFill>
-                <a:latin typeface="Arial Unicode MS"/>
-                <a:ea typeface="Arial Unicode MS"/>
-                <a:cs typeface="Arial Unicode MS"/>
-              </a:rPr>
-              <a:t>第二句，看型號的結尾。</a:t>
-            </a:r>
-            <a:r>
-              <a:rPr sz="800" lang="zh-TW" dirty="0">
-                <a:solidFill>
-                  <a:srgbClr val="000000"/>
-                </a:solidFill>
-                <a:latin typeface="Arial Unicode MS"/>
-                <a:ea typeface="Arial Unicode MS"/>
-                <a:cs typeface="Arial Unicode MS"/>
-              </a:rPr>
-              <a:t>onsemi 的車規型號習慣用 </a:t>
-            </a:r>
-            <a:r>
-              <a:rPr sz="800" b="1" lang="zh-TW" dirty="0">
-                <a:solidFill>
-                  <a:srgbClr val="000000"/>
-                </a:solidFill>
-                <a:latin typeface="Arial Unicode MS"/>
-                <a:ea typeface="Arial Unicode MS"/>
-                <a:cs typeface="Arial Unicode MS"/>
-              </a:rPr>
-              <a:t>AT</a:t>
-            </a:r>
-            <a:r>
-              <a:rPr sz="800" lang="zh-TW" dirty="0">
-                <a:solidFill>
-                  <a:srgbClr val="000000"/>
-                </a:solidFill>
-                <a:latin typeface="Arial Unicode MS"/>
-                <a:ea typeface="Arial Unicode MS"/>
-                <a:cs typeface="Arial Unicode MS"/>
-              </a:rPr>
-              <a:t> 結尾——AR0233AT、AR0234AT 都是；同一顆晶片的非車規版本會換成別的後綴，像 AR0234CS。看到 AT，大概就知道它是衝著車用來的。
+              <a:rPr sz="900" lang="zh-TW" dirty="0">
+                <a:solidFill>
+                  <a:srgbClr val="000000"/>
+                </a:solidFill>
+                <a:latin typeface="Arial Unicode MS"/>
+                <a:ea typeface="Arial Unicode MS"/>
+                <a:cs typeface="Arial Unicode MS"/>
+              </a:rPr>
+              <a:t>現在請各位在左邊找「視野」，英文是 field of view。再找「測距」，range。給各位三十秒。
 </a:t>
             </a:r>
           </a:p>
@@ -1489,30 +1368,19 @@
                 <a:spcPts val="0"/>
               </a:spcBef>
               <a:spcAft>
-                <a:spcPts val="133"/>
+                <a:spcPts val="150"/>
               </a:spcAft>
             </a:pPr>
             <a:r>
-              <a:rPr sz="800" b="1" lang="zh-TW" dirty="0">
-                <a:solidFill>
-                  <a:srgbClr val="000000"/>
-                </a:solidFill>
-                <a:latin typeface="Arial Unicode MS"/>
-                <a:ea typeface="Arial Unicode MS"/>
-                <a:cs typeface="Arial Unicode MS"/>
-              </a:rPr>
-              <a:t>第三句，也是今天最重要的一句：onsemi 賣的是「晶片」，不是「相機」。</a:t>
-            </a:r>
-            <a:r>
-              <a:rPr sz="800" lang="zh-TW" dirty="0">
-                <a:solidFill>
-                  <a:srgbClr val="000000"/>
-                </a:solidFill>
-                <a:latin typeface="Arial Unicode MS"/>
-                <a:ea typeface="Arial Unicode MS"/>
-                <a:cs typeface="Arial Unicode MS"/>
-              </a:rPr>
-              <a:t>它出貨的是一塊方方的感光晶片，鏡頭要你自己配。各位先把這句話記著，等一下找不到視野的時候會用到。
+              <a:rPr sz="900" lang="zh-TW" dirty="0">
+                <a:solidFill>
+                  <a:srgbClr val="000000"/>
+                </a:solidFill>
+                <a:latin typeface="Arial Unicode MS"/>
+                <a:ea typeface="Arial Unicode MS"/>
+                <a:cs typeface="Arial Unicode MS"/>
+              </a:rPr>
+              <a:t>都沒有。七行裡面一行都沒有。可是這兩行，就是我們前兩週天天在拉的滑桿。
 </a:t>
             </a:r>
           </a:p>
@@ -1522,19 +1390,19 @@
                 <a:spcPts val="0"/>
               </a:spcBef>
               <a:spcAft>
-                <a:spcPts val="133"/>
+                <a:spcPts val="150"/>
               </a:spcAft>
             </a:pPr>
             <a:r>
-              <a:rPr sz="800" lang="zh-TW" dirty="0">
-                <a:solidFill>
-                  <a:srgbClr val="000000"/>
-                </a:solidFill>
-                <a:latin typeface="Arial Unicode MS"/>
-                <a:ea typeface="Arial Unicode MS"/>
-                <a:cs typeface="Arial Unicode MS"/>
-              </a:rPr>
-              <a:t>左邊這張是從 onsemi 的公開文件直接剪下來的，出處印在圖下面。
+              <a:rPr sz="900" lang="zh-TW" dirty="0">
+                <a:solidFill>
+                  <a:srgbClr val="000000"/>
+                </a:solidFill>
+                <a:latin typeface="Arial Unicode MS"/>
+                <a:ea typeface="Arial Unicode MS"/>
+                <a:cs typeface="Arial Unicode MS"/>
+              </a:rPr>
+              <a:t>現在看右邊。一樣是相機的規格表，Raspberry Pi 的 Camera Module 3。這張上面有沒有視野？有，而且有三行：對角、水平、垂直。同樣是相機的東西，為什麼一張有、一張沒有？先別急著回答。
 </a:t>
             </a:r>
           </a:p>
@@ -1544,63 +1412,63 @@
                 <a:spcPts val="0"/>
               </a:spcBef>
               <a:spcAft>
-                <a:spcPts val="133"/>
+                <a:spcPts val="150"/>
               </a:spcAft>
             </a:pPr>
             <a:r>
-              <a:rPr sz="800" lang="zh-TW" dirty="0">
-                <a:solidFill>
-                  <a:srgbClr val="000000"/>
-                </a:solidFill>
-                <a:latin typeface="Arial Unicode MS"/>
-                <a:ea typeface="Arial Unicode MS"/>
-                <a:cs typeface="Arial Unicode MS"/>
-              </a:rPr>
-              <a:t>我們先看它有什麼。最上面一行 Optical format，是感光面的大小。第二行 </a:t>
-            </a:r>
-            <a:r>
-              <a:rPr sz="800" b="1" lang="zh-TW" dirty="0">
-                <a:solidFill>
-                  <a:srgbClr val="000000"/>
-                </a:solidFill>
-                <a:latin typeface="Arial Unicode MS"/>
-                <a:ea typeface="Arial Unicode MS"/>
-                <a:cs typeface="Arial Unicode MS"/>
-              </a:rPr>
-              <a:t>Active pixels，2048 乘 1280</a:t>
-            </a:r>
-            <a:r>
-              <a:rPr sz="800" lang="zh-TW" dirty="0">
-                <a:solidFill>
-                  <a:srgbClr val="000000"/>
-                </a:solidFill>
-                <a:latin typeface="Arial Unicode MS"/>
-                <a:ea typeface="Arial Unicode MS"/>
-                <a:cs typeface="Arial Unicode MS"/>
-              </a:rPr>
-              <a:t>，就是第四週拉的那條水平解析度。第三行 </a:t>
-            </a:r>
-            <a:r>
-              <a:rPr sz="800" b="1" lang="zh-TW" dirty="0">
-                <a:solidFill>
-                  <a:srgbClr val="000000"/>
-                </a:solidFill>
-                <a:latin typeface="Arial Unicode MS"/>
-                <a:ea typeface="Arial Unicode MS"/>
-                <a:cs typeface="Arial Unicode MS"/>
-              </a:rPr>
-              <a:t>Pixel size，3.0 微米</a:t>
-            </a:r>
-            <a:r>
-              <a:rPr sz="800" lang="zh-TW" dirty="0">
-                <a:solidFill>
-                  <a:srgbClr val="000000"/>
-                </a:solidFill>
-                <a:latin typeface="Arial Unicode MS"/>
-                <a:ea typeface="Arial Unicode MS"/>
-                <a:cs typeface="Arial Unicode MS"/>
-              </a:rPr>
-              <a:t>，一個像素三微米見方，這個數字等一下有用。
+              <a:rPr sz="900" lang="zh-TW" dirty="0">
+                <a:solidFill>
+                  <a:srgbClr val="000000"/>
+                </a:solidFill>
+                <a:latin typeface="Arial Unicode MS"/>
+                <a:ea typeface="Arial Unicode MS"/>
+                <a:cs typeface="Arial Unicode MS"/>
+              </a:rPr>
+              <a:t>右邊還有一行叫 </a:t>
+            </a:r>
+            <a:r>
+              <a:rPr sz="900" b="1" lang="zh-TW" dirty="0">
+                <a:solidFill>
+                  <a:srgbClr val="000000"/>
+                </a:solidFill>
+                <a:latin typeface="Arial Unicode MS"/>
+                <a:ea typeface="Arial Unicode MS"/>
+                <a:cs typeface="Arial Unicode MS"/>
+              </a:rPr>
+              <a:t>Focal length</a:t>
+            </a:r>
+            <a:r>
+              <a:rPr sz="900" lang="zh-TW" dirty="0">
+                <a:solidFill>
+                  <a:srgbClr val="000000"/>
+                </a:solidFill>
+                <a:latin typeface="Arial Unicode MS"/>
+                <a:ea typeface="Arial Unicode MS"/>
+                <a:cs typeface="Arial Unicode MS"/>
+              </a:rPr>
+              <a:t>，焦距。前面兩欄是 4.74 公釐，後面兩欄是 2.75 公釐。往下看</a:t>
+            </a:r>
+            <a:r>
+              <a:rPr sz="900" b="1" lang="zh-TW" dirty="0">
+                <a:solidFill>
+                  <a:srgbClr val="000000"/>
+                </a:solidFill>
+                <a:latin typeface="Arial Unicode MS"/>
+                <a:ea typeface="Arial Unicode MS"/>
+                <a:cs typeface="Arial Unicode MS"/>
+              </a:rPr>
+              <a:t>水平視野</a:t>
+            </a:r>
+            <a:r>
+              <a:rPr sz="900" lang="zh-TW" dirty="0">
+                <a:solidFill>
+                  <a:srgbClr val="000000"/>
+                </a:solidFill>
+                <a:latin typeface="Arial Unicode MS"/>
+                <a:ea typeface="Arial Unicode MS"/>
+                <a:cs typeface="Arial Unicode MS"/>
+              </a:rPr>
+              <a:t>那一行：4.74 的那兩欄是 66 度，2.75 的那兩欄是 102 度。
 </a:t>
             </a:r>
           </a:p>
@@ -1610,165 +1478,11 @@
                 <a:spcPts val="0"/>
               </a:spcBef>
               <a:spcAft>
-                <a:spcPts val="133"/>
+                <a:spcPts val="150"/>
               </a:spcAft>
             </a:pPr>
             <a:r>
-              <a:rPr sz="800" lang="zh-TW" dirty="0">
-                <a:solidFill>
-                  <a:srgbClr val="000000"/>
-                </a:solidFill>
-                <a:latin typeface="Arial Unicode MS"/>
-                <a:ea typeface="Arial Unicode MS"/>
-                <a:cs typeface="Arial Unicode MS"/>
-              </a:rPr>
-              <a:t>再往下四行：彩色濾波陣列、介面、動態範圍、封裝。七行就這樣，沒了。
-</a:t>
-            </a:r>
-          </a:p>
-          <a:p>
-            <a:pPr algn="l">
-              <a:spcBef>
-                <a:spcPts val="0"/>
-              </a:spcBef>
-              <a:spcAft>
-                <a:spcPts val="133"/>
-              </a:spcAft>
-            </a:pPr>
-            <a:r>
-              <a:rPr sz="800" lang="zh-TW" dirty="0">
-                <a:solidFill>
-                  <a:srgbClr val="000000"/>
-                </a:solidFill>
-                <a:latin typeface="Arial Unicode MS"/>
-                <a:ea typeface="Arial Unicode MS"/>
-                <a:cs typeface="Arial Unicode MS"/>
-              </a:rPr>
-              <a:t>現在請各位在左邊找「視野」，英文是 field of view。再找「測距」，range。給各位三十秒。
-</a:t>
-            </a:r>
-          </a:p>
-          <a:p>
-            <a:pPr algn="l">
-              <a:spcBef>
-                <a:spcPts val="0"/>
-              </a:spcBef>
-              <a:spcAft>
-                <a:spcPts val="133"/>
-              </a:spcAft>
-            </a:pPr>
-            <a:r>
-              <a:rPr sz="800" lang="zh-TW" dirty="0">
-                <a:solidFill>
-                  <a:srgbClr val="000000"/>
-                </a:solidFill>
-                <a:latin typeface="Arial Unicode MS"/>
-                <a:ea typeface="Arial Unicode MS"/>
-                <a:cs typeface="Arial Unicode MS"/>
-              </a:rPr>
-              <a:t>都沒有。七行裡面一行都沒有。可是這兩行，就是我們前兩週天天在拉的滑桿。
-</a:t>
-            </a:r>
-          </a:p>
-          <a:p>
-            <a:pPr algn="l">
-              <a:spcBef>
-                <a:spcPts val="0"/>
-              </a:spcBef>
-              <a:spcAft>
-                <a:spcPts val="133"/>
-              </a:spcAft>
-            </a:pPr>
-            <a:r>
-              <a:rPr sz="800" lang="zh-TW" dirty="0">
-                <a:solidFill>
-                  <a:srgbClr val="000000"/>
-                </a:solidFill>
-                <a:latin typeface="Arial Unicode MS"/>
-                <a:ea typeface="Arial Unicode MS"/>
-                <a:cs typeface="Arial Unicode MS"/>
-              </a:rPr>
-              <a:t>現在看右邊。一樣是相機的規格表，Raspberry Pi 的 Camera Module 3。這張上面有沒有視野？有，而且有三行：對角、水平、垂直。同樣是相機的東西，為什麼一張有、一張沒有？先別急著回答。
-</a:t>
-            </a:r>
-          </a:p>
-          <a:p>
-            <a:pPr algn="l">
-              <a:spcBef>
-                <a:spcPts val="0"/>
-              </a:spcBef>
-              <a:spcAft>
-                <a:spcPts val="133"/>
-              </a:spcAft>
-            </a:pPr>
-            <a:r>
-              <a:rPr sz="800" lang="zh-TW" dirty="0">
-                <a:solidFill>
-                  <a:srgbClr val="000000"/>
-                </a:solidFill>
-                <a:latin typeface="Arial Unicode MS"/>
-                <a:ea typeface="Arial Unicode MS"/>
-                <a:cs typeface="Arial Unicode MS"/>
-              </a:rPr>
-              <a:t>右邊還有一行叫 </a:t>
-            </a:r>
-            <a:r>
-              <a:rPr sz="800" b="1" lang="zh-TW" dirty="0">
-                <a:solidFill>
-                  <a:srgbClr val="000000"/>
-                </a:solidFill>
-                <a:latin typeface="Arial Unicode MS"/>
-                <a:ea typeface="Arial Unicode MS"/>
-                <a:cs typeface="Arial Unicode MS"/>
-              </a:rPr>
-              <a:t>Focal length</a:t>
-            </a:r>
-            <a:r>
-              <a:rPr sz="800" lang="zh-TW" dirty="0">
-                <a:solidFill>
-                  <a:srgbClr val="000000"/>
-                </a:solidFill>
-                <a:latin typeface="Arial Unicode MS"/>
-                <a:ea typeface="Arial Unicode MS"/>
-                <a:cs typeface="Arial Unicode MS"/>
-              </a:rPr>
-              <a:t>，焦距。前面兩欄是 4.74 公釐，後面兩欄是 2.75 公釐。往下看</a:t>
-            </a:r>
-            <a:r>
-              <a:rPr sz="800" b="1" lang="zh-TW" dirty="0">
-                <a:solidFill>
-                  <a:srgbClr val="000000"/>
-                </a:solidFill>
-                <a:latin typeface="Arial Unicode MS"/>
-                <a:ea typeface="Arial Unicode MS"/>
-                <a:cs typeface="Arial Unicode MS"/>
-              </a:rPr>
-              <a:t>水平視野</a:t>
-            </a:r>
-            <a:r>
-              <a:rPr sz="800" lang="zh-TW" dirty="0">
-                <a:solidFill>
-                  <a:srgbClr val="000000"/>
-                </a:solidFill>
-                <a:latin typeface="Arial Unicode MS"/>
-                <a:ea typeface="Arial Unicode MS"/>
-                <a:cs typeface="Arial Unicode MS"/>
-              </a:rPr>
-              <a:t>那一行：4.74 的那兩欄是 66 度，2.75 的那兩欄是 102 度。
-</a:t>
-            </a:r>
-          </a:p>
-          <a:p>
-            <a:pPr algn="l">
-              <a:spcBef>
-                <a:spcPts val="0"/>
-              </a:spcBef>
-              <a:spcAft>
-                <a:spcPts val="133"/>
-              </a:spcAft>
-            </a:pPr>
-            <a:r>
-              <a:rPr sz="800" lang="zh-TW" dirty="0">
+              <a:rPr sz="900" lang="zh-TW" dirty="0">
                 <a:solidFill>
                   <a:srgbClr val="000000"/>
                 </a:solidFill>
@@ -1889,149 +1603,6 @@
               </a:spcAft>
             </a:pPr>
             <a:r>
-              <a:rPr sz="800" b="1" lang="zh-TW" dirty="0">
-                <a:solidFill>
-                  <a:srgbClr val="000000"/>
-                </a:solidFill>
-                <a:latin typeface="Arial Unicode MS"/>
-                <a:ea typeface="Arial Unicode MS"/>
-                <a:cs typeface="Arial Unicode MS"/>
-              </a:rPr>
-              <a:t>▍這一張要做什麼</a:t>
-            </a:r>
-            <a:r>
-              <a:rPr sz="800" lang="zh-TW" dirty="0">
-                <a:solidFill>
-                  <a:srgbClr val="000000"/>
-                </a:solidFill>
-                <a:latin typeface="Arial Unicode MS"/>
-                <a:ea typeface="Arial Unicode MS"/>
-                <a:cs typeface="Arial Unicode MS"/>
-              </a:rPr>
-              <a:t>
-</a:t>
-            </a:r>
-          </a:p>
-          <a:p>
-            <a:pPr algn="l">
-              <a:spcBef>
-                <a:spcPts val="0"/>
-              </a:spcBef>
-              <a:spcAft>
-                <a:spcPts val="133"/>
-              </a:spcAft>
-            </a:pPr>
-            <a:r>
-              <a:rPr sz="800" lang="zh-TW" dirty="0">
-                <a:solidFill>
-                  <a:srgbClr val="000000"/>
-                </a:solidFill>
-                <a:latin typeface="Arial Unicode MS"/>
-                <a:ea typeface="Arial Unicode MS"/>
-                <a:cs typeface="Arial Unicode MS"/>
-              </a:rPr>
-              <a:t>公布答案：視野不在感測器身上，在鏡頭身上。這是整份工具最重要的一題。
-</a:t>
-            </a:r>
-          </a:p>
-          <a:p>
-            <a:pPr algn="l">
-              <a:spcBef>
-                <a:spcPts val="0"/>
-              </a:spcBef>
-              <a:spcAft>
-                <a:spcPts val="133"/>
-              </a:spcAft>
-            </a:pPr>
-            <a:r>
-              <a:rPr sz="800" b="1" lang="zh-TW" dirty="0">
-                <a:solidFill>
-                  <a:srgbClr val="000000"/>
-                </a:solidFill>
-                <a:latin typeface="Arial Unicode MS"/>
-                <a:ea typeface="Arial Unicode MS"/>
-                <a:cs typeface="Arial Unicode MS"/>
-              </a:rPr>
-              <a:t>▍畫面上圈這裡</a:t>
-            </a:r>
-            <a:r>
-              <a:rPr sz="800" lang="zh-TW" dirty="0">
-                <a:solidFill>
-                  <a:srgbClr val="000000"/>
-                </a:solidFill>
-                <a:latin typeface="Arial Unicode MS"/>
-                <a:ea typeface="Arial Unicode MS"/>
-                <a:cs typeface="Arial Unicode MS"/>
-              </a:rPr>
-              <a:t>
-</a:t>
-            </a:r>
-          </a:p>
-          <a:p>
-            <a:pPr algn="l">
-              <a:spcBef>
-                <a:spcPts val="0"/>
-              </a:spcBef>
-              <a:spcAft>
-                <a:spcPts val="133"/>
-              </a:spcAft>
-            </a:pPr>
-            <a:r>
-              <a:rPr sz="800" lang="zh-TW" dirty="0">
-                <a:solidFill>
-                  <a:srgbClr val="000000"/>
-                </a:solidFill>
-                <a:latin typeface="Arial Unicode MS"/>
-                <a:ea typeface="Arial Unicode MS"/>
-                <a:cs typeface="Arial Unicode MS"/>
-              </a:rPr>
-              <a:t>動圖在開頭停一次（兩格取景不一樣，右邊看得比較寬）、結尾再停一次（框到同一台車，右邊糊掉）。再打開判讀台第①個小工具現場算一次。
-</a:t>
-            </a:r>
-          </a:p>
-          <a:p>
-            <a:pPr algn="l">
-              <a:spcBef>
-                <a:spcPts val="0"/>
-              </a:spcBef>
-              <a:spcAft>
-                <a:spcPts val="133"/>
-              </a:spcAft>
-            </a:pPr>
-            <a:r>
-              <a:rPr sz="800" b="1" lang="zh-TW" dirty="0">
-                <a:solidFill>
-                  <a:srgbClr val="000000"/>
-                </a:solidFill>
-                <a:latin typeface="Arial Unicode MS"/>
-                <a:ea typeface="Arial Unicode MS"/>
-                <a:cs typeface="Arial Unicode MS"/>
-              </a:rPr>
-              <a:t>▍以下照著唸</a:t>
-            </a:r>
-            <a:r>
-              <a:rPr sz="800" lang="zh-TW" dirty="0">
-                <a:solidFill>
-                  <a:srgbClr val="000000"/>
-                </a:solidFill>
-                <a:latin typeface="Arial Unicode MS"/>
-                <a:ea typeface="Arial Unicode MS"/>
-                <a:cs typeface="Arial Unicode MS"/>
-              </a:rPr>
-              <a:t>
-</a:t>
-            </a:r>
-          </a:p>
-          <a:p>
-            <a:pPr algn="l">
-              <a:spcBef>
-                <a:spcPts val="0"/>
-              </a:spcBef>
-              <a:spcAft>
-                <a:spcPts val="133"/>
-              </a:spcAft>
-            </a:pPr>
-            <a:r>
               <a:rPr sz="800" lang="zh-TW" dirty="0">
                 <a:solidFill>
                   <a:srgbClr val="000000"/>
@@ -2875,30 +2446,41 @@
                 <a:spcPts val="0"/>
               </a:spcBef>
               <a:spcAft>
-                <a:spcPts val="133"/>
+                <a:spcPts val="167"/>
               </a:spcAft>
             </a:pPr>
             <a:r>
-              <a:rPr sz="800" b="1" lang="zh-TW" dirty="0">
-                <a:solidFill>
-                  <a:srgbClr val="000000"/>
-                </a:solidFill>
-                <a:latin typeface="Arial Unicode MS"/>
-                <a:ea typeface="Arial Unicode MS"/>
-                <a:cs typeface="Arial Unicode MS"/>
-              </a:rPr>
-              <a:t>▍這一張要做什麼</a:t>
-            </a:r>
-            <a:r>
-              <a:rPr sz="800" lang="zh-TW" dirty="0">
-                <a:solidFill>
-                  <a:srgbClr val="000000"/>
-                </a:solidFill>
-                <a:latin typeface="Arial Unicode MS"/>
-                <a:ea typeface="Arial Unicode MS"/>
-                <a:cs typeface="Arial Unicode MS"/>
-              </a:rPr>
-              <a:t>
+              <a:rPr sz="1000" lang="zh-TW" dirty="0">
+                <a:solidFill>
+                  <a:srgbClr val="000000"/>
+                </a:solidFill>
+                <a:latin typeface="Arial Unicode MS"/>
+                <a:ea typeface="Arial Unicode MS"/>
+                <a:cs typeface="Arial Unicode MS"/>
+              </a:rPr>
+              <a:t>再看一個很容易讀漏的地方。第七張那張圖上，水平解析度和轉速後面都跟著同一個字：</a:t>
+            </a:r>
+            <a:r>
+              <a:rPr sz="1000" b="1" lang="zh-TW" dirty="0">
+                <a:solidFill>
+                  <a:srgbClr val="000000"/>
+                </a:solidFill>
+                <a:latin typeface="Arial Unicode MS"/>
+                <a:ea typeface="Arial Unicode MS"/>
+                <a:cs typeface="Arial Unicode MS"/>
+              </a:rPr>
+              <a:t>configurable</a:t>
+            </a:r>
+            <a:r>
+              <a:rPr sz="1000" lang="zh-TW" dirty="0">
+                <a:solidFill>
+                  <a:srgbClr val="000000"/>
+                </a:solidFill>
+                <a:latin typeface="Arial Unicode MS"/>
+                <a:ea typeface="Arial Unicode MS"/>
+                <a:cs typeface="Arial Unicode MS"/>
+              </a:rPr>
+              <a:t>，可以設定。
 </a:t>
             </a:r>
           </a:p>
@@ -2908,19 +2490,41 @@
                 <a:spcPts val="0"/>
               </a:spcBef>
               <a:spcAft>
-                <a:spcPts val="133"/>
+                <a:spcPts val="167"/>
               </a:spcAft>
             </a:pPr>
             <a:r>
-              <a:rPr sz="800" lang="zh-TW" dirty="0">
-                <a:solidFill>
-                  <a:srgbClr val="000000"/>
-                </a:solidFill>
-                <a:latin typeface="Arial Unicode MS"/>
-                <a:ea typeface="Arial Unicode MS"/>
-                <a:cs typeface="Arial Unicode MS"/>
-              </a:rPr>
-              <a:t>提醒一個容易讀錯的地方：寫著「可設定」的那一行是模式，不是定值。
+              <a:rPr sz="1000" lang="zh-TW" dirty="0">
+                <a:solidFill>
+                  <a:srgbClr val="000000"/>
+                </a:solidFill>
+                <a:latin typeface="Arial Unicode MS"/>
+                <a:ea typeface="Arial Unicode MS"/>
+                <a:cs typeface="Arial Unicode MS"/>
+              </a:rPr>
+              <a:t>datasheet 後面幾頁就把可以設定的組合整個列出來，也就是左邊這一塊，</a:t>
+            </a:r>
+            <a:r>
+              <a:rPr sz="1000" b="1" lang="zh-TW" dirty="0">
+                <a:solidFill>
+                  <a:srgbClr val="000000"/>
+                </a:solidFill>
+                <a:latin typeface="Arial Unicode MS"/>
+                <a:ea typeface="Arial Unicode MS"/>
+                <a:cs typeface="Arial Unicode MS"/>
+              </a:rPr>
+              <a:t>Lidar Operating Modes</a:t>
+            </a:r>
+            <a:r>
+              <a:rPr sz="1000" lang="zh-TW" dirty="0">
+                <a:solidFill>
+                  <a:srgbClr val="000000"/>
+                </a:solidFill>
+                <a:latin typeface="Arial Unicode MS"/>
+                <a:ea typeface="Arial Unicode MS"/>
+                <a:cs typeface="Arial Unicode MS"/>
+              </a:rPr>
+              <a:t>。512 點一圈，可以配 10 Hz 或 20 Hz。1024 點一圈，也可以配 10 Hz 或 20 Hz。
 </a:t>
             </a:r>
           </a:p>
@@ -2930,30 +2534,41 @@
                 <a:spcPts val="0"/>
               </a:spcBef>
               <a:spcAft>
-                <a:spcPts val="133"/>
+                <a:spcPts val="167"/>
               </a:spcAft>
             </a:pPr>
             <a:r>
-              <a:rPr sz="800" b="1" lang="zh-TW" dirty="0">
-                <a:solidFill>
-                  <a:srgbClr val="000000"/>
-                </a:solidFill>
-                <a:latin typeface="Arial Unicode MS"/>
-                <a:ea typeface="Arial Unicode MS"/>
-                <a:cs typeface="Arial Unicode MS"/>
-              </a:rPr>
-              <a:t>▍畫面上圈這裡</a:t>
-            </a:r>
-            <a:r>
-              <a:rPr sz="800" lang="zh-TW" dirty="0">
-                <a:solidFill>
-                  <a:srgbClr val="000000"/>
-                </a:solidFill>
-                <a:latin typeface="Arial Unicode MS"/>
-                <a:ea typeface="Arial Unicode MS"/>
-                <a:cs typeface="Arial Unicode MS"/>
-              </a:rPr>
-              <a:t>
+              <a:rPr sz="1000" lang="zh-TW" dirty="0">
+                <a:solidFill>
+                  <a:srgbClr val="000000"/>
+                </a:solidFill>
+                <a:latin typeface="Arial Unicode MS"/>
+                <a:ea typeface="Arial Unicode MS"/>
+                <a:cs typeface="Arial Unicode MS"/>
+              </a:rPr>
+              <a:t>請各位特別看第三行：</a:t>
+            </a:r>
+            <a:r>
+              <a:rPr sz="1000" b="1" lang="zh-TW" dirty="0">
+                <a:solidFill>
+                  <a:srgbClr val="000000"/>
+                </a:solidFill>
+                <a:latin typeface="Arial Unicode MS"/>
+                <a:ea typeface="Arial Unicode MS"/>
+                <a:cs typeface="Arial Unicode MS"/>
+              </a:rPr>
+              <a:t>x 2048，只有 @ 10 Hz</a:t>
+            </a:r>
+            <a:r>
+              <a:rPr sz="1000" lang="zh-TW" dirty="0">
+                <a:solidFill>
+                  <a:srgbClr val="000000"/>
+                </a:solidFill>
+                <a:latin typeface="Arial Unicode MS"/>
+                <a:ea typeface="Arial Unicode MS"/>
+                <a:cs typeface="Arial Unicode MS"/>
+              </a:rPr>
+              <a:t>。想要最密的點，就不能跑 20 Hz。廠商自己把這件事寫在表上了——要最密，就得轉慢一點。
 </a:t>
             </a:r>
           </a:p>
@@ -2963,19 +2578,41 @@
                 <a:spcPts val="0"/>
               </a:spcBef>
               <a:spcAft>
-                <a:spcPts val="133"/>
+                <a:spcPts val="167"/>
               </a:spcAft>
             </a:pPr>
             <a:r>
-              <a:rPr sz="800" lang="zh-TW" dirty="0">
-                <a:solidFill>
-                  <a:srgbClr val="000000"/>
-                </a:solidFill>
-                <a:latin typeface="Arial Unicode MS"/>
-                <a:ea typeface="Arial Unicode MS"/>
-                <a:cs typeface="Arial Unicode MS"/>
-              </a:rPr>
-              <a:t>圈圖裡三行模式，特別圈第三行的 x 2048 @ 10 Hz——只有 10 Hz。再現場切一次模式給他們看。
+              <a:rPr sz="1000" lang="zh-TW" dirty="0">
+                <a:solidFill>
+                  <a:srgbClr val="000000"/>
+                </a:solidFill>
+                <a:latin typeface="Arial Unicode MS"/>
+                <a:ea typeface="Arial Unicode MS"/>
+                <a:cs typeface="Arial Unicode MS"/>
+              </a:rPr>
+              <a:t>這代表什麼？代表</a:t>
+            </a:r>
+            <a:r>
+              <a:rPr sz="1000" b="1" lang="zh-TW" dirty="0">
+                <a:solidFill>
+                  <a:srgbClr val="000000"/>
+                </a:solidFill>
+                <a:latin typeface="Arial Unicode MS"/>
+                <a:ea typeface="Arial Unicode MS"/>
+                <a:cs typeface="Arial Unicode MS"/>
+              </a:rPr>
+              <a:t>同一顆光達，你買回來之後還可以選模式</a:t>
+            </a:r>
+            <a:r>
+              <a:rPr sz="1000" lang="zh-TW" dirty="0">
+                <a:solidFill>
+                  <a:srgbClr val="000000"/>
+                </a:solidFill>
+                <a:latin typeface="Arial Unicode MS"/>
+                <a:ea typeface="Arial Unicode MS"/>
+                <a:cs typeface="Arial Unicode MS"/>
+              </a:rPr>
+              <a:t>。
 </a:t>
             </a:r>
           </a:p>
@@ -2985,22 +2622,143 @@
                 <a:spcPts val="0"/>
               </a:spcBef>
               <a:spcAft>
-                <a:spcPts val="133"/>
+                <a:spcPts val="167"/>
               </a:spcAft>
             </a:pPr>
             <a:r>
-              <a:rPr sz="800" b="1" lang="zh-TW" dirty="0">
-                <a:solidFill>
-                  <a:srgbClr val="000000"/>
-                </a:solidFill>
-                <a:latin typeface="Arial Unicode MS"/>
-                <a:ea typeface="Arial Unicode MS"/>
-                <a:cs typeface="Arial Unicode MS"/>
-              </a:rPr>
-              <a:t>▍以下照著唸</a:t>
-            </a:r>
-            <a:r>
-              <a:rPr sz="800" lang="zh-TW" dirty="0">
+              <a:rPr sz="1000" lang="zh-TW" dirty="0">
+                <a:solidFill>
+                  <a:srgbClr val="000000"/>
+                </a:solidFill>
+                <a:latin typeface="Arial Unicode MS"/>
+                <a:ea typeface="Arial Unicode MS"/>
+                <a:cs typeface="Arial Unicode MS"/>
+              </a:rPr>
+              <a:t>這裡要停一下，因為有一個坑：</a:t>
+            </a:r>
+            <a:r>
+              <a:rPr sz="1000" b="1" lang="zh-TW" dirty="0">
+                <a:solidFill>
+                  <a:srgbClr val="000000"/>
+                </a:solidFill>
+                <a:latin typeface="Arial Unicode MS"/>
+                <a:ea typeface="Arial Unicode MS"/>
+                <a:cs typeface="Arial Unicode MS"/>
+              </a:rPr>
+              <a:t>同樣是用斜線隔開的三個數字，意思可能完全不一樣。</a:t>
+            </a:r>
+            <a:r>
+              <a:rPr sz="1000" lang="zh-TW" dirty="0">
+                <a:solidFill>
+                  <a:srgbClr val="000000"/>
+                </a:solidFill>
+                <a:latin typeface="Arial Unicode MS"/>
+                <a:ea typeface="Arial Unicode MS"/>
+                <a:cs typeface="Arial Unicode MS"/>
+              </a:rPr>
+              <a:t>各位回頭看規格表最上面那兩行——Vertical Resolution 寫 </a:t>
+            </a:r>
+            <a:r>
+              <a:rPr sz="1000" b="1" lang="zh-TW" dirty="0">
+                <a:solidFill>
+                  <a:srgbClr val="000000"/>
+                </a:solidFill>
+                <a:latin typeface="Arial Unicode MS"/>
+                <a:ea typeface="Arial Unicode MS"/>
+                <a:cs typeface="Arial Unicode MS"/>
+              </a:rPr>
+              <a:t>32 / 64 / 128</a:t>
+            </a:r>
+            <a:r>
+              <a:rPr sz="1000" lang="zh-TW" dirty="0">
+                <a:solidFill>
+                  <a:srgbClr val="000000"/>
+                </a:solidFill>
+                <a:latin typeface="Arial Unicode MS"/>
+                <a:ea typeface="Arial Unicode MS"/>
+                <a:cs typeface="Arial Unicode MS"/>
+              </a:rPr>
+              <a:t>，Horizontal Resolution 寫 </a:t>
+            </a:r>
+            <a:r>
+              <a:rPr sz="1000" b="1" lang="zh-TW" dirty="0">
+                <a:solidFill>
+                  <a:srgbClr val="000000"/>
+                </a:solidFill>
+                <a:latin typeface="Arial Unicode MS"/>
+                <a:ea typeface="Arial Unicode MS"/>
+                <a:cs typeface="Arial Unicode MS"/>
+              </a:rPr>
+              <a:t>512 / 1024 / 2048</a:t>
+            </a:r>
+            <a:r>
+              <a:rPr sz="1000" lang="zh-TW" dirty="0">
+                <a:solidFill>
+                  <a:srgbClr val="000000"/>
+                </a:solidFill>
+                <a:latin typeface="Arial Unicode MS"/>
+                <a:ea typeface="Arial Unicode MS"/>
+                <a:cs typeface="Arial Unicode MS"/>
+              </a:rPr>
+              <a:t>。長得一模一樣，可是：上面那排是</a:t>
+            </a:r>
+            <a:r>
+              <a:rPr sz="1000" b="1" lang="zh-TW" dirty="0">
+                <a:solidFill>
+                  <a:srgbClr val="000000"/>
+                </a:solidFill>
+                <a:latin typeface="Arial Unicode MS"/>
+                <a:ea typeface="Arial Unicode MS"/>
+                <a:cs typeface="Arial Unicode MS"/>
+              </a:rPr>
+              <a:t>三種不同的產品</a:t>
+            </a:r>
+            <a:r>
+              <a:rPr sz="1000" lang="zh-TW" dirty="0">
+                <a:solidFill>
+                  <a:srgbClr val="000000"/>
+                </a:solidFill>
+                <a:latin typeface="Arial Unicode MS"/>
+                <a:ea typeface="Arial Unicode MS"/>
+                <a:cs typeface="Arial Unicode MS"/>
+              </a:rPr>
+              <a:t>，這份 datasheet 整個 OS1 家族共用，你買的這一顆是 OS1-64，另外兩個買不到；下面那排才是</a:t>
+            </a:r>
+            <a:r>
+              <a:rPr sz="1000" b="1" lang="zh-TW" dirty="0">
+                <a:solidFill>
+                  <a:srgbClr val="000000"/>
+                </a:solidFill>
+                <a:latin typeface="Arial Unicode MS"/>
+                <a:ea typeface="Arial Unicode MS"/>
+                <a:cs typeface="Arial Unicode MS"/>
+              </a:rPr>
+              <a:t>同一顆的三種模式</a:t>
+            </a:r>
+            <a:r>
+              <a:rPr sz="1000" lang="zh-TW" dirty="0">
+                <a:solidFill>
+                  <a:srgbClr val="000000"/>
+                </a:solidFill>
+                <a:latin typeface="Arial Unicode MS"/>
+                <a:ea typeface="Arial Unicode MS"/>
+                <a:cs typeface="Arial Unicode MS"/>
+              </a:rPr>
+              <a:t>，可以自己切。所以看到斜線先問一句：</a:t>
+            </a:r>
+            <a:r>
+              <a:rPr sz="1000" b="1" lang="zh-TW" dirty="0">
+                <a:solidFill>
+                  <a:srgbClr val="000000"/>
+                </a:solidFill>
+                <a:latin typeface="Arial Unicode MS"/>
+                <a:ea typeface="Arial Unicode MS"/>
+                <a:cs typeface="Arial Unicode MS"/>
+              </a:rPr>
+              <a:t>這是三種貨，還是一種貨的三個模式？</a:t>
+            </a:r>
+            <a:r>
+              <a:rPr sz="1000" lang="zh-TW" dirty="0">
                 <a:solidFill>
                   <a:srgbClr val="000000"/>
                 </a:solidFill>
@@ -3018,41 +2776,41 @@
                 <a:spcPts val="0"/>
               </a:spcBef>
               <a:spcAft>
-                <a:spcPts val="133"/>
+                <a:spcPts val="167"/>
               </a:spcAft>
             </a:pPr>
             <a:r>
-              <a:rPr sz="800" lang="zh-TW" dirty="0">
-                <a:solidFill>
-                  <a:srgbClr val="000000"/>
-                </a:solidFill>
-                <a:latin typeface="Arial Unicode MS"/>
-                <a:ea typeface="Arial Unicode MS"/>
-                <a:cs typeface="Arial Unicode MS"/>
-              </a:rPr>
-              <a:t>再看一個很容易讀漏的地方。第七張那張圖上，水平解析度和轉速後面都跟著同一個字：</a:t>
-            </a:r>
-            <a:r>
-              <a:rPr sz="800" b="1" lang="zh-TW" dirty="0">
-                <a:solidFill>
-                  <a:srgbClr val="000000"/>
-                </a:solidFill>
-                <a:latin typeface="Arial Unicode MS"/>
-                <a:ea typeface="Arial Unicode MS"/>
-                <a:cs typeface="Arial Unicode MS"/>
-              </a:rPr>
-              <a:t>configurable</a:t>
-            </a:r>
-            <a:r>
-              <a:rPr sz="800" lang="zh-TW" dirty="0">
-                <a:solidFill>
-                  <a:srgbClr val="000000"/>
-                </a:solidFill>
-                <a:latin typeface="Arial Unicode MS"/>
-                <a:ea typeface="Arial Unicode MS"/>
-                <a:cs typeface="Arial Unicode MS"/>
-              </a:rPr>
-              <a:t>，可以設定。
+              <a:rPr sz="1000" lang="zh-TW" dirty="0">
+                <a:solidFill>
+                  <a:srgbClr val="000000"/>
+                </a:solidFill>
+                <a:latin typeface="Arial Unicode MS"/>
+                <a:ea typeface="Arial Unicode MS"/>
+                <a:cs typeface="Arial Unicode MS"/>
+              </a:rPr>
+              <a:t>第六張那張表我算給各位看，四十公尺的機車身上，OS1 有九個點。那是在 1024 點一圈的模式下算的。切到 2048 點一圈，左右的點加倍，九個點就變成</a:t>
+            </a:r>
+            <a:r>
+              <a:rPr sz="1000" b="1" lang="zh-TW" dirty="0">
+                <a:solidFill>
+                  <a:srgbClr val="000000"/>
+                </a:solidFill>
+                <a:latin typeface="Arial Unicode MS"/>
+                <a:ea typeface="Arial Unicode MS"/>
+                <a:cs typeface="Arial Unicode MS"/>
+              </a:rPr>
+              <a:t>十八個點</a:t>
+            </a:r>
+            <a:r>
+              <a:rPr sz="1000" lang="zh-TW" dirty="0">
+                <a:solidFill>
+                  <a:srgbClr val="000000"/>
+                </a:solidFill>
+                <a:latin typeface="Arial Unicode MS"/>
+                <a:ea typeface="Arial Unicode MS"/>
+                <a:cs typeface="Arial Unicode MS"/>
+              </a:rPr>
+              <a:t>。
 </a:t>
             </a:r>
           </a:p>
@@ -3062,41 +2820,41 @@
                 <a:spcPts val="0"/>
               </a:spcBef>
               <a:spcAft>
-                <a:spcPts val="133"/>
+                <a:spcPts val="167"/>
               </a:spcAft>
             </a:pPr>
             <a:r>
-              <a:rPr sz="800" lang="zh-TW" dirty="0">
-                <a:solidFill>
-                  <a:srgbClr val="000000"/>
-                </a:solidFill>
-                <a:latin typeface="Arial Unicode MS"/>
-                <a:ea typeface="Arial Unicode MS"/>
-                <a:cs typeface="Arial Unicode MS"/>
-              </a:rPr>
-              <a:t>datasheet 後面幾頁就把可以設定的組合整個列出來，也就是左邊這一塊，</a:t>
-            </a:r>
-            <a:r>
-              <a:rPr sz="800" b="1" lang="zh-TW" dirty="0">
-                <a:solidFill>
-                  <a:srgbClr val="000000"/>
-                </a:solidFill>
-                <a:latin typeface="Arial Unicode MS"/>
-                <a:ea typeface="Arial Unicode MS"/>
-                <a:cs typeface="Arial Unicode MS"/>
-              </a:rPr>
-              <a:t>Lidar Operating Modes</a:t>
-            </a:r>
-            <a:r>
-              <a:rPr sz="800" lang="zh-TW" dirty="0">
-                <a:solidFill>
-                  <a:srgbClr val="000000"/>
-                </a:solidFill>
-                <a:latin typeface="Arial Unicode MS"/>
-                <a:ea typeface="Arial Unicode MS"/>
-                <a:cs typeface="Arial Unicode MS"/>
-              </a:rPr>
-              <a:t>。512 點一圈，可以配 10 Hz 或 20 Hz。1024 點一圈，也可以配 10 Hz 或 20 Hz。
+              <a:rPr sz="1000" lang="zh-TW" dirty="0">
+                <a:solidFill>
+                  <a:srgbClr val="000000"/>
+                </a:solidFill>
+                <a:latin typeface="Arial Unicode MS"/>
+                <a:ea typeface="Arial Unicode MS"/>
+                <a:cs typeface="Arial Unicode MS"/>
+              </a:rPr>
+              <a:t>同一顆硬體，同一個人站在同一個位置，設定不一樣，結果就差一倍。所以買之前要問清楚：</a:t>
+            </a:r>
+            <a:r>
+              <a:rPr sz="1000" b="1" lang="zh-TW" dirty="0">
+                <a:solidFill>
+                  <a:srgbClr val="000000"/>
+                </a:solidFill>
+                <a:latin typeface="Arial Unicode MS"/>
+                <a:ea typeface="Arial Unicode MS"/>
+                <a:cs typeface="Arial Unicode MS"/>
+              </a:rPr>
+              <a:t>廠商標的那個漂亮數字，是在哪一個模式下量的？</a:t>
+            </a:r>
+            <a:r>
+              <a:rPr sz="1000" lang="zh-TW" dirty="0">
+                <a:solidFill>
+                  <a:srgbClr val="000000"/>
+                </a:solidFill>
+                <a:latin typeface="Arial Unicode MS"/>
+                <a:ea typeface="Arial Unicode MS"/>
+                <a:cs typeface="Arial Unicode MS"/>
+              </a:rPr>
+              <a:t>跟剛剛那個反射率是同一種陷阱。
 </a:t>
             </a:r>
           </a:p>
@@ -3106,41 +2864,19 @@
                 <a:spcPts val="0"/>
               </a:spcBef>
               <a:spcAft>
-                <a:spcPts val="133"/>
+                <a:spcPts val="167"/>
               </a:spcAft>
             </a:pPr>
             <a:r>
-              <a:rPr sz="800" lang="zh-TW" dirty="0">
-                <a:solidFill>
-                  <a:srgbClr val="000000"/>
-                </a:solidFill>
-                <a:latin typeface="Arial Unicode MS"/>
-                <a:ea typeface="Arial Unicode MS"/>
-                <a:cs typeface="Arial Unicode MS"/>
-              </a:rPr>
-              <a:t>請各位特別看第三行：</a:t>
-            </a:r>
-            <a:r>
-              <a:rPr sz="800" b="1" lang="zh-TW" dirty="0">
-                <a:solidFill>
-                  <a:srgbClr val="000000"/>
-                </a:solidFill>
-                <a:latin typeface="Arial Unicode MS"/>
-                <a:ea typeface="Arial Unicode MS"/>
-                <a:cs typeface="Arial Unicode MS"/>
-              </a:rPr>
-              <a:t>x 2048，只有 @ 10 Hz</a:t>
-            </a:r>
-            <a:r>
-              <a:rPr sz="800" lang="zh-TW" dirty="0">
-                <a:solidFill>
-                  <a:srgbClr val="000000"/>
-                </a:solidFill>
-                <a:latin typeface="Arial Unicode MS"/>
-                <a:ea typeface="Arial Unicode MS"/>
-                <a:cs typeface="Arial Unicode MS"/>
-              </a:rPr>
-              <a:t>。想要最密的點，就不能跑 20 Hz。廠商自己把這件事寫在表上了——要最密，就得轉慢一點。
+              <a:rPr sz="1000" lang="zh-TW" dirty="0">
+                <a:solidFill>
+                  <a:srgbClr val="000000"/>
+                </a:solidFill>
+                <a:latin typeface="Arial Unicode MS"/>
+                <a:ea typeface="Arial Unicode MS"/>
+                <a:cs typeface="Arial Unicode MS"/>
+              </a:rPr>
+              <a:t>第三節上機的時候，我會請各位親自切一次。工具上的判定會從「不夠用」變成「夠用」，只是換了一個模式，什麼錢都沒多花。
 </a:t>
             </a:r>
           </a:p>
@@ -3150,319 +2886,11 @@
                 <a:spcPts val="0"/>
               </a:spcBef>
               <a:spcAft>
-                <a:spcPts val="133"/>
+                <a:spcPts val="167"/>
               </a:spcAft>
             </a:pPr>
             <a:r>
-              <a:rPr sz="800" lang="zh-TW" dirty="0">
-                <a:solidFill>
-                  <a:srgbClr val="000000"/>
-                </a:solidFill>
-                <a:latin typeface="Arial Unicode MS"/>
-                <a:ea typeface="Arial Unicode MS"/>
-                <a:cs typeface="Arial Unicode MS"/>
-              </a:rPr>
-              <a:t>這代表什麼？代表</a:t>
-            </a:r>
-            <a:r>
-              <a:rPr sz="800" b="1" lang="zh-TW" dirty="0">
-                <a:solidFill>
-                  <a:srgbClr val="000000"/>
-                </a:solidFill>
-                <a:latin typeface="Arial Unicode MS"/>
-                <a:ea typeface="Arial Unicode MS"/>
-                <a:cs typeface="Arial Unicode MS"/>
-              </a:rPr>
-              <a:t>同一顆光達，你買回來之後還可以選模式</a:t>
-            </a:r>
-            <a:r>
-              <a:rPr sz="800" lang="zh-TW" dirty="0">
-                <a:solidFill>
-                  <a:srgbClr val="000000"/>
-                </a:solidFill>
-                <a:latin typeface="Arial Unicode MS"/>
-                <a:ea typeface="Arial Unicode MS"/>
-                <a:cs typeface="Arial Unicode MS"/>
-              </a:rPr>
-              <a:t>。
-</a:t>
-            </a:r>
-          </a:p>
-          <a:p>
-            <a:pPr algn="l">
-              <a:spcBef>
-                <a:spcPts val="0"/>
-              </a:spcBef>
-              <a:spcAft>
-                <a:spcPts val="133"/>
-              </a:spcAft>
-            </a:pPr>
-            <a:r>
-              <a:rPr sz="800" lang="zh-TW" dirty="0">
-                <a:solidFill>
-                  <a:srgbClr val="000000"/>
-                </a:solidFill>
-                <a:latin typeface="Arial Unicode MS"/>
-                <a:ea typeface="Arial Unicode MS"/>
-                <a:cs typeface="Arial Unicode MS"/>
-              </a:rPr>
-              <a:t>這裡要停一下，因為有一個坑：</a:t>
-            </a:r>
-            <a:r>
-              <a:rPr sz="800" b="1" lang="zh-TW" dirty="0">
-                <a:solidFill>
-                  <a:srgbClr val="000000"/>
-                </a:solidFill>
-                <a:latin typeface="Arial Unicode MS"/>
-                <a:ea typeface="Arial Unicode MS"/>
-                <a:cs typeface="Arial Unicode MS"/>
-              </a:rPr>
-              <a:t>同樣是用斜線隔開的三個數字，意思可能完全不一樣。</a:t>
-            </a:r>
-            <a:r>
-              <a:rPr sz="800" lang="zh-TW" dirty="0">
-                <a:solidFill>
-                  <a:srgbClr val="000000"/>
-                </a:solidFill>
-                <a:latin typeface="Arial Unicode MS"/>
-                <a:ea typeface="Arial Unicode MS"/>
-                <a:cs typeface="Arial Unicode MS"/>
-              </a:rPr>
-              <a:t>各位回頭看規格表最上面那兩行——Vertical Resolution 寫 </a:t>
-            </a:r>
-            <a:r>
-              <a:rPr sz="800" b="1" lang="zh-TW" dirty="0">
-                <a:solidFill>
-                  <a:srgbClr val="000000"/>
-                </a:solidFill>
-                <a:latin typeface="Arial Unicode MS"/>
-                <a:ea typeface="Arial Unicode MS"/>
-                <a:cs typeface="Arial Unicode MS"/>
-              </a:rPr>
-              <a:t>32 / 64 / 128</a:t>
-            </a:r>
-            <a:r>
-              <a:rPr sz="800" lang="zh-TW" dirty="0">
-                <a:solidFill>
-                  <a:srgbClr val="000000"/>
-                </a:solidFill>
-                <a:latin typeface="Arial Unicode MS"/>
-                <a:ea typeface="Arial Unicode MS"/>
-                <a:cs typeface="Arial Unicode MS"/>
-              </a:rPr>
-              <a:t>，Horizontal Resolution 寫 </a:t>
-            </a:r>
-            <a:r>
-              <a:rPr sz="800" b="1" lang="zh-TW" dirty="0">
-                <a:solidFill>
-                  <a:srgbClr val="000000"/>
-                </a:solidFill>
-                <a:latin typeface="Arial Unicode MS"/>
-                <a:ea typeface="Arial Unicode MS"/>
-                <a:cs typeface="Arial Unicode MS"/>
-              </a:rPr>
-              <a:t>512 / 1024 / 2048</a:t>
-            </a:r>
-            <a:r>
-              <a:rPr sz="800" lang="zh-TW" dirty="0">
-                <a:solidFill>
-                  <a:srgbClr val="000000"/>
-                </a:solidFill>
-                <a:latin typeface="Arial Unicode MS"/>
-                <a:ea typeface="Arial Unicode MS"/>
-                <a:cs typeface="Arial Unicode MS"/>
-              </a:rPr>
-              <a:t>。長得一模一樣，可是：上面那排是</a:t>
-            </a:r>
-            <a:r>
-              <a:rPr sz="800" b="1" lang="zh-TW" dirty="0">
-                <a:solidFill>
-                  <a:srgbClr val="000000"/>
-                </a:solidFill>
-                <a:latin typeface="Arial Unicode MS"/>
-                <a:ea typeface="Arial Unicode MS"/>
-                <a:cs typeface="Arial Unicode MS"/>
-              </a:rPr>
-              <a:t>三種不同的產品</a:t>
-            </a:r>
-            <a:r>
-              <a:rPr sz="800" lang="zh-TW" dirty="0">
-                <a:solidFill>
-                  <a:srgbClr val="000000"/>
-                </a:solidFill>
-                <a:latin typeface="Arial Unicode MS"/>
-                <a:ea typeface="Arial Unicode MS"/>
-                <a:cs typeface="Arial Unicode MS"/>
-              </a:rPr>
-              <a:t>，這份 datasheet 整個 OS1 家族共用，你買的這一顆是 OS1-64，另外兩個買不到；下面那排才是</a:t>
-            </a:r>
-            <a:r>
-              <a:rPr sz="800" b="1" lang="zh-TW" dirty="0">
-                <a:solidFill>
-                  <a:srgbClr val="000000"/>
-                </a:solidFill>
-                <a:latin typeface="Arial Unicode MS"/>
-                <a:ea typeface="Arial Unicode MS"/>
-                <a:cs typeface="Arial Unicode MS"/>
-              </a:rPr>
-              <a:t>同一顆的三種模式</a:t>
-            </a:r>
-            <a:r>
-              <a:rPr sz="800" lang="zh-TW" dirty="0">
-                <a:solidFill>
-                  <a:srgbClr val="000000"/>
-                </a:solidFill>
-                <a:latin typeface="Arial Unicode MS"/>
-                <a:ea typeface="Arial Unicode MS"/>
-                <a:cs typeface="Arial Unicode MS"/>
-              </a:rPr>
-              <a:t>，可以自己切。所以看到斜線先問一句：</a:t>
-            </a:r>
-            <a:r>
-              <a:rPr sz="800" b="1" lang="zh-TW" dirty="0">
-                <a:solidFill>
-                  <a:srgbClr val="000000"/>
-                </a:solidFill>
-                <a:latin typeface="Arial Unicode MS"/>
-                <a:ea typeface="Arial Unicode MS"/>
-                <a:cs typeface="Arial Unicode MS"/>
-              </a:rPr>
-              <a:t>這是三種貨，還是一種貨的三個模式？</a:t>
-            </a:r>
-            <a:r>
-              <a:rPr sz="800" lang="zh-TW" dirty="0">
-                <a:solidFill>
-                  <a:srgbClr val="000000"/>
-                </a:solidFill>
-                <a:latin typeface="Arial Unicode MS"/>
-                <a:ea typeface="Arial Unicode MS"/>
-                <a:cs typeface="Arial Unicode MS"/>
-              </a:rPr>
-              <a:t>
-</a:t>
-            </a:r>
-          </a:p>
-          <a:p>
-            <a:pPr algn="l">
-              <a:spcBef>
-                <a:spcPts val="0"/>
-              </a:spcBef>
-              <a:spcAft>
-                <a:spcPts val="133"/>
-              </a:spcAft>
-            </a:pPr>
-            <a:r>
-              <a:rPr sz="800" lang="zh-TW" dirty="0">
-                <a:solidFill>
-                  <a:srgbClr val="000000"/>
-                </a:solidFill>
-                <a:latin typeface="Arial Unicode MS"/>
-                <a:ea typeface="Arial Unicode MS"/>
-                <a:cs typeface="Arial Unicode MS"/>
-              </a:rPr>
-              <a:t>第六張那張表我算給各位看，四十公尺的機車身上，OS1 有九個點。那是在 1024 點一圈的模式下算的。切到 2048 點一圈，左右的點加倍，九個點就變成</a:t>
-            </a:r>
-            <a:r>
-              <a:rPr sz="800" b="1" lang="zh-TW" dirty="0">
-                <a:solidFill>
-                  <a:srgbClr val="000000"/>
-                </a:solidFill>
-                <a:latin typeface="Arial Unicode MS"/>
-                <a:ea typeface="Arial Unicode MS"/>
-                <a:cs typeface="Arial Unicode MS"/>
-              </a:rPr>
-              <a:t>十八個點</a:t>
-            </a:r>
-            <a:r>
-              <a:rPr sz="800" lang="zh-TW" dirty="0">
-                <a:solidFill>
-                  <a:srgbClr val="000000"/>
-                </a:solidFill>
-                <a:latin typeface="Arial Unicode MS"/>
-                <a:ea typeface="Arial Unicode MS"/>
-                <a:cs typeface="Arial Unicode MS"/>
-              </a:rPr>
-              <a:t>。
-</a:t>
-            </a:r>
-          </a:p>
-          <a:p>
-            <a:pPr algn="l">
-              <a:spcBef>
-                <a:spcPts val="0"/>
-              </a:spcBef>
-              <a:spcAft>
-                <a:spcPts val="133"/>
-              </a:spcAft>
-            </a:pPr>
-            <a:r>
-              <a:rPr sz="800" lang="zh-TW" dirty="0">
-                <a:solidFill>
-                  <a:srgbClr val="000000"/>
-                </a:solidFill>
-                <a:latin typeface="Arial Unicode MS"/>
-                <a:ea typeface="Arial Unicode MS"/>
-                <a:cs typeface="Arial Unicode MS"/>
-              </a:rPr>
-              <a:t>同一顆硬體，同一個人站在同一個位置，設定不一樣，結果就差一倍。所以買之前要問清楚：</a:t>
-            </a:r>
-            <a:r>
-              <a:rPr sz="800" b="1" lang="zh-TW" dirty="0">
-                <a:solidFill>
-                  <a:srgbClr val="000000"/>
-                </a:solidFill>
-                <a:latin typeface="Arial Unicode MS"/>
-                <a:ea typeface="Arial Unicode MS"/>
-                <a:cs typeface="Arial Unicode MS"/>
-              </a:rPr>
-              <a:t>廠商標的那個漂亮數字，是在哪一個模式下量的？</a:t>
-            </a:r>
-            <a:r>
-              <a:rPr sz="800" lang="zh-TW" dirty="0">
-                <a:solidFill>
-                  <a:srgbClr val="000000"/>
-                </a:solidFill>
-                <a:latin typeface="Arial Unicode MS"/>
-                <a:ea typeface="Arial Unicode MS"/>
-                <a:cs typeface="Arial Unicode MS"/>
-              </a:rPr>
-              <a:t>跟剛剛那個反射率是同一種陷阱。
-</a:t>
-            </a:r>
-          </a:p>
-          <a:p>
-            <a:pPr algn="l">
-              <a:spcBef>
-                <a:spcPts val="0"/>
-              </a:spcBef>
-              <a:spcAft>
-                <a:spcPts val="133"/>
-              </a:spcAft>
-            </a:pPr>
-            <a:r>
-              <a:rPr sz="800" lang="zh-TW" dirty="0">
-                <a:solidFill>
-                  <a:srgbClr val="000000"/>
-                </a:solidFill>
-                <a:latin typeface="Arial Unicode MS"/>
-                <a:ea typeface="Arial Unicode MS"/>
-                <a:cs typeface="Arial Unicode MS"/>
-              </a:rPr>
-              <a:t>第三節上機的時候，我會請各位親自切一次。工具上的判定會從「不夠用」變成「夠用」，只是換了一個模式，什麼錢都沒多花。
-</a:t>
-            </a:r>
-          </a:p>
-          <a:p>
-            <a:pPr algn="l">
-              <a:spcBef>
-                <a:spcPts val="0"/>
-              </a:spcBef>
-              <a:spcAft>
-                <a:spcPts val="133"/>
-              </a:spcAft>
-            </a:pPr>
-            <a:r>
-              <a:rPr sz="800" lang="zh-TW" dirty="0">
+              <a:rPr sz="1000" lang="zh-TW" dirty="0">
                 <a:solidFill>
                   <a:srgbClr val="000000"/>
                 </a:solidFill>
@@ -3579,30 +3007,41 @@
                 <a:spcPts val="0"/>
               </a:spcBef>
               <a:spcAft>
-                <a:spcPts val="133"/>
+                <a:spcPts val="142"/>
               </a:spcAft>
             </a:pPr>
             <a:r>
-              <a:rPr sz="800" b="1" lang="zh-TW" dirty="0">
-                <a:solidFill>
-                  <a:srgbClr val="000000"/>
-                </a:solidFill>
-                <a:latin typeface="Arial Unicode MS"/>
-                <a:ea typeface="Arial Unicode MS"/>
-                <a:cs typeface="Arial Unicode MS"/>
-              </a:rPr>
-              <a:t>▍這一張要做什麼</a:t>
-            </a:r>
-            <a:r>
-              <a:rPr sz="800" lang="zh-TW" dirty="0">
-                <a:solidFill>
-                  <a:srgbClr val="000000"/>
-                </a:solidFill>
-                <a:latin typeface="Arial Unicode MS"/>
-                <a:ea typeface="Arial Unicode MS"/>
-                <a:cs typeface="Arial Unicode MS"/>
-              </a:rPr>
-              <a:t>
+              <a:rPr sz="850" lang="zh-TW" dirty="0">
+                <a:solidFill>
+                  <a:srgbClr val="000000"/>
+                </a:solidFill>
+                <a:latin typeface="Arial Unicode MS"/>
+                <a:ea typeface="Arial Unicode MS"/>
+                <a:cs typeface="Arial Unicode MS"/>
+              </a:rPr>
+              <a:t>回到剛剛請大家圈起來的那一行。左邊是 OS1 規格表上真正的那兩行，測距寫了</a:t>
+            </a:r>
+            <a:r>
+              <a:rPr sz="850" b="1" lang="zh-TW" dirty="0">
+                <a:solidFill>
+                  <a:srgbClr val="000000"/>
+                </a:solidFill>
+                <a:latin typeface="Arial Unicode MS"/>
+                <a:ea typeface="Arial Unicode MS"/>
+                <a:cs typeface="Arial Unicode MS"/>
+              </a:rPr>
+              <a:t>兩個數字</a:t>
+            </a:r>
+            <a:r>
+              <a:rPr sz="850" lang="zh-TW" dirty="0">
+                <a:solidFill>
+                  <a:srgbClr val="000000"/>
+                </a:solidFill>
+                <a:latin typeface="Arial Unicode MS"/>
+                <a:ea typeface="Arial Unicode MS"/>
+                <a:cs typeface="Arial Unicode MS"/>
+              </a:rPr>
+              <a:t>。
 </a:t>
             </a:r>
           </a:p>
@@ -3612,19 +3051,63 @@
                 <a:spcPts val="0"/>
               </a:spcBef>
               <a:spcAft>
-                <a:spcPts val="133"/>
+                <a:spcPts val="142"/>
               </a:spcAft>
             </a:pPr>
             <a:r>
-              <a:rPr sz="800" lang="zh-TW" dirty="0">
-                <a:solidFill>
-                  <a:srgbClr val="000000"/>
-                </a:solidFill>
-                <a:latin typeface="Arial Unicode MS"/>
-                <a:ea typeface="Arial Unicode MS"/>
-                <a:cs typeface="Arial Unicode MS"/>
-              </a:rPr>
-              <a:t>同一顆光達兩個測距：讓學生在真的 datasheet 上看到 170 與 90 後面那串小字。最後補一句光達看的是紅外線、不是顏色。
+              <a:rPr sz="850" lang="zh-TW" dirty="0">
+                <a:solidFill>
+                  <a:srgbClr val="000000"/>
+                </a:solidFill>
+                <a:latin typeface="Arial Unicode MS"/>
+                <a:ea typeface="Arial Unicode MS"/>
+                <a:cs typeface="Arial Unicode MS"/>
+              </a:rPr>
+              <a:t>第一個 170 公尺，括號裡是 </a:t>
+            </a:r>
+            <a:r>
+              <a:rPr sz="850" b="1" lang="zh-TW" dirty="0">
+                <a:solidFill>
+                  <a:srgbClr val="000000"/>
+                </a:solidFill>
+                <a:latin typeface="Arial Unicode MS"/>
+                <a:ea typeface="Arial Unicode MS"/>
+                <a:cs typeface="Arial Unicode MS"/>
+              </a:rPr>
+              <a:t>80% Lambertian reflectivity</a:t>
+            </a:r>
+            <a:r>
+              <a:rPr sz="850" lang="zh-TW" dirty="0">
+                <a:solidFill>
+                  <a:srgbClr val="000000"/>
+                </a:solidFill>
+                <a:latin typeface="Arial Unicode MS"/>
+                <a:ea typeface="Arial Unicode MS"/>
+                <a:cs typeface="Arial Unicode MS"/>
+              </a:rPr>
+              <a:t>；第二個 90 公尺，括號裡是 </a:t>
+            </a:r>
+            <a:r>
+              <a:rPr sz="850" b="1" lang="zh-TW" dirty="0">
+                <a:solidFill>
+                  <a:srgbClr val="000000"/>
+                </a:solidFill>
+                <a:latin typeface="Arial Unicode MS"/>
+                <a:ea typeface="Arial Unicode MS"/>
+                <a:cs typeface="Arial Unicode MS"/>
+              </a:rPr>
+              <a:t>10%</a:t>
+            </a:r>
+            <a:r>
+              <a:rPr sz="850" lang="zh-TW" dirty="0">
+                <a:solidFill>
+                  <a:srgbClr val="000000"/>
+                </a:solidFill>
+                <a:latin typeface="Arial Unicode MS"/>
+                <a:ea typeface="Arial Unicode MS"/>
+                <a:cs typeface="Arial Unicode MS"/>
+              </a:rPr>
+              <a:t>。反射率的意思是：打出去的光，有幾成彈回來。
 </a:t>
             </a:r>
           </a:p>
@@ -3634,30 +3117,41 @@
                 <a:spcPts val="0"/>
               </a:spcBef>
               <a:spcAft>
-                <a:spcPts val="133"/>
+                <a:spcPts val="142"/>
               </a:spcAft>
             </a:pPr>
             <a:r>
-              <a:rPr sz="800" b="1" lang="zh-TW" dirty="0">
-                <a:solidFill>
-                  <a:srgbClr val="000000"/>
-                </a:solidFill>
-                <a:latin typeface="Arial Unicode MS"/>
-                <a:ea typeface="Arial Unicode MS"/>
-                <a:cs typeface="Arial Unicode MS"/>
-              </a:rPr>
-              <a:t>▍畫面上圈這裡</a:t>
-            </a:r>
-            <a:r>
-              <a:rPr sz="800" lang="zh-TW" dirty="0">
-                <a:solidFill>
-                  <a:srgbClr val="000000"/>
-                </a:solidFill>
-                <a:latin typeface="Arial Unicode MS"/>
-                <a:ea typeface="Arial Unicode MS"/>
-                <a:cs typeface="Arial Unicode MS"/>
-              </a:rPr>
-              <a:t>
+              <a:rPr sz="850" lang="zh-TW" dirty="0">
+                <a:solidFill>
+                  <a:srgbClr val="000000"/>
+                </a:solidFill>
+                <a:latin typeface="Arial Unicode MS"/>
+                <a:ea typeface="Arial Unicode MS"/>
+                <a:cs typeface="Arial Unicode MS"/>
+              </a:rPr>
+              <a:t>百分之八十是淺色、會把光均勻散回來的東西——白色的車、淺色的牆、水泥路面。百分之十是深色、吃光的東西——黑色的車、深色的雨衣、柏油路面。所以同一顆光達，看白色的車看得到一百七十公尺，看黑色的車只剩九十公尺，</a:t>
+            </a:r>
+            <a:r>
+              <a:rPr sz="850" b="1" lang="zh-TW" dirty="0">
+                <a:solidFill>
+                  <a:srgbClr val="000000"/>
+                </a:solidFill>
+                <a:latin typeface="Arial Unicode MS"/>
+                <a:ea typeface="Arial Unicode MS"/>
+                <a:cs typeface="Arial Unicode MS"/>
+              </a:rPr>
+              <a:t>差了將近一倍</a:t>
+            </a:r>
+            <a:r>
+              <a:rPr sz="850" lang="zh-TW" dirty="0">
+                <a:solidFill>
+                  <a:srgbClr val="000000"/>
+                </a:solidFill>
+                <a:latin typeface="Arial Unicode MS"/>
+                <a:ea typeface="Arial Unicode MS"/>
+                <a:cs typeface="Arial Unicode MS"/>
+              </a:rPr>
+              <a:t>。
 </a:t>
             </a:r>
           </a:p>
@@ -3667,19 +3161,41 @@
                 <a:spcPts val="0"/>
               </a:spcBef>
               <a:spcAft>
-                <a:spcPts val="133"/>
+                <a:spcPts val="142"/>
               </a:spcAft>
             </a:pPr>
             <a:r>
-              <a:rPr sz="800" lang="zh-TW" dirty="0">
-                <a:solidFill>
-                  <a:srgbClr val="000000"/>
-                </a:solidFill>
-                <a:latin typeface="Arial Unicode MS"/>
-                <a:ea typeface="Arial Unicode MS"/>
-                <a:cs typeface="Arial Unicode MS"/>
-              </a:rPr>
-              <a:t>先圈兩個括號 80%／10% Lambertian reflectivity 與 170 m／90 m；再把後面那串條件一個一個圈：1024 @ 10 Hz mode、&gt;90% detection probability、100 klx sunlight。四個條件要數得出來。
+              <a:rPr sz="850" lang="zh-TW" dirty="0">
+                <a:solidFill>
+                  <a:srgbClr val="000000"/>
+                </a:solidFill>
+                <a:latin typeface="Arial Unicode MS"/>
+                <a:ea typeface="Arial Unicode MS"/>
+                <a:cs typeface="Arial Unicode MS"/>
+              </a:rPr>
+              <a:t>不過這裡要補一件事，不然各位會記成錯的：</a:t>
+            </a:r>
+            <a:r>
+              <a:rPr sz="850" b="1" lang="zh-TW" dirty="0">
+                <a:solidFill>
+                  <a:srgbClr val="000000"/>
+                </a:solidFill>
+                <a:latin typeface="Arial Unicode MS"/>
+                <a:ea typeface="Arial Unicode MS"/>
+                <a:cs typeface="Arial Unicode MS"/>
+              </a:rPr>
+              <a:t>光達看的其實不是顏色</a:t>
+            </a:r>
+            <a:r>
+              <a:rPr sz="850" lang="zh-TW" dirty="0">
+                <a:solidFill>
+                  <a:srgbClr val="000000"/>
+                </a:solidFill>
+                <a:latin typeface="Arial Unicode MS"/>
+                <a:ea typeface="Arial Unicode MS"/>
+                <a:cs typeface="Arial Unicode MS"/>
+              </a:rPr>
+              <a:t>。它只打一個波長——OS1 是 865 奈米的紅外線，AT128P 是 905 奈米。它量的是「我打出去那個波長，回來多少」，跟人眼看到的深淺只是大概相關。樹葉在我們眼裡是深綠色，在紅外線下卻很亮；有些黑色車漆看起來一樣黑，對紅外線卻反得特別好。業界現在真的在做「對光達友善的黑漆」——可見光反射率不到一成，看起來還是黑的，紅外線卻反回六成以上。
 </a:t>
             </a:r>
           </a:p>
@@ -3689,30 +3205,250 @@
                 <a:spcPts val="0"/>
               </a:spcBef>
               <a:spcAft>
-                <a:spcPts val="133"/>
+                <a:spcPts val="142"/>
               </a:spcAft>
             </a:pPr>
             <a:r>
-              <a:rPr sz="800" b="1" lang="zh-TW" dirty="0">
-                <a:solidFill>
-                  <a:srgbClr val="000000"/>
-                </a:solidFill>
-                <a:latin typeface="Arial Unicode MS"/>
-                <a:ea typeface="Arial Unicode MS"/>
-                <a:cs typeface="Arial Unicode MS"/>
-              </a:rPr>
-              <a:t>▍以下照著唸</a:t>
-            </a:r>
-            <a:r>
-              <a:rPr sz="800" lang="zh-TW" dirty="0">
-                <a:solidFill>
-                  <a:srgbClr val="000000"/>
-                </a:solidFill>
-                <a:latin typeface="Arial Unicode MS"/>
-                <a:ea typeface="Arial Unicode MS"/>
-                <a:cs typeface="Arial Unicode MS"/>
-              </a:rPr>
-              <a:t>
+              <a:rPr sz="850" lang="zh-TW" dirty="0">
+                <a:solidFill>
+                  <a:srgbClr val="000000"/>
+                </a:solidFill>
+                <a:latin typeface="Arial Unicode MS"/>
+                <a:ea typeface="Arial Unicode MS"/>
+                <a:cs typeface="Arial Unicode MS"/>
+              </a:rPr>
+              <a:t>還有一件事，各位看那兩行的</a:t>
+            </a:r>
+            <a:r>
+              <a:rPr sz="850" b="1" lang="zh-TW" dirty="0">
+                <a:solidFill>
+                  <a:srgbClr val="000000"/>
+                </a:solidFill>
+                <a:latin typeface="Arial Unicode MS"/>
+                <a:ea typeface="Arial Unicode MS"/>
+                <a:cs typeface="Arial Unicode MS"/>
+              </a:rPr>
+              <a:t>後面</a:t>
+            </a:r>
+            <a:r>
+              <a:rPr sz="850" lang="zh-TW" dirty="0">
+                <a:solidFill>
+                  <a:srgbClr val="000000"/>
+                </a:solidFill>
+                <a:latin typeface="Arial Unicode MS"/>
+                <a:ea typeface="Arial Unicode MS"/>
+                <a:cs typeface="Arial Unicode MS"/>
+              </a:rPr>
+              <a:t>——它不是只寫一個公尺數，後面還跟著一串條件。</a:t>
+            </a:r>
+            <a:r>
+              <a:rPr sz="850" b="1" lang="zh-TW" dirty="0">
+                <a:solidFill>
+                  <a:srgbClr val="000000"/>
+                </a:solidFill>
+                <a:latin typeface="Arial Unicode MS"/>
+                <a:ea typeface="Arial Unicode MS"/>
+                <a:cs typeface="Arial Unicode MS"/>
+              </a:rPr>
+              <a:t>Lambertian</a:t>
+            </a:r>
+            <a:r>
+              <a:rPr sz="850" lang="zh-TW" dirty="0">
+                <a:solidFill>
+                  <a:srgbClr val="000000"/>
+                </a:solidFill>
+                <a:latin typeface="Arial Unicode MS"/>
+                <a:ea typeface="Arial Unicode MS"/>
+                <a:cs typeface="Arial Unicode MS"/>
+              </a:rPr>
+              <a:t>，意思是「均勻散回來的表面」，鏡子和反光背心都不算，那兩種第二節會講。</a:t>
+            </a:r>
+            <a:r>
+              <a:rPr sz="850" b="1" lang="zh-TW" dirty="0">
+                <a:solidFill>
+                  <a:srgbClr val="000000"/>
+                </a:solidFill>
+                <a:latin typeface="Arial Unicode MS"/>
+                <a:ea typeface="Arial Unicode MS"/>
+                <a:cs typeface="Arial Unicode MS"/>
+              </a:rPr>
+              <a:t>1024 @ 10 Hz mode</a:t>
+            </a:r>
+            <a:r>
+              <a:rPr sz="850" lang="zh-TW" dirty="0">
+                <a:solidFill>
+                  <a:srgbClr val="000000"/>
+                </a:solidFill>
+                <a:latin typeface="Arial Unicode MS"/>
+                <a:ea typeface="Arial Unicode MS"/>
+                <a:cs typeface="Arial Unicode MS"/>
+              </a:rPr>
+              <a:t>，是用哪一個模式量的；換成 2048 點或 20 赫茲，這個數字就不是這個數字了——這就是第十二張講的「可設定」。</a:t>
+            </a:r>
+            <a:r>
+              <a:rPr sz="850" b="1" lang="zh-TW" dirty="0">
+                <a:solidFill>
+                  <a:srgbClr val="000000"/>
+                </a:solidFill>
+                <a:latin typeface="Arial Unicode MS"/>
+                <a:ea typeface="Arial Unicode MS"/>
+                <a:cs typeface="Arial Unicode MS"/>
+              </a:rPr>
+              <a:t>&gt;90% detection probability</a:t>
+            </a:r>
+            <a:r>
+              <a:rPr sz="850" lang="zh-TW" dirty="0">
+                <a:solidFill>
+                  <a:srgbClr val="000000"/>
+                </a:solidFill>
+                <a:latin typeface="Arial Unicode MS"/>
+                <a:ea typeface="Arial Unicode MS"/>
+                <a:cs typeface="Arial Unicode MS"/>
+              </a:rPr>
+              <a:t>，這個最多人漏掉：</a:t>
+            </a:r>
+            <a:r>
+              <a:rPr sz="850" b="1" lang="zh-TW" dirty="0">
+                <a:solidFill>
+                  <a:srgbClr val="000000"/>
+                </a:solidFill>
+                <a:latin typeface="Arial Unicode MS"/>
+                <a:ea typeface="Arial Unicode MS"/>
+                <a:cs typeface="Arial Unicode MS"/>
+              </a:rPr>
+              <a:t>它不是保證看得到，是十次裡面超過九次看得到。</a:t>
+            </a:r>
+            <a:r>
+              <a:rPr sz="850" b="1" lang="zh-TW" dirty="0">
+                <a:solidFill>
+                  <a:srgbClr val="000000"/>
+                </a:solidFill>
+                <a:latin typeface="Arial Unicode MS"/>
+                <a:ea typeface="Arial Unicode MS"/>
+                <a:cs typeface="Arial Unicode MS"/>
+              </a:rPr>
+              <a:t>100 klx sunlight</a:t>
+            </a:r>
+            <a:r>
+              <a:rPr sz="850" lang="zh-TW" dirty="0">
+                <a:solidFill>
+                  <a:srgbClr val="000000"/>
+                </a:solidFill>
+                <a:latin typeface="Arial Unicode MS"/>
+                <a:ea typeface="Arial Unicode MS"/>
+                <a:cs typeface="Arial Unicode MS"/>
+              </a:rPr>
+              <a:t>，十萬勒克斯，正午直射的大太陽——陰天大概一萬，室內只有五百，所以十萬是最亮的情況。為什麼要寫這個？因為</a:t>
+            </a:r>
+            <a:r>
+              <a:rPr sz="850" b="1" lang="zh-TW" dirty="0">
+                <a:solidFill>
+                  <a:srgbClr val="000000"/>
+                </a:solidFill>
+                <a:latin typeface="Arial Unicode MS"/>
+                <a:ea typeface="Arial Unicode MS"/>
+                <a:cs typeface="Arial Unicode MS"/>
+              </a:rPr>
+              <a:t>陽光裡面也有 865 奈米</a:t>
+            </a:r>
+            <a:r>
+              <a:rPr sz="850" lang="zh-TW" dirty="0">
+                <a:solidFill>
+                  <a:srgbClr val="000000"/>
+                </a:solidFill>
+                <a:latin typeface="Arial Unicode MS"/>
+                <a:ea typeface="Arial Unicode MS"/>
+                <a:cs typeface="Arial Unicode MS"/>
+              </a:rPr>
+              <a:t>。接收器不會分那個光子是誰打出去的，陽光一起進來就變成背景，雷射那一下要從背景裡</a:t>
+            </a:r>
+            <a:r>
+              <a:rPr sz="850" b="1" lang="zh-TW" dirty="0">
+                <a:solidFill>
+                  <a:srgbClr val="000000"/>
+                </a:solidFill>
+                <a:latin typeface="Arial Unicode MS"/>
+                <a:ea typeface="Arial Unicode MS"/>
+                <a:cs typeface="Arial Unicode MS"/>
+              </a:rPr>
+              <a:t>冒得出來</a:t>
+            </a:r>
+            <a:r>
+              <a:rPr sz="850" lang="zh-TW" dirty="0">
+                <a:solidFill>
+                  <a:srgbClr val="000000"/>
+                </a:solidFill>
+                <a:latin typeface="Arial Unicode MS"/>
+                <a:ea typeface="Arial Unicode MS"/>
+                <a:cs typeface="Arial Unicode MS"/>
+              </a:rPr>
+              <a:t>才算數。所以</a:t>
+            </a:r>
+            <a:r>
+              <a:rPr sz="850" b="1" lang="zh-TW" dirty="0">
+                <a:solidFill>
+                  <a:srgbClr val="000000"/>
+                </a:solidFill>
+                <a:latin typeface="Arial Unicode MS"/>
+                <a:ea typeface="Arial Unicode MS"/>
+                <a:cs typeface="Arial Unicode MS"/>
+              </a:rPr>
+              <a:t>太陽愈大，光達看得愈近</a:t>
+            </a:r>
+            <a:r>
+              <a:rPr sz="850" lang="zh-TW" dirty="0">
+                <a:solidFill>
+                  <a:srgbClr val="000000"/>
+                </a:solidFill>
+                <a:latin typeface="Arial Unicode MS"/>
+                <a:ea typeface="Arial Unicode MS"/>
+                <a:cs typeface="Arial Unicode MS"/>
+              </a:rPr>
+              <a:t>。這跟第八張那支影片剛好相反：相機沒光就瞎，光達是</a:t>
+            </a:r>
+            <a:r>
+              <a:rPr sz="850" b="1" lang="zh-TW" dirty="0">
+                <a:solidFill>
+                  <a:srgbClr val="000000"/>
+                </a:solidFill>
+                <a:latin typeface="Arial Unicode MS"/>
+                <a:ea typeface="Arial Unicode MS"/>
+                <a:cs typeface="Arial Unicode MS"/>
+              </a:rPr>
+              <a:t>光太多會被吵</a:t>
+            </a:r>
+            <a:r>
+              <a:rPr sz="850" lang="zh-TW" dirty="0">
+                <a:solidFill>
+                  <a:srgbClr val="000000"/>
+                </a:solidFill>
+                <a:latin typeface="Arial Unicode MS"/>
+                <a:ea typeface="Arial Unicode MS"/>
+                <a:cs typeface="Arial Unicode MS"/>
+              </a:rPr>
+              <a:t>。所以這一條是</a:t>
+            </a:r>
+            <a:r>
+              <a:rPr sz="850" b="1" lang="zh-TW" dirty="0">
+                <a:solidFill>
+                  <a:srgbClr val="000000"/>
+                </a:solidFill>
+                <a:latin typeface="Arial Unicode MS"/>
+                <a:ea typeface="Arial Unicode MS"/>
+                <a:cs typeface="Arial Unicode MS"/>
+              </a:rPr>
+              <a:t>嚴苛</a:t>
+            </a:r>
+            <a:r>
+              <a:rPr sz="850" lang="zh-TW" dirty="0">
+                <a:solidFill>
+                  <a:srgbClr val="000000"/>
+                </a:solidFill>
+                <a:latin typeface="Arial Unicode MS"/>
+                <a:ea typeface="Arial Unicode MS"/>
+                <a:cs typeface="Arial Unicode MS"/>
+              </a:rPr>
+              <a:t>條件，不是放水——它在說最壞的情況下還有九十公尺。
 </a:t>
             </a:r>
           </a:p>
@@ -3722,33 +3458,99 @@
                 <a:spcPts val="0"/>
               </a:spcBef>
               <a:spcAft>
-                <a:spcPts val="133"/>
+                <a:spcPts val="142"/>
               </a:spcAft>
             </a:pPr>
             <a:r>
-              <a:rPr sz="800" lang="zh-TW" dirty="0">
-                <a:solidFill>
-                  <a:srgbClr val="000000"/>
-                </a:solidFill>
-                <a:latin typeface="Arial Unicode MS"/>
-                <a:ea typeface="Arial Unicode MS"/>
-                <a:cs typeface="Arial Unicode MS"/>
-              </a:rPr>
-              <a:t>回到剛剛請大家圈起來的那一行。左邊是 OS1 規格表上真正的那兩行，測距寫了</a:t>
-            </a:r>
-            <a:r>
-              <a:rPr sz="800" b="1" lang="zh-TW" dirty="0">
-                <a:solidFill>
-                  <a:srgbClr val="000000"/>
-                </a:solidFill>
-                <a:latin typeface="Arial Unicode MS"/>
-                <a:ea typeface="Arial Unicode MS"/>
-                <a:cs typeface="Arial Unicode MS"/>
-              </a:rPr>
-              <a:t>兩個數字</a:t>
-            </a:r>
-            <a:r>
-              <a:rPr sz="800" lang="zh-TW" dirty="0">
+              <a:rPr sz="850" lang="zh-TW" dirty="0">
+                <a:solidFill>
+                  <a:srgbClr val="000000"/>
+                </a:solidFill>
+                <a:latin typeface="Arial Unicode MS"/>
+                <a:ea typeface="Arial Unicode MS"/>
+                <a:cs typeface="Arial Unicode MS"/>
+              </a:rPr>
+              <a:t>那廠商怎麼對付太陽？三招。第一，</a:t>
+            </a:r>
+            <a:r>
+              <a:rPr sz="850" b="1" lang="zh-TW" dirty="0">
+                <a:solidFill>
+                  <a:srgbClr val="000000"/>
+                </a:solidFill>
+                <a:latin typeface="Arial Unicode MS"/>
+                <a:ea typeface="Arial Unicode MS"/>
+                <a:cs typeface="Arial Unicode MS"/>
+              </a:rPr>
+              <a:t>裝一片只讓 865 奈米通過的濾光片</a:t>
+            </a:r>
+            <a:r>
+              <a:rPr sz="850" lang="zh-TW" dirty="0">
+                <a:solidFill>
+                  <a:srgbClr val="000000"/>
+                </a:solidFill>
+                <a:latin typeface="Arial Unicode MS"/>
+                <a:ea typeface="Arial Unicode MS"/>
+                <a:cs typeface="Arial Unicode MS"/>
+              </a:rPr>
+              <a:t>，把其他波長的陽光擋在外面——濾得愈窄，進來的背景愈少。第二，</a:t>
+            </a:r>
+            <a:r>
+              <a:rPr sz="850" b="1" lang="zh-TW" dirty="0">
+                <a:solidFill>
+                  <a:srgbClr val="000000"/>
+                </a:solidFill>
+                <a:latin typeface="Arial Unicode MS"/>
+                <a:ea typeface="Arial Unicode MS"/>
+                <a:cs typeface="Arial Unicode MS"/>
+              </a:rPr>
+              <a:t>只在該回來的那一小段時間裡聽</a:t>
+            </a:r>
+            <a:r>
+              <a:rPr sz="850" lang="zh-TW" dirty="0">
+                <a:solidFill>
+                  <a:srgbClr val="000000"/>
+                </a:solidFill>
+                <a:latin typeface="Arial Unicode MS"/>
+                <a:ea typeface="Arial Unicode MS"/>
+                <a:cs typeface="Arial Unicode MS"/>
+              </a:rPr>
+              <a:t>，其他時間進來的光不算。第三，</a:t>
+            </a:r>
+            <a:r>
+              <a:rPr sz="850" b="1" lang="zh-TW" dirty="0">
+                <a:solidFill>
+                  <a:srgbClr val="000000"/>
+                </a:solidFill>
+                <a:latin typeface="Arial Unicode MS"/>
+                <a:ea typeface="Arial Unicode MS"/>
+                <a:cs typeface="Arial Unicode MS"/>
+              </a:rPr>
+              <a:t>把能量擠進一個很短很強的脈衝</a:t>
+            </a:r>
+            <a:r>
+              <a:rPr sz="850" lang="zh-TW" dirty="0">
+                <a:solidFill>
+                  <a:srgbClr val="000000"/>
+                </a:solidFill>
+                <a:latin typeface="Arial Unicode MS"/>
+                <a:ea typeface="Arial Unicode MS"/>
+                <a:cs typeface="Arial Unicode MS"/>
+              </a:rPr>
+              <a:t>，讓它在背景上凸得出來。第二節講波長的時候各位會看到，1550 奈米在這件事上天生有利：它可以打比較強，而且</a:t>
+            </a:r>
+            <a:r>
+              <a:rPr sz="850" b="1" lang="zh-TW" dirty="0">
+                <a:solidFill>
+                  <a:srgbClr val="000000"/>
+                </a:solidFill>
+                <a:latin typeface="Arial Unicode MS"/>
+                <a:ea typeface="Arial Unicode MS"/>
+                <a:cs typeface="Arial Unicode MS"/>
+              </a:rPr>
+              <a:t>太陽在 1550 這個波長的輻射本來就比較弱</a:t>
+            </a:r>
+            <a:r>
+              <a:rPr sz="850" lang="zh-TW" dirty="0">
                 <a:solidFill>
                   <a:srgbClr val="000000"/>
                 </a:solidFill>
@@ -3766,63 +3568,41 @@
                 <a:spcPts val="0"/>
               </a:spcBef>
               <a:spcAft>
-                <a:spcPts val="133"/>
+                <a:spcPts val="142"/>
               </a:spcAft>
             </a:pPr>
             <a:r>
-              <a:rPr sz="800" lang="zh-TW" dirty="0">
-                <a:solidFill>
-                  <a:srgbClr val="000000"/>
-                </a:solidFill>
-                <a:latin typeface="Arial Unicode MS"/>
-                <a:ea typeface="Arial Unicode MS"/>
-                <a:cs typeface="Arial Unicode MS"/>
-              </a:rPr>
-              <a:t>第一個 170 公尺，括號裡是 </a:t>
-            </a:r>
-            <a:r>
-              <a:rPr sz="800" b="1" lang="zh-TW" dirty="0">
-                <a:solidFill>
-                  <a:srgbClr val="000000"/>
-                </a:solidFill>
-                <a:latin typeface="Arial Unicode MS"/>
-                <a:ea typeface="Arial Unicode MS"/>
-                <a:cs typeface="Arial Unicode MS"/>
-              </a:rPr>
-              <a:t>80% Lambertian reflectivity</a:t>
-            </a:r>
-            <a:r>
-              <a:rPr sz="800" lang="zh-TW" dirty="0">
-                <a:solidFill>
-                  <a:srgbClr val="000000"/>
-                </a:solidFill>
-                <a:latin typeface="Arial Unicode MS"/>
-                <a:ea typeface="Arial Unicode MS"/>
-                <a:cs typeface="Arial Unicode MS"/>
-              </a:rPr>
-              <a:t>；第二個 90 公尺，括號裡是 </a:t>
-            </a:r>
-            <a:r>
-              <a:rPr sz="800" b="1" lang="zh-TW" dirty="0">
-                <a:solidFill>
-                  <a:srgbClr val="000000"/>
-                </a:solidFill>
-                <a:latin typeface="Arial Unicode MS"/>
-                <a:ea typeface="Arial Unicode MS"/>
-                <a:cs typeface="Arial Unicode MS"/>
-              </a:rPr>
-              <a:t>10%</a:t>
-            </a:r>
-            <a:r>
-              <a:rPr sz="800" lang="zh-TW" dirty="0">
-                <a:solidFill>
-                  <a:srgbClr val="000000"/>
-                </a:solidFill>
-                <a:latin typeface="Arial Unicode MS"/>
-                <a:ea typeface="Arial Unicode MS"/>
-                <a:cs typeface="Arial Unicode MS"/>
-              </a:rPr>
-              <a:t>。反射率的意思是：打出去的光，有幾成彈回來。
+              <a:rPr sz="850" lang="zh-TW" dirty="0">
+                <a:solidFill>
+                  <a:srgbClr val="000000"/>
+                </a:solidFill>
+                <a:latin typeface="Arial Unicode MS"/>
+                <a:ea typeface="Arial Unicode MS"/>
+                <a:cs typeface="Arial Unicode MS"/>
+              </a:rPr>
+              <a:t>所以那一行真正的意思是：</a:t>
+            </a:r>
+            <a:r>
+              <a:rPr sz="850" b="1" lang="zh-TW" dirty="0">
+                <a:solidFill>
+                  <a:srgbClr val="000000"/>
+                </a:solidFill>
+                <a:latin typeface="Arial Unicode MS"/>
+                <a:ea typeface="Arial Unicode MS"/>
+                <a:cs typeface="Arial Unicode MS"/>
+              </a:rPr>
+              <a:t>對一個深色的漫反射目標、在 1024 乘 10 赫茲模式下、在正午大太陽底下，九十公尺處有九成以上的機率看得到。</a:t>
+            </a:r>
+            <a:r>
+              <a:rPr sz="850" lang="zh-TW" dirty="0">
+                <a:solidFill>
+                  <a:srgbClr val="000000"/>
+                </a:solidFill>
+                <a:latin typeface="Arial Unicode MS"/>
+         